--- a/mycatalog-architecture-diagram-template.pptx
+++ b/mycatalog-architecture-diagram-template.pptx
@@ -524,7 +524,7 @@
           <a:p>
             <a:r>
               <a:rPr lang="en-US" dirty="0" smtClean="0"/>
-              <a:t>Generated on Fri Dec 13 2024 00:49:33 GMT+0000 (Coordinated Universal Time)</a:t>
+              <a:t>Generated on Sun Jan 12 2025 08:05:57 GMT+0000 (Coordinated Universal Time)</a:t>
             </a:r>
             <a:endParaRPr lang="en-US" dirty="0"/>
           </a:p>
@@ -23547,7 +23547,7 @@
       </p:sp>
       <p:pic>
         <p:nvPicPr>
-          <p:cNvPr id="100" name="Object 99" descr="public/generated/icons/is.reservation.png">    </p:cNvPr>
+          <p:cNvPr id="100" name="Object 99" descr="public/generated/icons/35759612-efad-48d5-ad2a-5336349ed9bc.png">    </p:cNvPr>
           <p:cNvPicPr>
             <a:picLocks noChangeAspect="1"/>
           </p:cNvPicPr>
@@ -23603,7 +23603,7 @@
                 <a:ea typeface="Helvetica" pitchFamily="34" charset="-122"/>
                 <a:cs typeface="Helvetica" pitchFamily="34" charset="-120"/>
               </a:rPr>
-              <a:t>CLOUD RESERVATIONS FOR VPC</a:t>
+              <a:t>CLOUD PLATFORM PROFESSIONAL SERVICES</a:t>
             </a:r>
             <a:endParaRPr lang="en-US" dirty="0"/>
           </a:p>
@@ -23636,7 +23636,7 @@
       </p:sp>
       <p:pic>
         <p:nvPicPr>
-          <p:cNvPr id="103" name="Object 102" descr="public/generated/icons/cf329950-0a3e-11e8-922e-f1366c6e1c83-hytrust.png">    </p:cNvPr>
+          <p:cNvPr id="103" name="Object 102" descr="public/generated/icons/is.reservation.png">    </p:cNvPr>
           <p:cNvPicPr>
             <a:picLocks noChangeAspect="1"/>
           </p:cNvPicPr>
@@ -23692,7 +23692,7 @@
                 <a:ea typeface="Helvetica" pitchFamily="34" charset="-122"/>
                 <a:cs typeface="Helvetica" pitchFamily="34" charset="-120"/>
               </a:rPr>
-              <a:t>CLOUD SECURE VIRTUALIZATION</a:t>
+              <a:t>CLOUD RESERVATIONS FOR VPC</a:t>
             </a:r>
             <a:endParaRPr lang="en-US" dirty="0"/>
           </a:p>
@@ -23725,7 +23725,7 @@
       </p:sp>
       <p:pic>
         <p:nvPicPr>
-          <p:cNvPr id="106" name="Object 105" descr="public/generated/icons/cloudant.png">    </p:cNvPr>
+          <p:cNvPr id="106" name="Object 105" descr="public/generated/icons/cf329950-0a3e-11e8-922e-f1366c6e1c83-hytrust.png">    </p:cNvPr>
           <p:cNvPicPr>
             <a:picLocks noChangeAspect="1"/>
           </p:cNvPicPr>
@@ -23781,7 +23781,7 @@
                 <a:ea typeface="Helvetica" pitchFamily="34" charset="-122"/>
                 <a:cs typeface="Helvetica" pitchFamily="34" charset="-120"/>
               </a:rPr>
-              <a:t>CLOUDANT</a:t>
+              <a:t>CLOUD SECURE VIRTUALIZATION</a:t>
             </a:r>
             <a:endParaRPr lang="en-US" dirty="0"/>
           </a:p>
@@ -23814,7 +23814,7 @@
       </p:sp>
       <p:pic>
         <p:nvPicPr>
-          <p:cNvPr id="109" name="Object 108" descr="public/generated/icons/e7114cc0-ffd2-4199-bc1a-ea79a6f09e89.png">    </p:cNvPr>
+          <p:cNvPr id="109" name="Object 108" descr="public/generated/icons/cloudant.png">    </p:cNvPr>
           <p:cNvPicPr>
             <a:picLocks noChangeAspect="1"/>
           </p:cNvPicPr>
@@ -23870,7 +23870,7 @@
                 <a:ea typeface="Helvetica" pitchFamily="34" charset="-122"/>
                 <a:cs typeface="Helvetica" pitchFamily="34" charset="-120"/>
               </a:rPr>
-              <a:t>CLOUDSWAY CDN PRO</a:t>
+              <a:t>CLOUDANT</a:t>
             </a:r>
             <a:endParaRPr lang="en-US" dirty="0"/>
           </a:p>
@@ -23936,7 +23936,7 @@
       </p:sp>
       <p:pic>
         <p:nvPicPr>
-          <p:cNvPr id="3" name="Object 2" descr="public/generated/icons/is.cluster-network.png">    </p:cNvPr>
+          <p:cNvPr id="3" name="Object 2" descr="public/generated/icons/e7114cc0-ffd2-4199-bc1a-ea79a6f09e89.png">    </p:cNvPr>
           <p:cNvPicPr>
             <a:picLocks noChangeAspect="1"/>
           </p:cNvPicPr>
@@ -23992,7 +23992,7 @@
                 <a:ea typeface="Helvetica" pitchFamily="34" charset="-122"/>
                 <a:cs typeface="Helvetica" pitchFamily="34" charset="-120"/>
               </a:rPr>
-              <a:t>CLUSTER NETWORK</a:t>
+              <a:t>CLOUDSWAY CDN PRO</a:t>
             </a:r>
             <a:endParaRPr lang="en-US" dirty="0"/>
           </a:p>
@@ -24025,7 +24025,7 @@
       </p:sp>
       <p:pic>
         <p:nvPicPr>
-          <p:cNvPr id="6" name="Object 5" descr="public/generated/icons/afb603e9-8738-4542-abf4-baf5231a4dbe.png">    </p:cNvPr>
+          <p:cNvPr id="6" name="Object 5" descr="public/generated/icons/is.cluster-network.png">    </p:cNvPr>
           <p:cNvPicPr>
             <a:picLocks noChangeAspect="1"/>
           </p:cNvPicPr>
@@ -24081,7 +24081,7 @@
                 <a:ea typeface="Helvetica" pitchFamily="34" charset="-122"/>
                 <a:cs typeface="Helvetica" pitchFamily="34" charset="-120"/>
               </a:rPr>
-              <a:t>COBALT IRON - SECURE AUTOMATED BACKUP WITH COMPASS</a:t>
+              <a:t>CLUSTER NETWORK</a:t>
             </a:r>
             <a:endParaRPr lang="en-US" dirty="0"/>
           </a:p>
@@ -24114,7 +24114,7 @@
       </p:sp>
       <p:pic>
         <p:nvPicPr>
-          <p:cNvPr id="9" name="Object 8" descr="public/generated/icons/2ad2fdd0-bba5-11ea-8966-5d6402fed1c7.png">    </p:cNvPr>
+          <p:cNvPr id="9" name="Object 8" descr="public/generated/icons/afb603e9-8738-4542-abf4-baf5231a4dbe.png">    </p:cNvPr>
           <p:cNvPicPr>
             <a:picLocks noChangeAspect="1"/>
           </p:cNvPicPr>
@@ -24170,7 +24170,7 @@
                 <a:ea typeface="Helvetica" pitchFamily="34" charset="-122"/>
                 <a:cs typeface="Helvetica" pitchFamily="34" charset="-120"/>
               </a:rPr>
-              <a:t>CODE ENGINE</a:t>
+              <a:t>COBALT IRON - SECURE AUTOMATED BACKUP WITH COMPASS</a:t>
             </a:r>
             <a:endParaRPr lang="en-US" dirty="0"/>
           </a:p>
@@ -24203,7 +24203,7 @@
       </p:sp>
       <p:pic>
         <p:nvPicPr>
-          <p:cNvPr id="12" name="Object 11" descr="public/generated/icons/81cda9f0-b9c3-11e7-acad-0d931c5f18f1.png">    </p:cNvPr>
+          <p:cNvPr id="12" name="Object 11" descr="public/generated/icons/2ad2fdd0-bba5-11ea-8966-5d6402fed1c7.png">    </p:cNvPr>
           <p:cNvPicPr>
             <a:picLocks noChangeAspect="1"/>
           </p:cNvPicPr>
@@ -24259,7 +24259,7 @@
                 <a:ea typeface="Helvetica" pitchFamily="34" charset="-122"/>
                 <a:cs typeface="Helvetica" pitchFamily="34" charset="-120"/>
               </a:rPr>
-              <a:t>COGNOS DASHBOARD EMBEDDED</a:t>
+              <a:t>CODE ENGINE</a:t>
             </a:r>
             <a:endParaRPr lang="en-US" dirty="0"/>
           </a:p>
@@ -24292,7 +24292,7 @@
       </p:sp>
       <p:pic>
         <p:nvPicPr>
-          <p:cNvPr id="15" name="Object 14" descr="public/generated/icons/3e1a2c30-11dd-11ec-b621-67e0f6600d56.png">    </p:cNvPr>
+          <p:cNvPr id="15" name="Object 14" descr="public/generated/icons/81cda9f0-b9c3-11e7-acad-0d931c5f18f1.png">    </p:cNvPr>
           <p:cNvPicPr>
             <a:picLocks noChangeAspect="1"/>
           </p:cNvPicPr>
@@ -24348,7 +24348,7 @@
                 <a:ea typeface="Helvetica" pitchFamily="34" charset="-122"/>
                 <a:cs typeface="Helvetica" pitchFamily="34" charset="-120"/>
               </a:rPr>
-              <a:t>COMPLIANCE AND CUSTOMER EXPERIENCE AUTOMATION</a:t>
+              <a:t>COGNOS DASHBOARD EMBEDDED</a:t>
             </a:r>
             <a:endParaRPr lang="en-US" dirty="0"/>
           </a:p>
@@ -24381,7 +24381,7 @@
       </p:sp>
       <p:pic>
         <p:nvPicPr>
-          <p:cNvPr id="18" name="Object 17" descr="public/generated/icons/ComposeElasticsearch-P.png">    </p:cNvPr>
+          <p:cNvPr id="18" name="Object 17" descr="public/generated/icons/3e1a2c30-11dd-11ec-b621-67e0f6600d56.png">    </p:cNvPr>
           <p:cNvPicPr>
             <a:picLocks noChangeAspect="1"/>
           </p:cNvPicPr>
@@ -24437,7 +24437,7 @@
                 <a:ea typeface="Helvetica" pitchFamily="34" charset="-122"/>
                 <a:cs typeface="Helvetica" pitchFamily="34" charset="-120"/>
               </a:rPr>
-              <a:t>COMPOSE FOR ELASTICSEARCH</a:t>
+              <a:t>COMPLIANCE AND CUSTOMER EXPERIENCE AUTOMATION</a:t>
             </a:r>
             <a:endParaRPr lang="en-US" dirty="0"/>
           </a:p>
@@ -24470,7 +24470,7 @@
       </p:sp>
       <p:pic>
         <p:nvPicPr>
-          <p:cNvPr id="21" name="Object 20" descr="public/generated/icons/ComposeEtcd-P.png">    </p:cNvPr>
+          <p:cNvPr id="21" name="Object 20" descr="public/generated/icons/ComposeElasticsearch-P.png">    </p:cNvPr>
           <p:cNvPicPr>
             <a:picLocks noChangeAspect="1"/>
           </p:cNvPicPr>
@@ -24526,7 +24526,7 @@
                 <a:ea typeface="Helvetica" pitchFamily="34" charset="-122"/>
                 <a:cs typeface="Helvetica" pitchFamily="34" charset="-120"/>
               </a:rPr>
-              <a:t>COMPOSE FOR ETCD</a:t>
+              <a:t>COMPOSE FOR ELASTICSEARCH</a:t>
             </a:r>
             <a:endParaRPr lang="en-US" dirty="0"/>
           </a:p>
@@ -24559,7 +24559,7 @@
       </p:sp>
       <p:pic>
         <p:nvPicPr>
-          <p:cNvPr id="24" name="Object 23" descr="public/generated/icons/ComposeMongo-P.png">    </p:cNvPr>
+          <p:cNvPr id="24" name="Object 23" descr="public/generated/icons/ComposeEtcd-P.png">    </p:cNvPr>
           <p:cNvPicPr>
             <a:picLocks noChangeAspect="1"/>
           </p:cNvPicPr>
@@ -24615,7 +24615,7 @@
                 <a:ea typeface="Helvetica" pitchFamily="34" charset="-122"/>
                 <a:cs typeface="Helvetica" pitchFamily="34" charset="-120"/>
               </a:rPr>
-              <a:t>COMPOSE FOR MONGODB</a:t>
+              <a:t>COMPOSE FOR ETCD</a:t>
             </a:r>
             <a:endParaRPr lang="en-US" dirty="0"/>
           </a:p>
@@ -24648,7 +24648,7 @@
       </p:sp>
       <p:pic>
         <p:nvPicPr>
-          <p:cNvPr id="27" name="Object 26" descr="public/generated/icons/ComposePostgreSQL-P.png">    </p:cNvPr>
+          <p:cNvPr id="27" name="Object 26" descr="public/generated/icons/ComposeMongo-P.png">    </p:cNvPr>
           <p:cNvPicPr>
             <a:picLocks noChangeAspect="1"/>
           </p:cNvPicPr>
@@ -24704,7 +24704,7 @@
                 <a:ea typeface="Helvetica" pitchFamily="34" charset="-122"/>
                 <a:cs typeface="Helvetica" pitchFamily="34" charset="-120"/>
               </a:rPr>
-              <a:t>COMPOSE FOR POSTGRESQL</a:t>
+              <a:t>COMPOSE FOR MONGODB</a:t>
             </a:r>
             <a:endParaRPr lang="en-US" dirty="0"/>
           </a:p>
@@ -24737,7 +24737,7 @@
       </p:sp>
       <p:pic>
         <p:nvPicPr>
-          <p:cNvPr id="30" name="Object 29" descr="public/generated/icons/ComposeRabbitMQ-P.png">    </p:cNvPr>
+          <p:cNvPr id="30" name="Object 29" descr="public/generated/icons/ComposePostgreSQL-P.png">    </p:cNvPr>
           <p:cNvPicPr>
             <a:picLocks noChangeAspect="1"/>
           </p:cNvPicPr>
@@ -24793,7 +24793,7 @@
                 <a:ea typeface="Helvetica" pitchFamily="34" charset="-122"/>
                 <a:cs typeface="Helvetica" pitchFamily="34" charset="-120"/>
               </a:rPr>
-              <a:t>COMPOSE FOR RABBITMQ</a:t>
+              <a:t>COMPOSE FOR POSTGRESQL</a:t>
             </a:r>
             <a:endParaRPr lang="en-US" dirty="0"/>
           </a:p>
@@ -24826,7 +24826,7 @@
       </p:sp>
       <p:pic>
         <p:nvPicPr>
-          <p:cNvPr id="33" name="Object 32" descr="public/generated/icons/ComposeRedis-P.png">    </p:cNvPr>
+          <p:cNvPr id="33" name="Object 32" descr="public/generated/icons/ComposeRabbitMQ-P.png">    </p:cNvPr>
           <p:cNvPicPr>
             <a:picLocks noChangeAspect="1"/>
           </p:cNvPicPr>
@@ -24882,7 +24882,7 @@
                 <a:ea typeface="Helvetica" pitchFamily="34" charset="-122"/>
                 <a:cs typeface="Helvetica" pitchFamily="34" charset="-120"/>
               </a:rPr>
-              <a:t>COMPOSE FOR REDIS</a:t>
+              <a:t>COMPOSE FOR RABBITMQ</a:t>
             </a:r>
             <a:endParaRPr lang="en-US" dirty="0"/>
           </a:p>
@@ -24915,7 +24915,7 @@
       </p:sp>
       <p:pic>
         <p:nvPicPr>
-          <p:cNvPr id="36" name="Object 35" descr="public/generated/icons/public.bluemix.container.registry.png">    </p:cNvPr>
+          <p:cNvPr id="36" name="Object 35" descr="public/generated/icons/ComposeRedis-P.png">    </p:cNvPr>
           <p:cNvPicPr>
             <a:picLocks noChangeAspect="1"/>
           </p:cNvPicPr>
@@ -24971,7 +24971,7 @@
                 <a:ea typeface="Helvetica" pitchFamily="34" charset="-122"/>
                 <a:cs typeface="Helvetica" pitchFamily="34" charset="-120"/>
               </a:rPr>
-              <a:t>CONTAINER REGISTRY</a:t>
+              <a:t>COMPOSE FOR REDIS</a:t>
             </a:r>
             <a:endParaRPr lang="en-US" dirty="0"/>
           </a:p>
@@ -25004,7 +25004,7 @@
       </p:sp>
       <p:pic>
         <p:nvPicPr>
-          <p:cNvPr id="39" name="Object 38" descr="public/generated/icons/4ad9c1b8-e58e-2a9d-ccb8-d4d5ae84abc0.png">    </p:cNvPr>
+          <p:cNvPr id="39" name="Object 38" descr="public/generated/icons/public.bluemix.container.registry.png">    </p:cNvPr>
           <p:cNvPicPr>
             <a:picLocks noChangeAspect="1"/>
           </p:cNvPicPr>
@@ -25060,7 +25060,7 @@
                 <a:ea typeface="Helvetica" pitchFamily="34" charset="-122"/>
                 <a:cs typeface="Helvetica" pitchFamily="34" charset="-120"/>
               </a:rPr>
-              <a:t>CONTAINER SECURITY SERVICES</a:t>
+              <a:t>CONTAINER REGISTRY</a:t>
             </a:r>
             <a:endParaRPr lang="en-US" dirty="0"/>
           </a:p>
@@ -25093,7 +25093,7 @@
       </p:sp>
       <p:pic>
         <p:nvPicPr>
-          <p:cNvPr id="42" name="Object 41" descr="public/generated/icons/b6c4a555-5ff6-4e1d-9ce7-0a9976629eab.png">    </p:cNvPr>
+          <p:cNvPr id="42" name="Object 41" descr="public/generated/icons/4ad9c1b8-e58e-2a9d-ccb8-d4d5ae84abc0.png">    </p:cNvPr>
           <p:cNvPicPr>
             <a:picLocks noChangeAspect="1"/>
           </p:cNvPicPr>
@@ -25149,7 +25149,7 @@
                 <a:ea typeface="Helvetica" pitchFamily="34" charset="-122"/>
                 <a:cs typeface="Helvetica" pitchFamily="34" charset="-120"/>
               </a:rPr>
-              <a:t>CONTENT DELIVERY NETWORK</a:t>
+              <a:t>CONTAINER SECURITY SERVICES</a:t>
             </a:r>
             <a:endParaRPr lang="en-US" dirty="0"/>
           </a:p>
@@ -25182,7 +25182,7 @@
       </p:sp>
       <p:pic>
         <p:nvPicPr>
-          <p:cNvPr id="45" name="Object 44" descr="public/generated/icons/59b735ee-5938-4ebd-a6b2-541aef2d1f68.png">    </p:cNvPr>
+          <p:cNvPr id="45" name="Object 44" descr="public/generated/icons/b6c4a555-5ff6-4e1d-9ce7-0a9976629eab.png">    </p:cNvPr>
           <p:cNvPicPr>
             <a:picLocks noChangeAspect="1"/>
           </p:cNvPicPr>
@@ -25238,7 +25238,7 @@
                 <a:ea typeface="Helvetica" pitchFamily="34" charset="-122"/>
                 <a:cs typeface="Helvetica" pitchFamily="34" charset="-120"/>
               </a:rPr>
-              <a:t>CONTINUOUS DELIVERY</a:t>
+              <a:t>CONTENT DELIVERY NETWORK</a:t>
             </a:r>
             <a:endParaRPr lang="en-US" dirty="0"/>
           </a:p>
@@ -25271,7 +25271,7 @@
       </p:sp>
       <p:pic>
         <p:nvPicPr>
-          <p:cNvPr id="48" name="Object 47" descr="public/generated/icons/d19358fd-a20a-4bb7-9727-9d3c129db741.png">    </p:cNvPr>
+          <p:cNvPr id="48" name="Object 47" descr="public/generated/icons/59b735ee-5938-4ebd-a6b2-541aef2d1f68.png">    </p:cNvPr>
           <p:cNvPicPr>
             <a:picLocks noChangeAspect="1"/>
           </p:cNvPicPr>
@@ -25327,7 +25327,7 @@
                 <a:ea typeface="Helvetica" pitchFamily="34" charset="-122"/>
                 <a:cs typeface="Helvetica" pitchFamily="34" charset="-120"/>
               </a:rPr>
-              <a:t>CONVERLISTICS</a:t>
+              <a:t>CONTINUOUS DELIVERY</a:t>
             </a:r>
             <a:endParaRPr lang="en-US" dirty="0"/>
           </a:p>
@@ -25360,7 +25360,7 @@
       </p:sp>
       <p:pic>
         <p:nvPicPr>
-          <p:cNvPr id="51" name="Object 50" descr="public/generated/icons/76fad670-9d74-4138-8a14-709f5e6ac65b.png">    </p:cNvPr>
+          <p:cNvPr id="51" name="Object 50" descr="public/generated/icons/d19358fd-a20a-4bb7-9727-9d3c129db741.png">    </p:cNvPr>
           <p:cNvPicPr>
             <a:picLocks noChangeAspect="1"/>
           </p:cNvPicPr>
@@ -25416,7 +25416,7 @@
                 <a:ea typeface="Helvetica" pitchFamily="34" charset="-122"/>
                 <a:cs typeface="Helvetica" pitchFamily="34" charset="-120"/>
               </a:rPr>
-              <a:t>COST AND ASSET MANAGEMENT</a:t>
+              <a:t>CONVERLISTICS</a:t>
             </a:r>
             <a:endParaRPr lang="en-US" dirty="0"/>
           </a:p>
@@ -25449,7 +25449,7 @@
       </p:sp>
       <p:pic>
         <p:nvPicPr>
-          <p:cNvPr id="54" name="Object 53" descr="public/generated/icons/5da26b90-7b83-44b5-b6d3-778b408b77db.png">    </p:cNvPr>
+          <p:cNvPr id="54" name="Object 53" descr="public/generated/icons/76fad670-9d74-4138-8a14-709f5e6ac65b.png">    </p:cNvPr>
           <p:cNvPicPr>
             <a:picLocks noChangeAspect="1"/>
           </p:cNvPicPr>
@@ -25505,7 +25505,7 @@
                 <a:ea typeface="Helvetica" pitchFamily="34" charset="-122"/>
                 <a:cs typeface="Helvetica" pitchFamily="34" charset="-120"/>
               </a:rPr>
-              <a:t>CRUSHBANK</a:t>
+              <a:t>COST AND ASSET MANAGEMENT</a:t>
             </a:r>
             <a:endParaRPr lang="en-US" dirty="0"/>
           </a:p>
@@ -25538,7 +25538,7 @@
       </p:sp>
       <p:pic>
         <p:nvPicPr>
-          <p:cNvPr id="57" name="Object 56" descr="public/generated/icons/07d4aa9f-1f71-43bb-9916-8e9cff5bc426.png">    </p:cNvPr>
+          <p:cNvPr id="57" name="Object 56" descr="public/generated/icons/5da26b90-7b83-44b5-b6d3-778b408b77db.png">    </p:cNvPr>
           <p:cNvPicPr>
             <a:picLocks noChangeAspect="1"/>
           </p:cNvPicPr>
@@ -25594,7 +25594,7 @@
                 <a:ea typeface="Helvetica" pitchFamily="34" charset="-122"/>
                 <a:cs typeface="Helvetica" pitchFamily="34" charset="-120"/>
               </a:rPr>
-              <a:t>CUSTOM MIGRATIONS DR AND MANAGEMENT AS A SERVICE</a:t>
+              <a:t>CRUSHBANK</a:t>
             </a:r>
             <a:endParaRPr lang="en-US" dirty="0"/>
           </a:p>
@@ -25627,7 +25627,7 @@
       </p:sp>
       <p:pic>
         <p:nvPicPr>
-          <p:cNvPr id="60" name="Object 59" descr="public/generated/icons/1ab48530-6638-4fce-a386-0bd598576a0a.png">    </p:cNvPr>
+          <p:cNvPr id="60" name="Object 59" descr="public/generated/icons/07d4aa9f-1f71-43bb-9916-8e9cff5bc426.png">    </p:cNvPr>
           <p:cNvPicPr>
             <a:picLocks noChangeAspect="1"/>
           </p:cNvPicPr>
@@ -25683,7 +25683,7 @@
                 <a:ea typeface="Helvetica" pitchFamily="34" charset="-122"/>
                 <a:cs typeface="Helvetica" pitchFamily="34" charset="-120"/>
               </a:rPr>
-              <a:t>CYBERSTRONG BY CYBERSAINT</a:t>
+              <a:t>CUSTOM MIGRATIONS DR AND MANAGEMENT AS A SERVICE</a:t>
             </a:r>
             <a:endParaRPr lang="en-US" dirty="0"/>
           </a:p>
@@ -25716,7 +25716,7 @@
       </p:sp>
       <p:pic>
         <p:nvPicPr>
-          <p:cNvPr id="63" name="Object 62" descr="public/generated/icons/a0814030-c9dd-11e7-9a5e-19d80fed5e00.png">    </p:cNvPr>
+          <p:cNvPr id="63" name="Object 62" descr="public/generated/icons/1ab48530-6638-4fce-a386-0bd598576a0a.png">    </p:cNvPr>
           <p:cNvPicPr>
             <a:picLocks noChangeAspect="1"/>
           </p:cNvPicPr>
@@ -25772,7 +25772,7 @@
                 <a:ea typeface="Helvetica" pitchFamily="34" charset="-122"/>
                 <a:cs typeface="Helvetica" pitchFamily="34" charset="-120"/>
               </a:rPr>
-              <a:t>DATA ENGINE (PREVIOUSLY SQL QUERY)</a:t>
+              <a:t>CYBERSTRONG BY CYBERSAINT</a:t>
             </a:r>
             <a:endParaRPr lang="en-US" dirty="0"/>
           </a:p>
@@ -25805,7 +25805,7 @@
       </p:sp>
       <p:pic>
         <p:nvPicPr>
-          <p:cNvPr id="66" name="Object 65" descr="public/generated/icons/840bcb30-f8c3-11ed-afcd-01dba1a5ada3.png">    </p:cNvPr>
+          <p:cNvPr id="66" name="Object 65" descr="public/generated/icons/a0814030-c9dd-11e7-9a5e-19d80fed5e00.png">    </p:cNvPr>
           <p:cNvPicPr>
             <a:picLocks noChangeAspect="1"/>
           </p:cNvPicPr>
@@ -25861,7 +25861,7 @@
                 <a:ea typeface="Helvetica" pitchFamily="34" charset="-122"/>
                 <a:cs typeface="Helvetica" pitchFamily="34" charset="-120"/>
               </a:rPr>
-              <a:t>DATA PRODUCT HUB</a:t>
+              <a:t>DATA ENGINE (PREVIOUSLY SQL QUERY)</a:t>
             </a:r>
             <a:endParaRPr lang="en-US" dirty="0"/>
           </a:p>
@@ -25894,7 +25894,7 @@
       </p:sp>
       <p:pic>
         <p:nvPicPr>
-          <p:cNvPr id="69" name="Object 68" descr="public/generated/icons/696b9880-9e9b-11ea-9054-e15e287f1e7f.png">    </p:cNvPr>
+          <p:cNvPr id="69" name="Object 68" descr="public/generated/icons/840bcb30-f8c3-11ed-afcd-01dba1a5ada3.png">    </p:cNvPr>
           <p:cNvPicPr>
             <a:picLocks noChangeAspect="1"/>
           </p:cNvPicPr>
@@ -25950,7 +25950,7 @@
                 <a:ea typeface="Helvetica" pitchFamily="34" charset="-122"/>
                 <a:cs typeface="Helvetica" pitchFamily="34" charset="-120"/>
               </a:rPr>
-              <a:t>DATA REPLICATION</a:t>
+              <a:t>DATA PRODUCT HUB</a:t>
             </a:r>
             <a:endParaRPr lang="en-US" dirty="0"/>
           </a:p>
@@ -25983,7 +25983,7 @@
       </p:sp>
       <p:pic>
         <p:nvPicPr>
-          <p:cNvPr id="72" name="Object 71" descr="public/generated/icons/5d307850-0404-11eb-8c8b-c7d7505f656d.png">    </p:cNvPr>
+          <p:cNvPr id="72" name="Object 71" descr="public/generated/icons/696b9880-9e9b-11ea-9054-e15e287f1e7f.png">    </p:cNvPr>
           <p:cNvPicPr>
             <a:picLocks noChangeAspect="1"/>
           </p:cNvPicPr>
@@ -26039,7 +26039,7 @@
                 <a:ea typeface="Helvetica" pitchFamily="34" charset="-122"/>
                 <a:cs typeface="Helvetica" pitchFamily="34" charset="-120"/>
               </a:rPr>
-              <a:t>DATA VIRTUALIZATION</a:t>
+              <a:t>DATA REPLICATION</a:t>
             </a:r>
             <a:endParaRPr lang="en-US" dirty="0"/>
           </a:p>
@@ -26072,7 +26072,7 @@
       </p:sp>
       <p:pic>
         <p:nvPicPr>
-          <p:cNvPr id="75" name="Object 74" descr="public/generated/icons/databases-for-enterprisedb.png">    </p:cNvPr>
+          <p:cNvPr id="75" name="Object 74" descr="public/generated/icons/5d307850-0404-11eb-8c8b-c7d7505f656d.png">    </p:cNvPr>
           <p:cNvPicPr>
             <a:picLocks noChangeAspect="1"/>
           </p:cNvPicPr>
@@ -26128,7 +26128,7 @@
                 <a:ea typeface="Helvetica" pitchFamily="34" charset="-122"/>
                 <a:cs typeface="Helvetica" pitchFamily="34" charset="-120"/>
               </a:rPr>
-              <a:t>DATABASES FOR EDB</a:t>
+              <a:t>DATA VIRTUALIZATION</a:t>
             </a:r>
             <a:endParaRPr lang="en-US" dirty="0"/>
           </a:p>
@@ -26161,7 +26161,7 @@
       </p:sp>
       <p:pic>
         <p:nvPicPr>
-          <p:cNvPr id="78" name="Object 77" descr="public/generated/icons/databases-for-elasticsearch.png">    </p:cNvPr>
+          <p:cNvPr id="78" name="Object 77" descr="public/generated/icons/databases-for-enterprisedb.png">    </p:cNvPr>
           <p:cNvPicPr>
             <a:picLocks noChangeAspect="1"/>
           </p:cNvPicPr>
@@ -26217,7 +26217,7 @@
                 <a:ea typeface="Helvetica" pitchFamily="34" charset="-122"/>
                 <a:cs typeface="Helvetica" pitchFamily="34" charset="-120"/>
               </a:rPr>
-              <a:t>DATABASES FOR ELASTICSEARCH</a:t>
+              <a:t>DATABASES FOR EDB</a:t>
             </a:r>
             <a:endParaRPr lang="en-US" dirty="0"/>
           </a:p>
@@ -26250,7 +26250,7 @@
       </p:sp>
       <p:pic>
         <p:nvPicPr>
-          <p:cNvPr id="81" name="Object 80" descr="public/generated/icons/databases-for-etcd.png">    </p:cNvPr>
+          <p:cNvPr id="81" name="Object 80" descr="public/generated/icons/databases-for-elasticsearch.png">    </p:cNvPr>
           <p:cNvPicPr>
             <a:picLocks noChangeAspect="1"/>
           </p:cNvPicPr>
@@ -26306,7 +26306,7 @@
                 <a:ea typeface="Helvetica" pitchFamily="34" charset="-122"/>
                 <a:cs typeface="Helvetica" pitchFamily="34" charset="-120"/>
               </a:rPr>
-              <a:t>DATABASES FOR ETCD</a:t>
+              <a:t>DATABASES FOR ELASTICSEARCH</a:t>
             </a:r>
             <a:endParaRPr lang="en-US" dirty="0"/>
           </a:p>
@@ -26339,7 +26339,7 @@
       </p:sp>
       <p:pic>
         <p:nvPicPr>
-          <p:cNvPr id="84" name="Object 83" descr="public/generated/icons/databases-for-mongodb.png">    </p:cNvPr>
+          <p:cNvPr id="84" name="Object 83" descr="public/generated/icons/databases-for-etcd.png">    </p:cNvPr>
           <p:cNvPicPr>
             <a:picLocks noChangeAspect="1"/>
           </p:cNvPicPr>
@@ -26395,7 +26395,7 @@
                 <a:ea typeface="Helvetica" pitchFamily="34" charset="-122"/>
                 <a:cs typeface="Helvetica" pitchFamily="34" charset="-120"/>
               </a:rPr>
-              <a:t>DATABASES FOR MONGODB</a:t>
+              <a:t>DATABASES FOR ETCD</a:t>
             </a:r>
             <a:endParaRPr lang="en-US" dirty="0"/>
           </a:p>
@@ -26428,7 +26428,7 @@
       </p:sp>
       <p:pic>
         <p:nvPicPr>
-          <p:cNvPr id="87" name="Object 86" descr="public/generated/icons/databases-for-mysql.png">    </p:cNvPr>
+          <p:cNvPr id="87" name="Object 86" descr="public/generated/icons/databases-for-mongodb.png">    </p:cNvPr>
           <p:cNvPicPr>
             <a:picLocks noChangeAspect="1"/>
           </p:cNvPicPr>
@@ -26484,7 +26484,7 @@
                 <a:ea typeface="Helvetica" pitchFamily="34" charset="-122"/>
                 <a:cs typeface="Helvetica" pitchFamily="34" charset="-120"/>
               </a:rPr>
-              <a:t>DATABASES FOR MYSQL</a:t>
+              <a:t>DATABASES FOR MONGODB</a:t>
             </a:r>
             <a:endParaRPr lang="en-US" dirty="0"/>
           </a:p>
@@ -26517,7 +26517,7 @@
       </p:sp>
       <p:pic>
         <p:nvPicPr>
-          <p:cNvPr id="90" name="Object 89" descr="public/generated/icons/databases-for-postgresql.png">    </p:cNvPr>
+          <p:cNvPr id="90" name="Object 89" descr="public/generated/icons/databases-for-mysql.png">    </p:cNvPr>
           <p:cNvPicPr>
             <a:picLocks noChangeAspect="1"/>
           </p:cNvPicPr>
@@ -26573,7 +26573,7 @@
                 <a:ea typeface="Helvetica" pitchFamily="34" charset="-122"/>
                 <a:cs typeface="Helvetica" pitchFamily="34" charset="-120"/>
               </a:rPr>
-              <a:t>DATABASES FOR POSTGRESQL</a:t>
+              <a:t>DATABASES FOR MYSQL</a:t>
             </a:r>
             <a:endParaRPr lang="en-US" dirty="0"/>
           </a:p>
@@ -26606,7 +26606,7 @@
       </p:sp>
       <p:pic>
         <p:nvPicPr>
-          <p:cNvPr id="93" name="Object 92" descr="public/generated/icons/databases-for-redis.png">    </p:cNvPr>
+          <p:cNvPr id="93" name="Object 92" descr="public/generated/icons/databases-for-postgresql.png">    </p:cNvPr>
           <p:cNvPicPr>
             <a:picLocks noChangeAspect="1"/>
           </p:cNvPicPr>
@@ -26662,7 +26662,7 @@
                 <a:ea typeface="Helvetica" pitchFamily="34" charset="-122"/>
                 <a:cs typeface="Helvetica" pitchFamily="34" charset="-120"/>
               </a:rPr>
-              <a:t>DATABASES FOR REDIS</a:t>
+              <a:t>DATABASES FOR POSTGRESQL</a:t>
             </a:r>
             <a:endParaRPr lang="en-US" dirty="0"/>
           </a:p>
@@ -26695,7 +26695,7 @@
       </p:sp>
       <p:pic>
         <p:nvPicPr>
-          <p:cNvPr id="96" name="Object 95" descr="public/generated/icons/dd0532c0-f87c-11ea-be25-c9dc051df74f.png">    </p:cNvPr>
+          <p:cNvPr id="96" name="Object 95" descr="public/generated/icons/databases-for-redis.png">    </p:cNvPr>
           <p:cNvPicPr>
             <a:picLocks noChangeAspect="1"/>
           </p:cNvPicPr>
@@ -26751,7 +26751,7 @@
                 <a:ea typeface="Helvetica" pitchFamily="34" charset="-122"/>
                 <a:cs typeface="Helvetica" pitchFamily="34" charset="-120"/>
               </a:rPr>
-              <a:t>DATASTAGE</a:t>
+              <a:t>DATABASES FOR REDIS</a:t>
             </a:r>
             <a:endParaRPr lang="en-US" dirty="0"/>
           </a:p>
@@ -26784,7 +26784,7 @@
       </p:sp>
       <p:pic>
         <p:nvPicPr>
-          <p:cNvPr id="99" name="Object 98" descr="public/generated/icons/dashdb-for-transactions.png">    </p:cNvPr>
+          <p:cNvPr id="99" name="Object 98" descr="public/generated/icons/dd0532c0-f87c-11ea-be25-c9dc051df74f.png">    </p:cNvPr>
           <p:cNvPicPr>
             <a:picLocks noChangeAspect="1"/>
           </p:cNvPicPr>
@@ -26840,7 +26840,7 @@
                 <a:ea typeface="Helvetica" pitchFamily="34" charset="-122"/>
                 <a:cs typeface="Helvetica" pitchFamily="34" charset="-120"/>
               </a:rPr>
-              <a:t>DB2</a:t>
+              <a:t>DATASTAGE</a:t>
             </a:r>
             <a:endParaRPr lang="en-US" dirty="0"/>
           </a:p>
@@ -26873,7 +26873,7 @@
       </p:sp>
       <p:pic>
         <p:nvPicPr>
-          <p:cNvPr id="102" name="Object 101" descr="public/generated/icons/9e02e72d-00ce-4220-b44c-650c8314e58a.png">    </p:cNvPr>
+          <p:cNvPr id="102" name="Object 101" descr="public/generated/icons/dashdb-for-transactions.png">    </p:cNvPr>
           <p:cNvPicPr>
             <a:picLocks noChangeAspect="1"/>
           </p:cNvPicPr>
@@ -26929,7 +26929,7 @@
                 <a:ea typeface="Helvetica" pitchFamily="34" charset="-122"/>
                 <a:cs typeface="Helvetica" pitchFamily="34" charset="-120"/>
               </a:rPr>
-              <a:t>DB2 WAREHOUSE</a:t>
+              <a:t>DB2</a:t>
             </a:r>
             <a:endParaRPr lang="en-US" dirty="0"/>
           </a:p>
@@ -26962,7 +26962,7 @@
       </p:sp>
       <p:pic>
         <p:nvPicPr>
-          <p:cNvPr id="105" name="Object 104" descr="public/generated/icons/is.dedicated-host.png">    </p:cNvPr>
+          <p:cNvPr id="105" name="Object 104" descr="public/generated/icons/9e02e72d-00ce-4220-b44c-650c8314e58a.png">    </p:cNvPr>
           <p:cNvPicPr>
             <a:picLocks noChangeAspect="1"/>
           </p:cNvPicPr>
@@ -27018,7 +27018,7 @@
                 <a:ea typeface="Helvetica" pitchFamily="34" charset="-122"/>
                 <a:cs typeface="Helvetica" pitchFamily="34" charset="-120"/>
               </a:rPr>
-              <a:t>DEDICATED HOST FOR VPC</a:t>
+              <a:t>DB2 WAREHOUSE</a:t>
             </a:r>
             <a:endParaRPr lang="en-US" dirty="0"/>
           </a:p>
@@ -27051,7 +27051,7 @@
       </p:sp>
       <p:pic>
         <p:nvPicPr>
-          <p:cNvPr id="108" name="Object 107" descr="public/generated/icons/86fb7610-0f92-11ea-a6a3-8b96ed1570d8.png">    </p:cNvPr>
+          <p:cNvPr id="108" name="Object 107" descr="public/generated/icons/is.dedicated-host.png">    </p:cNvPr>
           <p:cNvPicPr>
             <a:picLocks noChangeAspect="1"/>
           </p:cNvPicPr>
@@ -27107,7 +27107,7 @@
                 <a:ea typeface="Helvetica" pitchFamily="34" charset="-122"/>
                 <a:cs typeface="Helvetica" pitchFamily="34" charset="-120"/>
               </a:rPr>
-              <a:t>DIRECT LINK CONNECT</a:t>
+              <a:t>DEDICATED HOST FOR VPC</a:t>
             </a:r>
             <a:endParaRPr lang="en-US" dirty="0"/>
           </a:p>
@@ -27173,7 +27173,7 @@
       </p:sp>
       <p:pic>
         <p:nvPicPr>
-          <p:cNvPr id="3" name="Object 2" descr="public/generated/icons/7dd59b11-c3c5-5aad-f6b2-2a0c2a3e6c49.png">    </p:cNvPr>
+          <p:cNvPr id="3" name="Object 2" descr="public/generated/icons/86fb7610-0f92-11ea-a6a3-8b96ed1570d8.png">    </p:cNvPr>
           <p:cNvPicPr>
             <a:picLocks noChangeAspect="1"/>
           </p:cNvPicPr>
@@ -27229,7 +27229,7 @@
                 <a:ea typeface="Helvetica" pitchFamily="34" charset="-122"/>
                 <a:cs typeface="Helvetica" pitchFamily="34" charset="-120"/>
               </a:rPr>
-              <a:t>DIRECT LINK CONNECT ON CLASSIC</a:t>
+              <a:t>DIRECT LINK CONNECT</a:t>
             </a:r>
             <a:endParaRPr lang="en-US" dirty="0"/>
           </a:p>
@@ -27262,7 +27262,7 @@
       </p:sp>
       <p:pic>
         <p:nvPicPr>
-          <p:cNvPr id="6" name="Object 5" descr="public/generated/icons/dc11a440-6073-11e9-9f5a-2f7997ba23c0.png">    </p:cNvPr>
+          <p:cNvPr id="6" name="Object 5" descr="public/generated/icons/7dd59b11-c3c5-5aad-f6b2-2a0c2a3e6c49.png">    </p:cNvPr>
           <p:cNvPicPr>
             <a:picLocks noChangeAspect="1"/>
           </p:cNvPicPr>
@@ -27318,7 +27318,7 @@
                 <a:ea typeface="Helvetica" pitchFamily="34" charset="-122"/>
                 <a:cs typeface="Helvetica" pitchFamily="34" charset="-120"/>
               </a:rPr>
-              <a:t>DIRECT LINK DEDICATED</a:t>
+              <a:t>DIRECT LINK CONNECT ON CLASSIC</a:t>
             </a:r>
             <a:endParaRPr lang="en-US" dirty="0"/>
           </a:p>
@@ -27351,7 +27351,7 @@
       </p:sp>
       <p:pic>
         <p:nvPicPr>
-          <p:cNvPr id="9" name="Object 8" descr="public/generated/icons/22.png">    </p:cNvPr>
+          <p:cNvPr id="9" name="Object 8" descr="public/generated/icons/dc11a440-6073-11e9-9f5a-2f7997ba23c0.png">    </p:cNvPr>
           <p:cNvPicPr>
             <a:picLocks noChangeAspect="1"/>
           </p:cNvPicPr>
@@ -27407,7 +27407,7 @@
                 <a:ea typeface="Helvetica" pitchFamily="34" charset="-122"/>
                 <a:cs typeface="Helvetica" pitchFamily="34" charset="-120"/>
               </a:rPr>
-              <a:t>DIRECT LINK DEDICATED HOSTING ON CLASSIC</a:t>
+              <a:t>DIRECT LINK DEDICATED</a:t>
             </a:r>
             <a:endParaRPr lang="en-US" dirty="0"/>
           </a:p>
@@ -27440,7 +27440,7 @@
       </p:sp>
       <p:pic>
         <p:nvPicPr>
-          <p:cNvPr id="12" name="Object 11" descr="public/generated/icons/23.png">    </p:cNvPr>
+          <p:cNvPr id="12" name="Object 11" descr="public/generated/icons/22.png">    </p:cNvPr>
           <p:cNvPicPr>
             <a:picLocks noChangeAspect="1"/>
           </p:cNvPicPr>
@@ -27496,7 +27496,7 @@
                 <a:ea typeface="Helvetica" pitchFamily="34" charset="-122"/>
                 <a:cs typeface="Helvetica" pitchFamily="34" charset="-120"/>
               </a:rPr>
-              <a:t>DIRECT LINK DEDICATED ON CLASSIC</a:t>
+              <a:t>DIRECT LINK DEDICATED HOSTING ON CLASSIC</a:t>
             </a:r>
             <a:endParaRPr lang="en-US" dirty="0"/>
           </a:p>
@@ -27529,7 +27529,7 @@
       </p:sp>
       <p:pic>
         <p:nvPicPr>
-          <p:cNvPr id="15" name="Object 14" descr="public/generated/icons/21.png">    </p:cNvPr>
+          <p:cNvPr id="15" name="Object 14" descr="public/generated/icons/23.png">    </p:cNvPr>
           <p:cNvPicPr>
             <a:picLocks noChangeAspect="1"/>
           </p:cNvPicPr>
@@ -27585,7 +27585,7 @@
                 <a:ea typeface="Helvetica" pitchFamily="34" charset="-122"/>
                 <a:cs typeface="Helvetica" pitchFamily="34" charset="-120"/>
               </a:rPr>
-              <a:t>DIRECT LINK EXCHANGE ON CLASSIC</a:t>
+              <a:t>DIRECT LINK DEDICATED ON CLASSIC</a:t>
             </a:r>
             <a:endParaRPr lang="en-US" dirty="0"/>
           </a:p>
@@ -27618,7 +27618,7 @@
       </p:sp>
       <p:pic>
         <p:nvPicPr>
-          <p:cNvPr id="18" name="Object 17" descr="public/generated/icons/9f3db814-3aec-47c5-94b0-6a71d49bd27f.png">    </p:cNvPr>
+          <p:cNvPr id="18" name="Object 17" descr="public/generated/icons/21.png">    </p:cNvPr>
           <p:cNvPicPr>
             <a:picLocks noChangeAspect="1"/>
           </p:cNvPicPr>
@@ -27674,7 +27674,7 @@
                 <a:ea typeface="Helvetica" pitchFamily="34" charset="-122"/>
                 <a:cs typeface="Helvetica" pitchFamily="34" charset="-120"/>
               </a:rPr>
-              <a:t>DIZZION COMPLETE</a:t>
+              <a:t>DIRECT LINK EXCHANGE ON CLASSIC</a:t>
             </a:r>
             <a:endParaRPr lang="en-US" dirty="0"/>
           </a:p>
@@ -27707,7 +27707,7 @@
       </p:sp>
       <p:pic>
         <p:nvPicPr>
-          <p:cNvPr id="21" name="Object 20" descr="public/generated/icons/9e09a2eb-b2e5-4d76-ab7c-1b2f8c080865.png">    </p:cNvPr>
+          <p:cNvPr id="21" name="Object 20" descr="public/generated/icons/9f3db814-3aec-47c5-94b0-6a71d49bd27f.png">    </p:cNvPr>
           <p:cNvPicPr>
             <a:picLocks noChangeAspect="1"/>
           </p:cNvPicPr>
@@ -27763,7 +27763,7 @@
                 <a:ea typeface="Helvetica" pitchFamily="34" charset="-122"/>
                 <a:cs typeface="Helvetica" pitchFamily="34" charset="-120"/>
               </a:rPr>
-              <a:t>DIZZION COMPLETE - HORIZON</a:t>
+              <a:t>DIZZION COMPLETE</a:t>
             </a:r>
             <a:endParaRPr lang="en-US" dirty="0"/>
           </a:p>
@@ -27796,7 +27796,7 @@
       </p:sp>
       <p:pic>
         <p:nvPicPr>
-          <p:cNvPr id="24" name="Object 23" descr="public/generated/icons/79679329-2050-4779-a2e2-7210b88aed4e.png">    </p:cNvPr>
+          <p:cNvPr id="24" name="Object 23" descr="public/generated/icons/9e09a2eb-b2e5-4d76-ab7c-1b2f8c080865.png">    </p:cNvPr>
           <p:cNvPicPr>
             <a:picLocks noChangeAspect="1"/>
           </p:cNvPicPr>
@@ -27852,7 +27852,7 @@
                 <a:ea typeface="Helvetica" pitchFamily="34" charset="-122"/>
                 <a:cs typeface="Helvetica" pitchFamily="34" charset="-120"/>
               </a:rPr>
-              <a:t>DIZZION COMPLETE FS - HORIZON</a:t>
+              <a:t>DIZZION COMPLETE - HORIZON</a:t>
             </a:r>
             <a:endParaRPr lang="en-US" dirty="0"/>
           </a:p>
@@ -27885,7 +27885,7 @@
       </p:sp>
       <p:pic>
         <p:nvPicPr>
-          <p:cNvPr id="27" name="Object 26" descr="public/generated/icons/6fc0c2df-7fbc-470f-aac5-a93af7ef4a92.png">    </p:cNvPr>
+          <p:cNvPr id="27" name="Object 26" descr="public/generated/icons/79679329-2050-4779-a2e2-7210b88aed4e.png">    </p:cNvPr>
           <p:cNvPicPr>
             <a:picLocks noChangeAspect="1"/>
           </p:cNvPicPr>
@@ -27941,7 +27941,7 @@
                 <a:ea typeface="Helvetica" pitchFamily="34" charset="-122"/>
                 <a:cs typeface="Helvetica" pitchFamily="34" charset="-120"/>
               </a:rPr>
-              <a:t>DIZZION FLEX</a:t>
+              <a:t>DIZZION COMPLETE FS - HORIZON</a:t>
             </a:r>
             <a:endParaRPr lang="en-US" dirty="0"/>
           </a:p>
@@ -27974,7 +27974,7 @@
       </p:sp>
       <p:pic>
         <p:nvPicPr>
-          <p:cNvPr id="30" name="Object 29" descr="public/generated/icons/72ca6b61-2aa8-4b8f-ba21-69854bd2095b.png">    </p:cNvPr>
+          <p:cNvPr id="30" name="Object 29" descr="public/generated/icons/6fc0c2df-7fbc-470f-aac5-a93af7ef4a92.png">    </p:cNvPr>
           <p:cNvPicPr>
             <a:picLocks noChangeAspect="1"/>
           </p:cNvPicPr>
@@ -28030,7 +28030,7 @@
                 <a:ea typeface="Helvetica" pitchFamily="34" charset="-122"/>
                 <a:cs typeface="Helvetica" pitchFamily="34" charset="-120"/>
               </a:rPr>
-              <a:t>DIZZION MANAGED</a:t>
+              <a:t>DIZZION FLEX</a:t>
             </a:r>
             <a:endParaRPr lang="en-US" dirty="0"/>
           </a:p>
@@ -28063,7 +28063,7 @@
       </p:sp>
       <p:pic>
         <p:nvPicPr>
-          <p:cNvPr id="33" name="Object 32" descr="public/generated/icons/b4ed8a30-936f-11e9-b289-1d079699cbe5.png">    </p:cNvPr>
+          <p:cNvPr id="33" name="Object 32" descr="public/generated/icons/72ca6b61-2aa8-4b8f-ba21-69854bd2095b.png">    </p:cNvPr>
           <p:cNvPicPr>
             <a:picLocks noChangeAspect="1"/>
           </p:cNvPicPr>
@@ -28119,7 +28119,7 @@
                 <a:ea typeface="Helvetica" pitchFamily="34" charset="-122"/>
                 <a:cs typeface="Helvetica" pitchFamily="34" charset="-120"/>
               </a:rPr>
-              <a:t>DNS SERVICES</a:t>
+              <a:t>DIZZION MANAGED</a:t>
             </a:r>
             <a:endParaRPr lang="en-US" dirty="0"/>
           </a:p>
@@ -28152,7 +28152,7 @@
       </p:sp>
       <p:pic>
         <p:nvPicPr>
-          <p:cNvPr id="36" name="Object 35" descr="public/generated/icons/d1e3f0d2-0f49-ddfd-0eb9-2897b9d3a45d.png">    </p:cNvPr>
+          <p:cNvPr id="36" name="Object 35" descr="public/generated/icons/b4ed8a30-936f-11e9-b289-1d079699cbe5.png">    </p:cNvPr>
           <p:cNvPicPr>
             <a:picLocks noChangeAspect="1"/>
           </p:cNvPicPr>
@@ -28208,7 +28208,7 @@
                 <a:ea typeface="Helvetica" pitchFamily="34" charset="-122"/>
                 <a:cs typeface="Helvetica" pitchFamily="34" charset="-120"/>
               </a:rPr>
-              <a:t>EMAIL DELIVERY, POWERED BY SENDGRID</a:t>
+              <a:t>DNS SERVICES</a:t>
             </a:r>
             <a:endParaRPr lang="en-US" dirty="0"/>
           </a:p>
@@ -28241,7 +28241,7 @@
       </p:sp>
       <p:pic>
         <p:nvPicPr>
-          <p:cNvPr id="39" name="Object 38" descr="public/generated/icons/64955a78-30f9-426d-a25a-344480421b27.png">    </p:cNvPr>
+          <p:cNvPr id="39" name="Object 38" descr="public/generated/icons/d1e3f0d2-0f49-ddfd-0eb9-2897b9d3a45d.png">    </p:cNvPr>
           <p:cNvPicPr>
             <a:picLocks noChangeAspect="1"/>
           </p:cNvPicPr>
@@ -28297,7 +28297,7 @@
                 <a:ea typeface="Helvetica" pitchFamily="34" charset="-122"/>
                 <a:cs typeface="Helvetica" pitchFamily="34" charset="-120"/>
               </a:rPr>
-              <a:t>ETICLOUD SECURE DIGITAL AGILE WORKPLACE</a:t>
+              <a:t>EMAIL DELIVERY, POWERED BY SENDGRID</a:t>
             </a:r>
             <a:endParaRPr lang="en-US" dirty="0"/>
           </a:p>
@@ -28330,7 +28330,7 @@
       </p:sp>
       <p:pic>
         <p:nvPicPr>
-          <p:cNvPr id="42" name="Object 41" descr="public/generated/icons/ecdb4690-c2d8-11eb-bff1-4f7b9d2dfe41.png">    </p:cNvPr>
+          <p:cNvPr id="42" name="Object 41" descr="public/generated/icons/871a9870-7508-11ef-ac5c-3324c550b37a.png">    </p:cNvPr>
           <p:cNvPicPr>
             <a:picLocks noChangeAspect="1"/>
           </p:cNvPicPr>
@@ -28386,7 +28386,7 @@
                 <a:ea typeface="Helvetica" pitchFamily="34" charset="-122"/>
                 <a:cs typeface="Helvetica" pitchFamily="34" charset="-120"/>
               </a:rPr>
-              <a:t>EVENT NOTIFICATIONS</a:t>
+              <a:t>ENTERPRISE APPLICATION SERVICE</a:t>
             </a:r>
             <a:endParaRPr lang="en-US" dirty="0"/>
           </a:p>
@@ -28419,7 +28419,7 @@
       </p:sp>
       <p:pic>
         <p:nvPicPr>
-          <p:cNvPr id="45" name="Object 44" descr="public/generated/icons/6a7f4e38-f218-48ef-9dd2-df408747568e.png">    </p:cNvPr>
+          <p:cNvPr id="45" name="Object 44" descr="public/generated/icons/64955a78-30f9-426d-a25a-344480421b27.png">    </p:cNvPr>
           <p:cNvPicPr>
             <a:picLocks noChangeAspect="1"/>
           </p:cNvPicPr>
@@ -28475,7 +28475,7 @@
                 <a:ea typeface="Helvetica" pitchFamily="34" charset="-122"/>
                 <a:cs typeface="Helvetica" pitchFamily="34" charset="-120"/>
               </a:rPr>
-              <a:t>EVENT STREAMS</a:t>
+              <a:t>ETICLOUD SECURE DIGITAL AGILE WORKPLACE</a:t>
             </a:r>
             <a:endParaRPr lang="en-US" dirty="0"/>
           </a:p>
@@ -28508,7 +28508,7 @@
       </p:sp>
       <p:pic>
         <p:nvPicPr>
-          <p:cNvPr id="48" name="Object 47" descr="public/generated/icons/cf329950-0a3e-11e8-922e-f1366c6e1c83-bigip.png">    </p:cNvPr>
+          <p:cNvPr id="48" name="Object 47" descr="public/generated/icons/ecdb4690-c2d8-11eb-bff1-4f7b9d2dfe41.png">    </p:cNvPr>
           <p:cNvPicPr>
             <a:picLocks noChangeAspect="1"/>
           </p:cNvPicPr>
@@ -28564,7 +28564,7 @@
                 <a:ea typeface="Helvetica" pitchFamily="34" charset="-122"/>
                 <a:cs typeface="Helvetica" pitchFamily="34" charset="-120"/>
               </a:rPr>
-              <a:t>F5 BIG-IP</a:t>
+              <a:t>EVENT NOTIFICATIONS</a:t>
             </a:r>
             <a:endParaRPr lang="en-US" dirty="0"/>
           </a:p>
@@ -28597,7 +28597,7 @@
       </p:sp>
       <p:pic>
         <p:nvPicPr>
-          <p:cNvPr id="51" name="Object 50" descr="public/generated/icons/60427a43-cf48-41e0-bd95-26bde9c12105.png">    </p:cNvPr>
+          <p:cNvPr id="51" name="Object 50" descr="public/generated/icons/6a7f4e38-f218-48ef-9dd2-df408747568e.png">    </p:cNvPr>
           <p:cNvPicPr>
             <a:picLocks noChangeAspect="1"/>
           </p:cNvPicPr>
@@ -28653,7 +28653,7 @@
                 <a:ea typeface="Helvetica" pitchFamily="34" charset="-122"/>
                 <a:cs typeface="Helvetica" pitchFamily="34" charset="-120"/>
               </a:rPr>
-              <a:t>FALCONSTOR STORSAFE VTL FOR POWER ON-PREMISES</a:t>
+              <a:t>EVENT STREAMS</a:t>
             </a:r>
             <a:endParaRPr lang="en-US" dirty="0"/>
           </a:p>
@@ -28686,7 +28686,7 @@
       </p:sp>
       <p:pic>
         <p:nvPicPr>
-          <p:cNvPr id="54" name="Object 53" descr="public/generated/icons/6.png">    </p:cNvPr>
+          <p:cNvPr id="54" name="Object 53" descr="public/generated/icons/cf329950-0a3e-11e8-922e-f1366c6e1c83-bigip.png">    </p:cNvPr>
           <p:cNvPicPr>
             <a:picLocks noChangeAspect="1"/>
           </p:cNvPicPr>
@@ -28742,7 +28742,7 @@
                 <a:ea typeface="Helvetica" pitchFamily="34" charset="-122"/>
                 <a:cs typeface="Helvetica" pitchFamily="34" charset="-120"/>
               </a:rPr>
-              <a:t>FILE STORAGE FOR CLASSIC</a:t>
+              <a:t>F5 BIG-IP</a:t>
             </a:r>
             <a:endParaRPr lang="en-US" dirty="0"/>
           </a:p>
@@ -28775,7 +28775,7 @@
       </p:sp>
       <p:pic>
         <p:nvPicPr>
-          <p:cNvPr id="57" name="Object 56" descr="public/generated/icons/is.share.png">    </p:cNvPr>
+          <p:cNvPr id="57" name="Object 56" descr="public/generated/icons/60427a43-cf48-41e0-bd95-26bde9c12105.png">    </p:cNvPr>
           <p:cNvPicPr>
             <a:picLocks noChangeAspect="1"/>
           </p:cNvPicPr>
@@ -28831,7 +28831,7 @@
                 <a:ea typeface="Helvetica" pitchFamily="34" charset="-122"/>
                 <a:cs typeface="Helvetica" pitchFamily="34" charset="-120"/>
               </a:rPr>
-              <a:t>FILE STORAGE FOR VPC</a:t>
+              <a:t>FALCONSTOR STORSAFE VTL FOR POWER ON-PREMISES</a:t>
             </a:r>
             <a:endParaRPr lang="en-US" dirty="0"/>
           </a:p>
@@ -28864,7 +28864,7 @@
       </p:sp>
       <p:pic>
         <p:nvPicPr>
-          <p:cNvPr id="60" name="Object 59" descr="public/generated/icons/is.floating-ip.png">    </p:cNvPr>
+          <p:cNvPr id="60" name="Object 59" descr="public/generated/icons/6.png">    </p:cNvPr>
           <p:cNvPicPr>
             <a:picLocks noChangeAspect="1"/>
           </p:cNvPicPr>
@@ -28920,7 +28920,7 @@
                 <a:ea typeface="Helvetica" pitchFamily="34" charset="-122"/>
                 <a:cs typeface="Helvetica" pitchFamily="34" charset="-120"/>
               </a:rPr>
-              <a:t>FLOATING IP FOR VPC</a:t>
+              <a:t>FILE STORAGE FOR CLASSIC</a:t>
             </a:r>
             <a:endParaRPr lang="en-US" dirty="0"/>
           </a:p>
@@ -28953,7 +28953,7 @@
       </p:sp>
       <p:pic>
         <p:nvPicPr>
-          <p:cNvPr id="63" name="Object 62" descr="public/generated/icons/is.flow-log-collector.png">    </p:cNvPr>
+          <p:cNvPr id="63" name="Object 62" descr="public/generated/icons/is.share.png">    </p:cNvPr>
           <p:cNvPicPr>
             <a:picLocks noChangeAspect="1"/>
           </p:cNvPicPr>
@@ -29009,7 +29009,7 @@
                 <a:ea typeface="Helvetica" pitchFamily="34" charset="-122"/>
                 <a:cs typeface="Helvetica" pitchFamily="34" charset="-120"/>
               </a:rPr>
-              <a:t>FLOW LOGS FOR VPC</a:t>
+              <a:t>FILE STORAGE FOR VPC</a:t>
             </a:r>
             <a:endParaRPr lang="en-US" dirty="0"/>
           </a:p>
@@ -29042,7 +29042,7 @@
       </p:sp>
       <p:pic>
         <p:nvPicPr>
-          <p:cNvPr id="66" name="Object 65" descr="public/generated/icons/d2fb0ba3-1679-4053-a593-9f2259d9e87b.png">    </p:cNvPr>
+          <p:cNvPr id="66" name="Object 65" descr="public/generated/icons/is.floating-ip.png">    </p:cNvPr>
           <p:cNvPicPr>
             <a:picLocks noChangeAspect="1"/>
           </p:cNvPicPr>
@@ -29098,7 +29098,7 @@
                 <a:ea typeface="Helvetica" pitchFamily="34" charset="-122"/>
                 <a:cs typeface="Helvetica" pitchFamily="34" charset="-120"/>
               </a:rPr>
-              <a:t>FNTS MANAGED SERVICES FOR POWERVS CLOUD</a:t>
+              <a:t>FLOATING IP FOR VPC</a:t>
             </a:r>
             <a:endParaRPr lang="en-US" dirty="0"/>
           </a:p>
@@ -29131,7 +29131,7 @@
       </p:sp>
       <p:pic>
         <p:nvPicPr>
-          <p:cNvPr id="69" name="Object 68" descr="public/generated/icons/cf329950-0a3e-11e8-922e-f1366c6e1c83-fortigate.png">    </p:cNvPr>
+          <p:cNvPr id="69" name="Object 68" descr="public/generated/icons/is.flow-log-collector.png">    </p:cNvPr>
           <p:cNvPicPr>
             <a:picLocks noChangeAspect="1"/>
           </p:cNvPicPr>
@@ -29187,7 +29187,7 @@
                 <a:ea typeface="Helvetica" pitchFamily="34" charset="-122"/>
                 <a:cs typeface="Helvetica" pitchFamily="34" charset="-120"/>
               </a:rPr>
-              <a:t>FORTIGATE SECURITY APPLIANCE</a:t>
+              <a:t>FLOW LOGS FOR VPC</a:t>
             </a:r>
             <a:endParaRPr lang="en-US" dirty="0"/>
           </a:p>
@@ -29220,7 +29220,7 @@
       </p:sp>
       <p:pic>
         <p:nvPicPr>
-          <p:cNvPr id="72" name="Object 71" descr="public/generated/icons/f5b26324-9b39-c701-0cc5-b0d5d2fe8534.png">    </p:cNvPr>
+          <p:cNvPr id="72" name="Object 71" descr="public/generated/icons/05605040-8854-4665-bd05-0b10a96daf05.png">    </p:cNvPr>
           <p:cNvPicPr>
             <a:picLocks noChangeAspect="1"/>
           </p:cNvPicPr>
@@ -29276,7 +29276,7 @@
                 <a:ea typeface="Helvetica" pitchFamily="34" charset="-122"/>
                 <a:cs typeface="Helvetica" pitchFamily="34" charset="-120"/>
               </a:rPr>
-              <a:t>FORTIGATE SECURITY APPLIANCE 10GBPS</a:t>
+              <a:t>FNTS CLOUD MIGRATION SERVICES</a:t>
             </a:r>
             <a:endParaRPr lang="en-US" dirty="0"/>
           </a:p>
@@ -29309,7 +29309,7 @@
       </p:sp>
       <p:pic>
         <p:nvPicPr>
-          <p:cNvPr id="75" name="Object 74" descr="public/generated/icons/cf329950-0a3e-11e8-922e-f1366c6e1c83-fortigatevm.png">    </p:cNvPr>
+          <p:cNvPr id="75" name="Object 74" descr="public/generated/icons/d2fb0ba3-1679-4053-a593-9f2259d9e87b.png">    </p:cNvPr>
           <p:cNvPicPr>
             <a:picLocks noChangeAspect="1"/>
           </p:cNvPicPr>
@@ -29365,7 +29365,7 @@
                 <a:ea typeface="Helvetica" pitchFamily="34" charset="-122"/>
                 <a:cs typeface="Helvetica" pitchFamily="34" charset="-120"/>
               </a:rPr>
-              <a:t>FORTIGATE VIRTUAL APPLIANCE</a:t>
+              <a:t>FNTS MANAGED SERVICES FOR POWERVS CLOUD</a:t>
             </a:r>
             <a:endParaRPr lang="en-US" dirty="0"/>
           </a:p>
@@ -29398,7 +29398,7 @@
       </p:sp>
       <p:pic>
         <p:nvPicPr>
-          <p:cNvPr id="78" name="Object 77" descr="public/generated/icons/a93eeacc-7012-c8bc-c851-e928949a226c.png">    </p:cNvPr>
+          <p:cNvPr id="78" name="Object 77" descr="public/generated/icons/cf329950-0a3e-11e8-922e-f1366c6e1c83-fortigate.png">    </p:cNvPr>
           <p:cNvPicPr>
             <a:picLocks noChangeAspect="1"/>
           </p:cNvPicPr>
@@ -29454,7 +29454,7 @@
                 <a:ea typeface="Helvetica" pitchFamily="34" charset="-122"/>
                 <a:cs typeface="Helvetica" pitchFamily="34" charset="-120"/>
               </a:rPr>
-              <a:t>FORTINET VIRTUAL FORTIGATE SECURITY APPLIANCE (VFSA)</a:t>
+              <a:t>FORTIGATE SECURITY APPLIANCE</a:t>
             </a:r>
             <a:endParaRPr lang="en-US" dirty="0"/>
           </a:p>
@@ -29487,7 +29487,7 @@
       </p:sp>
       <p:pic>
         <p:nvPicPr>
-          <p:cNvPr id="81" name="Object 80" descr="public/generated/icons/functions.png">    </p:cNvPr>
+          <p:cNvPr id="81" name="Object 80" descr="public/generated/icons/f5b26324-9b39-c701-0cc5-b0d5d2fe8534.png">    </p:cNvPr>
           <p:cNvPicPr>
             <a:picLocks noChangeAspect="1"/>
           </p:cNvPicPr>
@@ -29543,7 +29543,7 @@
                 <a:ea typeface="Helvetica" pitchFamily="34" charset="-122"/>
                 <a:cs typeface="Helvetica" pitchFamily="34" charset="-120"/>
               </a:rPr>
-              <a:t>FUNCTIONS</a:t>
+              <a:t>FORTIGATE SECURITY APPLIANCE 10GBPS</a:t>
             </a:r>
             <a:endParaRPr lang="en-US" dirty="0"/>
           </a:p>
@@ -29576,7 +29576,7 @@
       </p:sp>
       <p:pic>
         <p:nvPicPr>
-          <p:cNvPr id="84" name="Object 83" descr="public/generated/icons/16.png">    </p:cNvPr>
+          <p:cNvPr id="84" name="Object 83" descr="public/generated/icons/cf329950-0a3e-11e8-922e-f1366c6e1c83-fortigatevm.png">    </p:cNvPr>
           <p:cNvPicPr>
             <a:picLocks noChangeAspect="1"/>
           </p:cNvPicPr>
@@ -29632,7 +29632,7 @@
                 <a:ea typeface="Helvetica" pitchFamily="34" charset="-122"/>
                 <a:cs typeface="Helvetica" pitchFamily="34" charset="-120"/>
               </a:rPr>
-              <a:t>HARDWARE FIREWALL</a:t>
+              <a:t>FORTIGATE VIRTUAL APPLIANCE</a:t>
             </a:r>
             <a:endParaRPr lang="en-US" dirty="0"/>
           </a:p>
@@ -29665,7 +29665,7 @@
       </p:sp>
       <p:pic>
         <p:nvPicPr>
-          <p:cNvPr id="87" name="Object 86" descr="public/generated/icons/cf329950-0a3e-11e8-922e-f1366c6e1c83-hcx.png">    </p:cNvPr>
+          <p:cNvPr id="87" name="Object 86" descr="public/generated/icons/a93eeacc-7012-c8bc-c851-e928949a226c.png">    </p:cNvPr>
           <p:cNvPicPr>
             <a:picLocks noChangeAspect="1"/>
           </p:cNvPicPr>
@@ -29721,7 +29721,7 @@
                 <a:ea typeface="Helvetica" pitchFamily="34" charset="-122"/>
                 <a:cs typeface="Helvetica" pitchFamily="34" charset="-120"/>
               </a:rPr>
-              <a:t>HCX</a:t>
+              <a:t>FORTINET VIRTUAL FORTIGATE SECURITY APPLIANCE (VFSA)</a:t>
             </a:r>
             <a:endParaRPr lang="en-US" dirty="0"/>
           </a:p>
@@ -29754,7 +29754,7 @@
       </p:sp>
       <p:pic>
         <p:nvPicPr>
-          <p:cNvPr id="90" name="Object 89" descr="public/generated/icons/3dacb5a3-de4a-4361-9f39-0b6657f89f37.png">    </p:cNvPr>
+          <p:cNvPr id="90" name="Object 89" descr="public/generated/icons/16.png">    </p:cNvPr>
           <p:cNvPicPr>
             <a:picLocks noChangeAspect="1"/>
           </p:cNvPicPr>
@@ -29810,7 +29810,7 @@
                 <a:ea typeface="Helvetica" pitchFamily="34" charset="-122"/>
                 <a:cs typeface="Helvetica" pitchFamily="34" charset="-120"/>
               </a:rPr>
-              <a:t>HDM VMWARE WORKLOAD ANALYZER</a:t>
+              <a:t>HARDWARE FIREWALL</a:t>
             </a:r>
             <a:endParaRPr lang="en-US" dirty="0"/>
           </a:p>
@@ -29843,7 +29843,7 @@
       </p:sp>
       <p:pic>
         <p:nvPicPr>
-          <p:cNvPr id="93" name="Object 92" descr="public/generated/icons/BE3AADC2-2C1A-4078-82F0-A33B1FD86EB0.png">    </p:cNvPr>
+          <p:cNvPr id="93" name="Object 92" descr="public/generated/icons/cf329950-0a3e-11e8-922e-f1366c6e1c83-hcx.png">    </p:cNvPr>
           <p:cNvPicPr>
             <a:picLocks noChangeAspect="1"/>
           </p:cNvPicPr>
@@ -29899,7 +29899,7 @@
                 <a:ea typeface="Helvetica" pitchFamily="34" charset="-122"/>
                 <a:cs typeface="Helvetica" pitchFamily="34" charset="-120"/>
               </a:rPr>
-              <a:t>HISTORICAL INSTRUMENT ANALYTICS</a:t>
+              <a:t>HCX</a:t>
             </a:r>
             <a:endParaRPr lang="en-US" dirty="0"/>
           </a:p>
@@ -29932,7 +29932,7 @@
       </p:sp>
       <p:pic>
         <p:nvPicPr>
-          <p:cNvPr id="96" name="Object 95" descr="public/generated/icons/cf329950-0a3e-11e8-922e-f1366c6e1c83-horizon.png">    </p:cNvPr>
+          <p:cNvPr id="96" name="Object 95" descr="public/generated/icons/3dacb5a3-de4a-4361-9f39-0b6657f89f37.png">    </p:cNvPr>
           <p:cNvPicPr>
             <a:picLocks noChangeAspect="1"/>
           </p:cNvPicPr>
@@ -29988,7 +29988,7 @@
                 <a:ea typeface="Helvetica" pitchFamily="34" charset="-122"/>
                 <a:cs typeface="Helvetica" pitchFamily="34" charset="-120"/>
               </a:rPr>
-              <a:t>HORIZON 7</a:t>
+              <a:t>HDM VMWARE WORKLOAD ANALYZER</a:t>
             </a:r>
             <a:endParaRPr lang="en-US" dirty="0"/>
           </a:p>
@@ -30021,7 +30021,7 @@
       </p:sp>
       <p:pic>
         <p:nvPicPr>
-          <p:cNvPr id="99" name="Object 98" descr="public/generated/icons/fa329acf-f9b6-fa9f-f37e-ad72d0b6a783.png">    </p:cNvPr>
+          <p:cNvPr id="99" name="Object 98" descr="public/generated/icons/BE3AADC2-2C1A-4078-82F0-A33B1FD86EB0.png">    </p:cNvPr>
           <p:cNvPicPr>
             <a:picLocks noChangeAspect="1"/>
           </p:cNvPicPr>
@@ -30077,7 +30077,7 @@
                 <a:ea typeface="Helvetica" pitchFamily="34" charset="-122"/>
                 <a:cs typeface="Helvetica" pitchFamily="34" charset="-120"/>
               </a:rPr>
-              <a:t>HYBRID CLOUD INFRASTRUCTURE AS A SERVICE</a:t>
+              <a:t>HISTORICAL INSTRUMENT ANALYTICS</a:t>
             </a:r>
             <a:endParaRPr lang="en-US" dirty="0"/>
           </a:p>
@@ -30110,7 +30110,7 @@
       </p:sp>
       <p:pic>
         <p:nvPicPr>
-          <p:cNvPr id="102" name="Object 101" descr="public/generated/icons/d589492e-6ac0-4a11-9c28-a157851c8f68.png">    </p:cNvPr>
+          <p:cNvPr id="102" name="Object 101" descr="public/generated/icons/cf329950-0a3e-11e8-922e-f1366c6e1c83-horizon.png">    </p:cNvPr>
           <p:cNvPicPr>
             <a:picLocks noChangeAspect="1"/>
           </p:cNvPicPr>
@@ -30166,7 +30166,7 @@
                 <a:ea typeface="Helvetica" pitchFamily="34" charset="-122"/>
                 <a:cs typeface="Helvetica" pitchFamily="34" charset="-120"/>
               </a:rPr>
-              <a:t>HYPER PROTECT CRYPTO SERVICES</a:t>
+              <a:t>HORIZON 7</a:t>
             </a:r>
             <a:endParaRPr lang="en-US" dirty="0"/>
           </a:p>
@@ -30199,7 +30199,7 @@
       </p:sp>
       <p:pic>
         <p:nvPicPr>
-          <p:cNvPr id="105" name="Object 104" descr="public/generated/icons/986f2197-9f9a-44f4-9463-f17ec64c6729.png">    </p:cNvPr>
+          <p:cNvPr id="105" name="Object 104" descr="public/generated/icons/fa329acf-f9b6-fa9f-f37e-ad72d0b6a783.png">    </p:cNvPr>
           <p:cNvPicPr>
             <a:picLocks noChangeAspect="1"/>
           </p:cNvPicPr>
@@ -30255,7 +30255,7 @@
                 <a:ea typeface="Helvetica" pitchFamily="34" charset="-122"/>
                 <a:cs typeface="Helvetica" pitchFamily="34" charset="-120"/>
               </a:rPr>
-              <a:t>HYPER PROTECT VIRTUAL SERVER FOR CLASSIC</a:t>
+              <a:t>HYBRID CLOUD INFRASTRUCTURE AS A SERVICE</a:t>
             </a:r>
             <a:endParaRPr lang="en-US" dirty="0"/>
           </a:p>
@@ -30288,7 +30288,7 @@
       </p:sp>
       <p:pic>
         <p:nvPicPr>
-          <p:cNvPr id="108" name="Object 107" descr="public/generated/icons/cf329950-0a3e-11e8-922e-f1366c6e1c83-hytrustcc.png">    </p:cNvPr>
+          <p:cNvPr id="108" name="Object 107" descr="public/generated/icons/d589492e-6ac0-4a11-9c28-a157851c8f68.png">    </p:cNvPr>
           <p:cNvPicPr>
             <a:picLocks noChangeAspect="1"/>
           </p:cNvPicPr>
@@ -30344,7 +30344,7 @@
                 <a:ea typeface="Helvetica" pitchFamily="34" charset="-122"/>
                 <a:cs typeface="Helvetica" pitchFamily="34" charset="-120"/>
               </a:rPr>
-              <a:t>HYTRUST CLOUDCONTROL</a:t>
+              <a:t>HYPER PROTECT CRYPTO SERVICES</a:t>
             </a:r>
             <a:endParaRPr lang="en-US" dirty="0"/>
           </a:p>
@@ -30410,7 +30410,7 @@
       </p:sp>
       <p:pic>
         <p:nvPicPr>
-          <p:cNvPr id="3" name="Object 2" descr="public/generated/icons/cf329950-0a3e-11e8-922e-f1366c6e1c83-hytrustdc.png">    </p:cNvPr>
+          <p:cNvPr id="3" name="Object 2" descr="public/generated/icons/986f2197-9f9a-44f4-9463-f17ec64c6729.png">    </p:cNvPr>
           <p:cNvPicPr>
             <a:picLocks noChangeAspect="1"/>
           </p:cNvPicPr>
@@ -30466,7 +30466,7 @@
                 <a:ea typeface="Helvetica" pitchFamily="34" charset="-122"/>
                 <a:cs typeface="Helvetica" pitchFamily="34" charset="-120"/>
               </a:rPr>
-              <a:t>HYTRUST DATACONTROL</a:t>
+              <a:t>HYPER PROTECT VIRTUAL SERVER FOR CLASSIC</a:t>
             </a:r>
             <a:endParaRPr lang="en-US" dirty="0"/>
           </a:p>
@@ -30499,7 +30499,7 @@
       </p:sp>
       <p:pic>
         <p:nvPicPr>
-          <p:cNvPr id="6" name="Object 5" descr="public/generated/icons/cf329950-0a3e-11e8-922e-f1366c6e1c83-hytrustkc.png">    </p:cNvPr>
+          <p:cNvPr id="6" name="Object 5" descr="public/generated/icons/cf329950-0a3e-11e8-922e-f1366c6e1c83-hytrustcc.png">    </p:cNvPr>
           <p:cNvPicPr>
             <a:picLocks noChangeAspect="1"/>
           </p:cNvPicPr>
@@ -30555,7 +30555,7 @@
                 <a:ea typeface="Helvetica" pitchFamily="34" charset="-122"/>
                 <a:cs typeface="Helvetica" pitchFamily="34" charset="-120"/>
               </a:rPr>
-              <a:t>HYTRUST KEYCONTROL</a:t>
+              <a:t>HYTRUST CLOUDCONTROL</a:t>
             </a:r>
             <a:endParaRPr lang="en-US" dirty="0"/>
           </a:p>
@@ -30588,7 +30588,7 @@
       </p:sp>
       <p:pic>
         <p:nvPicPr>
-          <p:cNvPr id="9" name="Object 8" descr="public/generated/icons/is.image.png">    </p:cNvPr>
+          <p:cNvPr id="9" name="Object 8" descr="public/generated/icons/cf329950-0a3e-11e8-922e-f1366c6e1c83-hytrustdc.png">    </p:cNvPr>
           <p:cNvPicPr>
             <a:picLocks noChangeAspect="1"/>
           </p:cNvPicPr>
@@ -30644,7 +30644,7 @@
                 <a:ea typeface="Helvetica" pitchFamily="34" charset="-122"/>
                 <a:cs typeface="Helvetica" pitchFamily="34" charset="-120"/>
               </a:rPr>
-              <a:t>IMAGE SERVICE FOR VPC</a:t>
+              <a:t>HYTRUST DATACONTROL</a:t>
             </a:r>
             <a:endParaRPr lang="en-US" dirty="0"/>
           </a:p>
@@ -30677,7 +30677,7 @@
       </p:sp>
       <p:pic>
         <p:nvPicPr>
-          <p:cNvPr id="12" name="Object 11" descr="public/generated/icons/is.metadata.png">    </p:cNvPr>
+          <p:cNvPr id="12" name="Object 11" descr="public/generated/icons/cf329950-0a3e-11e8-922e-f1366c6e1c83-hytrustkc.png">    </p:cNvPr>
           <p:cNvPicPr>
             <a:picLocks noChangeAspect="1"/>
           </p:cNvPicPr>
@@ -30733,7 +30733,7 @@
                 <a:ea typeface="Helvetica" pitchFamily="34" charset="-122"/>
                 <a:cs typeface="Helvetica" pitchFamily="34" charset="-120"/>
               </a:rPr>
-              <a:t>INSTANCE METADATA FOR VPC</a:t>
+              <a:t>HYTRUST KEYCONTROL</a:t>
             </a:r>
             <a:endParaRPr lang="en-US" dirty="0"/>
           </a:p>
@@ -30766,7 +30766,7 @@
       </p:sp>
       <p:pic>
         <p:nvPicPr>
-          <p:cNvPr id="15" name="Object 14" descr="public/generated/icons/EEB04BA5-25BB-4E52-AAE5-9C7BEF86543B.png">    </p:cNvPr>
+          <p:cNvPr id="15" name="Object 14" descr="public/generated/icons/is.image.png">    </p:cNvPr>
           <p:cNvPicPr>
             <a:picLocks noChangeAspect="1"/>
           </p:cNvPicPr>
@@ -30822,7 +30822,7 @@
                 <a:ea typeface="Helvetica" pitchFamily="34" charset="-122"/>
                 <a:cs typeface="Helvetica" pitchFamily="34" charset="-120"/>
               </a:rPr>
-              <a:t>INSTRUMENT ANALYTICS</a:t>
+              <a:t>IMAGE SERVICE FOR VPC</a:t>
             </a:r>
             <a:endParaRPr lang="en-US" dirty="0"/>
           </a:p>
@@ -30855,7 +30855,7 @@
       </p:sp>
       <p:pic>
         <p:nvPicPr>
-          <p:cNvPr id="18" name="Object 17" descr="public/generated/icons/iotf-service-id.png">    </p:cNvPr>
+          <p:cNvPr id="18" name="Object 17" descr="public/generated/icons/is.metadata.png">    </p:cNvPr>
           <p:cNvPicPr>
             <a:picLocks noChangeAspect="1"/>
           </p:cNvPicPr>
@@ -30911,7 +30911,7 @@
                 <a:ea typeface="Helvetica" pitchFamily="34" charset="-122"/>
                 <a:cs typeface="Helvetica" pitchFamily="34" charset="-120"/>
               </a:rPr>
-              <a:t>INTERNET OF THINGS PLATFORM</a:t>
+              <a:t>INSTANCE METADATA FOR VPC</a:t>
             </a:r>
             <a:endParaRPr lang="en-US" dirty="0"/>
           </a:p>
@@ -30944,7 +30944,7 @@
       </p:sp>
       <p:pic>
         <p:nvPicPr>
-          <p:cNvPr id="21" name="Object 20" descr="public/generated/icons/75874a60-cb12-11e7-948e-37ac098eb1b9.png">    </p:cNvPr>
+          <p:cNvPr id="21" name="Object 20" descr="public/generated/icons/EEB04BA5-25BB-4E52-AAE5-9C7BEF86543B.png">    </p:cNvPr>
           <p:cNvPicPr>
             <a:picLocks noChangeAspect="1"/>
           </p:cNvPicPr>
@@ -31000,7 +31000,7 @@
                 <a:ea typeface="Helvetica" pitchFamily="34" charset="-122"/>
                 <a:cs typeface="Helvetica" pitchFamily="34" charset="-120"/>
               </a:rPr>
-              <a:t>INTERNET SERVICES</a:t>
+              <a:t>INSTRUMENT ANALYTICS</a:t>
             </a:r>
             <a:endParaRPr lang="en-US" dirty="0"/>
           </a:p>
@@ -31033,7 +31033,7 @@
       </p:sp>
       <p:pic>
         <p:nvPicPr>
-          <p:cNvPr id="24" name="Object 23" descr="public/generated/icons/3b960983-4483-488a-9851-6f7cccdb3534.png">    </p:cNvPr>
+          <p:cNvPr id="24" name="Object 23" descr="public/generated/icons/iotf-service-id.png">    </p:cNvPr>
           <p:cNvPicPr>
             <a:picLocks noChangeAspect="1"/>
           </p:cNvPicPr>
@@ -31089,7 +31089,7 @@
                 <a:ea typeface="Helvetica" pitchFamily="34" charset="-122"/>
                 <a:cs typeface="Helvetica" pitchFamily="34" charset="-120"/>
               </a:rPr>
-              <a:t>INVESTMENT PORTFOLIO</a:t>
+              <a:t>INTERNET OF THINGS PLATFORM</a:t>
             </a:r>
             <a:endParaRPr lang="en-US" dirty="0"/>
           </a:p>
@@ -31122,7 +31122,7 @@
       </p:sp>
       <p:pic>
         <p:nvPicPr>
-          <p:cNvPr id="27" name="Object 26" descr="public/generated/icons/12.png">    </p:cNvPr>
+          <p:cNvPr id="27" name="Object 26" descr="public/generated/icons/75874a60-cb12-11e7-948e-37ac098eb1b9.png">    </p:cNvPr>
           <p:cNvPicPr>
             <a:picLocks noChangeAspect="1"/>
           </p:cNvPicPr>
@@ -31178,7 +31178,7 @@
                 <a:ea typeface="Helvetica" pitchFamily="34" charset="-122"/>
                 <a:cs typeface="Helvetica" pitchFamily="34" charset="-120"/>
               </a:rPr>
-              <a:t>IPSEC VPN</a:t>
+              <a:t>INTERNET SERVICES</a:t>
             </a:r>
             <a:endParaRPr lang="en-US" dirty="0"/>
           </a:p>
@@ -31211,7 +31211,7 @@
       </p:sp>
       <p:pic>
         <p:nvPicPr>
-          <p:cNvPr id="30" name="Object 29" descr="public/generated/icons/035145f0-2cac-4505-59e9-2e363d08d5aa.png">    </p:cNvPr>
+          <p:cNvPr id="30" name="Object 29" descr="public/generated/icons/3b960983-4483-488a-9851-6f7cccdb3534.png">    </p:cNvPr>
           <p:cNvPicPr>
             <a:picLocks noChangeAspect="1"/>
           </p:cNvPicPr>
@@ -31267,7 +31267,7 @@
                 <a:ea typeface="Helvetica" pitchFamily="34" charset="-122"/>
                 <a:cs typeface="Helvetica" pitchFamily="34" charset="-120"/>
               </a:rPr>
-              <a:t>JUNIPER VSRX</a:t>
+              <a:t>INVESTMENT PORTFOLIO</a:t>
             </a:r>
             <a:endParaRPr lang="en-US" dirty="0"/>
           </a:p>
@@ -31300,7 +31300,7 @@
       </p:sp>
       <p:pic>
         <p:nvPicPr>
-          <p:cNvPr id="33" name="Object 32" descr="public/generated/icons/ee41347f-b18e-4ca6-bf80-b5467c63f9a6.png">    </p:cNvPr>
+          <p:cNvPr id="33" name="Object 32" descr="public/generated/icons/12.png">    </p:cNvPr>
           <p:cNvPicPr>
             <a:picLocks noChangeAspect="1"/>
           </p:cNvPicPr>
@@ -31356,7 +31356,7 @@
                 <a:ea typeface="Helvetica" pitchFamily="34" charset="-122"/>
                 <a:cs typeface="Helvetica" pitchFamily="34" charset="-120"/>
               </a:rPr>
-              <a:t>KEY PROTECT</a:t>
+              <a:t>IPSEC VPN</a:t>
             </a:r>
             <a:endParaRPr lang="en-US" dirty="0"/>
           </a:p>
@@ -31389,7 +31389,7 @@
       </p:sp>
       <p:pic>
         <p:nvPicPr>
-          <p:cNvPr id="36" name="Object 35" descr="public/generated/icons/cf329950-0a3e-11e8-922e-f1366c6e1c83-kmipadapter.png">    </p:cNvPr>
+          <p:cNvPr id="36" name="Object 35" descr="public/generated/icons/035145f0-2cac-4505-59e9-2e363d08d5aa.png">    </p:cNvPr>
           <p:cNvPicPr>
             <a:picLocks noChangeAspect="1"/>
           </p:cNvPicPr>
@@ -31445,7 +31445,7 @@
                 <a:ea typeface="Helvetica" pitchFamily="34" charset="-122"/>
                 <a:cs typeface="Helvetica" pitchFamily="34" charset="-120"/>
               </a:rPr>
-              <a:t>KMIP FOR VMWARE</a:t>
+              <a:t>JUNIPER VSRX</a:t>
             </a:r>
             <a:endParaRPr lang="en-US" dirty="0"/>
           </a:p>
@@ -31478,7 +31478,7 @@
       </p:sp>
       <p:pic>
         <p:nvPicPr>
-          <p:cNvPr id="39" name="Object 38" descr="public/generated/icons/ed3a5a53-eb60-4f3c-8fd1-17f88585b6ed.png">    </p:cNvPr>
+          <p:cNvPr id="39" name="Object 38" descr="public/generated/icons/ee41347f-b18e-4ca6-bf80-b5467c63f9a6.png">    </p:cNvPr>
           <p:cNvPicPr>
             <a:picLocks noChangeAspect="1"/>
           </p:cNvPicPr>
@@ -31534,7 +31534,7 @@
                 <a:ea typeface="Helvetica" pitchFamily="34" charset="-122"/>
                 <a:cs typeface="Helvetica" pitchFamily="34" charset="-120"/>
               </a:rPr>
-              <a:t>KNOWLEDGE CATALOG</a:t>
+              <a:t>KEY PROTECT</a:t>
             </a:r>
             <a:endParaRPr lang="en-US" dirty="0"/>
           </a:p>
@@ -31567,7 +31567,7 @@
       </p:sp>
       <p:pic>
         <p:nvPicPr>
-          <p:cNvPr id="42" name="Object 41" descr="public/generated/icons/983ea9a2-0fec-4021-8b70-8da5373394e5.png">    </p:cNvPr>
+          <p:cNvPr id="42" name="Object 41" descr="public/generated/icons/cf329950-0a3e-11e8-922e-f1366c6e1c83-kmipadapter.png">    </p:cNvPr>
           <p:cNvPicPr>
             <a:picLocks noChangeAspect="1"/>
           </p:cNvPicPr>
@@ -31623,7 +31623,7 @@
                 <a:ea typeface="Helvetica" pitchFamily="34" charset="-122"/>
                 <a:cs typeface="Helvetica" pitchFamily="34" charset="-120"/>
               </a:rPr>
-              <a:t>KNOWLEDGE STUDIO</a:t>
+              <a:t>KMIP FOR VMWARE</a:t>
             </a:r>
             <a:endParaRPr lang="en-US" dirty="0"/>
           </a:p>
@@ -31656,7 +31656,7 @@
       </p:sp>
       <p:pic>
         <p:nvPicPr>
-          <p:cNvPr id="45" name="Object 44" descr="public/generated/icons/a8f89634-261c-4832-8257-b25e04787988.png">    </p:cNvPr>
+          <p:cNvPr id="45" name="Object 44" descr="public/generated/icons/ed3a5a53-eb60-4f3c-8fd1-17f88585b6ed.png">    </p:cNvPr>
           <p:cNvPicPr>
             <a:picLocks noChangeAspect="1"/>
           </p:cNvPicPr>
@@ -31712,7 +31712,7 @@
                 <a:ea typeface="Helvetica" pitchFamily="34" charset="-122"/>
                 <a:cs typeface="Helvetica" pitchFamily="34" charset="-120"/>
               </a:rPr>
-              <a:t>KOMPRISE ELASTIC DATA MIGRATION</a:t>
+              <a:t>KNOWLEDGE CATALOG</a:t>
             </a:r>
             <a:endParaRPr lang="en-US" dirty="0"/>
           </a:p>
@@ -31745,7 +31745,7 @@
       </p:sp>
       <p:pic>
         <p:nvPicPr>
-          <p:cNvPr id="48" name="Object 47" descr="public/generated/icons/f1fa7442-9ee0-4e27-94c2-0cb3776a0a0a.png">    </p:cNvPr>
+          <p:cNvPr id="48" name="Object 47" descr="public/generated/icons/983ea9a2-0fec-4021-8b70-8da5373394e5.png">    </p:cNvPr>
           <p:cNvPicPr>
             <a:picLocks noChangeAspect="1"/>
           </p:cNvPicPr>
@@ -31801,7 +31801,7 @@
                 <a:ea typeface="Helvetica" pitchFamily="34" charset="-122"/>
                 <a:cs typeface="Helvetica" pitchFamily="34" charset="-120"/>
               </a:rPr>
-              <a:t>KOMPRISE INTELLIGENT DATA MANAGEMENT SUITE</a:t>
+              <a:t>KNOWLEDGE STUDIO</a:t>
             </a:r>
             <a:endParaRPr lang="en-US" dirty="0"/>
           </a:p>
@@ -31834,7 +31834,7 @@
       </p:sp>
       <p:pic>
         <p:nvPicPr>
-          <p:cNvPr id="51" name="Object 50" descr="public/generated/icons/containers-kubernetes.png">    </p:cNvPr>
+          <p:cNvPr id="51" name="Object 50" descr="public/generated/icons/a8f89634-261c-4832-8257-b25e04787988.png">    </p:cNvPr>
           <p:cNvPicPr>
             <a:picLocks noChangeAspect="1"/>
           </p:cNvPicPr>
@@ -31890,7 +31890,7 @@
                 <a:ea typeface="Helvetica" pitchFamily="34" charset="-122"/>
                 <a:cs typeface="Helvetica" pitchFamily="34" charset="-120"/>
               </a:rPr>
-              <a:t>KUBERNETES SERVICE</a:t>
+              <a:t>KOMPRISE ELASTIC DATA MIGRATION</a:t>
             </a:r>
             <a:endParaRPr lang="en-US" dirty="0"/>
           </a:p>
@@ -31923,7 +31923,7 @@
       </p:sp>
       <p:pic>
         <p:nvPicPr>
-          <p:cNvPr id="54" name="Object 53" descr="public/generated/icons/is.load-balancer.png">    </p:cNvPr>
+          <p:cNvPr id="54" name="Object 53" descr="public/generated/icons/f1fa7442-9ee0-4e27-94c2-0cb3776a0a0a.png">    </p:cNvPr>
           <p:cNvPicPr>
             <a:picLocks noChangeAspect="1"/>
           </p:cNvPicPr>
@@ -31979,7 +31979,7 @@
                 <a:ea typeface="Helvetica" pitchFamily="34" charset="-122"/>
                 <a:cs typeface="Helvetica" pitchFamily="34" charset="-120"/>
               </a:rPr>
-              <a:t>LOAD BALANCER FOR VPC</a:t>
+              <a:t>KOMPRISE INTELLIGENT DATA MANAGEMENT SUITE</a:t>
             </a:r>
             <a:endParaRPr lang="en-US" dirty="0"/>
           </a:p>
@@ -32012,7 +32012,7 @@
       </p:sp>
       <p:pic>
         <p:nvPicPr>
-          <p:cNvPr id="57" name="Object 56" descr="public/generated/icons/e13e1860-959c-11e8-871e-ad157af61ad7.png">    </p:cNvPr>
+          <p:cNvPr id="57" name="Object 56" descr="public/generated/icons/containers-kubernetes.png">    </p:cNvPr>
           <p:cNvPicPr>
             <a:picLocks noChangeAspect="1"/>
           </p:cNvPicPr>
@@ -32068,7 +32068,7 @@
                 <a:ea typeface="Helvetica" pitchFamily="34" charset="-122"/>
                 <a:cs typeface="Helvetica" pitchFamily="34" charset="-120"/>
               </a:rPr>
-              <a:t>LOG ANALYSIS</a:t>
+              <a:t>KUBERNETES SERVICE</a:t>
             </a:r>
             <a:endParaRPr lang="en-US" dirty="0"/>
           </a:p>
@@ -32101,7 +32101,7 @@
       </p:sp>
       <p:pic>
         <p:nvPicPr>
-          <p:cNvPr id="60" name="Object 59" descr="public/generated/icons/cf329950-0a3e-11e8-922e-f1366c6e1c83-managedveeam.png">    </p:cNvPr>
+          <p:cNvPr id="60" name="Object 59" descr="public/generated/icons/is.load-balancer.png">    </p:cNvPr>
           <p:cNvPicPr>
             <a:picLocks noChangeAspect="1"/>
           </p:cNvPicPr>
@@ -32157,7 +32157,7 @@
                 <a:ea typeface="Helvetica" pitchFamily="34" charset="-122"/>
                 <a:cs typeface="Helvetica" pitchFamily="34" charset="-120"/>
               </a:rPr>
-              <a:t>MANAGED BACKUP SERVICES</a:t>
+              <a:t>LOAD BALANCER FOR VPC</a:t>
             </a:r>
             <a:endParaRPr lang="en-US" dirty="0"/>
           </a:p>
@@ -32190,7 +32190,7 @@
       </p:sp>
       <p:pic>
         <p:nvPicPr>
-          <p:cNvPr id="63" name="Object 62" descr="public/generated/icons/cf329950-0a3e-11e8-922e-f1366c6e1c83-managedzerto.png">    </p:cNvPr>
+          <p:cNvPr id="63" name="Object 62" descr="public/generated/icons/e13e1860-959c-11e8-871e-ad157af61ad7.png">    </p:cNvPr>
           <p:cNvPicPr>
             <a:picLocks noChangeAspect="1"/>
           </p:cNvPicPr>
@@ -32246,7 +32246,7 @@
                 <a:ea typeface="Helvetica" pitchFamily="34" charset="-122"/>
                 <a:cs typeface="Helvetica" pitchFamily="34" charset="-120"/>
               </a:rPr>
-              <a:t>MANAGED DISASTER RECOVERY SERVICES</a:t>
+              <a:t>LOG ANALYSIS</a:t>
             </a:r>
             <a:endParaRPr lang="en-US" dirty="0"/>
           </a:p>
@@ -32279,7 +32279,7 @@
       </p:sp>
       <p:pic>
         <p:nvPicPr>
-          <p:cNvPr id="66" name="Object 65" descr="public/generated/icons/cfb3c3da-7b1f-0879-f414-f367da218488.png">    </p:cNvPr>
+          <p:cNvPr id="66" name="Object 65" descr="public/generated/icons/9349854b-eb46-427f-8ef6-687d601c9eda.png">    </p:cNvPr>
           <p:cNvPicPr>
             <a:picLocks noChangeAspect="1"/>
           </p:cNvPicPr>
@@ -32335,7 +32335,7 @@
                 <a:ea typeface="Helvetica" pitchFamily="34" charset="-122"/>
                 <a:cs typeface="Helvetica" pitchFamily="34" charset="-120"/>
               </a:rPr>
-              <a:t>MANAGED NETWORK SECURITY SERVICES</a:t>
+              <a:t>LYVE DATA TRANSFER SERVICES</a:t>
             </a:r>
             <a:endParaRPr lang="en-US" dirty="0"/>
           </a:p>
@@ -32368,7 +32368,7 @@
       </p:sp>
       <p:pic>
         <p:nvPicPr>
-          <p:cNvPr id="69" name="Object 68" descr="public/generated/icons/cf329950-0a3e-11e8-922e-f1366c6e1c83-imi.png">    </p:cNvPr>
+          <p:cNvPr id="69" name="Object 68" descr="public/generated/icons/cf329950-0a3e-11e8-922e-f1366c6e1c83-managedveeam.png">    </p:cNvPr>
           <p:cNvPicPr>
             <a:picLocks noChangeAspect="1"/>
           </p:cNvPicPr>
@@ -32424,7 +32424,7 @@
                 <a:ea typeface="Helvetica" pitchFamily="34" charset="-122"/>
                 <a:cs typeface="Helvetica" pitchFamily="34" charset="-120"/>
               </a:rPr>
-              <a:t>MANAGED VMWARE SERVICES</a:t>
+              <a:t>MANAGED BACKUP SERVICES</a:t>
             </a:r>
             <a:endParaRPr lang="en-US" dirty="0"/>
           </a:p>
@@ -32457,7 +32457,7 @@
       </p:sp>
       <p:pic>
         <p:nvPicPr>
-          <p:cNvPr id="72" name="Object 71" descr="public/generated/icons/14bd30e0-8921-11e9-a2c5-13fceaf553c0.png">    </p:cNvPr>
+          <p:cNvPr id="72" name="Object 71" descr="public/generated/icons/cf329950-0a3e-11e8-922e-f1366c6e1c83-managedzerto.png">    </p:cNvPr>
           <p:cNvPicPr>
             <a:picLocks noChangeAspect="1"/>
           </p:cNvPicPr>
@@ -32513,7 +32513,7 @@
                 <a:ea typeface="Helvetica" pitchFamily="34" charset="-122"/>
                 <a:cs typeface="Helvetica" pitchFamily="34" charset="-120"/>
               </a:rPr>
-              <a:t>MATCH 360 WITH WATSON</a:t>
+              <a:t>MANAGED DISASTER RECOVERY SERVICES</a:t>
             </a:r>
             <a:endParaRPr lang="en-US" dirty="0"/>
           </a:p>
@@ -32546,7 +32546,7 @@
       </p:sp>
       <p:pic>
         <p:nvPicPr>
-          <p:cNvPr id="75" name="Object 74" descr="public/generated/icons/messages-for-rabbitmq.png">    </p:cNvPr>
+          <p:cNvPr id="75" name="Object 74" descr="public/generated/icons/cfb3c3da-7b1f-0879-f414-f367da218488.png">    </p:cNvPr>
           <p:cNvPicPr>
             <a:picLocks noChangeAspect="1"/>
           </p:cNvPicPr>
@@ -32602,7 +32602,7 @@
                 <a:ea typeface="Helvetica" pitchFamily="34" charset="-122"/>
                 <a:cs typeface="Helvetica" pitchFamily="34" charset="-120"/>
               </a:rPr>
-              <a:t>MESSAGES FOR RABBITMQ</a:t>
+              <a:t>MANAGED NETWORK SECURITY SERVICES</a:t>
             </a:r>
             <a:endParaRPr lang="en-US" dirty="0"/>
           </a:p>
@@ -32635,7 +32635,7 @@
       </p:sp>
       <p:pic>
         <p:nvPicPr>
-          <p:cNvPr id="78" name="Object 77" descr="public/generated/icons/d4000551-49ff-4868-9e05-f863e60fad3a.png">    </p:cNvPr>
+          <p:cNvPr id="78" name="Object 77" descr="public/generated/icons/cf329950-0a3e-11e8-922e-f1366c6e1c83-imi.png">    </p:cNvPr>
           <p:cNvPicPr>
             <a:picLocks noChangeAspect="1"/>
           </p:cNvPicPr>
@@ -32691,7 +32691,7 @@
                 <a:ea typeface="Helvetica" pitchFamily="34" charset="-122"/>
                 <a:cs typeface="Helvetica" pitchFamily="34" charset="-120"/>
               </a:rPr>
-              <a:t>MINIO</a:t>
+              <a:t>MANAGED VMWARE SERVICES</a:t>
             </a:r>
             <a:endParaRPr lang="en-US" dirty="0"/>
           </a:p>
@@ -32724,7 +32724,7 @@
       </p:sp>
       <p:pic>
         <p:nvPicPr>
-          <p:cNvPr id="81" name="Object 80" descr="public/generated/icons/9d9545b4-b866-4c1b-9fc0-39273aef5bb0.png">    </p:cNvPr>
+          <p:cNvPr id="81" name="Object 80" descr="public/generated/icons/14bd30e0-8921-11e9-a2c5-13fceaf553c0.png">    </p:cNvPr>
           <p:cNvPicPr>
             <a:picLocks noChangeAspect="1"/>
           </p:cNvPicPr>
@@ -32780,7 +32780,7 @@
                 <a:ea typeface="Helvetica" pitchFamily="34" charset="-122"/>
                 <a:cs typeface="Helvetica" pitchFamily="34" charset="-120"/>
               </a:rPr>
-              <a:t>MONO-X ONE FOR POWERVS</a:t>
+              <a:t>MATCH 360 WITH WATSON</a:t>
             </a:r>
             <a:endParaRPr lang="en-US" dirty="0"/>
           </a:p>
@@ -32813,7 +32813,7 @@
       </p:sp>
       <p:pic>
         <p:nvPicPr>
-          <p:cNvPr id="84" name="Object 83" descr="public/generated/icons/01037c41-adce-4bb5-8b45-0c06004916c4.png">    </p:cNvPr>
+          <p:cNvPr id="84" name="Object 83" descr="public/generated/icons/messages-for-rabbitmq.png">    </p:cNvPr>
           <p:cNvPicPr>
             <a:picLocks noChangeAspect="1"/>
           </p:cNvPicPr>
@@ -32869,7 +32869,7 @@
                 <a:ea typeface="Helvetica" pitchFamily="34" charset="-122"/>
                 <a:cs typeface="Helvetica" pitchFamily="34" charset="-120"/>
               </a:rPr>
-              <a:t>MQ</a:t>
+              <a:t>MESSAGES FOR RABBITMQ</a:t>
             </a:r>
             <a:endParaRPr lang="en-US" dirty="0"/>
           </a:p>
@@ -32902,7 +32902,7 @@
       </p:sp>
       <p:pic>
         <p:nvPicPr>
-          <p:cNvPr id="87" name="Object 86" descr="public/generated/icons/is.snapshot-consistency-group.png">    </p:cNvPr>
+          <p:cNvPr id="87" name="Object 86" descr="public/generated/icons/d4000551-49ff-4868-9e05-f863e60fad3a.png">    </p:cNvPr>
           <p:cNvPicPr>
             <a:picLocks noChangeAspect="1"/>
           </p:cNvPicPr>
@@ -32958,7 +32958,7 @@
                 <a:ea typeface="Helvetica" pitchFamily="34" charset="-122"/>
                 <a:cs typeface="Helvetica" pitchFamily="34" charset="-120"/>
               </a:rPr>
-              <a:t>MULTI VOLUME SNAPSHOTS FOR VPC</a:t>
+              <a:t>MINIO</a:t>
             </a:r>
             <a:endParaRPr lang="en-US" dirty="0"/>
           </a:p>
@@ -32991,7 +32991,7 @@
       </p:sp>
       <p:pic>
         <p:nvPicPr>
-          <p:cNvPr id="90" name="Object 89" descr="public/generated/icons/bb6393bc-7d81-446b-9728-61b704f6eca5.png">    </p:cNvPr>
+          <p:cNvPr id="90" name="Object 89" descr="public/generated/icons/9d9545b4-b866-4c1b-9fc0-39273aef5bb0.png">    </p:cNvPr>
           <p:cNvPicPr>
             <a:picLocks noChangeAspect="1"/>
           </p:cNvPicPr>
@@ -33047,7 +33047,7 @@
                 <a:ea typeface="Helvetica" pitchFamily="34" charset="-122"/>
                 <a:cs typeface="Helvetica" pitchFamily="34" charset="-120"/>
               </a:rPr>
-              <a:t>NATURAL LANGUAGE UNDERSTANDING</a:t>
+              <a:t>MONO-X ONE FOR POWERVS</a:t>
             </a:r>
             <a:endParaRPr lang="en-US" dirty="0"/>
           </a:p>
@@ -33080,7 +33080,7 @@
       </p:sp>
       <p:pic>
         <p:nvPicPr>
-          <p:cNvPr id="93" name="Object 92" descr="public/generated/icons/cf329950-0a3e-11e8-922e-f1366c6e1c83-netapp.png">    </p:cNvPr>
+          <p:cNvPr id="93" name="Object 92" descr="public/generated/icons/01037c41-adce-4bb5-8b45-0c06004916c4.png">    </p:cNvPr>
           <p:cNvPicPr>
             <a:picLocks noChangeAspect="1"/>
           </p:cNvPicPr>
@@ -33136,7 +33136,7 @@
                 <a:ea typeface="Helvetica" pitchFamily="34" charset="-122"/>
                 <a:cs typeface="Helvetica" pitchFamily="34" charset="-120"/>
               </a:rPr>
-              <a:t>NETAPP ONTAP SELECT</a:t>
+              <a:t>MQ</a:t>
             </a:r>
             <a:endParaRPr lang="en-US" dirty="0"/>
           </a:p>
@@ -33169,7 +33169,7 @@
       </p:sp>
       <p:pic>
         <p:nvPicPr>
-          <p:cNvPr id="96" name="Object 95" descr="public/generated/icons/cc42cff0-b19b-11eb-9a66-c717766c1d30.png">    </p:cNvPr>
+          <p:cNvPr id="96" name="Object 95" descr="public/generated/icons/is.snapshot-consistency-group.png">    </p:cNvPr>
           <p:cNvPicPr>
             <a:picLocks noChangeAspect="1"/>
           </p:cNvPicPr>
@@ -33225,7 +33225,7 @@
                 <a:ea typeface="Helvetica" pitchFamily="34" charset="-122"/>
                 <a:cs typeface="Helvetica" pitchFamily="34" charset="-120"/>
               </a:rPr>
-              <a:t>NETEZZA PERFORMANCE SERVER</a:t>
+              <a:t>MULTI VOLUME SNAPSHOTS FOR VPC</a:t>
             </a:r>
             <a:endParaRPr lang="en-US" dirty="0"/>
           </a:p>
@@ -33258,7 +33258,7 @@
       </p:sp>
       <p:pic>
         <p:nvPicPr>
-          <p:cNvPr id="99" name="Object 98" descr="public/generated/icons/is.network-acl.png">    </p:cNvPr>
+          <p:cNvPr id="99" name="Object 98" descr="public/generated/icons/bb6393bc-7d81-446b-9728-61b704f6eca5.png">    </p:cNvPr>
           <p:cNvPicPr>
             <a:picLocks noChangeAspect="1"/>
           </p:cNvPicPr>
@@ -33314,7 +33314,7 @@
                 <a:ea typeface="Helvetica" pitchFamily="34" charset="-122"/>
                 <a:cs typeface="Helvetica" pitchFamily="34" charset="-120"/>
               </a:rPr>
-              <a:t>NETWORK ACL</a:t>
+              <a:t>NATURAL LANGUAGE UNDERSTANDING</a:t>
             </a:r>
             <a:endParaRPr lang="en-US" dirty="0"/>
           </a:p>
@@ -33347,7 +33347,7 @@
       </p:sp>
       <p:pic>
         <p:nvPicPr>
-          <p:cNvPr id="102" name="Object 101" descr="public/generated/icons/d97bd0c3-a8e5-4f3d-b925-16380e039a9a.png">    </p:cNvPr>
+          <p:cNvPr id="102" name="Object 101" descr="public/generated/icons/cf329950-0a3e-11e8-922e-f1366c6e1c83-netapp.png">    </p:cNvPr>
           <p:cNvPicPr>
             <a:picLocks noChangeAspect="1"/>
           </p:cNvPicPr>
@@ -33403,7 +33403,7 @@
                 <a:ea typeface="Helvetica" pitchFamily="34" charset="-122"/>
                 <a:cs typeface="Helvetica" pitchFamily="34" charset="-120"/>
               </a:rPr>
-              <a:t>NEURALSEEK</a:t>
+              <a:t>NETAPP ONTAP SELECT</a:t>
             </a:r>
             <a:endParaRPr lang="en-US" dirty="0"/>
           </a:p>
@@ -33436,7 +33436,7 @@
       </p:sp>
       <p:pic>
         <p:nvPicPr>
-          <p:cNvPr id="105" name="Object 104" descr="public/generated/icons/466091c0-9b8d-11eb-8f8c-91e95378d441.png">    </p:cNvPr>
+          <p:cNvPr id="105" name="Object 104" descr="public/generated/icons/cc42cff0-b19b-11eb-9a66-c717766c1d30.png">    </p:cNvPr>
           <p:cNvPicPr>
             <a:picLocks noChangeAspect="1"/>
           </p:cNvPicPr>
@@ -33492,7 +33492,7 @@
                 <a:ea typeface="Helvetica" pitchFamily="34" charset="-122"/>
                 <a:cs typeface="Helvetica" pitchFamily="34" charset="-120"/>
               </a:rPr>
-              <a:t>OPENPAGES</a:t>
+              <a:t>NETEZZA PERFORMANCE SERVER</a:t>
             </a:r>
             <a:endParaRPr lang="en-US" dirty="0"/>
           </a:p>
@@ -33525,7 +33525,7 @@
       </p:sp>
       <p:pic>
         <p:nvPicPr>
-          <p:cNvPr id="108" name="Object 107" descr="public/generated/icons/2f756420-434f-11e8-ae40-6bdd72502abc.png">    </p:cNvPr>
+          <p:cNvPr id="108" name="Object 107" descr="public/generated/icons/is.network-acl.png">    </p:cNvPr>
           <p:cNvPicPr>
             <a:picLocks noChangeAspect="1"/>
           </p:cNvPicPr>
@@ -33581,7 +33581,7 @@
                 <a:ea typeface="Helvetica" pitchFamily="34" charset="-122"/>
                 <a:cs typeface="Helvetica" pitchFamily="34" charset="-120"/>
               </a:rPr>
-              <a:t>PARTNER WITH TECHNOLOGY EXPERT LABS</a:t>
+              <a:t>NETWORK ACL</a:t>
             </a:r>
             <a:endParaRPr lang="en-US" dirty="0"/>
           </a:p>
@@ -33647,7 +33647,7 @@
       </p:sp>
       <p:pic>
         <p:nvPicPr>
-          <p:cNvPr id="3" name="Object 2" descr="public/generated/icons/bb6229f0-e632-11ee-ae26-5d6d9ba99eec.png">    </p:cNvPr>
+          <p:cNvPr id="3" name="Object 2" descr="public/generated/icons/d97bd0c3-a8e5-4f3d-b925-16380e039a9a.png">    </p:cNvPr>
           <p:cNvPicPr>
             <a:picLocks noChangeAspect="1"/>
           </p:cNvPicPr>
@@ -33703,7 +33703,7 @@
                 <a:ea typeface="Helvetica" pitchFamily="34" charset="-122"/>
                 <a:cs typeface="Helvetica" pitchFamily="34" charset="-120"/>
               </a:rPr>
-              <a:t>PARTNER WITH TECHNOLOGY EXPERT LABS - BUILD IBM STORAGE PROTECT FOR POWERVS</a:t>
+              <a:t>NEURALSEEK</a:t>
             </a:r>
             <a:endParaRPr lang="en-US" dirty="0"/>
           </a:p>
@@ -33736,7 +33736,7 @@
       </p:sp>
       <p:pic>
         <p:nvPicPr>
-          <p:cNvPr id="6" name="Object 5" descr="public/generated/icons/f0ea1510-e632-11ee-acb6-4d13e7035de5.png">    </p:cNvPr>
+          <p:cNvPr id="6" name="Object 5" descr="public/generated/icons/466091c0-9b8d-11eb-8f8c-91e95378d441.png">    </p:cNvPr>
           <p:cNvPicPr>
             <a:picLocks noChangeAspect="1"/>
           </p:cNvPicPr>
@@ -33792,7 +33792,7 @@
                 <a:ea typeface="Helvetica" pitchFamily="34" charset="-122"/>
                 <a:cs typeface="Helvetica" pitchFamily="34" charset="-120"/>
               </a:rPr>
-              <a:t>PARTNER WITH TECHNOLOGY EXPERT LABS - BUILD SAP HANA STARTER EDITION</a:t>
+              <a:t>OPENPAGES</a:t>
             </a:r>
             <a:endParaRPr lang="en-US" dirty="0"/>
           </a:p>
@@ -33825,7 +33825,7 @@
       </p:sp>
       <p:pic>
         <p:nvPicPr>
-          <p:cNvPr id="9" name="Object 8" descr="public/generated/icons/339a87f0-e633-11ee-acb6-4d13e7035de5.png">    </p:cNvPr>
+          <p:cNvPr id="9" name="Object 8" descr="public/generated/icons/2f756420-434f-11e8-ae40-6bdd72502abc.png">    </p:cNvPr>
           <p:cNvPicPr>
             <a:picLocks noChangeAspect="1"/>
           </p:cNvPicPr>
@@ -33881,7 +33881,7 @@
                 <a:ea typeface="Helvetica" pitchFamily="34" charset="-122"/>
                 <a:cs typeface="Helvetica" pitchFamily="34" charset="-120"/>
               </a:rPr>
-              <a:t>PARTNER WITH TECHNOLOGY EXPERT LABS - MIGRATE WORKLOADS TO IBM POWER VIRTUAL SERVER</a:t>
+              <a:t>PARTNER WITH TECHNOLOGY EXPERT LABS</a:t>
             </a:r>
             <a:endParaRPr lang="en-US" dirty="0"/>
           </a:p>
@@ -33914,7 +33914,7 @@
       </p:sp>
       <p:pic>
         <p:nvPicPr>
-          <p:cNvPr id="12" name="Object 11" descr="public/generated/icons/is.placement-group.png">    </p:cNvPr>
+          <p:cNvPr id="12" name="Object 11" descr="public/generated/icons/bb6229f0-e632-11ee-ae26-5d6d9ba99eec.png">    </p:cNvPr>
           <p:cNvPicPr>
             <a:picLocks noChangeAspect="1"/>
           </p:cNvPicPr>
@@ -33970,7 +33970,7 @@
                 <a:ea typeface="Helvetica" pitchFamily="34" charset="-122"/>
                 <a:cs typeface="Helvetica" pitchFamily="34" charset="-120"/>
               </a:rPr>
-              <a:t>PLACEMENT GROUPS FOR VPC</a:t>
+              <a:t>PARTNER WITH TECHNOLOGY EXPERT LABS - BUILD IBM STORAGE PROTECT FOR POWERVS</a:t>
             </a:r>
             <a:endParaRPr lang="en-US" dirty="0"/>
           </a:p>
@@ -34003,7 +34003,7 @@
       </p:sp>
       <p:pic>
         <p:nvPicPr>
-          <p:cNvPr id="15" name="Object 14" descr="public/generated/icons/41690130-a4e8-11ea-94c3-d72a57643c7d.png">    </p:cNvPr>
+          <p:cNvPr id="15" name="Object 14" descr="public/generated/icons/f0ea1510-e632-11ee-acb6-4d13e7035de5.png">    </p:cNvPr>
           <p:cNvPicPr>
             <a:picLocks noChangeAspect="1"/>
           </p:cNvPicPr>
@@ -34059,7 +34059,7 @@
                 <a:ea typeface="Helvetica" pitchFamily="34" charset="-122"/>
                 <a:cs typeface="Helvetica" pitchFamily="34" charset="-120"/>
               </a:rPr>
-              <a:t>PLANNING ANALYTICS</a:t>
+              <a:t>PARTNER WITH TECHNOLOGY EXPERT LABS - BUILD SAP HANA STARTER EDITION</a:t>
             </a:r>
             <a:endParaRPr lang="en-US" dirty="0"/>
           </a:p>
@@ -34092,7 +34092,7 @@
       </p:sp>
       <p:pic>
         <p:nvPicPr>
-          <p:cNvPr id="18" name="Object 17" descr="public/generated/icons/2a001640-21f1-466e-b6f0-d227c353a823.png">    </p:cNvPr>
+          <p:cNvPr id="18" name="Object 17" descr="public/generated/icons/339a87f0-e633-11ee-acb6-4d13e7035de5.png">    </p:cNvPr>
           <p:cNvPicPr>
             <a:picLocks noChangeAspect="1"/>
           </p:cNvPicPr>
@@ -34148,7 +34148,7 @@
                 <a:ea typeface="Helvetica" pitchFamily="34" charset="-122"/>
                 <a:cs typeface="Helvetica" pitchFamily="34" charset="-120"/>
               </a:rPr>
-              <a:t>PORTFOLIO OPTIMIZATION</a:t>
+              <a:t>PARTNER WITH TECHNOLOGY EXPERT LABS - MIGRATE WORKLOADS TO IBM POWER VIRTUAL SERVER</a:t>
             </a:r>
             <a:endParaRPr lang="en-US" dirty="0"/>
           </a:p>
@@ -34181,7 +34181,7 @@
       </p:sp>
       <p:pic>
         <p:nvPicPr>
-          <p:cNvPr id="21" name="Object 20" descr="public/generated/icons/d666f360-66d1-11e9-85ef-a19427301a8c.png">    </p:cNvPr>
+          <p:cNvPr id="21" name="Object 20" descr="public/generated/icons/is.placement-group.png">    </p:cNvPr>
           <p:cNvPicPr>
             <a:picLocks noChangeAspect="1"/>
           </p:cNvPicPr>
@@ -34237,7 +34237,7 @@
                 <a:ea typeface="Helvetica" pitchFamily="34" charset="-122"/>
                 <a:cs typeface="Helvetica" pitchFamily="34" charset="-120"/>
               </a:rPr>
-              <a:t>PORTWORX ENTERPRISE</a:t>
+              <a:t>PLACEMENT GROUPS FOR VPC</a:t>
             </a:r>
             <a:endParaRPr lang="en-US" dirty="0"/>
           </a:p>
@@ -34270,7 +34270,7 @@
       </p:sp>
       <p:pic>
         <p:nvPicPr>
-          <p:cNvPr id="24" name="Object 23" descr="public/generated/icons/7b2cdb0e-ad91-4fd7-97c0-5398874ec27b.png">    </p:cNvPr>
+          <p:cNvPr id="24" name="Object 23" descr="public/generated/icons/41690130-a4e8-11ea-94c3-d72a57643c7d.png">    </p:cNvPr>
           <p:cNvPicPr>
             <a:picLocks noChangeAspect="1"/>
           </p:cNvPicPr>
@@ -34326,7 +34326,7 @@
                 <a:ea typeface="Helvetica" pitchFamily="34" charset="-122"/>
                 <a:cs typeface="Helvetica" pitchFamily="34" charset="-120"/>
               </a:rPr>
-              <a:t>POWER I MIGRATE 23 SERVICES</a:t>
+              <a:t>PLANNING ANALYTICS</a:t>
             </a:r>
             <a:endParaRPr lang="en-US" dirty="0"/>
           </a:p>
@@ -34359,7 +34359,7 @@
       </p:sp>
       <p:pic>
         <p:nvPicPr>
-          <p:cNvPr id="27" name="Object 26" descr="public/generated/icons/9828699d-dda7-4022-839b-c8e1e8b7d9d8.png">    </p:cNvPr>
+          <p:cNvPr id="27" name="Object 26" descr="public/generated/icons/2a001640-21f1-466e-b6f0-d227c353a823.png">    </p:cNvPr>
           <p:cNvPicPr>
             <a:picLocks noChangeAspect="1"/>
           </p:cNvPicPr>
@@ -34415,7 +34415,7 @@
                 <a:ea typeface="Helvetica" pitchFamily="34" charset="-122"/>
                 <a:cs typeface="Helvetica" pitchFamily="34" charset="-120"/>
               </a:rPr>
-              <a:t>POWER I MIGRATE WHILE ACTIVE SERVICES</a:t>
+              <a:t>PORTFOLIO OPTIMIZATION</a:t>
             </a:r>
             <a:endParaRPr lang="en-US" dirty="0"/>
           </a:p>
@@ -34448,7 +34448,7 @@
       </p:sp>
       <p:pic>
         <p:nvPicPr>
-          <p:cNvPr id="30" name="Object 29" descr="public/generated/icons/power-iaas.network.png">    </p:cNvPr>
+          <p:cNvPr id="30" name="Object 29" descr="public/generated/icons/d666f360-66d1-11e9-85ef-a19427301a8c.png">    </p:cNvPr>
           <p:cNvPicPr>
             <a:picLocks noChangeAspect="1"/>
           </p:cNvPicPr>
@@ -34504,7 +34504,7 @@
                 <a:ea typeface="Helvetica" pitchFamily="34" charset="-122"/>
                 <a:cs typeface="Helvetica" pitchFamily="34" charset="-120"/>
               </a:rPr>
-              <a:t>POWER VIRTUAL SERVER NETWORK</a:t>
+              <a:t>PORTWORX ENTERPRISE</a:t>
             </a:r>
             <a:endParaRPr lang="en-US" dirty="0"/>
           </a:p>
@@ -34537,7 +34537,7 @@
       </p:sp>
       <p:pic>
         <p:nvPicPr>
-          <p:cNvPr id="33" name="Object 32" descr="public/generated/icons/power-iaas.shared-processor-pool.png">    </p:cNvPr>
+          <p:cNvPr id="33" name="Object 32" descr="public/generated/icons/7b2cdb0e-ad91-4fd7-97c0-5398874ec27b.png">    </p:cNvPr>
           <p:cNvPicPr>
             <a:picLocks noChangeAspect="1"/>
           </p:cNvPicPr>
@@ -34593,7 +34593,7 @@
                 <a:ea typeface="Helvetica" pitchFamily="34" charset="-122"/>
                 <a:cs typeface="Helvetica" pitchFamily="34" charset="-120"/>
               </a:rPr>
-              <a:t>POWER VIRTUAL SERVER SHARED PROCESSOR POOL</a:t>
+              <a:t>POWER I MIGRATE 23 SERVICES</a:t>
             </a:r>
             <a:endParaRPr lang="en-US" dirty="0"/>
           </a:p>
@@ -34626,7 +34626,7 @@
       </p:sp>
       <p:pic>
         <p:nvPicPr>
-          <p:cNvPr id="36" name="Object 35" descr="public/generated/icons/power-iaas.snapshot.png">    </p:cNvPr>
+          <p:cNvPr id="36" name="Object 35" descr="public/generated/icons/9828699d-dda7-4022-839b-c8e1e8b7d9d8.png">    </p:cNvPr>
           <p:cNvPicPr>
             <a:picLocks noChangeAspect="1"/>
           </p:cNvPicPr>
@@ -34682,7 +34682,7 @@
                 <a:ea typeface="Helvetica" pitchFamily="34" charset="-122"/>
                 <a:cs typeface="Helvetica" pitchFamily="34" charset="-120"/>
               </a:rPr>
-              <a:t>POWER VIRTUAL SERVER SNAPSHOT</a:t>
+              <a:t>POWER I MIGRATE WHILE ACTIVE SERVICES</a:t>
             </a:r>
             <a:endParaRPr lang="en-US" dirty="0"/>
           </a:p>
@@ -34715,7 +34715,7 @@
       </p:sp>
       <p:pic>
         <p:nvPicPr>
-          <p:cNvPr id="39" name="Object 38" descr="public/generated/icons/power-iaas.pvm-instance.png">    </p:cNvPr>
+          <p:cNvPr id="39" name="Object 38" descr="public/generated/icons/power-iaas.network.png">    </p:cNvPr>
           <p:cNvPicPr>
             <a:picLocks noChangeAspect="1"/>
           </p:cNvPicPr>
@@ -34771,7 +34771,7 @@
                 <a:ea typeface="Helvetica" pitchFamily="34" charset="-122"/>
                 <a:cs typeface="Helvetica" pitchFamily="34" charset="-120"/>
               </a:rPr>
-              <a:t>POWER VIRTUAL SERVER VIRTUAL MACHINE</a:t>
+              <a:t>POWER VIRTUAL SERVER NETWORK</a:t>
             </a:r>
             <a:endParaRPr lang="en-US" dirty="0"/>
           </a:p>
@@ -34804,7 +34804,7 @@
       </p:sp>
       <p:pic>
         <p:nvPicPr>
-          <p:cNvPr id="42" name="Object 41" descr="public/generated/icons/power-iaas.volume.png">    </p:cNvPr>
+          <p:cNvPr id="42" name="Object 41" descr="public/generated/icons/power-iaas.shared-processor-pool.png">    </p:cNvPr>
           <p:cNvPicPr>
             <a:picLocks noChangeAspect="1"/>
           </p:cNvPicPr>
@@ -34860,7 +34860,7 @@
                 <a:ea typeface="Helvetica" pitchFamily="34" charset="-122"/>
                 <a:cs typeface="Helvetica" pitchFamily="34" charset="-120"/>
               </a:rPr>
-              <a:t>POWER VIRTUAL SERVER VOLUME</a:t>
+              <a:t>POWER VIRTUAL SERVER SHARED PROCESSOR POOL</a:t>
             </a:r>
             <a:endParaRPr lang="en-US" dirty="0"/>
           </a:p>
@@ -34893,7 +34893,7 @@
       </p:sp>
       <p:pic>
         <p:nvPicPr>
-          <p:cNvPr id="45" name="Object 44" descr="public/generated/icons/b260dfd6-9b79-4377-be6d-146a5cb59be8.png">    </p:cNvPr>
+          <p:cNvPr id="45" name="Object 44" descr="public/generated/icons/power-iaas.snapshot.png">    </p:cNvPr>
           <p:cNvPicPr>
             <a:picLocks noChangeAspect="1"/>
           </p:cNvPicPr>
@@ -34949,7 +34949,7 @@
                 <a:ea typeface="Helvetica" pitchFamily="34" charset="-122"/>
                 <a:cs typeface="Helvetica" pitchFamily="34" charset="-120"/>
               </a:rPr>
-              <a:t>POWERVS MIGRATION AS A SERVICE</a:t>
+              <a:t>POWER VIRTUAL SERVER SNAPSHOT</a:t>
             </a:r>
             <a:endParaRPr lang="en-US" dirty="0"/>
           </a:p>
@@ -34982,7 +34982,7 @@
       </p:sp>
       <p:pic>
         <p:nvPicPr>
-          <p:cNvPr id="48" name="Object 47" descr="public/generated/icons/C43B3EB0-F56B-4753-92E4-093815814C1E.png">    </p:cNvPr>
+          <p:cNvPr id="48" name="Object 47" descr="public/generated/icons/power-iaas.pvm-instance.png">    </p:cNvPr>
           <p:cNvPicPr>
             <a:picLocks noChangeAspect="1"/>
           </p:cNvPicPr>
@@ -35038,7 +35038,7 @@
                 <a:ea typeface="Helvetica" pitchFamily="34" charset="-122"/>
                 <a:cs typeface="Helvetica" pitchFamily="34" charset="-120"/>
               </a:rPr>
-              <a:t>PREDICTIVE MARKET SCENARIOS</a:t>
+              <a:t>POWER VIRTUAL SERVER VIRTUAL MACHINE</a:t>
             </a:r>
             <a:endParaRPr lang="en-US" dirty="0"/>
           </a:p>
@@ -35071,7 +35071,7 @@
       </p:sp>
       <p:pic>
         <p:nvPicPr>
-          <p:cNvPr id="51" name="Object 50" descr="public/generated/icons/is.private-path-service-gateway.png">    </p:cNvPr>
+          <p:cNvPr id="51" name="Object 50" descr="public/generated/icons/power-iaas.volume.png">    </p:cNvPr>
           <p:cNvPicPr>
             <a:picLocks noChangeAspect="1"/>
           </p:cNvPicPr>
@@ -35127,7 +35127,7 @@
                 <a:ea typeface="Helvetica" pitchFamily="34" charset="-122"/>
                 <a:cs typeface="Helvetica" pitchFamily="34" charset="-120"/>
               </a:rPr>
-              <a:t>PRIVATE PATH SERVICE FOR VPC</a:t>
+              <a:t>POWER VIRTUAL SERVER VOLUME</a:t>
             </a:r>
             <a:endParaRPr lang="en-US" dirty="0"/>
           </a:p>
@@ -35160,7 +35160,7 @@
       </p:sp>
       <p:pic>
         <p:nvPicPr>
-          <p:cNvPr id="54" name="Object 53" descr="public/generated/icons/91a901ac-fb7d-9b6e-eb25-14e75a20c4c2.png">    </p:cNvPr>
+          <p:cNvPr id="54" name="Object 53" descr="public/generated/icons/b260dfd6-9b79-4377-be6d-146a5cb59be8.png">    </p:cNvPr>
           <p:cNvPicPr>
             <a:picLocks noChangeAspect="1"/>
           </p:cNvPicPr>
@@ -35216,7 +35216,7 @@
                 <a:ea typeface="Helvetica" pitchFamily="34" charset="-122"/>
                 <a:cs typeface="Helvetica" pitchFamily="34" charset="-120"/>
               </a:rPr>
-              <a:t>PROFESSIONAL SERVICES FOR GOVERNMENT(ONLY AVAILABLE IN US)</a:t>
+              <a:t>POWERVS MIGRATION AS A SERVICE</a:t>
             </a:r>
             <a:endParaRPr lang="en-US" dirty="0"/>
           </a:p>
@@ -35249,7 +35249,7 @@
       </p:sp>
       <p:pic>
         <p:nvPicPr>
-          <p:cNvPr id="57" name="Object 56" descr="public/generated/icons/7c03a06c-f1bb-46f8-84d8-9378432b2804.png">    </p:cNvPr>
+          <p:cNvPr id="57" name="Object 56" descr="public/generated/icons/C43B3EB0-F56B-4753-92E4-093815814C1E.png">    </p:cNvPr>
           <p:cNvPicPr>
             <a:picLocks noChangeAspect="1"/>
           </p:cNvPicPr>
@@ -35305,7 +35305,7 @@
                 <a:ea typeface="Helvetica" pitchFamily="34" charset="-122"/>
                 <a:cs typeface="Helvetica" pitchFamily="34" charset="-120"/>
               </a:rPr>
-              <a:t>PROTECTIO DRAAS MANAGED SERVICE</a:t>
+              <a:t>PREDICTIVE MARKET SCENARIOS</a:t>
             </a:r>
             <a:endParaRPr lang="en-US" dirty="0"/>
           </a:p>
@@ -35338,7 +35338,7 @@
       </p:sp>
       <p:pic>
         <p:nvPicPr>
-          <p:cNvPr id="60" name="Object 59" descr="public/generated/icons/is.public-gateway.png">    </p:cNvPr>
+          <p:cNvPr id="60" name="Object 59" descr="public/generated/icons/is.private-path-service-gateway.png">    </p:cNvPr>
           <p:cNvPicPr>
             <a:picLocks noChangeAspect="1"/>
           </p:cNvPicPr>
@@ -35394,7 +35394,7 @@
                 <a:ea typeface="Helvetica" pitchFamily="34" charset="-122"/>
                 <a:cs typeface="Helvetica" pitchFamily="34" charset="-120"/>
               </a:rPr>
-              <a:t>PUBLIC GATEWAY</a:t>
+              <a:t>PRIVATE PATH SERVICE FOR VPC</a:t>
             </a:r>
             <a:endParaRPr lang="en-US" dirty="0"/>
           </a:p>
@@ -35427,7 +35427,7 @@
       </p:sp>
       <p:pic>
         <p:nvPicPr>
-          <p:cNvPr id="63" name="Object 62" descr="public/generated/icons/aa11a8b2-381e-4c1c-a232-2148f65c005f.png">    </p:cNvPr>
+          <p:cNvPr id="63" name="Object 62" descr="public/generated/icons/91a901ac-fb7d-9b6e-eb25-14e75a20c4c2.png">    </p:cNvPr>
           <p:cNvPicPr>
             <a:picLocks noChangeAspect="1"/>
           </p:cNvPicPr>
@@ -35483,7 +35483,7 @@
                 <a:ea typeface="Helvetica" pitchFamily="34" charset="-122"/>
                 <a:cs typeface="Helvetica" pitchFamily="34" charset="-120"/>
               </a:rPr>
-              <a:t>PVS ONE MANAGED SERVICE</a:t>
+              <a:t>PROFESSIONAL SERVICES FOR GOVERNMENT(ONLY AVAILABLE IN US)</a:t>
             </a:r>
             <a:endParaRPr lang="en-US" dirty="0"/>
           </a:p>
@@ -35516,7 +35516,7 @@
       </p:sp>
       <p:pic>
         <p:nvPicPr>
-          <p:cNvPr id="66" name="Object 65" descr="public/generated/icons/3eb2d5a0-24ff-11eb-9437-631d7272fff5.png">    </p:cNvPr>
+          <p:cNvPr id="66" name="Object 65" descr="public/generated/icons/7c03a06c-f1bb-46f8-84d8-9378432b2804.png">    </p:cNvPr>
           <p:cNvPicPr>
             <a:picLocks noChangeAspect="1"/>
           </p:cNvPicPr>
@@ -35572,7 +35572,7 @@
                 <a:ea typeface="Helvetica" pitchFamily="34" charset="-122"/>
                 <a:cs typeface="Helvetica" pitchFamily="34" charset="-120"/>
               </a:rPr>
-              <a:t>PX-BACKUP FOR KUBERNETES</a:t>
+              <a:t>PROTECTIO DRAAS MANAGED SERVICE</a:t>
             </a:r>
             <a:endParaRPr lang="en-US" dirty="0"/>
           </a:p>
@@ -35605,7 +35605,7 @@
       </p:sp>
       <p:pic>
         <p:nvPicPr>
-          <p:cNvPr id="69" name="Object 68" descr="public/generated/icons/b6049020-80f4-11eb-a0f7-e35ec9b4054f.png">    </p:cNvPr>
+          <p:cNvPr id="69" name="Object 68" descr="public/generated/icons/is.public-gateway.png">    </p:cNvPr>
           <p:cNvPicPr>
             <a:picLocks noChangeAspect="1"/>
           </p:cNvPicPr>
@@ -35661,7 +35661,7 @@
                 <a:ea typeface="Helvetica" pitchFamily="34" charset="-122"/>
                 <a:cs typeface="Helvetica" pitchFamily="34" charset="-120"/>
               </a:rPr>
-              <a:t>QISKIT RUNTIME</a:t>
+              <a:t>PUBLIC GATEWAY</a:t>
             </a:r>
             <a:endParaRPr lang="en-US" dirty="0"/>
           </a:p>
@@ -35694,7 +35694,7 @@
       </p:sp>
       <p:pic>
         <p:nvPicPr>
-          <p:cNvPr id="72" name="Object 71" descr="public/generated/icons/cf5f8ac0-98f7-11e9-a40c-5b3c4bf3cc6d.png">    </p:cNvPr>
+          <p:cNvPr id="72" name="Object 71" descr="public/generated/icons/aa11a8b2-381e-4c1c-a232-2148f65c005f.png">    </p:cNvPr>
           <p:cNvPicPr>
             <a:picLocks noChangeAspect="1"/>
           </p:cNvPicPr>
@@ -35750,7 +35750,7 @@
                 <a:ea typeface="Helvetica" pitchFamily="34" charset="-122"/>
                 <a:cs typeface="Helvetica" pitchFamily="34" charset="-120"/>
               </a:rPr>
-              <a:t>RAXAK PROTECT</a:t>
+              <a:t>PVS ONE MANAGED SERVICE</a:t>
             </a:r>
             <a:endParaRPr lang="en-US" dirty="0"/>
           </a:p>
@@ -35783,7 +35783,7 @@
       </p:sp>
       <p:pic>
         <p:nvPicPr>
-          <p:cNvPr id="75" name="Object 74" descr="public/generated/icons/467ab6d8-48dd-485a-adf9-30d5107537a1.png">    </p:cNvPr>
+          <p:cNvPr id="75" name="Object 74" descr="public/generated/icons/3eb2d5a0-24ff-11eb-9437-631d7272fff5.png">    </p:cNvPr>
           <p:cNvPicPr>
             <a:picLocks noChangeAspect="1"/>
           </p:cNvPicPr>
@@ -35839,7 +35839,7 @@
                 <a:ea typeface="Helvetica" pitchFamily="34" charset="-122"/>
                 <a:cs typeface="Helvetica" pitchFamily="34" charset="-120"/>
               </a:rPr>
-              <a:t>REAL-TIME PAYMENTS</a:t>
+              <a:t>PX-BACKUP FOR KUBERNETES</a:t>
             </a:r>
             <a:endParaRPr lang="en-US" dirty="0"/>
           </a:p>
@@ -35872,7 +35872,7 @@
       </p:sp>
       <p:pic>
         <p:nvPicPr>
-          <p:cNvPr id="78" name="Object 77" descr="public/generated/icons/openshift.png">    </p:cNvPr>
+          <p:cNvPr id="78" name="Object 77" descr="public/generated/icons/b6049020-80f4-11eb-a0f7-e35ec9b4054f.png">    </p:cNvPr>
           <p:cNvPicPr>
             <a:picLocks noChangeAspect="1"/>
           </p:cNvPicPr>
@@ -35928,7 +35928,7 @@
                 <a:ea typeface="Helvetica" pitchFamily="34" charset="-122"/>
                 <a:cs typeface="Helvetica" pitchFamily="34" charset="-120"/>
               </a:rPr>
-              <a:t>RED HAT OPENSHIFT ON IBM CLOUD</a:t>
+              <a:t>QISKIT RUNTIME</a:t>
             </a:r>
             <a:endParaRPr lang="en-US" dirty="0"/>
           </a:p>
@@ -35961,7 +35961,7 @@
       </p:sp>
       <p:pic>
         <p:nvPicPr>
-          <p:cNvPr id="81" name="Object 80" descr="public/generated/icons/bd517bf0-88ba-11ea-a52e-91aeb42a4019.png">    </p:cNvPr>
+          <p:cNvPr id="81" name="Object 80" descr="public/generated/icons/cf5f8ac0-98f7-11e9-a40c-5b3c4bf3cc6d.png">    </p:cNvPr>
           <p:cNvPicPr>
             <a:picLocks noChangeAspect="1"/>
           </p:cNvPicPr>
@@ -36017,7 +36017,7 @@
                 <a:ea typeface="Helvetica" pitchFamily="34" charset="-122"/>
                 <a:cs typeface="Helvetica" pitchFamily="34" charset="-120"/>
               </a:rPr>
-              <a:t>SATELLITE</a:t>
+              <a:t>RAXAK PROTECT</a:t>
             </a:r>
             <a:endParaRPr lang="en-US" dirty="0"/>
           </a:p>
@@ -36050,7 +36050,7 @@
       </p:sp>
       <p:pic>
         <p:nvPicPr>
-          <p:cNvPr id="84" name="Object 83" descr="public/generated/icons/schematics.png">    </p:cNvPr>
+          <p:cNvPr id="84" name="Object 83" descr="public/generated/icons/467ab6d8-48dd-485a-adf9-30d5107537a1.png">    </p:cNvPr>
           <p:cNvPicPr>
             <a:picLocks noChangeAspect="1"/>
           </p:cNvPicPr>
@@ -36106,7 +36106,7 @@
                 <a:ea typeface="Helvetica" pitchFamily="34" charset="-122"/>
                 <a:cs typeface="Helvetica" pitchFamily="34" charset="-120"/>
               </a:rPr>
-              <a:t>SCHEMATICS</a:t>
+              <a:t>REAL-TIME PAYMENTS</a:t>
             </a:r>
             <a:endParaRPr lang="en-US" dirty="0"/>
           </a:p>
@@ -36139,7 +36139,7 @@
       </p:sp>
       <p:pic>
         <p:nvPicPr>
-          <p:cNvPr id="87" name="Object 86" descr="public/generated/icons/14.png">    </p:cNvPr>
+          <p:cNvPr id="87" name="Object 86" descr="public/generated/icons/openshift.png">    </p:cNvPr>
           <p:cNvPicPr>
             <a:picLocks noChangeAspect="1"/>
           </p:cNvPicPr>
@@ -36195,7 +36195,7 @@
                 <a:ea typeface="Helvetica" pitchFamily="34" charset="-122"/>
                 <a:cs typeface="Helvetica" pitchFamily="34" charset="-120"/>
               </a:rPr>
-              <a:t>SECONDARY SUBNETS</a:t>
+              <a:t>RED HAT OPENSHIFT ON IBM CLOUD</a:t>
             </a:r>
             <a:endParaRPr lang="en-US" dirty="0"/>
           </a:p>
@@ -36228,7 +36228,7 @@
       </p:sp>
       <p:pic>
         <p:nvPicPr>
-          <p:cNvPr id="90" name="Object 89" descr="public/generated/icons/ebc0cdb0-af2a-11ea-98c7-29e5db822649.png">    </p:cNvPr>
+          <p:cNvPr id="90" name="Object 89" descr="public/generated/icons/bd517bf0-88ba-11ea-a52e-91aeb42a4019.png">    </p:cNvPr>
           <p:cNvPicPr>
             <a:picLocks noChangeAspect="1"/>
           </p:cNvPicPr>
@@ -36284,7 +36284,7 @@
                 <a:ea typeface="Helvetica" pitchFamily="34" charset="-122"/>
                 <a:cs typeface="Helvetica" pitchFamily="34" charset="-120"/>
               </a:rPr>
-              <a:t>SECRETS MANAGER</a:t>
+              <a:t>SATELLITE</a:t>
             </a:r>
             <a:endParaRPr lang="en-US" dirty="0"/>
           </a:p>
@@ -36317,7 +36317,7 @@
       </p:sp>
       <p:pic>
         <p:nvPicPr>
-          <p:cNvPr id="93" name="Object 92" descr="public/generated/icons/IBM_SecureGateway.png">    </p:cNvPr>
+          <p:cNvPr id="93" name="Object 92" descr="public/generated/icons/schematics.png">    </p:cNvPr>
           <p:cNvPicPr>
             <a:picLocks noChangeAspect="1"/>
           </p:cNvPicPr>
@@ -36373,7 +36373,7 @@
                 <a:ea typeface="Helvetica" pitchFamily="34" charset="-122"/>
                 <a:cs typeface="Helvetica" pitchFamily="34" charset="-120"/>
               </a:rPr>
-              <a:t>SECURE GATEWAY</a:t>
+              <a:t>SCHEMATICS</a:t>
             </a:r>
             <a:endParaRPr lang="en-US" dirty="0"/>
           </a:p>
@@ -36406,7 +36406,7 @@
       </p:sp>
       <p:pic>
         <p:nvPicPr>
-          <p:cNvPr id="96" name="Object 95" descr="public/generated/icons/compliance.png">    </p:cNvPr>
+          <p:cNvPr id="96" name="Object 95" descr="public/generated/icons/14.png">    </p:cNvPr>
           <p:cNvPicPr>
             <a:picLocks noChangeAspect="1"/>
           </p:cNvPicPr>
@@ -36462,7 +36462,7 @@
                 <a:ea typeface="Helvetica" pitchFamily="34" charset="-122"/>
                 <a:cs typeface="Helvetica" pitchFamily="34" charset="-120"/>
               </a:rPr>
-              <a:t>SECURITY AND COMPLIANCE CENTER</a:t>
+              <a:t>SECONDARY SUBNETS</a:t>
             </a:r>
             <a:endParaRPr lang="en-US" dirty="0"/>
           </a:p>
@@ -36495,7 +36495,7 @@
       </p:sp>
       <p:pic>
         <p:nvPicPr>
-          <p:cNvPr id="99" name="Object 98" descr="public/generated/icons/e831e900-82d6-11ec-95c5-c12c5a5d9687.png">    </p:cNvPr>
+          <p:cNvPr id="99" name="Object 98" descr="public/generated/icons/ebc0cdb0-af2a-11ea-98c7-29e5db822649.png">    </p:cNvPr>
           <p:cNvPicPr>
             <a:picLocks noChangeAspect="1"/>
           </p:cNvPicPr>
@@ -36551,7 +36551,7 @@
                 <a:ea typeface="Helvetica" pitchFamily="34" charset="-122"/>
                 <a:cs typeface="Helvetica" pitchFamily="34" charset="-120"/>
               </a:rPr>
-              <a:t>SECURITY AND COMPLIANCE CENTER WORKLOAD PROTECTION</a:t>
+              <a:t>SECRETS MANAGER</a:t>
             </a:r>
             <a:endParaRPr lang="en-US" dirty="0"/>
           </a:p>
@@ -36584,7 +36584,7 @@
       </p:sp>
       <p:pic>
         <p:nvPicPr>
-          <p:cNvPr id="102" name="Object 101" descr="public/generated/icons/is.security-group.png">    </p:cNvPr>
+          <p:cNvPr id="102" name="Object 101" descr="public/generated/icons/IBM_SecureGateway.png">    </p:cNvPr>
           <p:cNvPicPr>
             <a:picLocks noChangeAspect="1"/>
           </p:cNvPicPr>
@@ -36640,7 +36640,7 @@
                 <a:ea typeface="Helvetica" pitchFamily="34" charset="-122"/>
                 <a:cs typeface="Helvetica" pitchFamily="34" charset="-120"/>
               </a:rPr>
-              <a:t>SECURITY GROUP FOR VPC</a:t>
+              <a:t>SECURE GATEWAY</a:t>
             </a:r>
             <a:endParaRPr lang="en-US" dirty="0"/>
           </a:p>
@@ -36673,7 +36673,7 @@
       </p:sp>
       <p:pic>
         <p:nvPicPr>
-          <p:cNvPr id="105" name="Object 104" descr="public/generated/icons/ABB08BA3-D14D-4BD9-A5E6-EF67C52D35C0.png">    </p:cNvPr>
+          <p:cNvPr id="105" name="Object 104" descr="public/generated/icons/compliance.png">    </p:cNvPr>
           <p:cNvPicPr>
             <a:picLocks noChangeAspect="1"/>
           </p:cNvPicPr>
@@ -36729,7 +36729,7 @@
                 <a:ea typeface="Helvetica" pitchFamily="34" charset="-122"/>
                 <a:cs typeface="Helvetica" pitchFamily="34" charset="-120"/>
               </a:rPr>
-              <a:t>SIMULATED HISTORICAL INSTRUMENT ANALYTICS</a:t>
+              <a:t>SECURITY AND COMPLIANCE CENTER</a:t>
             </a:r>
             <a:endParaRPr lang="en-US" dirty="0"/>
           </a:p>
@@ -36762,7 +36762,7 @@
       </p:sp>
       <p:pic>
         <p:nvPicPr>
-          <p:cNvPr id="108" name="Object 107" descr="public/generated/icons/A888FFEA-E976-4F83-B7EC-288233BF62E6.png">    </p:cNvPr>
+          <p:cNvPr id="108" name="Object 107" descr="public/generated/icons/e831e900-82d6-11ec-95c5-c12c5a5d9687.png">    </p:cNvPr>
           <p:cNvPicPr>
             <a:picLocks noChangeAspect="1"/>
           </p:cNvPicPr>
@@ -36818,7 +36818,7 @@
                 <a:ea typeface="Helvetica" pitchFamily="34" charset="-122"/>
                 <a:cs typeface="Helvetica" pitchFamily="34" charset="-120"/>
               </a:rPr>
-              <a:t>SIMULATED INSTRUMENT ANALYTICS</a:t>
+              <a:t>SECURITY AND COMPLIANCE CENTER WORKLOAD PROTECTION</a:t>
             </a:r>
             <a:endParaRPr lang="en-US" dirty="0"/>
           </a:p>
@@ -36884,7 +36884,7 @@
       </p:sp>
       <p:pic>
         <p:nvPicPr>
-          <p:cNvPr id="3" name="Object 2" descr="public/generated/icons/cf329950-0a3e-11e8-922e-f1366c6e1c83-vcstrial_dr.png">    </p:cNvPr>
+          <p:cNvPr id="3" name="Object 2" descr="public/generated/icons/is.security-group.png">    </p:cNvPr>
           <p:cNvPicPr>
             <a:picLocks noChangeAspect="1"/>
           </p:cNvPicPr>
@@ -36940,7 +36940,7 @@
                 <a:ea typeface="Helvetica" pitchFamily="34" charset="-122"/>
                 <a:cs typeface="Helvetica" pitchFamily="34" charset="-120"/>
               </a:rPr>
-              <a:t>SINGLE-NODE TRIAL FOR DATA PROTECTION AND DISASTER RECOVERY</a:t>
+              <a:t>SECURITY GROUP FOR VPC</a:t>
             </a:r>
             <a:endParaRPr lang="en-US" dirty="0"/>
           </a:p>
@@ -36973,7 +36973,7 @@
       </p:sp>
       <p:pic>
         <p:nvPicPr>
-          <p:cNvPr id="6" name="Object 5" descr="public/generated/icons/cf329950-0a3e-11e8-922e-f1366c6e1c83-vcstrial.png">    </p:cNvPr>
+          <p:cNvPr id="6" name="Object 5" descr="public/generated/icons/ABB08BA3-D14D-4BD9-A5E6-EF67C52D35C0.png">    </p:cNvPr>
           <p:cNvPicPr>
             <a:picLocks noChangeAspect="1"/>
           </p:cNvPicPr>
@@ -37029,7 +37029,7 @@
                 <a:ea typeface="Helvetica" pitchFamily="34" charset="-122"/>
                 <a:cs typeface="Helvetica" pitchFamily="34" charset="-120"/>
               </a:rPr>
-              <a:t>SINGLE-NODE TRIAL FOR MIGRATION AND APP MODERNIZATION</a:t>
+              <a:t>SIMULATED HISTORICAL INSTRUMENT ANALYTICS</a:t>
             </a:r>
             <a:endParaRPr lang="en-US" dirty="0"/>
           </a:p>
@@ -37062,7 +37062,7 @@
       </p:sp>
       <p:pic>
         <p:nvPicPr>
-          <p:cNvPr id="9" name="Object 8" descr="public/generated/icons/fdf77820-deed-11e9-911d-5f09017358ff.png">    </p:cNvPr>
+          <p:cNvPr id="9" name="Object 8" descr="public/generated/icons/A888FFEA-E976-4F83-B7EC-288233BF62E6.png">    </p:cNvPr>
           <p:cNvPicPr>
             <a:picLocks noChangeAspect="1"/>
           </p:cNvPicPr>
@@ -37118,7 +37118,7 @@
                 <a:ea typeface="Helvetica" pitchFamily="34" charset="-122"/>
                 <a:cs typeface="Helvetica" pitchFamily="34" charset="-120"/>
               </a:rPr>
-              <a:t>SKYTAP ON IBM CLOUD</a:t>
+              <a:t>SIMULATED INSTRUMENT ANALYTICS</a:t>
             </a:r>
             <a:endParaRPr lang="en-US" dirty="0"/>
           </a:p>
@@ -37151,7 +37151,7 @@
       </p:sp>
       <p:pic>
         <p:nvPicPr>
-          <p:cNvPr id="12" name="Object 11" descr="public/generated/icons/cf329950-0a3e-11e8-922e-f1366c6e1c83-spplus.png">    </p:cNvPr>
+          <p:cNvPr id="12" name="Object 11" descr="public/generated/icons/cf329950-0a3e-11e8-922e-f1366c6e1c83-vcstrial_dr.png">    </p:cNvPr>
           <p:cNvPicPr>
             <a:picLocks noChangeAspect="1"/>
           </p:cNvPicPr>
@@ -37207,7 +37207,7 @@
                 <a:ea typeface="Helvetica" pitchFamily="34" charset="-122"/>
                 <a:cs typeface="Helvetica" pitchFamily="34" charset="-120"/>
               </a:rPr>
-              <a:t>SPECTRUM PROTECT PLUS</a:t>
+              <a:t>SINGLE-NODE TRIAL FOR DATA PROTECTION AND DISASTER RECOVERY</a:t>
             </a:r>
             <a:endParaRPr lang="en-US" dirty="0"/>
           </a:p>
@@ -37240,7 +37240,7 @@
       </p:sp>
       <p:pic>
         <p:nvPicPr>
-          <p:cNvPr id="15" name="Object 14" descr="public/generated/icons/bc35fb8c-bc5b-431b-859e-3861771d5843.png">    </p:cNvPr>
+          <p:cNvPr id="15" name="Object 14" descr="public/generated/icons/cf329950-0a3e-11e8-922e-f1366c6e1c83-vcstrial.png">    </p:cNvPr>
           <p:cNvPicPr>
             <a:picLocks noChangeAspect="1"/>
           </p:cNvPicPr>
@@ -37296,7 +37296,7 @@
                 <a:ea typeface="Helvetica" pitchFamily="34" charset="-122"/>
                 <a:cs typeface="Helvetica" pitchFamily="34" charset="-120"/>
               </a:rPr>
-              <a:t>SPEECH TO TEXT</a:t>
+              <a:t>SINGLE-NODE TRIAL FOR MIGRATION AND APP MODERNIZATION</a:t>
             </a:r>
             <a:endParaRPr lang="en-US" dirty="0"/>
           </a:p>
@@ -37329,7 +37329,7 @@
       </p:sp>
       <p:pic>
         <p:nvPicPr>
-          <p:cNvPr id="18" name="Object 17" descr="public/generated/icons/556153d0-5ad0-11e9-b7f9-41319ef22125.png">    </p:cNvPr>
+          <p:cNvPr id="18" name="Object 17" descr="public/generated/icons/fdf77820-deed-11e9-911d-5f09017358ff.png">    </p:cNvPr>
           <p:cNvPicPr>
             <a:picLocks noChangeAspect="1"/>
           </p:cNvPicPr>
@@ -37385,7 +37385,7 @@
                 <a:ea typeface="Helvetica" pitchFamily="34" charset="-122"/>
                 <a:cs typeface="Helvetica" pitchFamily="34" charset="-120"/>
               </a:rPr>
-              <a:t>SSH KEY FOR VPC</a:t>
+              <a:t>SKYTAP ON IBM CLOUD</a:t>
             </a:r>
             <a:endParaRPr lang="en-US" dirty="0"/>
           </a:p>
@@ -37418,7 +37418,7 @@
       </p:sp>
       <p:pic>
         <p:nvPicPr>
-          <p:cNvPr id="21" name="Object 20" descr="public/generated/icons/19.png">    </p:cNvPr>
+          <p:cNvPr id="21" name="Object 20" descr="public/generated/icons/cf329950-0a3e-11e8-922e-f1366c6e1c83-spplus.png">    </p:cNvPr>
           <p:cNvPicPr>
             <a:picLocks noChangeAspect="1"/>
           </p:cNvPicPr>
@@ -37474,7 +37474,7 @@
                 <a:ea typeface="Helvetica" pitchFamily="34" charset="-122"/>
                 <a:cs typeface="Helvetica" pitchFamily="34" charset="-120"/>
               </a:rPr>
-              <a:t>SSL CERTIFICATES</a:t>
+              <a:t>SPECTRUM PROTECT PLUS</a:t>
             </a:r>
             <a:endParaRPr lang="en-US" dirty="0"/>
           </a:p>
@@ -37507,7 +37507,7 @@
       </p:sp>
       <p:pic>
         <p:nvPicPr>
-          <p:cNvPr id="24" name="Object 23" descr="public/generated/icons/5acdbc42-8965-48f9-8a3c-1c728b6ed2c4.png">    </p:cNvPr>
+          <p:cNvPr id="24" name="Object 23" descr="public/generated/icons/bc35fb8c-bc5b-431b-859e-3861771d5843.png">    </p:cNvPr>
           <p:cNvPicPr>
             <a:picLocks noChangeAspect="1"/>
           </p:cNvPicPr>
@@ -37563,7 +37563,7 @@
                 <a:ea typeface="Helvetica" pitchFamily="34" charset="-122"/>
                 <a:cs typeface="Helvetica" pitchFamily="34" charset="-120"/>
               </a:rPr>
-              <a:t>STREAMING ANALYTICS</a:t>
+              <a:t>SPEECH TO TEXT</a:t>
             </a:r>
             <a:endParaRPr lang="en-US" dirty="0"/>
           </a:p>
@@ -37596,7 +37596,7 @@
       </p:sp>
       <p:pic>
         <p:nvPicPr>
-          <p:cNvPr id="27" name="Object 26" descr="public/generated/icons/is.subnet.png">    </p:cNvPr>
+          <p:cNvPr id="27" name="Object 26" descr="public/generated/icons/556153d0-5ad0-11e9-b7f9-41319ef22125.png">    </p:cNvPr>
           <p:cNvPicPr>
             <a:picLocks noChangeAspect="1"/>
           </p:cNvPicPr>
@@ -37652,7 +37652,7 @@
                 <a:ea typeface="Helvetica" pitchFamily="34" charset="-122"/>
                 <a:cs typeface="Helvetica" pitchFamily="34" charset="-120"/>
               </a:rPr>
-              <a:t>SUBNET</a:t>
+              <a:t>SSH KEY FOR VPC</a:t>
             </a:r>
             <a:endParaRPr lang="en-US" dirty="0"/>
           </a:p>
@@ -37685,7 +37685,7 @@
       </p:sp>
       <p:pic>
         <p:nvPicPr>
-          <p:cNvPr id="30" name="Object 29" descr="public/generated/icons/282c1d79-9176-4597-9cff-941a8d6cfd4c.png">    </p:cNvPr>
+          <p:cNvPr id="30" name="Object 29" descr="public/generated/icons/19.png">    </p:cNvPr>
           <p:cNvPicPr>
             <a:picLocks noChangeAspect="1"/>
           </p:cNvPicPr>
@@ -37741,7 +37741,7 @@
                 <a:ea typeface="Helvetica" pitchFamily="34" charset="-122"/>
                 <a:cs typeface="Helvetica" pitchFamily="34" charset="-120"/>
               </a:rPr>
-              <a:t>TEXT TO SPEECH</a:t>
+              <a:t>SSL CERTIFICATES</a:t>
             </a:r>
             <a:endParaRPr lang="en-US" dirty="0"/>
           </a:p>
@@ -37774,7 +37774,7 @@
       </p:sp>
       <p:pic>
         <p:nvPicPr>
-          <p:cNvPr id="33" name="Object 32" descr="public/generated/icons/e512e5f0-64fb-11e8-9c23-830c05b8b729.png">    </p:cNvPr>
+          <p:cNvPr id="33" name="Object 32" descr="public/generated/icons/5acdbc42-8965-48f9-8a3c-1c728b6ed2c4.png">    </p:cNvPr>
           <p:cNvPicPr>
             <a:picLocks noChangeAspect="1"/>
           </p:cNvPicPr>
@@ -37830,7 +37830,7 @@
                 <a:ea typeface="Helvetica" pitchFamily="34" charset="-122"/>
                 <a:cs typeface="Helvetica" pitchFamily="34" charset="-120"/>
               </a:rPr>
-              <a:t>TOOLCHAIN</a:t>
+              <a:t>STREAMING ANALYTICS</a:t>
             </a:r>
             <a:endParaRPr lang="en-US" dirty="0"/>
           </a:p>
@@ -37863,7 +37863,7 @@
       </p:sp>
       <p:pic>
         <p:nvPicPr>
-          <p:cNvPr id="36" name="Object 35" descr="public/generated/icons/f38a4da0-c353-11e9-83b6-a36a57a97a06.png">    </p:cNvPr>
+          <p:cNvPr id="36" name="Object 35" descr="public/generated/icons/is.subnet.png">    </p:cNvPr>
           <p:cNvPicPr>
             <a:picLocks noChangeAspect="1"/>
           </p:cNvPicPr>
@@ -37919,7 +37919,7 @@
                 <a:ea typeface="Helvetica" pitchFamily="34" charset="-122"/>
                 <a:cs typeface="Helvetica" pitchFamily="34" charset="-120"/>
               </a:rPr>
-              <a:t>TRANSIT GATEWAY</a:t>
+              <a:t>SUBNET</a:t>
             </a:r>
             <a:endParaRPr lang="en-US" dirty="0"/>
           </a:p>
@@ -37952,7 +37952,7 @@
       </p:sp>
       <p:pic>
         <p:nvPicPr>
-          <p:cNvPr id="39" name="Object 38" descr="public/generated/icons/vmware.directorsite.png">    </p:cNvPr>
+          <p:cNvPr id="39" name="Object 38" descr="public/generated/icons/282c1d79-9176-4597-9cff-941a8d6cfd4c.png">    </p:cNvPr>
           <p:cNvPicPr>
             <a:picLocks noChangeAspect="1"/>
           </p:cNvPicPr>
@@ -38008,7 +38008,7 @@
                 <a:ea typeface="Helvetica" pitchFamily="34" charset="-122"/>
                 <a:cs typeface="Helvetica" pitchFamily="34" charset="-120"/>
               </a:rPr>
-              <a:t>VCF AS A SERVICE - CLOUD DIRECTOR SITE</a:t>
+              <a:t>TEXT TO SPEECH</a:t>
             </a:r>
             <a:endParaRPr lang="en-US" dirty="0"/>
           </a:p>
@@ -38041,7 +38041,7 @@
       </p:sp>
       <p:pic>
         <p:nvPicPr>
-          <p:cNvPr id="42" name="Object 41" descr="public/generated/icons/vmware.vdc.png">    </p:cNvPr>
+          <p:cNvPr id="42" name="Object 41" descr="public/generated/icons/e512e5f0-64fb-11e8-9c23-830c05b8b729.png">    </p:cNvPr>
           <p:cNvPicPr>
             <a:picLocks noChangeAspect="1"/>
           </p:cNvPicPr>
@@ -38097,7 +38097,7 @@
                 <a:ea typeface="Helvetica" pitchFamily="34" charset="-122"/>
                 <a:cs typeface="Helvetica" pitchFamily="34" charset="-120"/>
               </a:rPr>
-              <a:t>VCF AS A SERVICE - VIRTUAL DATA CENTER</a:t>
+              <a:t>TOOLCHAIN</a:t>
             </a:r>
             <a:endParaRPr lang="en-US" dirty="0"/>
           </a:p>
@@ -38130,7 +38130,7 @@
       </p:sp>
       <p:pic>
         <p:nvPicPr>
-          <p:cNvPr id="45" name="Object 44" descr="public/generated/icons/cf329950-0a3e-11e8-922e-f1366c6e1c83-veeam.png">    </p:cNvPr>
+          <p:cNvPr id="45" name="Object 44" descr="public/generated/icons/f38a4da0-c353-11e9-83b6-a36a57a97a06.png">    </p:cNvPr>
           <p:cNvPicPr>
             <a:picLocks noChangeAspect="1"/>
           </p:cNvPicPr>
@@ -38186,7 +38186,7 @@
                 <a:ea typeface="Helvetica" pitchFamily="34" charset="-122"/>
                 <a:cs typeface="Helvetica" pitchFamily="34" charset="-120"/>
               </a:rPr>
-              <a:t>VEEAM</a:t>
+              <a:t>TRANSIT GATEWAY</a:t>
             </a:r>
             <a:endParaRPr lang="en-US" dirty="0"/>
           </a:p>
@@ -38219,7 +38219,7 @@
       </p:sp>
       <p:pic>
         <p:nvPicPr>
-          <p:cNvPr id="48" name="Object 47" descr="public/generated/icons/66644e80-f35a-11ee-923f-2fe367129617.png">    </p:cNvPr>
+          <p:cNvPr id="48" name="Object 47" descr="public/generated/icons/vmware.directorsite.png">    </p:cNvPr>
           <p:cNvPicPr>
             <a:picLocks noChangeAspect="1"/>
           </p:cNvPicPr>
@@ -38275,7 +38275,7 @@
                 <a:ea typeface="Helvetica" pitchFamily="34" charset="-122"/>
                 <a:cs typeface="Helvetica" pitchFamily="34" charset="-120"/>
               </a:rPr>
-              <a:t>VERIFY</a:t>
+              <a:t>VCF AS A SERVICE - CLOUD DIRECTOR SITE</a:t>
             </a:r>
             <a:endParaRPr lang="en-US" dirty="0"/>
           </a:p>
@@ -38308,7 +38308,7 @@
       </p:sp>
       <p:pic>
         <p:nvPicPr>
-          <p:cNvPr id="51" name="Object 50" descr="public/generated/icons/is.virtual-network-interface.png">    </p:cNvPr>
+          <p:cNvPr id="51" name="Object 50" descr="public/generated/icons/vmware.vdc.png">    </p:cNvPr>
           <p:cNvPicPr>
             <a:picLocks noChangeAspect="1"/>
           </p:cNvPicPr>
@@ -38364,7 +38364,7 @@
                 <a:ea typeface="Helvetica" pitchFamily="34" charset="-122"/>
                 <a:cs typeface="Helvetica" pitchFamily="34" charset="-120"/>
               </a:rPr>
-              <a:t>VIRTUAL NETWORK INTERFACE</a:t>
+              <a:t>VCF AS A SERVICE - VIRTUAL DATA CENTER</a:t>
             </a:r>
             <a:endParaRPr lang="en-US" dirty="0"/>
           </a:p>
@@ -38397,7 +38397,7 @@
       </p:sp>
       <p:pic>
         <p:nvPicPr>
-          <p:cNvPr id="54" name="Object 53" descr="public/generated/icons/is.vpc.png">    </p:cNvPr>
+          <p:cNvPr id="54" name="Object 53" descr="public/generated/icons/cf329950-0a3e-11e8-922e-f1366c6e1c83-veeam.png">    </p:cNvPr>
           <p:cNvPicPr>
             <a:picLocks noChangeAspect="1"/>
           </p:cNvPicPr>
@@ -38453,7 +38453,7 @@
                 <a:ea typeface="Helvetica" pitchFamily="34" charset="-122"/>
                 <a:cs typeface="Helvetica" pitchFamily="34" charset="-120"/>
               </a:rPr>
-              <a:t>VIRTUAL PRIVATE CLOUD</a:t>
+              <a:t>VEEAM</a:t>
             </a:r>
             <a:endParaRPr lang="en-US" dirty="0"/>
           </a:p>
@@ -38486,7 +38486,7 @@
       </p:sp>
       <p:pic>
         <p:nvPicPr>
-          <p:cNvPr id="57" name="Object 56" descr="public/generated/icons/is.endpoint-gateway.png">    </p:cNvPr>
+          <p:cNvPr id="57" name="Object 56" descr="public/generated/icons/66644e80-f35a-11ee-923f-2fe367129617.png">    </p:cNvPr>
           <p:cNvPicPr>
             <a:picLocks noChangeAspect="1"/>
           </p:cNvPicPr>
@@ -38542,7 +38542,7 @@
                 <a:ea typeface="Helvetica" pitchFamily="34" charset="-122"/>
                 <a:cs typeface="Helvetica" pitchFamily="34" charset="-120"/>
               </a:rPr>
-              <a:t>VIRTUAL PRIVATE ENDPOINT FOR VPC</a:t>
+              <a:t>VERIFY</a:t>
             </a:r>
             <a:endParaRPr lang="en-US" dirty="0"/>
           </a:p>
@@ -38575,7 +38575,7 @@
       </p:sp>
       <p:pic>
         <p:nvPicPr>
-          <p:cNvPr id="60" name="Object 59" descr="public/generated/icons/887073fb-ba5b-9407-d2ac-938308d890e4.png">    </p:cNvPr>
+          <p:cNvPr id="60" name="Object 59" descr="public/generated/icons/is.virtual-network-interface.png">    </p:cNvPr>
           <p:cNvPicPr>
             <a:picLocks noChangeAspect="1"/>
           </p:cNvPicPr>
@@ -38631,7 +38631,7 @@
                 <a:ea typeface="Helvetica" pitchFamily="34" charset="-122"/>
                 <a:cs typeface="Helvetica" pitchFamily="34" charset="-120"/>
               </a:rPr>
-              <a:t>VIRTUAL ROUTER APPLIANCE</a:t>
+              <a:t>VIRTUAL NETWORK INTERFACE</a:t>
             </a:r>
             <a:endParaRPr lang="en-US" dirty="0"/>
           </a:p>
@@ -38664,7 +38664,7 @@
       </p:sp>
       <p:pic>
         <p:nvPicPr>
-          <p:cNvPr id="63" name="Object 62" descr="public/generated/icons/virtual-server-group.png">    </p:cNvPr>
+          <p:cNvPr id="63" name="Object 62" descr="public/generated/icons/is.vpc.png">    </p:cNvPr>
           <p:cNvPicPr>
             <a:picLocks noChangeAspect="1"/>
           </p:cNvPicPr>
@@ -38720,7 +38720,7 @@
                 <a:ea typeface="Helvetica" pitchFamily="34" charset="-122"/>
                 <a:cs typeface="Helvetica" pitchFamily="34" charset="-120"/>
               </a:rPr>
-              <a:t>VIRTUAL SERVER FOR CLASSIC</a:t>
+              <a:t>VIRTUAL PRIVATE CLOUD</a:t>
             </a:r>
             <a:endParaRPr lang="en-US" dirty="0"/>
           </a:p>
@@ -38753,7 +38753,7 @@
       </p:sp>
       <p:pic>
         <p:nvPicPr>
-          <p:cNvPr id="66" name="Object 65" descr="public/generated/icons/is.instance.png">    </p:cNvPr>
+          <p:cNvPr id="66" name="Object 65" descr="public/generated/icons/is.endpoint-gateway.png">    </p:cNvPr>
           <p:cNvPicPr>
             <a:picLocks noChangeAspect="1"/>
           </p:cNvPicPr>
@@ -38809,7 +38809,7 @@
                 <a:ea typeface="Helvetica" pitchFamily="34" charset="-122"/>
                 <a:cs typeface="Helvetica" pitchFamily="34" charset="-120"/>
               </a:rPr>
-              <a:t>VIRTUAL SERVER FOR VPC</a:t>
+              <a:t>VIRTUAL PRIVATE ENDPOINT FOR VPC</a:t>
             </a:r>
             <a:endParaRPr lang="en-US" dirty="0"/>
           </a:p>
@@ -38842,7 +38842,7 @@
       </p:sp>
       <p:pic>
         <p:nvPicPr>
-          <p:cNvPr id="69" name="Object 68" descr="public/generated/icons/15.png">    </p:cNvPr>
+          <p:cNvPr id="69" name="Object 68" descr="public/generated/icons/887073fb-ba5b-9407-d2ac-938308d890e4.png">    </p:cNvPr>
           <p:cNvPicPr>
             <a:picLocks noChangeAspect="1"/>
           </p:cNvPicPr>
@@ -38898,7 +38898,7 @@
                 <a:ea typeface="Helvetica" pitchFamily="34" charset="-122"/>
                 <a:cs typeface="Helvetica" pitchFamily="34" charset="-120"/>
               </a:rPr>
-              <a:t>VLAN</a:t>
+              <a:t>VIRTUAL ROUTER APPLIANCE</a:t>
             </a:r>
             <a:endParaRPr lang="en-US" dirty="0"/>
           </a:p>
@@ -38931,7 +38931,7 @@
       </p:sp>
       <p:pic>
         <p:nvPicPr>
-          <p:cNvPr id="72" name="Object 71" descr="public/generated/icons/09f5a6ea-185e-4625-8281-9e8629360a4f.png">    </p:cNvPr>
+          <p:cNvPr id="72" name="Object 71" descr="public/generated/icons/virtual-server-group.png">    </p:cNvPr>
           <p:cNvPicPr>
             <a:picLocks noChangeAspect="1"/>
           </p:cNvPicPr>
@@ -38987,7 +38987,7 @@
                 <a:ea typeface="Helvetica" pitchFamily="34" charset="-122"/>
                 <a:cs typeface="Helvetica" pitchFamily="34" charset="-120"/>
               </a:rPr>
-              <a:t>VMWARE CLOUD MIGRATION SERVICES</a:t>
+              <a:t>VIRTUAL SERVER FOR CLASSIC</a:t>
             </a:r>
             <a:endParaRPr lang="en-US" dirty="0"/>
           </a:p>
@@ -39020,7 +39020,7 @@
       </p:sp>
       <p:pic>
         <p:nvPicPr>
-          <p:cNvPr id="75" name="Object 74" descr="public/generated/icons/cf329950-0a3e-11e8-922e-f1366c6e1c83.png">    </p:cNvPr>
+          <p:cNvPr id="75" name="Object 74" descr="public/generated/icons/is.instance.png">    </p:cNvPr>
           <p:cNvPicPr>
             <a:picLocks noChangeAspect="1"/>
           </p:cNvPicPr>
@@ -39076,7 +39076,7 @@
                 <a:ea typeface="Helvetica" pitchFamily="34" charset="-122"/>
                 <a:cs typeface="Helvetica" pitchFamily="34" charset="-120"/>
               </a:rPr>
-              <a:t>VMWARE SOLUTIONS</a:t>
+              <a:t>VIRTUAL SERVER FOR VPC</a:t>
             </a:r>
             <a:endParaRPr lang="en-US" dirty="0"/>
           </a:p>
@@ -39109,7 +39109,7 @@
       </p:sp>
       <p:pic>
         <p:nvPicPr>
-          <p:cNvPr id="78" name="Object 77" descr="public/generated/icons/cf329950-0a3e-11e8-922e-f1366c6e1c83-vcenterserver.png">    </p:cNvPr>
+          <p:cNvPr id="78" name="Object 77" descr="public/generated/icons/15.png">    </p:cNvPr>
           <p:cNvPicPr>
             <a:picLocks noChangeAspect="1"/>
           </p:cNvPicPr>
@@ -39165,7 +39165,7 @@
                 <a:ea typeface="Helvetica" pitchFamily="34" charset="-122"/>
                 <a:cs typeface="Helvetica" pitchFamily="34" charset="-120"/>
               </a:rPr>
-              <a:t>VMWARE VCENTER SERVER</a:t>
+              <a:t>VLAN</a:t>
             </a:r>
             <a:endParaRPr lang="en-US" dirty="0"/>
           </a:p>
@@ -39198,7 +39198,7 @@
       </p:sp>
       <p:pic>
         <p:nvPicPr>
-          <p:cNvPr id="81" name="Object 80" descr="public/generated/icons/cf329950-0a3e-11e8-922e-f1366c6e1c83-vsphere.png">    </p:cNvPr>
+          <p:cNvPr id="81" name="Object 80" descr="public/generated/icons/09f5a6ea-185e-4625-8281-9e8629360a4f.png">    </p:cNvPr>
           <p:cNvPicPr>
             <a:picLocks noChangeAspect="1"/>
           </p:cNvPicPr>
@@ -39254,7 +39254,7 @@
                 <a:ea typeface="Helvetica" pitchFamily="34" charset="-122"/>
                 <a:cs typeface="Helvetica" pitchFamily="34" charset="-120"/>
               </a:rPr>
-              <a:t>VMWARE VSPHERE</a:t>
+              <a:t>VMWARE CLOUD MIGRATION SERVICES</a:t>
             </a:r>
             <a:endParaRPr lang="en-US" dirty="0"/>
           </a:p>
@@ -39287,7 +39287,7 @@
       </p:sp>
       <p:pic>
         <p:nvPicPr>
-          <p:cNvPr id="84" name="Object 83" descr="public/generated/icons/b6670b68-84ca-4a04-b8e8-c567dfeeddde.png">    </p:cNvPr>
+          <p:cNvPr id="84" name="Object 83" descr="public/generated/icons/cf329950-0a3e-11e8-922e-f1366c6e1c83.png">    </p:cNvPr>
           <p:cNvPicPr>
             <a:picLocks noChangeAspect="1"/>
           </p:cNvPicPr>
@@ -39343,7 +39343,7 @@
                 <a:ea typeface="Helvetica" pitchFamily="34" charset="-122"/>
                 <a:cs typeface="Helvetica" pitchFamily="34" charset="-120"/>
               </a:rPr>
-              <a:t>VPC COAAS (VPC COST OPTIMIZATION AS A SERVICE)</a:t>
+              <a:t>VMWARE SOLUTIONS</a:t>
             </a:r>
             <a:endParaRPr lang="en-US" dirty="0"/>
           </a:p>
@@ -39376,7 +39376,7 @@
       </p:sp>
       <p:pic>
         <p:nvPicPr>
-          <p:cNvPr id="87" name="Object 86" descr="public/generated/icons/757254b0-a9a0-11ea-9ff6-17a22eb543c5.png">    </p:cNvPr>
+          <p:cNvPr id="87" name="Object 86" descr="public/generated/icons/cf329950-0a3e-11e8-922e-f1366c6e1c83-vcenterserver.png">    </p:cNvPr>
           <p:cNvPicPr>
             <a:picLocks noChangeAspect="1"/>
           </p:cNvPicPr>
@@ -39432,7 +39432,7 @@
                 <a:ea typeface="Helvetica" pitchFamily="34" charset="-122"/>
                 <a:cs typeface="Helvetica" pitchFamily="34" charset="-120"/>
               </a:rPr>
-              <a:t>VPC+ CLOUD MIGRATION</a:t>
+              <a:t>VMWARE VCENTER SERVER</a:t>
             </a:r>
             <a:endParaRPr lang="en-US" dirty="0"/>
           </a:p>
@@ -39465,7 +39465,7 @@
       </p:sp>
       <p:pic>
         <p:nvPicPr>
-          <p:cNvPr id="90" name="Object 89" descr="public/generated/icons/fd1e0240-dd95-11eb-b4a0-db1c9221b8a2.png">    </p:cNvPr>
+          <p:cNvPr id="90" name="Object 89" descr="public/generated/icons/cf329950-0a3e-11e8-922e-f1366c6e1c83-vsphere.png">    </p:cNvPr>
           <p:cNvPicPr>
             <a:picLocks noChangeAspect="1"/>
           </p:cNvPicPr>
@@ -39521,7 +39521,7 @@
                 <a:ea typeface="Helvetica" pitchFamily="34" charset="-122"/>
                 <a:cs typeface="Helvetica" pitchFamily="34" charset="-120"/>
               </a:rPr>
-              <a:t>VPC+ DRAAS (VPC+ DISASTER RECOVERY AS A SERVICE)</a:t>
+              <a:t>VMWARE VSPHERE</a:t>
             </a:r>
             <a:endParaRPr lang="en-US" dirty="0"/>
           </a:p>
@@ -39554,7 +39554,7 @@
       </p:sp>
       <p:pic>
         <p:nvPicPr>
-          <p:cNvPr id="93" name="Object 92" descr="public/generated/icons/is.vpn.png">    </p:cNvPr>
+          <p:cNvPr id="93" name="Object 92" descr="public/generated/icons/b6670b68-84ca-4a04-b8e8-c567dfeeddde.png">    </p:cNvPr>
           <p:cNvPicPr>
             <a:picLocks noChangeAspect="1"/>
           </p:cNvPicPr>
@@ -39610,7 +39610,7 @@
                 <a:ea typeface="Helvetica" pitchFamily="34" charset="-122"/>
                 <a:cs typeface="Helvetica" pitchFamily="34" charset="-120"/>
               </a:rPr>
-              <a:t>VPN FOR VPC</a:t>
+              <a:t>VPC COAAS (VPC COST OPTIMIZATION AS A SERVICE)</a:t>
             </a:r>
             <a:endParaRPr lang="en-US" dirty="0"/>
           </a:p>
@@ -39643,7 +39643,7 @@
       </p:sp>
       <p:pic>
         <p:nvPicPr>
-          <p:cNvPr id="96" name="Object 95" descr="public/generated/icons/cf329950-0a3e-11e8-922e-f1366c6e1c83-vrops.png">    </p:cNvPr>
+          <p:cNvPr id="96" name="Object 95" descr="public/generated/icons/757254b0-a9a0-11ea-9ff6-17a22eb543c5.png">    </p:cNvPr>
           <p:cNvPicPr>
             <a:picLocks noChangeAspect="1"/>
           </p:cNvPicPr>
@@ -39699,7 +39699,7 @@
                 <a:ea typeface="Helvetica" pitchFamily="34" charset="-122"/>
                 <a:cs typeface="Helvetica" pitchFamily="34" charset="-120"/>
               </a:rPr>
-              <a:t>VREALIZE OPERATIONS AND LOG INSIGHT</a:t>
+              <a:t>VPC+ CLOUD MIGRATION</a:t>
             </a:r>
             <a:endParaRPr lang="en-US" dirty="0"/>
           </a:p>
@@ -39732,7 +39732,7 @@
       </p:sp>
       <p:pic>
         <p:nvPicPr>
-          <p:cNvPr id="99" name="Object 98" descr="public/generated/icons/76b7bf22-b443-47db-b3db-066ba2988f47.png">    </p:cNvPr>
+          <p:cNvPr id="99" name="Object 98" descr="public/generated/icons/fd1e0240-dd95-11eb-b4a0-db1c9221b8a2.png">    </p:cNvPr>
           <p:cNvPicPr>
             <a:picLocks noChangeAspect="1"/>
           </p:cNvPicPr>
@@ -39788,7 +39788,7 @@
                 <a:ea typeface="Helvetica" pitchFamily="34" charset="-122"/>
                 <a:cs typeface="Helvetica" pitchFamily="34" charset="-120"/>
               </a:rPr>
-              <a:t>WATSON DISCOVERY</a:t>
+              <a:t>VPC+ DRAAS (VPC+ DISASTER RECOVERY AS A SERVICE)</a:t>
             </a:r>
             <a:endParaRPr lang="en-US" dirty="0"/>
           </a:p>
@@ -39821,7 +39821,7 @@
       </p:sp>
       <p:pic>
         <p:nvPicPr>
-          <p:cNvPr id="102" name="Object 101" descr="public/generated/icons/12fbfff4-12c7-ccd0-80e6-603e8607468a.png">    </p:cNvPr>
+          <p:cNvPr id="102" name="Object 101" descr="public/generated/icons/is.vpn.png">    </p:cNvPr>
           <p:cNvPicPr>
             <a:picLocks noChangeAspect="1"/>
           </p:cNvPicPr>
@@ -39877,7 +39877,7 @@
                 <a:ea typeface="Helvetica" pitchFamily="34" charset="-122"/>
                 <a:cs typeface="Helvetica" pitchFamily="34" charset="-120"/>
               </a:rPr>
-              <a:t>WATSONX</a:t>
+              <a:t>VPN FOR VPC</a:t>
             </a:r>
             <a:endParaRPr lang="en-US" dirty="0"/>
           </a:p>
@@ -39910,7 +39910,7 @@
       </p:sp>
       <p:pic>
         <p:nvPicPr>
-          <p:cNvPr id="105" name="Object 104" descr="public/generated/icons/7045626d-55e3-4418-be11-683a26dbc1e5.png">    </p:cNvPr>
+          <p:cNvPr id="105" name="Object 104" descr="public/generated/icons/cf329950-0a3e-11e8-922e-f1366c6e1c83-vrops.png">    </p:cNvPr>
           <p:cNvPicPr>
             <a:picLocks noChangeAspect="1"/>
           </p:cNvPicPr>
@@ -39966,7 +39966,7 @@
                 <a:ea typeface="Helvetica" pitchFamily="34" charset="-122"/>
                 <a:cs typeface="Helvetica" pitchFamily="34" charset="-120"/>
               </a:rPr>
-              <a:t>WATSONX ASSISTANT</a:t>
+              <a:t>VREALIZE OPERATIONS AND LOG INSIGHT</a:t>
             </a:r>
             <a:endParaRPr lang="en-US" dirty="0"/>
           </a:p>
@@ -39999,7 +39999,7 @@
       </p:sp>
       <p:pic>
         <p:nvPicPr>
-          <p:cNvPr id="108" name="Object 107" descr="public/generated/icons/11530fa0-1776-11ee-93f6-1d4066e6a409.png">    </p:cNvPr>
+          <p:cNvPr id="108" name="Object 107" descr="public/generated/icons/76b7bf22-b443-47db-b3db-066ba2988f47.png">    </p:cNvPr>
           <p:cNvPicPr>
             <a:picLocks noChangeAspect="1"/>
           </p:cNvPicPr>
@@ -40055,7 +40055,7 @@
                 <a:ea typeface="Helvetica" pitchFamily="34" charset="-122"/>
                 <a:cs typeface="Helvetica" pitchFamily="34" charset="-120"/>
               </a:rPr>
-              <a:t>WATSONX CODE ASSISTANT</a:t>
+              <a:t>WATSON DISCOVERY</a:t>
             </a:r>
             <a:endParaRPr lang="en-US" dirty="0"/>
           </a:p>
@@ -40121,7 +40121,7 @@
       </p:sp>
       <p:pic>
         <p:nvPicPr>
-          <p:cNvPr id="3" name="Object 2" descr="public/generated/icons/b69f78c0-11d7-11ef-9bdf-c92eb40d1838.png">    </p:cNvPr>
+          <p:cNvPr id="3" name="Object 2" descr="public/generated/icons/12fbfff4-12c7-ccd0-80e6-603e8607468a.png">    </p:cNvPr>
           <p:cNvPicPr>
             <a:picLocks noChangeAspect="1"/>
           </p:cNvPicPr>
@@ -40177,7 +40177,7 @@
                 <a:ea typeface="Helvetica" pitchFamily="34" charset="-122"/>
                 <a:cs typeface="Helvetica" pitchFamily="34" charset="-120"/>
               </a:rPr>
-              <a:t>WATSONX ORCHESTRATE</a:t>
+              <a:t>WATSONX</a:t>
             </a:r>
             <a:endParaRPr lang="en-US" dirty="0"/>
           </a:p>
@@ -40210,7 +40210,7 @@
       </p:sp>
       <p:pic>
         <p:nvPicPr>
-          <p:cNvPr id="6" name="Object 5" descr="public/generated/icons/51c53b72-918f-4869-b834-2d99eb28422a.png">    </p:cNvPr>
+          <p:cNvPr id="6" name="Object 5" descr="public/generated/icons/7045626d-55e3-4418-be11-683a26dbc1e5.png">    </p:cNvPr>
           <p:cNvPicPr>
             <a:picLocks noChangeAspect="1"/>
           </p:cNvPicPr>
@@ -40266,7 +40266,7 @@
                 <a:ea typeface="Helvetica" pitchFamily="34" charset="-122"/>
                 <a:cs typeface="Helvetica" pitchFamily="34" charset="-120"/>
               </a:rPr>
-              <a:t>WATSONX.AI RUNTIME</a:t>
+              <a:t>WATSONX ASSISTANT</a:t>
             </a:r>
             <a:endParaRPr lang="en-US" dirty="0"/>
           </a:p>
@@ -40299,7 +40299,7 @@
       </p:sp>
       <p:pic>
         <p:nvPicPr>
-          <p:cNvPr id="9" name="Object 8" descr="public/generated/icons/39ba9d4c-b1c5-4cc3-a163-38b580121e01.png">    </p:cNvPr>
+          <p:cNvPr id="9" name="Object 8" descr="public/generated/icons/11530fa0-1776-11ee-93f6-1d4066e6a409.png">    </p:cNvPr>
           <p:cNvPicPr>
             <a:picLocks noChangeAspect="1"/>
           </p:cNvPicPr>
@@ -40355,7 +40355,7 @@
                 <a:ea typeface="Helvetica" pitchFamily="34" charset="-122"/>
                 <a:cs typeface="Helvetica" pitchFamily="34" charset="-120"/>
               </a:rPr>
-              <a:t>WATSONX.AI STUDIO</a:t>
+              <a:t>WATSONX CODE ASSISTANT</a:t>
             </a:r>
             <a:endParaRPr lang="en-US" dirty="0"/>
           </a:p>
@@ -40388,7 +40388,7 @@
       </p:sp>
       <p:pic>
         <p:nvPicPr>
-          <p:cNvPr id="12" name="Object 11" descr="public/generated/icons/43834340-4a6d-11ed-97d2-959039ad2a2e.png">    </p:cNvPr>
+          <p:cNvPr id="12" name="Object 11" descr="public/generated/icons/b69f78c0-11d7-11ef-9bdf-c92eb40d1838.png">    </p:cNvPr>
           <p:cNvPicPr>
             <a:picLocks noChangeAspect="1"/>
           </p:cNvPicPr>
@@ -40444,7 +40444,7 @@
                 <a:ea typeface="Helvetica" pitchFamily="34" charset="-122"/>
                 <a:cs typeface="Helvetica" pitchFamily="34" charset="-120"/>
               </a:rPr>
-              <a:t>WATSONX.DATA</a:t>
+              <a:t>WATSONX ORCHESTRATE</a:t>
             </a:r>
             <a:endParaRPr lang="en-US" dirty="0"/>
           </a:p>
@@ -40477,7 +40477,7 @@
       </p:sp>
       <p:pic>
         <p:nvPicPr>
-          <p:cNvPr id="15" name="Object 14" descr="public/generated/icons/2ad019f3-0fd6-4c25-966d-f3952481a870.png">    </p:cNvPr>
+          <p:cNvPr id="15" name="Object 14" descr="public/generated/icons/51c53b72-918f-4869-b834-2d99eb28422a.png">    </p:cNvPr>
           <p:cNvPicPr>
             <a:picLocks noChangeAspect="1"/>
           </p:cNvPicPr>
@@ -40533,7 +40533,7 @@
                 <a:ea typeface="Helvetica" pitchFamily="34" charset="-122"/>
                 <a:cs typeface="Helvetica" pitchFamily="34" charset="-120"/>
               </a:rPr>
-              <a:t>WATSONX.GOVERNANCE</a:t>
+              <a:t>WATSONX.AI RUNTIME</a:t>
             </a:r>
             <a:endParaRPr lang="en-US" dirty="0"/>
           </a:p>
@@ -40566,7 +40566,7 @@
       </p:sp>
       <p:pic>
         <p:nvPicPr>
-          <p:cNvPr id="18" name="Object 17" descr="public/generated/icons/power-iaas.workspace.png">    </p:cNvPr>
+          <p:cNvPr id="18" name="Object 17" descr="public/generated/icons/39ba9d4c-b1c5-4cc3-a163-38b580121e01.png">    </p:cNvPr>
           <p:cNvPicPr>
             <a:picLocks noChangeAspect="1"/>
           </p:cNvPicPr>
@@ -40622,7 +40622,7 @@
                 <a:ea typeface="Helvetica" pitchFamily="34" charset="-122"/>
                 <a:cs typeface="Helvetica" pitchFamily="34" charset="-120"/>
               </a:rPr>
-              <a:t>WORKSPACE FOR POWER VIRTUAL SERVER</a:t>
+              <a:t>WATSONX.AI STUDIO</a:t>
             </a:r>
             <a:endParaRPr lang="en-US" dirty="0"/>
           </a:p>
@@ -40655,7 +40655,7 @@
       </p:sp>
       <p:pic>
         <p:nvPicPr>
-          <p:cNvPr id="21" name="Object 20" descr="public/generated/icons/cf329950-0a3e-11e8-922e-f1366c6e1c83-zerto.png">    </p:cNvPr>
+          <p:cNvPr id="21" name="Object 20" descr="public/generated/icons/43834340-4a6d-11ed-97d2-959039ad2a2e.png">    </p:cNvPr>
           <p:cNvPicPr>
             <a:picLocks noChangeAspect="1"/>
           </p:cNvPicPr>
@@ -40686,6 +40686,273 @@
         <p:spPr>
           <a:xfrm>
             <a:off x="5669280" y="777240"/>
+            <a:ext cx="640080" cy="274320"/>
+          </a:xfrm>
+          <a:prstGeom prst="rect">
+            <a:avLst/>
+          </a:prstGeom>
+          <a:noFill/>
+        </p:spPr>
+        <p:txBody>
+          <a:bodyPr wrap="square" rtlCol="0" anchor="t" bIns="0" lIns="0" rIns="0" tIns="0">
+            <a:spAutoFit/>
+          </a:bodyPr>
+          <a:lstStyle/>
+          <a:p>
+            <a:pPr algn="ctr">
+              <a:buNone/>
+            </a:pPr>
+            <a:r>
+              <a:rPr lang="en-US" b="1" sz="600" dirty="0" smtClean="0">
+                <a:solidFill>
+                  <a:srgbClr val="646365"/>
+                </a:solidFill>
+                <a:latin typeface="Helvetica" pitchFamily="34" charset="0"/>
+                <a:ea typeface="Helvetica" pitchFamily="34" charset="-122"/>
+                <a:cs typeface="Helvetica" pitchFamily="34" charset="-120"/>
+              </a:rPr>
+              <a:t>WATSONX.DATA</a:t>
+            </a:r>
+            <a:endParaRPr lang="en-US" dirty="0"/>
+          </a:p>
+        </p:txBody>
+      </p:sp>
+      <p:sp>
+        <p:nvSpPr>
+          <p:cNvPr id="23" name="Object 22"/>
+          <p:cNvSpPr/>
+          <p:nvPr/>
+        </p:nvSpPr>
+        <p:spPr>
+          <a:xfrm>
+            <a:off x="6675120" y="274320"/>
+            <a:ext cx="457200" cy="457200"/>
+          </a:xfrm>
+          <a:prstGeom prst="ellipse">
+            <a:avLst/>
+          </a:prstGeom>
+          <a:solidFill>
+            <a:srgbClr val="FFFFFF"/>
+          </a:solidFill>
+          <a:ln w="19050">
+            <a:solidFill>
+              <a:srgbClr val="646365"/>
+            </a:solidFill>
+            <a:prstDash val="solid"/>
+          </a:ln>
+        </p:spPr>
+      </p:sp>
+      <p:pic>
+        <p:nvPicPr>
+          <p:cNvPr id="24" name="Object 23" descr="public/generated/icons/2ad019f3-0fd6-4c25-966d-f3952481a870.png">    </p:cNvPr>
+          <p:cNvPicPr>
+            <a:picLocks noChangeAspect="1"/>
+          </p:cNvPicPr>
+          <p:nvPr/>
+        </p:nvPicPr>
+        <p:blipFill>
+          <a:blip r:embed="rId8"/>
+          <a:stretch>
+            <a:fillRect/>
+          </a:stretch>
+        </p:blipFill>
+        <p:spPr>
+          <a:xfrm>
+            <a:off x="6766560" y="365760"/>
+            <a:ext cx="274320" cy="274320"/>
+          </a:xfrm>
+          <a:prstGeom prst="rect">
+            <a:avLst/>
+          </a:prstGeom>
+        </p:spPr>
+      </p:pic>
+      <p:sp>
+        <p:nvSpPr>
+          <p:cNvPr id="25" name="Object 24"/>
+          <p:cNvSpPr/>
+          <p:nvPr/>
+        </p:nvSpPr>
+        <p:spPr>
+          <a:xfrm>
+            <a:off x="6583680" y="777240"/>
+            <a:ext cx="640080" cy="274320"/>
+          </a:xfrm>
+          <a:prstGeom prst="rect">
+            <a:avLst/>
+          </a:prstGeom>
+          <a:noFill/>
+        </p:spPr>
+        <p:txBody>
+          <a:bodyPr wrap="square" rtlCol="0" anchor="t" bIns="0" lIns="0" rIns="0" tIns="0">
+            <a:spAutoFit/>
+          </a:bodyPr>
+          <a:lstStyle/>
+          <a:p>
+            <a:pPr algn="ctr">
+              <a:buNone/>
+            </a:pPr>
+            <a:r>
+              <a:rPr lang="en-US" b="1" sz="600" dirty="0" smtClean="0">
+                <a:solidFill>
+                  <a:srgbClr val="646365"/>
+                </a:solidFill>
+                <a:latin typeface="Helvetica" pitchFamily="34" charset="0"/>
+                <a:ea typeface="Helvetica" pitchFamily="34" charset="-122"/>
+                <a:cs typeface="Helvetica" pitchFamily="34" charset="-120"/>
+              </a:rPr>
+              <a:t>WATSONX.GOVERNANCE</a:t>
+            </a:r>
+            <a:endParaRPr lang="en-US" dirty="0"/>
+          </a:p>
+        </p:txBody>
+      </p:sp>
+      <p:sp>
+        <p:nvSpPr>
+          <p:cNvPr id="26" name="Object 25"/>
+          <p:cNvSpPr/>
+          <p:nvPr/>
+        </p:nvSpPr>
+        <p:spPr>
+          <a:xfrm>
+            <a:off x="7589520" y="274320"/>
+            <a:ext cx="457200" cy="457200"/>
+          </a:xfrm>
+          <a:prstGeom prst="ellipse">
+            <a:avLst/>
+          </a:prstGeom>
+          <a:solidFill>
+            <a:srgbClr val="FFFFFF"/>
+          </a:solidFill>
+          <a:ln w="19050">
+            <a:solidFill>
+              <a:srgbClr val="646365"/>
+            </a:solidFill>
+            <a:prstDash val="solid"/>
+          </a:ln>
+        </p:spPr>
+      </p:sp>
+      <p:pic>
+        <p:nvPicPr>
+          <p:cNvPr id="27" name="Object 26" descr="public/generated/icons/power-iaas.workspace.png">    </p:cNvPr>
+          <p:cNvPicPr>
+            <a:picLocks noChangeAspect="1"/>
+          </p:cNvPicPr>
+          <p:nvPr/>
+        </p:nvPicPr>
+        <p:blipFill>
+          <a:blip r:embed="rId9"/>
+          <a:stretch>
+            <a:fillRect/>
+          </a:stretch>
+        </p:blipFill>
+        <p:spPr>
+          <a:xfrm>
+            <a:off x="7680960" y="365760"/>
+            <a:ext cx="274320" cy="274320"/>
+          </a:xfrm>
+          <a:prstGeom prst="rect">
+            <a:avLst/>
+          </a:prstGeom>
+        </p:spPr>
+      </p:pic>
+      <p:sp>
+        <p:nvSpPr>
+          <p:cNvPr id="28" name="Object 27"/>
+          <p:cNvSpPr/>
+          <p:nvPr/>
+        </p:nvSpPr>
+        <p:spPr>
+          <a:xfrm>
+            <a:off x="7498080" y="777240"/>
+            <a:ext cx="640080" cy="274320"/>
+          </a:xfrm>
+          <a:prstGeom prst="rect">
+            <a:avLst/>
+          </a:prstGeom>
+          <a:noFill/>
+        </p:spPr>
+        <p:txBody>
+          <a:bodyPr wrap="square" rtlCol="0" anchor="t" bIns="0" lIns="0" rIns="0" tIns="0">
+            <a:spAutoFit/>
+          </a:bodyPr>
+          <a:lstStyle/>
+          <a:p>
+            <a:pPr algn="ctr">
+              <a:buNone/>
+            </a:pPr>
+            <a:r>
+              <a:rPr lang="en-US" b="1" sz="600" dirty="0" smtClean="0">
+                <a:solidFill>
+                  <a:srgbClr val="646365"/>
+                </a:solidFill>
+                <a:latin typeface="Helvetica" pitchFamily="34" charset="0"/>
+                <a:ea typeface="Helvetica" pitchFamily="34" charset="-122"/>
+                <a:cs typeface="Helvetica" pitchFamily="34" charset="-120"/>
+              </a:rPr>
+              <a:t>WORKSPACE FOR POWER VIRTUAL SERVER</a:t>
+            </a:r>
+            <a:endParaRPr lang="en-US" dirty="0"/>
+          </a:p>
+        </p:txBody>
+      </p:sp>
+      <p:sp>
+        <p:nvSpPr>
+          <p:cNvPr id="29" name="Object 28"/>
+          <p:cNvSpPr/>
+          <p:nvPr/>
+        </p:nvSpPr>
+        <p:spPr>
+          <a:xfrm>
+            <a:off x="274320" y="1371600"/>
+            <a:ext cx="457200" cy="457200"/>
+          </a:xfrm>
+          <a:prstGeom prst="ellipse">
+            <a:avLst/>
+          </a:prstGeom>
+          <a:solidFill>
+            <a:srgbClr val="FFFFFF"/>
+          </a:solidFill>
+          <a:ln w="19050">
+            <a:solidFill>
+              <a:srgbClr val="646365"/>
+            </a:solidFill>
+            <a:prstDash val="solid"/>
+          </a:ln>
+        </p:spPr>
+      </p:sp>
+      <p:pic>
+        <p:nvPicPr>
+          <p:cNvPr id="30" name="Object 29" descr="public/generated/icons/cf329950-0a3e-11e8-922e-f1366c6e1c83-zerto.png">    </p:cNvPr>
+          <p:cNvPicPr>
+            <a:picLocks noChangeAspect="1"/>
+          </p:cNvPicPr>
+          <p:nvPr/>
+        </p:nvPicPr>
+        <p:blipFill>
+          <a:blip r:embed="rId10"/>
+          <a:stretch>
+            <a:fillRect/>
+          </a:stretch>
+        </p:blipFill>
+        <p:spPr>
+          <a:xfrm>
+            <a:off x="365760" y="1463040"/>
+            <a:ext cx="274320" cy="274320"/>
+          </a:xfrm>
+          <a:prstGeom prst="rect">
+            <a:avLst/>
+          </a:prstGeom>
+        </p:spPr>
+      </p:pic>
+      <p:sp>
+        <p:nvSpPr>
+          <p:cNvPr id="31" name="Object 30"/>
+          <p:cNvSpPr/>
+          <p:nvPr/>
+        </p:nvSpPr>
+        <p:spPr>
+          <a:xfrm>
+            <a:off x="182880" y="1874520"/>
             <a:ext cx="640080" cy="274320"/>
           </a:xfrm>
           <a:prstGeom prst="rect">

--- a/mycatalog-architecture-diagram-template.pptx
+++ b/mycatalog-architecture-diagram-template.pptx
@@ -524,7 +524,7 @@
           <a:p>
             <a:r>
               <a:rPr lang="en-US" dirty="0" smtClean="0"/>
-              <a:t>Generated on Sun Jan 12 2025 08:05:57 GMT+0000 (Coordinated Universal Time)</a:t>
+              <a:t>Generated on Sun Jan 19 2025 08:03:36 GMT+0000 (Coordinated Universal Time)</a:t>
             </a:r>
             <a:endParaRPr lang="en-US" dirty="0"/>
           </a:p>

--- a/mycatalog-architecture-diagram-template.pptx
+++ b/mycatalog-architecture-diagram-template.pptx
@@ -524,7 +524,7 @@
           <a:p>
             <a:r>
               <a:rPr lang="en-US" dirty="0" smtClean="0"/>
-              <a:t>Generated on Sun Jan 19 2025 08:03:36 GMT+0000 (Coordinated Universal Time)</a:t>
+              <a:t>Generated on Sun Feb 02 2025 08:05:41 GMT+0000 (Coordinated Universal Time)</a:t>
             </a:r>
             <a:endParaRPr lang="en-US" dirty="0"/>
           </a:p>
@@ -31033,7 +31033,7 @@
       </p:sp>
       <p:pic>
         <p:nvPicPr>
-          <p:cNvPr id="24" name="Object 23" descr="public/generated/icons/iotf-service-id.png">    </p:cNvPr>
+          <p:cNvPr id="24" name="Object 23" descr="public/generated/icons/75874a60-cb12-11e7-948e-37ac098eb1b9.png">    </p:cNvPr>
           <p:cNvPicPr>
             <a:picLocks noChangeAspect="1"/>
           </p:cNvPicPr>
@@ -31089,7 +31089,7 @@
                 <a:ea typeface="Helvetica" pitchFamily="34" charset="-122"/>
                 <a:cs typeface="Helvetica" pitchFamily="34" charset="-120"/>
               </a:rPr>
-              <a:t>INTERNET OF THINGS PLATFORM</a:t>
+              <a:t>INTERNET SERVICES</a:t>
             </a:r>
             <a:endParaRPr lang="en-US" dirty="0"/>
           </a:p>
@@ -31122,7 +31122,7 @@
       </p:sp>
       <p:pic>
         <p:nvPicPr>
-          <p:cNvPr id="27" name="Object 26" descr="public/generated/icons/75874a60-cb12-11e7-948e-37ac098eb1b9.png">    </p:cNvPr>
+          <p:cNvPr id="27" name="Object 26" descr="public/generated/icons/3b960983-4483-488a-9851-6f7cccdb3534.png">    </p:cNvPr>
           <p:cNvPicPr>
             <a:picLocks noChangeAspect="1"/>
           </p:cNvPicPr>
@@ -31178,7 +31178,7 @@
                 <a:ea typeface="Helvetica" pitchFamily="34" charset="-122"/>
                 <a:cs typeface="Helvetica" pitchFamily="34" charset="-120"/>
               </a:rPr>
-              <a:t>INTERNET SERVICES</a:t>
+              <a:t>INVESTMENT PORTFOLIO</a:t>
             </a:r>
             <a:endParaRPr lang="en-US" dirty="0"/>
           </a:p>
@@ -31211,7 +31211,7 @@
       </p:sp>
       <p:pic>
         <p:nvPicPr>
-          <p:cNvPr id="30" name="Object 29" descr="public/generated/icons/3b960983-4483-488a-9851-6f7cccdb3534.png">    </p:cNvPr>
+          <p:cNvPr id="30" name="Object 29" descr="public/generated/icons/12.png">    </p:cNvPr>
           <p:cNvPicPr>
             <a:picLocks noChangeAspect="1"/>
           </p:cNvPicPr>
@@ -31267,7 +31267,7 @@
                 <a:ea typeface="Helvetica" pitchFamily="34" charset="-122"/>
                 <a:cs typeface="Helvetica" pitchFamily="34" charset="-120"/>
               </a:rPr>
-              <a:t>INVESTMENT PORTFOLIO</a:t>
+              <a:t>IPSEC VPN</a:t>
             </a:r>
             <a:endParaRPr lang="en-US" dirty="0"/>
           </a:p>
@@ -31300,7 +31300,7 @@
       </p:sp>
       <p:pic>
         <p:nvPicPr>
-          <p:cNvPr id="33" name="Object 32" descr="public/generated/icons/12.png">    </p:cNvPr>
+          <p:cNvPr id="33" name="Object 32" descr="public/generated/icons/035145f0-2cac-4505-59e9-2e363d08d5aa.png">    </p:cNvPr>
           <p:cNvPicPr>
             <a:picLocks noChangeAspect="1"/>
           </p:cNvPicPr>
@@ -31356,7 +31356,7 @@
                 <a:ea typeface="Helvetica" pitchFamily="34" charset="-122"/>
                 <a:cs typeface="Helvetica" pitchFamily="34" charset="-120"/>
               </a:rPr>
-              <a:t>IPSEC VPN</a:t>
+              <a:t>JUNIPER VSRX</a:t>
             </a:r>
             <a:endParaRPr lang="en-US" dirty="0"/>
           </a:p>
@@ -31389,7 +31389,7 @@
       </p:sp>
       <p:pic>
         <p:nvPicPr>
-          <p:cNvPr id="36" name="Object 35" descr="public/generated/icons/035145f0-2cac-4505-59e9-2e363d08d5aa.png">    </p:cNvPr>
+          <p:cNvPr id="36" name="Object 35" descr="public/generated/icons/ee41347f-b18e-4ca6-bf80-b5467c63f9a6.png">    </p:cNvPr>
           <p:cNvPicPr>
             <a:picLocks noChangeAspect="1"/>
           </p:cNvPicPr>
@@ -31445,7 +31445,7 @@
                 <a:ea typeface="Helvetica" pitchFamily="34" charset="-122"/>
                 <a:cs typeface="Helvetica" pitchFamily="34" charset="-120"/>
               </a:rPr>
-              <a:t>JUNIPER VSRX</a:t>
+              <a:t>KEY PROTECT</a:t>
             </a:r>
             <a:endParaRPr lang="en-US" dirty="0"/>
           </a:p>
@@ -31478,7 +31478,7 @@
       </p:sp>
       <p:pic>
         <p:nvPicPr>
-          <p:cNvPr id="39" name="Object 38" descr="public/generated/icons/ee41347f-b18e-4ca6-bf80-b5467c63f9a6.png">    </p:cNvPr>
+          <p:cNvPr id="39" name="Object 38" descr="public/generated/icons/cf329950-0a3e-11e8-922e-f1366c6e1c83-kmipadapter.png">    </p:cNvPr>
           <p:cNvPicPr>
             <a:picLocks noChangeAspect="1"/>
           </p:cNvPicPr>
@@ -31534,7 +31534,7 @@
                 <a:ea typeface="Helvetica" pitchFamily="34" charset="-122"/>
                 <a:cs typeface="Helvetica" pitchFamily="34" charset="-120"/>
               </a:rPr>
-              <a:t>KEY PROTECT</a:t>
+              <a:t>KMIP FOR VMWARE</a:t>
             </a:r>
             <a:endParaRPr lang="en-US" dirty="0"/>
           </a:p>
@@ -31567,7 +31567,7 @@
       </p:sp>
       <p:pic>
         <p:nvPicPr>
-          <p:cNvPr id="42" name="Object 41" descr="public/generated/icons/cf329950-0a3e-11e8-922e-f1366c6e1c83-kmipadapter.png">    </p:cNvPr>
+          <p:cNvPr id="42" name="Object 41" descr="public/generated/icons/ed3a5a53-eb60-4f3c-8fd1-17f88585b6ed.png">    </p:cNvPr>
           <p:cNvPicPr>
             <a:picLocks noChangeAspect="1"/>
           </p:cNvPicPr>
@@ -31623,7 +31623,7 @@
                 <a:ea typeface="Helvetica" pitchFamily="34" charset="-122"/>
                 <a:cs typeface="Helvetica" pitchFamily="34" charset="-120"/>
               </a:rPr>
-              <a:t>KMIP FOR VMWARE</a:t>
+              <a:t>KNOWLEDGE CATALOG</a:t>
             </a:r>
             <a:endParaRPr lang="en-US" dirty="0"/>
           </a:p>
@@ -31656,7 +31656,7 @@
       </p:sp>
       <p:pic>
         <p:nvPicPr>
-          <p:cNvPr id="45" name="Object 44" descr="public/generated/icons/ed3a5a53-eb60-4f3c-8fd1-17f88585b6ed.png">    </p:cNvPr>
+          <p:cNvPr id="45" name="Object 44" descr="public/generated/icons/983ea9a2-0fec-4021-8b70-8da5373394e5.png">    </p:cNvPr>
           <p:cNvPicPr>
             <a:picLocks noChangeAspect="1"/>
           </p:cNvPicPr>
@@ -31712,7 +31712,7 @@
                 <a:ea typeface="Helvetica" pitchFamily="34" charset="-122"/>
                 <a:cs typeface="Helvetica" pitchFamily="34" charset="-120"/>
               </a:rPr>
-              <a:t>KNOWLEDGE CATALOG</a:t>
+              <a:t>KNOWLEDGE STUDIO</a:t>
             </a:r>
             <a:endParaRPr lang="en-US" dirty="0"/>
           </a:p>
@@ -31745,7 +31745,7 @@
       </p:sp>
       <p:pic>
         <p:nvPicPr>
-          <p:cNvPr id="48" name="Object 47" descr="public/generated/icons/983ea9a2-0fec-4021-8b70-8da5373394e5.png">    </p:cNvPr>
+          <p:cNvPr id="48" name="Object 47" descr="public/generated/icons/a8f89634-261c-4832-8257-b25e04787988.png">    </p:cNvPr>
           <p:cNvPicPr>
             <a:picLocks noChangeAspect="1"/>
           </p:cNvPicPr>
@@ -31801,7 +31801,7 @@
                 <a:ea typeface="Helvetica" pitchFamily="34" charset="-122"/>
                 <a:cs typeface="Helvetica" pitchFamily="34" charset="-120"/>
               </a:rPr>
-              <a:t>KNOWLEDGE STUDIO</a:t>
+              <a:t>KOMPRISE ELASTIC DATA MIGRATION</a:t>
             </a:r>
             <a:endParaRPr lang="en-US" dirty="0"/>
           </a:p>
@@ -31834,7 +31834,7 @@
       </p:sp>
       <p:pic>
         <p:nvPicPr>
-          <p:cNvPr id="51" name="Object 50" descr="public/generated/icons/a8f89634-261c-4832-8257-b25e04787988.png">    </p:cNvPr>
+          <p:cNvPr id="51" name="Object 50" descr="public/generated/icons/f1fa7442-9ee0-4e27-94c2-0cb3776a0a0a.png">    </p:cNvPr>
           <p:cNvPicPr>
             <a:picLocks noChangeAspect="1"/>
           </p:cNvPicPr>
@@ -31890,7 +31890,7 @@
                 <a:ea typeface="Helvetica" pitchFamily="34" charset="-122"/>
                 <a:cs typeface="Helvetica" pitchFamily="34" charset="-120"/>
               </a:rPr>
-              <a:t>KOMPRISE ELASTIC DATA MIGRATION</a:t>
+              <a:t>KOMPRISE INTELLIGENT DATA MANAGEMENT SUITE</a:t>
             </a:r>
             <a:endParaRPr lang="en-US" dirty="0"/>
           </a:p>
@@ -31923,7 +31923,7 @@
       </p:sp>
       <p:pic>
         <p:nvPicPr>
-          <p:cNvPr id="54" name="Object 53" descr="public/generated/icons/f1fa7442-9ee0-4e27-94c2-0cb3776a0a0a.png">    </p:cNvPr>
+          <p:cNvPr id="54" name="Object 53" descr="public/generated/icons/containers-kubernetes.png">    </p:cNvPr>
           <p:cNvPicPr>
             <a:picLocks noChangeAspect="1"/>
           </p:cNvPicPr>
@@ -31979,7 +31979,7 @@
                 <a:ea typeface="Helvetica" pitchFamily="34" charset="-122"/>
                 <a:cs typeface="Helvetica" pitchFamily="34" charset="-120"/>
               </a:rPr>
-              <a:t>KOMPRISE INTELLIGENT DATA MANAGEMENT SUITE</a:t>
+              <a:t>KUBERNETES SERVICE</a:t>
             </a:r>
             <a:endParaRPr lang="en-US" dirty="0"/>
           </a:p>
@@ -32012,7 +32012,7 @@
       </p:sp>
       <p:pic>
         <p:nvPicPr>
-          <p:cNvPr id="57" name="Object 56" descr="public/generated/icons/containers-kubernetes.png">    </p:cNvPr>
+          <p:cNvPr id="57" name="Object 56" descr="public/generated/icons/is.load-balancer.png">    </p:cNvPr>
           <p:cNvPicPr>
             <a:picLocks noChangeAspect="1"/>
           </p:cNvPicPr>
@@ -32068,7 +32068,7 @@
                 <a:ea typeface="Helvetica" pitchFamily="34" charset="-122"/>
                 <a:cs typeface="Helvetica" pitchFamily="34" charset="-120"/>
               </a:rPr>
-              <a:t>KUBERNETES SERVICE</a:t>
+              <a:t>LOAD BALANCER FOR VPC</a:t>
             </a:r>
             <a:endParaRPr lang="en-US" dirty="0"/>
           </a:p>
@@ -32101,7 +32101,7 @@
       </p:sp>
       <p:pic>
         <p:nvPicPr>
-          <p:cNvPr id="60" name="Object 59" descr="public/generated/icons/is.load-balancer.png">    </p:cNvPr>
+          <p:cNvPr id="60" name="Object 59" descr="public/generated/icons/e13e1860-959c-11e8-871e-ad157af61ad7.png">    </p:cNvPr>
           <p:cNvPicPr>
             <a:picLocks noChangeAspect="1"/>
           </p:cNvPicPr>
@@ -32157,7 +32157,7 @@
                 <a:ea typeface="Helvetica" pitchFamily="34" charset="-122"/>
                 <a:cs typeface="Helvetica" pitchFamily="34" charset="-120"/>
               </a:rPr>
-              <a:t>LOAD BALANCER FOR VPC</a:t>
+              <a:t>LOG ANALYSIS</a:t>
             </a:r>
             <a:endParaRPr lang="en-US" dirty="0"/>
           </a:p>
@@ -32190,7 +32190,7 @@
       </p:sp>
       <p:pic>
         <p:nvPicPr>
-          <p:cNvPr id="63" name="Object 62" descr="public/generated/icons/e13e1860-959c-11e8-871e-ad157af61ad7.png">    </p:cNvPr>
+          <p:cNvPr id="63" name="Object 62" descr="public/generated/icons/9349854b-eb46-427f-8ef6-687d601c9eda.png">    </p:cNvPr>
           <p:cNvPicPr>
             <a:picLocks noChangeAspect="1"/>
           </p:cNvPicPr>
@@ -32246,7 +32246,7 @@
                 <a:ea typeface="Helvetica" pitchFamily="34" charset="-122"/>
                 <a:cs typeface="Helvetica" pitchFamily="34" charset="-120"/>
               </a:rPr>
-              <a:t>LOG ANALYSIS</a:t>
+              <a:t>LYVE DATA TRANSFER SERVICES</a:t>
             </a:r>
             <a:endParaRPr lang="en-US" dirty="0"/>
           </a:p>
@@ -32279,7 +32279,7 @@
       </p:sp>
       <p:pic>
         <p:nvPicPr>
-          <p:cNvPr id="66" name="Object 65" descr="public/generated/icons/9349854b-eb46-427f-8ef6-687d601c9eda.png">    </p:cNvPr>
+          <p:cNvPr id="66" name="Object 65" descr="public/generated/icons/cf329950-0a3e-11e8-922e-f1366c6e1c83-managedveeam.png">    </p:cNvPr>
           <p:cNvPicPr>
             <a:picLocks noChangeAspect="1"/>
           </p:cNvPicPr>
@@ -32335,7 +32335,7 @@
                 <a:ea typeface="Helvetica" pitchFamily="34" charset="-122"/>
                 <a:cs typeface="Helvetica" pitchFamily="34" charset="-120"/>
               </a:rPr>
-              <a:t>LYVE DATA TRANSFER SERVICES</a:t>
+              <a:t>MANAGED BACKUP SERVICES</a:t>
             </a:r>
             <a:endParaRPr lang="en-US" dirty="0"/>
           </a:p>
@@ -32368,7 +32368,7 @@
       </p:sp>
       <p:pic>
         <p:nvPicPr>
-          <p:cNvPr id="69" name="Object 68" descr="public/generated/icons/cf329950-0a3e-11e8-922e-f1366c6e1c83-managedveeam.png">    </p:cNvPr>
+          <p:cNvPr id="69" name="Object 68" descr="public/generated/icons/cf329950-0a3e-11e8-922e-f1366c6e1c83-managedzerto.png">    </p:cNvPr>
           <p:cNvPicPr>
             <a:picLocks noChangeAspect="1"/>
           </p:cNvPicPr>
@@ -32424,7 +32424,7 @@
                 <a:ea typeface="Helvetica" pitchFamily="34" charset="-122"/>
                 <a:cs typeface="Helvetica" pitchFamily="34" charset="-120"/>
               </a:rPr>
-              <a:t>MANAGED BACKUP SERVICES</a:t>
+              <a:t>MANAGED DISASTER RECOVERY SERVICES</a:t>
             </a:r>
             <a:endParaRPr lang="en-US" dirty="0"/>
           </a:p>
@@ -32457,7 +32457,7 @@
       </p:sp>
       <p:pic>
         <p:nvPicPr>
-          <p:cNvPr id="72" name="Object 71" descr="public/generated/icons/cf329950-0a3e-11e8-922e-f1366c6e1c83-managedzerto.png">    </p:cNvPr>
+          <p:cNvPr id="72" name="Object 71" descr="public/generated/icons/cfb3c3da-7b1f-0879-f414-f367da218488.png">    </p:cNvPr>
           <p:cNvPicPr>
             <a:picLocks noChangeAspect="1"/>
           </p:cNvPicPr>
@@ -32513,7 +32513,7 @@
                 <a:ea typeface="Helvetica" pitchFamily="34" charset="-122"/>
                 <a:cs typeface="Helvetica" pitchFamily="34" charset="-120"/>
               </a:rPr>
-              <a:t>MANAGED DISASTER RECOVERY SERVICES</a:t>
+              <a:t>MANAGED NETWORK SECURITY SERVICES</a:t>
             </a:r>
             <a:endParaRPr lang="en-US" dirty="0"/>
           </a:p>
@@ -32546,7 +32546,7 @@
       </p:sp>
       <p:pic>
         <p:nvPicPr>
-          <p:cNvPr id="75" name="Object 74" descr="public/generated/icons/cfb3c3da-7b1f-0879-f414-f367da218488.png">    </p:cNvPr>
+          <p:cNvPr id="75" name="Object 74" descr="public/generated/icons/cf329950-0a3e-11e8-922e-f1366c6e1c83-imi.png">    </p:cNvPr>
           <p:cNvPicPr>
             <a:picLocks noChangeAspect="1"/>
           </p:cNvPicPr>
@@ -32602,7 +32602,7 @@
                 <a:ea typeface="Helvetica" pitchFamily="34" charset="-122"/>
                 <a:cs typeface="Helvetica" pitchFamily="34" charset="-120"/>
               </a:rPr>
-              <a:t>MANAGED NETWORK SECURITY SERVICES</a:t>
+              <a:t>MANAGED VMWARE SERVICES</a:t>
             </a:r>
             <a:endParaRPr lang="en-US" dirty="0"/>
           </a:p>
@@ -32635,7 +32635,7 @@
       </p:sp>
       <p:pic>
         <p:nvPicPr>
-          <p:cNvPr id="78" name="Object 77" descr="public/generated/icons/cf329950-0a3e-11e8-922e-f1366c6e1c83-imi.png">    </p:cNvPr>
+          <p:cNvPr id="78" name="Object 77" descr="public/generated/icons/14bd30e0-8921-11e9-a2c5-13fceaf553c0.png">    </p:cNvPr>
           <p:cNvPicPr>
             <a:picLocks noChangeAspect="1"/>
           </p:cNvPicPr>
@@ -32691,7 +32691,7 @@
                 <a:ea typeface="Helvetica" pitchFamily="34" charset="-122"/>
                 <a:cs typeface="Helvetica" pitchFamily="34" charset="-120"/>
               </a:rPr>
-              <a:t>MANAGED VMWARE SERVICES</a:t>
+              <a:t>MATCH 360 WITH WATSON</a:t>
             </a:r>
             <a:endParaRPr lang="en-US" dirty="0"/>
           </a:p>
@@ -32724,7 +32724,7 @@
       </p:sp>
       <p:pic>
         <p:nvPicPr>
-          <p:cNvPr id="81" name="Object 80" descr="public/generated/icons/14bd30e0-8921-11e9-a2c5-13fceaf553c0.png">    </p:cNvPr>
+          <p:cNvPr id="81" name="Object 80" descr="public/generated/icons/messages-for-rabbitmq.png">    </p:cNvPr>
           <p:cNvPicPr>
             <a:picLocks noChangeAspect="1"/>
           </p:cNvPicPr>
@@ -32780,7 +32780,7 @@
                 <a:ea typeface="Helvetica" pitchFamily="34" charset="-122"/>
                 <a:cs typeface="Helvetica" pitchFamily="34" charset="-120"/>
               </a:rPr>
-              <a:t>MATCH 360 WITH WATSON</a:t>
+              <a:t>MESSAGES FOR RABBITMQ</a:t>
             </a:r>
             <a:endParaRPr lang="en-US" dirty="0"/>
           </a:p>
@@ -32813,7 +32813,7 @@
       </p:sp>
       <p:pic>
         <p:nvPicPr>
-          <p:cNvPr id="84" name="Object 83" descr="public/generated/icons/messages-for-rabbitmq.png">    </p:cNvPr>
+          <p:cNvPr id="84" name="Object 83" descr="public/generated/icons/d4000551-49ff-4868-9e05-f863e60fad3a.png">    </p:cNvPr>
           <p:cNvPicPr>
             <a:picLocks noChangeAspect="1"/>
           </p:cNvPicPr>
@@ -32869,7 +32869,7 @@
                 <a:ea typeface="Helvetica" pitchFamily="34" charset="-122"/>
                 <a:cs typeface="Helvetica" pitchFamily="34" charset="-120"/>
               </a:rPr>
-              <a:t>MESSAGES FOR RABBITMQ</a:t>
+              <a:t>MINIO</a:t>
             </a:r>
             <a:endParaRPr lang="en-US" dirty="0"/>
           </a:p>
@@ -32902,7 +32902,7 @@
       </p:sp>
       <p:pic>
         <p:nvPicPr>
-          <p:cNvPr id="87" name="Object 86" descr="public/generated/icons/d4000551-49ff-4868-9e05-f863e60fad3a.png">    </p:cNvPr>
+          <p:cNvPr id="87" name="Object 86" descr="public/generated/icons/9d9545b4-b866-4c1b-9fc0-39273aef5bb0.png">    </p:cNvPr>
           <p:cNvPicPr>
             <a:picLocks noChangeAspect="1"/>
           </p:cNvPicPr>
@@ -32958,7 +32958,7 @@
                 <a:ea typeface="Helvetica" pitchFamily="34" charset="-122"/>
                 <a:cs typeface="Helvetica" pitchFamily="34" charset="-120"/>
               </a:rPr>
-              <a:t>MINIO</a:t>
+              <a:t>MONO-X ONE FOR POWERVS</a:t>
             </a:r>
             <a:endParaRPr lang="en-US" dirty="0"/>
           </a:p>
@@ -32991,7 +32991,7 @@
       </p:sp>
       <p:pic>
         <p:nvPicPr>
-          <p:cNvPr id="90" name="Object 89" descr="public/generated/icons/9d9545b4-b866-4c1b-9fc0-39273aef5bb0.png">    </p:cNvPr>
+          <p:cNvPr id="90" name="Object 89" descr="public/generated/icons/01037c41-adce-4bb5-8b45-0c06004916c4.png">    </p:cNvPr>
           <p:cNvPicPr>
             <a:picLocks noChangeAspect="1"/>
           </p:cNvPicPr>
@@ -33047,7 +33047,7 @@
                 <a:ea typeface="Helvetica" pitchFamily="34" charset="-122"/>
                 <a:cs typeface="Helvetica" pitchFamily="34" charset="-120"/>
               </a:rPr>
-              <a:t>MONO-X ONE FOR POWERVS</a:t>
+              <a:t>MQ</a:t>
             </a:r>
             <a:endParaRPr lang="en-US" dirty="0"/>
           </a:p>
@@ -33080,7 +33080,7 @@
       </p:sp>
       <p:pic>
         <p:nvPicPr>
-          <p:cNvPr id="93" name="Object 92" descr="public/generated/icons/01037c41-adce-4bb5-8b45-0c06004916c4.png">    </p:cNvPr>
+          <p:cNvPr id="93" name="Object 92" descr="public/generated/icons/is.snapshot-consistency-group.png">    </p:cNvPr>
           <p:cNvPicPr>
             <a:picLocks noChangeAspect="1"/>
           </p:cNvPicPr>
@@ -33136,7 +33136,7 @@
                 <a:ea typeface="Helvetica" pitchFamily="34" charset="-122"/>
                 <a:cs typeface="Helvetica" pitchFamily="34" charset="-120"/>
               </a:rPr>
-              <a:t>MQ</a:t>
+              <a:t>MULTI VOLUME SNAPSHOTS FOR VPC</a:t>
             </a:r>
             <a:endParaRPr lang="en-US" dirty="0"/>
           </a:p>
@@ -33169,7 +33169,7 @@
       </p:sp>
       <p:pic>
         <p:nvPicPr>
-          <p:cNvPr id="96" name="Object 95" descr="public/generated/icons/is.snapshot-consistency-group.png">    </p:cNvPr>
+          <p:cNvPr id="96" name="Object 95" descr="public/generated/icons/bb6393bc-7d81-446b-9728-61b704f6eca5.png">    </p:cNvPr>
           <p:cNvPicPr>
             <a:picLocks noChangeAspect="1"/>
           </p:cNvPicPr>
@@ -33225,7 +33225,7 @@
                 <a:ea typeface="Helvetica" pitchFamily="34" charset="-122"/>
                 <a:cs typeface="Helvetica" pitchFamily="34" charset="-120"/>
               </a:rPr>
-              <a:t>MULTI VOLUME SNAPSHOTS FOR VPC</a:t>
+              <a:t>NATURAL LANGUAGE UNDERSTANDING</a:t>
             </a:r>
             <a:endParaRPr lang="en-US" dirty="0"/>
           </a:p>
@@ -33258,7 +33258,7 @@
       </p:sp>
       <p:pic>
         <p:nvPicPr>
-          <p:cNvPr id="99" name="Object 98" descr="public/generated/icons/bb6393bc-7d81-446b-9728-61b704f6eca5.png">    </p:cNvPr>
+          <p:cNvPr id="99" name="Object 98" descr="public/generated/icons/cf329950-0a3e-11e8-922e-f1366c6e1c83-netapp.png">    </p:cNvPr>
           <p:cNvPicPr>
             <a:picLocks noChangeAspect="1"/>
           </p:cNvPicPr>
@@ -33314,7 +33314,7 @@
                 <a:ea typeface="Helvetica" pitchFamily="34" charset="-122"/>
                 <a:cs typeface="Helvetica" pitchFamily="34" charset="-120"/>
               </a:rPr>
-              <a:t>NATURAL LANGUAGE UNDERSTANDING</a:t>
+              <a:t>NETAPP ONTAP SELECT</a:t>
             </a:r>
             <a:endParaRPr lang="en-US" dirty="0"/>
           </a:p>
@@ -33347,7 +33347,7 @@
       </p:sp>
       <p:pic>
         <p:nvPicPr>
-          <p:cNvPr id="102" name="Object 101" descr="public/generated/icons/cf329950-0a3e-11e8-922e-f1366c6e1c83-netapp.png">    </p:cNvPr>
+          <p:cNvPr id="102" name="Object 101" descr="public/generated/icons/cc42cff0-b19b-11eb-9a66-c717766c1d30.png">    </p:cNvPr>
           <p:cNvPicPr>
             <a:picLocks noChangeAspect="1"/>
           </p:cNvPicPr>
@@ -33403,7 +33403,7 @@
                 <a:ea typeface="Helvetica" pitchFamily="34" charset="-122"/>
                 <a:cs typeface="Helvetica" pitchFamily="34" charset="-120"/>
               </a:rPr>
-              <a:t>NETAPP ONTAP SELECT</a:t>
+              <a:t>NETEZZA PERFORMANCE SERVER</a:t>
             </a:r>
             <a:endParaRPr lang="en-US" dirty="0"/>
           </a:p>
@@ -33436,7 +33436,7 @@
       </p:sp>
       <p:pic>
         <p:nvPicPr>
-          <p:cNvPr id="105" name="Object 104" descr="public/generated/icons/cc42cff0-b19b-11eb-9a66-c717766c1d30.png">    </p:cNvPr>
+          <p:cNvPr id="105" name="Object 104" descr="public/generated/icons/is.network-acl.png">    </p:cNvPr>
           <p:cNvPicPr>
             <a:picLocks noChangeAspect="1"/>
           </p:cNvPicPr>
@@ -33492,7 +33492,7 @@
                 <a:ea typeface="Helvetica" pitchFamily="34" charset="-122"/>
                 <a:cs typeface="Helvetica" pitchFamily="34" charset="-120"/>
               </a:rPr>
-              <a:t>NETEZZA PERFORMANCE SERVER</a:t>
+              <a:t>NETWORK ACL</a:t>
             </a:r>
             <a:endParaRPr lang="en-US" dirty="0"/>
           </a:p>
@@ -33525,7 +33525,7 @@
       </p:sp>
       <p:pic>
         <p:nvPicPr>
-          <p:cNvPr id="108" name="Object 107" descr="public/generated/icons/is.network-acl.png">    </p:cNvPr>
+          <p:cNvPr id="108" name="Object 107" descr="public/generated/icons/d97bd0c3-a8e5-4f3d-b925-16380e039a9a.png">    </p:cNvPr>
           <p:cNvPicPr>
             <a:picLocks noChangeAspect="1"/>
           </p:cNvPicPr>
@@ -33581,7 +33581,7 @@
                 <a:ea typeface="Helvetica" pitchFamily="34" charset="-122"/>
                 <a:cs typeface="Helvetica" pitchFamily="34" charset="-120"/>
               </a:rPr>
-              <a:t>NETWORK ACL</a:t>
+              <a:t>NEURALSEEK</a:t>
             </a:r>
             <a:endParaRPr lang="en-US" dirty="0"/>
           </a:p>
@@ -33647,7 +33647,7 @@
       </p:sp>
       <p:pic>
         <p:nvPicPr>
-          <p:cNvPr id="3" name="Object 2" descr="public/generated/icons/d97bd0c3-a8e5-4f3d-b925-16380e039a9a.png">    </p:cNvPr>
+          <p:cNvPr id="3" name="Object 2" descr="public/generated/icons/466091c0-9b8d-11eb-8f8c-91e95378d441.png">    </p:cNvPr>
           <p:cNvPicPr>
             <a:picLocks noChangeAspect="1"/>
           </p:cNvPicPr>
@@ -33703,7 +33703,7 @@
                 <a:ea typeface="Helvetica" pitchFamily="34" charset="-122"/>
                 <a:cs typeface="Helvetica" pitchFamily="34" charset="-120"/>
               </a:rPr>
-              <a:t>NEURALSEEK</a:t>
+              <a:t>OPENPAGES</a:t>
             </a:r>
             <a:endParaRPr lang="en-US" dirty="0"/>
           </a:p>
@@ -33736,7 +33736,7 @@
       </p:sp>
       <p:pic>
         <p:nvPicPr>
-          <p:cNvPr id="6" name="Object 5" descr="public/generated/icons/466091c0-9b8d-11eb-8f8c-91e95378d441.png">    </p:cNvPr>
+          <p:cNvPr id="6" name="Object 5" descr="public/generated/icons/2f756420-434f-11e8-ae40-6bdd72502abc.png">    </p:cNvPr>
           <p:cNvPicPr>
             <a:picLocks noChangeAspect="1"/>
           </p:cNvPicPr>
@@ -33792,7 +33792,7 @@
                 <a:ea typeface="Helvetica" pitchFamily="34" charset="-122"/>
                 <a:cs typeface="Helvetica" pitchFamily="34" charset="-120"/>
               </a:rPr>
-              <a:t>OPENPAGES</a:t>
+              <a:t>PARTNER WITH TECHNOLOGY EXPERT LABS</a:t>
             </a:r>
             <a:endParaRPr lang="en-US" dirty="0"/>
           </a:p>
@@ -33825,7 +33825,7 @@
       </p:sp>
       <p:pic>
         <p:nvPicPr>
-          <p:cNvPr id="9" name="Object 8" descr="public/generated/icons/2f756420-434f-11e8-ae40-6bdd72502abc.png">    </p:cNvPr>
+          <p:cNvPr id="9" name="Object 8" descr="public/generated/icons/bb6229f0-e632-11ee-ae26-5d6d9ba99eec.png">    </p:cNvPr>
           <p:cNvPicPr>
             <a:picLocks noChangeAspect="1"/>
           </p:cNvPicPr>
@@ -33881,7 +33881,7 @@
                 <a:ea typeface="Helvetica" pitchFamily="34" charset="-122"/>
                 <a:cs typeface="Helvetica" pitchFamily="34" charset="-120"/>
               </a:rPr>
-              <a:t>PARTNER WITH TECHNOLOGY EXPERT LABS</a:t>
+              <a:t>PARTNER WITH TECHNOLOGY EXPERT LABS - BUILD IBM STORAGE PROTECT FOR POWERVS</a:t>
             </a:r>
             <a:endParaRPr lang="en-US" dirty="0"/>
           </a:p>
@@ -33914,7 +33914,7 @@
       </p:sp>
       <p:pic>
         <p:nvPicPr>
-          <p:cNvPr id="12" name="Object 11" descr="public/generated/icons/bb6229f0-e632-11ee-ae26-5d6d9ba99eec.png">    </p:cNvPr>
+          <p:cNvPr id="12" name="Object 11" descr="public/generated/icons/f0ea1510-e632-11ee-acb6-4d13e7035de5.png">    </p:cNvPr>
           <p:cNvPicPr>
             <a:picLocks noChangeAspect="1"/>
           </p:cNvPicPr>
@@ -33970,7 +33970,7 @@
                 <a:ea typeface="Helvetica" pitchFamily="34" charset="-122"/>
                 <a:cs typeface="Helvetica" pitchFamily="34" charset="-120"/>
               </a:rPr>
-              <a:t>PARTNER WITH TECHNOLOGY EXPERT LABS - BUILD IBM STORAGE PROTECT FOR POWERVS</a:t>
+              <a:t>PARTNER WITH TECHNOLOGY EXPERT LABS - BUILD SAP HANA STARTER EDITION</a:t>
             </a:r>
             <a:endParaRPr lang="en-US" dirty="0"/>
           </a:p>
@@ -34003,7 +34003,7 @@
       </p:sp>
       <p:pic>
         <p:nvPicPr>
-          <p:cNvPr id="15" name="Object 14" descr="public/generated/icons/f0ea1510-e632-11ee-acb6-4d13e7035de5.png">    </p:cNvPr>
+          <p:cNvPr id="15" name="Object 14" descr="public/generated/icons/339a87f0-e633-11ee-acb6-4d13e7035de5.png">    </p:cNvPr>
           <p:cNvPicPr>
             <a:picLocks noChangeAspect="1"/>
           </p:cNvPicPr>
@@ -34059,7 +34059,7 @@
                 <a:ea typeface="Helvetica" pitchFamily="34" charset="-122"/>
                 <a:cs typeface="Helvetica" pitchFamily="34" charset="-120"/>
               </a:rPr>
-              <a:t>PARTNER WITH TECHNOLOGY EXPERT LABS - BUILD SAP HANA STARTER EDITION</a:t>
+              <a:t>PARTNER WITH TECHNOLOGY EXPERT LABS - MIGRATE WORKLOADS TO IBM POWER VIRTUAL SERVER</a:t>
             </a:r>
             <a:endParaRPr lang="en-US" dirty="0"/>
           </a:p>
@@ -34092,7 +34092,7 @@
       </p:sp>
       <p:pic>
         <p:nvPicPr>
-          <p:cNvPr id="18" name="Object 17" descr="public/generated/icons/339a87f0-e633-11ee-acb6-4d13e7035de5.png">    </p:cNvPr>
+          <p:cNvPr id="18" name="Object 17" descr="public/generated/icons/is.placement-group.png">    </p:cNvPr>
           <p:cNvPicPr>
             <a:picLocks noChangeAspect="1"/>
           </p:cNvPicPr>
@@ -34148,7 +34148,7 @@
                 <a:ea typeface="Helvetica" pitchFamily="34" charset="-122"/>
                 <a:cs typeface="Helvetica" pitchFamily="34" charset="-120"/>
               </a:rPr>
-              <a:t>PARTNER WITH TECHNOLOGY EXPERT LABS - MIGRATE WORKLOADS TO IBM POWER VIRTUAL SERVER</a:t>
+              <a:t>PLACEMENT GROUPS FOR VPC</a:t>
             </a:r>
             <a:endParaRPr lang="en-US" dirty="0"/>
           </a:p>
@@ -34181,7 +34181,7 @@
       </p:sp>
       <p:pic>
         <p:nvPicPr>
-          <p:cNvPr id="21" name="Object 20" descr="public/generated/icons/is.placement-group.png">    </p:cNvPr>
+          <p:cNvPr id="21" name="Object 20" descr="public/generated/icons/41690130-a4e8-11ea-94c3-d72a57643c7d.png">    </p:cNvPr>
           <p:cNvPicPr>
             <a:picLocks noChangeAspect="1"/>
           </p:cNvPicPr>
@@ -34237,7 +34237,7 @@
                 <a:ea typeface="Helvetica" pitchFamily="34" charset="-122"/>
                 <a:cs typeface="Helvetica" pitchFamily="34" charset="-120"/>
               </a:rPr>
-              <a:t>PLACEMENT GROUPS FOR VPC</a:t>
+              <a:t>PLANNING ANALYTICS</a:t>
             </a:r>
             <a:endParaRPr lang="en-US" dirty="0"/>
           </a:p>
@@ -34270,7 +34270,7 @@
       </p:sp>
       <p:pic>
         <p:nvPicPr>
-          <p:cNvPr id="24" name="Object 23" descr="public/generated/icons/41690130-a4e8-11ea-94c3-d72a57643c7d.png">    </p:cNvPr>
+          <p:cNvPr id="24" name="Object 23" descr="public/generated/icons/2a001640-21f1-466e-b6f0-d227c353a823.png">    </p:cNvPr>
           <p:cNvPicPr>
             <a:picLocks noChangeAspect="1"/>
           </p:cNvPicPr>
@@ -34326,7 +34326,7 @@
                 <a:ea typeface="Helvetica" pitchFamily="34" charset="-122"/>
                 <a:cs typeface="Helvetica" pitchFamily="34" charset="-120"/>
               </a:rPr>
-              <a:t>PLANNING ANALYTICS</a:t>
+              <a:t>PORTFOLIO OPTIMIZATION</a:t>
             </a:r>
             <a:endParaRPr lang="en-US" dirty="0"/>
           </a:p>
@@ -34359,7 +34359,7 @@
       </p:sp>
       <p:pic>
         <p:nvPicPr>
-          <p:cNvPr id="27" name="Object 26" descr="public/generated/icons/2a001640-21f1-466e-b6f0-d227c353a823.png">    </p:cNvPr>
+          <p:cNvPr id="27" name="Object 26" descr="public/generated/icons/d666f360-66d1-11e9-85ef-a19427301a8c.png">    </p:cNvPr>
           <p:cNvPicPr>
             <a:picLocks noChangeAspect="1"/>
           </p:cNvPicPr>
@@ -34415,7 +34415,7 @@
                 <a:ea typeface="Helvetica" pitchFamily="34" charset="-122"/>
                 <a:cs typeface="Helvetica" pitchFamily="34" charset="-120"/>
               </a:rPr>
-              <a:t>PORTFOLIO OPTIMIZATION</a:t>
+              <a:t>PORTWORX ENTERPRISE</a:t>
             </a:r>
             <a:endParaRPr lang="en-US" dirty="0"/>
           </a:p>
@@ -34448,7 +34448,7 @@
       </p:sp>
       <p:pic>
         <p:nvPicPr>
-          <p:cNvPr id="30" name="Object 29" descr="public/generated/icons/d666f360-66d1-11e9-85ef-a19427301a8c.png">    </p:cNvPr>
+          <p:cNvPr id="30" name="Object 29" descr="public/generated/icons/7b2cdb0e-ad91-4fd7-97c0-5398874ec27b.png">    </p:cNvPr>
           <p:cNvPicPr>
             <a:picLocks noChangeAspect="1"/>
           </p:cNvPicPr>
@@ -34504,7 +34504,7 @@
                 <a:ea typeface="Helvetica" pitchFamily="34" charset="-122"/>
                 <a:cs typeface="Helvetica" pitchFamily="34" charset="-120"/>
               </a:rPr>
-              <a:t>PORTWORX ENTERPRISE</a:t>
+              <a:t>POWER I MIGRATE 23 SERVICES</a:t>
             </a:r>
             <a:endParaRPr lang="en-US" dirty="0"/>
           </a:p>
@@ -34537,7 +34537,7 @@
       </p:sp>
       <p:pic>
         <p:nvPicPr>
-          <p:cNvPr id="33" name="Object 32" descr="public/generated/icons/7b2cdb0e-ad91-4fd7-97c0-5398874ec27b.png">    </p:cNvPr>
+          <p:cNvPr id="33" name="Object 32" descr="public/generated/icons/9828699d-dda7-4022-839b-c8e1e8b7d9d8.png">    </p:cNvPr>
           <p:cNvPicPr>
             <a:picLocks noChangeAspect="1"/>
           </p:cNvPicPr>
@@ -34593,7 +34593,7 @@
                 <a:ea typeface="Helvetica" pitchFamily="34" charset="-122"/>
                 <a:cs typeface="Helvetica" pitchFamily="34" charset="-120"/>
               </a:rPr>
-              <a:t>POWER I MIGRATE 23 SERVICES</a:t>
+              <a:t>POWER I MIGRATE WHILE ACTIVE SERVICES</a:t>
             </a:r>
             <a:endParaRPr lang="en-US" dirty="0"/>
           </a:p>
@@ -34626,7 +34626,7 @@
       </p:sp>
       <p:pic>
         <p:nvPicPr>
-          <p:cNvPr id="36" name="Object 35" descr="public/generated/icons/9828699d-dda7-4022-839b-c8e1e8b7d9d8.png">    </p:cNvPr>
+          <p:cNvPr id="36" name="Object 35" descr="public/generated/icons/power-iaas.network.png">    </p:cNvPr>
           <p:cNvPicPr>
             <a:picLocks noChangeAspect="1"/>
           </p:cNvPicPr>
@@ -34682,7 +34682,7 @@
                 <a:ea typeface="Helvetica" pitchFamily="34" charset="-122"/>
                 <a:cs typeface="Helvetica" pitchFamily="34" charset="-120"/>
               </a:rPr>
-              <a:t>POWER I MIGRATE WHILE ACTIVE SERVICES</a:t>
+              <a:t>POWER VIRTUAL SERVER NETWORK</a:t>
             </a:r>
             <a:endParaRPr lang="en-US" dirty="0"/>
           </a:p>
@@ -34715,7 +34715,7 @@
       </p:sp>
       <p:pic>
         <p:nvPicPr>
-          <p:cNvPr id="39" name="Object 38" descr="public/generated/icons/power-iaas.network.png">    </p:cNvPr>
+          <p:cNvPr id="39" name="Object 38" descr="public/generated/icons/power-iaas.shared-processor-pool.png">    </p:cNvPr>
           <p:cNvPicPr>
             <a:picLocks noChangeAspect="1"/>
           </p:cNvPicPr>
@@ -34771,7 +34771,7 @@
                 <a:ea typeface="Helvetica" pitchFamily="34" charset="-122"/>
                 <a:cs typeface="Helvetica" pitchFamily="34" charset="-120"/>
               </a:rPr>
-              <a:t>POWER VIRTUAL SERVER NETWORK</a:t>
+              <a:t>POWER VIRTUAL SERVER SHARED PROCESSOR POOL</a:t>
             </a:r>
             <a:endParaRPr lang="en-US" dirty="0"/>
           </a:p>
@@ -34804,7 +34804,7 @@
       </p:sp>
       <p:pic>
         <p:nvPicPr>
-          <p:cNvPr id="42" name="Object 41" descr="public/generated/icons/power-iaas.shared-processor-pool.png">    </p:cNvPr>
+          <p:cNvPr id="42" name="Object 41" descr="public/generated/icons/power-iaas.snapshot.png">    </p:cNvPr>
           <p:cNvPicPr>
             <a:picLocks noChangeAspect="1"/>
           </p:cNvPicPr>
@@ -34860,7 +34860,7 @@
                 <a:ea typeface="Helvetica" pitchFamily="34" charset="-122"/>
                 <a:cs typeface="Helvetica" pitchFamily="34" charset="-120"/>
               </a:rPr>
-              <a:t>POWER VIRTUAL SERVER SHARED PROCESSOR POOL</a:t>
+              <a:t>POWER VIRTUAL SERVER SNAPSHOT</a:t>
             </a:r>
             <a:endParaRPr lang="en-US" dirty="0"/>
           </a:p>
@@ -34893,7 +34893,7 @@
       </p:sp>
       <p:pic>
         <p:nvPicPr>
-          <p:cNvPr id="45" name="Object 44" descr="public/generated/icons/power-iaas.snapshot.png">    </p:cNvPr>
+          <p:cNvPr id="45" name="Object 44" descr="public/generated/icons/power-iaas.pvm-instance.png">    </p:cNvPr>
           <p:cNvPicPr>
             <a:picLocks noChangeAspect="1"/>
           </p:cNvPicPr>
@@ -34949,7 +34949,7 @@
                 <a:ea typeface="Helvetica" pitchFamily="34" charset="-122"/>
                 <a:cs typeface="Helvetica" pitchFamily="34" charset="-120"/>
               </a:rPr>
-              <a:t>POWER VIRTUAL SERVER SNAPSHOT</a:t>
+              <a:t>POWER VIRTUAL SERVER VIRTUAL MACHINE</a:t>
             </a:r>
             <a:endParaRPr lang="en-US" dirty="0"/>
           </a:p>
@@ -34982,7 +34982,7 @@
       </p:sp>
       <p:pic>
         <p:nvPicPr>
-          <p:cNvPr id="48" name="Object 47" descr="public/generated/icons/power-iaas.pvm-instance.png">    </p:cNvPr>
+          <p:cNvPr id="48" name="Object 47" descr="public/generated/icons/power-iaas.volume.png">    </p:cNvPr>
           <p:cNvPicPr>
             <a:picLocks noChangeAspect="1"/>
           </p:cNvPicPr>
@@ -35038,7 +35038,7 @@
                 <a:ea typeface="Helvetica" pitchFamily="34" charset="-122"/>
                 <a:cs typeface="Helvetica" pitchFamily="34" charset="-120"/>
               </a:rPr>
-              <a:t>POWER VIRTUAL SERVER VIRTUAL MACHINE</a:t>
+              <a:t>POWER VIRTUAL SERVER VOLUME</a:t>
             </a:r>
             <a:endParaRPr lang="en-US" dirty="0"/>
           </a:p>
@@ -35071,7 +35071,7 @@
       </p:sp>
       <p:pic>
         <p:nvPicPr>
-          <p:cNvPr id="51" name="Object 50" descr="public/generated/icons/power-iaas.volume.png">    </p:cNvPr>
+          <p:cNvPr id="51" name="Object 50" descr="public/generated/icons/b260dfd6-9b79-4377-be6d-146a5cb59be8.png">    </p:cNvPr>
           <p:cNvPicPr>
             <a:picLocks noChangeAspect="1"/>
           </p:cNvPicPr>
@@ -35127,7 +35127,7 @@
                 <a:ea typeface="Helvetica" pitchFamily="34" charset="-122"/>
                 <a:cs typeface="Helvetica" pitchFamily="34" charset="-120"/>
               </a:rPr>
-              <a:t>POWER VIRTUAL SERVER VOLUME</a:t>
+              <a:t>POWERVS MIGRATION AS A SERVICE</a:t>
             </a:r>
             <a:endParaRPr lang="en-US" dirty="0"/>
           </a:p>
@@ -35160,7 +35160,7 @@
       </p:sp>
       <p:pic>
         <p:nvPicPr>
-          <p:cNvPr id="54" name="Object 53" descr="public/generated/icons/b260dfd6-9b79-4377-be6d-146a5cb59be8.png">    </p:cNvPr>
+          <p:cNvPr id="54" name="Object 53" descr="public/generated/icons/C43B3EB0-F56B-4753-92E4-093815814C1E.png">    </p:cNvPr>
           <p:cNvPicPr>
             <a:picLocks noChangeAspect="1"/>
           </p:cNvPicPr>
@@ -35216,7 +35216,7 @@
                 <a:ea typeface="Helvetica" pitchFamily="34" charset="-122"/>
                 <a:cs typeface="Helvetica" pitchFamily="34" charset="-120"/>
               </a:rPr>
-              <a:t>POWERVS MIGRATION AS A SERVICE</a:t>
+              <a:t>PREDICTIVE MARKET SCENARIOS</a:t>
             </a:r>
             <a:endParaRPr lang="en-US" dirty="0"/>
           </a:p>
@@ -35249,7 +35249,7 @@
       </p:sp>
       <p:pic>
         <p:nvPicPr>
-          <p:cNvPr id="57" name="Object 56" descr="public/generated/icons/C43B3EB0-F56B-4753-92E4-093815814C1E.png">    </p:cNvPr>
+          <p:cNvPr id="57" name="Object 56" descr="public/generated/icons/is.private-path-service-gateway.png">    </p:cNvPr>
           <p:cNvPicPr>
             <a:picLocks noChangeAspect="1"/>
           </p:cNvPicPr>
@@ -35305,7 +35305,7 @@
                 <a:ea typeface="Helvetica" pitchFamily="34" charset="-122"/>
                 <a:cs typeface="Helvetica" pitchFamily="34" charset="-120"/>
               </a:rPr>
-              <a:t>PREDICTIVE MARKET SCENARIOS</a:t>
+              <a:t>PRIVATE PATH SERVICE FOR VPC</a:t>
             </a:r>
             <a:endParaRPr lang="en-US" dirty="0"/>
           </a:p>
@@ -35338,7 +35338,7 @@
       </p:sp>
       <p:pic>
         <p:nvPicPr>
-          <p:cNvPr id="60" name="Object 59" descr="public/generated/icons/is.private-path-service-gateway.png">    </p:cNvPr>
+          <p:cNvPr id="60" name="Object 59" descr="public/generated/icons/91a901ac-fb7d-9b6e-eb25-14e75a20c4c2.png">    </p:cNvPr>
           <p:cNvPicPr>
             <a:picLocks noChangeAspect="1"/>
           </p:cNvPicPr>
@@ -35394,7 +35394,7 @@
                 <a:ea typeface="Helvetica" pitchFamily="34" charset="-122"/>
                 <a:cs typeface="Helvetica" pitchFamily="34" charset="-120"/>
               </a:rPr>
-              <a:t>PRIVATE PATH SERVICE FOR VPC</a:t>
+              <a:t>PROFESSIONAL SERVICES FOR GOVERNMENT(ONLY AVAILABLE IN US)</a:t>
             </a:r>
             <a:endParaRPr lang="en-US" dirty="0"/>
           </a:p>
@@ -35427,7 +35427,7 @@
       </p:sp>
       <p:pic>
         <p:nvPicPr>
-          <p:cNvPr id="63" name="Object 62" descr="public/generated/icons/91a901ac-fb7d-9b6e-eb25-14e75a20c4c2.png">    </p:cNvPr>
+          <p:cNvPr id="63" name="Object 62" descr="public/generated/icons/7c03a06c-f1bb-46f8-84d8-9378432b2804.png">    </p:cNvPr>
           <p:cNvPicPr>
             <a:picLocks noChangeAspect="1"/>
           </p:cNvPicPr>
@@ -35483,7 +35483,7 @@
                 <a:ea typeface="Helvetica" pitchFamily="34" charset="-122"/>
                 <a:cs typeface="Helvetica" pitchFamily="34" charset="-120"/>
               </a:rPr>
-              <a:t>PROFESSIONAL SERVICES FOR GOVERNMENT(ONLY AVAILABLE IN US)</a:t>
+              <a:t>PROTECTIO DRAAS MANAGED SERVICE</a:t>
             </a:r>
             <a:endParaRPr lang="en-US" dirty="0"/>
           </a:p>
@@ -35516,7 +35516,7 @@
       </p:sp>
       <p:pic>
         <p:nvPicPr>
-          <p:cNvPr id="66" name="Object 65" descr="public/generated/icons/7c03a06c-f1bb-46f8-84d8-9378432b2804.png">    </p:cNvPr>
+          <p:cNvPr id="66" name="Object 65" descr="public/generated/icons/is.public-gateway.png">    </p:cNvPr>
           <p:cNvPicPr>
             <a:picLocks noChangeAspect="1"/>
           </p:cNvPicPr>
@@ -35572,7 +35572,7 @@
                 <a:ea typeface="Helvetica" pitchFamily="34" charset="-122"/>
                 <a:cs typeface="Helvetica" pitchFamily="34" charset="-120"/>
               </a:rPr>
-              <a:t>PROTECTIO DRAAS MANAGED SERVICE</a:t>
+              <a:t>PUBLIC GATEWAY</a:t>
             </a:r>
             <a:endParaRPr lang="en-US" dirty="0"/>
           </a:p>
@@ -35605,7 +35605,7 @@
       </p:sp>
       <p:pic>
         <p:nvPicPr>
-          <p:cNvPr id="69" name="Object 68" descr="public/generated/icons/is.public-gateway.png">    </p:cNvPr>
+          <p:cNvPr id="69" name="Object 68" descr="public/generated/icons/aa11a8b2-381e-4c1c-a232-2148f65c005f.png">    </p:cNvPr>
           <p:cNvPicPr>
             <a:picLocks noChangeAspect="1"/>
           </p:cNvPicPr>
@@ -35661,7 +35661,7 @@
                 <a:ea typeface="Helvetica" pitchFamily="34" charset="-122"/>
                 <a:cs typeface="Helvetica" pitchFamily="34" charset="-120"/>
               </a:rPr>
-              <a:t>PUBLIC GATEWAY</a:t>
+              <a:t>PVS ONE MANAGED SERVICE</a:t>
             </a:r>
             <a:endParaRPr lang="en-US" dirty="0"/>
           </a:p>
@@ -35694,7 +35694,7 @@
       </p:sp>
       <p:pic>
         <p:nvPicPr>
-          <p:cNvPr id="72" name="Object 71" descr="public/generated/icons/aa11a8b2-381e-4c1c-a232-2148f65c005f.png">    </p:cNvPr>
+          <p:cNvPr id="72" name="Object 71" descr="public/generated/icons/3eb2d5a0-24ff-11eb-9437-631d7272fff5.png">    </p:cNvPr>
           <p:cNvPicPr>
             <a:picLocks noChangeAspect="1"/>
           </p:cNvPicPr>
@@ -35750,7 +35750,7 @@
                 <a:ea typeface="Helvetica" pitchFamily="34" charset="-122"/>
                 <a:cs typeface="Helvetica" pitchFamily="34" charset="-120"/>
               </a:rPr>
-              <a:t>PVS ONE MANAGED SERVICE</a:t>
+              <a:t>PX-BACKUP FOR KUBERNETES</a:t>
             </a:r>
             <a:endParaRPr lang="en-US" dirty="0"/>
           </a:p>
@@ -35783,7 +35783,7 @@
       </p:sp>
       <p:pic>
         <p:nvPicPr>
-          <p:cNvPr id="75" name="Object 74" descr="public/generated/icons/3eb2d5a0-24ff-11eb-9437-631d7272fff5.png">    </p:cNvPr>
+          <p:cNvPr id="75" name="Object 74" descr="public/generated/icons/b6049020-80f4-11eb-a0f7-e35ec9b4054f.png">    </p:cNvPr>
           <p:cNvPicPr>
             <a:picLocks noChangeAspect="1"/>
           </p:cNvPicPr>
@@ -35839,7 +35839,7 @@
                 <a:ea typeface="Helvetica" pitchFamily="34" charset="-122"/>
                 <a:cs typeface="Helvetica" pitchFamily="34" charset="-120"/>
               </a:rPr>
-              <a:t>PX-BACKUP FOR KUBERNETES</a:t>
+              <a:t>QISKIT RUNTIME</a:t>
             </a:r>
             <a:endParaRPr lang="en-US" dirty="0"/>
           </a:p>
@@ -35872,7 +35872,7 @@
       </p:sp>
       <p:pic>
         <p:nvPicPr>
-          <p:cNvPr id="78" name="Object 77" descr="public/generated/icons/b6049020-80f4-11eb-a0f7-e35ec9b4054f.png">    </p:cNvPr>
+          <p:cNvPr id="78" name="Object 77" descr="public/generated/icons/cf5f8ac0-98f7-11e9-a40c-5b3c4bf3cc6d.png">    </p:cNvPr>
           <p:cNvPicPr>
             <a:picLocks noChangeAspect="1"/>
           </p:cNvPicPr>
@@ -35928,7 +35928,7 @@
                 <a:ea typeface="Helvetica" pitchFamily="34" charset="-122"/>
                 <a:cs typeface="Helvetica" pitchFamily="34" charset="-120"/>
               </a:rPr>
-              <a:t>QISKIT RUNTIME</a:t>
+              <a:t>RAXAK PROTECT</a:t>
             </a:r>
             <a:endParaRPr lang="en-US" dirty="0"/>
           </a:p>
@@ -35961,7 +35961,7 @@
       </p:sp>
       <p:pic>
         <p:nvPicPr>
-          <p:cNvPr id="81" name="Object 80" descr="public/generated/icons/cf5f8ac0-98f7-11e9-a40c-5b3c4bf3cc6d.png">    </p:cNvPr>
+          <p:cNvPr id="81" name="Object 80" descr="public/generated/icons/467ab6d8-48dd-485a-adf9-30d5107537a1.png">    </p:cNvPr>
           <p:cNvPicPr>
             <a:picLocks noChangeAspect="1"/>
           </p:cNvPicPr>
@@ -36017,7 +36017,7 @@
                 <a:ea typeface="Helvetica" pitchFamily="34" charset="-122"/>
                 <a:cs typeface="Helvetica" pitchFamily="34" charset="-120"/>
               </a:rPr>
-              <a:t>RAXAK PROTECT</a:t>
+              <a:t>REAL-TIME PAYMENTS</a:t>
             </a:r>
             <a:endParaRPr lang="en-US" dirty="0"/>
           </a:p>
@@ -36050,7 +36050,7 @@
       </p:sp>
       <p:pic>
         <p:nvPicPr>
-          <p:cNvPr id="84" name="Object 83" descr="public/generated/icons/467ab6d8-48dd-485a-adf9-30d5107537a1.png">    </p:cNvPr>
+          <p:cNvPr id="84" name="Object 83" descr="public/generated/icons/openshift.png">    </p:cNvPr>
           <p:cNvPicPr>
             <a:picLocks noChangeAspect="1"/>
           </p:cNvPicPr>
@@ -36106,7 +36106,7 @@
                 <a:ea typeface="Helvetica" pitchFamily="34" charset="-122"/>
                 <a:cs typeface="Helvetica" pitchFamily="34" charset="-120"/>
               </a:rPr>
-              <a:t>REAL-TIME PAYMENTS</a:t>
+              <a:t>RED HAT OPENSHIFT ON IBM CLOUD</a:t>
             </a:r>
             <a:endParaRPr lang="en-US" dirty="0"/>
           </a:p>
@@ -36139,7 +36139,7 @@
       </p:sp>
       <p:pic>
         <p:nvPicPr>
-          <p:cNvPr id="87" name="Object 86" descr="public/generated/icons/openshift.png">    </p:cNvPr>
+          <p:cNvPr id="87" name="Object 86" descr="public/generated/icons/bd517bf0-88ba-11ea-a52e-91aeb42a4019.png">    </p:cNvPr>
           <p:cNvPicPr>
             <a:picLocks noChangeAspect="1"/>
           </p:cNvPicPr>
@@ -36195,7 +36195,7 @@
                 <a:ea typeface="Helvetica" pitchFamily="34" charset="-122"/>
                 <a:cs typeface="Helvetica" pitchFamily="34" charset="-120"/>
               </a:rPr>
-              <a:t>RED HAT OPENSHIFT ON IBM CLOUD</a:t>
+              <a:t>SATELLITE</a:t>
             </a:r>
             <a:endParaRPr lang="en-US" dirty="0"/>
           </a:p>
@@ -36228,7 +36228,7 @@
       </p:sp>
       <p:pic>
         <p:nvPicPr>
-          <p:cNvPr id="90" name="Object 89" descr="public/generated/icons/bd517bf0-88ba-11ea-a52e-91aeb42a4019.png">    </p:cNvPr>
+          <p:cNvPr id="90" name="Object 89" descr="public/generated/icons/schematics.png">    </p:cNvPr>
           <p:cNvPicPr>
             <a:picLocks noChangeAspect="1"/>
           </p:cNvPicPr>
@@ -36284,7 +36284,7 @@
                 <a:ea typeface="Helvetica" pitchFamily="34" charset="-122"/>
                 <a:cs typeface="Helvetica" pitchFamily="34" charset="-120"/>
               </a:rPr>
-              <a:t>SATELLITE</a:t>
+              <a:t>SCHEMATICS</a:t>
             </a:r>
             <a:endParaRPr lang="en-US" dirty="0"/>
           </a:p>
@@ -36317,7 +36317,7 @@
       </p:sp>
       <p:pic>
         <p:nvPicPr>
-          <p:cNvPr id="93" name="Object 92" descr="public/generated/icons/schematics.png">    </p:cNvPr>
+          <p:cNvPr id="93" name="Object 92" descr="public/generated/icons/14.png">    </p:cNvPr>
           <p:cNvPicPr>
             <a:picLocks noChangeAspect="1"/>
           </p:cNvPicPr>
@@ -36373,7 +36373,7 @@
                 <a:ea typeface="Helvetica" pitchFamily="34" charset="-122"/>
                 <a:cs typeface="Helvetica" pitchFamily="34" charset="-120"/>
               </a:rPr>
-              <a:t>SCHEMATICS</a:t>
+              <a:t>SECONDARY SUBNETS</a:t>
             </a:r>
             <a:endParaRPr lang="en-US" dirty="0"/>
           </a:p>
@@ -36406,7 +36406,7 @@
       </p:sp>
       <p:pic>
         <p:nvPicPr>
-          <p:cNvPr id="96" name="Object 95" descr="public/generated/icons/14.png">    </p:cNvPr>
+          <p:cNvPr id="96" name="Object 95" descr="public/generated/icons/ebc0cdb0-af2a-11ea-98c7-29e5db822649.png">    </p:cNvPr>
           <p:cNvPicPr>
             <a:picLocks noChangeAspect="1"/>
           </p:cNvPicPr>
@@ -36462,7 +36462,7 @@
                 <a:ea typeface="Helvetica" pitchFamily="34" charset="-122"/>
                 <a:cs typeface="Helvetica" pitchFamily="34" charset="-120"/>
               </a:rPr>
-              <a:t>SECONDARY SUBNETS</a:t>
+              <a:t>SECRETS MANAGER</a:t>
             </a:r>
             <a:endParaRPr lang="en-US" dirty="0"/>
           </a:p>
@@ -36495,7 +36495,7 @@
       </p:sp>
       <p:pic>
         <p:nvPicPr>
-          <p:cNvPr id="99" name="Object 98" descr="public/generated/icons/ebc0cdb0-af2a-11ea-98c7-29e5db822649.png">    </p:cNvPr>
+          <p:cNvPr id="99" name="Object 98" descr="public/generated/icons/IBM_SecureGateway.png">    </p:cNvPr>
           <p:cNvPicPr>
             <a:picLocks noChangeAspect="1"/>
           </p:cNvPicPr>
@@ -36551,7 +36551,7 @@
                 <a:ea typeface="Helvetica" pitchFamily="34" charset="-122"/>
                 <a:cs typeface="Helvetica" pitchFamily="34" charset="-120"/>
               </a:rPr>
-              <a:t>SECRETS MANAGER</a:t>
+              <a:t>SECURE GATEWAY</a:t>
             </a:r>
             <a:endParaRPr lang="en-US" dirty="0"/>
           </a:p>
@@ -36584,7 +36584,7 @@
       </p:sp>
       <p:pic>
         <p:nvPicPr>
-          <p:cNvPr id="102" name="Object 101" descr="public/generated/icons/IBM_SecureGateway.png">    </p:cNvPr>
+          <p:cNvPr id="102" name="Object 101" descr="public/generated/icons/compliance.png">    </p:cNvPr>
           <p:cNvPicPr>
             <a:picLocks noChangeAspect="1"/>
           </p:cNvPicPr>
@@ -36640,7 +36640,7 @@
                 <a:ea typeface="Helvetica" pitchFamily="34" charset="-122"/>
                 <a:cs typeface="Helvetica" pitchFamily="34" charset="-120"/>
               </a:rPr>
-              <a:t>SECURE GATEWAY</a:t>
+              <a:t>SECURITY AND COMPLIANCE CENTER</a:t>
             </a:r>
             <a:endParaRPr lang="en-US" dirty="0"/>
           </a:p>
@@ -36673,7 +36673,7 @@
       </p:sp>
       <p:pic>
         <p:nvPicPr>
-          <p:cNvPr id="105" name="Object 104" descr="public/generated/icons/compliance.png">    </p:cNvPr>
+          <p:cNvPr id="105" name="Object 104" descr="public/generated/icons/e831e900-82d6-11ec-95c5-c12c5a5d9687.png">    </p:cNvPr>
           <p:cNvPicPr>
             <a:picLocks noChangeAspect="1"/>
           </p:cNvPicPr>
@@ -36729,7 +36729,7 @@
                 <a:ea typeface="Helvetica" pitchFamily="34" charset="-122"/>
                 <a:cs typeface="Helvetica" pitchFamily="34" charset="-120"/>
               </a:rPr>
-              <a:t>SECURITY AND COMPLIANCE CENTER</a:t>
+              <a:t>SECURITY AND COMPLIANCE CENTER WORKLOAD PROTECTION</a:t>
             </a:r>
             <a:endParaRPr lang="en-US" dirty="0"/>
           </a:p>
@@ -36762,7 +36762,7 @@
       </p:sp>
       <p:pic>
         <p:nvPicPr>
-          <p:cNvPr id="108" name="Object 107" descr="public/generated/icons/e831e900-82d6-11ec-95c5-c12c5a5d9687.png">    </p:cNvPr>
+          <p:cNvPr id="108" name="Object 107" descr="public/generated/icons/is.security-group.png">    </p:cNvPr>
           <p:cNvPicPr>
             <a:picLocks noChangeAspect="1"/>
           </p:cNvPicPr>
@@ -36818,7 +36818,7 @@
                 <a:ea typeface="Helvetica" pitchFamily="34" charset="-122"/>
                 <a:cs typeface="Helvetica" pitchFamily="34" charset="-120"/>
               </a:rPr>
-              <a:t>SECURITY AND COMPLIANCE CENTER WORKLOAD PROTECTION</a:t>
+              <a:t>SECURITY GROUP FOR VPC</a:t>
             </a:r>
             <a:endParaRPr lang="en-US" dirty="0"/>
           </a:p>
@@ -36884,7 +36884,7 @@
       </p:sp>
       <p:pic>
         <p:nvPicPr>
-          <p:cNvPr id="3" name="Object 2" descr="public/generated/icons/is.security-group.png">    </p:cNvPr>
+          <p:cNvPr id="3" name="Object 2" descr="public/generated/icons/ABB08BA3-D14D-4BD9-A5E6-EF67C52D35C0.png">    </p:cNvPr>
           <p:cNvPicPr>
             <a:picLocks noChangeAspect="1"/>
           </p:cNvPicPr>
@@ -36940,7 +36940,7 @@
                 <a:ea typeface="Helvetica" pitchFamily="34" charset="-122"/>
                 <a:cs typeface="Helvetica" pitchFamily="34" charset="-120"/>
               </a:rPr>
-              <a:t>SECURITY GROUP FOR VPC</a:t>
+              <a:t>SIMULATED HISTORICAL INSTRUMENT ANALYTICS</a:t>
             </a:r>
             <a:endParaRPr lang="en-US" dirty="0"/>
           </a:p>
@@ -36973,7 +36973,7 @@
       </p:sp>
       <p:pic>
         <p:nvPicPr>
-          <p:cNvPr id="6" name="Object 5" descr="public/generated/icons/ABB08BA3-D14D-4BD9-A5E6-EF67C52D35C0.png">    </p:cNvPr>
+          <p:cNvPr id="6" name="Object 5" descr="public/generated/icons/A888FFEA-E976-4F83-B7EC-288233BF62E6.png">    </p:cNvPr>
           <p:cNvPicPr>
             <a:picLocks noChangeAspect="1"/>
           </p:cNvPicPr>
@@ -37029,7 +37029,7 @@
                 <a:ea typeface="Helvetica" pitchFamily="34" charset="-122"/>
                 <a:cs typeface="Helvetica" pitchFamily="34" charset="-120"/>
               </a:rPr>
-              <a:t>SIMULATED HISTORICAL INSTRUMENT ANALYTICS</a:t>
+              <a:t>SIMULATED INSTRUMENT ANALYTICS</a:t>
             </a:r>
             <a:endParaRPr lang="en-US" dirty="0"/>
           </a:p>
@@ -37062,7 +37062,7 @@
       </p:sp>
       <p:pic>
         <p:nvPicPr>
-          <p:cNvPr id="9" name="Object 8" descr="public/generated/icons/A888FFEA-E976-4F83-B7EC-288233BF62E6.png">    </p:cNvPr>
+          <p:cNvPr id="9" name="Object 8" descr="public/generated/icons/cf329950-0a3e-11e8-922e-f1366c6e1c83-vcstrial_dr.png">    </p:cNvPr>
           <p:cNvPicPr>
             <a:picLocks noChangeAspect="1"/>
           </p:cNvPicPr>
@@ -37118,7 +37118,7 @@
                 <a:ea typeface="Helvetica" pitchFamily="34" charset="-122"/>
                 <a:cs typeface="Helvetica" pitchFamily="34" charset="-120"/>
               </a:rPr>
-              <a:t>SIMULATED INSTRUMENT ANALYTICS</a:t>
+              <a:t>SINGLE-NODE TRIAL FOR DATA PROTECTION AND DISASTER RECOVERY</a:t>
             </a:r>
             <a:endParaRPr lang="en-US" dirty="0"/>
           </a:p>
@@ -37151,7 +37151,7 @@
       </p:sp>
       <p:pic>
         <p:nvPicPr>
-          <p:cNvPr id="12" name="Object 11" descr="public/generated/icons/cf329950-0a3e-11e8-922e-f1366c6e1c83-vcstrial_dr.png">    </p:cNvPr>
+          <p:cNvPr id="12" name="Object 11" descr="public/generated/icons/cf329950-0a3e-11e8-922e-f1366c6e1c83-vcstrial.png">    </p:cNvPr>
           <p:cNvPicPr>
             <a:picLocks noChangeAspect="1"/>
           </p:cNvPicPr>
@@ -37207,7 +37207,7 @@
                 <a:ea typeface="Helvetica" pitchFamily="34" charset="-122"/>
                 <a:cs typeface="Helvetica" pitchFamily="34" charset="-120"/>
               </a:rPr>
-              <a:t>SINGLE-NODE TRIAL FOR DATA PROTECTION AND DISASTER RECOVERY</a:t>
+              <a:t>SINGLE-NODE TRIAL FOR MIGRATION AND APP MODERNIZATION</a:t>
             </a:r>
             <a:endParaRPr lang="en-US" dirty="0"/>
           </a:p>
@@ -37240,7 +37240,7 @@
       </p:sp>
       <p:pic>
         <p:nvPicPr>
-          <p:cNvPr id="15" name="Object 14" descr="public/generated/icons/cf329950-0a3e-11e8-922e-f1366c6e1c83-vcstrial.png">    </p:cNvPr>
+          <p:cNvPr id="15" name="Object 14" descr="public/generated/icons/fdf77820-deed-11e9-911d-5f09017358ff.png">    </p:cNvPr>
           <p:cNvPicPr>
             <a:picLocks noChangeAspect="1"/>
           </p:cNvPicPr>
@@ -37296,7 +37296,7 @@
                 <a:ea typeface="Helvetica" pitchFamily="34" charset="-122"/>
                 <a:cs typeface="Helvetica" pitchFamily="34" charset="-120"/>
               </a:rPr>
-              <a:t>SINGLE-NODE TRIAL FOR MIGRATION AND APP MODERNIZATION</a:t>
+              <a:t>SKYTAP ON IBM CLOUD</a:t>
             </a:r>
             <a:endParaRPr lang="en-US" dirty="0"/>
           </a:p>
@@ -37329,7 +37329,7 @@
       </p:sp>
       <p:pic>
         <p:nvPicPr>
-          <p:cNvPr id="18" name="Object 17" descr="public/generated/icons/fdf77820-deed-11e9-911d-5f09017358ff.png">    </p:cNvPr>
+          <p:cNvPr id="18" name="Object 17" descr="public/generated/icons/cf329950-0a3e-11e8-922e-f1366c6e1c83-spplus.png">    </p:cNvPr>
           <p:cNvPicPr>
             <a:picLocks noChangeAspect="1"/>
           </p:cNvPicPr>
@@ -37385,7 +37385,7 @@
                 <a:ea typeface="Helvetica" pitchFamily="34" charset="-122"/>
                 <a:cs typeface="Helvetica" pitchFamily="34" charset="-120"/>
               </a:rPr>
-              <a:t>SKYTAP ON IBM CLOUD</a:t>
+              <a:t>SPECTRUM PROTECT PLUS</a:t>
             </a:r>
             <a:endParaRPr lang="en-US" dirty="0"/>
           </a:p>
@@ -37418,7 +37418,7 @@
       </p:sp>
       <p:pic>
         <p:nvPicPr>
-          <p:cNvPr id="21" name="Object 20" descr="public/generated/icons/cf329950-0a3e-11e8-922e-f1366c6e1c83-spplus.png">    </p:cNvPr>
+          <p:cNvPr id="21" name="Object 20" descr="public/generated/icons/bc35fb8c-bc5b-431b-859e-3861771d5843.png">    </p:cNvPr>
           <p:cNvPicPr>
             <a:picLocks noChangeAspect="1"/>
           </p:cNvPicPr>
@@ -37474,7 +37474,7 @@
                 <a:ea typeface="Helvetica" pitchFamily="34" charset="-122"/>
                 <a:cs typeface="Helvetica" pitchFamily="34" charset="-120"/>
               </a:rPr>
-              <a:t>SPECTRUM PROTECT PLUS</a:t>
+              <a:t>SPEECH TO TEXT</a:t>
             </a:r>
             <a:endParaRPr lang="en-US" dirty="0"/>
           </a:p>
@@ -37507,7 +37507,7 @@
       </p:sp>
       <p:pic>
         <p:nvPicPr>
-          <p:cNvPr id="24" name="Object 23" descr="public/generated/icons/bc35fb8c-bc5b-431b-859e-3861771d5843.png">    </p:cNvPr>
+          <p:cNvPr id="24" name="Object 23" descr="public/generated/icons/556153d0-5ad0-11e9-b7f9-41319ef22125.png">    </p:cNvPr>
           <p:cNvPicPr>
             <a:picLocks noChangeAspect="1"/>
           </p:cNvPicPr>
@@ -37563,7 +37563,7 @@
                 <a:ea typeface="Helvetica" pitchFamily="34" charset="-122"/>
                 <a:cs typeface="Helvetica" pitchFamily="34" charset="-120"/>
               </a:rPr>
-              <a:t>SPEECH TO TEXT</a:t>
+              <a:t>SSH KEY FOR VPC</a:t>
             </a:r>
             <a:endParaRPr lang="en-US" dirty="0"/>
           </a:p>
@@ -37596,7 +37596,7 @@
       </p:sp>
       <p:pic>
         <p:nvPicPr>
-          <p:cNvPr id="27" name="Object 26" descr="public/generated/icons/556153d0-5ad0-11e9-b7f9-41319ef22125.png">    </p:cNvPr>
+          <p:cNvPr id="27" name="Object 26" descr="public/generated/icons/19.png">    </p:cNvPr>
           <p:cNvPicPr>
             <a:picLocks noChangeAspect="1"/>
           </p:cNvPicPr>
@@ -37652,7 +37652,7 @@
                 <a:ea typeface="Helvetica" pitchFamily="34" charset="-122"/>
                 <a:cs typeface="Helvetica" pitchFamily="34" charset="-120"/>
               </a:rPr>
-              <a:t>SSH KEY FOR VPC</a:t>
+              <a:t>SSL CERTIFICATES</a:t>
             </a:r>
             <a:endParaRPr lang="en-US" dirty="0"/>
           </a:p>
@@ -37685,7 +37685,7 @@
       </p:sp>
       <p:pic>
         <p:nvPicPr>
-          <p:cNvPr id="30" name="Object 29" descr="public/generated/icons/19.png">    </p:cNvPr>
+          <p:cNvPr id="30" name="Object 29" descr="public/generated/icons/5acdbc42-8965-48f9-8a3c-1c728b6ed2c4.png">    </p:cNvPr>
           <p:cNvPicPr>
             <a:picLocks noChangeAspect="1"/>
           </p:cNvPicPr>
@@ -37741,7 +37741,7 @@
                 <a:ea typeface="Helvetica" pitchFamily="34" charset="-122"/>
                 <a:cs typeface="Helvetica" pitchFamily="34" charset="-120"/>
               </a:rPr>
-              <a:t>SSL CERTIFICATES</a:t>
+              <a:t>STREAMING ANALYTICS</a:t>
             </a:r>
             <a:endParaRPr lang="en-US" dirty="0"/>
           </a:p>
@@ -37774,7 +37774,7 @@
       </p:sp>
       <p:pic>
         <p:nvPicPr>
-          <p:cNvPr id="33" name="Object 32" descr="public/generated/icons/5acdbc42-8965-48f9-8a3c-1c728b6ed2c4.png">    </p:cNvPr>
+          <p:cNvPr id="33" name="Object 32" descr="public/generated/icons/is.subnet.png">    </p:cNvPr>
           <p:cNvPicPr>
             <a:picLocks noChangeAspect="1"/>
           </p:cNvPicPr>
@@ -37830,7 +37830,7 @@
                 <a:ea typeface="Helvetica" pitchFamily="34" charset="-122"/>
                 <a:cs typeface="Helvetica" pitchFamily="34" charset="-120"/>
               </a:rPr>
-              <a:t>STREAMING ANALYTICS</a:t>
+              <a:t>SUBNET</a:t>
             </a:r>
             <a:endParaRPr lang="en-US" dirty="0"/>
           </a:p>
@@ -37863,7 +37863,7 @@
       </p:sp>
       <p:pic>
         <p:nvPicPr>
-          <p:cNvPr id="36" name="Object 35" descr="public/generated/icons/is.subnet.png">    </p:cNvPr>
+          <p:cNvPr id="36" name="Object 35" descr="public/generated/icons/282c1d79-9176-4597-9cff-941a8d6cfd4c.png">    </p:cNvPr>
           <p:cNvPicPr>
             <a:picLocks noChangeAspect="1"/>
           </p:cNvPicPr>
@@ -37919,7 +37919,7 @@
                 <a:ea typeface="Helvetica" pitchFamily="34" charset="-122"/>
                 <a:cs typeface="Helvetica" pitchFamily="34" charset="-120"/>
               </a:rPr>
-              <a:t>SUBNET</a:t>
+              <a:t>TEXT TO SPEECH</a:t>
             </a:r>
             <a:endParaRPr lang="en-US" dirty="0"/>
           </a:p>
@@ -37952,7 +37952,7 @@
       </p:sp>
       <p:pic>
         <p:nvPicPr>
-          <p:cNvPr id="39" name="Object 38" descr="public/generated/icons/282c1d79-9176-4597-9cff-941a8d6cfd4c.png">    </p:cNvPr>
+          <p:cNvPr id="39" name="Object 38" descr="public/generated/icons/e512e5f0-64fb-11e8-9c23-830c05b8b729.png">    </p:cNvPr>
           <p:cNvPicPr>
             <a:picLocks noChangeAspect="1"/>
           </p:cNvPicPr>
@@ -38008,7 +38008,7 @@
                 <a:ea typeface="Helvetica" pitchFamily="34" charset="-122"/>
                 <a:cs typeface="Helvetica" pitchFamily="34" charset="-120"/>
               </a:rPr>
-              <a:t>TEXT TO SPEECH</a:t>
+              <a:t>TOOLCHAIN</a:t>
             </a:r>
             <a:endParaRPr lang="en-US" dirty="0"/>
           </a:p>
@@ -38041,7 +38041,7 @@
       </p:sp>
       <p:pic>
         <p:nvPicPr>
-          <p:cNvPr id="42" name="Object 41" descr="public/generated/icons/e512e5f0-64fb-11e8-9c23-830c05b8b729.png">    </p:cNvPr>
+          <p:cNvPr id="42" name="Object 41" descr="public/generated/icons/f38a4da0-c353-11e9-83b6-a36a57a97a06.png">    </p:cNvPr>
           <p:cNvPicPr>
             <a:picLocks noChangeAspect="1"/>
           </p:cNvPicPr>
@@ -38097,7 +38097,7 @@
                 <a:ea typeface="Helvetica" pitchFamily="34" charset="-122"/>
                 <a:cs typeface="Helvetica" pitchFamily="34" charset="-120"/>
               </a:rPr>
-              <a:t>TOOLCHAIN</a:t>
+              <a:t>TRANSIT GATEWAY</a:t>
             </a:r>
             <a:endParaRPr lang="en-US" dirty="0"/>
           </a:p>
@@ -38130,7 +38130,7 @@
       </p:sp>
       <p:pic>
         <p:nvPicPr>
-          <p:cNvPr id="45" name="Object 44" descr="public/generated/icons/f38a4da0-c353-11e9-83b6-a36a57a97a06.png">    </p:cNvPr>
+          <p:cNvPr id="45" name="Object 44" descr="public/generated/icons/vmware.directorsite.png">    </p:cNvPr>
           <p:cNvPicPr>
             <a:picLocks noChangeAspect="1"/>
           </p:cNvPicPr>
@@ -38186,7 +38186,7 @@
                 <a:ea typeface="Helvetica" pitchFamily="34" charset="-122"/>
                 <a:cs typeface="Helvetica" pitchFamily="34" charset="-120"/>
               </a:rPr>
-              <a:t>TRANSIT GATEWAY</a:t>
+              <a:t>VCF AS A SERVICE - CLOUD DIRECTOR SITE</a:t>
             </a:r>
             <a:endParaRPr lang="en-US" dirty="0"/>
           </a:p>
@@ -38219,7 +38219,7 @@
       </p:sp>
       <p:pic>
         <p:nvPicPr>
-          <p:cNvPr id="48" name="Object 47" descr="public/generated/icons/vmware.directorsite.png">    </p:cNvPr>
+          <p:cNvPr id="48" name="Object 47" descr="public/generated/icons/vmware.vdc.png">    </p:cNvPr>
           <p:cNvPicPr>
             <a:picLocks noChangeAspect="1"/>
           </p:cNvPicPr>
@@ -38275,7 +38275,7 @@
                 <a:ea typeface="Helvetica" pitchFamily="34" charset="-122"/>
                 <a:cs typeface="Helvetica" pitchFamily="34" charset="-120"/>
               </a:rPr>
-              <a:t>VCF AS A SERVICE - CLOUD DIRECTOR SITE</a:t>
+              <a:t>VCF AS A SERVICE - VIRTUAL DATA CENTER</a:t>
             </a:r>
             <a:endParaRPr lang="en-US" dirty="0"/>
           </a:p>
@@ -38308,7 +38308,7 @@
       </p:sp>
       <p:pic>
         <p:nvPicPr>
-          <p:cNvPr id="51" name="Object 50" descr="public/generated/icons/vmware.vdc.png">    </p:cNvPr>
+          <p:cNvPr id="51" name="Object 50" descr="public/generated/icons/cf329950-0a3e-11e8-922e-f1366c6e1c83-veeam.png">    </p:cNvPr>
           <p:cNvPicPr>
             <a:picLocks noChangeAspect="1"/>
           </p:cNvPicPr>
@@ -38364,7 +38364,7 @@
                 <a:ea typeface="Helvetica" pitchFamily="34" charset="-122"/>
                 <a:cs typeface="Helvetica" pitchFamily="34" charset="-120"/>
               </a:rPr>
-              <a:t>VCF AS A SERVICE - VIRTUAL DATA CENTER</a:t>
+              <a:t>VEEAM</a:t>
             </a:r>
             <a:endParaRPr lang="en-US" dirty="0"/>
           </a:p>
@@ -38397,7 +38397,7 @@
       </p:sp>
       <p:pic>
         <p:nvPicPr>
-          <p:cNvPr id="54" name="Object 53" descr="public/generated/icons/cf329950-0a3e-11e8-922e-f1366c6e1c83-veeam.png">    </p:cNvPr>
+          <p:cNvPr id="54" name="Object 53" descr="public/generated/icons/66644e80-f35a-11ee-923f-2fe367129617.png">    </p:cNvPr>
           <p:cNvPicPr>
             <a:picLocks noChangeAspect="1"/>
           </p:cNvPicPr>
@@ -38453,7 +38453,7 @@
                 <a:ea typeface="Helvetica" pitchFamily="34" charset="-122"/>
                 <a:cs typeface="Helvetica" pitchFamily="34" charset="-120"/>
               </a:rPr>
-              <a:t>VEEAM</a:t>
+              <a:t>VERIFY</a:t>
             </a:r>
             <a:endParaRPr lang="en-US" dirty="0"/>
           </a:p>
@@ -38486,7 +38486,7 @@
       </p:sp>
       <p:pic>
         <p:nvPicPr>
-          <p:cNvPr id="57" name="Object 56" descr="public/generated/icons/66644e80-f35a-11ee-923f-2fe367129617.png">    </p:cNvPr>
+          <p:cNvPr id="57" name="Object 56" descr="public/generated/icons/is.virtual-network-interface.png">    </p:cNvPr>
           <p:cNvPicPr>
             <a:picLocks noChangeAspect="1"/>
           </p:cNvPicPr>
@@ -38542,7 +38542,7 @@
                 <a:ea typeface="Helvetica" pitchFamily="34" charset="-122"/>
                 <a:cs typeface="Helvetica" pitchFamily="34" charset="-120"/>
               </a:rPr>
-              <a:t>VERIFY</a:t>
+              <a:t>VIRTUAL NETWORK INTERFACE</a:t>
             </a:r>
             <a:endParaRPr lang="en-US" dirty="0"/>
           </a:p>
@@ -38575,7 +38575,7 @@
       </p:sp>
       <p:pic>
         <p:nvPicPr>
-          <p:cNvPr id="60" name="Object 59" descr="public/generated/icons/is.virtual-network-interface.png">    </p:cNvPr>
+          <p:cNvPr id="60" name="Object 59" descr="public/generated/icons/is.vpc.png">    </p:cNvPr>
           <p:cNvPicPr>
             <a:picLocks noChangeAspect="1"/>
           </p:cNvPicPr>
@@ -38631,7 +38631,7 @@
                 <a:ea typeface="Helvetica" pitchFamily="34" charset="-122"/>
                 <a:cs typeface="Helvetica" pitchFamily="34" charset="-120"/>
               </a:rPr>
-              <a:t>VIRTUAL NETWORK INTERFACE</a:t>
+              <a:t>VIRTUAL PRIVATE CLOUD</a:t>
             </a:r>
             <a:endParaRPr lang="en-US" dirty="0"/>
           </a:p>
@@ -38664,7 +38664,7 @@
       </p:sp>
       <p:pic>
         <p:nvPicPr>
-          <p:cNvPr id="63" name="Object 62" descr="public/generated/icons/is.vpc.png">    </p:cNvPr>
+          <p:cNvPr id="63" name="Object 62" descr="public/generated/icons/is.endpoint-gateway.png">    </p:cNvPr>
           <p:cNvPicPr>
             <a:picLocks noChangeAspect="1"/>
           </p:cNvPicPr>
@@ -38720,7 +38720,7 @@
                 <a:ea typeface="Helvetica" pitchFamily="34" charset="-122"/>
                 <a:cs typeface="Helvetica" pitchFamily="34" charset="-120"/>
               </a:rPr>
-              <a:t>VIRTUAL PRIVATE CLOUD</a:t>
+              <a:t>VIRTUAL PRIVATE ENDPOINT FOR VPC</a:t>
             </a:r>
             <a:endParaRPr lang="en-US" dirty="0"/>
           </a:p>
@@ -38753,7 +38753,7 @@
       </p:sp>
       <p:pic>
         <p:nvPicPr>
-          <p:cNvPr id="66" name="Object 65" descr="public/generated/icons/is.endpoint-gateway.png">    </p:cNvPr>
+          <p:cNvPr id="66" name="Object 65" descr="public/generated/icons/887073fb-ba5b-9407-d2ac-938308d890e4.png">    </p:cNvPr>
           <p:cNvPicPr>
             <a:picLocks noChangeAspect="1"/>
           </p:cNvPicPr>
@@ -38809,7 +38809,7 @@
                 <a:ea typeface="Helvetica" pitchFamily="34" charset="-122"/>
                 <a:cs typeface="Helvetica" pitchFamily="34" charset="-120"/>
               </a:rPr>
-              <a:t>VIRTUAL PRIVATE ENDPOINT FOR VPC</a:t>
+              <a:t>VIRTUAL ROUTER APPLIANCE</a:t>
             </a:r>
             <a:endParaRPr lang="en-US" dirty="0"/>
           </a:p>
@@ -38842,7 +38842,7 @@
       </p:sp>
       <p:pic>
         <p:nvPicPr>
-          <p:cNvPr id="69" name="Object 68" descr="public/generated/icons/887073fb-ba5b-9407-d2ac-938308d890e4.png">    </p:cNvPr>
+          <p:cNvPr id="69" name="Object 68" descr="public/generated/icons/virtual-server-group.png">    </p:cNvPr>
           <p:cNvPicPr>
             <a:picLocks noChangeAspect="1"/>
           </p:cNvPicPr>
@@ -38898,7 +38898,7 @@
                 <a:ea typeface="Helvetica" pitchFamily="34" charset="-122"/>
                 <a:cs typeface="Helvetica" pitchFamily="34" charset="-120"/>
               </a:rPr>
-              <a:t>VIRTUAL ROUTER APPLIANCE</a:t>
+              <a:t>VIRTUAL SERVER FOR CLASSIC</a:t>
             </a:r>
             <a:endParaRPr lang="en-US" dirty="0"/>
           </a:p>
@@ -38931,7 +38931,7 @@
       </p:sp>
       <p:pic>
         <p:nvPicPr>
-          <p:cNvPr id="72" name="Object 71" descr="public/generated/icons/virtual-server-group.png">    </p:cNvPr>
+          <p:cNvPr id="72" name="Object 71" descr="public/generated/icons/is.instance.png">    </p:cNvPr>
           <p:cNvPicPr>
             <a:picLocks noChangeAspect="1"/>
           </p:cNvPicPr>
@@ -38987,7 +38987,7 @@
                 <a:ea typeface="Helvetica" pitchFamily="34" charset="-122"/>
                 <a:cs typeface="Helvetica" pitchFamily="34" charset="-120"/>
               </a:rPr>
-              <a:t>VIRTUAL SERVER FOR CLASSIC</a:t>
+              <a:t>VIRTUAL SERVER FOR VPC</a:t>
             </a:r>
             <a:endParaRPr lang="en-US" dirty="0"/>
           </a:p>
@@ -39020,7 +39020,7 @@
       </p:sp>
       <p:pic>
         <p:nvPicPr>
-          <p:cNvPr id="75" name="Object 74" descr="public/generated/icons/is.instance.png">    </p:cNvPr>
+          <p:cNvPr id="75" name="Object 74" descr="public/generated/icons/15.png">    </p:cNvPr>
           <p:cNvPicPr>
             <a:picLocks noChangeAspect="1"/>
           </p:cNvPicPr>
@@ -39076,7 +39076,7 @@
                 <a:ea typeface="Helvetica" pitchFamily="34" charset="-122"/>
                 <a:cs typeface="Helvetica" pitchFamily="34" charset="-120"/>
               </a:rPr>
-              <a:t>VIRTUAL SERVER FOR VPC</a:t>
+              <a:t>VLAN</a:t>
             </a:r>
             <a:endParaRPr lang="en-US" dirty="0"/>
           </a:p>
@@ -39109,7 +39109,7 @@
       </p:sp>
       <p:pic>
         <p:nvPicPr>
-          <p:cNvPr id="78" name="Object 77" descr="public/generated/icons/15.png">    </p:cNvPr>
+          <p:cNvPr id="78" name="Object 77" descr="public/generated/icons/09f5a6ea-185e-4625-8281-9e8629360a4f.png">    </p:cNvPr>
           <p:cNvPicPr>
             <a:picLocks noChangeAspect="1"/>
           </p:cNvPicPr>
@@ -39165,7 +39165,7 @@
                 <a:ea typeface="Helvetica" pitchFamily="34" charset="-122"/>
                 <a:cs typeface="Helvetica" pitchFamily="34" charset="-120"/>
               </a:rPr>
-              <a:t>VLAN</a:t>
+              <a:t>VMWARE CLOUD MIGRATION SERVICES</a:t>
             </a:r>
             <a:endParaRPr lang="en-US" dirty="0"/>
           </a:p>
@@ -39198,7 +39198,7 @@
       </p:sp>
       <p:pic>
         <p:nvPicPr>
-          <p:cNvPr id="81" name="Object 80" descr="public/generated/icons/09f5a6ea-185e-4625-8281-9e8629360a4f.png">    </p:cNvPr>
+          <p:cNvPr id="81" name="Object 80" descr="public/generated/icons/cf329950-0a3e-11e8-922e-f1366c6e1c83.png">    </p:cNvPr>
           <p:cNvPicPr>
             <a:picLocks noChangeAspect="1"/>
           </p:cNvPicPr>
@@ -39254,7 +39254,7 @@
                 <a:ea typeface="Helvetica" pitchFamily="34" charset="-122"/>
                 <a:cs typeface="Helvetica" pitchFamily="34" charset="-120"/>
               </a:rPr>
-              <a:t>VMWARE CLOUD MIGRATION SERVICES</a:t>
+              <a:t>VMWARE SOLUTIONS</a:t>
             </a:r>
             <a:endParaRPr lang="en-US" dirty="0"/>
           </a:p>
@@ -39287,7 +39287,7 @@
       </p:sp>
       <p:pic>
         <p:nvPicPr>
-          <p:cNvPr id="84" name="Object 83" descr="public/generated/icons/cf329950-0a3e-11e8-922e-f1366c6e1c83.png">    </p:cNvPr>
+          <p:cNvPr id="84" name="Object 83" descr="public/generated/icons/cf329950-0a3e-11e8-922e-f1366c6e1c83-vcenterserver.png">    </p:cNvPr>
           <p:cNvPicPr>
             <a:picLocks noChangeAspect="1"/>
           </p:cNvPicPr>
@@ -39343,7 +39343,7 @@
                 <a:ea typeface="Helvetica" pitchFamily="34" charset="-122"/>
                 <a:cs typeface="Helvetica" pitchFamily="34" charset="-120"/>
               </a:rPr>
-              <a:t>VMWARE SOLUTIONS</a:t>
+              <a:t>VMWARE VCENTER SERVER</a:t>
             </a:r>
             <a:endParaRPr lang="en-US" dirty="0"/>
           </a:p>
@@ -39376,7 +39376,7 @@
       </p:sp>
       <p:pic>
         <p:nvPicPr>
-          <p:cNvPr id="87" name="Object 86" descr="public/generated/icons/cf329950-0a3e-11e8-922e-f1366c6e1c83-vcenterserver.png">    </p:cNvPr>
+          <p:cNvPr id="87" name="Object 86" descr="public/generated/icons/cf329950-0a3e-11e8-922e-f1366c6e1c83-vsphere.png">    </p:cNvPr>
           <p:cNvPicPr>
             <a:picLocks noChangeAspect="1"/>
           </p:cNvPicPr>
@@ -39432,7 +39432,7 @@
                 <a:ea typeface="Helvetica" pitchFamily="34" charset="-122"/>
                 <a:cs typeface="Helvetica" pitchFamily="34" charset="-120"/>
               </a:rPr>
-              <a:t>VMWARE VCENTER SERVER</a:t>
+              <a:t>VMWARE VSPHERE</a:t>
             </a:r>
             <a:endParaRPr lang="en-US" dirty="0"/>
           </a:p>
@@ -39465,7 +39465,7 @@
       </p:sp>
       <p:pic>
         <p:nvPicPr>
-          <p:cNvPr id="90" name="Object 89" descr="public/generated/icons/cf329950-0a3e-11e8-922e-f1366c6e1c83-vsphere.png">    </p:cNvPr>
+          <p:cNvPr id="90" name="Object 89" descr="public/generated/icons/b6670b68-84ca-4a04-b8e8-c567dfeeddde.png">    </p:cNvPr>
           <p:cNvPicPr>
             <a:picLocks noChangeAspect="1"/>
           </p:cNvPicPr>
@@ -39521,7 +39521,7 @@
                 <a:ea typeface="Helvetica" pitchFamily="34" charset="-122"/>
                 <a:cs typeface="Helvetica" pitchFamily="34" charset="-120"/>
               </a:rPr>
-              <a:t>VMWARE VSPHERE</a:t>
+              <a:t>VPC COAAS (VPC COST OPTIMIZATION AS A SERVICE)</a:t>
             </a:r>
             <a:endParaRPr lang="en-US" dirty="0"/>
           </a:p>
@@ -39554,7 +39554,7 @@
       </p:sp>
       <p:pic>
         <p:nvPicPr>
-          <p:cNvPr id="93" name="Object 92" descr="public/generated/icons/b6670b68-84ca-4a04-b8e8-c567dfeeddde.png">    </p:cNvPr>
+          <p:cNvPr id="93" name="Object 92" descr="public/generated/icons/757254b0-a9a0-11ea-9ff6-17a22eb543c5.png">    </p:cNvPr>
           <p:cNvPicPr>
             <a:picLocks noChangeAspect="1"/>
           </p:cNvPicPr>
@@ -39610,7 +39610,7 @@
                 <a:ea typeface="Helvetica" pitchFamily="34" charset="-122"/>
                 <a:cs typeface="Helvetica" pitchFamily="34" charset="-120"/>
               </a:rPr>
-              <a:t>VPC COAAS (VPC COST OPTIMIZATION AS A SERVICE)</a:t>
+              <a:t>VPC+ CLOUD MIGRATION</a:t>
             </a:r>
             <a:endParaRPr lang="en-US" dirty="0"/>
           </a:p>
@@ -39643,7 +39643,7 @@
       </p:sp>
       <p:pic>
         <p:nvPicPr>
-          <p:cNvPr id="96" name="Object 95" descr="public/generated/icons/757254b0-a9a0-11ea-9ff6-17a22eb543c5.png">    </p:cNvPr>
+          <p:cNvPr id="96" name="Object 95" descr="public/generated/icons/fd1e0240-dd95-11eb-b4a0-db1c9221b8a2.png">    </p:cNvPr>
           <p:cNvPicPr>
             <a:picLocks noChangeAspect="1"/>
           </p:cNvPicPr>
@@ -39699,7 +39699,7 @@
                 <a:ea typeface="Helvetica" pitchFamily="34" charset="-122"/>
                 <a:cs typeface="Helvetica" pitchFamily="34" charset="-120"/>
               </a:rPr>
-              <a:t>VPC+ CLOUD MIGRATION</a:t>
+              <a:t>VPC+ DRAAS (VPC+ DISASTER RECOVERY AS A SERVICE)</a:t>
             </a:r>
             <a:endParaRPr lang="en-US" dirty="0"/>
           </a:p>
@@ -39732,7 +39732,7 @@
       </p:sp>
       <p:pic>
         <p:nvPicPr>
-          <p:cNvPr id="99" name="Object 98" descr="public/generated/icons/fd1e0240-dd95-11eb-b4a0-db1c9221b8a2.png">    </p:cNvPr>
+          <p:cNvPr id="99" name="Object 98" descr="public/generated/icons/is.vpn.png">    </p:cNvPr>
           <p:cNvPicPr>
             <a:picLocks noChangeAspect="1"/>
           </p:cNvPicPr>
@@ -39788,7 +39788,7 @@
                 <a:ea typeface="Helvetica" pitchFamily="34" charset="-122"/>
                 <a:cs typeface="Helvetica" pitchFamily="34" charset="-120"/>
               </a:rPr>
-              <a:t>VPC+ DRAAS (VPC+ DISASTER RECOVERY AS A SERVICE)</a:t>
+              <a:t>VPN FOR VPC</a:t>
             </a:r>
             <a:endParaRPr lang="en-US" dirty="0"/>
           </a:p>
@@ -39821,7 +39821,7 @@
       </p:sp>
       <p:pic>
         <p:nvPicPr>
-          <p:cNvPr id="102" name="Object 101" descr="public/generated/icons/is.vpn.png">    </p:cNvPr>
+          <p:cNvPr id="102" name="Object 101" descr="public/generated/icons/cf329950-0a3e-11e8-922e-f1366c6e1c83-vrops.png">    </p:cNvPr>
           <p:cNvPicPr>
             <a:picLocks noChangeAspect="1"/>
           </p:cNvPicPr>
@@ -39877,7 +39877,7 @@
                 <a:ea typeface="Helvetica" pitchFamily="34" charset="-122"/>
                 <a:cs typeface="Helvetica" pitchFamily="34" charset="-120"/>
               </a:rPr>
-              <a:t>VPN FOR VPC</a:t>
+              <a:t>VREALIZE OPERATIONS AND LOG INSIGHT</a:t>
             </a:r>
             <a:endParaRPr lang="en-US" dirty="0"/>
           </a:p>
@@ -39910,7 +39910,7 @@
       </p:sp>
       <p:pic>
         <p:nvPicPr>
-          <p:cNvPr id="105" name="Object 104" descr="public/generated/icons/cf329950-0a3e-11e8-922e-f1366c6e1c83-vrops.png">    </p:cNvPr>
+          <p:cNvPr id="105" name="Object 104" descr="public/generated/icons/76b7bf22-b443-47db-b3db-066ba2988f47.png">    </p:cNvPr>
           <p:cNvPicPr>
             <a:picLocks noChangeAspect="1"/>
           </p:cNvPicPr>
@@ -39966,7 +39966,7 @@
                 <a:ea typeface="Helvetica" pitchFamily="34" charset="-122"/>
                 <a:cs typeface="Helvetica" pitchFamily="34" charset="-120"/>
               </a:rPr>
-              <a:t>VREALIZE OPERATIONS AND LOG INSIGHT</a:t>
+              <a:t>WATSON DISCOVERY</a:t>
             </a:r>
             <a:endParaRPr lang="en-US" dirty="0"/>
           </a:p>
@@ -39999,7 +39999,7 @@
       </p:sp>
       <p:pic>
         <p:nvPicPr>
-          <p:cNvPr id="108" name="Object 107" descr="public/generated/icons/76b7bf22-b443-47db-b3db-066ba2988f47.png">    </p:cNvPr>
+          <p:cNvPr id="108" name="Object 107" descr="public/generated/icons/12fbfff4-12c7-ccd0-80e6-603e8607468a.png">    </p:cNvPr>
           <p:cNvPicPr>
             <a:picLocks noChangeAspect="1"/>
           </p:cNvPicPr>
@@ -40055,7 +40055,7 @@
                 <a:ea typeface="Helvetica" pitchFamily="34" charset="-122"/>
                 <a:cs typeface="Helvetica" pitchFamily="34" charset="-120"/>
               </a:rPr>
-              <a:t>WATSON DISCOVERY</a:t>
+              <a:t>WATSONX</a:t>
             </a:r>
             <a:endParaRPr lang="en-US" dirty="0"/>
           </a:p>
@@ -40121,7 +40121,7 @@
       </p:sp>
       <p:pic>
         <p:nvPicPr>
-          <p:cNvPr id="3" name="Object 2" descr="public/generated/icons/12fbfff4-12c7-ccd0-80e6-603e8607468a.png">    </p:cNvPr>
+          <p:cNvPr id="3" name="Object 2" descr="public/generated/icons/7045626d-55e3-4418-be11-683a26dbc1e5.png">    </p:cNvPr>
           <p:cNvPicPr>
             <a:picLocks noChangeAspect="1"/>
           </p:cNvPicPr>
@@ -40177,7 +40177,7 @@
                 <a:ea typeface="Helvetica" pitchFamily="34" charset="-122"/>
                 <a:cs typeface="Helvetica" pitchFamily="34" charset="-120"/>
               </a:rPr>
-              <a:t>WATSONX</a:t>
+              <a:t>WATSONX ASSISTANT</a:t>
             </a:r>
             <a:endParaRPr lang="en-US" dirty="0"/>
           </a:p>
@@ -40210,7 +40210,7 @@
       </p:sp>
       <p:pic>
         <p:nvPicPr>
-          <p:cNvPr id="6" name="Object 5" descr="public/generated/icons/7045626d-55e3-4418-be11-683a26dbc1e5.png">    </p:cNvPr>
+          <p:cNvPr id="6" name="Object 5" descr="public/generated/icons/11530fa0-1776-11ee-93f6-1d4066e6a409.png">    </p:cNvPr>
           <p:cNvPicPr>
             <a:picLocks noChangeAspect="1"/>
           </p:cNvPicPr>
@@ -40266,7 +40266,7 @@
                 <a:ea typeface="Helvetica" pitchFamily="34" charset="-122"/>
                 <a:cs typeface="Helvetica" pitchFamily="34" charset="-120"/>
               </a:rPr>
-              <a:t>WATSONX ASSISTANT</a:t>
+              <a:t>WATSONX CODE ASSISTANT</a:t>
             </a:r>
             <a:endParaRPr lang="en-US" dirty="0"/>
           </a:p>
@@ -40299,7 +40299,7 @@
       </p:sp>
       <p:pic>
         <p:nvPicPr>
-          <p:cNvPr id="9" name="Object 8" descr="public/generated/icons/11530fa0-1776-11ee-93f6-1d4066e6a409.png">    </p:cNvPr>
+          <p:cNvPr id="9" name="Object 8" descr="public/generated/icons/b69f78c0-11d7-11ef-9bdf-c92eb40d1838.png">    </p:cNvPr>
           <p:cNvPicPr>
             <a:picLocks noChangeAspect="1"/>
           </p:cNvPicPr>
@@ -40355,7 +40355,7 @@
                 <a:ea typeface="Helvetica" pitchFamily="34" charset="-122"/>
                 <a:cs typeface="Helvetica" pitchFamily="34" charset="-120"/>
               </a:rPr>
-              <a:t>WATSONX CODE ASSISTANT</a:t>
+              <a:t>WATSONX ORCHESTRATE</a:t>
             </a:r>
             <a:endParaRPr lang="en-US" dirty="0"/>
           </a:p>
@@ -40388,7 +40388,7 @@
       </p:sp>
       <p:pic>
         <p:nvPicPr>
-          <p:cNvPr id="12" name="Object 11" descr="public/generated/icons/b69f78c0-11d7-11ef-9bdf-c92eb40d1838.png">    </p:cNvPr>
+          <p:cNvPr id="12" name="Object 11" descr="public/generated/icons/51c53b72-918f-4869-b834-2d99eb28422a.png">    </p:cNvPr>
           <p:cNvPicPr>
             <a:picLocks noChangeAspect="1"/>
           </p:cNvPicPr>
@@ -40444,7 +40444,7 @@
                 <a:ea typeface="Helvetica" pitchFamily="34" charset="-122"/>
                 <a:cs typeface="Helvetica" pitchFamily="34" charset="-120"/>
               </a:rPr>
-              <a:t>WATSONX ORCHESTRATE</a:t>
+              <a:t>WATSONX.AI RUNTIME</a:t>
             </a:r>
             <a:endParaRPr lang="en-US" dirty="0"/>
           </a:p>
@@ -40477,7 +40477,7 @@
       </p:sp>
       <p:pic>
         <p:nvPicPr>
-          <p:cNvPr id="15" name="Object 14" descr="public/generated/icons/51c53b72-918f-4869-b834-2d99eb28422a.png">    </p:cNvPr>
+          <p:cNvPr id="15" name="Object 14" descr="public/generated/icons/39ba9d4c-b1c5-4cc3-a163-38b580121e01.png">    </p:cNvPr>
           <p:cNvPicPr>
             <a:picLocks noChangeAspect="1"/>
           </p:cNvPicPr>
@@ -40533,7 +40533,7 @@
                 <a:ea typeface="Helvetica" pitchFamily="34" charset="-122"/>
                 <a:cs typeface="Helvetica" pitchFamily="34" charset="-120"/>
               </a:rPr>
-              <a:t>WATSONX.AI RUNTIME</a:t>
+              <a:t>WATSONX.AI STUDIO</a:t>
             </a:r>
             <a:endParaRPr lang="en-US" dirty="0"/>
           </a:p>
@@ -40566,7 +40566,7 @@
       </p:sp>
       <p:pic>
         <p:nvPicPr>
-          <p:cNvPr id="18" name="Object 17" descr="public/generated/icons/39ba9d4c-b1c5-4cc3-a163-38b580121e01.png">    </p:cNvPr>
+          <p:cNvPr id="18" name="Object 17" descr="public/generated/icons/43834340-4a6d-11ed-97d2-959039ad2a2e.png">    </p:cNvPr>
           <p:cNvPicPr>
             <a:picLocks noChangeAspect="1"/>
           </p:cNvPicPr>
@@ -40622,7 +40622,7 @@
                 <a:ea typeface="Helvetica" pitchFamily="34" charset="-122"/>
                 <a:cs typeface="Helvetica" pitchFamily="34" charset="-120"/>
               </a:rPr>
-              <a:t>WATSONX.AI STUDIO</a:t>
+              <a:t>WATSONX.DATA</a:t>
             </a:r>
             <a:endParaRPr lang="en-US" dirty="0"/>
           </a:p>
@@ -40655,7 +40655,7 @@
       </p:sp>
       <p:pic>
         <p:nvPicPr>
-          <p:cNvPr id="21" name="Object 20" descr="public/generated/icons/43834340-4a6d-11ed-97d2-959039ad2a2e.png">    </p:cNvPr>
+          <p:cNvPr id="21" name="Object 20" descr="public/generated/icons/2ad019f3-0fd6-4c25-966d-f3952481a870.png">    </p:cNvPr>
           <p:cNvPicPr>
             <a:picLocks noChangeAspect="1"/>
           </p:cNvPicPr>
@@ -40711,7 +40711,7 @@
                 <a:ea typeface="Helvetica" pitchFamily="34" charset="-122"/>
                 <a:cs typeface="Helvetica" pitchFamily="34" charset="-120"/>
               </a:rPr>
-              <a:t>WATSONX.DATA</a:t>
+              <a:t>WATSONX.GOVERNANCE</a:t>
             </a:r>
             <a:endParaRPr lang="en-US" dirty="0"/>
           </a:p>
@@ -40744,7 +40744,7 @@
       </p:sp>
       <p:pic>
         <p:nvPicPr>
-          <p:cNvPr id="24" name="Object 23" descr="public/generated/icons/2ad019f3-0fd6-4c25-966d-f3952481a870.png">    </p:cNvPr>
+          <p:cNvPr id="24" name="Object 23" descr="public/generated/icons/power-iaas.workspace.png">    </p:cNvPr>
           <p:cNvPicPr>
             <a:picLocks noChangeAspect="1"/>
           </p:cNvPicPr>
@@ -40800,7 +40800,7 @@
                 <a:ea typeface="Helvetica" pitchFamily="34" charset="-122"/>
                 <a:cs typeface="Helvetica" pitchFamily="34" charset="-120"/>
               </a:rPr>
-              <a:t>WATSONX.GOVERNANCE</a:t>
+              <a:t>WORKSPACE FOR POWER VIRTUAL SERVER</a:t>
             </a:r>
             <a:endParaRPr lang="en-US" dirty="0"/>
           </a:p>
@@ -40833,7 +40833,7 @@
       </p:sp>
       <p:pic>
         <p:nvPicPr>
-          <p:cNvPr id="27" name="Object 26" descr="public/generated/icons/power-iaas.workspace.png">    </p:cNvPr>
+          <p:cNvPr id="27" name="Object 26" descr="public/generated/icons/cf329950-0a3e-11e8-922e-f1366c6e1c83-zerto.png">    </p:cNvPr>
           <p:cNvPicPr>
             <a:picLocks noChangeAspect="1"/>
           </p:cNvPicPr>
@@ -40864,95 +40864,6 @@
         <p:spPr>
           <a:xfrm>
             <a:off x="7498080" y="777240"/>
-            <a:ext cx="640080" cy="274320"/>
-          </a:xfrm>
-          <a:prstGeom prst="rect">
-            <a:avLst/>
-          </a:prstGeom>
-          <a:noFill/>
-        </p:spPr>
-        <p:txBody>
-          <a:bodyPr wrap="square" rtlCol="0" anchor="t" bIns="0" lIns="0" rIns="0" tIns="0">
-            <a:spAutoFit/>
-          </a:bodyPr>
-          <a:lstStyle/>
-          <a:p>
-            <a:pPr algn="ctr">
-              <a:buNone/>
-            </a:pPr>
-            <a:r>
-              <a:rPr lang="en-US" b="1" sz="600" dirty="0" smtClean="0">
-                <a:solidFill>
-                  <a:srgbClr val="646365"/>
-                </a:solidFill>
-                <a:latin typeface="Helvetica" pitchFamily="34" charset="0"/>
-                <a:ea typeface="Helvetica" pitchFamily="34" charset="-122"/>
-                <a:cs typeface="Helvetica" pitchFamily="34" charset="-120"/>
-              </a:rPr>
-              <a:t>WORKSPACE FOR POWER VIRTUAL SERVER</a:t>
-            </a:r>
-            <a:endParaRPr lang="en-US" dirty="0"/>
-          </a:p>
-        </p:txBody>
-      </p:sp>
-      <p:sp>
-        <p:nvSpPr>
-          <p:cNvPr id="29" name="Object 28"/>
-          <p:cNvSpPr/>
-          <p:nvPr/>
-        </p:nvSpPr>
-        <p:spPr>
-          <a:xfrm>
-            <a:off x="274320" y="1371600"/>
-            <a:ext cx="457200" cy="457200"/>
-          </a:xfrm>
-          <a:prstGeom prst="ellipse">
-            <a:avLst/>
-          </a:prstGeom>
-          <a:solidFill>
-            <a:srgbClr val="FFFFFF"/>
-          </a:solidFill>
-          <a:ln w="19050">
-            <a:solidFill>
-              <a:srgbClr val="646365"/>
-            </a:solidFill>
-            <a:prstDash val="solid"/>
-          </a:ln>
-        </p:spPr>
-      </p:sp>
-      <p:pic>
-        <p:nvPicPr>
-          <p:cNvPr id="30" name="Object 29" descr="public/generated/icons/cf329950-0a3e-11e8-922e-f1366c6e1c83-zerto.png">    </p:cNvPr>
-          <p:cNvPicPr>
-            <a:picLocks noChangeAspect="1"/>
-          </p:cNvPicPr>
-          <p:nvPr/>
-        </p:nvPicPr>
-        <p:blipFill>
-          <a:blip r:embed="rId10"/>
-          <a:stretch>
-            <a:fillRect/>
-          </a:stretch>
-        </p:blipFill>
-        <p:spPr>
-          <a:xfrm>
-            <a:off x="365760" y="1463040"/>
-            <a:ext cx="274320" cy="274320"/>
-          </a:xfrm>
-          <a:prstGeom prst="rect">
-            <a:avLst/>
-          </a:prstGeom>
-        </p:spPr>
-      </p:pic>
-      <p:sp>
-        <p:nvSpPr>
-          <p:cNvPr id="31" name="Object 30"/>
-          <p:cNvSpPr/>
-          <p:nvPr/>
-        </p:nvSpPr>
-        <p:spPr>
-          <a:xfrm>
-            <a:off x="182880" y="1874520"/>
             <a:ext cx="640080" cy="274320"/>
           </a:xfrm>
           <a:prstGeom prst="rect">

--- a/mycatalog-architecture-diagram-template.pptx
+++ b/mycatalog-architecture-diagram-template.pptx
@@ -524,7 +524,7 @@
           <a:p>
             <a:r>
               <a:rPr lang="en-US" dirty="0" smtClean="0"/>
-              <a:t>Generated on Sun Feb 02 2025 08:05:41 GMT+0000 (Coordinated Universal Time)</a:t>
+              <a:t>Generated on Sun Feb 09 2025 08:05:27 GMT+0000 (Coordinated Universal Time)</a:t>
             </a:r>
             <a:endParaRPr lang="en-US" dirty="0"/>
           </a:p>

--- a/mycatalog-architecture-diagram-template.pptx
+++ b/mycatalog-architecture-diagram-template.pptx
@@ -524,7 +524,7 @@
           <a:p>
             <a:r>
               <a:rPr lang="en-US" dirty="0" smtClean="0"/>
-              <a:t>Generated on Sun Feb 09 2025 08:05:27 GMT+0000 (Coordinated Universal Time)</a:t>
+              <a:t>Generated on Sun Feb 16 2025 08:04:19 GMT+0000 (Coordinated Universal Time)</a:t>
             </a:r>
             <a:endParaRPr lang="en-US" dirty="0"/>
           </a:p>
@@ -34626,7 +34626,7 @@
       </p:sp>
       <p:pic>
         <p:nvPicPr>
-          <p:cNvPr id="36" name="Object 35" descr="public/generated/icons/power-iaas.network.png">    </p:cNvPr>
+          <p:cNvPr id="36" name="Object 35" descr="public/generated/icons/power-iaas.workspace.png">    </p:cNvPr>
           <p:cNvPicPr>
             <a:picLocks noChangeAspect="1"/>
           </p:cNvPicPr>
@@ -34682,7 +34682,7 @@
                 <a:ea typeface="Helvetica" pitchFamily="34" charset="-122"/>
                 <a:cs typeface="Helvetica" pitchFamily="34" charset="-120"/>
               </a:rPr>
-              <a:t>POWER VIRTUAL SERVER NETWORK</a:t>
+              <a:t>POWER VIRTUAL SERVER</a:t>
             </a:r>
             <a:endParaRPr lang="en-US" dirty="0"/>
           </a:p>
@@ -34715,7 +34715,7 @@
       </p:sp>
       <p:pic>
         <p:nvPicPr>
-          <p:cNvPr id="39" name="Object 38" descr="public/generated/icons/power-iaas.shared-processor-pool.png">    </p:cNvPr>
+          <p:cNvPr id="39" name="Object 38" descr="public/generated/icons/power-iaas.network.png">    </p:cNvPr>
           <p:cNvPicPr>
             <a:picLocks noChangeAspect="1"/>
           </p:cNvPicPr>
@@ -34771,7 +34771,7 @@
                 <a:ea typeface="Helvetica" pitchFamily="34" charset="-122"/>
                 <a:cs typeface="Helvetica" pitchFamily="34" charset="-120"/>
               </a:rPr>
-              <a:t>POWER VIRTUAL SERVER SHARED PROCESSOR POOL</a:t>
+              <a:t>POWER VIRTUAL SERVER NETWORK</a:t>
             </a:r>
             <a:endParaRPr lang="en-US" dirty="0"/>
           </a:p>
@@ -34804,7 +34804,7 @@
       </p:sp>
       <p:pic>
         <p:nvPicPr>
-          <p:cNvPr id="42" name="Object 41" descr="public/generated/icons/power-iaas.snapshot.png">    </p:cNvPr>
+          <p:cNvPr id="42" name="Object 41" descr="public/generated/icons/power-iaas.shared-processor-pool.png">    </p:cNvPr>
           <p:cNvPicPr>
             <a:picLocks noChangeAspect="1"/>
           </p:cNvPicPr>
@@ -34860,7 +34860,7 @@
                 <a:ea typeface="Helvetica" pitchFamily="34" charset="-122"/>
                 <a:cs typeface="Helvetica" pitchFamily="34" charset="-120"/>
               </a:rPr>
-              <a:t>POWER VIRTUAL SERVER SNAPSHOT</a:t>
+              <a:t>POWER VIRTUAL SERVER SHARED PROCESSOR POOL</a:t>
             </a:r>
             <a:endParaRPr lang="en-US" dirty="0"/>
           </a:p>
@@ -34893,7 +34893,7 @@
       </p:sp>
       <p:pic>
         <p:nvPicPr>
-          <p:cNvPr id="45" name="Object 44" descr="public/generated/icons/power-iaas.pvm-instance.png">    </p:cNvPr>
+          <p:cNvPr id="45" name="Object 44" descr="public/generated/icons/power-iaas.snapshot.png">    </p:cNvPr>
           <p:cNvPicPr>
             <a:picLocks noChangeAspect="1"/>
           </p:cNvPicPr>
@@ -34949,7 +34949,7 @@
                 <a:ea typeface="Helvetica" pitchFamily="34" charset="-122"/>
                 <a:cs typeface="Helvetica" pitchFamily="34" charset="-120"/>
               </a:rPr>
-              <a:t>POWER VIRTUAL SERVER VIRTUAL MACHINE</a:t>
+              <a:t>POWER VIRTUAL SERVER SNAPSHOT</a:t>
             </a:r>
             <a:endParaRPr lang="en-US" dirty="0"/>
           </a:p>
@@ -34982,7 +34982,7 @@
       </p:sp>
       <p:pic>
         <p:nvPicPr>
-          <p:cNvPr id="48" name="Object 47" descr="public/generated/icons/power-iaas.volume.png">    </p:cNvPr>
+          <p:cNvPr id="48" name="Object 47" descr="public/generated/icons/power-iaas.pvm-instance.png">    </p:cNvPr>
           <p:cNvPicPr>
             <a:picLocks noChangeAspect="1"/>
           </p:cNvPicPr>
@@ -35038,7 +35038,7 @@
                 <a:ea typeface="Helvetica" pitchFamily="34" charset="-122"/>
                 <a:cs typeface="Helvetica" pitchFamily="34" charset="-120"/>
               </a:rPr>
-              <a:t>POWER VIRTUAL SERVER VOLUME</a:t>
+              <a:t>POWER VIRTUAL SERVER VIRTUAL MACHINE</a:t>
             </a:r>
             <a:endParaRPr lang="en-US" dirty="0"/>
           </a:p>
@@ -35071,7 +35071,7 @@
       </p:sp>
       <p:pic>
         <p:nvPicPr>
-          <p:cNvPr id="51" name="Object 50" descr="public/generated/icons/b260dfd6-9b79-4377-be6d-146a5cb59be8.png">    </p:cNvPr>
+          <p:cNvPr id="51" name="Object 50" descr="public/generated/icons/power-iaas.volume.png">    </p:cNvPr>
           <p:cNvPicPr>
             <a:picLocks noChangeAspect="1"/>
           </p:cNvPicPr>
@@ -35127,7 +35127,7 @@
                 <a:ea typeface="Helvetica" pitchFamily="34" charset="-122"/>
                 <a:cs typeface="Helvetica" pitchFamily="34" charset="-120"/>
               </a:rPr>
-              <a:t>POWERVS MIGRATION AS A SERVICE</a:t>
+              <a:t>POWER VIRTUAL SERVER VOLUME</a:t>
             </a:r>
             <a:endParaRPr lang="en-US" dirty="0"/>
           </a:p>
@@ -35160,7 +35160,7 @@
       </p:sp>
       <p:pic>
         <p:nvPicPr>
-          <p:cNvPr id="54" name="Object 53" descr="public/generated/icons/C43B3EB0-F56B-4753-92E4-093815814C1E.png">    </p:cNvPr>
+          <p:cNvPr id="54" name="Object 53" descr="public/generated/icons/b260dfd6-9b79-4377-be6d-146a5cb59be8.png">    </p:cNvPr>
           <p:cNvPicPr>
             <a:picLocks noChangeAspect="1"/>
           </p:cNvPicPr>
@@ -35216,7 +35216,7 @@
                 <a:ea typeface="Helvetica" pitchFamily="34" charset="-122"/>
                 <a:cs typeface="Helvetica" pitchFamily="34" charset="-120"/>
               </a:rPr>
-              <a:t>PREDICTIVE MARKET SCENARIOS</a:t>
+              <a:t>POWERVS MIGRATION AS A SERVICE</a:t>
             </a:r>
             <a:endParaRPr lang="en-US" dirty="0"/>
           </a:p>
@@ -35249,7 +35249,7 @@
       </p:sp>
       <p:pic>
         <p:nvPicPr>
-          <p:cNvPr id="57" name="Object 56" descr="public/generated/icons/is.private-path-service-gateway.png">    </p:cNvPr>
+          <p:cNvPr id="57" name="Object 56" descr="public/generated/icons/C43B3EB0-F56B-4753-92E4-093815814C1E.png">    </p:cNvPr>
           <p:cNvPicPr>
             <a:picLocks noChangeAspect="1"/>
           </p:cNvPicPr>
@@ -35305,7 +35305,7 @@
                 <a:ea typeface="Helvetica" pitchFamily="34" charset="-122"/>
                 <a:cs typeface="Helvetica" pitchFamily="34" charset="-120"/>
               </a:rPr>
-              <a:t>PRIVATE PATH SERVICE FOR VPC</a:t>
+              <a:t>PREDICTIVE MARKET SCENARIOS</a:t>
             </a:r>
             <a:endParaRPr lang="en-US" dirty="0"/>
           </a:p>
@@ -35338,7 +35338,7 @@
       </p:sp>
       <p:pic>
         <p:nvPicPr>
-          <p:cNvPr id="60" name="Object 59" descr="public/generated/icons/91a901ac-fb7d-9b6e-eb25-14e75a20c4c2.png">    </p:cNvPr>
+          <p:cNvPr id="60" name="Object 59" descr="public/generated/icons/is.private-path-service-gateway.png">    </p:cNvPr>
           <p:cNvPicPr>
             <a:picLocks noChangeAspect="1"/>
           </p:cNvPicPr>
@@ -35394,7 +35394,7 @@
                 <a:ea typeface="Helvetica" pitchFamily="34" charset="-122"/>
                 <a:cs typeface="Helvetica" pitchFamily="34" charset="-120"/>
               </a:rPr>
-              <a:t>PROFESSIONAL SERVICES FOR GOVERNMENT(ONLY AVAILABLE IN US)</a:t>
+              <a:t>PRIVATE PATH SERVICE FOR VPC</a:t>
             </a:r>
             <a:endParaRPr lang="en-US" dirty="0"/>
           </a:p>
@@ -35427,7 +35427,7 @@
       </p:sp>
       <p:pic>
         <p:nvPicPr>
-          <p:cNvPr id="63" name="Object 62" descr="public/generated/icons/7c03a06c-f1bb-46f8-84d8-9378432b2804.png">    </p:cNvPr>
+          <p:cNvPr id="63" name="Object 62" descr="public/generated/icons/91a901ac-fb7d-9b6e-eb25-14e75a20c4c2.png">    </p:cNvPr>
           <p:cNvPicPr>
             <a:picLocks noChangeAspect="1"/>
           </p:cNvPicPr>
@@ -35483,7 +35483,7 @@
                 <a:ea typeface="Helvetica" pitchFamily="34" charset="-122"/>
                 <a:cs typeface="Helvetica" pitchFamily="34" charset="-120"/>
               </a:rPr>
-              <a:t>PROTECTIO DRAAS MANAGED SERVICE</a:t>
+              <a:t>PROFESSIONAL SERVICES FOR GOVERNMENT(ONLY AVAILABLE IN US)</a:t>
             </a:r>
             <a:endParaRPr lang="en-US" dirty="0"/>
           </a:p>
@@ -35516,7 +35516,7 @@
       </p:sp>
       <p:pic>
         <p:nvPicPr>
-          <p:cNvPr id="66" name="Object 65" descr="public/generated/icons/is.public-gateway.png">    </p:cNvPr>
+          <p:cNvPr id="66" name="Object 65" descr="public/generated/icons/7c03a06c-f1bb-46f8-84d8-9378432b2804.png">    </p:cNvPr>
           <p:cNvPicPr>
             <a:picLocks noChangeAspect="1"/>
           </p:cNvPicPr>
@@ -35572,7 +35572,7 @@
                 <a:ea typeface="Helvetica" pitchFamily="34" charset="-122"/>
                 <a:cs typeface="Helvetica" pitchFamily="34" charset="-120"/>
               </a:rPr>
-              <a:t>PUBLIC GATEWAY</a:t>
+              <a:t>PROTECTIO DRAAS MANAGED SERVICE</a:t>
             </a:r>
             <a:endParaRPr lang="en-US" dirty="0"/>
           </a:p>
@@ -35605,7 +35605,7 @@
       </p:sp>
       <p:pic>
         <p:nvPicPr>
-          <p:cNvPr id="69" name="Object 68" descr="public/generated/icons/aa11a8b2-381e-4c1c-a232-2148f65c005f.png">    </p:cNvPr>
+          <p:cNvPr id="69" name="Object 68" descr="public/generated/icons/is.public-gateway.png">    </p:cNvPr>
           <p:cNvPicPr>
             <a:picLocks noChangeAspect="1"/>
           </p:cNvPicPr>
@@ -35661,7 +35661,7 @@
                 <a:ea typeface="Helvetica" pitchFamily="34" charset="-122"/>
                 <a:cs typeface="Helvetica" pitchFamily="34" charset="-120"/>
               </a:rPr>
-              <a:t>PVS ONE MANAGED SERVICE</a:t>
+              <a:t>PUBLIC GATEWAY</a:t>
             </a:r>
             <a:endParaRPr lang="en-US" dirty="0"/>
           </a:p>
@@ -35694,7 +35694,7 @@
       </p:sp>
       <p:pic>
         <p:nvPicPr>
-          <p:cNvPr id="72" name="Object 71" descr="public/generated/icons/3eb2d5a0-24ff-11eb-9437-631d7272fff5.png">    </p:cNvPr>
+          <p:cNvPr id="72" name="Object 71" descr="public/generated/icons/aa11a8b2-381e-4c1c-a232-2148f65c005f.png">    </p:cNvPr>
           <p:cNvPicPr>
             <a:picLocks noChangeAspect="1"/>
           </p:cNvPicPr>
@@ -35750,7 +35750,7 @@
                 <a:ea typeface="Helvetica" pitchFamily="34" charset="-122"/>
                 <a:cs typeface="Helvetica" pitchFamily="34" charset="-120"/>
               </a:rPr>
-              <a:t>PX-BACKUP FOR KUBERNETES</a:t>
+              <a:t>PVS ONE MANAGED SERVICE</a:t>
             </a:r>
             <a:endParaRPr lang="en-US" dirty="0"/>
           </a:p>
@@ -35783,7 +35783,7 @@
       </p:sp>
       <p:pic>
         <p:nvPicPr>
-          <p:cNvPr id="75" name="Object 74" descr="public/generated/icons/b6049020-80f4-11eb-a0f7-e35ec9b4054f.png">    </p:cNvPr>
+          <p:cNvPr id="75" name="Object 74" descr="public/generated/icons/3eb2d5a0-24ff-11eb-9437-631d7272fff5.png">    </p:cNvPr>
           <p:cNvPicPr>
             <a:picLocks noChangeAspect="1"/>
           </p:cNvPicPr>
@@ -35839,7 +35839,7 @@
                 <a:ea typeface="Helvetica" pitchFamily="34" charset="-122"/>
                 <a:cs typeface="Helvetica" pitchFamily="34" charset="-120"/>
               </a:rPr>
-              <a:t>QISKIT RUNTIME</a:t>
+              <a:t>PX-BACKUP FOR KUBERNETES</a:t>
             </a:r>
             <a:endParaRPr lang="en-US" dirty="0"/>
           </a:p>
@@ -35872,7 +35872,7 @@
       </p:sp>
       <p:pic>
         <p:nvPicPr>
-          <p:cNvPr id="78" name="Object 77" descr="public/generated/icons/cf5f8ac0-98f7-11e9-a40c-5b3c4bf3cc6d.png">    </p:cNvPr>
+          <p:cNvPr id="78" name="Object 77" descr="public/generated/icons/b6049020-80f4-11eb-a0f7-e35ec9b4054f.png">    </p:cNvPr>
           <p:cNvPicPr>
             <a:picLocks noChangeAspect="1"/>
           </p:cNvPicPr>
@@ -35928,7 +35928,7 @@
                 <a:ea typeface="Helvetica" pitchFamily="34" charset="-122"/>
                 <a:cs typeface="Helvetica" pitchFamily="34" charset="-120"/>
               </a:rPr>
-              <a:t>RAXAK PROTECT</a:t>
+              <a:t>QISKIT RUNTIME</a:t>
             </a:r>
             <a:endParaRPr lang="en-US" dirty="0"/>
           </a:p>
@@ -35961,7 +35961,7 @@
       </p:sp>
       <p:pic>
         <p:nvPicPr>
-          <p:cNvPr id="81" name="Object 80" descr="public/generated/icons/467ab6d8-48dd-485a-adf9-30d5107537a1.png">    </p:cNvPr>
+          <p:cNvPr id="81" name="Object 80" descr="public/generated/icons/cf5f8ac0-98f7-11e9-a40c-5b3c4bf3cc6d.png">    </p:cNvPr>
           <p:cNvPicPr>
             <a:picLocks noChangeAspect="1"/>
           </p:cNvPicPr>
@@ -36017,7 +36017,7 @@
                 <a:ea typeface="Helvetica" pitchFamily="34" charset="-122"/>
                 <a:cs typeface="Helvetica" pitchFamily="34" charset="-120"/>
               </a:rPr>
-              <a:t>REAL-TIME PAYMENTS</a:t>
+              <a:t>RAXAK PROTECT</a:t>
             </a:r>
             <a:endParaRPr lang="en-US" dirty="0"/>
           </a:p>
@@ -36050,7 +36050,7 @@
       </p:sp>
       <p:pic>
         <p:nvPicPr>
-          <p:cNvPr id="84" name="Object 83" descr="public/generated/icons/openshift.png">    </p:cNvPr>
+          <p:cNvPr id="84" name="Object 83" descr="public/generated/icons/467ab6d8-48dd-485a-adf9-30d5107537a1.png">    </p:cNvPr>
           <p:cNvPicPr>
             <a:picLocks noChangeAspect="1"/>
           </p:cNvPicPr>
@@ -36106,7 +36106,7 @@
                 <a:ea typeface="Helvetica" pitchFamily="34" charset="-122"/>
                 <a:cs typeface="Helvetica" pitchFamily="34" charset="-120"/>
               </a:rPr>
-              <a:t>RED HAT OPENSHIFT ON IBM CLOUD</a:t>
+              <a:t>REAL-TIME PAYMENTS</a:t>
             </a:r>
             <a:endParaRPr lang="en-US" dirty="0"/>
           </a:p>
@@ -36139,7 +36139,7 @@
       </p:sp>
       <p:pic>
         <p:nvPicPr>
-          <p:cNvPr id="87" name="Object 86" descr="public/generated/icons/bd517bf0-88ba-11ea-a52e-91aeb42a4019.png">    </p:cNvPr>
+          <p:cNvPr id="87" name="Object 86" descr="public/generated/icons/openshift.png">    </p:cNvPr>
           <p:cNvPicPr>
             <a:picLocks noChangeAspect="1"/>
           </p:cNvPicPr>
@@ -36195,7 +36195,7 @@
                 <a:ea typeface="Helvetica" pitchFamily="34" charset="-122"/>
                 <a:cs typeface="Helvetica" pitchFamily="34" charset="-120"/>
               </a:rPr>
-              <a:t>SATELLITE</a:t>
+              <a:t>RED HAT OPENSHIFT ON IBM CLOUD</a:t>
             </a:r>
             <a:endParaRPr lang="en-US" dirty="0"/>
           </a:p>
@@ -36228,7 +36228,7 @@
       </p:sp>
       <p:pic>
         <p:nvPicPr>
-          <p:cNvPr id="90" name="Object 89" descr="public/generated/icons/schematics.png">    </p:cNvPr>
+          <p:cNvPr id="90" name="Object 89" descr="public/generated/icons/bd517bf0-88ba-11ea-a52e-91aeb42a4019.png">    </p:cNvPr>
           <p:cNvPicPr>
             <a:picLocks noChangeAspect="1"/>
           </p:cNvPicPr>
@@ -36284,7 +36284,7 @@
                 <a:ea typeface="Helvetica" pitchFamily="34" charset="-122"/>
                 <a:cs typeface="Helvetica" pitchFamily="34" charset="-120"/>
               </a:rPr>
-              <a:t>SCHEMATICS</a:t>
+              <a:t>SATELLITE</a:t>
             </a:r>
             <a:endParaRPr lang="en-US" dirty="0"/>
           </a:p>
@@ -36317,7 +36317,7 @@
       </p:sp>
       <p:pic>
         <p:nvPicPr>
-          <p:cNvPr id="93" name="Object 92" descr="public/generated/icons/14.png">    </p:cNvPr>
+          <p:cNvPr id="93" name="Object 92" descr="public/generated/icons/schematics.png">    </p:cNvPr>
           <p:cNvPicPr>
             <a:picLocks noChangeAspect="1"/>
           </p:cNvPicPr>
@@ -36373,7 +36373,7 @@
                 <a:ea typeface="Helvetica" pitchFamily="34" charset="-122"/>
                 <a:cs typeface="Helvetica" pitchFamily="34" charset="-120"/>
               </a:rPr>
-              <a:t>SECONDARY SUBNETS</a:t>
+              <a:t>SCHEMATICS</a:t>
             </a:r>
             <a:endParaRPr lang="en-US" dirty="0"/>
           </a:p>
@@ -36406,7 +36406,7 @@
       </p:sp>
       <p:pic>
         <p:nvPicPr>
-          <p:cNvPr id="96" name="Object 95" descr="public/generated/icons/ebc0cdb0-af2a-11ea-98c7-29e5db822649.png">    </p:cNvPr>
+          <p:cNvPr id="96" name="Object 95" descr="public/generated/icons/14.png">    </p:cNvPr>
           <p:cNvPicPr>
             <a:picLocks noChangeAspect="1"/>
           </p:cNvPicPr>
@@ -36462,7 +36462,7 @@
                 <a:ea typeface="Helvetica" pitchFamily="34" charset="-122"/>
                 <a:cs typeface="Helvetica" pitchFamily="34" charset="-120"/>
               </a:rPr>
-              <a:t>SECRETS MANAGER</a:t>
+              <a:t>SECONDARY SUBNETS</a:t>
             </a:r>
             <a:endParaRPr lang="en-US" dirty="0"/>
           </a:p>
@@ -36495,7 +36495,7 @@
       </p:sp>
       <p:pic>
         <p:nvPicPr>
-          <p:cNvPr id="99" name="Object 98" descr="public/generated/icons/IBM_SecureGateway.png">    </p:cNvPr>
+          <p:cNvPr id="99" name="Object 98" descr="public/generated/icons/ebc0cdb0-af2a-11ea-98c7-29e5db822649.png">    </p:cNvPr>
           <p:cNvPicPr>
             <a:picLocks noChangeAspect="1"/>
           </p:cNvPicPr>
@@ -36551,7 +36551,7 @@
                 <a:ea typeface="Helvetica" pitchFamily="34" charset="-122"/>
                 <a:cs typeface="Helvetica" pitchFamily="34" charset="-120"/>
               </a:rPr>
-              <a:t>SECURE GATEWAY</a:t>
+              <a:t>SECRETS MANAGER</a:t>
             </a:r>
             <a:endParaRPr lang="en-US" dirty="0"/>
           </a:p>
@@ -36584,7 +36584,7 @@
       </p:sp>
       <p:pic>
         <p:nvPicPr>
-          <p:cNvPr id="102" name="Object 101" descr="public/generated/icons/compliance.png">    </p:cNvPr>
+          <p:cNvPr id="102" name="Object 101" descr="public/generated/icons/IBM_SecureGateway.png">    </p:cNvPr>
           <p:cNvPicPr>
             <a:picLocks noChangeAspect="1"/>
           </p:cNvPicPr>
@@ -36640,7 +36640,7 @@
                 <a:ea typeface="Helvetica" pitchFamily="34" charset="-122"/>
                 <a:cs typeface="Helvetica" pitchFamily="34" charset="-120"/>
               </a:rPr>
-              <a:t>SECURITY AND COMPLIANCE CENTER</a:t>
+              <a:t>SECURE GATEWAY</a:t>
             </a:r>
             <a:endParaRPr lang="en-US" dirty="0"/>
           </a:p>
@@ -36673,7 +36673,7 @@
       </p:sp>
       <p:pic>
         <p:nvPicPr>
-          <p:cNvPr id="105" name="Object 104" descr="public/generated/icons/e831e900-82d6-11ec-95c5-c12c5a5d9687.png">    </p:cNvPr>
+          <p:cNvPr id="105" name="Object 104" descr="public/generated/icons/compliance.png">    </p:cNvPr>
           <p:cNvPicPr>
             <a:picLocks noChangeAspect="1"/>
           </p:cNvPicPr>
@@ -36729,7 +36729,7 @@
                 <a:ea typeface="Helvetica" pitchFamily="34" charset="-122"/>
                 <a:cs typeface="Helvetica" pitchFamily="34" charset="-120"/>
               </a:rPr>
-              <a:t>SECURITY AND COMPLIANCE CENTER WORKLOAD PROTECTION</a:t>
+              <a:t>SECURITY AND COMPLIANCE CENTER</a:t>
             </a:r>
             <a:endParaRPr lang="en-US" dirty="0"/>
           </a:p>
@@ -36762,7 +36762,7 @@
       </p:sp>
       <p:pic>
         <p:nvPicPr>
-          <p:cNvPr id="108" name="Object 107" descr="public/generated/icons/is.security-group.png">    </p:cNvPr>
+          <p:cNvPr id="108" name="Object 107" descr="public/generated/icons/e831e900-82d6-11ec-95c5-c12c5a5d9687.png">    </p:cNvPr>
           <p:cNvPicPr>
             <a:picLocks noChangeAspect="1"/>
           </p:cNvPicPr>
@@ -36818,7 +36818,7 @@
                 <a:ea typeface="Helvetica" pitchFamily="34" charset="-122"/>
                 <a:cs typeface="Helvetica" pitchFamily="34" charset="-120"/>
               </a:rPr>
-              <a:t>SECURITY GROUP FOR VPC</a:t>
+              <a:t>SECURITY AND COMPLIANCE CENTER WORKLOAD PROTECTION</a:t>
             </a:r>
             <a:endParaRPr lang="en-US" dirty="0"/>
           </a:p>
@@ -36884,7 +36884,7 @@
       </p:sp>
       <p:pic>
         <p:nvPicPr>
-          <p:cNvPr id="3" name="Object 2" descr="public/generated/icons/ABB08BA3-D14D-4BD9-A5E6-EF67C52D35C0.png">    </p:cNvPr>
+          <p:cNvPr id="3" name="Object 2" descr="public/generated/icons/is.security-group.png">    </p:cNvPr>
           <p:cNvPicPr>
             <a:picLocks noChangeAspect="1"/>
           </p:cNvPicPr>
@@ -36940,7 +36940,7 @@
                 <a:ea typeface="Helvetica" pitchFamily="34" charset="-122"/>
                 <a:cs typeface="Helvetica" pitchFamily="34" charset="-120"/>
               </a:rPr>
-              <a:t>SIMULATED HISTORICAL INSTRUMENT ANALYTICS</a:t>
+              <a:t>SECURITY GROUP FOR VPC</a:t>
             </a:r>
             <a:endParaRPr lang="en-US" dirty="0"/>
           </a:p>
@@ -36973,7 +36973,7 @@
       </p:sp>
       <p:pic>
         <p:nvPicPr>
-          <p:cNvPr id="6" name="Object 5" descr="public/generated/icons/A888FFEA-E976-4F83-B7EC-288233BF62E6.png">    </p:cNvPr>
+          <p:cNvPr id="6" name="Object 5" descr="public/generated/icons/ABB08BA3-D14D-4BD9-A5E6-EF67C52D35C0.png">    </p:cNvPr>
           <p:cNvPicPr>
             <a:picLocks noChangeAspect="1"/>
           </p:cNvPicPr>
@@ -37029,7 +37029,7 @@
                 <a:ea typeface="Helvetica" pitchFamily="34" charset="-122"/>
                 <a:cs typeface="Helvetica" pitchFamily="34" charset="-120"/>
               </a:rPr>
-              <a:t>SIMULATED INSTRUMENT ANALYTICS</a:t>
+              <a:t>SIMULATED HISTORICAL INSTRUMENT ANALYTICS</a:t>
             </a:r>
             <a:endParaRPr lang="en-US" dirty="0"/>
           </a:p>
@@ -37062,7 +37062,7 @@
       </p:sp>
       <p:pic>
         <p:nvPicPr>
-          <p:cNvPr id="9" name="Object 8" descr="public/generated/icons/cf329950-0a3e-11e8-922e-f1366c6e1c83-vcstrial_dr.png">    </p:cNvPr>
+          <p:cNvPr id="9" name="Object 8" descr="public/generated/icons/A888FFEA-E976-4F83-B7EC-288233BF62E6.png">    </p:cNvPr>
           <p:cNvPicPr>
             <a:picLocks noChangeAspect="1"/>
           </p:cNvPicPr>
@@ -37118,7 +37118,7 @@
                 <a:ea typeface="Helvetica" pitchFamily="34" charset="-122"/>
                 <a:cs typeface="Helvetica" pitchFamily="34" charset="-120"/>
               </a:rPr>
-              <a:t>SINGLE-NODE TRIAL FOR DATA PROTECTION AND DISASTER RECOVERY</a:t>
+              <a:t>SIMULATED INSTRUMENT ANALYTICS</a:t>
             </a:r>
             <a:endParaRPr lang="en-US" dirty="0"/>
           </a:p>
@@ -37151,7 +37151,7 @@
       </p:sp>
       <p:pic>
         <p:nvPicPr>
-          <p:cNvPr id="12" name="Object 11" descr="public/generated/icons/cf329950-0a3e-11e8-922e-f1366c6e1c83-vcstrial.png">    </p:cNvPr>
+          <p:cNvPr id="12" name="Object 11" descr="public/generated/icons/cf329950-0a3e-11e8-922e-f1366c6e1c83-vcstrial_dr.png">    </p:cNvPr>
           <p:cNvPicPr>
             <a:picLocks noChangeAspect="1"/>
           </p:cNvPicPr>
@@ -37207,7 +37207,7 @@
                 <a:ea typeface="Helvetica" pitchFamily="34" charset="-122"/>
                 <a:cs typeface="Helvetica" pitchFamily="34" charset="-120"/>
               </a:rPr>
-              <a:t>SINGLE-NODE TRIAL FOR MIGRATION AND APP MODERNIZATION</a:t>
+              <a:t>SINGLE-NODE TRIAL FOR DATA PROTECTION AND DISASTER RECOVERY</a:t>
             </a:r>
             <a:endParaRPr lang="en-US" dirty="0"/>
           </a:p>
@@ -37240,7 +37240,7 @@
       </p:sp>
       <p:pic>
         <p:nvPicPr>
-          <p:cNvPr id="15" name="Object 14" descr="public/generated/icons/fdf77820-deed-11e9-911d-5f09017358ff.png">    </p:cNvPr>
+          <p:cNvPr id="15" name="Object 14" descr="public/generated/icons/cf329950-0a3e-11e8-922e-f1366c6e1c83-vcstrial.png">    </p:cNvPr>
           <p:cNvPicPr>
             <a:picLocks noChangeAspect="1"/>
           </p:cNvPicPr>
@@ -37296,7 +37296,7 @@
                 <a:ea typeface="Helvetica" pitchFamily="34" charset="-122"/>
                 <a:cs typeface="Helvetica" pitchFamily="34" charset="-120"/>
               </a:rPr>
-              <a:t>SKYTAP ON IBM CLOUD</a:t>
+              <a:t>SINGLE-NODE TRIAL FOR MIGRATION AND APP MODERNIZATION</a:t>
             </a:r>
             <a:endParaRPr lang="en-US" dirty="0"/>
           </a:p>
@@ -37329,7 +37329,7 @@
       </p:sp>
       <p:pic>
         <p:nvPicPr>
-          <p:cNvPr id="18" name="Object 17" descr="public/generated/icons/cf329950-0a3e-11e8-922e-f1366c6e1c83-spplus.png">    </p:cNvPr>
+          <p:cNvPr id="18" name="Object 17" descr="public/generated/icons/fdf77820-deed-11e9-911d-5f09017358ff.png">    </p:cNvPr>
           <p:cNvPicPr>
             <a:picLocks noChangeAspect="1"/>
           </p:cNvPicPr>
@@ -37385,7 +37385,7 @@
                 <a:ea typeface="Helvetica" pitchFamily="34" charset="-122"/>
                 <a:cs typeface="Helvetica" pitchFamily="34" charset="-120"/>
               </a:rPr>
-              <a:t>SPECTRUM PROTECT PLUS</a:t>
+              <a:t>SKYTAP ON IBM CLOUD</a:t>
             </a:r>
             <a:endParaRPr lang="en-US" dirty="0"/>
           </a:p>
@@ -37418,7 +37418,7 @@
       </p:sp>
       <p:pic>
         <p:nvPicPr>
-          <p:cNvPr id="21" name="Object 20" descr="public/generated/icons/bc35fb8c-bc5b-431b-859e-3861771d5843.png">    </p:cNvPr>
+          <p:cNvPr id="21" name="Object 20" descr="public/generated/icons/cf329950-0a3e-11e8-922e-f1366c6e1c83-spplus.png">    </p:cNvPr>
           <p:cNvPicPr>
             <a:picLocks noChangeAspect="1"/>
           </p:cNvPicPr>
@@ -37474,7 +37474,7 @@
                 <a:ea typeface="Helvetica" pitchFamily="34" charset="-122"/>
                 <a:cs typeface="Helvetica" pitchFamily="34" charset="-120"/>
               </a:rPr>
-              <a:t>SPEECH TO TEXT</a:t>
+              <a:t>SPECTRUM PROTECT PLUS</a:t>
             </a:r>
             <a:endParaRPr lang="en-US" dirty="0"/>
           </a:p>
@@ -37507,7 +37507,7 @@
       </p:sp>
       <p:pic>
         <p:nvPicPr>
-          <p:cNvPr id="24" name="Object 23" descr="public/generated/icons/556153d0-5ad0-11e9-b7f9-41319ef22125.png">    </p:cNvPr>
+          <p:cNvPr id="24" name="Object 23" descr="public/generated/icons/bc35fb8c-bc5b-431b-859e-3861771d5843.png">    </p:cNvPr>
           <p:cNvPicPr>
             <a:picLocks noChangeAspect="1"/>
           </p:cNvPicPr>
@@ -37563,7 +37563,7 @@
                 <a:ea typeface="Helvetica" pitchFamily="34" charset="-122"/>
                 <a:cs typeface="Helvetica" pitchFamily="34" charset="-120"/>
               </a:rPr>
-              <a:t>SSH KEY FOR VPC</a:t>
+              <a:t>SPEECH TO TEXT</a:t>
             </a:r>
             <a:endParaRPr lang="en-US" dirty="0"/>
           </a:p>
@@ -37596,7 +37596,7 @@
       </p:sp>
       <p:pic>
         <p:nvPicPr>
-          <p:cNvPr id="27" name="Object 26" descr="public/generated/icons/19.png">    </p:cNvPr>
+          <p:cNvPr id="27" name="Object 26" descr="public/generated/icons/556153d0-5ad0-11e9-b7f9-41319ef22125.png">    </p:cNvPr>
           <p:cNvPicPr>
             <a:picLocks noChangeAspect="1"/>
           </p:cNvPicPr>
@@ -37652,7 +37652,7 @@
                 <a:ea typeface="Helvetica" pitchFamily="34" charset="-122"/>
                 <a:cs typeface="Helvetica" pitchFamily="34" charset="-120"/>
               </a:rPr>
-              <a:t>SSL CERTIFICATES</a:t>
+              <a:t>SSH KEY FOR VPC</a:t>
             </a:r>
             <a:endParaRPr lang="en-US" dirty="0"/>
           </a:p>
@@ -37685,7 +37685,7 @@
       </p:sp>
       <p:pic>
         <p:nvPicPr>
-          <p:cNvPr id="30" name="Object 29" descr="public/generated/icons/5acdbc42-8965-48f9-8a3c-1c728b6ed2c4.png">    </p:cNvPr>
+          <p:cNvPr id="30" name="Object 29" descr="public/generated/icons/19.png">    </p:cNvPr>
           <p:cNvPicPr>
             <a:picLocks noChangeAspect="1"/>
           </p:cNvPicPr>
@@ -37741,7 +37741,7 @@
                 <a:ea typeface="Helvetica" pitchFamily="34" charset="-122"/>
                 <a:cs typeface="Helvetica" pitchFamily="34" charset="-120"/>
               </a:rPr>
-              <a:t>STREAMING ANALYTICS</a:t>
+              <a:t>SSL CERTIFICATES</a:t>
             </a:r>
             <a:endParaRPr lang="en-US" dirty="0"/>
           </a:p>
@@ -37774,7 +37774,7 @@
       </p:sp>
       <p:pic>
         <p:nvPicPr>
-          <p:cNvPr id="33" name="Object 32" descr="public/generated/icons/is.subnet.png">    </p:cNvPr>
+          <p:cNvPr id="33" name="Object 32" descr="public/generated/icons/5acdbc42-8965-48f9-8a3c-1c728b6ed2c4.png">    </p:cNvPr>
           <p:cNvPicPr>
             <a:picLocks noChangeAspect="1"/>
           </p:cNvPicPr>
@@ -37830,7 +37830,7 @@
                 <a:ea typeface="Helvetica" pitchFamily="34" charset="-122"/>
                 <a:cs typeface="Helvetica" pitchFamily="34" charset="-120"/>
               </a:rPr>
-              <a:t>SUBNET</a:t>
+              <a:t>STREAMING ANALYTICS</a:t>
             </a:r>
             <a:endParaRPr lang="en-US" dirty="0"/>
           </a:p>
@@ -37863,7 +37863,7 @@
       </p:sp>
       <p:pic>
         <p:nvPicPr>
-          <p:cNvPr id="36" name="Object 35" descr="public/generated/icons/282c1d79-9176-4597-9cff-941a8d6cfd4c.png">    </p:cNvPr>
+          <p:cNvPr id="36" name="Object 35" descr="public/generated/icons/is.subnet.png">    </p:cNvPr>
           <p:cNvPicPr>
             <a:picLocks noChangeAspect="1"/>
           </p:cNvPicPr>
@@ -37919,7 +37919,7 @@
                 <a:ea typeface="Helvetica" pitchFamily="34" charset="-122"/>
                 <a:cs typeface="Helvetica" pitchFamily="34" charset="-120"/>
               </a:rPr>
-              <a:t>TEXT TO SPEECH</a:t>
+              <a:t>SUBNET</a:t>
             </a:r>
             <a:endParaRPr lang="en-US" dirty="0"/>
           </a:p>
@@ -37952,7 +37952,7 @@
       </p:sp>
       <p:pic>
         <p:nvPicPr>
-          <p:cNvPr id="39" name="Object 38" descr="public/generated/icons/e512e5f0-64fb-11e8-9c23-830c05b8b729.png">    </p:cNvPr>
+          <p:cNvPr id="39" name="Object 38" descr="public/generated/icons/282c1d79-9176-4597-9cff-941a8d6cfd4c.png">    </p:cNvPr>
           <p:cNvPicPr>
             <a:picLocks noChangeAspect="1"/>
           </p:cNvPicPr>
@@ -38008,7 +38008,7 @@
                 <a:ea typeface="Helvetica" pitchFamily="34" charset="-122"/>
                 <a:cs typeface="Helvetica" pitchFamily="34" charset="-120"/>
               </a:rPr>
-              <a:t>TOOLCHAIN</a:t>
+              <a:t>TEXT TO SPEECH</a:t>
             </a:r>
             <a:endParaRPr lang="en-US" dirty="0"/>
           </a:p>
@@ -38041,7 +38041,7 @@
       </p:sp>
       <p:pic>
         <p:nvPicPr>
-          <p:cNvPr id="42" name="Object 41" descr="public/generated/icons/f38a4da0-c353-11e9-83b6-a36a57a97a06.png">    </p:cNvPr>
+          <p:cNvPr id="42" name="Object 41" descr="public/generated/icons/e512e5f0-64fb-11e8-9c23-830c05b8b729.png">    </p:cNvPr>
           <p:cNvPicPr>
             <a:picLocks noChangeAspect="1"/>
           </p:cNvPicPr>
@@ -38097,7 +38097,7 @@
                 <a:ea typeface="Helvetica" pitchFamily="34" charset="-122"/>
                 <a:cs typeface="Helvetica" pitchFamily="34" charset="-120"/>
               </a:rPr>
-              <a:t>TRANSIT GATEWAY</a:t>
+              <a:t>TOOLCHAIN</a:t>
             </a:r>
             <a:endParaRPr lang="en-US" dirty="0"/>
           </a:p>
@@ -38130,7 +38130,7 @@
       </p:sp>
       <p:pic>
         <p:nvPicPr>
-          <p:cNvPr id="45" name="Object 44" descr="public/generated/icons/vmware.directorsite.png">    </p:cNvPr>
+          <p:cNvPr id="45" name="Object 44" descr="public/generated/icons/f38a4da0-c353-11e9-83b6-a36a57a97a06.png">    </p:cNvPr>
           <p:cNvPicPr>
             <a:picLocks noChangeAspect="1"/>
           </p:cNvPicPr>
@@ -38186,7 +38186,7 @@
                 <a:ea typeface="Helvetica" pitchFamily="34" charset="-122"/>
                 <a:cs typeface="Helvetica" pitchFamily="34" charset="-120"/>
               </a:rPr>
-              <a:t>VCF AS A SERVICE - CLOUD DIRECTOR SITE</a:t>
+              <a:t>TRANSIT GATEWAY</a:t>
             </a:r>
             <a:endParaRPr lang="en-US" dirty="0"/>
           </a:p>
@@ -38219,7 +38219,7 @@
       </p:sp>
       <p:pic>
         <p:nvPicPr>
-          <p:cNvPr id="48" name="Object 47" descr="public/generated/icons/vmware.vdc.png">    </p:cNvPr>
+          <p:cNvPr id="48" name="Object 47" descr="public/generated/icons/vmware.directorsite.png">    </p:cNvPr>
           <p:cNvPicPr>
             <a:picLocks noChangeAspect="1"/>
           </p:cNvPicPr>
@@ -38275,7 +38275,7 @@
                 <a:ea typeface="Helvetica" pitchFamily="34" charset="-122"/>
                 <a:cs typeface="Helvetica" pitchFamily="34" charset="-120"/>
               </a:rPr>
-              <a:t>VCF AS A SERVICE - VIRTUAL DATA CENTER</a:t>
+              <a:t>VCF AS A SERVICE - CLOUD DIRECTOR SITE</a:t>
             </a:r>
             <a:endParaRPr lang="en-US" dirty="0"/>
           </a:p>
@@ -38308,7 +38308,7 @@
       </p:sp>
       <p:pic>
         <p:nvPicPr>
-          <p:cNvPr id="51" name="Object 50" descr="public/generated/icons/cf329950-0a3e-11e8-922e-f1366c6e1c83-veeam.png">    </p:cNvPr>
+          <p:cNvPr id="51" name="Object 50" descr="public/generated/icons/vmware.vdc.png">    </p:cNvPr>
           <p:cNvPicPr>
             <a:picLocks noChangeAspect="1"/>
           </p:cNvPicPr>
@@ -38364,7 +38364,7 @@
                 <a:ea typeface="Helvetica" pitchFamily="34" charset="-122"/>
                 <a:cs typeface="Helvetica" pitchFamily="34" charset="-120"/>
               </a:rPr>
-              <a:t>VEEAM</a:t>
+              <a:t>VCF AS A SERVICE - VIRTUAL DATA CENTER</a:t>
             </a:r>
             <a:endParaRPr lang="en-US" dirty="0"/>
           </a:p>
@@ -38397,7 +38397,7 @@
       </p:sp>
       <p:pic>
         <p:nvPicPr>
-          <p:cNvPr id="54" name="Object 53" descr="public/generated/icons/66644e80-f35a-11ee-923f-2fe367129617.png">    </p:cNvPr>
+          <p:cNvPr id="54" name="Object 53" descr="public/generated/icons/cf329950-0a3e-11e8-922e-f1366c6e1c83-veeam.png">    </p:cNvPr>
           <p:cNvPicPr>
             <a:picLocks noChangeAspect="1"/>
           </p:cNvPicPr>
@@ -38453,7 +38453,7 @@
                 <a:ea typeface="Helvetica" pitchFamily="34" charset="-122"/>
                 <a:cs typeface="Helvetica" pitchFamily="34" charset="-120"/>
               </a:rPr>
-              <a:t>VERIFY</a:t>
+              <a:t>VEEAM</a:t>
             </a:r>
             <a:endParaRPr lang="en-US" dirty="0"/>
           </a:p>
@@ -38486,7 +38486,7 @@
       </p:sp>
       <p:pic>
         <p:nvPicPr>
-          <p:cNvPr id="57" name="Object 56" descr="public/generated/icons/is.virtual-network-interface.png">    </p:cNvPr>
+          <p:cNvPr id="57" name="Object 56" descr="public/generated/icons/66644e80-f35a-11ee-923f-2fe367129617.png">    </p:cNvPr>
           <p:cNvPicPr>
             <a:picLocks noChangeAspect="1"/>
           </p:cNvPicPr>
@@ -38542,7 +38542,7 @@
                 <a:ea typeface="Helvetica" pitchFamily="34" charset="-122"/>
                 <a:cs typeface="Helvetica" pitchFamily="34" charset="-120"/>
               </a:rPr>
-              <a:t>VIRTUAL NETWORK INTERFACE</a:t>
+              <a:t>VERIFY</a:t>
             </a:r>
             <a:endParaRPr lang="en-US" dirty="0"/>
           </a:p>
@@ -38575,7 +38575,7 @@
       </p:sp>
       <p:pic>
         <p:nvPicPr>
-          <p:cNvPr id="60" name="Object 59" descr="public/generated/icons/is.vpc.png">    </p:cNvPr>
+          <p:cNvPr id="60" name="Object 59" descr="public/generated/icons/is.virtual-network-interface.png">    </p:cNvPr>
           <p:cNvPicPr>
             <a:picLocks noChangeAspect="1"/>
           </p:cNvPicPr>
@@ -38631,7 +38631,7 @@
                 <a:ea typeface="Helvetica" pitchFamily="34" charset="-122"/>
                 <a:cs typeface="Helvetica" pitchFamily="34" charset="-120"/>
               </a:rPr>
-              <a:t>VIRTUAL PRIVATE CLOUD</a:t>
+              <a:t>VIRTUAL NETWORK INTERFACE</a:t>
             </a:r>
             <a:endParaRPr lang="en-US" dirty="0"/>
           </a:p>
@@ -38664,7 +38664,7 @@
       </p:sp>
       <p:pic>
         <p:nvPicPr>
-          <p:cNvPr id="63" name="Object 62" descr="public/generated/icons/is.endpoint-gateway.png">    </p:cNvPr>
+          <p:cNvPr id="63" name="Object 62" descr="public/generated/icons/is.vpc.png">    </p:cNvPr>
           <p:cNvPicPr>
             <a:picLocks noChangeAspect="1"/>
           </p:cNvPicPr>
@@ -38720,7 +38720,7 @@
                 <a:ea typeface="Helvetica" pitchFamily="34" charset="-122"/>
                 <a:cs typeface="Helvetica" pitchFamily="34" charset="-120"/>
               </a:rPr>
-              <a:t>VIRTUAL PRIVATE ENDPOINT FOR VPC</a:t>
+              <a:t>VIRTUAL PRIVATE CLOUD</a:t>
             </a:r>
             <a:endParaRPr lang="en-US" dirty="0"/>
           </a:p>
@@ -38753,7 +38753,7 @@
       </p:sp>
       <p:pic>
         <p:nvPicPr>
-          <p:cNvPr id="66" name="Object 65" descr="public/generated/icons/887073fb-ba5b-9407-d2ac-938308d890e4.png">    </p:cNvPr>
+          <p:cNvPr id="66" name="Object 65" descr="public/generated/icons/is.endpoint-gateway.png">    </p:cNvPr>
           <p:cNvPicPr>
             <a:picLocks noChangeAspect="1"/>
           </p:cNvPicPr>
@@ -38809,7 +38809,7 @@
                 <a:ea typeface="Helvetica" pitchFamily="34" charset="-122"/>
                 <a:cs typeface="Helvetica" pitchFamily="34" charset="-120"/>
               </a:rPr>
-              <a:t>VIRTUAL ROUTER APPLIANCE</a:t>
+              <a:t>VIRTUAL PRIVATE ENDPOINT FOR VPC</a:t>
             </a:r>
             <a:endParaRPr lang="en-US" dirty="0"/>
           </a:p>
@@ -38842,7 +38842,7 @@
       </p:sp>
       <p:pic>
         <p:nvPicPr>
-          <p:cNvPr id="69" name="Object 68" descr="public/generated/icons/virtual-server-group.png">    </p:cNvPr>
+          <p:cNvPr id="69" name="Object 68" descr="public/generated/icons/887073fb-ba5b-9407-d2ac-938308d890e4.png">    </p:cNvPr>
           <p:cNvPicPr>
             <a:picLocks noChangeAspect="1"/>
           </p:cNvPicPr>
@@ -38898,7 +38898,7 @@
                 <a:ea typeface="Helvetica" pitchFamily="34" charset="-122"/>
                 <a:cs typeface="Helvetica" pitchFamily="34" charset="-120"/>
               </a:rPr>
-              <a:t>VIRTUAL SERVER FOR CLASSIC</a:t>
+              <a:t>VIRTUAL ROUTER APPLIANCE</a:t>
             </a:r>
             <a:endParaRPr lang="en-US" dirty="0"/>
           </a:p>
@@ -38931,7 +38931,7 @@
       </p:sp>
       <p:pic>
         <p:nvPicPr>
-          <p:cNvPr id="72" name="Object 71" descr="public/generated/icons/is.instance.png">    </p:cNvPr>
+          <p:cNvPr id="72" name="Object 71" descr="public/generated/icons/virtual-server-group.png">    </p:cNvPr>
           <p:cNvPicPr>
             <a:picLocks noChangeAspect="1"/>
           </p:cNvPicPr>
@@ -38987,7 +38987,7 @@
                 <a:ea typeface="Helvetica" pitchFamily="34" charset="-122"/>
                 <a:cs typeface="Helvetica" pitchFamily="34" charset="-120"/>
               </a:rPr>
-              <a:t>VIRTUAL SERVER FOR VPC</a:t>
+              <a:t>VIRTUAL SERVER FOR CLASSIC</a:t>
             </a:r>
             <a:endParaRPr lang="en-US" dirty="0"/>
           </a:p>
@@ -39020,7 +39020,7 @@
       </p:sp>
       <p:pic>
         <p:nvPicPr>
-          <p:cNvPr id="75" name="Object 74" descr="public/generated/icons/15.png">    </p:cNvPr>
+          <p:cNvPr id="75" name="Object 74" descr="public/generated/icons/is.instance.png">    </p:cNvPr>
           <p:cNvPicPr>
             <a:picLocks noChangeAspect="1"/>
           </p:cNvPicPr>
@@ -39076,7 +39076,7 @@
                 <a:ea typeface="Helvetica" pitchFamily="34" charset="-122"/>
                 <a:cs typeface="Helvetica" pitchFamily="34" charset="-120"/>
               </a:rPr>
-              <a:t>VLAN</a:t>
+              <a:t>VIRTUAL SERVER FOR VPC</a:t>
             </a:r>
             <a:endParaRPr lang="en-US" dirty="0"/>
           </a:p>
@@ -39109,7 +39109,7 @@
       </p:sp>
       <p:pic>
         <p:nvPicPr>
-          <p:cNvPr id="78" name="Object 77" descr="public/generated/icons/09f5a6ea-185e-4625-8281-9e8629360a4f.png">    </p:cNvPr>
+          <p:cNvPr id="78" name="Object 77" descr="public/generated/icons/15.png">    </p:cNvPr>
           <p:cNvPicPr>
             <a:picLocks noChangeAspect="1"/>
           </p:cNvPicPr>
@@ -39165,7 +39165,7 @@
                 <a:ea typeface="Helvetica" pitchFamily="34" charset="-122"/>
                 <a:cs typeface="Helvetica" pitchFamily="34" charset="-120"/>
               </a:rPr>
-              <a:t>VMWARE CLOUD MIGRATION SERVICES</a:t>
+              <a:t>VLAN</a:t>
             </a:r>
             <a:endParaRPr lang="en-US" dirty="0"/>
           </a:p>
@@ -39198,7 +39198,7 @@
       </p:sp>
       <p:pic>
         <p:nvPicPr>
-          <p:cNvPr id="81" name="Object 80" descr="public/generated/icons/cf329950-0a3e-11e8-922e-f1366c6e1c83.png">    </p:cNvPr>
+          <p:cNvPr id="81" name="Object 80" descr="public/generated/icons/09f5a6ea-185e-4625-8281-9e8629360a4f.png">    </p:cNvPr>
           <p:cNvPicPr>
             <a:picLocks noChangeAspect="1"/>
           </p:cNvPicPr>
@@ -39254,7 +39254,7 @@
                 <a:ea typeface="Helvetica" pitchFamily="34" charset="-122"/>
                 <a:cs typeface="Helvetica" pitchFamily="34" charset="-120"/>
               </a:rPr>
-              <a:t>VMWARE SOLUTIONS</a:t>
+              <a:t>VMWARE CLOUD MIGRATION SERVICES</a:t>
             </a:r>
             <a:endParaRPr lang="en-US" dirty="0"/>
           </a:p>
@@ -39287,7 +39287,7 @@
       </p:sp>
       <p:pic>
         <p:nvPicPr>
-          <p:cNvPr id="84" name="Object 83" descr="public/generated/icons/cf329950-0a3e-11e8-922e-f1366c6e1c83-vcenterserver.png">    </p:cNvPr>
+          <p:cNvPr id="84" name="Object 83" descr="public/generated/icons/cf329950-0a3e-11e8-922e-f1366c6e1c83.png">    </p:cNvPr>
           <p:cNvPicPr>
             <a:picLocks noChangeAspect="1"/>
           </p:cNvPicPr>
@@ -39343,7 +39343,7 @@
                 <a:ea typeface="Helvetica" pitchFamily="34" charset="-122"/>
                 <a:cs typeface="Helvetica" pitchFamily="34" charset="-120"/>
               </a:rPr>
-              <a:t>VMWARE VCENTER SERVER</a:t>
+              <a:t>VMWARE SOLUTIONS</a:t>
             </a:r>
             <a:endParaRPr lang="en-US" dirty="0"/>
           </a:p>
@@ -39376,7 +39376,7 @@
       </p:sp>
       <p:pic>
         <p:nvPicPr>
-          <p:cNvPr id="87" name="Object 86" descr="public/generated/icons/cf329950-0a3e-11e8-922e-f1366c6e1c83-vsphere.png">    </p:cNvPr>
+          <p:cNvPr id="87" name="Object 86" descr="public/generated/icons/cf329950-0a3e-11e8-922e-f1366c6e1c83-vcenterserver.png">    </p:cNvPr>
           <p:cNvPicPr>
             <a:picLocks noChangeAspect="1"/>
           </p:cNvPicPr>
@@ -39432,7 +39432,7 @@
                 <a:ea typeface="Helvetica" pitchFamily="34" charset="-122"/>
                 <a:cs typeface="Helvetica" pitchFamily="34" charset="-120"/>
               </a:rPr>
-              <a:t>VMWARE VSPHERE</a:t>
+              <a:t>VMWARE VCENTER SERVER</a:t>
             </a:r>
             <a:endParaRPr lang="en-US" dirty="0"/>
           </a:p>
@@ -39465,7 +39465,7 @@
       </p:sp>
       <p:pic>
         <p:nvPicPr>
-          <p:cNvPr id="90" name="Object 89" descr="public/generated/icons/b6670b68-84ca-4a04-b8e8-c567dfeeddde.png">    </p:cNvPr>
+          <p:cNvPr id="90" name="Object 89" descr="public/generated/icons/cf329950-0a3e-11e8-922e-f1366c6e1c83-vsphere.png">    </p:cNvPr>
           <p:cNvPicPr>
             <a:picLocks noChangeAspect="1"/>
           </p:cNvPicPr>
@@ -39521,7 +39521,7 @@
                 <a:ea typeface="Helvetica" pitchFamily="34" charset="-122"/>
                 <a:cs typeface="Helvetica" pitchFamily="34" charset="-120"/>
               </a:rPr>
-              <a:t>VPC COAAS (VPC COST OPTIMIZATION AS A SERVICE)</a:t>
+              <a:t>VMWARE VSPHERE</a:t>
             </a:r>
             <a:endParaRPr lang="en-US" dirty="0"/>
           </a:p>
@@ -39554,7 +39554,7 @@
       </p:sp>
       <p:pic>
         <p:nvPicPr>
-          <p:cNvPr id="93" name="Object 92" descr="public/generated/icons/757254b0-a9a0-11ea-9ff6-17a22eb543c5.png">    </p:cNvPr>
+          <p:cNvPr id="93" name="Object 92" descr="public/generated/icons/b6670b68-84ca-4a04-b8e8-c567dfeeddde.png">    </p:cNvPr>
           <p:cNvPicPr>
             <a:picLocks noChangeAspect="1"/>
           </p:cNvPicPr>
@@ -39610,7 +39610,7 @@
                 <a:ea typeface="Helvetica" pitchFamily="34" charset="-122"/>
                 <a:cs typeface="Helvetica" pitchFamily="34" charset="-120"/>
               </a:rPr>
-              <a:t>VPC+ CLOUD MIGRATION</a:t>
+              <a:t>VPC COAAS (VPC COST OPTIMIZATION AS A SERVICE)</a:t>
             </a:r>
             <a:endParaRPr lang="en-US" dirty="0"/>
           </a:p>
@@ -39643,7 +39643,7 @@
       </p:sp>
       <p:pic>
         <p:nvPicPr>
-          <p:cNvPr id="96" name="Object 95" descr="public/generated/icons/fd1e0240-dd95-11eb-b4a0-db1c9221b8a2.png">    </p:cNvPr>
+          <p:cNvPr id="96" name="Object 95" descr="public/generated/icons/757254b0-a9a0-11ea-9ff6-17a22eb543c5.png">    </p:cNvPr>
           <p:cNvPicPr>
             <a:picLocks noChangeAspect="1"/>
           </p:cNvPicPr>
@@ -39699,7 +39699,7 @@
                 <a:ea typeface="Helvetica" pitchFamily="34" charset="-122"/>
                 <a:cs typeface="Helvetica" pitchFamily="34" charset="-120"/>
               </a:rPr>
-              <a:t>VPC+ DRAAS (VPC+ DISASTER RECOVERY AS A SERVICE)</a:t>
+              <a:t>VPC+ CLOUD MIGRATION</a:t>
             </a:r>
             <a:endParaRPr lang="en-US" dirty="0"/>
           </a:p>
@@ -39732,7 +39732,7 @@
       </p:sp>
       <p:pic>
         <p:nvPicPr>
-          <p:cNvPr id="99" name="Object 98" descr="public/generated/icons/is.vpn.png">    </p:cNvPr>
+          <p:cNvPr id="99" name="Object 98" descr="public/generated/icons/fd1e0240-dd95-11eb-b4a0-db1c9221b8a2.png">    </p:cNvPr>
           <p:cNvPicPr>
             <a:picLocks noChangeAspect="1"/>
           </p:cNvPicPr>
@@ -39788,7 +39788,7 @@
                 <a:ea typeface="Helvetica" pitchFamily="34" charset="-122"/>
                 <a:cs typeface="Helvetica" pitchFamily="34" charset="-120"/>
               </a:rPr>
-              <a:t>VPN FOR VPC</a:t>
+              <a:t>VPC+ DRAAS (VPC+ DISASTER RECOVERY AS A SERVICE)</a:t>
             </a:r>
             <a:endParaRPr lang="en-US" dirty="0"/>
           </a:p>
@@ -39821,7 +39821,7 @@
       </p:sp>
       <p:pic>
         <p:nvPicPr>
-          <p:cNvPr id="102" name="Object 101" descr="public/generated/icons/cf329950-0a3e-11e8-922e-f1366c6e1c83-vrops.png">    </p:cNvPr>
+          <p:cNvPr id="102" name="Object 101" descr="public/generated/icons/is.vpn.png">    </p:cNvPr>
           <p:cNvPicPr>
             <a:picLocks noChangeAspect="1"/>
           </p:cNvPicPr>
@@ -39877,7 +39877,7 @@
                 <a:ea typeface="Helvetica" pitchFamily="34" charset="-122"/>
                 <a:cs typeface="Helvetica" pitchFamily="34" charset="-120"/>
               </a:rPr>
-              <a:t>VREALIZE OPERATIONS AND LOG INSIGHT</a:t>
+              <a:t>VPN FOR VPC</a:t>
             </a:r>
             <a:endParaRPr lang="en-US" dirty="0"/>
           </a:p>
@@ -39910,7 +39910,7 @@
       </p:sp>
       <p:pic>
         <p:nvPicPr>
-          <p:cNvPr id="105" name="Object 104" descr="public/generated/icons/76b7bf22-b443-47db-b3db-066ba2988f47.png">    </p:cNvPr>
+          <p:cNvPr id="105" name="Object 104" descr="public/generated/icons/cf329950-0a3e-11e8-922e-f1366c6e1c83-vrops.png">    </p:cNvPr>
           <p:cNvPicPr>
             <a:picLocks noChangeAspect="1"/>
           </p:cNvPicPr>
@@ -39966,7 +39966,7 @@
                 <a:ea typeface="Helvetica" pitchFamily="34" charset="-122"/>
                 <a:cs typeface="Helvetica" pitchFamily="34" charset="-120"/>
               </a:rPr>
-              <a:t>WATSON DISCOVERY</a:t>
+              <a:t>VREALIZE OPERATIONS AND LOG INSIGHT</a:t>
             </a:r>
             <a:endParaRPr lang="en-US" dirty="0"/>
           </a:p>
@@ -39999,7 +39999,7 @@
       </p:sp>
       <p:pic>
         <p:nvPicPr>
-          <p:cNvPr id="108" name="Object 107" descr="public/generated/icons/12fbfff4-12c7-ccd0-80e6-603e8607468a.png">    </p:cNvPr>
+          <p:cNvPr id="108" name="Object 107" descr="public/generated/icons/76b7bf22-b443-47db-b3db-066ba2988f47.png">    </p:cNvPr>
           <p:cNvPicPr>
             <a:picLocks noChangeAspect="1"/>
           </p:cNvPicPr>
@@ -40055,7 +40055,7 @@
                 <a:ea typeface="Helvetica" pitchFamily="34" charset="-122"/>
                 <a:cs typeface="Helvetica" pitchFamily="34" charset="-120"/>
               </a:rPr>
-              <a:t>WATSONX</a:t>
+              <a:t>WATSON DISCOVERY</a:t>
             </a:r>
             <a:endParaRPr lang="en-US" dirty="0"/>
           </a:p>
@@ -40121,7 +40121,7 @@
       </p:sp>
       <p:pic>
         <p:nvPicPr>
-          <p:cNvPr id="3" name="Object 2" descr="public/generated/icons/7045626d-55e3-4418-be11-683a26dbc1e5.png">    </p:cNvPr>
+          <p:cNvPr id="3" name="Object 2" descr="public/generated/icons/12fbfff4-12c7-ccd0-80e6-603e8607468a.png">    </p:cNvPr>
           <p:cNvPicPr>
             <a:picLocks noChangeAspect="1"/>
           </p:cNvPicPr>
@@ -40177,7 +40177,7 @@
                 <a:ea typeface="Helvetica" pitchFamily="34" charset="-122"/>
                 <a:cs typeface="Helvetica" pitchFamily="34" charset="-120"/>
               </a:rPr>
-              <a:t>WATSONX ASSISTANT</a:t>
+              <a:t>WATSONX</a:t>
             </a:r>
             <a:endParaRPr lang="en-US" dirty="0"/>
           </a:p>
@@ -40210,7 +40210,7 @@
       </p:sp>
       <p:pic>
         <p:nvPicPr>
-          <p:cNvPr id="6" name="Object 5" descr="public/generated/icons/11530fa0-1776-11ee-93f6-1d4066e6a409.png">    </p:cNvPr>
+          <p:cNvPr id="6" name="Object 5" descr="public/generated/icons/7045626d-55e3-4418-be11-683a26dbc1e5.png">    </p:cNvPr>
           <p:cNvPicPr>
             <a:picLocks noChangeAspect="1"/>
           </p:cNvPicPr>
@@ -40266,7 +40266,7 @@
                 <a:ea typeface="Helvetica" pitchFamily="34" charset="-122"/>
                 <a:cs typeface="Helvetica" pitchFamily="34" charset="-120"/>
               </a:rPr>
-              <a:t>WATSONX CODE ASSISTANT</a:t>
+              <a:t>WATSONX ASSISTANT</a:t>
             </a:r>
             <a:endParaRPr lang="en-US" dirty="0"/>
           </a:p>
@@ -40299,7 +40299,7 @@
       </p:sp>
       <p:pic>
         <p:nvPicPr>
-          <p:cNvPr id="9" name="Object 8" descr="public/generated/icons/b69f78c0-11d7-11ef-9bdf-c92eb40d1838.png">    </p:cNvPr>
+          <p:cNvPr id="9" name="Object 8" descr="public/generated/icons/11530fa0-1776-11ee-93f6-1d4066e6a409.png">    </p:cNvPr>
           <p:cNvPicPr>
             <a:picLocks noChangeAspect="1"/>
           </p:cNvPicPr>
@@ -40355,7 +40355,7 @@
                 <a:ea typeface="Helvetica" pitchFamily="34" charset="-122"/>
                 <a:cs typeface="Helvetica" pitchFamily="34" charset="-120"/>
               </a:rPr>
-              <a:t>WATSONX ORCHESTRATE</a:t>
+              <a:t>WATSONX CODE ASSISTANT</a:t>
             </a:r>
             <a:endParaRPr lang="en-US" dirty="0"/>
           </a:p>
@@ -40388,7 +40388,7 @@
       </p:sp>
       <p:pic>
         <p:nvPicPr>
-          <p:cNvPr id="12" name="Object 11" descr="public/generated/icons/51c53b72-918f-4869-b834-2d99eb28422a.png">    </p:cNvPr>
+          <p:cNvPr id="12" name="Object 11" descr="public/generated/icons/b69f78c0-11d7-11ef-9bdf-c92eb40d1838.png">    </p:cNvPr>
           <p:cNvPicPr>
             <a:picLocks noChangeAspect="1"/>
           </p:cNvPicPr>
@@ -40444,7 +40444,7 @@
                 <a:ea typeface="Helvetica" pitchFamily="34" charset="-122"/>
                 <a:cs typeface="Helvetica" pitchFamily="34" charset="-120"/>
               </a:rPr>
-              <a:t>WATSONX.AI RUNTIME</a:t>
+              <a:t>WATSONX ORCHESTRATE</a:t>
             </a:r>
             <a:endParaRPr lang="en-US" dirty="0"/>
           </a:p>
@@ -40477,7 +40477,7 @@
       </p:sp>
       <p:pic>
         <p:nvPicPr>
-          <p:cNvPr id="15" name="Object 14" descr="public/generated/icons/39ba9d4c-b1c5-4cc3-a163-38b580121e01.png">    </p:cNvPr>
+          <p:cNvPr id="15" name="Object 14" descr="public/generated/icons/51c53b72-918f-4869-b834-2d99eb28422a.png">    </p:cNvPr>
           <p:cNvPicPr>
             <a:picLocks noChangeAspect="1"/>
           </p:cNvPicPr>
@@ -40533,7 +40533,7 @@
                 <a:ea typeface="Helvetica" pitchFamily="34" charset="-122"/>
                 <a:cs typeface="Helvetica" pitchFamily="34" charset="-120"/>
               </a:rPr>
-              <a:t>WATSONX.AI STUDIO</a:t>
+              <a:t>WATSONX.AI RUNTIME</a:t>
             </a:r>
             <a:endParaRPr lang="en-US" dirty="0"/>
           </a:p>
@@ -40566,7 +40566,7 @@
       </p:sp>
       <p:pic>
         <p:nvPicPr>
-          <p:cNvPr id="18" name="Object 17" descr="public/generated/icons/43834340-4a6d-11ed-97d2-959039ad2a2e.png">    </p:cNvPr>
+          <p:cNvPr id="18" name="Object 17" descr="public/generated/icons/39ba9d4c-b1c5-4cc3-a163-38b580121e01.png">    </p:cNvPr>
           <p:cNvPicPr>
             <a:picLocks noChangeAspect="1"/>
           </p:cNvPicPr>
@@ -40622,7 +40622,7 @@
                 <a:ea typeface="Helvetica" pitchFamily="34" charset="-122"/>
                 <a:cs typeface="Helvetica" pitchFamily="34" charset="-120"/>
               </a:rPr>
-              <a:t>WATSONX.DATA</a:t>
+              <a:t>WATSONX.AI STUDIO</a:t>
             </a:r>
             <a:endParaRPr lang="en-US" dirty="0"/>
           </a:p>
@@ -40655,7 +40655,7 @@
       </p:sp>
       <p:pic>
         <p:nvPicPr>
-          <p:cNvPr id="21" name="Object 20" descr="public/generated/icons/2ad019f3-0fd6-4c25-966d-f3952481a870.png">    </p:cNvPr>
+          <p:cNvPr id="21" name="Object 20" descr="public/generated/icons/43834340-4a6d-11ed-97d2-959039ad2a2e.png">    </p:cNvPr>
           <p:cNvPicPr>
             <a:picLocks noChangeAspect="1"/>
           </p:cNvPicPr>
@@ -40711,7 +40711,7 @@
                 <a:ea typeface="Helvetica" pitchFamily="34" charset="-122"/>
                 <a:cs typeface="Helvetica" pitchFamily="34" charset="-120"/>
               </a:rPr>
-              <a:t>WATSONX.GOVERNANCE</a:t>
+              <a:t>WATSONX.DATA</a:t>
             </a:r>
             <a:endParaRPr lang="en-US" dirty="0"/>
           </a:p>
@@ -40744,7 +40744,7 @@
       </p:sp>
       <p:pic>
         <p:nvPicPr>
-          <p:cNvPr id="24" name="Object 23" descr="public/generated/icons/power-iaas.workspace.png">    </p:cNvPr>
+          <p:cNvPr id="24" name="Object 23" descr="public/generated/icons/2ad019f3-0fd6-4c25-966d-f3952481a870.png">    </p:cNvPr>
           <p:cNvPicPr>
             <a:picLocks noChangeAspect="1"/>
           </p:cNvPicPr>
@@ -40800,7 +40800,7 @@
                 <a:ea typeface="Helvetica" pitchFamily="34" charset="-122"/>
                 <a:cs typeface="Helvetica" pitchFamily="34" charset="-120"/>
               </a:rPr>
-              <a:t>WORKSPACE FOR POWER VIRTUAL SERVER</a:t>
+              <a:t>WATSONX.GOVERNANCE</a:t>
             </a:r>
             <a:endParaRPr lang="en-US" dirty="0"/>
           </a:p>

--- a/mycatalog-architecture-diagram-template.pptx
+++ b/mycatalog-architecture-diagram-template.pptx
@@ -524,7 +524,7 @@
           <a:p>
             <a:r>
               <a:rPr lang="en-US" dirty="0" smtClean="0"/>
-              <a:t>Generated on Sun Feb 16 2025 08:04:19 GMT+0000 (Coordinated Universal Time)</a:t>
+              <a:t>Generated on Sun Mar 02 2025 08:04:32 GMT+0000 (Coordinated Universal Time)</a:t>
             </a:r>
             <a:endParaRPr lang="en-US" dirty="0"/>
           </a:p>
@@ -34715,7 +34715,7 @@
       </p:sp>
       <p:pic>
         <p:nvPicPr>
-          <p:cNvPr id="39" name="Object 38" descr="public/generated/icons/power-iaas.network.png">    </p:cNvPr>
+          <p:cNvPr id="39" name="Object 38" descr="public/generated/icons/power-iaas.dedicated-host.png">    </p:cNvPr>
           <p:cNvPicPr>
             <a:picLocks noChangeAspect="1"/>
           </p:cNvPicPr>
@@ -34771,7 +34771,7 @@
                 <a:ea typeface="Helvetica" pitchFamily="34" charset="-122"/>
                 <a:cs typeface="Helvetica" pitchFamily="34" charset="-120"/>
               </a:rPr>
-              <a:t>POWER VIRTUAL SERVER NETWORK</a:t>
+              <a:t>POWER VIRTUAL SERVER DEDICATED HOST</a:t>
             </a:r>
             <a:endParaRPr lang="en-US" dirty="0"/>
           </a:p>
@@ -34804,7 +34804,7 @@
       </p:sp>
       <p:pic>
         <p:nvPicPr>
-          <p:cNvPr id="42" name="Object 41" descr="public/generated/icons/power-iaas.shared-processor-pool.png">    </p:cNvPr>
+          <p:cNvPr id="42" name="Object 41" descr="public/generated/icons/208072a0-7978-11ef-b369-0733120a414f.png">    </p:cNvPr>
           <p:cNvPicPr>
             <a:picLocks noChangeAspect="1"/>
           </p:cNvPicPr>
@@ -34860,7 +34860,7 @@
                 <a:ea typeface="Helvetica" pitchFamily="34" charset="-122"/>
                 <a:cs typeface="Helvetica" pitchFamily="34" charset="-120"/>
               </a:rPr>
-              <a:t>POWER VIRTUAL SERVER SHARED PROCESSOR POOL</a:t>
+              <a:t>POWER VIRTUAL SERVER DR AUTOMATION</a:t>
             </a:r>
             <a:endParaRPr lang="en-US" dirty="0"/>
           </a:p>
@@ -34893,7 +34893,7 @@
       </p:sp>
       <p:pic>
         <p:nvPicPr>
-          <p:cNvPr id="45" name="Object 44" descr="public/generated/icons/power-iaas.snapshot.png">    </p:cNvPr>
+          <p:cNvPr id="45" name="Object 44" descr="public/generated/icons/power-iaas.image.png">    </p:cNvPr>
           <p:cNvPicPr>
             <a:picLocks noChangeAspect="1"/>
           </p:cNvPicPr>
@@ -34949,7 +34949,7 @@
                 <a:ea typeface="Helvetica" pitchFamily="34" charset="-122"/>
                 <a:cs typeface="Helvetica" pitchFamily="34" charset="-120"/>
               </a:rPr>
-              <a:t>POWER VIRTUAL SERVER SNAPSHOT</a:t>
+              <a:t>POWER VIRTUAL SERVER IMAGE</a:t>
             </a:r>
             <a:endParaRPr lang="en-US" dirty="0"/>
           </a:p>
@@ -34982,7 +34982,7 @@
       </p:sp>
       <p:pic>
         <p:nvPicPr>
-          <p:cNvPr id="48" name="Object 47" descr="public/generated/icons/power-iaas.pvm-instance.png">    </p:cNvPr>
+          <p:cNvPr id="48" name="Object 47" descr="public/generated/icons/power-iaas.network.png">    </p:cNvPr>
           <p:cNvPicPr>
             <a:picLocks noChangeAspect="1"/>
           </p:cNvPicPr>
@@ -35038,7 +35038,7 @@
                 <a:ea typeface="Helvetica" pitchFamily="34" charset="-122"/>
                 <a:cs typeface="Helvetica" pitchFamily="34" charset="-120"/>
               </a:rPr>
-              <a:t>POWER VIRTUAL SERVER VIRTUAL MACHINE</a:t>
+              <a:t>POWER VIRTUAL SERVER NETWORK</a:t>
             </a:r>
             <a:endParaRPr lang="en-US" dirty="0"/>
           </a:p>
@@ -35071,7 +35071,7 @@
       </p:sp>
       <p:pic>
         <p:nvPicPr>
-          <p:cNvPr id="51" name="Object 50" descr="public/generated/icons/power-iaas.volume.png">    </p:cNvPr>
+          <p:cNvPr id="51" name="Object 50" descr="public/generated/icons/power-iaas.network-address-group.png">    </p:cNvPr>
           <p:cNvPicPr>
             <a:picLocks noChangeAspect="1"/>
           </p:cNvPicPr>
@@ -35127,7 +35127,7 @@
                 <a:ea typeface="Helvetica" pitchFamily="34" charset="-122"/>
                 <a:cs typeface="Helvetica" pitchFamily="34" charset="-120"/>
               </a:rPr>
-              <a:t>POWER VIRTUAL SERVER VOLUME</a:t>
+              <a:t>POWER VIRTUAL SERVER NETWORK ADDRESS GROUP</a:t>
             </a:r>
             <a:endParaRPr lang="en-US" dirty="0"/>
           </a:p>
@@ -35160,7 +35160,7 @@
       </p:sp>
       <p:pic>
         <p:nvPicPr>
-          <p:cNvPr id="54" name="Object 53" descr="public/generated/icons/b260dfd6-9b79-4377-be6d-146a5cb59be8.png">    </p:cNvPr>
+          <p:cNvPr id="54" name="Object 53" descr="public/generated/icons/power-iaas.network-interface.png">    </p:cNvPr>
           <p:cNvPicPr>
             <a:picLocks noChangeAspect="1"/>
           </p:cNvPicPr>
@@ -35216,7 +35216,7 @@
                 <a:ea typeface="Helvetica" pitchFamily="34" charset="-122"/>
                 <a:cs typeface="Helvetica" pitchFamily="34" charset="-120"/>
               </a:rPr>
-              <a:t>POWERVS MIGRATION AS A SERVICE</a:t>
+              <a:t>POWER VIRTUAL SERVER NETWORK INTERFACE</a:t>
             </a:r>
             <a:endParaRPr lang="en-US" dirty="0"/>
           </a:p>
@@ -35249,7 +35249,7 @@
       </p:sp>
       <p:pic>
         <p:nvPicPr>
-          <p:cNvPr id="57" name="Object 56" descr="public/generated/icons/C43B3EB0-F56B-4753-92E4-093815814C1E.png">    </p:cNvPr>
+          <p:cNvPr id="57" name="Object 56" descr="public/generated/icons/power-iaas.network-security-group.png">    </p:cNvPr>
           <p:cNvPicPr>
             <a:picLocks noChangeAspect="1"/>
           </p:cNvPicPr>
@@ -35305,7 +35305,7 @@
                 <a:ea typeface="Helvetica" pitchFamily="34" charset="-122"/>
                 <a:cs typeface="Helvetica" pitchFamily="34" charset="-120"/>
               </a:rPr>
-              <a:t>PREDICTIVE MARKET SCENARIOS</a:t>
+              <a:t>POWER VIRTUAL SERVER NETWORK SECURITY GROUP</a:t>
             </a:r>
             <a:endParaRPr lang="en-US" dirty="0"/>
           </a:p>
@@ -35338,7 +35338,7 @@
       </p:sp>
       <p:pic>
         <p:nvPicPr>
-          <p:cNvPr id="60" name="Object 59" descr="public/generated/icons/is.private-path-service-gateway.png">    </p:cNvPr>
+          <p:cNvPr id="60" name="Object 59" descr="public/generated/icons/power-iaas.shared-processor-pool.png">    </p:cNvPr>
           <p:cNvPicPr>
             <a:picLocks noChangeAspect="1"/>
           </p:cNvPicPr>
@@ -35394,7 +35394,7 @@
                 <a:ea typeface="Helvetica" pitchFamily="34" charset="-122"/>
                 <a:cs typeface="Helvetica" pitchFamily="34" charset="-120"/>
               </a:rPr>
-              <a:t>PRIVATE PATH SERVICE FOR VPC</a:t>
+              <a:t>POWER VIRTUAL SERVER SHARED PROCESSOR POOL</a:t>
             </a:r>
             <a:endParaRPr lang="en-US" dirty="0"/>
           </a:p>
@@ -35427,7 +35427,7 @@
       </p:sp>
       <p:pic>
         <p:nvPicPr>
-          <p:cNvPr id="63" name="Object 62" descr="public/generated/icons/91a901ac-fb7d-9b6e-eb25-14e75a20c4c2.png">    </p:cNvPr>
+          <p:cNvPr id="63" name="Object 62" descr="public/generated/icons/power-iaas.snapshot.png">    </p:cNvPr>
           <p:cNvPicPr>
             <a:picLocks noChangeAspect="1"/>
           </p:cNvPicPr>
@@ -35483,7 +35483,7 @@
                 <a:ea typeface="Helvetica" pitchFamily="34" charset="-122"/>
                 <a:cs typeface="Helvetica" pitchFamily="34" charset="-120"/>
               </a:rPr>
-              <a:t>PROFESSIONAL SERVICES FOR GOVERNMENT(ONLY AVAILABLE IN US)</a:t>
+              <a:t>POWER VIRTUAL SERVER SNAPSHOT</a:t>
             </a:r>
             <a:endParaRPr lang="en-US" dirty="0"/>
           </a:p>
@@ -35516,7 +35516,7 @@
       </p:sp>
       <p:pic>
         <p:nvPicPr>
-          <p:cNvPr id="66" name="Object 65" descr="public/generated/icons/7c03a06c-f1bb-46f8-84d8-9378432b2804.png">    </p:cNvPr>
+          <p:cNvPr id="66" name="Object 65" descr="public/generated/icons/power-iaas.pvm-instance.png">    </p:cNvPr>
           <p:cNvPicPr>
             <a:picLocks noChangeAspect="1"/>
           </p:cNvPicPr>
@@ -35572,7 +35572,7 @@
                 <a:ea typeface="Helvetica" pitchFamily="34" charset="-122"/>
                 <a:cs typeface="Helvetica" pitchFamily="34" charset="-120"/>
               </a:rPr>
-              <a:t>PROTECTIO DRAAS MANAGED SERVICE</a:t>
+              <a:t>POWER VIRTUAL SERVER VIRTUAL MACHINE</a:t>
             </a:r>
             <a:endParaRPr lang="en-US" dirty="0"/>
           </a:p>
@@ -35605,7 +35605,7 @@
       </p:sp>
       <p:pic>
         <p:nvPicPr>
-          <p:cNvPr id="69" name="Object 68" descr="public/generated/icons/is.public-gateway.png">    </p:cNvPr>
+          <p:cNvPr id="69" name="Object 68" descr="public/generated/icons/power-iaas.volume.png">    </p:cNvPr>
           <p:cNvPicPr>
             <a:picLocks noChangeAspect="1"/>
           </p:cNvPicPr>
@@ -35661,7 +35661,7 @@
                 <a:ea typeface="Helvetica" pitchFamily="34" charset="-122"/>
                 <a:cs typeface="Helvetica" pitchFamily="34" charset="-120"/>
               </a:rPr>
-              <a:t>PUBLIC GATEWAY</a:t>
+              <a:t>POWER VIRTUAL SERVER VOLUME</a:t>
             </a:r>
             <a:endParaRPr lang="en-US" dirty="0"/>
           </a:p>
@@ -35694,7 +35694,7 @@
       </p:sp>
       <p:pic>
         <p:nvPicPr>
-          <p:cNvPr id="72" name="Object 71" descr="public/generated/icons/aa11a8b2-381e-4c1c-a232-2148f65c005f.png">    </p:cNvPr>
+          <p:cNvPr id="72" name="Object 71" descr="public/generated/icons/b260dfd6-9b79-4377-be6d-146a5cb59be8.png">    </p:cNvPr>
           <p:cNvPicPr>
             <a:picLocks noChangeAspect="1"/>
           </p:cNvPicPr>
@@ -35750,7 +35750,7 @@
                 <a:ea typeface="Helvetica" pitchFamily="34" charset="-122"/>
                 <a:cs typeface="Helvetica" pitchFamily="34" charset="-120"/>
               </a:rPr>
-              <a:t>PVS ONE MANAGED SERVICE</a:t>
+              <a:t>POWERVS MIGRATION AS A SERVICE</a:t>
             </a:r>
             <a:endParaRPr lang="en-US" dirty="0"/>
           </a:p>
@@ -35783,7 +35783,7 @@
       </p:sp>
       <p:pic>
         <p:nvPicPr>
-          <p:cNvPr id="75" name="Object 74" descr="public/generated/icons/3eb2d5a0-24ff-11eb-9437-631d7272fff5.png">    </p:cNvPr>
+          <p:cNvPr id="75" name="Object 74" descr="public/generated/icons/C43B3EB0-F56B-4753-92E4-093815814C1E.png">    </p:cNvPr>
           <p:cNvPicPr>
             <a:picLocks noChangeAspect="1"/>
           </p:cNvPicPr>
@@ -35839,7 +35839,7 @@
                 <a:ea typeface="Helvetica" pitchFamily="34" charset="-122"/>
                 <a:cs typeface="Helvetica" pitchFamily="34" charset="-120"/>
               </a:rPr>
-              <a:t>PX-BACKUP FOR KUBERNETES</a:t>
+              <a:t>PREDICTIVE MARKET SCENARIOS</a:t>
             </a:r>
             <a:endParaRPr lang="en-US" dirty="0"/>
           </a:p>
@@ -35872,7 +35872,7 @@
       </p:sp>
       <p:pic>
         <p:nvPicPr>
-          <p:cNvPr id="78" name="Object 77" descr="public/generated/icons/b6049020-80f4-11eb-a0f7-e35ec9b4054f.png">    </p:cNvPr>
+          <p:cNvPr id="78" name="Object 77" descr="public/generated/icons/is.private-path-service-gateway.png">    </p:cNvPr>
           <p:cNvPicPr>
             <a:picLocks noChangeAspect="1"/>
           </p:cNvPicPr>
@@ -35928,7 +35928,7 @@
                 <a:ea typeface="Helvetica" pitchFamily="34" charset="-122"/>
                 <a:cs typeface="Helvetica" pitchFamily="34" charset="-120"/>
               </a:rPr>
-              <a:t>QISKIT RUNTIME</a:t>
+              <a:t>PRIVATE PATH SERVICE FOR VPC</a:t>
             </a:r>
             <a:endParaRPr lang="en-US" dirty="0"/>
           </a:p>
@@ -35961,7 +35961,7 @@
       </p:sp>
       <p:pic>
         <p:nvPicPr>
-          <p:cNvPr id="81" name="Object 80" descr="public/generated/icons/cf5f8ac0-98f7-11e9-a40c-5b3c4bf3cc6d.png">    </p:cNvPr>
+          <p:cNvPr id="81" name="Object 80" descr="public/generated/icons/91a901ac-fb7d-9b6e-eb25-14e75a20c4c2.png">    </p:cNvPr>
           <p:cNvPicPr>
             <a:picLocks noChangeAspect="1"/>
           </p:cNvPicPr>
@@ -36017,7 +36017,7 @@
                 <a:ea typeface="Helvetica" pitchFamily="34" charset="-122"/>
                 <a:cs typeface="Helvetica" pitchFamily="34" charset="-120"/>
               </a:rPr>
-              <a:t>RAXAK PROTECT</a:t>
+              <a:t>PROFESSIONAL SERVICES FOR GOVERNMENT(ONLY AVAILABLE IN US)</a:t>
             </a:r>
             <a:endParaRPr lang="en-US" dirty="0"/>
           </a:p>
@@ -36050,7 +36050,7 @@
       </p:sp>
       <p:pic>
         <p:nvPicPr>
-          <p:cNvPr id="84" name="Object 83" descr="public/generated/icons/467ab6d8-48dd-485a-adf9-30d5107537a1.png">    </p:cNvPr>
+          <p:cNvPr id="84" name="Object 83" descr="public/generated/icons/7c03a06c-f1bb-46f8-84d8-9378432b2804.png">    </p:cNvPr>
           <p:cNvPicPr>
             <a:picLocks noChangeAspect="1"/>
           </p:cNvPicPr>
@@ -36106,7 +36106,7 @@
                 <a:ea typeface="Helvetica" pitchFamily="34" charset="-122"/>
                 <a:cs typeface="Helvetica" pitchFamily="34" charset="-120"/>
               </a:rPr>
-              <a:t>REAL-TIME PAYMENTS</a:t>
+              <a:t>PROTECTIO DRAAS MANAGED SERVICE</a:t>
             </a:r>
             <a:endParaRPr lang="en-US" dirty="0"/>
           </a:p>
@@ -36139,7 +36139,7 @@
       </p:sp>
       <p:pic>
         <p:nvPicPr>
-          <p:cNvPr id="87" name="Object 86" descr="public/generated/icons/openshift.png">    </p:cNvPr>
+          <p:cNvPr id="87" name="Object 86" descr="public/generated/icons/is.public-gateway.png">    </p:cNvPr>
           <p:cNvPicPr>
             <a:picLocks noChangeAspect="1"/>
           </p:cNvPicPr>
@@ -36195,7 +36195,7 @@
                 <a:ea typeface="Helvetica" pitchFamily="34" charset="-122"/>
                 <a:cs typeface="Helvetica" pitchFamily="34" charset="-120"/>
               </a:rPr>
-              <a:t>RED HAT OPENSHIFT ON IBM CLOUD</a:t>
+              <a:t>PUBLIC GATEWAY</a:t>
             </a:r>
             <a:endParaRPr lang="en-US" dirty="0"/>
           </a:p>
@@ -36228,7 +36228,7 @@
       </p:sp>
       <p:pic>
         <p:nvPicPr>
-          <p:cNvPr id="90" name="Object 89" descr="public/generated/icons/bd517bf0-88ba-11ea-a52e-91aeb42a4019.png">    </p:cNvPr>
+          <p:cNvPr id="90" name="Object 89" descr="public/generated/icons/aa11a8b2-381e-4c1c-a232-2148f65c005f.png">    </p:cNvPr>
           <p:cNvPicPr>
             <a:picLocks noChangeAspect="1"/>
           </p:cNvPicPr>
@@ -36284,7 +36284,7 @@
                 <a:ea typeface="Helvetica" pitchFamily="34" charset="-122"/>
                 <a:cs typeface="Helvetica" pitchFamily="34" charset="-120"/>
               </a:rPr>
-              <a:t>SATELLITE</a:t>
+              <a:t>PVS ONE MANAGED SERVICE</a:t>
             </a:r>
             <a:endParaRPr lang="en-US" dirty="0"/>
           </a:p>
@@ -36317,7 +36317,7 @@
       </p:sp>
       <p:pic>
         <p:nvPicPr>
-          <p:cNvPr id="93" name="Object 92" descr="public/generated/icons/schematics.png">    </p:cNvPr>
+          <p:cNvPr id="93" name="Object 92" descr="public/generated/icons/3eb2d5a0-24ff-11eb-9437-631d7272fff5.png">    </p:cNvPr>
           <p:cNvPicPr>
             <a:picLocks noChangeAspect="1"/>
           </p:cNvPicPr>
@@ -36373,7 +36373,7 @@
                 <a:ea typeface="Helvetica" pitchFamily="34" charset="-122"/>
                 <a:cs typeface="Helvetica" pitchFamily="34" charset="-120"/>
               </a:rPr>
-              <a:t>SCHEMATICS</a:t>
+              <a:t>PX-BACKUP FOR KUBERNETES</a:t>
             </a:r>
             <a:endParaRPr lang="en-US" dirty="0"/>
           </a:p>
@@ -36406,7 +36406,7 @@
       </p:sp>
       <p:pic>
         <p:nvPicPr>
-          <p:cNvPr id="96" name="Object 95" descr="public/generated/icons/14.png">    </p:cNvPr>
+          <p:cNvPr id="96" name="Object 95" descr="public/generated/icons/b6049020-80f4-11eb-a0f7-e35ec9b4054f.png">    </p:cNvPr>
           <p:cNvPicPr>
             <a:picLocks noChangeAspect="1"/>
           </p:cNvPicPr>
@@ -36462,7 +36462,7 @@
                 <a:ea typeface="Helvetica" pitchFamily="34" charset="-122"/>
                 <a:cs typeface="Helvetica" pitchFamily="34" charset="-120"/>
               </a:rPr>
-              <a:t>SECONDARY SUBNETS</a:t>
+              <a:t>QISKIT RUNTIME</a:t>
             </a:r>
             <a:endParaRPr lang="en-US" dirty="0"/>
           </a:p>
@@ -36495,7 +36495,7 @@
       </p:sp>
       <p:pic>
         <p:nvPicPr>
-          <p:cNvPr id="99" name="Object 98" descr="public/generated/icons/ebc0cdb0-af2a-11ea-98c7-29e5db822649.png">    </p:cNvPr>
+          <p:cNvPr id="99" name="Object 98" descr="public/generated/icons/cf5f8ac0-98f7-11e9-a40c-5b3c4bf3cc6d.png">    </p:cNvPr>
           <p:cNvPicPr>
             <a:picLocks noChangeAspect="1"/>
           </p:cNvPicPr>
@@ -36551,7 +36551,7 @@
                 <a:ea typeface="Helvetica" pitchFamily="34" charset="-122"/>
                 <a:cs typeface="Helvetica" pitchFamily="34" charset="-120"/>
               </a:rPr>
-              <a:t>SECRETS MANAGER</a:t>
+              <a:t>RAXAK PROTECT</a:t>
             </a:r>
             <a:endParaRPr lang="en-US" dirty="0"/>
           </a:p>
@@ -36584,7 +36584,7 @@
       </p:sp>
       <p:pic>
         <p:nvPicPr>
-          <p:cNvPr id="102" name="Object 101" descr="public/generated/icons/IBM_SecureGateway.png">    </p:cNvPr>
+          <p:cNvPr id="102" name="Object 101" descr="public/generated/icons/467ab6d8-48dd-485a-adf9-30d5107537a1.png">    </p:cNvPr>
           <p:cNvPicPr>
             <a:picLocks noChangeAspect="1"/>
           </p:cNvPicPr>
@@ -36640,7 +36640,7 @@
                 <a:ea typeface="Helvetica" pitchFamily="34" charset="-122"/>
                 <a:cs typeface="Helvetica" pitchFamily="34" charset="-120"/>
               </a:rPr>
-              <a:t>SECURE GATEWAY</a:t>
+              <a:t>REAL-TIME PAYMENTS</a:t>
             </a:r>
             <a:endParaRPr lang="en-US" dirty="0"/>
           </a:p>
@@ -36673,7 +36673,7 @@
       </p:sp>
       <p:pic>
         <p:nvPicPr>
-          <p:cNvPr id="105" name="Object 104" descr="public/generated/icons/compliance.png">    </p:cNvPr>
+          <p:cNvPr id="105" name="Object 104" descr="public/generated/icons/openshift.png">    </p:cNvPr>
           <p:cNvPicPr>
             <a:picLocks noChangeAspect="1"/>
           </p:cNvPicPr>
@@ -36729,7 +36729,7 @@
                 <a:ea typeface="Helvetica" pitchFamily="34" charset="-122"/>
                 <a:cs typeface="Helvetica" pitchFamily="34" charset="-120"/>
               </a:rPr>
-              <a:t>SECURITY AND COMPLIANCE CENTER</a:t>
+              <a:t>RED HAT OPENSHIFT ON IBM CLOUD</a:t>
             </a:r>
             <a:endParaRPr lang="en-US" dirty="0"/>
           </a:p>
@@ -36762,7 +36762,7 @@
       </p:sp>
       <p:pic>
         <p:nvPicPr>
-          <p:cNvPr id="108" name="Object 107" descr="public/generated/icons/e831e900-82d6-11ec-95c5-c12c5a5d9687.png">    </p:cNvPr>
+          <p:cNvPr id="108" name="Object 107" descr="public/generated/icons/bd517bf0-88ba-11ea-a52e-91aeb42a4019.png">    </p:cNvPr>
           <p:cNvPicPr>
             <a:picLocks noChangeAspect="1"/>
           </p:cNvPicPr>
@@ -36818,7 +36818,7 @@
                 <a:ea typeface="Helvetica" pitchFamily="34" charset="-122"/>
                 <a:cs typeface="Helvetica" pitchFamily="34" charset="-120"/>
               </a:rPr>
-              <a:t>SECURITY AND COMPLIANCE CENTER WORKLOAD PROTECTION</a:t>
+              <a:t>SATELLITE</a:t>
             </a:r>
             <a:endParaRPr lang="en-US" dirty="0"/>
           </a:p>
@@ -36884,7 +36884,7 @@
       </p:sp>
       <p:pic>
         <p:nvPicPr>
-          <p:cNvPr id="3" name="Object 2" descr="public/generated/icons/is.security-group.png">    </p:cNvPr>
+          <p:cNvPr id="3" name="Object 2" descr="public/generated/icons/schematics.png">    </p:cNvPr>
           <p:cNvPicPr>
             <a:picLocks noChangeAspect="1"/>
           </p:cNvPicPr>
@@ -36940,7 +36940,7 @@
                 <a:ea typeface="Helvetica" pitchFamily="34" charset="-122"/>
                 <a:cs typeface="Helvetica" pitchFamily="34" charset="-120"/>
               </a:rPr>
-              <a:t>SECURITY GROUP FOR VPC</a:t>
+              <a:t>SCHEMATICS</a:t>
             </a:r>
             <a:endParaRPr lang="en-US" dirty="0"/>
           </a:p>
@@ -36973,7 +36973,7 @@
       </p:sp>
       <p:pic>
         <p:nvPicPr>
-          <p:cNvPr id="6" name="Object 5" descr="public/generated/icons/ABB08BA3-D14D-4BD9-A5E6-EF67C52D35C0.png">    </p:cNvPr>
+          <p:cNvPr id="6" name="Object 5" descr="public/generated/icons/14.png">    </p:cNvPr>
           <p:cNvPicPr>
             <a:picLocks noChangeAspect="1"/>
           </p:cNvPicPr>
@@ -37029,7 +37029,7 @@
                 <a:ea typeface="Helvetica" pitchFamily="34" charset="-122"/>
                 <a:cs typeface="Helvetica" pitchFamily="34" charset="-120"/>
               </a:rPr>
-              <a:t>SIMULATED HISTORICAL INSTRUMENT ANALYTICS</a:t>
+              <a:t>SECONDARY SUBNETS</a:t>
             </a:r>
             <a:endParaRPr lang="en-US" dirty="0"/>
           </a:p>
@@ -37062,7 +37062,7 @@
       </p:sp>
       <p:pic>
         <p:nvPicPr>
-          <p:cNvPr id="9" name="Object 8" descr="public/generated/icons/A888FFEA-E976-4F83-B7EC-288233BF62E6.png">    </p:cNvPr>
+          <p:cNvPr id="9" name="Object 8" descr="public/generated/icons/ebc0cdb0-af2a-11ea-98c7-29e5db822649.png">    </p:cNvPr>
           <p:cNvPicPr>
             <a:picLocks noChangeAspect="1"/>
           </p:cNvPicPr>
@@ -37118,7 +37118,7 @@
                 <a:ea typeface="Helvetica" pitchFamily="34" charset="-122"/>
                 <a:cs typeface="Helvetica" pitchFamily="34" charset="-120"/>
               </a:rPr>
-              <a:t>SIMULATED INSTRUMENT ANALYTICS</a:t>
+              <a:t>SECRETS MANAGER</a:t>
             </a:r>
             <a:endParaRPr lang="en-US" dirty="0"/>
           </a:p>
@@ -37151,7 +37151,7 @@
       </p:sp>
       <p:pic>
         <p:nvPicPr>
-          <p:cNvPr id="12" name="Object 11" descr="public/generated/icons/cf329950-0a3e-11e8-922e-f1366c6e1c83-vcstrial_dr.png">    </p:cNvPr>
+          <p:cNvPr id="12" name="Object 11" descr="public/generated/icons/IBM_SecureGateway.png">    </p:cNvPr>
           <p:cNvPicPr>
             <a:picLocks noChangeAspect="1"/>
           </p:cNvPicPr>
@@ -37207,7 +37207,7 @@
                 <a:ea typeface="Helvetica" pitchFamily="34" charset="-122"/>
                 <a:cs typeface="Helvetica" pitchFamily="34" charset="-120"/>
               </a:rPr>
-              <a:t>SINGLE-NODE TRIAL FOR DATA PROTECTION AND DISASTER RECOVERY</a:t>
+              <a:t>SECURE GATEWAY</a:t>
             </a:r>
             <a:endParaRPr lang="en-US" dirty="0"/>
           </a:p>
@@ -37240,7 +37240,7 @@
       </p:sp>
       <p:pic>
         <p:nvPicPr>
-          <p:cNvPr id="15" name="Object 14" descr="public/generated/icons/cf329950-0a3e-11e8-922e-f1366c6e1c83-vcstrial.png">    </p:cNvPr>
+          <p:cNvPr id="15" name="Object 14" descr="public/generated/icons/compliance.png">    </p:cNvPr>
           <p:cNvPicPr>
             <a:picLocks noChangeAspect="1"/>
           </p:cNvPicPr>
@@ -37296,7 +37296,7 @@
                 <a:ea typeface="Helvetica" pitchFamily="34" charset="-122"/>
                 <a:cs typeface="Helvetica" pitchFamily="34" charset="-120"/>
               </a:rPr>
-              <a:t>SINGLE-NODE TRIAL FOR MIGRATION AND APP MODERNIZATION</a:t>
+              <a:t>SECURITY AND COMPLIANCE CENTER</a:t>
             </a:r>
             <a:endParaRPr lang="en-US" dirty="0"/>
           </a:p>
@@ -37329,7 +37329,7 @@
       </p:sp>
       <p:pic>
         <p:nvPicPr>
-          <p:cNvPr id="18" name="Object 17" descr="public/generated/icons/fdf77820-deed-11e9-911d-5f09017358ff.png">    </p:cNvPr>
+          <p:cNvPr id="18" name="Object 17" descr="public/generated/icons/e831e900-82d6-11ec-95c5-c12c5a5d9687.png">    </p:cNvPr>
           <p:cNvPicPr>
             <a:picLocks noChangeAspect="1"/>
           </p:cNvPicPr>
@@ -37385,7 +37385,7 @@
                 <a:ea typeface="Helvetica" pitchFamily="34" charset="-122"/>
                 <a:cs typeface="Helvetica" pitchFamily="34" charset="-120"/>
               </a:rPr>
-              <a:t>SKYTAP ON IBM CLOUD</a:t>
+              <a:t>SECURITY AND COMPLIANCE CENTER WORKLOAD PROTECTION</a:t>
             </a:r>
             <a:endParaRPr lang="en-US" dirty="0"/>
           </a:p>
@@ -37418,7 +37418,7 @@
       </p:sp>
       <p:pic>
         <p:nvPicPr>
-          <p:cNvPr id="21" name="Object 20" descr="public/generated/icons/cf329950-0a3e-11e8-922e-f1366c6e1c83-spplus.png">    </p:cNvPr>
+          <p:cNvPr id="21" name="Object 20" descr="public/generated/icons/is.security-group.png">    </p:cNvPr>
           <p:cNvPicPr>
             <a:picLocks noChangeAspect="1"/>
           </p:cNvPicPr>
@@ -37474,7 +37474,7 @@
                 <a:ea typeface="Helvetica" pitchFamily="34" charset="-122"/>
                 <a:cs typeface="Helvetica" pitchFamily="34" charset="-120"/>
               </a:rPr>
-              <a:t>SPECTRUM PROTECT PLUS</a:t>
+              <a:t>SECURITY GROUP FOR VPC</a:t>
             </a:r>
             <a:endParaRPr lang="en-US" dirty="0"/>
           </a:p>
@@ -37507,7 +37507,7 @@
       </p:sp>
       <p:pic>
         <p:nvPicPr>
-          <p:cNvPr id="24" name="Object 23" descr="public/generated/icons/bc35fb8c-bc5b-431b-859e-3861771d5843.png">    </p:cNvPr>
+          <p:cNvPr id="24" name="Object 23" descr="public/generated/icons/ABB08BA3-D14D-4BD9-A5E6-EF67C52D35C0.png">    </p:cNvPr>
           <p:cNvPicPr>
             <a:picLocks noChangeAspect="1"/>
           </p:cNvPicPr>
@@ -37563,7 +37563,7 @@
                 <a:ea typeface="Helvetica" pitchFamily="34" charset="-122"/>
                 <a:cs typeface="Helvetica" pitchFamily="34" charset="-120"/>
               </a:rPr>
-              <a:t>SPEECH TO TEXT</a:t>
+              <a:t>SIMULATED HISTORICAL INSTRUMENT ANALYTICS</a:t>
             </a:r>
             <a:endParaRPr lang="en-US" dirty="0"/>
           </a:p>
@@ -37596,7 +37596,7 @@
       </p:sp>
       <p:pic>
         <p:nvPicPr>
-          <p:cNvPr id="27" name="Object 26" descr="public/generated/icons/556153d0-5ad0-11e9-b7f9-41319ef22125.png">    </p:cNvPr>
+          <p:cNvPr id="27" name="Object 26" descr="public/generated/icons/A888FFEA-E976-4F83-B7EC-288233BF62E6.png">    </p:cNvPr>
           <p:cNvPicPr>
             <a:picLocks noChangeAspect="1"/>
           </p:cNvPicPr>
@@ -37652,7 +37652,7 @@
                 <a:ea typeface="Helvetica" pitchFamily="34" charset="-122"/>
                 <a:cs typeface="Helvetica" pitchFamily="34" charset="-120"/>
               </a:rPr>
-              <a:t>SSH KEY FOR VPC</a:t>
+              <a:t>SIMULATED INSTRUMENT ANALYTICS</a:t>
             </a:r>
             <a:endParaRPr lang="en-US" dirty="0"/>
           </a:p>
@@ -37685,7 +37685,7 @@
       </p:sp>
       <p:pic>
         <p:nvPicPr>
-          <p:cNvPr id="30" name="Object 29" descr="public/generated/icons/19.png">    </p:cNvPr>
+          <p:cNvPr id="30" name="Object 29" descr="public/generated/icons/cf329950-0a3e-11e8-922e-f1366c6e1c83-vcstrial_dr.png">    </p:cNvPr>
           <p:cNvPicPr>
             <a:picLocks noChangeAspect="1"/>
           </p:cNvPicPr>
@@ -37741,7 +37741,7 @@
                 <a:ea typeface="Helvetica" pitchFamily="34" charset="-122"/>
                 <a:cs typeface="Helvetica" pitchFamily="34" charset="-120"/>
               </a:rPr>
-              <a:t>SSL CERTIFICATES</a:t>
+              <a:t>SINGLE-NODE TRIAL FOR DATA PROTECTION AND DISASTER RECOVERY</a:t>
             </a:r>
             <a:endParaRPr lang="en-US" dirty="0"/>
           </a:p>
@@ -37774,7 +37774,7 @@
       </p:sp>
       <p:pic>
         <p:nvPicPr>
-          <p:cNvPr id="33" name="Object 32" descr="public/generated/icons/5acdbc42-8965-48f9-8a3c-1c728b6ed2c4.png">    </p:cNvPr>
+          <p:cNvPr id="33" name="Object 32" descr="public/generated/icons/cf329950-0a3e-11e8-922e-f1366c6e1c83-vcstrial.png">    </p:cNvPr>
           <p:cNvPicPr>
             <a:picLocks noChangeAspect="1"/>
           </p:cNvPicPr>
@@ -37830,7 +37830,7 @@
                 <a:ea typeface="Helvetica" pitchFamily="34" charset="-122"/>
                 <a:cs typeface="Helvetica" pitchFamily="34" charset="-120"/>
               </a:rPr>
-              <a:t>STREAMING ANALYTICS</a:t>
+              <a:t>SINGLE-NODE TRIAL FOR MIGRATION AND APP MODERNIZATION</a:t>
             </a:r>
             <a:endParaRPr lang="en-US" dirty="0"/>
           </a:p>
@@ -37863,7 +37863,7 @@
       </p:sp>
       <p:pic>
         <p:nvPicPr>
-          <p:cNvPr id="36" name="Object 35" descr="public/generated/icons/is.subnet.png">    </p:cNvPr>
+          <p:cNvPr id="36" name="Object 35" descr="public/generated/icons/fdf77820-deed-11e9-911d-5f09017358ff.png">    </p:cNvPr>
           <p:cNvPicPr>
             <a:picLocks noChangeAspect="1"/>
           </p:cNvPicPr>
@@ -37919,7 +37919,7 @@
                 <a:ea typeface="Helvetica" pitchFamily="34" charset="-122"/>
                 <a:cs typeface="Helvetica" pitchFamily="34" charset="-120"/>
               </a:rPr>
-              <a:t>SUBNET</a:t>
+              <a:t>SKYTAP ON IBM CLOUD</a:t>
             </a:r>
             <a:endParaRPr lang="en-US" dirty="0"/>
           </a:p>
@@ -37952,7 +37952,7 @@
       </p:sp>
       <p:pic>
         <p:nvPicPr>
-          <p:cNvPr id="39" name="Object 38" descr="public/generated/icons/282c1d79-9176-4597-9cff-941a8d6cfd4c.png">    </p:cNvPr>
+          <p:cNvPr id="39" name="Object 38" descr="public/generated/icons/cf329950-0a3e-11e8-922e-f1366c6e1c83-spplus.png">    </p:cNvPr>
           <p:cNvPicPr>
             <a:picLocks noChangeAspect="1"/>
           </p:cNvPicPr>
@@ -38008,7 +38008,7 @@
                 <a:ea typeface="Helvetica" pitchFamily="34" charset="-122"/>
                 <a:cs typeface="Helvetica" pitchFamily="34" charset="-120"/>
               </a:rPr>
-              <a:t>TEXT TO SPEECH</a:t>
+              <a:t>SPECTRUM PROTECT PLUS</a:t>
             </a:r>
             <a:endParaRPr lang="en-US" dirty="0"/>
           </a:p>
@@ -38041,7 +38041,7 @@
       </p:sp>
       <p:pic>
         <p:nvPicPr>
-          <p:cNvPr id="42" name="Object 41" descr="public/generated/icons/e512e5f0-64fb-11e8-9c23-830c05b8b729.png">    </p:cNvPr>
+          <p:cNvPr id="42" name="Object 41" descr="public/generated/icons/bc35fb8c-bc5b-431b-859e-3861771d5843.png">    </p:cNvPr>
           <p:cNvPicPr>
             <a:picLocks noChangeAspect="1"/>
           </p:cNvPicPr>
@@ -38097,7 +38097,7 @@
                 <a:ea typeface="Helvetica" pitchFamily="34" charset="-122"/>
                 <a:cs typeface="Helvetica" pitchFamily="34" charset="-120"/>
               </a:rPr>
-              <a:t>TOOLCHAIN</a:t>
+              <a:t>SPEECH TO TEXT</a:t>
             </a:r>
             <a:endParaRPr lang="en-US" dirty="0"/>
           </a:p>
@@ -38130,7 +38130,7 @@
       </p:sp>
       <p:pic>
         <p:nvPicPr>
-          <p:cNvPr id="45" name="Object 44" descr="public/generated/icons/f38a4da0-c353-11e9-83b6-a36a57a97a06.png">    </p:cNvPr>
+          <p:cNvPr id="45" name="Object 44" descr="public/generated/icons/556153d0-5ad0-11e9-b7f9-41319ef22125.png">    </p:cNvPr>
           <p:cNvPicPr>
             <a:picLocks noChangeAspect="1"/>
           </p:cNvPicPr>
@@ -38186,7 +38186,7 @@
                 <a:ea typeface="Helvetica" pitchFamily="34" charset="-122"/>
                 <a:cs typeface="Helvetica" pitchFamily="34" charset="-120"/>
               </a:rPr>
-              <a:t>TRANSIT GATEWAY</a:t>
+              <a:t>SSH KEY FOR VPC</a:t>
             </a:r>
             <a:endParaRPr lang="en-US" dirty="0"/>
           </a:p>
@@ -38219,7 +38219,7 @@
       </p:sp>
       <p:pic>
         <p:nvPicPr>
-          <p:cNvPr id="48" name="Object 47" descr="public/generated/icons/vmware.directorsite.png">    </p:cNvPr>
+          <p:cNvPr id="48" name="Object 47" descr="public/generated/icons/19.png">    </p:cNvPr>
           <p:cNvPicPr>
             <a:picLocks noChangeAspect="1"/>
           </p:cNvPicPr>
@@ -38275,7 +38275,7 @@
                 <a:ea typeface="Helvetica" pitchFamily="34" charset="-122"/>
                 <a:cs typeface="Helvetica" pitchFamily="34" charset="-120"/>
               </a:rPr>
-              <a:t>VCF AS A SERVICE - CLOUD DIRECTOR SITE</a:t>
+              <a:t>SSL CERTIFICATES</a:t>
             </a:r>
             <a:endParaRPr lang="en-US" dirty="0"/>
           </a:p>
@@ -38308,7 +38308,7 @@
       </p:sp>
       <p:pic>
         <p:nvPicPr>
-          <p:cNvPr id="51" name="Object 50" descr="public/generated/icons/vmware.vdc.png">    </p:cNvPr>
+          <p:cNvPr id="51" name="Object 50" descr="public/generated/icons/5acdbc42-8965-48f9-8a3c-1c728b6ed2c4.png">    </p:cNvPr>
           <p:cNvPicPr>
             <a:picLocks noChangeAspect="1"/>
           </p:cNvPicPr>
@@ -38364,7 +38364,7 @@
                 <a:ea typeface="Helvetica" pitchFamily="34" charset="-122"/>
                 <a:cs typeface="Helvetica" pitchFamily="34" charset="-120"/>
               </a:rPr>
-              <a:t>VCF AS A SERVICE - VIRTUAL DATA CENTER</a:t>
+              <a:t>STREAMING ANALYTICS</a:t>
             </a:r>
             <a:endParaRPr lang="en-US" dirty="0"/>
           </a:p>
@@ -38397,7 +38397,7 @@
       </p:sp>
       <p:pic>
         <p:nvPicPr>
-          <p:cNvPr id="54" name="Object 53" descr="public/generated/icons/cf329950-0a3e-11e8-922e-f1366c6e1c83-veeam.png">    </p:cNvPr>
+          <p:cNvPr id="54" name="Object 53" descr="public/generated/icons/is.subnet.png">    </p:cNvPr>
           <p:cNvPicPr>
             <a:picLocks noChangeAspect="1"/>
           </p:cNvPicPr>
@@ -38453,7 +38453,7 @@
                 <a:ea typeface="Helvetica" pitchFamily="34" charset="-122"/>
                 <a:cs typeface="Helvetica" pitchFamily="34" charset="-120"/>
               </a:rPr>
-              <a:t>VEEAM</a:t>
+              <a:t>SUBNET</a:t>
             </a:r>
             <a:endParaRPr lang="en-US" dirty="0"/>
           </a:p>
@@ -38486,7 +38486,7 @@
       </p:sp>
       <p:pic>
         <p:nvPicPr>
-          <p:cNvPr id="57" name="Object 56" descr="public/generated/icons/66644e80-f35a-11ee-923f-2fe367129617.png">    </p:cNvPr>
+          <p:cNvPr id="57" name="Object 56" descr="public/generated/icons/282c1d79-9176-4597-9cff-941a8d6cfd4c.png">    </p:cNvPr>
           <p:cNvPicPr>
             <a:picLocks noChangeAspect="1"/>
           </p:cNvPicPr>
@@ -38542,7 +38542,7 @@
                 <a:ea typeface="Helvetica" pitchFamily="34" charset="-122"/>
                 <a:cs typeface="Helvetica" pitchFamily="34" charset="-120"/>
               </a:rPr>
-              <a:t>VERIFY</a:t>
+              <a:t>TEXT TO SPEECH</a:t>
             </a:r>
             <a:endParaRPr lang="en-US" dirty="0"/>
           </a:p>
@@ -38575,7 +38575,7 @@
       </p:sp>
       <p:pic>
         <p:nvPicPr>
-          <p:cNvPr id="60" name="Object 59" descr="public/generated/icons/is.virtual-network-interface.png">    </p:cNvPr>
+          <p:cNvPr id="60" name="Object 59" descr="public/generated/icons/e512e5f0-64fb-11e8-9c23-830c05b8b729.png">    </p:cNvPr>
           <p:cNvPicPr>
             <a:picLocks noChangeAspect="1"/>
           </p:cNvPicPr>
@@ -38631,7 +38631,7 @@
                 <a:ea typeface="Helvetica" pitchFamily="34" charset="-122"/>
                 <a:cs typeface="Helvetica" pitchFamily="34" charset="-120"/>
               </a:rPr>
-              <a:t>VIRTUAL NETWORK INTERFACE</a:t>
+              <a:t>TOOLCHAIN</a:t>
             </a:r>
             <a:endParaRPr lang="en-US" dirty="0"/>
           </a:p>
@@ -38664,7 +38664,7 @@
       </p:sp>
       <p:pic>
         <p:nvPicPr>
-          <p:cNvPr id="63" name="Object 62" descr="public/generated/icons/is.vpc.png">    </p:cNvPr>
+          <p:cNvPr id="63" name="Object 62" descr="public/generated/icons/f38a4da0-c353-11e9-83b6-a36a57a97a06.png">    </p:cNvPr>
           <p:cNvPicPr>
             <a:picLocks noChangeAspect="1"/>
           </p:cNvPicPr>
@@ -38720,7 +38720,7 @@
                 <a:ea typeface="Helvetica" pitchFamily="34" charset="-122"/>
                 <a:cs typeface="Helvetica" pitchFamily="34" charset="-120"/>
               </a:rPr>
-              <a:t>VIRTUAL PRIVATE CLOUD</a:t>
+              <a:t>TRANSIT GATEWAY</a:t>
             </a:r>
             <a:endParaRPr lang="en-US" dirty="0"/>
           </a:p>
@@ -38753,7 +38753,7 @@
       </p:sp>
       <p:pic>
         <p:nvPicPr>
-          <p:cNvPr id="66" name="Object 65" descr="public/generated/icons/is.endpoint-gateway.png">    </p:cNvPr>
+          <p:cNvPr id="66" name="Object 65" descr="public/generated/icons/vmware.directorsite.png">    </p:cNvPr>
           <p:cNvPicPr>
             <a:picLocks noChangeAspect="1"/>
           </p:cNvPicPr>
@@ -38809,7 +38809,7 @@
                 <a:ea typeface="Helvetica" pitchFamily="34" charset="-122"/>
                 <a:cs typeface="Helvetica" pitchFamily="34" charset="-120"/>
               </a:rPr>
-              <a:t>VIRTUAL PRIVATE ENDPOINT FOR VPC</a:t>
+              <a:t>VCF AS A SERVICE - CLOUD DIRECTOR SITE</a:t>
             </a:r>
             <a:endParaRPr lang="en-US" dirty="0"/>
           </a:p>
@@ -38842,7 +38842,7 @@
       </p:sp>
       <p:pic>
         <p:nvPicPr>
-          <p:cNvPr id="69" name="Object 68" descr="public/generated/icons/887073fb-ba5b-9407-d2ac-938308d890e4.png">    </p:cNvPr>
+          <p:cNvPr id="69" name="Object 68" descr="public/generated/icons/vmware.vdc.png">    </p:cNvPr>
           <p:cNvPicPr>
             <a:picLocks noChangeAspect="1"/>
           </p:cNvPicPr>
@@ -38898,7 +38898,7 @@
                 <a:ea typeface="Helvetica" pitchFamily="34" charset="-122"/>
                 <a:cs typeface="Helvetica" pitchFamily="34" charset="-120"/>
               </a:rPr>
-              <a:t>VIRTUAL ROUTER APPLIANCE</a:t>
+              <a:t>VCF AS A SERVICE - VIRTUAL DATA CENTER</a:t>
             </a:r>
             <a:endParaRPr lang="en-US" dirty="0"/>
           </a:p>
@@ -38931,7 +38931,7 @@
       </p:sp>
       <p:pic>
         <p:nvPicPr>
-          <p:cNvPr id="72" name="Object 71" descr="public/generated/icons/virtual-server-group.png">    </p:cNvPr>
+          <p:cNvPr id="72" name="Object 71" descr="public/generated/icons/cf329950-0a3e-11e8-922e-f1366c6e1c83-veeam.png">    </p:cNvPr>
           <p:cNvPicPr>
             <a:picLocks noChangeAspect="1"/>
           </p:cNvPicPr>
@@ -38987,7 +38987,7 @@
                 <a:ea typeface="Helvetica" pitchFamily="34" charset="-122"/>
                 <a:cs typeface="Helvetica" pitchFamily="34" charset="-120"/>
               </a:rPr>
-              <a:t>VIRTUAL SERVER FOR CLASSIC</a:t>
+              <a:t>VEEAM</a:t>
             </a:r>
             <a:endParaRPr lang="en-US" dirty="0"/>
           </a:p>
@@ -39020,7 +39020,7 @@
       </p:sp>
       <p:pic>
         <p:nvPicPr>
-          <p:cNvPr id="75" name="Object 74" descr="public/generated/icons/is.instance.png">    </p:cNvPr>
+          <p:cNvPr id="75" name="Object 74" descr="public/generated/icons/66644e80-f35a-11ee-923f-2fe367129617.png">    </p:cNvPr>
           <p:cNvPicPr>
             <a:picLocks noChangeAspect="1"/>
           </p:cNvPicPr>
@@ -39076,7 +39076,7 @@
                 <a:ea typeface="Helvetica" pitchFamily="34" charset="-122"/>
                 <a:cs typeface="Helvetica" pitchFamily="34" charset="-120"/>
               </a:rPr>
-              <a:t>VIRTUAL SERVER FOR VPC</a:t>
+              <a:t>VERIFY</a:t>
             </a:r>
             <a:endParaRPr lang="en-US" dirty="0"/>
           </a:p>
@@ -39109,7 +39109,7 @@
       </p:sp>
       <p:pic>
         <p:nvPicPr>
-          <p:cNvPr id="78" name="Object 77" descr="public/generated/icons/15.png">    </p:cNvPr>
+          <p:cNvPr id="78" name="Object 77" descr="public/generated/icons/is.virtual-network-interface.png">    </p:cNvPr>
           <p:cNvPicPr>
             <a:picLocks noChangeAspect="1"/>
           </p:cNvPicPr>
@@ -39165,7 +39165,7 @@
                 <a:ea typeface="Helvetica" pitchFamily="34" charset="-122"/>
                 <a:cs typeface="Helvetica" pitchFamily="34" charset="-120"/>
               </a:rPr>
-              <a:t>VLAN</a:t>
+              <a:t>VIRTUAL NETWORK INTERFACE</a:t>
             </a:r>
             <a:endParaRPr lang="en-US" dirty="0"/>
           </a:p>
@@ -39198,7 +39198,7 @@
       </p:sp>
       <p:pic>
         <p:nvPicPr>
-          <p:cNvPr id="81" name="Object 80" descr="public/generated/icons/09f5a6ea-185e-4625-8281-9e8629360a4f.png">    </p:cNvPr>
+          <p:cNvPr id="81" name="Object 80" descr="public/generated/icons/is.vpc.png">    </p:cNvPr>
           <p:cNvPicPr>
             <a:picLocks noChangeAspect="1"/>
           </p:cNvPicPr>
@@ -39254,7 +39254,7 @@
                 <a:ea typeface="Helvetica" pitchFamily="34" charset="-122"/>
                 <a:cs typeface="Helvetica" pitchFamily="34" charset="-120"/>
               </a:rPr>
-              <a:t>VMWARE CLOUD MIGRATION SERVICES</a:t>
+              <a:t>VIRTUAL PRIVATE CLOUD</a:t>
             </a:r>
             <a:endParaRPr lang="en-US" dirty="0"/>
           </a:p>
@@ -39287,7 +39287,7 @@
       </p:sp>
       <p:pic>
         <p:nvPicPr>
-          <p:cNvPr id="84" name="Object 83" descr="public/generated/icons/cf329950-0a3e-11e8-922e-f1366c6e1c83.png">    </p:cNvPr>
+          <p:cNvPr id="84" name="Object 83" descr="public/generated/icons/is.endpoint-gateway.png">    </p:cNvPr>
           <p:cNvPicPr>
             <a:picLocks noChangeAspect="1"/>
           </p:cNvPicPr>
@@ -39343,7 +39343,7 @@
                 <a:ea typeface="Helvetica" pitchFamily="34" charset="-122"/>
                 <a:cs typeface="Helvetica" pitchFamily="34" charset="-120"/>
               </a:rPr>
-              <a:t>VMWARE SOLUTIONS</a:t>
+              <a:t>VIRTUAL PRIVATE ENDPOINT FOR VPC</a:t>
             </a:r>
             <a:endParaRPr lang="en-US" dirty="0"/>
           </a:p>
@@ -39376,7 +39376,7 @@
       </p:sp>
       <p:pic>
         <p:nvPicPr>
-          <p:cNvPr id="87" name="Object 86" descr="public/generated/icons/cf329950-0a3e-11e8-922e-f1366c6e1c83-vcenterserver.png">    </p:cNvPr>
+          <p:cNvPr id="87" name="Object 86" descr="public/generated/icons/887073fb-ba5b-9407-d2ac-938308d890e4.png">    </p:cNvPr>
           <p:cNvPicPr>
             <a:picLocks noChangeAspect="1"/>
           </p:cNvPicPr>
@@ -39432,7 +39432,7 @@
                 <a:ea typeface="Helvetica" pitchFamily="34" charset="-122"/>
                 <a:cs typeface="Helvetica" pitchFamily="34" charset="-120"/>
               </a:rPr>
-              <a:t>VMWARE VCENTER SERVER</a:t>
+              <a:t>VIRTUAL ROUTER APPLIANCE</a:t>
             </a:r>
             <a:endParaRPr lang="en-US" dirty="0"/>
           </a:p>
@@ -39465,7 +39465,7 @@
       </p:sp>
       <p:pic>
         <p:nvPicPr>
-          <p:cNvPr id="90" name="Object 89" descr="public/generated/icons/cf329950-0a3e-11e8-922e-f1366c6e1c83-vsphere.png">    </p:cNvPr>
+          <p:cNvPr id="90" name="Object 89" descr="public/generated/icons/virtual-server-group.png">    </p:cNvPr>
           <p:cNvPicPr>
             <a:picLocks noChangeAspect="1"/>
           </p:cNvPicPr>
@@ -39521,7 +39521,7 @@
                 <a:ea typeface="Helvetica" pitchFamily="34" charset="-122"/>
                 <a:cs typeface="Helvetica" pitchFamily="34" charset="-120"/>
               </a:rPr>
-              <a:t>VMWARE VSPHERE</a:t>
+              <a:t>VIRTUAL SERVER FOR CLASSIC</a:t>
             </a:r>
             <a:endParaRPr lang="en-US" dirty="0"/>
           </a:p>
@@ -39554,7 +39554,7 @@
       </p:sp>
       <p:pic>
         <p:nvPicPr>
-          <p:cNvPr id="93" name="Object 92" descr="public/generated/icons/b6670b68-84ca-4a04-b8e8-c567dfeeddde.png">    </p:cNvPr>
+          <p:cNvPr id="93" name="Object 92" descr="public/generated/icons/is.instance.png">    </p:cNvPr>
           <p:cNvPicPr>
             <a:picLocks noChangeAspect="1"/>
           </p:cNvPicPr>
@@ -39610,7 +39610,7 @@
                 <a:ea typeface="Helvetica" pitchFamily="34" charset="-122"/>
                 <a:cs typeface="Helvetica" pitchFamily="34" charset="-120"/>
               </a:rPr>
-              <a:t>VPC COAAS (VPC COST OPTIMIZATION AS A SERVICE)</a:t>
+              <a:t>VIRTUAL SERVER FOR VPC</a:t>
             </a:r>
             <a:endParaRPr lang="en-US" dirty="0"/>
           </a:p>
@@ -39643,7 +39643,7 @@
       </p:sp>
       <p:pic>
         <p:nvPicPr>
-          <p:cNvPr id="96" name="Object 95" descr="public/generated/icons/757254b0-a9a0-11ea-9ff6-17a22eb543c5.png">    </p:cNvPr>
+          <p:cNvPr id="96" name="Object 95" descr="public/generated/icons/15.png">    </p:cNvPr>
           <p:cNvPicPr>
             <a:picLocks noChangeAspect="1"/>
           </p:cNvPicPr>
@@ -39699,7 +39699,7 @@
                 <a:ea typeface="Helvetica" pitchFamily="34" charset="-122"/>
                 <a:cs typeface="Helvetica" pitchFamily="34" charset="-120"/>
               </a:rPr>
-              <a:t>VPC+ CLOUD MIGRATION</a:t>
+              <a:t>VLAN</a:t>
             </a:r>
             <a:endParaRPr lang="en-US" dirty="0"/>
           </a:p>
@@ -39732,7 +39732,7 @@
       </p:sp>
       <p:pic>
         <p:nvPicPr>
-          <p:cNvPr id="99" name="Object 98" descr="public/generated/icons/fd1e0240-dd95-11eb-b4a0-db1c9221b8a2.png">    </p:cNvPr>
+          <p:cNvPr id="99" name="Object 98" descr="public/generated/icons/09f5a6ea-185e-4625-8281-9e8629360a4f.png">    </p:cNvPr>
           <p:cNvPicPr>
             <a:picLocks noChangeAspect="1"/>
           </p:cNvPicPr>
@@ -39788,7 +39788,7 @@
                 <a:ea typeface="Helvetica" pitchFamily="34" charset="-122"/>
                 <a:cs typeface="Helvetica" pitchFamily="34" charset="-120"/>
               </a:rPr>
-              <a:t>VPC+ DRAAS (VPC+ DISASTER RECOVERY AS A SERVICE)</a:t>
+              <a:t>VMWARE CLOUD MIGRATION SERVICES</a:t>
             </a:r>
             <a:endParaRPr lang="en-US" dirty="0"/>
           </a:p>
@@ -39821,7 +39821,7 @@
       </p:sp>
       <p:pic>
         <p:nvPicPr>
-          <p:cNvPr id="102" name="Object 101" descr="public/generated/icons/is.vpn.png">    </p:cNvPr>
+          <p:cNvPr id="102" name="Object 101" descr="public/generated/icons/cf329950-0a3e-11e8-922e-f1366c6e1c83.png">    </p:cNvPr>
           <p:cNvPicPr>
             <a:picLocks noChangeAspect="1"/>
           </p:cNvPicPr>
@@ -39877,7 +39877,7 @@
                 <a:ea typeface="Helvetica" pitchFamily="34" charset="-122"/>
                 <a:cs typeface="Helvetica" pitchFamily="34" charset="-120"/>
               </a:rPr>
-              <a:t>VPN FOR VPC</a:t>
+              <a:t>VMWARE SOLUTIONS</a:t>
             </a:r>
             <a:endParaRPr lang="en-US" dirty="0"/>
           </a:p>
@@ -39910,7 +39910,7 @@
       </p:sp>
       <p:pic>
         <p:nvPicPr>
-          <p:cNvPr id="105" name="Object 104" descr="public/generated/icons/cf329950-0a3e-11e8-922e-f1366c6e1c83-vrops.png">    </p:cNvPr>
+          <p:cNvPr id="105" name="Object 104" descr="public/generated/icons/cf329950-0a3e-11e8-922e-f1366c6e1c83-vcenterserver.png">    </p:cNvPr>
           <p:cNvPicPr>
             <a:picLocks noChangeAspect="1"/>
           </p:cNvPicPr>
@@ -39966,7 +39966,7 @@
                 <a:ea typeface="Helvetica" pitchFamily="34" charset="-122"/>
                 <a:cs typeface="Helvetica" pitchFamily="34" charset="-120"/>
               </a:rPr>
-              <a:t>VREALIZE OPERATIONS AND LOG INSIGHT</a:t>
+              <a:t>VMWARE VCENTER SERVER</a:t>
             </a:r>
             <a:endParaRPr lang="en-US" dirty="0"/>
           </a:p>
@@ -39999,7 +39999,7 @@
       </p:sp>
       <p:pic>
         <p:nvPicPr>
-          <p:cNvPr id="108" name="Object 107" descr="public/generated/icons/76b7bf22-b443-47db-b3db-066ba2988f47.png">    </p:cNvPr>
+          <p:cNvPr id="108" name="Object 107" descr="public/generated/icons/cf329950-0a3e-11e8-922e-f1366c6e1c83-vsphere.png">    </p:cNvPr>
           <p:cNvPicPr>
             <a:picLocks noChangeAspect="1"/>
           </p:cNvPicPr>
@@ -40055,7 +40055,7 @@
                 <a:ea typeface="Helvetica" pitchFamily="34" charset="-122"/>
                 <a:cs typeface="Helvetica" pitchFamily="34" charset="-120"/>
               </a:rPr>
-              <a:t>WATSON DISCOVERY</a:t>
+              <a:t>VMWARE VSPHERE</a:t>
             </a:r>
             <a:endParaRPr lang="en-US" dirty="0"/>
           </a:p>
@@ -40121,7 +40121,7 @@
       </p:sp>
       <p:pic>
         <p:nvPicPr>
-          <p:cNvPr id="3" name="Object 2" descr="public/generated/icons/12fbfff4-12c7-ccd0-80e6-603e8607468a.png">    </p:cNvPr>
+          <p:cNvPr id="3" name="Object 2" descr="public/generated/icons/b6670b68-84ca-4a04-b8e8-c567dfeeddde.png">    </p:cNvPr>
           <p:cNvPicPr>
             <a:picLocks noChangeAspect="1"/>
           </p:cNvPicPr>
@@ -40177,7 +40177,7 @@
                 <a:ea typeface="Helvetica" pitchFamily="34" charset="-122"/>
                 <a:cs typeface="Helvetica" pitchFamily="34" charset="-120"/>
               </a:rPr>
-              <a:t>WATSONX</a:t>
+              <a:t>VPC COAAS (VPC COST OPTIMIZATION AS A SERVICE)</a:t>
             </a:r>
             <a:endParaRPr lang="en-US" dirty="0"/>
           </a:p>
@@ -40210,7 +40210,7 @@
       </p:sp>
       <p:pic>
         <p:nvPicPr>
-          <p:cNvPr id="6" name="Object 5" descr="public/generated/icons/7045626d-55e3-4418-be11-683a26dbc1e5.png">    </p:cNvPr>
+          <p:cNvPr id="6" name="Object 5" descr="public/generated/icons/757254b0-a9a0-11ea-9ff6-17a22eb543c5.png">    </p:cNvPr>
           <p:cNvPicPr>
             <a:picLocks noChangeAspect="1"/>
           </p:cNvPicPr>
@@ -40266,7 +40266,7 @@
                 <a:ea typeface="Helvetica" pitchFamily="34" charset="-122"/>
                 <a:cs typeface="Helvetica" pitchFamily="34" charset="-120"/>
               </a:rPr>
-              <a:t>WATSONX ASSISTANT</a:t>
+              <a:t>VPC+ CLOUD MIGRATION</a:t>
             </a:r>
             <a:endParaRPr lang="en-US" dirty="0"/>
           </a:p>
@@ -40299,7 +40299,7 @@
       </p:sp>
       <p:pic>
         <p:nvPicPr>
-          <p:cNvPr id="9" name="Object 8" descr="public/generated/icons/11530fa0-1776-11ee-93f6-1d4066e6a409.png">    </p:cNvPr>
+          <p:cNvPr id="9" name="Object 8" descr="public/generated/icons/fd1e0240-dd95-11eb-b4a0-db1c9221b8a2.png">    </p:cNvPr>
           <p:cNvPicPr>
             <a:picLocks noChangeAspect="1"/>
           </p:cNvPicPr>
@@ -40355,7 +40355,7 @@
                 <a:ea typeface="Helvetica" pitchFamily="34" charset="-122"/>
                 <a:cs typeface="Helvetica" pitchFamily="34" charset="-120"/>
               </a:rPr>
-              <a:t>WATSONX CODE ASSISTANT</a:t>
+              <a:t>VPC+ DRAAS (VPC+ DISASTER RECOVERY AS A SERVICE)</a:t>
             </a:r>
             <a:endParaRPr lang="en-US" dirty="0"/>
           </a:p>
@@ -40388,7 +40388,7 @@
       </p:sp>
       <p:pic>
         <p:nvPicPr>
-          <p:cNvPr id="12" name="Object 11" descr="public/generated/icons/b69f78c0-11d7-11ef-9bdf-c92eb40d1838.png">    </p:cNvPr>
+          <p:cNvPr id="12" name="Object 11" descr="public/generated/icons/is.vpn.png">    </p:cNvPr>
           <p:cNvPicPr>
             <a:picLocks noChangeAspect="1"/>
           </p:cNvPicPr>
@@ -40444,7 +40444,7 @@
                 <a:ea typeface="Helvetica" pitchFamily="34" charset="-122"/>
                 <a:cs typeface="Helvetica" pitchFamily="34" charset="-120"/>
               </a:rPr>
-              <a:t>WATSONX ORCHESTRATE</a:t>
+              <a:t>VPN FOR VPC</a:t>
             </a:r>
             <a:endParaRPr lang="en-US" dirty="0"/>
           </a:p>
@@ -40477,7 +40477,7 @@
       </p:sp>
       <p:pic>
         <p:nvPicPr>
-          <p:cNvPr id="15" name="Object 14" descr="public/generated/icons/51c53b72-918f-4869-b834-2d99eb28422a.png">    </p:cNvPr>
+          <p:cNvPr id="15" name="Object 14" descr="public/generated/icons/cf329950-0a3e-11e8-922e-f1366c6e1c83-vrops.png">    </p:cNvPr>
           <p:cNvPicPr>
             <a:picLocks noChangeAspect="1"/>
           </p:cNvPicPr>
@@ -40533,7 +40533,7 @@
                 <a:ea typeface="Helvetica" pitchFamily="34" charset="-122"/>
                 <a:cs typeface="Helvetica" pitchFamily="34" charset="-120"/>
               </a:rPr>
-              <a:t>WATSONX.AI RUNTIME</a:t>
+              <a:t>VREALIZE OPERATIONS AND LOG INSIGHT</a:t>
             </a:r>
             <a:endParaRPr lang="en-US" dirty="0"/>
           </a:p>
@@ -40566,7 +40566,7 @@
       </p:sp>
       <p:pic>
         <p:nvPicPr>
-          <p:cNvPr id="18" name="Object 17" descr="public/generated/icons/39ba9d4c-b1c5-4cc3-a163-38b580121e01.png">    </p:cNvPr>
+          <p:cNvPr id="18" name="Object 17" descr="public/generated/icons/76b7bf22-b443-47db-b3db-066ba2988f47.png">    </p:cNvPr>
           <p:cNvPicPr>
             <a:picLocks noChangeAspect="1"/>
           </p:cNvPicPr>
@@ -40622,7 +40622,7 @@
                 <a:ea typeface="Helvetica" pitchFamily="34" charset="-122"/>
                 <a:cs typeface="Helvetica" pitchFamily="34" charset="-120"/>
               </a:rPr>
-              <a:t>WATSONX.AI STUDIO</a:t>
+              <a:t>WATSON DISCOVERY</a:t>
             </a:r>
             <a:endParaRPr lang="en-US" dirty="0"/>
           </a:p>
@@ -40655,7 +40655,7 @@
       </p:sp>
       <p:pic>
         <p:nvPicPr>
-          <p:cNvPr id="21" name="Object 20" descr="public/generated/icons/43834340-4a6d-11ed-97d2-959039ad2a2e.png">    </p:cNvPr>
+          <p:cNvPr id="21" name="Object 20" descr="public/generated/icons/12fbfff4-12c7-ccd0-80e6-603e8607468a.png">    </p:cNvPr>
           <p:cNvPicPr>
             <a:picLocks noChangeAspect="1"/>
           </p:cNvPicPr>
@@ -40711,7 +40711,7 @@
                 <a:ea typeface="Helvetica" pitchFamily="34" charset="-122"/>
                 <a:cs typeface="Helvetica" pitchFamily="34" charset="-120"/>
               </a:rPr>
-              <a:t>WATSONX.DATA</a:t>
+              <a:t>WATSONX</a:t>
             </a:r>
             <a:endParaRPr lang="en-US" dirty="0"/>
           </a:p>
@@ -40744,7 +40744,7 @@
       </p:sp>
       <p:pic>
         <p:nvPicPr>
-          <p:cNvPr id="24" name="Object 23" descr="public/generated/icons/2ad019f3-0fd6-4c25-966d-f3952481a870.png">    </p:cNvPr>
+          <p:cNvPr id="24" name="Object 23" descr="public/generated/icons/7045626d-55e3-4418-be11-683a26dbc1e5.png">    </p:cNvPr>
           <p:cNvPicPr>
             <a:picLocks noChangeAspect="1"/>
           </p:cNvPicPr>
@@ -40800,7 +40800,7 @@
                 <a:ea typeface="Helvetica" pitchFamily="34" charset="-122"/>
                 <a:cs typeface="Helvetica" pitchFamily="34" charset="-120"/>
               </a:rPr>
-              <a:t>WATSONX.GOVERNANCE</a:t>
+              <a:t>WATSONX ASSISTANT</a:t>
             </a:r>
             <a:endParaRPr lang="en-US" dirty="0"/>
           </a:p>
@@ -40833,7 +40833,7 @@
       </p:sp>
       <p:pic>
         <p:nvPicPr>
-          <p:cNvPr id="27" name="Object 26" descr="public/generated/icons/cf329950-0a3e-11e8-922e-f1366c6e1c83-zerto.png">    </p:cNvPr>
+          <p:cNvPr id="27" name="Object 26" descr="public/generated/icons/11530fa0-1776-11ee-93f6-1d4066e6a409.png">    </p:cNvPr>
           <p:cNvPicPr>
             <a:picLocks noChangeAspect="1"/>
           </p:cNvPicPr>
@@ -40864,6 +40864,540 @@
         <p:spPr>
           <a:xfrm>
             <a:off x="7498080" y="777240"/>
+            <a:ext cx="640080" cy="274320"/>
+          </a:xfrm>
+          <a:prstGeom prst="rect">
+            <a:avLst/>
+          </a:prstGeom>
+          <a:noFill/>
+        </p:spPr>
+        <p:txBody>
+          <a:bodyPr wrap="square" rtlCol="0" anchor="t" bIns="0" lIns="0" rIns="0" tIns="0">
+            <a:spAutoFit/>
+          </a:bodyPr>
+          <a:lstStyle/>
+          <a:p>
+            <a:pPr algn="ctr">
+              <a:buNone/>
+            </a:pPr>
+            <a:r>
+              <a:rPr lang="en-US" b="1" sz="600" dirty="0" smtClean="0">
+                <a:solidFill>
+                  <a:srgbClr val="646365"/>
+                </a:solidFill>
+                <a:latin typeface="Helvetica" pitchFamily="34" charset="0"/>
+                <a:ea typeface="Helvetica" pitchFamily="34" charset="-122"/>
+                <a:cs typeface="Helvetica" pitchFamily="34" charset="-120"/>
+              </a:rPr>
+              <a:t>WATSONX CODE ASSISTANT</a:t>
+            </a:r>
+            <a:endParaRPr lang="en-US" dirty="0"/>
+          </a:p>
+        </p:txBody>
+      </p:sp>
+      <p:sp>
+        <p:nvSpPr>
+          <p:cNvPr id="29" name="Object 28"/>
+          <p:cNvSpPr/>
+          <p:nvPr/>
+        </p:nvSpPr>
+        <p:spPr>
+          <a:xfrm>
+            <a:off x="274320" y="1371600"/>
+            <a:ext cx="457200" cy="457200"/>
+          </a:xfrm>
+          <a:prstGeom prst="ellipse">
+            <a:avLst/>
+          </a:prstGeom>
+          <a:solidFill>
+            <a:srgbClr val="FFFFFF"/>
+          </a:solidFill>
+          <a:ln w="19050">
+            <a:solidFill>
+              <a:srgbClr val="646365"/>
+            </a:solidFill>
+            <a:prstDash val="solid"/>
+          </a:ln>
+        </p:spPr>
+      </p:sp>
+      <p:pic>
+        <p:nvPicPr>
+          <p:cNvPr id="30" name="Object 29" descr="public/generated/icons/b69f78c0-11d7-11ef-9bdf-c92eb40d1838.png">    </p:cNvPr>
+          <p:cNvPicPr>
+            <a:picLocks noChangeAspect="1"/>
+          </p:cNvPicPr>
+          <p:nvPr/>
+        </p:nvPicPr>
+        <p:blipFill>
+          <a:blip r:embed="rId10"/>
+          <a:stretch>
+            <a:fillRect/>
+          </a:stretch>
+        </p:blipFill>
+        <p:spPr>
+          <a:xfrm>
+            <a:off x="365760" y="1463040"/>
+            <a:ext cx="274320" cy="274320"/>
+          </a:xfrm>
+          <a:prstGeom prst="rect">
+            <a:avLst/>
+          </a:prstGeom>
+        </p:spPr>
+      </p:pic>
+      <p:sp>
+        <p:nvSpPr>
+          <p:cNvPr id="31" name="Object 30"/>
+          <p:cNvSpPr/>
+          <p:nvPr/>
+        </p:nvSpPr>
+        <p:spPr>
+          <a:xfrm>
+            <a:off x="182880" y="1874520"/>
+            <a:ext cx="640080" cy="274320"/>
+          </a:xfrm>
+          <a:prstGeom prst="rect">
+            <a:avLst/>
+          </a:prstGeom>
+          <a:noFill/>
+        </p:spPr>
+        <p:txBody>
+          <a:bodyPr wrap="square" rtlCol="0" anchor="t" bIns="0" lIns="0" rIns="0" tIns="0">
+            <a:spAutoFit/>
+          </a:bodyPr>
+          <a:lstStyle/>
+          <a:p>
+            <a:pPr algn="ctr">
+              <a:buNone/>
+            </a:pPr>
+            <a:r>
+              <a:rPr lang="en-US" b="1" sz="600" dirty="0" smtClean="0">
+                <a:solidFill>
+                  <a:srgbClr val="646365"/>
+                </a:solidFill>
+                <a:latin typeface="Helvetica" pitchFamily="34" charset="0"/>
+                <a:ea typeface="Helvetica" pitchFamily="34" charset="-122"/>
+                <a:cs typeface="Helvetica" pitchFamily="34" charset="-120"/>
+              </a:rPr>
+              <a:t>WATSONX ORCHESTRATE</a:t>
+            </a:r>
+            <a:endParaRPr lang="en-US" dirty="0"/>
+          </a:p>
+        </p:txBody>
+      </p:sp>
+      <p:sp>
+        <p:nvSpPr>
+          <p:cNvPr id="32" name="Object 31"/>
+          <p:cNvSpPr/>
+          <p:nvPr/>
+        </p:nvSpPr>
+        <p:spPr>
+          <a:xfrm>
+            <a:off x="1188720" y="1371600"/>
+            <a:ext cx="457200" cy="457200"/>
+          </a:xfrm>
+          <a:prstGeom prst="ellipse">
+            <a:avLst/>
+          </a:prstGeom>
+          <a:solidFill>
+            <a:srgbClr val="FFFFFF"/>
+          </a:solidFill>
+          <a:ln w="19050">
+            <a:solidFill>
+              <a:srgbClr val="646365"/>
+            </a:solidFill>
+            <a:prstDash val="solid"/>
+          </a:ln>
+        </p:spPr>
+      </p:sp>
+      <p:pic>
+        <p:nvPicPr>
+          <p:cNvPr id="33" name="Object 32" descr="public/generated/icons/51c53b72-918f-4869-b834-2d99eb28422a.png">    </p:cNvPr>
+          <p:cNvPicPr>
+            <a:picLocks noChangeAspect="1"/>
+          </p:cNvPicPr>
+          <p:nvPr/>
+        </p:nvPicPr>
+        <p:blipFill>
+          <a:blip r:embed="rId11"/>
+          <a:stretch>
+            <a:fillRect/>
+          </a:stretch>
+        </p:blipFill>
+        <p:spPr>
+          <a:xfrm>
+            <a:off x="1280160" y="1463040"/>
+            <a:ext cx="274320" cy="274320"/>
+          </a:xfrm>
+          <a:prstGeom prst="rect">
+            <a:avLst/>
+          </a:prstGeom>
+        </p:spPr>
+      </p:pic>
+      <p:sp>
+        <p:nvSpPr>
+          <p:cNvPr id="34" name="Object 33"/>
+          <p:cNvSpPr/>
+          <p:nvPr/>
+        </p:nvSpPr>
+        <p:spPr>
+          <a:xfrm>
+            <a:off x="1097280" y="1874520"/>
+            <a:ext cx="640080" cy="274320"/>
+          </a:xfrm>
+          <a:prstGeom prst="rect">
+            <a:avLst/>
+          </a:prstGeom>
+          <a:noFill/>
+        </p:spPr>
+        <p:txBody>
+          <a:bodyPr wrap="square" rtlCol="0" anchor="t" bIns="0" lIns="0" rIns="0" tIns="0">
+            <a:spAutoFit/>
+          </a:bodyPr>
+          <a:lstStyle/>
+          <a:p>
+            <a:pPr algn="ctr">
+              <a:buNone/>
+            </a:pPr>
+            <a:r>
+              <a:rPr lang="en-US" b="1" sz="600" dirty="0" smtClean="0">
+                <a:solidFill>
+                  <a:srgbClr val="646365"/>
+                </a:solidFill>
+                <a:latin typeface="Helvetica" pitchFamily="34" charset="0"/>
+                <a:ea typeface="Helvetica" pitchFamily="34" charset="-122"/>
+                <a:cs typeface="Helvetica" pitchFamily="34" charset="-120"/>
+              </a:rPr>
+              <a:t>WATSONX.AI RUNTIME</a:t>
+            </a:r>
+            <a:endParaRPr lang="en-US" dirty="0"/>
+          </a:p>
+        </p:txBody>
+      </p:sp>
+      <p:sp>
+        <p:nvSpPr>
+          <p:cNvPr id="35" name="Object 34"/>
+          <p:cNvSpPr/>
+          <p:nvPr/>
+        </p:nvSpPr>
+        <p:spPr>
+          <a:xfrm>
+            <a:off x="2103120" y="1371600"/>
+            <a:ext cx="457200" cy="457200"/>
+          </a:xfrm>
+          <a:prstGeom prst="ellipse">
+            <a:avLst/>
+          </a:prstGeom>
+          <a:solidFill>
+            <a:srgbClr val="FFFFFF"/>
+          </a:solidFill>
+          <a:ln w="19050">
+            <a:solidFill>
+              <a:srgbClr val="646365"/>
+            </a:solidFill>
+            <a:prstDash val="solid"/>
+          </a:ln>
+        </p:spPr>
+      </p:sp>
+      <p:pic>
+        <p:nvPicPr>
+          <p:cNvPr id="36" name="Object 35" descr="public/generated/icons/39ba9d4c-b1c5-4cc3-a163-38b580121e01.png">    </p:cNvPr>
+          <p:cNvPicPr>
+            <a:picLocks noChangeAspect="1"/>
+          </p:cNvPicPr>
+          <p:nvPr/>
+        </p:nvPicPr>
+        <p:blipFill>
+          <a:blip r:embed="rId12"/>
+          <a:stretch>
+            <a:fillRect/>
+          </a:stretch>
+        </p:blipFill>
+        <p:spPr>
+          <a:xfrm>
+            <a:off x="2194560" y="1463040"/>
+            <a:ext cx="274320" cy="274320"/>
+          </a:xfrm>
+          <a:prstGeom prst="rect">
+            <a:avLst/>
+          </a:prstGeom>
+        </p:spPr>
+      </p:pic>
+      <p:sp>
+        <p:nvSpPr>
+          <p:cNvPr id="37" name="Object 36"/>
+          <p:cNvSpPr/>
+          <p:nvPr/>
+        </p:nvSpPr>
+        <p:spPr>
+          <a:xfrm>
+            <a:off x="2011680" y="1874520"/>
+            <a:ext cx="640080" cy="274320"/>
+          </a:xfrm>
+          <a:prstGeom prst="rect">
+            <a:avLst/>
+          </a:prstGeom>
+          <a:noFill/>
+        </p:spPr>
+        <p:txBody>
+          <a:bodyPr wrap="square" rtlCol="0" anchor="t" bIns="0" lIns="0" rIns="0" tIns="0">
+            <a:spAutoFit/>
+          </a:bodyPr>
+          <a:lstStyle/>
+          <a:p>
+            <a:pPr algn="ctr">
+              <a:buNone/>
+            </a:pPr>
+            <a:r>
+              <a:rPr lang="en-US" b="1" sz="600" dirty="0" smtClean="0">
+                <a:solidFill>
+                  <a:srgbClr val="646365"/>
+                </a:solidFill>
+                <a:latin typeface="Helvetica" pitchFamily="34" charset="0"/>
+                <a:ea typeface="Helvetica" pitchFamily="34" charset="-122"/>
+                <a:cs typeface="Helvetica" pitchFamily="34" charset="-120"/>
+              </a:rPr>
+              <a:t>WATSONX.AI STUDIO</a:t>
+            </a:r>
+            <a:endParaRPr lang="en-US" dirty="0"/>
+          </a:p>
+        </p:txBody>
+      </p:sp>
+      <p:sp>
+        <p:nvSpPr>
+          <p:cNvPr id="38" name="Object 37"/>
+          <p:cNvSpPr/>
+          <p:nvPr/>
+        </p:nvSpPr>
+        <p:spPr>
+          <a:xfrm>
+            <a:off x="3017520" y="1371600"/>
+            <a:ext cx="457200" cy="457200"/>
+          </a:xfrm>
+          <a:prstGeom prst="ellipse">
+            <a:avLst/>
+          </a:prstGeom>
+          <a:solidFill>
+            <a:srgbClr val="FFFFFF"/>
+          </a:solidFill>
+          <a:ln w="19050">
+            <a:solidFill>
+              <a:srgbClr val="646365"/>
+            </a:solidFill>
+            <a:prstDash val="solid"/>
+          </a:ln>
+        </p:spPr>
+      </p:sp>
+      <p:pic>
+        <p:nvPicPr>
+          <p:cNvPr id="39" name="Object 38" descr="public/generated/icons/43834340-4a6d-11ed-97d2-959039ad2a2e.png">    </p:cNvPr>
+          <p:cNvPicPr>
+            <a:picLocks noChangeAspect="1"/>
+          </p:cNvPicPr>
+          <p:nvPr/>
+        </p:nvPicPr>
+        <p:blipFill>
+          <a:blip r:embed="rId13"/>
+          <a:stretch>
+            <a:fillRect/>
+          </a:stretch>
+        </p:blipFill>
+        <p:spPr>
+          <a:xfrm>
+            <a:off x="3108960" y="1463040"/>
+            <a:ext cx="274320" cy="274320"/>
+          </a:xfrm>
+          <a:prstGeom prst="rect">
+            <a:avLst/>
+          </a:prstGeom>
+        </p:spPr>
+      </p:pic>
+      <p:sp>
+        <p:nvSpPr>
+          <p:cNvPr id="40" name="Object 39"/>
+          <p:cNvSpPr/>
+          <p:nvPr/>
+        </p:nvSpPr>
+        <p:spPr>
+          <a:xfrm>
+            <a:off x="2926080" y="1874520"/>
+            <a:ext cx="640080" cy="274320"/>
+          </a:xfrm>
+          <a:prstGeom prst="rect">
+            <a:avLst/>
+          </a:prstGeom>
+          <a:noFill/>
+        </p:spPr>
+        <p:txBody>
+          <a:bodyPr wrap="square" rtlCol="0" anchor="t" bIns="0" lIns="0" rIns="0" tIns="0">
+            <a:spAutoFit/>
+          </a:bodyPr>
+          <a:lstStyle/>
+          <a:p>
+            <a:pPr algn="ctr">
+              <a:buNone/>
+            </a:pPr>
+            <a:r>
+              <a:rPr lang="en-US" b="1" sz="600" dirty="0" smtClean="0">
+                <a:solidFill>
+                  <a:srgbClr val="646365"/>
+                </a:solidFill>
+                <a:latin typeface="Helvetica" pitchFamily="34" charset="0"/>
+                <a:ea typeface="Helvetica" pitchFamily="34" charset="-122"/>
+                <a:cs typeface="Helvetica" pitchFamily="34" charset="-120"/>
+              </a:rPr>
+              <a:t>WATSONX.DATA</a:t>
+            </a:r>
+            <a:endParaRPr lang="en-US" dirty="0"/>
+          </a:p>
+        </p:txBody>
+      </p:sp>
+      <p:sp>
+        <p:nvSpPr>
+          <p:cNvPr id="41" name="Object 40"/>
+          <p:cNvSpPr/>
+          <p:nvPr/>
+        </p:nvSpPr>
+        <p:spPr>
+          <a:xfrm>
+            <a:off x="3931920" y="1371600"/>
+            <a:ext cx="457200" cy="457200"/>
+          </a:xfrm>
+          <a:prstGeom prst="ellipse">
+            <a:avLst/>
+          </a:prstGeom>
+          <a:solidFill>
+            <a:srgbClr val="FFFFFF"/>
+          </a:solidFill>
+          <a:ln w="19050">
+            <a:solidFill>
+              <a:srgbClr val="646365"/>
+            </a:solidFill>
+            <a:prstDash val="solid"/>
+          </a:ln>
+        </p:spPr>
+      </p:sp>
+      <p:pic>
+        <p:nvPicPr>
+          <p:cNvPr id="42" name="Object 41" descr="public/generated/icons/2ad019f3-0fd6-4c25-966d-f3952481a870.png">    </p:cNvPr>
+          <p:cNvPicPr>
+            <a:picLocks noChangeAspect="1"/>
+          </p:cNvPicPr>
+          <p:nvPr/>
+        </p:nvPicPr>
+        <p:blipFill>
+          <a:blip r:embed="rId14"/>
+          <a:stretch>
+            <a:fillRect/>
+          </a:stretch>
+        </p:blipFill>
+        <p:spPr>
+          <a:xfrm>
+            <a:off x="4023360" y="1463040"/>
+            <a:ext cx="274320" cy="274320"/>
+          </a:xfrm>
+          <a:prstGeom prst="rect">
+            <a:avLst/>
+          </a:prstGeom>
+        </p:spPr>
+      </p:pic>
+      <p:sp>
+        <p:nvSpPr>
+          <p:cNvPr id="43" name="Object 42"/>
+          <p:cNvSpPr/>
+          <p:nvPr/>
+        </p:nvSpPr>
+        <p:spPr>
+          <a:xfrm>
+            <a:off x="3840480" y="1874520"/>
+            <a:ext cx="640080" cy="274320"/>
+          </a:xfrm>
+          <a:prstGeom prst="rect">
+            <a:avLst/>
+          </a:prstGeom>
+          <a:noFill/>
+        </p:spPr>
+        <p:txBody>
+          <a:bodyPr wrap="square" rtlCol="0" anchor="t" bIns="0" lIns="0" rIns="0" tIns="0">
+            <a:spAutoFit/>
+          </a:bodyPr>
+          <a:lstStyle/>
+          <a:p>
+            <a:pPr algn="ctr">
+              <a:buNone/>
+            </a:pPr>
+            <a:r>
+              <a:rPr lang="en-US" b="1" sz="600" dirty="0" smtClean="0">
+                <a:solidFill>
+                  <a:srgbClr val="646365"/>
+                </a:solidFill>
+                <a:latin typeface="Helvetica" pitchFamily="34" charset="0"/>
+                <a:ea typeface="Helvetica" pitchFamily="34" charset="-122"/>
+                <a:cs typeface="Helvetica" pitchFamily="34" charset="-120"/>
+              </a:rPr>
+              <a:t>WATSONX.GOVERNANCE</a:t>
+            </a:r>
+            <a:endParaRPr lang="en-US" dirty="0"/>
+          </a:p>
+        </p:txBody>
+      </p:sp>
+      <p:sp>
+        <p:nvSpPr>
+          <p:cNvPr id="44" name="Object 43"/>
+          <p:cNvSpPr/>
+          <p:nvPr/>
+        </p:nvSpPr>
+        <p:spPr>
+          <a:xfrm>
+            <a:off x="4846320" y="1371600"/>
+            <a:ext cx="457200" cy="457200"/>
+          </a:xfrm>
+          <a:prstGeom prst="ellipse">
+            <a:avLst/>
+          </a:prstGeom>
+          <a:solidFill>
+            <a:srgbClr val="FFFFFF"/>
+          </a:solidFill>
+          <a:ln w="19050">
+            <a:solidFill>
+              <a:srgbClr val="646365"/>
+            </a:solidFill>
+            <a:prstDash val="solid"/>
+          </a:ln>
+        </p:spPr>
+      </p:sp>
+      <p:pic>
+        <p:nvPicPr>
+          <p:cNvPr id="45" name="Object 44" descr="public/generated/icons/cf329950-0a3e-11e8-922e-f1366c6e1c83-zerto.png">    </p:cNvPr>
+          <p:cNvPicPr>
+            <a:picLocks noChangeAspect="1"/>
+          </p:cNvPicPr>
+          <p:nvPr/>
+        </p:nvPicPr>
+        <p:blipFill>
+          <a:blip r:embed="rId15"/>
+          <a:stretch>
+            <a:fillRect/>
+          </a:stretch>
+        </p:blipFill>
+        <p:spPr>
+          <a:xfrm>
+            <a:off x="4937760" y="1463040"/>
+            <a:ext cx="274320" cy="274320"/>
+          </a:xfrm>
+          <a:prstGeom prst="rect">
+            <a:avLst/>
+          </a:prstGeom>
+        </p:spPr>
+      </p:pic>
+      <p:sp>
+        <p:nvSpPr>
+          <p:cNvPr id="46" name="Object 45"/>
+          <p:cNvSpPr/>
+          <p:nvPr/>
+        </p:nvSpPr>
+        <p:spPr>
+          <a:xfrm>
+            <a:off x="4754880" y="1874520"/>
             <a:ext cx="640080" cy="274320"/>
           </a:xfrm>
           <a:prstGeom prst="rect">

--- a/mycatalog-architecture-diagram-template.pptx
+++ b/mycatalog-architecture-diagram-template.pptx
@@ -524,7 +524,7 @@
           <a:p>
             <a:r>
               <a:rPr lang="en-US" dirty="0" smtClean="0"/>
-              <a:t>Generated on Sun Mar 02 2025 08:04:32 GMT+0000 (Coordinated Universal Time)</a:t>
+              <a:t>Generated on Sun Mar 16 2025 07:06:00 GMT+0000 (Coordinated Universal Time)</a:t>
             </a:r>
             <a:endParaRPr lang="en-US" dirty="0"/>
           </a:p>
@@ -25449,7 +25449,7 @@
       </p:sp>
       <p:pic>
         <p:nvPicPr>
-          <p:cNvPr id="54" name="Object 53" descr="public/generated/icons/76fad670-9d74-4138-8a14-709f5e6ac65b.png">    </p:cNvPr>
+          <p:cNvPr id="54" name="Object 53" descr="public/generated/icons/742c2c0f-1c40-480d-ab7b-76e56a89f51b.png">    </p:cNvPr>
           <p:cNvPicPr>
             <a:picLocks noChangeAspect="1"/>
           </p:cNvPicPr>
@@ -25505,7 +25505,7 @@
                 <a:ea typeface="Helvetica" pitchFamily="34" charset="-122"/>
                 <a:cs typeface="Helvetica" pitchFamily="34" charset="-120"/>
               </a:rPr>
-              <a:t>COST AND ASSET MANAGEMENT</a:t>
+              <a:t>CONVERTIO VMWARE WORKLOAD MIGRATION AND CONVERSION</a:t>
             </a:r>
             <a:endParaRPr lang="en-US" dirty="0"/>
           </a:p>
@@ -30021,7 +30021,7 @@
       </p:sp>
       <p:pic>
         <p:nvPicPr>
-          <p:cNvPr id="99" name="Object 98" descr="public/generated/icons/BE3AADC2-2C1A-4078-82F0-A33B1FD86EB0.png">    </p:cNvPr>
+          <p:cNvPr id="99" name="Object 98" descr="public/generated/icons/cf329950-0a3e-11e8-922e-f1366c6e1c83-horizon.png">    </p:cNvPr>
           <p:cNvPicPr>
             <a:picLocks noChangeAspect="1"/>
           </p:cNvPicPr>
@@ -30077,7 +30077,7 @@
                 <a:ea typeface="Helvetica" pitchFamily="34" charset="-122"/>
                 <a:cs typeface="Helvetica" pitchFamily="34" charset="-120"/>
               </a:rPr>
-              <a:t>HISTORICAL INSTRUMENT ANALYTICS</a:t>
+              <a:t>HORIZON 7</a:t>
             </a:r>
             <a:endParaRPr lang="en-US" dirty="0"/>
           </a:p>
@@ -30110,7 +30110,7 @@
       </p:sp>
       <p:pic>
         <p:nvPicPr>
-          <p:cNvPr id="102" name="Object 101" descr="public/generated/icons/cf329950-0a3e-11e8-922e-f1366c6e1c83-horizon.png">    </p:cNvPr>
+          <p:cNvPr id="102" name="Object 101" descr="public/generated/icons/fa329acf-f9b6-fa9f-f37e-ad72d0b6a783.png">    </p:cNvPr>
           <p:cNvPicPr>
             <a:picLocks noChangeAspect="1"/>
           </p:cNvPicPr>
@@ -30166,7 +30166,7 @@
                 <a:ea typeface="Helvetica" pitchFamily="34" charset="-122"/>
                 <a:cs typeface="Helvetica" pitchFamily="34" charset="-120"/>
               </a:rPr>
-              <a:t>HORIZON 7</a:t>
+              <a:t>HYBRID CLOUD INFRASTRUCTURE AS A SERVICE</a:t>
             </a:r>
             <a:endParaRPr lang="en-US" dirty="0"/>
           </a:p>
@@ -30199,7 +30199,7 @@
       </p:sp>
       <p:pic>
         <p:nvPicPr>
-          <p:cNvPr id="105" name="Object 104" descr="public/generated/icons/fa329acf-f9b6-fa9f-f37e-ad72d0b6a783.png">    </p:cNvPr>
+          <p:cNvPr id="105" name="Object 104" descr="public/generated/icons/d589492e-6ac0-4a11-9c28-a157851c8f68.png">    </p:cNvPr>
           <p:cNvPicPr>
             <a:picLocks noChangeAspect="1"/>
           </p:cNvPicPr>
@@ -30255,7 +30255,7 @@
                 <a:ea typeface="Helvetica" pitchFamily="34" charset="-122"/>
                 <a:cs typeface="Helvetica" pitchFamily="34" charset="-120"/>
               </a:rPr>
-              <a:t>HYBRID CLOUD INFRASTRUCTURE AS A SERVICE</a:t>
+              <a:t>HYPER PROTECT CRYPTO SERVICES</a:t>
             </a:r>
             <a:endParaRPr lang="en-US" dirty="0"/>
           </a:p>
@@ -30288,7 +30288,7 @@
       </p:sp>
       <p:pic>
         <p:nvPicPr>
-          <p:cNvPr id="108" name="Object 107" descr="public/generated/icons/d589492e-6ac0-4a11-9c28-a157851c8f68.png">    </p:cNvPr>
+          <p:cNvPr id="108" name="Object 107" descr="public/generated/icons/986f2197-9f9a-44f4-9463-f17ec64c6729.png">    </p:cNvPr>
           <p:cNvPicPr>
             <a:picLocks noChangeAspect="1"/>
           </p:cNvPicPr>
@@ -30344,7 +30344,7 @@
                 <a:ea typeface="Helvetica" pitchFamily="34" charset="-122"/>
                 <a:cs typeface="Helvetica" pitchFamily="34" charset="-120"/>
               </a:rPr>
-              <a:t>HYPER PROTECT CRYPTO SERVICES</a:t>
+              <a:t>HYPER PROTECT VIRTUAL SERVER FOR CLASSIC</a:t>
             </a:r>
             <a:endParaRPr lang="en-US" dirty="0"/>
           </a:p>
@@ -30410,7 +30410,7 @@
       </p:sp>
       <p:pic>
         <p:nvPicPr>
-          <p:cNvPr id="3" name="Object 2" descr="public/generated/icons/986f2197-9f9a-44f4-9463-f17ec64c6729.png">    </p:cNvPr>
+          <p:cNvPr id="3" name="Object 2" descr="public/generated/icons/cf329950-0a3e-11e8-922e-f1366c6e1c83-hytrustcc.png">    </p:cNvPr>
           <p:cNvPicPr>
             <a:picLocks noChangeAspect="1"/>
           </p:cNvPicPr>
@@ -30466,7 +30466,7 @@
                 <a:ea typeface="Helvetica" pitchFamily="34" charset="-122"/>
                 <a:cs typeface="Helvetica" pitchFamily="34" charset="-120"/>
               </a:rPr>
-              <a:t>HYPER PROTECT VIRTUAL SERVER FOR CLASSIC</a:t>
+              <a:t>HYTRUST CLOUDCONTROL</a:t>
             </a:r>
             <a:endParaRPr lang="en-US" dirty="0"/>
           </a:p>
@@ -30499,7 +30499,7 @@
       </p:sp>
       <p:pic>
         <p:nvPicPr>
-          <p:cNvPr id="6" name="Object 5" descr="public/generated/icons/cf329950-0a3e-11e8-922e-f1366c6e1c83-hytrustcc.png">    </p:cNvPr>
+          <p:cNvPr id="6" name="Object 5" descr="public/generated/icons/cf329950-0a3e-11e8-922e-f1366c6e1c83-hytrustdc.png">    </p:cNvPr>
           <p:cNvPicPr>
             <a:picLocks noChangeAspect="1"/>
           </p:cNvPicPr>
@@ -30555,7 +30555,7 @@
                 <a:ea typeface="Helvetica" pitchFamily="34" charset="-122"/>
                 <a:cs typeface="Helvetica" pitchFamily="34" charset="-120"/>
               </a:rPr>
-              <a:t>HYTRUST CLOUDCONTROL</a:t>
+              <a:t>HYTRUST DATACONTROL</a:t>
             </a:r>
             <a:endParaRPr lang="en-US" dirty="0"/>
           </a:p>
@@ -30588,7 +30588,7 @@
       </p:sp>
       <p:pic>
         <p:nvPicPr>
-          <p:cNvPr id="9" name="Object 8" descr="public/generated/icons/cf329950-0a3e-11e8-922e-f1366c6e1c83-hytrustdc.png">    </p:cNvPr>
+          <p:cNvPr id="9" name="Object 8" descr="public/generated/icons/cf329950-0a3e-11e8-922e-f1366c6e1c83-hytrustkc.png">    </p:cNvPr>
           <p:cNvPicPr>
             <a:picLocks noChangeAspect="1"/>
           </p:cNvPicPr>
@@ -30644,7 +30644,7 @@
                 <a:ea typeface="Helvetica" pitchFamily="34" charset="-122"/>
                 <a:cs typeface="Helvetica" pitchFamily="34" charset="-120"/>
               </a:rPr>
-              <a:t>HYTRUST DATACONTROL</a:t>
+              <a:t>HYTRUST KEYCONTROL</a:t>
             </a:r>
             <a:endParaRPr lang="en-US" dirty="0"/>
           </a:p>
@@ -30677,7 +30677,7 @@
       </p:sp>
       <p:pic>
         <p:nvPicPr>
-          <p:cNvPr id="12" name="Object 11" descr="public/generated/icons/cf329950-0a3e-11e8-922e-f1366c6e1c83-hytrustkc.png">    </p:cNvPr>
+          <p:cNvPr id="12" name="Object 11" descr="public/generated/icons/is.image.png">    </p:cNvPr>
           <p:cNvPicPr>
             <a:picLocks noChangeAspect="1"/>
           </p:cNvPicPr>
@@ -30733,7 +30733,7 @@
                 <a:ea typeface="Helvetica" pitchFamily="34" charset="-122"/>
                 <a:cs typeface="Helvetica" pitchFamily="34" charset="-120"/>
               </a:rPr>
-              <a:t>HYTRUST KEYCONTROL</a:t>
+              <a:t>IMAGE SERVICE FOR VPC</a:t>
             </a:r>
             <a:endParaRPr lang="en-US" dirty="0"/>
           </a:p>
@@ -30766,7 +30766,7 @@
       </p:sp>
       <p:pic>
         <p:nvPicPr>
-          <p:cNvPr id="15" name="Object 14" descr="public/generated/icons/is.image.png">    </p:cNvPr>
+          <p:cNvPr id="15" name="Object 14" descr="public/generated/icons/is.metadata.png">    </p:cNvPr>
           <p:cNvPicPr>
             <a:picLocks noChangeAspect="1"/>
           </p:cNvPicPr>
@@ -30822,7 +30822,7 @@
                 <a:ea typeface="Helvetica" pitchFamily="34" charset="-122"/>
                 <a:cs typeface="Helvetica" pitchFamily="34" charset="-120"/>
               </a:rPr>
-              <a:t>IMAGE SERVICE FOR VPC</a:t>
+              <a:t>INSTANCE METADATA FOR VPC</a:t>
             </a:r>
             <a:endParaRPr lang="en-US" dirty="0"/>
           </a:p>
@@ -30855,7 +30855,7 @@
       </p:sp>
       <p:pic>
         <p:nvPicPr>
-          <p:cNvPr id="18" name="Object 17" descr="public/generated/icons/is.metadata.png">    </p:cNvPr>
+          <p:cNvPr id="18" name="Object 17" descr="public/generated/icons/75874a60-cb12-11e7-948e-37ac098eb1b9.png">    </p:cNvPr>
           <p:cNvPicPr>
             <a:picLocks noChangeAspect="1"/>
           </p:cNvPicPr>
@@ -30911,7 +30911,7 @@
                 <a:ea typeface="Helvetica" pitchFamily="34" charset="-122"/>
                 <a:cs typeface="Helvetica" pitchFamily="34" charset="-120"/>
               </a:rPr>
-              <a:t>INSTANCE METADATA FOR VPC</a:t>
+              <a:t>INTERNET SERVICES</a:t>
             </a:r>
             <a:endParaRPr lang="en-US" dirty="0"/>
           </a:p>
@@ -30944,7 +30944,7 @@
       </p:sp>
       <p:pic>
         <p:nvPicPr>
-          <p:cNvPr id="21" name="Object 20" descr="public/generated/icons/EEB04BA5-25BB-4E52-AAE5-9C7BEF86543B.png">    </p:cNvPr>
+          <p:cNvPr id="21" name="Object 20" descr="public/generated/icons/12.png">    </p:cNvPr>
           <p:cNvPicPr>
             <a:picLocks noChangeAspect="1"/>
           </p:cNvPicPr>
@@ -31000,7 +31000,7 @@
                 <a:ea typeface="Helvetica" pitchFamily="34" charset="-122"/>
                 <a:cs typeface="Helvetica" pitchFamily="34" charset="-120"/>
               </a:rPr>
-              <a:t>INSTRUMENT ANALYTICS</a:t>
+              <a:t>IPSEC VPN</a:t>
             </a:r>
             <a:endParaRPr lang="en-US" dirty="0"/>
           </a:p>
@@ -31033,7 +31033,7 @@
       </p:sp>
       <p:pic>
         <p:nvPicPr>
-          <p:cNvPr id="24" name="Object 23" descr="public/generated/icons/75874a60-cb12-11e7-948e-37ac098eb1b9.png">    </p:cNvPr>
+          <p:cNvPr id="24" name="Object 23" descr="public/generated/icons/035145f0-2cac-4505-59e9-2e363d08d5aa.png">    </p:cNvPr>
           <p:cNvPicPr>
             <a:picLocks noChangeAspect="1"/>
           </p:cNvPicPr>
@@ -31089,7 +31089,7 @@
                 <a:ea typeface="Helvetica" pitchFamily="34" charset="-122"/>
                 <a:cs typeface="Helvetica" pitchFamily="34" charset="-120"/>
               </a:rPr>
-              <a:t>INTERNET SERVICES</a:t>
+              <a:t>JUNIPER VSRX</a:t>
             </a:r>
             <a:endParaRPr lang="en-US" dirty="0"/>
           </a:p>
@@ -31122,7 +31122,7 @@
       </p:sp>
       <p:pic>
         <p:nvPicPr>
-          <p:cNvPr id="27" name="Object 26" descr="public/generated/icons/3b960983-4483-488a-9851-6f7cccdb3534.png">    </p:cNvPr>
+          <p:cNvPr id="27" name="Object 26" descr="public/generated/icons/ee41347f-b18e-4ca6-bf80-b5467c63f9a6.png">    </p:cNvPr>
           <p:cNvPicPr>
             <a:picLocks noChangeAspect="1"/>
           </p:cNvPicPr>
@@ -31178,7 +31178,7 @@
                 <a:ea typeface="Helvetica" pitchFamily="34" charset="-122"/>
                 <a:cs typeface="Helvetica" pitchFamily="34" charset="-120"/>
               </a:rPr>
-              <a:t>INVESTMENT PORTFOLIO</a:t>
+              <a:t>KEY PROTECT</a:t>
             </a:r>
             <a:endParaRPr lang="en-US" dirty="0"/>
           </a:p>
@@ -31211,7 +31211,7 @@
       </p:sp>
       <p:pic>
         <p:nvPicPr>
-          <p:cNvPr id="30" name="Object 29" descr="public/generated/icons/12.png">    </p:cNvPr>
+          <p:cNvPr id="30" name="Object 29" descr="public/generated/icons/cf329950-0a3e-11e8-922e-f1366c6e1c83-kmipadapter.png">    </p:cNvPr>
           <p:cNvPicPr>
             <a:picLocks noChangeAspect="1"/>
           </p:cNvPicPr>
@@ -31267,7 +31267,7 @@
                 <a:ea typeface="Helvetica" pitchFamily="34" charset="-122"/>
                 <a:cs typeface="Helvetica" pitchFamily="34" charset="-120"/>
               </a:rPr>
-              <a:t>IPSEC VPN</a:t>
+              <a:t>KMIP FOR VMWARE</a:t>
             </a:r>
             <a:endParaRPr lang="en-US" dirty="0"/>
           </a:p>
@@ -31300,7 +31300,7 @@
       </p:sp>
       <p:pic>
         <p:nvPicPr>
-          <p:cNvPr id="33" name="Object 32" descr="public/generated/icons/035145f0-2cac-4505-59e9-2e363d08d5aa.png">    </p:cNvPr>
+          <p:cNvPr id="33" name="Object 32" descr="public/generated/icons/ed3a5a53-eb60-4f3c-8fd1-17f88585b6ed.png">    </p:cNvPr>
           <p:cNvPicPr>
             <a:picLocks noChangeAspect="1"/>
           </p:cNvPicPr>
@@ -31356,7 +31356,7 @@
                 <a:ea typeface="Helvetica" pitchFamily="34" charset="-122"/>
                 <a:cs typeface="Helvetica" pitchFamily="34" charset="-120"/>
               </a:rPr>
-              <a:t>JUNIPER VSRX</a:t>
+              <a:t>KNOWLEDGE CATALOG</a:t>
             </a:r>
             <a:endParaRPr lang="en-US" dirty="0"/>
           </a:p>
@@ -31389,7 +31389,7 @@
       </p:sp>
       <p:pic>
         <p:nvPicPr>
-          <p:cNvPr id="36" name="Object 35" descr="public/generated/icons/ee41347f-b18e-4ca6-bf80-b5467c63f9a6.png">    </p:cNvPr>
+          <p:cNvPr id="36" name="Object 35" descr="public/generated/icons/983ea9a2-0fec-4021-8b70-8da5373394e5.png">    </p:cNvPr>
           <p:cNvPicPr>
             <a:picLocks noChangeAspect="1"/>
           </p:cNvPicPr>
@@ -31445,7 +31445,7 @@
                 <a:ea typeface="Helvetica" pitchFamily="34" charset="-122"/>
                 <a:cs typeface="Helvetica" pitchFamily="34" charset="-120"/>
               </a:rPr>
-              <a:t>KEY PROTECT</a:t>
+              <a:t>KNOWLEDGE STUDIO</a:t>
             </a:r>
             <a:endParaRPr lang="en-US" dirty="0"/>
           </a:p>
@@ -31478,7 +31478,7 @@
       </p:sp>
       <p:pic>
         <p:nvPicPr>
-          <p:cNvPr id="39" name="Object 38" descr="public/generated/icons/cf329950-0a3e-11e8-922e-f1366c6e1c83-kmipadapter.png">    </p:cNvPr>
+          <p:cNvPr id="39" name="Object 38" descr="public/generated/icons/a8f89634-261c-4832-8257-b25e04787988.png">    </p:cNvPr>
           <p:cNvPicPr>
             <a:picLocks noChangeAspect="1"/>
           </p:cNvPicPr>
@@ -31534,7 +31534,7 @@
                 <a:ea typeface="Helvetica" pitchFamily="34" charset="-122"/>
                 <a:cs typeface="Helvetica" pitchFamily="34" charset="-120"/>
               </a:rPr>
-              <a:t>KMIP FOR VMWARE</a:t>
+              <a:t>KOMPRISE ELASTIC DATA MIGRATION</a:t>
             </a:r>
             <a:endParaRPr lang="en-US" dirty="0"/>
           </a:p>
@@ -31567,7 +31567,7 @@
       </p:sp>
       <p:pic>
         <p:nvPicPr>
-          <p:cNvPr id="42" name="Object 41" descr="public/generated/icons/ed3a5a53-eb60-4f3c-8fd1-17f88585b6ed.png">    </p:cNvPr>
+          <p:cNvPr id="42" name="Object 41" descr="public/generated/icons/f1fa7442-9ee0-4e27-94c2-0cb3776a0a0a.png">    </p:cNvPr>
           <p:cNvPicPr>
             <a:picLocks noChangeAspect="1"/>
           </p:cNvPicPr>
@@ -31623,7 +31623,7 @@
                 <a:ea typeface="Helvetica" pitchFamily="34" charset="-122"/>
                 <a:cs typeface="Helvetica" pitchFamily="34" charset="-120"/>
               </a:rPr>
-              <a:t>KNOWLEDGE CATALOG</a:t>
+              <a:t>KOMPRISE INTELLIGENT DATA MANAGEMENT SUITE</a:t>
             </a:r>
             <a:endParaRPr lang="en-US" dirty="0"/>
           </a:p>
@@ -31656,7 +31656,7 @@
       </p:sp>
       <p:pic>
         <p:nvPicPr>
-          <p:cNvPr id="45" name="Object 44" descr="public/generated/icons/983ea9a2-0fec-4021-8b70-8da5373394e5.png">    </p:cNvPr>
+          <p:cNvPr id="45" name="Object 44" descr="public/generated/icons/containers-kubernetes.png">    </p:cNvPr>
           <p:cNvPicPr>
             <a:picLocks noChangeAspect="1"/>
           </p:cNvPicPr>
@@ -31712,7 +31712,7 @@
                 <a:ea typeface="Helvetica" pitchFamily="34" charset="-122"/>
                 <a:cs typeface="Helvetica" pitchFamily="34" charset="-120"/>
               </a:rPr>
-              <a:t>KNOWLEDGE STUDIO</a:t>
+              <a:t>KUBERNETES SERVICE</a:t>
             </a:r>
             <a:endParaRPr lang="en-US" dirty="0"/>
           </a:p>
@@ -31745,7 +31745,7 @@
       </p:sp>
       <p:pic>
         <p:nvPicPr>
-          <p:cNvPr id="48" name="Object 47" descr="public/generated/icons/a8f89634-261c-4832-8257-b25e04787988.png">    </p:cNvPr>
+          <p:cNvPr id="48" name="Object 47" descr="public/generated/icons/is.load-balancer.png">    </p:cNvPr>
           <p:cNvPicPr>
             <a:picLocks noChangeAspect="1"/>
           </p:cNvPicPr>
@@ -31801,7 +31801,7 @@
                 <a:ea typeface="Helvetica" pitchFamily="34" charset="-122"/>
                 <a:cs typeface="Helvetica" pitchFamily="34" charset="-120"/>
               </a:rPr>
-              <a:t>KOMPRISE ELASTIC DATA MIGRATION</a:t>
+              <a:t>LOAD BALANCER FOR VPC</a:t>
             </a:r>
             <a:endParaRPr lang="en-US" dirty="0"/>
           </a:p>
@@ -31834,7 +31834,7 @@
       </p:sp>
       <p:pic>
         <p:nvPicPr>
-          <p:cNvPr id="51" name="Object 50" descr="public/generated/icons/f1fa7442-9ee0-4e27-94c2-0cb3776a0a0a.png">    </p:cNvPr>
+          <p:cNvPr id="51" name="Object 50" descr="public/generated/icons/e13e1860-959c-11e8-871e-ad157af61ad7.png">    </p:cNvPr>
           <p:cNvPicPr>
             <a:picLocks noChangeAspect="1"/>
           </p:cNvPicPr>
@@ -31890,7 +31890,7 @@
                 <a:ea typeface="Helvetica" pitchFamily="34" charset="-122"/>
                 <a:cs typeface="Helvetica" pitchFamily="34" charset="-120"/>
               </a:rPr>
-              <a:t>KOMPRISE INTELLIGENT DATA MANAGEMENT SUITE</a:t>
+              <a:t>LOG ANALYSIS</a:t>
             </a:r>
             <a:endParaRPr lang="en-US" dirty="0"/>
           </a:p>
@@ -31923,7 +31923,7 @@
       </p:sp>
       <p:pic>
         <p:nvPicPr>
-          <p:cNvPr id="54" name="Object 53" descr="public/generated/icons/containers-kubernetes.png">    </p:cNvPr>
+          <p:cNvPr id="54" name="Object 53" descr="public/generated/icons/9349854b-eb46-427f-8ef6-687d601c9eda.png">    </p:cNvPr>
           <p:cNvPicPr>
             <a:picLocks noChangeAspect="1"/>
           </p:cNvPicPr>
@@ -31979,7 +31979,7 @@
                 <a:ea typeface="Helvetica" pitchFamily="34" charset="-122"/>
                 <a:cs typeface="Helvetica" pitchFamily="34" charset="-120"/>
               </a:rPr>
-              <a:t>KUBERNETES SERVICE</a:t>
+              <a:t>LYVE DATA TRANSFER SERVICES</a:t>
             </a:r>
             <a:endParaRPr lang="en-US" dirty="0"/>
           </a:p>
@@ -32012,7 +32012,7 @@
       </p:sp>
       <p:pic>
         <p:nvPicPr>
-          <p:cNvPr id="57" name="Object 56" descr="public/generated/icons/is.load-balancer.png">    </p:cNvPr>
+          <p:cNvPr id="57" name="Object 56" descr="public/generated/icons/cf329950-0a3e-11e8-922e-f1366c6e1c83-managedveeam.png">    </p:cNvPr>
           <p:cNvPicPr>
             <a:picLocks noChangeAspect="1"/>
           </p:cNvPicPr>
@@ -32068,7 +32068,7 @@
                 <a:ea typeface="Helvetica" pitchFamily="34" charset="-122"/>
                 <a:cs typeface="Helvetica" pitchFamily="34" charset="-120"/>
               </a:rPr>
-              <a:t>LOAD BALANCER FOR VPC</a:t>
+              <a:t>MANAGED BACKUP SERVICES</a:t>
             </a:r>
             <a:endParaRPr lang="en-US" dirty="0"/>
           </a:p>
@@ -32101,7 +32101,7 @@
       </p:sp>
       <p:pic>
         <p:nvPicPr>
-          <p:cNvPr id="60" name="Object 59" descr="public/generated/icons/e13e1860-959c-11e8-871e-ad157af61ad7.png">    </p:cNvPr>
+          <p:cNvPr id="60" name="Object 59" descr="public/generated/icons/cf329950-0a3e-11e8-922e-f1366c6e1c83-managedzerto.png">    </p:cNvPr>
           <p:cNvPicPr>
             <a:picLocks noChangeAspect="1"/>
           </p:cNvPicPr>
@@ -32157,7 +32157,7 @@
                 <a:ea typeface="Helvetica" pitchFamily="34" charset="-122"/>
                 <a:cs typeface="Helvetica" pitchFamily="34" charset="-120"/>
               </a:rPr>
-              <a:t>LOG ANALYSIS</a:t>
+              <a:t>MANAGED DISASTER RECOVERY SERVICES</a:t>
             </a:r>
             <a:endParaRPr lang="en-US" dirty="0"/>
           </a:p>
@@ -32190,7 +32190,7 @@
       </p:sp>
       <p:pic>
         <p:nvPicPr>
-          <p:cNvPr id="63" name="Object 62" descr="public/generated/icons/9349854b-eb46-427f-8ef6-687d601c9eda.png">    </p:cNvPr>
+          <p:cNvPr id="63" name="Object 62" descr="public/generated/icons/cfb3c3da-7b1f-0879-f414-f367da218488.png">    </p:cNvPr>
           <p:cNvPicPr>
             <a:picLocks noChangeAspect="1"/>
           </p:cNvPicPr>
@@ -32246,7 +32246,7 @@
                 <a:ea typeface="Helvetica" pitchFamily="34" charset="-122"/>
                 <a:cs typeface="Helvetica" pitchFamily="34" charset="-120"/>
               </a:rPr>
-              <a:t>LYVE DATA TRANSFER SERVICES</a:t>
+              <a:t>MANAGED NETWORK SECURITY SERVICES</a:t>
             </a:r>
             <a:endParaRPr lang="en-US" dirty="0"/>
           </a:p>
@@ -32279,7 +32279,7 @@
       </p:sp>
       <p:pic>
         <p:nvPicPr>
-          <p:cNvPr id="66" name="Object 65" descr="public/generated/icons/cf329950-0a3e-11e8-922e-f1366c6e1c83-managedveeam.png">    </p:cNvPr>
+          <p:cNvPr id="66" name="Object 65" descr="public/generated/icons/cf329950-0a3e-11e8-922e-f1366c6e1c83-imi.png">    </p:cNvPr>
           <p:cNvPicPr>
             <a:picLocks noChangeAspect="1"/>
           </p:cNvPicPr>
@@ -32335,7 +32335,7 @@
                 <a:ea typeface="Helvetica" pitchFamily="34" charset="-122"/>
                 <a:cs typeface="Helvetica" pitchFamily="34" charset="-120"/>
               </a:rPr>
-              <a:t>MANAGED BACKUP SERVICES</a:t>
+              <a:t>MANAGED VMWARE SERVICES</a:t>
             </a:r>
             <a:endParaRPr lang="en-US" dirty="0"/>
           </a:p>
@@ -32368,7 +32368,7 @@
       </p:sp>
       <p:pic>
         <p:nvPicPr>
-          <p:cNvPr id="69" name="Object 68" descr="public/generated/icons/cf329950-0a3e-11e8-922e-f1366c6e1c83-managedzerto.png">    </p:cNvPr>
+          <p:cNvPr id="69" name="Object 68" descr="public/generated/icons/14bd30e0-8921-11e9-a2c5-13fceaf553c0.png">    </p:cNvPr>
           <p:cNvPicPr>
             <a:picLocks noChangeAspect="1"/>
           </p:cNvPicPr>
@@ -32424,7 +32424,7 @@
                 <a:ea typeface="Helvetica" pitchFamily="34" charset="-122"/>
                 <a:cs typeface="Helvetica" pitchFamily="34" charset="-120"/>
               </a:rPr>
-              <a:t>MANAGED DISASTER RECOVERY SERVICES</a:t>
+              <a:t>MATCH 360 WITH WATSON</a:t>
             </a:r>
             <a:endParaRPr lang="en-US" dirty="0"/>
           </a:p>
@@ -32457,7 +32457,7 @@
       </p:sp>
       <p:pic>
         <p:nvPicPr>
-          <p:cNvPr id="72" name="Object 71" descr="public/generated/icons/cfb3c3da-7b1f-0879-f414-f367da218488.png">    </p:cNvPr>
+          <p:cNvPr id="72" name="Object 71" descr="public/generated/icons/messages-for-rabbitmq.png">    </p:cNvPr>
           <p:cNvPicPr>
             <a:picLocks noChangeAspect="1"/>
           </p:cNvPicPr>
@@ -32513,7 +32513,7 @@
                 <a:ea typeface="Helvetica" pitchFamily="34" charset="-122"/>
                 <a:cs typeface="Helvetica" pitchFamily="34" charset="-120"/>
               </a:rPr>
-              <a:t>MANAGED NETWORK SECURITY SERVICES</a:t>
+              <a:t>MESSAGES FOR RABBITMQ</a:t>
             </a:r>
             <a:endParaRPr lang="en-US" dirty="0"/>
           </a:p>
@@ -32546,7 +32546,7 @@
       </p:sp>
       <p:pic>
         <p:nvPicPr>
-          <p:cNvPr id="75" name="Object 74" descr="public/generated/icons/cf329950-0a3e-11e8-922e-f1366c6e1c83-imi.png">    </p:cNvPr>
+          <p:cNvPr id="75" name="Object 74" descr="public/generated/icons/d4000551-49ff-4868-9e05-f863e60fad3a.png">    </p:cNvPr>
           <p:cNvPicPr>
             <a:picLocks noChangeAspect="1"/>
           </p:cNvPicPr>
@@ -32602,7 +32602,7 @@
                 <a:ea typeface="Helvetica" pitchFamily="34" charset="-122"/>
                 <a:cs typeface="Helvetica" pitchFamily="34" charset="-120"/>
               </a:rPr>
-              <a:t>MANAGED VMWARE SERVICES</a:t>
+              <a:t>MINIO</a:t>
             </a:r>
             <a:endParaRPr lang="en-US" dirty="0"/>
           </a:p>
@@ -32635,7 +32635,7 @@
       </p:sp>
       <p:pic>
         <p:nvPicPr>
-          <p:cNvPr id="78" name="Object 77" descr="public/generated/icons/14bd30e0-8921-11e9-a2c5-13fceaf553c0.png">    </p:cNvPr>
+          <p:cNvPr id="78" name="Object 77" descr="public/generated/icons/9d9545b4-b866-4c1b-9fc0-39273aef5bb0.png">    </p:cNvPr>
           <p:cNvPicPr>
             <a:picLocks noChangeAspect="1"/>
           </p:cNvPicPr>
@@ -32691,7 +32691,7 @@
                 <a:ea typeface="Helvetica" pitchFamily="34" charset="-122"/>
                 <a:cs typeface="Helvetica" pitchFamily="34" charset="-120"/>
               </a:rPr>
-              <a:t>MATCH 360 WITH WATSON</a:t>
+              <a:t>MONO-X ONE FOR POWERVS</a:t>
             </a:r>
             <a:endParaRPr lang="en-US" dirty="0"/>
           </a:p>
@@ -32724,7 +32724,7 @@
       </p:sp>
       <p:pic>
         <p:nvPicPr>
-          <p:cNvPr id="81" name="Object 80" descr="public/generated/icons/messages-for-rabbitmq.png">    </p:cNvPr>
+          <p:cNvPr id="81" name="Object 80" descr="public/generated/icons/01037c41-adce-4bb5-8b45-0c06004916c4.png">    </p:cNvPr>
           <p:cNvPicPr>
             <a:picLocks noChangeAspect="1"/>
           </p:cNvPicPr>
@@ -32780,7 +32780,7 @@
                 <a:ea typeface="Helvetica" pitchFamily="34" charset="-122"/>
                 <a:cs typeface="Helvetica" pitchFamily="34" charset="-120"/>
               </a:rPr>
-              <a:t>MESSAGES FOR RABBITMQ</a:t>
+              <a:t>MQ</a:t>
             </a:r>
             <a:endParaRPr lang="en-US" dirty="0"/>
           </a:p>
@@ -32813,7 +32813,7 @@
       </p:sp>
       <p:pic>
         <p:nvPicPr>
-          <p:cNvPr id="84" name="Object 83" descr="public/generated/icons/d4000551-49ff-4868-9e05-f863e60fad3a.png">    </p:cNvPr>
+          <p:cNvPr id="84" name="Object 83" descr="public/generated/icons/is.snapshot-consistency-group.png">    </p:cNvPr>
           <p:cNvPicPr>
             <a:picLocks noChangeAspect="1"/>
           </p:cNvPicPr>
@@ -32869,7 +32869,7 @@
                 <a:ea typeface="Helvetica" pitchFamily="34" charset="-122"/>
                 <a:cs typeface="Helvetica" pitchFamily="34" charset="-120"/>
               </a:rPr>
-              <a:t>MINIO</a:t>
+              <a:t>MULTI VOLUME SNAPSHOTS FOR VPC</a:t>
             </a:r>
             <a:endParaRPr lang="en-US" dirty="0"/>
           </a:p>
@@ -32902,7 +32902,7 @@
       </p:sp>
       <p:pic>
         <p:nvPicPr>
-          <p:cNvPr id="87" name="Object 86" descr="public/generated/icons/9d9545b4-b866-4c1b-9fc0-39273aef5bb0.png">    </p:cNvPr>
+          <p:cNvPr id="87" name="Object 86" descr="public/generated/icons/bb6393bc-7d81-446b-9728-61b704f6eca5.png">    </p:cNvPr>
           <p:cNvPicPr>
             <a:picLocks noChangeAspect="1"/>
           </p:cNvPicPr>
@@ -32958,7 +32958,7 @@
                 <a:ea typeface="Helvetica" pitchFamily="34" charset="-122"/>
                 <a:cs typeface="Helvetica" pitchFamily="34" charset="-120"/>
               </a:rPr>
-              <a:t>MONO-X ONE FOR POWERVS</a:t>
+              <a:t>NATURAL LANGUAGE UNDERSTANDING</a:t>
             </a:r>
             <a:endParaRPr lang="en-US" dirty="0"/>
           </a:p>
@@ -32991,7 +32991,7 @@
       </p:sp>
       <p:pic>
         <p:nvPicPr>
-          <p:cNvPr id="90" name="Object 89" descr="public/generated/icons/01037c41-adce-4bb5-8b45-0c06004916c4.png">    </p:cNvPr>
+          <p:cNvPr id="90" name="Object 89" descr="public/generated/icons/cf329950-0a3e-11e8-922e-f1366c6e1c83-netapp.png">    </p:cNvPr>
           <p:cNvPicPr>
             <a:picLocks noChangeAspect="1"/>
           </p:cNvPicPr>
@@ -33047,7 +33047,7 @@
                 <a:ea typeface="Helvetica" pitchFamily="34" charset="-122"/>
                 <a:cs typeface="Helvetica" pitchFamily="34" charset="-120"/>
               </a:rPr>
-              <a:t>MQ</a:t>
+              <a:t>NETAPP ONTAP SELECT</a:t>
             </a:r>
             <a:endParaRPr lang="en-US" dirty="0"/>
           </a:p>
@@ -33080,7 +33080,7 @@
       </p:sp>
       <p:pic>
         <p:nvPicPr>
-          <p:cNvPr id="93" name="Object 92" descr="public/generated/icons/is.snapshot-consistency-group.png">    </p:cNvPr>
+          <p:cNvPr id="93" name="Object 92" descr="public/generated/icons/cc42cff0-b19b-11eb-9a66-c717766c1d30.png">    </p:cNvPr>
           <p:cNvPicPr>
             <a:picLocks noChangeAspect="1"/>
           </p:cNvPicPr>
@@ -33136,7 +33136,7 @@
                 <a:ea typeface="Helvetica" pitchFamily="34" charset="-122"/>
                 <a:cs typeface="Helvetica" pitchFamily="34" charset="-120"/>
               </a:rPr>
-              <a:t>MULTI VOLUME SNAPSHOTS FOR VPC</a:t>
+              <a:t>NETEZZA PERFORMANCE SERVER</a:t>
             </a:r>
             <a:endParaRPr lang="en-US" dirty="0"/>
           </a:p>
@@ -33169,7 +33169,7 @@
       </p:sp>
       <p:pic>
         <p:nvPicPr>
-          <p:cNvPr id="96" name="Object 95" descr="public/generated/icons/bb6393bc-7d81-446b-9728-61b704f6eca5.png">    </p:cNvPr>
+          <p:cNvPr id="96" name="Object 95" descr="public/generated/icons/is.network-acl.png">    </p:cNvPr>
           <p:cNvPicPr>
             <a:picLocks noChangeAspect="1"/>
           </p:cNvPicPr>
@@ -33225,7 +33225,7 @@
                 <a:ea typeface="Helvetica" pitchFamily="34" charset="-122"/>
                 <a:cs typeface="Helvetica" pitchFamily="34" charset="-120"/>
               </a:rPr>
-              <a:t>NATURAL LANGUAGE UNDERSTANDING</a:t>
+              <a:t>NETWORK ACL</a:t>
             </a:r>
             <a:endParaRPr lang="en-US" dirty="0"/>
           </a:p>
@@ -33258,7 +33258,7 @@
       </p:sp>
       <p:pic>
         <p:nvPicPr>
-          <p:cNvPr id="99" name="Object 98" descr="public/generated/icons/cf329950-0a3e-11e8-922e-f1366c6e1c83-netapp.png">    </p:cNvPr>
+          <p:cNvPr id="99" name="Object 98" descr="public/generated/icons/d97bd0c3-a8e5-4f3d-b925-16380e039a9a.png">    </p:cNvPr>
           <p:cNvPicPr>
             <a:picLocks noChangeAspect="1"/>
           </p:cNvPicPr>
@@ -33314,7 +33314,7 @@
                 <a:ea typeface="Helvetica" pitchFamily="34" charset="-122"/>
                 <a:cs typeface="Helvetica" pitchFamily="34" charset="-120"/>
               </a:rPr>
-              <a:t>NETAPP ONTAP SELECT</a:t>
+              <a:t>NEURALSEEK</a:t>
             </a:r>
             <a:endParaRPr lang="en-US" dirty="0"/>
           </a:p>
@@ -33347,7 +33347,7 @@
       </p:sp>
       <p:pic>
         <p:nvPicPr>
-          <p:cNvPr id="102" name="Object 101" descr="public/generated/icons/cc42cff0-b19b-11eb-9a66-c717766c1d30.png">    </p:cNvPr>
+          <p:cNvPr id="102" name="Object 101" descr="public/generated/icons/466091c0-9b8d-11eb-8f8c-91e95378d441.png">    </p:cNvPr>
           <p:cNvPicPr>
             <a:picLocks noChangeAspect="1"/>
           </p:cNvPicPr>
@@ -33403,7 +33403,7 @@
                 <a:ea typeface="Helvetica" pitchFamily="34" charset="-122"/>
                 <a:cs typeface="Helvetica" pitchFamily="34" charset="-120"/>
               </a:rPr>
-              <a:t>NETEZZA PERFORMANCE SERVER</a:t>
+              <a:t>OPENPAGES</a:t>
             </a:r>
             <a:endParaRPr lang="en-US" dirty="0"/>
           </a:p>
@@ -33436,7 +33436,7 @@
       </p:sp>
       <p:pic>
         <p:nvPicPr>
-          <p:cNvPr id="105" name="Object 104" descr="public/generated/icons/is.network-acl.png">    </p:cNvPr>
+          <p:cNvPr id="105" name="Object 104" descr="public/generated/icons/2f756420-434f-11e8-ae40-6bdd72502abc.png">    </p:cNvPr>
           <p:cNvPicPr>
             <a:picLocks noChangeAspect="1"/>
           </p:cNvPicPr>
@@ -33492,7 +33492,7 @@
                 <a:ea typeface="Helvetica" pitchFamily="34" charset="-122"/>
                 <a:cs typeface="Helvetica" pitchFamily="34" charset="-120"/>
               </a:rPr>
-              <a:t>NETWORK ACL</a:t>
+              <a:t>PARTNER WITH TECHNOLOGY EXPERT LABS</a:t>
             </a:r>
             <a:endParaRPr lang="en-US" dirty="0"/>
           </a:p>
@@ -33525,7 +33525,7 @@
       </p:sp>
       <p:pic>
         <p:nvPicPr>
-          <p:cNvPr id="108" name="Object 107" descr="public/generated/icons/d97bd0c3-a8e5-4f3d-b925-16380e039a9a.png">    </p:cNvPr>
+          <p:cNvPr id="108" name="Object 107" descr="public/generated/icons/bb6229f0-e632-11ee-ae26-5d6d9ba99eec.png">    </p:cNvPr>
           <p:cNvPicPr>
             <a:picLocks noChangeAspect="1"/>
           </p:cNvPicPr>
@@ -33581,7 +33581,7 @@
                 <a:ea typeface="Helvetica" pitchFamily="34" charset="-122"/>
                 <a:cs typeface="Helvetica" pitchFamily="34" charset="-120"/>
               </a:rPr>
-              <a:t>NEURALSEEK</a:t>
+              <a:t>PARTNER WITH TECHNOLOGY EXPERT LABS - BUILD IBM STORAGE PROTECT FOR POWERVS</a:t>
             </a:r>
             <a:endParaRPr lang="en-US" dirty="0"/>
           </a:p>
@@ -33647,7 +33647,7 @@
       </p:sp>
       <p:pic>
         <p:nvPicPr>
-          <p:cNvPr id="3" name="Object 2" descr="public/generated/icons/466091c0-9b8d-11eb-8f8c-91e95378d441.png">    </p:cNvPr>
+          <p:cNvPr id="3" name="Object 2" descr="public/generated/icons/f0ea1510-e632-11ee-acb6-4d13e7035de5.png">    </p:cNvPr>
           <p:cNvPicPr>
             <a:picLocks noChangeAspect="1"/>
           </p:cNvPicPr>
@@ -33703,7 +33703,7 @@
                 <a:ea typeface="Helvetica" pitchFamily="34" charset="-122"/>
                 <a:cs typeface="Helvetica" pitchFamily="34" charset="-120"/>
               </a:rPr>
-              <a:t>OPENPAGES</a:t>
+              <a:t>PARTNER WITH TECHNOLOGY EXPERT LABS - BUILD SAP HANA STARTER EDITION</a:t>
             </a:r>
             <a:endParaRPr lang="en-US" dirty="0"/>
           </a:p>
@@ -33736,7 +33736,7 @@
       </p:sp>
       <p:pic>
         <p:nvPicPr>
-          <p:cNvPr id="6" name="Object 5" descr="public/generated/icons/2f756420-434f-11e8-ae40-6bdd72502abc.png">    </p:cNvPr>
+          <p:cNvPr id="6" name="Object 5" descr="public/generated/icons/339a87f0-e633-11ee-acb6-4d13e7035de5.png">    </p:cNvPr>
           <p:cNvPicPr>
             <a:picLocks noChangeAspect="1"/>
           </p:cNvPicPr>
@@ -33792,7 +33792,7 @@
                 <a:ea typeface="Helvetica" pitchFamily="34" charset="-122"/>
                 <a:cs typeface="Helvetica" pitchFamily="34" charset="-120"/>
               </a:rPr>
-              <a:t>PARTNER WITH TECHNOLOGY EXPERT LABS</a:t>
+              <a:t>PARTNER WITH TECHNOLOGY EXPERT LABS - MIGRATE WORKLOADS TO IBM POWER VIRTUAL SERVER</a:t>
             </a:r>
             <a:endParaRPr lang="en-US" dirty="0"/>
           </a:p>
@@ -33825,7 +33825,7 @@
       </p:sp>
       <p:pic>
         <p:nvPicPr>
-          <p:cNvPr id="9" name="Object 8" descr="public/generated/icons/bb6229f0-e632-11ee-ae26-5d6d9ba99eec.png">    </p:cNvPr>
+          <p:cNvPr id="9" name="Object 8" descr="public/generated/icons/is.placement-group.png">    </p:cNvPr>
           <p:cNvPicPr>
             <a:picLocks noChangeAspect="1"/>
           </p:cNvPicPr>
@@ -33881,7 +33881,7 @@
                 <a:ea typeface="Helvetica" pitchFamily="34" charset="-122"/>
                 <a:cs typeface="Helvetica" pitchFamily="34" charset="-120"/>
               </a:rPr>
-              <a:t>PARTNER WITH TECHNOLOGY EXPERT LABS - BUILD IBM STORAGE PROTECT FOR POWERVS</a:t>
+              <a:t>PLACEMENT GROUPS FOR VPC</a:t>
             </a:r>
             <a:endParaRPr lang="en-US" dirty="0"/>
           </a:p>
@@ -33914,7 +33914,7 @@
       </p:sp>
       <p:pic>
         <p:nvPicPr>
-          <p:cNvPr id="12" name="Object 11" descr="public/generated/icons/f0ea1510-e632-11ee-acb6-4d13e7035de5.png">    </p:cNvPr>
+          <p:cNvPr id="12" name="Object 11" descr="public/generated/icons/41690130-a4e8-11ea-94c3-d72a57643c7d.png">    </p:cNvPr>
           <p:cNvPicPr>
             <a:picLocks noChangeAspect="1"/>
           </p:cNvPicPr>
@@ -33970,7 +33970,7 @@
                 <a:ea typeface="Helvetica" pitchFamily="34" charset="-122"/>
                 <a:cs typeface="Helvetica" pitchFamily="34" charset="-120"/>
               </a:rPr>
-              <a:t>PARTNER WITH TECHNOLOGY EXPERT LABS - BUILD SAP HANA STARTER EDITION</a:t>
+              <a:t>PLANNING ANALYTICS</a:t>
             </a:r>
             <a:endParaRPr lang="en-US" dirty="0"/>
           </a:p>
@@ -34003,7 +34003,7 @@
       </p:sp>
       <p:pic>
         <p:nvPicPr>
-          <p:cNvPr id="15" name="Object 14" descr="public/generated/icons/339a87f0-e633-11ee-acb6-4d13e7035de5.png">    </p:cNvPr>
+          <p:cNvPr id="15" name="Object 14" descr="public/generated/icons/d666f360-66d1-11e9-85ef-a19427301a8c.png">    </p:cNvPr>
           <p:cNvPicPr>
             <a:picLocks noChangeAspect="1"/>
           </p:cNvPicPr>
@@ -34059,7 +34059,7 @@
                 <a:ea typeface="Helvetica" pitchFamily="34" charset="-122"/>
                 <a:cs typeface="Helvetica" pitchFamily="34" charset="-120"/>
               </a:rPr>
-              <a:t>PARTNER WITH TECHNOLOGY EXPERT LABS - MIGRATE WORKLOADS TO IBM POWER VIRTUAL SERVER</a:t>
+              <a:t>PORTWORX ENTERPRISE</a:t>
             </a:r>
             <a:endParaRPr lang="en-US" dirty="0"/>
           </a:p>
@@ -34092,7 +34092,7 @@
       </p:sp>
       <p:pic>
         <p:nvPicPr>
-          <p:cNvPr id="18" name="Object 17" descr="public/generated/icons/is.placement-group.png">    </p:cNvPr>
+          <p:cNvPr id="18" name="Object 17" descr="public/generated/icons/7b2cdb0e-ad91-4fd7-97c0-5398874ec27b.png">    </p:cNvPr>
           <p:cNvPicPr>
             <a:picLocks noChangeAspect="1"/>
           </p:cNvPicPr>
@@ -34148,7 +34148,7 @@
                 <a:ea typeface="Helvetica" pitchFamily="34" charset="-122"/>
                 <a:cs typeface="Helvetica" pitchFamily="34" charset="-120"/>
               </a:rPr>
-              <a:t>PLACEMENT GROUPS FOR VPC</a:t>
+              <a:t>POWER I MIGRATE 23 SERVICES</a:t>
             </a:r>
             <a:endParaRPr lang="en-US" dirty="0"/>
           </a:p>
@@ -34181,7 +34181,7 @@
       </p:sp>
       <p:pic>
         <p:nvPicPr>
-          <p:cNvPr id="21" name="Object 20" descr="public/generated/icons/41690130-a4e8-11ea-94c3-d72a57643c7d.png">    </p:cNvPr>
+          <p:cNvPr id="21" name="Object 20" descr="public/generated/icons/9828699d-dda7-4022-839b-c8e1e8b7d9d8.png">    </p:cNvPr>
           <p:cNvPicPr>
             <a:picLocks noChangeAspect="1"/>
           </p:cNvPicPr>
@@ -34237,7 +34237,7 @@
                 <a:ea typeface="Helvetica" pitchFamily="34" charset="-122"/>
                 <a:cs typeface="Helvetica" pitchFamily="34" charset="-120"/>
               </a:rPr>
-              <a:t>PLANNING ANALYTICS</a:t>
+              <a:t>POWER I MIGRATE WHILE ACTIVE SERVICES</a:t>
             </a:r>
             <a:endParaRPr lang="en-US" dirty="0"/>
           </a:p>
@@ -34270,7 +34270,7 @@
       </p:sp>
       <p:pic>
         <p:nvPicPr>
-          <p:cNvPr id="24" name="Object 23" descr="public/generated/icons/2a001640-21f1-466e-b6f0-d227c353a823.png">    </p:cNvPr>
+          <p:cNvPr id="24" name="Object 23" descr="public/generated/icons/power-iaas.workspace.png">    </p:cNvPr>
           <p:cNvPicPr>
             <a:picLocks noChangeAspect="1"/>
           </p:cNvPicPr>
@@ -34326,7 +34326,7 @@
                 <a:ea typeface="Helvetica" pitchFamily="34" charset="-122"/>
                 <a:cs typeface="Helvetica" pitchFamily="34" charset="-120"/>
               </a:rPr>
-              <a:t>PORTFOLIO OPTIMIZATION</a:t>
+              <a:t>POWER VIRTUAL SERVER</a:t>
             </a:r>
             <a:endParaRPr lang="en-US" dirty="0"/>
           </a:p>
@@ -34359,7 +34359,7 @@
       </p:sp>
       <p:pic>
         <p:nvPicPr>
-          <p:cNvPr id="27" name="Object 26" descr="public/generated/icons/d666f360-66d1-11e9-85ef-a19427301a8c.png">    </p:cNvPr>
+          <p:cNvPr id="27" name="Object 26" descr="public/generated/icons/power-iaas.dedicated-host.png">    </p:cNvPr>
           <p:cNvPicPr>
             <a:picLocks noChangeAspect="1"/>
           </p:cNvPicPr>
@@ -34415,7 +34415,7 @@
                 <a:ea typeface="Helvetica" pitchFamily="34" charset="-122"/>
                 <a:cs typeface="Helvetica" pitchFamily="34" charset="-120"/>
               </a:rPr>
-              <a:t>PORTWORX ENTERPRISE</a:t>
+              <a:t>POWER VIRTUAL SERVER DEDICATED HOST</a:t>
             </a:r>
             <a:endParaRPr lang="en-US" dirty="0"/>
           </a:p>
@@ -34448,7 +34448,7 @@
       </p:sp>
       <p:pic>
         <p:nvPicPr>
-          <p:cNvPr id="30" name="Object 29" descr="public/generated/icons/7b2cdb0e-ad91-4fd7-97c0-5398874ec27b.png">    </p:cNvPr>
+          <p:cNvPr id="30" name="Object 29" descr="public/generated/icons/208072a0-7978-11ef-b369-0733120a414f.png">    </p:cNvPr>
           <p:cNvPicPr>
             <a:picLocks noChangeAspect="1"/>
           </p:cNvPicPr>
@@ -34504,7 +34504,7 @@
                 <a:ea typeface="Helvetica" pitchFamily="34" charset="-122"/>
                 <a:cs typeface="Helvetica" pitchFamily="34" charset="-120"/>
               </a:rPr>
-              <a:t>POWER I MIGRATE 23 SERVICES</a:t>
+              <a:t>POWER VIRTUAL SERVER DR AUTOMATION</a:t>
             </a:r>
             <a:endParaRPr lang="en-US" dirty="0"/>
           </a:p>
@@ -34537,7 +34537,7 @@
       </p:sp>
       <p:pic>
         <p:nvPicPr>
-          <p:cNvPr id="33" name="Object 32" descr="public/generated/icons/9828699d-dda7-4022-839b-c8e1e8b7d9d8.png">    </p:cNvPr>
+          <p:cNvPr id="33" name="Object 32" descr="public/generated/icons/power-iaas.image.png">    </p:cNvPr>
           <p:cNvPicPr>
             <a:picLocks noChangeAspect="1"/>
           </p:cNvPicPr>
@@ -34593,7 +34593,7 @@
                 <a:ea typeface="Helvetica" pitchFamily="34" charset="-122"/>
                 <a:cs typeface="Helvetica" pitchFamily="34" charset="-120"/>
               </a:rPr>
-              <a:t>POWER I MIGRATE WHILE ACTIVE SERVICES</a:t>
+              <a:t>POWER VIRTUAL SERVER IMAGE</a:t>
             </a:r>
             <a:endParaRPr lang="en-US" dirty="0"/>
           </a:p>
@@ -34626,7 +34626,7 @@
       </p:sp>
       <p:pic>
         <p:nvPicPr>
-          <p:cNvPr id="36" name="Object 35" descr="public/generated/icons/power-iaas.workspace.png">    </p:cNvPr>
+          <p:cNvPr id="36" name="Object 35" descr="public/generated/icons/power-iaas.network.png">    </p:cNvPr>
           <p:cNvPicPr>
             <a:picLocks noChangeAspect="1"/>
           </p:cNvPicPr>
@@ -34682,7 +34682,7 @@
                 <a:ea typeface="Helvetica" pitchFamily="34" charset="-122"/>
                 <a:cs typeface="Helvetica" pitchFamily="34" charset="-120"/>
               </a:rPr>
-              <a:t>POWER VIRTUAL SERVER</a:t>
+              <a:t>POWER VIRTUAL SERVER NETWORK</a:t>
             </a:r>
             <a:endParaRPr lang="en-US" dirty="0"/>
           </a:p>
@@ -34715,7 +34715,7 @@
       </p:sp>
       <p:pic>
         <p:nvPicPr>
-          <p:cNvPr id="39" name="Object 38" descr="public/generated/icons/power-iaas.dedicated-host.png">    </p:cNvPr>
+          <p:cNvPr id="39" name="Object 38" descr="public/generated/icons/power-iaas.network-address-group.png">    </p:cNvPr>
           <p:cNvPicPr>
             <a:picLocks noChangeAspect="1"/>
           </p:cNvPicPr>
@@ -34771,7 +34771,7 @@
                 <a:ea typeface="Helvetica" pitchFamily="34" charset="-122"/>
                 <a:cs typeface="Helvetica" pitchFamily="34" charset="-120"/>
               </a:rPr>
-              <a:t>POWER VIRTUAL SERVER DEDICATED HOST</a:t>
+              <a:t>POWER VIRTUAL SERVER NETWORK ADDRESS GROUP</a:t>
             </a:r>
             <a:endParaRPr lang="en-US" dirty="0"/>
           </a:p>
@@ -34804,7 +34804,7 @@
       </p:sp>
       <p:pic>
         <p:nvPicPr>
-          <p:cNvPr id="42" name="Object 41" descr="public/generated/icons/208072a0-7978-11ef-b369-0733120a414f.png">    </p:cNvPr>
+          <p:cNvPr id="42" name="Object 41" descr="public/generated/icons/power-iaas.network-interface.png">    </p:cNvPr>
           <p:cNvPicPr>
             <a:picLocks noChangeAspect="1"/>
           </p:cNvPicPr>
@@ -34860,7 +34860,7 @@
                 <a:ea typeface="Helvetica" pitchFamily="34" charset="-122"/>
                 <a:cs typeface="Helvetica" pitchFamily="34" charset="-120"/>
               </a:rPr>
-              <a:t>POWER VIRTUAL SERVER DR AUTOMATION</a:t>
+              <a:t>POWER VIRTUAL SERVER NETWORK INTERFACE</a:t>
             </a:r>
             <a:endParaRPr lang="en-US" dirty="0"/>
           </a:p>
@@ -34893,7 +34893,7 @@
       </p:sp>
       <p:pic>
         <p:nvPicPr>
-          <p:cNvPr id="45" name="Object 44" descr="public/generated/icons/power-iaas.image.png">    </p:cNvPr>
+          <p:cNvPr id="45" name="Object 44" descr="public/generated/icons/power-iaas.network-security-group.png">    </p:cNvPr>
           <p:cNvPicPr>
             <a:picLocks noChangeAspect="1"/>
           </p:cNvPicPr>
@@ -34949,7 +34949,7 @@
                 <a:ea typeface="Helvetica" pitchFamily="34" charset="-122"/>
                 <a:cs typeface="Helvetica" pitchFamily="34" charset="-120"/>
               </a:rPr>
-              <a:t>POWER VIRTUAL SERVER IMAGE</a:t>
+              <a:t>POWER VIRTUAL SERVER NETWORK SECURITY GROUP</a:t>
             </a:r>
             <a:endParaRPr lang="en-US" dirty="0"/>
           </a:p>
@@ -34982,7 +34982,7 @@
       </p:sp>
       <p:pic>
         <p:nvPicPr>
-          <p:cNvPr id="48" name="Object 47" descr="public/generated/icons/power-iaas.network.png">    </p:cNvPr>
+          <p:cNvPr id="48" name="Object 47" descr="public/generated/icons/power-iaas.shared-processor-pool.png">    </p:cNvPr>
           <p:cNvPicPr>
             <a:picLocks noChangeAspect="1"/>
           </p:cNvPicPr>
@@ -35038,7 +35038,7 @@
                 <a:ea typeface="Helvetica" pitchFamily="34" charset="-122"/>
                 <a:cs typeface="Helvetica" pitchFamily="34" charset="-120"/>
               </a:rPr>
-              <a:t>POWER VIRTUAL SERVER NETWORK</a:t>
+              <a:t>POWER VIRTUAL SERVER SHARED PROCESSOR POOL</a:t>
             </a:r>
             <a:endParaRPr lang="en-US" dirty="0"/>
           </a:p>
@@ -35071,7 +35071,7 @@
       </p:sp>
       <p:pic>
         <p:nvPicPr>
-          <p:cNvPr id="51" name="Object 50" descr="public/generated/icons/power-iaas.network-address-group.png">    </p:cNvPr>
+          <p:cNvPr id="51" name="Object 50" descr="public/generated/icons/power-iaas.snapshot.png">    </p:cNvPr>
           <p:cNvPicPr>
             <a:picLocks noChangeAspect="1"/>
           </p:cNvPicPr>
@@ -35127,7 +35127,7 @@
                 <a:ea typeface="Helvetica" pitchFamily="34" charset="-122"/>
                 <a:cs typeface="Helvetica" pitchFamily="34" charset="-120"/>
               </a:rPr>
-              <a:t>POWER VIRTUAL SERVER NETWORK ADDRESS GROUP</a:t>
+              <a:t>POWER VIRTUAL SERVER SNAPSHOT</a:t>
             </a:r>
             <a:endParaRPr lang="en-US" dirty="0"/>
           </a:p>
@@ -35160,7 +35160,7 @@
       </p:sp>
       <p:pic>
         <p:nvPicPr>
-          <p:cNvPr id="54" name="Object 53" descr="public/generated/icons/power-iaas.network-interface.png">    </p:cNvPr>
+          <p:cNvPr id="54" name="Object 53" descr="public/generated/icons/power-iaas.pvm-instance.png">    </p:cNvPr>
           <p:cNvPicPr>
             <a:picLocks noChangeAspect="1"/>
           </p:cNvPicPr>
@@ -35216,7 +35216,7 @@
                 <a:ea typeface="Helvetica" pitchFamily="34" charset="-122"/>
                 <a:cs typeface="Helvetica" pitchFamily="34" charset="-120"/>
               </a:rPr>
-              <a:t>POWER VIRTUAL SERVER NETWORK INTERFACE</a:t>
+              <a:t>POWER VIRTUAL SERVER VIRTUAL MACHINE</a:t>
             </a:r>
             <a:endParaRPr lang="en-US" dirty="0"/>
           </a:p>
@@ -35249,7 +35249,7 @@
       </p:sp>
       <p:pic>
         <p:nvPicPr>
-          <p:cNvPr id="57" name="Object 56" descr="public/generated/icons/power-iaas.network-security-group.png">    </p:cNvPr>
+          <p:cNvPr id="57" name="Object 56" descr="public/generated/icons/power-iaas.volume.png">    </p:cNvPr>
           <p:cNvPicPr>
             <a:picLocks noChangeAspect="1"/>
           </p:cNvPicPr>
@@ -35305,7 +35305,7 @@
                 <a:ea typeface="Helvetica" pitchFamily="34" charset="-122"/>
                 <a:cs typeface="Helvetica" pitchFamily="34" charset="-120"/>
               </a:rPr>
-              <a:t>POWER VIRTUAL SERVER NETWORK SECURITY GROUP</a:t>
+              <a:t>POWER VIRTUAL SERVER VOLUME</a:t>
             </a:r>
             <a:endParaRPr lang="en-US" dirty="0"/>
           </a:p>
@@ -35338,7 +35338,7 @@
       </p:sp>
       <p:pic>
         <p:nvPicPr>
-          <p:cNvPr id="60" name="Object 59" descr="public/generated/icons/power-iaas.shared-processor-pool.png">    </p:cNvPr>
+          <p:cNvPr id="60" name="Object 59" descr="public/generated/icons/b260dfd6-9b79-4377-be6d-146a5cb59be8.png">    </p:cNvPr>
           <p:cNvPicPr>
             <a:picLocks noChangeAspect="1"/>
           </p:cNvPicPr>
@@ -35394,7 +35394,7 @@
                 <a:ea typeface="Helvetica" pitchFamily="34" charset="-122"/>
                 <a:cs typeface="Helvetica" pitchFamily="34" charset="-120"/>
               </a:rPr>
-              <a:t>POWER VIRTUAL SERVER SHARED PROCESSOR POOL</a:t>
+              <a:t>POWERVS MIGRATION AS A SERVICE</a:t>
             </a:r>
             <a:endParaRPr lang="en-US" dirty="0"/>
           </a:p>
@@ -35427,7 +35427,7 @@
       </p:sp>
       <p:pic>
         <p:nvPicPr>
-          <p:cNvPr id="63" name="Object 62" descr="public/generated/icons/power-iaas.snapshot.png">    </p:cNvPr>
+          <p:cNvPr id="63" name="Object 62" descr="public/generated/icons/is.private-path-service-gateway.png">    </p:cNvPr>
           <p:cNvPicPr>
             <a:picLocks noChangeAspect="1"/>
           </p:cNvPicPr>
@@ -35483,7 +35483,7 @@
                 <a:ea typeface="Helvetica" pitchFamily="34" charset="-122"/>
                 <a:cs typeface="Helvetica" pitchFamily="34" charset="-120"/>
               </a:rPr>
-              <a:t>POWER VIRTUAL SERVER SNAPSHOT</a:t>
+              <a:t>PRIVATE PATH SERVICE FOR VPC</a:t>
             </a:r>
             <a:endParaRPr lang="en-US" dirty="0"/>
           </a:p>
@@ -35516,7 +35516,7 @@
       </p:sp>
       <p:pic>
         <p:nvPicPr>
-          <p:cNvPr id="66" name="Object 65" descr="public/generated/icons/power-iaas.pvm-instance.png">    </p:cNvPr>
+          <p:cNvPr id="66" name="Object 65" descr="public/generated/icons/91a901ac-fb7d-9b6e-eb25-14e75a20c4c2.png">    </p:cNvPr>
           <p:cNvPicPr>
             <a:picLocks noChangeAspect="1"/>
           </p:cNvPicPr>
@@ -35572,7 +35572,7 @@
                 <a:ea typeface="Helvetica" pitchFamily="34" charset="-122"/>
                 <a:cs typeface="Helvetica" pitchFamily="34" charset="-120"/>
               </a:rPr>
-              <a:t>POWER VIRTUAL SERVER VIRTUAL MACHINE</a:t>
+              <a:t>PROFESSIONAL SERVICES FOR GOVERNMENT(ONLY AVAILABLE IN US)</a:t>
             </a:r>
             <a:endParaRPr lang="en-US" dirty="0"/>
           </a:p>
@@ -35605,7 +35605,7 @@
       </p:sp>
       <p:pic>
         <p:nvPicPr>
-          <p:cNvPr id="69" name="Object 68" descr="public/generated/icons/power-iaas.volume.png">    </p:cNvPr>
+          <p:cNvPr id="69" name="Object 68" descr="public/generated/icons/7c03a06c-f1bb-46f8-84d8-9378432b2804.png">    </p:cNvPr>
           <p:cNvPicPr>
             <a:picLocks noChangeAspect="1"/>
           </p:cNvPicPr>
@@ -35661,7 +35661,7 @@
                 <a:ea typeface="Helvetica" pitchFamily="34" charset="-122"/>
                 <a:cs typeface="Helvetica" pitchFamily="34" charset="-120"/>
               </a:rPr>
-              <a:t>POWER VIRTUAL SERVER VOLUME</a:t>
+              <a:t>PROTECTIO DRAAS MANAGED SERVICE</a:t>
             </a:r>
             <a:endParaRPr lang="en-US" dirty="0"/>
           </a:p>
@@ -35694,7 +35694,7 @@
       </p:sp>
       <p:pic>
         <p:nvPicPr>
-          <p:cNvPr id="72" name="Object 71" descr="public/generated/icons/b260dfd6-9b79-4377-be6d-146a5cb59be8.png">    </p:cNvPr>
+          <p:cNvPr id="72" name="Object 71" descr="public/generated/icons/is.public-gateway.png">    </p:cNvPr>
           <p:cNvPicPr>
             <a:picLocks noChangeAspect="1"/>
           </p:cNvPicPr>
@@ -35750,7 +35750,7 @@
                 <a:ea typeface="Helvetica" pitchFamily="34" charset="-122"/>
                 <a:cs typeface="Helvetica" pitchFamily="34" charset="-120"/>
               </a:rPr>
-              <a:t>POWERVS MIGRATION AS A SERVICE</a:t>
+              <a:t>PUBLIC GATEWAY</a:t>
             </a:r>
             <a:endParaRPr lang="en-US" dirty="0"/>
           </a:p>
@@ -35783,7 +35783,7 @@
       </p:sp>
       <p:pic>
         <p:nvPicPr>
-          <p:cNvPr id="75" name="Object 74" descr="public/generated/icons/C43B3EB0-F56B-4753-92E4-093815814C1E.png">    </p:cNvPr>
+          <p:cNvPr id="75" name="Object 74" descr="public/generated/icons/aa11a8b2-381e-4c1c-a232-2148f65c005f.png">    </p:cNvPr>
           <p:cNvPicPr>
             <a:picLocks noChangeAspect="1"/>
           </p:cNvPicPr>
@@ -35839,7 +35839,7 @@
                 <a:ea typeface="Helvetica" pitchFamily="34" charset="-122"/>
                 <a:cs typeface="Helvetica" pitchFamily="34" charset="-120"/>
               </a:rPr>
-              <a:t>PREDICTIVE MARKET SCENARIOS</a:t>
+              <a:t>PVS ONE MANAGED SERVICE</a:t>
             </a:r>
             <a:endParaRPr lang="en-US" dirty="0"/>
           </a:p>
@@ -35872,7 +35872,7 @@
       </p:sp>
       <p:pic>
         <p:nvPicPr>
-          <p:cNvPr id="78" name="Object 77" descr="public/generated/icons/is.private-path-service-gateway.png">    </p:cNvPr>
+          <p:cNvPr id="78" name="Object 77" descr="public/generated/icons/3eb2d5a0-24ff-11eb-9437-631d7272fff5.png">    </p:cNvPr>
           <p:cNvPicPr>
             <a:picLocks noChangeAspect="1"/>
           </p:cNvPicPr>
@@ -35928,7 +35928,7 @@
                 <a:ea typeface="Helvetica" pitchFamily="34" charset="-122"/>
                 <a:cs typeface="Helvetica" pitchFamily="34" charset="-120"/>
               </a:rPr>
-              <a:t>PRIVATE PATH SERVICE FOR VPC</a:t>
+              <a:t>PX-BACKUP FOR KUBERNETES</a:t>
             </a:r>
             <a:endParaRPr lang="en-US" dirty="0"/>
           </a:p>
@@ -35961,7 +35961,7 @@
       </p:sp>
       <p:pic>
         <p:nvPicPr>
-          <p:cNvPr id="81" name="Object 80" descr="public/generated/icons/91a901ac-fb7d-9b6e-eb25-14e75a20c4c2.png">    </p:cNvPr>
+          <p:cNvPr id="81" name="Object 80" descr="public/generated/icons/b6049020-80f4-11eb-a0f7-e35ec9b4054f.png">    </p:cNvPr>
           <p:cNvPicPr>
             <a:picLocks noChangeAspect="1"/>
           </p:cNvPicPr>
@@ -36017,7 +36017,7 @@
                 <a:ea typeface="Helvetica" pitchFamily="34" charset="-122"/>
                 <a:cs typeface="Helvetica" pitchFamily="34" charset="-120"/>
               </a:rPr>
-              <a:t>PROFESSIONAL SERVICES FOR GOVERNMENT(ONLY AVAILABLE IN US)</a:t>
+              <a:t>QISKIT RUNTIME</a:t>
             </a:r>
             <a:endParaRPr lang="en-US" dirty="0"/>
           </a:p>
@@ -36050,7 +36050,7 @@
       </p:sp>
       <p:pic>
         <p:nvPicPr>
-          <p:cNvPr id="84" name="Object 83" descr="public/generated/icons/7c03a06c-f1bb-46f8-84d8-9378432b2804.png">    </p:cNvPr>
+          <p:cNvPr id="84" name="Object 83" descr="public/generated/icons/cf5f8ac0-98f7-11e9-a40c-5b3c4bf3cc6d.png">    </p:cNvPr>
           <p:cNvPicPr>
             <a:picLocks noChangeAspect="1"/>
           </p:cNvPicPr>
@@ -36106,7 +36106,7 @@
                 <a:ea typeface="Helvetica" pitchFamily="34" charset="-122"/>
                 <a:cs typeface="Helvetica" pitchFamily="34" charset="-120"/>
               </a:rPr>
-              <a:t>PROTECTIO DRAAS MANAGED SERVICE</a:t>
+              <a:t>RAXAK PROTECT</a:t>
             </a:r>
             <a:endParaRPr lang="en-US" dirty="0"/>
           </a:p>
@@ -36139,7 +36139,7 @@
       </p:sp>
       <p:pic>
         <p:nvPicPr>
-          <p:cNvPr id="87" name="Object 86" descr="public/generated/icons/is.public-gateway.png">    </p:cNvPr>
+          <p:cNvPr id="87" name="Object 86" descr="public/generated/icons/openshift.png">    </p:cNvPr>
           <p:cNvPicPr>
             <a:picLocks noChangeAspect="1"/>
           </p:cNvPicPr>
@@ -36195,7 +36195,7 @@
                 <a:ea typeface="Helvetica" pitchFamily="34" charset="-122"/>
                 <a:cs typeface="Helvetica" pitchFamily="34" charset="-120"/>
               </a:rPr>
-              <a:t>PUBLIC GATEWAY</a:t>
+              <a:t>RED HAT OPENSHIFT ON IBM CLOUD</a:t>
             </a:r>
             <a:endParaRPr lang="en-US" dirty="0"/>
           </a:p>
@@ -36228,7 +36228,7 @@
       </p:sp>
       <p:pic>
         <p:nvPicPr>
-          <p:cNvPr id="90" name="Object 89" descr="public/generated/icons/aa11a8b2-381e-4c1c-a232-2148f65c005f.png">    </p:cNvPr>
+          <p:cNvPr id="90" name="Object 89" descr="public/generated/icons/bd517bf0-88ba-11ea-a52e-91aeb42a4019.png">    </p:cNvPr>
           <p:cNvPicPr>
             <a:picLocks noChangeAspect="1"/>
           </p:cNvPicPr>
@@ -36284,7 +36284,7 @@
                 <a:ea typeface="Helvetica" pitchFamily="34" charset="-122"/>
                 <a:cs typeface="Helvetica" pitchFamily="34" charset="-120"/>
               </a:rPr>
-              <a:t>PVS ONE MANAGED SERVICE</a:t>
+              <a:t>SATELLITE</a:t>
             </a:r>
             <a:endParaRPr lang="en-US" dirty="0"/>
           </a:p>
@@ -36317,7 +36317,7 @@
       </p:sp>
       <p:pic>
         <p:nvPicPr>
-          <p:cNvPr id="93" name="Object 92" descr="public/generated/icons/3eb2d5a0-24ff-11eb-9437-631d7272fff5.png">    </p:cNvPr>
+          <p:cNvPr id="93" name="Object 92" descr="public/generated/icons/schematics.png">    </p:cNvPr>
           <p:cNvPicPr>
             <a:picLocks noChangeAspect="1"/>
           </p:cNvPicPr>
@@ -36373,7 +36373,7 @@
                 <a:ea typeface="Helvetica" pitchFamily="34" charset="-122"/>
                 <a:cs typeface="Helvetica" pitchFamily="34" charset="-120"/>
               </a:rPr>
-              <a:t>PX-BACKUP FOR KUBERNETES</a:t>
+              <a:t>SCHEMATICS</a:t>
             </a:r>
             <a:endParaRPr lang="en-US" dirty="0"/>
           </a:p>
@@ -36406,7 +36406,7 @@
       </p:sp>
       <p:pic>
         <p:nvPicPr>
-          <p:cNvPr id="96" name="Object 95" descr="public/generated/icons/b6049020-80f4-11eb-a0f7-e35ec9b4054f.png">    </p:cNvPr>
+          <p:cNvPr id="96" name="Object 95" descr="public/generated/icons/14.png">    </p:cNvPr>
           <p:cNvPicPr>
             <a:picLocks noChangeAspect="1"/>
           </p:cNvPicPr>
@@ -36462,7 +36462,7 @@
                 <a:ea typeface="Helvetica" pitchFamily="34" charset="-122"/>
                 <a:cs typeface="Helvetica" pitchFamily="34" charset="-120"/>
               </a:rPr>
-              <a:t>QISKIT RUNTIME</a:t>
+              <a:t>SECONDARY SUBNETS</a:t>
             </a:r>
             <a:endParaRPr lang="en-US" dirty="0"/>
           </a:p>
@@ -36495,7 +36495,7 @@
       </p:sp>
       <p:pic>
         <p:nvPicPr>
-          <p:cNvPr id="99" name="Object 98" descr="public/generated/icons/cf5f8ac0-98f7-11e9-a40c-5b3c4bf3cc6d.png">    </p:cNvPr>
+          <p:cNvPr id="99" name="Object 98" descr="public/generated/icons/ebc0cdb0-af2a-11ea-98c7-29e5db822649.png">    </p:cNvPr>
           <p:cNvPicPr>
             <a:picLocks noChangeAspect="1"/>
           </p:cNvPicPr>
@@ -36551,7 +36551,7 @@
                 <a:ea typeface="Helvetica" pitchFamily="34" charset="-122"/>
                 <a:cs typeface="Helvetica" pitchFamily="34" charset="-120"/>
               </a:rPr>
-              <a:t>RAXAK PROTECT</a:t>
+              <a:t>SECRETS MANAGER</a:t>
             </a:r>
             <a:endParaRPr lang="en-US" dirty="0"/>
           </a:p>
@@ -36584,7 +36584,7 @@
       </p:sp>
       <p:pic>
         <p:nvPicPr>
-          <p:cNvPr id="102" name="Object 101" descr="public/generated/icons/467ab6d8-48dd-485a-adf9-30d5107537a1.png">    </p:cNvPr>
+          <p:cNvPr id="102" name="Object 101" descr="public/generated/icons/IBM_SecureGateway.png">    </p:cNvPr>
           <p:cNvPicPr>
             <a:picLocks noChangeAspect="1"/>
           </p:cNvPicPr>
@@ -36640,7 +36640,7 @@
                 <a:ea typeface="Helvetica" pitchFamily="34" charset="-122"/>
                 <a:cs typeface="Helvetica" pitchFamily="34" charset="-120"/>
               </a:rPr>
-              <a:t>REAL-TIME PAYMENTS</a:t>
+              <a:t>SECURE GATEWAY</a:t>
             </a:r>
             <a:endParaRPr lang="en-US" dirty="0"/>
           </a:p>
@@ -36673,7 +36673,7 @@
       </p:sp>
       <p:pic>
         <p:nvPicPr>
-          <p:cNvPr id="105" name="Object 104" descr="public/generated/icons/openshift.png">    </p:cNvPr>
+          <p:cNvPr id="105" name="Object 104" descr="public/generated/icons/compliance.png">    </p:cNvPr>
           <p:cNvPicPr>
             <a:picLocks noChangeAspect="1"/>
           </p:cNvPicPr>
@@ -36729,7 +36729,7 @@
                 <a:ea typeface="Helvetica" pitchFamily="34" charset="-122"/>
                 <a:cs typeface="Helvetica" pitchFamily="34" charset="-120"/>
               </a:rPr>
-              <a:t>RED HAT OPENSHIFT ON IBM CLOUD</a:t>
+              <a:t>SECURITY AND COMPLIANCE CENTER</a:t>
             </a:r>
             <a:endParaRPr lang="en-US" dirty="0"/>
           </a:p>
@@ -36762,7 +36762,7 @@
       </p:sp>
       <p:pic>
         <p:nvPicPr>
-          <p:cNvPr id="108" name="Object 107" descr="public/generated/icons/bd517bf0-88ba-11ea-a52e-91aeb42a4019.png">    </p:cNvPr>
+          <p:cNvPr id="108" name="Object 107" descr="public/generated/icons/e831e900-82d6-11ec-95c5-c12c5a5d9687.png">    </p:cNvPr>
           <p:cNvPicPr>
             <a:picLocks noChangeAspect="1"/>
           </p:cNvPicPr>
@@ -36818,7 +36818,7 @@
                 <a:ea typeface="Helvetica" pitchFamily="34" charset="-122"/>
                 <a:cs typeface="Helvetica" pitchFamily="34" charset="-120"/>
               </a:rPr>
-              <a:t>SATELLITE</a:t>
+              <a:t>SECURITY AND COMPLIANCE CENTER WORKLOAD PROTECTION</a:t>
             </a:r>
             <a:endParaRPr lang="en-US" dirty="0"/>
           </a:p>
@@ -36884,7 +36884,7 @@
       </p:sp>
       <p:pic>
         <p:nvPicPr>
-          <p:cNvPr id="3" name="Object 2" descr="public/generated/icons/schematics.png">    </p:cNvPr>
+          <p:cNvPr id="3" name="Object 2" descr="public/generated/icons/is.security-group.png">    </p:cNvPr>
           <p:cNvPicPr>
             <a:picLocks noChangeAspect="1"/>
           </p:cNvPicPr>
@@ -36940,7 +36940,7 @@
                 <a:ea typeface="Helvetica" pitchFamily="34" charset="-122"/>
                 <a:cs typeface="Helvetica" pitchFamily="34" charset="-120"/>
               </a:rPr>
-              <a:t>SCHEMATICS</a:t>
+              <a:t>SECURITY GROUP FOR VPC</a:t>
             </a:r>
             <a:endParaRPr lang="en-US" dirty="0"/>
           </a:p>
@@ -36973,7 +36973,7 @@
       </p:sp>
       <p:pic>
         <p:nvPicPr>
-          <p:cNvPr id="6" name="Object 5" descr="public/generated/icons/14.png">    </p:cNvPr>
+          <p:cNvPr id="6" name="Object 5" descr="public/generated/icons/cf329950-0a3e-11e8-922e-f1366c6e1c83-vcstrial_dr.png">    </p:cNvPr>
           <p:cNvPicPr>
             <a:picLocks noChangeAspect="1"/>
           </p:cNvPicPr>
@@ -37029,7 +37029,7 @@
                 <a:ea typeface="Helvetica" pitchFamily="34" charset="-122"/>
                 <a:cs typeface="Helvetica" pitchFamily="34" charset="-120"/>
               </a:rPr>
-              <a:t>SECONDARY SUBNETS</a:t>
+              <a:t>SINGLE-NODE TRIAL FOR DATA PROTECTION AND DISASTER RECOVERY</a:t>
             </a:r>
             <a:endParaRPr lang="en-US" dirty="0"/>
           </a:p>
@@ -37062,7 +37062,7 @@
       </p:sp>
       <p:pic>
         <p:nvPicPr>
-          <p:cNvPr id="9" name="Object 8" descr="public/generated/icons/ebc0cdb0-af2a-11ea-98c7-29e5db822649.png">    </p:cNvPr>
+          <p:cNvPr id="9" name="Object 8" descr="public/generated/icons/cf329950-0a3e-11e8-922e-f1366c6e1c83-vcstrial.png">    </p:cNvPr>
           <p:cNvPicPr>
             <a:picLocks noChangeAspect="1"/>
           </p:cNvPicPr>
@@ -37118,7 +37118,7 @@
                 <a:ea typeface="Helvetica" pitchFamily="34" charset="-122"/>
                 <a:cs typeface="Helvetica" pitchFamily="34" charset="-120"/>
               </a:rPr>
-              <a:t>SECRETS MANAGER</a:t>
+              <a:t>SINGLE-NODE TRIAL FOR MIGRATION AND APP MODERNIZATION</a:t>
             </a:r>
             <a:endParaRPr lang="en-US" dirty="0"/>
           </a:p>
@@ -37151,7 +37151,7 @@
       </p:sp>
       <p:pic>
         <p:nvPicPr>
-          <p:cNvPr id="12" name="Object 11" descr="public/generated/icons/IBM_SecureGateway.png">    </p:cNvPr>
+          <p:cNvPr id="12" name="Object 11" descr="public/generated/icons/fdf77820-deed-11e9-911d-5f09017358ff.png">    </p:cNvPr>
           <p:cNvPicPr>
             <a:picLocks noChangeAspect="1"/>
           </p:cNvPicPr>
@@ -37207,7 +37207,7 @@
                 <a:ea typeface="Helvetica" pitchFamily="34" charset="-122"/>
                 <a:cs typeface="Helvetica" pitchFamily="34" charset="-120"/>
               </a:rPr>
-              <a:t>SECURE GATEWAY</a:t>
+              <a:t>SKYTAP ON IBM CLOUD</a:t>
             </a:r>
             <a:endParaRPr lang="en-US" dirty="0"/>
           </a:p>
@@ -37240,7 +37240,7 @@
       </p:sp>
       <p:pic>
         <p:nvPicPr>
-          <p:cNvPr id="15" name="Object 14" descr="public/generated/icons/compliance.png">    </p:cNvPr>
+          <p:cNvPr id="15" name="Object 14" descr="public/generated/icons/cf329950-0a3e-11e8-922e-f1366c6e1c83-spplus.png">    </p:cNvPr>
           <p:cNvPicPr>
             <a:picLocks noChangeAspect="1"/>
           </p:cNvPicPr>
@@ -37296,7 +37296,7 @@
                 <a:ea typeface="Helvetica" pitchFamily="34" charset="-122"/>
                 <a:cs typeface="Helvetica" pitchFamily="34" charset="-120"/>
               </a:rPr>
-              <a:t>SECURITY AND COMPLIANCE CENTER</a:t>
+              <a:t>SPECTRUM PROTECT PLUS</a:t>
             </a:r>
             <a:endParaRPr lang="en-US" dirty="0"/>
           </a:p>
@@ -37329,7 +37329,7 @@
       </p:sp>
       <p:pic>
         <p:nvPicPr>
-          <p:cNvPr id="18" name="Object 17" descr="public/generated/icons/e831e900-82d6-11ec-95c5-c12c5a5d9687.png">    </p:cNvPr>
+          <p:cNvPr id="18" name="Object 17" descr="public/generated/icons/bc35fb8c-bc5b-431b-859e-3861771d5843.png">    </p:cNvPr>
           <p:cNvPicPr>
             <a:picLocks noChangeAspect="1"/>
           </p:cNvPicPr>
@@ -37385,7 +37385,7 @@
                 <a:ea typeface="Helvetica" pitchFamily="34" charset="-122"/>
                 <a:cs typeface="Helvetica" pitchFamily="34" charset="-120"/>
               </a:rPr>
-              <a:t>SECURITY AND COMPLIANCE CENTER WORKLOAD PROTECTION</a:t>
+              <a:t>SPEECH TO TEXT</a:t>
             </a:r>
             <a:endParaRPr lang="en-US" dirty="0"/>
           </a:p>
@@ -37418,7 +37418,7 @@
       </p:sp>
       <p:pic>
         <p:nvPicPr>
-          <p:cNvPr id="21" name="Object 20" descr="public/generated/icons/is.security-group.png">    </p:cNvPr>
+          <p:cNvPr id="21" name="Object 20" descr="public/generated/icons/556153d0-5ad0-11e9-b7f9-41319ef22125.png">    </p:cNvPr>
           <p:cNvPicPr>
             <a:picLocks noChangeAspect="1"/>
           </p:cNvPicPr>
@@ -37474,7 +37474,7 @@
                 <a:ea typeface="Helvetica" pitchFamily="34" charset="-122"/>
                 <a:cs typeface="Helvetica" pitchFamily="34" charset="-120"/>
               </a:rPr>
-              <a:t>SECURITY GROUP FOR VPC</a:t>
+              <a:t>SSH KEY FOR VPC</a:t>
             </a:r>
             <a:endParaRPr lang="en-US" dirty="0"/>
           </a:p>
@@ -37507,7 +37507,7 @@
       </p:sp>
       <p:pic>
         <p:nvPicPr>
-          <p:cNvPr id="24" name="Object 23" descr="public/generated/icons/ABB08BA3-D14D-4BD9-A5E6-EF67C52D35C0.png">    </p:cNvPr>
+          <p:cNvPr id="24" name="Object 23" descr="public/generated/icons/19.png">    </p:cNvPr>
           <p:cNvPicPr>
             <a:picLocks noChangeAspect="1"/>
           </p:cNvPicPr>
@@ -37563,7 +37563,7 @@
                 <a:ea typeface="Helvetica" pitchFamily="34" charset="-122"/>
                 <a:cs typeface="Helvetica" pitchFamily="34" charset="-120"/>
               </a:rPr>
-              <a:t>SIMULATED HISTORICAL INSTRUMENT ANALYTICS</a:t>
+              <a:t>SSL CERTIFICATES</a:t>
             </a:r>
             <a:endParaRPr lang="en-US" dirty="0"/>
           </a:p>
@@ -37596,7 +37596,7 @@
       </p:sp>
       <p:pic>
         <p:nvPicPr>
-          <p:cNvPr id="27" name="Object 26" descr="public/generated/icons/A888FFEA-E976-4F83-B7EC-288233BF62E6.png">    </p:cNvPr>
+          <p:cNvPr id="27" name="Object 26" descr="public/generated/icons/5acdbc42-8965-48f9-8a3c-1c728b6ed2c4.png">    </p:cNvPr>
           <p:cNvPicPr>
             <a:picLocks noChangeAspect="1"/>
           </p:cNvPicPr>
@@ -37652,7 +37652,7 @@
                 <a:ea typeface="Helvetica" pitchFamily="34" charset="-122"/>
                 <a:cs typeface="Helvetica" pitchFamily="34" charset="-120"/>
               </a:rPr>
-              <a:t>SIMULATED INSTRUMENT ANALYTICS</a:t>
+              <a:t>STREAMING ANALYTICS</a:t>
             </a:r>
             <a:endParaRPr lang="en-US" dirty="0"/>
           </a:p>
@@ -37685,7 +37685,7 @@
       </p:sp>
       <p:pic>
         <p:nvPicPr>
-          <p:cNvPr id="30" name="Object 29" descr="public/generated/icons/cf329950-0a3e-11e8-922e-f1366c6e1c83-vcstrial_dr.png">    </p:cNvPr>
+          <p:cNvPr id="30" name="Object 29" descr="public/generated/icons/is.subnet.png">    </p:cNvPr>
           <p:cNvPicPr>
             <a:picLocks noChangeAspect="1"/>
           </p:cNvPicPr>
@@ -37741,7 +37741,7 @@
                 <a:ea typeface="Helvetica" pitchFamily="34" charset="-122"/>
                 <a:cs typeface="Helvetica" pitchFamily="34" charset="-120"/>
               </a:rPr>
-              <a:t>SINGLE-NODE TRIAL FOR DATA PROTECTION AND DISASTER RECOVERY</a:t>
+              <a:t>SUBNET</a:t>
             </a:r>
             <a:endParaRPr lang="en-US" dirty="0"/>
           </a:p>
@@ -37774,7 +37774,7 @@
       </p:sp>
       <p:pic>
         <p:nvPicPr>
-          <p:cNvPr id="33" name="Object 32" descr="public/generated/icons/cf329950-0a3e-11e8-922e-f1366c6e1c83-vcstrial.png">    </p:cNvPr>
+          <p:cNvPr id="33" name="Object 32" descr="public/generated/icons/282c1d79-9176-4597-9cff-941a8d6cfd4c.png">    </p:cNvPr>
           <p:cNvPicPr>
             <a:picLocks noChangeAspect="1"/>
           </p:cNvPicPr>
@@ -37830,7 +37830,7 @@
                 <a:ea typeface="Helvetica" pitchFamily="34" charset="-122"/>
                 <a:cs typeface="Helvetica" pitchFamily="34" charset="-120"/>
               </a:rPr>
-              <a:t>SINGLE-NODE TRIAL FOR MIGRATION AND APP MODERNIZATION</a:t>
+              <a:t>TEXT TO SPEECH</a:t>
             </a:r>
             <a:endParaRPr lang="en-US" dirty="0"/>
           </a:p>
@@ -37863,7 +37863,7 @@
       </p:sp>
       <p:pic>
         <p:nvPicPr>
-          <p:cNvPr id="36" name="Object 35" descr="public/generated/icons/fdf77820-deed-11e9-911d-5f09017358ff.png">    </p:cNvPr>
+          <p:cNvPr id="36" name="Object 35" descr="public/generated/icons/e512e5f0-64fb-11e8-9c23-830c05b8b729.png">    </p:cNvPr>
           <p:cNvPicPr>
             <a:picLocks noChangeAspect="1"/>
           </p:cNvPicPr>
@@ -37919,7 +37919,7 @@
                 <a:ea typeface="Helvetica" pitchFamily="34" charset="-122"/>
                 <a:cs typeface="Helvetica" pitchFamily="34" charset="-120"/>
               </a:rPr>
-              <a:t>SKYTAP ON IBM CLOUD</a:t>
+              <a:t>TOOLCHAIN</a:t>
             </a:r>
             <a:endParaRPr lang="en-US" dirty="0"/>
           </a:p>
@@ -37952,7 +37952,7 @@
       </p:sp>
       <p:pic>
         <p:nvPicPr>
-          <p:cNvPr id="39" name="Object 38" descr="public/generated/icons/cf329950-0a3e-11e8-922e-f1366c6e1c83-spplus.png">    </p:cNvPr>
+          <p:cNvPr id="39" name="Object 38" descr="public/generated/icons/f38a4da0-c353-11e9-83b6-a36a57a97a06.png">    </p:cNvPr>
           <p:cNvPicPr>
             <a:picLocks noChangeAspect="1"/>
           </p:cNvPicPr>
@@ -38008,7 +38008,7 @@
                 <a:ea typeface="Helvetica" pitchFamily="34" charset="-122"/>
                 <a:cs typeface="Helvetica" pitchFamily="34" charset="-120"/>
               </a:rPr>
-              <a:t>SPECTRUM PROTECT PLUS</a:t>
+              <a:t>TRANSIT GATEWAY</a:t>
             </a:r>
             <a:endParaRPr lang="en-US" dirty="0"/>
           </a:p>
@@ -38041,7 +38041,7 @@
       </p:sp>
       <p:pic>
         <p:nvPicPr>
-          <p:cNvPr id="42" name="Object 41" descr="public/generated/icons/bc35fb8c-bc5b-431b-859e-3861771d5843.png">    </p:cNvPr>
+          <p:cNvPr id="42" name="Object 41" descr="public/generated/icons/vmware.directorsite.png">    </p:cNvPr>
           <p:cNvPicPr>
             <a:picLocks noChangeAspect="1"/>
           </p:cNvPicPr>
@@ -38097,7 +38097,7 @@
                 <a:ea typeface="Helvetica" pitchFamily="34" charset="-122"/>
                 <a:cs typeface="Helvetica" pitchFamily="34" charset="-120"/>
               </a:rPr>
-              <a:t>SPEECH TO TEXT</a:t>
+              <a:t>VCF AS A SERVICE - CLOUD DIRECTOR SITE</a:t>
             </a:r>
             <a:endParaRPr lang="en-US" dirty="0"/>
           </a:p>
@@ -38130,7 +38130,7 @@
       </p:sp>
       <p:pic>
         <p:nvPicPr>
-          <p:cNvPr id="45" name="Object 44" descr="public/generated/icons/556153d0-5ad0-11e9-b7f9-41319ef22125.png">    </p:cNvPr>
+          <p:cNvPr id="45" name="Object 44" descr="public/generated/icons/vmware.vdc.png">    </p:cNvPr>
           <p:cNvPicPr>
             <a:picLocks noChangeAspect="1"/>
           </p:cNvPicPr>
@@ -38186,7 +38186,7 @@
                 <a:ea typeface="Helvetica" pitchFamily="34" charset="-122"/>
                 <a:cs typeface="Helvetica" pitchFamily="34" charset="-120"/>
               </a:rPr>
-              <a:t>SSH KEY FOR VPC</a:t>
+              <a:t>VCF AS A SERVICE - VIRTUAL DATA CENTER</a:t>
             </a:r>
             <a:endParaRPr lang="en-US" dirty="0"/>
           </a:p>
@@ -38219,7 +38219,7 @@
       </p:sp>
       <p:pic>
         <p:nvPicPr>
-          <p:cNvPr id="48" name="Object 47" descr="public/generated/icons/19.png">    </p:cNvPr>
+          <p:cNvPr id="48" name="Object 47" descr="public/generated/icons/cf329950-0a3e-11e8-922e-f1366c6e1c83-veeam.png">    </p:cNvPr>
           <p:cNvPicPr>
             <a:picLocks noChangeAspect="1"/>
           </p:cNvPicPr>
@@ -38275,7 +38275,7 @@
                 <a:ea typeface="Helvetica" pitchFamily="34" charset="-122"/>
                 <a:cs typeface="Helvetica" pitchFamily="34" charset="-120"/>
               </a:rPr>
-              <a:t>SSL CERTIFICATES</a:t>
+              <a:t>VEEAM</a:t>
             </a:r>
             <a:endParaRPr lang="en-US" dirty="0"/>
           </a:p>
@@ -38308,7 +38308,7 @@
       </p:sp>
       <p:pic>
         <p:nvPicPr>
-          <p:cNvPr id="51" name="Object 50" descr="public/generated/icons/5acdbc42-8965-48f9-8a3c-1c728b6ed2c4.png">    </p:cNvPr>
+          <p:cNvPr id="51" name="Object 50" descr="public/generated/icons/66644e80-f35a-11ee-923f-2fe367129617.png">    </p:cNvPr>
           <p:cNvPicPr>
             <a:picLocks noChangeAspect="1"/>
           </p:cNvPicPr>
@@ -38364,7 +38364,7 @@
                 <a:ea typeface="Helvetica" pitchFamily="34" charset="-122"/>
                 <a:cs typeface="Helvetica" pitchFamily="34" charset="-120"/>
               </a:rPr>
-              <a:t>STREAMING ANALYTICS</a:t>
+              <a:t>VERIFY</a:t>
             </a:r>
             <a:endParaRPr lang="en-US" dirty="0"/>
           </a:p>
@@ -38397,7 +38397,7 @@
       </p:sp>
       <p:pic>
         <p:nvPicPr>
-          <p:cNvPr id="54" name="Object 53" descr="public/generated/icons/is.subnet.png">    </p:cNvPr>
+          <p:cNvPr id="54" name="Object 53" descr="public/generated/icons/is.virtual-network-interface.png">    </p:cNvPr>
           <p:cNvPicPr>
             <a:picLocks noChangeAspect="1"/>
           </p:cNvPicPr>
@@ -38453,7 +38453,7 @@
                 <a:ea typeface="Helvetica" pitchFamily="34" charset="-122"/>
                 <a:cs typeface="Helvetica" pitchFamily="34" charset="-120"/>
               </a:rPr>
-              <a:t>SUBNET</a:t>
+              <a:t>VIRTUAL NETWORK INTERFACE</a:t>
             </a:r>
             <a:endParaRPr lang="en-US" dirty="0"/>
           </a:p>
@@ -38486,7 +38486,7 @@
       </p:sp>
       <p:pic>
         <p:nvPicPr>
-          <p:cNvPr id="57" name="Object 56" descr="public/generated/icons/282c1d79-9176-4597-9cff-941a8d6cfd4c.png">    </p:cNvPr>
+          <p:cNvPr id="57" name="Object 56" descr="public/generated/icons/is.vpc.png">    </p:cNvPr>
           <p:cNvPicPr>
             <a:picLocks noChangeAspect="1"/>
           </p:cNvPicPr>
@@ -38542,7 +38542,7 @@
                 <a:ea typeface="Helvetica" pitchFamily="34" charset="-122"/>
                 <a:cs typeface="Helvetica" pitchFamily="34" charset="-120"/>
               </a:rPr>
-              <a:t>TEXT TO SPEECH</a:t>
+              <a:t>VIRTUAL PRIVATE CLOUD</a:t>
             </a:r>
             <a:endParaRPr lang="en-US" dirty="0"/>
           </a:p>
@@ -38575,7 +38575,7 @@
       </p:sp>
       <p:pic>
         <p:nvPicPr>
-          <p:cNvPr id="60" name="Object 59" descr="public/generated/icons/e512e5f0-64fb-11e8-9c23-830c05b8b729.png">    </p:cNvPr>
+          <p:cNvPr id="60" name="Object 59" descr="public/generated/icons/is.endpoint-gateway.png">    </p:cNvPr>
           <p:cNvPicPr>
             <a:picLocks noChangeAspect="1"/>
           </p:cNvPicPr>
@@ -38631,7 +38631,7 @@
                 <a:ea typeface="Helvetica" pitchFamily="34" charset="-122"/>
                 <a:cs typeface="Helvetica" pitchFamily="34" charset="-120"/>
               </a:rPr>
-              <a:t>TOOLCHAIN</a:t>
+              <a:t>VIRTUAL PRIVATE ENDPOINT FOR VPC</a:t>
             </a:r>
             <a:endParaRPr lang="en-US" dirty="0"/>
           </a:p>
@@ -38664,7 +38664,7 @@
       </p:sp>
       <p:pic>
         <p:nvPicPr>
-          <p:cNvPr id="63" name="Object 62" descr="public/generated/icons/f38a4da0-c353-11e9-83b6-a36a57a97a06.png">    </p:cNvPr>
+          <p:cNvPr id="63" name="Object 62" descr="public/generated/icons/887073fb-ba5b-9407-d2ac-938308d890e4.png">    </p:cNvPr>
           <p:cNvPicPr>
             <a:picLocks noChangeAspect="1"/>
           </p:cNvPicPr>
@@ -38720,7 +38720,7 @@
                 <a:ea typeface="Helvetica" pitchFamily="34" charset="-122"/>
                 <a:cs typeface="Helvetica" pitchFamily="34" charset="-120"/>
               </a:rPr>
-              <a:t>TRANSIT GATEWAY</a:t>
+              <a:t>VIRTUAL ROUTER APPLIANCE</a:t>
             </a:r>
             <a:endParaRPr lang="en-US" dirty="0"/>
           </a:p>
@@ -38753,7 +38753,7 @@
       </p:sp>
       <p:pic>
         <p:nvPicPr>
-          <p:cNvPr id="66" name="Object 65" descr="public/generated/icons/vmware.directorsite.png">    </p:cNvPr>
+          <p:cNvPr id="66" name="Object 65" descr="public/generated/icons/virtual-server-group.png">    </p:cNvPr>
           <p:cNvPicPr>
             <a:picLocks noChangeAspect="1"/>
           </p:cNvPicPr>
@@ -38809,7 +38809,7 @@
                 <a:ea typeface="Helvetica" pitchFamily="34" charset="-122"/>
                 <a:cs typeface="Helvetica" pitchFamily="34" charset="-120"/>
               </a:rPr>
-              <a:t>VCF AS A SERVICE - CLOUD DIRECTOR SITE</a:t>
+              <a:t>VIRTUAL SERVER FOR CLASSIC</a:t>
             </a:r>
             <a:endParaRPr lang="en-US" dirty="0"/>
           </a:p>
@@ -38842,7 +38842,7 @@
       </p:sp>
       <p:pic>
         <p:nvPicPr>
-          <p:cNvPr id="69" name="Object 68" descr="public/generated/icons/vmware.vdc.png">    </p:cNvPr>
+          <p:cNvPr id="69" name="Object 68" descr="public/generated/icons/is.instance.png">    </p:cNvPr>
           <p:cNvPicPr>
             <a:picLocks noChangeAspect="1"/>
           </p:cNvPicPr>
@@ -38898,7 +38898,7 @@
                 <a:ea typeface="Helvetica" pitchFamily="34" charset="-122"/>
                 <a:cs typeface="Helvetica" pitchFamily="34" charset="-120"/>
               </a:rPr>
-              <a:t>VCF AS A SERVICE - VIRTUAL DATA CENTER</a:t>
+              <a:t>VIRTUAL SERVER FOR VPC</a:t>
             </a:r>
             <a:endParaRPr lang="en-US" dirty="0"/>
           </a:p>
@@ -38931,7 +38931,7 @@
       </p:sp>
       <p:pic>
         <p:nvPicPr>
-          <p:cNvPr id="72" name="Object 71" descr="public/generated/icons/cf329950-0a3e-11e8-922e-f1366c6e1c83-veeam.png">    </p:cNvPr>
+          <p:cNvPr id="72" name="Object 71" descr="public/generated/icons/15.png">    </p:cNvPr>
           <p:cNvPicPr>
             <a:picLocks noChangeAspect="1"/>
           </p:cNvPicPr>
@@ -38987,7 +38987,7 @@
                 <a:ea typeface="Helvetica" pitchFamily="34" charset="-122"/>
                 <a:cs typeface="Helvetica" pitchFamily="34" charset="-120"/>
               </a:rPr>
-              <a:t>VEEAM</a:t>
+              <a:t>VLAN</a:t>
             </a:r>
             <a:endParaRPr lang="en-US" dirty="0"/>
           </a:p>
@@ -39020,7 +39020,7 @@
       </p:sp>
       <p:pic>
         <p:nvPicPr>
-          <p:cNvPr id="75" name="Object 74" descr="public/generated/icons/66644e80-f35a-11ee-923f-2fe367129617.png">    </p:cNvPr>
+          <p:cNvPr id="75" name="Object 74" descr="public/generated/icons/09f5a6ea-185e-4625-8281-9e8629360a4f.png">    </p:cNvPr>
           <p:cNvPicPr>
             <a:picLocks noChangeAspect="1"/>
           </p:cNvPicPr>
@@ -39076,7 +39076,7 @@
                 <a:ea typeface="Helvetica" pitchFamily="34" charset="-122"/>
                 <a:cs typeface="Helvetica" pitchFamily="34" charset="-120"/>
               </a:rPr>
-              <a:t>VERIFY</a:t>
+              <a:t>VMWARE CLOUD MIGRATION SERVICES</a:t>
             </a:r>
             <a:endParaRPr lang="en-US" dirty="0"/>
           </a:p>
@@ -39109,7 +39109,7 @@
       </p:sp>
       <p:pic>
         <p:nvPicPr>
-          <p:cNvPr id="78" name="Object 77" descr="public/generated/icons/is.virtual-network-interface.png">    </p:cNvPr>
+          <p:cNvPr id="78" name="Object 77" descr="public/generated/icons/cf329950-0a3e-11e8-922e-f1366c6e1c83.png">    </p:cNvPr>
           <p:cNvPicPr>
             <a:picLocks noChangeAspect="1"/>
           </p:cNvPicPr>
@@ -39165,7 +39165,7 @@
                 <a:ea typeface="Helvetica" pitchFamily="34" charset="-122"/>
                 <a:cs typeface="Helvetica" pitchFamily="34" charset="-120"/>
               </a:rPr>
-              <a:t>VIRTUAL NETWORK INTERFACE</a:t>
+              <a:t>VMWARE SOLUTIONS</a:t>
             </a:r>
             <a:endParaRPr lang="en-US" dirty="0"/>
           </a:p>
@@ -39198,7 +39198,7 @@
       </p:sp>
       <p:pic>
         <p:nvPicPr>
-          <p:cNvPr id="81" name="Object 80" descr="public/generated/icons/is.vpc.png">    </p:cNvPr>
+          <p:cNvPr id="81" name="Object 80" descr="public/generated/icons/cf329950-0a3e-11e8-922e-f1366c6e1c83-vcenterserver.png">    </p:cNvPr>
           <p:cNvPicPr>
             <a:picLocks noChangeAspect="1"/>
           </p:cNvPicPr>
@@ -39254,7 +39254,7 @@
                 <a:ea typeface="Helvetica" pitchFamily="34" charset="-122"/>
                 <a:cs typeface="Helvetica" pitchFamily="34" charset="-120"/>
               </a:rPr>
-              <a:t>VIRTUAL PRIVATE CLOUD</a:t>
+              <a:t>VMWARE VCENTER SERVER</a:t>
             </a:r>
             <a:endParaRPr lang="en-US" dirty="0"/>
           </a:p>
@@ -39287,7 +39287,7 @@
       </p:sp>
       <p:pic>
         <p:nvPicPr>
-          <p:cNvPr id="84" name="Object 83" descr="public/generated/icons/is.endpoint-gateway.png">    </p:cNvPr>
+          <p:cNvPr id="84" name="Object 83" descr="public/generated/icons/cf329950-0a3e-11e8-922e-f1366c6e1c83-vsphere.png">    </p:cNvPr>
           <p:cNvPicPr>
             <a:picLocks noChangeAspect="1"/>
           </p:cNvPicPr>
@@ -39343,7 +39343,7 @@
                 <a:ea typeface="Helvetica" pitchFamily="34" charset="-122"/>
                 <a:cs typeface="Helvetica" pitchFamily="34" charset="-120"/>
               </a:rPr>
-              <a:t>VIRTUAL PRIVATE ENDPOINT FOR VPC</a:t>
+              <a:t>VMWARE VSPHERE</a:t>
             </a:r>
             <a:endParaRPr lang="en-US" dirty="0"/>
           </a:p>
@@ -39376,7 +39376,7 @@
       </p:sp>
       <p:pic>
         <p:nvPicPr>
-          <p:cNvPr id="87" name="Object 86" descr="public/generated/icons/887073fb-ba5b-9407-d2ac-938308d890e4.png">    </p:cNvPr>
+          <p:cNvPr id="87" name="Object 86" descr="public/generated/icons/b6670b68-84ca-4a04-b8e8-c567dfeeddde.png">    </p:cNvPr>
           <p:cNvPicPr>
             <a:picLocks noChangeAspect="1"/>
           </p:cNvPicPr>
@@ -39432,7 +39432,7 @@
                 <a:ea typeface="Helvetica" pitchFamily="34" charset="-122"/>
                 <a:cs typeface="Helvetica" pitchFamily="34" charset="-120"/>
               </a:rPr>
-              <a:t>VIRTUAL ROUTER APPLIANCE</a:t>
+              <a:t>VPC COAAS (VPC COST OPTIMIZATION AS A SERVICE)</a:t>
             </a:r>
             <a:endParaRPr lang="en-US" dirty="0"/>
           </a:p>
@@ -39465,7 +39465,7 @@
       </p:sp>
       <p:pic>
         <p:nvPicPr>
-          <p:cNvPr id="90" name="Object 89" descr="public/generated/icons/virtual-server-group.png">    </p:cNvPr>
+          <p:cNvPr id="90" name="Object 89" descr="public/generated/icons/757254b0-a9a0-11ea-9ff6-17a22eb543c5.png">    </p:cNvPr>
           <p:cNvPicPr>
             <a:picLocks noChangeAspect="1"/>
           </p:cNvPicPr>
@@ -39521,7 +39521,7 @@
                 <a:ea typeface="Helvetica" pitchFamily="34" charset="-122"/>
                 <a:cs typeface="Helvetica" pitchFamily="34" charset="-120"/>
               </a:rPr>
-              <a:t>VIRTUAL SERVER FOR CLASSIC</a:t>
+              <a:t>VPC+ CLOUD MIGRATION</a:t>
             </a:r>
             <a:endParaRPr lang="en-US" dirty="0"/>
           </a:p>
@@ -39554,7 +39554,7 @@
       </p:sp>
       <p:pic>
         <p:nvPicPr>
-          <p:cNvPr id="93" name="Object 92" descr="public/generated/icons/is.instance.png">    </p:cNvPr>
+          <p:cNvPr id="93" name="Object 92" descr="public/generated/icons/fd1e0240-dd95-11eb-b4a0-db1c9221b8a2.png">    </p:cNvPr>
           <p:cNvPicPr>
             <a:picLocks noChangeAspect="1"/>
           </p:cNvPicPr>
@@ -39610,7 +39610,7 @@
                 <a:ea typeface="Helvetica" pitchFamily="34" charset="-122"/>
                 <a:cs typeface="Helvetica" pitchFamily="34" charset="-120"/>
               </a:rPr>
-              <a:t>VIRTUAL SERVER FOR VPC</a:t>
+              <a:t>VPC+ DRAAS (VPC+ DISASTER RECOVERY AS A SERVICE)</a:t>
             </a:r>
             <a:endParaRPr lang="en-US" dirty="0"/>
           </a:p>
@@ -39643,7 +39643,7 @@
       </p:sp>
       <p:pic>
         <p:nvPicPr>
-          <p:cNvPr id="96" name="Object 95" descr="public/generated/icons/15.png">    </p:cNvPr>
+          <p:cNvPr id="96" name="Object 95" descr="public/generated/icons/is.vpn.png">    </p:cNvPr>
           <p:cNvPicPr>
             <a:picLocks noChangeAspect="1"/>
           </p:cNvPicPr>
@@ -39699,7 +39699,7 @@
                 <a:ea typeface="Helvetica" pitchFamily="34" charset="-122"/>
                 <a:cs typeface="Helvetica" pitchFamily="34" charset="-120"/>
               </a:rPr>
-              <a:t>VLAN</a:t>
+              <a:t>VPN FOR VPC</a:t>
             </a:r>
             <a:endParaRPr lang="en-US" dirty="0"/>
           </a:p>
@@ -39732,7 +39732,7 @@
       </p:sp>
       <p:pic>
         <p:nvPicPr>
-          <p:cNvPr id="99" name="Object 98" descr="public/generated/icons/09f5a6ea-185e-4625-8281-9e8629360a4f.png">    </p:cNvPr>
+          <p:cNvPr id="99" name="Object 98" descr="public/generated/icons/cf329950-0a3e-11e8-922e-f1366c6e1c83-vrops.png">    </p:cNvPr>
           <p:cNvPicPr>
             <a:picLocks noChangeAspect="1"/>
           </p:cNvPicPr>
@@ -39788,7 +39788,7 @@
                 <a:ea typeface="Helvetica" pitchFamily="34" charset="-122"/>
                 <a:cs typeface="Helvetica" pitchFamily="34" charset="-120"/>
               </a:rPr>
-              <a:t>VMWARE CLOUD MIGRATION SERVICES</a:t>
+              <a:t>VREALIZE OPERATIONS AND LOG INSIGHT</a:t>
             </a:r>
             <a:endParaRPr lang="en-US" dirty="0"/>
           </a:p>
@@ -39821,7 +39821,7 @@
       </p:sp>
       <p:pic>
         <p:nvPicPr>
-          <p:cNvPr id="102" name="Object 101" descr="public/generated/icons/cf329950-0a3e-11e8-922e-f1366c6e1c83.png">    </p:cNvPr>
+          <p:cNvPr id="102" name="Object 101" descr="public/generated/icons/76b7bf22-b443-47db-b3db-066ba2988f47.png">    </p:cNvPr>
           <p:cNvPicPr>
             <a:picLocks noChangeAspect="1"/>
           </p:cNvPicPr>
@@ -39877,7 +39877,7 @@
                 <a:ea typeface="Helvetica" pitchFamily="34" charset="-122"/>
                 <a:cs typeface="Helvetica" pitchFamily="34" charset="-120"/>
               </a:rPr>
-              <a:t>VMWARE SOLUTIONS</a:t>
+              <a:t>WATSON DISCOVERY</a:t>
             </a:r>
             <a:endParaRPr lang="en-US" dirty="0"/>
           </a:p>
@@ -39910,7 +39910,7 @@
       </p:sp>
       <p:pic>
         <p:nvPicPr>
-          <p:cNvPr id="105" name="Object 104" descr="public/generated/icons/cf329950-0a3e-11e8-922e-f1366c6e1c83-vcenterserver.png">    </p:cNvPr>
+          <p:cNvPr id="105" name="Object 104" descr="public/generated/icons/12fbfff4-12c7-ccd0-80e6-603e8607468a.png">    </p:cNvPr>
           <p:cNvPicPr>
             <a:picLocks noChangeAspect="1"/>
           </p:cNvPicPr>
@@ -39966,7 +39966,7 @@
                 <a:ea typeface="Helvetica" pitchFamily="34" charset="-122"/>
                 <a:cs typeface="Helvetica" pitchFamily="34" charset="-120"/>
               </a:rPr>
-              <a:t>VMWARE VCENTER SERVER</a:t>
+              <a:t>WATSONX</a:t>
             </a:r>
             <a:endParaRPr lang="en-US" dirty="0"/>
           </a:p>
@@ -39999,7 +39999,7 @@
       </p:sp>
       <p:pic>
         <p:nvPicPr>
-          <p:cNvPr id="108" name="Object 107" descr="public/generated/icons/cf329950-0a3e-11e8-922e-f1366c6e1c83-vsphere.png">    </p:cNvPr>
+          <p:cNvPr id="108" name="Object 107" descr="public/generated/icons/7045626d-55e3-4418-be11-683a26dbc1e5.png">    </p:cNvPr>
           <p:cNvPicPr>
             <a:picLocks noChangeAspect="1"/>
           </p:cNvPicPr>
@@ -40055,7 +40055,7 @@
                 <a:ea typeface="Helvetica" pitchFamily="34" charset="-122"/>
                 <a:cs typeface="Helvetica" pitchFamily="34" charset="-120"/>
               </a:rPr>
-              <a:t>VMWARE VSPHERE</a:t>
+              <a:t>WATSONX ASSISTANT</a:t>
             </a:r>
             <a:endParaRPr lang="en-US" dirty="0"/>
           </a:p>
@@ -40121,7 +40121,7 @@
       </p:sp>
       <p:pic>
         <p:nvPicPr>
-          <p:cNvPr id="3" name="Object 2" descr="public/generated/icons/b6670b68-84ca-4a04-b8e8-c567dfeeddde.png">    </p:cNvPr>
+          <p:cNvPr id="3" name="Object 2" descr="public/generated/icons/11530fa0-1776-11ee-93f6-1d4066e6a409.png">    </p:cNvPr>
           <p:cNvPicPr>
             <a:picLocks noChangeAspect="1"/>
           </p:cNvPicPr>
@@ -40177,7 +40177,7 @@
                 <a:ea typeface="Helvetica" pitchFamily="34" charset="-122"/>
                 <a:cs typeface="Helvetica" pitchFamily="34" charset="-120"/>
               </a:rPr>
-              <a:t>VPC COAAS (VPC COST OPTIMIZATION AS A SERVICE)</a:t>
+              <a:t>WATSONX CODE ASSISTANT</a:t>
             </a:r>
             <a:endParaRPr lang="en-US" dirty="0"/>
           </a:p>
@@ -40210,7 +40210,7 @@
       </p:sp>
       <p:pic>
         <p:nvPicPr>
-          <p:cNvPr id="6" name="Object 5" descr="public/generated/icons/757254b0-a9a0-11ea-9ff6-17a22eb543c5.png">    </p:cNvPr>
+          <p:cNvPr id="6" name="Object 5" descr="public/generated/icons/b69f78c0-11d7-11ef-9bdf-c92eb40d1838.png">    </p:cNvPr>
           <p:cNvPicPr>
             <a:picLocks noChangeAspect="1"/>
           </p:cNvPicPr>
@@ -40266,7 +40266,7 @@
                 <a:ea typeface="Helvetica" pitchFamily="34" charset="-122"/>
                 <a:cs typeface="Helvetica" pitchFamily="34" charset="-120"/>
               </a:rPr>
-              <a:t>VPC+ CLOUD MIGRATION</a:t>
+              <a:t>WATSONX ORCHESTRATE</a:t>
             </a:r>
             <a:endParaRPr lang="en-US" dirty="0"/>
           </a:p>
@@ -40299,7 +40299,7 @@
       </p:sp>
       <p:pic>
         <p:nvPicPr>
-          <p:cNvPr id="9" name="Object 8" descr="public/generated/icons/fd1e0240-dd95-11eb-b4a0-db1c9221b8a2.png">    </p:cNvPr>
+          <p:cNvPr id="9" name="Object 8" descr="public/generated/icons/51c53b72-918f-4869-b834-2d99eb28422a.png">    </p:cNvPr>
           <p:cNvPicPr>
             <a:picLocks noChangeAspect="1"/>
           </p:cNvPicPr>
@@ -40355,7 +40355,7 @@
                 <a:ea typeface="Helvetica" pitchFamily="34" charset="-122"/>
                 <a:cs typeface="Helvetica" pitchFamily="34" charset="-120"/>
               </a:rPr>
-              <a:t>VPC+ DRAAS (VPC+ DISASTER RECOVERY AS A SERVICE)</a:t>
+              <a:t>WATSONX.AI RUNTIME</a:t>
             </a:r>
             <a:endParaRPr lang="en-US" dirty="0"/>
           </a:p>
@@ -40388,7 +40388,7 @@
       </p:sp>
       <p:pic>
         <p:nvPicPr>
-          <p:cNvPr id="12" name="Object 11" descr="public/generated/icons/is.vpn.png">    </p:cNvPr>
+          <p:cNvPr id="12" name="Object 11" descr="public/generated/icons/39ba9d4c-b1c5-4cc3-a163-38b580121e01.png">    </p:cNvPr>
           <p:cNvPicPr>
             <a:picLocks noChangeAspect="1"/>
           </p:cNvPicPr>
@@ -40444,7 +40444,7 @@
                 <a:ea typeface="Helvetica" pitchFamily="34" charset="-122"/>
                 <a:cs typeface="Helvetica" pitchFamily="34" charset="-120"/>
               </a:rPr>
-              <a:t>VPN FOR VPC</a:t>
+              <a:t>WATSONX.AI STUDIO</a:t>
             </a:r>
             <a:endParaRPr lang="en-US" dirty="0"/>
           </a:p>
@@ -40477,7 +40477,7 @@
       </p:sp>
       <p:pic>
         <p:nvPicPr>
-          <p:cNvPr id="15" name="Object 14" descr="public/generated/icons/cf329950-0a3e-11e8-922e-f1366c6e1c83-vrops.png">    </p:cNvPr>
+          <p:cNvPr id="15" name="Object 14" descr="public/generated/icons/43834340-4a6d-11ed-97d2-959039ad2a2e.png">    </p:cNvPr>
           <p:cNvPicPr>
             <a:picLocks noChangeAspect="1"/>
           </p:cNvPicPr>
@@ -40533,7 +40533,7 @@
                 <a:ea typeface="Helvetica" pitchFamily="34" charset="-122"/>
                 <a:cs typeface="Helvetica" pitchFamily="34" charset="-120"/>
               </a:rPr>
-              <a:t>VREALIZE OPERATIONS AND LOG INSIGHT</a:t>
+              <a:t>WATSONX.DATA</a:t>
             </a:r>
             <a:endParaRPr lang="en-US" dirty="0"/>
           </a:p>
@@ -40566,7 +40566,7 @@
       </p:sp>
       <p:pic>
         <p:nvPicPr>
-          <p:cNvPr id="18" name="Object 17" descr="public/generated/icons/76b7bf22-b443-47db-b3db-066ba2988f47.png">    </p:cNvPr>
+          <p:cNvPr id="18" name="Object 17" descr="public/generated/icons/2ad019f3-0fd6-4c25-966d-f3952481a870.png">    </p:cNvPr>
           <p:cNvPicPr>
             <a:picLocks noChangeAspect="1"/>
           </p:cNvPicPr>
@@ -40622,7 +40622,7 @@
                 <a:ea typeface="Helvetica" pitchFamily="34" charset="-122"/>
                 <a:cs typeface="Helvetica" pitchFamily="34" charset="-120"/>
               </a:rPr>
-              <a:t>WATSON DISCOVERY</a:t>
+              <a:t>WATSONX.GOVERNANCE</a:t>
             </a:r>
             <a:endParaRPr lang="en-US" dirty="0"/>
           </a:p>
@@ -40655,7 +40655,7 @@
       </p:sp>
       <p:pic>
         <p:nvPicPr>
-          <p:cNvPr id="21" name="Object 20" descr="public/generated/icons/12fbfff4-12c7-ccd0-80e6-603e8607468a.png">    </p:cNvPr>
+          <p:cNvPr id="21" name="Object 20" descr="public/generated/icons/cf329950-0a3e-11e8-922e-f1366c6e1c83-zerto.png">    </p:cNvPr>
           <p:cNvPicPr>
             <a:picLocks noChangeAspect="1"/>
           </p:cNvPicPr>
@@ -40686,718 +40686,6 @@
         <p:spPr>
           <a:xfrm>
             <a:off x="5669280" y="777240"/>
-            <a:ext cx="640080" cy="274320"/>
-          </a:xfrm>
-          <a:prstGeom prst="rect">
-            <a:avLst/>
-          </a:prstGeom>
-          <a:noFill/>
-        </p:spPr>
-        <p:txBody>
-          <a:bodyPr wrap="square" rtlCol="0" anchor="t" bIns="0" lIns="0" rIns="0" tIns="0">
-            <a:spAutoFit/>
-          </a:bodyPr>
-          <a:lstStyle/>
-          <a:p>
-            <a:pPr algn="ctr">
-              <a:buNone/>
-            </a:pPr>
-            <a:r>
-              <a:rPr lang="en-US" b="1" sz="600" dirty="0" smtClean="0">
-                <a:solidFill>
-                  <a:srgbClr val="646365"/>
-                </a:solidFill>
-                <a:latin typeface="Helvetica" pitchFamily="34" charset="0"/>
-                <a:ea typeface="Helvetica" pitchFamily="34" charset="-122"/>
-                <a:cs typeface="Helvetica" pitchFamily="34" charset="-120"/>
-              </a:rPr>
-              <a:t>WATSONX</a:t>
-            </a:r>
-            <a:endParaRPr lang="en-US" dirty="0"/>
-          </a:p>
-        </p:txBody>
-      </p:sp>
-      <p:sp>
-        <p:nvSpPr>
-          <p:cNvPr id="23" name="Object 22"/>
-          <p:cNvSpPr/>
-          <p:nvPr/>
-        </p:nvSpPr>
-        <p:spPr>
-          <a:xfrm>
-            <a:off x="6675120" y="274320"/>
-            <a:ext cx="457200" cy="457200"/>
-          </a:xfrm>
-          <a:prstGeom prst="ellipse">
-            <a:avLst/>
-          </a:prstGeom>
-          <a:solidFill>
-            <a:srgbClr val="FFFFFF"/>
-          </a:solidFill>
-          <a:ln w="19050">
-            <a:solidFill>
-              <a:srgbClr val="646365"/>
-            </a:solidFill>
-            <a:prstDash val="solid"/>
-          </a:ln>
-        </p:spPr>
-      </p:sp>
-      <p:pic>
-        <p:nvPicPr>
-          <p:cNvPr id="24" name="Object 23" descr="public/generated/icons/7045626d-55e3-4418-be11-683a26dbc1e5.png">    </p:cNvPr>
-          <p:cNvPicPr>
-            <a:picLocks noChangeAspect="1"/>
-          </p:cNvPicPr>
-          <p:nvPr/>
-        </p:nvPicPr>
-        <p:blipFill>
-          <a:blip r:embed="rId8"/>
-          <a:stretch>
-            <a:fillRect/>
-          </a:stretch>
-        </p:blipFill>
-        <p:spPr>
-          <a:xfrm>
-            <a:off x="6766560" y="365760"/>
-            <a:ext cx="274320" cy="274320"/>
-          </a:xfrm>
-          <a:prstGeom prst="rect">
-            <a:avLst/>
-          </a:prstGeom>
-        </p:spPr>
-      </p:pic>
-      <p:sp>
-        <p:nvSpPr>
-          <p:cNvPr id="25" name="Object 24"/>
-          <p:cNvSpPr/>
-          <p:nvPr/>
-        </p:nvSpPr>
-        <p:spPr>
-          <a:xfrm>
-            <a:off x="6583680" y="777240"/>
-            <a:ext cx="640080" cy="274320"/>
-          </a:xfrm>
-          <a:prstGeom prst="rect">
-            <a:avLst/>
-          </a:prstGeom>
-          <a:noFill/>
-        </p:spPr>
-        <p:txBody>
-          <a:bodyPr wrap="square" rtlCol="0" anchor="t" bIns="0" lIns="0" rIns="0" tIns="0">
-            <a:spAutoFit/>
-          </a:bodyPr>
-          <a:lstStyle/>
-          <a:p>
-            <a:pPr algn="ctr">
-              <a:buNone/>
-            </a:pPr>
-            <a:r>
-              <a:rPr lang="en-US" b="1" sz="600" dirty="0" smtClean="0">
-                <a:solidFill>
-                  <a:srgbClr val="646365"/>
-                </a:solidFill>
-                <a:latin typeface="Helvetica" pitchFamily="34" charset="0"/>
-                <a:ea typeface="Helvetica" pitchFamily="34" charset="-122"/>
-                <a:cs typeface="Helvetica" pitchFamily="34" charset="-120"/>
-              </a:rPr>
-              <a:t>WATSONX ASSISTANT</a:t>
-            </a:r>
-            <a:endParaRPr lang="en-US" dirty="0"/>
-          </a:p>
-        </p:txBody>
-      </p:sp>
-      <p:sp>
-        <p:nvSpPr>
-          <p:cNvPr id="26" name="Object 25"/>
-          <p:cNvSpPr/>
-          <p:nvPr/>
-        </p:nvSpPr>
-        <p:spPr>
-          <a:xfrm>
-            <a:off x="7589520" y="274320"/>
-            <a:ext cx="457200" cy="457200"/>
-          </a:xfrm>
-          <a:prstGeom prst="ellipse">
-            <a:avLst/>
-          </a:prstGeom>
-          <a:solidFill>
-            <a:srgbClr val="FFFFFF"/>
-          </a:solidFill>
-          <a:ln w="19050">
-            <a:solidFill>
-              <a:srgbClr val="646365"/>
-            </a:solidFill>
-            <a:prstDash val="solid"/>
-          </a:ln>
-        </p:spPr>
-      </p:sp>
-      <p:pic>
-        <p:nvPicPr>
-          <p:cNvPr id="27" name="Object 26" descr="public/generated/icons/11530fa0-1776-11ee-93f6-1d4066e6a409.png">    </p:cNvPr>
-          <p:cNvPicPr>
-            <a:picLocks noChangeAspect="1"/>
-          </p:cNvPicPr>
-          <p:nvPr/>
-        </p:nvPicPr>
-        <p:blipFill>
-          <a:blip r:embed="rId9"/>
-          <a:stretch>
-            <a:fillRect/>
-          </a:stretch>
-        </p:blipFill>
-        <p:spPr>
-          <a:xfrm>
-            <a:off x="7680960" y="365760"/>
-            <a:ext cx="274320" cy="274320"/>
-          </a:xfrm>
-          <a:prstGeom prst="rect">
-            <a:avLst/>
-          </a:prstGeom>
-        </p:spPr>
-      </p:pic>
-      <p:sp>
-        <p:nvSpPr>
-          <p:cNvPr id="28" name="Object 27"/>
-          <p:cNvSpPr/>
-          <p:nvPr/>
-        </p:nvSpPr>
-        <p:spPr>
-          <a:xfrm>
-            <a:off x="7498080" y="777240"/>
-            <a:ext cx="640080" cy="274320"/>
-          </a:xfrm>
-          <a:prstGeom prst="rect">
-            <a:avLst/>
-          </a:prstGeom>
-          <a:noFill/>
-        </p:spPr>
-        <p:txBody>
-          <a:bodyPr wrap="square" rtlCol="0" anchor="t" bIns="0" lIns="0" rIns="0" tIns="0">
-            <a:spAutoFit/>
-          </a:bodyPr>
-          <a:lstStyle/>
-          <a:p>
-            <a:pPr algn="ctr">
-              <a:buNone/>
-            </a:pPr>
-            <a:r>
-              <a:rPr lang="en-US" b="1" sz="600" dirty="0" smtClean="0">
-                <a:solidFill>
-                  <a:srgbClr val="646365"/>
-                </a:solidFill>
-                <a:latin typeface="Helvetica" pitchFamily="34" charset="0"/>
-                <a:ea typeface="Helvetica" pitchFamily="34" charset="-122"/>
-                <a:cs typeface="Helvetica" pitchFamily="34" charset="-120"/>
-              </a:rPr>
-              <a:t>WATSONX CODE ASSISTANT</a:t>
-            </a:r>
-            <a:endParaRPr lang="en-US" dirty="0"/>
-          </a:p>
-        </p:txBody>
-      </p:sp>
-      <p:sp>
-        <p:nvSpPr>
-          <p:cNvPr id="29" name="Object 28"/>
-          <p:cNvSpPr/>
-          <p:nvPr/>
-        </p:nvSpPr>
-        <p:spPr>
-          <a:xfrm>
-            <a:off x="274320" y="1371600"/>
-            <a:ext cx="457200" cy="457200"/>
-          </a:xfrm>
-          <a:prstGeom prst="ellipse">
-            <a:avLst/>
-          </a:prstGeom>
-          <a:solidFill>
-            <a:srgbClr val="FFFFFF"/>
-          </a:solidFill>
-          <a:ln w="19050">
-            <a:solidFill>
-              <a:srgbClr val="646365"/>
-            </a:solidFill>
-            <a:prstDash val="solid"/>
-          </a:ln>
-        </p:spPr>
-      </p:sp>
-      <p:pic>
-        <p:nvPicPr>
-          <p:cNvPr id="30" name="Object 29" descr="public/generated/icons/b69f78c0-11d7-11ef-9bdf-c92eb40d1838.png">    </p:cNvPr>
-          <p:cNvPicPr>
-            <a:picLocks noChangeAspect="1"/>
-          </p:cNvPicPr>
-          <p:nvPr/>
-        </p:nvPicPr>
-        <p:blipFill>
-          <a:blip r:embed="rId10"/>
-          <a:stretch>
-            <a:fillRect/>
-          </a:stretch>
-        </p:blipFill>
-        <p:spPr>
-          <a:xfrm>
-            <a:off x="365760" y="1463040"/>
-            <a:ext cx="274320" cy="274320"/>
-          </a:xfrm>
-          <a:prstGeom prst="rect">
-            <a:avLst/>
-          </a:prstGeom>
-        </p:spPr>
-      </p:pic>
-      <p:sp>
-        <p:nvSpPr>
-          <p:cNvPr id="31" name="Object 30"/>
-          <p:cNvSpPr/>
-          <p:nvPr/>
-        </p:nvSpPr>
-        <p:spPr>
-          <a:xfrm>
-            <a:off x="182880" y="1874520"/>
-            <a:ext cx="640080" cy="274320"/>
-          </a:xfrm>
-          <a:prstGeom prst="rect">
-            <a:avLst/>
-          </a:prstGeom>
-          <a:noFill/>
-        </p:spPr>
-        <p:txBody>
-          <a:bodyPr wrap="square" rtlCol="0" anchor="t" bIns="0" lIns="0" rIns="0" tIns="0">
-            <a:spAutoFit/>
-          </a:bodyPr>
-          <a:lstStyle/>
-          <a:p>
-            <a:pPr algn="ctr">
-              <a:buNone/>
-            </a:pPr>
-            <a:r>
-              <a:rPr lang="en-US" b="1" sz="600" dirty="0" smtClean="0">
-                <a:solidFill>
-                  <a:srgbClr val="646365"/>
-                </a:solidFill>
-                <a:latin typeface="Helvetica" pitchFamily="34" charset="0"/>
-                <a:ea typeface="Helvetica" pitchFamily="34" charset="-122"/>
-                <a:cs typeface="Helvetica" pitchFamily="34" charset="-120"/>
-              </a:rPr>
-              <a:t>WATSONX ORCHESTRATE</a:t>
-            </a:r>
-            <a:endParaRPr lang="en-US" dirty="0"/>
-          </a:p>
-        </p:txBody>
-      </p:sp>
-      <p:sp>
-        <p:nvSpPr>
-          <p:cNvPr id="32" name="Object 31"/>
-          <p:cNvSpPr/>
-          <p:nvPr/>
-        </p:nvSpPr>
-        <p:spPr>
-          <a:xfrm>
-            <a:off x="1188720" y="1371600"/>
-            <a:ext cx="457200" cy="457200"/>
-          </a:xfrm>
-          <a:prstGeom prst="ellipse">
-            <a:avLst/>
-          </a:prstGeom>
-          <a:solidFill>
-            <a:srgbClr val="FFFFFF"/>
-          </a:solidFill>
-          <a:ln w="19050">
-            <a:solidFill>
-              <a:srgbClr val="646365"/>
-            </a:solidFill>
-            <a:prstDash val="solid"/>
-          </a:ln>
-        </p:spPr>
-      </p:sp>
-      <p:pic>
-        <p:nvPicPr>
-          <p:cNvPr id="33" name="Object 32" descr="public/generated/icons/51c53b72-918f-4869-b834-2d99eb28422a.png">    </p:cNvPr>
-          <p:cNvPicPr>
-            <a:picLocks noChangeAspect="1"/>
-          </p:cNvPicPr>
-          <p:nvPr/>
-        </p:nvPicPr>
-        <p:blipFill>
-          <a:blip r:embed="rId11"/>
-          <a:stretch>
-            <a:fillRect/>
-          </a:stretch>
-        </p:blipFill>
-        <p:spPr>
-          <a:xfrm>
-            <a:off x="1280160" y="1463040"/>
-            <a:ext cx="274320" cy="274320"/>
-          </a:xfrm>
-          <a:prstGeom prst="rect">
-            <a:avLst/>
-          </a:prstGeom>
-        </p:spPr>
-      </p:pic>
-      <p:sp>
-        <p:nvSpPr>
-          <p:cNvPr id="34" name="Object 33"/>
-          <p:cNvSpPr/>
-          <p:nvPr/>
-        </p:nvSpPr>
-        <p:spPr>
-          <a:xfrm>
-            <a:off x="1097280" y="1874520"/>
-            <a:ext cx="640080" cy="274320"/>
-          </a:xfrm>
-          <a:prstGeom prst="rect">
-            <a:avLst/>
-          </a:prstGeom>
-          <a:noFill/>
-        </p:spPr>
-        <p:txBody>
-          <a:bodyPr wrap="square" rtlCol="0" anchor="t" bIns="0" lIns="0" rIns="0" tIns="0">
-            <a:spAutoFit/>
-          </a:bodyPr>
-          <a:lstStyle/>
-          <a:p>
-            <a:pPr algn="ctr">
-              <a:buNone/>
-            </a:pPr>
-            <a:r>
-              <a:rPr lang="en-US" b="1" sz="600" dirty="0" smtClean="0">
-                <a:solidFill>
-                  <a:srgbClr val="646365"/>
-                </a:solidFill>
-                <a:latin typeface="Helvetica" pitchFamily="34" charset="0"/>
-                <a:ea typeface="Helvetica" pitchFamily="34" charset="-122"/>
-                <a:cs typeface="Helvetica" pitchFamily="34" charset="-120"/>
-              </a:rPr>
-              <a:t>WATSONX.AI RUNTIME</a:t>
-            </a:r>
-            <a:endParaRPr lang="en-US" dirty="0"/>
-          </a:p>
-        </p:txBody>
-      </p:sp>
-      <p:sp>
-        <p:nvSpPr>
-          <p:cNvPr id="35" name="Object 34"/>
-          <p:cNvSpPr/>
-          <p:nvPr/>
-        </p:nvSpPr>
-        <p:spPr>
-          <a:xfrm>
-            <a:off x="2103120" y="1371600"/>
-            <a:ext cx="457200" cy="457200"/>
-          </a:xfrm>
-          <a:prstGeom prst="ellipse">
-            <a:avLst/>
-          </a:prstGeom>
-          <a:solidFill>
-            <a:srgbClr val="FFFFFF"/>
-          </a:solidFill>
-          <a:ln w="19050">
-            <a:solidFill>
-              <a:srgbClr val="646365"/>
-            </a:solidFill>
-            <a:prstDash val="solid"/>
-          </a:ln>
-        </p:spPr>
-      </p:sp>
-      <p:pic>
-        <p:nvPicPr>
-          <p:cNvPr id="36" name="Object 35" descr="public/generated/icons/39ba9d4c-b1c5-4cc3-a163-38b580121e01.png">    </p:cNvPr>
-          <p:cNvPicPr>
-            <a:picLocks noChangeAspect="1"/>
-          </p:cNvPicPr>
-          <p:nvPr/>
-        </p:nvPicPr>
-        <p:blipFill>
-          <a:blip r:embed="rId12"/>
-          <a:stretch>
-            <a:fillRect/>
-          </a:stretch>
-        </p:blipFill>
-        <p:spPr>
-          <a:xfrm>
-            <a:off x="2194560" y="1463040"/>
-            <a:ext cx="274320" cy="274320"/>
-          </a:xfrm>
-          <a:prstGeom prst="rect">
-            <a:avLst/>
-          </a:prstGeom>
-        </p:spPr>
-      </p:pic>
-      <p:sp>
-        <p:nvSpPr>
-          <p:cNvPr id="37" name="Object 36"/>
-          <p:cNvSpPr/>
-          <p:nvPr/>
-        </p:nvSpPr>
-        <p:spPr>
-          <a:xfrm>
-            <a:off x="2011680" y="1874520"/>
-            <a:ext cx="640080" cy="274320"/>
-          </a:xfrm>
-          <a:prstGeom prst="rect">
-            <a:avLst/>
-          </a:prstGeom>
-          <a:noFill/>
-        </p:spPr>
-        <p:txBody>
-          <a:bodyPr wrap="square" rtlCol="0" anchor="t" bIns="0" lIns="0" rIns="0" tIns="0">
-            <a:spAutoFit/>
-          </a:bodyPr>
-          <a:lstStyle/>
-          <a:p>
-            <a:pPr algn="ctr">
-              <a:buNone/>
-            </a:pPr>
-            <a:r>
-              <a:rPr lang="en-US" b="1" sz="600" dirty="0" smtClean="0">
-                <a:solidFill>
-                  <a:srgbClr val="646365"/>
-                </a:solidFill>
-                <a:latin typeface="Helvetica" pitchFamily="34" charset="0"/>
-                <a:ea typeface="Helvetica" pitchFamily="34" charset="-122"/>
-                <a:cs typeface="Helvetica" pitchFamily="34" charset="-120"/>
-              </a:rPr>
-              <a:t>WATSONX.AI STUDIO</a:t>
-            </a:r>
-            <a:endParaRPr lang="en-US" dirty="0"/>
-          </a:p>
-        </p:txBody>
-      </p:sp>
-      <p:sp>
-        <p:nvSpPr>
-          <p:cNvPr id="38" name="Object 37"/>
-          <p:cNvSpPr/>
-          <p:nvPr/>
-        </p:nvSpPr>
-        <p:spPr>
-          <a:xfrm>
-            <a:off x="3017520" y="1371600"/>
-            <a:ext cx="457200" cy="457200"/>
-          </a:xfrm>
-          <a:prstGeom prst="ellipse">
-            <a:avLst/>
-          </a:prstGeom>
-          <a:solidFill>
-            <a:srgbClr val="FFFFFF"/>
-          </a:solidFill>
-          <a:ln w="19050">
-            <a:solidFill>
-              <a:srgbClr val="646365"/>
-            </a:solidFill>
-            <a:prstDash val="solid"/>
-          </a:ln>
-        </p:spPr>
-      </p:sp>
-      <p:pic>
-        <p:nvPicPr>
-          <p:cNvPr id="39" name="Object 38" descr="public/generated/icons/43834340-4a6d-11ed-97d2-959039ad2a2e.png">    </p:cNvPr>
-          <p:cNvPicPr>
-            <a:picLocks noChangeAspect="1"/>
-          </p:cNvPicPr>
-          <p:nvPr/>
-        </p:nvPicPr>
-        <p:blipFill>
-          <a:blip r:embed="rId13"/>
-          <a:stretch>
-            <a:fillRect/>
-          </a:stretch>
-        </p:blipFill>
-        <p:spPr>
-          <a:xfrm>
-            <a:off x="3108960" y="1463040"/>
-            <a:ext cx="274320" cy="274320"/>
-          </a:xfrm>
-          <a:prstGeom prst="rect">
-            <a:avLst/>
-          </a:prstGeom>
-        </p:spPr>
-      </p:pic>
-      <p:sp>
-        <p:nvSpPr>
-          <p:cNvPr id="40" name="Object 39"/>
-          <p:cNvSpPr/>
-          <p:nvPr/>
-        </p:nvSpPr>
-        <p:spPr>
-          <a:xfrm>
-            <a:off x="2926080" y="1874520"/>
-            <a:ext cx="640080" cy="274320"/>
-          </a:xfrm>
-          <a:prstGeom prst="rect">
-            <a:avLst/>
-          </a:prstGeom>
-          <a:noFill/>
-        </p:spPr>
-        <p:txBody>
-          <a:bodyPr wrap="square" rtlCol="0" anchor="t" bIns="0" lIns="0" rIns="0" tIns="0">
-            <a:spAutoFit/>
-          </a:bodyPr>
-          <a:lstStyle/>
-          <a:p>
-            <a:pPr algn="ctr">
-              <a:buNone/>
-            </a:pPr>
-            <a:r>
-              <a:rPr lang="en-US" b="1" sz="600" dirty="0" smtClean="0">
-                <a:solidFill>
-                  <a:srgbClr val="646365"/>
-                </a:solidFill>
-                <a:latin typeface="Helvetica" pitchFamily="34" charset="0"/>
-                <a:ea typeface="Helvetica" pitchFamily="34" charset="-122"/>
-                <a:cs typeface="Helvetica" pitchFamily="34" charset="-120"/>
-              </a:rPr>
-              <a:t>WATSONX.DATA</a:t>
-            </a:r>
-            <a:endParaRPr lang="en-US" dirty="0"/>
-          </a:p>
-        </p:txBody>
-      </p:sp>
-      <p:sp>
-        <p:nvSpPr>
-          <p:cNvPr id="41" name="Object 40"/>
-          <p:cNvSpPr/>
-          <p:nvPr/>
-        </p:nvSpPr>
-        <p:spPr>
-          <a:xfrm>
-            <a:off x="3931920" y="1371600"/>
-            <a:ext cx="457200" cy="457200"/>
-          </a:xfrm>
-          <a:prstGeom prst="ellipse">
-            <a:avLst/>
-          </a:prstGeom>
-          <a:solidFill>
-            <a:srgbClr val="FFFFFF"/>
-          </a:solidFill>
-          <a:ln w="19050">
-            <a:solidFill>
-              <a:srgbClr val="646365"/>
-            </a:solidFill>
-            <a:prstDash val="solid"/>
-          </a:ln>
-        </p:spPr>
-      </p:sp>
-      <p:pic>
-        <p:nvPicPr>
-          <p:cNvPr id="42" name="Object 41" descr="public/generated/icons/2ad019f3-0fd6-4c25-966d-f3952481a870.png">    </p:cNvPr>
-          <p:cNvPicPr>
-            <a:picLocks noChangeAspect="1"/>
-          </p:cNvPicPr>
-          <p:nvPr/>
-        </p:nvPicPr>
-        <p:blipFill>
-          <a:blip r:embed="rId14"/>
-          <a:stretch>
-            <a:fillRect/>
-          </a:stretch>
-        </p:blipFill>
-        <p:spPr>
-          <a:xfrm>
-            <a:off x="4023360" y="1463040"/>
-            <a:ext cx="274320" cy="274320"/>
-          </a:xfrm>
-          <a:prstGeom prst="rect">
-            <a:avLst/>
-          </a:prstGeom>
-        </p:spPr>
-      </p:pic>
-      <p:sp>
-        <p:nvSpPr>
-          <p:cNvPr id="43" name="Object 42"/>
-          <p:cNvSpPr/>
-          <p:nvPr/>
-        </p:nvSpPr>
-        <p:spPr>
-          <a:xfrm>
-            <a:off x="3840480" y="1874520"/>
-            <a:ext cx="640080" cy="274320"/>
-          </a:xfrm>
-          <a:prstGeom prst="rect">
-            <a:avLst/>
-          </a:prstGeom>
-          <a:noFill/>
-        </p:spPr>
-        <p:txBody>
-          <a:bodyPr wrap="square" rtlCol="0" anchor="t" bIns="0" lIns="0" rIns="0" tIns="0">
-            <a:spAutoFit/>
-          </a:bodyPr>
-          <a:lstStyle/>
-          <a:p>
-            <a:pPr algn="ctr">
-              <a:buNone/>
-            </a:pPr>
-            <a:r>
-              <a:rPr lang="en-US" b="1" sz="600" dirty="0" smtClean="0">
-                <a:solidFill>
-                  <a:srgbClr val="646365"/>
-                </a:solidFill>
-                <a:latin typeface="Helvetica" pitchFamily="34" charset="0"/>
-                <a:ea typeface="Helvetica" pitchFamily="34" charset="-122"/>
-                <a:cs typeface="Helvetica" pitchFamily="34" charset="-120"/>
-              </a:rPr>
-              <a:t>WATSONX.GOVERNANCE</a:t>
-            </a:r>
-            <a:endParaRPr lang="en-US" dirty="0"/>
-          </a:p>
-        </p:txBody>
-      </p:sp>
-      <p:sp>
-        <p:nvSpPr>
-          <p:cNvPr id="44" name="Object 43"/>
-          <p:cNvSpPr/>
-          <p:nvPr/>
-        </p:nvSpPr>
-        <p:spPr>
-          <a:xfrm>
-            <a:off x="4846320" y="1371600"/>
-            <a:ext cx="457200" cy="457200"/>
-          </a:xfrm>
-          <a:prstGeom prst="ellipse">
-            <a:avLst/>
-          </a:prstGeom>
-          <a:solidFill>
-            <a:srgbClr val="FFFFFF"/>
-          </a:solidFill>
-          <a:ln w="19050">
-            <a:solidFill>
-              <a:srgbClr val="646365"/>
-            </a:solidFill>
-            <a:prstDash val="solid"/>
-          </a:ln>
-        </p:spPr>
-      </p:sp>
-      <p:pic>
-        <p:nvPicPr>
-          <p:cNvPr id="45" name="Object 44" descr="public/generated/icons/cf329950-0a3e-11e8-922e-f1366c6e1c83-zerto.png">    </p:cNvPr>
-          <p:cNvPicPr>
-            <a:picLocks noChangeAspect="1"/>
-          </p:cNvPicPr>
-          <p:nvPr/>
-        </p:nvPicPr>
-        <p:blipFill>
-          <a:blip r:embed="rId15"/>
-          <a:stretch>
-            <a:fillRect/>
-          </a:stretch>
-        </p:blipFill>
-        <p:spPr>
-          <a:xfrm>
-            <a:off x="4937760" y="1463040"/>
-            <a:ext cx="274320" cy="274320"/>
-          </a:xfrm>
-          <a:prstGeom prst="rect">
-            <a:avLst/>
-          </a:prstGeom>
-        </p:spPr>
-      </p:pic>
-      <p:sp>
-        <p:nvSpPr>
-          <p:cNvPr id="46" name="Object 45"/>
-          <p:cNvSpPr/>
-          <p:nvPr/>
-        </p:nvSpPr>
-        <p:spPr>
-          <a:xfrm>
-            <a:off x="4754880" y="1874520"/>
             <a:ext cx="640080" cy="274320"/>
           </a:xfrm>
           <a:prstGeom prst="rect">

--- a/mycatalog-architecture-diagram-template.pptx
+++ b/mycatalog-architecture-diagram-template.pptx
@@ -524,7 +524,7 @@
           <a:p>
             <a:r>
               <a:rPr lang="en-US" dirty="0" smtClean="0"/>
-              <a:t>Generated on Sun Mar 16 2025 07:06:00 GMT+0000 (Coordinated Universal Time)</a:t>
+              <a:t>Generated on Sun Mar 23 2025 07:06:27 GMT+0000 (Coordinated Universal Time)</a:t>
             </a:r>
             <a:endParaRPr lang="en-US" dirty="0"/>
           </a:p>
@@ -25805,7 +25805,7 @@
       </p:sp>
       <p:pic>
         <p:nvPicPr>
-          <p:cNvPr id="66" name="Object 65" descr="public/generated/icons/a0814030-c9dd-11e7-9a5e-19d80fed5e00.png">    </p:cNvPr>
+          <p:cNvPr id="66" name="Object 65" descr="public/generated/icons/840bcb30-f8c3-11ed-afcd-01dba1a5ada3.png">    </p:cNvPr>
           <p:cNvPicPr>
             <a:picLocks noChangeAspect="1"/>
           </p:cNvPicPr>
@@ -25861,7 +25861,7 @@
                 <a:ea typeface="Helvetica" pitchFamily="34" charset="-122"/>
                 <a:cs typeface="Helvetica" pitchFamily="34" charset="-120"/>
               </a:rPr>
-              <a:t>DATA ENGINE (PREVIOUSLY SQL QUERY)</a:t>
+              <a:t>DATA PRODUCT HUB</a:t>
             </a:r>
             <a:endParaRPr lang="en-US" dirty="0"/>
           </a:p>
@@ -25894,7 +25894,7 @@
       </p:sp>
       <p:pic>
         <p:nvPicPr>
-          <p:cNvPr id="69" name="Object 68" descr="public/generated/icons/840bcb30-f8c3-11ed-afcd-01dba1a5ada3.png">    </p:cNvPr>
+          <p:cNvPr id="69" name="Object 68" descr="public/generated/icons/696b9880-9e9b-11ea-9054-e15e287f1e7f.png">    </p:cNvPr>
           <p:cNvPicPr>
             <a:picLocks noChangeAspect="1"/>
           </p:cNvPicPr>
@@ -25950,7 +25950,7 @@
                 <a:ea typeface="Helvetica" pitchFamily="34" charset="-122"/>
                 <a:cs typeface="Helvetica" pitchFamily="34" charset="-120"/>
               </a:rPr>
-              <a:t>DATA PRODUCT HUB</a:t>
+              <a:t>DATA REPLICATION</a:t>
             </a:r>
             <a:endParaRPr lang="en-US" dirty="0"/>
           </a:p>
@@ -25983,7 +25983,7 @@
       </p:sp>
       <p:pic>
         <p:nvPicPr>
-          <p:cNvPr id="72" name="Object 71" descr="public/generated/icons/696b9880-9e9b-11ea-9054-e15e287f1e7f.png">    </p:cNvPr>
+          <p:cNvPr id="72" name="Object 71" descr="public/generated/icons/5d307850-0404-11eb-8c8b-c7d7505f656d.png">    </p:cNvPr>
           <p:cNvPicPr>
             <a:picLocks noChangeAspect="1"/>
           </p:cNvPicPr>
@@ -26039,7 +26039,7 @@
                 <a:ea typeface="Helvetica" pitchFamily="34" charset="-122"/>
                 <a:cs typeface="Helvetica" pitchFamily="34" charset="-120"/>
               </a:rPr>
-              <a:t>DATA REPLICATION</a:t>
+              <a:t>DATA VIRTUALIZATION</a:t>
             </a:r>
             <a:endParaRPr lang="en-US" dirty="0"/>
           </a:p>
@@ -26072,7 +26072,7 @@
       </p:sp>
       <p:pic>
         <p:nvPicPr>
-          <p:cNvPr id="75" name="Object 74" descr="public/generated/icons/5d307850-0404-11eb-8c8b-c7d7505f656d.png">    </p:cNvPr>
+          <p:cNvPr id="75" name="Object 74" descr="public/generated/icons/databases-for-enterprisedb.png">    </p:cNvPr>
           <p:cNvPicPr>
             <a:picLocks noChangeAspect="1"/>
           </p:cNvPicPr>
@@ -26128,7 +26128,7 @@
                 <a:ea typeface="Helvetica" pitchFamily="34" charset="-122"/>
                 <a:cs typeface="Helvetica" pitchFamily="34" charset="-120"/>
               </a:rPr>
-              <a:t>DATA VIRTUALIZATION</a:t>
+              <a:t>DATABASES FOR EDB</a:t>
             </a:r>
             <a:endParaRPr lang="en-US" dirty="0"/>
           </a:p>
@@ -26161,7 +26161,7 @@
       </p:sp>
       <p:pic>
         <p:nvPicPr>
-          <p:cNvPr id="78" name="Object 77" descr="public/generated/icons/databases-for-enterprisedb.png">    </p:cNvPr>
+          <p:cNvPr id="78" name="Object 77" descr="public/generated/icons/databases-for-elasticsearch.png">    </p:cNvPr>
           <p:cNvPicPr>
             <a:picLocks noChangeAspect="1"/>
           </p:cNvPicPr>
@@ -26217,7 +26217,7 @@
                 <a:ea typeface="Helvetica" pitchFamily="34" charset="-122"/>
                 <a:cs typeface="Helvetica" pitchFamily="34" charset="-120"/>
               </a:rPr>
-              <a:t>DATABASES FOR EDB</a:t>
+              <a:t>DATABASES FOR ELASTICSEARCH</a:t>
             </a:r>
             <a:endParaRPr lang="en-US" dirty="0"/>
           </a:p>
@@ -26250,7 +26250,7 @@
       </p:sp>
       <p:pic>
         <p:nvPicPr>
-          <p:cNvPr id="81" name="Object 80" descr="public/generated/icons/databases-for-elasticsearch.png">    </p:cNvPr>
+          <p:cNvPr id="81" name="Object 80" descr="public/generated/icons/databases-for-etcd.png">    </p:cNvPr>
           <p:cNvPicPr>
             <a:picLocks noChangeAspect="1"/>
           </p:cNvPicPr>
@@ -26306,7 +26306,7 @@
                 <a:ea typeface="Helvetica" pitchFamily="34" charset="-122"/>
                 <a:cs typeface="Helvetica" pitchFamily="34" charset="-120"/>
               </a:rPr>
-              <a:t>DATABASES FOR ELASTICSEARCH</a:t>
+              <a:t>DATABASES FOR ETCD</a:t>
             </a:r>
             <a:endParaRPr lang="en-US" dirty="0"/>
           </a:p>
@@ -26339,7 +26339,7 @@
       </p:sp>
       <p:pic>
         <p:nvPicPr>
-          <p:cNvPr id="84" name="Object 83" descr="public/generated/icons/databases-for-etcd.png">    </p:cNvPr>
+          <p:cNvPr id="84" name="Object 83" descr="public/generated/icons/databases-for-mongodb.png">    </p:cNvPr>
           <p:cNvPicPr>
             <a:picLocks noChangeAspect="1"/>
           </p:cNvPicPr>
@@ -26395,7 +26395,7 @@
                 <a:ea typeface="Helvetica" pitchFamily="34" charset="-122"/>
                 <a:cs typeface="Helvetica" pitchFamily="34" charset="-120"/>
               </a:rPr>
-              <a:t>DATABASES FOR ETCD</a:t>
+              <a:t>DATABASES FOR MONGODB</a:t>
             </a:r>
             <a:endParaRPr lang="en-US" dirty="0"/>
           </a:p>
@@ -26428,7 +26428,7 @@
       </p:sp>
       <p:pic>
         <p:nvPicPr>
-          <p:cNvPr id="87" name="Object 86" descr="public/generated/icons/databases-for-mongodb.png">    </p:cNvPr>
+          <p:cNvPr id="87" name="Object 86" descr="public/generated/icons/databases-for-mysql.png">    </p:cNvPr>
           <p:cNvPicPr>
             <a:picLocks noChangeAspect="1"/>
           </p:cNvPicPr>
@@ -26484,7 +26484,7 @@
                 <a:ea typeface="Helvetica" pitchFamily="34" charset="-122"/>
                 <a:cs typeface="Helvetica" pitchFamily="34" charset="-120"/>
               </a:rPr>
-              <a:t>DATABASES FOR MONGODB</a:t>
+              <a:t>DATABASES FOR MYSQL</a:t>
             </a:r>
             <a:endParaRPr lang="en-US" dirty="0"/>
           </a:p>
@@ -26517,7 +26517,7 @@
       </p:sp>
       <p:pic>
         <p:nvPicPr>
-          <p:cNvPr id="90" name="Object 89" descr="public/generated/icons/databases-for-mysql.png">    </p:cNvPr>
+          <p:cNvPr id="90" name="Object 89" descr="public/generated/icons/databases-for-postgresql.png">    </p:cNvPr>
           <p:cNvPicPr>
             <a:picLocks noChangeAspect="1"/>
           </p:cNvPicPr>
@@ -26573,7 +26573,7 @@
                 <a:ea typeface="Helvetica" pitchFamily="34" charset="-122"/>
                 <a:cs typeface="Helvetica" pitchFamily="34" charset="-120"/>
               </a:rPr>
-              <a:t>DATABASES FOR MYSQL</a:t>
+              <a:t>DATABASES FOR POSTGRESQL</a:t>
             </a:r>
             <a:endParaRPr lang="en-US" dirty="0"/>
           </a:p>
@@ -26606,7 +26606,7 @@
       </p:sp>
       <p:pic>
         <p:nvPicPr>
-          <p:cNvPr id="93" name="Object 92" descr="public/generated/icons/databases-for-postgresql.png">    </p:cNvPr>
+          <p:cNvPr id="93" name="Object 92" descr="public/generated/icons/databases-for-redis.png">    </p:cNvPr>
           <p:cNvPicPr>
             <a:picLocks noChangeAspect="1"/>
           </p:cNvPicPr>
@@ -26662,7 +26662,7 @@
                 <a:ea typeface="Helvetica" pitchFamily="34" charset="-122"/>
                 <a:cs typeface="Helvetica" pitchFamily="34" charset="-120"/>
               </a:rPr>
-              <a:t>DATABASES FOR POSTGRESQL</a:t>
+              <a:t>DATABASES FOR REDIS</a:t>
             </a:r>
             <a:endParaRPr lang="en-US" dirty="0"/>
           </a:p>
@@ -26695,7 +26695,7 @@
       </p:sp>
       <p:pic>
         <p:nvPicPr>
-          <p:cNvPr id="96" name="Object 95" descr="public/generated/icons/databases-for-redis.png">    </p:cNvPr>
+          <p:cNvPr id="96" name="Object 95" descr="public/generated/icons/dd0532c0-f87c-11ea-be25-c9dc051df74f.png">    </p:cNvPr>
           <p:cNvPicPr>
             <a:picLocks noChangeAspect="1"/>
           </p:cNvPicPr>
@@ -26751,7 +26751,7 @@
                 <a:ea typeface="Helvetica" pitchFamily="34" charset="-122"/>
                 <a:cs typeface="Helvetica" pitchFamily="34" charset="-120"/>
               </a:rPr>
-              <a:t>DATABASES FOR REDIS</a:t>
+              <a:t>DATASTAGE</a:t>
             </a:r>
             <a:endParaRPr lang="en-US" dirty="0"/>
           </a:p>
@@ -26784,7 +26784,7 @@
       </p:sp>
       <p:pic>
         <p:nvPicPr>
-          <p:cNvPr id="99" name="Object 98" descr="public/generated/icons/dd0532c0-f87c-11ea-be25-c9dc051df74f.png">    </p:cNvPr>
+          <p:cNvPr id="99" name="Object 98" descr="public/generated/icons/dashdb-for-transactions.png">    </p:cNvPr>
           <p:cNvPicPr>
             <a:picLocks noChangeAspect="1"/>
           </p:cNvPicPr>
@@ -26840,7 +26840,7 @@
                 <a:ea typeface="Helvetica" pitchFamily="34" charset="-122"/>
                 <a:cs typeface="Helvetica" pitchFamily="34" charset="-120"/>
               </a:rPr>
-              <a:t>DATASTAGE</a:t>
+              <a:t>DB2</a:t>
             </a:r>
             <a:endParaRPr lang="en-US" dirty="0"/>
           </a:p>
@@ -26873,7 +26873,7 @@
       </p:sp>
       <p:pic>
         <p:nvPicPr>
-          <p:cNvPr id="102" name="Object 101" descr="public/generated/icons/dashdb-for-transactions.png">    </p:cNvPr>
+          <p:cNvPr id="102" name="Object 101" descr="public/generated/icons/9e02e72d-00ce-4220-b44c-650c8314e58a.png">    </p:cNvPr>
           <p:cNvPicPr>
             <a:picLocks noChangeAspect="1"/>
           </p:cNvPicPr>
@@ -26929,7 +26929,7 @@
                 <a:ea typeface="Helvetica" pitchFamily="34" charset="-122"/>
                 <a:cs typeface="Helvetica" pitchFamily="34" charset="-120"/>
               </a:rPr>
-              <a:t>DB2</a:t>
+              <a:t>DB2 WAREHOUSE</a:t>
             </a:r>
             <a:endParaRPr lang="en-US" dirty="0"/>
           </a:p>
@@ -26962,7 +26962,7 @@
       </p:sp>
       <p:pic>
         <p:nvPicPr>
-          <p:cNvPr id="105" name="Object 104" descr="public/generated/icons/9e02e72d-00ce-4220-b44c-650c8314e58a.png">    </p:cNvPr>
+          <p:cNvPr id="105" name="Object 104" descr="public/generated/icons/is.dedicated-host.png">    </p:cNvPr>
           <p:cNvPicPr>
             <a:picLocks noChangeAspect="1"/>
           </p:cNvPicPr>
@@ -27018,7 +27018,7 @@
                 <a:ea typeface="Helvetica" pitchFamily="34" charset="-122"/>
                 <a:cs typeface="Helvetica" pitchFamily="34" charset="-120"/>
               </a:rPr>
-              <a:t>DB2 WAREHOUSE</a:t>
+              <a:t>DEDICATED HOST FOR VPC</a:t>
             </a:r>
             <a:endParaRPr lang="en-US" dirty="0"/>
           </a:p>
@@ -27051,7 +27051,7 @@
       </p:sp>
       <p:pic>
         <p:nvPicPr>
-          <p:cNvPr id="108" name="Object 107" descr="public/generated/icons/is.dedicated-host.png">    </p:cNvPr>
+          <p:cNvPr id="108" name="Object 107" descr="public/generated/icons/86fb7610-0f92-11ea-a6a3-8b96ed1570d8.png">    </p:cNvPr>
           <p:cNvPicPr>
             <a:picLocks noChangeAspect="1"/>
           </p:cNvPicPr>
@@ -27107,7 +27107,7 @@
                 <a:ea typeface="Helvetica" pitchFamily="34" charset="-122"/>
                 <a:cs typeface="Helvetica" pitchFamily="34" charset="-120"/>
               </a:rPr>
-              <a:t>DEDICATED HOST FOR VPC</a:t>
+              <a:t>DIRECT LINK CONNECT</a:t>
             </a:r>
             <a:endParaRPr lang="en-US" dirty="0"/>
           </a:p>
@@ -27173,7 +27173,7 @@
       </p:sp>
       <p:pic>
         <p:nvPicPr>
-          <p:cNvPr id="3" name="Object 2" descr="public/generated/icons/86fb7610-0f92-11ea-a6a3-8b96ed1570d8.png">    </p:cNvPr>
+          <p:cNvPr id="3" name="Object 2" descr="public/generated/icons/7dd59b11-c3c5-5aad-f6b2-2a0c2a3e6c49.png">    </p:cNvPr>
           <p:cNvPicPr>
             <a:picLocks noChangeAspect="1"/>
           </p:cNvPicPr>
@@ -27229,7 +27229,7 @@
                 <a:ea typeface="Helvetica" pitchFamily="34" charset="-122"/>
                 <a:cs typeface="Helvetica" pitchFamily="34" charset="-120"/>
               </a:rPr>
-              <a:t>DIRECT LINK CONNECT</a:t>
+              <a:t>DIRECT LINK CONNECT ON CLASSIC</a:t>
             </a:r>
             <a:endParaRPr lang="en-US" dirty="0"/>
           </a:p>
@@ -27262,7 +27262,7 @@
       </p:sp>
       <p:pic>
         <p:nvPicPr>
-          <p:cNvPr id="6" name="Object 5" descr="public/generated/icons/7dd59b11-c3c5-5aad-f6b2-2a0c2a3e6c49.png">    </p:cNvPr>
+          <p:cNvPr id="6" name="Object 5" descr="public/generated/icons/dc11a440-6073-11e9-9f5a-2f7997ba23c0.png">    </p:cNvPr>
           <p:cNvPicPr>
             <a:picLocks noChangeAspect="1"/>
           </p:cNvPicPr>
@@ -27318,7 +27318,7 @@
                 <a:ea typeface="Helvetica" pitchFamily="34" charset="-122"/>
                 <a:cs typeface="Helvetica" pitchFamily="34" charset="-120"/>
               </a:rPr>
-              <a:t>DIRECT LINK CONNECT ON CLASSIC</a:t>
+              <a:t>DIRECT LINK DEDICATED</a:t>
             </a:r>
             <a:endParaRPr lang="en-US" dirty="0"/>
           </a:p>
@@ -27351,7 +27351,7 @@
       </p:sp>
       <p:pic>
         <p:nvPicPr>
-          <p:cNvPr id="9" name="Object 8" descr="public/generated/icons/dc11a440-6073-11e9-9f5a-2f7997ba23c0.png">    </p:cNvPr>
+          <p:cNvPr id="9" name="Object 8" descr="public/generated/icons/22.png">    </p:cNvPr>
           <p:cNvPicPr>
             <a:picLocks noChangeAspect="1"/>
           </p:cNvPicPr>
@@ -27407,7 +27407,7 @@
                 <a:ea typeface="Helvetica" pitchFamily="34" charset="-122"/>
                 <a:cs typeface="Helvetica" pitchFamily="34" charset="-120"/>
               </a:rPr>
-              <a:t>DIRECT LINK DEDICATED</a:t>
+              <a:t>DIRECT LINK DEDICATED HOSTING ON CLASSIC</a:t>
             </a:r>
             <a:endParaRPr lang="en-US" dirty="0"/>
           </a:p>
@@ -27440,7 +27440,7 @@
       </p:sp>
       <p:pic>
         <p:nvPicPr>
-          <p:cNvPr id="12" name="Object 11" descr="public/generated/icons/22.png">    </p:cNvPr>
+          <p:cNvPr id="12" name="Object 11" descr="public/generated/icons/23.png">    </p:cNvPr>
           <p:cNvPicPr>
             <a:picLocks noChangeAspect="1"/>
           </p:cNvPicPr>
@@ -27496,7 +27496,7 @@
                 <a:ea typeface="Helvetica" pitchFamily="34" charset="-122"/>
                 <a:cs typeface="Helvetica" pitchFamily="34" charset="-120"/>
               </a:rPr>
-              <a:t>DIRECT LINK DEDICATED HOSTING ON CLASSIC</a:t>
+              <a:t>DIRECT LINK DEDICATED ON CLASSIC</a:t>
             </a:r>
             <a:endParaRPr lang="en-US" dirty="0"/>
           </a:p>
@@ -27529,7 +27529,7 @@
       </p:sp>
       <p:pic>
         <p:nvPicPr>
-          <p:cNvPr id="15" name="Object 14" descr="public/generated/icons/23.png">    </p:cNvPr>
+          <p:cNvPr id="15" name="Object 14" descr="public/generated/icons/21.png">    </p:cNvPr>
           <p:cNvPicPr>
             <a:picLocks noChangeAspect="1"/>
           </p:cNvPicPr>
@@ -27585,7 +27585,7 @@
                 <a:ea typeface="Helvetica" pitchFamily="34" charset="-122"/>
                 <a:cs typeface="Helvetica" pitchFamily="34" charset="-120"/>
               </a:rPr>
-              <a:t>DIRECT LINK DEDICATED ON CLASSIC</a:t>
+              <a:t>DIRECT LINK EXCHANGE ON CLASSIC</a:t>
             </a:r>
             <a:endParaRPr lang="en-US" dirty="0"/>
           </a:p>
@@ -27618,7 +27618,7 @@
       </p:sp>
       <p:pic>
         <p:nvPicPr>
-          <p:cNvPr id="18" name="Object 17" descr="public/generated/icons/21.png">    </p:cNvPr>
+          <p:cNvPr id="18" name="Object 17" descr="public/generated/icons/9f3db814-3aec-47c5-94b0-6a71d49bd27f.png">    </p:cNvPr>
           <p:cNvPicPr>
             <a:picLocks noChangeAspect="1"/>
           </p:cNvPicPr>
@@ -27674,7 +27674,7 @@
                 <a:ea typeface="Helvetica" pitchFamily="34" charset="-122"/>
                 <a:cs typeface="Helvetica" pitchFamily="34" charset="-120"/>
               </a:rPr>
-              <a:t>DIRECT LINK EXCHANGE ON CLASSIC</a:t>
+              <a:t>DIZZION COMPLETE</a:t>
             </a:r>
             <a:endParaRPr lang="en-US" dirty="0"/>
           </a:p>
@@ -27707,7 +27707,7 @@
       </p:sp>
       <p:pic>
         <p:nvPicPr>
-          <p:cNvPr id="21" name="Object 20" descr="public/generated/icons/9f3db814-3aec-47c5-94b0-6a71d49bd27f.png">    </p:cNvPr>
+          <p:cNvPr id="21" name="Object 20" descr="public/generated/icons/9e09a2eb-b2e5-4d76-ab7c-1b2f8c080865.png">    </p:cNvPr>
           <p:cNvPicPr>
             <a:picLocks noChangeAspect="1"/>
           </p:cNvPicPr>
@@ -27763,7 +27763,7 @@
                 <a:ea typeface="Helvetica" pitchFamily="34" charset="-122"/>
                 <a:cs typeface="Helvetica" pitchFamily="34" charset="-120"/>
               </a:rPr>
-              <a:t>DIZZION COMPLETE</a:t>
+              <a:t>DIZZION COMPLETE - HORIZON</a:t>
             </a:r>
             <a:endParaRPr lang="en-US" dirty="0"/>
           </a:p>
@@ -27796,7 +27796,7 @@
       </p:sp>
       <p:pic>
         <p:nvPicPr>
-          <p:cNvPr id="24" name="Object 23" descr="public/generated/icons/9e09a2eb-b2e5-4d76-ab7c-1b2f8c080865.png">    </p:cNvPr>
+          <p:cNvPr id="24" name="Object 23" descr="public/generated/icons/79679329-2050-4779-a2e2-7210b88aed4e.png">    </p:cNvPr>
           <p:cNvPicPr>
             <a:picLocks noChangeAspect="1"/>
           </p:cNvPicPr>
@@ -27852,7 +27852,7 @@
                 <a:ea typeface="Helvetica" pitchFamily="34" charset="-122"/>
                 <a:cs typeface="Helvetica" pitchFamily="34" charset="-120"/>
               </a:rPr>
-              <a:t>DIZZION COMPLETE - HORIZON</a:t>
+              <a:t>DIZZION COMPLETE FS - HORIZON</a:t>
             </a:r>
             <a:endParaRPr lang="en-US" dirty="0"/>
           </a:p>
@@ -27885,7 +27885,7 @@
       </p:sp>
       <p:pic>
         <p:nvPicPr>
-          <p:cNvPr id="27" name="Object 26" descr="public/generated/icons/79679329-2050-4779-a2e2-7210b88aed4e.png">    </p:cNvPr>
+          <p:cNvPr id="27" name="Object 26" descr="public/generated/icons/6fc0c2df-7fbc-470f-aac5-a93af7ef4a92.png">    </p:cNvPr>
           <p:cNvPicPr>
             <a:picLocks noChangeAspect="1"/>
           </p:cNvPicPr>
@@ -27941,7 +27941,7 @@
                 <a:ea typeface="Helvetica" pitchFamily="34" charset="-122"/>
                 <a:cs typeface="Helvetica" pitchFamily="34" charset="-120"/>
               </a:rPr>
-              <a:t>DIZZION COMPLETE FS - HORIZON</a:t>
+              <a:t>DIZZION FLEX</a:t>
             </a:r>
             <a:endParaRPr lang="en-US" dirty="0"/>
           </a:p>
@@ -27974,7 +27974,7 @@
       </p:sp>
       <p:pic>
         <p:nvPicPr>
-          <p:cNvPr id="30" name="Object 29" descr="public/generated/icons/6fc0c2df-7fbc-470f-aac5-a93af7ef4a92.png">    </p:cNvPr>
+          <p:cNvPr id="30" name="Object 29" descr="public/generated/icons/72ca6b61-2aa8-4b8f-ba21-69854bd2095b.png">    </p:cNvPr>
           <p:cNvPicPr>
             <a:picLocks noChangeAspect="1"/>
           </p:cNvPicPr>
@@ -28030,7 +28030,7 @@
                 <a:ea typeface="Helvetica" pitchFamily="34" charset="-122"/>
                 <a:cs typeface="Helvetica" pitchFamily="34" charset="-120"/>
               </a:rPr>
-              <a:t>DIZZION FLEX</a:t>
+              <a:t>DIZZION MANAGED</a:t>
             </a:r>
             <a:endParaRPr lang="en-US" dirty="0"/>
           </a:p>
@@ -28063,7 +28063,7 @@
       </p:sp>
       <p:pic>
         <p:nvPicPr>
-          <p:cNvPr id="33" name="Object 32" descr="public/generated/icons/72ca6b61-2aa8-4b8f-ba21-69854bd2095b.png">    </p:cNvPr>
+          <p:cNvPr id="33" name="Object 32" descr="public/generated/icons/b4ed8a30-936f-11e9-b289-1d079699cbe5.png">    </p:cNvPr>
           <p:cNvPicPr>
             <a:picLocks noChangeAspect="1"/>
           </p:cNvPicPr>
@@ -28119,7 +28119,7 @@
                 <a:ea typeface="Helvetica" pitchFamily="34" charset="-122"/>
                 <a:cs typeface="Helvetica" pitchFamily="34" charset="-120"/>
               </a:rPr>
-              <a:t>DIZZION MANAGED</a:t>
+              <a:t>DNS SERVICES</a:t>
             </a:r>
             <a:endParaRPr lang="en-US" dirty="0"/>
           </a:p>
@@ -28152,7 +28152,7 @@
       </p:sp>
       <p:pic>
         <p:nvPicPr>
-          <p:cNvPr id="36" name="Object 35" descr="public/generated/icons/b4ed8a30-936f-11e9-b289-1d079699cbe5.png">    </p:cNvPr>
+          <p:cNvPr id="36" name="Object 35" descr="public/generated/icons/d1e3f0d2-0f49-ddfd-0eb9-2897b9d3a45d.png">    </p:cNvPr>
           <p:cNvPicPr>
             <a:picLocks noChangeAspect="1"/>
           </p:cNvPicPr>
@@ -28208,7 +28208,7 @@
                 <a:ea typeface="Helvetica" pitchFamily="34" charset="-122"/>
                 <a:cs typeface="Helvetica" pitchFamily="34" charset="-120"/>
               </a:rPr>
-              <a:t>DNS SERVICES</a:t>
+              <a:t>EMAIL DELIVERY, POWERED BY SENDGRID</a:t>
             </a:r>
             <a:endParaRPr lang="en-US" dirty="0"/>
           </a:p>
@@ -28241,7 +28241,7 @@
       </p:sp>
       <p:pic>
         <p:nvPicPr>
-          <p:cNvPr id="39" name="Object 38" descr="public/generated/icons/d1e3f0d2-0f49-ddfd-0eb9-2897b9d3a45d.png">    </p:cNvPr>
+          <p:cNvPr id="39" name="Object 38" descr="public/generated/icons/871a9870-7508-11ef-ac5c-3324c550b37a.png">    </p:cNvPr>
           <p:cNvPicPr>
             <a:picLocks noChangeAspect="1"/>
           </p:cNvPicPr>
@@ -28297,7 +28297,7 @@
                 <a:ea typeface="Helvetica" pitchFamily="34" charset="-122"/>
                 <a:cs typeface="Helvetica" pitchFamily="34" charset="-120"/>
               </a:rPr>
-              <a:t>EMAIL DELIVERY, POWERED BY SENDGRID</a:t>
+              <a:t>ENTERPRISE APPLICATION SERVICE</a:t>
             </a:r>
             <a:endParaRPr lang="en-US" dirty="0"/>
           </a:p>
@@ -28330,7 +28330,7 @@
       </p:sp>
       <p:pic>
         <p:nvPicPr>
-          <p:cNvPr id="42" name="Object 41" descr="public/generated/icons/871a9870-7508-11ef-ac5c-3324c550b37a.png">    </p:cNvPr>
+          <p:cNvPr id="42" name="Object 41" descr="public/generated/icons/64955a78-30f9-426d-a25a-344480421b27.png">    </p:cNvPr>
           <p:cNvPicPr>
             <a:picLocks noChangeAspect="1"/>
           </p:cNvPicPr>
@@ -28386,7 +28386,7 @@
                 <a:ea typeface="Helvetica" pitchFamily="34" charset="-122"/>
                 <a:cs typeface="Helvetica" pitchFamily="34" charset="-120"/>
               </a:rPr>
-              <a:t>ENTERPRISE APPLICATION SERVICE</a:t>
+              <a:t>ETICLOUD SECURE DIGITAL AGILE WORKPLACE</a:t>
             </a:r>
             <a:endParaRPr lang="en-US" dirty="0"/>
           </a:p>
@@ -28419,7 +28419,7 @@
       </p:sp>
       <p:pic>
         <p:nvPicPr>
-          <p:cNvPr id="45" name="Object 44" descr="public/generated/icons/64955a78-30f9-426d-a25a-344480421b27.png">    </p:cNvPr>
+          <p:cNvPr id="45" name="Object 44" descr="public/generated/icons/ecdb4690-c2d8-11eb-bff1-4f7b9d2dfe41.png">    </p:cNvPr>
           <p:cNvPicPr>
             <a:picLocks noChangeAspect="1"/>
           </p:cNvPicPr>
@@ -28475,7 +28475,7 @@
                 <a:ea typeface="Helvetica" pitchFamily="34" charset="-122"/>
                 <a:cs typeface="Helvetica" pitchFamily="34" charset="-120"/>
               </a:rPr>
-              <a:t>ETICLOUD SECURE DIGITAL AGILE WORKPLACE</a:t>
+              <a:t>EVENT NOTIFICATIONS</a:t>
             </a:r>
             <a:endParaRPr lang="en-US" dirty="0"/>
           </a:p>
@@ -28508,7 +28508,7 @@
       </p:sp>
       <p:pic>
         <p:nvPicPr>
-          <p:cNvPr id="48" name="Object 47" descr="public/generated/icons/ecdb4690-c2d8-11eb-bff1-4f7b9d2dfe41.png">    </p:cNvPr>
+          <p:cNvPr id="48" name="Object 47" descr="public/generated/icons/6a7f4e38-f218-48ef-9dd2-df408747568e.png">    </p:cNvPr>
           <p:cNvPicPr>
             <a:picLocks noChangeAspect="1"/>
           </p:cNvPicPr>
@@ -28564,7 +28564,7 @@
                 <a:ea typeface="Helvetica" pitchFamily="34" charset="-122"/>
                 <a:cs typeface="Helvetica" pitchFamily="34" charset="-120"/>
               </a:rPr>
-              <a:t>EVENT NOTIFICATIONS</a:t>
+              <a:t>EVENT STREAMS</a:t>
             </a:r>
             <a:endParaRPr lang="en-US" dirty="0"/>
           </a:p>
@@ -28597,7 +28597,7 @@
       </p:sp>
       <p:pic>
         <p:nvPicPr>
-          <p:cNvPr id="51" name="Object 50" descr="public/generated/icons/6a7f4e38-f218-48ef-9dd2-df408747568e.png">    </p:cNvPr>
+          <p:cNvPr id="51" name="Object 50" descr="public/generated/icons/cf329950-0a3e-11e8-922e-f1366c6e1c83-bigip.png">    </p:cNvPr>
           <p:cNvPicPr>
             <a:picLocks noChangeAspect="1"/>
           </p:cNvPicPr>
@@ -28653,7 +28653,7 @@
                 <a:ea typeface="Helvetica" pitchFamily="34" charset="-122"/>
                 <a:cs typeface="Helvetica" pitchFamily="34" charset="-120"/>
               </a:rPr>
-              <a:t>EVENT STREAMS</a:t>
+              <a:t>F5 BIG-IP</a:t>
             </a:r>
             <a:endParaRPr lang="en-US" dirty="0"/>
           </a:p>
@@ -28686,7 +28686,7 @@
       </p:sp>
       <p:pic>
         <p:nvPicPr>
-          <p:cNvPr id="54" name="Object 53" descr="public/generated/icons/cf329950-0a3e-11e8-922e-f1366c6e1c83-bigip.png">    </p:cNvPr>
+          <p:cNvPr id="54" name="Object 53" descr="public/generated/icons/60427a43-cf48-41e0-bd95-26bde9c12105.png">    </p:cNvPr>
           <p:cNvPicPr>
             <a:picLocks noChangeAspect="1"/>
           </p:cNvPicPr>
@@ -28742,7 +28742,7 @@
                 <a:ea typeface="Helvetica" pitchFamily="34" charset="-122"/>
                 <a:cs typeface="Helvetica" pitchFamily="34" charset="-120"/>
               </a:rPr>
-              <a:t>F5 BIG-IP</a:t>
+              <a:t>FALCONSTOR STORSAFE VTL FOR POWER ON-PREMISES</a:t>
             </a:r>
             <a:endParaRPr lang="en-US" dirty="0"/>
           </a:p>
@@ -28775,7 +28775,7 @@
       </p:sp>
       <p:pic>
         <p:nvPicPr>
-          <p:cNvPr id="57" name="Object 56" descr="public/generated/icons/60427a43-cf48-41e0-bd95-26bde9c12105.png">    </p:cNvPr>
+          <p:cNvPr id="57" name="Object 56" descr="public/generated/icons/6.png">    </p:cNvPr>
           <p:cNvPicPr>
             <a:picLocks noChangeAspect="1"/>
           </p:cNvPicPr>
@@ -28831,7 +28831,7 @@
                 <a:ea typeface="Helvetica" pitchFamily="34" charset="-122"/>
                 <a:cs typeface="Helvetica" pitchFamily="34" charset="-120"/>
               </a:rPr>
-              <a:t>FALCONSTOR STORSAFE VTL FOR POWER ON-PREMISES</a:t>
+              <a:t>FILE STORAGE FOR CLASSIC</a:t>
             </a:r>
             <a:endParaRPr lang="en-US" dirty="0"/>
           </a:p>
@@ -28864,7 +28864,7 @@
       </p:sp>
       <p:pic>
         <p:nvPicPr>
-          <p:cNvPr id="60" name="Object 59" descr="public/generated/icons/6.png">    </p:cNvPr>
+          <p:cNvPr id="60" name="Object 59" descr="public/generated/icons/is.share.png">    </p:cNvPr>
           <p:cNvPicPr>
             <a:picLocks noChangeAspect="1"/>
           </p:cNvPicPr>
@@ -28920,7 +28920,7 @@
                 <a:ea typeface="Helvetica" pitchFamily="34" charset="-122"/>
                 <a:cs typeface="Helvetica" pitchFamily="34" charset="-120"/>
               </a:rPr>
-              <a:t>FILE STORAGE FOR CLASSIC</a:t>
+              <a:t>FILE STORAGE FOR VPC</a:t>
             </a:r>
             <a:endParaRPr lang="en-US" dirty="0"/>
           </a:p>
@@ -28953,7 +28953,7 @@
       </p:sp>
       <p:pic>
         <p:nvPicPr>
-          <p:cNvPr id="63" name="Object 62" descr="public/generated/icons/is.share.png">    </p:cNvPr>
+          <p:cNvPr id="63" name="Object 62" descr="public/generated/icons/is.floating-ip.png">    </p:cNvPr>
           <p:cNvPicPr>
             <a:picLocks noChangeAspect="1"/>
           </p:cNvPicPr>
@@ -29009,7 +29009,7 @@
                 <a:ea typeface="Helvetica" pitchFamily="34" charset="-122"/>
                 <a:cs typeface="Helvetica" pitchFamily="34" charset="-120"/>
               </a:rPr>
-              <a:t>FILE STORAGE FOR VPC</a:t>
+              <a:t>FLOATING IP FOR VPC</a:t>
             </a:r>
             <a:endParaRPr lang="en-US" dirty="0"/>
           </a:p>
@@ -29042,7 +29042,7 @@
       </p:sp>
       <p:pic>
         <p:nvPicPr>
-          <p:cNvPr id="66" name="Object 65" descr="public/generated/icons/is.floating-ip.png">    </p:cNvPr>
+          <p:cNvPr id="66" name="Object 65" descr="public/generated/icons/is.flow-log-collector.png">    </p:cNvPr>
           <p:cNvPicPr>
             <a:picLocks noChangeAspect="1"/>
           </p:cNvPicPr>
@@ -29098,7 +29098,7 @@
                 <a:ea typeface="Helvetica" pitchFamily="34" charset="-122"/>
                 <a:cs typeface="Helvetica" pitchFamily="34" charset="-120"/>
               </a:rPr>
-              <a:t>FLOATING IP FOR VPC</a:t>
+              <a:t>FLOW LOGS FOR VPC</a:t>
             </a:r>
             <a:endParaRPr lang="en-US" dirty="0"/>
           </a:p>
@@ -29131,7 +29131,7 @@
       </p:sp>
       <p:pic>
         <p:nvPicPr>
-          <p:cNvPr id="69" name="Object 68" descr="public/generated/icons/is.flow-log-collector.png">    </p:cNvPr>
+          <p:cNvPr id="69" name="Object 68" descr="public/generated/icons/05605040-8854-4665-bd05-0b10a96daf05.png">    </p:cNvPr>
           <p:cNvPicPr>
             <a:picLocks noChangeAspect="1"/>
           </p:cNvPicPr>
@@ -29187,7 +29187,7 @@
                 <a:ea typeface="Helvetica" pitchFamily="34" charset="-122"/>
                 <a:cs typeface="Helvetica" pitchFamily="34" charset="-120"/>
               </a:rPr>
-              <a:t>FLOW LOGS FOR VPC</a:t>
+              <a:t>FNTS CLOUD MIGRATION SERVICES</a:t>
             </a:r>
             <a:endParaRPr lang="en-US" dirty="0"/>
           </a:p>
@@ -29220,7 +29220,7 @@
       </p:sp>
       <p:pic>
         <p:nvPicPr>
-          <p:cNvPr id="72" name="Object 71" descr="public/generated/icons/05605040-8854-4665-bd05-0b10a96daf05.png">    </p:cNvPr>
+          <p:cNvPr id="72" name="Object 71" descr="public/generated/icons/d2fb0ba3-1679-4053-a593-9f2259d9e87b.png">    </p:cNvPr>
           <p:cNvPicPr>
             <a:picLocks noChangeAspect="1"/>
           </p:cNvPicPr>
@@ -29276,7 +29276,7 @@
                 <a:ea typeface="Helvetica" pitchFamily="34" charset="-122"/>
                 <a:cs typeface="Helvetica" pitchFamily="34" charset="-120"/>
               </a:rPr>
-              <a:t>FNTS CLOUD MIGRATION SERVICES</a:t>
+              <a:t>FNTS MANAGED SERVICES FOR POWERVS CLOUD</a:t>
             </a:r>
             <a:endParaRPr lang="en-US" dirty="0"/>
           </a:p>
@@ -29309,7 +29309,7 @@
       </p:sp>
       <p:pic>
         <p:nvPicPr>
-          <p:cNvPr id="75" name="Object 74" descr="public/generated/icons/d2fb0ba3-1679-4053-a593-9f2259d9e87b.png">    </p:cNvPr>
+          <p:cNvPr id="75" name="Object 74" descr="public/generated/icons/cf329950-0a3e-11e8-922e-f1366c6e1c83-fortigate.png">    </p:cNvPr>
           <p:cNvPicPr>
             <a:picLocks noChangeAspect="1"/>
           </p:cNvPicPr>
@@ -29365,7 +29365,7 @@
                 <a:ea typeface="Helvetica" pitchFamily="34" charset="-122"/>
                 <a:cs typeface="Helvetica" pitchFamily="34" charset="-120"/>
               </a:rPr>
-              <a:t>FNTS MANAGED SERVICES FOR POWERVS CLOUD</a:t>
+              <a:t>FORTIGATE SECURITY APPLIANCE</a:t>
             </a:r>
             <a:endParaRPr lang="en-US" dirty="0"/>
           </a:p>
@@ -29398,7 +29398,7 @@
       </p:sp>
       <p:pic>
         <p:nvPicPr>
-          <p:cNvPr id="78" name="Object 77" descr="public/generated/icons/cf329950-0a3e-11e8-922e-f1366c6e1c83-fortigate.png">    </p:cNvPr>
+          <p:cNvPr id="78" name="Object 77" descr="public/generated/icons/f5b26324-9b39-c701-0cc5-b0d5d2fe8534.png">    </p:cNvPr>
           <p:cNvPicPr>
             <a:picLocks noChangeAspect="1"/>
           </p:cNvPicPr>
@@ -29454,7 +29454,7 @@
                 <a:ea typeface="Helvetica" pitchFamily="34" charset="-122"/>
                 <a:cs typeface="Helvetica" pitchFamily="34" charset="-120"/>
               </a:rPr>
-              <a:t>FORTIGATE SECURITY APPLIANCE</a:t>
+              <a:t>FORTIGATE SECURITY APPLIANCE 10GBPS</a:t>
             </a:r>
             <a:endParaRPr lang="en-US" dirty="0"/>
           </a:p>
@@ -29487,7 +29487,7 @@
       </p:sp>
       <p:pic>
         <p:nvPicPr>
-          <p:cNvPr id="81" name="Object 80" descr="public/generated/icons/f5b26324-9b39-c701-0cc5-b0d5d2fe8534.png">    </p:cNvPr>
+          <p:cNvPr id="81" name="Object 80" descr="public/generated/icons/cf329950-0a3e-11e8-922e-f1366c6e1c83-fortigatevm.png">    </p:cNvPr>
           <p:cNvPicPr>
             <a:picLocks noChangeAspect="1"/>
           </p:cNvPicPr>
@@ -29543,7 +29543,7 @@
                 <a:ea typeface="Helvetica" pitchFamily="34" charset="-122"/>
                 <a:cs typeface="Helvetica" pitchFamily="34" charset="-120"/>
               </a:rPr>
-              <a:t>FORTIGATE SECURITY APPLIANCE 10GBPS</a:t>
+              <a:t>FORTIGATE VIRTUAL APPLIANCE</a:t>
             </a:r>
             <a:endParaRPr lang="en-US" dirty="0"/>
           </a:p>
@@ -29576,7 +29576,7 @@
       </p:sp>
       <p:pic>
         <p:nvPicPr>
-          <p:cNvPr id="84" name="Object 83" descr="public/generated/icons/cf329950-0a3e-11e8-922e-f1366c6e1c83-fortigatevm.png">    </p:cNvPr>
+          <p:cNvPr id="84" name="Object 83" descr="public/generated/icons/a93eeacc-7012-c8bc-c851-e928949a226c.png">    </p:cNvPr>
           <p:cNvPicPr>
             <a:picLocks noChangeAspect="1"/>
           </p:cNvPicPr>
@@ -29632,7 +29632,7 @@
                 <a:ea typeface="Helvetica" pitchFamily="34" charset="-122"/>
                 <a:cs typeface="Helvetica" pitchFamily="34" charset="-120"/>
               </a:rPr>
-              <a:t>FORTIGATE VIRTUAL APPLIANCE</a:t>
+              <a:t>FORTINET VIRTUAL FORTIGATE SECURITY APPLIANCE (VFSA)</a:t>
             </a:r>
             <a:endParaRPr lang="en-US" dirty="0"/>
           </a:p>
@@ -29665,7 +29665,7 @@
       </p:sp>
       <p:pic>
         <p:nvPicPr>
-          <p:cNvPr id="87" name="Object 86" descr="public/generated/icons/a93eeacc-7012-c8bc-c851-e928949a226c.png">    </p:cNvPr>
+          <p:cNvPr id="87" name="Object 86" descr="public/generated/icons/16.png">    </p:cNvPr>
           <p:cNvPicPr>
             <a:picLocks noChangeAspect="1"/>
           </p:cNvPicPr>
@@ -29721,7 +29721,7 @@
                 <a:ea typeface="Helvetica" pitchFamily="34" charset="-122"/>
                 <a:cs typeface="Helvetica" pitchFamily="34" charset="-120"/>
               </a:rPr>
-              <a:t>FORTINET VIRTUAL FORTIGATE SECURITY APPLIANCE (VFSA)</a:t>
+              <a:t>HARDWARE FIREWALL</a:t>
             </a:r>
             <a:endParaRPr lang="en-US" dirty="0"/>
           </a:p>
@@ -29754,7 +29754,7 @@
       </p:sp>
       <p:pic>
         <p:nvPicPr>
-          <p:cNvPr id="90" name="Object 89" descr="public/generated/icons/16.png">    </p:cNvPr>
+          <p:cNvPr id="90" name="Object 89" descr="public/generated/icons/cf329950-0a3e-11e8-922e-f1366c6e1c83-hcx.png">    </p:cNvPr>
           <p:cNvPicPr>
             <a:picLocks noChangeAspect="1"/>
           </p:cNvPicPr>
@@ -29810,7 +29810,7 @@
                 <a:ea typeface="Helvetica" pitchFamily="34" charset="-122"/>
                 <a:cs typeface="Helvetica" pitchFamily="34" charset="-120"/>
               </a:rPr>
-              <a:t>HARDWARE FIREWALL</a:t>
+              <a:t>HCX</a:t>
             </a:r>
             <a:endParaRPr lang="en-US" dirty="0"/>
           </a:p>
@@ -29843,7 +29843,7 @@
       </p:sp>
       <p:pic>
         <p:nvPicPr>
-          <p:cNvPr id="93" name="Object 92" descr="public/generated/icons/cf329950-0a3e-11e8-922e-f1366c6e1c83-hcx.png">    </p:cNvPr>
+          <p:cNvPr id="93" name="Object 92" descr="public/generated/icons/3dacb5a3-de4a-4361-9f39-0b6657f89f37.png">    </p:cNvPr>
           <p:cNvPicPr>
             <a:picLocks noChangeAspect="1"/>
           </p:cNvPicPr>
@@ -29899,7 +29899,7 @@
                 <a:ea typeface="Helvetica" pitchFamily="34" charset="-122"/>
                 <a:cs typeface="Helvetica" pitchFamily="34" charset="-120"/>
               </a:rPr>
-              <a:t>HCX</a:t>
+              <a:t>HDM VMWARE WORKLOAD ANALYZER</a:t>
             </a:r>
             <a:endParaRPr lang="en-US" dirty="0"/>
           </a:p>
@@ -29932,7 +29932,7 @@
       </p:sp>
       <p:pic>
         <p:nvPicPr>
-          <p:cNvPr id="96" name="Object 95" descr="public/generated/icons/3dacb5a3-de4a-4361-9f39-0b6657f89f37.png">    </p:cNvPr>
+          <p:cNvPr id="96" name="Object 95" descr="public/generated/icons/cf329950-0a3e-11e8-922e-f1366c6e1c83-horizon.png">    </p:cNvPr>
           <p:cNvPicPr>
             <a:picLocks noChangeAspect="1"/>
           </p:cNvPicPr>
@@ -29988,7 +29988,7 @@
                 <a:ea typeface="Helvetica" pitchFamily="34" charset="-122"/>
                 <a:cs typeface="Helvetica" pitchFamily="34" charset="-120"/>
               </a:rPr>
-              <a:t>HDM VMWARE WORKLOAD ANALYZER</a:t>
+              <a:t>HORIZON 7</a:t>
             </a:r>
             <a:endParaRPr lang="en-US" dirty="0"/>
           </a:p>
@@ -30021,7 +30021,7 @@
       </p:sp>
       <p:pic>
         <p:nvPicPr>
-          <p:cNvPr id="99" name="Object 98" descr="public/generated/icons/cf329950-0a3e-11e8-922e-f1366c6e1c83-horizon.png">    </p:cNvPr>
+          <p:cNvPr id="99" name="Object 98" descr="public/generated/icons/fa329acf-f9b6-fa9f-f37e-ad72d0b6a783.png">    </p:cNvPr>
           <p:cNvPicPr>
             <a:picLocks noChangeAspect="1"/>
           </p:cNvPicPr>
@@ -30077,7 +30077,7 @@
                 <a:ea typeface="Helvetica" pitchFamily="34" charset="-122"/>
                 <a:cs typeface="Helvetica" pitchFamily="34" charset="-120"/>
               </a:rPr>
-              <a:t>HORIZON 7</a:t>
+              <a:t>HYBRID CLOUD INFRASTRUCTURE AS A SERVICE</a:t>
             </a:r>
             <a:endParaRPr lang="en-US" dirty="0"/>
           </a:p>
@@ -30110,7 +30110,7 @@
       </p:sp>
       <p:pic>
         <p:nvPicPr>
-          <p:cNvPr id="102" name="Object 101" descr="public/generated/icons/fa329acf-f9b6-fa9f-f37e-ad72d0b6a783.png">    </p:cNvPr>
+          <p:cNvPr id="102" name="Object 101" descr="public/generated/icons/d589492e-6ac0-4a11-9c28-a157851c8f68.png">    </p:cNvPr>
           <p:cNvPicPr>
             <a:picLocks noChangeAspect="1"/>
           </p:cNvPicPr>
@@ -30166,7 +30166,7 @@
                 <a:ea typeface="Helvetica" pitchFamily="34" charset="-122"/>
                 <a:cs typeface="Helvetica" pitchFamily="34" charset="-120"/>
               </a:rPr>
-              <a:t>HYBRID CLOUD INFRASTRUCTURE AS A SERVICE</a:t>
+              <a:t>HYPER PROTECT CRYPTO SERVICES</a:t>
             </a:r>
             <a:endParaRPr lang="en-US" dirty="0"/>
           </a:p>
@@ -30199,7 +30199,7 @@
       </p:sp>
       <p:pic>
         <p:nvPicPr>
-          <p:cNvPr id="105" name="Object 104" descr="public/generated/icons/d589492e-6ac0-4a11-9c28-a157851c8f68.png">    </p:cNvPr>
+          <p:cNvPr id="105" name="Object 104" descr="public/generated/icons/986f2197-9f9a-44f4-9463-f17ec64c6729.png">    </p:cNvPr>
           <p:cNvPicPr>
             <a:picLocks noChangeAspect="1"/>
           </p:cNvPicPr>
@@ -30255,7 +30255,7 @@
                 <a:ea typeface="Helvetica" pitchFamily="34" charset="-122"/>
                 <a:cs typeface="Helvetica" pitchFamily="34" charset="-120"/>
               </a:rPr>
-              <a:t>HYPER PROTECT CRYPTO SERVICES</a:t>
+              <a:t>HYPER PROTECT VIRTUAL SERVER FOR CLASSIC</a:t>
             </a:r>
             <a:endParaRPr lang="en-US" dirty="0"/>
           </a:p>
@@ -30288,7 +30288,7 @@
       </p:sp>
       <p:pic>
         <p:nvPicPr>
-          <p:cNvPr id="108" name="Object 107" descr="public/generated/icons/986f2197-9f9a-44f4-9463-f17ec64c6729.png">    </p:cNvPr>
+          <p:cNvPr id="108" name="Object 107" descr="public/generated/icons/cf329950-0a3e-11e8-922e-f1366c6e1c83-hytrustcc.png">    </p:cNvPr>
           <p:cNvPicPr>
             <a:picLocks noChangeAspect="1"/>
           </p:cNvPicPr>
@@ -30344,7 +30344,7 @@
                 <a:ea typeface="Helvetica" pitchFamily="34" charset="-122"/>
                 <a:cs typeface="Helvetica" pitchFamily="34" charset="-120"/>
               </a:rPr>
-              <a:t>HYPER PROTECT VIRTUAL SERVER FOR CLASSIC</a:t>
+              <a:t>HYTRUST CLOUDCONTROL</a:t>
             </a:r>
             <a:endParaRPr lang="en-US" dirty="0"/>
           </a:p>
@@ -30410,7 +30410,7 @@
       </p:sp>
       <p:pic>
         <p:nvPicPr>
-          <p:cNvPr id="3" name="Object 2" descr="public/generated/icons/cf329950-0a3e-11e8-922e-f1366c6e1c83-hytrustcc.png">    </p:cNvPr>
+          <p:cNvPr id="3" name="Object 2" descr="public/generated/icons/cf329950-0a3e-11e8-922e-f1366c6e1c83-hytrustdc.png">    </p:cNvPr>
           <p:cNvPicPr>
             <a:picLocks noChangeAspect="1"/>
           </p:cNvPicPr>
@@ -30466,7 +30466,7 @@
                 <a:ea typeface="Helvetica" pitchFamily="34" charset="-122"/>
                 <a:cs typeface="Helvetica" pitchFamily="34" charset="-120"/>
               </a:rPr>
-              <a:t>HYTRUST CLOUDCONTROL</a:t>
+              <a:t>HYTRUST DATACONTROL</a:t>
             </a:r>
             <a:endParaRPr lang="en-US" dirty="0"/>
           </a:p>
@@ -30499,7 +30499,7 @@
       </p:sp>
       <p:pic>
         <p:nvPicPr>
-          <p:cNvPr id="6" name="Object 5" descr="public/generated/icons/cf329950-0a3e-11e8-922e-f1366c6e1c83-hytrustdc.png">    </p:cNvPr>
+          <p:cNvPr id="6" name="Object 5" descr="public/generated/icons/cf329950-0a3e-11e8-922e-f1366c6e1c83-hytrustkc.png">    </p:cNvPr>
           <p:cNvPicPr>
             <a:picLocks noChangeAspect="1"/>
           </p:cNvPicPr>
@@ -30555,7 +30555,7 @@
                 <a:ea typeface="Helvetica" pitchFamily="34" charset="-122"/>
                 <a:cs typeface="Helvetica" pitchFamily="34" charset="-120"/>
               </a:rPr>
-              <a:t>HYTRUST DATACONTROL</a:t>
+              <a:t>HYTRUST KEYCONTROL</a:t>
             </a:r>
             <a:endParaRPr lang="en-US" dirty="0"/>
           </a:p>
@@ -30588,7 +30588,7 @@
       </p:sp>
       <p:pic>
         <p:nvPicPr>
-          <p:cNvPr id="9" name="Object 8" descr="public/generated/icons/cf329950-0a3e-11e8-922e-f1366c6e1c83-hytrustkc.png">    </p:cNvPr>
+          <p:cNvPr id="9" name="Object 8" descr="public/generated/icons/is.image.png">    </p:cNvPr>
           <p:cNvPicPr>
             <a:picLocks noChangeAspect="1"/>
           </p:cNvPicPr>
@@ -30644,7 +30644,7 @@
                 <a:ea typeface="Helvetica" pitchFamily="34" charset="-122"/>
                 <a:cs typeface="Helvetica" pitchFamily="34" charset="-120"/>
               </a:rPr>
-              <a:t>HYTRUST KEYCONTROL</a:t>
+              <a:t>IMAGE SERVICE FOR VPC</a:t>
             </a:r>
             <a:endParaRPr lang="en-US" dirty="0"/>
           </a:p>
@@ -30677,7 +30677,7 @@
       </p:sp>
       <p:pic>
         <p:nvPicPr>
-          <p:cNvPr id="12" name="Object 11" descr="public/generated/icons/is.image.png">    </p:cNvPr>
+          <p:cNvPr id="12" name="Object 11" descr="public/generated/icons/is.metadata.png">    </p:cNvPr>
           <p:cNvPicPr>
             <a:picLocks noChangeAspect="1"/>
           </p:cNvPicPr>
@@ -30733,7 +30733,7 @@
                 <a:ea typeface="Helvetica" pitchFamily="34" charset="-122"/>
                 <a:cs typeface="Helvetica" pitchFamily="34" charset="-120"/>
               </a:rPr>
-              <a:t>IMAGE SERVICE FOR VPC</a:t>
+              <a:t>INSTANCE METADATA FOR VPC</a:t>
             </a:r>
             <a:endParaRPr lang="en-US" dirty="0"/>
           </a:p>
@@ -30766,7 +30766,7 @@
       </p:sp>
       <p:pic>
         <p:nvPicPr>
-          <p:cNvPr id="15" name="Object 14" descr="public/generated/icons/is.metadata.png">    </p:cNvPr>
+          <p:cNvPr id="15" name="Object 14" descr="public/generated/icons/75874a60-cb12-11e7-948e-37ac098eb1b9.png">    </p:cNvPr>
           <p:cNvPicPr>
             <a:picLocks noChangeAspect="1"/>
           </p:cNvPicPr>
@@ -30822,7 +30822,7 @@
                 <a:ea typeface="Helvetica" pitchFamily="34" charset="-122"/>
                 <a:cs typeface="Helvetica" pitchFamily="34" charset="-120"/>
               </a:rPr>
-              <a:t>INSTANCE METADATA FOR VPC</a:t>
+              <a:t>INTERNET SERVICES</a:t>
             </a:r>
             <a:endParaRPr lang="en-US" dirty="0"/>
           </a:p>
@@ -30855,7 +30855,7 @@
       </p:sp>
       <p:pic>
         <p:nvPicPr>
-          <p:cNvPr id="18" name="Object 17" descr="public/generated/icons/75874a60-cb12-11e7-948e-37ac098eb1b9.png">    </p:cNvPr>
+          <p:cNvPr id="18" name="Object 17" descr="public/generated/icons/12.png">    </p:cNvPr>
           <p:cNvPicPr>
             <a:picLocks noChangeAspect="1"/>
           </p:cNvPicPr>
@@ -30911,7 +30911,7 @@
                 <a:ea typeface="Helvetica" pitchFamily="34" charset="-122"/>
                 <a:cs typeface="Helvetica" pitchFamily="34" charset="-120"/>
               </a:rPr>
-              <a:t>INTERNET SERVICES</a:t>
+              <a:t>IPSEC VPN</a:t>
             </a:r>
             <a:endParaRPr lang="en-US" dirty="0"/>
           </a:p>
@@ -30944,7 +30944,7 @@
       </p:sp>
       <p:pic>
         <p:nvPicPr>
-          <p:cNvPr id="21" name="Object 20" descr="public/generated/icons/12.png">    </p:cNvPr>
+          <p:cNvPr id="21" name="Object 20" descr="public/generated/icons/035145f0-2cac-4505-59e9-2e363d08d5aa.png">    </p:cNvPr>
           <p:cNvPicPr>
             <a:picLocks noChangeAspect="1"/>
           </p:cNvPicPr>
@@ -31000,7 +31000,7 @@
                 <a:ea typeface="Helvetica" pitchFamily="34" charset="-122"/>
                 <a:cs typeface="Helvetica" pitchFamily="34" charset="-120"/>
               </a:rPr>
-              <a:t>IPSEC VPN</a:t>
+              <a:t>JUNIPER VSRX</a:t>
             </a:r>
             <a:endParaRPr lang="en-US" dirty="0"/>
           </a:p>
@@ -31033,7 +31033,7 @@
       </p:sp>
       <p:pic>
         <p:nvPicPr>
-          <p:cNvPr id="24" name="Object 23" descr="public/generated/icons/035145f0-2cac-4505-59e9-2e363d08d5aa.png">    </p:cNvPr>
+          <p:cNvPr id="24" name="Object 23" descr="public/generated/icons/ee41347f-b18e-4ca6-bf80-b5467c63f9a6.png">    </p:cNvPr>
           <p:cNvPicPr>
             <a:picLocks noChangeAspect="1"/>
           </p:cNvPicPr>
@@ -31089,7 +31089,7 @@
                 <a:ea typeface="Helvetica" pitchFamily="34" charset="-122"/>
                 <a:cs typeface="Helvetica" pitchFamily="34" charset="-120"/>
               </a:rPr>
-              <a:t>JUNIPER VSRX</a:t>
+              <a:t>KEY PROTECT</a:t>
             </a:r>
             <a:endParaRPr lang="en-US" dirty="0"/>
           </a:p>
@@ -31122,7 +31122,7 @@
       </p:sp>
       <p:pic>
         <p:nvPicPr>
-          <p:cNvPr id="27" name="Object 26" descr="public/generated/icons/ee41347f-b18e-4ca6-bf80-b5467c63f9a6.png">    </p:cNvPr>
+          <p:cNvPr id="27" name="Object 26" descr="public/generated/icons/cf329950-0a3e-11e8-922e-f1366c6e1c83-kmipadapter.png">    </p:cNvPr>
           <p:cNvPicPr>
             <a:picLocks noChangeAspect="1"/>
           </p:cNvPicPr>
@@ -31178,7 +31178,7 @@
                 <a:ea typeface="Helvetica" pitchFamily="34" charset="-122"/>
                 <a:cs typeface="Helvetica" pitchFamily="34" charset="-120"/>
               </a:rPr>
-              <a:t>KEY PROTECT</a:t>
+              <a:t>KMIP FOR VMWARE</a:t>
             </a:r>
             <a:endParaRPr lang="en-US" dirty="0"/>
           </a:p>
@@ -31211,7 +31211,7 @@
       </p:sp>
       <p:pic>
         <p:nvPicPr>
-          <p:cNvPr id="30" name="Object 29" descr="public/generated/icons/cf329950-0a3e-11e8-922e-f1366c6e1c83-kmipadapter.png">    </p:cNvPr>
+          <p:cNvPr id="30" name="Object 29" descr="public/generated/icons/ed3a5a53-eb60-4f3c-8fd1-17f88585b6ed.png">    </p:cNvPr>
           <p:cNvPicPr>
             <a:picLocks noChangeAspect="1"/>
           </p:cNvPicPr>
@@ -31267,7 +31267,7 @@
                 <a:ea typeface="Helvetica" pitchFamily="34" charset="-122"/>
                 <a:cs typeface="Helvetica" pitchFamily="34" charset="-120"/>
               </a:rPr>
-              <a:t>KMIP FOR VMWARE</a:t>
+              <a:t>KNOWLEDGE CATALOG</a:t>
             </a:r>
             <a:endParaRPr lang="en-US" dirty="0"/>
           </a:p>
@@ -31300,7 +31300,7 @@
       </p:sp>
       <p:pic>
         <p:nvPicPr>
-          <p:cNvPr id="33" name="Object 32" descr="public/generated/icons/ed3a5a53-eb60-4f3c-8fd1-17f88585b6ed.png">    </p:cNvPr>
+          <p:cNvPr id="33" name="Object 32" descr="public/generated/icons/983ea9a2-0fec-4021-8b70-8da5373394e5.png">    </p:cNvPr>
           <p:cNvPicPr>
             <a:picLocks noChangeAspect="1"/>
           </p:cNvPicPr>
@@ -31356,7 +31356,7 @@
                 <a:ea typeface="Helvetica" pitchFamily="34" charset="-122"/>
                 <a:cs typeface="Helvetica" pitchFamily="34" charset="-120"/>
               </a:rPr>
-              <a:t>KNOWLEDGE CATALOG</a:t>
+              <a:t>KNOWLEDGE STUDIO</a:t>
             </a:r>
             <a:endParaRPr lang="en-US" dirty="0"/>
           </a:p>
@@ -31389,7 +31389,7 @@
       </p:sp>
       <p:pic>
         <p:nvPicPr>
-          <p:cNvPr id="36" name="Object 35" descr="public/generated/icons/983ea9a2-0fec-4021-8b70-8da5373394e5.png">    </p:cNvPr>
+          <p:cNvPr id="36" name="Object 35" descr="public/generated/icons/a8f89634-261c-4832-8257-b25e04787988.png">    </p:cNvPr>
           <p:cNvPicPr>
             <a:picLocks noChangeAspect="1"/>
           </p:cNvPicPr>
@@ -31445,7 +31445,7 @@
                 <a:ea typeface="Helvetica" pitchFamily="34" charset="-122"/>
                 <a:cs typeface="Helvetica" pitchFamily="34" charset="-120"/>
               </a:rPr>
-              <a:t>KNOWLEDGE STUDIO</a:t>
+              <a:t>KOMPRISE ELASTIC DATA MIGRATION</a:t>
             </a:r>
             <a:endParaRPr lang="en-US" dirty="0"/>
           </a:p>
@@ -31478,7 +31478,7 @@
       </p:sp>
       <p:pic>
         <p:nvPicPr>
-          <p:cNvPr id="39" name="Object 38" descr="public/generated/icons/a8f89634-261c-4832-8257-b25e04787988.png">    </p:cNvPr>
+          <p:cNvPr id="39" name="Object 38" descr="public/generated/icons/f1fa7442-9ee0-4e27-94c2-0cb3776a0a0a.png">    </p:cNvPr>
           <p:cNvPicPr>
             <a:picLocks noChangeAspect="1"/>
           </p:cNvPicPr>
@@ -31534,7 +31534,7 @@
                 <a:ea typeface="Helvetica" pitchFamily="34" charset="-122"/>
                 <a:cs typeface="Helvetica" pitchFamily="34" charset="-120"/>
               </a:rPr>
-              <a:t>KOMPRISE ELASTIC DATA MIGRATION</a:t>
+              <a:t>KOMPRISE INTELLIGENT DATA MANAGEMENT SUITE</a:t>
             </a:r>
             <a:endParaRPr lang="en-US" dirty="0"/>
           </a:p>
@@ -31567,7 +31567,7 @@
       </p:sp>
       <p:pic>
         <p:nvPicPr>
-          <p:cNvPr id="42" name="Object 41" descr="public/generated/icons/f1fa7442-9ee0-4e27-94c2-0cb3776a0a0a.png">    </p:cNvPr>
+          <p:cNvPr id="42" name="Object 41" descr="public/generated/icons/containers-kubernetes.png">    </p:cNvPr>
           <p:cNvPicPr>
             <a:picLocks noChangeAspect="1"/>
           </p:cNvPicPr>
@@ -31623,7 +31623,7 @@
                 <a:ea typeface="Helvetica" pitchFamily="34" charset="-122"/>
                 <a:cs typeface="Helvetica" pitchFamily="34" charset="-120"/>
               </a:rPr>
-              <a:t>KOMPRISE INTELLIGENT DATA MANAGEMENT SUITE</a:t>
+              <a:t>KUBERNETES SERVICE</a:t>
             </a:r>
             <a:endParaRPr lang="en-US" dirty="0"/>
           </a:p>
@@ -31656,7 +31656,7 @@
       </p:sp>
       <p:pic>
         <p:nvPicPr>
-          <p:cNvPr id="45" name="Object 44" descr="public/generated/icons/containers-kubernetes.png">    </p:cNvPr>
+          <p:cNvPr id="45" name="Object 44" descr="public/generated/icons/is.load-balancer.png">    </p:cNvPr>
           <p:cNvPicPr>
             <a:picLocks noChangeAspect="1"/>
           </p:cNvPicPr>
@@ -31712,7 +31712,7 @@
                 <a:ea typeface="Helvetica" pitchFamily="34" charset="-122"/>
                 <a:cs typeface="Helvetica" pitchFamily="34" charset="-120"/>
               </a:rPr>
-              <a:t>KUBERNETES SERVICE</a:t>
+              <a:t>LOAD BALANCER FOR VPC</a:t>
             </a:r>
             <a:endParaRPr lang="en-US" dirty="0"/>
           </a:p>
@@ -31745,7 +31745,7 @@
       </p:sp>
       <p:pic>
         <p:nvPicPr>
-          <p:cNvPr id="48" name="Object 47" descr="public/generated/icons/is.load-balancer.png">    </p:cNvPr>
+          <p:cNvPr id="48" name="Object 47" descr="public/generated/icons/e13e1860-959c-11e8-871e-ad157af61ad7.png">    </p:cNvPr>
           <p:cNvPicPr>
             <a:picLocks noChangeAspect="1"/>
           </p:cNvPicPr>
@@ -31801,7 +31801,7 @@
                 <a:ea typeface="Helvetica" pitchFamily="34" charset="-122"/>
                 <a:cs typeface="Helvetica" pitchFamily="34" charset="-120"/>
               </a:rPr>
-              <a:t>LOAD BALANCER FOR VPC</a:t>
+              <a:t>LOG ANALYSIS</a:t>
             </a:r>
             <a:endParaRPr lang="en-US" dirty="0"/>
           </a:p>
@@ -31834,7 +31834,7 @@
       </p:sp>
       <p:pic>
         <p:nvPicPr>
-          <p:cNvPr id="51" name="Object 50" descr="public/generated/icons/e13e1860-959c-11e8-871e-ad157af61ad7.png">    </p:cNvPr>
+          <p:cNvPr id="51" name="Object 50" descr="public/generated/icons/9349854b-eb46-427f-8ef6-687d601c9eda.png">    </p:cNvPr>
           <p:cNvPicPr>
             <a:picLocks noChangeAspect="1"/>
           </p:cNvPicPr>
@@ -31890,7 +31890,7 @@
                 <a:ea typeface="Helvetica" pitchFamily="34" charset="-122"/>
                 <a:cs typeface="Helvetica" pitchFamily="34" charset="-120"/>
               </a:rPr>
-              <a:t>LOG ANALYSIS</a:t>
+              <a:t>LYVE DATA TRANSFER SERVICES</a:t>
             </a:r>
             <a:endParaRPr lang="en-US" dirty="0"/>
           </a:p>
@@ -31923,7 +31923,7 @@
       </p:sp>
       <p:pic>
         <p:nvPicPr>
-          <p:cNvPr id="54" name="Object 53" descr="public/generated/icons/9349854b-eb46-427f-8ef6-687d601c9eda.png">    </p:cNvPr>
+          <p:cNvPr id="54" name="Object 53" descr="public/generated/icons/cf329950-0a3e-11e8-922e-f1366c6e1c83-managedveeam.png">    </p:cNvPr>
           <p:cNvPicPr>
             <a:picLocks noChangeAspect="1"/>
           </p:cNvPicPr>
@@ -31979,7 +31979,7 @@
                 <a:ea typeface="Helvetica" pitchFamily="34" charset="-122"/>
                 <a:cs typeface="Helvetica" pitchFamily="34" charset="-120"/>
               </a:rPr>
-              <a:t>LYVE DATA TRANSFER SERVICES</a:t>
+              <a:t>MANAGED BACKUP SERVICES</a:t>
             </a:r>
             <a:endParaRPr lang="en-US" dirty="0"/>
           </a:p>
@@ -32012,7 +32012,7 @@
       </p:sp>
       <p:pic>
         <p:nvPicPr>
-          <p:cNvPr id="57" name="Object 56" descr="public/generated/icons/cf329950-0a3e-11e8-922e-f1366c6e1c83-managedveeam.png">    </p:cNvPr>
+          <p:cNvPr id="57" name="Object 56" descr="public/generated/icons/cf329950-0a3e-11e8-922e-f1366c6e1c83-managedzerto.png">    </p:cNvPr>
           <p:cNvPicPr>
             <a:picLocks noChangeAspect="1"/>
           </p:cNvPicPr>
@@ -32068,7 +32068,7 @@
                 <a:ea typeface="Helvetica" pitchFamily="34" charset="-122"/>
                 <a:cs typeface="Helvetica" pitchFamily="34" charset="-120"/>
               </a:rPr>
-              <a:t>MANAGED BACKUP SERVICES</a:t>
+              <a:t>MANAGED DISASTER RECOVERY SERVICES</a:t>
             </a:r>
             <a:endParaRPr lang="en-US" dirty="0"/>
           </a:p>
@@ -32101,7 +32101,7 @@
       </p:sp>
       <p:pic>
         <p:nvPicPr>
-          <p:cNvPr id="60" name="Object 59" descr="public/generated/icons/cf329950-0a3e-11e8-922e-f1366c6e1c83-managedzerto.png">    </p:cNvPr>
+          <p:cNvPr id="60" name="Object 59" descr="public/generated/icons/cfb3c3da-7b1f-0879-f414-f367da218488.png">    </p:cNvPr>
           <p:cNvPicPr>
             <a:picLocks noChangeAspect="1"/>
           </p:cNvPicPr>
@@ -32157,7 +32157,7 @@
                 <a:ea typeface="Helvetica" pitchFamily="34" charset="-122"/>
                 <a:cs typeface="Helvetica" pitchFamily="34" charset="-120"/>
               </a:rPr>
-              <a:t>MANAGED DISASTER RECOVERY SERVICES</a:t>
+              <a:t>MANAGED NETWORK SECURITY SERVICES</a:t>
             </a:r>
             <a:endParaRPr lang="en-US" dirty="0"/>
           </a:p>
@@ -32190,7 +32190,7 @@
       </p:sp>
       <p:pic>
         <p:nvPicPr>
-          <p:cNvPr id="63" name="Object 62" descr="public/generated/icons/cfb3c3da-7b1f-0879-f414-f367da218488.png">    </p:cNvPr>
+          <p:cNvPr id="63" name="Object 62" descr="public/generated/icons/cf329950-0a3e-11e8-922e-f1366c6e1c83-imi.png">    </p:cNvPr>
           <p:cNvPicPr>
             <a:picLocks noChangeAspect="1"/>
           </p:cNvPicPr>
@@ -32246,7 +32246,7 @@
                 <a:ea typeface="Helvetica" pitchFamily="34" charset="-122"/>
                 <a:cs typeface="Helvetica" pitchFamily="34" charset="-120"/>
               </a:rPr>
-              <a:t>MANAGED NETWORK SECURITY SERVICES</a:t>
+              <a:t>MANAGED VMWARE SERVICES</a:t>
             </a:r>
             <a:endParaRPr lang="en-US" dirty="0"/>
           </a:p>
@@ -32279,7 +32279,7 @@
       </p:sp>
       <p:pic>
         <p:nvPicPr>
-          <p:cNvPr id="66" name="Object 65" descr="public/generated/icons/cf329950-0a3e-11e8-922e-f1366c6e1c83-imi.png">    </p:cNvPr>
+          <p:cNvPr id="66" name="Object 65" descr="public/generated/icons/14bd30e0-8921-11e9-a2c5-13fceaf553c0.png">    </p:cNvPr>
           <p:cNvPicPr>
             <a:picLocks noChangeAspect="1"/>
           </p:cNvPicPr>
@@ -32335,7 +32335,7 @@
                 <a:ea typeface="Helvetica" pitchFamily="34" charset="-122"/>
                 <a:cs typeface="Helvetica" pitchFamily="34" charset="-120"/>
               </a:rPr>
-              <a:t>MANAGED VMWARE SERVICES</a:t>
+              <a:t>MATCH 360 WITH WATSON</a:t>
             </a:r>
             <a:endParaRPr lang="en-US" dirty="0"/>
           </a:p>
@@ -32368,7 +32368,7 @@
       </p:sp>
       <p:pic>
         <p:nvPicPr>
-          <p:cNvPr id="69" name="Object 68" descr="public/generated/icons/14bd30e0-8921-11e9-a2c5-13fceaf553c0.png">    </p:cNvPr>
+          <p:cNvPr id="69" name="Object 68" descr="public/generated/icons/messages-for-rabbitmq.png">    </p:cNvPr>
           <p:cNvPicPr>
             <a:picLocks noChangeAspect="1"/>
           </p:cNvPicPr>
@@ -32424,7 +32424,7 @@
                 <a:ea typeface="Helvetica" pitchFamily="34" charset="-122"/>
                 <a:cs typeface="Helvetica" pitchFamily="34" charset="-120"/>
               </a:rPr>
-              <a:t>MATCH 360 WITH WATSON</a:t>
+              <a:t>MESSAGES FOR RABBITMQ</a:t>
             </a:r>
             <a:endParaRPr lang="en-US" dirty="0"/>
           </a:p>
@@ -32457,7 +32457,7 @@
       </p:sp>
       <p:pic>
         <p:nvPicPr>
-          <p:cNvPr id="72" name="Object 71" descr="public/generated/icons/messages-for-rabbitmq.png">    </p:cNvPr>
+          <p:cNvPr id="72" name="Object 71" descr="public/generated/icons/d4000551-49ff-4868-9e05-f863e60fad3a.png">    </p:cNvPr>
           <p:cNvPicPr>
             <a:picLocks noChangeAspect="1"/>
           </p:cNvPicPr>
@@ -32513,7 +32513,7 @@
                 <a:ea typeface="Helvetica" pitchFamily="34" charset="-122"/>
                 <a:cs typeface="Helvetica" pitchFamily="34" charset="-120"/>
               </a:rPr>
-              <a:t>MESSAGES FOR RABBITMQ</a:t>
+              <a:t>MINIO</a:t>
             </a:r>
             <a:endParaRPr lang="en-US" dirty="0"/>
           </a:p>
@@ -32546,7 +32546,7 @@
       </p:sp>
       <p:pic>
         <p:nvPicPr>
-          <p:cNvPr id="75" name="Object 74" descr="public/generated/icons/d4000551-49ff-4868-9e05-f863e60fad3a.png">    </p:cNvPr>
+          <p:cNvPr id="75" name="Object 74" descr="public/generated/icons/9d9545b4-b866-4c1b-9fc0-39273aef5bb0.png">    </p:cNvPr>
           <p:cNvPicPr>
             <a:picLocks noChangeAspect="1"/>
           </p:cNvPicPr>
@@ -32602,7 +32602,7 @@
                 <a:ea typeface="Helvetica" pitchFamily="34" charset="-122"/>
                 <a:cs typeface="Helvetica" pitchFamily="34" charset="-120"/>
               </a:rPr>
-              <a:t>MINIO</a:t>
+              <a:t>MONO-X ONE FOR POWERVS</a:t>
             </a:r>
             <a:endParaRPr lang="en-US" dirty="0"/>
           </a:p>
@@ -32635,7 +32635,7 @@
       </p:sp>
       <p:pic>
         <p:nvPicPr>
-          <p:cNvPr id="78" name="Object 77" descr="public/generated/icons/9d9545b4-b866-4c1b-9fc0-39273aef5bb0.png">    </p:cNvPr>
+          <p:cNvPr id="78" name="Object 77" descr="public/generated/icons/01037c41-adce-4bb5-8b45-0c06004916c4.png">    </p:cNvPr>
           <p:cNvPicPr>
             <a:picLocks noChangeAspect="1"/>
           </p:cNvPicPr>
@@ -32691,7 +32691,7 @@
                 <a:ea typeface="Helvetica" pitchFamily="34" charset="-122"/>
                 <a:cs typeface="Helvetica" pitchFamily="34" charset="-120"/>
               </a:rPr>
-              <a:t>MONO-X ONE FOR POWERVS</a:t>
+              <a:t>MQ</a:t>
             </a:r>
             <a:endParaRPr lang="en-US" dirty="0"/>
           </a:p>
@@ -32724,7 +32724,7 @@
       </p:sp>
       <p:pic>
         <p:nvPicPr>
-          <p:cNvPr id="81" name="Object 80" descr="public/generated/icons/01037c41-adce-4bb5-8b45-0c06004916c4.png">    </p:cNvPr>
+          <p:cNvPr id="81" name="Object 80" descr="public/generated/icons/is.snapshot-consistency-group.png">    </p:cNvPr>
           <p:cNvPicPr>
             <a:picLocks noChangeAspect="1"/>
           </p:cNvPicPr>
@@ -32780,7 +32780,7 @@
                 <a:ea typeface="Helvetica" pitchFamily="34" charset="-122"/>
                 <a:cs typeface="Helvetica" pitchFamily="34" charset="-120"/>
               </a:rPr>
-              <a:t>MQ</a:t>
+              <a:t>MULTI VOLUME SNAPSHOTS FOR VPC</a:t>
             </a:r>
             <a:endParaRPr lang="en-US" dirty="0"/>
           </a:p>
@@ -32813,7 +32813,7 @@
       </p:sp>
       <p:pic>
         <p:nvPicPr>
-          <p:cNvPr id="84" name="Object 83" descr="public/generated/icons/is.snapshot-consistency-group.png">    </p:cNvPr>
+          <p:cNvPr id="84" name="Object 83" descr="public/generated/icons/bb6393bc-7d81-446b-9728-61b704f6eca5.png">    </p:cNvPr>
           <p:cNvPicPr>
             <a:picLocks noChangeAspect="1"/>
           </p:cNvPicPr>
@@ -32869,7 +32869,7 @@
                 <a:ea typeface="Helvetica" pitchFamily="34" charset="-122"/>
                 <a:cs typeface="Helvetica" pitchFamily="34" charset="-120"/>
               </a:rPr>
-              <a:t>MULTI VOLUME SNAPSHOTS FOR VPC</a:t>
+              <a:t>NATURAL LANGUAGE UNDERSTANDING</a:t>
             </a:r>
             <a:endParaRPr lang="en-US" dirty="0"/>
           </a:p>
@@ -32902,7 +32902,7 @@
       </p:sp>
       <p:pic>
         <p:nvPicPr>
-          <p:cNvPr id="87" name="Object 86" descr="public/generated/icons/bb6393bc-7d81-446b-9728-61b704f6eca5.png">    </p:cNvPr>
+          <p:cNvPr id="87" name="Object 86" descr="public/generated/icons/cf329950-0a3e-11e8-922e-f1366c6e1c83-netapp.png">    </p:cNvPr>
           <p:cNvPicPr>
             <a:picLocks noChangeAspect="1"/>
           </p:cNvPicPr>
@@ -32958,7 +32958,7 @@
                 <a:ea typeface="Helvetica" pitchFamily="34" charset="-122"/>
                 <a:cs typeface="Helvetica" pitchFamily="34" charset="-120"/>
               </a:rPr>
-              <a:t>NATURAL LANGUAGE UNDERSTANDING</a:t>
+              <a:t>NETAPP ONTAP SELECT</a:t>
             </a:r>
             <a:endParaRPr lang="en-US" dirty="0"/>
           </a:p>
@@ -32991,7 +32991,7 @@
       </p:sp>
       <p:pic>
         <p:nvPicPr>
-          <p:cNvPr id="90" name="Object 89" descr="public/generated/icons/cf329950-0a3e-11e8-922e-f1366c6e1c83-netapp.png">    </p:cNvPr>
+          <p:cNvPr id="90" name="Object 89" descr="public/generated/icons/cc42cff0-b19b-11eb-9a66-c717766c1d30.png">    </p:cNvPr>
           <p:cNvPicPr>
             <a:picLocks noChangeAspect="1"/>
           </p:cNvPicPr>
@@ -33047,7 +33047,7 @@
                 <a:ea typeface="Helvetica" pitchFamily="34" charset="-122"/>
                 <a:cs typeface="Helvetica" pitchFamily="34" charset="-120"/>
               </a:rPr>
-              <a:t>NETAPP ONTAP SELECT</a:t>
+              <a:t>NETEZZA PERFORMANCE SERVER</a:t>
             </a:r>
             <a:endParaRPr lang="en-US" dirty="0"/>
           </a:p>
@@ -33080,7 +33080,7 @@
       </p:sp>
       <p:pic>
         <p:nvPicPr>
-          <p:cNvPr id="93" name="Object 92" descr="public/generated/icons/cc42cff0-b19b-11eb-9a66-c717766c1d30.png">    </p:cNvPr>
+          <p:cNvPr id="93" name="Object 92" descr="public/generated/icons/is.network-acl.png">    </p:cNvPr>
           <p:cNvPicPr>
             <a:picLocks noChangeAspect="1"/>
           </p:cNvPicPr>
@@ -33136,7 +33136,7 @@
                 <a:ea typeface="Helvetica" pitchFamily="34" charset="-122"/>
                 <a:cs typeface="Helvetica" pitchFamily="34" charset="-120"/>
               </a:rPr>
-              <a:t>NETEZZA PERFORMANCE SERVER</a:t>
+              <a:t>NETWORK ACL</a:t>
             </a:r>
             <a:endParaRPr lang="en-US" dirty="0"/>
           </a:p>
@@ -33169,7 +33169,7 @@
       </p:sp>
       <p:pic>
         <p:nvPicPr>
-          <p:cNvPr id="96" name="Object 95" descr="public/generated/icons/is.network-acl.png">    </p:cNvPr>
+          <p:cNvPr id="96" name="Object 95" descr="public/generated/icons/d97bd0c3-a8e5-4f3d-b925-16380e039a9a.png">    </p:cNvPr>
           <p:cNvPicPr>
             <a:picLocks noChangeAspect="1"/>
           </p:cNvPicPr>
@@ -33225,7 +33225,7 @@
                 <a:ea typeface="Helvetica" pitchFamily="34" charset="-122"/>
                 <a:cs typeface="Helvetica" pitchFamily="34" charset="-120"/>
               </a:rPr>
-              <a:t>NETWORK ACL</a:t>
+              <a:t>NEURALSEEK</a:t>
             </a:r>
             <a:endParaRPr lang="en-US" dirty="0"/>
           </a:p>
@@ -33258,7 +33258,7 @@
       </p:sp>
       <p:pic>
         <p:nvPicPr>
-          <p:cNvPr id="99" name="Object 98" descr="public/generated/icons/d97bd0c3-a8e5-4f3d-b925-16380e039a9a.png">    </p:cNvPr>
+          <p:cNvPr id="99" name="Object 98" descr="public/generated/icons/466091c0-9b8d-11eb-8f8c-91e95378d441.png">    </p:cNvPr>
           <p:cNvPicPr>
             <a:picLocks noChangeAspect="1"/>
           </p:cNvPicPr>
@@ -33314,7 +33314,7 @@
                 <a:ea typeface="Helvetica" pitchFamily="34" charset="-122"/>
                 <a:cs typeface="Helvetica" pitchFamily="34" charset="-120"/>
               </a:rPr>
-              <a:t>NEURALSEEK</a:t>
+              <a:t>OPENPAGES</a:t>
             </a:r>
             <a:endParaRPr lang="en-US" dirty="0"/>
           </a:p>
@@ -33347,7 +33347,7 @@
       </p:sp>
       <p:pic>
         <p:nvPicPr>
-          <p:cNvPr id="102" name="Object 101" descr="public/generated/icons/466091c0-9b8d-11eb-8f8c-91e95378d441.png">    </p:cNvPr>
+          <p:cNvPr id="102" name="Object 101" descr="public/generated/icons/2f756420-434f-11e8-ae40-6bdd72502abc.png">    </p:cNvPr>
           <p:cNvPicPr>
             <a:picLocks noChangeAspect="1"/>
           </p:cNvPicPr>
@@ -33403,7 +33403,7 @@
                 <a:ea typeface="Helvetica" pitchFamily="34" charset="-122"/>
                 <a:cs typeface="Helvetica" pitchFamily="34" charset="-120"/>
               </a:rPr>
-              <a:t>OPENPAGES</a:t>
+              <a:t>PARTNER WITH TECHNOLOGY EXPERT LABS</a:t>
             </a:r>
             <a:endParaRPr lang="en-US" dirty="0"/>
           </a:p>
@@ -33436,7 +33436,7 @@
       </p:sp>
       <p:pic>
         <p:nvPicPr>
-          <p:cNvPr id="105" name="Object 104" descr="public/generated/icons/2f756420-434f-11e8-ae40-6bdd72502abc.png">    </p:cNvPr>
+          <p:cNvPr id="105" name="Object 104" descr="public/generated/icons/bb6229f0-e632-11ee-ae26-5d6d9ba99eec.png">    </p:cNvPr>
           <p:cNvPicPr>
             <a:picLocks noChangeAspect="1"/>
           </p:cNvPicPr>
@@ -33492,7 +33492,7 @@
                 <a:ea typeface="Helvetica" pitchFamily="34" charset="-122"/>
                 <a:cs typeface="Helvetica" pitchFamily="34" charset="-120"/>
               </a:rPr>
-              <a:t>PARTNER WITH TECHNOLOGY EXPERT LABS</a:t>
+              <a:t>PARTNER WITH TECHNOLOGY EXPERT LABS - BUILD IBM STORAGE PROTECT FOR POWERVS</a:t>
             </a:r>
             <a:endParaRPr lang="en-US" dirty="0"/>
           </a:p>
@@ -33525,7 +33525,7 @@
       </p:sp>
       <p:pic>
         <p:nvPicPr>
-          <p:cNvPr id="108" name="Object 107" descr="public/generated/icons/bb6229f0-e632-11ee-ae26-5d6d9ba99eec.png">    </p:cNvPr>
+          <p:cNvPr id="108" name="Object 107" descr="public/generated/icons/f0ea1510-e632-11ee-acb6-4d13e7035de5.png">    </p:cNvPr>
           <p:cNvPicPr>
             <a:picLocks noChangeAspect="1"/>
           </p:cNvPicPr>
@@ -33581,7 +33581,7 @@
                 <a:ea typeface="Helvetica" pitchFamily="34" charset="-122"/>
                 <a:cs typeface="Helvetica" pitchFamily="34" charset="-120"/>
               </a:rPr>
-              <a:t>PARTNER WITH TECHNOLOGY EXPERT LABS - BUILD IBM STORAGE PROTECT FOR POWERVS</a:t>
+              <a:t>PARTNER WITH TECHNOLOGY EXPERT LABS - BUILD SAP HANA STARTER EDITION</a:t>
             </a:r>
             <a:endParaRPr lang="en-US" dirty="0"/>
           </a:p>
@@ -33647,7 +33647,7 @@
       </p:sp>
       <p:pic>
         <p:nvPicPr>
-          <p:cNvPr id="3" name="Object 2" descr="public/generated/icons/f0ea1510-e632-11ee-acb6-4d13e7035de5.png">    </p:cNvPr>
+          <p:cNvPr id="3" name="Object 2" descr="public/generated/icons/339a87f0-e633-11ee-acb6-4d13e7035de5.png">    </p:cNvPr>
           <p:cNvPicPr>
             <a:picLocks noChangeAspect="1"/>
           </p:cNvPicPr>
@@ -33703,7 +33703,7 @@
                 <a:ea typeface="Helvetica" pitchFamily="34" charset="-122"/>
                 <a:cs typeface="Helvetica" pitchFamily="34" charset="-120"/>
               </a:rPr>
-              <a:t>PARTNER WITH TECHNOLOGY EXPERT LABS - BUILD SAP HANA STARTER EDITION</a:t>
+              <a:t>PARTNER WITH TECHNOLOGY EXPERT LABS - MIGRATE WORKLOADS TO IBM POWER VIRTUAL SERVER</a:t>
             </a:r>
             <a:endParaRPr lang="en-US" dirty="0"/>
           </a:p>
@@ -33736,7 +33736,7 @@
       </p:sp>
       <p:pic>
         <p:nvPicPr>
-          <p:cNvPr id="6" name="Object 5" descr="public/generated/icons/339a87f0-e633-11ee-acb6-4d13e7035de5.png">    </p:cNvPr>
+          <p:cNvPr id="6" name="Object 5" descr="public/generated/icons/is.placement-group.png">    </p:cNvPr>
           <p:cNvPicPr>
             <a:picLocks noChangeAspect="1"/>
           </p:cNvPicPr>
@@ -33792,7 +33792,7 @@
                 <a:ea typeface="Helvetica" pitchFamily="34" charset="-122"/>
                 <a:cs typeface="Helvetica" pitchFamily="34" charset="-120"/>
               </a:rPr>
-              <a:t>PARTNER WITH TECHNOLOGY EXPERT LABS - MIGRATE WORKLOADS TO IBM POWER VIRTUAL SERVER</a:t>
+              <a:t>PLACEMENT GROUPS FOR VPC</a:t>
             </a:r>
             <a:endParaRPr lang="en-US" dirty="0"/>
           </a:p>
@@ -33825,7 +33825,7 @@
       </p:sp>
       <p:pic>
         <p:nvPicPr>
-          <p:cNvPr id="9" name="Object 8" descr="public/generated/icons/is.placement-group.png">    </p:cNvPr>
+          <p:cNvPr id="9" name="Object 8" descr="public/generated/icons/41690130-a4e8-11ea-94c3-d72a57643c7d.png">    </p:cNvPr>
           <p:cNvPicPr>
             <a:picLocks noChangeAspect="1"/>
           </p:cNvPicPr>
@@ -33881,7 +33881,7 @@
                 <a:ea typeface="Helvetica" pitchFamily="34" charset="-122"/>
                 <a:cs typeface="Helvetica" pitchFamily="34" charset="-120"/>
               </a:rPr>
-              <a:t>PLACEMENT GROUPS FOR VPC</a:t>
+              <a:t>PLANNING ANALYTICS</a:t>
             </a:r>
             <a:endParaRPr lang="en-US" dirty="0"/>
           </a:p>
@@ -33914,7 +33914,7 @@
       </p:sp>
       <p:pic>
         <p:nvPicPr>
-          <p:cNvPr id="12" name="Object 11" descr="public/generated/icons/41690130-a4e8-11ea-94c3-d72a57643c7d.png">    </p:cNvPr>
+          <p:cNvPr id="12" name="Object 11" descr="public/generated/icons/d666f360-66d1-11e9-85ef-a19427301a8c.png">    </p:cNvPr>
           <p:cNvPicPr>
             <a:picLocks noChangeAspect="1"/>
           </p:cNvPicPr>
@@ -33970,7 +33970,7 @@
                 <a:ea typeface="Helvetica" pitchFamily="34" charset="-122"/>
                 <a:cs typeface="Helvetica" pitchFamily="34" charset="-120"/>
               </a:rPr>
-              <a:t>PLANNING ANALYTICS</a:t>
+              <a:t>PORTWORX ENTERPRISE</a:t>
             </a:r>
             <a:endParaRPr lang="en-US" dirty="0"/>
           </a:p>
@@ -34003,7 +34003,7 @@
       </p:sp>
       <p:pic>
         <p:nvPicPr>
-          <p:cNvPr id="15" name="Object 14" descr="public/generated/icons/d666f360-66d1-11e9-85ef-a19427301a8c.png">    </p:cNvPr>
+          <p:cNvPr id="15" name="Object 14" descr="public/generated/icons/7b2cdb0e-ad91-4fd7-97c0-5398874ec27b.png">    </p:cNvPr>
           <p:cNvPicPr>
             <a:picLocks noChangeAspect="1"/>
           </p:cNvPicPr>
@@ -34059,7 +34059,7 @@
                 <a:ea typeface="Helvetica" pitchFamily="34" charset="-122"/>
                 <a:cs typeface="Helvetica" pitchFamily="34" charset="-120"/>
               </a:rPr>
-              <a:t>PORTWORX ENTERPRISE</a:t>
+              <a:t>POWER I MIGRATE 23 SERVICES</a:t>
             </a:r>
             <a:endParaRPr lang="en-US" dirty="0"/>
           </a:p>
@@ -34092,7 +34092,7 @@
       </p:sp>
       <p:pic>
         <p:nvPicPr>
-          <p:cNvPr id="18" name="Object 17" descr="public/generated/icons/7b2cdb0e-ad91-4fd7-97c0-5398874ec27b.png">    </p:cNvPr>
+          <p:cNvPr id="18" name="Object 17" descr="public/generated/icons/9828699d-dda7-4022-839b-c8e1e8b7d9d8.png">    </p:cNvPr>
           <p:cNvPicPr>
             <a:picLocks noChangeAspect="1"/>
           </p:cNvPicPr>
@@ -34148,7 +34148,7 @@
                 <a:ea typeface="Helvetica" pitchFamily="34" charset="-122"/>
                 <a:cs typeface="Helvetica" pitchFamily="34" charset="-120"/>
               </a:rPr>
-              <a:t>POWER I MIGRATE 23 SERVICES</a:t>
+              <a:t>POWER I MIGRATE WHILE ACTIVE SERVICES</a:t>
             </a:r>
             <a:endParaRPr lang="en-US" dirty="0"/>
           </a:p>
@@ -34181,7 +34181,7 @@
       </p:sp>
       <p:pic>
         <p:nvPicPr>
-          <p:cNvPr id="21" name="Object 20" descr="public/generated/icons/9828699d-dda7-4022-839b-c8e1e8b7d9d8.png">    </p:cNvPr>
+          <p:cNvPr id="21" name="Object 20" descr="public/generated/icons/power-iaas.workspace.png">    </p:cNvPr>
           <p:cNvPicPr>
             <a:picLocks noChangeAspect="1"/>
           </p:cNvPicPr>
@@ -34237,7 +34237,7 @@
                 <a:ea typeface="Helvetica" pitchFamily="34" charset="-122"/>
                 <a:cs typeface="Helvetica" pitchFamily="34" charset="-120"/>
               </a:rPr>
-              <a:t>POWER I MIGRATE WHILE ACTIVE SERVICES</a:t>
+              <a:t>POWER VIRTUAL SERVER</a:t>
             </a:r>
             <a:endParaRPr lang="en-US" dirty="0"/>
           </a:p>
@@ -34270,7 +34270,7 @@
       </p:sp>
       <p:pic>
         <p:nvPicPr>
-          <p:cNvPr id="24" name="Object 23" descr="public/generated/icons/power-iaas.workspace.png">    </p:cNvPr>
+          <p:cNvPr id="24" name="Object 23" descr="public/generated/icons/power-iaas.dedicated-host.png">    </p:cNvPr>
           <p:cNvPicPr>
             <a:picLocks noChangeAspect="1"/>
           </p:cNvPicPr>
@@ -34326,7 +34326,7 @@
                 <a:ea typeface="Helvetica" pitchFamily="34" charset="-122"/>
                 <a:cs typeface="Helvetica" pitchFamily="34" charset="-120"/>
               </a:rPr>
-              <a:t>POWER VIRTUAL SERVER</a:t>
+              <a:t>POWER VIRTUAL SERVER DEDICATED HOST</a:t>
             </a:r>
             <a:endParaRPr lang="en-US" dirty="0"/>
           </a:p>
@@ -34359,7 +34359,7 @@
       </p:sp>
       <p:pic>
         <p:nvPicPr>
-          <p:cNvPr id="27" name="Object 26" descr="public/generated/icons/power-iaas.dedicated-host.png">    </p:cNvPr>
+          <p:cNvPr id="27" name="Object 26" descr="public/generated/icons/208072a0-7978-11ef-b369-0733120a414f.png">    </p:cNvPr>
           <p:cNvPicPr>
             <a:picLocks noChangeAspect="1"/>
           </p:cNvPicPr>
@@ -34415,7 +34415,7 @@
                 <a:ea typeface="Helvetica" pitchFamily="34" charset="-122"/>
                 <a:cs typeface="Helvetica" pitchFamily="34" charset="-120"/>
               </a:rPr>
-              <a:t>POWER VIRTUAL SERVER DEDICATED HOST</a:t>
+              <a:t>POWER VIRTUAL SERVER DR AUTOMATION</a:t>
             </a:r>
             <a:endParaRPr lang="en-US" dirty="0"/>
           </a:p>
@@ -34448,7 +34448,7 @@
       </p:sp>
       <p:pic>
         <p:nvPicPr>
-          <p:cNvPr id="30" name="Object 29" descr="public/generated/icons/208072a0-7978-11ef-b369-0733120a414f.png">    </p:cNvPr>
+          <p:cNvPr id="30" name="Object 29" descr="public/generated/icons/power-iaas.image.png">    </p:cNvPr>
           <p:cNvPicPr>
             <a:picLocks noChangeAspect="1"/>
           </p:cNvPicPr>
@@ -34504,7 +34504,7 @@
                 <a:ea typeface="Helvetica" pitchFamily="34" charset="-122"/>
                 <a:cs typeface="Helvetica" pitchFamily="34" charset="-120"/>
               </a:rPr>
-              <a:t>POWER VIRTUAL SERVER DR AUTOMATION</a:t>
+              <a:t>POWER VIRTUAL SERVER IMAGE</a:t>
             </a:r>
             <a:endParaRPr lang="en-US" dirty="0"/>
           </a:p>
@@ -34537,7 +34537,7 @@
       </p:sp>
       <p:pic>
         <p:nvPicPr>
-          <p:cNvPr id="33" name="Object 32" descr="public/generated/icons/power-iaas.image.png">    </p:cNvPr>
+          <p:cNvPr id="33" name="Object 32" descr="public/generated/icons/power-iaas.network.png">    </p:cNvPr>
           <p:cNvPicPr>
             <a:picLocks noChangeAspect="1"/>
           </p:cNvPicPr>
@@ -34593,7 +34593,7 @@
                 <a:ea typeface="Helvetica" pitchFamily="34" charset="-122"/>
                 <a:cs typeface="Helvetica" pitchFamily="34" charset="-120"/>
               </a:rPr>
-              <a:t>POWER VIRTUAL SERVER IMAGE</a:t>
+              <a:t>POWER VIRTUAL SERVER NETWORK</a:t>
             </a:r>
             <a:endParaRPr lang="en-US" dirty="0"/>
           </a:p>
@@ -34626,7 +34626,7 @@
       </p:sp>
       <p:pic>
         <p:nvPicPr>
-          <p:cNvPr id="36" name="Object 35" descr="public/generated/icons/power-iaas.network.png">    </p:cNvPr>
+          <p:cNvPr id="36" name="Object 35" descr="public/generated/icons/power-iaas.network-address-group.png">    </p:cNvPr>
           <p:cNvPicPr>
             <a:picLocks noChangeAspect="1"/>
           </p:cNvPicPr>
@@ -34682,7 +34682,7 @@
                 <a:ea typeface="Helvetica" pitchFamily="34" charset="-122"/>
                 <a:cs typeface="Helvetica" pitchFamily="34" charset="-120"/>
               </a:rPr>
-              <a:t>POWER VIRTUAL SERVER NETWORK</a:t>
+              <a:t>POWER VIRTUAL SERVER NETWORK ADDRESS GROUP</a:t>
             </a:r>
             <a:endParaRPr lang="en-US" dirty="0"/>
           </a:p>
@@ -34715,7 +34715,7 @@
       </p:sp>
       <p:pic>
         <p:nvPicPr>
-          <p:cNvPr id="39" name="Object 38" descr="public/generated/icons/power-iaas.network-address-group.png">    </p:cNvPr>
+          <p:cNvPr id="39" name="Object 38" descr="public/generated/icons/power-iaas.network-interface.png">    </p:cNvPr>
           <p:cNvPicPr>
             <a:picLocks noChangeAspect="1"/>
           </p:cNvPicPr>
@@ -34771,7 +34771,7 @@
                 <a:ea typeface="Helvetica" pitchFamily="34" charset="-122"/>
                 <a:cs typeface="Helvetica" pitchFamily="34" charset="-120"/>
               </a:rPr>
-              <a:t>POWER VIRTUAL SERVER NETWORK ADDRESS GROUP</a:t>
+              <a:t>POWER VIRTUAL SERVER NETWORK INTERFACE</a:t>
             </a:r>
             <a:endParaRPr lang="en-US" dirty="0"/>
           </a:p>
@@ -34804,7 +34804,7 @@
       </p:sp>
       <p:pic>
         <p:nvPicPr>
-          <p:cNvPr id="42" name="Object 41" descr="public/generated/icons/power-iaas.network-interface.png">    </p:cNvPr>
+          <p:cNvPr id="42" name="Object 41" descr="public/generated/icons/power-iaas.network-security-group.png">    </p:cNvPr>
           <p:cNvPicPr>
             <a:picLocks noChangeAspect="1"/>
           </p:cNvPicPr>
@@ -34860,7 +34860,7 @@
                 <a:ea typeface="Helvetica" pitchFamily="34" charset="-122"/>
                 <a:cs typeface="Helvetica" pitchFamily="34" charset="-120"/>
               </a:rPr>
-              <a:t>POWER VIRTUAL SERVER NETWORK INTERFACE</a:t>
+              <a:t>POWER VIRTUAL SERVER NETWORK SECURITY GROUP</a:t>
             </a:r>
             <a:endParaRPr lang="en-US" dirty="0"/>
           </a:p>
@@ -34893,7 +34893,7 @@
       </p:sp>
       <p:pic>
         <p:nvPicPr>
-          <p:cNvPr id="45" name="Object 44" descr="public/generated/icons/power-iaas.network-security-group.png">    </p:cNvPr>
+          <p:cNvPr id="45" name="Object 44" descr="public/generated/icons/power-iaas.shared-processor-pool.png">    </p:cNvPr>
           <p:cNvPicPr>
             <a:picLocks noChangeAspect="1"/>
           </p:cNvPicPr>
@@ -34949,7 +34949,7 @@
                 <a:ea typeface="Helvetica" pitchFamily="34" charset="-122"/>
                 <a:cs typeface="Helvetica" pitchFamily="34" charset="-120"/>
               </a:rPr>
-              <a:t>POWER VIRTUAL SERVER NETWORK SECURITY GROUP</a:t>
+              <a:t>POWER VIRTUAL SERVER SHARED PROCESSOR POOL</a:t>
             </a:r>
             <a:endParaRPr lang="en-US" dirty="0"/>
           </a:p>
@@ -34982,7 +34982,7 @@
       </p:sp>
       <p:pic>
         <p:nvPicPr>
-          <p:cNvPr id="48" name="Object 47" descr="public/generated/icons/power-iaas.shared-processor-pool.png">    </p:cNvPr>
+          <p:cNvPr id="48" name="Object 47" descr="public/generated/icons/power-iaas.snapshot.png">    </p:cNvPr>
           <p:cNvPicPr>
             <a:picLocks noChangeAspect="1"/>
           </p:cNvPicPr>
@@ -35038,7 +35038,7 @@
                 <a:ea typeface="Helvetica" pitchFamily="34" charset="-122"/>
                 <a:cs typeface="Helvetica" pitchFamily="34" charset="-120"/>
               </a:rPr>
-              <a:t>POWER VIRTUAL SERVER SHARED PROCESSOR POOL</a:t>
+              <a:t>POWER VIRTUAL SERVER SNAPSHOT</a:t>
             </a:r>
             <a:endParaRPr lang="en-US" dirty="0"/>
           </a:p>
@@ -35071,7 +35071,7 @@
       </p:sp>
       <p:pic>
         <p:nvPicPr>
-          <p:cNvPr id="51" name="Object 50" descr="public/generated/icons/power-iaas.snapshot.png">    </p:cNvPr>
+          <p:cNvPr id="51" name="Object 50" descr="public/generated/icons/power-iaas.pvm-instance.png">    </p:cNvPr>
           <p:cNvPicPr>
             <a:picLocks noChangeAspect="1"/>
           </p:cNvPicPr>
@@ -35127,7 +35127,7 @@
                 <a:ea typeface="Helvetica" pitchFamily="34" charset="-122"/>
                 <a:cs typeface="Helvetica" pitchFamily="34" charset="-120"/>
               </a:rPr>
-              <a:t>POWER VIRTUAL SERVER SNAPSHOT</a:t>
+              <a:t>POWER VIRTUAL SERVER VIRTUAL MACHINE</a:t>
             </a:r>
             <a:endParaRPr lang="en-US" dirty="0"/>
           </a:p>
@@ -35160,7 +35160,7 @@
       </p:sp>
       <p:pic>
         <p:nvPicPr>
-          <p:cNvPr id="54" name="Object 53" descr="public/generated/icons/power-iaas.pvm-instance.png">    </p:cNvPr>
+          <p:cNvPr id="54" name="Object 53" descr="public/generated/icons/power-iaas.volume.png">    </p:cNvPr>
           <p:cNvPicPr>
             <a:picLocks noChangeAspect="1"/>
           </p:cNvPicPr>
@@ -35216,7 +35216,7 @@
                 <a:ea typeface="Helvetica" pitchFamily="34" charset="-122"/>
                 <a:cs typeface="Helvetica" pitchFamily="34" charset="-120"/>
               </a:rPr>
-              <a:t>POWER VIRTUAL SERVER VIRTUAL MACHINE</a:t>
+              <a:t>POWER VIRTUAL SERVER VOLUME</a:t>
             </a:r>
             <a:endParaRPr lang="en-US" dirty="0"/>
           </a:p>
@@ -35249,7 +35249,7 @@
       </p:sp>
       <p:pic>
         <p:nvPicPr>
-          <p:cNvPr id="57" name="Object 56" descr="public/generated/icons/power-iaas.volume.png">    </p:cNvPr>
+          <p:cNvPr id="57" name="Object 56" descr="public/generated/icons/b260dfd6-9b79-4377-be6d-146a5cb59be8.png">    </p:cNvPr>
           <p:cNvPicPr>
             <a:picLocks noChangeAspect="1"/>
           </p:cNvPicPr>
@@ -35305,7 +35305,7 @@
                 <a:ea typeface="Helvetica" pitchFamily="34" charset="-122"/>
                 <a:cs typeface="Helvetica" pitchFamily="34" charset="-120"/>
               </a:rPr>
-              <a:t>POWER VIRTUAL SERVER VOLUME</a:t>
+              <a:t>POWERVS MIGRATION AS A SERVICE</a:t>
             </a:r>
             <a:endParaRPr lang="en-US" dirty="0"/>
           </a:p>
@@ -35338,7 +35338,7 @@
       </p:sp>
       <p:pic>
         <p:nvPicPr>
-          <p:cNvPr id="60" name="Object 59" descr="public/generated/icons/b260dfd6-9b79-4377-be6d-146a5cb59be8.png">    </p:cNvPr>
+          <p:cNvPr id="60" name="Object 59" descr="public/generated/icons/is.private-path-service-gateway.png">    </p:cNvPr>
           <p:cNvPicPr>
             <a:picLocks noChangeAspect="1"/>
           </p:cNvPicPr>
@@ -35394,7 +35394,7 @@
                 <a:ea typeface="Helvetica" pitchFamily="34" charset="-122"/>
                 <a:cs typeface="Helvetica" pitchFamily="34" charset="-120"/>
               </a:rPr>
-              <a:t>POWERVS MIGRATION AS A SERVICE</a:t>
+              <a:t>PRIVATE PATH SERVICE FOR VPC</a:t>
             </a:r>
             <a:endParaRPr lang="en-US" dirty="0"/>
           </a:p>
@@ -35427,7 +35427,7 @@
       </p:sp>
       <p:pic>
         <p:nvPicPr>
-          <p:cNvPr id="63" name="Object 62" descr="public/generated/icons/is.private-path-service-gateway.png">    </p:cNvPr>
+          <p:cNvPr id="63" name="Object 62" descr="public/generated/icons/91a901ac-fb7d-9b6e-eb25-14e75a20c4c2.png">    </p:cNvPr>
           <p:cNvPicPr>
             <a:picLocks noChangeAspect="1"/>
           </p:cNvPicPr>
@@ -35483,7 +35483,7 @@
                 <a:ea typeface="Helvetica" pitchFamily="34" charset="-122"/>
                 <a:cs typeface="Helvetica" pitchFamily="34" charset="-120"/>
               </a:rPr>
-              <a:t>PRIVATE PATH SERVICE FOR VPC</a:t>
+              <a:t>PROFESSIONAL SERVICES FOR GOVERNMENT(ONLY AVAILABLE IN US)</a:t>
             </a:r>
             <a:endParaRPr lang="en-US" dirty="0"/>
           </a:p>
@@ -35516,7 +35516,7 @@
       </p:sp>
       <p:pic>
         <p:nvPicPr>
-          <p:cNvPr id="66" name="Object 65" descr="public/generated/icons/91a901ac-fb7d-9b6e-eb25-14e75a20c4c2.png">    </p:cNvPr>
+          <p:cNvPr id="66" name="Object 65" descr="public/generated/icons/7c03a06c-f1bb-46f8-84d8-9378432b2804.png">    </p:cNvPr>
           <p:cNvPicPr>
             <a:picLocks noChangeAspect="1"/>
           </p:cNvPicPr>
@@ -35572,7 +35572,7 @@
                 <a:ea typeface="Helvetica" pitchFamily="34" charset="-122"/>
                 <a:cs typeface="Helvetica" pitchFamily="34" charset="-120"/>
               </a:rPr>
-              <a:t>PROFESSIONAL SERVICES FOR GOVERNMENT(ONLY AVAILABLE IN US)</a:t>
+              <a:t>PROTECTIO DRAAS MANAGED SERVICE</a:t>
             </a:r>
             <a:endParaRPr lang="en-US" dirty="0"/>
           </a:p>
@@ -35605,7 +35605,7 @@
       </p:sp>
       <p:pic>
         <p:nvPicPr>
-          <p:cNvPr id="69" name="Object 68" descr="public/generated/icons/7c03a06c-f1bb-46f8-84d8-9378432b2804.png">    </p:cNvPr>
+          <p:cNvPr id="69" name="Object 68" descr="public/generated/icons/is.public-gateway.png">    </p:cNvPr>
           <p:cNvPicPr>
             <a:picLocks noChangeAspect="1"/>
           </p:cNvPicPr>
@@ -35661,7 +35661,7 @@
                 <a:ea typeface="Helvetica" pitchFamily="34" charset="-122"/>
                 <a:cs typeface="Helvetica" pitchFamily="34" charset="-120"/>
               </a:rPr>
-              <a:t>PROTECTIO DRAAS MANAGED SERVICE</a:t>
+              <a:t>PUBLIC GATEWAY</a:t>
             </a:r>
             <a:endParaRPr lang="en-US" dirty="0"/>
           </a:p>
@@ -35694,7 +35694,7 @@
       </p:sp>
       <p:pic>
         <p:nvPicPr>
-          <p:cNvPr id="72" name="Object 71" descr="public/generated/icons/is.public-gateway.png">    </p:cNvPr>
+          <p:cNvPr id="72" name="Object 71" descr="public/generated/icons/aa11a8b2-381e-4c1c-a232-2148f65c005f.png">    </p:cNvPr>
           <p:cNvPicPr>
             <a:picLocks noChangeAspect="1"/>
           </p:cNvPicPr>
@@ -35750,7 +35750,7 @@
                 <a:ea typeface="Helvetica" pitchFamily="34" charset="-122"/>
                 <a:cs typeface="Helvetica" pitchFamily="34" charset="-120"/>
               </a:rPr>
-              <a:t>PUBLIC GATEWAY</a:t>
+              <a:t>PVS ONE MANAGED SERVICE</a:t>
             </a:r>
             <a:endParaRPr lang="en-US" dirty="0"/>
           </a:p>
@@ -35783,7 +35783,7 @@
       </p:sp>
       <p:pic>
         <p:nvPicPr>
-          <p:cNvPr id="75" name="Object 74" descr="public/generated/icons/aa11a8b2-381e-4c1c-a232-2148f65c005f.png">    </p:cNvPr>
+          <p:cNvPr id="75" name="Object 74" descr="public/generated/icons/3eb2d5a0-24ff-11eb-9437-631d7272fff5.png">    </p:cNvPr>
           <p:cNvPicPr>
             <a:picLocks noChangeAspect="1"/>
           </p:cNvPicPr>
@@ -35839,7 +35839,7 @@
                 <a:ea typeface="Helvetica" pitchFamily="34" charset="-122"/>
                 <a:cs typeface="Helvetica" pitchFamily="34" charset="-120"/>
               </a:rPr>
-              <a:t>PVS ONE MANAGED SERVICE</a:t>
+              <a:t>PX-BACKUP FOR KUBERNETES</a:t>
             </a:r>
             <a:endParaRPr lang="en-US" dirty="0"/>
           </a:p>
@@ -35872,7 +35872,7 @@
       </p:sp>
       <p:pic>
         <p:nvPicPr>
-          <p:cNvPr id="78" name="Object 77" descr="public/generated/icons/3eb2d5a0-24ff-11eb-9437-631d7272fff5.png">    </p:cNvPr>
+          <p:cNvPr id="78" name="Object 77" descr="public/generated/icons/b6049020-80f4-11eb-a0f7-e35ec9b4054f.png">    </p:cNvPr>
           <p:cNvPicPr>
             <a:picLocks noChangeAspect="1"/>
           </p:cNvPicPr>
@@ -35928,7 +35928,7 @@
                 <a:ea typeface="Helvetica" pitchFamily="34" charset="-122"/>
                 <a:cs typeface="Helvetica" pitchFamily="34" charset="-120"/>
               </a:rPr>
-              <a:t>PX-BACKUP FOR KUBERNETES</a:t>
+              <a:t>QISKIT RUNTIME</a:t>
             </a:r>
             <a:endParaRPr lang="en-US" dirty="0"/>
           </a:p>
@@ -35961,7 +35961,7 @@
       </p:sp>
       <p:pic>
         <p:nvPicPr>
-          <p:cNvPr id="81" name="Object 80" descr="public/generated/icons/b6049020-80f4-11eb-a0f7-e35ec9b4054f.png">    </p:cNvPr>
+          <p:cNvPr id="81" name="Object 80" descr="public/generated/icons/cf5f8ac0-98f7-11e9-a40c-5b3c4bf3cc6d.png">    </p:cNvPr>
           <p:cNvPicPr>
             <a:picLocks noChangeAspect="1"/>
           </p:cNvPicPr>
@@ -36017,7 +36017,7 @@
                 <a:ea typeface="Helvetica" pitchFamily="34" charset="-122"/>
                 <a:cs typeface="Helvetica" pitchFamily="34" charset="-120"/>
               </a:rPr>
-              <a:t>QISKIT RUNTIME</a:t>
+              <a:t>RAXAK PROTECT</a:t>
             </a:r>
             <a:endParaRPr lang="en-US" dirty="0"/>
           </a:p>
@@ -36050,7 +36050,7 @@
       </p:sp>
       <p:pic>
         <p:nvPicPr>
-          <p:cNvPr id="84" name="Object 83" descr="public/generated/icons/cf5f8ac0-98f7-11e9-a40c-5b3c4bf3cc6d.png">    </p:cNvPr>
+          <p:cNvPr id="84" name="Object 83" descr="public/generated/icons/openshift.png">    </p:cNvPr>
           <p:cNvPicPr>
             <a:picLocks noChangeAspect="1"/>
           </p:cNvPicPr>
@@ -36106,7 +36106,7 @@
                 <a:ea typeface="Helvetica" pitchFamily="34" charset="-122"/>
                 <a:cs typeface="Helvetica" pitchFamily="34" charset="-120"/>
               </a:rPr>
-              <a:t>RAXAK PROTECT</a:t>
+              <a:t>RED HAT OPENSHIFT ON IBM CLOUD</a:t>
             </a:r>
             <a:endParaRPr lang="en-US" dirty="0"/>
           </a:p>
@@ -36139,7 +36139,7 @@
       </p:sp>
       <p:pic>
         <p:nvPicPr>
-          <p:cNvPr id="87" name="Object 86" descr="public/generated/icons/openshift.png">    </p:cNvPr>
+          <p:cNvPr id="87" name="Object 86" descr="public/generated/icons/bd517bf0-88ba-11ea-a52e-91aeb42a4019.png">    </p:cNvPr>
           <p:cNvPicPr>
             <a:picLocks noChangeAspect="1"/>
           </p:cNvPicPr>
@@ -36195,7 +36195,7 @@
                 <a:ea typeface="Helvetica" pitchFamily="34" charset="-122"/>
                 <a:cs typeface="Helvetica" pitchFamily="34" charset="-120"/>
               </a:rPr>
-              <a:t>RED HAT OPENSHIFT ON IBM CLOUD</a:t>
+              <a:t>SATELLITE</a:t>
             </a:r>
             <a:endParaRPr lang="en-US" dirty="0"/>
           </a:p>
@@ -36228,7 +36228,7 @@
       </p:sp>
       <p:pic>
         <p:nvPicPr>
-          <p:cNvPr id="90" name="Object 89" descr="public/generated/icons/bd517bf0-88ba-11ea-a52e-91aeb42a4019.png">    </p:cNvPr>
+          <p:cNvPr id="90" name="Object 89" descr="public/generated/icons/schematics.png">    </p:cNvPr>
           <p:cNvPicPr>
             <a:picLocks noChangeAspect="1"/>
           </p:cNvPicPr>
@@ -36284,7 +36284,7 @@
                 <a:ea typeface="Helvetica" pitchFamily="34" charset="-122"/>
                 <a:cs typeface="Helvetica" pitchFamily="34" charset="-120"/>
               </a:rPr>
-              <a:t>SATELLITE</a:t>
+              <a:t>SCHEMATICS</a:t>
             </a:r>
             <a:endParaRPr lang="en-US" dirty="0"/>
           </a:p>
@@ -36317,7 +36317,7 @@
       </p:sp>
       <p:pic>
         <p:nvPicPr>
-          <p:cNvPr id="93" name="Object 92" descr="public/generated/icons/schematics.png">    </p:cNvPr>
+          <p:cNvPr id="93" name="Object 92" descr="public/generated/icons/14.png">    </p:cNvPr>
           <p:cNvPicPr>
             <a:picLocks noChangeAspect="1"/>
           </p:cNvPicPr>
@@ -36373,7 +36373,7 @@
                 <a:ea typeface="Helvetica" pitchFamily="34" charset="-122"/>
                 <a:cs typeface="Helvetica" pitchFamily="34" charset="-120"/>
               </a:rPr>
-              <a:t>SCHEMATICS</a:t>
+              <a:t>SECONDARY SUBNETS</a:t>
             </a:r>
             <a:endParaRPr lang="en-US" dirty="0"/>
           </a:p>
@@ -36406,7 +36406,7 @@
       </p:sp>
       <p:pic>
         <p:nvPicPr>
-          <p:cNvPr id="96" name="Object 95" descr="public/generated/icons/14.png">    </p:cNvPr>
+          <p:cNvPr id="96" name="Object 95" descr="public/generated/icons/ebc0cdb0-af2a-11ea-98c7-29e5db822649.png">    </p:cNvPr>
           <p:cNvPicPr>
             <a:picLocks noChangeAspect="1"/>
           </p:cNvPicPr>
@@ -36462,7 +36462,7 @@
                 <a:ea typeface="Helvetica" pitchFamily="34" charset="-122"/>
                 <a:cs typeface="Helvetica" pitchFamily="34" charset="-120"/>
               </a:rPr>
-              <a:t>SECONDARY SUBNETS</a:t>
+              <a:t>SECRETS MANAGER</a:t>
             </a:r>
             <a:endParaRPr lang="en-US" dirty="0"/>
           </a:p>
@@ -36495,7 +36495,7 @@
       </p:sp>
       <p:pic>
         <p:nvPicPr>
-          <p:cNvPr id="99" name="Object 98" descr="public/generated/icons/ebc0cdb0-af2a-11ea-98c7-29e5db822649.png">    </p:cNvPr>
+          <p:cNvPr id="99" name="Object 98" descr="public/generated/icons/IBM_SecureGateway.png">    </p:cNvPr>
           <p:cNvPicPr>
             <a:picLocks noChangeAspect="1"/>
           </p:cNvPicPr>
@@ -36551,7 +36551,7 @@
                 <a:ea typeface="Helvetica" pitchFamily="34" charset="-122"/>
                 <a:cs typeface="Helvetica" pitchFamily="34" charset="-120"/>
               </a:rPr>
-              <a:t>SECRETS MANAGER</a:t>
+              <a:t>SECURE GATEWAY</a:t>
             </a:r>
             <a:endParaRPr lang="en-US" dirty="0"/>
           </a:p>
@@ -36584,7 +36584,7 @@
       </p:sp>
       <p:pic>
         <p:nvPicPr>
-          <p:cNvPr id="102" name="Object 101" descr="public/generated/icons/IBM_SecureGateway.png">    </p:cNvPr>
+          <p:cNvPr id="102" name="Object 101" descr="public/generated/icons/compliance.png">    </p:cNvPr>
           <p:cNvPicPr>
             <a:picLocks noChangeAspect="1"/>
           </p:cNvPicPr>
@@ -36640,7 +36640,7 @@
                 <a:ea typeface="Helvetica" pitchFamily="34" charset="-122"/>
                 <a:cs typeface="Helvetica" pitchFamily="34" charset="-120"/>
               </a:rPr>
-              <a:t>SECURE GATEWAY</a:t>
+              <a:t>SECURITY AND COMPLIANCE CENTER</a:t>
             </a:r>
             <a:endParaRPr lang="en-US" dirty="0"/>
           </a:p>
@@ -36673,7 +36673,7 @@
       </p:sp>
       <p:pic>
         <p:nvPicPr>
-          <p:cNvPr id="105" name="Object 104" descr="public/generated/icons/compliance.png">    </p:cNvPr>
+          <p:cNvPr id="105" name="Object 104" descr="public/generated/icons/e831e900-82d6-11ec-95c5-c12c5a5d9687.png">    </p:cNvPr>
           <p:cNvPicPr>
             <a:picLocks noChangeAspect="1"/>
           </p:cNvPicPr>
@@ -36729,7 +36729,7 @@
                 <a:ea typeface="Helvetica" pitchFamily="34" charset="-122"/>
                 <a:cs typeface="Helvetica" pitchFamily="34" charset="-120"/>
               </a:rPr>
-              <a:t>SECURITY AND COMPLIANCE CENTER</a:t>
+              <a:t>SECURITY AND COMPLIANCE CENTER WORKLOAD PROTECTION</a:t>
             </a:r>
             <a:endParaRPr lang="en-US" dirty="0"/>
           </a:p>
@@ -36762,7 +36762,7 @@
       </p:sp>
       <p:pic>
         <p:nvPicPr>
-          <p:cNvPr id="108" name="Object 107" descr="public/generated/icons/e831e900-82d6-11ec-95c5-c12c5a5d9687.png">    </p:cNvPr>
+          <p:cNvPr id="108" name="Object 107" descr="public/generated/icons/is.security-group.png">    </p:cNvPr>
           <p:cNvPicPr>
             <a:picLocks noChangeAspect="1"/>
           </p:cNvPicPr>
@@ -36818,7 +36818,7 @@
                 <a:ea typeface="Helvetica" pitchFamily="34" charset="-122"/>
                 <a:cs typeface="Helvetica" pitchFamily="34" charset="-120"/>
               </a:rPr>
-              <a:t>SECURITY AND COMPLIANCE CENTER WORKLOAD PROTECTION</a:t>
+              <a:t>SECURITY GROUP FOR VPC</a:t>
             </a:r>
             <a:endParaRPr lang="en-US" dirty="0"/>
           </a:p>
@@ -36884,7 +36884,7 @@
       </p:sp>
       <p:pic>
         <p:nvPicPr>
-          <p:cNvPr id="3" name="Object 2" descr="public/generated/icons/is.security-group.png">    </p:cNvPr>
+          <p:cNvPr id="3" name="Object 2" descr="public/generated/icons/cf329950-0a3e-11e8-922e-f1366c6e1c83-vcstrial_dr.png">    </p:cNvPr>
           <p:cNvPicPr>
             <a:picLocks noChangeAspect="1"/>
           </p:cNvPicPr>
@@ -36940,7 +36940,7 @@
                 <a:ea typeface="Helvetica" pitchFamily="34" charset="-122"/>
                 <a:cs typeface="Helvetica" pitchFamily="34" charset="-120"/>
               </a:rPr>
-              <a:t>SECURITY GROUP FOR VPC</a:t>
+              <a:t>SINGLE-NODE TRIAL FOR DATA PROTECTION AND DISASTER RECOVERY</a:t>
             </a:r>
             <a:endParaRPr lang="en-US" dirty="0"/>
           </a:p>
@@ -36973,7 +36973,7 @@
       </p:sp>
       <p:pic>
         <p:nvPicPr>
-          <p:cNvPr id="6" name="Object 5" descr="public/generated/icons/cf329950-0a3e-11e8-922e-f1366c6e1c83-vcstrial_dr.png">    </p:cNvPr>
+          <p:cNvPr id="6" name="Object 5" descr="public/generated/icons/cf329950-0a3e-11e8-922e-f1366c6e1c83-vcstrial.png">    </p:cNvPr>
           <p:cNvPicPr>
             <a:picLocks noChangeAspect="1"/>
           </p:cNvPicPr>
@@ -37029,7 +37029,7 @@
                 <a:ea typeface="Helvetica" pitchFamily="34" charset="-122"/>
                 <a:cs typeface="Helvetica" pitchFamily="34" charset="-120"/>
               </a:rPr>
-              <a:t>SINGLE-NODE TRIAL FOR DATA PROTECTION AND DISASTER RECOVERY</a:t>
+              <a:t>SINGLE-NODE TRIAL FOR MIGRATION AND APP MODERNIZATION</a:t>
             </a:r>
             <a:endParaRPr lang="en-US" dirty="0"/>
           </a:p>
@@ -37062,7 +37062,7 @@
       </p:sp>
       <p:pic>
         <p:nvPicPr>
-          <p:cNvPr id="9" name="Object 8" descr="public/generated/icons/cf329950-0a3e-11e8-922e-f1366c6e1c83-vcstrial.png">    </p:cNvPr>
+          <p:cNvPr id="9" name="Object 8" descr="public/generated/icons/fdf77820-deed-11e9-911d-5f09017358ff.png">    </p:cNvPr>
           <p:cNvPicPr>
             <a:picLocks noChangeAspect="1"/>
           </p:cNvPicPr>
@@ -37118,7 +37118,7 @@
                 <a:ea typeface="Helvetica" pitchFamily="34" charset="-122"/>
                 <a:cs typeface="Helvetica" pitchFamily="34" charset="-120"/>
               </a:rPr>
-              <a:t>SINGLE-NODE TRIAL FOR MIGRATION AND APP MODERNIZATION</a:t>
+              <a:t>SKYTAP ON IBM CLOUD</a:t>
             </a:r>
             <a:endParaRPr lang="en-US" dirty="0"/>
           </a:p>
@@ -37151,7 +37151,7 @@
       </p:sp>
       <p:pic>
         <p:nvPicPr>
-          <p:cNvPr id="12" name="Object 11" descr="public/generated/icons/fdf77820-deed-11e9-911d-5f09017358ff.png">    </p:cNvPr>
+          <p:cNvPr id="12" name="Object 11" descr="public/generated/icons/cf329950-0a3e-11e8-922e-f1366c6e1c83-spplus.png">    </p:cNvPr>
           <p:cNvPicPr>
             <a:picLocks noChangeAspect="1"/>
           </p:cNvPicPr>
@@ -37207,7 +37207,7 @@
                 <a:ea typeface="Helvetica" pitchFamily="34" charset="-122"/>
                 <a:cs typeface="Helvetica" pitchFamily="34" charset="-120"/>
               </a:rPr>
-              <a:t>SKYTAP ON IBM CLOUD</a:t>
+              <a:t>SPECTRUM PROTECT PLUS</a:t>
             </a:r>
             <a:endParaRPr lang="en-US" dirty="0"/>
           </a:p>
@@ -37240,7 +37240,7 @@
       </p:sp>
       <p:pic>
         <p:nvPicPr>
-          <p:cNvPr id="15" name="Object 14" descr="public/generated/icons/cf329950-0a3e-11e8-922e-f1366c6e1c83-spplus.png">    </p:cNvPr>
+          <p:cNvPr id="15" name="Object 14" descr="public/generated/icons/bc35fb8c-bc5b-431b-859e-3861771d5843.png">    </p:cNvPr>
           <p:cNvPicPr>
             <a:picLocks noChangeAspect="1"/>
           </p:cNvPicPr>
@@ -37296,7 +37296,7 @@
                 <a:ea typeface="Helvetica" pitchFamily="34" charset="-122"/>
                 <a:cs typeface="Helvetica" pitchFamily="34" charset="-120"/>
               </a:rPr>
-              <a:t>SPECTRUM PROTECT PLUS</a:t>
+              <a:t>SPEECH TO TEXT</a:t>
             </a:r>
             <a:endParaRPr lang="en-US" dirty="0"/>
           </a:p>
@@ -37329,7 +37329,7 @@
       </p:sp>
       <p:pic>
         <p:nvPicPr>
-          <p:cNvPr id="18" name="Object 17" descr="public/generated/icons/bc35fb8c-bc5b-431b-859e-3861771d5843.png">    </p:cNvPr>
+          <p:cNvPr id="18" name="Object 17" descr="public/generated/icons/556153d0-5ad0-11e9-b7f9-41319ef22125.png">    </p:cNvPr>
           <p:cNvPicPr>
             <a:picLocks noChangeAspect="1"/>
           </p:cNvPicPr>
@@ -37385,7 +37385,7 @@
                 <a:ea typeface="Helvetica" pitchFamily="34" charset="-122"/>
                 <a:cs typeface="Helvetica" pitchFamily="34" charset="-120"/>
               </a:rPr>
-              <a:t>SPEECH TO TEXT</a:t>
+              <a:t>SSH KEY FOR VPC</a:t>
             </a:r>
             <a:endParaRPr lang="en-US" dirty="0"/>
           </a:p>
@@ -37418,7 +37418,7 @@
       </p:sp>
       <p:pic>
         <p:nvPicPr>
-          <p:cNvPr id="21" name="Object 20" descr="public/generated/icons/556153d0-5ad0-11e9-b7f9-41319ef22125.png">    </p:cNvPr>
+          <p:cNvPr id="21" name="Object 20" descr="public/generated/icons/19.png">    </p:cNvPr>
           <p:cNvPicPr>
             <a:picLocks noChangeAspect="1"/>
           </p:cNvPicPr>
@@ -37474,7 +37474,7 @@
                 <a:ea typeface="Helvetica" pitchFamily="34" charset="-122"/>
                 <a:cs typeface="Helvetica" pitchFamily="34" charset="-120"/>
               </a:rPr>
-              <a:t>SSH KEY FOR VPC</a:t>
+              <a:t>SSL CERTIFICATES</a:t>
             </a:r>
             <a:endParaRPr lang="en-US" dirty="0"/>
           </a:p>
@@ -37507,7 +37507,7 @@
       </p:sp>
       <p:pic>
         <p:nvPicPr>
-          <p:cNvPr id="24" name="Object 23" descr="public/generated/icons/19.png">    </p:cNvPr>
+          <p:cNvPr id="24" name="Object 23" descr="public/generated/icons/2bea02b0-c0a4-11ee-83aa-3171b0bf2976.png">    </p:cNvPr>
           <p:cNvPicPr>
             <a:picLocks noChangeAspect="1"/>
           </p:cNvPicPr>
@@ -37563,7 +37563,7 @@
                 <a:ea typeface="Helvetica" pitchFamily="34" charset="-122"/>
                 <a:cs typeface="Helvetica" pitchFamily="34" charset="-120"/>
               </a:rPr>
-              <a:t>SSL CERTIFICATES</a:t>
+              <a:t>STORAGE CEPH AS A SERVICE</a:t>
             </a:r>
             <a:endParaRPr lang="en-US" dirty="0"/>
           </a:p>

--- a/mycatalog-architecture-diagram-template.pptx
+++ b/mycatalog-architecture-diagram-template.pptx
@@ -524,7 +524,7 @@
           <a:p>
             <a:r>
               <a:rPr lang="en-US" dirty="0" smtClean="0"/>
-              <a:t>Generated on Sun Mar 23 2025 07:06:27 GMT+0000 (Coordinated Universal Time)</a:t>
+              <a:t>Generated on Sun Apr 06 2025 07:04:28 GMT+0000 (Coordinated Universal Time)</a:t>
             </a:r>
             <a:endParaRPr lang="en-US" dirty="0"/>
           </a:p>
@@ -20699,7 +20699,7 @@
       </p:sp>
       <p:pic>
         <p:nvPicPr>
-          <p:cNvPr id="4" name="Object 3" descr="public/generated/icons/586d04e3-804f-4d0c-b9d3-e0e7279398b4.png">    </p:cNvPr>
+          <p:cNvPr id="4" name="Object 3" descr="public/generated/icons/c3c7f095-67da-42e6-b982-46d0e6e79f84.png">    </p:cNvPr>
           <p:cNvPicPr>
             <a:picLocks noChangeAspect="1"/>
           </p:cNvPicPr>
@@ -20755,7 +20755,7 @@
                 <a:ea typeface="Helvetica" pitchFamily="34" charset="-122"/>
                 <a:cs typeface="Helvetica" pitchFamily="34" charset="-120"/>
               </a:rPr>
-              <a:t>AGILECDN</a:t>
+              <a:t>1FRESCHE MANAGED SERVICES</a:t>
             </a:r>
             <a:endParaRPr lang="en-US" dirty="0"/>
           </a:p>
@@ -20788,7 +20788,7 @@
       </p:sp>
       <p:pic>
         <p:nvPicPr>
-          <p:cNvPr id="7" name="Object 6" descr="public/generated/icons/7586ae5b-6f22-4e98-bd3d-a7b47e6844e7.png">    </p:cNvPr>
+          <p:cNvPr id="7" name="Object 6" descr="public/generated/icons/900fb23f-fe9d-4cf8-9bb2-a82d87dede0e.png">    </p:cNvPr>
           <p:cNvPicPr>
             <a:picLocks noChangeAspect="1"/>
           </p:cNvPicPr>
@@ -20844,7 +20844,7 @@
                 <a:ea typeface="Helvetica" pitchFamily="34" charset="-122"/>
                 <a:cs typeface="Helvetica" pitchFamily="34" charset="-120"/>
               </a:rPr>
-              <a:t>AISOLVED - SEEKERS OF KNOWLEDGE MEET AI SOLUTIONS</a:t>
+              <a:t>1FRESCHE TOTALOPS360 - COMPREHENSIVE MANAGED SERVICES </a:t>
             </a:r>
             <a:endParaRPr lang="en-US" dirty="0"/>
           </a:p>
@@ -20877,7 +20877,7 @@
       </p:sp>
       <p:pic>
         <p:nvPicPr>
-          <p:cNvPr id="10" name="Object 9" descr="public/generated/icons/515d67c9-df89-4ef7-84cc-52bb739e15a7.png">    </p:cNvPr>
+          <p:cNvPr id="10" name="Object 9" descr="public/generated/icons/586d04e3-804f-4d0c-b9d3-e0e7279398b4.png">    </p:cNvPr>
           <p:cNvPicPr>
             <a:picLocks noChangeAspect="1"/>
           </p:cNvPicPr>
@@ -20933,7 +20933,7 @@
                 <a:ea typeface="Helvetica" pitchFamily="34" charset="-122"/>
                 <a:cs typeface="Helvetica" pitchFamily="34" charset="-120"/>
               </a:rPr>
-              <a:t>AKASIA FINOPS MODELER</a:t>
+              <a:t>AGILECDN</a:t>
             </a:r>
             <a:endParaRPr lang="en-US" dirty="0"/>
           </a:p>
@@ -20966,7 +20966,7 @@
       </p:sp>
       <p:pic>
         <p:nvPicPr>
-          <p:cNvPr id="13" name="Object 12" descr="public/generated/icons/18de078f-e6b0-4b47-a7c4-0ed2f93f3e1d.png">    </p:cNvPr>
+          <p:cNvPr id="13" name="Object 12" descr="public/generated/icons/7586ae5b-6f22-4e98-bd3d-a7b47e6844e7.png">    </p:cNvPr>
           <p:cNvPicPr>
             <a:picLocks noChangeAspect="1"/>
           </p:cNvPicPr>
@@ -21022,7 +21022,7 @@
                 <a:ea typeface="Helvetica" pitchFamily="34" charset="-122"/>
                 <a:cs typeface="Helvetica" pitchFamily="34" charset="-120"/>
               </a:rPr>
-              <a:t>ANALYTICS ENGINE</a:t>
+              <a:t>AISOLVED - SEEKERS OF KNOWLEDGE MEET AI SOLUTIONS</a:t>
             </a:r>
             <a:endParaRPr lang="en-US" dirty="0"/>
           </a:p>
@@ -21055,7 +21055,7 @@
       </p:sp>
       <p:pic>
         <p:nvPicPr>
-          <p:cNvPr id="16" name="Object 15" descr="public/generated/icons/b77c8f80-f155-11eb-8766-1f68cf60a2c4.png">    </p:cNvPr>
+          <p:cNvPr id="16" name="Object 15" descr="public/generated/icons/515d67c9-df89-4ef7-84cc-52bb739e15a7.png">    </p:cNvPr>
           <p:cNvPicPr>
             <a:picLocks noChangeAspect="1"/>
           </p:cNvPicPr>
@@ -21111,7 +21111,7 @@
                 <a:ea typeface="Helvetica" pitchFamily="34" charset="-122"/>
                 <a:cs typeface="Helvetica" pitchFamily="34" charset="-120"/>
               </a:rPr>
-              <a:t>ANONTECH VIZIVAULT PLATFORM</a:t>
+              <a:t>AKASIA FINOPS MODELER</a:t>
             </a:r>
             <a:endParaRPr lang="en-US" dirty="0"/>
           </a:p>
@@ -21144,7 +21144,7 @@
       </p:sp>
       <p:pic>
         <p:nvPicPr>
-          <p:cNvPr id="19" name="Object 18" descr="public/generated/icons/8c437b59-5f6a-460c-b11a-5b7cabf058cb.png">    </p:cNvPr>
+          <p:cNvPr id="19" name="Object 18" descr="public/generated/icons/18de078f-e6b0-4b47-a7c4-0ed2f93f3e1d.png">    </p:cNvPr>
           <p:cNvPicPr>
             <a:picLocks noChangeAspect="1"/>
           </p:cNvPicPr>
@@ -21200,7 +21200,7 @@
                 <a:ea typeface="Helvetica" pitchFamily="34" charset="-122"/>
                 <a:cs typeface="Helvetica" pitchFamily="34" charset="-120"/>
               </a:rPr>
-              <a:t>ANYCLOUD BACKUP FOR 365</a:t>
+              <a:t>ANALYTICS ENGINE</a:t>
             </a:r>
             <a:endParaRPr lang="en-US" dirty="0"/>
           </a:p>
@@ -21233,7 +21233,7 @@
       </p:sp>
       <p:pic>
         <p:nvPicPr>
-          <p:cNvPr id="22" name="Object 21" descr="public/generated/icons/api-connect.png">    </p:cNvPr>
+          <p:cNvPr id="22" name="Object 21" descr="public/generated/icons/b77c8f80-f155-11eb-8766-1f68cf60a2c4.png">    </p:cNvPr>
           <p:cNvPicPr>
             <a:picLocks noChangeAspect="1"/>
           </p:cNvPicPr>
@@ -21289,7 +21289,7 @@
                 <a:ea typeface="Helvetica" pitchFamily="34" charset="-122"/>
                 <a:cs typeface="Helvetica" pitchFamily="34" charset="-120"/>
               </a:rPr>
-              <a:t>API CONNECT</a:t>
+              <a:t>ANONTECH VIZIVAULT PLATFORM</a:t>
             </a:r>
             <a:endParaRPr lang="en-US" dirty="0"/>
           </a:p>
@@ -21322,7 +21322,7 @@
       </p:sp>
       <p:pic>
         <p:nvPicPr>
-          <p:cNvPr id="25" name="Object 24" descr="public/generated/icons/09edee6c-6ec8-4bc9-823a-3d8d193b7bd9.png">    </p:cNvPr>
+          <p:cNvPr id="25" name="Object 24" descr="public/generated/icons/8c437b59-5f6a-460c-b11a-5b7cabf058cb.png">    </p:cNvPr>
           <p:cNvPicPr>
             <a:picLocks noChangeAspect="1"/>
           </p:cNvPicPr>
@@ -21378,7 +21378,7 @@
                 <a:ea typeface="Helvetica" pitchFamily="34" charset="-122"/>
                 <a:cs typeface="Helvetica" pitchFamily="34" charset="-120"/>
               </a:rPr>
-              <a:t>API-BRIDGE FOR POWERVS</a:t>
+              <a:t>ANYCLOUD BACKUP FOR 365</a:t>
             </a:r>
             <a:endParaRPr lang="en-US" dirty="0"/>
           </a:p>
@@ -21411,7 +21411,7 @@
       </p:sp>
       <p:pic>
         <p:nvPicPr>
-          <p:cNvPr id="28" name="Object 27" descr="public/generated/icons/apprapp-d6aece47-d840-45b0-8ab9-ad15354deeea.png">    </p:cNvPr>
+          <p:cNvPr id="28" name="Object 27" descr="public/generated/icons/api-connect.png">    </p:cNvPr>
           <p:cNvPicPr>
             <a:picLocks noChangeAspect="1"/>
           </p:cNvPicPr>
@@ -21467,7 +21467,7 @@
                 <a:ea typeface="Helvetica" pitchFamily="34" charset="-122"/>
                 <a:cs typeface="Helvetica" pitchFamily="34" charset="-120"/>
               </a:rPr>
-              <a:t>APP CONFIGURATION</a:t>
+              <a:t>API CONNECT</a:t>
             </a:r>
             <a:endParaRPr lang="en-US" dirty="0"/>
           </a:p>
@@ -21500,7 +21500,7 @@
       </p:sp>
       <p:pic>
         <p:nvPicPr>
-          <p:cNvPr id="31" name="Object 30" descr="public/generated/icons/AdvancedMobileAccess-d6aece47-d840-45b0-8ab9-ad15354deeea.png">    </p:cNvPr>
+          <p:cNvPr id="31" name="Object 30" descr="public/generated/icons/09edee6c-6ec8-4bc9-823a-3d8d193b7bd9.png">    </p:cNvPr>
           <p:cNvPicPr>
             <a:picLocks noChangeAspect="1"/>
           </p:cNvPicPr>
@@ -21556,7 +21556,7 @@
                 <a:ea typeface="Helvetica" pitchFamily="34" charset="-122"/>
                 <a:cs typeface="Helvetica" pitchFamily="34" charset="-120"/>
               </a:rPr>
-              <a:t>APP ID</a:t>
+              <a:t>API-BRIDGE FOR POWERVS</a:t>
             </a:r>
             <a:endParaRPr lang="en-US" dirty="0"/>
           </a:p>
@@ -21589,7 +21589,7 @@
       </p:sp>
       <p:pic>
         <p:nvPicPr>
-          <p:cNvPr id="34" name="Object 33" descr="public/generated/icons/is.instance-group.png">    </p:cNvPr>
+          <p:cNvPr id="34" name="Object 33" descr="public/generated/icons/apprapp-d6aece47-d840-45b0-8ab9-ad15354deeea.png">    </p:cNvPr>
           <p:cNvPicPr>
             <a:picLocks noChangeAspect="1"/>
           </p:cNvPicPr>
@@ -21645,7 +21645,7 @@
                 <a:ea typeface="Helvetica" pitchFamily="34" charset="-122"/>
                 <a:cs typeface="Helvetica" pitchFamily="34" charset="-120"/>
               </a:rPr>
-              <a:t>AUTO SCALE FOR VPC</a:t>
+              <a:t>APP CONFIGURATION</a:t>
             </a:r>
             <a:endParaRPr lang="en-US" dirty="0"/>
           </a:p>
@@ -21678,7 +21678,7 @@
       </p:sp>
       <p:pic>
         <p:nvPicPr>
-          <p:cNvPr id="37" name="Object 36" descr="public/generated/icons/1.png">    </p:cNvPr>
+          <p:cNvPr id="37" name="Object 36" descr="public/generated/icons/AdvancedMobileAccess-d6aece47-d840-45b0-8ab9-ad15354deeea.png">    </p:cNvPr>
           <p:cNvPicPr>
             <a:picLocks noChangeAspect="1"/>
           </p:cNvPicPr>
@@ -21734,7 +21734,7 @@
                 <a:ea typeface="Helvetica" pitchFamily="34" charset="-122"/>
                 <a:cs typeface="Helvetica" pitchFamily="34" charset="-120"/>
               </a:rPr>
-              <a:t>BARE METAL SERVER FOR CLASSIC</a:t>
+              <a:t>APP ID</a:t>
             </a:r>
             <a:endParaRPr lang="en-US" dirty="0"/>
           </a:p>
@@ -21767,7 +21767,7 @@
       </p:sp>
       <p:pic>
         <p:nvPicPr>
-          <p:cNvPr id="40" name="Object 39" descr="public/generated/icons/is.bare-metal-server.png">    </p:cNvPr>
+          <p:cNvPr id="40" name="Object 39" descr="public/generated/icons/is.instance-group.png">    </p:cNvPr>
           <p:cNvPicPr>
             <a:picLocks noChangeAspect="1"/>
           </p:cNvPicPr>
@@ -21823,7 +21823,7 @@
                 <a:ea typeface="Helvetica" pitchFamily="34" charset="-122"/>
                 <a:cs typeface="Helvetica" pitchFamily="34" charset="-120"/>
               </a:rPr>
-              <a:t>BARE METAL SERVERS FOR VPC</a:t>
+              <a:t>AUTO SCALE FOR VPC</a:t>
             </a:r>
             <a:endParaRPr lang="en-US" dirty="0"/>
           </a:p>
@@ -21856,7 +21856,7 @@
       </p:sp>
       <p:pic>
         <p:nvPicPr>
-          <p:cNvPr id="43" name="Object 42" descr="public/generated/icons/ee700ab3-6951-4c68-b541-a177f78eed53.png">    </p:cNvPr>
+          <p:cNvPr id="43" name="Object 42" descr="public/generated/icons/1.png">    </p:cNvPr>
           <p:cNvPicPr>
             <a:picLocks noChangeAspect="1"/>
           </p:cNvPicPr>
@@ -21912,7 +21912,7 @@
                 <a:ea typeface="Helvetica" pitchFamily="34" charset="-122"/>
                 <a:cs typeface="Helvetica" pitchFamily="34" charset="-120"/>
               </a:rPr>
-              <a:t>BESPOKEN AUTOMATED TESTING FOR IVR AND CHAT</a:t>
+              <a:t>BARE METAL SERVER FOR CLASSIC</a:t>
             </a:r>
             <a:endParaRPr lang="en-US" dirty="0"/>
           </a:p>
@@ -21945,7 +21945,7 @@
       </p:sp>
       <p:pic>
         <p:nvPicPr>
-          <p:cNvPr id="46" name="Object 45" descr="public/generated/icons/block-storage-group.png">    </p:cNvPr>
+          <p:cNvPr id="46" name="Object 45" descr="public/generated/icons/is.bare-metal-server.png">    </p:cNvPr>
           <p:cNvPicPr>
             <a:picLocks noChangeAspect="1"/>
           </p:cNvPicPr>
@@ -22001,7 +22001,7 @@
                 <a:ea typeface="Helvetica" pitchFamily="34" charset="-122"/>
                 <a:cs typeface="Helvetica" pitchFamily="34" charset="-120"/>
               </a:rPr>
-              <a:t>BLOCK STORAGE FOR CLASSIC</a:t>
+              <a:t>BARE METAL SERVERS FOR VPC</a:t>
             </a:r>
             <a:endParaRPr lang="en-US" dirty="0"/>
           </a:p>
@@ -22034,7 +22034,7 @@
       </p:sp>
       <p:pic>
         <p:nvPicPr>
-          <p:cNvPr id="49" name="Object 48" descr="public/generated/icons/is.volume.png">    </p:cNvPr>
+          <p:cNvPr id="49" name="Object 48" descr="public/generated/icons/ee700ab3-6951-4c68-b541-a177f78eed53.png">    </p:cNvPr>
           <p:cNvPicPr>
             <a:picLocks noChangeAspect="1"/>
           </p:cNvPicPr>
@@ -22090,7 +22090,7 @@
                 <a:ea typeface="Helvetica" pitchFamily="34" charset="-122"/>
                 <a:cs typeface="Helvetica" pitchFamily="34" charset="-120"/>
               </a:rPr>
-              <a:t>BLOCK STORAGE FOR VPC</a:t>
+              <a:t>BESPOKEN AUTOMATED TESTING FOR IVR AND CHAT</a:t>
             </a:r>
             <a:endParaRPr lang="en-US" dirty="0"/>
           </a:p>
@@ -22123,7 +22123,7 @@
       </p:sp>
       <p:pic>
         <p:nvPicPr>
-          <p:cNvPr id="52" name="Object 51" descr="public/generated/icons/is.snapshot.png">    </p:cNvPr>
+          <p:cNvPr id="52" name="Object 51" descr="public/generated/icons/block-storage-group.png">    </p:cNvPr>
           <p:cNvPicPr>
             <a:picLocks noChangeAspect="1"/>
           </p:cNvPicPr>
@@ -22179,7 +22179,7 @@
                 <a:ea typeface="Helvetica" pitchFamily="34" charset="-122"/>
                 <a:cs typeface="Helvetica" pitchFamily="34" charset="-120"/>
               </a:rPr>
-              <a:t>BLOCK STORAGE SNAPSHOTS FOR VPC</a:t>
+              <a:t>BLOCK STORAGE FOR CLASSIC</a:t>
             </a:r>
             <a:endParaRPr lang="en-US" dirty="0"/>
           </a:p>
@@ -22212,7 +22212,7 @@
       </p:sp>
       <p:pic>
         <p:nvPicPr>
-          <p:cNvPr id="55" name="Object 54" descr="public/generated/icons/e687e558-849d-40cc-8043-cd8071f659e9.png">    </p:cNvPr>
+          <p:cNvPr id="55" name="Object 54" descr="public/generated/icons/is.volume.png">    </p:cNvPr>
           <p:cNvPicPr>
             <a:picLocks noChangeAspect="1"/>
           </p:cNvPicPr>
@@ -22268,7 +22268,7 @@
                 <a:ea typeface="Helvetica" pitchFamily="34" charset="-122"/>
                 <a:cs typeface="Helvetica" pitchFamily="34" charset="-120"/>
               </a:rPr>
-              <a:t>BUS4I SYSTEM COPY - MIGRATE 23 FOR POWER I</a:t>
+              <a:t>BLOCK STORAGE FOR VPC</a:t>
             </a:r>
             <a:endParaRPr lang="en-US" dirty="0"/>
           </a:p>
@@ -22301,7 +22301,7 @@
       </p:sp>
       <p:pic>
         <p:nvPicPr>
-          <p:cNvPr id="58" name="Object 57" descr="public/generated/icons/cf329950-0a3e-11e8-922e-f1366c6e1c83-caveonix.png">    </p:cNvPr>
+          <p:cNvPr id="58" name="Object 57" descr="public/generated/icons/is.snapshot.png">    </p:cNvPr>
           <p:cNvPicPr>
             <a:picLocks noChangeAspect="1"/>
           </p:cNvPicPr>
@@ -22357,7 +22357,7 @@
                 <a:ea typeface="Helvetica" pitchFamily="34" charset="-122"/>
                 <a:cs typeface="Helvetica" pitchFamily="34" charset="-120"/>
               </a:rPr>
-              <a:t>CAVEONIX RISKFORESIGHT</a:t>
+              <a:t>BLOCK STORAGE SNAPSHOTS FOR VPC</a:t>
             </a:r>
             <a:endParaRPr lang="en-US" dirty="0"/>
           </a:p>
@@ -22390,7 +22390,7 @@
       </p:sp>
       <p:pic>
         <p:nvPicPr>
-          <p:cNvPr id="61" name="Object 60" descr="public/generated/icons/5b8aa656-9da6-4683-a21b-7d3d45361d94.png">    </p:cNvPr>
+          <p:cNvPr id="61" name="Object 60" descr="public/generated/icons/e687e558-849d-40cc-8043-cd8071f659e9.png">    </p:cNvPr>
           <p:cNvPicPr>
             <a:picLocks noChangeAspect="1"/>
           </p:cNvPicPr>
@@ -22446,7 +22446,7 @@
                 <a:ea typeface="Helvetica" pitchFamily="34" charset="-122"/>
                 <a:cs typeface="Helvetica" pitchFamily="34" charset="-120"/>
               </a:rPr>
-              <a:t>CHECK-A-ROO</a:t>
+              <a:t>BUS4I SYSTEM COPY - MIGRATE 23 FOR POWER I</a:t>
             </a:r>
             <a:endParaRPr lang="en-US" dirty="0"/>
           </a:p>
@@ -22479,7 +22479,7 @@
       </p:sp>
       <p:pic>
         <p:nvPicPr>
-          <p:cNvPr id="64" name="Object 63" descr="public/generated/icons/0a42129b-9839-42b7-90c7-7f3adb435379.png">    </p:cNvPr>
+          <p:cNvPr id="64" name="Object 63" descr="public/generated/icons/cf329950-0a3e-11e8-922e-f1366c6e1c83-caveonix.png">    </p:cNvPr>
           <p:cNvPicPr>
             <a:picLocks noChangeAspect="1"/>
           </p:cNvPicPr>
@@ -22535,7 +22535,7 @@
                 <a:ea typeface="Helvetica" pitchFamily="34" charset="-122"/>
                 <a:cs typeface="Helvetica" pitchFamily="34" charset="-120"/>
               </a:rPr>
-              <a:t>CITRIX NETSCALER VPX</a:t>
+              <a:t>CAVEONIX RISKFORESIGHT</a:t>
             </a:r>
             <a:endParaRPr lang="en-US" dirty="0"/>
           </a:p>
@@ -22568,7 +22568,7 @@
       </p:sp>
       <p:pic>
         <p:nvPicPr>
-          <p:cNvPr id="67" name="Object 66" descr="public/generated/icons/is.vpn-server.png">    </p:cNvPr>
+          <p:cNvPr id="67" name="Object 66" descr="public/generated/icons/5b8aa656-9da6-4683-a21b-7d3d45361d94.png">    </p:cNvPr>
           <p:cNvPicPr>
             <a:picLocks noChangeAspect="1"/>
           </p:cNvPicPr>
@@ -22624,7 +22624,7 @@
                 <a:ea typeface="Helvetica" pitchFamily="34" charset="-122"/>
                 <a:cs typeface="Helvetica" pitchFamily="34" charset="-120"/>
               </a:rPr>
-              <a:t>CLIENT VPN FOR VPC</a:t>
+              <a:t>CHECK-A-ROO</a:t>
             </a:r>
             <a:endParaRPr lang="en-US" dirty="0"/>
           </a:p>
@@ -22657,7 +22657,7 @@
       </p:sp>
       <p:pic>
         <p:nvPicPr>
-          <p:cNvPr id="70" name="Object 69" descr="public/generated/icons/dcc46a60-e13b-11e8-a015-757410dab16b.png">    </p:cNvPr>
+          <p:cNvPr id="70" name="Object 69" descr="public/generated/icons/0a42129b-9839-42b7-90c7-7f3adb435379.png">    </p:cNvPr>
           <p:cNvPicPr>
             <a:picLocks noChangeAspect="1"/>
           </p:cNvPicPr>
@@ -22713,7 +22713,7 @@
                 <a:ea typeface="Helvetica" pitchFamily="34" charset="-122"/>
                 <a:cs typeface="Helvetica" pitchFamily="34" charset="-120"/>
               </a:rPr>
-              <a:t>CLOUD ACTIVITY TRACKER</a:t>
+              <a:t>CITRIX NETSCALER VPX</a:t>
             </a:r>
             <a:endParaRPr lang="en-US" dirty="0"/>
           </a:p>
@@ -22746,7 +22746,7 @@
       </p:sp>
       <p:pic>
         <p:nvPicPr>
-          <p:cNvPr id="73" name="Object 72" descr="public/generated/icons/6cde723c-9e49-74ac-4266-3f7a9bb74216.png">    </p:cNvPr>
+          <p:cNvPr id="73" name="Object 72" descr="public/generated/icons/is.vpn-server.png">    </p:cNvPr>
           <p:cNvPicPr>
             <a:picLocks noChangeAspect="1"/>
           </p:cNvPicPr>
@@ -22802,7 +22802,7 @@
                 <a:ea typeface="Helvetica" pitchFamily="34" charset="-122"/>
                 <a:cs typeface="Helvetica" pitchFamily="34" charset="-120"/>
               </a:rPr>
-              <a:t>CLOUD BACKUP FOR CLASSIC</a:t>
+              <a:t>CLIENT VPN FOR VPC</a:t>
             </a:r>
             <a:endParaRPr lang="en-US" dirty="0"/>
           </a:p>
@@ -22835,7 +22835,7 @@
       </p:sp>
       <p:pic>
         <p:nvPicPr>
-          <p:cNvPr id="76" name="Object 75" descr="public/generated/icons/is.backup-policy.png">    </p:cNvPr>
+          <p:cNvPr id="76" name="Object 75" descr="public/generated/icons/dcc46a60-e13b-11e8-a015-757410dab16b.png">    </p:cNvPr>
           <p:cNvPicPr>
             <a:picLocks noChangeAspect="1"/>
           </p:cNvPicPr>
@@ -22891,7 +22891,7 @@
                 <a:ea typeface="Helvetica" pitchFamily="34" charset="-122"/>
                 <a:cs typeface="Helvetica" pitchFamily="34" charset="-120"/>
               </a:rPr>
-              <a:t>CLOUD BACKUP FOR VPC</a:t>
+              <a:t>CLOUD ACTIVITY TRACKER</a:t>
             </a:r>
             <a:endParaRPr lang="en-US" dirty="0"/>
           </a:p>
@@ -22924,7 +22924,7 @@
       </p:sp>
       <p:pic>
         <p:nvPicPr>
-          <p:cNvPr id="79" name="Object 78" descr="public/generated/icons/hardware-security-module.png">    </p:cNvPr>
+          <p:cNvPr id="79" name="Object 78" descr="public/generated/icons/6cde723c-9e49-74ac-4266-3f7a9bb74216.png">    </p:cNvPr>
           <p:cNvPicPr>
             <a:picLocks noChangeAspect="1"/>
           </p:cNvPicPr>
@@ -22980,7 +22980,7 @@
                 <a:ea typeface="Helvetica" pitchFamily="34" charset="-122"/>
                 <a:cs typeface="Helvetica" pitchFamily="34" charset="-120"/>
               </a:rPr>
-              <a:t>CLOUD HSM</a:t>
+              <a:t>CLOUD BACKUP FOR CLASSIC</a:t>
             </a:r>
             <a:endParaRPr lang="en-US" dirty="0"/>
           </a:p>
@@ -23013,7 +23013,7 @@
       </p:sp>
       <p:pic>
         <p:nvPicPr>
-          <p:cNvPr id="82" name="Object 81" descr="public/generated/icons/a3b01d2d-5457-4269-8bd5-a7c815bd2f41.png">    </p:cNvPr>
+          <p:cNvPr id="82" name="Object 81" descr="public/generated/icons/is.backup-policy.png">    </p:cNvPr>
           <p:cNvPicPr>
             <a:picLocks noChangeAspect="1"/>
           </p:cNvPicPr>
@@ -23069,7 +23069,7 @@
                 <a:ea typeface="Helvetica" pitchFamily="34" charset="-122"/>
                 <a:cs typeface="Helvetica" pitchFamily="34" charset="-120"/>
               </a:rPr>
-              <a:t>CLOUD LOAD BALANCER</a:t>
+              <a:t>CLOUD BACKUP FOR VPC</a:t>
             </a:r>
             <a:endParaRPr lang="en-US" dirty="0"/>
           </a:p>
@@ -23102,7 +23102,7 @@
       </p:sp>
       <p:pic>
         <p:nvPicPr>
-          <p:cNvPr id="85" name="Object 84" descr="public/generated/icons/cd515180-d78a-11ec-b396-db7d306c4f73.png">    </p:cNvPr>
+          <p:cNvPr id="85" name="Object 84" descr="public/generated/icons/hardware-security-module.png">    </p:cNvPr>
           <p:cNvPicPr>
             <a:picLocks noChangeAspect="1"/>
           </p:cNvPicPr>
@@ -23158,7 +23158,7 @@
                 <a:ea typeface="Helvetica" pitchFamily="34" charset="-122"/>
                 <a:cs typeface="Helvetica" pitchFamily="34" charset="-120"/>
               </a:rPr>
-              <a:t>CLOUD LOGS</a:t>
+              <a:t>CLOUD HSM</a:t>
             </a:r>
             <a:endParaRPr lang="en-US" dirty="0"/>
           </a:p>
@@ -23191,7 +23191,7 @@
       </p:sp>
       <p:pic>
         <p:nvPicPr>
-          <p:cNvPr id="88" name="Object 87" descr="public/generated/icons/090c2c10-8c38-11e8-bec2-493df9c49eb8.png">    </p:cNvPr>
+          <p:cNvPr id="88" name="Object 87" descr="public/generated/icons/a3b01d2d-5457-4269-8bd5-a7c815bd2f41.png">    </p:cNvPr>
           <p:cNvPicPr>
             <a:picLocks noChangeAspect="1"/>
           </p:cNvPicPr>
@@ -23247,7 +23247,7 @@
                 <a:ea typeface="Helvetica" pitchFamily="34" charset="-122"/>
                 <a:cs typeface="Helvetica" pitchFamily="34" charset="-120"/>
               </a:rPr>
-              <a:t>CLOUD MONITORING</a:t>
+              <a:t>CLOUD LOAD BALANCER</a:t>
             </a:r>
             <a:endParaRPr lang="en-US" dirty="0"/>
           </a:p>
@@ -23280,7 +23280,7 @@
       </p:sp>
       <p:pic>
         <p:nvPicPr>
-          <p:cNvPr id="91" name="Object 90" descr="public/generated/icons/a9617650-09ff-11ec-85f2-d10915d24d79.png">    </p:cNvPr>
+          <p:cNvPr id="91" name="Object 90" descr="public/generated/icons/cd515180-d78a-11ec-b396-db7d306c4f73.png">    </p:cNvPr>
           <p:cNvPicPr>
             <a:picLocks noChangeAspect="1"/>
           </p:cNvPicPr>
@@ -23336,7 +23336,7 @@
                 <a:ea typeface="Helvetica" pitchFamily="34" charset="-122"/>
                 <a:cs typeface="Helvetica" pitchFamily="34" charset="-120"/>
               </a:rPr>
-              <a:t>CLOUD NATIVE STORAGE AND DATA SERVICE</a:t>
+              <a:t>CLOUD LOGS</a:t>
             </a:r>
             <a:endParaRPr lang="en-US" dirty="0"/>
           </a:p>
@@ -23369,7 +23369,7 @@
       </p:sp>
       <p:pic>
         <p:nvPicPr>
-          <p:cNvPr id="94" name="Object 93" descr="public/generated/icons/dff97f5c-bc5e-4455-b470-411c3edbe49c.png">    </p:cNvPr>
+          <p:cNvPr id="94" name="Object 93" descr="public/generated/icons/090c2c10-8c38-11e8-bec2-493df9c49eb8.png">    </p:cNvPr>
           <p:cNvPicPr>
             <a:picLocks noChangeAspect="1"/>
           </p:cNvPicPr>
@@ -23425,7 +23425,7 @@
                 <a:ea typeface="Helvetica" pitchFamily="34" charset="-122"/>
                 <a:cs typeface="Helvetica" pitchFamily="34" charset="-120"/>
               </a:rPr>
-              <a:t>CLOUD OBJECT STORAGE</a:t>
+              <a:t>CLOUD MONITORING</a:t>
             </a:r>
             <a:endParaRPr lang="en-US" dirty="0"/>
           </a:p>
@@ -23458,7 +23458,7 @@
       </p:sp>
       <p:pic>
         <p:nvPicPr>
-          <p:cNvPr id="97" name="Object 96" descr="public/generated/icons/8.png">    </p:cNvPr>
+          <p:cNvPr id="97" name="Object 96" descr="public/generated/icons/a9617650-09ff-11ec-85f2-d10915d24d79.png">    </p:cNvPr>
           <p:cNvPicPr>
             <a:picLocks noChangeAspect="1"/>
           </p:cNvPicPr>
@@ -23514,7 +23514,7 @@
                 <a:ea typeface="Helvetica" pitchFamily="34" charset="-122"/>
                 <a:cs typeface="Helvetica" pitchFamily="34" charset="-120"/>
               </a:rPr>
-              <a:t>CLOUD OBJECT STORAGE (CLASSIC)</a:t>
+              <a:t>CLOUD NATIVE STORAGE AND DATA SERVICE</a:t>
             </a:r>
             <a:endParaRPr lang="en-US" dirty="0"/>
           </a:p>
@@ -23547,7 +23547,7 @@
       </p:sp>
       <p:pic>
         <p:nvPicPr>
-          <p:cNvPr id="100" name="Object 99" descr="public/generated/icons/35759612-efad-48d5-ad2a-5336349ed9bc.png">    </p:cNvPr>
+          <p:cNvPr id="100" name="Object 99" descr="public/generated/icons/dff97f5c-bc5e-4455-b470-411c3edbe49c.png">    </p:cNvPr>
           <p:cNvPicPr>
             <a:picLocks noChangeAspect="1"/>
           </p:cNvPicPr>
@@ -23603,7 +23603,7 @@
                 <a:ea typeface="Helvetica" pitchFamily="34" charset="-122"/>
                 <a:cs typeface="Helvetica" pitchFamily="34" charset="-120"/>
               </a:rPr>
-              <a:t>CLOUD PLATFORM PROFESSIONAL SERVICES</a:t>
+              <a:t>CLOUD OBJECT STORAGE</a:t>
             </a:r>
             <a:endParaRPr lang="en-US" dirty="0"/>
           </a:p>
@@ -23636,7 +23636,7 @@
       </p:sp>
       <p:pic>
         <p:nvPicPr>
-          <p:cNvPr id="103" name="Object 102" descr="public/generated/icons/is.reservation.png">    </p:cNvPr>
+          <p:cNvPr id="103" name="Object 102" descr="public/generated/icons/8.png">    </p:cNvPr>
           <p:cNvPicPr>
             <a:picLocks noChangeAspect="1"/>
           </p:cNvPicPr>
@@ -23692,7 +23692,7 @@
                 <a:ea typeface="Helvetica" pitchFamily="34" charset="-122"/>
                 <a:cs typeface="Helvetica" pitchFamily="34" charset="-120"/>
               </a:rPr>
-              <a:t>CLOUD RESERVATIONS FOR VPC</a:t>
+              <a:t>CLOUD OBJECT STORAGE (CLASSIC)</a:t>
             </a:r>
             <a:endParaRPr lang="en-US" dirty="0"/>
           </a:p>
@@ -23725,7 +23725,7 @@
       </p:sp>
       <p:pic>
         <p:nvPicPr>
-          <p:cNvPr id="106" name="Object 105" descr="public/generated/icons/cf329950-0a3e-11e8-922e-f1366c6e1c83-hytrust.png">    </p:cNvPr>
+          <p:cNvPr id="106" name="Object 105" descr="public/generated/icons/35759612-efad-48d5-ad2a-5336349ed9bc.png">    </p:cNvPr>
           <p:cNvPicPr>
             <a:picLocks noChangeAspect="1"/>
           </p:cNvPicPr>
@@ -23781,7 +23781,7 @@
                 <a:ea typeface="Helvetica" pitchFamily="34" charset="-122"/>
                 <a:cs typeface="Helvetica" pitchFamily="34" charset="-120"/>
               </a:rPr>
-              <a:t>CLOUD SECURE VIRTUALIZATION</a:t>
+              <a:t>CLOUD PLATFORM PROFESSIONAL SERVICES</a:t>
             </a:r>
             <a:endParaRPr lang="en-US" dirty="0"/>
           </a:p>
@@ -23814,7 +23814,7 @@
       </p:sp>
       <p:pic>
         <p:nvPicPr>
-          <p:cNvPr id="109" name="Object 108" descr="public/generated/icons/cloudant.png">    </p:cNvPr>
+          <p:cNvPr id="109" name="Object 108" descr="public/generated/icons/is.reservation.png">    </p:cNvPr>
           <p:cNvPicPr>
             <a:picLocks noChangeAspect="1"/>
           </p:cNvPicPr>
@@ -23870,7 +23870,7 @@
                 <a:ea typeface="Helvetica" pitchFamily="34" charset="-122"/>
                 <a:cs typeface="Helvetica" pitchFamily="34" charset="-120"/>
               </a:rPr>
-              <a:t>CLOUDANT</a:t>
+              <a:t>CLOUD RESERVATIONS FOR VPC</a:t>
             </a:r>
             <a:endParaRPr lang="en-US" dirty="0"/>
           </a:p>
@@ -23936,7 +23936,7 @@
       </p:sp>
       <p:pic>
         <p:nvPicPr>
-          <p:cNvPr id="3" name="Object 2" descr="public/generated/icons/e7114cc0-ffd2-4199-bc1a-ea79a6f09e89.png">    </p:cNvPr>
+          <p:cNvPr id="3" name="Object 2" descr="public/generated/icons/cf329950-0a3e-11e8-922e-f1366c6e1c83-hytrust.png">    </p:cNvPr>
           <p:cNvPicPr>
             <a:picLocks noChangeAspect="1"/>
           </p:cNvPicPr>
@@ -23992,7 +23992,7 @@
                 <a:ea typeface="Helvetica" pitchFamily="34" charset="-122"/>
                 <a:cs typeface="Helvetica" pitchFamily="34" charset="-120"/>
               </a:rPr>
-              <a:t>CLOUDSWAY CDN PRO</a:t>
+              <a:t>CLOUD SECURE VIRTUALIZATION</a:t>
             </a:r>
             <a:endParaRPr lang="en-US" dirty="0"/>
           </a:p>
@@ -24025,7 +24025,7 @@
       </p:sp>
       <p:pic>
         <p:nvPicPr>
-          <p:cNvPr id="6" name="Object 5" descr="public/generated/icons/is.cluster-network.png">    </p:cNvPr>
+          <p:cNvPr id="6" name="Object 5" descr="public/generated/icons/cloudant.png">    </p:cNvPr>
           <p:cNvPicPr>
             <a:picLocks noChangeAspect="1"/>
           </p:cNvPicPr>
@@ -24081,7 +24081,7 @@
                 <a:ea typeface="Helvetica" pitchFamily="34" charset="-122"/>
                 <a:cs typeface="Helvetica" pitchFamily="34" charset="-120"/>
               </a:rPr>
-              <a:t>CLUSTER NETWORK</a:t>
+              <a:t>CLOUDANT</a:t>
             </a:r>
             <a:endParaRPr lang="en-US" dirty="0"/>
           </a:p>
@@ -24114,7 +24114,7 @@
       </p:sp>
       <p:pic>
         <p:nvPicPr>
-          <p:cNvPr id="9" name="Object 8" descr="public/generated/icons/afb603e9-8738-4542-abf4-baf5231a4dbe.png">    </p:cNvPr>
+          <p:cNvPr id="9" name="Object 8" descr="public/generated/icons/e7114cc0-ffd2-4199-bc1a-ea79a6f09e89.png">    </p:cNvPr>
           <p:cNvPicPr>
             <a:picLocks noChangeAspect="1"/>
           </p:cNvPicPr>
@@ -24170,7 +24170,7 @@
                 <a:ea typeface="Helvetica" pitchFamily="34" charset="-122"/>
                 <a:cs typeface="Helvetica" pitchFamily="34" charset="-120"/>
               </a:rPr>
-              <a:t>COBALT IRON - SECURE AUTOMATED BACKUP WITH COMPASS</a:t>
+              <a:t>CLOUDSWAY CDN PRO</a:t>
             </a:r>
             <a:endParaRPr lang="en-US" dirty="0"/>
           </a:p>
@@ -24203,7 +24203,7 @@
       </p:sp>
       <p:pic>
         <p:nvPicPr>
-          <p:cNvPr id="12" name="Object 11" descr="public/generated/icons/2ad2fdd0-bba5-11ea-8966-5d6402fed1c7.png">    </p:cNvPr>
+          <p:cNvPr id="12" name="Object 11" descr="public/generated/icons/is.cluster-network.png">    </p:cNvPr>
           <p:cNvPicPr>
             <a:picLocks noChangeAspect="1"/>
           </p:cNvPicPr>
@@ -24259,7 +24259,7 @@
                 <a:ea typeface="Helvetica" pitchFamily="34" charset="-122"/>
                 <a:cs typeface="Helvetica" pitchFamily="34" charset="-120"/>
               </a:rPr>
-              <a:t>CODE ENGINE</a:t>
+              <a:t>CLUSTER NETWORK</a:t>
             </a:r>
             <a:endParaRPr lang="en-US" dirty="0"/>
           </a:p>
@@ -24292,7 +24292,7 @@
       </p:sp>
       <p:pic>
         <p:nvPicPr>
-          <p:cNvPr id="15" name="Object 14" descr="public/generated/icons/81cda9f0-b9c3-11e7-acad-0d931c5f18f1.png">    </p:cNvPr>
+          <p:cNvPr id="15" name="Object 14" descr="public/generated/icons/afb603e9-8738-4542-abf4-baf5231a4dbe.png">    </p:cNvPr>
           <p:cNvPicPr>
             <a:picLocks noChangeAspect="1"/>
           </p:cNvPicPr>
@@ -24348,7 +24348,7 @@
                 <a:ea typeface="Helvetica" pitchFamily="34" charset="-122"/>
                 <a:cs typeface="Helvetica" pitchFamily="34" charset="-120"/>
               </a:rPr>
-              <a:t>COGNOS DASHBOARD EMBEDDED</a:t>
+              <a:t>COBALT IRON - SECURE AUTOMATED BACKUP WITH COMPASS</a:t>
             </a:r>
             <a:endParaRPr lang="en-US" dirty="0"/>
           </a:p>
@@ -24381,7 +24381,7 @@
       </p:sp>
       <p:pic>
         <p:nvPicPr>
-          <p:cNvPr id="18" name="Object 17" descr="public/generated/icons/3e1a2c30-11dd-11ec-b621-67e0f6600d56.png">    </p:cNvPr>
+          <p:cNvPr id="18" name="Object 17" descr="public/generated/icons/2ad2fdd0-bba5-11ea-8966-5d6402fed1c7.png">    </p:cNvPr>
           <p:cNvPicPr>
             <a:picLocks noChangeAspect="1"/>
           </p:cNvPicPr>
@@ -24437,7 +24437,7 @@
                 <a:ea typeface="Helvetica" pitchFamily="34" charset="-122"/>
                 <a:cs typeface="Helvetica" pitchFamily="34" charset="-120"/>
               </a:rPr>
-              <a:t>COMPLIANCE AND CUSTOMER EXPERIENCE AUTOMATION</a:t>
+              <a:t>CODE ENGINE</a:t>
             </a:r>
             <a:endParaRPr lang="en-US" dirty="0"/>
           </a:p>
@@ -24470,7 +24470,7 @@
       </p:sp>
       <p:pic>
         <p:nvPicPr>
-          <p:cNvPr id="21" name="Object 20" descr="public/generated/icons/ComposeElasticsearch-P.png">    </p:cNvPr>
+          <p:cNvPr id="21" name="Object 20" descr="public/generated/icons/3e1a2c30-11dd-11ec-b621-67e0f6600d56.png">    </p:cNvPr>
           <p:cNvPicPr>
             <a:picLocks noChangeAspect="1"/>
           </p:cNvPicPr>
@@ -24526,7 +24526,7 @@
                 <a:ea typeface="Helvetica" pitchFamily="34" charset="-122"/>
                 <a:cs typeface="Helvetica" pitchFamily="34" charset="-120"/>
               </a:rPr>
-              <a:t>COMPOSE FOR ELASTICSEARCH</a:t>
+              <a:t>COMPLIANCE AND CUSTOMER EXPERIENCE AUTOMATION</a:t>
             </a:r>
             <a:endParaRPr lang="en-US" dirty="0"/>
           </a:p>
@@ -24559,7 +24559,7 @@
       </p:sp>
       <p:pic>
         <p:nvPicPr>
-          <p:cNvPr id="24" name="Object 23" descr="public/generated/icons/ComposeEtcd-P.png">    </p:cNvPr>
+          <p:cNvPr id="24" name="Object 23" descr="public/generated/icons/ComposeElasticsearch-P.png">    </p:cNvPr>
           <p:cNvPicPr>
             <a:picLocks noChangeAspect="1"/>
           </p:cNvPicPr>
@@ -24615,7 +24615,7 @@
                 <a:ea typeface="Helvetica" pitchFamily="34" charset="-122"/>
                 <a:cs typeface="Helvetica" pitchFamily="34" charset="-120"/>
               </a:rPr>
-              <a:t>COMPOSE FOR ETCD</a:t>
+              <a:t>COMPOSE FOR ELASTICSEARCH</a:t>
             </a:r>
             <a:endParaRPr lang="en-US" dirty="0"/>
           </a:p>
@@ -24648,7 +24648,7 @@
       </p:sp>
       <p:pic>
         <p:nvPicPr>
-          <p:cNvPr id="27" name="Object 26" descr="public/generated/icons/ComposeMongo-P.png">    </p:cNvPr>
+          <p:cNvPr id="27" name="Object 26" descr="public/generated/icons/ComposeEtcd-P.png">    </p:cNvPr>
           <p:cNvPicPr>
             <a:picLocks noChangeAspect="1"/>
           </p:cNvPicPr>
@@ -24704,7 +24704,7 @@
                 <a:ea typeface="Helvetica" pitchFamily="34" charset="-122"/>
                 <a:cs typeface="Helvetica" pitchFamily="34" charset="-120"/>
               </a:rPr>
-              <a:t>COMPOSE FOR MONGODB</a:t>
+              <a:t>COMPOSE FOR ETCD</a:t>
             </a:r>
             <a:endParaRPr lang="en-US" dirty="0"/>
           </a:p>
@@ -24737,7 +24737,7 @@
       </p:sp>
       <p:pic>
         <p:nvPicPr>
-          <p:cNvPr id="30" name="Object 29" descr="public/generated/icons/ComposePostgreSQL-P.png">    </p:cNvPr>
+          <p:cNvPr id="30" name="Object 29" descr="public/generated/icons/ComposeMongo-P.png">    </p:cNvPr>
           <p:cNvPicPr>
             <a:picLocks noChangeAspect="1"/>
           </p:cNvPicPr>
@@ -24793,7 +24793,7 @@
                 <a:ea typeface="Helvetica" pitchFamily="34" charset="-122"/>
                 <a:cs typeface="Helvetica" pitchFamily="34" charset="-120"/>
               </a:rPr>
-              <a:t>COMPOSE FOR POSTGRESQL</a:t>
+              <a:t>COMPOSE FOR MONGODB</a:t>
             </a:r>
             <a:endParaRPr lang="en-US" dirty="0"/>
           </a:p>
@@ -24826,7 +24826,7 @@
       </p:sp>
       <p:pic>
         <p:nvPicPr>
-          <p:cNvPr id="33" name="Object 32" descr="public/generated/icons/ComposeRabbitMQ-P.png">    </p:cNvPr>
+          <p:cNvPr id="33" name="Object 32" descr="public/generated/icons/ComposePostgreSQL-P.png">    </p:cNvPr>
           <p:cNvPicPr>
             <a:picLocks noChangeAspect="1"/>
           </p:cNvPicPr>
@@ -24882,7 +24882,7 @@
                 <a:ea typeface="Helvetica" pitchFamily="34" charset="-122"/>
                 <a:cs typeface="Helvetica" pitchFamily="34" charset="-120"/>
               </a:rPr>
-              <a:t>COMPOSE FOR RABBITMQ</a:t>
+              <a:t>COMPOSE FOR POSTGRESQL</a:t>
             </a:r>
             <a:endParaRPr lang="en-US" dirty="0"/>
           </a:p>
@@ -24915,7 +24915,7 @@
       </p:sp>
       <p:pic>
         <p:nvPicPr>
-          <p:cNvPr id="36" name="Object 35" descr="public/generated/icons/ComposeRedis-P.png">    </p:cNvPr>
+          <p:cNvPr id="36" name="Object 35" descr="public/generated/icons/ComposeRabbitMQ-P.png">    </p:cNvPr>
           <p:cNvPicPr>
             <a:picLocks noChangeAspect="1"/>
           </p:cNvPicPr>
@@ -24971,7 +24971,7 @@
                 <a:ea typeface="Helvetica" pitchFamily="34" charset="-122"/>
                 <a:cs typeface="Helvetica" pitchFamily="34" charset="-120"/>
               </a:rPr>
-              <a:t>COMPOSE FOR REDIS</a:t>
+              <a:t>COMPOSE FOR RABBITMQ</a:t>
             </a:r>
             <a:endParaRPr lang="en-US" dirty="0"/>
           </a:p>
@@ -25004,7 +25004,7 @@
       </p:sp>
       <p:pic>
         <p:nvPicPr>
-          <p:cNvPr id="39" name="Object 38" descr="public/generated/icons/public.bluemix.container.registry.png">    </p:cNvPr>
+          <p:cNvPr id="39" name="Object 38" descr="public/generated/icons/ComposeRedis-P.png">    </p:cNvPr>
           <p:cNvPicPr>
             <a:picLocks noChangeAspect="1"/>
           </p:cNvPicPr>
@@ -25060,7 +25060,7 @@
                 <a:ea typeface="Helvetica" pitchFamily="34" charset="-122"/>
                 <a:cs typeface="Helvetica" pitchFamily="34" charset="-120"/>
               </a:rPr>
-              <a:t>CONTAINER REGISTRY</a:t>
+              <a:t>COMPOSE FOR REDIS</a:t>
             </a:r>
             <a:endParaRPr lang="en-US" dirty="0"/>
           </a:p>
@@ -25093,7 +25093,7 @@
       </p:sp>
       <p:pic>
         <p:nvPicPr>
-          <p:cNvPr id="42" name="Object 41" descr="public/generated/icons/4ad9c1b8-e58e-2a9d-ccb8-d4d5ae84abc0.png">    </p:cNvPr>
+          <p:cNvPr id="42" name="Object 41" descr="public/generated/icons/public.bluemix.container.registry.png">    </p:cNvPr>
           <p:cNvPicPr>
             <a:picLocks noChangeAspect="1"/>
           </p:cNvPicPr>
@@ -25149,7 +25149,7 @@
                 <a:ea typeface="Helvetica" pitchFamily="34" charset="-122"/>
                 <a:cs typeface="Helvetica" pitchFamily="34" charset="-120"/>
               </a:rPr>
-              <a:t>CONTAINER SECURITY SERVICES</a:t>
+              <a:t>CONTAINER REGISTRY</a:t>
             </a:r>
             <a:endParaRPr lang="en-US" dirty="0"/>
           </a:p>
@@ -25182,7 +25182,7 @@
       </p:sp>
       <p:pic>
         <p:nvPicPr>
-          <p:cNvPr id="45" name="Object 44" descr="public/generated/icons/b6c4a555-5ff6-4e1d-9ce7-0a9976629eab.png">    </p:cNvPr>
+          <p:cNvPr id="45" name="Object 44" descr="public/generated/icons/4ad9c1b8-e58e-2a9d-ccb8-d4d5ae84abc0.png">    </p:cNvPr>
           <p:cNvPicPr>
             <a:picLocks noChangeAspect="1"/>
           </p:cNvPicPr>
@@ -25238,7 +25238,7 @@
                 <a:ea typeface="Helvetica" pitchFamily="34" charset="-122"/>
                 <a:cs typeface="Helvetica" pitchFamily="34" charset="-120"/>
               </a:rPr>
-              <a:t>CONTENT DELIVERY NETWORK</a:t>
+              <a:t>CONTAINER SECURITY SERVICES</a:t>
             </a:r>
             <a:endParaRPr lang="en-US" dirty="0"/>
           </a:p>
@@ -25271,7 +25271,7 @@
       </p:sp>
       <p:pic>
         <p:nvPicPr>
-          <p:cNvPr id="48" name="Object 47" descr="public/generated/icons/59b735ee-5938-4ebd-a6b2-541aef2d1f68.png">    </p:cNvPr>
+          <p:cNvPr id="48" name="Object 47" descr="public/generated/icons/b6c4a555-5ff6-4e1d-9ce7-0a9976629eab.png">    </p:cNvPr>
           <p:cNvPicPr>
             <a:picLocks noChangeAspect="1"/>
           </p:cNvPicPr>
@@ -25327,7 +25327,7 @@
                 <a:ea typeface="Helvetica" pitchFamily="34" charset="-122"/>
                 <a:cs typeface="Helvetica" pitchFamily="34" charset="-120"/>
               </a:rPr>
-              <a:t>CONTINUOUS DELIVERY</a:t>
+              <a:t>CONTENT DELIVERY NETWORK</a:t>
             </a:r>
             <a:endParaRPr lang="en-US" dirty="0"/>
           </a:p>
@@ -25360,7 +25360,7 @@
       </p:sp>
       <p:pic>
         <p:nvPicPr>
-          <p:cNvPr id="51" name="Object 50" descr="public/generated/icons/d19358fd-a20a-4bb7-9727-9d3c129db741.png">    </p:cNvPr>
+          <p:cNvPr id="51" name="Object 50" descr="public/generated/icons/59b735ee-5938-4ebd-a6b2-541aef2d1f68.png">    </p:cNvPr>
           <p:cNvPicPr>
             <a:picLocks noChangeAspect="1"/>
           </p:cNvPicPr>
@@ -25416,7 +25416,7 @@
                 <a:ea typeface="Helvetica" pitchFamily="34" charset="-122"/>
                 <a:cs typeface="Helvetica" pitchFamily="34" charset="-120"/>
               </a:rPr>
-              <a:t>CONVERLISTICS</a:t>
+              <a:t>CONTINUOUS DELIVERY</a:t>
             </a:r>
             <a:endParaRPr lang="en-US" dirty="0"/>
           </a:p>
@@ -25449,7 +25449,7 @@
       </p:sp>
       <p:pic>
         <p:nvPicPr>
-          <p:cNvPr id="54" name="Object 53" descr="public/generated/icons/742c2c0f-1c40-480d-ab7b-76e56a89f51b.png">    </p:cNvPr>
+          <p:cNvPr id="54" name="Object 53" descr="public/generated/icons/d19358fd-a20a-4bb7-9727-9d3c129db741.png">    </p:cNvPr>
           <p:cNvPicPr>
             <a:picLocks noChangeAspect="1"/>
           </p:cNvPicPr>
@@ -25505,7 +25505,7 @@
                 <a:ea typeface="Helvetica" pitchFamily="34" charset="-122"/>
                 <a:cs typeface="Helvetica" pitchFamily="34" charset="-120"/>
               </a:rPr>
-              <a:t>CONVERTIO VMWARE WORKLOAD MIGRATION AND CONVERSION</a:t>
+              <a:t>CONVERLISTICS</a:t>
             </a:r>
             <a:endParaRPr lang="en-US" dirty="0"/>
           </a:p>
@@ -25538,7 +25538,7 @@
       </p:sp>
       <p:pic>
         <p:nvPicPr>
-          <p:cNvPr id="57" name="Object 56" descr="public/generated/icons/5da26b90-7b83-44b5-b6d3-778b408b77db.png">    </p:cNvPr>
+          <p:cNvPr id="57" name="Object 56" descr="public/generated/icons/742c2c0f-1c40-480d-ab7b-76e56a89f51b.png">    </p:cNvPr>
           <p:cNvPicPr>
             <a:picLocks noChangeAspect="1"/>
           </p:cNvPicPr>
@@ -25594,7 +25594,7 @@
                 <a:ea typeface="Helvetica" pitchFamily="34" charset="-122"/>
                 <a:cs typeface="Helvetica" pitchFamily="34" charset="-120"/>
               </a:rPr>
-              <a:t>CRUSHBANK</a:t>
+              <a:t>CONVERTIO VMWARE WORKLOAD MIGRATION AND CONVERSION</a:t>
             </a:r>
             <a:endParaRPr lang="en-US" dirty="0"/>
           </a:p>
@@ -25627,7 +25627,7 @@
       </p:sp>
       <p:pic>
         <p:nvPicPr>
-          <p:cNvPr id="60" name="Object 59" descr="public/generated/icons/07d4aa9f-1f71-43bb-9916-8e9cff5bc426.png">    </p:cNvPr>
+          <p:cNvPr id="60" name="Object 59" descr="public/generated/icons/5da26b90-7b83-44b5-b6d3-778b408b77db.png">    </p:cNvPr>
           <p:cNvPicPr>
             <a:picLocks noChangeAspect="1"/>
           </p:cNvPicPr>
@@ -25683,7 +25683,7 @@
                 <a:ea typeface="Helvetica" pitchFamily="34" charset="-122"/>
                 <a:cs typeface="Helvetica" pitchFamily="34" charset="-120"/>
               </a:rPr>
-              <a:t>CUSTOM MIGRATIONS DR AND MANAGEMENT AS A SERVICE</a:t>
+              <a:t>CRUSHBANK</a:t>
             </a:r>
             <a:endParaRPr lang="en-US" dirty="0"/>
           </a:p>
@@ -25716,7 +25716,7 @@
       </p:sp>
       <p:pic>
         <p:nvPicPr>
-          <p:cNvPr id="63" name="Object 62" descr="public/generated/icons/1ab48530-6638-4fce-a386-0bd598576a0a.png">    </p:cNvPr>
+          <p:cNvPr id="63" name="Object 62" descr="public/generated/icons/07d4aa9f-1f71-43bb-9916-8e9cff5bc426.png">    </p:cNvPr>
           <p:cNvPicPr>
             <a:picLocks noChangeAspect="1"/>
           </p:cNvPicPr>
@@ -25772,7 +25772,7 @@
                 <a:ea typeface="Helvetica" pitchFamily="34" charset="-122"/>
                 <a:cs typeface="Helvetica" pitchFamily="34" charset="-120"/>
               </a:rPr>
-              <a:t>CYBERSTRONG BY CYBERSAINT</a:t>
+              <a:t>CUSTOM MIGRATIONS DR AND MANAGEMENT AS A SERVICE</a:t>
             </a:r>
             <a:endParaRPr lang="en-US" dirty="0"/>
           </a:p>
@@ -25805,7 +25805,7 @@
       </p:sp>
       <p:pic>
         <p:nvPicPr>
-          <p:cNvPr id="66" name="Object 65" descr="public/generated/icons/840bcb30-f8c3-11ed-afcd-01dba1a5ada3.png">    </p:cNvPr>
+          <p:cNvPr id="66" name="Object 65" descr="public/generated/icons/1ab48530-6638-4fce-a386-0bd598576a0a.png">    </p:cNvPr>
           <p:cNvPicPr>
             <a:picLocks noChangeAspect="1"/>
           </p:cNvPicPr>
@@ -25861,7 +25861,7 @@
                 <a:ea typeface="Helvetica" pitchFamily="34" charset="-122"/>
                 <a:cs typeface="Helvetica" pitchFamily="34" charset="-120"/>
               </a:rPr>
-              <a:t>DATA PRODUCT HUB</a:t>
+              <a:t>CYBERSTRONG BY CYBERSAINT</a:t>
             </a:r>
             <a:endParaRPr lang="en-US" dirty="0"/>
           </a:p>
@@ -25894,7 +25894,7 @@
       </p:sp>
       <p:pic>
         <p:nvPicPr>
-          <p:cNvPr id="69" name="Object 68" descr="public/generated/icons/696b9880-9e9b-11ea-9054-e15e287f1e7f.png">    </p:cNvPr>
+          <p:cNvPr id="69" name="Object 68" descr="public/generated/icons/840bcb30-f8c3-11ed-afcd-01dba1a5ada3.png">    </p:cNvPr>
           <p:cNvPicPr>
             <a:picLocks noChangeAspect="1"/>
           </p:cNvPicPr>
@@ -25950,7 +25950,7 @@
                 <a:ea typeface="Helvetica" pitchFamily="34" charset="-122"/>
                 <a:cs typeface="Helvetica" pitchFamily="34" charset="-120"/>
               </a:rPr>
-              <a:t>DATA REPLICATION</a:t>
+              <a:t>DATA PRODUCT HUB</a:t>
             </a:r>
             <a:endParaRPr lang="en-US" dirty="0"/>
           </a:p>
@@ -25983,7 +25983,7 @@
       </p:sp>
       <p:pic>
         <p:nvPicPr>
-          <p:cNvPr id="72" name="Object 71" descr="public/generated/icons/5d307850-0404-11eb-8c8b-c7d7505f656d.png">    </p:cNvPr>
+          <p:cNvPr id="72" name="Object 71" descr="public/generated/icons/696b9880-9e9b-11ea-9054-e15e287f1e7f.png">    </p:cNvPr>
           <p:cNvPicPr>
             <a:picLocks noChangeAspect="1"/>
           </p:cNvPicPr>
@@ -26039,7 +26039,7 @@
                 <a:ea typeface="Helvetica" pitchFamily="34" charset="-122"/>
                 <a:cs typeface="Helvetica" pitchFamily="34" charset="-120"/>
               </a:rPr>
-              <a:t>DATA VIRTUALIZATION</a:t>
+              <a:t>DATA REPLICATION</a:t>
             </a:r>
             <a:endParaRPr lang="en-US" dirty="0"/>
           </a:p>
@@ -26072,7 +26072,7 @@
       </p:sp>
       <p:pic>
         <p:nvPicPr>
-          <p:cNvPr id="75" name="Object 74" descr="public/generated/icons/databases-for-enterprisedb.png">    </p:cNvPr>
+          <p:cNvPr id="75" name="Object 74" descr="public/generated/icons/5d307850-0404-11eb-8c8b-c7d7505f656d.png">    </p:cNvPr>
           <p:cNvPicPr>
             <a:picLocks noChangeAspect="1"/>
           </p:cNvPicPr>
@@ -26128,7 +26128,7 @@
                 <a:ea typeface="Helvetica" pitchFamily="34" charset="-122"/>
                 <a:cs typeface="Helvetica" pitchFamily="34" charset="-120"/>
               </a:rPr>
-              <a:t>DATABASES FOR EDB</a:t>
+              <a:t>DATA VIRTUALIZATION</a:t>
             </a:r>
             <a:endParaRPr lang="en-US" dirty="0"/>
           </a:p>
@@ -26161,7 +26161,7 @@
       </p:sp>
       <p:pic>
         <p:nvPicPr>
-          <p:cNvPr id="78" name="Object 77" descr="public/generated/icons/databases-for-elasticsearch.png">    </p:cNvPr>
+          <p:cNvPr id="78" name="Object 77" descr="public/generated/icons/databases-for-enterprisedb.png">    </p:cNvPr>
           <p:cNvPicPr>
             <a:picLocks noChangeAspect="1"/>
           </p:cNvPicPr>
@@ -26217,7 +26217,7 @@
                 <a:ea typeface="Helvetica" pitchFamily="34" charset="-122"/>
                 <a:cs typeface="Helvetica" pitchFamily="34" charset="-120"/>
               </a:rPr>
-              <a:t>DATABASES FOR ELASTICSEARCH</a:t>
+              <a:t>DATABASES FOR EDB</a:t>
             </a:r>
             <a:endParaRPr lang="en-US" dirty="0"/>
           </a:p>
@@ -26250,7 +26250,7 @@
       </p:sp>
       <p:pic>
         <p:nvPicPr>
-          <p:cNvPr id="81" name="Object 80" descr="public/generated/icons/databases-for-etcd.png">    </p:cNvPr>
+          <p:cNvPr id="81" name="Object 80" descr="public/generated/icons/databases-for-elasticsearch.png">    </p:cNvPr>
           <p:cNvPicPr>
             <a:picLocks noChangeAspect="1"/>
           </p:cNvPicPr>
@@ -26306,7 +26306,7 @@
                 <a:ea typeface="Helvetica" pitchFamily="34" charset="-122"/>
                 <a:cs typeface="Helvetica" pitchFamily="34" charset="-120"/>
               </a:rPr>
-              <a:t>DATABASES FOR ETCD</a:t>
+              <a:t>DATABASES FOR ELASTICSEARCH</a:t>
             </a:r>
             <a:endParaRPr lang="en-US" dirty="0"/>
           </a:p>
@@ -26339,7 +26339,7 @@
       </p:sp>
       <p:pic>
         <p:nvPicPr>
-          <p:cNvPr id="84" name="Object 83" descr="public/generated/icons/databases-for-mongodb.png">    </p:cNvPr>
+          <p:cNvPr id="84" name="Object 83" descr="public/generated/icons/databases-for-etcd.png">    </p:cNvPr>
           <p:cNvPicPr>
             <a:picLocks noChangeAspect="1"/>
           </p:cNvPicPr>
@@ -26395,7 +26395,7 @@
                 <a:ea typeface="Helvetica" pitchFamily="34" charset="-122"/>
                 <a:cs typeface="Helvetica" pitchFamily="34" charset="-120"/>
               </a:rPr>
-              <a:t>DATABASES FOR MONGODB</a:t>
+              <a:t>DATABASES FOR ETCD</a:t>
             </a:r>
             <a:endParaRPr lang="en-US" dirty="0"/>
           </a:p>
@@ -26428,7 +26428,7 @@
       </p:sp>
       <p:pic>
         <p:nvPicPr>
-          <p:cNvPr id="87" name="Object 86" descr="public/generated/icons/databases-for-mysql.png">    </p:cNvPr>
+          <p:cNvPr id="87" name="Object 86" descr="public/generated/icons/databases-for-mongodb.png">    </p:cNvPr>
           <p:cNvPicPr>
             <a:picLocks noChangeAspect="1"/>
           </p:cNvPicPr>
@@ -26484,7 +26484,7 @@
                 <a:ea typeface="Helvetica" pitchFamily="34" charset="-122"/>
                 <a:cs typeface="Helvetica" pitchFamily="34" charset="-120"/>
               </a:rPr>
-              <a:t>DATABASES FOR MYSQL</a:t>
+              <a:t>DATABASES FOR MONGODB</a:t>
             </a:r>
             <a:endParaRPr lang="en-US" dirty="0"/>
           </a:p>
@@ -26517,7 +26517,7 @@
       </p:sp>
       <p:pic>
         <p:nvPicPr>
-          <p:cNvPr id="90" name="Object 89" descr="public/generated/icons/databases-for-postgresql.png">    </p:cNvPr>
+          <p:cNvPr id="90" name="Object 89" descr="public/generated/icons/databases-for-mysql.png">    </p:cNvPr>
           <p:cNvPicPr>
             <a:picLocks noChangeAspect="1"/>
           </p:cNvPicPr>
@@ -26573,7 +26573,7 @@
                 <a:ea typeface="Helvetica" pitchFamily="34" charset="-122"/>
                 <a:cs typeface="Helvetica" pitchFamily="34" charset="-120"/>
               </a:rPr>
-              <a:t>DATABASES FOR POSTGRESQL</a:t>
+              <a:t>DATABASES FOR MYSQL</a:t>
             </a:r>
             <a:endParaRPr lang="en-US" dirty="0"/>
           </a:p>
@@ -26606,7 +26606,7 @@
       </p:sp>
       <p:pic>
         <p:nvPicPr>
-          <p:cNvPr id="93" name="Object 92" descr="public/generated/icons/databases-for-redis.png">    </p:cNvPr>
+          <p:cNvPr id="93" name="Object 92" descr="public/generated/icons/databases-for-postgresql.png">    </p:cNvPr>
           <p:cNvPicPr>
             <a:picLocks noChangeAspect="1"/>
           </p:cNvPicPr>
@@ -26662,7 +26662,7 @@
                 <a:ea typeface="Helvetica" pitchFamily="34" charset="-122"/>
                 <a:cs typeface="Helvetica" pitchFamily="34" charset="-120"/>
               </a:rPr>
-              <a:t>DATABASES FOR REDIS</a:t>
+              <a:t>DATABASES FOR POSTGRESQL</a:t>
             </a:r>
             <a:endParaRPr lang="en-US" dirty="0"/>
           </a:p>
@@ -26695,7 +26695,7 @@
       </p:sp>
       <p:pic>
         <p:nvPicPr>
-          <p:cNvPr id="96" name="Object 95" descr="public/generated/icons/dd0532c0-f87c-11ea-be25-c9dc051df74f.png">    </p:cNvPr>
+          <p:cNvPr id="96" name="Object 95" descr="public/generated/icons/databases-for-redis.png">    </p:cNvPr>
           <p:cNvPicPr>
             <a:picLocks noChangeAspect="1"/>
           </p:cNvPicPr>
@@ -26751,7 +26751,7 @@
                 <a:ea typeface="Helvetica" pitchFamily="34" charset="-122"/>
                 <a:cs typeface="Helvetica" pitchFamily="34" charset="-120"/>
               </a:rPr>
-              <a:t>DATASTAGE</a:t>
+              <a:t>DATABASES FOR REDIS</a:t>
             </a:r>
             <a:endParaRPr lang="en-US" dirty="0"/>
           </a:p>
@@ -26784,7 +26784,7 @@
       </p:sp>
       <p:pic>
         <p:nvPicPr>
-          <p:cNvPr id="99" name="Object 98" descr="public/generated/icons/dashdb-for-transactions.png">    </p:cNvPr>
+          <p:cNvPr id="99" name="Object 98" descr="public/generated/icons/dd0532c0-f87c-11ea-be25-c9dc051df74f.png">    </p:cNvPr>
           <p:cNvPicPr>
             <a:picLocks noChangeAspect="1"/>
           </p:cNvPicPr>
@@ -26840,7 +26840,7 @@
                 <a:ea typeface="Helvetica" pitchFamily="34" charset="-122"/>
                 <a:cs typeface="Helvetica" pitchFamily="34" charset="-120"/>
               </a:rPr>
-              <a:t>DB2</a:t>
+              <a:t>DATASTAGE</a:t>
             </a:r>
             <a:endParaRPr lang="en-US" dirty="0"/>
           </a:p>
@@ -26873,7 +26873,7 @@
       </p:sp>
       <p:pic>
         <p:nvPicPr>
-          <p:cNvPr id="102" name="Object 101" descr="public/generated/icons/9e02e72d-00ce-4220-b44c-650c8314e58a.png">    </p:cNvPr>
+          <p:cNvPr id="102" name="Object 101" descr="public/generated/icons/dashdb-for-transactions.png">    </p:cNvPr>
           <p:cNvPicPr>
             <a:picLocks noChangeAspect="1"/>
           </p:cNvPicPr>
@@ -26929,7 +26929,7 @@
                 <a:ea typeface="Helvetica" pitchFamily="34" charset="-122"/>
                 <a:cs typeface="Helvetica" pitchFamily="34" charset="-120"/>
               </a:rPr>
-              <a:t>DB2 WAREHOUSE</a:t>
+              <a:t>DB2</a:t>
             </a:r>
             <a:endParaRPr lang="en-US" dirty="0"/>
           </a:p>
@@ -26962,7 +26962,7 @@
       </p:sp>
       <p:pic>
         <p:nvPicPr>
-          <p:cNvPr id="105" name="Object 104" descr="public/generated/icons/is.dedicated-host.png">    </p:cNvPr>
+          <p:cNvPr id="105" name="Object 104" descr="public/generated/icons/9e02e72d-00ce-4220-b44c-650c8314e58a.png">    </p:cNvPr>
           <p:cNvPicPr>
             <a:picLocks noChangeAspect="1"/>
           </p:cNvPicPr>
@@ -27018,7 +27018,7 @@
                 <a:ea typeface="Helvetica" pitchFamily="34" charset="-122"/>
                 <a:cs typeface="Helvetica" pitchFamily="34" charset="-120"/>
               </a:rPr>
-              <a:t>DEDICATED HOST FOR VPC</a:t>
+              <a:t>DB2 WAREHOUSE</a:t>
             </a:r>
             <a:endParaRPr lang="en-US" dirty="0"/>
           </a:p>
@@ -27051,7 +27051,7 @@
       </p:sp>
       <p:pic>
         <p:nvPicPr>
-          <p:cNvPr id="108" name="Object 107" descr="public/generated/icons/86fb7610-0f92-11ea-a6a3-8b96ed1570d8.png">    </p:cNvPr>
+          <p:cNvPr id="108" name="Object 107" descr="public/generated/icons/is.dedicated-host.png">    </p:cNvPr>
           <p:cNvPicPr>
             <a:picLocks noChangeAspect="1"/>
           </p:cNvPicPr>
@@ -27107,7 +27107,7 @@
                 <a:ea typeface="Helvetica" pitchFamily="34" charset="-122"/>
                 <a:cs typeface="Helvetica" pitchFamily="34" charset="-120"/>
               </a:rPr>
-              <a:t>DIRECT LINK CONNECT</a:t>
+              <a:t>DEDICATED HOST FOR VPC</a:t>
             </a:r>
             <a:endParaRPr lang="en-US" dirty="0"/>
           </a:p>
@@ -27173,7 +27173,7 @@
       </p:sp>
       <p:pic>
         <p:nvPicPr>
-          <p:cNvPr id="3" name="Object 2" descr="public/generated/icons/7dd59b11-c3c5-5aad-f6b2-2a0c2a3e6c49.png">    </p:cNvPr>
+          <p:cNvPr id="3" name="Object 2" descr="public/generated/icons/86fb7610-0f92-11ea-a6a3-8b96ed1570d8.png">    </p:cNvPr>
           <p:cNvPicPr>
             <a:picLocks noChangeAspect="1"/>
           </p:cNvPicPr>
@@ -27229,7 +27229,7 @@
                 <a:ea typeface="Helvetica" pitchFamily="34" charset="-122"/>
                 <a:cs typeface="Helvetica" pitchFamily="34" charset="-120"/>
               </a:rPr>
-              <a:t>DIRECT LINK CONNECT ON CLASSIC</a:t>
+              <a:t>DIRECT LINK CONNECT</a:t>
             </a:r>
             <a:endParaRPr lang="en-US" dirty="0"/>
           </a:p>
@@ -27262,7 +27262,7 @@
       </p:sp>
       <p:pic>
         <p:nvPicPr>
-          <p:cNvPr id="6" name="Object 5" descr="public/generated/icons/dc11a440-6073-11e9-9f5a-2f7997ba23c0.png">    </p:cNvPr>
+          <p:cNvPr id="6" name="Object 5" descr="public/generated/icons/7dd59b11-c3c5-5aad-f6b2-2a0c2a3e6c49.png">    </p:cNvPr>
           <p:cNvPicPr>
             <a:picLocks noChangeAspect="1"/>
           </p:cNvPicPr>
@@ -27318,7 +27318,7 @@
                 <a:ea typeface="Helvetica" pitchFamily="34" charset="-122"/>
                 <a:cs typeface="Helvetica" pitchFamily="34" charset="-120"/>
               </a:rPr>
-              <a:t>DIRECT LINK DEDICATED</a:t>
+              <a:t>DIRECT LINK CONNECT ON CLASSIC</a:t>
             </a:r>
             <a:endParaRPr lang="en-US" dirty="0"/>
           </a:p>
@@ -27351,7 +27351,7 @@
       </p:sp>
       <p:pic>
         <p:nvPicPr>
-          <p:cNvPr id="9" name="Object 8" descr="public/generated/icons/22.png">    </p:cNvPr>
+          <p:cNvPr id="9" name="Object 8" descr="public/generated/icons/dc11a440-6073-11e9-9f5a-2f7997ba23c0.png">    </p:cNvPr>
           <p:cNvPicPr>
             <a:picLocks noChangeAspect="1"/>
           </p:cNvPicPr>
@@ -27407,7 +27407,7 @@
                 <a:ea typeface="Helvetica" pitchFamily="34" charset="-122"/>
                 <a:cs typeface="Helvetica" pitchFamily="34" charset="-120"/>
               </a:rPr>
-              <a:t>DIRECT LINK DEDICATED HOSTING ON CLASSIC</a:t>
+              <a:t>DIRECT LINK DEDICATED</a:t>
             </a:r>
             <a:endParaRPr lang="en-US" dirty="0"/>
           </a:p>
@@ -27440,7 +27440,7 @@
       </p:sp>
       <p:pic>
         <p:nvPicPr>
-          <p:cNvPr id="12" name="Object 11" descr="public/generated/icons/23.png">    </p:cNvPr>
+          <p:cNvPr id="12" name="Object 11" descr="public/generated/icons/22.png">    </p:cNvPr>
           <p:cNvPicPr>
             <a:picLocks noChangeAspect="1"/>
           </p:cNvPicPr>
@@ -27496,7 +27496,7 @@
                 <a:ea typeface="Helvetica" pitchFamily="34" charset="-122"/>
                 <a:cs typeface="Helvetica" pitchFamily="34" charset="-120"/>
               </a:rPr>
-              <a:t>DIRECT LINK DEDICATED ON CLASSIC</a:t>
+              <a:t>DIRECT LINK DEDICATED HOSTING ON CLASSIC</a:t>
             </a:r>
             <a:endParaRPr lang="en-US" dirty="0"/>
           </a:p>
@@ -27529,7 +27529,7 @@
       </p:sp>
       <p:pic>
         <p:nvPicPr>
-          <p:cNvPr id="15" name="Object 14" descr="public/generated/icons/21.png">    </p:cNvPr>
+          <p:cNvPr id="15" name="Object 14" descr="public/generated/icons/23.png">    </p:cNvPr>
           <p:cNvPicPr>
             <a:picLocks noChangeAspect="1"/>
           </p:cNvPicPr>
@@ -27585,7 +27585,7 @@
                 <a:ea typeface="Helvetica" pitchFamily="34" charset="-122"/>
                 <a:cs typeface="Helvetica" pitchFamily="34" charset="-120"/>
               </a:rPr>
-              <a:t>DIRECT LINK EXCHANGE ON CLASSIC</a:t>
+              <a:t>DIRECT LINK DEDICATED ON CLASSIC</a:t>
             </a:r>
             <a:endParaRPr lang="en-US" dirty="0"/>
           </a:p>
@@ -27618,7 +27618,7 @@
       </p:sp>
       <p:pic>
         <p:nvPicPr>
-          <p:cNvPr id="18" name="Object 17" descr="public/generated/icons/9f3db814-3aec-47c5-94b0-6a71d49bd27f.png">    </p:cNvPr>
+          <p:cNvPr id="18" name="Object 17" descr="public/generated/icons/21.png">    </p:cNvPr>
           <p:cNvPicPr>
             <a:picLocks noChangeAspect="1"/>
           </p:cNvPicPr>
@@ -27674,7 +27674,7 @@
                 <a:ea typeface="Helvetica" pitchFamily="34" charset="-122"/>
                 <a:cs typeface="Helvetica" pitchFamily="34" charset="-120"/>
               </a:rPr>
-              <a:t>DIZZION COMPLETE</a:t>
+              <a:t>DIRECT LINK EXCHANGE ON CLASSIC</a:t>
             </a:r>
             <a:endParaRPr lang="en-US" dirty="0"/>
           </a:p>
@@ -27707,7 +27707,7 @@
       </p:sp>
       <p:pic>
         <p:nvPicPr>
-          <p:cNvPr id="21" name="Object 20" descr="public/generated/icons/9e09a2eb-b2e5-4d76-ab7c-1b2f8c080865.png">    </p:cNvPr>
+          <p:cNvPr id="21" name="Object 20" descr="public/generated/icons/9f3db814-3aec-47c5-94b0-6a71d49bd27f.png">    </p:cNvPr>
           <p:cNvPicPr>
             <a:picLocks noChangeAspect="1"/>
           </p:cNvPicPr>
@@ -27763,7 +27763,7 @@
                 <a:ea typeface="Helvetica" pitchFamily="34" charset="-122"/>
                 <a:cs typeface="Helvetica" pitchFamily="34" charset="-120"/>
               </a:rPr>
-              <a:t>DIZZION COMPLETE - HORIZON</a:t>
+              <a:t>DIZZION COMPLETE</a:t>
             </a:r>
             <a:endParaRPr lang="en-US" dirty="0"/>
           </a:p>
@@ -27796,7 +27796,7 @@
       </p:sp>
       <p:pic>
         <p:nvPicPr>
-          <p:cNvPr id="24" name="Object 23" descr="public/generated/icons/79679329-2050-4779-a2e2-7210b88aed4e.png">    </p:cNvPr>
+          <p:cNvPr id="24" name="Object 23" descr="public/generated/icons/9e09a2eb-b2e5-4d76-ab7c-1b2f8c080865.png">    </p:cNvPr>
           <p:cNvPicPr>
             <a:picLocks noChangeAspect="1"/>
           </p:cNvPicPr>
@@ -27852,7 +27852,7 @@
                 <a:ea typeface="Helvetica" pitchFamily="34" charset="-122"/>
                 <a:cs typeface="Helvetica" pitchFamily="34" charset="-120"/>
               </a:rPr>
-              <a:t>DIZZION COMPLETE FS - HORIZON</a:t>
+              <a:t>DIZZION COMPLETE - HORIZON</a:t>
             </a:r>
             <a:endParaRPr lang="en-US" dirty="0"/>
           </a:p>
@@ -27885,7 +27885,7 @@
       </p:sp>
       <p:pic>
         <p:nvPicPr>
-          <p:cNvPr id="27" name="Object 26" descr="public/generated/icons/6fc0c2df-7fbc-470f-aac5-a93af7ef4a92.png">    </p:cNvPr>
+          <p:cNvPr id="27" name="Object 26" descr="public/generated/icons/79679329-2050-4779-a2e2-7210b88aed4e.png">    </p:cNvPr>
           <p:cNvPicPr>
             <a:picLocks noChangeAspect="1"/>
           </p:cNvPicPr>
@@ -27941,7 +27941,7 @@
                 <a:ea typeface="Helvetica" pitchFamily="34" charset="-122"/>
                 <a:cs typeface="Helvetica" pitchFamily="34" charset="-120"/>
               </a:rPr>
-              <a:t>DIZZION FLEX</a:t>
+              <a:t>DIZZION COMPLETE FS - HORIZON</a:t>
             </a:r>
             <a:endParaRPr lang="en-US" dirty="0"/>
           </a:p>
@@ -27974,7 +27974,7 @@
       </p:sp>
       <p:pic>
         <p:nvPicPr>
-          <p:cNvPr id="30" name="Object 29" descr="public/generated/icons/72ca6b61-2aa8-4b8f-ba21-69854bd2095b.png">    </p:cNvPr>
+          <p:cNvPr id="30" name="Object 29" descr="public/generated/icons/6fc0c2df-7fbc-470f-aac5-a93af7ef4a92.png">    </p:cNvPr>
           <p:cNvPicPr>
             <a:picLocks noChangeAspect="1"/>
           </p:cNvPicPr>
@@ -28030,7 +28030,7 @@
                 <a:ea typeface="Helvetica" pitchFamily="34" charset="-122"/>
                 <a:cs typeface="Helvetica" pitchFamily="34" charset="-120"/>
               </a:rPr>
-              <a:t>DIZZION MANAGED</a:t>
+              <a:t>DIZZION FLEX</a:t>
             </a:r>
             <a:endParaRPr lang="en-US" dirty="0"/>
           </a:p>
@@ -28063,7 +28063,7 @@
       </p:sp>
       <p:pic>
         <p:nvPicPr>
-          <p:cNvPr id="33" name="Object 32" descr="public/generated/icons/b4ed8a30-936f-11e9-b289-1d079699cbe5.png">    </p:cNvPr>
+          <p:cNvPr id="33" name="Object 32" descr="public/generated/icons/72ca6b61-2aa8-4b8f-ba21-69854bd2095b.png">    </p:cNvPr>
           <p:cNvPicPr>
             <a:picLocks noChangeAspect="1"/>
           </p:cNvPicPr>
@@ -28119,7 +28119,7 @@
                 <a:ea typeface="Helvetica" pitchFamily="34" charset="-122"/>
                 <a:cs typeface="Helvetica" pitchFamily="34" charset="-120"/>
               </a:rPr>
-              <a:t>DNS SERVICES</a:t>
+              <a:t>DIZZION MANAGED</a:t>
             </a:r>
             <a:endParaRPr lang="en-US" dirty="0"/>
           </a:p>
@@ -28152,7 +28152,7 @@
       </p:sp>
       <p:pic>
         <p:nvPicPr>
-          <p:cNvPr id="36" name="Object 35" descr="public/generated/icons/d1e3f0d2-0f49-ddfd-0eb9-2897b9d3a45d.png">    </p:cNvPr>
+          <p:cNvPr id="36" name="Object 35" descr="public/generated/icons/b4ed8a30-936f-11e9-b289-1d079699cbe5.png">    </p:cNvPr>
           <p:cNvPicPr>
             <a:picLocks noChangeAspect="1"/>
           </p:cNvPicPr>
@@ -28208,7 +28208,7 @@
                 <a:ea typeface="Helvetica" pitchFamily="34" charset="-122"/>
                 <a:cs typeface="Helvetica" pitchFamily="34" charset="-120"/>
               </a:rPr>
-              <a:t>EMAIL DELIVERY, POWERED BY SENDGRID</a:t>
+              <a:t>DNS SERVICES</a:t>
             </a:r>
             <a:endParaRPr lang="en-US" dirty="0"/>
           </a:p>
@@ -28241,7 +28241,7 @@
       </p:sp>
       <p:pic>
         <p:nvPicPr>
-          <p:cNvPr id="39" name="Object 38" descr="public/generated/icons/871a9870-7508-11ef-ac5c-3324c550b37a.png">    </p:cNvPr>
+          <p:cNvPr id="39" name="Object 38" descr="public/generated/icons/d1e3f0d2-0f49-ddfd-0eb9-2897b9d3a45d.png">    </p:cNvPr>
           <p:cNvPicPr>
             <a:picLocks noChangeAspect="1"/>
           </p:cNvPicPr>
@@ -28297,7 +28297,7 @@
                 <a:ea typeface="Helvetica" pitchFamily="34" charset="-122"/>
                 <a:cs typeface="Helvetica" pitchFamily="34" charset="-120"/>
               </a:rPr>
-              <a:t>ENTERPRISE APPLICATION SERVICE</a:t>
+              <a:t>EMAIL DELIVERY, POWERED BY SENDGRID</a:t>
             </a:r>
             <a:endParaRPr lang="en-US" dirty="0"/>
           </a:p>
@@ -28330,7 +28330,7 @@
       </p:sp>
       <p:pic>
         <p:nvPicPr>
-          <p:cNvPr id="42" name="Object 41" descr="public/generated/icons/64955a78-30f9-426d-a25a-344480421b27.png">    </p:cNvPr>
+          <p:cNvPr id="42" name="Object 41" descr="public/generated/icons/871a9870-7508-11ef-ac5c-3324c550b37a.png">    </p:cNvPr>
           <p:cNvPicPr>
             <a:picLocks noChangeAspect="1"/>
           </p:cNvPicPr>
@@ -28386,7 +28386,7 @@
                 <a:ea typeface="Helvetica" pitchFamily="34" charset="-122"/>
                 <a:cs typeface="Helvetica" pitchFamily="34" charset="-120"/>
               </a:rPr>
-              <a:t>ETICLOUD SECURE DIGITAL AGILE WORKPLACE</a:t>
+              <a:t>ENTERPRISE APPLICATION SERVICE</a:t>
             </a:r>
             <a:endParaRPr lang="en-US" dirty="0"/>
           </a:p>
@@ -28419,7 +28419,7 @@
       </p:sp>
       <p:pic>
         <p:nvPicPr>
-          <p:cNvPr id="45" name="Object 44" descr="public/generated/icons/ecdb4690-c2d8-11eb-bff1-4f7b9d2dfe41.png">    </p:cNvPr>
+          <p:cNvPr id="45" name="Object 44" descr="public/generated/icons/64955a78-30f9-426d-a25a-344480421b27.png">    </p:cNvPr>
           <p:cNvPicPr>
             <a:picLocks noChangeAspect="1"/>
           </p:cNvPicPr>
@@ -28475,7 +28475,7 @@
                 <a:ea typeface="Helvetica" pitchFamily="34" charset="-122"/>
                 <a:cs typeface="Helvetica" pitchFamily="34" charset="-120"/>
               </a:rPr>
-              <a:t>EVENT NOTIFICATIONS</a:t>
+              <a:t>ETICLOUD SECURE DIGITAL AGILE WORKPLACE</a:t>
             </a:r>
             <a:endParaRPr lang="en-US" dirty="0"/>
           </a:p>
@@ -28508,7 +28508,7 @@
       </p:sp>
       <p:pic>
         <p:nvPicPr>
-          <p:cNvPr id="48" name="Object 47" descr="public/generated/icons/6a7f4e38-f218-48ef-9dd2-df408747568e.png">    </p:cNvPr>
+          <p:cNvPr id="48" name="Object 47" descr="public/generated/icons/ecdb4690-c2d8-11eb-bff1-4f7b9d2dfe41.png">    </p:cNvPr>
           <p:cNvPicPr>
             <a:picLocks noChangeAspect="1"/>
           </p:cNvPicPr>
@@ -28564,7 +28564,7 @@
                 <a:ea typeface="Helvetica" pitchFamily="34" charset="-122"/>
                 <a:cs typeface="Helvetica" pitchFamily="34" charset="-120"/>
               </a:rPr>
-              <a:t>EVENT STREAMS</a:t>
+              <a:t>EVENT NOTIFICATIONS</a:t>
             </a:r>
             <a:endParaRPr lang="en-US" dirty="0"/>
           </a:p>
@@ -28597,7 +28597,7 @@
       </p:sp>
       <p:pic>
         <p:nvPicPr>
-          <p:cNvPr id="51" name="Object 50" descr="public/generated/icons/cf329950-0a3e-11e8-922e-f1366c6e1c83-bigip.png">    </p:cNvPr>
+          <p:cNvPr id="51" name="Object 50" descr="public/generated/icons/6a7f4e38-f218-48ef-9dd2-df408747568e.png">    </p:cNvPr>
           <p:cNvPicPr>
             <a:picLocks noChangeAspect="1"/>
           </p:cNvPicPr>
@@ -28653,7 +28653,7 @@
                 <a:ea typeface="Helvetica" pitchFamily="34" charset="-122"/>
                 <a:cs typeface="Helvetica" pitchFamily="34" charset="-120"/>
               </a:rPr>
-              <a:t>F5 BIG-IP</a:t>
+              <a:t>EVENT STREAMS</a:t>
             </a:r>
             <a:endParaRPr lang="en-US" dirty="0"/>
           </a:p>
@@ -28686,7 +28686,7 @@
       </p:sp>
       <p:pic>
         <p:nvPicPr>
-          <p:cNvPr id="54" name="Object 53" descr="public/generated/icons/60427a43-cf48-41e0-bd95-26bde9c12105.png">    </p:cNvPr>
+          <p:cNvPr id="54" name="Object 53" descr="public/generated/icons/cf329950-0a3e-11e8-922e-f1366c6e1c83-bigip.png">    </p:cNvPr>
           <p:cNvPicPr>
             <a:picLocks noChangeAspect="1"/>
           </p:cNvPicPr>
@@ -28742,7 +28742,7 @@
                 <a:ea typeface="Helvetica" pitchFamily="34" charset="-122"/>
                 <a:cs typeface="Helvetica" pitchFamily="34" charset="-120"/>
               </a:rPr>
-              <a:t>FALCONSTOR STORSAFE VTL FOR POWER ON-PREMISES</a:t>
+              <a:t>F5 BIG-IP</a:t>
             </a:r>
             <a:endParaRPr lang="en-US" dirty="0"/>
           </a:p>
@@ -28775,7 +28775,7 @@
       </p:sp>
       <p:pic>
         <p:nvPicPr>
-          <p:cNvPr id="57" name="Object 56" descr="public/generated/icons/6.png">    </p:cNvPr>
+          <p:cNvPr id="57" name="Object 56" descr="public/generated/icons/60427a43-cf48-41e0-bd95-26bde9c12105.png">    </p:cNvPr>
           <p:cNvPicPr>
             <a:picLocks noChangeAspect="1"/>
           </p:cNvPicPr>
@@ -28831,7 +28831,7 @@
                 <a:ea typeface="Helvetica" pitchFamily="34" charset="-122"/>
                 <a:cs typeface="Helvetica" pitchFamily="34" charset="-120"/>
               </a:rPr>
-              <a:t>FILE STORAGE FOR CLASSIC</a:t>
+              <a:t>FALCONSTOR STORSAFE VTL FOR POWER ON-PREMISES</a:t>
             </a:r>
             <a:endParaRPr lang="en-US" dirty="0"/>
           </a:p>
@@ -28864,7 +28864,7 @@
       </p:sp>
       <p:pic>
         <p:nvPicPr>
-          <p:cNvPr id="60" name="Object 59" descr="public/generated/icons/is.share.png">    </p:cNvPr>
+          <p:cNvPr id="60" name="Object 59" descr="public/generated/icons/6.png">    </p:cNvPr>
           <p:cNvPicPr>
             <a:picLocks noChangeAspect="1"/>
           </p:cNvPicPr>
@@ -28920,7 +28920,7 @@
                 <a:ea typeface="Helvetica" pitchFamily="34" charset="-122"/>
                 <a:cs typeface="Helvetica" pitchFamily="34" charset="-120"/>
               </a:rPr>
-              <a:t>FILE STORAGE FOR VPC</a:t>
+              <a:t>FILE STORAGE FOR CLASSIC</a:t>
             </a:r>
             <a:endParaRPr lang="en-US" dirty="0"/>
           </a:p>
@@ -28953,7 +28953,7 @@
       </p:sp>
       <p:pic>
         <p:nvPicPr>
-          <p:cNvPr id="63" name="Object 62" descr="public/generated/icons/is.floating-ip.png">    </p:cNvPr>
+          <p:cNvPr id="63" name="Object 62" descr="public/generated/icons/is.share.png">    </p:cNvPr>
           <p:cNvPicPr>
             <a:picLocks noChangeAspect="1"/>
           </p:cNvPicPr>
@@ -29009,7 +29009,7 @@
                 <a:ea typeface="Helvetica" pitchFamily="34" charset="-122"/>
                 <a:cs typeface="Helvetica" pitchFamily="34" charset="-120"/>
               </a:rPr>
-              <a:t>FLOATING IP FOR VPC</a:t>
+              <a:t>FILE STORAGE FOR VPC</a:t>
             </a:r>
             <a:endParaRPr lang="en-US" dirty="0"/>
           </a:p>
@@ -29042,7 +29042,7 @@
       </p:sp>
       <p:pic>
         <p:nvPicPr>
-          <p:cNvPr id="66" name="Object 65" descr="public/generated/icons/is.flow-log-collector.png">    </p:cNvPr>
+          <p:cNvPr id="66" name="Object 65" descr="public/generated/icons/is.floating-ip.png">    </p:cNvPr>
           <p:cNvPicPr>
             <a:picLocks noChangeAspect="1"/>
           </p:cNvPicPr>
@@ -29098,7 +29098,7 @@
                 <a:ea typeface="Helvetica" pitchFamily="34" charset="-122"/>
                 <a:cs typeface="Helvetica" pitchFamily="34" charset="-120"/>
               </a:rPr>
-              <a:t>FLOW LOGS FOR VPC</a:t>
+              <a:t>FLOATING IP FOR VPC</a:t>
             </a:r>
             <a:endParaRPr lang="en-US" dirty="0"/>
           </a:p>
@@ -29131,7 +29131,7 @@
       </p:sp>
       <p:pic>
         <p:nvPicPr>
-          <p:cNvPr id="69" name="Object 68" descr="public/generated/icons/05605040-8854-4665-bd05-0b10a96daf05.png">    </p:cNvPr>
+          <p:cNvPr id="69" name="Object 68" descr="public/generated/icons/is.flow-log-collector.png">    </p:cNvPr>
           <p:cNvPicPr>
             <a:picLocks noChangeAspect="1"/>
           </p:cNvPicPr>
@@ -29187,7 +29187,7 @@
                 <a:ea typeface="Helvetica" pitchFamily="34" charset="-122"/>
                 <a:cs typeface="Helvetica" pitchFamily="34" charset="-120"/>
               </a:rPr>
-              <a:t>FNTS CLOUD MIGRATION SERVICES</a:t>
+              <a:t>FLOW LOGS FOR VPC</a:t>
             </a:r>
             <a:endParaRPr lang="en-US" dirty="0"/>
           </a:p>
@@ -29220,7 +29220,7 @@
       </p:sp>
       <p:pic>
         <p:nvPicPr>
-          <p:cNvPr id="72" name="Object 71" descr="public/generated/icons/d2fb0ba3-1679-4053-a593-9f2259d9e87b.png">    </p:cNvPr>
+          <p:cNvPr id="72" name="Object 71" descr="public/generated/icons/05605040-8854-4665-bd05-0b10a96daf05.png">    </p:cNvPr>
           <p:cNvPicPr>
             <a:picLocks noChangeAspect="1"/>
           </p:cNvPicPr>
@@ -29276,7 +29276,7 @@
                 <a:ea typeface="Helvetica" pitchFamily="34" charset="-122"/>
                 <a:cs typeface="Helvetica" pitchFamily="34" charset="-120"/>
               </a:rPr>
-              <a:t>FNTS MANAGED SERVICES FOR POWERVS CLOUD</a:t>
+              <a:t>FNTS CLOUD MIGRATION SERVICES</a:t>
             </a:r>
             <a:endParaRPr lang="en-US" dirty="0"/>
           </a:p>
@@ -29309,7 +29309,7 @@
       </p:sp>
       <p:pic>
         <p:nvPicPr>
-          <p:cNvPr id="75" name="Object 74" descr="public/generated/icons/cf329950-0a3e-11e8-922e-f1366c6e1c83-fortigate.png">    </p:cNvPr>
+          <p:cNvPr id="75" name="Object 74" descr="public/generated/icons/d2fb0ba3-1679-4053-a593-9f2259d9e87b.png">    </p:cNvPr>
           <p:cNvPicPr>
             <a:picLocks noChangeAspect="1"/>
           </p:cNvPicPr>
@@ -29365,7 +29365,7 @@
                 <a:ea typeface="Helvetica" pitchFamily="34" charset="-122"/>
                 <a:cs typeface="Helvetica" pitchFamily="34" charset="-120"/>
               </a:rPr>
-              <a:t>FORTIGATE SECURITY APPLIANCE</a:t>
+              <a:t>FNTS MANAGED SERVICES FOR POWERVS CLOUD</a:t>
             </a:r>
             <a:endParaRPr lang="en-US" dirty="0"/>
           </a:p>
@@ -29398,7 +29398,7 @@
       </p:sp>
       <p:pic>
         <p:nvPicPr>
-          <p:cNvPr id="78" name="Object 77" descr="public/generated/icons/f5b26324-9b39-c701-0cc5-b0d5d2fe8534.png">    </p:cNvPr>
+          <p:cNvPr id="78" name="Object 77" descr="public/generated/icons/cf329950-0a3e-11e8-922e-f1366c6e1c83-fortigate.png">    </p:cNvPr>
           <p:cNvPicPr>
             <a:picLocks noChangeAspect="1"/>
           </p:cNvPicPr>
@@ -29454,7 +29454,7 @@
                 <a:ea typeface="Helvetica" pitchFamily="34" charset="-122"/>
                 <a:cs typeface="Helvetica" pitchFamily="34" charset="-120"/>
               </a:rPr>
-              <a:t>FORTIGATE SECURITY APPLIANCE 10GBPS</a:t>
+              <a:t>FORTIGATE SECURITY APPLIANCE</a:t>
             </a:r>
             <a:endParaRPr lang="en-US" dirty="0"/>
           </a:p>
@@ -29487,7 +29487,7 @@
       </p:sp>
       <p:pic>
         <p:nvPicPr>
-          <p:cNvPr id="81" name="Object 80" descr="public/generated/icons/cf329950-0a3e-11e8-922e-f1366c6e1c83-fortigatevm.png">    </p:cNvPr>
+          <p:cNvPr id="81" name="Object 80" descr="public/generated/icons/f5b26324-9b39-c701-0cc5-b0d5d2fe8534.png">    </p:cNvPr>
           <p:cNvPicPr>
             <a:picLocks noChangeAspect="1"/>
           </p:cNvPicPr>
@@ -29543,7 +29543,7 @@
                 <a:ea typeface="Helvetica" pitchFamily="34" charset="-122"/>
                 <a:cs typeface="Helvetica" pitchFamily="34" charset="-120"/>
               </a:rPr>
-              <a:t>FORTIGATE VIRTUAL APPLIANCE</a:t>
+              <a:t>FORTIGATE SECURITY APPLIANCE 10GBPS</a:t>
             </a:r>
             <a:endParaRPr lang="en-US" dirty="0"/>
           </a:p>
@@ -29576,7 +29576,7 @@
       </p:sp>
       <p:pic>
         <p:nvPicPr>
-          <p:cNvPr id="84" name="Object 83" descr="public/generated/icons/a93eeacc-7012-c8bc-c851-e928949a226c.png">    </p:cNvPr>
+          <p:cNvPr id="84" name="Object 83" descr="public/generated/icons/cf329950-0a3e-11e8-922e-f1366c6e1c83-fortigatevm.png">    </p:cNvPr>
           <p:cNvPicPr>
             <a:picLocks noChangeAspect="1"/>
           </p:cNvPicPr>
@@ -29632,7 +29632,7 @@
                 <a:ea typeface="Helvetica" pitchFamily="34" charset="-122"/>
                 <a:cs typeface="Helvetica" pitchFamily="34" charset="-120"/>
               </a:rPr>
-              <a:t>FORTINET VIRTUAL FORTIGATE SECURITY APPLIANCE (VFSA)</a:t>
+              <a:t>FORTIGATE VIRTUAL APPLIANCE</a:t>
             </a:r>
             <a:endParaRPr lang="en-US" dirty="0"/>
           </a:p>
@@ -29665,7 +29665,7 @@
       </p:sp>
       <p:pic>
         <p:nvPicPr>
-          <p:cNvPr id="87" name="Object 86" descr="public/generated/icons/16.png">    </p:cNvPr>
+          <p:cNvPr id="87" name="Object 86" descr="public/generated/icons/a93eeacc-7012-c8bc-c851-e928949a226c.png">    </p:cNvPr>
           <p:cNvPicPr>
             <a:picLocks noChangeAspect="1"/>
           </p:cNvPicPr>
@@ -29721,7 +29721,7 @@
                 <a:ea typeface="Helvetica" pitchFamily="34" charset="-122"/>
                 <a:cs typeface="Helvetica" pitchFamily="34" charset="-120"/>
               </a:rPr>
-              <a:t>HARDWARE FIREWALL</a:t>
+              <a:t>FORTINET VIRTUAL FORTIGATE SECURITY APPLIANCE (VFSA)</a:t>
             </a:r>
             <a:endParaRPr lang="en-US" dirty="0"/>
           </a:p>
@@ -29754,7 +29754,7 @@
       </p:sp>
       <p:pic>
         <p:nvPicPr>
-          <p:cNvPr id="90" name="Object 89" descr="public/generated/icons/cf329950-0a3e-11e8-922e-f1366c6e1c83-hcx.png">    </p:cNvPr>
+          <p:cNvPr id="90" name="Object 89" descr="public/generated/icons/16.png">    </p:cNvPr>
           <p:cNvPicPr>
             <a:picLocks noChangeAspect="1"/>
           </p:cNvPicPr>
@@ -29810,7 +29810,7 @@
                 <a:ea typeface="Helvetica" pitchFamily="34" charset="-122"/>
                 <a:cs typeface="Helvetica" pitchFamily="34" charset="-120"/>
               </a:rPr>
-              <a:t>HCX</a:t>
+              <a:t>HARDWARE FIREWALL</a:t>
             </a:r>
             <a:endParaRPr lang="en-US" dirty="0"/>
           </a:p>
@@ -29843,7 +29843,7 @@
       </p:sp>
       <p:pic>
         <p:nvPicPr>
-          <p:cNvPr id="93" name="Object 92" descr="public/generated/icons/3dacb5a3-de4a-4361-9f39-0b6657f89f37.png">    </p:cNvPr>
+          <p:cNvPr id="93" name="Object 92" descr="public/generated/icons/cf329950-0a3e-11e8-922e-f1366c6e1c83-hcx.png">    </p:cNvPr>
           <p:cNvPicPr>
             <a:picLocks noChangeAspect="1"/>
           </p:cNvPicPr>
@@ -29899,7 +29899,7 @@
                 <a:ea typeface="Helvetica" pitchFamily="34" charset="-122"/>
                 <a:cs typeface="Helvetica" pitchFamily="34" charset="-120"/>
               </a:rPr>
-              <a:t>HDM VMWARE WORKLOAD ANALYZER</a:t>
+              <a:t>HCX</a:t>
             </a:r>
             <a:endParaRPr lang="en-US" dirty="0"/>
           </a:p>
@@ -29932,7 +29932,7 @@
       </p:sp>
       <p:pic>
         <p:nvPicPr>
-          <p:cNvPr id="96" name="Object 95" descr="public/generated/icons/cf329950-0a3e-11e8-922e-f1366c6e1c83-horizon.png">    </p:cNvPr>
+          <p:cNvPr id="96" name="Object 95" descr="public/generated/icons/3dacb5a3-de4a-4361-9f39-0b6657f89f37.png">    </p:cNvPr>
           <p:cNvPicPr>
             <a:picLocks noChangeAspect="1"/>
           </p:cNvPicPr>
@@ -29988,7 +29988,7 @@
                 <a:ea typeface="Helvetica" pitchFamily="34" charset="-122"/>
                 <a:cs typeface="Helvetica" pitchFamily="34" charset="-120"/>
               </a:rPr>
-              <a:t>HORIZON 7</a:t>
+              <a:t>HDM VMWARE WORKLOAD ANALYZER</a:t>
             </a:r>
             <a:endParaRPr lang="en-US" dirty="0"/>
           </a:p>
@@ -30021,7 +30021,7 @@
       </p:sp>
       <p:pic>
         <p:nvPicPr>
-          <p:cNvPr id="99" name="Object 98" descr="public/generated/icons/fa329acf-f9b6-fa9f-f37e-ad72d0b6a783.png">    </p:cNvPr>
+          <p:cNvPr id="99" name="Object 98" descr="public/generated/icons/cf329950-0a3e-11e8-922e-f1366c6e1c83-horizon.png">    </p:cNvPr>
           <p:cNvPicPr>
             <a:picLocks noChangeAspect="1"/>
           </p:cNvPicPr>
@@ -30077,7 +30077,7 @@
                 <a:ea typeface="Helvetica" pitchFamily="34" charset="-122"/>
                 <a:cs typeface="Helvetica" pitchFamily="34" charset="-120"/>
               </a:rPr>
-              <a:t>HYBRID CLOUD INFRASTRUCTURE AS A SERVICE</a:t>
+              <a:t>HORIZON 7</a:t>
             </a:r>
             <a:endParaRPr lang="en-US" dirty="0"/>
           </a:p>
@@ -30110,7 +30110,7 @@
       </p:sp>
       <p:pic>
         <p:nvPicPr>
-          <p:cNvPr id="102" name="Object 101" descr="public/generated/icons/d589492e-6ac0-4a11-9c28-a157851c8f68.png">    </p:cNvPr>
+          <p:cNvPr id="102" name="Object 101" descr="public/generated/icons/fa329acf-f9b6-fa9f-f37e-ad72d0b6a783.png">    </p:cNvPr>
           <p:cNvPicPr>
             <a:picLocks noChangeAspect="1"/>
           </p:cNvPicPr>
@@ -30166,7 +30166,7 @@
                 <a:ea typeface="Helvetica" pitchFamily="34" charset="-122"/>
                 <a:cs typeface="Helvetica" pitchFamily="34" charset="-120"/>
               </a:rPr>
-              <a:t>HYPER PROTECT CRYPTO SERVICES</a:t>
+              <a:t>HYBRID CLOUD INFRASTRUCTURE AS A SERVICE</a:t>
             </a:r>
             <a:endParaRPr lang="en-US" dirty="0"/>
           </a:p>
@@ -30199,7 +30199,7 @@
       </p:sp>
       <p:pic>
         <p:nvPicPr>
-          <p:cNvPr id="105" name="Object 104" descr="public/generated/icons/986f2197-9f9a-44f4-9463-f17ec64c6729.png">    </p:cNvPr>
+          <p:cNvPr id="105" name="Object 104" descr="public/generated/icons/d589492e-6ac0-4a11-9c28-a157851c8f68.png">    </p:cNvPr>
           <p:cNvPicPr>
             <a:picLocks noChangeAspect="1"/>
           </p:cNvPicPr>
@@ -30255,7 +30255,7 @@
                 <a:ea typeface="Helvetica" pitchFamily="34" charset="-122"/>
                 <a:cs typeface="Helvetica" pitchFamily="34" charset="-120"/>
               </a:rPr>
-              <a:t>HYPER PROTECT VIRTUAL SERVER FOR CLASSIC</a:t>
+              <a:t>HYPER PROTECT CRYPTO SERVICES</a:t>
             </a:r>
             <a:endParaRPr lang="en-US" dirty="0"/>
           </a:p>
@@ -30288,7 +30288,7 @@
       </p:sp>
       <p:pic>
         <p:nvPicPr>
-          <p:cNvPr id="108" name="Object 107" descr="public/generated/icons/cf329950-0a3e-11e8-922e-f1366c6e1c83-hytrustcc.png">    </p:cNvPr>
+          <p:cNvPr id="108" name="Object 107" descr="public/generated/icons/986f2197-9f9a-44f4-9463-f17ec64c6729.png">    </p:cNvPr>
           <p:cNvPicPr>
             <a:picLocks noChangeAspect="1"/>
           </p:cNvPicPr>
@@ -30344,7 +30344,7 @@
                 <a:ea typeface="Helvetica" pitchFamily="34" charset="-122"/>
                 <a:cs typeface="Helvetica" pitchFamily="34" charset="-120"/>
               </a:rPr>
-              <a:t>HYTRUST CLOUDCONTROL</a:t>
+              <a:t>HYPER PROTECT VIRTUAL SERVER FOR CLASSIC</a:t>
             </a:r>
             <a:endParaRPr lang="en-US" dirty="0"/>
           </a:p>
@@ -30410,7 +30410,7 @@
       </p:sp>
       <p:pic>
         <p:nvPicPr>
-          <p:cNvPr id="3" name="Object 2" descr="public/generated/icons/cf329950-0a3e-11e8-922e-f1366c6e1c83-hytrustdc.png">    </p:cNvPr>
+          <p:cNvPr id="3" name="Object 2" descr="public/generated/icons/cf329950-0a3e-11e8-922e-f1366c6e1c83-hytrustcc.png">    </p:cNvPr>
           <p:cNvPicPr>
             <a:picLocks noChangeAspect="1"/>
           </p:cNvPicPr>
@@ -30466,7 +30466,7 @@
                 <a:ea typeface="Helvetica" pitchFamily="34" charset="-122"/>
                 <a:cs typeface="Helvetica" pitchFamily="34" charset="-120"/>
               </a:rPr>
-              <a:t>HYTRUST DATACONTROL</a:t>
+              <a:t>HYTRUST CLOUDCONTROL</a:t>
             </a:r>
             <a:endParaRPr lang="en-US" dirty="0"/>
           </a:p>
@@ -30499,7 +30499,7 @@
       </p:sp>
       <p:pic>
         <p:nvPicPr>
-          <p:cNvPr id="6" name="Object 5" descr="public/generated/icons/cf329950-0a3e-11e8-922e-f1366c6e1c83-hytrustkc.png">    </p:cNvPr>
+          <p:cNvPr id="6" name="Object 5" descr="public/generated/icons/cf329950-0a3e-11e8-922e-f1366c6e1c83-hytrustdc.png">    </p:cNvPr>
           <p:cNvPicPr>
             <a:picLocks noChangeAspect="1"/>
           </p:cNvPicPr>
@@ -30555,7 +30555,7 @@
                 <a:ea typeface="Helvetica" pitchFamily="34" charset="-122"/>
                 <a:cs typeface="Helvetica" pitchFamily="34" charset="-120"/>
               </a:rPr>
-              <a:t>HYTRUST KEYCONTROL</a:t>
+              <a:t>HYTRUST DATACONTROL</a:t>
             </a:r>
             <a:endParaRPr lang="en-US" dirty="0"/>
           </a:p>
@@ -30588,7 +30588,7 @@
       </p:sp>
       <p:pic>
         <p:nvPicPr>
-          <p:cNvPr id="9" name="Object 8" descr="public/generated/icons/is.image.png">    </p:cNvPr>
+          <p:cNvPr id="9" name="Object 8" descr="public/generated/icons/cf329950-0a3e-11e8-922e-f1366c6e1c83-hytrustkc.png">    </p:cNvPr>
           <p:cNvPicPr>
             <a:picLocks noChangeAspect="1"/>
           </p:cNvPicPr>
@@ -30644,7 +30644,7 @@
                 <a:ea typeface="Helvetica" pitchFamily="34" charset="-122"/>
                 <a:cs typeface="Helvetica" pitchFamily="34" charset="-120"/>
               </a:rPr>
-              <a:t>IMAGE SERVICE FOR VPC</a:t>
+              <a:t>HYTRUST KEYCONTROL</a:t>
             </a:r>
             <a:endParaRPr lang="en-US" dirty="0"/>
           </a:p>
@@ -30677,7 +30677,7 @@
       </p:sp>
       <p:pic>
         <p:nvPicPr>
-          <p:cNvPr id="12" name="Object 11" descr="public/generated/icons/is.metadata.png">    </p:cNvPr>
+          <p:cNvPr id="12" name="Object 11" descr="public/generated/icons/is.image.png">    </p:cNvPr>
           <p:cNvPicPr>
             <a:picLocks noChangeAspect="1"/>
           </p:cNvPicPr>
@@ -30733,7 +30733,7 @@
                 <a:ea typeface="Helvetica" pitchFamily="34" charset="-122"/>
                 <a:cs typeface="Helvetica" pitchFamily="34" charset="-120"/>
               </a:rPr>
-              <a:t>INSTANCE METADATA FOR VPC</a:t>
+              <a:t>IMAGE SERVICE FOR VPC</a:t>
             </a:r>
             <a:endParaRPr lang="en-US" dirty="0"/>
           </a:p>
@@ -30766,7 +30766,7 @@
       </p:sp>
       <p:pic>
         <p:nvPicPr>
-          <p:cNvPr id="15" name="Object 14" descr="public/generated/icons/75874a60-cb12-11e7-948e-37ac098eb1b9.png">    </p:cNvPr>
+          <p:cNvPr id="15" name="Object 14" descr="public/generated/icons/is.metadata.png">    </p:cNvPr>
           <p:cNvPicPr>
             <a:picLocks noChangeAspect="1"/>
           </p:cNvPicPr>
@@ -30822,7 +30822,7 @@
                 <a:ea typeface="Helvetica" pitchFamily="34" charset="-122"/>
                 <a:cs typeface="Helvetica" pitchFamily="34" charset="-120"/>
               </a:rPr>
-              <a:t>INTERNET SERVICES</a:t>
+              <a:t>INSTANCE METADATA FOR VPC</a:t>
             </a:r>
             <a:endParaRPr lang="en-US" dirty="0"/>
           </a:p>
@@ -30855,7 +30855,7 @@
       </p:sp>
       <p:pic>
         <p:nvPicPr>
-          <p:cNvPr id="18" name="Object 17" descr="public/generated/icons/12.png">    </p:cNvPr>
+          <p:cNvPr id="18" name="Object 17" descr="public/generated/icons/75874a60-cb12-11e7-948e-37ac098eb1b9.png">    </p:cNvPr>
           <p:cNvPicPr>
             <a:picLocks noChangeAspect="1"/>
           </p:cNvPicPr>
@@ -30911,7 +30911,7 @@
                 <a:ea typeface="Helvetica" pitchFamily="34" charset="-122"/>
                 <a:cs typeface="Helvetica" pitchFamily="34" charset="-120"/>
               </a:rPr>
-              <a:t>IPSEC VPN</a:t>
+              <a:t>INTERNET SERVICES</a:t>
             </a:r>
             <a:endParaRPr lang="en-US" dirty="0"/>
           </a:p>
@@ -30944,7 +30944,7 @@
       </p:sp>
       <p:pic>
         <p:nvPicPr>
-          <p:cNvPr id="21" name="Object 20" descr="public/generated/icons/035145f0-2cac-4505-59e9-2e363d08d5aa.png">    </p:cNvPr>
+          <p:cNvPr id="21" name="Object 20" descr="public/generated/icons/12.png">    </p:cNvPr>
           <p:cNvPicPr>
             <a:picLocks noChangeAspect="1"/>
           </p:cNvPicPr>
@@ -31000,7 +31000,7 @@
                 <a:ea typeface="Helvetica" pitchFamily="34" charset="-122"/>
                 <a:cs typeface="Helvetica" pitchFamily="34" charset="-120"/>
               </a:rPr>
-              <a:t>JUNIPER VSRX</a:t>
+              <a:t>IPSEC VPN</a:t>
             </a:r>
             <a:endParaRPr lang="en-US" dirty="0"/>
           </a:p>
@@ -31033,7 +31033,7 @@
       </p:sp>
       <p:pic>
         <p:nvPicPr>
-          <p:cNvPr id="24" name="Object 23" descr="public/generated/icons/ee41347f-b18e-4ca6-bf80-b5467c63f9a6.png">    </p:cNvPr>
+          <p:cNvPr id="24" name="Object 23" descr="public/generated/icons/035145f0-2cac-4505-59e9-2e363d08d5aa.png">    </p:cNvPr>
           <p:cNvPicPr>
             <a:picLocks noChangeAspect="1"/>
           </p:cNvPicPr>
@@ -31089,7 +31089,7 @@
                 <a:ea typeface="Helvetica" pitchFamily="34" charset="-122"/>
                 <a:cs typeface="Helvetica" pitchFamily="34" charset="-120"/>
               </a:rPr>
-              <a:t>KEY PROTECT</a:t>
+              <a:t>JUNIPER VSRX</a:t>
             </a:r>
             <a:endParaRPr lang="en-US" dirty="0"/>
           </a:p>
@@ -31122,7 +31122,7 @@
       </p:sp>
       <p:pic>
         <p:nvPicPr>
-          <p:cNvPr id="27" name="Object 26" descr="public/generated/icons/cf329950-0a3e-11e8-922e-f1366c6e1c83-kmipadapter.png">    </p:cNvPr>
+          <p:cNvPr id="27" name="Object 26" descr="public/generated/icons/ee41347f-b18e-4ca6-bf80-b5467c63f9a6.png">    </p:cNvPr>
           <p:cNvPicPr>
             <a:picLocks noChangeAspect="1"/>
           </p:cNvPicPr>
@@ -31178,7 +31178,7 @@
                 <a:ea typeface="Helvetica" pitchFamily="34" charset="-122"/>
                 <a:cs typeface="Helvetica" pitchFamily="34" charset="-120"/>
               </a:rPr>
-              <a:t>KMIP FOR VMWARE</a:t>
+              <a:t>KEY PROTECT</a:t>
             </a:r>
             <a:endParaRPr lang="en-US" dirty="0"/>
           </a:p>
@@ -31211,7 +31211,7 @@
       </p:sp>
       <p:pic>
         <p:nvPicPr>
-          <p:cNvPr id="30" name="Object 29" descr="public/generated/icons/ed3a5a53-eb60-4f3c-8fd1-17f88585b6ed.png">    </p:cNvPr>
+          <p:cNvPr id="30" name="Object 29" descr="public/generated/icons/cf329950-0a3e-11e8-922e-f1366c6e1c83-kmipadapter.png">    </p:cNvPr>
           <p:cNvPicPr>
             <a:picLocks noChangeAspect="1"/>
           </p:cNvPicPr>
@@ -31267,7 +31267,7 @@
                 <a:ea typeface="Helvetica" pitchFamily="34" charset="-122"/>
                 <a:cs typeface="Helvetica" pitchFamily="34" charset="-120"/>
               </a:rPr>
-              <a:t>KNOWLEDGE CATALOG</a:t>
+              <a:t>KMIP FOR VMWARE</a:t>
             </a:r>
             <a:endParaRPr lang="en-US" dirty="0"/>
           </a:p>
@@ -31300,7 +31300,7 @@
       </p:sp>
       <p:pic>
         <p:nvPicPr>
-          <p:cNvPr id="33" name="Object 32" descr="public/generated/icons/983ea9a2-0fec-4021-8b70-8da5373394e5.png">    </p:cNvPr>
+          <p:cNvPr id="33" name="Object 32" descr="public/generated/icons/ed3a5a53-eb60-4f3c-8fd1-17f88585b6ed.png">    </p:cNvPr>
           <p:cNvPicPr>
             <a:picLocks noChangeAspect="1"/>
           </p:cNvPicPr>
@@ -31356,7 +31356,7 @@
                 <a:ea typeface="Helvetica" pitchFamily="34" charset="-122"/>
                 <a:cs typeface="Helvetica" pitchFamily="34" charset="-120"/>
               </a:rPr>
-              <a:t>KNOWLEDGE STUDIO</a:t>
+              <a:t>KNOWLEDGE CATALOG</a:t>
             </a:r>
             <a:endParaRPr lang="en-US" dirty="0"/>
           </a:p>
@@ -31389,7 +31389,7 @@
       </p:sp>
       <p:pic>
         <p:nvPicPr>
-          <p:cNvPr id="36" name="Object 35" descr="public/generated/icons/a8f89634-261c-4832-8257-b25e04787988.png">    </p:cNvPr>
+          <p:cNvPr id="36" name="Object 35" descr="public/generated/icons/983ea9a2-0fec-4021-8b70-8da5373394e5.png">    </p:cNvPr>
           <p:cNvPicPr>
             <a:picLocks noChangeAspect="1"/>
           </p:cNvPicPr>
@@ -31445,7 +31445,7 @@
                 <a:ea typeface="Helvetica" pitchFamily="34" charset="-122"/>
                 <a:cs typeface="Helvetica" pitchFamily="34" charset="-120"/>
               </a:rPr>
-              <a:t>KOMPRISE ELASTIC DATA MIGRATION</a:t>
+              <a:t>KNOWLEDGE STUDIO</a:t>
             </a:r>
             <a:endParaRPr lang="en-US" dirty="0"/>
           </a:p>
@@ -31478,7 +31478,7 @@
       </p:sp>
       <p:pic>
         <p:nvPicPr>
-          <p:cNvPr id="39" name="Object 38" descr="public/generated/icons/f1fa7442-9ee0-4e27-94c2-0cb3776a0a0a.png">    </p:cNvPr>
+          <p:cNvPr id="39" name="Object 38" descr="public/generated/icons/a8f89634-261c-4832-8257-b25e04787988.png">    </p:cNvPr>
           <p:cNvPicPr>
             <a:picLocks noChangeAspect="1"/>
           </p:cNvPicPr>
@@ -31534,7 +31534,7 @@
                 <a:ea typeface="Helvetica" pitchFamily="34" charset="-122"/>
                 <a:cs typeface="Helvetica" pitchFamily="34" charset="-120"/>
               </a:rPr>
-              <a:t>KOMPRISE INTELLIGENT DATA MANAGEMENT SUITE</a:t>
+              <a:t>KOMPRISE ELASTIC DATA MIGRATION</a:t>
             </a:r>
             <a:endParaRPr lang="en-US" dirty="0"/>
           </a:p>
@@ -31567,7 +31567,7 @@
       </p:sp>
       <p:pic>
         <p:nvPicPr>
-          <p:cNvPr id="42" name="Object 41" descr="public/generated/icons/containers-kubernetes.png">    </p:cNvPr>
+          <p:cNvPr id="42" name="Object 41" descr="public/generated/icons/f1fa7442-9ee0-4e27-94c2-0cb3776a0a0a.png">    </p:cNvPr>
           <p:cNvPicPr>
             <a:picLocks noChangeAspect="1"/>
           </p:cNvPicPr>
@@ -31623,7 +31623,7 @@
                 <a:ea typeface="Helvetica" pitchFamily="34" charset="-122"/>
                 <a:cs typeface="Helvetica" pitchFamily="34" charset="-120"/>
               </a:rPr>
-              <a:t>KUBERNETES SERVICE</a:t>
+              <a:t>KOMPRISE INTELLIGENT DATA MANAGEMENT SUITE</a:t>
             </a:r>
             <a:endParaRPr lang="en-US" dirty="0"/>
           </a:p>
@@ -31656,7 +31656,7 @@
       </p:sp>
       <p:pic>
         <p:nvPicPr>
-          <p:cNvPr id="45" name="Object 44" descr="public/generated/icons/is.load-balancer.png">    </p:cNvPr>
+          <p:cNvPr id="45" name="Object 44" descr="public/generated/icons/containers-kubernetes.png">    </p:cNvPr>
           <p:cNvPicPr>
             <a:picLocks noChangeAspect="1"/>
           </p:cNvPicPr>
@@ -31712,7 +31712,7 @@
                 <a:ea typeface="Helvetica" pitchFamily="34" charset="-122"/>
                 <a:cs typeface="Helvetica" pitchFamily="34" charset="-120"/>
               </a:rPr>
-              <a:t>LOAD BALANCER FOR VPC</a:t>
+              <a:t>KUBERNETES SERVICE</a:t>
             </a:r>
             <a:endParaRPr lang="en-US" dirty="0"/>
           </a:p>
@@ -31745,7 +31745,7 @@
       </p:sp>
       <p:pic>
         <p:nvPicPr>
-          <p:cNvPr id="48" name="Object 47" descr="public/generated/icons/e13e1860-959c-11e8-871e-ad157af61ad7.png">    </p:cNvPr>
+          <p:cNvPr id="48" name="Object 47" descr="public/generated/icons/is.load-balancer.png">    </p:cNvPr>
           <p:cNvPicPr>
             <a:picLocks noChangeAspect="1"/>
           </p:cNvPicPr>
@@ -31801,7 +31801,7 @@
                 <a:ea typeface="Helvetica" pitchFamily="34" charset="-122"/>
                 <a:cs typeface="Helvetica" pitchFamily="34" charset="-120"/>
               </a:rPr>
-              <a:t>LOG ANALYSIS</a:t>
+              <a:t>LOAD BALANCER FOR VPC</a:t>
             </a:r>
             <a:endParaRPr lang="en-US" dirty="0"/>
           </a:p>
@@ -31834,7 +31834,7 @@
       </p:sp>
       <p:pic>
         <p:nvPicPr>
-          <p:cNvPr id="51" name="Object 50" descr="public/generated/icons/9349854b-eb46-427f-8ef6-687d601c9eda.png">    </p:cNvPr>
+          <p:cNvPr id="51" name="Object 50" descr="public/generated/icons/e13e1860-959c-11e8-871e-ad157af61ad7.png">    </p:cNvPr>
           <p:cNvPicPr>
             <a:picLocks noChangeAspect="1"/>
           </p:cNvPicPr>
@@ -31890,7 +31890,7 @@
                 <a:ea typeface="Helvetica" pitchFamily="34" charset="-122"/>
                 <a:cs typeface="Helvetica" pitchFamily="34" charset="-120"/>
               </a:rPr>
-              <a:t>LYVE DATA TRANSFER SERVICES</a:t>
+              <a:t>LOG ANALYSIS</a:t>
             </a:r>
             <a:endParaRPr lang="en-US" dirty="0"/>
           </a:p>
@@ -31923,7 +31923,7 @@
       </p:sp>
       <p:pic>
         <p:nvPicPr>
-          <p:cNvPr id="54" name="Object 53" descr="public/generated/icons/cf329950-0a3e-11e8-922e-f1366c6e1c83-managedveeam.png">    </p:cNvPr>
+          <p:cNvPr id="54" name="Object 53" descr="public/generated/icons/9349854b-eb46-427f-8ef6-687d601c9eda.png">    </p:cNvPr>
           <p:cNvPicPr>
             <a:picLocks noChangeAspect="1"/>
           </p:cNvPicPr>
@@ -31979,7 +31979,7 @@
                 <a:ea typeface="Helvetica" pitchFamily="34" charset="-122"/>
                 <a:cs typeface="Helvetica" pitchFamily="34" charset="-120"/>
               </a:rPr>
-              <a:t>MANAGED BACKUP SERVICES</a:t>
+              <a:t>LYVE DATA TRANSFER SERVICES</a:t>
             </a:r>
             <a:endParaRPr lang="en-US" dirty="0"/>
           </a:p>
@@ -32012,7 +32012,7 @@
       </p:sp>
       <p:pic>
         <p:nvPicPr>
-          <p:cNvPr id="57" name="Object 56" descr="public/generated/icons/cf329950-0a3e-11e8-922e-f1366c6e1c83-managedzerto.png">    </p:cNvPr>
+          <p:cNvPr id="57" name="Object 56" descr="public/generated/icons/cf329950-0a3e-11e8-922e-f1366c6e1c83-managedveeam.png">    </p:cNvPr>
           <p:cNvPicPr>
             <a:picLocks noChangeAspect="1"/>
           </p:cNvPicPr>
@@ -32068,7 +32068,7 @@
                 <a:ea typeface="Helvetica" pitchFamily="34" charset="-122"/>
                 <a:cs typeface="Helvetica" pitchFamily="34" charset="-120"/>
               </a:rPr>
-              <a:t>MANAGED DISASTER RECOVERY SERVICES</a:t>
+              <a:t>MANAGED BACKUP SERVICES</a:t>
             </a:r>
             <a:endParaRPr lang="en-US" dirty="0"/>
           </a:p>
@@ -32101,7 +32101,7 @@
       </p:sp>
       <p:pic>
         <p:nvPicPr>
-          <p:cNvPr id="60" name="Object 59" descr="public/generated/icons/cfb3c3da-7b1f-0879-f414-f367da218488.png">    </p:cNvPr>
+          <p:cNvPr id="60" name="Object 59" descr="public/generated/icons/cf329950-0a3e-11e8-922e-f1366c6e1c83-managedzerto.png">    </p:cNvPr>
           <p:cNvPicPr>
             <a:picLocks noChangeAspect="1"/>
           </p:cNvPicPr>
@@ -32157,7 +32157,7 @@
                 <a:ea typeface="Helvetica" pitchFamily="34" charset="-122"/>
                 <a:cs typeface="Helvetica" pitchFamily="34" charset="-120"/>
               </a:rPr>
-              <a:t>MANAGED NETWORK SECURITY SERVICES</a:t>
+              <a:t>MANAGED DISASTER RECOVERY SERVICES</a:t>
             </a:r>
             <a:endParaRPr lang="en-US" dirty="0"/>
           </a:p>
@@ -32190,7 +32190,7 @@
       </p:sp>
       <p:pic>
         <p:nvPicPr>
-          <p:cNvPr id="63" name="Object 62" descr="public/generated/icons/cf329950-0a3e-11e8-922e-f1366c6e1c83-imi.png">    </p:cNvPr>
+          <p:cNvPr id="63" name="Object 62" descr="public/generated/icons/cfb3c3da-7b1f-0879-f414-f367da218488.png">    </p:cNvPr>
           <p:cNvPicPr>
             <a:picLocks noChangeAspect="1"/>
           </p:cNvPicPr>
@@ -32246,7 +32246,7 @@
                 <a:ea typeface="Helvetica" pitchFamily="34" charset="-122"/>
                 <a:cs typeface="Helvetica" pitchFamily="34" charset="-120"/>
               </a:rPr>
-              <a:t>MANAGED VMWARE SERVICES</a:t>
+              <a:t>MANAGED NETWORK SECURITY SERVICES</a:t>
             </a:r>
             <a:endParaRPr lang="en-US" dirty="0"/>
           </a:p>
@@ -32279,7 +32279,7 @@
       </p:sp>
       <p:pic>
         <p:nvPicPr>
-          <p:cNvPr id="66" name="Object 65" descr="public/generated/icons/14bd30e0-8921-11e9-a2c5-13fceaf553c0.png">    </p:cNvPr>
+          <p:cNvPr id="66" name="Object 65" descr="public/generated/icons/cf329950-0a3e-11e8-922e-f1366c6e1c83-imi.png">    </p:cNvPr>
           <p:cNvPicPr>
             <a:picLocks noChangeAspect="1"/>
           </p:cNvPicPr>
@@ -32335,7 +32335,7 @@
                 <a:ea typeface="Helvetica" pitchFamily="34" charset="-122"/>
                 <a:cs typeface="Helvetica" pitchFamily="34" charset="-120"/>
               </a:rPr>
-              <a:t>MATCH 360 WITH WATSON</a:t>
+              <a:t>MANAGED VMWARE SERVICES</a:t>
             </a:r>
             <a:endParaRPr lang="en-US" dirty="0"/>
           </a:p>
@@ -32368,7 +32368,7 @@
       </p:sp>
       <p:pic>
         <p:nvPicPr>
-          <p:cNvPr id="69" name="Object 68" descr="public/generated/icons/messages-for-rabbitmq.png">    </p:cNvPr>
+          <p:cNvPr id="69" name="Object 68" descr="public/generated/icons/14bd30e0-8921-11e9-a2c5-13fceaf553c0.png">    </p:cNvPr>
           <p:cNvPicPr>
             <a:picLocks noChangeAspect="1"/>
           </p:cNvPicPr>
@@ -32424,7 +32424,7 @@
                 <a:ea typeface="Helvetica" pitchFamily="34" charset="-122"/>
                 <a:cs typeface="Helvetica" pitchFamily="34" charset="-120"/>
               </a:rPr>
-              <a:t>MESSAGES FOR RABBITMQ</a:t>
+              <a:t>MATCH 360 WITH WATSON</a:t>
             </a:r>
             <a:endParaRPr lang="en-US" dirty="0"/>
           </a:p>
@@ -32457,7 +32457,7 @@
       </p:sp>
       <p:pic>
         <p:nvPicPr>
-          <p:cNvPr id="72" name="Object 71" descr="public/generated/icons/d4000551-49ff-4868-9e05-f863e60fad3a.png">    </p:cNvPr>
+          <p:cNvPr id="72" name="Object 71" descr="public/generated/icons/messages-for-rabbitmq.png">    </p:cNvPr>
           <p:cNvPicPr>
             <a:picLocks noChangeAspect="1"/>
           </p:cNvPicPr>
@@ -32513,7 +32513,7 @@
                 <a:ea typeface="Helvetica" pitchFamily="34" charset="-122"/>
                 <a:cs typeface="Helvetica" pitchFamily="34" charset="-120"/>
               </a:rPr>
-              <a:t>MINIO</a:t>
+              <a:t>MESSAGES FOR RABBITMQ</a:t>
             </a:r>
             <a:endParaRPr lang="en-US" dirty="0"/>
           </a:p>
@@ -32546,7 +32546,7 @@
       </p:sp>
       <p:pic>
         <p:nvPicPr>
-          <p:cNvPr id="75" name="Object 74" descr="public/generated/icons/9d9545b4-b866-4c1b-9fc0-39273aef5bb0.png">    </p:cNvPr>
+          <p:cNvPr id="75" name="Object 74" descr="public/generated/icons/d4000551-49ff-4868-9e05-f863e60fad3a.png">    </p:cNvPr>
           <p:cNvPicPr>
             <a:picLocks noChangeAspect="1"/>
           </p:cNvPicPr>
@@ -32602,7 +32602,7 @@
                 <a:ea typeface="Helvetica" pitchFamily="34" charset="-122"/>
                 <a:cs typeface="Helvetica" pitchFamily="34" charset="-120"/>
               </a:rPr>
-              <a:t>MONO-X ONE FOR POWERVS</a:t>
+              <a:t>MINIO</a:t>
             </a:r>
             <a:endParaRPr lang="en-US" dirty="0"/>
           </a:p>
@@ -32635,7 +32635,7 @@
       </p:sp>
       <p:pic>
         <p:nvPicPr>
-          <p:cNvPr id="78" name="Object 77" descr="public/generated/icons/01037c41-adce-4bb5-8b45-0c06004916c4.png">    </p:cNvPr>
+          <p:cNvPr id="78" name="Object 77" descr="public/generated/icons/9d9545b4-b866-4c1b-9fc0-39273aef5bb0.png">    </p:cNvPr>
           <p:cNvPicPr>
             <a:picLocks noChangeAspect="1"/>
           </p:cNvPicPr>
@@ -32691,7 +32691,7 @@
                 <a:ea typeface="Helvetica" pitchFamily="34" charset="-122"/>
                 <a:cs typeface="Helvetica" pitchFamily="34" charset="-120"/>
               </a:rPr>
-              <a:t>MQ</a:t>
+              <a:t>MONO-X ONE FOR POWERVS</a:t>
             </a:r>
             <a:endParaRPr lang="en-US" dirty="0"/>
           </a:p>
@@ -32724,7 +32724,7 @@
       </p:sp>
       <p:pic>
         <p:nvPicPr>
-          <p:cNvPr id="81" name="Object 80" descr="public/generated/icons/is.snapshot-consistency-group.png">    </p:cNvPr>
+          <p:cNvPr id="81" name="Object 80" descr="public/generated/icons/01037c41-adce-4bb5-8b45-0c06004916c4.png">    </p:cNvPr>
           <p:cNvPicPr>
             <a:picLocks noChangeAspect="1"/>
           </p:cNvPicPr>
@@ -32780,7 +32780,7 @@
                 <a:ea typeface="Helvetica" pitchFamily="34" charset="-122"/>
                 <a:cs typeface="Helvetica" pitchFamily="34" charset="-120"/>
               </a:rPr>
-              <a:t>MULTI VOLUME SNAPSHOTS FOR VPC</a:t>
+              <a:t>MQ</a:t>
             </a:r>
             <a:endParaRPr lang="en-US" dirty="0"/>
           </a:p>
@@ -32813,7 +32813,7 @@
       </p:sp>
       <p:pic>
         <p:nvPicPr>
-          <p:cNvPr id="84" name="Object 83" descr="public/generated/icons/bb6393bc-7d81-446b-9728-61b704f6eca5.png">    </p:cNvPr>
+          <p:cNvPr id="84" name="Object 83" descr="public/generated/icons/is.snapshot-consistency-group.png">    </p:cNvPr>
           <p:cNvPicPr>
             <a:picLocks noChangeAspect="1"/>
           </p:cNvPicPr>
@@ -32869,7 +32869,7 @@
                 <a:ea typeface="Helvetica" pitchFamily="34" charset="-122"/>
                 <a:cs typeface="Helvetica" pitchFamily="34" charset="-120"/>
               </a:rPr>
-              <a:t>NATURAL LANGUAGE UNDERSTANDING</a:t>
+              <a:t>MULTI VOLUME SNAPSHOTS FOR VPC</a:t>
             </a:r>
             <a:endParaRPr lang="en-US" dirty="0"/>
           </a:p>
@@ -32902,7 +32902,7 @@
       </p:sp>
       <p:pic>
         <p:nvPicPr>
-          <p:cNvPr id="87" name="Object 86" descr="public/generated/icons/cf329950-0a3e-11e8-922e-f1366c6e1c83-netapp.png">    </p:cNvPr>
+          <p:cNvPr id="87" name="Object 86" descr="public/generated/icons/bb6393bc-7d81-446b-9728-61b704f6eca5.png">    </p:cNvPr>
           <p:cNvPicPr>
             <a:picLocks noChangeAspect="1"/>
           </p:cNvPicPr>
@@ -32958,7 +32958,7 @@
                 <a:ea typeface="Helvetica" pitchFamily="34" charset="-122"/>
                 <a:cs typeface="Helvetica" pitchFamily="34" charset="-120"/>
               </a:rPr>
-              <a:t>NETAPP ONTAP SELECT</a:t>
+              <a:t>NATURAL LANGUAGE UNDERSTANDING</a:t>
             </a:r>
             <a:endParaRPr lang="en-US" dirty="0"/>
           </a:p>
@@ -32991,7 +32991,7 @@
       </p:sp>
       <p:pic>
         <p:nvPicPr>
-          <p:cNvPr id="90" name="Object 89" descr="public/generated/icons/cc42cff0-b19b-11eb-9a66-c717766c1d30.png">    </p:cNvPr>
+          <p:cNvPr id="90" name="Object 89" descr="public/generated/icons/cf329950-0a3e-11e8-922e-f1366c6e1c83-netapp.png">    </p:cNvPr>
           <p:cNvPicPr>
             <a:picLocks noChangeAspect="1"/>
           </p:cNvPicPr>
@@ -33047,7 +33047,7 @@
                 <a:ea typeface="Helvetica" pitchFamily="34" charset="-122"/>
                 <a:cs typeface="Helvetica" pitchFamily="34" charset="-120"/>
               </a:rPr>
-              <a:t>NETEZZA PERFORMANCE SERVER</a:t>
+              <a:t>NETAPP ONTAP SELECT</a:t>
             </a:r>
             <a:endParaRPr lang="en-US" dirty="0"/>
           </a:p>
@@ -33080,7 +33080,7 @@
       </p:sp>
       <p:pic>
         <p:nvPicPr>
-          <p:cNvPr id="93" name="Object 92" descr="public/generated/icons/is.network-acl.png">    </p:cNvPr>
+          <p:cNvPr id="93" name="Object 92" descr="public/generated/icons/cc42cff0-b19b-11eb-9a66-c717766c1d30.png">    </p:cNvPr>
           <p:cNvPicPr>
             <a:picLocks noChangeAspect="1"/>
           </p:cNvPicPr>
@@ -33136,7 +33136,7 @@
                 <a:ea typeface="Helvetica" pitchFamily="34" charset="-122"/>
                 <a:cs typeface="Helvetica" pitchFamily="34" charset="-120"/>
               </a:rPr>
-              <a:t>NETWORK ACL</a:t>
+              <a:t>NETEZZA PERFORMANCE SERVER</a:t>
             </a:r>
             <a:endParaRPr lang="en-US" dirty="0"/>
           </a:p>
@@ -33169,7 +33169,7 @@
       </p:sp>
       <p:pic>
         <p:nvPicPr>
-          <p:cNvPr id="96" name="Object 95" descr="public/generated/icons/d97bd0c3-a8e5-4f3d-b925-16380e039a9a.png">    </p:cNvPr>
+          <p:cNvPr id="96" name="Object 95" descr="public/generated/icons/is.network-acl.png">    </p:cNvPr>
           <p:cNvPicPr>
             <a:picLocks noChangeAspect="1"/>
           </p:cNvPicPr>
@@ -33225,7 +33225,7 @@
                 <a:ea typeface="Helvetica" pitchFamily="34" charset="-122"/>
                 <a:cs typeface="Helvetica" pitchFamily="34" charset="-120"/>
               </a:rPr>
-              <a:t>NEURALSEEK</a:t>
+              <a:t>NETWORK ACL</a:t>
             </a:r>
             <a:endParaRPr lang="en-US" dirty="0"/>
           </a:p>
@@ -33258,7 +33258,7 @@
       </p:sp>
       <p:pic>
         <p:nvPicPr>
-          <p:cNvPr id="99" name="Object 98" descr="public/generated/icons/466091c0-9b8d-11eb-8f8c-91e95378d441.png">    </p:cNvPr>
+          <p:cNvPr id="99" name="Object 98" descr="public/generated/icons/d97bd0c3-a8e5-4f3d-b925-16380e039a9a.png">    </p:cNvPr>
           <p:cNvPicPr>
             <a:picLocks noChangeAspect="1"/>
           </p:cNvPicPr>
@@ -33314,7 +33314,7 @@
                 <a:ea typeface="Helvetica" pitchFamily="34" charset="-122"/>
                 <a:cs typeface="Helvetica" pitchFamily="34" charset="-120"/>
               </a:rPr>
-              <a:t>OPENPAGES</a:t>
+              <a:t>NEURALSEEK</a:t>
             </a:r>
             <a:endParaRPr lang="en-US" dirty="0"/>
           </a:p>
@@ -33347,7 +33347,7 @@
       </p:sp>
       <p:pic>
         <p:nvPicPr>
-          <p:cNvPr id="102" name="Object 101" descr="public/generated/icons/2f756420-434f-11e8-ae40-6bdd72502abc.png">    </p:cNvPr>
+          <p:cNvPr id="102" name="Object 101" descr="public/generated/icons/466091c0-9b8d-11eb-8f8c-91e95378d441.png">    </p:cNvPr>
           <p:cNvPicPr>
             <a:picLocks noChangeAspect="1"/>
           </p:cNvPicPr>
@@ -33403,7 +33403,7 @@
                 <a:ea typeface="Helvetica" pitchFamily="34" charset="-122"/>
                 <a:cs typeface="Helvetica" pitchFamily="34" charset="-120"/>
               </a:rPr>
-              <a:t>PARTNER WITH TECHNOLOGY EXPERT LABS</a:t>
+              <a:t>OPENPAGES</a:t>
             </a:r>
             <a:endParaRPr lang="en-US" dirty="0"/>
           </a:p>
@@ -33436,7 +33436,7 @@
       </p:sp>
       <p:pic>
         <p:nvPicPr>
-          <p:cNvPr id="105" name="Object 104" descr="public/generated/icons/bb6229f0-e632-11ee-ae26-5d6d9ba99eec.png">    </p:cNvPr>
+          <p:cNvPr id="105" name="Object 104" descr="public/generated/icons/2f756420-434f-11e8-ae40-6bdd72502abc.png">    </p:cNvPr>
           <p:cNvPicPr>
             <a:picLocks noChangeAspect="1"/>
           </p:cNvPicPr>
@@ -33492,7 +33492,7 @@
                 <a:ea typeface="Helvetica" pitchFamily="34" charset="-122"/>
                 <a:cs typeface="Helvetica" pitchFamily="34" charset="-120"/>
               </a:rPr>
-              <a:t>PARTNER WITH TECHNOLOGY EXPERT LABS - BUILD IBM STORAGE PROTECT FOR POWERVS</a:t>
+              <a:t>PARTNER WITH TECHNOLOGY EXPERT LABS</a:t>
             </a:r>
             <a:endParaRPr lang="en-US" dirty="0"/>
           </a:p>
@@ -33525,7 +33525,7 @@
       </p:sp>
       <p:pic>
         <p:nvPicPr>
-          <p:cNvPr id="108" name="Object 107" descr="public/generated/icons/f0ea1510-e632-11ee-acb6-4d13e7035de5.png">    </p:cNvPr>
+          <p:cNvPr id="108" name="Object 107" descr="public/generated/icons/bb6229f0-e632-11ee-ae26-5d6d9ba99eec.png">    </p:cNvPr>
           <p:cNvPicPr>
             <a:picLocks noChangeAspect="1"/>
           </p:cNvPicPr>
@@ -33581,7 +33581,7 @@
                 <a:ea typeface="Helvetica" pitchFamily="34" charset="-122"/>
                 <a:cs typeface="Helvetica" pitchFamily="34" charset="-120"/>
               </a:rPr>
-              <a:t>PARTNER WITH TECHNOLOGY EXPERT LABS - BUILD SAP HANA STARTER EDITION</a:t>
+              <a:t>PARTNER WITH TECHNOLOGY EXPERT LABS - BUILD IBM STORAGE PROTECT FOR POWERVS</a:t>
             </a:r>
             <a:endParaRPr lang="en-US" dirty="0"/>
           </a:p>
@@ -33647,7 +33647,7 @@
       </p:sp>
       <p:pic>
         <p:nvPicPr>
-          <p:cNvPr id="3" name="Object 2" descr="public/generated/icons/339a87f0-e633-11ee-acb6-4d13e7035de5.png">    </p:cNvPr>
+          <p:cNvPr id="3" name="Object 2" descr="public/generated/icons/f0ea1510-e632-11ee-acb6-4d13e7035de5.png">    </p:cNvPr>
           <p:cNvPicPr>
             <a:picLocks noChangeAspect="1"/>
           </p:cNvPicPr>
@@ -33703,7 +33703,7 @@
                 <a:ea typeface="Helvetica" pitchFamily="34" charset="-122"/>
                 <a:cs typeface="Helvetica" pitchFamily="34" charset="-120"/>
               </a:rPr>
-              <a:t>PARTNER WITH TECHNOLOGY EXPERT LABS - MIGRATE WORKLOADS TO IBM POWER VIRTUAL SERVER</a:t>
+              <a:t>PARTNER WITH TECHNOLOGY EXPERT LABS - BUILD SAP HANA STARTER EDITION</a:t>
             </a:r>
             <a:endParaRPr lang="en-US" dirty="0"/>
           </a:p>
@@ -33736,7 +33736,7 @@
       </p:sp>
       <p:pic>
         <p:nvPicPr>
-          <p:cNvPr id="6" name="Object 5" descr="public/generated/icons/is.placement-group.png">    </p:cNvPr>
+          <p:cNvPr id="6" name="Object 5" descr="public/generated/icons/339a87f0-e633-11ee-acb6-4d13e7035de5.png">    </p:cNvPr>
           <p:cNvPicPr>
             <a:picLocks noChangeAspect="1"/>
           </p:cNvPicPr>
@@ -33792,7 +33792,7 @@
                 <a:ea typeface="Helvetica" pitchFamily="34" charset="-122"/>
                 <a:cs typeface="Helvetica" pitchFamily="34" charset="-120"/>
               </a:rPr>
-              <a:t>PLACEMENT GROUPS FOR VPC</a:t>
+              <a:t>PARTNER WITH TECHNOLOGY EXPERT LABS - MIGRATE WORKLOADS TO IBM POWER VIRTUAL SERVER</a:t>
             </a:r>
             <a:endParaRPr lang="en-US" dirty="0"/>
           </a:p>
@@ -33825,7 +33825,7 @@
       </p:sp>
       <p:pic>
         <p:nvPicPr>
-          <p:cNvPr id="9" name="Object 8" descr="public/generated/icons/41690130-a4e8-11ea-94c3-d72a57643c7d.png">    </p:cNvPr>
+          <p:cNvPr id="9" name="Object 8" descr="public/generated/icons/is.placement-group.png">    </p:cNvPr>
           <p:cNvPicPr>
             <a:picLocks noChangeAspect="1"/>
           </p:cNvPicPr>
@@ -33881,7 +33881,7 @@
                 <a:ea typeface="Helvetica" pitchFamily="34" charset="-122"/>
                 <a:cs typeface="Helvetica" pitchFamily="34" charset="-120"/>
               </a:rPr>
-              <a:t>PLANNING ANALYTICS</a:t>
+              <a:t>PLACEMENT GROUPS FOR VPC</a:t>
             </a:r>
             <a:endParaRPr lang="en-US" dirty="0"/>
           </a:p>
@@ -33914,7 +33914,7 @@
       </p:sp>
       <p:pic>
         <p:nvPicPr>
-          <p:cNvPr id="12" name="Object 11" descr="public/generated/icons/d666f360-66d1-11e9-85ef-a19427301a8c.png">    </p:cNvPr>
+          <p:cNvPr id="12" name="Object 11" descr="public/generated/icons/41690130-a4e8-11ea-94c3-d72a57643c7d.png">    </p:cNvPr>
           <p:cNvPicPr>
             <a:picLocks noChangeAspect="1"/>
           </p:cNvPicPr>
@@ -33970,7 +33970,7 @@
                 <a:ea typeface="Helvetica" pitchFamily="34" charset="-122"/>
                 <a:cs typeface="Helvetica" pitchFamily="34" charset="-120"/>
               </a:rPr>
-              <a:t>PORTWORX ENTERPRISE</a:t>
+              <a:t>PLANNING ANALYTICS</a:t>
             </a:r>
             <a:endParaRPr lang="en-US" dirty="0"/>
           </a:p>
@@ -34003,7 +34003,7 @@
       </p:sp>
       <p:pic>
         <p:nvPicPr>
-          <p:cNvPr id="15" name="Object 14" descr="public/generated/icons/7b2cdb0e-ad91-4fd7-97c0-5398874ec27b.png">    </p:cNvPr>
+          <p:cNvPr id="15" name="Object 14" descr="public/generated/icons/d666f360-66d1-11e9-85ef-a19427301a8c.png">    </p:cNvPr>
           <p:cNvPicPr>
             <a:picLocks noChangeAspect="1"/>
           </p:cNvPicPr>
@@ -34059,7 +34059,7 @@
                 <a:ea typeface="Helvetica" pitchFamily="34" charset="-122"/>
                 <a:cs typeface="Helvetica" pitchFamily="34" charset="-120"/>
               </a:rPr>
-              <a:t>POWER I MIGRATE 23 SERVICES</a:t>
+              <a:t>PORTWORX ENTERPRISE</a:t>
             </a:r>
             <a:endParaRPr lang="en-US" dirty="0"/>
           </a:p>
@@ -34092,7 +34092,7 @@
       </p:sp>
       <p:pic>
         <p:nvPicPr>
-          <p:cNvPr id="18" name="Object 17" descr="public/generated/icons/9828699d-dda7-4022-839b-c8e1e8b7d9d8.png">    </p:cNvPr>
+          <p:cNvPr id="18" name="Object 17" descr="public/generated/icons/7b2cdb0e-ad91-4fd7-97c0-5398874ec27b.png">    </p:cNvPr>
           <p:cNvPicPr>
             <a:picLocks noChangeAspect="1"/>
           </p:cNvPicPr>
@@ -34148,7 +34148,7 @@
                 <a:ea typeface="Helvetica" pitchFamily="34" charset="-122"/>
                 <a:cs typeface="Helvetica" pitchFamily="34" charset="-120"/>
               </a:rPr>
-              <a:t>POWER I MIGRATE WHILE ACTIVE SERVICES</a:t>
+              <a:t>POWER I MIGRATE 23 SERVICES</a:t>
             </a:r>
             <a:endParaRPr lang="en-US" dirty="0"/>
           </a:p>
@@ -34181,7 +34181,7 @@
       </p:sp>
       <p:pic>
         <p:nvPicPr>
-          <p:cNvPr id="21" name="Object 20" descr="public/generated/icons/power-iaas.workspace.png">    </p:cNvPr>
+          <p:cNvPr id="21" name="Object 20" descr="public/generated/icons/9828699d-dda7-4022-839b-c8e1e8b7d9d8.png">    </p:cNvPr>
           <p:cNvPicPr>
             <a:picLocks noChangeAspect="1"/>
           </p:cNvPicPr>
@@ -34237,7 +34237,7 @@
                 <a:ea typeface="Helvetica" pitchFamily="34" charset="-122"/>
                 <a:cs typeface="Helvetica" pitchFamily="34" charset="-120"/>
               </a:rPr>
-              <a:t>POWER VIRTUAL SERVER</a:t>
+              <a:t>POWER I MIGRATE WHILE ACTIVE SERVICES</a:t>
             </a:r>
             <a:endParaRPr lang="en-US" dirty="0"/>
           </a:p>
@@ -34270,7 +34270,7 @@
       </p:sp>
       <p:pic>
         <p:nvPicPr>
-          <p:cNvPr id="24" name="Object 23" descr="public/generated/icons/power-iaas.dedicated-host.png">    </p:cNvPr>
+          <p:cNvPr id="24" name="Object 23" descr="public/generated/icons/power-iaas.workspace.png">    </p:cNvPr>
           <p:cNvPicPr>
             <a:picLocks noChangeAspect="1"/>
           </p:cNvPicPr>
@@ -34326,7 +34326,7 @@
                 <a:ea typeface="Helvetica" pitchFamily="34" charset="-122"/>
                 <a:cs typeface="Helvetica" pitchFamily="34" charset="-120"/>
               </a:rPr>
-              <a:t>POWER VIRTUAL SERVER DEDICATED HOST</a:t>
+              <a:t>POWER VIRTUAL SERVER</a:t>
             </a:r>
             <a:endParaRPr lang="en-US" dirty="0"/>
           </a:p>
@@ -34359,7 +34359,7 @@
       </p:sp>
       <p:pic>
         <p:nvPicPr>
-          <p:cNvPr id="27" name="Object 26" descr="public/generated/icons/208072a0-7978-11ef-b369-0733120a414f.png">    </p:cNvPr>
+          <p:cNvPr id="27" name="Object 26" descr="public/generated/icons/power-iaas.dedicated-host.png">    </p:cNvPr>
           <p:cNvPicPr>
             <a:picLocks noChangeAspect="1"/>
           </p:cNvPicPr>
@@ -34415,7 +34415,7 @@
                 <a:ea typeface="Helvetica" pitchFamily="34" charset="-122"/>
                 <a:cs typeface="Helvetica" pitchFamily="34" charset="-120"/>
               </a:rPr>
-              <a:t>POWER VIRTUAL SERVER DR AUTOMATION</a:t>
+              <a:t>POWER VIRTUAL SERVER DEDICATED HOST</a:t>
             </a:r>
             <a:endParaRPr lang="en-US" dirty="0"/>
           </a:p>
@@ -34448,7 +34448,7 @@
       </p:sp>
       <p:pic>
         <p:nvPicPr>
-          <p:cNvPr id="30" name="Object 29" descr="public/generated/icons/power-iaas.image.png">    </p:cNvPr>
+          <p:cNvPr id="30" name="Object 29" descr="public/generated/icons/208072a0-7978-11ef-b369-0733120a414f.png">    </p:cNvPr>
           <p:cNvPicPr>
             <a:picLocks noChangeAspect="1"/>
           </p:cNvPicPr>
@@ -34504,7 +34504,7 @@
                 <a:ea typeface="Helvetica" pitchFamily="34" charset="-122"/>
                 <a:cs typeface="Helvetica" pitchFamily="34" charset="-120"/>
               </a:rPr>
-              <a:t>POWER VIRTUAL SERVER IMAGE</a:t>
+              <a:t>POWER VIRTUAL SERVER DR AUTOMATION</a:t>
             </a:r>
             <a:endParaRPr lang="en-US" dirty="0"/>
           </a:p>
@@ -34537,7 +34537,7 @@
       </p:sp>
       <p:pic>
         <p:nvPicPr>
-          <p:cNvPr id="33" name="Object 32" descr="public/generated/icons/power-iaas.network.png">    </p:cNvPr>
+          <p:cNvPr id="33" name="Object 32" descr="public/generated/icons/power-iaas.image.png">    </p:cNvPr>
           <p:cNvPicPr>
             <a:picLocks noChangeAspect="1"/>
           </p:cNvPicPr>
@@ -34593,7 +34593,7 @@
                 <a:ea typeface="Helvetica" pitchFamily="34" charset="-122"/>
                 <a:cs typeface="Helvetica" pitchFamily="34" charset="-120"/>
               </a:rPr>
-              <a:t>POWER VIRTUAL SERVER NETWORK</a:t>
+              <a:t>POWER VIRTUAL SERVER IMAGE</a:t>
             </a:r>
             <a:endParaRPr lang="en-US" dirty="0"/>
           </a:p>
@@ -34626,7 +34626,7 @@
       </p:sp>
       <p:pic>
         <p:nvPicPr>
-          <p:cNvPr id="36" name="Object 35" descr="public/generated/icons/power-iaas.network-address-group.png">    </p:cNvPr>
+          <p:cNvPr id="36" name="Object 35" descr="public/generated/icons/power-iaas.network.png">    </p:cNvPr>
           <p:cNvPicPr>
             <a:picLocks noChangeAspect="1"/>
           </p:cNvPicPr>
@@ -34682,7 +34682,7 @@
                 <a:ea typeface="Helvetica" pitchFamily="34" charset="-122"/>
                 <a:cs typeface="Helvetica" pitchFamily="34" charset="-120"/>
               </a:rPr>
-              <a:t>POWER VIRTUAL SERVER NETWORK ADDRESS GROUP</a:t>
+              <a:t>POWER VIRTUAL SERVER NETWORK</a:t>
             </a:r>
             <a:endParaRPr lang="en-US" dirty="0"/>
           </a:p>
@@ -34715,7 +34715,7 @@
       </p:sp>
       <p:pic>
         <p:nvPicPr>
-          <p:cNvPr id="39" name="Object 38" descr="public/generated/icons/power-iaas.network-interface.png">    </p:cNvPr>
+          <p:cNvPr id="39" name="Object 38" descr="public/generated/icons/power-iaas.network-address-group.png">    </p:cNvPr>
           <p:cNvPicPr>
             <a:picLocks noChangeAspect="1"/>
           </p:cNvPicPr>
@@ -34771,7 +34771,7 @@
                 <a:ea typeface="Helvetica" pitchFamily="34" charset="-122"/>
                 <a:cs typeface="Helvetica" pitchFamily="34" charset="-120"/>
               </a:rPr>
-              <a:t>POWER VIRTUAL SERVER NETWORK INTERFACE</a:t>
+              <a:t>POWER VIRTUAL SERVER NETWORK ADDRESS GROUP</a:t>
             </a:r>
             <a:endParaRPr lang="en-US" dirty="0"/>
           </a:p>
@@ -34804,7 +34804,7 @@
       </p:sp>
       <p:pic>
         <p:nvPicPr>
-          <p:cNvPr id="42" name="Object 41" descr="public/generated/icons/power-iaas.network-security-group.png">    </p:cNvPr>
+          <p:cNvPr id="42" name="Object 41" descr="public/generated/icons/power-iaas.network-interface.png">    </p:cNvPr>
           <p:cNvPicPr>
             <a:picLocks noChangeAspect="1"/>
           </p:cNvPicPr>
@@ -34860,7 +34860,7 @@
                 <a:ea typeface="Helvetica" pitchFamily="34" charset="-122"/>
                 <a:cs typeface="Helvetica" pitchFamily="34" charset="-120"/>
               </a:rPr>
-              <a:t>POWER VIRTUAL SERVER NETWORK SECURITY GROUP</a:t>
+              <a:t>POWER VIRTUAL SERVER NETWORK INTERFACE</a:t>
             </a:r>
             <a:endParaRPr lang="en-US" dirty="0"/>
           </a:p>
@@ -34893,7 +34893,7 @@
       </p:sp>
       <p:pic>
         <p:nvPicPr>
-          <p:cNvPr id="45" name="Object 44" descr="public/generated/icons/power-iaas.shared-processor-pool.png">    </p:cNvPr>
+          <p:cNvPr id="45" name="Object 44" descr="public/generated/icons/power-iaas.network-security-group.png">    </p:cNvPr>
           <p:cNvPicPr>
             <a:picLocks noChangeAspect="1"/>
           </p:cNvPicPr>
@@ -34949,7 +34949,7 @@
                 <a:ea typeface="Helvetica" pitchFamily="34" charset="-122"/>
                 <a:cs typeface="Helvetica" pitchFamily="34" charset="-120"/>
               </a:rPr>
-              <a:t>POWER VIRTUAL SERVER SHARED PROCESSOR POOL</a:t>
+              <a:t>POWER VIRTUAL SERVER NETWORK SECURITY GROUP</a:t>
             </a:r>
             <a:endParaRPr lang="en-US" dirty="0"/>
           </a:p>
@@ -34982,7 +34982,7 @@
       </p:sp>
       <p:pic>
         <p:nvPicPr>
-          <p:cNvPr id="48" name="Object 47" descr="public/generated/icons/power-iaas.snapshot.png">    </p:cNvPr>
+          <p:cNvPr id="48" name="Object 47" descr="public/generated/icons/power-iaas.shared-processor-pool.png">    </p:cNvPr>
           <p:cNvPicPr>
             <a:picLocks noChangeAspect="1"/>
           </p:cNvPicPr>
@@ -35038,7 +35038,7 @@
                 <a:ea typeface="Helvetica" pitchFamily="34" charset="-122"/>
                 <a:cs typeface="Helvetica" pitchFamily="34" charset="-120"/>
               </a:rPr>
-              <a:t>POWER VIRTUAL SERVER SNAPSHOT</a:t>
+              <a:t>POWER VIRTUAL SERVER SHARED PROCESSOR POOL</a:t>
             </a:r>
             <a:endParaRPr lang="en-US" dirty="0"/>
           </a:p>
@@ -35071,7 +35071,7 @@
       </p:sp>
       <p:pic>
         <p:nvPicPr>
-          <p:cNvPr id="51" name="Object 50" descr="public/generated/icons/power-iaas.pvm-instance.png">    </p:cNvPr>
+          <p:cNvPr id="51" name="Object 50" descr="public/generated/icons/power-iaas.snapshot.png">    </p:cNvPr>
           <p:cNvPicPr>
             <a:picLocks noChangeAspect="1"/>
           </p:cNvPicPr>
@@ -35127,7 +35127,7 @@
                 <a:ea typeface="Helvetica" pitchFamily="34" charset="-122"/>
                 <a:cs typeface="Helvetica" pitchFamily="34" charset="-120"/>
               </a:rPr>
-              <a:t>POWER VIRTUAL SERVER VIRTUAL MACHINE</a:t>
+              <a:t>POWER VIRTUAL SERVER SNAPSHOT</a:t>
             </a:r>
             <a:endParaRPr lang="en-US" dirty="0"/>
           </a:p>
@@ -35160,7 +35160,7 @@
       </p:sp>
       <p:pic>
         <p:nvPicPr>
-          <p:cNvPr id="54" name="Object 53" descr="public/generated/icons/power-iaas.volume.png">    </p:cNvPr>
+          <p:cNvPr id="54" name="Object 53" descr="public/generated/icons/power-iaas.pvm-instance.png">    </p:cNvPr>
           <p:cNvPicPr>
             <a:picLocks noChangeAspect="1"/>
           </p:cNvPicPr>
@@ -35216,7 +35216,7 @@
                 <a:ea typeface="Helvetica" pitchFamily="34" charset="-122"/>
                 <a:cs typeface="Helvetica" pitchFamily="34" charset="-120"/>
               </a:rPr>
-              <a:t>POWER VIRTUAL SERVER VOLUME</a:t>
+              <a:t>POWER VIRTUAL SERVER VIRTUAL MACHINE</a:t>
             </a:r>
             <a:endParaRPr lang="en-US" dirty="0"/>
           </a:p>
@@ -35249,7 +35249,7 @@
       </p:sp>
       <p:pic>
         <p:nvPicPr>
-          <p:cNvPr id="57" name="Object 56" descr="public/generated/icons/b260dfd6-9b79-4377-be6d-146a5cb59be8.png">    </p:cNvPr>
+          <p:cNvPr id="57" name="Object 56" descr="public/generated/icons/power-iaas.volume.png">    </p:cNvPr>
           <p:cNvPicPr>
             <a:picLocks noChangeAspect="1"/>
           </p:cNvPicPr>
@@ -35305,7 +35305,7 @@
                 <a:ea typeface="Helvetica" pitchFamily="34" charset="-122"/>
                 <a:cs typeface="Helvetica" pitchFamily="34" charset="-120"/>
               </a:rPr>
-              <a:t>POWERVS MIGRATION AS A SERVICE</a:t>
+              <a:t>POWER VIRTUAL SERVER VOLUME</a:t>
             </a:r>
             <a:endParaRPr lang="en-US" dirty="0"/>
           </a:p>
@@ -35338,7 +35338,7 @@
       </p:sp>
       <p:pic>
         <p:nvPicPr>
-          <p:cNvPr id="60" name="Object 59" descr="public/generated/icons/is.private-path-service-gateway.png">    </p:cNvPr>
+          <p:cNvPr id="60" name="Object 59" descr="public/generated/icons/b260dfd6-9b79-4377-be6d-146a5cb59be8.png">    </p:cNvPr>
           <p:cNvPicPr>
             <a:picLocks noChangeAspect="1"/>
           </p:cNvPicPr>
@@ -35394,7 +35394,7 @@
                 <a:ea typeface="Helvetica" pitchFamily="34" charset="-122"/>
                 <a:cs typeface="Helvetica" pitchFamily="34" charset="-120"/>
               </a:rPr>
-              <a:t>PRIVATE PATH SERVICE FOR VPC</a:t>
+              <a:t>POWERVS MIGRATION AS A SERVICE</a:t>
             </a:r>
             <a:endParaRPr lang="en-US" dirty="0"/>
           </a:p>
@@ -35427,7 +35427,7 @@
       </p:sp>
       <p:pic>
         <p:nvPicPr>
-          <p:cNvPr id="63" name="Object 62" descr="public/generated/icons/91a901ac-fb7d-9b6e-eb25-14e75a20c4c2.png">    </p:cNvPr>
+          <p:cNvPr id="63" name="Object 62" descr="public/generated/icons/is.private-path-service-gateway.png">    </p:cNvPr>
           <p:cNvPicPr>
             <a:picLocks noChangeAspect="1"/>
           </p:cNvPicPr>
@@ -35483,7 +35483,7 @@
                 <a:ea typeface="Helvetica" pitchFamily="34" charset="-122"/>
                 <a:cs typeface="Helvetica" pitchFamily="34" charset="-120"/>
               </a:rPr>
-              <a:t>PROFESSIONAL SERVICES FOR GOVERNMENT(ONLY AVAILABLE IN US)</a:t>
+              <a:t>PRIVATE PATH SERVICE FOR VPC</a:t>
             </a:r>
             <a:endParaRPr lang="en-US" dirty="0"/>
           </a:p>
@@ -35516,7 +35516,7 @@
       </p:sp>
       <p:pic>
         <p:nvPicPr>
-          <p:cNvPr id="66" name="Object 65" descr="public/generated/icons/7c03a06c-f1bb-46f8-84d8-9378432b2804.png">    </p:cNvPr>
+          <p:cNvPr id="66" name="Object 65" descr="public/generated/icons/91a901ac-fb7d-9b6e-eb25-14e75a20c4c2.png">    </p:cNvPr>
           <p:cNvPicPr>
             <a:picLocks noChangeAspect="1"/>
           </p:cNvPicPr>
@@ -35572,7 +35572,7 @@
                 <a:ea typeface="Helvetica" pitchFamily="34" charset="-122"/>
                 <a:cs typeface="Helvetica" pitchFamily="34" charset="-120"/>
               </a:rPr>
-              <a:t>PROTECTIO DRAAS MANAGED SERVICE</a:t>
+              <a:t>PROFESSIONAL SERVICES FOR GOVERNMENT(ONLY AVAILABLE IN US)</a:t>
             </a:r>
             <a:endParaRPr lang="en-US" dirty="0"/>
           </a:p>
@@ -35605,7 +35605,7 @@
       </p:sp>
       <p:pic>
         <p:nvPicPr>
-          <p:cNvPr id="69" name="Object 68" descr="public/generated/icons/is.public-gateway.png">    </p:cNvPr>
+          <p:cNvPr id="69" name="Object 68" descr="public/generated/icons/7c03a06c-f1bb-46f8-84d8-9378432b2804.png">    </p:cNvPr>
           <p:cNvPicPr>
             <a:picLocks noChangeAspect="1"/>
           </p:cNvPicPr>
@@ -35661,7 +35661,7 @@
                 <a:ea typeface="Helvetica" pitchFamily="34" charset="-122"/>
                 <a:cs typeface="Helvetica" pitchFamily="34" charset="-120"/>
               </a:rPr>
-              <a:t>PUBLIC GATEWAY</a:t>
+              <a:t>PROTECTIO DRAAS MANAGED SERVICE</a:t>
             </a:r>
             <a:endParaRPr lang="en-US" dirty="0"/>
           </a:p>
@@ -35694,7 +35694,7 @@
       </p:sp>
       <p:pic>
         <p:nvPicPr>
-          <p:cNvPr id="72" name="Object 71" descr="public/generated/icons/aa11a8b2-381e-4c1c-a232-2148f65c005f.png">    </p:cNvPr>
+          <p:cNvPr id="72" name="Object 71" descr="public/generated/icons/is.public-gateway.png">    </p:cNvPr>
           <p:cNvPicPr>
             <a:picLocks noChangeAspect="1"/>
           </p:cNvPicPr>
@@ -35750,7 +35750,7 @@
                 <a:ea typeface="Helvetica" pitchFamily="34" charset="-122"/>
                 <a:cs typeface="Helvetica" pitchFamily="34" charset="-120"/>
               </a:rPr>
-              <a:t>PVS ONE MANAGED SERVICE</a:t>
+              <a:t>PUBLIC GATEWAY</a:t>
             </a:r>
             <a:endParaRPr lang="en-US" dirty="0"/>
           </a:p>
@@ -35783,7 +35783,7 @@
       </p:sp>
       <p:pic>
         <p:nvPicPr>
-          <p:cNvPr id="75" name="Object 74" descr="public/generated/icons/3eb2d5a0-24ff-11eb-9437-631d7272fff5.png">    </p:cNvPr>
+          <p:cNvPr id="75" name="Object 74" descr="public/generated/icons/aa11a8b2-381e-4c1c-a232-2148f65c005f.png">    </p:cNvPr>
           <p:cNvPicPr>
             <a:picLocks noChangeAspect="1"/>
           </p:cNvPicPr>
@@ -35839,7 +35839,7 @@
                 <a:ea typeface="Helvetica" pitchFamily="34" charset="-122"/>
                 <a:cs typeface="Helvetica" pitchFamily="34" charset="-120"/>
               </a:rPr>
-              <a:t>PX-BACKUP FOR KUBERNETES</a:t>
+              <a:t>PVS ONE MANAGED SERVICE</a:t>
             </a:r>
             <a:endParaRPr lang="en-US" dirty="0"/>
           </a:p>
@@ -35872,7 +35872,7 @@
       </p:sp>
       <p:pic>
         <p:nvPicPr>
-          <p:cNvPr id="78" name="Object 77" descr="public/generated/icons/b6049020-80f4-11eb-a0f7-e35ec9b4054f.png">    </p:cNvPr>
+          <p:cNvPr id="78" name="Object 77" descr="public/generated/icons/3eb2d5a0-24ff-11eb-9437-631d7272fff5.png">    </p:cNvPr>
           <p:cNvPicPr>
             <a:picLocks noChangeAspect="1"/>
           </p:cNvPicPr>
@@ -35928,7 +35928,7 @@
                 <a:ea typeface="Helvetica" pitchFamily="34" charset="-122"/>
                 <a:cs typeface="Helvetica" pitchFamily="34" charset="-120"/>
               </a:rPr>
-              <a:t>QISKIT RUNTIME</a:t>
+              <a:t>PX-BACKUP FOR KUBERNETES</a:t>
             </a:r>
             <a:endParaRPr lang="en-US" dirty="0"/>
           </a:p>
@@ -35961,7 +35961,7 @@
       </p:sp>
       <p:pic>
         <p:nvPicPr>
-          <p:cNvPr id="81" name="Object 80" descr="public/generated/icons/cf5f8ac0-98f7-11e9-a40c-5b3c4bf3cc6d.png">    </p:cNvPr>
+          <p:cNvPr id="81" name="Object 80" descr="public/generated/icons/b6049020-80f4-11eb-a0f7-e35ec9b4054f.png">    </p:cNvPr>
           <p:cNvPicPr>
             <a:picLocks noChangeAspect="1"/>
           </p:cNvPicPr>
@@ -36017,7 +36017,7 @@
                 <a:ea typeface="Helvetica" pitchFamily="34" charset="-122"/>
                 <a:cs typeface="Helvetica" pitchFamily="34" charset="-120"/>
               </a:rPr>
-              <a:t>RAXAK PROTECT</a:t>
+              <a:t>QISKIT RUNTIME</a:t>
             </a:r>
             <a:endParaRPr lang="en-US" dirty="0"/>
           </a:p>
@@ -36050,7 +36050,7 @@
       </p:sp>
       <p:pic>
         <p:nvPicPr>
-          <p:cNvPr id="84" name="Object 83" descr="public/generated/icons/openshift.png">    </p:cNvPr>
+          <p:cNvPr id="84" name="Object 83" descr="public/generated/icons/cf5f8ac0-98f7-11e9-a40c-5b3c4bf3cc6d.png">    </p:cNvPr>
           <p:cNvPicPr>
             <a:picLocks noChangeAspect="1"/>
           </p:cNvPicPr>
@@ -36106,7 +36106,7 @@
                 <a:ea typeface="Helvetica" pitchFamily="34" charset="-122"/>
                 <a:cs typeface="Helvetica" pitchFamily="34" charset="-120"/>
               </a:rPr>
-              <a:t>RED HAT OPENSHIFT ON IBM CLOUD</a:t>
+              <a:t>RAXAK PROTECT</a:t>
             </a:r>
             <a:endParaRPr lang="en-US" dirty="0"/>
           </a:p>
@@ -36139,7 +36139,7 @@
       </p:sp>
       <p:pic>
         <p:nvPicPr>
-          <p:cNvPr id="87" name="Object 86" descr="public/generated/icons/bd517bf0-88ba-11ea-a52e-91aeb42a4019.png">    </p:cNvPr>
+          <p:cNvPr id="87" name="Object 86" descr="public/generated/icons/openshift.png">    </p:cNvPr>
           <p:cNvPicPr>
             <a:picLocks noChangeAspect="1"/>
           </p:cNvPicPr>
@@ -36195,7 +36195,7 @@
                 <a:ea typeface="Helvetica" pitchFamily="34" charset="-122"/>
                 <a:cs typeface="Helvetica" pitchFamily="34" charset="-120"/>
               </a:rPr>
-              <a:t>SATELLITE</a:t>
+              <a:t>RED HAT OPENSHIFT ON IBM CLOUD</a:t>
             </a:r>
             <a:endParaRPr lang="en-US" dirty="0"/>
           </a:p>
@@ -36228,7 +36228,7 @@
       </p:sp>
       <p:pic>
         <p:nvPicPr>
-          <p:cNvPr id="90" name="Object 89" descr="public/generated/icons/schematics.png">    </p:cNvPr>
+          <p:cNvPr id="90" name="Object 89" descr="public/generated/icons/bd517bf0-88ba-11ea-a52e-91aeb42a4019.png">    </p:cNvPr>
           <p:cNvPicPr>
             <a:picLocks noChangeAspect="1"/>
           </p:cNvPicPr>
@@ -36284,7 +36284,7 @@
                 <a:ea typeface="Helvetica" pitchFamily="34" charset="-122"/>
                 <a:cs typeface="Helvetica" pitchFamily="34" charset="-120"/>
               </a:rPr>
-              <a:t>SCHEMATICS</a:t>
+              <a:t>SATELLITE</a:t>
             </a:r>
             <a:endParaRPr lang="en-US" dirty="0"/>
           </a:p>
@@ -36317,7 +36317,7 @@
       </p:sp>
       <p:pic>
         <p:nvPicPr>
-          <p:cNvPr id="93" name="Object 92" descr="public/generated/icons/14.png">    </p:cNvPr>
+          <p:cNvPr id="93" name="Object 92" descr="public/generated/icons/schematics.png">    </p:cNvPr>
           <p:cNvPicPr>
             <a:picLocks noChangeAspect="1"/>
           </p:cNvPicPr>
@@ -36373,7 +36373,7 @@
                 <a:ea typeface="Helvetica" pitchFamily="34" charset="-122"/>
                 <a:cs typeface="Helvetica" pitchFamily="34" charset="-120"/>
               </a:rPr>
-              <a:t>SECONDARY SUBNETS</a:t>
+              <a:t>SCHEMATICS</a:t>
             </a:r>
             <a:endParaRPr lang="en-US" dirty="0"/>
           </a:p>
@@ -36406,7 +36406,7 @@
       </p:sp>
       <p:pic>
         <p:nvPicPr>
-          <p:cNvPr id="96" name="Object 95" descr="public/generated/icons/ebc0cdb0-af2a-11ea-98c7-29e5db822649.png">    </p:cNvPr>
+          <p:cNvPr id="96" name="Object 95" descr="public/generated/icons/14.png">    </p:cNvPr>
           <p:cNvPicPr>
             <a:picLocks noChangeAspect="1"/>
           </p:cNvPicPr>
@@ -36462,7 +36462,7 @@
                 <a:ea typeface="Helvetica" pitchFamily="34" charset="-122"/>
                 <a:cs typeface="Helvetica" pitchFamily="34" charset="-120"/>
               </a:rPr>
-              <a:t>SECRETS MANAGER</a:t>
+              <a:t>SECONDARY SUBNETS</a:t>
             </a:r>
             <a:endParaRPr lang="en-US" dirty="0"/>
           </a:p>
@@ -36495,7 +36495,7 @@
       </p:sp>
       <p:pic>
         <p:nvPicPr>
-          <p:cNvPr id="99" name="Object 98" descr="public/generated/icons/IBM_SecureGateway.png">    </p:cNvPr>
+          <p:cNvPr id="99" name="Object 98" descr="public/generated/icons/ebc0cdb0-af2a-11ea-98c7-29e5db822649.png">    </p:cNvPr>
           <p:cNvPicPr>
             <a:picLocks noChangeAspect="1"/>
           </p:cNvPicPr>
@@ -36551,7 +36551,7 @@
                 <a:ea typeface="Helvetica" pitchFamily="34" charset="-122"/>
                 <a:cs typeface="Helvetica" pitchFamily="34" charset="-120"/>
               </a:rPr>
-              <a:t>SECURE GATEWAY</a:t>
+              <a:t>SECRETS MANAGER</a:t>
             </a:r>
             <a:endParaRPr lang="en-US" dirty="0"/>
           </a:p>
@@ -36584,7 +36584,7 @@
       </p:sp>
       <p:pic>
         <p:nvPicPr>
-          <p:cNvPr id="102" name="Object 101" descr="public/generated/icons/compliance.png">    </p:cNvPr>
+          <p:cNvPr id="102" name="Object 101" descr="public/generated/icons/IBM_SecureGateway.png">    </p:cNvPr>
           <p:cNvPicPr>
             <a:picLocks noChangeAspect="1"/>
           </p:cNvPicPr>
@@ -36640,7 +36640,7 @@
                 <a:ea typeface="Helvetica" pitchFamily="34" charset="-122"/>
                 <a:cs typeface="Helvetica" pitchFamily="34" charset="-120"/>
               </a:rPr>
-              <a:t>SECURITY AND COMPLIANCE CENTER</a:t>
+              <a:t>SECURE GATEWAY</a:t>
             </a:r>
             <a:endParaRPr lang="en-US" dirty="0"/>
           </a:p>
@@ -36673,7 +36673,7 @@
       </p:sp>
       <p:pic>
         <p:nvPicPr>
-          <p:cNvPr id="105" name="Object 104" descr="public/generated/icons/e831e900-82d6-11ec-95c5-c12c5a5d9687.png">    </p:cNvPr>
+          <p:cNvPr id="105" name="Object 104" descr="public/generated/icons/compliance.png">    </p:cNvPr>
           <p:cNvPicPr>
             <a:picLocks noChangeAspect="1"/>
           </p:cNvPicPr>
@@ -36729,7 +36729,7 @@
                 <a:ea typeface="Helvetica" pitchFamily="34" charset="-122"/>
                 <a:cs typeface="Helvetica" pitchFamily="34" charset="-120"/>
               </a:rPr>
-              <a:t>SECURITY AND COMPLIANCE CENTER WORKLOAD PROTECTION</a:t>
+              <a:t>SECURITY AND COMPLIANCE CENTER</a:t>
             </a:r>
             <a:endParaRPr lang="en-US" dirty="0"/>
           </a:p>
@@ -36762,7 +36762,7 @@
       </p:sp>
       <p:pic>
         <p:nvPicPr>
-          <p:cNvPr id="108" name="Object 107" descr="public/generated/icons/is.security-group.png">    </p:cNvPr>
+          <p:cNvPr id="108" name="Object 107" descr="public/generated/icons/e831e900-82d6-11ec-95c5-c12c5a5d9687.png">    </p:cNvPr>
           <p:cNvPicPr>
             <a:picLocks noChangeAspect="1"/>
           </p:cNvPicPr>
@@ -36818,7 +36818,7 @@
                 <a:ea typeface="Helvetica" pitchFamily="34" charset="-122"/>
                 <a:cs typeface="Helvetica" pitchFamily="34" charset="-120"/>
               </a:rPr>
-              <a:t>SECURITY GROUP FOR VPC</a:t>
+              <a:t>SECURITY AND COMPLIANCE CENTER WORKLOAD PROTECTION</a:t>
             </a:r>
             <a:endParaRPr lang="en-US" dirty="0"/>
           </a:p>
@@ -36884,7 +36884,7 @@
       </p:sp>
       <p:pic>
         <p:nvPicPr>
-          <p:cNvPr id="3" name="Object 2" descr="public/generated/icons/cf329950-0a3e-11e8-922e-f1366c6e1c83-vcstrial_dr.png">    </p:cNvPr>
+          <p:cNvPr id="3" name="Object 2" descr="public/generated/icons/is.security-group.png">    </p:cNvPr>
           <p:cNvPicPr>
             <a:picLocks noChangeAspect="1"/>
           </p:cNvPicPr>
@@ -36940,7 +36940,7 @@
                 <a:ea typeface="Helvetica" pitchFamily="34" charset="-122"/>
                 <a:cs typeface="Helvetica" pitchFamily="34" charset="-120"/>
               </a:rPr>
-              <a:t>SINGLE-NODE TRIAL FOR DATA PROTECTION AND DISASTER RECOVERY</a:t>
+              <a:t>SECURITY GROUP FOR VPC</a:t>
             </a:r>
             <a:endParaRPr lang="en-US" dirty="0"/>
           </a:p>
@@ -36973,7 +36973,7 @@
       </p:sp>
       <p:pic>
         <p:nvPicPr>
-          <p:cNvPr id="6" name="Object 5" descr="public/generated/icons/cf329950-0a3e-11e8-922e-f1366c6e1c83-vcstrial.png">    </p:cNvPr>
+          <p:cNvPr id="6" name="Object 5" descr="public/generated/icons/cf329950-0a3e-11e8-922e-f1366c6e1c83-vcstrial_dr.png">    </p:cNvPr>
           <p:cNvPicPr>
             <a:picLocks noChangeAspect="1"/>
           </p:cNvPicPr>
@@ -37029,7 +37029,7 @@
                 <a:ea typeface="Helvetica" pitchFamily="34" charset="-122"/>
                 <a:cs typeface="Helvetica" pitchFamily="34" charset="-120"/>
               </a:rPr>
-              <a:t>SINGLE-NODE TRIAL FOR MIGRATION AND APP MODERNIZATION</a:t>
+              <a:t>SINGLE-NODE TRIAL FOR DATA PROTECTION AND DISASTER RECOVERY</a:t>
             </a:r>
             <a:endParaRPr lang="en-US" dirty="0"/>
           </a:p>
@@ -37062,7 +37062,7 @@
       </p:sp>
       <p:pic>
         <p:nvPicPr>
-          <p:cNvPr id="9" name="Object 8" descr="public/generated/icons/fdf77820-deed-11e9-911d-5f09017358ff.png">    </p:cNvPr>
+          <p:cNvPr id="9" name="Object 8" descr="public/generated/icons/cf329950-0a3e-11e8-922e-f1366c6e1c83-vcstrial.png">    </p:cNvPr>
           <p:cNvPicPr>
             <a:picLocks noChangeAspect="1"/>
           </p:cNvPicPr>
@@ -37118,7 +37118,7 @@
                 <a:ea typeface="Helvetica" pitchFamily="34" charset="-122"/>
                 <a:cs typeface="Helvetica" pitchFamily="34" charset="-120"/>
               </a:rPr>
-              <a:t>SKYTAP ON IBM CLOUD</a:t>
+              <a:t>SINGLE-NODE TRIAL FOR MIGRATION AND APP MODERNIZATION</a:t>
             </a:r>
             <a:endParaRPr lang="en-US" dirty="0"/>
           </a:p>
@@ -37151,7 +37151,7 @@
       </p:sp>
       <p:pic>
         <p:nvPicPr>
-          <p:cNvPr id="12" name="Object 11" descr="public/generated/icons/cf329950-0a3e-11e8-922e-f1366c6e1c83-spplus.png">    </p:cNvPr>
+          <p:cNvPr id="12" name="Object 11" descr="public/generated/icons/fdf77820-deed-11e9-911d-5f09017358ff.png">    </p:cNvPr>
           <p:cNvPicPr>
             <a:picLocks noChangeAspect="1"/>
           </p:cNvPicPr>
@@ -37207,7 +37207,7 @@
                 <a:ea typeface="Helvetica" pitchFamily="34" charset="-122"/>
                 <a:cs typeface="Helvetica" pitchFamily="34" charset="-120"/>
               </a:rPr>
-              <a:t>SPECTRUM PROTECT PLUS</a:t>
+              <a:t>SKYTAP ON IBM CLOUD</a:t>
             </a:r>
             <a:endParaRPr lang="en-US" dirty="0"/>
           </a:p>
@@ -37240,7 +37240,7 @@
       </p:sp>
       <p:pic>
         <p:nvPicPr>
-          <p:cNvPr id="15" name="Object 14" descr="public/generated/icons/bc35fb8c-bc5b-431b-859e-3861771d5843.png">    </p:cNvPr>
+          <p:cNvPr id="15" name="Object 14" descr="public/generated/icons/cf329950-0a3e-11e8-922e-f1366c6e1c83-spplus.png">    </p:cNvPr>
           <p:cNvPicPr>
             <a:picLocks noChangeAspect="1"/>
           </p:cNvPicPr>
@@ -37296,7 +37296,7 @@
                 <a:ea typeface="Helvetica" pitchFamily="34" charset="-122"/>
                 <a:cs typeface="Helvetica" pitchFamily="34" charset="-120"/>
               </a:rPr>
-              <a:t>SPEECH TO TEXT</a:t>
+              <a:t>SPECTRUM PROTECT PLUS</a:t>
             </a:r>
             <a:endParaRPr lang="en-US" dirty="0"/>
           </a:p>
@@ -37329,7 +37329,7 @@
       </p:sp>
       <p:pic>
         <p:nvPicPr>
-          <p:cNvPr id="18" name="Object 17" descr="public/generated/icons/556153d0-5ad0-11e9-b7f9-41319ef22125.png">    </p:cNvPr>
+          <p:cNvPr id="18" name="Object 17" descr="public/generated/icons/bc35fb8c-bc5b-431b-859e-3861771d5843.png">    </p:cNvPr>
           <p:cNvPicPr>
             <a:picLocks noChangeAspect="1"/>
           </p:cNvPicPr>
@@ -37385,7 +37385,7 @@
                 <a:ea typeface="Helvetica" pitchFamily="34" charset="-122"/>
                 <a:cs typeface="Helvetica" pitchFamily="34" charset="-120"/>
               </a:rPr>
-              <a:t>SSH KEY FOR VPC</a:t>
+              <a:t>SPEECH TO TEXT</a:t>
             </a:r>
             <a:endParaRPr lang="en-US" dirty="0"/>
           </a:p>
@@ -37418,7 +37418,7 @@
       </p:sp>
       <p:pic>
         <p:nvPicPr>
-          <p:cNvPr id="21" name="Object 20" descr="public/generated/icons/19.png">    </p:cNvPr>
+          <p:cNvPr id="21" name="Object 20" descr="public/generated/icons/556153d0-5ad0-11e9-b7f9-41319ef22125.png">    </p:cNvPr>
           <p:cNvPicPr>
             <a:picLocks noChangeAspect="1"/>
           </p:cNvPicPr>
@@ -37474,7 +37474,7 @@
                 <a:ea typeface="Helvetica" pitchFamily="34" charset="-122"/>
                 <a:cs typeface="Helvetica" pitchFamily="34" charset="-120"/>
               </a:rPr>
-              <a:t>SSL CERTIFICATES</a:t>
+              <a:t>SSH KEY FOR VPC</a:t>
             </a:r>
             <a:endParaRPr lang="en-US" dirty="0"/>
           </a:p>
@@ -37507,7 +37507,7 @@
       </p:sp>
       <p:pic>
         <p:nvPicPr>
-          <p:cNvPr id="24" name="Object 23" descr="public/generated/icons/2bea02b0-c0a4-11ee-83aa-3171b0bf2976.png">    </p:cNvPr>
+          <p:cNvPr id="24" name="Object 23" descr="public/generated/icons/19.png">    </p:cNvPr>
           <p:cNvPicPr>
             <a:picLocks noChangeAspect="1"/>
           </p:cNvPicPr>
@@ -37563,7 +37563,7 @@
                 <a:ea typeface="Helvetica" pitchFamily="34" charset="-122"/>
                 <a:cs typeface="Helvetica" pitchFamily="34" charset="-120"/>
               </a:rPr>
-              <a:t>STORAGE CEPH AS A SERVICE</a:t>
+              <a:t>SSL CERTIFICATES</a:t>
             </a:r>
             <a:endParaRPr lang="en-US" dirty="0"/>
           </a:p>
@@ -37596,7 +37596,7 @@
       </p:sp>
       <p:pic>
         <p:nvPicPr>
-          <p:cNvPr id="27" name="Object 26" descr="public/generated/icons/5acdbc42-8965-48f9-8a3c-1c728b6ed2c4.png">    </p:cNvPr>
+          <p:cNvPr id="27" name="Object 26" descr="public/generated/icons/2bea02b0-c0a4-11ee-83aa-3171b0bf2976.png">    </p:cNvPr>
           <p:cNvPicPr>
             <a:picLocks noChangeAspect="1"/>
           </p:cNvPicPr>
@@ -37652,7 +37652,7 @@
                 <a:ea typeface="Helvetica" pitchFamily="34" charset="-122"/>
                 <a:cs typeface="Helvetica" pitchFamily="34" charset="-120"/>
               </a:rPr>
-              <a:t>STREAMING ANALYTICS</a:t>
+              <a:t>STORAGE CEPH AS A SERVICE</a:t>
             </a:r>
             <a:endParaRPr lang="en-US" dirty="0"/>
           </a:p>
@@ -37685,7 +37685,7 @@
       </p:sp>
       <p:pic>
         <p:nvPicPr>
-          <p:cNvPr id="30" name="Object 29" descr="public/generated/icons/is.subnet.png">    </p:cNvPr>
+          <p:cNvPr id="30" name="Object 29" descr="public/generated/icons/5acdbc42-8965-48f9-8a3c-1c728b6ed2c4.png">    </p:cNvPr>
           <p:cNvPicPr>
             <a:picLocks noChangeAspect="1"/>
           </p:cNvPicPr>
@@ -37741,7 +37741,7 @@
                 <a:ea typeface="Helvetica" pitchFamily="34" charset="-122"/>
                 <a:cs typeface="Helvetica" pitchFamily="34" charset="-120"/>
               </a:rPr>
-              <a:t>SUBNET</a:t>
+              <a:t>STREAMING ANALYTICS</a:t>
             </a:r>
             <a:endParaRPr lang="en-US" dirty="0"/>
           </a:p>
@@ -37774,7 +37774,7 @@
       </p:sp>
       <p:pic>
         <p:nvPicPr>
-          <p:cNvPr id="33" name="Object 32" descr="public/generated/icons/282c1d79-9176-4597-9cff-941a8d6cfd4c.png">    </p:cNvPr>
+          <p:cNvPr id="33" name="Object 32" descr="public/generated/icons/is.subnet.png">    </p:cNvPr>
           <p:cNvPicPr>
             <a:picLocks noChangeAspect="1"/>
           </p:cNvPicPr>
@@ -37830,7 +37830,7 @@
                 <a:ea typeface="Helvetica" pitchFamily="34" charset="-122"/>
                 <a:cs typeface="Helvetica" pitchFamily="34" charset="-120"/>
               </a:rPr>
-              <a:t>TEXT TO SPEECH</a:t>
+              <a:t>SUBNET</a:t>
             </a:r>
             <a:endParaRPr lang="en-US" dirty="0"/>
           </a:p>
@@ -37863,7 +37863,7 @@
       </p:sp>
       <p:pic>
         <p:nvPicPr>
-          <p:cNvPr id="36" name="Object 35" descr="public/generated/icons/e512e5f0-64fb-11e8-9c23-830c05b8b729.png">    </p:cNvPr>
+          <p:cNvPr id="36" name="Object 35" descr="public/generated/icons/282c1d79-9176-4597-9cff-941a8d6cfd4c.png">    </p:cNvPr>
           <p:cNvPicPr>
             <a:picLocks noChangeAspect="1"/>
           </p:cNvPicPr>
@@ -37919,7 +37919,7 @@
                 <a:ea typeface="Helvetica" pitchFamily="34" charset="-122"/>
                 <a:cs typeface="Helvetica" pitchFamily="34" charset="-120"/>
               </a:rPr>
-              <a:t>TOOLCHAIN</a:t>
+              <a:t>TEXT TO SPEECH</a:t>
             </a:r>
             <a:endParaRPr lang="en-US" dirty="0"/>
           </a:p>
@@ -37952,7 +37952,7 @@
       </p:sp>
       <p:pic>
         <p:nvPicPr>
-          <p:cNvPr id="39" name="Object 38" descr="public/generated/icons/f38a4da0-c353-11e9-83b6-a36a57a97a06.png">    </p:cNvPr>
+          <p:cNvPr id="39" name="Object 38" descr="public/generated/icons/e512e5f0-64fb-11e8-9c23-830c05b8b729.png">    </p:cNvPr>
           <p:cNvPicPr>
             <a:picLocks noChangeAspect="1"/>
           </p:cNvPicPr>
@@ -38008,7 +38008,7 @@
                 <a:ea typeface="Helvetica" pitchFamily="34" charset="-122"/>
                 <a:cs typeface="Helvetica" pitchFamily="34" charset="-120"/>
               </a:rPr>
-              <a:t>TRANSIT GATEWAY</a:t>
+              <a:t>TOOLCHAIN</a:t>
             </a:r>
             <a:endParaRPr lang="en-US" dirty="0"/>
           </a:p>
@@ -38041,7 +38041,7 @@
       </p:sp>
       <p:pic>
         <p:nvPicPr>
-          <p:cNvPr id="42" name="Object 41" descr="public/generated/icons/vmware.directorsite.png">    </p:cNvPr>
+          <p:cNvPr id="42" name="Object 41" descr="public/generated/icons/f38a4da0-c353-11e9-83b6-a36a57a97a06.png">    </p:cNvPr>
           <p:cNvPicPr>
             <a:picLocks noChangeAspect="1"/>
           </p:cNvPicPr>
@@ -38097,7 +38097,7 @@
                 <a:ea typeface="Helvetica" pitchFamily="34" charset="-122"/>
                 <a:cs typeface="Helvetica" pitchFamily="34" charset="-120"/>
               </a:rPr>
-              <a:t>VCF AS A SERVICE - CLOUD DIRECTOR SITE</a:t>
+              <a:t>TRANSIT GATEWAY</a:t>
             </a:r>
             <a:endParaRPr lang="en-US" dirty="0"/>
           </a:p>
@@ -38130,7 +38130,7 @@
       </p:sp>
       <p:pic>
         <p:nvPicPr>
-          <p:cNvPr id="45" name="Object 44" descr="public/generated/icons/vmware.vdc.png">    </p:cNvPr>
+          <p:cNvPr id="45" name="Object 44" descr="public/generated/icons/vmware.directorsite.png">    </p:cNvPr>
           <p:cNvPicPr>
             <a:picLocks noChangeAspect="1"/>
           </p:cNvPicPr>
@@ -38186,7 +38186,7 @@
                 <a:ea typeface="Helvetica" pitchFamily="34" charset="-122"/>
                 <a:cs typeface="Helvetica" pitchFamily="34" charset="-120"/>
               </a:rPr>
-              <a:t>VCF AS A SERVICE - VIRTUAL DATA CENTER</a:t>
+              <a:t>VCF AS A SERVICE - CLOUD DIRECTOR SITE</a:t>
             </a:r>
             <a:endParaRPr lang="en-US" dirty="0"/>
           </a:p>
@@ -38219,7 +38219,7 @@
       </p:sp>
       <p:pic>
         <p:nvPicPr>
-          <p:cNvPr id="48" name="Object 47" descr="public/generated/icons/cf329950-0a3e-11e8-922e-f1366c6e1c83-veeam.png">    </p:cNvPr>
+          <p:cNvPr id="48" name="Object 47" descr="public/generated/icons/vmware.vdc.png">    </p:cNvPr>
           <p:cNvPicPr>
             <a:picLocks noChangeAspect="1"/>
           </p:cNvPicPr>
@@ -38275,7 +38275,7 @@
                 <a:ea typeface="Helvetica" pitchFamily="34" charset="-122"/>
                 <a:cs typeface="Helvetica" pitchFamily="34" charset="-120"/>
               </a:rPr>
-              <a:t>VEEAM</a:t>
+              <a:t>VCF AS A SERVICE - VIRTUAL DATA CENTER</a:t>
             </a:r>
             <a:endParaRPr lang="en-US" dirty="0"/>
           </a:p>
@@ -38308,7 +38308,7 @@
       </p:sp>
       <p:pic>
         <p:nvPicPr>
-          <p:cNvPr id="51" name="Object 50" descr="public/generated/icons/66644e80-f35a-11ee-923f-2fe367129617.png">    </p:cNvPr>
+          <p:cNvPr id="51" name="Object 50" descr="public/generated/icons/cf329950-0a3e-11e8-922e-f1366c6e1c83-veeam.png">    </p:cNvPr>
           <p:cNvPicPr>
             <a:picLocks noChangeAspect="1"/>
           </p:cNvPicPr>
@@ -38364,7 +38364,7 @@
                 <a:ea typeface="Helvetica" pitchFamily="34" charset="-122"/>
                 <a:cs typeface="Helvetica" pitchFamily="34" charset="-120"/>
               </a:rPr>
-              <a:t>VERIFY</a:t>
+              <a:t>VEEAM</a:t>
             </a:r>
             <a:endParaRPr lang="en-US" dirty="0"/>
           </a:p>
@@ -38397,7 +38397,7 @@
       </p:sp>
       <p:pic>
         <p:nvPicPr>
-          <p:cNvPr id="54" name="Object 53" descr="public/generated/icons/is.virtual-network-interface.png">    </p:cNvPr>
+          <p:cNvPr id="54" name="Object 53" descr="public/generated/icons/66644e80-f35a-11ee-923f-2fe367129617.png">    </p:cNvPr>
           <p:cNvPicPr>
             <a:picLocks noChangeAspect="1"/>
           </p:cNvPicPr>
@@ -38453,7 +38453,7 @@
                 <a:ea typeface="Helvetica" pitchFamily="34" charset="-122"/>
                 <a:cs typeface="Helvetica" pitchFamily="34" charset="-120"/>
               </a:rPr>
-              <a:t>VIRTUAL NETWORK INTERFACE</a:t>
+              <a:t>VERIFY</a:t>
             </a:r>
             <a:endParaRPr lang="en-US" dirty="0"/>
           </a:p>
@@ -38486,7 +38486,7 @@
       </p:sp>
       <p:pic>
         <p:nvPicPr>
-          <p:cNvPr id="57" name="Object 56" descr="public/generated/icons/is.vpc.png">    </p:cNvPr>
+          <p:cNvPr id="57" name="Object 56" descr="public/generated/icons/is.virtual-network-interface.png">    </p:cNvPr>
           <p:cNvPicPr>
             <a:picLocks noChangeAspect="1"/>
           </p:cNvPicPr>
@@ -38542,7 +38542,7 @@
                 <a:ea typeface="Helvetica" pitchFamily="34" charset="-122"/>
                 <a:cs typeface="Helvetica" pitchFamily="34" charset="-120"/>
               </a:rPr>
-              <a:t>VIRTUAL PRIVATE CLOUD</a:t>
+              <a:t>VIRTUAL NETWORK INTERFACE</a:t>
             </a:r>
             <a:endParaRPr lang="en-US" dirty="0"/>
           </a:p>
@@ -38575,7 +38575,7 @@
       </p:sp>
       <p:pic>
         <p:nvPicPr>
-          <p:cNvPr id="60" name="Object 59" descr="public/generated/icons/is.endpoint-gateway.png">    </p:cNvPr>
+          <p:cNvPr id="60" name="Object 59" descr="public/generated/icons/is.vpc.png">    </p:cNvPr>
           <p:cNvPicPr>
             <a:picLocks noChangeAspect="1"/>
           </p:cNvPicPr>
@@ -38631,7 +38631,7 @@
                 <a:ea typeface="Helvetica" pitchFamily="34" charset="-122"/>
                 <a:cs typeface="Helvetica" pitchFamily="34" charset="-120"/>
               </a:rPr>
-              <a:t>VIRTUAL PRIVATE ENDPOINT FOR VPC</a:t>
+              <a:t>VIRTUAL PRIVATE CLOUD</a:t>
             </a:r>
             <a:endParaRPr lang="en-US" dirty="0"/>
           </a:p>
@@ -38664,7 +38664,7 @@
       </p:sp>
       <p:pic>
         <p:nvPicPr>
-          <p:cNvPr id="63" name="Object 62" descr="public/generated/icons/887073fb-ba5b-9407-d2ac-938308d890e4.png">    </p:cNvPr>
+          <p:cNvPr id="63" name="Object 62" descr="public/generated/icons/is.endpoint-gateway.png">    </p:cNvPr>
           <p:cNvPicPr>
             <a:picLocks noChangeAspect="1"/>
           </p:cNvPicPr>
@@ -38720,7 +38720,7 @@
                 <a:ea typeface="Helvetica" pitchFamily="34" charset="-122"/>
                 <a:cs typeface="Helvetica" pitchFamily="34" charset="-120"/>
               </a:rPr>
-              <a:t>VIRTUAL ROUTER APPLIANCE</a:t>
+              <a:t>VIRTUAL PRIVATE ENDPOINT FOR VPC</a:t>
             </a:r>
             <a:endParaRPr lang="en-US" dirty="0"/>
           </a:p>
@@ -38753,7 +38753,7 @@
       </p:sp>
       <p:pic>
         <p:nvPicPr>
-          <p:cNvPr id="66" name="Object 65" descr="public/generated/icons/virtual-server-group.png">    </p:cNvPr>
+          <p:cNvPr id="66" name="Object 65" descr="public/generated/icons/887073fb-ba5b-9407-d2ac-938308d890e4.png">    </p:cNvPr>
           <p:cNvPicPr>
             <a:picLocks noChangeAspect="1"/>
           </p:cNvPicPr>
@@ -38809,7 +38809,7 @@
                 <a:ea typeface="Helvetica" pitchFamily="34" charset="-122"/>
                 <a:cs typeface="Helvetica" pitchFamily="34" charset="-120"/>
               </a:rPr>
-              <a:t>VIRTUAL SERVER FOR CLASSIC</a:t>
+              <a:t>VIRTUAL ROUTER APPLIANCE</a:t>
             </a:r>
             <a:endParaRPr lang="en-US" dirty="0"/>
           </a:p>
@@ -38842,7 +38842,7 @@
       </p:sp>
       <p:pic>
         <p:nvPicPr>
-          <p:cNvPr id="69" name="Object 68" descr="public/generated/icons/is.instance.png">    </p:cNvPr>
+          <p:cNvPr id="69" name="Object 68" descr="public/generated/icons/virtual-server-group.png">    </p:cNvPr>
           <p:cNvPicPr>
             <a:picLocks noChangeAspect="1"/>
           </p:cNvPicPr>
@@ -38898,7 +38898,7 @@
                 <a:ea typeface="Helvetica" pitchFamily="34" charset="-122"/>
                 <a:cs typeface="Helvetica" pitchFamily="34" charset="-120"/>
               </a:rPr>
-              <a:t>VIRTUAL SERVER FOR VPC</a:t>
+              <a:t>VIRTUAL SERVER FOR CLASSIC</a:t>
             </a:r>
             <a:endParaRPr lang="en-US" dirty="0"/>
           </a:p>
@@ -38931,7 +38931,7 @@
       </p:sp>
       <p:pic>
         <p:nvPicPr>
-          <p:cNvPr id="72" name="Object 71" descr="public/generated/icons/15.png">    </p:cNvPr>
+          <p:cNvPr id="72" name="Object 71" descr="public/generated/icons/is.instance.png">    </p:cNvPr>
           <p:cNvPicPr>
             <a:picLocks noChangeAspect="1"/>
           </p:cNvPicPr>
@@ -38987,7 +38987,7 @@
                 <a:ea typeface="Helvetica" pitchFamily="34" charset="-122"/>
                 <a:cs typeface="Helvetica" pitchFamily="34" charset="-120"/>
               </a:rPr>
-              <a:t>VLAN</a:t>
+              <a:t>VIRTUAL SERVER FOR VPC</a:t>
             </a:r>
             <a:endParaRPr lang="en-US" dirty="0"/>
           </a:p>
@@ -39020,7 +39020,7 @@
       </p:sp>
       <p:pic>
         <p:nvPicPr>
-          <p:cNvPr id="75" name="Object 74" descr="public/generated/icons/09f5a6ea-185e-4625-8281-9e8629360a4f.png">    </p:cNvPr>
+          <p:cNvPr id="75" name="Object 74" descr="public/generated/icons/15.png">    </p:cNvPr>
           <p:cNvPicPr>
             <a:picLocks noChangeAspect="1"/>
           </p:cNvPicPr>
@@ -39076,7 +39076,7 @@
                 <a:ea typeface="Helvetica" pitchFamily="34" charset="-122"/>
                 <a:cs typeface="Helvetica" pitchFamily="34" charset="-120"/>
               </a:rPr>
-              <a:t>VMWARE CLOUD MIGRATION SERVICES</a:t>
+              <a:t>VLAN</a:t>
             </a:r>
             <a:endParaRPr lang="en-US" dirty="0"/>
           </a:p>
@@ -39109,7 +39109,7 @@
       </p:sp>
       <p:pic>
         <p:nvPicPr>
-          <p:cNvPr id="78" name="Object 77" descr="public/generated/icons/cf329950-0a3e-11e8-922e-f1366c6e1c83.png">    </p:cNvPr>
+          <p:cNvPr id="78" name="Object 77" descr="public/generated/icons/09f5a6ea-185e-4625-8281-9e8629360a4f.png">    </p:cNvPr>
           <p:cNvPicPr>
             <a:picLocks noChangeAspect="1"/>
           </p:cNvPicPr>
@@ -39165,7 +39165,7 @@
                 <a:ea typeface="Helvetica" pitchFamily="34" charset="-122"/>
                 <a:cs typeface="Helvetica" pitchFamily="34" charset="-120"/>
               </a:rPr>
-              <a:t>VMWARE SOLUTIONS</a:t>
+              <a:t>VMWARE CLOUD MIGRATION SERVICES</a:t>
             </a:r>
             <a:endParaRPr lang="en-US" dirty="0"/>
           </a:p>
@@ -39198,7 +39198,7 @@
       </p:sp>
       <p:pic>
         <p:nvPicPr>
-          <p:cNvPr id="81" name="Object 80" descr="public/generated/icons/cf329950-0a3e-11e8-922e-f1366c6e1c83-vcenterserver.png">    </p:cNvPr>
+          <p:cNvPr id="81" name="Object 80" descr="public/generated/icons/cf329950-0a3e-11e8-922e-f1366c6e1c83.png">    </p:cNvPr>
           <p:cNvPicPr>
             <a:picLocks noChangeAspect="1"/>
           </p:cNvPicPr>
@@ -39254,7 +39254,7 @@
                 <a:ea typeface="Helvetica" pitchFamily="34" charset="-122"/>
                 <a:cs typeface="Helvetica" pitchFamily="34" charset="-120"/>
               </a:rPr>
-              <a:t>VMWARE VCENTER SERVER</a:t>
+              <a:t>VMWARE SOLUTIONS</a:t>
             </a:r>
             <a:endParaRPr lang="en-US" dirty="0"/>
           </a:p>
@@ -39287,7 +39287,7 @@
       </p:sp>
       <p:pic>
         <p:nvPicPr>
-          <p:cNvPr id="84" name="Object 83" descr="public/generated/icons/cf329950-0a3e-11e8-922e-f1366c6e1c83-vsphere.png">    </p:cNvPr>
+          <p:cNvPr id="84" name="Object 83" descr="public/generated/icons/cf329950-0a3e-11e8-922e-f1366c6e1c83-vcenterserver.png">    </p:cNvPr>
           <p:cNvPicPr>
             <a:picLocks noChangeAspect="1"/>
           </p:cNvPicPr>
@@ -39343,7 +39343,7 @@
                 <a:ea typeface="Helvetica" pitchFamily="34" charset="-122"/>
                 <a:cs typeface="Helvetica" pitchFamily="34" charset="-120"/>
               </a:rPr>
-              <a:t>VMWARE VSPHERE</a:t>
+              <a:t>VMWARE VCENTER SERVER</a:t>
             </a:r>
             <a:endParaRPr lang="en-US" dirty="0"/>
           </a:p>
@@ -39376,7 +39376,7 @@
       </p:sp>
       <p:pic>
         <p:nvPicPr>
-          <p:cNvPr id="87" name="Object 86" descr="public/generated/icons/b6670b68-84ca-4a04-b8e8-c567dfeeddde.png">    </p:cNvPr>
+          <p:cNvPr id="87" name="Object 86" descr="public/generated/icons/cf329950-0a3e-11e8-922e-f1366c6e1c83-vsphere.png">    </p:cNvPr>
           <p:cNvPicPr>
             <a:picLocks noChangeAspect="1"/>
           </p:cNvPicPr>
@@ -39432,7 +39432,7 @@
                 <a:ea typeface="Helvetica" pitchFamily="34" charset="-122"/>
                 <a:cs typeface="Helvetica" pitchFamily="34" charset="-120"/>
               </a:rPr>
-              <a:t>VPC COAAS (VPC COST OPTIMIZATION AS A SERVICE)</a:t>
+              <a:t>VMWARE VSPHERE</a:t>
             </a:r>
             <a:endParaRPr lang="en-US" dirty="0"/>
           </a:p>
@@ -39465,7 +39465,7 @@
       </p:sp>
       <p:pic>
         <p:nvPicPr>
-          <p:cNvPr id="90" name="Object 89" descr="public/generated/icons/757254b0-a9a0-11ea-9ff6-17a22eb543c5.png">    </p:cNvPr>
+          <p:cNvPr id="90" name="Object 89" descr="public/generated/icons/b6670b68-84ca-4a04-b8e8-c567dfeeddde.png">    </p:cNvPr>
           <p:cNvPicPr>
             <a:picLocks noChangeAspect="1"/>
           </p:cNvPicPr>
@@ -39521,7 +39521,7 @@
                 <a:ea typeface="Helvetica" pitchFamily="34" charset="-122"/>
                 <a:cs typeface="Helvetica" pitchFamily="34" charset="-120"/>
               </a:rPr>
-              <a:t>VPC+ CLOUD MIGRATION</a:t>
+              <a:t>VPC COAAS (VPC COST OPTIMIZATION AS A SERVICE)</a:t>
             </a:r>
             <a:endParaRPr lang="en-US" dirty="0"/>
           </a:p>
@@ -39554,7 +39554,7 @@
       </p:sp>
       <p:pic>
         <p:nvPicPr>
-          <p:cNvPr id="93" name="Object 92" descr="public/generated/icons/fd1e0240-dd95-11eb-b4a0-db1c9221b8a2.png">    </p:cNvPr>
+          <p:cNvPr id="93" name="Object 92" descr="public/generated/icons/757254b0-a9a0-11ea-9ff6-17a22eb543c5.png">    </p:cNvPr>
           <p:cNvPicPr>
             <a:picLocks noChangeAspect="1"/>
           </p:cNvPicPr>
@@ -39610,7 +39610,7 @@
                 <a:ea typeface="Helvetica" pitchFamily="34" charset="-122"/>
                 <a:cs typeface="Helvetica" pitchFamily="34" charset="-120"/>
               </a:rPr>
-              <a:t>VPC+ DRAAS (VPC+ DISASTER RECOVERY AS A SERVICE)</a:t>
+              <a:t>VPC+ CLOUD MIGRATION</a:t>
             </a:r>
             <a:endParaRPr lang="en-US" dirty="0"/>
           </a:p>
@@ -39643,7 +39643,7 @@
       </p:sp>
       <p:pic>
         <p:nvPicPr>
-          <p:cNvPr id="96" name="Object 95" descr="public/generated/icons/is.vpn.png">    </p:cNvPr>
+          <p:cNvPr id="96" name="Object 95" descr="public/generated/icons/fd1e0240-dd95-11eb-b4a0-db1c9221b8a2.png">    </p:cNvPr>
           <p:cNvPicPr>
             <a:picLocks noChangeAspect="1"/>
           </p:cNvPicPr>
@@ -39699,7 +39699,7 @@
                 <a:ea typeface="Helvetica" pitchFamily="34" charset="-122"/>
                 <a:cs typeface="Helvetica" pitchFamily="34" charset="-120"/>
               </a:rPr>
-              <a:t>VPN FOR VPC</a:t>
+              <a:t>VPC+ DRAAS (VPC+ DISASTER RECOVERY AS A SERVICE)</a:t>
             </a:r>
             <a:endParaRPr lang="en-US" dirty="0"/>
           </a:p>
@@ -39732,7 +39732,7 @@
       </p:sp>
       <p:pic>
         <p:nvPicPr>
-          <p:cNvPr id="99" name="Object 98" descr="public/generated/icons/cf329950-0a3e-11e8-922e-f1366c6e1c83-vrops.png">    </p:cNvPr>
+          <p:cNvPr id="99" name="Object 98" descr="public/generated/icons/is.vpn.png">    </p:cNvPr>
           <p:cNvPicPr>
             <a:picLocks noChangeAspect="1"/>
           </p:cNvPicPr>
@@ -39788,7 +39788,7 @@
                 <a:ea typeface="Helvetica" pitchFamily="34" charset="-122"/>
                 <a:cs typeface="Helvetica" pitchFamily="34" charset="-120"/>
               </a:rPr>
-              <a:t>VREALIZE OPERATIONS AND LOG INSIGHT</a:t>
+              <a:t>VPN FOR VPC</a:t>
             </a:r>
             <a:endParaRPr lang="en-US" dirty="0"/>
           </a:p>
@@ -39821,7 +39821,7 @@
       </p:sp>
       <p:pic>
         <p:nvPicPr>
-          <p:cNvPr id="102" name="Object 101" descr="public/generated/icons/76b7bf22-b443-47db-b3db-066ba2988f47.png">    </p:cNvPr>
+          <p:cNvPr id="102" name="Object 101" descr="public/generated/icons/cf329950-0a3e-11e8-922e-f1366c6e1c83-vrops.png">    </p:cNvPr>
           <p:cNvPicPr>
             <a:picLocks noChangeAspect="1"/>
           </p:cNvPicPr>
@@ -39877,7 +39877,7 @@
                 <a:ea typeface="Helvetica" pitchFamily="34" charset="-122"/>
                 <a:cs typeface="Helvetica" pitchFamily="34" charset="-120"/>
               </a:rPr>
-              <a:t>WATSON DISCOVERY</a:t>
+              <a:t>VREALIZE OPERATIONS AND LOG INSIGHT</a:t>
             </a:r>
             <a:endParaRPr lang="en-US" dirty="0"/>
           </a:p>
@@ -39910,7 +39910,7 @@
       </p:sp>
       <p:pic>
         <p:nvPicPr>
-          <p:cNvPr id="105" name="Object 104" descr="public/generated/icons/12fbfff4-12c7-ccd0-80e6-603e8607468a.png">    </p:cNvPr>
+          <p:cNvPr id="105" name="Object 104" descr="public/generated/icons/76b7bf22-b443-47db-b3db-066ba2988f47.png">    </p:cNvPr>
           <p:cNvPicPr>
             <a:picLocks noChangeAspect="1"/>
           </p:cNvPicPr>
@@ -39966,7 +39966,7 @@
                 <a:ea typeface="Helvetica" pitchFamily="34" charset="-122"/>
                 <a:cs typeface="Helvetica" pitchFamily="34" charset="-120"/>
               </a:rPr>
-              <a:t>WATSONX</a:t>
+              <a:t>WATSON DISCOVERY</a:t>
             </a:r>
             <a:endParaRPr lang="en-US" dirty="0"/>
           </a:p>
@@ -39999,7 +39999,7 @@
       </p:sp>
       <p:pic>
         <p:nvPicPr>
-          <p:cNvPr id="108" name="Object 107" descr="public/generated/icons/7045626d-55e3-4418-be11-683a26dbc1e5.png">    </p:cNvPr>
+          <p:cNvPr id="108" name="Object 107" descr="public/generated/icons/12fbfff4-12c7-ccd0-80e6-603e8607468a.png">    </p:cNvPr>
           <p:cNvPicPr>
             <a:picLocks noChangeAspect="1"/>
           </p:cNvPicPr>
@@ -40055,7 +40055,7 @@
                 <a:ea typeface="Helvetica" pitchFamily="34" charset="-122"/>
                 <a:cs typeface="Helvetica" pitchFamily="34" charset="-120"/>
               </a:rPr>
-              <a:t>WATSONX ASSISTANT</a:t>
+              <a:t>WATSONX</a:t>
             </a:r>
             <a:endParaRPr lang="en-US" dirty="0"/>
           </a:p>
@@ -40121,7 +40121,7 @@
       </p:sp>
       <p:pic>
         <p:nvPicPr>
-          <p:cNvPr id="3" name="Object 2" descr="public/generated/icons/11530fa0-1776-11ee-93f6-1d4066e6a409.png">    </p:cNvPr>
+          <p:cNvPr id="3" name="Object 2" descr="public/generated/icons/7045626d-55e3-4418-be11-683a26dbc1e5.png">    </p:cNvPr>
           <p:cNvPicPr>
             <a:picLocks noChangeAspect="1"/>
           </p:cNvPicPr>
@@ -40177,7 +40177,7 @@
                 <a:ea typeface="Helvetica" pitchFamily="34" charset="-122"/>
                 <a:cs typeface="Helvetica" pitchFamily="34" charset="-120"/>
               </a:rPr>
-              <a:t>WATSONX CODE ASSISTANT</a:t>
+              <a:t>WATSONX ASSISTANT</a:t>
             </a:r>
             <a:endParaRPr lang="en-US" dirty="0"/>
           </a:p>
@@ -40210,7 +40210,7 @@
       </p:sp>
       <p:pic>
         <p:nvPicPr>
-          <p:cNvPr id="6" name="Object 5" descr="public/generated/icons/b69f78c0-11d7-11ef-9bdf-c92eb40d1838.png">    </p:cNvPr>
+          <p:cNvPr id="6" name="Object 5" descr="public/generated/icons/11530fa0-1776-11ee-93f6-1d4066e6a409.png">    </p:cNvPr>
           <p:cNvPicPr>
             <a:picLocks noChangeAspect="1"/>
           </p:cNvPicPr>
@@ -40266,7 +40266,7 @@
                 <a:ea typeface="Helvetica" pitchFamily="34" charset="-122"/>
                 <a:cs typeface="Helvetica" pitchFamily="34" charset="-120"/>
               </a:rPr>
-              <a:t>WATSONX ORCHESTRATE</a:t>
+              <a:t>WATSONX CODE ASSISTANT</a:t>
             </a:r>
             <a:endParaRPr lang="en-US" dirty="0"/>
           </a:p>
@@ -40299,7 +40299,7 @@
       </p:sp>
       <p:pic>
         <p:nvPicPr>
-          <p:cNvPr id="9" name="Object 8" descr="public/generated/icons/51c53b72-918f-4869-b834-2d99eb28422a.png">    </p:cNvPr>
+          <p:cNvPr id="9" name="Object 8" descr="public/generated/icons/b69f78c0-11d7-11ef-9bdf-c92eb40d1838.png">    </p:cNvPr>
           <p:cNvPicPr>
             <a:picLocks noChangeAspect="1"/>
           </p:cNvPicPr>
@@ -40355,7 +40355,7 @@
                 <a:ea typeface="Helvetica" pitchFamily="34" charset="-122"/>
                 <a:cs typeface="Helvetica" pitchFamily="34" charset="-120"/>
               </a:rPr>
-              <a:t>WATSONX.AI RUNTIME</a:t>
+              <a:t>WATSONX ORCHESTRATE</a:t>
             </a:r>
             <a:endParaRPr lang="en-US" dirty="0"/>
           </a:p>
@@ -40388,7 +40388,7 @@
       </p:sp>
       <p:pic>
         <p:nvPicPr>
-          <p:cNvPr id="12" name="Object 11" descr="public/generated/icons/39ba9d4c-b1c5-4cc3-a163-38b580121e01.png">    </p:cNvPr>
+          <p:cNvPr id="12" name="Object 11" descr="public/generated/icons/51c53b72-918f-4869-b834-2d99eb28422a.png">    </p:cNvPr>
           <p:cNvPicPr>
             <a:picLocks noChangeAspect="1"/>
           </p:cNvPicPr>
@@ -40444,7 +40444,7 @@
                 <a:ea typeface="Helvetica" pitchFamily="34" charset="-122"/>
                 <a:cs typeface="Helvetica" pitchFamily="34" charset="-120"/>
               </a:rPr>
-              <a:t>WATSONX.AI STUDIO</a:t>
+              <a:t>WATSONX.AI RUNTIME</a:t>
             </a:r>
             <a:endParaRPr lang="en-US" dirty="0"/>
           </a:p>
@@ -40477,7 +40477,7 @@
       </p:sp>
       <p:pic>
         <p:nvPicPr>
-          <p:cNvPr id="15" name="Object 14" descr="public/generated/icons/43834340-4a6d-11ed-97d2-959039ad2a2e.png">    </p:cNvPr>
+          <p:cNvPr id="15" name="Object 14" descr="public/generated/icons/39ba9d4c-b1c5-4cc3-a163-38b580121e01.png">    </p:cNvPr>
           <p:cNvPicPr>
             <a:picLocks noChangeAspect="1"/>
           </p:cNvPicPr>
@@ -40533,7 +40533,7 @@
                 <a:ea typeface="Helvetica" pitchFamily="34" charset="-122"/>
                 <a:cs typeface="Helvetica" pitchFamily="34" charset="-120"/>
               </a:rPr>
-              <a:t>WATSONX.DATA</a:t>
+              <a:t>WATSONX.AI STUDIO</a:t>
             </a:r>
             <a:endParaRPr lang="en-US" dirty="0"/>
           </a:p>
@@ -40566,7 +40566,7 @@
       </p:sp>
       <p:pic>
         <p:nvPicPr>
-          <p:cNvPr id="18" name="Object 17" descr="public/generated/icons/2ad019f3-0fd6-4c25-966d-f3952481a870.png">    </p:cNvPr>
+          <p:cNvPr id="18" name="Object 17" descr="public/generated/icons/43834340-4a6d-11ed-97d2-959039ad2a2e.png">    </p:cNvPr>
           <p:cNvPicPr>
             <a:picLocks noChangeAspect="1"/>
           </p:cNvPicPr>
@@ -40622,7 +40622,7 @@
                 <a:ea typeface="Helvetica" pitchFamily="34" charset="-122"/>
                 <a:cs typeface="Helvetica" pitchFamily="34" charset="-120"/>
               </a:rPr>
-              <a:t>WATSONX.GOVERNANCE</a:t>
+              <a:t>WATSONX.DATA</a:t>
             </a:r>
             <a:endParaRPr lang="en-US" dirty="0"/>
           </a:p>
@@ -40655,7 +40655,7 @@
       </p:sp>
       <p:pic>
         <p:nvPicPr>
-          <p:cNvPr id="21" name="Object 20" descr="public/generated/icons/cf329950-0a3e-11e8-922e-f1366c6e1c83-zerto.png">    </p:cNvPr>
+          <p:cNvPr id="21" name="Object 20" descr="public/generated/icons/2ad019f3-0fd6-4c25-966d-f3952481a870.png">    </p:cNvPr>
           <p:cNvPicPr>
             <a:picLocks noChangeAspect="1"/>
           </p:cNvPicPr>
@@ -40686,6 +40686,95 @@
         <p:spPr>
           <a:xfrm>
             <a:off x="5669280" y="777240"/>
+            <a:ext cx="640080" cy="274320"/>
+          </a:xfrm>
+          <a:prstGeom prst="rect">
+            <a:avLst/>
+          </a:prstGeom>
+          <a:noFill/>
+        </p:spPr>
+        <p:txBody>
+          <a:bodyPr wrap="square" rtlCol="0" anchor="t" bIns="0" lIns="0" rIns="0" tIns="0">
+            <a:spAutoFit/>
+          </a:bodyPr>
+          <a:lstStyle/>
+          <a:p>
+            <a:pPr algn="ctr">
+              <a:buNone/>
+            </a:pPr>
+            <a:r>
+              <a:rPr lang="en-US" b="1" sz="600" dirty="0" smtClean="0">
+                <a:solidFill>
+                  <a:srgbClr val="646365"/>
+                </a:solidFill>
+                <a:latin typeface="Helvetica" pitchFamily="34" charset="0"/>
+                <a:ea typeface="Helvetica" pitchFamily="34" charset="-122"/>
+                <a:cs typeface="Helvetica" pitchFamily="34" charset="-120"/>
+              </a:rPr>
+              <a:t>WATSONX.GOVERNANCE</a:t>
+            </a:r>
+            <a:endParaRPr lang="en-US" dirty="0"/>
+          </a:p>
+        </p:txBody>
+      </p:sp>
+      <p:sp>
+        <p:nvSpPr>
+          <p:cNvPr id="23" name="Object 22"/>
+          <p:cNvSpPr/>
+          <p:nvPr/>
+        </p:nvSpPr>
+        <p:spPr>
+          <a:xfrm>
+            <a:off x="6675120" y="274320"/>
+            <a:ext cx="457200" cy="457200"/>
+          </a:xfrm>
+          <a:prstGeom prst="ellipse">
+            <a:avLst/>
+          </a:prstGeom>
+          <a:solidFill>
+            <a:srgbClr val="FFFFFF"/>
+          </a:solidFill>
+          <a:ln w="19050">
+            <a:solidFill>
+              <a:srgbClr val="646365"/>
+            </a:solidFill>
+            <a:prstDash val="solid"/>
+          </a:ln>
+        </p:spPr>
+      </p:sp>
+      <p:pic>
+        <p:nvPicPr>
+          <p:cNvPr id="24" name="Object 23" descr="public/generated/icons/cf329950-0a3e-11e8-922e-f1366c6e1c83-zerto.png">    </p:cNvPr>
+          <p:cNvPicPr>
+            <a:picLocks noChangeAspect="1"/>
+          </p:cNvPicPr>
+          <p:nvPr/>
+        </p:nvPicPr>
+        <p:blipFill>
+          <a:blip r:embed="rId8"/>
+          <a:stretch>
+            <a:fillRect/>
+          </a:stretch>
+        </p:blipFill>
+        <p:spPr>
+          <a:xfrm>
+            <a:off x="6766560" y="365760"/>
+            <a:ext cx="274320" cy="274320"/>
+          </a:xfrm>
+          <a:prstGeom prst="rect">
+            <a:avLst/>
+          </a:prstGeom>
+        </p:spPr>
+      </p:pic>
+      <p:sp>
+        <p:nvSpPr>
+          <p:cNvPr id="25" name="Object 24"/>
+          <p:cNvSpPr/>
+          <p:nvPr/>
+        </p:nvSpPr>
+        <p:spPr>
+          <a:xfrm>
+            <a:off x="6583680" y="777240"/>
             <a:ext cx="640080" cy="274320"/>
           </a:xfrm>
           <a:prstGeom prst="rect">

--- a/mycatalog-architecture-diagram-template.pptx
+++ b/mycatalog-architecture-diagram-template.pptx
@@ -524,7 +524,7 @@
           <a:p>
             <a:r>
               <a:rPr lang="en-US" dirty="0" smtClean="0"/>
-              <a:t>Generated on Sun Apr 06 2025 07:04:28 GMT+0000 (Coordinated Universal Time)</a:t>
+              <a:t>Generated on Sun Apr 13 2025 07:06:08 GMT+0000 (Coordinated Universal Time)</a:t>
             </a:r>
             <a:endParaRPr lang="en-US" dirty="0"/>
           </a:p>
@@ -20699,7 +20699,7 @@
       </p:sp>
       <p:pic>
         <p:nvPicPr>
-          <p:cNvPr id="4" name="Object 3" descr="public/generated/icons/c3c7f095-67da-42e6-b982-46d0e6e79f84.png">    </p:cNvPr>
+          <p:cNvPr id="4" name="Object 3" descr="public/generated/icons/586d04e3-804f-4d0c-b9d3-e0e7279398b4.png">    </p:cNvPr>
           <p:cNvPicPr>
             <a:picLocks noChangeAspect="1"/>
           </p:cNvPicPr>
@@ -20755,7 +20755,7 @@
                 <a:ea typeface="Helvetica" pitchFamily="34" charset="-122"/>
                 <a:cs typeface="Helvetica" pitchFamily="34" charset="-120"/>
               </a:rPr>
-              <a:t>1FRESCHE MANAGED SERVICES</a:t>
+              <a:t>AGILECDN</a:t>
             </a:r>
             <a:endParaRPr lang="en-US" dirty="0"/>
           </a:p>
@@ -20788,7 +20788,7 @@
       </p:sp>
       <p:pic>
         <p:nvPicPr>
-          <p:cNvPr id="7" name="Object 6" descr="public/generated/icons/900fb23f-fe9d-4cf8-9bb2-a82d87dede0e.png">    </p:cNvPr>
+          <p:cNvPr id="7" name="Object 6" descr="public/generated/icons/7586ae5b-6f22-4e98-bd3d-a7b47e6844e7.png">    </p:cNvPr>
           <p:cNvPicPr>
             <a:picLocks noChangeAspect="1"/>
           </p:cNvPicPr>
@@ -20844,7 +20844,7 @@
                 <a:ea typeface="Helvetica" pitchFamily="34" charset="-122"/>
                 <a:cs typeface="Helvetica" pitchFamily="34" charset="-120"/>
               </a:rPr>
-              <a:t>1FRESCHE TOTALOPS360 - COMPREHENSIVE MANAGED SERVICES </a:t>
+              <a:t>AISOLVED - SEEKERS OF KNOWLEDGE MEET AI SOLUTIONS</a:t>
             </a:r>
             <a:endParaRPr lang="en-US" dirty="0"/>
           </a:p>
@@ -20877,7 +20877,7 @@
       </p:sp>
       <p:pic>
         <p:nvPicPr>
-          <p:cNvPr id="10" name="Object 9" descr="public/generated/icons/586d04e3-804f-4d0c-b9d3-e0e7279398b4.png">    </p:cNvPr>
+          <p:cNvPr id="10" name="Object 9" descr="public/generated/icons/515d67c9-df89-4ef7-84cc-52bb739e15a7.png">    </p:cNvPr>
           <p:cNvPicPr>
             <a:picLocks noChangeAspect="1"/>
           </p:cNvPicPr>
@@ -20933,7 +20933,7 @@
                 <a:ea typeface="Helvetica" pitchFamily="34" charset="-122"/>
                 <a:cs typeface="Helvetica" pitchFamily="34" charset="-120"/>
               </a:rPr>
-              <a:t>AGILECDN</a:t>
+              <a:t>AKASIA FINOPS MODELER</a:t>
             </a:r>
             <a:endParaRPr lang="en-US" dirty="0"/>
           </a:p>
@@ -20966,7 +20966,7 @@
       </p:sp>
       <p:pic>
         <p:nvPicPr>
-          <p:cNvPr id="13" name="Object 12" descr="public/generated/icons/7586ae5b-6f22-4e98-bd3d-a7b47e6844e7.png">    </p:cNvPr>
+          <p:cNvPr id="13" name="Object 12" descr="public/generated/icons/18de078f-e6b0-4b47-a7c4-0ed2f93f3e1d.png">    </p:cNvPr>
           <p:cNvPicPr>
             <a:picLocks noChangeAspect="1"/>
           </p:cNvPicPr>
@@ -21022,7 +21022,7 @@
                 <a:ea typeface="Helvetica" pitchFamily="34" charset="-122"/>
                 <a:cs typeface="Helvetica" pitchFamily="34" charset="-120"/>
               </a:rPr>
-              <a:t>AISOLVED - SEEKERS OF KNOWLEDGE MEET AI SOLUTIONS</a:t>
+              <a:t>ANALYTICS ENGINE</a:t>
             </a:r>
             <a:endParaRPr lang="en-US" dirty="0"/>
           </a:p>
@@ -21055,7 +21055,7 @@
       </p:sp>
       <p:pic>
         <p:nvPicPr>
-          <p:cNvPr id="16" name="Object 15" descr="public/generated/icons/515d67c9-df89-4ef7-84cc-52bb739e15a7.png">    </p:cNvPr>
+          <p:cNvPr id="16" name="Object 15" descr="public/generated/icons/b77c8f80-f155-11eb-8766-1f68cf60a2c4.png">    </p:cNvPr>
           <p:cNvPicPr>
             <a:picLocks noChangeAspect="1"/>
           </p:cNvPicPr>
@@ -21111,7 +21111,7 @@
                 <a:ea typeface="Helvetica" pitchFamily="34" charset="-122"/>
                 <a:cs typeface="Helvetica" pitchFamily="34" charset="-120"/>
               </a:rPr>
-              <a:t>AKASIA FINOPS MODELER</a:t>
+              <a:t>ANONTECH VIZIVAULT PLATFORM</a:t>
             </a:r>
             <a:endParaRPr lang="en-US" dirty="0"/>
           </a:p>
@@ -21144,7 +21144,7 @@
       </p:sp>
       <p:pic>
         <p:nvPicPr>
-          <p:cNvPr id="19" name="Object 18" descr="public/generated/icons/18de078f-e6b0-4b47-a7c4-0ed2f93f3e1d.png">    </p:cNvPr>
+          <p:cNvPr id="19" name="Object 18" descr="public/generated/icons/8c437b59-5f6a-460c-b11a-5b7cabf058cb.png">    </p:cNvPr>
           <p:cNvPicPr>
             <a:picLocks noChangeAspect="1"/>
           </p:cNvPicPr>
@@ -21200,7 +21200,7 @@
                 <a:ea typeface="Helvetica" pitchFamily="34" charset="-122"/>
                 <a:cs typeface="Helvetica" pitchFamily="34" charset="-120"/>
               </a:rPr>
-              <a:t>ANALYTICS ENGINE</a:t>
+              <a:t>ANYCLOUD BACKUP FOR 365</a:t>
             </a:r>
             <a:endParaRPr lang="en-US" dirty="0"/>
           </a:p>
@@ -21233,7 +21233,7 @@
       </p:sp>
       <p:pic>
         <p:nvPicPr>
-          <p:cNvPr id="22" name="Object 21" descr="public/generated/icons/b77c8f80-f155-11eb-8766-1f68cf60a2c4.png">    </p:cNvPr>
+          <p:cNvPr id="22" name="Object 21" descr="public/generated/icons/api-connect.png">    </p:cNvPr>
           <p:cNvPicPr>
             <a:picLocks noChangeAspect="1"/>
           </p:cNvPicPr>
@@ -21289,7 +21289,7 @@
                 <a:ea typeface="Helvetica" pitchFamily="34" charset="-122"/>
                 <a:cs typeface="Helvetica" pitchFamily="34" charset="-120"/>
               </a:rPr>
-              <a:t>ANONTECH VIZIVAULT PLATFORM</a:t>
+              <a:t>API CONNECT</a:t>
             </a:r>
             <a:endParaRPr lang="en-US" dirty="0"/>
           </a:p>
@@ -21322,7 +21322,7 @@
       </p:sp>
       <p:pic>
         <p:nvPicPr>
-          <p:cNvPr id="25" name="Object 24" descr="public/generated/icons/8c437b59-5f6a-460c-b11a-5b7cabf058cb.png">    </p:cNvPr>
+          <p:cNvPr id="25" name="Object 24" descr="public/generated/icons/09edee6c-6ec8-4bc9-823a-3d8d193b7bd9.png">    </p:cNvPr>
           <p:cNvPicPr>
             <a:picLocks noChangeAspect="1"/>
           </p:cNvPicPr>
@@ -21378,7 +21378,7 @@
                 <a:ea typeface="Helvetica" pitchFamily="34" charset="-122"/>
                 <a:cs typeface="Helvetica" pitchFamily="34" charset="-120"/>
               </a:rPr>
-              <a:t>ANYCLOUD BACKUP FOR 365</a:t>
+              <a:t>API-BRIDGE FOR POWERVS</a:t>
             </a:r>
             <a:endParaRPr lang="en-US" dirty="0"/>
           </a:p>
@@ -21411,7 +21411,7 @@
       </p:sp>
       <p:pic>
         <p:nvPicPr>
-          <p:cNvPr id="28" name="Object 27" descr="public/generated/icons/api-connect.png">    </p:cNvPr>
+          <p:cNvPr id="28" name="Object 27" descr="public/generated/icons/apprapp-d6aece47-d840-45b0-8ab9-ad15354deeea.png">    </p:cNvPr>
           <p:cNvPicPr>
             <a:picLocks noChangeAspect="1"/>
           </p:cNvPicPr>
@@ -21467,7 +21467,7 @@
                 <a:ea typeface="Helvetica" pitchFamily="34" charset="-122"/>
                 <a:cs typeface="Helvetica" pitchFamily="34" charset="-120"/>
               </a:rPr>
-              <a:t>API CONNECT</a:t>
+              <a:t>APP CONFIGURATION</a:t>
             </a:r>
             <a:endParaRPr lang="en-US" dirty="0"/>
           </a:p>
@@ -21500,7 +21500,7 @@
       </p:sp>
       <p:pic>
         <p:nvPicPr>
-          <p:cNvPr id="31" name="Object 30" descr="public/generated/icons/09edee6c-6ec8-4bc9-823a-3d8d193b7bd9.png">    </p:cNvPr>
+          <p:cNvPr id="31" name="Object 30" descr="public/generated/icons/AdvancedMobileAccess-d6aece47-d840-45b0-8ab9-ad15354deeea.png">    </p:cNvPr>
           <p:cNvPicPr>
             <a:picLocks noChangeAspect="1"/>
           </p:cNvPicPr>
@@ -21556,7 +21556,7 @@
                 <a:ea typeface="Helvetica" pitchFamily="34" charset="-122"/>
                 <a:cs typeface="Helvetica" pitchFamily="34" charset="-120"/>
               </a:rPr>
-              <a:t>API-BRIDGE FOR POWERVS</a:t>
+              <a:t>APP ID</a:t>
             </a:r>
             <a:endParaRPr lang="en-US" dirty="0"/>
           </a:p>
@@ -21589,7 +21589,7 @@
       </p:sp>
       <p:pic>
         <p:nvPicPr>
-          <p:cNvPr id="34" name="Object 33" descr="public/generated/icons/apprapp-d6aece47-d840-45b0-8ab9-ad15354deeea.png">    </p:cNvPr>
+          <p:cNvPr id="34" name="Object 33" descr="public/generated/icons/is.instance-group.png">    </p:cNvPr>
           <p:cNvPicPr>
             <a:picLocks noChangeAspect="1"/>
           </p:cNvPicPr>
@@ -21645,7 +21645,7 @@
                 <a:ea typeface="Helvetica" pitchFamily="34" charset="-122"/>
                 <a:cs typeface="Helvetica" pitchFamily="34" charset="-120"/>
               </a:rPr>
-              <a:t>APP CONFIGURATION</a:t>
+              <a:t>AUTO SCALE FOR VPC</a:t>
             </a:r>
             <a:endParaRPr lang="en-US" dirty="0"/>
           </a:p>
@@ -21678,7 +21678,7 @@
       </p:sp>
       <p:pic>
         <p:nvPicPr>
-          <p:cNvPr id="37" name="Object 36" descr="public/generated/icons/AdvancedMobileAccess-d6aece47-d840-45b0-8ab9-ad15354deeea.png">    </p:cNvPr>
+          <p:cNvPr id="37" name="Object 36" descr="public/generated/icons/1.png">    </p:cNvPr>
           <p:cNvPicPr>
             <a:picLocks noChangeAspect="1"/>
           </p:cNvPicPr>
@@ -21734,7 +21734,7 @@
                 <a:ea typeface="Helvetica" pitchFamily="34" charset="-122"/>
                 <a:cs typeface="Helvetica" pitchFamily="34" charset="-120"/>
               </a:rPr>
-              <a:t>APP ID</a:t>
+              <a:t>BARE METAL SERVER FOR CLASSIC</a:t>
             </a:r>
             <a:endParaRPr lang="en-US" dirty="0"/>
           </a:p>
@@ -21767,7 +21767,7 @@
       </p:sp>
       <p:pic>
         <p:nvPicPr>
-          <p:cNvPr id="40" name="Object 39" descr="public/generated/icons/is.instance-group.png">    </p:cNvPr>
+          <p:cNvPr id="40" name="Object 39" descr="public/generated/icons/is.bare-metal-server.png">    </p:cNvPr>
           <p:cNvPicPr>
             <a:picLocks noChangeAspect="1"/>
           </p:cNvPicPr>
@@ -21823,7 +21823,7 @@
                 <a:ea typeface="Helvetica" pitchFamily="34" charset="-122"/>
                 <a:cs typeface="Helvetica" pitchFamily="34" charset="-120"/>
               </a:rPr>
-              <a:t>AUTO SCALE FOR VPC</a:t>
+              <a:t>BARE METAL SERVERS FOR VPC</a:t>
             </a:r>
             <a:endParaRPr lang="en-US" dirty="0"/>
           </a:p>
@@ -21856,7 +21856,7 @@
       </p:sp>
       <p:pic>
         <p:nvPicPr>
-          <p:cNvPr id="43" name="Object 42" descr="public/generated/icons/1.png">    </p:cNvPr>
+          <p:cNvPr id="43" name="Object 42" descr="public/generated/icons/ee700ab3-6951-4c68-b541-a177f78eed53.png">    </p:cNvPr>
           <p:cNvPicPr>
             <a:picLocks noChangeAspect="1"/>
           </p:cNvPicPr>
@@ -21912,7 +21912,7 @@
                 <a:ea typeface="Helvetica" pitchFamily="34" charset="-122"/>
                 <a:cs typeface="Helvetica" pitchFamily="34" charset="-120"/>
               </a:rPr>
-              <a:t>BARE METAL SERVER FOR CLASSIC</a:t>
+              <a:t>BESPOKEN AUTOMATED TESTING FOR IVR AND CHAT</a:t>
             </a:r>
             <a:endParaRPr lang="en-US" dirty="0"/>
           </a:p>
@@ -21945,7 +21945,7 @@
       </p:sp>
       <p:pic>
         <p:nvPicPr>
-          <p:cNvPr id="46" name="Object 45" descr="public/generated/icons/is.bare-metal-server.png">    </p:cNvPr>
+          <p:cNvPr id="46" name="Object 45" descr="public/generated/icons/block-storage-group.png">    </p:cNvPr>
           <p:cNvPicPr>
             <a:picLocks noChangeAspect="1"/>
           </p:cNvPicPr>
@@ -22001,7 +22001,7 @@
                 <a:ea typeface="Helvetica" pitchFamily="34" charset="-122"/>
                 <a:cs typeface="Helvetica" pitchFamily="34" charset="-120"/>
               </a:rPr>
-              <a:t>BARE METAL SERVERS FOR VPC</a:t>
+              <a:t>BLOCK STORAGE FOR CLASSIC</a:t>
             </a:r>
             <a:endParaRPr lang="en-US" dirty="0"/>
           </a:p>
@@ -22034,7 +22034,7 @@
       </p:sp>
       <p:pic>
         <p:nvPicPr>
-          <p:cNvPr id="49" name="Object 48" descr="public/generated/icons/ee700ab3-6951-4c68-b541-a177f78eed53.png">    </p:cNvPr>
+          <p:cNvPr id="49" name="Object 48" descr="public/generated/icons/is.volume.png">    </p:cNvPr>
           <p:cNvPicPr>
             <a:picLocks noChangeAspect="1"/>
           </p:cNvPicPr>
@@ -22090,7 +22090,7 @@
                 <a:ea typeface="Helvetica" pitchFamily="34" charset="-122"/>
                 <a:cs typeface="Helvetica" pitchFamily="34" charset="-120"/>
               </a:rPr>
-              <a:t>BESPOKEN AUTOMATED TESTING FOR IVR AND CHAT</a:t>
+              <a:t>BLOCK STORAGE FOR VPC</a:t>
             </a:r>
             <a:endParaRPr lang="en-US" dirty="0"/>
           </a:p>
@@ -22123,7 +22123,7 @@
       </p:sp>
       <p:pic>
         <p:nvPicPr>
-          <p:cNvPr id="52" name="Object 51" descr="public/generated/icons/block-storage-group.png">    </p:cNvPr>
+          <p:cNvPr id="52" name="Object 51" descr="public/generated/icons/is.snapshot.png">    </p:cNvPr>
           <p:cNvPicPr>
             <a:picLocks noChangeAspect="1"/>
           </p:cNvPicPr>
@@ -22179,7 +22179,7 @@
                 <a:ea typeface="Helvetica" pitchFamily="34" charset="-122"/>
                 <a:cs typeface="Helvetica" pitchFamily="34" charset="-120"/>
               </a:rPr>
-              <a:t>BLOCK STORAGE FOR CLASSIC</a:t>
+              <a:t>BLOCK STORAGE SNAPSHOTS FOR VPC</a:t>
             </a:r>
             <a:endParaRPr lang="en-US" dirty="0"/>
           </a:p>
@@ -22212,7 +22212,7 @@
       </p:sp>
       <p:pic>
         <p:nvPicPr>
-          <p:cNvPr id="55" name="Object 54" descr="public/generated/icons/is.volume.png">    </p:cNvPr>
+          <p:cNvPr id="55" name="Object 54" descr="public/generated/icons/e687e558-849d-40cc-8043-cd8071f659e9.png">    </p:cNvPr>
           <p:cNvPicPr>
             <a:picLocks noChangeAspect="1"/>
           </p:cNvPicPr>
@@ -22268,7 +22268,7 @@
                 <a:ea typeface="Helvetica" pitchFamily="34" charset="-122"/>
                 <a:cs typeface="Helvetica" pitchFamily="34" charset="-120"/>
               </a:rPr>
-              <a:t>BLOCK STORAGE FOR VPC</a:t>
+              <a:t>BUS4I SYSTEM COPY - MIGRATE 23 FOR POWER I</a:t>
             </a:r>
             <a:endParaRPr lang="en-US" dirty="0"/>
           </a:p>
@@ -22301,7 +22301,7 @@
       </p:sp>
       <p:pic>
         <p:nvPicPr>
-          <p:cNvPr id="58" name="Object 57" descr="public/generated/icons/is.snapshot.png">    </p:cNvPr>
+          <p:cNvPr id="58" name="Object 57" descr="public/generated/icons/cf329950-0a3e-11e8-922e-f1366c6e1c83-caveonix.png">    </p:cNvPr>
           <p:cNvPicPr>
             <a:picLocks noChangeAspect="1"/>
           </p:cNvPicPr>
@@ -22357,7 +22357,7 @@
                 <a:ea typeface="Helvetica" pitchFamily="34" charset="-122"/>
                 <a:cs typeface="Helvetica" pitchFamily="34" charset="-120"/>
               </a:rPr>
-              <a:t>BLOCK STORAGE SNAPSHOTS FOR VPC</a:t>
+              <a:t>CAVEONIX RISKFORESIGHT</a:t>
             </a:r>
             <a:endParaRPr lang="en-US" dirty="0"/>
           </a:p>
@@ -22390,7 +22390,7 @@
       </p:sp>
       <p:pic>
         <p:nvPicPr>
-          <p:cNvPr id="61" name="Object 60" descr="public/generated/icons/e687e558-849d-40cc-8043-cd8071f659e9.png">    </p:cNvPr>
+          <p:cNvPr id="61" name="Object 60" descr="public/generated/icons/5b8aa656-9da6-4683-a21b-7d3d45361d94.png">    </p:cNvPr>
           <p:cNvPicPr>
             <a:picLocks noChangeAspect="1"/>
           </p:cNvPicPr>
@@ -22446,7 +22446,7 @@
                 <a:ea typeface="Helvetica" pitchFamily="34" charset="-122"/>
                 <a:cs typeface="Helvetica" pitchFamily="34" charset="-120"/>
               </a:rPr>
-              <a:t>BUS4I SYSTEM COPY - MIGRATE 23 FOR POWER I</a:t>
+              <a:t>CHECK-A-ROO</a:t>
             </a:r>
             <a:endParaRPr lang="en-US" dirty="0"/>
           </a:p>
@@ -22479,7 +22479,7 @@
       </p:sp>
       <p:pic>
         <p:nvPicPr>
-          <p:cNvPr id="64" name="Object 63" descr="public/generated/icons/cf329950-0a3e-11e8-922e-f1366c6e1c83-caveonix.png">    </p:cNvPr>
+          <p:cNvPr id="64" name="Object 63" descr="public/generated/icons/0a42129b-9839-42b7-90c7-7f3adb435379.png">    </p:cNvPr>
           <p:cNvPicPr>
             <a:picLocks noChangeAspect="1"/>
           </p:cNvPicPr>
@@ -22535,7 +22535,7 @@
                 <a:ea typeface="Helvetica" pitchFamily="34" charset="-122"/>
                 <a:cs typeface="Helvetica" pitchFamily="34" charset="-120"/>
               </a:rPr>
-              <a:t>CAVEONIX RISKFORESIGHT</a:t>
+              <a:t>CITRIX NETSCALER VPX</a:t>
             </a:r>
             <a:endParaRPr lang="en-US" dirty="0"/>
           </a:p>
@@ -22568,7 +22568,7 @@
       </p:sp>
       <p:pic>
         <p:nvPicPr>
-          <p:cNvPr id="67" name="Object 66" descr="public/generated/icons/5b8aa656-9da6-4683-a21b-7d3d45361d94.png">    </p:cNvPr>
+          <p:cNvPr id="67" name="Object 66" descr="public/generated/icons/is.vpn-server.png">    </p:cNvPr>
           <p:cNvPicPr>
             <a:picLocks noChangeAspect="1"/>
           </p:cNvPicPr>
@@ -22624,7 +22624,7 @@
                 <a:ea typeface="Helvetica" pitchFamily="34" charset="-122"/>
                 <a:cs typeface="Helvetica" pitchFamily="34" charset="-120"/>
               </a:rPr>
-              <a:t>CHECK-A-ROO</a:t>
+              <a:t>CLIENT VPN FOR VPC</a:t>
             </a:r>
             <a:endParaRPr lang="en-US" dirty="0"/>
           </a:p>
@@ -22657,7 +22657,7 @@
       </p:sp>
       <p:pic>
         <p:nvPicPr>
-          <p:cNvPr id="70" name="Object 69" descr="public/generated/icons/0a42129b-9839-42b7-90c7-7f3adb435379.png">    </p:cNvPr>
+          <p:cNvPr id="70" name="Object 69" descr="public/generated/icons/dcc46a60-e13b-11e8-a015-757410dab16b.png">    </p:cNvPr>
           <p:cNvPicPr>
             <a:picLocks noChangeAspect="1"/>
           </p:cNvPicPr>
@@ -22713,7 +22713,7 @@
                 <a:ea typeface="Helvetica" pitchFamily="34" charset="-122"/>
                 <a:cs typeface="Helvetica" pitchFamily="34" charset="-120"/>
               </a:rPr>
-              <a:t>CITRIX NETSCALER VPX</a:t>
+              <a:t>CLOUD ACTIVITY TRACKER</a:t>
             </a:r>
             <a:endParaRPr lang="en-US" dirty="0"/>
           </a:p>
@@ -22746,7 +22746,7 @@
       </p:sp>
       <p:pic>
         <p:nvPicPr>
-          <p:cNvPr id="73" name="Object 72" descr="public/generated/icons/is.vpn-server.png">    </p:cNvPr>
+          <p:cNvPr id="73" name="Object 72" descr="public/generated/icons/6cde723c-9e49-74ac-4266-3f7a9bb74216.png">    </p:cNvPr>
           <p:cNvPicPr>
             <a:picLocks noChangeAspect="1"/>
           </p:cNvPicPr>
@@ -22802,7 +22802,7 @@
                 <a:ea typeface="Helvetica" pitchFamily="34" charset="-122"/>
                 <a:cs typeface="Helvetica" pitchFamily="34" charset="-120"/>
               </a:rPr>
-              <a:t>CLIENT VPN FOR VPC</a:t>
+              <a:t>CLOUD BACKUP FOR CLASSIC</a:t>
             </a:r>
             <a:endParaRPr lang="en-US" dirty="0"/>
           </a:p>
@@ -22835,7 +22835,7 @@
       </p:sp>
       <p:pic>
         <p:nvPicPr>
-          <p:cNvPr id="76" name="Object 75" descr="public/generated/icons/dcc46a60-e13b-11e8-a015-757410dab16b.png">    </p:cNvPr>
+          <p:cNvPr id="76" name="Object 75" descr="public/generated/icons/is.backup-policy.png">    </p:cNvPr>
           <p:cNvPicPr>
             <a:picLocks noChangeAspect="1"/>
           </p:cNvPicPr>
@@ -22891,7 +22891,7 @@
                 <a:ea typeface="Helvetica" pitchFamily="34" charset="-122"/>
                 <a:cs typeface="Helvetica" pitchFamily="34" charset="-120"/>
               </a:rPr>
-              <a:t>CLOUD ACTIVITY TRACKER</a:t>
+              <a:t>CLOUD BACKUP FOR VPC</a:t>
             </a:r>
             <a:endParaRPr lang="en-US" dirty="0"/>
           </a:p>
@@ -22924,7 +22924,7 @@
       </p:sp>
       <p:pic>
         <p:nvPicPr>
-          <p:cNvPr id="79" name="Object 78" descr="public/generated/icons/6cde723c-9e49-74ac-4266-3f7a9bb74216.png">    </p:cNvPr>
+          <p:cNvPr id="79" name="Object 78" descr="public/generated/icons/hardware-security-module.png">    </p:cNvPr>
           <p:cNvPicPr>
             <a:picLocks noChangeAspect="1"/>
           </p:cNvPicPr>
@@ -22980,7 +22980,7 @@
                 <a:ea typeface="Helvetica" pitchFamily="34" charset="-122"/>
                 <a:cs typeface="Helvetica" pitchFamily="34" charset="-120"/>
               </a:rPr>
-              <a:t>CLOUD BACKUP FOR CLASSIC</a:t>
+              <a:t>CLOUD HSM</a:t>
             </a:r>
             <a:endParaRPr lang="en-US" dirty="0"/>
           </a:p>
@@ -23013,7 +23013,7 @@
       </p:sp>
       <p:pic>
         <p:nvPicPr>
-          <p:cNvPr id="82" name="Object 81" descr="public/generated/icons/is.backup-policy.png">    </p:cNvPr>
+          <p:cNvPr id="82" name="Object 81" descr="public/generated/icons/a3b01d2d-5457-4269-8bd5-a7c815bd2f41.png">    </p:cNvPr>
           <p:cNvPicPr>
             <a:picLocks noChangeAspect="1"/>
           </p:cNvPicPr>
@@ -23069,7 +23069,7 @@
                 <a:ea typeface="Helvetica" pitchFamily="34" charset="-122"/>
                 <a:cs typeface="Helvetica" pitchFamily="34" charset="-120"/>
               </a:rPr>
-              <a:t>CLOUD BACKUP FOR VPC</a:t>
+              <a:t>CLOUD LOAD BALANCER</a:t>
             </a:r>
             <a:endParaRPr lang="en-US" dirty="0"/>
           </a:p>
@@ -23102,7 +23102,7 @@
       </p:sp>
       <p:pic>
         <p:nvPicPr>
-          <p:cNvPr id="85" name="Object 84" descr="public/generated/icons/hardware-security-module.png">    </p:cNvPr>
+          <p:cNvPr id="85" name="Object 84" descr="public/generated/icons/cd515180-d78a-11ec-b396-db7d306c4f73.png">    </p:cNvPr>
           <p:cNvPicPr>
             <a:picLocks noChangeAspect="1"/>
           </p:cNvPicPr>
@@ -23158,7 +23158,7 @@
                 <a:ea typeface="Helvetica" pitchFamily="34" charset="-122"/>
                 <a:cs typeface="Helvetica" pitchFamily="34" charset="-120"/>
               </a:rPr>
-              <a:t>CLOUD HSM</a:t>
+              <a:t>CLOUD LOGS</a:t>
             </a:r>
             <a:endParaRPr lang="en-US" dirty="0"/>
           </a:p>
@@ -23191,7 +23191,7 @@
       </p:sp>
       <p:pic>
         <p:nvPicPr>
-          <p:cNvPr id="88" name="Object 87" descr="public/generated/icons/a3b01d2d-5457-4269-8bd5-a7c815bd2f41.png">    </p:cNvPr>
+          <p:cNvPr id="88" name="Object 87" descr="public/generated/icons/090c2c10-8c38-11e8-bec2-493df9c49eb8.png">    </p:cNvPr>
           <p:cNvPicPr>
             <a:picLocks noChangeAspect="1"/>
           </p:cNvPicPr>
@@ -23247,7 +23247,7 @@
                 <a:ea typeface="Helvetica" pitchFamily="34" charset="-122"/>
                 <a:cs typeface="Helvetica" pitchFamily="34" charset="-120"/>
               </a:rPr>
-              <a:t>CLOUD LOAD BALANCER</a:t>
+              <a:t>CLOUD MONITORING</a:t>
             </a:r>
             <a:endParaRPr lang="en-US" dirty="0"/>
           </a:p>
@@ -23280,7 +23280,7 @@
       </p:sp>
       <p:pic>
         <p:nvPicPr>
-          <p:cNvPr id="91" name="Object 90" descr="public/generated/icons/cd515180-d78a-11ec-b396-db7d306c4f73.png">    </p:cNvPr>
+          <p:cNvPr id="91" name="Object 90" descr="public/generated/icons/a9617650-09ff-11ec-85f2-d10915d24d79.png">    </p:cNvPr>
           <p:cNvPicPr>
             <a:picLocks noChangeAspect="1"/>
           </p:cNvPicPr>
@@ -23336,7 +23336,7 @@
                 <a:ea typeface="Helvetica" pitchFamily="34" charset="-122"/>
                 <a:cs typeface="Helvetica" pitchFamily="34" charset="-120"/>
               </a:rPr>
-              <a:t>CLOUD LOGS</a:t>
+              <a:t>CLOUD NATIVE STORAGE AND DATA SERVICE</a:t>
             </a:r>
             <a:endParaRPr lang="en-US" dirty="0"/>
           </a:p>
@@ -23369,7 +23369,7 @@
       </p:sp>
       <p:pic>
         <p:nvPicPr>
-          <p:cNvPr id="94" name="Object 93" descr="public/generated/icons/090c2c10-8c38-11e8-bec2-493df9c49eb8.png">    </p:cNvPr>
+          <p:cNvPr id="94" name="Object 93" descr="public/generated/icons/dff97f5c-bc5e-4455-b470-411c3edbe49c.png">    </p:cNvPr>
           <p:cNvPicPr>
             <a:picLocks noChangeAspect="1"/>
           </p:cNvPicPr>
@@ -23425,7 +23425,7 @@
                 <a:ea typeface="Helvetica" pitchFamily="34" charset="-122"/>
                 <a:cs typeface="Helvetica" pitchFamily="34" charset="-120"/>
               </a:rPr>
-              <a:t>CLOUD MONITORING</a:t>
+              <a:t>CLOUD OBJECT STORAGE</a:t>
             </a:r>
             <a:endParaRPr lang="en-US" dirty="0"/>
           </a:p>
@@ -23458,7 +23458,7 @@
       </p:sp>
       <p:pic>
         <p:nvPicPr>
-          <p:cNvPr id="97" name="Object 96" descr="public/generated/icons/a9617650-09ff-11ec-85f2-d10915d24d79.png">    </p:cNvPr>
+          <p:cNvPr id="97" name="Object 96" descr="public/generated/icons/8.png">    </p:cNvPr>
           <p:cNvPicPr>
             <a:picLocks noChangeAspect="1"/>
           </p:cNvPicPr>
@@ -23514,7 +23514,7 @@
                 <a:ea typeface="Helvetica" pitchFamily="34" charset="-122"/>
                 <a:cs typeface="Helvetica" pitchFamily="34" charset="-120"/>
               </a:rPr>
-              <a:t>CLOUD NATIVE STORAGE AND DATA SERVICE</a:t>
+              <a:t>CLOUD OBJECT STORAGE (CLASSIC)</a:t>
             </a:r>
             <a:endParaRPr lang="en-US" dirty="0"/>
           </a:p>
@@ -23547,7 +23547,7 @@
       </p:sp>
       <p:pic>
         <p:nvPicPr>
-          <p:cNvPr id="100" name="Object 99" descr="public/generated/icons/dff97f5c-bc5e-4455-b470-411c3edbe49c.png">    </p:cNvPr>
+          <p:cNvPr id="100" name="Object 99" descr="public/generated/icons/35759612-efad-48d5-ad2a-5336349ed9bc.png">    </p:cNvPr>
           <p:cNvPicPr>
             <a:picLocks noChangeAspect="1"/>
           </p:cNvPicPr>
@@ -23603,7 +23603,7 @@
                 <a:ea typeface="Helvetica" pitchFamily="34" charset="-122"/>
                 <a:cs typeface="Helvetica" pitchFamily="34" charset="-120"/>
               </a:rPr>
-              <a:t>CLOUD OBJECT STORAGE</a:t>
+              <a:t>CLOUD PLATFORM PROFESSIONAL SERVICES</a:t>
             </a:r>
             <a:endParaRPr lang="en-US" dirty="0"/>
           </a:p>
@@ -23636,7 +23636,7 @@
       </p:sp>
       <p:pic>
         <p:nvPicPr>
-          <p:cNvPr id="103" name="Object 102" descr="public/generated/icons/8.png">    </p:cNvPr>
+          <p:cNvPr id="103" name="Object 102" descr="public/generated/icons/is.reservation.png">    </p:cNvPr>
           <p:cNvPicPr>
             <a:picLocks noChangeAspect="1"/>
           </p:cNvPicPr>
@@ -23692,7 +23692,7 @@
                 <a:ea typeface="Helvetica" pitchFamily="34" charset="-122"/>
                 <a:cs typeface="Helvetica" pitchFamily="34" charset="-120"/>
               </a:rPr>
-              <a:t>CLOUD OBJECT STORAGE (CLASSIC)</a:t>
+              <a:t>CLOUD RESERVATIONS FOR VPC</a:t>
             </a:r>
             <a:endParaRPr lang="en-US" dirty="0"/>
           </a:p>
@@ -23725,7 +23725,7 @@
       </p:sp>
       <p:pic>
         <p:nvPicPr>
-          <p:cNvPr id="106" name="Object 105" descr="public/generated/icons/35759612-efad-48d5-ad2a-5336349ed9bc.png">    </p:cNvPr>
+          <p:cNvPr id="106" name="Object 105" descr="public/generated/icons/cf329950-0a3e-11e8-922e-f1366c6e1c83-hytrust.png">    </p:cNvPr>
           <p:cNvPicPr>
             <a:picLocks noChangeAspect="1"/>
           </p:cNvPicPr>
@@ -23781,7 +23781,7 @@
                 <a:ea typeface="Helvetica" pitchFamily="34" charset="-122"/>
                 <a:cs typeface="Helvetica" pitchFamily="34" charset="-120"/>
               </a:rPr>
-              <a:t>CLOUD PLATFORM PROFESSIONAL SERVICES</a:t>
+              <a:t>CLOUD SECURE VIRTUALIZATION</a:t>
             </a:r>
             <a:endParaRPr lang="en-US" dirty="0"/>
           </a:p>
@@ -23814,7 +23814,7 @@
       </p:sp>
       <p:pic>
         <p:nvPicPr>
-          <p:cNvPr id="109" name="Object 108" descr="public/generated/icons/is.reservation.png">    </p:cNvPr>
+          <p:cNvPr id="109" name="Object 108" descr="public/generated/icons/cloudant.png">    </p:cNvPr>
           <p:cNvPicPr>
             <a:picLocks noChangeAspect="1"/>
           </p:cNvPicPr>
@@ -23870,7 +23870,7 @@
                 <a:ea typeface="Helvetica" pitchFamily="34" charset="-122"/>
                 <a:cs typeface="Helvetica" pitchFamily="34" charset="-120"/>
               </a:rPr>
-              <a:t>CLOUD RESERVATIONS FOR VPC</a:t>
+              <a:t>CLOUDANT</a:t>
             </a:r>
             <a:endParaRPr lang="en-US" dirty="0"/>
           </a:p>
@@ -23936,7 +23936,7 @@
       </p:sp>
       <p:pic>
         <p:nvPicPr>
-          <p:cNvPr id="3" name="Object 2" descr="public/generated/icons/cf329950-0a3e-11e8-922e-f1366c6e1c83-hytrust.png">    </p:cNvPr>
+          <p:cNvPr id="3" name="Object 2" descr="public/generated/icons/e7114cc0-ffd2-4199-bc1a-ea79a6f09e89.png">    </p:cNvPr>
           <p:cNvPicPr>
             <a:picLocks noChangeAspect="1"/>
           </p:cNvPicPr>
@@ -23992,7 +23992,7 @@
                 <a:ea typeface="Helvetica" pitchFamily="34" charset="-122"/>
                 <a:cs typeface="Helvetica" pitchFamily="34" charset="-120"/>
               </a:rPr>
-              <a:t>CLOUD SECURE VIRTUALIZATION</a:t>
+              <a:t>CLOUDSWAY CDN PRO</a:t>
             </a:r>
             <a:endParaRPr lang="en-US" dirty="0"/>
           </a:p>
@@ -24025,7 +24025,7 @@
       </p:sp>
       <p:pic>
         <p:nvPicPr>
-          <p:cNvPr id="6" name="Object 5" descr="public/generated/icons/cloudant.png">    </p:cNvPr>
+          <p:cNvPr id="6" name="Object 5" descr="public/generated/icons/is.cluster-network.png">    </p:cNvPr>
           <p:cNvPicPr>
             <a:picLocks noChangeAspect="1"/>
           </p:cNvPicPr>
@@ -24081,7 +24081,7 @@
                 <a:ea typeface="Helvetica" pitchFamily="34" charset="-122"/>
                 <a:cs typeface="Helvetica" pitchFamily="34" charset="-120"/>
               </a:rPr>
-              <a:t>CLOUDANT</a:t>
+              <a:t>CLUSTER NETWORK</a:t>
             </a:r>
             <a:endParaRPr lang="en-US" dirty="0"/>
           </a:p>
@@ -24114,7 +24114,7 @@
       </p:sp>
       <p:pic>
         <p:nvPicPr>
-          <p:cNvPr id="9" name="Object 8" descr="public/generated/icons/e7114cc0-ffd2-4199-bc1a-ea79a6f09e89.png">    </p:cNvPr>
+          <p:cNvPr id="9" name="Object 8" descr="public/generated/icons/afb603e9-8738-4542-abf4-baf5231a4dbe.png">    </p:cNvPr>
           <p:cNvPicPr>
             <a:picLocks noChangeAspect="1"/>
           </p:cNvPicPr>
@@ -24170,7 +24170,7 @@
                 <a:ea typeface="Helvetica" pitchFamily="34" charset="-122"/>
                 <a:cs typeface="Helvetica" pitchFamily="34" charset="-120"/>
               </a:rPr>
-              <a:t>CLOUDSWAY CDN PRO</a:t>
+              <a:t>COBALT IRON - SECURE AUTOMATED BACKUP WITH COMPASS</a:t>
             </a:r>
             <a:endParaRPr lang="en-US" dirty="0"/>
           </a:p>
@@ -24203,7 +24203,7 @@
       </p:sp>
       <p:pic>
         <p:nvPicPr>
-          <p:cNvPr id="12" name="Object 11" descr="public/generated/icons/is.cluster-network.png">    </p:cNvPr>
+          <p:cNvPr id="12" name="Object 11" descr="public/generated/icons/2ad2fdd0-bba5-11ea-8966-5d6402fed1c7.png">    </p:cNvPr>
           <p:cNvPicPr>
             <a:picLocks noChangeAspect="1"/>
           </p:cNvPicPr>
@@ -24259,7 +24259,7 @@
                 <a:ea typeface="Helvetica" pitchFamily="34" charset="-122"/>
                 <a:cs typeface="Helvetica" pitchFamily="34" charset="-120"/>
               </a:rPr>
-              <a:t>CLUSTER NETWORK</a:t>
+              <a:t>CODE ENGINE</a:t>
             </a:r>
             <a:endParaRPr lang="en-US" dirty="0"/>
           </a:p>
@@ -24292,7 +24292,7 @@
       </p:sp>
       <p:pic>
         <p:nvPicPr>
-          <p:cNvPr id="15" name="Object 14" descr="public/generated/icons/afb603e9-8738-4542-abf4-baf5231a4dbe.png">    </p:cNvPr>
+          <p:cNvPr id="15" name="Object 14" descr="public/generated/icons/3e1a2c30-11dd-11ec-b621-67e0f6600d56.png">    </p:cNvPr>
           <p:cNvPicPr>
             <a:picLocks noChangeAspect="1"/>
           </p:cNvPicPr>
@@ -24348,7 +24348,7 @@
                 <a:ea typeface="Helvetica" pitchFamily="34" charset="-122"/>
                 <a:cs typeface="Helvetica" pitchFamily="34" charset="-120"/>
               </a:rPr>
-              <a:t>COBALT IRON - SECURE AUTOMATED BACKUP WITH COMPASS</a:t>
+              <a:t>COMPLIANCE AND CUSTOMER EXPERIENCE AUTOMATION</a:t>
             </a:r>
             <a:endParaRPr lang="en-US" dirty="0"/>
           </a:p>
@@ -24381,7 +24381,7 @@
       </p:sp>
       <p:pic>
         <p:nvPicPr>
-          <p:cNvPr id="18" name="Object 17" descr="public/generated/icons/2ad2fdd0-bba5-11ea-8966-5d6402fed1c7.png">    </p:cNvPr>
+          <p:cNvPr id="18" name="Object 17" descr="public/generated/icons/ComposeElasticsearch-P.png">    </p:cNvPr>
           <p:cNvPicPr>
             <a:picLocks noChangeAspect="1"/>
           </p:cNvPicPr>
@@ -24437,7 +24437,7 @@
                 <a:ea typeface="Helvetica" pitchFamily="34" charset="-122"/>
                 <a:cs typeface="Helvetica" pitchFamily="34" charset="-120"/>
               </a:rPr>
-              <a:t>CODE ENGINE</a:t>
+              <a:t>COMPOSE FOR ELASTICSEARCH</a:t>
             </a:r>
             <a:endParaRPr lang="en-US" dirty="0"/>
           </a:p>
@@ -24470,7 +24470,7 @@
       </p:sp>
       <p:pic>
         <p:nvPicPr>
-          <p:cNvPr id="21" name="Object 20" descr="public/generated/icons/3e1a2c30-11dd-11ec-b621-67e0f6600d56.png">    </p:cNvPr>
+          <p:cNvPr id="21" name="Object 20" descr="public/generated/icons/ComposeEtcd-P.png">    </p:cNvPr>
           <p:cNvPicPr>
             <a:picLocks noChangeAspect="1"/>
           </p:cNvPicPr>
@@ -24526,7 +24526,7 @@
                 <a:ea typeface="Helvetica" pitchFamily="34" charset="-122"/>
                 <a:cs typeface="Helvetica" pitchFamily="34" charset="-120"/>
               </a:rPr>
-              <a:t>COMPLIANCE AND CUSTOMER EXPERIENCE AUTOMATION</a:t>
+              <a:t>COMPOSE FOR ETCD</a:t>
             </a:r>
             <a:endParaRPr lang="en-US" dirty="0"/>
           </a:p>
@@ -24559,7 +24559,7 @@
       </p:sp>
       <p:pic>
         <p:nvPicPr>
-          <p:cNvPr id="24" name="Object 23" descr="public/generated/icons/ComposeElasticsearch-P.png">    </p:cNvPr>
+          <p:cNvPr id="24" name="Object 23" descr="public/generated/icons/ComposeMongo-P.png">    </p:cNvPr>
           <p:cNvPicPr>
             <a:picLocks noChangeAspect="1"/>
           </p:cNvPicPr>
@@ -24615,7 +24615,7 @@
                 <a:ea typeface="Helvetica" pitchFamily="34" charset="-122"/>
                 <a:cs typeface="Helvetica" pitchFamily="34" charset="-120"/>
               </a:rPr>
-              <a:t>COMPOSE FOR ELASTICSEARCH</a:t>
+              <a:t>COMPOSE FOR MONGODB</a:t>
             </a:r>
             <a:endParaRPr lang="en-US" dirty="0"/>
           </a:p>
@@ -24648,7 +24648,7 @@
       </p:sp>
       <p:pic>
         <p:nvPicPr>
-          <p:cNvPr id="27" name="Object 26" descr="public/generated/icons/ComposeEtcd-P.png">    </p:cNvPr>
+          <p:cNvPr id="27" name="Object 26" descr="public/generated/icons/ComposePostgreSQL-P.png">    </p:cNvPr>
           <p:cNvPicPr>
             <a:picLocks noChangeAspect="1"/>
           </p:cNvPicPr>
@@ -24704,7 +24704,7 @@
                 <a:ea typeface="Helvetica" pitchFamily="34" charset="-122"/>
                 <a:cs typeface="Helvetica" pitchFamily="34" charset="-120"/>
               </a:rPr>
-              <a:t>COMPOSE FOR ETCD</a:t>
+              <a:t>COMPOSE FOR POSTGRESQL</a:t>
             </a:r>
             <a:endParaRPr lang="en-US" dirty="0"/>
           </a:p>
@@ -24737,7 +24737,7 @@
       </p:sp>
       <p:pic>
         <p:nvPicPr>
-          <p:cNvPr id="30" name="Object 29" descr="public/generated/icons/ComposeMongo-P.png">    </p:cNvPr>
+          <p:cNvPr id="30" name="Object 29" descr="public/generated/icons/ComposeRabbitMQ-P.png">    </p:cNvPr>
           <p:cNvPicPr>
             <a:picLocks noChangeAspect="1"/>
           </p:cNvPicPr>
@@ -24793,7 +24793,7 @@
                 <a:ea typeface="Helvetica" pitchFamily="34" charset="-122"/>
                 <a:cs typeface="Helvetica" pitchFamily="34" charset="-120"/>
               </a:rPr>
-              <a:t>COMPOSE FOR MONGODB</a:t>
+              <a:t>COMPOSE FOR RABBITMQ</a:t>
             </a:r>
             <a:endParaRPr lang="en-US" dirty="0"/>
           </a:p>
@@ -24826,7 +24826,7 @@
       </p:sp>
       <p:pic>
         <p:nvPicPr>
-          <p:cNvPr id="33" name="Object 32" descr="public/generated/icons/ComposePostgreSQL-P.png">    </p:cNvPr>
+          <p:cNvPr id="33" name="Object 32" descr="public/generated/icons/ComposeRedis-P.png">    </p:cNvPr>
           <p:cNvPicPr>
             <a:picLocks noChangeAspect="1"/>
           </p:cNvPicPr>
@@ -24882,7 +24882,7 @@
                 <a:ea typeface="Helvetica" pitchFamily="34" charset="-122"/>
                 <a:cs typeface="Helvetica" pitchFamily="34" charset="-120"/>
               </a:rPr>
-              <a:t>COMPOSE FOR POSTGRESQL</a:t>
+              <a:t>COMPOSE FOR REDIS</a:t>
             </a:r>
             <a:endParaRPr lang="en-US" dirty="0"/>
           </a:p>
@@ -24915,7 +24915,7 @@
       </p:sp>
       <p:pic>
         <p:nvPicPr>
-          <p:cNvPr id="36" name="Object 35" descr="public/generated/icons/ComposeRabbitMQ-P.png">    </p:cNvPr>
+          <p:cNvPr id="36" name="Object 35" descr="public/generated/icons/public.bluemix.container.registry.png">    </p:cNvPr>
           <p:cNvPicPr>
             <a:picLocks noChangeAspect="1"/>
           </p:cNvPicPr>
@@ -24971,7 +24971,7 @@
                 <a:ea typeface="Helvetica" pitchFamily="34" charset="-122"/>
                 <a:cs typeface="Helvetica" pitchFamily="34" charset="-120"/>
               </a:rPr>
-              <a:t>COMPOSE FOR RABBITMQ</a:t>
+              <a:t>CONTAINER REGISTRY</a:t>
             </a:r>
             <a:endParaRPr lang="en-US" dirty="0"/>
           </a:p>
@@ -25004,7 +25004,7 @@
       </p:sp>
       <p:pic>
         <p:nvPicPr>
-          <p:cNvPr id="39" name="Object 38" descr="public/generated/icons/ComposeRedis-P.png">    </p:cNvPr>
+          <p:cNvPr id="39" name="Object 38" descr="public/generated/icons/4ad9c1b8-e58e-2a9d-ccb8-d4d5ae84abc0.png">    </p:cNvPr>
           <p:cNvPicPr>
             <a:picLocks noChangeAspect="1"/>
           </p:cNvPicPr>
@@ -25060,7 +25060,7 @@
                 <a:ea typeface="Helvetica" pitchFamily="34" charset="-122"/>
                 <a:cs typeface="Helvetica" pitchFamily="34" charset="-120"/>
               </a:rPr>
-              <a:t>COMPOSE FOR REDIS</a:t>
+              <a:t>CONTAINER SECURITY SERVICES</a:t>
             </a:r>
             <a:endParaRPr lang="en-US" dirty="0"/>
           </a:p>
@@ -25093,7 +25093,7 @@
       </p:sp>
       <p:pic>
         <p:nvPicPr>
-          <p:cNvPr id="42" name="Object 41" descr="public/generated/icons/public.bluemix.container.registry.png">    </p:cNvPr>
+          <p:cNvPr id="42" name="Object 41" descr="public/generated/icons/b6c4a555-5ff6-4e1d-9ce7-0a9976629eab.png">    </p:cNvPr>
           <p:cNvPicPr>
             <a:picLocks noChangeAspect="1"/>
           </p:cNvPicPr>
@@ -25149,7 +25149,7 @@
                 <a:ea typeface="Helvetica" pitchFamily="34" charset="-122"/>
                 <a:cs typeface="Helvetica" pitchFamily="34" charset="-120"/>
               </a:rPr>
-              <a:t>CONTAINER REGISTRY</a:t>
+              <a:t>CONTENT DELIVERY NETWORK</a:t>
             </a:r>
             <a:endParaRPr lang="en-US" dirty="0"/>
           </a:p>
@@ -25182,7 +25182,7 @@
       </p:sp>
       <p:pic>
         <p:nvPicPr>
-          <p:cNvPr id="45" name="Object 44" descr="public/generated/icons/4ad9c1b8-e58e-2a9d-ccb8-d4d5ae84abc0.png">    </p:cNvPr>
+          <p:cNvPr id="45" name="Object 44" descr="public/generated/icons/59b735ee-5938-4ebd-a6b2-541aef2d1f68.png">    </p:cNvPr>
           <p:cNvPicPr>
             <a:picLocks noChangeAspect="1"/>
           </p:cNvPicPr>
@@ -25238,7 +25238,7 @@
                 <a:ea typeface="Helvetica" pitchFamily="34" charset="-122"/>
                 <a:cs typeface="Helvetica" pitchFamily="34" charset="-120"/>
               </a:rPr>
-              <a:t>CONTAINER SECURITY SERVICES</a:t>
+              <a:t>CONTINUOUS DELIVERY</a:t>
             </a:r>
             <a:endParaRPr lang="en-US" dirty="0"/>
           </a:p>
@@ -25271,7 +25271,7 @@
       </p:sp>
       <p:pic>
         <p:nvPicPr>
-          <p:cNvPr id="48" name="Object 47" descr="public/generated/icons/b6c4a555-5ff6-4e1d-9ce7-0a9976629eab.png">    </p:cNvPr>
+          <p:cNvPr id="48" name="Object 47" descr="public/generated/icons/d19358fd-a20a-4bb7-9727-9d3c129db741.png">    </p:cNvPr>
           <p:cNvPicPr>
             <a:picLocks noChangeAspect="1"/>
           </p:cNvPicPr>
@@ -25327,7 +25327,7 @@
                 <a:ea typeface="Helvetica" pitchFamily="34" charset="-122"/>
                 <a:cs typeface="Helvetica" pitchFamily="34" charset="-120"/>
               </a:rPr>
-              <a:t>CONTENT DELIVERY NETWORK</a:t>
+              <a:t>CONVERLISTICS</a:t>
             </a:r>
             <a:endParaRPr lang="en-US" dirty="0"/>
           </a:p>
@@ -25360,7 +25360,7 @@
       </p:sp>
       <p:pic>
         <p:nvPicPr>
-          <p:cNvPr id="51" name="Object 50" descr="public/generated/icons/59b735ee-5938-4ebd-a6b2-541aef2d1f68.png">    </p:cNvPr>
+          <p:cNvPr id="51" name="Object 50" descr="public/generated/icons/742c2c0f-1c40-480d-ab7b-76e56a89f51b.png">    </p:cNvPr>
           <p:cNvPicPr>
             <a:picLocks noChangeAspect="1"/>
           </p:cNvPicPr>
@@ -25416,7 +25416,7 @@
                 <a:ea typeface="Helvetica" pitchFamily="34" charset="-122"/>
                 <a:cs typeface="Helvetica" pitchFamily="34" charset="-120"/>
               </a:rPr>
-              <a:t>CONTINUOUS DELIVERY</a:t>
+              <a:t>CONVERTIO VMWARE WORKLOAD MIGRATION AND CONVERSION</a:t>
             </a:r>
             <a:endParaRPr lang="en-US" dirty="0"/>
           </a:p>
@@ -25449,7 +25449,7 @@
       </p:sp>
       <p:pic>
         <p:nvPicPr>
-          <p:cNvPr id="54" name="Object 53" descr="public/generated/icons/d19358fd-a20a-4bb7-9727-9d3c129db741.png">    </p:cNvPr>
+          <p:cNvPr id="54" name="Object 53" descr="public/generated/icons/5da26b90-7b83-44b5-b6d3-778b408b77db.png">    </p:cNvPr>
           <p:cNvPicPr>
             <a:picLocks noChangeAspect="1"/>
           </p:cNvPicPr>
@@ -25505,7 +25505,7 @@
                 <a:ea typeface="Helvetica" pitchFamily="34" charset="-122"/>
                 <a:cs typeface="Helvetica" pitchFamily="34" charset="-120"/>
               </a:rPr>
-              <a:t>CONVERLISTICS</a:t>
+              <a:t>CRUSHBANK</a:t>
             </a:r>
             <a:endParaRPr lang="en-US" dirty="0"/>
           </a:p>
@@ -25538,7 +25538,7 @@
       </p:sp>
       <p:pic>
         <p:nvPicPr>
-          <p:cNvPr id="57" name="Object 56" descr="public/generated/icons/742c2c0f-1c40-480d-ab7b-76e56a89f51b.png">    </p:cNvPr>
+          <p:cNvPr id="57" name="Object 56" descr="public/generated/icons/07d4aa9f-1f71-43bb-9916-8e9cff5bc426.png">    </p:cNvPr>
           <p:cNvPicPr>
             <a:picLocks noChangeAspect="1"/>
           </p:cNvPicPr>
@@ -25594,7 +25594,7 @@
                 <a:ea typeface="Helvetica" pitchFamily="34" charset="-122"/>
                 <a:cs typeface="Helvetica" pitchFamily="34" charset="-120"/>
               </a:rPr>
-              <a:t>CONVERTIO VMWARE WORKLOAD MIGRATION AND CONVERSION</a:t>
+              <a:t>CUSTOM MIGRATIONS DR AND MANAGEMENT AS A SERVICE</a:t>
             </a:r>
             <a:endParaRPr lang="en-US" dirty="0"/>
           </a:p>
@@ -25627,7 +25627,7 @@
       </p:sp>
       <p:pic>
         <p:nvPicPr>
-          <p:cNvPr id="60" name="Object 59" descr="public/generated/icons/5da26b90-7b83-44b5-b6d3-778b408b77db.png">    </p:cNvPr>
+          <p:cNvPr id="60" name="Object 59" descr="public/generated/icons/1ab48530-6638-4fce-a386-0bd598576a0a.png">    </p:cNvPr>
           <p:cNvPicPr>
             <a:picLocks noChangeAspect="1"/>
           </p:cNvPicPr>
@@ -25683,7 +25683,7 @@
                 <a:ea typeface="Helvetica" pitchFamily="34" charset="-122"/>
                 <a:cs typeface="Helvetica" pitchFamily="34" charset="-120"/>
               </a:rPr>
-              <a:t>CRUSHBANK</a:t>
+              <a:t>CYBERSTRONG BY CYBERSAINT</a:t>
             </a:r>
             <a:endParaRPr lang="en-US" dirty="0"/>
           </a:p>
@@ -25716,7 +25716,7 @@
       </p:sp>
       <p:pic>
         <p:nvPicPr>
-          <p:cNvPr id="63" name="Object 62" descr="public/generated/icons/07d4aa9f-1f71-43bb-9916-8e9cff5bc426.png">    </p:cNvPr>
+          <p:cNvPr id="63" name="Object 62" descr="public/generated/icons/840bcb30-f8c3-11ed-afcd-01dba1a5ada3.png">    </p:cNvPr>
           <p:cNvPicPr>
             <a:picLocks noChangeAspect="1"/>
           </p:cNvPicPr>
@@ -25772,7 +25772,7 @@
                 <a:ea typeface="Helvetica" pitchFamily="34" charset="-122"/>
                 <a:cs typeface="Helvetica" pitchFamily="34" charset="-120"/>
               </a:rPr>
-              <a:t>CUSTOM MIGRATIONS DR AND MANAGEMENT AS A SERVICE</a:t>
+              <a:t>DATA PRODUCT HUB</a:t>
             </a:r>
             <a:endParaRPr lang="en-US" dirty="0"/>
           </a:p>
@@ -25805,7 +25805,7 @@
       </p:sp>
       <p:pic>
         <p:nvPicPr>
-          <p:cNvPr id="66" name="Object 65" descr="public/generated/icons/1ab48530-6638-4fce-a386-0bd598576a0a.png">    </p:cNvPr>
+          <p:cNvPr id="66" name="Object 65" descr="public/generated/icons/696b9880-9e9b-11ea-9054-e15e287f1e7f.png">    </p:cNvPr>
           <p:cNvPicPr>
             <a:picLocks noChangeAspect="1"/>
           </p:cNvPicPr>
@@ -25861,7 +25861,7 @@
                 <a:ea typeface="Helvetica" pitchFamily="34" charset="-122"/>
                 <a:cs typeface="Helvetica" pitchFamily="34" charset="-120"/>
               </a:rPr>
-              <a:t>CYBERSTRONG BY CYBERSAINT</a:t>
+              <a:t>DATA REPLICATION</a:t>
             </a:r>
             <a:endParaRPr lang="en-US" dirty="0"/>
           </a:p>
@@ -25894,7 +25894,7 @@
       </p:sp>
       <p:pic>
         <p:nvPicPr>
-          <p:cNvPr id="69" name="Object 68" descr="public/generated/icons/840bcb30-f8c3-11ed-afcd-01dba1a5ada3.png">    </p:cNvPr>
+          <p:cNvPr id="69" name="Object 68" descr="public/generated/icons/5d307850-0404-11eb-8c8b-c7d7505f656d.png">    </p:cNvPr>
           <p:cNvPicPr>
             <a:picLocks noChangeAspect="1"/>
           </p:cNvPicPr>
@@ -25950,7 +25950,7 @@
                 <a:ea typeface="Helvetica" pitchFamily="34" charset="-122"/>
                 <a:cs typeface="Helvetica" pitchFamily="34" charset="-120"/>
               </a:rPr>
-              <a:t>DATA PRODUCT HUB</a:t>
+              <a:t>DATA VIRTUALIZATION</a:t>
             </a:r>
             <a:endParaRPr lang="en-US" dirty="0"/>
           </a:p>
@@ -25983,7 +25983,7 @@
       </p:sp>
       <p:pic>
         <p:nvPicPr>
-          <p:cNvPr id="72" name="Object 71" descr="public/generated/icons/696b9880-9e9b-11ea-9054-e15e287f1e7f.png">    </p:cNvPr>
+          <p:cNvPr id="72" name="Object 71" descr="public/generated/icons/databases-for-enterprisedb.png">    </p:cNvPr>
           <p:cNvPicPr>
             <a:picLocks noChangeAspect="1"/>
           </p:cNvPicPr>
@@ -26039,7 +26039,7 @@
                 <a:ea typeface="Helvetica" pitchFamily="34" charset="-122"/>
                 <a:cs typeface="Helvetica" pitchFamily="34" charset="-120"/>
               </a:rPr>
-              <a:t>DATA REPLICATION</a:t>
+              <a:t>DATABASES FOR EDB</a:t>
             </a:r>
             <a:endParaRPr lang="en-US" dirty="0"/>
           </a:p>
@@ -26072,7 +26072,7 @@
       </p:sp>
       <p:pic>
         <p:nvPicPr>
-          <p:cNvPr id="75" name="Object 74" descr="public/generated/icons/5d307850-0404-11eb-8c8b-c7d7505f656d.png">    </p:cNvPr>
+          <p:cNvPr id="75" name="Object 74" descr="public/generated/icons/databases-for-elasticsearch.png">    </p:cNvPr>
           <p:cNvPicPr>
             <a:picLocks noChangeAspect="1"/>
           </p:cNvPicPr>
@@ -26128,7 +26128,7 @@
                 <a:ea typeface="Helvetica" pitchFamily="34" charset="-122"/>
                 <a:cs typeface="Helvetica" pitchFamily="34" charset="-120"/>
               </a:rPr>
-              <a:t>DATA VIRTUALIZATION</a:t>
+              <a:t>DATABASES FOR ELASTICSEARCH</a:t>
             </a:r>
             <a:endParaRPr lang="en-US" dirty="0"/>
           </a:p>
@@ -26161,7 +26161,7 @@
       </p:sp>
       <p:pic>
         <p:nvPicPr>
-          <p:cNvPr id="78" name="Object 77" descr="public/generated/icons/databases-for-enterprisedb.png">    </p:cNvPr>
+          <p:cNvPr id="78" name="Object 77" descr="public/generated/icons/databases-for-etcd.png">    </p:cNvPr>
           <p:cNvPicPr>
             <a:picLocks noChangeAspect="1"/>
           </p:cNvPicPr>
@@ -26217,7 +26217,7 @@
                 <a:ea typeface="Helvetica" pitchFamily="34" charset="-122"/>
                 <a:cs typeface="Helvetica" pitchFamily="34" charset="-120"/>
               </a:rPr>
-              <a:t>DATABASES FOR EDB</a:t>
+              <a:t>DATABASES FOR ETCD</a:t>
             </a:r>
             <a:endParaRPr lang="en-US" dirty="0"/>
           </a:p>
@@ -26250,7 +26250,7 @@
       </p:sp>
       <p:pic>
         <p:nvPicPr>
-          <p:cNvPr id="81" name="Object 80" descr="public/generated/icons/databases-for-elasticsearch.png">    </p:cNvPr>
+          <p:cNvPr id="81" name="Object 80" descr="public/generated/icons/databases-for-mongodb.png">    </p:cNvPr>
           <p:cNvPicPr>
             <a:picLocks noChangeAspect="1"/>
           </p:cNvPicPr>
@@ -26306,7 +26306,7 @@
                 <a:ea typeface="Helvetica" pitchFamily="34" charset="-122"/>
                 <a:cs typeface="Helvetica" pitchFamily="34" charset="-120"/>
               </a:rPr>
-              <a:t>DATABASES FOR ELASTICSEARCH</a:t>
+              <a:t>DATABASES FOR MONGODB</a:t>
             </a:r>
             <a:endParaRPr lang="en-US" dirty="0"/>
           </a:p>
@@ -26339,7 +26339,7 @@
       </p:sp>
       <p:pic>
         <p:nvPicPr>
-          <p:cNvPr id="84" name="Object 83" descr="public/generated/icons/databases-for-etcd.png">    </p:cNvPr>
+          <p:cNvPr id="84" name="Object 83" descr="public/generated/icons/databases-for-mysql.png">    </p:cNvPr>
           <p:cNvPicPr>
             <a:picLocks noChangeAspect="1"/>
           </p:cNvPicPr>
@@ -26395,7 +26395,7 @@
                 <a:ea typeface="Helvetica" pitchFamily="34" charset="-122"/>
                 <a:cs typeface="Helvetica" pitchFamily="34" charset="-120"/>
               </a:rPr>
-              <a:t>DATABASES FOR ETCD</a:t>
+              <a:t>DATABASES FOR MYSQL</a:t>
             </a:r>
             <a:endParaRPr lang="en-US" dirty="0"/>
           </a:p>
@@ -26428,7 +26428,7 @@
       </p:sp>
       <p:pic>
         <p:nvPicPr>
-          <p:cNvPr id="87" name="Object 86" descr="public/generated/icons/databases-for-mongodb.png">    </p:cNvPr>
+          <p:cNvPr id="87" name="Object 86" descr="public/generated/icons/databases-for-postgresql.png">    </p:cNvPr>
           <p:cNvPicPr>
             <a:picLocks noChangeAspect="1"/>
           </p:cNvPicPr>
@@ -26484,7 +26484,7 @@
                 <a:ea typeface="Helvetica" pitchFamily="34" charset="-122"/>
                 <a:cs typeface="Helvetica" pitchFamily="34" charset="-120"/>
               </a:rPr>
-              <a:t>DATABASES FOR MONGODB</a:t>
+              <a:t>DATABASES FOR POSTGRESQL</a:t>
             </a:r>
             <a:endParaRPr lang="en-US" dirty="0"/>
           </a:p>
@@ -26517,7 +26517,7 @@
       </p:sp>
       <p:pic>
         <p:nvPicPr>
-          <p:cNvPr id="90" name="Object 89" descr="public/generated/icons/databases-for-mysql.png">    </p:cNvPr>
+          <p:cNvPr id="90" name="Object 89" descr="public/generated/icons/databases-for-redis.png">    </p:cNvPr>
           <p:cNvPicPr>
             <a:picLocks noChangeAspect="1"/>
           </p:cNvPicPr>
@@ -26573,7 +26573,7 @@
                 <a:ea typeface="Helvetica" pitchFamily="34" charset="-122"/>
                 <a:cs typeface="Helvetica" pitchFamily="34" charset="-120"/>
               </a:rPr>
-              <a:t>DATABASES FOR MYSQL</a:t>
+              <a:t>DATABASES FOR REDIS</a:t>
             </a:r>
             <a:endParaRPr lang="en-US" dirty="0"/>
           </a:p>
@@ -26606,7 +26606,7 @@
       </p:sp>
       <p:pic>
         <p:nvPicPr>
-          <p:cNvPr id="93" name="Object 92" descr="public/generated/icons/databases-for-postgresql.png">    </p:cNvPr>
+          <p:cNvPr id="93" name="Object 92" descr="public/generated/icons/dd0532c0-f87c-11ea-be25-c9dc051df74f.png">    </p:cNvPr>
           <p:cNvPicPr>
             <a:picLocks noChangeAspect="1"/>
           </p:cNvPicPr>
@@ -26662,7 +26662,7 @@
                 <a:ea typeface="Helvetica" pitchFamily="34" charset="-122"/>
                 <a:cs typeface="Helvetica" pitchFamily="34" charset="-120"/>
               </a:rPr>
-              <a:t>DATABASES FOR POSTGRESQL</a:t>
+              <a:t>DATASTAGE</a:t>
             </a:r>
             <a:endParaRPr lang="en-US" dirty="0"/>
           </a:p>
@@ -26695,7 +26695,7 @@
       </p:sp>
       <p:pic>
         <p:nvPicPr>
-          <p:cNvPr id="96" name="Object 95" descr="public/generated/icons/databases-for-redis.png">    </p:cNvPr>
+          <p:cNvPr id="96" name="Object 95" descr="public/generated/icons/dashdb-for-transactions.png">    </p:cNvPr>
           <p:cNvPicPr>
             <a:picLocks noChangeAspect="1"/>
           </p:cNvPicPr>
@@ -26751,7 +26751,7 @@
                 <a:ea typeface="Helvetica" pitchFamily="34" charset="-122"/>
                 <a:cs typeface="Helvetica" pitchFamily="34" charset="-120"/>
               </a:rPr>
-              <a:t>DATABASES FOR REDIS</a:t>
+              <a:t>DB2</a:t>
             </a:r>
             <a:endParaRPr lang="en-US" dirty="0"/>
           </a:p>
@@ -26784,7 +26784,7 @@
       </p:sp>
       <p:pic>
         <p:nvPicPr>
-          <p:cNvPr id="99" name="Object 98" descr="public/generated/icons/dd0532c0-f87c-11ea-be25-c9dc051df74f.png">    </p:cNvPr>
+          <p:cNvPr id="99" name="Object 98" descr="public/generated/icons/9e02e72d-00ce-4220-b44c-650c8314e58a.png">    </p:cNvPr>
           <p:cNvPicPr>
             <a:picLocks noChangeAspect="1"/>
           </p:cNvPicPr>
@@ -26840,7 +26840,7 @@
                 <a:ea typeface="Helvetica" pitchFamily="34" charset="-122"/>
                 <a:cs typeface="Helvetica" pitchFamily="34" charset="-120"/>
               </a:rPr>
-              <a:t>DATASTAGE</a:t>
+              <a:t>DB2 WAREHOUSE</a:t>
             </a:r>
             <a:endParaRPr lang="en-US" dirty="0"/>
           </a:p>
@@ -26873,7 +26873,7 @@
       </p:sp>
       <p:pic>
         <p:nvPicPr>
-          <p:cNvPr id="102" name="Object 101" descr="public/generated/icons/dashdb-for-transactions.png">    </p:cNvPr>
+          <p:cNvPr id="102" name="Object 101" descr="public/generated/icons/is.dedicated-host.png">    </p:cNvPr>
           <p:cNvPicPr>
             <a:picLocks noChangeAspect="1"/>
           </p:cNvPicPr>
@@ -26929,7 +26929,7 @@
                 <a:ea typeface="Helvetica" pitchFamily="34" charset="-122"/>
                 <a:cs typeface="Helvetica" pitchFamily="34" charset="-120"/>
               </a:rPr>
-              <a:t>DB2</a:t>
+              <a:t>DEDICATED HOST FOR VPC</a:t>
             </a:r>
             <a:endParaRPr lang="en-US" dirty="0"/>
           </a:p>
@@ -26962,7 +26962,7 @@
       </p:sp>
       <p:pic>
         <p:nvPicPr>
-          <p:cNvPr id="105" name="Object 104" descr="public/generated/icons/9e02e72d-00ce-4220-b44c-650c8314e58a.png">    </p:cNvPr>
+          <p:cNvPr id="105" name="Object 104" descr="public/generated/icons/86fb7610-0f92-11ea-a6a3-8b96ed1570d8.png">    </p:cNvPr>
           <p:cNvPicPr>
             <a:picLocks noChangeAspect="1"/>
           </p:cNvPicPr>
@@ -27018,7 +27018,7 @@
                 <a:ea typeface="Helvetica" pitchFamily="34" charset="-122"/>
                 <a:cs typeface="Helvetica" pitchFamily="34" charset="-120"/>
               </a:rPr>
-              <a:t>DB2 WAREHOUSE</a:t>
+              <a:t>DIRECT LINK CONNECT</a:t>
             </a:r>
             <a:endParaRPr lang="en-US" dirty="0"/>
           </a:p>
@@ -27051,7 +27051,7 @@
       </p:sp>
       <p:pic>
         <p:nvPicPr>
-          <p:cNvPr id="108" name="Object 107" descr="public/generated/icons/is.dedicated-host.png">    </p:cNvPr>
+          <p:cNvPr id="108" name="Object 107" descr="public/generated/icons/7dd59b11-c3c5-5aad-f6b2-2a0c2a3e6c49.png">    </p:cNvPr>
           <p:cNvPicPr>
             <a:picLocks noChangeAspect="1"/>
           </p:cNvPicPr>
@@ -27107,7 +27107,7 @@
                 <a:ea typeface="Helvetica" pitchFamily="34" charset="-122"/>
                 <a:cs typeface="Helvetica" pitchFamily="34" charset="-120"/>
               </a:rPr>
-              <a:t>DEDICATED HOST FOR VPC</a:t>
+              <a:t>DIRECT LINK CONNECT ON CLASSIC</a:t>
             </a:r>
             <a:endParaRPr lang="en-US" dirty="0"/>
           </a:p>
@@ -27173,7 +27173,7 @@
       </p:sp>
       <p:pic>
         <p:nvPicPr>
-          <p:cNvPr id="3" name="Object 2" descr="public/generated/icons/86fb7610-0f92-11ea-a6a3-8b96ed1570d8.png">    </p:cNvPr>
+          <p:cNvPr id="3" name="Object 2" descr="public/generated/icons/dc11a440-6073-11e9-9f5a-2f7997ba23c0.png">    </p:cNvPr>
           <p:cNvPicPr>
             <a:picLocks noChangeAspect="1"/>
           </p:cNvPicPr>
@@ -27229,7 +27229,7 @@
                 <a:ea typeface="Helvetica" pitchFamily="34" charset="-122"/>
                 <a:cs typeface="Helvetica" pitchFamily="34" charset="-120"/>
               </a:rPr>
-              <a:t>DIRECT LINK CONNECT</a:t>
+              <a:t>DIRECT LINK DEDICATED</a:t>
             </a:r>
             <a:endParaRPr lang="en-US" dirty="0"/>
           </a:p>
@@ -27262,7 +27262,7 @@
       </p:sp>
       <p:pic>
         <p:nvPicPr>
-          <p:cNvPr id="6" name="Object 5" descr="public/generated/icons/7dd59b11-c3c5-5aad-f6b2-2a0c2a3e6c49.png">    </p:cNvPr>
+          <p:cNvPr id="6" name="Object 5" descr="public/generated/icons/22.png">    </p:cNvPr>
           <p:cNvPicPr>
             <a:picLocks noChangeAspect="1"/>
           </p:cNvPicPr>
@@ -27318,7 +27318,7 @@
                 <a:ea typeface="Helvetica" pitchFamily="34" charset="-122"/>
                 <a:cs typeface="Helvetica" pitchFamily="34" charset="-120"/>
               </a:rPr>
-              <a:t>DIRECT LINK CONNECT ON CLASSIC</a:t>
+              <a:t>DIRECT LINK DEDICATED HOSTING ON CLASSIC</a:t>
             </a:r>
             <a:endParaRPr lang="en-US" dirty="0"/>
           </a:p>
@@ -27351,7 +27351,7 @@
       </p:sp>
       <p:pic>
         <p:nvPicPr>
-          <p:cNvPr id="9" name="Object 8" descr="public/generated/icons/dc11a440-6073-11e9-9f5a-2f7997ba23c0.png">    </p:cNvPr>
+          <p:cNvPr id="9" name="Object 8" descr="public/generated/icons/23.png">    </p:cNvPr>
           <p:cNvPicPr>
             <a:picLocks noChangeAspect="1"/>
           </p:cNvPicPr>
@@ -27407,7 +27407,7 @@
                 <a:ea typeface="Helvetica" pitchFamily="34" charset="-122"/>
                 <a:cs typeface="Helvetica" pitchFamily="34" charset="-120"/>
               </a:rPr>
-              <a:t>DIRECT LINK DEDICATED</a:t>
+              <a:t>DIRECT LINK DEDICATED ON CLASSIC</a:t>
             </a:r>
             <a:endParaRPr lang="en-US" dirty="0"/>
           </a:p>
@@ -27440,7 +27440,7 @@
       </p:sp>
       <p:pic>
         <p:nvPicPr>
-          <p:cNvPr id="12" name="Object 11" descr="public/generated/icons/22.png">    </p:cNvPr>
+          <p:cNvPr id="12" name="Object 11" descr="public/generated/icons/21.png">    </p:cNvPr>
           <p:cNvPicPr>
             <a:picLocks noChangeAspect="1"/>
           </p:cNvPicPr>
@@ -27496,7 +27496,7 @@
                 <a:ea typeface="Helvetica" pitchFamily="34" charset="-122"/>
                 <a:cs typeface="Helvetica" pitchFamily="34" charset="-120"/>
               </a:rPr>
-              <a:t>DIRECT LINK DEDICATED HOSTING ON CLASSIC</a:t>
+              <a:t>DIRECT LINK EXCHANGE ON CLASSIC</a:t>
             </a:r>
             <a:endParaRPr lang="en-US" dirty="0"/>
           </a:p>
@@ -27529,7 +27529,7 @@
       </p:sp>
       <p:pic>
         <p:nvPicPr>
-          <p:cNvPr id="15" name="Object 14" descr="public/generated/icons/23.png">    </p:cNvPr>
+          <p:cNvPr id="15" name="Object 14" descr="public/generated/icons/9f3db814-3aec-47c5-94b0-6a71d49bd27f.png">    </p:cNvPr>
           <p:cNvPicPr>
             <a:picLocks noChangeAspect="1"/>
           </p:cNvPicPr>
@@ -27585,7 +27585,7 @@
                 <a:ea typeface="Helvetica" pitchFamily="34" charset="-122"/>
                 <a:cs typeface="Helvetica" pitchFamily="34" charset="-120"/>
               </a:rPr>
-              <a:t>DIRECT LINK DEDICATED ON CLASSIC</a:t>
+              <a:t>DIZZION COMPLETE</a:t>
             </a:r>
             <a:endParaRPr lang="en-US" dirty="0"/>
           </a:p>
@@ -27618,7 +27618,7 @@
       </p:sp>
       <p:pic>
         <p:nvPicPr>
-          <p:cNvPr id="18" name="Object 17" descr="public/generated/icons/21.png">    </p:cNvPr>
+          <p:cNvPr id="18" name="Object 17" descr="public/generated/icons/9e09a2eb-b2e5-4d76-ab7c-1b2f8c080865.png">    </p:cNvPr>
           <p:cNvPicPr>
             <a:picLocks noChangeAspect="1"/>
           </p:cNvPicPr>
@@ -27674,7 +27674,7 @@
                 <a:ea typeface="Helvetica" pitchFamily="34" charset="-122"/>
                 <a:cs typeface="Helvetica" pitchFamily="34" charset="-120"/>
               </a:rPr>
-              <a:t>DIRECT LINK EXCHANGE ON CLASSIC</a:t>
+              <a:t>DIZZION COMPLETE - HORIZON</a:t>
             </a:r>
             <a:endParaRPr lang="en-US" dirty="0"/>
           </a:p>
@@ -27707,7 +27707,7 @@
       </p:sp>
       <p:pic>
         <p:nvPicPr>
-          <p:cNvPr id="21" name="Object 20" descr="public/generated/icons/9f3db814-3aec-47c5-94b0-6a71d49bd27f.png">    </p:cNvPr>
+          <p:cNvPr id="21" name="Object 20" descr="public/generated/icons/79679329-2050-4779-a2e2-7210b88aed4e.png">    </p:cNvPr>
           <p:cNvPicPr>
             <a:picLocks noChangeAspect="1"/>
           </p:cNvPicPr>
@@ -27763,7 +27763,7 @@
                 <a:ea typeface="Helvetica" pitchFamily="34" charset="-122"/>
                 <a:cs typeface="Helvetica" pitchFamily="34" charset="-120"/>
               </a:rPr>
-              <a:t>DIZZION COMPLETE</a:t>
+              <a:t>DIZZION COMPLETE FS - HORIZON</a:t>
             </a:r>
             <a:endParaRPr lang="en-US" dirty="0"/>
           </a:p>
@@ -27796,7 +27796,7 @@
       </p:sp>
       <p:pic>
         <p:nvPicPr>
-          <p:cNvPr id="24" name="Object 23" descr="public/generated/icons/9e09a2eb-b2e5-4d76-ab7c-1b2f8c080865.png">    </p:cNvPr>
+          <p:cNvPr id="24" name="Object 23" descr="public/generated/icons/6fc0c2df-7fbc-470f-aac5-a93af7ef4a92.png">    </p:cNvPr>
           <p:cNvPicPr>
             <a:picLocks noChangeAspect="1"/>
           </p:cNvPicPr>
@@ -27852,7 +27852,7 @@
                 <a:ea typeface="Helvetica" pitchFamily="34" charset="-122"/>
                 <a:cs typeface="Helvetica" pitchFamily="34" charset="-120"/>
               </a:rPr>
-              <a:t>DIZZION COMPLETE - HORIZON</a:t>
+              <a:t>DIZZION FLEX</a:t>
             </a:r>
             <a:endParaRPr lang="en-US" dirty="0"/>
           </a:p>
@@ -27885,7 +27885,7 @@
       </p:sp>
       <p:pic>
         <p:nvPicPr>
-          <p:cNvPr id="27" name="Object 26" descr="public/generated/icons/79679329-2050-4779-a2e2-7210b88aed4e.png">    </p:cNvPr>
+          <p:cNvPr id="27" name="Object 26" descr="public/generated/icons/72ca6b61-2aa8-4b8f-ba21-69854bd2095b.png">    </p:cNvPr>
           <p:cNvPicPr>
             <a:picLocks noChangeAspect="1"/>
           </p:cNvPicPr>
@@ -27941,7 +27941,7 @@
                 <a:ea typeface="Helvetica" pitchFamily="34" charset="-122"/>
                 <a:cs typeface="Helvetica" pitchFamily="34" charset="-120"/>
               </a:rPr>
-              <a:t>DIZZION COMPLETE FS - HORIZON</a:t>
+              <a:t>DIZZION MANAGED</a:t>
             </a:r>
             <a:endParaRPr lang="en-US" dirty="0"/>
           </a:p>
@@ -27974,7 +27974,7 @@
       </p:sp>
       <p:pic>
         <p:nvPicPr>
-          <p:cNvPr id="30" name="Object 29" descr="public/generated/icons/6fc0c2df-7fbc-470f-aac5-a93af7ef4a92.png">    </p:cNvPr>
+          <p:cNvPr id="30" name="Object 29" descr="public/generated/icons/b4ed8a30-936f-11e9-b289-1d079699cbe5.png">    </p:cNvPr>
           <p:cNvPicPr>
             <a:picLocks noChangeAspect="1"/>
           </p:cNvPicPr>
@@ -28030,7 +28030,7 @@
                 <a:ea typeface="Helvetica" pitchFamily="34" charset="-122"/>
                 <a:cs typeface="Helvetica" pitchFamily="34" charset="-120"/>
               </a:rPr>
-              <a:t>DIZZION FLEX</a:t>
+              <a:t>DNS SERVICES</a:t>
             </a:r>
             <a:endParaRPr lang="en-US" dirty="0"/>
           </a:p>
@@ -28063,7 +28063,7 @@
       </p:sp>
       <p:pic>
         <p:nvPicPr>
-          <p:cNvPr id="33" name="Object 32" descr="public/generated/icons/72ca6b61-2aa8-4b8f-ba21-69854bd2095b.png">    </p:cNvPr>
+          <p:cNvPr id="33" name="Object 32" descr="public/generated/icons/d1e3f0d2-0f49-ddfd-0eb9-2897b9d3a45d.png">    </p:cNvPr>
           <p:cNvPicPr>
             <a:picLocks noChangeAspect="1"/>
           </p:cNvPicPr>
@@ -28119,7 +28119,7 @@
                 <a:ea typeface="Helvetica" pitchFamily="34" charset="-122"/>
                 <a:cs typeface="Helvetica" pitchFamily="34" charset="-120"/>
               </a:rPr>
-              <a:t>DIZZION MANAGED</a:t>
+              <a:t>EMAIL DELIVERY, POWERED BY SENDGRID</a:t>
             </a:r>
             <a:endParaRPr lang="en-US" dirty="0"/>
           </a:p>
@@ -28152,7 +28152,7 @@
       </p:sp>
       <p:pic>
         <p:nvPicPr>
-          <p:cNvPr id="36" name="Object 35" descr="public/generated/icons/b4ed8a30-936f-11e9-b289-1d079699cbe5.png">    </p:cNvPr>
+          <p:cNvPr id="36" name="Object 35" descr="public/generated/icons/871a9870-7508-11ef-ac5c-3324c550b37a.png">    </p:cNvPr>
           <p:cNvPicPr>
             <a:picLocks noChangeAspect="1"/>
           </p:cNvPicPr>
@@ -28208,7 +28208,7 @@
                 <a:ea typeface="Helvetica" pitchFamily="34" charset="-122"/>
                 <a:cs typeface="Helvetica" pitchFamily="34" charset="-120"/>
               </a:rPr>
-              <a:t>DNS SERVICES</a:t>
+              <a:t>ENTERPRISE APPLICATION SERVICE</a:t>
             </a:r>
             <a:endParaRPr lang="en-US" dirty="0"/>
           </a:p>
@@ -28241,7 +28241,7 @@
       </p:sp>
       <p:pic>
         <p:nvPicPr>
-          <p:cNvPr id="39" name="Object 38" descr="public/generated/icons/d1e3f0d2-0f49-ddfd-0eb9-2897b9d3a45d.png">    </p:cNvPr>
+          <p:cNvPr id="39" name="Object 38" descr="public/generated/icons/64955a78-30f9-426d-a25a-344480421b27.png">    </p:cNvPr>
           <p:cNvPicPr>
             <a:picLocks noChangeAspect="1"/>
           </p:cNvPicPr>
@@ -28297,7 +28297,7 @@
                 <a:ea typeface="Helvetica" pitchFamily="34" charset="-122"/>
                 <a:cs typeface="Helvetica" pitchFamily="34" charset="-120"/>
               </a:rPr>
-              <a:t>EMAIL DELIVERY, POWERED BY SENDGRID</a:t>
+              <a:t>ETICLOUD SECURE DIGITAL AGILE WORKPLACE</a:t>
             </a:r>
             <a:endParaRPr lang="en-US" dirty="0"/>
           </a:p>
@@ -28330,7 +28330,7 @@
       </p:sp>
       <p:pic>
         <p:nvPicPr>
-          <p:cNvPr id="42" name="Object 41" descr="public/generated/icons/871a9870-7508-11ef-ac5c-3324c550b37a.png">    </p:cNvPr>
+          <p:cNvPr id="42" name="Object 41" descr="public/generated/icons/ecdb4690-c2d8-11eb-bff1-4f7b9d2dfe41.png">    </p:cNvPr>
           <p:cNvPicPr>
             <a:picLocks noChangeAspect="1"/>
           </p:cNvPicPr>
@@ -28386,7 +28386,7 @@
                 <a:ea typeface="Helvetica" pitchFamily="34" charset="-122"/>
                 <a:cs typeface="Helvetica" pitchFamily="34" charset="-120"/>
               </a:rPr>
-              <a:t>ENTERPRISE APPLICATION SERVICE</a:t>
+              <a:t>EVENT NOTIFICATIONS</a:t>
             </a:r>
             <a:endParaRPr lang="en-US" dirty="0"/>
           </a:p>
@@ -28419,7 +28419,7 @@
       </p:sp>
       <p:pic>
         <p:nvPicPr>
-          <p:cNvPr id="45" name="Object 44" descr="public/generated/icons/64955a78-30f9-426d-a25a-344480421b27.png">    </p:cNvPr>
+          <p:cNvPr id="45" name="Object 44" descr="public/generated/icons/6a7f4e38-f218-48ef-9dd2-df408747568e.png">    </p:cNvPr>
           <p:cNvPicPr>
             <a:picLocks noChangeAspect="1"/>
           </p:cNvPicPr>
@@ -28475,7 +28475,7 @@
                 <a:ea typeface="Helvetica" pitchFamily="34" charset="-122"/>
                 <a:cs typeface="Helvetica" pitchFamily="34" charset="-120"/>
               </a:rPr>
-              <a:t>ETICLOUD SECURE DIGITAL AGILE WORKPLACE</a:t>
+              <a:t>EVENT STREAMS</a:t>
             </a:r>
             <a:endParaRPr lang="en-US" dirty="0"/>
           </a:p>
@@ -28508,7 +28508,7 @@
       </p:sp>
       <p:pic>
         <p:nvPicPr>
-          <p:cNvPr id="48" name="Object 47" descr="public/generated/icons/ecdb4690-c2d8-11eb-bff1-4f7b9d2dfe41.png">    </p:cNvPr>
+          <p:cNvPr id="48" name="Object 47" descr="public/generated/icons/cf329950-0a3e-11e8-922e-f1366c6e1c83-bigip.png">    </p:cNvPr>
           <p:cNvPicPr>
             <a:picLocks noChangeAspect="1"/>
           </p:cNvPicPr>
@@ -28564,7 +28564,7 @@
                 <a:ea typeface="Helvetica" pitchFamily="34" charset="-122"/>
                 <a:cs typeface="Helvetica" pitchFamily="34" charset="-120"/>
               </a:rPr>
-              <a:t>EVENT NOTIFICATIONS</a:t>
+              <a:t>F5 BIG-IP</a:t>
             </a:r>
             <a:endParaRPr lang="en-US" dirty="0"/>
           </a:p>
@@ -28597,7 +28597,7 @@
       </p:sp>
       <p:pic>
         <p:nvPicPr>
-          <p:cNvPr id="51" name="Object 50" descr="public/generated/icons/6a7f4e38-f218-48ef-9dd2-df408747568e.png">    </p:cNvPr>
+          <p:cNvPr id="51" name="Object 50" descr="public/generated/icons/60427a43-cf48-41e0-bd95-26bde9c12105.png">    </p:cNvPr>
           <p:cNvPicPr>
             <a:picLocks noChangeAspect="1"/>
           </p:cNvPicPr>
@@ -28653,7 +28653,7 @@
                 <a:ea typeface="Helvetica" pitchFamily="34" charset="-122"/>
                 <a:cs typeface="Helvetica" pitchFamily="34" charset="-120"/>
               </a:rPr>
-              <a:t>EVENT STREAMS</a:t>
+              <a:t>FALCONSTOR STORSAFE VTL FOR POWER ON-PREMISES</a:t>
             </a:r>
             <a:endParaRPr lang="en-US" dirty="0"/>
           </a:p>
@@ -28686,7 +28686,7 @@
       </p:sp>
       <p:pic>
         <p:nvPicPr>
-          <p:cNvPr id="54" name="Object 53" descr="public/generated/icons/cf329950-0a3e-11e8-922e-f1366c6e1c83-bigip.png">    </p:cNvPr>
+          <p:cNvPr id="54" name="Object 53" descr="public/generated/icons/6.png">    </p:cNvPr>
           <p:cNvPicPr>
             <a:picLocks noChangeAspect="1"/>
           </p:cNvPicPr>
@@ -28742,7 +28742,7 @@
                 <a:ea typeface="Helvetica" pitchFamily="34" charset="-122"/>
                 <a:cs typeface="Helvetica" pitchFamily="34" charset="-120"/>
               </a:rPr>
-              <a:t>F5 BIG-IP</a:t>
+              <a:t>FILE STORAGE FOR CLASSIC</a:t>
             </a:r>
             <a:endParaRPr lang="en-US" dirty="0"/>
           </a:p>
@@ -28775,7 +28775,7 @@
       </p:sp>
       <p:pic>
         <p:nvPicPr>
-          <p:cNvPr id="57" name="Object 56" descr="public/generated/icons/60427a43-cf48-41e0-bd95-26bde9c12105.png">    </p:cNvPr>
+          <p:cNvPr id="57" name="Object 56" descr="public/generated/icons/is.share.png">    </p:cNvPr>
           <p:cNvPicPr>
             <a:picLocks noChangeAspect="1"/>
           </p:cNvPicPr>
@@ -28831,7 +28831,7 @@
                 <a:ea typeface="Helvetica" pitchFamily="34" charset="-122"/>
                 <a:cs typeface="Helvetica" pitchFamily="34" charset="-120"/>
               </a:rPr>
-              <a:t>FALCONSTOR STORSAFE VTL FOR POWER ON-PREMISES</a:t>
+              <a:t>FILE STORAGE FOR VPC</a:t>
             </a:r>
             <a:endParaRPr lang="en-US" dirty="0"/>
           </a:p>
@@ -28864,7 +28864,7 @@
       </p:sp>
       <p:pic>
         <p:nvPicPr>
-          <p:cNvPr id="60" name="Object 59" descr="public/generated/icons/6.png">    </p:cNvPr>
+          <p:cNvPr id="60" name="Object 59" descr="public/generated/icons/is.floating-ip.png">    </p:cNvPr>
           <p:cNvPicPr>
             <a:picLocks noChangeAspect="1"/>
           </p:cNvPicPr>
@@ -28920,7 +28920,7 @@
                 <a:ea typeface="Helvetica" pitchFamily="34" charset="-122"/>
                 <a:cs typeface="Helvetica" pitchFamily="34" charset="-120"/>
               </a:rPr>
-              <a:t>FILE STORAGE FOR CLASSIC</a:t>
+              <a:t>FLOATING IP FOR VPC</a:t>
             </a:r>
             <a:endParaRPr lang="en-US" dirty="0"/>
           </a:p>
@@ -28953,7 +28953,7 @@
       </p:sp>
       <p:pic>
         <p:nvPicPr>
-          <p:cNvPr id="63" name="Object 62" descr="public/generated/icons/is.share.png">    </p:cNvPr>
+          <p:cNvPr id="63" name="Object 62" descr="public/generated/icons/is.flow-log-collector.png">    </p:cNvPr>
           <p:cNvPicPr>
             <a:picLocks noChangeAspect="1"/>
           </p:cNvPicPr>
@@ -29009,7 +29009,7 @@
                 <a:ea typeface="Helvetica" pitchFamily="34" charset="-122"/>
                 <a:cs typeface="Helvetica" pitchFamily="34" charset="-120"/>
               </a:rPr>
-              <a:t>FILE STORAGE FOR VPC</a:t>
+              <a:t>FLOW LOGS FOR VPC</a:t>
             </a:r>
             <a:endParaRPr lang="en-US" dirty="0"/>
           </a:p>
@@ -29042,7 +29042,7 @@
       </p:sp>
       <p:pic>
         <p:nvPicPr>
-          <p:cNvPr id="66" name="Object 65" descr="public/generated/icons/is.floating-ip.png">    </p:cNvPr>
+          <p:cNvPr id="66" name="Object 65" descr="public/generated/icons/05605040-8854-4665-bd05-0b10a96daf05.png">    </p:cNvPr>
           <p:cNvPicPr>
             <a:picLocks noChangeAspect="1"/>
           </p:cNvPicPr>
@@ -29098,7 +29098,7 @@
                 <a:ea typeface="Helvetica" pitchFamily="34" charset="-122"/>
                 <a:cs typeface="Helvetica" pitchFamily="34" charset="-120"/>
               </a:rPr>
-              <a:t>FLOATING IP FOR VPC</a:t>
+              <a:t>FNTS CLOUD MIGRATION SERVICES</a:t>
             </a:r>
             <a:endParaRPr lang="en-US" dirty="0"/>
           </a:p>
@@ -29131,7 +29131,7 @@
       </p:sp>
       <p:pic>
         <p:nvPicPr>
-          <p:cNvPr id="69" name="Object 68" descr="public/generated/icons/is.flow-log-collector.png">    </p:cNvPr>
+          <p:cNvPr id="69" name="Object 68" descr="public/generated/icons/d2fb0ba3-1679-4053-a593-9f2259d9e87b.png">    </p:cNvPr>
           <p:cNvPicPr>
             <a:picLocks noChangeAspect="1"/>
           </p:cNvPicPr>
@@ -29187,7 +29187,7 @@
                 <a:ea typeface="Helvetica" pitchFamily="34" charset="-122"/>
                 <a:cs typeface="Helvetica" pitchFamily="34" charset="-120"/>
               </a:rPr>
-              <a:t>FLOW LOGS FOR VPC</a:t>
+              <a:t>FNTS MANAGED SERVICES FOR POWERVS CLOUD</a:t>
             </a:r>
             <a:endParaRPr lang="en-US" dirty="0"/>
           </a:p>
@@ -29220,7 +29220,7 @@
       </p:sp>
       <p:pic>
         <p:nvPicPr>
-          <p:cNvPr id="72" name="Object 71" descr="public/generated/icons/05605040-8854-4665-bd05-0b10a96daf05.png">    </p:cNvPr>
+          <p:cNvPr id="72" name="Object 71" descr="public/generated/icons/cf329950-0a3e-11e8-922e-f1366c6e1c83-fortigate.png">    </p:cNvPr>
           <p:cNvPicPr>
             <a:picLocks noChangeAspect="1"/>
           </p:cNvPicPr>
@@ -29276,7 +29276,7 @@
                 <a:ea typeface="Helvetica" pitchFamily="34" charset="-122"/>
                 <a:cs typeface="Helvetica" pitchFamily="34" charset="-120"/>
               </a:rPr>
-              <a:t>FNTS CLOUD MIGRATION SERVICES</a:t>
+              <a:t>FORTIGATE SECURITY APPLIANCE</a:t>
             </a:r>
             <a:endParaRPr lang="en-US" dirty="0"/>
           </a:p>
@@ -29309,7 +29309,7 @@
       </p:sp>
       <p:pic>
         <p:nvPicPr>
-          <p:cNvPr id="75" name="Object 74" descr="public/generated/icons/d2fb0ba3-1679-4053-a593-9f2259d9e87b.png">    </p:cNvPr>
+          <p:cNvPr id="75" name="Object 74" descr="public/generated/icons/f5b26324-9b39-c701-0cc5-b0d5d2fe8534.png">    </p:cNvPr>
           <p:cNvPicPr>
             <a:picLocks noChangeAspect="1"/>
           </p:cNvPicPr>
@@ -29365,7 +29365,7 @@
                 <a:ea typeface="Helvetica" pitchFamily="34" charset="-122"/>
                 <a:cs typeface="Helvetica" pitchFamily="34" charset="-120"/>
               </a:rPr>
-              <a:t>FNTS MANAGED SERVICES FOR POWERVS CLOUD</a:t>
+              <a:t>FORTIGATE SECURITY APPLIANCE 10GBPS</a:t>
             </a:r>
             <a:endParaRPr lang="en-US" dirty="0"/>
           </a:p>
@@ -29398,7 +29398,7 @@
       </p:sp>
       <p:pic>
         <p:nvPicPr>
-          <p:cNvPr id="78" name="Object 77" descr="public/generated/icons/cf329950-0a3e-11e8-922e-f1366c6e1c83-fortigate.png">    </p:cNvPr>
+          <p:cNvPr id="78" name="Object 77" descr="public/generated/icons/cf329950-0a3e-11e8-922e-f1366c6e1c83-fortigatevm.png">    </p:cNvPr>
           <p:cNvPicPr>
             <a:picLocks noChangeAspect="1"/>
           </p:cNvPicPr>
@@ -29454,7 +29454,7 @@
                 <a:ea typeface="Helvetica" pitchFamily="34" charset="-122"/>
                 <a:cs typeface="Helvetica" pitchFamily="34" charset="-120"/>
               </a:rPr>
-              <a:t>FORTIGATE SECURITY APPLIANCE</a:t>
+              <a:t>FORTIGATE VIRTUAL APPLIANCE</a:t>
             </a:r>
             <a:endParaRPr lang="en-US" dirty="0"/>
           </a:p>
@@ -29487,7 +29487,7 @@
       </p:sp>
       <p:pic>
         <p:nvPicPr>
-          <p:cNvPr id="81" name="Object 80" descr="public/generated/icons/f5b26324-9b39-c701-0cc5-b0d5d2fe8534.png">    </p:cNvPr>
+          <p:cNvPr id="81" name="Object 80" descr="public/generated/icons/a93eeacc-7012-c8bc-c851-e928949a226c.png">    </p:cNvPr>
           <p:cNvPicPr>
             <a:picLocks noChangeAspect="1"/>
           </p:cNvPicPr>
@@ -29543,7 +29543,7 @@
                 <a:ea typeface="Helvetica" pitchFamily="34" charset="-122"/>
                 <a:cs typeface="Helvetica" pitchFamily="34" charset="-120"/>
               </a:rPr>
-              <a:t>FORTIGATE SECURITY APPLIANCE 10GBPS</a:t>
+              <a:t>FORTINET VIRTUAL FORTIGATE SECURITY APPLIANCE (VFSA)</a:t>
             </a:r>
             <a:endParaRPr lang="en-US" dirty="0"/>
           </a:p>
@@ -29576,7 +29576,7 @@
       </p:sp>
       <p:pic>
         <p:nvPicPr>
-          <p:cNvPr id="84" name="Object 83" descr="public/generated/icons/cf329950-0a3e-11e8-922e-f1366c6e1c83-fortigatevm.png">    </p:cNvPr>
+          <p:cNvPr id="84" name="Object 83" descr="public/generated/icons/900fb23f-fe9d-4cf8-9bb2-a82d87dede0e.png">    </p:cNvPr>
           <p:cNvPicPr>
             <a:picLocks noChangeAspect="1"/>
           </p:cNvPicPr>
@@ -29632,7 +29632,7 @@
                 <a:ea typeface="Helvetica" pitchFamily="34" charset="-122"/>
                 <a:cs typeface="Helvetica" pitchFamily="34" charset="-120"/>
               </a:rPr>
-              <a:t>FORTIGATE VIRTUAL APPLIANCE</a:t>
+              <a:t>FRESCHE KTLO APPLICATION MANAGEMENT</a:t>
             </a:r>
             <a:endParaRPr lang="en-US" dirty="0"/>
           </a:p>
@@ -29665,7 +29665,7 @@
       </p:sp>
       <p:pic>
         <p:nvPicPr>
-          <p:cNvPr id="87" name="Object 86" descr="public/generated/icons/a93eeacc-7012-c8bc-c851-e928949a226c.png">    </p:cNvPr>
+          <p:cNvPr id="87" name="Object 86" descr="public/generated/icons/c3c7f095-67da-42e6-b982-46d0e6e79f84.png">    </p:cNvPr>
           <p:cNvPicPr>
             <a:picLocks noChangeAspect="1"/>
           </p:cNvPicPr>
@@ -29721,7 +29721,7 @@
                 <a:ea typeface="Helvetica" pitchFamily="34" charset="-122"/>
                 <a:cs typeface="Helvetica" pitchFamily="34" charset="-120"/>
               </a:rPr>
-              <a:t>FORTINET VIRTUAL FORTIGATE SECURITY APPLIANCE (VFSA)</a:t>
+              <a:t>FRESCHE LPAR OPERATIONS MANAGEMENT</a:t>
             </a:r>
             <a:endParaRPr lang="en-US" dirty="0"/>
           </a:p>
@@ -38219,7 +38219,7 @@
       </p:sp>
       <p:pic>
         <p:nvPicPr>
-          <p:cNvPr id="48" name="Object 47" descr="public/generated/icons/vmware.vdc.png">    </p:cNvPr>
+          <p:cNvPr id="48" name="Object 47" descr="public/generated/icons/vmware.usage-meter.png">    </p:cNvPr>
           <p:cNvPicPr>
             <a:picLocks noChangeAspect="1"/>
           </p:cNvPicPr>
@@ -38275,7 +38275,7 @@
                 <a:ea typeface="Helvetica" pitchFamily="34" charset="-122"/>
                 <a:cs typeface="Helvetica" pitchFamily="34" charset="-120"/>
               </a:rPr>
-              <a:t>VCF AS A SERVICE - VIRTUAL DATA CENTER</a:t>
+              <a:t>VCF AS A SERVICE - USAGE METER</a:t>
             </a:r>
             <a:endParaRPr lang="en-US" dirty="0"/>
           </a:p>
@@ -38308,7 +38308,7 @@
       </p:sp>
       <p:pic>
         <p:nvPicPr>
-          <p:cNvPr id="51" name="Object 50" descr="public/generated/icons/cf329950-0a3e-11e8-922e-f1366c6e1c83-veeam.png">    </p:cNvPr>
+          <p:cNvPr id="51" name="Object 50" descr="public/generated/icons/vmware.vdc.png">    </p:cNvPr>
           <p:cNvPicPr>
             <a:picLocks noChangeAspect="1"/>
           </p:cNvPicPr>
@@ -38364,7 +38364,7 @@
                 <a:ea typeface="Helvetica" pitchFamily="34" charset="-122"/>
                 <a:cs typeface="Helvetica" pitchFamily="34" charset="-120"/>
               </a:rPr>
-              <a:t>VEEAM</a:t>
+              <a:t>VCF AS A SERVICE - VIRTUAL DATA CENTER</a:t>
             </a:r>
             <a:endParaRPr lang="en-US" dirty="0"/>
           </a:p>
@@ -38397,7 +38397,7 @@
       </p:sp>
       <p:pic>
         <p:nvPicPr>
-          <p:cNvPr id="54" name="Object 53" descr="public/generated/icons/66644e80-f35a-11ee-923f-2fe367129617.png">    </p:cNvPr>
+          <p:cNvPr id="54" name="Object 53" descr="public/generated/icons/cf329950-0a3e-11e8-922e-f1366c6e1c83-veeam.png">    </p:cNvPr>
           <p:cNvPicPr>
             <a:picLocks noChangeAspect="1"/>
           </p:cNvPicPr>
@@ -38453,7 +38453,7 @@
                 <a:ea typeface="Helvetica" pitchFamily="34" charset="-122"/>
                 <a:cs typeface="Helvetica" pitchFamily="34" charset="-120"/>
               </a:rPr>
-              <a:t>VERIFY</a:t>
+              <a:t>VEEAM</a:t>
             </a:r>
             <a:endParaRPr lang="en-US" dirty="0"/>
           </a:p>
@@ -38486,7 +38486,7 @@
       </p:sp>
       <p:pic>
         <p:nvPicPr>
-          <p:cNvPr id="57" name="Object 56" descr="public/generated/icons/is.virtual-network-interface.png">    </p:cNvPr>
+          <p:cNvPr id="57" name="Object 56" descr="public/generated/icons/66644e80-f35a-11ee-923f-2fe367129617.png">    </p:cNvPr>
           <p:cNvPicPr>
             <a:picLocks noChangeAspect="1"/>
           </p:cNvPicPr>
@@ -38542,7 +38542,7 @@
                 <a:ea typeface="Helvetica" pitchFamily="34" charset="-122"/>
                 <a:cs typeface="Helvetica" pitchFamily="34" charset="-120"/>
               </a:rPr>
-              <a:t>VIRTUAL NETWORK INTERFACE</a:t>
+              <a:t>VERIFY</a:t>
             </a:r>
             <a:endParaRPr lang="en-US" dirty="0"/>
           </a:p>
@@ -38575,7 +38575,7 @@
       </p:sp>
       <p:pic>
         <p:nvPicPr>
-          <p:cNvPr id="60" name="Object 59" descr="public/generated/icons/is.vpc.png">    </p:cNvPr>
+          <p:cNvPr id="60" name="Object 59" descr="public/generated/icons/is.virtual-network-interface.png">    </p:cNvPr>
           <p:cNvPicPr>
             <a:picLocks noChangeAspect="1"/>
           </p:cNvPicPr>
@@ -38631,7 +38631,7 @@
                 <a:ea typeface="Helvetica" pitchFamily="34" charset="-122"/>
                 <a:cs typeface="Helvetica" pitchFamily="34" charset="-120"/>
               </a:rPr>
-              <a:t>VIRTUAL PRIVATE CLOUD</a:t>
+              <a:t>VIRTUAL NETWORK INTERFACE</a:t>
             </a:r>
             <a:endParaRPr lang="en-US" dirty="0"/>
           </a:p>
@@ -38664,7 +38664,7 @@
       </p:sp>
       <p:pic>
         <p:nvPicPr>
-          <p:cNvPr id="63" name="Object 62" descr="public/generated/icons/is.endpoint-gateway.png">    </p:cNvPr>
+          <p:cNvPr id="63" name="Object 62" descr="public/generated/icons/is.vpc.png">    </p:cNvPr>
           <p:cNvPicPr>
             <a:picLocks noChangeAspect="1"/>
           </p:cNvPicPr>
@@ -38720,7 +38720,7 @@
                 <a:ea typeface="Helvetica" pitchFamily="34" charset="-122"/>
                 <a:cs typeface="Helvetica" pitchFamily="34" charset="-120"/>
               </a:rPr>
-              <a:t>VIRTUAL PRIVATE ENDPOINT FOR VPC</a:t>
+              <a:t>VIRTUAL PRIVATE CLOUD</a:t>
             </a:r>
             <a:endParaRPr lang="en-US" dirty="0"/>
           </a:p>
@@ -38753,7 +38753,7 @@
       </p:sp>
       <p:pic>
         <p:nvPicPr>
-          <p:cNvPr id="66" name="Object 65" descr="public/generated/icons/887073fb-ba5b-9407-d2ac-938308d890e4.png">    </p:cNvPr>
+          <p:cNvPr id="66" name="Object 65" descr="public/generated/icons/is.endpoint-gateway.png">    </p:cNvPr>
           <p:cNvPicPr>
             <a:picLocks noChangeAspect="1"/>
           </p:cNvPicPr>
@@ -38809,7 +38809,7 @@
                 <a:ea typeface="Helvetica" pitchFamily="34" charset="-122"/>
                 <a:cs typeface="Helvetica" pitchFamily="34" charset="-120"/>
               </a:rPr>
-              <a:t>VIRTUAL ROUTER APPLIANCE</a:t>
+              <a:t>VIRTUAL PRIVATE ENDPOINT FOR VPC</a:t>
             </a:r>
             <a:endParaRPr lang="en-US" dirty="0"/>
           </a:p>
@@ -38842,7 +38842,7 @@
       </p:sp>
       <p:pic>
         <p:nvPicPr>
-          <p:cNvPr id="69" name="Object 68" descr="public/generated/icons/virtual-server-group.png">    </p:cNvPr>
+          <p:cNvPr id="69" name="Object 68" descr="public/generated/icons/887073fb-ba5b-9407-d2ac-938308d890e4.png">    </p:cNvPr>
           <p:cNvPicPr>
             <a:picLocks noChangeAspect="1"/>
           </p:cNvPicPr>
@@ -38898,7 +38898,7 @@
                 <a:ea typeface="Helvetica" pitchFamily="34" charset="-122"/>
                 <a:cs typeface="Helvetica" pitchFamily="34" charset="-120"/>
               </a:rPr>
-              <a:t>VIRTUAL SERVER FOR CLASSIC</a:t>
+              <a:t>VIRTUAL ROUTER APPLIANCE</a:t>
             </a:r>
             <a:endParaRPr lang="en-US" dirty="0"/>
           </a:p>
@@ -38931,7 +38931,7 @@
       </p:sp>
       <p:pic>
         <p:nvPicPr>
-          <p:cNvPr id="72" name="Object 71" descr="public/generated/icons/is.instance.png">    </p:cNvPr>
+          <p:cNvPr id="72" name="Object 71" descr="public/generated/icons/virtual-server-group.png">    </p:cNvPr>
           <p:cNvPicPr>
             <a:picLocks noChangeAspect="1"/>
           </p:cNvPicPr>
@@ -38987,7 +38987,7 @@
                 <a:ea typeface="Helvetica" pitchFamily="34" charset="-122"/>
                 <a:cs typeface="Helvetica" pitchFamily="34" charset="-120"/>
               </a:rPr>
-              <a:t>VIRTUAL SERVER FOR VPC</a:t>
+              <a:t>VIRTUAL SERVER FOR CLASSIC</a:t>
             </a:r>
             <a:endParaRPr lang="en-US" dirty="0"/>
           </a:p>
@@ -39020,7 +39020,7 @@
       </p:sp>
       <p:pic>
         <p:nvPicPr>
-          <p:cNvPr id="75" name="Object 74" descr="public/generated/icons/15.png">    </p:cNvPr>
+          <p:cNvPr id="75" name="Object 74" descr="public/generated/icons/is.instance.png">    </p:cNvPr>
           <p:cNvPicPr>
             <a:picLocks noChangeAspect="1"/>
           </p:cNvPicPr>
@@ -39076,7 +39076,7 @@
                 <a:ea typeface="Helvetica" pitchFamily="34" charset="-122"/>
                 <a:cs typeface="Helvetica" pitchFamily="34" charset="-120"/>
               </a:rPr>
-              <a:t>VLAN</a:t>
+              <a:t>VIRTUAL SERVER FOR VPC</a:t>
             </a:r>
             <a:endParaRPr lang="en-US" dirty="0"/>
           </a:p>
@@ -39109,7 +39109,7 @@
       </p:sp>
       <p:pic>
         <p:nvPicPr>
-          <p:cNvPr id="78" name="Object 77" descr="public/generated/icons/09f5a6ea-185e-4625-8281-9e8629360a4f.png">    </p:cNvPr>
+          <p:cNvPr id="78" name="Object 77" descr="public/generated/icons/15.png">    </p:cNvPr>
           <p:cNvPicPr>
             <a:picLocks noChangeAspect="1"/>
           </p:cNvPicPr>
@@ -39165,7 +39165,7 @@
                 <a:ea typeface="Helvetica" pitchFamily="34" charset="-122"/>
                 <a:cs typeface="Helvetica" pitchFamily="34" charset="-120"/>
               </a:rPr>
-              <a:t>VMWARE CLOUD MIGRATION SERVICES</a:t>
+              <a:t>VLAN</a:t>
             </a:r>
             <a:endParaRPr lang="en-US" dirty="0"/>
           </a:p>
@@ -39198,7 +39198,7 @@
       </p:sp>
       <p:pic>
         <p:nvPicPr>
-          <p:cNvPr id="81" name="Object 80" descr="public/generated/icons/cf329950-0a3e-11e8-922e-f1366c6e1c83.png">    </p:cNvPr>
+          <p:cNvPr id="81" name="Object 80" descr="public/generated/icons/09f5a6ea-185e-4625-8281-9e8629360a4f.png">    </p:cNvPr>
           <p:cNvPicPr>
             <a:picLocks noChangeAspect="1"/>
           </p:cNvPicPr>
@@ -39254,7 +39254,7 @@
                 <a:ea typeface="Helvetica" pitchFamily="34" charset="-122"/>
                 <a:cs typeface="Helvetica" pitchFamily="34" charset="-120"/>
               </a:rPr>
-              <a:t>VMWARE SOLUTIONS</a:t>
+              <a:t>VMWARE CLOUD MIGRATION SERVICES</a:t>
             </a:r>
             <a:endParaRPr lang="en-US" dirty="0"/>
           </a:p>
@@ -39287,7 +39287,7 @@
       </p:sp>
       <p:pic>
         <p:nvPicPr>
-          <p:cNvPr id="84" name="Object 83" descr="public/generated/icons/cf329950-0a3e-11e8-922e-f1366c6e1c83-vcenterserver.png">    </p:cNvPr>
+          <p:cNvPr id="84" name="Object 83" descr="public/generated/icons/cf329950-0a3e-11e8-922e-f1366c6e1c83.png">    </p:cNvPr>
           <p:cNvPicPr>
             <a:picLocks noChangeAspect="1"/>
           </p:cNvPicPr>
@@ -39343,7 +39343,7 @@
                 <a:ea typeface="Helvetica" pitchFamily="34" charset="-122"/>
                 <a:cs typeface="Helvetica" pitchFamily="34" charset="-120"/>
               </a:rPr>
-              <a:t>VMWARE VCENTER SERVER</a:t>
+              <a:t>VMWARE SOLUTIONS</a:t>
             </a:r>
             <a:endParaRPr lang="en-US" dirty="0"/>
           </a:p>
@@ -39376,7 +39376,7 @@
       </p:sp>
       <p:pic>
         <p:nvPicPr>
-          <p:cNvPr id="87" name="Object 86" descr="public/generated/icons/cf329950-0a3e-11e8-922e-f1366c6e1c83-vsphere.png">    </p:cNvPr>
+          <p:cNvPr id="87" name="Object 86" descr="public/generated/icons/cf329950-0a3e-11e8-922e-f1366c6e1c83-vcenterserver.png">    </p:cNvPr>
           <p:cNvPicPr>
             <a:picLocks noChangeAspect="1"/>
           </p:cNvPicPr>
@@ -39432,7 +39432,7 @@
                 <a:ea typeface="Helvetica" pitchFamily="34" charset="-122"/>
                 <a:cs typeface="Helvetica" pitchFamily="34" charset="-120"/>
               </a:rPr>
-              <a:t>VMWARE VSPHERE</a:t>
+              <a:t>VMWARE VCENTER SERVER</a:t>
             </a:r>
             <a:endParaRPr lang="en-US" dirty="0"/>
           </a:p>
@@ -39465,7 +39465,7 @@
       </p:sp>
       <p:pic>
         <p:nvPicPr>
-          <p:cNvPr id="90" name="Object 89" descr="public/generated/icons/b6670b68-84ca-4a04-b8e8-c567dfeeddde.png">    </p:cNvPr>
+          <p:cNvPr id="90" name="Object 89" descr="public/generated/icons/cf329950-0a3e-11e8-922e-f1366c6e1c83-vsphere.png">    </p:cNvPr>
           <p:cNvPicPr>
             <a:picLocks noChangeAspect="1"/>
           </p:cNvPicPr>
@@ -39521,7 +39521,7 @@
                 <a:ea typeface="Helvetica" pitchFamily="34" charset="-122"/>
                 <a:cs typeface="Helvetica" pitchFamily="34" charset="-120"/>
               </a:rPr>
-              <a:t>VPC COAAS (VPC COST OPTIMIZATION AS A SERVICE)</a:t>
+              <a:t>VMWARE VSPHERE</a:t>
             </a:r>
             <a:endParaRPr lang="en-US" dirty="0"/>
           </a:p>
@@ -39554,7 +39554,7 @@
       </p:sp>
       <p:pic>
         <p:nvPicPr>
-          <p:cNvPr id="93" name="Object 92" descr="public/generated/icons/757254b0-a9a0-11ea-9ff6-17a22eb543c5.png">    </p:cNvPr>
+          <p:cNvPr id="93" name="Object 92" descr="public/generated/icons/b6670b68-84ca-4a04-b8e8-c567dfeeddde.png">    </p:cNvPr>
           <p:cNvPicPr>
             <a:picLocks noChangeAspect="1"/>
           </p:cNvPicPr>
@@ -39610,7 +39610,7 @@
                 <a:ea typeface="Helvetica" pitchFamily="34" charset="-122"/>
                 <a:cs typeface="Helvetica" pitchFamily="34" charset="-120"/>
               </a:rPr>
-              <a:t>VPC+ CLOUD MIGRATION</a:t>
+              <a:t>VPC COAAS (VPC COST OPTIMIZATION AS A SERVICE)</a:t>
             </a:r>
             <a:endParaRPr lang="en-US" dirty="0"/>
           </a:p>
@@ -39643,7 +39643,7 @@
       </p:sp>
       <p:pic>
         <p:nvPicPr>
-          <p:cNvPr id="96" name="Object 95" descr="public/generated/icons/fd1e0240-dd95-11eb-b4a0-db1c9221b8a2.png">    </p:cNvPr>
+          <p:cNvPr id="96" name="Object 95" descr="public/generated/icons/757254b0-a9a0-11ea-9ff6-17a22eb543c5.png">    </p:cNvPr>
           <p:cNvPicPr>
             <a:picLocks noChangeAspect="1"/>
           </p:cNvPicPr>
@@ -39699,7 +39699,7 @@
                 <a:ea typeface="Helvetica" pitchFamily="34" charset="-122"/>
                 <a:cs typeface="Helvetica" pitchFamily="34" charset="-120"/>
               </a:rPr>
-              <a:t>VPC+ DRAAS (VPC+ DISASTER RECOVERY AS A SERVICE)</a:t>
+              <a:t>VPC+ CLOUD MIGRATION</a:t>
             </a:r>
             <a:endParaRPr lang="en-US" dirty="0"/>
           </a:p>
@@ -39732,7 +39732,7 @@
       </p:sp>
       <p:pic>
         <p:nvPicPr>
-          <p:cNvPr id="99" name="Object 98" descr="public/generated/icons/is.vpn.png">    </p:cNvPr>
+          <p:cNvPr id="99" name="Object 98" descr="public/generated/icons/fd1e0240-dd95-11eb-b4a0-db1c9221b8a2.png">    </p:cNvPr>
           <p:cNvPicPr>
             <a:picLocks noChangeAspect="1"/>
           </p:cNvPicPr>
@@ -39788,7 +39788,7 @@
                 <a:ea typeface="Helvetica" pitchFamily="34" charset="-122"/>
                 <a:cs typeface="Helvetica" pitchFamily="34" charset="-120"/>
               </a:rPr>
-              <a:t>VPN FOR VPC</a:t>
+              <a:t>VPC+ DRAAS (VPC+ DISASTER RECOVERY AS A SERVICE)</a:t>
             </a:r>
             <a:endParaRPr lang="en-US" dirty="0"/>
           </a:p>
@@ -39821,7 +39821,7 @@
       </p:sp>
       <p:pic>
         <p:nvPicPr>
-          <p:cNvPr id="102" name="Object 101" descr="public/generated/icons/cf329950-0a3e-11e8-922e-f1366c6e1c83-vrops.png">    </p:cNvPr>
+          <p:cNvPr id="102" name="Object 101" descr="public/generated/icons/is.vpn.png">    </p:cNvPr>
           <p:cNvPicPr>
             <a:picLocks noChangeAspect="1"/>
           </p:cNvPicPr>
@@ -39877,7 +39877,7 @@
                 <a:ea typeface="Helvetica" pitchFamily="34" charset="-122"/>
                 <a:cs typeface="Helvetica" pitchFamily="34" charset="-120"/>
               </a:rPr>
-              <a:t>VREALIZE OPERATIONS AND LOG INSIGHT</a:t>
+              <a:t>VPN FOR VPC</a:t>
             </a:r>
             <a:endParaRPr lang="en-US" dirty="0"/>
           </a:p>
@@ -39910,7 +39910,7 @@
       </p:sp>
       <p:pic>
         <p:nvPicPr>
-          <p:cNvPr id="105" name="Object 104" descr="public/generated/icons/76b7bf22-b443-47db-b3db-066ba2988f47.png">    </p:cNvPr>
+          <p:cNvPr id="105" name="Object 104" descr="public/generated/icons/cf329950-0a3e-11e8-922e-f1366c6e1c83-vrops.png">    </p:cNvPr>
           <p:cNvPicPr>
             <a:picLocks noChangeAspect="1"/>
           </p:cNvPicPr>
@@ -39966,7 +39966,7 @@
                 <a:ea typeface="Helvetica" pitchFamily="34" charset="-122"/>
                 <a:cs typeface="Helvetica" pitchFamily="34" charset="-120"/>
               </a:rPr>
-              <a:t>WATSON DISCOVERY</a:t>
+              <a:t>VREALIZE OPERATIONS AND LOG INSIGHT</a:t>
             </a:r>
             <a:endParaRPr lang="en-US" dirty="0"/>
           </a:p>
@@ -39999,7 +39999,7 @@
       </p:sp>
       <p:pic>
         <p:nvPicPr>
-          <p:cNvPr id="108" name="Object 107" descr="public/generated/icons/12fbfff4-12c7-ccd0-80e6-603e8607468a.png">    </p:cNvPr>
+          <p:cNvPr id="108" name="Object 107" descr="public/generated/icons/76b7bf22-b443-47db-b3db-066ba2988f47.png">    </p:cNvPr>
           <p:cNvPicPr>
             <a:picLocks noChangeAspect="1"/>
           </p:cNvPicPr>
@@ -40055,7 +40055,7 @@
                 <a:ea typeface="Helvetica" pitchFamily="34" charset="-122"/>
                 <a:cs typeface="Helvetica" pitchFamily="34" charset="-120"/>
               </a:rPr>
-              <a:t>WATSONX</a:t>
+              <a:t>WATSON DISCOVERY</a:t>
             </a:r>
             <a:endParaRPr lang="en-US" dirty="0"/>
           </a:p>
@@ -40121,7 +40121,7 @@
       </p:sp>
       <p:pic>
         <p:nvPicPr>
-          <p:cNvPr id="3" name="Object 2" descr="public/generated/icons/7045626d-55e3-4418-be11-683a26dbc1e5.png">    </p:cNvPr>
+          <p:cNvPr id="3" name="Object 2" descr="public/generated/icons/12fbfff4-12c7-ccd0-80e6-603e8607468a.png">    </p:cNvPr>
           <p:cNvPicPr>
             <a:picLocks noChangeAspect="1"/>
           </p:cNvPicPr>
@@ -40177,7 +40177,7 @@
                 <a:ea typeface="Helvetica" pitchFamily="34" charset="-122"/>
                 <a:cs typeface="Helvetica" pitchFamily="34" charset="-120"/>
               </a:rPr>
-              <a:t>WATSONX ASSISTANT</a:t>
+              <a:t>WATSONX</a:t>
             </a:r>
             <a:endParaRPr lang="en-US" dirty="0"/>
           </a:p>
@@ -40210,7 +40210,7 @@
       </p:sp>
       <p:pic>
         <p:nvPicPr>
-          <p:cNvPr id="6" name="Object 5" descr="public/generated/icons/11530fa0-1776-11ee-93f6-1d4066e6a409.png">    </p:cNvPr>
+          <p:cNvPr id="6" name="Object 5" descr="public/generated/icons/7045626d-55e3-4418-be11-683a26dbc1e5.png">    </p:cNvPr>
           <p:cNvPicPr>
             <a:picLocks noChangeAspect="1"/>
           </p:cNvPicPr>
@@ -40266,7 +40266,7 @@
                 <a:ea typeface="Helvetica" pitchFamily="34" charset="-122"/>
                 <a:cs typeface="Helvetica" pitchFamily="34" charset="-120"/>
               </a:rPr>
-              <a:t>WATSONX CODE ASSISTANT</a:t>
+              <a:t>WATSONX ASSISTANT</a:t>
             </a:r>
             <a:endParaRPr lang="en-US" dirty="0"/>
           </a:p>
@@ -40299,7 +40299,7 @@
       </p:sp>
       <p:pic>
         <p:nvPicPr>
-          <p:cNvPr id="9" name="Object 8" descr="public/generated/icons/b69f78c0-11d7-11ef-9bdf-c92eb40d1838.png">    </p:cNvPr>
+          <p:cNvPr id="9" name="Object 8" descr="public/generated/icons/11530fa0-1776-11ee-93f6-1d4066e6a409.png">    </p:cNvPr>
           <p:cNvPicPr>
             <a:picLocks noChangeAspect="1"/>
           </p:cNvPicPr>
@@ -40355,7 +40355,7 @@
                 <a:ea typeface="Helvetica" pitchFamily="34" charset="-122"/>
                 <a:cs typeface="Helvetica" pitchFamily="34" charset="-120"/>
               </a:rPr>
-              <a:t>WATSONX ORCHESTRATE</a:t>
+              <a:t>WATSONX CODE ASSISTANT</a:t>
             </a:r>
             <a:endParaRPr lang="en-US" dirty="0"/>
           </a:p>
@@ -40388,7 +40388,7 @@
       </p:sp>
       <p:pic>
         <p:nvPicPr>
-          <p:cNvPr id="12" name="Object 11" descr="public/generated/icons/51c53b72-918f-4869-b834-2d99eb28422a.png">    </p:cNvPr>
+          <p:cNvPr id="12" name="Object 11" descr="public/generated/icons/b69f78c0-11d7-11ef-9bdf-c92eb40d1838.png">    </p:cNvPr>
           <p:cNvPicPr>
             <a:picLocks noChangeAspect="1"/>
           </p:cNvPicPr>
@@ -40444,7 +40444,7 @@
                 <a:ea typeface="Helvetica" pitchFamily="34" charset="-122"/>
                 <a:cs typeface="Helvetica" pitchFamily="34" charset="-120"/>
               </a:rPr>
-              <a:t>WATSONX.AI RUNTIME</a:t>
+              <a:t>WATSONX ORCHESTRATE</a:t>
             </a:r>
             <a:endParaRPr lang="en-US" dirty="0"/>
           </a:p>
@@ -40477,7 +40477,7 @@
       </p:sp>
       <p:pic>
         <p:nvPicPr>
-          <p:cNvPr id="15" name="Object 14" descr="public/generated/icons/39ba9d4c-b1c5-4cc3-a163-38b580121e01.png">    </p:cNvPr>
+          <p:cNvPr id="15" name="Object 14" descr="public/generated/icons/51c53b72-918f-4869-b834-2d99eb28422a.png">    </p:cNvPr>
           <p:cNvPicPr>
             <a:picLocks noChangeAspect="1"/>
           </p:cNvPicPr>
@@ -40533,7 +40533,7 @@
                 <a:ea typeface="Helvetica" pitchFamily="34" charset="-122"/>
                 <a:cs typeface="Helvetica" pitchFamily="34" charset="-120"/>
               </a:rPr>
-              <a:t>WATSONX.AI STUDIO</a:t>
+              <a:t>WATSONX.AI RUNTIME</a:t>
             </a:r>
             <a:endParaRPr lang="en-US" dirty="0"/>
           </a:p>
@@ -40566,7 +40566,7 @@
       </p:sp>
       <p:pic>
         <p:nvPicPr>
-          <p:cNvPr id="18" name="Object 17" descr="public/generated/icons/43834340-4a6d-11ed-97d2-959039ad2a2e.png">    </p:cNvPr>
+          <p:cNvPr id="18" name="Object 17" descr="public/generated/icons/39ba9d4c-b1c5-4cc3-a163-38b580121e01.png">    </p:cNvPr>
           <p:cNvPicPr>
             <a:picLocks noChangeAspect="1"/>
           </p:cNvPicPr>
@@ -40622,7 +40622,7 @@
                 <a:ea typeface="Helvetica" pitchFamily="34" charset="-122"/>
                 <a:cs typeface="Helvetica" pitchFamily="34" charset="-120"/>
               </a:rPr>
-              <a:t>WATSONX.DATA</a:t>
+              <a:t>WATSONX.AI STUDIO</a:t>
             </a:r>
             <a:endParaRPr lang="en-US" dirty="0"/>
           </a:p>
@@ -40655,7 +40655,7 @@
       </p:sp>
       <p:pic>
         <p:nvPicPr>
-          <p:cNvPr id="21" name="Object 20" descr="public/generated/icons/2ad019f3-0fd6-4c25-966d-f3952481a870.png">    </p:cNvPr>
+          <p:cNvPr id="21" name="Object 20" descr="public/generated/icons/43834340-4a6d-11ed-97d2-959039ad2a2e.png">    </p:cNvPr>
           <p:cNvPicPr>
             <a:picLocks noChangeAspect="1"/>
           </p:cNvPicPr>
@@ -40711,7 +40711,7 @@
                 <a:ea typeface="Helvetica" pitchFamily="34" charset="-122"/>
                 <a:cs typeface="Helvetica" pitchFamily="34" charset="-120"/>
               </a:rPr>
-              <a:t>WATSONX.GOVERNANCE</a:t>
+              <a:t>WATSONX.DATA</a:t>
             </a:r>
             <a:endParaRPr lang="en-US" dirty="0"/>
           </a:p>
@@ -40744,7 +40744,7 @@
       </p:sp>
       <p:pic>
         <p:nvPicPr>
-          <p:cNvPr id="24" name="Object 23" descr="public/generated/icons/cf329950-0a3e-11e8-922e-f1366c6e1c83-zerto.png">    </p:cNvPr>
+          <p:cNvPr id="24" name="Object 23" descr="public/generated/icons/2ad019f3-0fd6-4c25-966d-f3952481a870.png">    </p:cNvPr>
           <p:cNvPicPr>
             <a:picLocks noChangeAspect="1"/>
           </p:cNvPicPr>
@@ -40775,6 +40775,95 @@
         <p:spPr>
           <a:xfrm>
             <a:off x="6583680" y="777240"/>
+            <a:ext cx="640080" cy="274320"/>
+          </a:xfrm>
+          <a:prstGeom prst="rect">
+            <a:avLst/>
+          </a:prstGeom>
+          <a:noFill/>
+        </p:spPr>
+        <p:txBody>
+          <a:bodyPr wrap="square" rtlCol="0" anchor="t" bIns="0" lIns="0" rIns="0" tIns="0">
+            <a:spAutoFit/>
+          </a:bodyPr>
+          <a:lstStyle/>
+          <a:p>
+            <a:pPr algn="ctr">
+              <a:buNone/>
+            </a:pPr>
+            <a:r>
+              <a:rPr lang="en-US" b="1" sz="600" dirty="0" smtClean="0">
+                <a:solidFill>
+                  <a:srgbClr val="646365"/>
+                </a:solidFill>
+                <a:latin typeface="Helvetica" pitchFamily="34" charset="0"/>
+                <a:ea typeface="Helvetica" pitchFamily="34" charset="-122"/>
+                <a:cs typeface="Helvetica" pitchFamily="34" charset="-120"/>
+              </a:rPr>
+              <a:t>WATSONX.GOVERNANCE</a:t>
+            </a:r>
+            <a:endParaRPr lang="en-US" dirty="0"/>
+          </a:p>
+        </p:txBody>
+      </p:sp>
+      <p:sp>
+        <p:nvSpPr>
+          <p:cNvPr id="26" name="Object 25"/>
+          <p:cNvSpPr/>
+          <p:nvPr/>
+        </p:nvSpPr>
+        <p:spPr>
+          <a:xfrm>
+            <a:off x="7589520" y="274320"/>
+            <a:ext cx="457200" cy="457200"/>
+          </a:xfrm>
+          <a:prstGeom prst="ellipse">
+            <a:avLst/>
+          </a:prstGeom>
+          <a:solidFill>
+            <a:srgbClr val="FFFFFF"/>
+          </a:solidFill>
+          <a:ln w="19050">
+            <a:solidFill>
+              <a:srgbClr val="646365"/>
+            </a:solidFill>
+            <a:prstDash val="solid"/>
+          </a:ln>
+        </p:spPr>
+      </p:sp>
+      <p:pic>
+        <p:nvPicPr>
+          <p:cNvPr id="27" name="Object 26" descr="public/generated/icons/cf329950-0a3e-11e8-922e-f1366c6e1c83-zerto.png">    </p:cNvPr>
+          <p:cNvPicPr>
+            <a:picLocks noChangeAspect="1"/>
+          </p:cNvPicPr>
+          <p:nvPr/>
+        </p:nvPicPr>
+        <p:blipFill>
+          <a:blip r:embed="rId9"/>
+          <a:stretch>
+            <a:fillRect/>
+          </a:stretch>
+        </p:blipFill>
+        <p:spPr>
+          <a:xfrm>
+            <a:off x="7680960" y="365760"/>
+            <a:ext cx="274320" cy="274320"/>
+          </a:xfrm>
+          <a:prstGeom prst="rect">
+            <a:avLst/>
+          </a:prstGeom>
+        </p:spPr>
+      </p:pic>
+      <p:sp>
+        <p:nvSpPr>
+          <p:cNvPr id="28" name="Object 27"/>
+          <p:cNvSpPr/>
+          <p:nvPr/>
+        </p:nvSpPr>
+        <p:spPr>
+          <a:xfrm>
+            <a:off x="7498080" y="777240"/>
             <a:ext cx="640080" cy="274320"/>
           </a:xfrm>
           <a:prstGeom prst="rect">

--- a/mycatalog-architecture-diagram-template.pptx
+++ b/mycatalog-architecture-diagram-template.pptx
@@ -524,7 +524,7 @@
           <a:p>
             <a:r>
               <a:rPr lang="en-US" dirty="0" smtClean="0"/>
-              <a:t>Generated on Sun Apr 13 2025 07:06:08 GMT+0000 (Coordinated Universal Time)</a:t>
+              <a:t>Generated on Sun Apr 27 2025 07:05:30 GMT+0000 (Coordinated Universal Time)</a:t>
             </a:r>
             <a:endParaRPr lang="en-US" dirty="0"/>
           </a:p>
@@ -26161,7 +26161,7 @@
       </p:sp>
       <p:pic>
         <p:nvPicPr>
-          <p:cNvPr id="78" name="Object 77" descr="public/generated/icons/databases-for-etcd.png">    </p:cNvPr>
+          <p:cNvPr id="78" name="Object 77" descr="public/generated/icons/databases-for-mongodb.png">    </p:cNvPr>
           <p:cNvPicPr>
             <a:picLocks noChangeAspect="1"/>
           </p:cNvPicPr>
@@ -26217,7 +26217,7 @@
                 <a:ea typeface="Helvetica" pitchFamily="34" charset="-122"/>
                 <a:cs typeface="Helvetica" pitchFamily="34" charset="-120"/>
               </a:rPr>
-              <a:t>DATABASES FOR ETCD</a:t>
+              <a:t>DATABASES FOR MONGODB</a:t>
             </a:r>
             <a:endParaRPr lang="en-US" dirty="0"/>
           </a:p>
@@ -26250,7 +26250,7 @@
       </p:sp>
       <p:pic>
         <p:nvPicPr>
-          <p:cNvPr id="81" name="Object 80" descr="public/generated/icons/databases-for-mongodb.png">    </p:cNvPr>
+          <p:cNvPr id="81" name="Object 80" descr="public/generated/icons/databases-for-mysql.png">    </p:cNvPr>
           <p:cNvPicPr>
             <a:picLocks noChangeAspect="1"/>
           </p:cNvPicPr>
@@ -26306,7 +26306,7 @@
                 <a:ea typeface="Helvetica" pitchFamily="34" charset="-122"/>
                 <a:cs typeface="Helvetica" pitchFamily="34" charset="-120"/>
               </a:rPr>
-              <a:t>DATABASES FOR MONGODB</a:t>
+              <a:t>DATABASES FOR MYSQL</a:t>
             </a:r>
             <a:endParaRPr lang="en-US" dirty="0"/>
           </a:p>
@@ -26339,7 +26339,7 @@
       </p:sp>
       <p:pic>
         <p:nvPicPr>
-          <p:cNvPr id="84" name="Object 83" descr="public/generated/icons/databases-for-mysql.png">    </p:cNvPr>
+          <p:cNvPr id="84" name="Object 83" descr="public/generated/icons/databases-for-postgresql.png">    </p:cNvPr>
           <p:cNvPicPr>
             <a:picLocks noChangeAspect="1"/>
           </p:cNvPicPr>
@@ -26395,7 +26395,7 @@
                 <a:ea typeface="Helvetica" pitchFamily="34" charset="-122"/>
                 <a:cs typeface="Helvetica" pitchFamily="34" charset="-120"/>
               </a:rPr>
-              <a:t>DATABASES FOR MYSQL</a:t>
+              <a:t>DATABASES FOR POSTGRESQL</a:t>
             </a:r>
             <a:endParaRPr lang="en-US" dirty="0"/>
           </a:p>
@@ -26428,7 +26428,7 @@
       </p:sp>
       <p:pic>
         <p:nvPicPr>
-          <p:cNvPr id="87" name="Object 86" descr="public/generated/icons/databases-for-postgresql.png">    </p:cNvPr>
+          <p:cNvPr id="87" name="Object 86" descr="public/generated/icons/databases-for-redis.png">    </p:cNvPr>
           <p:cNvPicPr>
             <a:picLocks noChangeAspect="1"/>
           </p:cNvPicPr>
@@ -26484,7 +26484,7 @@
                 <a:ea typeface="Helvetica" pitchFamily="34" charset="-122"/>
                 <a:cs typeface="Helvetica" pitchFamily="34" charset="-120"/>
               </a:rPr>
-              <a:t>DATABASES FOR POSTGRESQL</a:t>
+              <a:t>DATABASES FOR REDIS</a:t>
             </a:r>
             <a:endParaRPr lang="en-US" dirty="0"/>
           </a:p>
@@ -26517,7 +26517,7 @@
       </p:sp>
       <p:pic>
         <p:nvPicPr>
-          <p:cNvPr id="90" name="Object 89" descr="public/generated/icons/databases-for-redis.png">    </p:cNvPr>
+          <p:cNvPr id="90" name="Object 89" descr="public/generated/icons/dd0532c0-f87c-11ea-be25-c9dc051df74f.png">    </p:cNvPr>
           <p:cNvPicPr>
             <a:picLocks noChangeAspect="1"/>
           </p:cNvPicPr>
@@ -26573,7 +26573,7 @@
                 <a:ea typeface="Helvetica" pitchFamily="34" charset="-122"/>
                 <a:cs typeface="Helvetica" pitchFamily="34" charset="-120"/>
               </a:rPr>
-              <a:t>DATABASES FOR REDIS</a:t>
+              <a:t>DATASTAGE</a:t>
             </a:r>
             <a:endParaRPr lang="en-US" dirty="0"/>
           </a:p>
@@ -26606,7 +26606,7 @@
       </p:sp>
       <p:pic>
         <p:nvPicPr>
-          <p:cNvPr id="93" name="Object 92" descr="public/generated/icons/dd0532c0-f87c-11ea-be25-c9dc051df74f.png">    </p:cNvPr>
+          <p:cNvPr id="93" name="Object 92" descr="public/generated/icons/dashdb-for-transactions.png">    </p:cNvPr>
           <p:cNvPicPr>
             <a:picLocks noChangeAspect="1"/>
           </p:cNvPicPr>
@@ -26662,7 +26662,7 @@
                 <a:ea typeface="Helvetica" pitchFamily="34" charset="-122"/>
                 <a:cs typeface="Helvetica" pitchFamily="34" charset="-120"/>
               </a:rPr>
-              <a:t>DATASTAGE</a:t>
+              <a:t>DB2</a:t>
             </a:r>
             <a:endParaRPr lang="en-US" dirty="0"/>
           </a:p>
@@ -26695,7 +26695,7 @@
       </p:sp>
       <p:pic>
         <p:nvPicPr>
-          <p:cNvPr id="96" name="Object 95" descr="public/generated/icons/dashdb-for-transactions.png">    </p:cNvPr>
+          <p:cNvPr id="96" name="Object 95" descr="public/generated/icons/9e02e72d-00ce-4220-b44c-650c8314e58a.png">    </p:cNvPr>
           <p:cNvPicPr>
             <a:picLocks noChangeAspect="1"/>
           </p:cNvPicPr>
@@ -26751,7 +26751,7 @@
                 <a:ea typeface="Helvetica" pitchFamily="34" charset="-122"/>
                 <a:cs typeface="Helvetica" pitchFamily="34" charset="-120"/>
               </a:rPr>
-              <a:t>DB2</a:t>
+              <a:t>DB2 WAREHOUSE</a:t>
             </a:r>
             <a:endParaRPr lang="en-US" dirty="0"/>
           </a:p>
@@ -26784,7 +26784,7 @@
       </p:sp>
       <p:pic>
         <p:nvPicPr>
-          <p:cNvPr id="99" name="Object 98" descr="public/generated/icons/9e02e72d-00ce-4220-b44c-650c8314e58a.png">    </p:cNvPr>
+          <p:cNvPr id="99" name="Object 98" descr="public/generated/icons/is.dedicated-host.png">    </p:cNvPr>
           <p:cNvPicPr>
             <a:picLocks noChangeAspect="1"/>
           </p:cNvPicPr>
@@ -26840,7 +26840,7 @@
                 <a:ea typeface="Helvetica" pitchFamily="34" charset="-122"/>
                 <a:cs typeface="Helvetica" pitchFamily="34" charset="-120"/>
               </a:rPr>
-              <a:t>DB2 WAREHOUSE</a:t>
+              <a:t>DEDICATED HOST FOR VPC</a:t>
             </a:r>
             <a:endParaRPr lang="en-US" dirty="0"/>
           </a:p>
@@ -26873,7 +26873,7 @@
       </p:sp>
       <p:pic>
         <p:nvPicPr>
-          <p:cNvPr id="102" name="Object 101" descr="public/generated/icons/is.dedicated-host.png">    </p:cNvPr>
+          <p:cNvPr id="102" name="Object 101" descr="public/generated/icons/86fb7610-0f92-11ea-a6a3-8b96ed1570d8.png">    </p:cNvPr>
           <p:cNvPicPr>
             <a:picLocks noChangeAspect="1"/>
           </p:cNvPicPr>
@@ -26929,7 +26929,7 @@
                 <a:ea typeface="Helvetica" pitchFamily="34" charset="-122"/>
                 <a:cs typeface="Helvetica" pitchFamily="34" charset="-120"/>
               </a:rPr>
-              <a:t>DEDICATED HOST FOR VPC</a:t>
+              <a:t>DIRECT LINK CONNECT</a:t>
             </a:r>
             <a:endParaRPr lang="en-US" dirty="0"/>
           </a:p>
@@ -26962,7 +26962,7 @@
       </p:sp>
       <p:pic>
         <p:nvPicPr>
-          <p:cNvPr id="105" name="Object 104" descr="public/generated/icons/86fb7610-0f92-11ea-a6a3-8b96ed1570d8.png">    </p:cNvPr>
+          <p:cNvPr id="105" name="Object 104" descr="public/generated/icons/7dd59b11-c3c5-5aad-f6b2-2a0c2a3e6c49.png">    </p:cNvPr>
           <p:cNvPicPr>
             <a:picLocks noChangeAspect="1"/>
           </p:cNvPicPr>
@@ -27018,7 +27018,7 @@
                 <a:ea typeface="Helvetica" pitchFamily="34" charset="-122"/>
                 <a:cs typeface="Helvetica" pitchFamily="34" charset="-120"/>
               </a:rPr>
-              <a:t>DIRECT LINK CONNECT</a:t>
+              <a:t>DIRECT LINK CONNECT ON CLASSIC</a:t>
             </a:r>
             <a:endParaRPr lang="en-US" dirty="0"/>
           </a:p>
@@ -27051,7 +27051,7 @@
       </p:sp>
       <p:pic>
         <p:nvPicPr>
-          <p:cNvPr id="108" name="Object 107" descr="public/generated/icons/7dd59b11-c3c5-5aad-f6b2-2a0c2a3e6c49.png">    </p:cNvPr>
+          <p:cNvPr id="108" name="Object 107" descr="public/generated/icons/dc11a440-6073-11e9-9f5a-2f7997ba23c0.png">    </p:cNvPr>
           <p:cNvPicPr>
             <a:picLocks noChangeAspect="1"/>
           </p:cNvPicPr>
@@ -27107,7 +27107,7 @@
                 <a:ea typeface="Helvetica" pitchFamily="34" charset="-122"/>
                 <a:cs typeface="Helvetica" pitchFamily="34" charset="-120"/>
               </a:rPr>
-              <a:t>DIRECT LINK CONNECT ON CLASSIC</a:t>
+              <a:t>DIRECT LINK DEDICATED</a:t>
             </a:r>
             <a:endParaRPr lang="en-US" dirty="0"/>
           </a:p>
@@ -27173,7 +27173,7 @@
       </p:sp>
       <p:pic>
         <p:nvPicPr>
-          <p:cNvPr id="3" name="Object 2" descr="public/generated/icons/dc11a440-6073-11e9-9f5a-2f7997ba23c0.png">    </p:cNvPr>
+          <p:cNvPr id="3" name="Object 2" descr="public/generated/icons/22.png">    </p:cNvPr>
           <p:cNvPicPr>
             <a:picLocks noChangeAspect="1"/>
           </p:cNvPicPr>
@@ -27229,7 +27229,7 @@
                 <a:ea typeface="Helvetica" pitchFamily="34" charset="-122"/>
                 <a:cs typeface="Helvetica" pitchFamily="34" charset="-120"/>
               </a:rPr>
-              <a:t>DIRECT LINK DEDICATED</a:t>
+              <a:t>DIRECT LINK DEDICATED HOSTING ON CLASSIC</a:t>
             </a:r>
             <a:endParaRPr lang="en-US" dirty="0"/>
           </a:p>
@@ -27262,7 +27262,7 @@
       </p:sp>
       <p:pic>
         <p:nvPicPr>
-          <p:cNvPr id="6" name="Object 5" descr="public/generated/icons/22.png">    </p:cNvPr>
+          <p:cNvPr id="6" name="Object 5" descr="public/generated/icons/23.png">    </p:cNvPr>
           <p:cNvPicPr>
             <a:picLocks noChangeAspect="1"/>
           </p:cNvPicPr>
@@ -27318,7 +27318,7 @@
                 <a:ea typeface="Helvetica" pitchFamily="34" charset="-122"/>
                 <a:cs typeface="Helvetica" pitchFamily="34" charset="-120"/>
               </a:rPr>
-              <a:t>DIRECT LINK DEDICATED HOSTING ON CLASSIC</a:t>
+              <a:t>DIRECT LINK DEDICATED ON CLASSIC</a:t>
             </a:r>
             <a:endParaRPr lang="en-US" dirty="0"/>
           </a:p>
@@ -27351,7 +27351,7 @@
       </p:sp>
       <p:pic>
         <p:nvPicPr>
-          <p:cNvPr id="9" name="Object 8" descr="public/generated/icons/23.png">    </p:cNvPr>
+          <p:cNvPr id="9" name="Object 8" descr="public/generated/icons/21.png">    </p:cNvPr>
           <p:cNvPicPr>
             <a:picLocks noChangeAspect="1"/>
           </p:cNvPicPr>
@@ -27407,7 +27407,7 @@
                 <a:ea typeface="Helvetica" pitchFamily="34" charset="-122"/>
                 <a:cs typeface="Helvetica" pitchFamily="34" charset="-120"/>
               </a:rPr>
-              <a:t>DIRECT LINK DEDICATED ON CLASSIC</a:t>
+              <a:t>DIRECT LINK EXCHANGE ON CLASSIC</a:t>
             </a:r>
             <a:endParaRPr lang="en-US" dirty="0"/>
           </a:p>
@@ -27440,7 +27440,7 @@
       </p:sp>
       <p:pic>
         <p:nvPicPr>
-          <p:cNvPr id="12" name="Object 11" descr="public/generated/icons/21.png">    </p:cNvPr>
+          <p:cNvPr id="12" name="Object 11" descr="public/generated/icons/9f3db814-3aec-47c5-94b0-6a71d49bd27f.png">    </p:cNvPr>
           <p:cNvPicPr>
             <a:picLocks noChangeAspect="1"/>
           </p:cNvPicPr>
@@ -27496,7 +27496,7 @@
                 <a:ea typeface="Helvetica" pitchFamily="34" charset="-122"/>
                 <a:cs typeface="Helvetica" pitchFamily="34" charset="-120"/>
               </a:rPr>
-              <a:t>DIRECT LINK EXCHANGE ON CLASSIC</a:t>
+              <a:t>DIZZION COMPLETE</a:t>
             </a:r>
             <a:endParaRPr lang="en-US" dirty="0"/>
           </a:p>
@@ -27529,7 +27529,7 @@
       </p:sp>
       <p:pic>
         <p:nvPicPr>
-          <p:cNvPr id="15" name="Object 14" descr="public/generated/icons/9f3db814-3aec-47c5-94b0-6a71d49bd27f.png">    </p:cNvPr>
+          <p:cNvPr id="15" name="Object 14" descr="public/generated/icons/9e09a2eb-b2e5-4d76-ab7c-1b2f8c080865.png">    </p:cNvPr>
           <p:cNvPicPr>
             <a:picLocks noChangeAspect="1"/>
           </p:cNvPicPr>
@@ -27585,7 +27585,7 @@
                 <a:ea typeface="Helvetica" pitchFamily="34" charset="-122"/>
                 <a:cs typeface="Helvetica" pitchFamily="34" charset="-120"/>
               </a:rPr>
-              <a:t>DIZZION COMPLETE</a:t>
+              <a:t>DIZZION COMPLETE - HORIZON</a:t>
             </a:r>
             <a:endParaRPr lang="en-US" dirty="0"/>
           </a:p>
@@ -27618,7 +27618,7 @@
       </p:sp>
       <p:pic>
         <p:nvPicPr>
-          <p:cNvPr id="18" name="Object 17" descr="public/generated/icons/9e09a2eb-b2e5-4d76-ab7c-1b2f8c080865.png">    </p:cNvPr>
+          <p:cNvPr id="18" name="Object 17" descr="public/generated/icons/79679329-2050-4779-a2e2-7210b88aed4e.png">    </p:cNvPr>
           <p:cNvPicPr>
             <a:picLocks noChangeAspect="1"/>
           </p:cNvPicPr>
@@ -27674,7 +27674,7 @@
                 <a:ea typeface="Helvetica" pitchFamily="34" charset="-122"/>
                 <a:cs typeface="Helvetica" pitchFamily="34" charset="-120"/>
               </a:rPr>
-              <a:t>DIZZION COMPLETE - HORIZON</a:t>
+              <a:t>DIZZION COMPLETE FS - HORIZON</a:t>
             </a:r>
             <a:endParaRPr lang="en-US" dirty="0"/>
           </a:p>
@@ -27707,7 +27707,7 @@
       </p:sp>
       <p:pic>
         <p:nvPicPr>
-          <p:cNvPr id="21" name="Object 20" descr="public/generated/icons/79679329-2050-4779-a2e2-7210b88aed4e.png">    </p:cNvPr>
+          <p:cNvPr id="21" name="Object 20" descr="public/generated/icons/6fc0c2df-7fbc-470f-aac5-a93af7ef4a92.png">    </p:cNvPr>
           <p:cNvPicPr>
             <a:picLocks noChangeAspect="1"/>
           </p:cNvPicPr>
@@ -27763,7 +27763,7 @@
                 <a:ea typeface="Helvetica" pitchFamily="34" charset="-122"/>
                 <a:cs typeface="Helvetica" pitchFamily="34" charset="-120"/>
               </a:rPr>
-              <a:t>DIZZION COMPLETE FS - HORIZON</a:t>
+              <a:t>DIZZION FLEX</a:t>
             </a:r>
             <a:endParaRPr lang="en-US" dirty="0"/>
           </a:p>
@@ -27796,7 +27796,7 @@
       </p:sp>
       <p:pic>
         <p:nvPicPr>
-          <p:cNvPr id="24" name="Object 23" descr="public/generated/icons/6fc0c2df-7fbc-470f-aac5-a93af7ef4a92.png">    </p:cNvPr>
+          <p:cNvPr id="24" name="Object 23" descr="public/generated/icons/72ca6b61-2aa8-4b8f-ba21-69854bd2095b.png">    </p:cNvPr>
           <p:cNvPicPr>
             <a:picLocks noChangeAspect="1"/>
           </p:cNvPicPr>
@@ -27852,7 +27852,7 @@
                 <a:ea typeface="Helvetica" pitchFamily="34" charset="-122"/>
                 <a:cs typeface="Helvetica" pitchFamily="34" charset="-120"/>
               </a:rPr>
-              <a:t>DIZZION FLEX</a:t>
+              <a:t>DIZZION MANAGED</a:t>
             </a:r>
             <a:endParaRPr lang="en-US" dirty="0"/>
           </a:p>
@@ -27885,7 +27885,7 @@
       </p:sp>
       <p:pic>
         <p:nvPicPr>
-          <p:cNvPr id="27" name="Object 26" descr="public/generated/icons/72ca6b61-2aa8-4b8f-ba21-69854bd2095b.png">    </p:cNvPr>
+          <p:cNvPr id="27" name="Object 26" descr="public/generated/icons/b4ed8a30-936f-11e9-b289-1d079699cbe5.png">    </p:cNvPr>
           <p:cNvPicPr>
             <a:picLocks noChangeAspect="1"/>
           </p:cNvPicPr>
@@ -27941,7 +27941,7 @@
                 <a:ea typeface="Helvetica" pitchFamily="34" charset="-122"/>
                 <a:cs typeface="Helvetica" pitchFamily="34" charset="-120"/>
               </a:rPr>
-              <a:t>DIZZION MANAGED</a:t>
+              <a:t>DNS SERVICES</a:t>
             </a:r>
             <a:endParaRPr lang="en-US" dirty="0"/>
           </a:p>
@@ -27974,7 +27974,7 @@
       </p:sp>
       <p:pic>
         <p:nvPicPr>
-          <p:cNvPr id="30" name="Object 29" descr="public/generated/icons/b4ed8a30-936f-11e9-b289-1d079699cbe5.png">    </p:cNvPr>
+          <p:cNvPr id="30" name="Object 29" descr="public/generated/icons/d1e3f0d2-0f49-ddfd-0eb9-2897b9d3a45d.png">    </p:cNvPr>
           <p:cNvPicPr>
             <a:picLocks noChangeAspect="1"/>
           </p:cNvPicPr>
@@ -28030,7 +28030,7 @@
                 <a:ea typeface="Helvetica" pitchFamily="34" charset="-122"/>
                 <a:cs typeface="Helvetica" pitchFamily="34" charset="-120"/>
               </a:rPr>
-              <a:t>DNS SERVICES</a:t>
+              <a:t>EMAIL DELIVERY, POWERED BY SENDGRID</a:t>
             </a:r>
             <a:endParaRPr lang="en-US" dirty="0"/>
           </a:p>
@@ -28063,7 +28063,7 @@
       </p:sp>
       <p:pic>
         <p:nvPicPr>
-          <p:cNvPr id="33" name="Object 32" descr="public/generated/icons/d1e3f0d2-0f49-ddfd-0eb9-2897b9d3a45d.png">    </p:cNvPr>
+          <p:cNvPr id="33" name="Object 32" descr="public/generated/icons/871a9870-7508-11ef-ac5c-3324c550b37a.png">    </p:cNvPr>
           <p:cNvPicPr>
             <a:picLocks noChangeAspect="1"/>
           </p:cNvPicPr>
@@ -28119,7 +28119,7 @@
                 <a:ea typeface="Helvetica" pitchFamily="34" charset="-122"/>
                 <a:cs typeface="Helvetica" pitchFamily="34" charset="-120"/>
               </a:rPr>
-              <a:t>EMAIL DELIVERY, POWERED BY SENDGRID</a:t>
+              <a:t>ENTERPRISE APPLICATION SERVICE</a:t>
             </a:r>
             <a:endParaRPr lang="en-US" dirty="0"/>
           </a:p>
@@ -28152,7 +28152,7 @@
       </p:sp>
       <p:pic>
         <p:nvPicPr>
-          <p:cNvPr id="36" name="Object 35" descr="public/generated/icons/871a9870-7508-11ef-ac5c-3324c550b37a.png">    </p:cNvPr>
+          <p:cNvPr id="36" name="Object 35" descr="public/generated/icons/64955a78-30f9-426d-a25a-344480421b27.png">    </p:cNvPr>
           <p:cNvPicPr>
             <a:picLocks noChangeAspect="1"/>
           </p:cNvPicPr>
@@ -28208,7 +28208,7 @@
                 <a:ea typeface="Helvetica" pitchFamily="34" charset="-122"/>
                 <a:cs typeface="Helvetica" pitchFamily="34" charset="-120"/>
               </a:rPr>
-              <a:t>ENTERPRISE APPLICATION SERVICE</a:t>
+              <a:t>ETICLOUD SECURE DIGITAL AGILE WORKPLACE</a:t>
             </a:r>
             <a:endParaRPr lang="en-US" dirty="0"/>
           </a:p>
@@ -28241,7 +28241,7 @@
       </p:sp>
       <p:pic>
         <p:nvPicPr>
-          <p:cNvPr id="39" name="Object 38" descr="public/generated/icons/64955a78-30f9-426d-a25a-344480421b27.png">    </p:cNvPr>
+          <p:cNvPr id="39" name="Object 38" descr="public/generated/icons/ecdb4690-c2d8-11eb-bff1-4f7b9d2dfe41.png">    </p:cNvPr>
           <p:cNvPicPr>
             <a:picLocks noChangeAspect="1"/>
           </p:cNvPicPr>
@@ -28297,7 +28297,7 @@
                 <a:ea typeface="Helvetica" pitchFamily="34" charset="-122"/>
                 <a:cs typeface="Helvetica" pitchFamily="34" charset="-120"/>
               </a:rPr>
-              <a:t>ETICLOUD SECURE DIGITAL AGILE WORKPLACE</a:t>
+              <a:t>EVENT NOTIFICATIONS</a:t>
             </a:r>
             <a:endParaRPr lang="en-US" dirty="0"/>
           </a:p>
@@ -28330,7 +28330,7 @@
       </p:sp>
       <p:pic>
         <p:nvPicPr>
-          <p:cNvPr id="42" name="Object 41" descr="public/generated/icons/ecdb4690-c2d8-11eb-bff1-4f7b9d2dfe41.png">    </p:cNvPr>
+          <p:cNvPr id="42" name="Object 41" descr="public/generated/icons/6a7f4e38-f218-48ef-9dd2-df408747568e.png">    </p:cNvPr>
           <p:cNvPicPr>
             <a:picLocks noChangeAspect="1"/>
           </p:cNvPicPr>
@@ -28386,7 +28386,7 @@
                 <a:ea typeface="Helvetica" pitchFamily="34" charset="-122"/>
                 <a:cs typeface="Helvetica" pitchFamily="34" charset="-120"/>
               </a:rPr>
-              <a:t>EVENT NOTIFICATIONS</a:t>
+              <a:t>EVENT STREAMS</a:t>
             </a:r>
             <a:endParaRPr lang="en-US" dirty="0"/>
           </a:p>
@@ -28419,7 +28419,7 @@
       </p:sp>
       <p:pic>
         <p:nvPicPr>
-          <p:cNvPr id="45" name="Object 44" descr="public/generated/icons/6a7f4e38-f218-48ef-9dd2-df408747568e.png">    </p:cNvPr>
+          <p:cNvPr id="45" name="Object 44" descr="public/generated/icons/cf329950-0a3e-11e8-922e-f1366c6e1c83-bigip.png">    </p:cNvPr>
           <p:cNvPicPr>
             <a:picLocks noChangeAspect="1"/>
           </p:cNvPicPr>
@@ -28475,7 +28475,7 @@
                 <a:ea typeface="Helvetica" pitchFamily="34" charset="-122"/>
                 <a:cs typeface="Helvetica" pitchFamily="34" charset="-120"/>
               </a:rPr>
-              <a:t>EVENT STREAMS</a:t>
+              <a:t>F5 BIG-IP</a:t>
             </a:r>
             <a:endParaRPr lang="en-US" dirty="0"/>
           </a:p>
@@ -28508,7 +28508,7 @@
       </p:sp>
       <p:pic>
         <p:nvPicPr>
-          <p:cNvPr id="48" name="Object 47" descr="public/generated/icons/cf329950-0a3e-11e8-922e-f1366c6e1c83-bigip.png">    </p:cNvPr>
+          <p:cNvPr id="48" name="Object 47" descr="public/generated/icons/60427a43-cf48-41e0-bd95-26bde9c12105.png">    </p:cNvPr>
           <p:cNvPicPr>
             <a:picLocks noChangeAspect="1"/>
           </p:cNvPicPr>
@@ -28564,7 +28564,7 @@
                 <a:ea typeface="Helvetica" pitchFamily="34" charset="-122"/>
                 <a:cs typeface="Helvetica" pitchFamily="34" charset="-120"/>
               </a:rPr>
-              <a:t>F5 BIG-IP</a:t>
+              <a:t>FALCONSTOR STORSAFE VTL FOR POWER ON-PREMISES</a:t>
             </a:r>
             <a:endParaRPr lang="en-US" dirty="0"/>
           </a:p>
@@ -28597,7 +28597,7 @@
       </p:sp>
       <p:pic>
         <p:nvPicPr>
-          <p:cNvPr id="51" name="Object 50" descr="public/generated/icons/60427a43-cf48-41e0-bd95-26bde9c12105.png">    </p:cNvPr>
+          <p:cNvPr id="51" name="Object 50" descr="public/generated/icons/6.png">    </p:cNvPr>
           <p:cNvPicPr>
             <a:picLocks noChangeAspect="1"/>
           </p:cNvPicPr>
@@ -28653,7 +28653,7 @@
                 <a:ea typeface="Helvetica" pitchFamily="34" charset="-122"/>
                 <a:cs typeface="Helvetica" pitchFamily="34" charset="-120"/>
               </a:rPr>
-              <a:t>FALCONSTOR STORSAFE VTL FOR POWER ON-PREMISES</a:t>
+              <a:t>FILE STORAGE FOR CLASSIC</a:t>
             </a:r>
             <a:endParaRPr lang="en-US" dirty="0"/>
           </a:p>
@@ -28686,7 +28686,7 @@
       </p:sp>
       <p:pic>
         <p:nvPicPr>
-          <p:cNvPr id="54" name="Object 53" descr="public/generated/icons/6.png">    </p:cNvPr>
+          <p:cNvPr id="54" name="Object 53" descr="public/generated/icons/is.share.png">    </p:cNvPr>
           <p:cNvPicPr>
             <a:picLocks noChangeAspect="1"/>
           </p:cNvPicPr>
@@ -28742,7 +28742,7 @@
                 <a:ea typeface="Helvetica" pitchFamily="34" charset="-122"/>
                 <a:cs typeface="Helvetica" pitchFamily="34" charset="-120"/>
               </a:rPr>
-              <a:t>FILE STORAGE FOR CLASSIC</a:t>
+              <a:t>FILE STORAGE FOR VPC</a:t>
             </a:r>
             <a:endParaRPr lang="en-US" dirty="0"/>
           </a:p>
@@ -28775,7 +28775,7 @@
       </p:sp>
       <p:pic>
         <p:nvPicPr>
-          <p:cNvPr id="57" name="Object 56" descr="public/generated/icons/is.share.png">    </p:cNvPr>
+          <p:cNvPr id="57" name="Object 56" descr="public/generated/icons/is.floating-ip.png">    </p:cNvPr>
           <p:cNvPicPr>
             <a:picLocks noChangeAspect="1"/>
           </p:cNvPicPr>
@@ -28831,7 +28831,7 @@
                 <a:ea typeface="Helvetica" pitchFamily="34" charset="-122"/>
                 <a:cs typeface="Helvetica" pitchFamily="34" charset="-120"/>
               </a:rPr>
-              <a:t>FILE STORAGE FOR VPC</a:t>
+              <a:t>FLOATING IP FOR VPC</a:t>
             </a:r>
             <a:endParaRPr lang="en-US" dirty="0"/>
           </a:p>
@@ -28864,7 +28864,7 @@
       </p:sp>
       <p:pic>
         <p:nvPicPr>
-          <p:cNvPr id="60" name="Object 59" descr="public/generated/icons/is.floating-ip.png">    </p:cNvPr>
+          <p:cNvPr id="60" name="Object 59" descr="public/generated/icons/is.flow-log-collector.png">    </p:cNvPr>
           <p:cNvPicPr>
             <a:picLocks noChangeAspect="1"/>
           </p:cNvPicPr>
@@ -28920,7 +28920,7 @@
                 <a:ea typeface="Helvetica" pitchFamily="34" charset="-122"/>
                 <a:cs typeface="Helvetica" pitchFamily="34" charset="-120"/>
               </a:rPr>
-              <a:t>FLOATING IP FOR VPC</a:t>
+              <a:t>FLOW LOGS FOR VPC</a:t>
             </a:r>
             <a:endParaRPr lang="en-US" dirty="0"/>
           </a:p>
@@ -28953,7 +28953,7 @@
       </p:sp>
       <p:pic>
         <p:nvPicPr>
-          <p:cNvPr id="63" name="Object 62" descr="public/generated/icons/is.flow-log-collector.png">    </p:cNvPr>
+          <p:cNvPr id="63" name="Object 62" descr="public/generated/icons/05605040-8854-4665-bd05-0b10a96daf05.png">    </p:cNvPr>
           <p:cNvPicPr>
             <a:picLocks noChangeAspect="1"/>
           </p:cNvPicPr>
@@ -29009,7 +29009,7 @@
                 <a:ea typeface="Helvetica" pitchFamily="34" charset="-122"/>
                 <a:cs typeface="Helvetica" pitchFamily="34" charset="-120"/>
               </a:rPr>
-              <a:t>FLOW LOGS FOR VPC</a:t>
+              <a:t>FNTS CLOUD MIGRATION SERVICES</a:t>
             </a:r>
             <a:endParaRPr lang="en-US" dirty="0"/>
           </a:p>
@@ -29042,7 +29042,7 @@
       </p:sp>
       <p:pic>
         <p:nvPicPr>
-          <p:cNvPr id="66" name="Object 65" descr="public/generated/icons/05605040-8854-4665-bd05-0b10a96daf05.png">    </p:cNvPr>
+          <p:cNvPr id="66" name="Object 65" descr="public/generated/icons/d2fb0ba3-1679-4053-a593-9f2259d9e87b.png">    </p:cNvPr>
           <p:cNvPicPr>
             <a:picLocks noChangeAspect="1"/>
           </p:cNvPicPr>
@@ -29098,7 +29098,7 @@
                 <a:ea typeface="Helvetica" pitchFamily="34" charset="-122"/>
                 <a:cs typeface="Helvetica" pitchFamily="34" charset="-120"/>
               </a:rPr>
-              <a:t>FNTS CLOUD MIGRATION SERVICES</a:t>
+              <a:t>FNTS MANAGED SERVICES FOR POWERVS CLOUD</a:t>
             </a:r>
             <a:endParaRPr lang="en-US" dirty="0"/>
           </a:p>
@@ -29131,7 +29131,7 @@
       </p:sp>
       <p:pic>
         <p:nvPicPr>
-          <p:cNvPr id="69" name="Object 68" descr="public/generated/icons/d2fb0ba3-1679-4053-a593-9f2259d9e87b.png">    </p:cNvPr>
+          <p:cNvPr id="69" name="Object 68" descr="public/generated/icons/cf329950-0a3e-11e8-922e-f1366c6e1c83-fortigate.png">    </p:cNvPr>
           <p:cNvPicPr>
             <a:picLocks noChangeAspect="1"/>
           </p:cNvPicPr>
@@ -29187,7 +29187,7 @@
                 <a:ea typeface="Helvetica" pitchFamily="34" charset="-122"/>
                 <a:cs typeface="Helvetica" pitchFamily="34" charset="-120"/>
               </a:rPr>
-              <a:t>FNTS MANAGED SERVICES FOR POWERVS CLOUD</a:t>
+              <a:t>FORTIGATE SECURITY APPLIANCE</a:t>
             </a:r>
             <a:endParaRPr lang="en-US" dirty="0"/>
           </a:p>
@@ -29220,7 +29220,7 @@
       </p:sp>
       <p:pic>
         <p:nvPicPr>
-          <p:cNvPr id="72" name="Object 71" descr="public/generated/icons/cf329950-0a3e-11e8-922e-f1366c6e1c83-fortigate.png">    </p:cNvPr>
+          <p:cNvPr id="72" name="Object 71" descr="public/generated/icons/f5b26324-9b39-c701-0cc5-b0d5d2fe8534.png">    </p:cNvPr>
           <p:cNvPicPr>
             <a:picLocks noChangeAspect="1"/>
           </p:cNvPicPr>
@@ -29276,7 +29276,7 @@
                 <a:ea typeface="Helvetica" pitchFamily="34" charset="-122"/>
                 <a:cs typeface="Helvetica" pitchFamily="34" charset="-120"/>
               </a:rPr>
-              <a:t>FORTIGATE SECURITY APPLIANCE</a:t>
+              <a:t>FORTIGATE SECURITY APPLIANCE 10GBPS</a:t>
             </a:r>
             <a:endParaRPr lang="en-US" dirty="0"/>
           </a:p>
@@ -29309,7 +29309,7 @@
       </p:sp>
       <p:pic>
         <p:nvPicPr>
-          <p:cNvPr id="75" name="Object 74" descr="public/generated/icons/f5b26324-9b39-c701-0cc5-b0d5d2fe8534.png">    </p:cNvPr>
+          <p:cNvPr id="75" name="Object 74" descr="public/generated/icons/cf329950-0a3e-11e8-922e-f1366c6e1c83-fortigatevm.png">    </p:cNvPr>
           <p:cNvPicPr>
             <a:picLocks noChangeAspect="1"/>
           </p:cNvPicPr>
@@ -29365,7 +29365,7 @@
                 <a:ea typeface="Helvetica" pitchFamily="34" charset="-122"/>
                 <a:cs typeface="Helvetica" pitchFamily="34" charset="-120"/>
               </a:rPr>
-              <a:t>FORTIGATE SECURITY APPLIANCE 10GBPS</a:t>
+              <a:t>FORTIGATE VIRTUAL APPLIANCE</a:t>
             </a:r>
             <a:endParaRPr lang="en-US" dirty="0"/>
           </a:p>
@@ -29398,7 +29398,7 @@
       </p:sp>
       <p:pic>
         <p:nvPicPr>
-          <p:cNvPr id="78" name="Object 77" descr="public/generated/icons/cf329950-0a3e-11e8-922e-f1366c6e1c83-fortigatevm.png">    </p:cNvPr>
+          <p:cNvPr id="78" name="Object 77" descr="public/generated/icons/a93eeacc-7012-c8bc-c851-e928949a226c.png">    </p:cNvPr>
           <p:cNvPicPr>
             <a:picLocks noChangeAspect="1"/>
           </p:cNvPicPr>
@@ -29454,7 +29454,7 @@
                 <a:ea typeface="Helvetica" pitchFamily="34" charset="-122"/>
                 <a:cs typeface="Helvetica" pitchFamily="34" charset="-120"/>
               </a:rPr>
-              <a:t>FORTIGATE VIRTUAL APPLIANCE</a:t>
+              <a:t>FORTINET VIRTUAL FORTIGATE SECURITY APPLIANCE (VFSA)</a:t>
             </a:r>
             <a:endParaRPr lang="en-US" dirty="0"/>
           </a:p>
@@ -29487,7 +29487,7 @@
       </p:sp>
       <p:pic>
         <p:nvPicPr>
-          <p:cNvPr id="81" name="Object 80" descr="public/generated/icons/a93eeacc-7012-c8bc-c851-e928949a226c.png">    </p:cNvPr>
+          <p:cNvPr id="81" name="Object 80" descr="public/generated/icons/900fb23f-fe9d-4cf8-9bb2-a82d87dede0e.png">    </p:cNvPr>
           <p:cNvPicPr>
             <a:picLocks noChangeAspect="1"/>
           </p:cNvPicPr>
@@ -29543,7 +29543,7 @@
                 <a:ea typeface="Helvetica" pitchFamily="34" charset="-122"/>
                 <a:cs typeface="Helvetica" pitchFamily="34" charset="-120"/>
               </a:rPr>
-              <a:t>FORTINET VIRTUAL FORTIGATE SECURITY APPLIANCE (VFSA)</a:t>
+              <a:t>FRESCHE KTLO APPLICATION MANAGEMENT</a:t>
             </a:r>
             <a:endParaRPr lang="en-US" dirty="0"/>
           </a:p>
@@ -29576,7 +29576,7 @@
       </p:sp>
       <p:pic>
         <p:nvPicPr>
-          <p:cNvPr id="84" name="Object 83" descr="public/generated/icons/900fb23f-fe9d-4cf8-9bb2-a82d87dede0e.png">    </p:cNvPr>
+          <p:cNvPr id="84" name="Object 83" descr="public/generated/icons/c3c7f095-67da-42e6-b982-46d0e6e79f84.png">    </p:cNvPr>
           <p:cNvPicPr>
             <a:picLocks noChangeAspect="1"/>
           </p:cNvPicPr>
@@ -29632,7 +29632,7 @@
                 <a:ea typeface="Helvetica" pitchFamily="34" charset="-122"/>
                 <a:cs typeface="Helvetica" pitchFamily="34" charset="-120"/>
               </a:rPr>
-              <a:t>FRESCHE KTLO APPLICATION MANAGEMENT</a:t>
+              <a:t>FRESCHE LPAR OPERATIONS MANAGEMENT</a:t>
             </a:r>
             <a:endParaRPr lang="en-US" dirty="0"/>
           </a:p>
@@ -29665,7 +29665,7 @@
       </p:sp>
       <p:pic>
         <p:nvPicPr>
-          <p:cNvPr id="87" name="Object 86" descr="public/generated/icons/c3c7f095-67da-42e6-b982-46d0e6e79f84.png">    </p:cNvPr>
+          <p:cNvPr id="87" name="Object 86" descr="public/generated/icons/16.png">    </p:cNvPr>
           <p:cNvPicPr>
             <a:picLocks noChangeAspect="1"/>
           </p:cNvPicPr>
@@ -29721,7 +29721,7 @@
                 <a:ea typeface="Helvetica" pitchFamily="34" charset="-122"/>
                 <a:cs typeface="Helvetica" pitchFamily="34" charset="-120"/>
               </a:rPr>
-              <a:t>FRESCHE LPAR OPERATIONS MANAGEMENT</a:t>
+              <a:t>HARDWARE FIREWALL</a:t>
             </a:r>
             <a:endParaRPr lang="en-US" dirty="0"/>
           </a:p>
@@ -29754,7 +29754,7 @@
       </p:sp>
       <p:pic>
         <p:nvPicPr>
-          <p:cNvPr id="90" name="Object 89" descr="public/generated/icons/16.png">    </p:cNvPr>
+          <p:cNvPr id="90" name="Object 89" descr="public/generated/icons/cf329950-0a3e-11e8-922e-f1366c6e1c83-hcx.png">    </p:cNvPr>
           <p:cNvPicPr>
             <a:picLocks noChangeAspect="1"/>
           </p:cNvPicPr>
@@ -29810,7 +29810,7 @@
                 <a:ea typeface="Helvetica" pitchFamily="34" charset="-122"/>
                 <a:cs typeface="Helvetica" pitchFamily="34" charset="-120"/>
               </a:rPr>
-              <a:t>HARDWARE FIREWALL</a:t>
+              <a:t>HCX</a:t>
             </a:r>
             <a:endParaRPr lang="en-US" dirty="0"/>
           </a:p>
@@ -29843,7 +29843,7 @@
       </p:sp>
       <p:pic>
         <p:nvPicPr>
-          <p:cNvPr id="93" name="Object 92" descr="public/generated/icons/cf329950-0a3e-11e8-922e-f1366c6e1c83-hcx.png">    </p:cNvPr>
+          <p:cNvPr id="93" name="Object 92" descr="public/generated/icons/3dacb5a3-de4a-4361-9f39-0b6657f89f37.png">    </p:cNvPr>
           <p:cNvPicPr>
             <a:picLocks noChangeAspect="1"/>
           </p:cNvPicPr>
@@ -29899,7 +29899,7 @@
                 <a:ea typeface="Helvetica" pitchFamily="34" charset="-122"/>
                 <a:cs typeface="Helvetica" pitchFamily="34" charset="-120"/>
               </a:rPr>
-              <a:t>HCX</a:t>
+              <a:t>HDM VMWARE WORKLOAD ANALYZER</a:t>
             </a:r>
             <a:endParaRPr lang="en-US" dirty="0"/>
           </a:p>
@@ -29932,7 +29932,7 @@
       </p:sp>
       <p:pic>
         <p:nvPicPr>
-          <p:cNvPr id="96" name="Object 95" descr="public/generated/icons/3dacb5a3-de4a-4361-9f39-0b6657f89f37.png">    </p:cNvPr>
+          <p:cNvPr id="96" name="Object 95" descr="public/generated/icons/cf329950-0a3e-11e8-922e-f1366c6e1c83-horizon.png">    </p:cNvPr>
           <p:cNvPicPr>
             <a:picLocks noChangeAspect="1"/>
           </p:cNvPicPr>
@@ -29988,7 +29988,7 @@
                 <a:ea typeface="Helvetica" pitchFamily="34" charset="-122"/>
                 <a:cs typeface="Helvetica" pitchFamily="34" charset="-120"/>
               </a:rPr>
-              <a:t>HDM VMWARE WORKLOAD ANALYZER</a:t>
+              <a:t>HORIZON 7</a:t>
             </a:r>
             <a:endParaRPr lang="en-US" dirty="0"/>
           </a:p>
@@ -30021,7 +30021,7 @@
       </p:sp>
       <p:pic>
         <p:nvPicPr>
-          <p:cNvPr id="99" name="Object 98" descr="public/generated/icons/cf329950-0a3e-11e8-922e-f1366c6e1c83-horizon.png">    </p:cNvPr>
+          <p:cNvPr id="99" name="Object 98" descr="public/generated/icons/fa329acf-f9b6-fa9f-f37e-ad72d0b6a783.png">    </p:cNvPr>
           <p:cNvPicPr>
             <a:picLocks noChangeAspect="1"/>
           </p:cNvPicPr>
@@ -30077,7 +30077,7 @@
                 <a:ea typeface="Helvetica" pitchFamily="34" charset="-122"/>
                 <a:cs typeface="Helvetica" pitchFamily="34" charset="-120"/>
               </a:rPr>
-              <a:t>HORIZON 7</a:t>
+              <a:t>HYBRID CLOUD INFRASTRUCTURE AS A SERVICE</a:t>
             </a:r>
             <a:endParaRPr lang="en-US" dirty="0"/>
           </a:p>
@@ -30110,7 +30110,7 @@
       </p:sp>
       <p:pic>
         <p:nvPicPr>
-          <p:cNvPr id="102" name="Object 101" descr="public/generated/icons/fa329acf-f9b6-fa9f-f37e-ad72d0b6a783.png">    </p:cNvPr>
+          <p:cNvPr id="102" name="Object 101" descr="public/generated/icons/d589492e-6ac0-4a11-9c28-a157851c8f68.png">    </p:cNvPr>
           <p:cNvPicPr>
             <a:picLocks noChangeAspect="1"/>
           </p:cNvPicPr>
@@ -30166,7 +30166,7 @@
                 <a:ea typeface="Helvetica" pitchFamily="34" charset="-122"/>
                 <a:cs typeface="Helvetica" pitchFamily="34" charset="-120"/>
               </a:rPr>
-              <a:t>HYBRID CLOUD INFRASTRUCTURE AS A SERVICE</a:t>
+              <a:t>HYPER PROTECT CRYPTO SERVICES</a:t>
             </a:r>
             <a:endParaRPr lang="en-US" dirty="0"/>
           </a:p>
@@ -30199,7 +30199,7 @@
       </p:sp>
       <p:pic>
         <p:nvPicPr>
-          <p:cNvPr id="105" name="Object 104" descr="public/generated/icons/d589492e-6ac0-4a11-9c28-a157851c8f68.png">    </p:cNvPr>
+          <p:cNvPr id="105" name="Object 104" descr="public/generated/icons/986f2197-9f9a-44f4-9463-f17ec64c6729.png">    </p:cNvPr>
           <p:cNvPicPr>
             <a:picLocks noChangeAspect="1"/>
           </p:cNvPicPr>
@@ -30255,7 +30255,7 @@
                 <a:ea typeface="Helvetica" pitchFamily="34" charset="-122"/>
                 <a:cs typeface="Helvetica" pitchFamily="34" charset="-120"/>
               </a:rPr>
-              <a:t>HYPER PROTECT CRYPTO SERVICES</a:t>
+              <a:t>HYPER PROTECT VIRTUAL SERVER FOR CLASSIC</a:t>
             </a:r>
             <a:endParaRPr lang="en-US" dirty="0"/>
           </a:p>
@@ -30288,7 +30288,7 @@
       </p:sp>
       <p:pic>
         <p:nvPicPr>
-          <p:cNvPr id="108" name="Object 107" descr="public/generated/icons/986f2197-9f9a-44f4-9463-f17ec64c6729.png">    </p:cNvPr>
+          <p:cNvPr id="108" name="Object 107" descr="public/generated/icons/cf329950-0a3e-11e8-922e-f1366c6e1c83-hytrustcc.png">    </p:cNvPr>
           <p:cNvPicPr>
             <a:picLocks noChangeAspect="1"/>
           </p:cNvPicPr>
@@ -30344,7 +30344,7 @@
                 <a:ea typeface="Helvetica" pitchFamily="34" charset="-122"/>
                 <a:cs typeface="Helvetica" pitchFamily="34" charset="-120"/>
               </a:rPr>
-              <a:t>HYPER PROTECT VIRTUAL SERVER FOR CLASSIC</a:t>
+              <a:t>HYTRUST CLOUDCONTROL</a:t>
             </a:r>
             <a:endParaRPr lang="en-US" dirty="0"/>
           </a:p>
@@ -30410,7 +30410,7 @@
       </p:sp>
       <p:pic>
         <p:nvPicPr>
-          <p:cNvPr id="3" name="Object 2" descr="public/generated/icons/cf329950-0a3e-11e8-922e-f1366c6e1c83-hytrustcc.png">    </p:cNvPr>
+          <p:cNvPr id="3" name="Object 2" descr="public/generated/icons/cf329950-0a3e-11e8-922e-f1366c6e1c83-hytrustdc.png">    </p:cNvPr>
           <p:cNvPicPr>
             <a:picLocks noChangeAspect="1"/>
           </p:cNvPicPr>
@@ -30466,7 +30466,7 @@
                 <a:ea typeface="Helvetica" pitchFamily="34" charset="-122"/>
                 <a:cs typeface="Helvetica" pitchFamily="34" charset="-120"/>
               </a:rPr>
-              <a:t>HYTRUST CLOUDCONTROL</a:t>
+              <a:t>HYTRUST DATACONTROL</a:t>
             </a:r>
             <a:endParaRPr lang="en-US" dirty="0"/>
           </a:p>
@@ -30499,7 +30499,7 @@
       </p:sp>
       <p:pic>
         <p:nvPicPr>
-          <p:cNvPr id="6" name="Object 5" descr="public/generated/icons/cf329950-0a3e-11e8-922e-f1366c6e1c83-hytrustdc.png">    </p:cNvPr>
+          <p:cNvPr id="6" name="Object 5" descr="public/generated/icons/cf329950-0a3e-11e8-922e-f1366c6e1c83-hytrustkc.png">    </p:cNvPr>
           <p:cNvPicPr>
             <a:picLocks noChangeAspect="1"/>
           </p:cNvPicPr>
@@ -30555,7 +30555,7 @@
                 <a:ea typeface="Helvetica" pitchFamily="34" charset="-122"/>
                 <a:cs typeface="Helvetica" pitchFamily="34" charset="-120"/>
               </a:rPr>
-              <a:t>HYTRUST DATACONTROL</a:t>
+              <a:t>HYTRUST KEYCONTROL</a:t>
             </a:r>
             <a:endParaRPr lang="en-US" dirty="0"/>
           </a:p>
@@ -30588,7 +30588,7 @@
       </p:sp>
       <p:pic>
         <p:nvPicPr>
-          <p:cNvPr id="9" name="Object 8" descr="public/generated/icons/cf329950-0a3e-11e8-922e-f1366c6e1c83-hytrustkc.png">    </p:cNvPr>
+          <p:cNvPr id="9" name="Object 8" descr="public/generated/icons/is.image.png">    </p:cNvPr>
           <p:cNvPicPr>
             <a:picLocks noChangeAspect="1"/>
           </p:cNvPicPr>
@@ -30644,7 +30644,7 @@
                 <a:ea typeface="Helvetica" pitchFamily="34" charset="-122"/>
                 <a:cs typeface="Helvetica" pitchFamily="34" charset="-120"/>
               </a:rPr>
-              <a:t>HYTRUST KEYCONTROL</a:t>
+              <a:t>IMAGE SERVICE FOR VPC</a:t>
             </a:r>
             <a:endParaRPr lang="en-US" dirty="0"/>
           </a:p>
@@ -30677,7 +30677,7 @@
       </p:sp>
       <p:pic>
         <p:nvPicPr>
-          <p:cNvPr id="12" name="Object 11" descr="public/generated/icons/is.image.png">    </p:cNvPr>
+          <p:cNvPr id="12" name="Object 11" descr="public/generated/icons/is.metadata.png">    </p:cNvPr>
           <p:cNvPicPr>
             <a:picLocks noChangeAspect="1"/>
           </p:cNvPicPr>
@@ -30733,7 +30733,7 @@
                 <a:ea typeface="Helvetica" pitchFamily="34" charset="-122"/>
                 <a:cs typeface="Helvetica" pitchFamily="34" charset="-120"/>
               </a:rPr>
-              <a:t>IMAGE SERVICE FOR VPC</a:t>
+              <a:t>INSTANCE METADATA FOR VPC</a:t>
             </a:r>
             <a:endParaRPr lang="en-US" dirty="0"/>
           </a:p>
@@ -30766,7 +30766,7 @@
       </p:sp>
       <p:pic>
         <p:nvPicPr>
-          <p:cNvPr id="15" name="Object 14" descr="public/generated/icons/is.metadata.png">    </p:cNvPr>
+          <p:cNvPr id="15" name="Object 14" descr="public/generated/icons/instructlab.png">    </p:cNvPr>
           <p:cNvPicPr>
             <a:picLocks noChangeAspect="1"/>
           </p:cNvPicPr>
@@ -30822,7 +30822,7 @@
                 <a:ea typeface="Helvetica" pitchFamily="34" charset="-122"/>
                 <a:cs typeface="Helvetica" pitchFamily="34" charset="-120"/>
               </a:rPr>
-              <a:t>INSTANCE METADATA FOR VPC</a:t>
+              <a:t>INSTRUCTLAB</a:t>
             </a:r>
             <a:endParaRPr lang="en-US" dirty="0"/>
           </a:p>

--- a/mycatalog-architecture-diagram-template.pptx
+++ b/mycatalog-architecture-diagram-template.pptx
@@ -524,7 +524,7 @@
           <a:p>
             <a:r>
               <a:rPr lang="en-US" dirty="0" smtClean="0"/>
-              <a:t>Generated on Sun Apr 27 2025 07:05:30 GMT+0000 (Coordinated Universal Time)</a:t>
+              <a:t>Generated on Sun Jun 01 2025 07:05:09 GMT+0000 (Coordinated Universal Time)</a:t>
             </a:r>
             <a:endParaRPr lang="en-US" dirty="0"/>
           </a:p>
@@ -22657,7 +22657,7 @@
       </p:sp>
       <p:pic>
         <p:nvPicPr>
-          <p:cNvPr id="70" name="Object 69" descr="public/generated/icons/dcc46a60-e13b-11e8-a015-757410dab16b.png">    </p:cNvPr>
+          <p:cNvPr id="70" name="Object 69" descr="public/generated/icons/6cde723c-9e49-74ac-4266-3f7a9bb74216.png">    </p:cNvPr>
           <p:cNvPicPr>
             <a:picLocks noChangeAspect="1"/>
           </p:cNvPicPr>
@@ -22713,7 +22713,7 @@
                 <a:ea typeface="Helvetica" pitchFamily="34" charset="-122"/>
                 <a:cs typeface="Helvetica" pitchFamily="34" charset="-120"/>
               </a:rPr>
-              <a:t>CLOUD ACTIVITY TRACKER</a:t>
+              <a:t>CLOUD BACKUP FOR CLASSIC</a:t>
             </a:r>
             <a:endParaRPr lang="en-US" dirty="0"/>
           </a:p>
@@ -22746,7 +22746,7 @@
       </p:sp>
       <p:pic>
         <p:nvPicPr>
-          <p:cNvPr id="73" name="Object 72" descr="public/generated/icons/6cde723c-9e49-74ac-4266-3f7a9bb74216.png">    </p:cNvPr>
+          <p:cNvPr id="73" name="Object 72" descr="public/generated/icons/is.backup-policy.png">    </p:cNvPr>
           <p:cNvPicPr>
             <a:picLocks noChangeAspect="1"/>
           </p:cNvPicPr>
@@ -22802,7 +22802,7 @@
                 <a:ea typeface="Helvetica" pitchFamily="34" charset="-122"/>
                 <a:cs typeface="Helvetica" pitchFamily="34" charset="-120"/>
               </a:rPr>
-              <a:t>CLOUD BACKUP FOR CLASSIC</a:t>
+              <a:t>CLOUD BACKUP FOR VPC</a:t>
             </a:r>
             <a:endParaRPr lang="en-US" dirty="0"/>
           </a:p>
@@ -22835,7 +22835,7 @@
       </p:sp>
       <p:pic>
         <p:nvPicPr>
-          <p:cNvPr id="76" name="Object 75" descr="public/generated/icons/is.backup-policy.png">    </p:cNvPr>
+          <p:cNvPr id="76" name="Object 75" descr="public/generated/icons/hardware-security-module.png">    </p:cNvPr>
           <p:cNvPicPr>
             <a:picLocks noChangeAspect="1"/>
           </p:cNvPicPr>
@@ -22891,7 +22891,7 @@
                 <a:ea typeface="Helvetica" pitchFamily="34" charset="-122"/>
                 <a:cs typeface="Helvetica" pitchFamily="34" charset="-120"/>
               </a:rPr>
-              <a:t>CLOUD BACKUP FOR VPC</a:t>
+              <a:t>CLOUD HSM</a:t>
             </a:r>
             <a:endParaRPr lang="en-US" dirty="0"/>
           </a:p>
@@ -22924,7 +22924,7 @@
       </p:sp>
       <p:pic>
         <p:nvPicPr>
-          <p:cNvPr id="79" name="Object 78" descr="public/generated/icons/hardware-security-module.png">    </p:cNvPr>
+          <p:cNvPr id="79" name="Object 78" descr="public/generated/icons/a3b01d2d-5457-4269-8bd5-a7c815bd2f41.png">    </p:cNvPr>
           <p:cNvPicPr>
             <a:picLocks noChangeAspect="1"/>
           </p:cNvPicPr>
@@ -22980,7 +22980,7 @@
                 <a:ea typeface="Helvetica" pitchFamily="34" charset="-122"/>
                 <a:cs typeface="Helvetica" pitchFamily="34" charset="-120"/>
               </a:rPr>
-              <a:t>CLOUD HSM</a:t>
+              <a:t>CLOUD LOAD BALANCER</a:t>
             </a:r>
             <a:endParaRPr lang="en-US" dirty="0"/>
           </a:p>
@@ -23013,7 +23013,7 @@
       </p:sp>
       <p:pic>
         <p:nvPicPr>
-          <p:cNvPr id="82" name="Object 81" descr="public/generated/icons/a3b01d2d-5457-4269-8bd5-a7c815bd2f41.png">    </p:cNvPr>
+          <p:cNvPr id="82" name="Object 81" descr="public/generated/icons/cd515180-d78a-11ec-b396-db7d306c4f73.png">    </p:cNvPr>
           <p:cNvPicPr>
             <a:picLocks noChangeAspect="1"/>
           </p:cNvPicPr>
@@ -23069,7 +23069,7 @@
                 <a:ea typeface="Helvetica" pitchFamily="34" charset="-122"/>
                 <a:cs typeface="Helvetica" pitchFamily="34" charset="-120"/>
               </a:rPr>
-              <a:t>CLOUD LOAD BALANCER</a:t>
+              <a:t>CLOUD LOGS</a:t>
             </a:r>
             <a:endParaRPr lang="en-US" dirty="0"/>
           </a:p>
@@ -23102,7 +23102,7 @@
       </p:sp>
       <p:pic>
         <p:nvPicPr>
-          <p:cNvPr id="85" name="Object 84" descr="public/generated/icons/cd515180-d78a-11ec-b396-db7d306c4f73.png">    </p:cNvPr>
+          <p:cNvPr id="85" name="Object 84" descr="public/generated/icons/090c2c10-8c38-11e8-bec2-493df9c49eb8.png">    </p:cNvPr>
           <p:cNvPicPr>
             <a:picLocks noChangeAspect="1"/>
           </p:cNvPicPr>
@@ -23158,7 +23158,7 @@
                 <a:ea typeface="Helvetica" pitchFamily="34" charset="-122"/>
                 <a:cs typeface="Helvetica" pitchFamily="34" charset="-120"/>
               </a:rPr>
-              <a:t>CLOUD LOGS</a:t>
+              <a:t>CLOUD MONITORING</a:t>
             </a:r>
             <a:endParaRPr lang="en-US" dirty="0"/>
           </a:p>
@@ -23191,7 +23191,7 @@
       </p:sp>
       <p:pic>
         <p:nvPicPr>
-          <p:cNvPr id="88" name="Object 87" descr="public/generated/icons/090c2c10-8c38-11e8-bec2-493df9c49eb8.png">    </p:cNvPr>
+          <p:cNvPr id="88" name="Object 87" descr="public/generated/icons/a9617650-09ff-11ec-85f2-d10915d24d79.png">    </p:cNvPr>
           <p:cNvPicPr>
             <a:picLocks noChangeAspect="1"/>
           </p:cNvPicPr>
@@ -23247,7 +23247,7 @@
                 <a:ea typeface="Helvetica" pitchFamily="34" charset="-122"/>
                 <a:cs typeface="Helvetica" pitchFamily="34" charset="-120"/>
               </a:rPr>
-              <a:t>CLOUD MONITORING</a:t>
+              <a:t>CLOUD NATIVE STORAGE AND DATA SERVICE</a:t>
             </a:r>
             <a:endParaRPr lang="en-US" dirty="0"/>
           </a:p>
@@ -23280,7 +23280,7 @@
       </p:sp>
       <p:pic>
         <p:nvPicPr>
-          <p:cNvPr id="91" name="Object 90" descr="public/generated/icons/a9617650-09ff-11ec-85f2-d10915d24d79.png">    </p:cNvPr>
+          <p:cNvPr id="91" name="Object 90" descr="public/generated/icons/dff97f5c-bc5e-4455-b470-411c3edbe49c.png">    </p:cNvPr>
           <p:cNvPicPr>
             <a:picLocks noChangeAspect="1"/>
           </p:cNvPicPr>
@@ -23336,7 +23336,7 @@
                 <a:ea typeface="Helvetica" pitchFamily="34" charset="-122"/>
                 <a:cs typeface="Helvetica" pitchFamily="34" charset="-120"/>
               </a:rPr>
-              <a:t>CLOUD NATIVE STORAGE AND DATA SERVICE</a:t>
+              <a:t>CLOUD OBJECT STORAGE</a:t>
             </a:r>
             <a:endParaRPr lang="en-US" dirty="0"/>
           </a:p>
@@ -23369,7 +23369,7 @@
       </p:sp>
       <p:pic>
         <p:nvPicPr>
-          <p:cNvPr id="94" name="Object 93" descr="public/generated/icons/dff97f5c-bc5e-4455-b470-411c3edbe49c.png">    </p:cNvPr>
+          <p:cNvPr id="94" name="Object 93" descr="public/generated/icons/8.png">    </p:cNvPr>
           <p:cNvPicPr>
             <a:picLocks noChangeAspect="1"/>
           </p:cNvPicPr>
@@ -23425,7 +23425,7 @@
                 <a:ea typeface="Helvetica" pitchFamily="34" charset="-122"/>
                 <a:cs typeface="Helvetica" pitchFamily="34" charset="-120"/>
               </a:rPr>
-              <a:t>CLOUD OBJECT STORAGE</a:t>
+              <a:t>CLOUD OBJECT STORAGE (CLASSIC)</a:t>
             </a:r>
             <a:endParaRPr lang="en-US" dirty="0"/>
           </a:p>
@@ -23458,7 +23458,7 @@
       </p:sp>
       <p:pic>
         <p:nvPicPr>
-          <p:cNvPr id="97" name="Object 96" descr="public/generated/icons/8.png">    </p:cNvPr>
+          <p:cNvPr id="97" name="Object 96" descr="public/generated/icons/35759612-efad-48d5-ad2a-5336349ed9bc.png">    </p:cNvPr>
           <p:cNvPicPr>
             <a:picLocks noChangeAspect="1"/>
           </p:cNvPicPr>
@@ -23514,7 +23514,7 @@
                 <a:ea typeface="Helvetica" pitchFamily="34" charset="-122"/>
                 <a:cs typeface="Helvetica" pitchFamily="34" charset="-120"/>
               </a:rPr>
-              <a:t>CLOUD OBJECT STORAGE (CLASSIC)</a:t>
+              <a:t>CLOUD PLATFORM PROFESSIONAL SERVICES</a:t>
             </a:r>
             <a:endParaRPr lang="en-US" dirty="0"/>
           </a:p>
@@ -23547,7 +23547,7 @@
       </p:sp>
       <p:pic>
         <p:nvPicPr>
-          <p:cNvPr id="100" name="Object 99" descr="public/generated/icons/35759612-efad-48d5-ad2a-5336349ed9bc.png">    </p:cNvPr>
+          <p:cNvPr id="100" name="Object 99" descr="public/generated/icons/is.reservation.png">    </p:cNvPr>
           <p:cNvPicPr>
             <a:picLocks noChangeAspect="1"/>
           </p:cNvPicPr>
@@ -23603,7 +23603,7 @@
                 <a:ea typeface="Helvetica" pitchFamily="34" charset="-122"/>
                 <a:cs typeface="Helvetica" pitchFamily="34" charset="-120"/>
               </a:rPr>
-              <a:t>CLOUD PLATFORM PROFESSIONAL SERVICES</a:t>
+              <a:t>CLOUD RESERVATIONS FOR VPC</a:t>
             </a:r>
             <a:endParaRPr lang="en-US" dirty="0"/>
           </a:p>
@@ -23636,7 +23636,7 @@
       </p:sp>
       <p:pic>
         <p:nvPicPr>
-          <p:cNvPr id="103" name="Object 102" descr="public/generated/icons/is.reservation.png">    </p:cNvPr>
+          <p:cNvPr id="103" name="Object 102" descr="public/generated/icons/cf329950-0a3e-11e8-922e-f1366c6e1c83-hytrust.png">    </p:cNvPr>
           <p:cNvPicPr>
             <a:picLocks noChangeAspect="1"/>
           </p:cNvPicPr>
@@ -23692,7 +23692,7 @@
                 <a:ea typeface="Helvetica" pitchFamily="34" charset="-122"/>
                 <a:cs typeface="Helvetica" pitchFamily="34" charset="-120"/>
               </a:rPr>
-              <a:t>CLOUD RESERVATIONS FOR VPC</a:t>
+              <a:t>CLOUD SECURE VIRTUALIZATION</a:t>
             </a:r>
             <a:endParaRPr lang="en-US" dirty="0"/>
           </a:p>
@@ -23725,7 +23725,7 @@
       </p:sp>
       <p:pic>
         <p:nvPicPr>
-          <p:cNvPr id="106" name="Object 105" descr="public/generated/icons/cf329950-0a3e-11e8-922e-f1366c6e1c83-hytrust.png">    </p:cNvPr>
+          <p:cNvPr id="106" name="Object 105" descr="public/generated/icons/cloudant.png">    </p:cNvPr>
           <p:cNvPicPr>
             <a:picLocks noChangeAspect="1"/>
           </p:cNvPicPr>
@@ -23781,7 +23781,7 @@
                 <a:ea typeface="Helvetica" pitchFamily="34" charset="-122"/>
                 <a:cs typeface="Helvetica" pitchFamily="34" charset="-120"/>
               </a:rPr>
-              <a:t>CLOUD SECURE VIRTUALIZATION</a:t>
+              <a:t>CLOUDANT</a:t>
             </a:r>
             <a:endParaRPr lang="en-US" dirty="0"/>
           </a:p>
@@ -23814,7 +23814,7 @@
       </p:sp>
       <p:pic>
         <p:nvPicPr>
-          <p:cNvPr id="109" name="Object 108" descr="public/generated/icons/cloudant.png">    </p:cNvPr>
+          <p:cNvPr id="109" name="Object 108" descr="public/generated/icons/e7114cc0-ffd2-4199-bc1a-ea79a6f09e89.png">    </p:cNvPr>
           <p:cNvPicPr>
             <a:picLocks noChangeAspect="1"/>
           </p:cNvPicPr>
@@ -23870,7 +23870,7 @@
                 <a:ea typeface="Helvetica" pitchFamily="34" charset="-122"/>
                 <a:cs typeface="Helvetica" pitchFamily="34" charset="-120"/>
               </a:rPr>
-              <a:t>CLOUDANT</a:t>
+              <a:t>CLOUDSWAY CDN PRO</a:t>
             </a:r>
             <a:endParaRPr lang="en-US" dirty="0"/>
           </a:p>
@@ -23936,7 +23936,7 @@
       </p:sp>
       <p:pic>
         <p:nvPicPr>
-          <p:cNvPr id="3" name="Object 2" descr="public/generated/icons/e7114cc0-ffd2-4199-bc1a-ea79a6f09e89.png">    </p:cNvPr>
+          <p:cNvPr id="3" name="Object 2" descr="public/generated/icons/is.cluster-network.png">    </p:cNvPr>
           <p:cNvPicPr>
             <a:picLocks noChangeAspect="1"/>
           </p:cNvPicPr>
@@ -23992,7 +23992,7 @@
                 <a:ea typeface="Helvetica" pitchFamily="34" charset="-122"/>
                 <a:cs typeface="Helvetica" pitchFamily="34" charset="-120"/>
               </a:rPr>
-              <a:t>CLOUDSWAY CDN PRO</a:t>
+              <a:t>CLUSTER NETWORK</a:t>
             </a:r>
             <a:endParaRPr lang="en-US" dirty="0"/>
           </a:p>
@@ -24025,7 +24025,7 @@
       </p:sp>
       <p:pic>
         <p:nvPicPr>
-          <p:cNvPr id="6" name="Object 5" descr="public/generated/icons/is.cluster-network.png">    </p:cNvPr>
+          <p:cNvPr id="6" name="Object 5" descr="public/generated/icons/afb603e9-8738-4542-abf4-baf5231a4dbe.png">    </p:cNvPr>
           <p:cNvPicPr>
             <a:picLocks noChangeAspect="1"/>
           </p:cNvPicPr>
@@ -24081,7 +24081,7 @@
                 <a:ea typeface="Helvetica" pitchFamily="34" charset="-122"/>
                 <a:cs typeface="Helvetica" pitchFamily="34" charset="-120"/>
               </a:rPr>
-              <a:t>CLUSTER NETWORK</a:t>
+              <a:t>COBALT IRON - SECURE AUTOMATED BACKUP WITH COMPASS</a:t>
             </a:r>
             <a:endParaRPr lang="en-US" dirty="0"/>
           </a:p>
@@ -24114,7 +24114,7 @@
       </p:sp>
       <p:pic>
         <p:nvPicPr>
-          <p:cNvPr id="9" name="Object 8" descr="public/generated/icons/afb603e9-8738-4542-abf4-baf5231a4dbe.png">    </p:cNvPr>
+          <p:cNvPr id="9" name="Object 8" descr="public/generated/icons/2ad2fdd0-bba5-11ea-8966-5d6402fed1c7.png">    </p:cNvPr>
           <p:cNvPicPr>
             <a:picLocks noChangeAspect="1"/>
           </p:cNvPicPr>
@@ -24170,7 +24170,7 @@
                 <a:ea typeface="Helvetica" pitchFamily="34" charset="-122"/>
                 <a:cs typeface="Helvetica" pitchFamily="34" charset="-120"/>
               </a:rPr>
-              <a:t>COBALT IRON - SECURE AUTOMATED BACKUP WITH COMPASS</a:t>
+              <a:t>CODE ENGINE</a:t>
             </a:r>
             <a:endParaRPr lang="en-US" dirty="0"/>
           </a:p>
@@ -24203,7 +24203,7 @@
       </p:sp>
       <p:pic>
         <p:nvPicPr>
-          <p:cNvPr id="12" name="Object 11" descr="public/generated/icons/2ad2fdd0-bba5-11ea-8966-5d6402fed1c7.png">    </p:cNvPr>
+          <p:cNvPr id="12" name="Object 11" descr="public/generated/icons/3e1a2c30-11dd-11ec-b621-67e0f6600d56.png">    </p:cNvPr>
           <p:cNvPicPr>
             <a:picLocks noChangeAspect="1"/>
           </p:cNvPicPr>
@@ -24259,7 +24259,7 @@
                 <a:ea typeface="Helvetica" pitchFamily="34" charset="-122"/>
                 <a:cs typeface="Helvetica" pitchFamily="34" charset="-120"/>
               </a:rPr>
-              <a:t>CODE ENGINE</a:t>
+              <a:t>COMPLIANCE AND CUSTOMER EXPERIENCE AUTOMATION</a:t>
             </a:r>
             <a:endParaRPr lang="en-US" dirty="0"/>
           </a:p>
@@ -24292,7 +24292,7 @@
       </p:sp>
       <p:pic>
         <p:nvPicPr>
-          <p:cNvPr id="15" name="Object 14" descr="public/generated/icons/3e1a2c30-11dd-11ec-b621-67e0f6600d56.png">    </p:cNvPr>
+          <p:cNvPr id="15" name="Object 14" descr="public/generated/icons/ComposeElasticsearch-P.png">    </p:cNvPr>
           <p:cNvPicPr>
             <a:picLocks noChangeAspect="1"/>
           </p:cNvPicPr>
@@ -24348,7 +24348,7 @@
                 <a:ea typeface="Helvetica" pitchFamily="34" charset="-122"/>
                 <a:cs typeface="Helvetica" pitchFamily="34" charset="-120"/>
               </a:rPr>
-              <a:t>COMPLIANCE AND CUSTOMER EXPERIENCE AUTOMATION</a:t>
+              <a:t>COMPOSE FOR ELASTICSEARCH</a:t>
             </a:r>
             <a:endParaRPr lang="en-US" dirty="0"/>
           </a:p>
@@ -24381,7 +24381,7 @@
       </p:sp>
       <p:pic>
         <p:nvPicPr>
-          <p:cNvPr id="18" name="Object 17" descr="public/generated/icons/ComposeElasticsearch-P.png">    </p:cNvPr>
+          <p:cNvPr id="18" name="Object 17" descr="public/generated/icons/ComposeEtcd-P.png">    </p:cNvPr>
           <p:cNvPicPr>
             <a:picLocks noChangeAspect="1"/>
           </p:cNvPicPr>
@@ -24437,7 +24437,7 @@
                 <a:ea typeface="Helvetica" pitchFamily="34" charset="-122"/>
                 <a:cs typeface="Helvetica" pitchFamily="34" charset="-120"/>
               </a:rPr>
-              <a:t>COMPOSE FOR ELASTICSEARCH</a:t>
+              <a:t>COMPOSE FOR ETCD</a:t>
             </a:r>
             <a:endParaRPr lang="en-US" dirty="0"/>
           </a:p>
@@ -24470,7 +24470,7 @@
       </p:sp>
       <p:pic>
         <p:nvPicPr>
-          <p:cNvPr id="21" name="Object 20" descr="public/generated/icons/ComposeEtcd-P.png">    </p:cNvPr>
+          <p:cNvPr id="21" name="Object 20" descr="public/generated/icons/ComposeMongo-P.png">    </p:cNvPr>
           <p:cNvPicPr>
             <a:picLocks noChangeAspect="1"/>
           </p:cNvPicPr>
@@ -24526,7 +24526,7 @@
                 <a:ea typeface="Helvetica" pitchFamily="34" charset="-122"/>
                 <a:cs typeface="Helvetica" pitchFamily="34" charset="-120"/>
               </a:rPr>
-              <a:t>COMPOSE FOR ETCD</a:t>
+              <a:t>COMPOSE FOR MONGODB</a:t>
             </a:r>
             <a:endParaRPr lang="en-US" dirty="0"/>
           </a:p>
@@ -24559,7 +24559,7 @@
       </p:sp>
       <p:pic>
         <p:nvPicPr>
-          <p:cNvPr id="24" name="Object 23" descr="public/generated/icons/ComposeMongo-P.png">    </p:cNvPr>
+          <p:cNvPr id="24" name="Object 23" descr="public/generated/icons/ComposePostgreSQL-P.png">    </p:cNvPr>
           <p:cNvPicPr>
             <a:picLocks noChangeAspect="1"/>
           </p:cNvPicPr>
@@ -24615,7 +24615,7 @@
                 <a:ea typeface="Helvetica" pitchFamily="34" charset="-122"/>
                 <a:cs typeface="Helvetica" pitchFamily="34" charset="-120"/>
               </a:rPr>
-              <a:t>COMPOSE FOR MONGODB</a:t>
+              <a:t>COMPOSE FOR POSTGRESQL</a:t>
             </a:r>
             <a:endParaRPr lang="en-US" dirty="0"/>
           </a:p>
@@ -24648,7 +24648,7 @@
       </p:sp>
       <p:pic>
         <p:nvPicPr>
-          <p:cNvPr id="27" name="Object 26" descr="public/generated/icons/ComposePostgreSQL-P.png">    </p:cNvPr>
+          <p:cNvPr id="27" name="Object 26" descr="public/generated/icons/ComposeRabbitMQ-P.png">    </p:cNvPr>
           <p:cNvPicPr>
             <a:picLocks noChangeAspect="1"/>
           </p:cNvPicPr>
@@ -24704,7 +24704,7 @@
                 <a:ea typeface="Helvetica" pitchFamily="34" charset="-122"/>
                 <a:cs typeface="Helvetica" pitchFamily="34" charset="-120"/>
               </a:rPr>
-              <a:t>COMPOSE FOR POSTGRESQL</a:t>
+              <a:t>COMPOSE FOR RABBITMQ</a:t>
             </a:r>
             <a:endParaRPr lang="en-US" dirty="0"/>
           </a:p>
@@ -24737,7 +24737,7 @@
       </p:sp>
       <p:pic>
         <p:nvPicPr>
-          <p:cNvPr id="30" name="Object 29" descr="public/generated/icons/ComposeRabbitMQ-P.png">    </p:cNvPr>
+          <p:cNvPr id="30" name="Object 29" descr="public/generated/icons/ComposeRedis-P.png">    </p:cNvPr>
           <p:cNvPicPr>
             <a:picLocks noChangeAspect="1"/>
           </p:cNvPicPr>
@@ -24793,7 +24793,7 @@
                 <a:ea typeface="Helvetica" pitchFamily="34" charset="-122"/>
                 <a:cs typeface="Helvetica" pitchFamily="34" charset="-120"/>
               </a:rPr>
-              <a:t>COMPOSE FOR RABBITMQ</a:t>
+              <a:t>COMPOSE FOR REDIS</a:t>
             </a:r>
             <a:endParaRPr lang="en-US" dirty="0"/>
           </a:p>
@@ -24826,7 +24826,7 @@
       </p:sp>
       <p:pic>
         <p:nvPicPr>
-          <p:cNvPr id="33" name="Object 32" descr="public/generated/icons/ComposeRedis-P.png">    </p:cNvPr>
+          <p:cNvPr id="33" name="Object 32" descr="public/generated/icons/public.bluemix.container.registry.png">    </p:cNvPr>
           <p:cNvPicPr>
             <a:picLocks noChangeAspect="1"/>
           </p:cNvPicPr>
@@ -24882,7 +24882,7 @@
                 <a:ea typeface="Helvetica" pitchFamily="34" charset="-122"/>
                 <a:cs typeface="Helvetica" pitchFamily="34" charset="-120"/>
               </a:rPr>
-              <a:t>COMPOSE FOR REDIS</a:t>
+              <a:t>CONTAINER REGISTRY</a:t>
             </a:r>
             <a:endParaRPr lang="en-US" dirty="0"/>
           </a:p>
@@ -24915,7 +24915,7 @@
       </p:sp>
       <p:pic>
         <p:nvPicPr>
-          <p:cNvPr id="36" name="Object 35" descr="public/generated/icons/public.bluemix.container.registry.png">    </p:cNvPr>
+          <p:cNvPr id="36" name="Object 35" descr="public/generated/icons/4ad9c1b8-e58e-2a9d-ccb8-d4d5ae84abc0.png">    </p:cNvPr>
           <p:cNvPicPr>
             <a:picLocks noChangeAspect="1"/>
           </p:cNvPicPr>
@@ -24971,7 +24971,7 @@
                 <a:ea typeface="Helvetica" pitchFamily="34" charset="-122"/>
                 <a:cs typeface="Helvetica" pitchFamily="34" charset="-120"/>
               </a:rPr>
-              <a:t>CONTAINER REGISTRY</a:t>
+              <a:t>CONTAINER SECURITY SERVICES</a:t>
             </a:r>
             <a:endParaRPr lang="en-US" dirty="0"/>
           </a:p>
@@ -25004,7 +25004,7 @@
       </p:sp>
       <p:pic>
         <p:nvPicPr>
-          <p:cNvPr id="39" name="Object 38" descr="public/generated/icons/4ad9c1b8-e58e-2a9d-ccb8-d4d5ae84abc0.png">    </p:cNvPr>
+          <p:cNvPr id="39" name="Object 38" descr="public/generated/icons/b6c4a555-5ff6-4e1d-9ce7-0a9976629eab.png">    </p:cNvPr>
           <p:cNvPicPr>
             <a:picLocks noChangeAspect="1"/>
           </p:cNvPicPr>
@@ -25060,7 +25060,7 @@
                 <a:ea typeface="Helvetica" pitchFamily="34" charset="-122"/>
                 <a:cs typeface="Helvetica" pitchFamily="34" charset="-120"/>
               </a:rPr>
-              <a:t>CONTAINER SECURITY SERVICES</a:t>
+              <a:t>CONTENT DELIVERY NETWORK</a:t>
             </a:r>
             <a:endParaRPr lang="en-US" dirty="0"/>
           </a:p>
@@ -25093,7 +25093,7 @@
       </p:sp>
       <p:pic>
         <p:nvPicPr>
-          <p:cNvPr id="42" name="Object 41" descr="public/generated/icons/b6c4a555-5ff6-4e1d-9ce7-0a9976629eab.png">    </p:cNvPr>
+          <p:cNvPr id="42" name="Object 41" descr="public/generated/icons/59b735ee-5938-4ebd-a6b2-541aef2d1f68.png">    </p:cNvPr>
           <p:cNvPicPr>
             <a:picLocks noChangeAspect="1"/>
           </p:cNvPicPr>
@@ -25149,7 +25149,7 @@
                 <a:ea typeface="Helvetica" pitchFamily="34" charset="-122"/>
                 <a:cs typeface="Helvetica" pitchFamily="34" charset="-120"/>
               </a:rPr>
-              <a:t>CONTENT DELIVERY NETWORK</a:t>
+              <a:t>CONTINUOUS DELIVERY</a:t>
             </a:r>
             <a:endParaRPr lang="en-US" dirty="0"/>
           </a:p>
@@ -25182,7 +25182,7 @@
       </p:sp>
       <p:pic>
         <p:nvPicPr>
-          <p:cNvPr id="45" name="Object 44" descr="public/generated/icons/59b735ee-5938-4ebd-a6b2-541aef2d1f68.png">    </p:cNvPr>
+          <p:cNvPr id="45" name="Object 44" descr="public/generated/icons/d19358fd-a20a-4bb7-9727-9d3c129db741.png">    </p:cNvPr>
           <p:cNvPicPr>
             <a:picLocks noChangeAspect="1"/>
           </p:cNvPicPr>
@@ -25238,7 +25238,7 @@
                 <a:ea typeface="Helvetica" pitchFamily="34" charset="-122"/>
                 <a:cs typeface="Helvetica" pitchFamily="34" charset="-120"/>
               </a:rPr>
-              <a:t>CONTINUOUS DELIVERY</a:t>
+              <a:t>CONVERLISTICS</a:t>
             </a:r>
             <a:endParaRPr lang="en-US" dirty="0"/>
           </a:p>
@@ -25271,7 +25271,7 @@
       </p:sp>
       <p:pic>
         <p:nvPicPr>
-          <p:cNvPr id="48" name="Object 47" descr="public/generated/icons/d19358fd-a20a-4bb7-9727-9d3c129db741.png">    </p:cNvPr>
+          <p:cNvPr id="48" name="Object 47" descr="public/generated/icons/742c2c0f-1c40-480d-ab7b-76e56a89f51b.png">    </p:cNvPr>
           <p:cNvPicPr>
             <a:picLocks noChangeAspect="1"/>
           </p:cNvPicPr>
@@ -25327,7 +25327,7 @@
                 <a:ea typeface="Helvetica" pitchFamily="34" charset="-122"/>
                 <a:cs typeface="Helvetica" pitchFamily="34" charset="-120"/>
               </a:rPr>
-              <a:t>CONVERLISTICS</a:t>
+              <a:t>CONVERTIO VMWARE WORKLOAD MIGRATION AND CONVERSION</a:t>
             </a:r>
             <a:endParaRPr lang="en-US" dirty="0"/>
           </a:p>
@@ -25360,7 +25360,7 @@
       </p:sp>
       <p:pic>
         <p:nvPicPr>
-          <p:cNvPr id="51" name="Object 50" descr="public/generated/icons/742c2c0f-1c40-480d-ab7b-76e56a89f51b.png">    </p:cNvPr>
+          <p:cNvPr id="51" name="Object 50" descr="public/generated/icons/5da26b90-7b83-44b5-b6d3-778b408b77db.png">    </p:cNvPr>
           <p:cNvPicPr>
             <a:picLocks noChangeAspect="1"/>
           </p:cNvPicPr>
@@ -25416,7 +25416,7 @@
                 <a:ea typeface="Helvetica" pitchFamily="34" charset="-122"/>
                 <a:cs typeface="Helvetica" pitchFamily="34" charset="-120"/>
               </a:rPr>
-              <a:t>CONVERTIO VMWARE WORKLOAD MIGRATION AND CONVERSION</a:t>
+              <a:t>CRUSHBANK</a:t>
             </a:r>
             <a:endParaRPr lang="en-US" dirty="0"/>
           </a:p>
@@ -25449,7 +25449,7 @@
       </p:sp>
       <p:pic>
         <p:nvPicPr>
-          <p:cNvPr id="54" name="Object 53" descr="public/generated/icons/5da26b90-7b83-44b5-b6d3-778b408b77db.png">    </p:cNvPr>
+          <p:cNvPr id="54" name="Object 53" descr="public/generated/icons/07d4aa9f-1f71-43bb-9916-8e9cff5bc426.png">    </p:cNvPr>
           <p:cNvPicPr>
             <a:picLocks noChangeAspect="1"/>
           </p:cNvPicPr>
@@ -25505,7 +25505,7 @@
                 <a:ea typeface="Helvetica" pitchFamily="34" charset="-122"/>
                 <a:cs typeface="Helvetica" pitchFamily="34" charset="-120"/>
               </a:rPr>
-              <a:t>CRUSHBANK</a:t>
+              <a:t>CUSTOM MIGRATIONS DR AND MANAGEMENT AS A SERVICE</a:t>
             </a:r>
             <a:endParaRPr lang="en-US" dirty="0"/>
           </a:p>
@@ -25538,7 +25538,7 @@
       </p:sp>
       <p:pic>
         <p:nvPicPr>
-          <p:cNvPr id="57" name="Object 56" descr="public/generated/icons/07d4aa9f-1f71-43bb-9916-8e9cff5bc426.png">    </p:cNvPr>
+          <p:cNvPr id="57" name="Object 56" descr="public/generated/icons/1ab48530-6638-4fce-a386-0bd598576a0a.png">    </p:cNvPr>
           <p:cNvPicPr>
             <a:picLocks noChangeAspect="1"/>
           </p:cNvPicPr>
@@ -25594,7 +25594,7 @@
                 <a:ea typeface="Helvetica" pitchFamily="34" charset="-122"/>
                 <a:cs typeface="Helvetica" pitchFamily="34" charset="-120"/>
               </a:rPr>
-              <a:t>CUSTOM MIGRATIONS DR AND MANAGEMENT AS A SERVICE</a:t>
+              <a:t>CYBERSTRONG BY CYBERSAINT</a:t>
             </a:r>
             <a:endParaRPr lang="en-US" dirty="0"/>
           </a:p>
@@ -25627,7 +25627,7 @@
       </p:sp>
       <p:pic>
         <p:nvPicPr>
-          <p:cNvPr id="60" name="Object 59" descr="public/generated/icons/1ab48530-6638-4fce-a386-0bd598576a0a.png">    </p:cNvPr>
+          <p:cNvPr id="60" name="Object 59" descr="public/generated/icons/840bcb30-f8c3-11ed-afcd-01dba1a5ada3.png">    </p:cNvPr>
           <p:cNvPicPr>
             <a:picLocks noChangeAspect="1"/>
           </p:cNvPicPr>
@@ -25683,7 +25683,7 @@
                 <a:ea typeface="Helvetica" pitchFamily="34" charset="-122"/>
                 <a:cs typeface="Helvetica" pitchFamily="34" charset="-120"/>
               </a:rPr>
-              <a:t>CYBERSTRONG BY CYBERSAINT</a:t>
+              <a:t>DATA PRODUCT HUB</a:t>
             </a:r>
             <a:endParaRPr lang="en-US" dirty="0"/>
           </a:p>
@@ -25716,7 +25716,7 @@
       </p:sp>
       <p:pic>
         <p:nvPicPr>
-          <p:cNvPr id="63" name="Object 62" descr="public/generated/icons/840bcb30-f8c3-11ed-afcd-01dba1a5ada3.png">    </p:cNvPr>
+          <p:cNvPr id="63" name="Object 62" descr="public/generated/icons/696b9880-9e9b-11ea-9054-e15e287f1e7f.png">    </p:cNvPr>
           <p:cNvPicPr>
             <a:picLocks noChangeAspect="1"/>
           </p:cNvPicPr>
@@ -25772,7 +25772,7 @@
                 <a:ea typeface="Helvetica" pitchFamily="34" charset="-122"/>
                 <a:cs typeface="Helvetica" pitchFamily="34" charset="-120"/>
               </a:rPr>
-              <a:t>DATA PRODUCT HUB</a:t>
+              <a:t>DATA REPLICATION</a:t>
             </a:r>
             <a:endParaRPr lang="en-US" dirty="0"/>
           </a:p>
@@ -25805,7 +25805,7 @@
       </p:sp>
       <p:pic>
         <p:nvPicPr>
-          <p:cNvPr id="66" name="Object 65" descr="public/generated/icons/696b9880-9e9b-11ea-9054-e15e287f1e7f.png">    </p:cNvPr>
+          <p:cNvPr id="66" name="Object 65" descr="public/generated/icons/5d307850-0404-11eb-8c8b-c7d7505f656d.png">    </p:cNvPr>
           <p:cNvPicPr>
             <a:picLocks noChangeAspect="1"/>
           </p:cNvPicPr>
@@ -25861,7 +25861,7 @@
                 <a:ea typeface="Helvetica" pitchFamily="34" charset="-122"/>
                 <a:cs typeface="Helvetica" pitchFamily="34" charset="-120"/>
               </a:rPr>
-              <a:t>DATA REPLICATION</a:t>
+              <a:t>DATA VIRTUALIZATION</a:t>
             </a:r>
             <a:endParaRPr lang="en-US" dirty="0"/>
           </a:p>
@@ -25894,7 +25894,7 @@
       </p:sp>
       <p:pic>
         <p:nvPicPr>
-          <p:cNvPr id="69" name="Object 68" descr="public/generated/icons/5d307850-0404-11eb-8c8b-c7d7505f656d.png">    </p:cNvPr>
+          <p:cNvPr id="69" name="Object 68" descr="public/generated/icons/databases-for-enterprisedb.png">    </p:cNvPr>
           <p:cNvPicPr>
             <a:picLocks noChangeAspect="1"/>
           </p:cNvPicPr>
@@ -25950,7 +25950,7 @@
                 <a:ea typeface="Helvetica" pitchFamily="34" charset="-122"/>
                 <a:cs typeface="Helvetica" pitchFamily="34" charset="-120"/>
               </a:rPr>
-              <a:t>DATA VIRTUALIZATION</a:t>
+              <a:t>DATABASES FOR EDB</a:t>
             </a:r>
             <a:endParaRPr lang="en-US" dirty="0"/>
           </a:p>
@@ -25983,7 +25983,7 @@
       </p:sp>
       <p:pic>
         <p:nvPicPr>
-          <p:cNvPr id="72" name="Object 71" descr="public/generated/icons/databases-for-enterprisedb.png">    </p:cNvPr>
+          <p:cNvPr id="72" name="Object 71" descr="public/generated/icons/databases-for-elasticsearch.png">    </p:cNvPr>
           <p:cNvPicPr>
             <a:picLocks noChangeAspect="1"/>
           </p:cNvPicPr>
@@ -26039,7 +26039,7 @@
                 <a:ea typeface="Helvetica" pitchFamily="34" charset="-122"/>
                 <a:cs typeface="Helvetica" pitchFamily="34" charset="-120"/>
               </a:rPr>
-              <a:t>DATABASES FOR EDB</a:t>
+              <a:t>DATABASES FOR ELASTICSEARCH</a:t>
             </a:r>
             <a:endParaRPr lang="en-US" dirty="0"/>
           </a:p>
@@ -26072,7 +26072,7 @@
       </p:sp>
       <p:pic>
         <p:nvPicPr>
-          <p:cNvPr id="75" name="Object 74" descr="public/generated/icons/databases-for-elasticsearch.png">    </p:cNvPr>
+          <p:cNvPr id="75" name="Object 74" descr="public/generated/icons/databases-for-mongodb.png">    </p:cNvPr>
           <p:cNvPicPr>
             <a:picLocks noChangeAspect="1"/>
           </p:cNvPicPr>
@@ -26128,7 +26128,7 @@
                 <a:ea typeface="Helvetica" pitchFamily="34" charset="-122"/>
                 <a:cs typeface="Helvetica" pitchFamily="34" charset="-120"/>
               </a:rPr>
-              <a:t>DATABASES FOR ELASTICSEARCH</a:t>
+              <a:t>DATABASES FOR MONGODB</a:t>
             </a:r>
             <a:endParaRPr lang="en-US" dirty="0"/>
           </a:p>
@@ -26161,7 +26161,7 @@
       </p:sp>
       <p:pic>
         <p:nvPicPr>
-          <p:cNvPr id="78" name="Object 77" descr="public/generated/icons/databases-for-mongodb.png">    </p:cNvPr>
+          <p:cNvPr id="78" name="Object 77" descr="public/generated/icons/databases-for-mysql.png">    </p:cNvPr>
           <p:cNvPicPr>
             <a:picLocks noChangeAspect="1"/>
           </p:cNvPicPr>
@@ -26217,7 +26217,7 @@
                 <a:ea typeface="Helvetica" pitchFamily="34" charset="-122"/>
                 <a:cs typeface="Helvetica" pitchFamily="34" charset="-120"/>
               </a:rPr>
-              <a:t>DATABASES FOR MONGODB</a:t>
+              <a:t>DATABASES FOR MYSQL</a:t>
             </a:r>
             <a:endParaRPr lang="en-US" dirty="0"/>
           </a:p>
@@ -26250,7 +26250,7 @@
       </p:sp>
       <p:pic>
         <p:nvPicPr>
-          <p:cNvPr id="81" name="Object 80" descr="public/generated/icons/databases-for-mysql.png">    </p:cNvPr>
+          <p:cNvPr id="81" name="Object 80" descr="public/generated/icons/databases-for-postgresql.png">    </p:cNvPr>
           <p:cNvPicPr>
             <a:picLocks noChangeAspect="1"/>
           </p:cNvPicPr>
@@ -26306,7 +26306,7 @@
                 <a:ea typeface="Helvetica" pitchFamily="34" charset="-122"/>
                 <a:cs typeface="Helvetica" pitchFamily="34" charset="-120"/>
               </a:rPr>
-              <a:t>DATABASES FOR MYSQL</a:t>
+              <a:t>DATABASES FOR POSTGRESQL</a:t>
             </a:r>
             <a:endParaRPr lang="en-US" dirty="0"/>
           </a:p>
@@ -26339,7 +26339,7 @@
       </p:sp>
       <p:pic>
         <p:nvPicPr>
-          <p:cNvPr id="84" name="Object 83" descr="public/generated/icons/databases-for-postgresql.png">    </p:cNvPr>
+          <p:cNvPr id="84" name="Object 83" descr="public/generated/icons/databases-for-redis.png">    </p:cNvPr>
           <p:cNvPicPr>
             <a:picLocks noChangeAspect="1"/>
           </p:cNvPicPr>
@@ -26395,7 +26395,7 @@
                 <a:ea typeface="Helvetica" pitchFamily="34" charset="-122"/>
                 <a:cs typeface="Helvetica" pitchFamily="34" charset="-120"/>
               </a:rPr>
-              <a:t>DATABASES FOR POSTGRESQL</a:t>
+              <a:t>DATABASES FOR REDIS</a:t>
             </a:r>
             <a:endParaRPr lang="en-US" dirty="0"/>
           </a:p>
@@ -26428,7 +26428,7 @@
       </p:sp>
       <p:pic>
         <p:nvPicPr>
-          <p:cNvPr id="87" name="Object 86" descr="public/generated/icons/databases-for-redis.png">    </p:cNvPr>
+          <p:cNvPr id="87" name="Object 86" descr="public/generated/icons/dd0532c0-f87c-11ea-be25-c9dc051df74f.png">    </p:cNvPr>
           <p:cNvPicPr>
             <a:picLocks noChangeAspect="1"/>
           </p:cNvPicPr>
@@ -26484,7 +26484,7 @@
                 <a:ea typeface="Helvetica" pitchFamily="34" charset="-122"/>
                 <a:cs typeface="Helvetica" pitchFamily="34" charset="-120"/>
               </a:rPr>
-              <a:t>DATABASES FOR REDIS</a:t>
+              <a:t>DATASTAGE</a:t>
             </a:r>
             <a:endParaRPr lang="en-US" dirty="0"/>
           </a:p>
@@ -26517,7 +26517,7 @@
       </p:sp>
       <p:pic>
         <p:nvPicPr>
-          <p:cNvPr id="90" name="Object 89" descr="public/generated/icons/dd0532c0-f87c-11ea-be25-c9dc051df74f.png">    </p:cNvPr>
+          <p:cNvPr id="90" name="Object 89" descr="public/generated/icons/dashdb-for-transactions.png">    </p:cNvPr>
           <p:cNvPicPr>
             <a:picLocks noChangeAspect="1"/>
           </p:cNvPicPr>
@@ -26573,7 +26573,7 @@
                 <a:ea typeface="Helvetica" pitchFamily="34" charset="-122"/>
                 <a:cs typeface="Helvetica" pitchFamily="34" charset="-120"/>
               </a:rPr>
-              <a:t>DATASTAGE</a:t>
+              <a:t>DB2</a:t>
             </a:r>
             <a:endParaRPr lang="en-US" dirty="0"/>
           </a:p>
@@ -26606,7 +26606,7 @@
       </p:sp>
       <p:pic>
         <p:nvPicPr>
-          <p:cNvPr id="93" name="Object 92" descr="public/generated/icons/dashdb-for-transactions.png">    </p:cNvPr>
+          <p:cNvPr id="93" name="Object 92" descr="public/generated/icons/9e02e72d-00ce-4220-b44c-650c8314e58a.png">    </p:cNvPr>
           <p:cNvPicPr>
             <a:picLocks noChangeAspect="1"/>
           </p:cNvPicPr>
@@ -26662,7 +26662,7 @@
                 <a:ea typeface="Helvetica" pitchFamily="34" charset="-122"/>
                 <a:cs typeface="Helvetica" pitchFamily="34" charset="-120"/>
               </a:rPr>
-              <a:t>DB2</a:t>
+              <a:t>DB2 WAREHOUSE</a:t>
             </a:r>
             <a:endParaRPr lang="en-US" dirty="0"/>
           </a:p>
@@ -26695,7 +26695,7 @@
       </p:sp>
       <p:pic>
         <p:nvPicPr>
-          <p:cNvPr id="96" name="Object 95" descr="public/generated/icons/9e02e72d-00ce-4220-b44c-650c8314e58a.png">    </p:cNvPr>
+          <p:cNvPr id="96" name="Object 95" descr="public/generated/icons/is.dedicated-host.png">    </p:cNvPr>
           <p:cNvPicPr>
             <a:picLocks noChangeAspect="1"/>
           </p:cNvPicPr>
@@ -26751,7 +26751,7 @@
                 <a:ea typeface="Helvetica" pitchFamily="34" charset="-122"/>
                 <a:cs typeface="Helvetica" pitchFamily="34" charset="-120"/>
               </a:rPr>
-              <a:t>DB2 WAREHOUSE</a:t>
+              <a:t>DEDICATED HOST FOR VPC</a:t>
             </a:r>
             <a:endParaRPr lang="en-US" dirty="0"/>
           </a:p>
@@ -26784,7 +26784,7 @@
       </p:sp>
       <p:pic>
         <p:nvPicPr>
-          <p:cNvPr id="99" name="Object 98" descr="public/generated/icons/is.dedicated-host.png">    </p:cNvPr>
+          <p:cNvPr id="99" name="Object 98" descr="public/generated/icons/86fb7610-0f92-11ea-a6a3-8b96ed1570d8.png">    </p:cNvPr>
           <p:cNvPicPr>
             <a:picLocks noChangeAspect="1"/>
           </p:cNvPicPr>
@@ -26840,7 +26840,7 @@
                 <a:ea typeface="Helvetica" pitchFamily="34" charset="-122"/>
                 <a:cs typeface="Helvetica" pitchFamily="34" charset="-120"/>
               </a:rPr>
-              <a:t>DEDICATED HOST FOR VPC</a:t>
+              <a:t>DIRECT LINK CONNECT</a:t>
             </a:r>
             <a:endParaRPr lang="en-US" dirty="0"/>
           </a:p>
@@ -26873,7 +26873,7 @@
       </p:sp>
       <p:pic>
         <p:nvPicPr>
-          <p:cNvPr id="102" name="Object 101" descr="public/generated/icons/86fb7610-0f92-11ea-a6a3-8b96ed1570d8.png">    </p:cNvPr>
+          <p:cNvPr id="102" name="Object 101" descr="public/generated/icons/7dd59b11-c3c5-5aad-f6b2-2a0c2a3e6c49.png">    </p:cNvPr>
           <p:cNvPicPr>
             <a:picLocks noChangeAspect="1"/>
           </p:cNvPicPr>
@@ -26929,7 +26929,7 @@
                 <a:ea typeface="Helvetica" pitchFamily="34" charset="-122"/>
                 <a:cs typeface="Helvetica" pitchFamily="34" charset="-120"/>
               </a:rPr>
-              <a:t>DIRECT LINK CONNECT</a:t>
+              <a:t>DIRECT LINK CONNECT ON CLASSIC</a:t>
             </a:r>
             <a:endParaRPr lang="en-US" dirty="0"/>
           </a:p>
@@ -26962,7 +26962,7 @@
       </p:sp>
       <p:pic>
         <p:nvPicPr>
-          <p:cNvPr id="105" name="Object 104" descr="public/generated/icons/7dd59b11-c3c5-5aad-f6b2-2a0c2a3e6c49.png">    </p:cNvPr>
+          <p:cNvPr id="105" name="Object 104" descr="public/generated/icons/dc11a440-6073-11e9-9f5a-2f7997ba23c0.png">    </p:cNvPr>
           <p:cNvPicPr>
             <a:picLocks noChangeAspect="1"/>
           </p:cNvPicPr>
@@ -27018,7 +27018,7 @@
                 <a:ea typeface="Helvetica" pitchFamily="34" charset="-122"/>
                 <a:cs typeface="Helvetica" pitchFamily="34" charset="-120"/>
               </a:rPr>
-              <a:t>DIRECT LINK CONNECT ON CLASSIC</a:t>
+              <a:t>DIRECT LINK DEDICATED</a:t>
             </a:r>
             <a:endParaRPr lang="en-US" dirty="0"/>
           </a:p>
@@ -27051,7 +27051,7 @@
       </p:sp>
       <p:pic>
         <p:nvPicPr>
-          <p:cNvPr id="108" name="Object 107" descr="public/generated/icons/dc11a440-6073-11e9-9f5a-2f7997ba23c0.png">    </p:cNvPr>
+          <p:cNvPr id="108" name="Object 107" descr="public/generated/icons/22.png">    </p:cNvPr>
           <p:cNvPicPr>
             <a:picLocks noChangeAspect="1"/>
           </p:cNvPicPr>
@@ -27107,7 +27107,7 @@
                 <a:ea typeface="Helvetica" pitchFamily="34" charset="-122"/>
                 <a:cs typeface="Helvetica" pitchFamily="34" charset="-120"/>
               </a:rPr>
-              <a:t>DIRECT LINK DEDICATED</a:t>
+              <a:t>DIRECT LINK DEDICATED HOSTING ON CLASSIC</a:t>
             </a:r>
             <a:endParaRPr lang="en-US" dirty="0"/>
           </a:p>
@@ -27173,7 +27173,7 @@
       </p:sp>
       <p:pic>
         <p:nvPicPr>
-          <p:cNvPr id="3" name="Object 2" descr="public/generated/icons/22.png">    </p:cNvPr>
+          <p:cNvPr id="3" name="Object 2" descr="public/generated/icons/23.png">    </p:cNvPr>
           <p:cNvPicPr>
             <a:picLocks noChangeAspect="1"/>
           </p:cNvPicPr>
@@ -27229,7 +27229,7 @@
                 <a:ea typeface="Helvetica" pitchFamily="34" charset="-122"/>
                 <a:cs typeface="Helvetica" pitchFamily="34" charset="-120"/>
               </a:rPr>
-              <a:t>DIRECT LINK DEDICATED HOSTING ON CLASSIC</a:t>
+              <a:t>DIRECT LINK DEDICATED ON CLASSIC</a:t>
             </a:r>
             <a:endParaRPr lang="en-US" dirty="0"/>
           </a:p>
@@ -27262,7 +27262,7 @@
       </p:sp>
       <p:pic>
         <p:nvPicPr>
-          <p:cNvPr id="6" name="Object 5" descr="public/generated/icons/23.png">    </p:cNvPr>
+          <p:cNvPr id="6" name="Object 5" descr="public/generated/icons/21.png">    </p:cNvPr>
           <p:cNvPicPr>
             <a:picLocks noChangeAspect="1"/>
           </p:cNvPicPr>
@@ -27318,7 +27318,7 @@
                 <a:ea typeface="Helvetica" pitchFamily="34" charset="-122"/>
                 <a:cs typeface="Helvetica" pitchFamily="34" charset="-120"/>
               </a:rPr>
-              <a:t>DIRECT LINK DEDICATED ON CLASSIC</a:t>
+              <a:t>DIRECT LINK EXCHANGE ON CLASSIC</a:t>
             </a:r>
             <a:endParaRPr lang="en-US" dirty="0"/>
           </a:p>
@@ -27351,7 +27351,7 @@
       </p:sp>
       <p:pic>
         <p:nvPicPr>
-          <p:cNvPr id="9" name="Object 8" descr="public/generated/icons/21.png">    </p:cNvPr>
+          <p:cNvPr id="9" name="Object 8" descr="public/generated/icons/9f3db814-3aec-47c5-94b0-6a71d49bd27f.png">    </p:cNvPr>
           <p:cNvPicPr>
             <a:picLocks noChangeAspect="1"/>
           </p:cNvPicPr>
@@ -27407,7 +27407,7 @@
                 <a:ea typeface="Helvetica" pitchFamily="34" charset="-122"/>
                 <a:cs typeface="Helvetica" pitchFamily="34" charset="-120"/>
               </a:rPr>
-              <a:t>DIRECT LINK EXCHANGE ON CLASSIC</a:t>
+              <a:t>DIZZION COMPLETE</a:t>
             </a:r>
             <a:endParaRPr lang="en-US" dirty="0"/>
           </a:p>
@@ -27440,7 +27440,7 @@
       </p:sp>
       <p:pic>
         <p:nvPicPr>
-          <p:cNvPr id="12" name="Object 11" descr="public/generated/icons/9f3db814-3aec-47c5-94b0-6a71d49bd27f.png">    </p:cNvPr>
+          <p:cNvPr id="12" name="Object 11" descr="public/generated/icons/9e09a2eb-b2e5-4d76-ab7c-1b2f8c080865.png">    </p:cNvPr>
           <p:cNvPicPr>
             <a:picLocks noChangeAspect="1"/>
           </p:cNvPicPr>
@@ -27496,7 +27496,7 @@
                 <a:ea typeface="Helvetica" pitchFamily="34" charset="-122"/>
                 <a:cs typeface="Helvetica" pitchFamily="34" charset="-120"/>
               </a:rPr>
-              <a:t>DIZZION COMPLETE</a:t>
+              <a:t>DIZZION COMPLETE - HORIZON</a:t>
             </a:r>
             <a:endParaRPr lang="en-US" dirty="0"/>
           </a:p>
@@ -27529,7 +27529,7 @@
       </p:sp>
       <p:pic>
         <p:nvPicPr>
-          <p:cNvPr id="15" name="Object 14" descr="public/generated/icons/9e09a2eb-b2e5-4d76-ab7c-1b2f8c080865.png">    </p:cNvPr>
+          <p:cNvPr id="15" name="Object 14" descr="public/generated/icons/79679329-2050-4779-a2e2-7210b88aed4e.png">    </p:cNvPr>
           <p:cNvPicPr>
             <a:picLocks noChangeAspect="1"/>
           </p:cNvPicPr>
@@ -27585,7 +27585,7 @@
                 <a:ea typeface="Helvetica" pitchFamily="34" charset="-122"/>
                 <a:cs typeface="Helvetica" pitchFamily="34" charset="-120"/>
               </a:rPr>
-              <a:t>DIZZION COMPLETE - HORIZON</a:t>
+              <a:t>DIZZION COMPLETE FS - HORIZON</a:t>
             </a:r>
             <a:endParaRPr lang="en-US" dirty="0"/>
           </a:p>
@@ -27618,7 +27618,7 @@
       </p:sp>
       <p:pic>
         <p:nvPicPr>
-          <p:cNvPr id="18" name="Object 17" descr="public/generated/icons/79679329-2050-4779-a2e2-7210b88aed4e.png">    </p:cNvPr>
+          <p:cNvPr id="18" name="Object 17" descr="public/generated/icons/6fc0c2df-7fbc-470f-aac5-a93af7ef4a92.png">    </p:cNvPr>
           <p:cNvPicPr>
             <a:picLocks noChangeAspect="1"/>
           </p:cNvPicPr>
@@ -27674,7 +27674,7 @@
                 <a:ea typeface="Helvetica" pitchFamily="34" charset="-122"/>
                 <a:cs typeface="Helvetica" pitchFamily="34" charset="-120"/>
               </a:rPr>
-              <a:t>DIZZION COMPLETE FS - HORIZON</a:t>
+              <a:t>DIZZION FLEX</a:t>
             </a:r>
             <a:endParaRPr lang="en-US" dirty="0"/>
           </a:p>
@@ -27707,7 +27707,7 @@
       </p:sp>
       <p:pic>
         <p:nvPicPr>
-          <p:cNvPr id="21" name="Object 20" descr="public/generated/icons/6fc0c2df-7fbc-470f-aac5-a93af7ef4a92.png">    </p:cNvPr>
+          <p:cNvPr id="21" name="Object 20" descr="public/generated/icons/72ca6b61-2aa8-4b8f-ba21-69854bd2095b.png">    </p:cNvPr>
           <p:cNvPicPr>
             <a:picLocks noChangeAspect="1"/>
           </p:cNvPicPr>
@@ -27763,7 +27763,7 @@
                 <a:ea typeface="Helvetica" pitchFamily="34" charset="-122"/>
                 <a:cs typeface="Helvetica" pitchFamily="34" charset="-120"/>
               </a:rPr>
-              <a:t>DIZZION FLEX</a:t>
+              <a:t>DIZZION MANAGED</a:t>
             </a:r>
             <a:endParaRPr lang="en-US" dirty="0"/>
           </a:p>
@@ -27796,7 +27796,7 @@
       </p:sp>
       <p:pic>
         <p:nvPicPr>
-          <p:cNvPr id="24" name="Object 23" descr="public/generated/icons/72ca6b61-2aa8-4b8f-ba21-69854bd2095b.png">    </p:cNvPr>
+          <p:cNvPr id="24" name="Object 23" descr="public/generated/icons/b4ed8a30-936f-11e9-b289-1d079699cbe5.png">    </p:cNvPr>
           <p:cNvPicPr>
             <a:picLocks noChangeAspect="1"/>
           </p:cNvPicPr>
@@ -27852,7 +27852,7 @@
                 <a:ea typeface="Helvetica" pitchFamily="34" charset="-122"/>
                 <a:cs typeface="Helvetica" pitchFamily="34" charset="-120"/>
               </a:rPr>
-              <a:t>DIZZION MANAGED</a:t>
+              <a:t>DNS SERVICES</a:t>
             </a:r>
             <a:endParaRPr lang="en-US" dirty="0"/>
           </a:p>
@@ -27885,7 +27885,7 @@
       </p:sp>
       <p:pic>
         <p:nvPicPr>
-          <p:cNvPr id="27" name="Object 26" descr="public/generated/icons/b4ed8a30-936f-11e9-b289-1d079699cbe5.png">    </p:cNvPr>
+          <p:cNvPr id="27" name="Object 26" descr="public/generated/icons/d1e3f0d2-0f49-ddfd-0eb9-2897b9d3a45d.png">    </p:cNvPr>
           <p:cNvPicPr>
             <a:picLocks noChangeAspect="1"/>
           </p:cNvPicPr>
@@ -27941,7 +27941,7 @@
                 <a:ea typeface="Helvetica" pitchFamily="34" charset="-122"/>
                 <a:cs typeface="Helvetica" pitchFamily="34" charset="-120"/>
               </a:rPr>
-              <a:t>DNS SERVICES</a:t>
+              <a:t>EMAIL DELIVERY, POWERED BY SENDGRID</a:t>
             </a:r>
             <a:endParaRPr lang="en-US" dirty="0"/>
           </a:p>
@@ -27974,7 +27974,7 @@
       </p:sp>
       <p:pic>
         <p:nvPicPr>
-          <p:cNvPr id="30" name="Object 29" descr="public/generated/icons/d1e3f0d2-0f49-ddfd-0eb9-2897b9d3a45d.png">    </p:cNvPr>
+          <p:cNvPr id="30" name="Object 29" descr="public/generated/icons/871a9870-7508-11ef-ac5c-3324c550b37a.png">    </p:cNvPr>
           <p:cNvPicPr>
             <a:picLocks noChangeAspect="1"/>
           </p:cNvPicPr>
@@ -28030,7 +28030,7 @@
                 <a:ea typeface="Helvetica" pitchFamily="34" charset="-122"/>
                 <a:cs typeface="Helvetica" pitchFamily="34" charset="-120"/>
               </a:rPr>
-              <a:t>EMAIL DELIVERY, POWERED BY SENDGRID</a:t>
+              <a:t>ENTERPRISE APPLICATION SERVICE</a:t>
             </a:r>
             <a:endParaRPr lang="en-US" dirty="0"/>
           </a:p>
@@ -28063,7 +28063,7 @@
       </p:sp>
       <p:pic>
         <p:nvPicPr>
-          <p:cNvPr id="33" name="Object 32" descr="public/generated/icons/871a9870-7508-11ef-ac5c-3324c550b37a.png">    </p:cNvPr>
+          <p:cNvPr id="33" name="Object 32" descr="public/generated/icons/64955a78-30f9-426d-a25a-344480421b27.png">    </p:cNvPr>
           <p:cNvPicPr>
             <a:picLocks noChangeAspect="1"/>
           </p:cNvPicPr>
@@ -28119,7 +28119,7 @@
                 <a:ea typeface="Helvetica" pitchFamily="34" charset="-122"/>
                 <a:cs typeface="Helvetica" pitchFamily="34" charset="-120"/>
               </a:rPr>
-              <a:t>ENTERPRISE APPLICATION SERVICE</a:t>
+              <a:t>ETICLOUD SECURE DIGITAL AGILE WORKPLACE</a:t>
             </a:r>
             <a:endParaRPr lang="en-US" dirty="0"/>
           </a:p>
@@ -28152,7 +28152,7 @@
       </p:sp>
       <p:pic>
         <p:nvPicPr>
-          <p:cNvPr id="36" name="Object 35" descr="public/generated/icons/64955a78-30f9-426d-a25a-344480421b27.png">    </p:cNvPr>
+          <p:cNvPr id="36" name="Object 35" descr="public/generated/icons/ecdb4690-c2d8-11eb-bff1-4f7b9d2dfe41.png">    </p:cNvPr>
           <p:cNvPicPr>
             <a:picLocks noChangeAspect="1"/>
           </p:cNvPicPr>
@@ -28208,7 +28208,7 @@
                 <a:ea typeface="Helvetica" pitchFamily="34" charset="-122"/>
                 <a:cs typeface="Helvetica" pitchFamily="34" charset="-120"/>
               </a:rPr>
-              <a:t>ETICLOUD SECURE DIGITAL AGILE WORKPLACE</a:t>
+              <a:t>EVENT NOTIFICATIONS</a:t>
             </a:r>
             <a:endParaRPr lang="en-US" dirty="0"/>
           </a:p>
@@ -28241,7 +28241,7 @@
       </p:sp>
       <p:pic>
         <p:nvPicPr>
-          <p:cNvPr id="39" name="Object 38" descr="public/generated/icons/ecdb4690-c2d8-11eb-bff1-4f7b9d2dfe41.png">    </p:cNvPr>
+          <p:cNvPr id="39" name="Object 38" descr="public/generated/icons/6a7f4e38-f218-48ef-9dd2-df408747568e.png">    </p:cNvPr>
           <p:cNvPicPr>
             <a:picLocks noChangeAspect="1"/>
           </p:cNvPicPr>
@@ -28297,7 +28297,7 @@
                 <a:ea typeface="Helvetica" pitchFamily="34" charset="-122"/>
                 <a:cs typeface="Helvetica" pitchFamily="34" charset="-120"/>
               </a:rPr>
-              <a:t>EVENT NOTIFICATIONS</a:t>
+              <a:t>EVENT STREAMS</a:t>
             </a:r>
             <a:endParaRPr lang="en-US" dirty="0"/>
           </a:p>
@@ -28330,7 +28330,7 @@
       </p:sp>
       <p:pic>
         <p:nvPicPr>
-          <p:cNvPr id="42" name="Object 41" descr="public/generated/icons/6a7f4e38-f218-48ef-9dd2-df408747568e.png">    </p:cNvPr>
+          <p:cNvPr id="42" name="Object 41" descr="public/generated/icons/cf329950-0a3e-11e8-922e-f1366c6e1c83-bigip.png">    </p:cNvPr>
           <p:cNvPicPr>
             <a:picLocks noChangeAspect="1"/>
           </p:cNvPicPr>
@@ -28386,7 +28386,7 @@
                 <a:ea typeface="Helvetica" pitchFamily="34" charset="-122"/>
                 <a:cs typeface="Helvetica" pitchFamily="34" charset="-120"/>
               </a:rPr>
-              <a:t>EVENT STREAMS</a:t>
+              <a:t>F5 BIG-IP</a:t>
             </a:r>
             <a:endParaRPr lang="en-US" dirty="0"/>
           </a:p>
@@ -28419,7 +28419,7 @@
       </p:sp>
       <p:pic>
         <p:nvPicPr>
-          <p:cNvPr id="45" name="Object 44" descr="public/generated/icons/cf329950-0a3e-11e8-922e-f1366c6e1c83-bigip.png">    </p:cNvPr>
+          <p:cNvPr id="45" name="Object 44" descr="public/generated/icons/60427a43-cf48-41e0-bd95-26bde9c12105.png">    </p:cNvPr>
           <p:cNvPicPr>
             <a:picLocks noChangeAspect="1"/>
           </p:cNvPicPr>
@@ -28475,7 +28475,7 @@
                 <a:ea typeface="Helvetica" pitchFamily="34" charset="-122"/>
                 <a:cs typeface="Helvetica" pitchFamily="34" charset="-120"/>
               </a:rPr>
-              <a:t>F5 BIG-IP</a:t>
+              <a:t>FALCONSTOR STORSAFE FOR POWER ON-PREMISES</a:t>
             </a:r>
             <a:endParaRPr lang="en-US" dirty="0"/>
           </a:p>
@@ -28508,7 +28508,7 @@
       </p:sp>
       <p:pic>
         <p:nvPicPr>
-          <p:cNvPr id="48" name="Object 47" descr="public/generated/icons/60427a43-cf48-41e0-bd95-26bde9c12105.png">    </p:cNvPr>
+          <p:cNvPr id="48" name="Object 47" descr="public/generated/icons/6.png">    </p:cNvPr>
           <p:cNvPicPr>
             <a:picLocks noChangeAspect="1"/>
           </p:cNvPicPr>
@@ -28564,7 +28564,7 @@
                 <a:ea typeface="Helvetica" pitchFamily="34" charset="-122"/>
                 <a:cs typeface="Helvetica" pitchFamily="34" charset="-120"/>
               </a:rPr>
-              <a:t>FALCONSTOR STORSAFE VTL FOR POWER ON-PREMISES</a:t>
+              <a:t>FILE STORAGE FOR CLASSIC</a:t>
             </a:r>
             <a:endParaRPr lang="en-US" dirty="0"/>
           </a:p>
@@ -28597,7 +28597,7 @@
       </p:sp>
       <p:pic>
         <p:nvPicPr>
-          <p:cNvPr id="51" name="Object 50" descr="public/generated/icons/6.png">    </p:cNvPr>
+          <p:cNvPr id="51" name="Object 50" descr="public/generated/icons/is.share.png">    </p:cNvPr>
           <p:cNvPicPr>
             <a:picLocks noChangeAspect="1"/>
           </p:cNvPicPr>
@@ -28653,7 +28653,7 @@
                 <a:ea typeface="Helvetica" pitchFamily="34" charset="-122"/>
                 <a:cs typeface="Helvetica" pitchFamily="34" charset="-120"/>
               </a:rPr>
-              <a:t>FILE STORAGE FOR CLASSIC</a:t>
+              <a:t>FILE STORAGE FOR VPC</a:t>
             </a:r>
             <a:endParaRPr lang="en-US" dirty="0"/>
           </a:p>
@@ -28686,7 +28686,7 @@
       </p:sp>
       <p:pic>
         <p:nvPicPr>
-          <p:cNvPr id="54" name="Object 53" descr="public/generated/icons/is.share.png">    </p:cNvPr>
+          <p:cNvPr id="54" name="Object 53" descr="public/generated/icons/is.floating-ip.png">    </p:cNvPr>
           <p:cNvPicPr>
             <a:picLocks noChangeAspect="1"/>
           </p:cNvPicPr>
@@ -28742,7 +28742,7 @@
                 <a:ea typeface="Helvetica" pitchFamily="34" charset="-122"/>
                 <a:cs typeface="Helvetica" pitchFamily="34" charset="-120"/>
               </a:rPr>
-              <a:t>FILE STORAGE FOR VPC</a:t>
+              <a:t>FLOATING IP FOR VPC</a:t>
             </a:r>
             <a:endParaRPr lang="en-US" dirty="0"/>
           </a:p>
@@ -28775,7 +28775,7 @@
       </p:sp>
       <p:pic>
         <p:nvPicPr>
-          <p:cNvPr id="57" name="Object 56" descr="public/generated/icons/is.floating-ip.png">    </p:cNvPr>
+          <p:cNvPr id="57" name="Object 56" descr="public/generated/icons/is.flow-log-collector.png">    </p:cNvPr>
           <p:cNvPicPr>
             <a:picLocks noChangeAspect="1"/>
           </p:cNvPicPr>
@@ -28831,7 +28831,7 @@
                 <a:ea typeface="Helvetica" pitchFamily="34" charset="-122"/>
                 <a:cs typeface="Helvetica" pitchFamily="34" charset="-120"/>
               </a:rPr>
-              <a:t>FLOATING IP FOR VPC</a:t>
+              <a:t>FLOW LOGS FOR VPC</a:t>
             </a:r>
             <a:endParaRPr lang="en-US" dirty="0"/>
           </a:p>
@@ -28864,7 +28864,7 @@
       </p:sp>
       <p:pic>
         <p:nvPicPr>
-          <p:cNvPr id="60" name="Object 59" descr="public/generated/icons/is.flow-log-collector.png">    </p:cNvPr>
+          <p:cNvPr id="60" name="Object 59" descr="public/generated/icons/05605040-8854-4665-bd05-0b10a96daf05.png">    </p:cNvPr>
           <p:cNvPicPr>
             <a:picLocks noChangeAspect="1"/>
           </p:cNvPicPr>
@@ -28920,7 +28920,7 @@
                 <a:ea typeface="Helvetica" pitchFamily="34" charset="-122"/>
                 <a:cs typeface="Helvetica" pitchFamily="34" charset="-120"/>
               </a:rPr>
-              <a:t>FLOW LOGS FOR VPC</a:t>
+              <a:t>FNTS CLOUD MIGRATION SERVICES</a:t>
             </a:r>
             <a:endParaRPr lang="en-US" dirty="0"/>
           </a:p>
@@ -28953,7 +28953,7 @@
       </p:sp>
       <p:pic>
         <p:nvPicPr>
-          <p:cNvPr id="63" name="Object 62" descr="public/generated/icons/05605040-8854-4665-bd05-0b10a96daf05.png">    </p:cNvPr>
+          <p:cNvPr id="63" name="Object 62" descr="public/generated/icons/d2fb0ba3-1679-4053-a593-9f2259d9e87b.png">    </p:cNvPr>
           <p:cNvPicPr>
             <a:picLocks noChangeAspect="1"/>
           </p:cNvPicPr>
@@ -29009,7 +29009,7 @@
                 <a:ea typeface="Helvetica" pitchFamily="34" charset="-122"/>
                 <a:cs typeface="Helvetica" pitchFamily="34" charset="-120"/>
               </a:rPr>
-              <a:t>FNTS CLOUD MIGRATION SERVICES</a:t>
+              <a:t>FNTS MANAGED SERVICES FOR POWERVS CLOUD</a:t>
             </a:r>
             <a:endParaRPr lang="en-US" dirty="0"/>
           </a:p>
@@ -29042,7 +29042,7 @@
       </p:sp>
       <p:pic>
         <p:nvPicPr>
-          <p:cNvPr id="66" name="Object 65" descr="public/generated/icons/d2fb0ba3-1679-4053-a593-9f2259d9e87b.png">    </p:cNvPr>
+          <p:cNvPr id="66" name="Object 65" descr="public/generated/icons/cf329950-0a3e-11e8-922e-f1366c6e1c83-fortigate.png">    </p:cNvPr>
           <p:cNvPicPr>
             <a:picLocks noChangeAspect="1"/>
           </p:cNvPicPr>
@@ -29098,7 +29098,7 @@
                 <a:ea typeface="Helvetica" pitchFamily="34" charset="-122"/>
                 <a:cs typeface="Helvetica" pitchFamily="34" charset="-120"/>
               </a:rPr>
-              <a:t>FNTS MANAGED SERVICES FOR POWERVS CLOUD</a:t>
+              <a:t>FORTIGATE SECURITY APPLIANCE</a:t>
             </a:r>
             <a:endParaRPr lang="en-US" dirty="0"/>
           </a:p>
@@ -29131,7 +29131,7 @@
       </p:sp>
       <p:pic>
         <p:nvPicPr>
-          <p:cNvPr id="69" name="Object 68" descr="public/generated/icons/cf329950-0a3e-11e8-922e-f1366c6e1c83-fortigate.png">    </p:cNvPr>
+          <p:cNvPr id="69" name="Object 68" descr="public/generated/icons/f5b26324-9b39-c701-0cc5-b0d5d2fe8534.png">    </p:cNvPr>
           <p:cNvPicPr>
             <a:picLocks noChangeAspect="1"/>
           </p:cNvPicPr>
@@ -29187,7 +29187,7 @@
                 <a:ea typeface="Helvetica" pitchFamily="34" charset="-122"/>
                 <a:cs typeface="Helvetica" pitchFamily="34" charset="-120"/>
               </a:rPr>
-              <a:t>FORTIGATE SECURITY APPLIANCE</a:t>
+              <a:t>FORTIGATE SECURITY APPLIANCE 10GBPS</a:t>
             </a:r>
             <a:endParaRPr lang="en-US" dirty="0"/>
           </a:p>
@@ -29220,7 +29220,7 @@
       </p:sp>
       <p:pic>
         <p:nvPicPr>
-          <p:cNvPr id="72" name="Object 71" descr="public/generated/icons/f5b26324-9b39-c701-0cc5-b0d5d2fe8534.png">    </p:cNvPr>
+          <p:cNvPr id="72" name="Object 71" descr="public/generated/icons/cf329950-0a3e-11e8-922e-f1366c6e1c83-fortigatevm.png">    </p:cNvPr>
           <p:cNvPicPr>
             <a:picLocks noChangeAspect="1"/>
           </p:cNvPicPr>
@@ -29276,7 +29276,7 @@
                 <a:ea typeface="Helvetica" pitchFamily="34" charset="-122"/>
                 <a:cs typeface="Helvetica" pitchFamily="34" charset="-120"/>
               </a:rPr>
-              <a:t>FORTIGATE SECURITY APPLIANCE 10GBPS</a:t>
+              <a:t>FORTIGATE VIRTUAL APPLIANCE</a:t>
             </a:r>
             <a:endParaRPr lang="en-US" dirty="0"/>
           </a:p>
@@ -29309,7 +29309,7 @@
       </p:sp>
       <p:pic>
         <p:nvPicPr>
-          <p:cNvPr id="75" name="Object 74" descr="public/generated/icons/cf329950-0a3e-11e8-922e-f1366c6e1c83-fortigatevm.png">    </p:cNvPr>
+          <p:cNvPr id="75" name="Object 74" descr="public/generated/icons/a93eeacc-7012-c8bc-c851-e928949a226c.png">    </p:cNvPr>
           <p:cNvPicPr>
             <a:picLocks noChangeAspect="1"/>
           </p:cNvPicPr>
@@ -29365,7 +29365,7 @@
                 <a:ea typeface="Helvetica" pitchFamily="34" charset="-122"/>
                 <a:cs typeface="Helvetica" pitchFamily="34" charset="-120"/>
               </a:rPr>
-              <a:t>FORTIGATE VIRTUAL APPLIANCE</a:t>
+              <a:t>FORTINET VIRTUAL FORTIGATE SECURITY APPLIANCE (VFSA)</a:t>
             </a:r>
             <a:endParaRPr lang="en-US" dirty="0"/>
           </a:p>
@@ -29398,7 +29398,7 @@
       </p:sp>
       <p:pic>
         <p:nvPicPr>
-          <p:cNvPr id="78" name="Object 77" descr="public/generated/icons/a93eeacc-7012-c8bc-c851-e928949a226c.png">    </p:cNvPr>
+          <p:cNvPr id="78" name="Object 77" descr="public/generated/icons/900fb23f-fe9d-4cf8-9bb2-a82d87dede0e.png">    </p:cNvPr>
           <p:cNvPicPr>
             <a:picLocks noChangeAspect="1"/>
           </p:cNvPicPr>
@@ -29454,7 +29454,7 @@
                 <a:ea typeface="Helvetica" pitchFamily="34" charset="-122"/>
                 <a:cs typeface="Helvetica" pitchFamily="34" charset="-120"/>
               </a:rPr>
-              <a:t>FORTINET VIRTUAL FORTIGATE SECURITY APPLIANCE (VFSA)</a:t>
+              <a:t>FRESCHE KTLO APPLICATION MANAGEMENT</a:t>
             </a:r>
             <a:endParaRPr lang="en-US" dirty="0"/>
           </a:p>
@@ -29487,7 +29487,7 @@
       </p:sp>
       <p:pic>
         <p:nvPicPr>
-          <p:cNvPr id="81" name="Object 80" descr="public/generated/icons/900fb23f-fe9d-4cf8-9bb2-a82d87dede0e.png">    </p:cNvPr>
+          <p:cNvPr id="81" name="Object 80" descr="public/generated/icons/c3c7f095-67da-42e6-b982-46d0e6e79f84.png">    </p:cNvPr>
           <p:cNvPicPr>
             <a:picLocks noChangeAspect="1"/>
           </p:cNvPicPr>
@@ -29543,7 +29543,7 @@
                 <a:ea typeface="Helvetica" pitchFamily="34" charset="-122"/>
                 <a:cs typeface="Helvetica" pitchFamily="34" charset="-120"/>
               </a:rPr>
-              <a:t>FRESCHE KTLO APPLICATION MANAGEMENT</a:t>
+              <a:t>FRESCHE LPAR OPERATIONS MANAGEMENT</a:t>
             </a:r>
             <a:endParaRPr lang="en-US" dirty="0"/>
           </a:p>
@@ -29576,7 +29576,7 @@
       </p:sp>
       <p:pic>
         <p:nvPicPr>
-          <p:cNvPr id="84" name="Object 83" descr="public/generated/icons/c3c7f095-67da-42e6-b982-46d0e6e79f84.png">    </p:cNvPr>
+          <p:cNvPr id="84" name="Object 83" descr="public/generated/icons/afa31435-8561-4383-b069-ec9a47719e20.png">    </p:cNvPr>
           <p:cNvPicPr>
             <a:picLocks noChangeAspect="1"/>
           </p:cNvPicPr>
@@ -29632,7 +29632,7 @@
                 <a:ea typeface="Helvetica" pitchFamily="34" charset="-122"/>
                 <a:cs typeface="Helvetica" pitchFamily="34" charset="-120"/>
               </a:rPr>
-              <a:t>FRESCHE LPAR OPERATIONS MANAGEMENT</a:t>
+              <a:t>FRESCHE PRESTO</a:t>
             </a:r>
             <a:endParaRPr lang="en-US" dirty="0"/>
           </a:p>
@@ -29665,7 +29665,7 @@
       </p:sp>
       <p:pic>
         <p:nvPicPr>
-          <p:cNvPr id="87" name="Object 86" descr="public/generated/icons/16.png">    </p:cNvPr>
+          <p:cNvPr id="87" name="Object 86" descr="public/generated/icons/9db75c87-84ce-491b-8526-dcd2188f3866.png">    </p:cNvPr>
           <p:cNvPicPr>
             <a:picLocks noChangeAspect="1"/>
           </p:cNvPicPr>
@@ -29721,7 +29721,7 @@
                 <a:ea typeface="Helvetica" pitchFamily="34" charset="-122"/>
                 <a:cs typeface="Helvetica" pitchFamily="34" charset="-120"/>
               </a:rPr>
-              <a:t>HARDWARE FIREWALL</a:t>
+              <a:t>FRESCHE X-ANALYSIS SUITE</a:t>
             </a:r>
             <a:endParaRPr lang="en-US" dirty="0"/>
           </a:p>
@@ -29754,7 +29754,7 @@
       </p:sp>
       <p:pic>
         <p:nvPicPr>
-          <p:cNvPr id="90" name="Object 89" descr="public/generated/icons/cf329950-0a3e-11e8-922e-f1366c6e1c83-hcx.png">    </p:cNvPr>
+          <p:cNvPr id="90" name="Object 89" descr="public/generated/icons/16.png">    </p:cNvPr>
           <p:cNvPicPr>
             <a:picLocks noChangeAspect="1"/>
           </p:cNvPicPr>
@@ -29810,7 +29810,7 @@
                 <a:ea typeface="Helvetica" pitchFamily="34" charset="-122"/>
                 <a:cs typeface="Helvetica" pitchFamily="34" charset="-120"/>
               </a:rPr>
-              <a:t>HCX</a:t>
+              <a:t>HARDWARE FIREWALL</a:t>
             </a:r>
             <a:endParaRPr lang="en-US" dirty="0"/>
           </a:p>
@@ -29843,7 +29843,7 @@
       </p:sp>
       <p:pic>
         <p:nvPicPr>
-          <p:cNvPr id="93" name="Object 92" descr="public/generated/icons/3dacb5a3-de4a-4361-9f39-0b6657f89f37.png">    </p:cNvPr>
+          <p:cNvPr id="93" name="Object 92" descr="public/generated/icons/cf329950-0a3e-11e8-922e-f1366c6e1c83-hcx.png">    </p:cNvPr>
           <p:cNvPicPr>
             <a:picLocks noChangeAspect="1"/>
           </p:cNvPicPr>
@@ -29899,7 +29899,7 @@
                 <a:ea typeface="Helvetica" pitchFamily="34" charset="-122"/>
                 <a:cs typeface="Helvetica" pitchFamily="34" charset="-120"/>
               </a:rPr>
-              <a:t>HDM VMWARE WORKLOAD ANALYZER</a:t>
+              <a:t>HCX</a:t>
             </a:r>
             <a:endParaRPr lang="en-US" dirty="0"/>
           </a:p>
@@ -29932,7 +29932,7 @@
       </p:sp>
       <p:pic>
         <p:nvPicPr>
-          <p:cNvPr id="96" name="Object 95" descr="public/generated/icons/cf329950-0a3e-11e8-922e-f1366c6e1c83-horizon.png">    </p:cNvPr>
+          <p:cNvPr id="96" name="Object 95" descr="public/generated/icons/3dacb5a3-de4a-4361-9f39-0b6657f89f37.png">    </p:cNvPr>
           <p:cNvPicPr>
             <a:picLocks noChangeAspect="1"/>
           </p:cNvPicPr>
@@ -29988,7 +29988,7 @@
                 <a:ea typeface="Helvetica" pitchFamily="34" charset="-122"/>
                 <a:cs typeface="Helvetica" pitchFamily="34" charset="-120"/>
               </a:rPr>
-              <a:t>HORIZON 7</a:t>
+              <a:t>HDM VMWARE WORKLOAD ANALYZER</a:t>
             </a:r>
             <a:endParaRPr lang="en-US" dirty="0"/>
           </a:p>
@@ -30021,7 +30021,7 @@
       </p:sp>
       <p:pic>
         <p:nvPicPr>
-          <p:cNvPr id="99" name="Object 98" descr="public/generated/icons/fa329acf-f9b6-fa9f-f37e-ad72d0b6a783.png">    </p:cNvPr>
+          <p:cNvPr id="99" name="Object 98" descr="public/generated/icons/cf329950-0a3e-11e8-922e-f1366c6e1c83-horizon.png">    </p:cNvPr>
           <p:cNvPicPr>
             <a:picLocks noChangeAspect="1"/>
           </p:cNvPicPr>
@@ -30077,7 +30077,7 @@
                 <a:ea typeface="Helvetica" pitchFamily="34" charset="-122"/>
                 <a:cs typeface="Helvetica" pitchFamily="34" charset="-120"/>
               </a:rPr>
-              <a:t>HYBRID CLOUD INFRASTRUCTURE AS A SERVICE</a:t>
+              <a:t>HORIZON 7</a:t>
             </a:r>
             <a:endParaRPr lang="en-US" dirty="0"/>
           </a:p>
@@ -30110,7 +30110,7 @@
       </p:sp>
       <p:pic>
         <p:nvPicPr>
-          <p:cNvPr id="102" name="Object 101" descr="public/generated/icons/d589492e-6ac0-4a11-9c28-a157851c8f68.png">    </p:cNvPr>
+          <p:cNvPr id="102" name="Object 101" descr="public/generated/icons/fa329acf-f9b6-fa9f-f37e-ad72d0b6a783.png">    </p:cNvPr>
           <p:cNvPicPr>
             <a:picLocks noChangeAspect="1"/>
           </p:cNvPicPr>
@@ -30166,7 +30166,7 @@
                 <a:ea typeface="Helvetica" pitchFamily="34" charset="-122"/>
                 <a:cs typeface="Helvetica" pitchFamily="34" charset="-120"/>
               </a:rPr>
-              <a:t>HYPER PROTECT CRYPTO SERVICES</a:t>
+              <a:t>HYBRID CLOUD INFRASTRUCTURE AS A SERVICE</a:t>
             </a:r>
             <a:endParaRPr lang="en-US" dirty="0"/>
           </a:p>
@@ -30199,7 +30199,7 @@
       </p:sp>
       <p:pic>
         <p:nvPicPr>
-          <p:cNvPr id="105" name="Object 104" descr="public/generated/icons/986f2197-9f9a-44f4-9463-f17ec64c6729.png">    </p:cNvPr>
+          <p:cNvPr id="105" name="Object 104" descr="public/generated/icons/d589492e-6ac0-4a11-9c28-a157851c8f68.png">    </p:cNvPr>
           <p:cNvPicPr>
             <a:picLocks noChangeAspect="1"/>
           </p:cNvPicPr>
@@ -30255,7 +30255,7 @@
                 <a:ea typeface="Helvetica" pitchFamily="34" charset="-122"/>
                 <a:cs typeface="Helvetica" pitchFamily="34" charset="-120"/>
               </a:rPr>
-              <a:t>HYPER PROTECT VIRTUAL SERVER FOR CLASSIC</a:t>
+              <a:t>HYPER PROTECT CRYPTO SERVICES</a:t>
             </a:r>
             <a:endParaRPr lang="en-US" dirty="0"/>
           </a:p>
@@ -30288,7 +30288,7 @@
       </p:sp>
       <p:pic>
         <p:nvPicPr>
-          <p:cNvPr id="108" name="Object 107" descr="public/generated/icons/cf329950-0a3e-11e8-922e-f1366c6e1c83-hytrustcc.png">    </p:cNvPr>
+          <p:cNvPr id="108" name="Object 107" descr="public/generated/icons/986f2197-9f9a-44f4-9463-f17ec64c6729.png">    </p:cNvPr>
           <p:cNvPicPr>
             <a:picLocks noChangeAspect="1"/>
           </p:cNvPicPr>
@@ -30344,7 +30344,7 @@
                 <a:ea typeface="Helvetica" pitchFamily="34" charset="-122"/>
                 <a:cs typeface="Helvetica" pitchFamily="34" charset="-120"/>
               </a:rPr>
-              <a:t>HYTRUST CLOUDCONTROL</a:t>
+              <a:t>HYPER PROTECT VIRTUAL SERVER FOR CLASSIC</a:t>
             </a:r>
             <a:endParaRPr lang="en-US" dirty="0"/>
           </a:p>
@@ -30410,7 +30410,7 @@
       </p:sp>
       <p:pic>
         <p:nvPicPr>
-          <p:cNvPr id="3" name="Object 2" descr="public/generated/icons/cf329950-0a3e-11e8-922e-f1366c6e1c83-hytrustdc.png">    </p:cNvPr>
+          <p:cNvPr id="3" name="Object 2" descr="public/generated/icons/cf329950-0a3e-11e8-922e-f1366c6e1c83-hytrustcc.png">    </p:cNvPr>
           <p:cNvPicPr>
             <a:picLocks noChangeAspect="1"/>
           </p:cNvPicPr>
@@ -30466,7 +30466,7 @@
                 <a:ea typeface="Helvetica" pitchFamily="34" charset="-122"/>
                 <a:cs typeface="Helvetica" pitchFamily="34" charset="-120"/>
               </a:rPr>
-              <a:t>HYTRUST DATACONTROL</a:t>
+              <a:t>HYTRUST CLOUDCONTROL</a:t>
             </a:r>
             <a:endParaRPr lang="en-US" dirty="0"/>
           </a:p>
@@ -30499,7 +30499,7 @@
       </p:sp>
       <p:pic>
         <p:nvPicPr>
-          <p:cNvPr id="6" name="Object 5" descr="public/generated/icons/cf329950-0a3e-11e8-922e-f1366c6e1c83-hytrustkc.png">    </p:cNvPr>
+          <p:cNvPr id="6" name="Object 5" descr="public/generated/icons/cf329950-0a3e-11e8-922e-f1366c6e1c83-hytrustdc.png">    </p:cNvPr>
           <p:cNvPicPr>
             <a:picLocks noChangeAspect="1"/>
           </p:cNvPicPr>
@@ -30555,7 +30555,7 @@
                 <a:ea typeface="Helvetica" pitchFamily="34" charset="-122"/>
                 <a:cs typeface="Helvetica" pitchFamily="34" charset="-120"/>
               </a:rPr>
-              <a:t>HYTRUST KEYCONTROL</a:t>
+              <a:t>HYTRUST DATACONTROL</a:t>
             </a:r>
             <a:endParaRPr lang="en-US" dirty="0"/>
           </a:p>
@@ -30588,7 +30588,7 @@
       </p:sp>
       <p:pic>
         <p:nvPicPr>
-          <p:cNvPr id="9" name="Object 8" descr="public/generated/icons/is.image.png">    </p:cNvPr>
+          <p:cNvPr id="9" name="Object 8" descr="public/generated/icons/cf329950-0a3e-11e8-922e-f1366c6e1c83-hytrustkc.png">    </p:cNvPr>
           <p:cNvPicPr>
             <a:picLocks noChangeAspect="1"/>
           </p:cNvPicPr>
@@ -30644,7 +30644,7 @@
                 <a:ea typeface="Helvetica" pitchFamily="34" charset="-122"/>
                 <a:cs typeface="Helvetica" pitchFamily="34" charset="-120"/>
               </a:rPr>
-              <a:t>IMAGE SERVICE FOR VPC</a:t>
+              <a:t>HYTRUST KEYCONTROL</a:t>
             </a:r>
             <a:endParaRPr lang="en-US" dirty="0"/>
           </a:p>
@@ -30677,7 +30677,7 @@
       </p:sp>
       <p:pic>
         <p:nvPicPr>
-          <p:cNvPr id="12" name="Object 11" descr="public/generated/icons/is.metadata.png">    </p:cNvPr>
+          <p:cNvPr id="12" name="Object 11" descr="public/generated/icons/is.image.png">    </p:cNvPr>
           <p:cNvPicPr>
             <a:picLocks noChangeAspect="1"/>
           </p:cNvPicPr>
@@ -30733,7 +30733,7 @@
                 <a:ea typeface="Helvetica" pitchFamily="34" charset="-122"/>
                 <a:cs typeface="Helvetica" pitchFamily="34" charset="-120"/>
               </a:rPr>
-              <a:t>INSTANCE METADATA FOR VPC</a:t>
+              <a:t>IMAGE SERVICE FOR VPC</a:t>
             </a:r>
             <a:endParaRPr lang="en-US" dirty="0"/>
           </a:p>
@@ -30766,7 +30766,7 @@
       </p:sp>
       <p:pic>
         <p:nvPicPr>
-          <p:cNvPr id="15" name="Object 14" descr="public/generated/icons/instructlab.png">    </p:cNvPr>
+          <p:cNvPr id="15" name="Object 14" descr="public/generated/icons/is.metadata.png">    </p:cNvPr>
           <p:cNvPicPr>
             <a:picLocks noChangeAspect="1"/>
           </p:cNvPicPr>
@@ -30822,7 +30822,7 @@
                 <a:ea typeface="Helvetica" pitchFamily="34" charset="-122"/>
                 <a:cs typeface="Helvetica" pitchFamily="34" charset="-120"/>
               </a:rPr>
-              <a:t>INSTRUCTLAB</a:t>
+              <a:t>INSTANCE METADATA FOR VPC</a:t>
             </a:r>
             <a:endParaRPr lang="en-US" dirty="0"/>
           </a:p>
@@ -31300,7 +31300,7 @@
       </p:sp>
       <p:pic>
         <p:nvPicPr>
-          <p:cNvPr id="33" name="Object 32" descr="public/generated/icons/ed3a5a53-eb60-4f3c-8fd1-17f88585b6ed.png">    </p:cNvPr>
+          <p:cNvPr id="33" name="Object 32" descr="public/generated/icons/983ea9a2-0fec-4021-8b70-8da5373394e5.png">    </p:cNvPr>
           <p:cNvPicPr>
             <a:picLocks noChangeAspect="1"/>
           </p:cNvPicPr>
@@ -31356,7 +31356,7 @@
                 <a:ea typeface="Helvetica" pitchFamily="34" charset="-122"/>
                 <a:cs typeface="Helvetica" pitchFamily="34" charset="-120"/>
               </a:rPr>
-              <a:t>KNOWLEDGE CATALOG</a:t>
+              <a:t>KNOWLEDGE STUDIO</a:t>
             </a:r>
             <a:endParaRPr lang="en-US" dirty="0"/>
           </a:p>
@@ -31389,7 +31389,7 @@
       </p:sp>
       <p:pic>
         <p:nvPicPr>
-          <p:cNvPr id="36" name="Object 35" descr="public/generated/icons/983ea9a2-0fec-4021-8b70-8da5373394e5.png">    </p:cNvPr>
+          <p:cNvPr id="36" name="Object 35" descr="public/generated/icons/a8f89634-261c-4832-8257-b25e04787988.png">    </p:cNvPr>
           <p:cNvPicPr>
             <a:picLocks noChangeAspect="1"/>
           </p:cNvPicPr>
@@ -31445,7 +31445,7 @@
                 <a:ea typeface="Helvetica" pitchFamily="34" charset="-122"/>
                 <a:cs typeface="Helvetica" pitchFamily="34" charset="-120"/>
               </a:rPr>
-              <a:t>KNOWLEDGE STUDIO</a:t>
+              <a:t>KOMPRISE ELASTIC DATA MIGRATION</a:t>
             </a:r>
             <a:endParaRPr lang="en-US" dirty="0"/>
           </a:p>
@@ -31478,7 +31478,7 @@
       </p:sp>
       <p:pic>
         <p:nvPicPr>
-          <p:cNvPr id="39" name="Object 38" descr="public/generated/icons/a8f89634-261c-4832-8257-b25e04787988.png">    </p:cNvPr>
+          <p:cNvPr id="39" name="Object 38" descr="public/generated/icons/f1fa7442-9ee0-4e27-94c2-0cb3776a0a0a.png">    </p:cNvPr>
           <p:cNvPicPr>
             <a:picLocks noChangeAspect="1"/>
           </p:cNvPicPr>
@@ -31534,7 +31534,7 @@
                 <a:ea typeface="Helvetica" pitchFamily="34" charset="-122"/>
                 <a:cs typeface="Helvetica" pitchFamily="34" charset="-120"/>
               </a:rPr>
-              <a:t>KOMPRISE ELASTIC DATA MIGRATION</a:t>
+              <a:t>KOMPRISE INTELLIGENT DATA MANAGEMENT SUITE</a:t>
             </a:r>
             <a:endParaRPr lang="en-US" dirty="0"/>
           </a:p>
@@ -31567,7 +31567,7 @@
       </p:sp>
       <p:pic>
         <p:nvPicPr>
-          <p:cNvPr id="42" name="Object 41" descr="public/generated/icons/f1fa7442-9ee0-4e27-94c2-0cb3776a0a0a.png">    </p:cNvPr>
+          <p:cNvPr id="42" name="Object 41" descr="public/generated/icons/containers-kubernetes.png">    </p:cNvPr>
           <p:cNvPicPr>
             <a:picLocks noChangeAspect="1"/>
           </p:cNvPicPr>
@@ -31623,7 +31623,7 @@
                 <a:ea typeface="Helvetica" pitchFamily="34" charset="-122"/>
                 <a:cs typeface="Helvetica" pitchFamily="34" charset="-120"/>
               </a:rPr>
-              <a:t>KOMPRISE INTELLIGENT DATA MANAGEMENT SUITE</a:t>
+              <a:t>KUBERNETES SERVICE</a:t>
             </a:r>
             <a:endParaRPr lang="en-US" dirty="0"/>
           </a:p>
@@ -31656,7 +31656,7 @@
       </p:sp>
       <p:pic>
         <p:nvPicPr>
-          <p:cNvPr id="45" name="Object 44" descr="public/generated/icons/containers-kubernetes.png">    </p:cNvPr>
+          <p:cNvPr id="45" name="Object 44" descr="public/generated/icons/is.load-balancer.png">    </p:cNvPr>
           <p:cNvPicPr>
             <a:picLocks noChangeAspect="1"/>
           </p:cNvPicPr>
@@ -31712,7 +31712,7 @@
                 <a:ea typeface="Helvetica" pitchFamily="34" charset="-122"/>
                 <a:cs typeface="Helvetica" pitchFamily="34" charset="-120"/>
               </a:rPr>
-              <a:t>KUBERNETES SERVICE</a:t>
+              <a:t>LOAD BALANCER FOR VPC</a:t>
             </a:r>
             <a:endParaRPr lang="en-US" dirty="0"/>
           </a:p>
@@ -31745,7 +31745,7 @@
       </p:sp>
       <p:pic>
         <p:nvPicPr>
-          <p:cNvPr id="48" name="Object 47" descr="public/generated/icons/is.load-balancer.png">    </p:cNvPr>
+          <p:cNvPr id="48" name="Object 47" descr="public/generated/icons/9349854b-eb46-427f-8ef6-687d601c9eda.png">    </p:cNvPr>
           <p:cNvPicPr>
             <a:picLocks noChangeAspect="1"/>
           </p:cNvPicPr>
@@ -31801,7 +31801,7 @@
                 <a:ea typeface="Helvetica" pitchFamily="34" charset="-122"/>
                 <a:cs typeface="Helvetica" pitchFamily="34" charset="-120"/>
               </a:rPr>
-              <a:t>LOAD BALANCER FOR VPC</a:t>
+              <a:t>LYVE DATA TRANSFER SERVICES</a:t>
             </a:r>
             <a:endParaRPr lang="en-US" dirty="0"/>
           </a:p>
@@ -31834,7 +31834,7 @@
       </p:sp>
       <p:pic>
         <p:nvPicPr>
-          <p:cNvPr id="51" name="Object 50" descr="public/generated/icons/e13e1860-959c-11e8-871e-ad157af61ad7.png">    </p:cNvPr>
+          <p:cNvPr id="51" name="Object 50" descr="public/generated/icons/cf329950-0a3e-11e8-922e-f1366c6e1c83-managedveeam.png">    </p:cNvPr>
           <p:cNvPicPr>
             <a:picLocks noChangeAspect="1"/>
           </p:cNvPicPr>
@@ -31890,7 +31890,7 @@
                 <a:ea typeface="Helvetica" pitchFamily="34" charset="-122"/>
                 <a:cs typeface="Helvetica" pitchFamily="34" charset="-120"/>
               </a:rPr>
-              <a:t>LOG ANALYSIS</a:t>
+              <a:t>MANAGED BACKUP SERVICES</a:t>
             </a:r>
             <a:endParaRPr lang="en-US" dirty="0"/>
           </a:p>
@@ -31923,7 +31923,7 @@
       </p:sp>
       <p:pic>
         <p:nvPicPr>
-          <p:cNvPr id="54" name="Object 53" descr="public/generated/icons/9349854b-eb46-427f-8ef6-687d601c9eda.png">    </p:cNvPr>
+          <p:cNvPr id="54" name="Object 53" descr="public/generated/icons/cf329950-0a3e-11e8-922e-f1366c6e1c83-managedzerto.png">    </p:cNvPr>
           <p:cNvPicPr>
             <a:picLocks noChangeAspect="1"/>
           </p:cNvPicPr>
@@ -31979,7 +31979,7 @@
                 <a:ea typeface="Helvetica" pitchFamily="34" charset="-122"/>
                 <a:cs typeface="Helvetica" pitchFamily="34" charset="-120"/>
               </a:rPr>
-              <a:t>LYVE DATA TRANSFER SERVICES</a:t>
+              <a:t>MANAGED DISASTER RECOVERY SERVICES</a:t>
             </a:r>
             <a:endParaRPr lang="en-US" dirty="0"/>
           </a:p>
@@ -32012,7 +32012,7 @@
       </p:sp>
       <p:pic>
         <p:nvPicPr>
-          <p:cNvPr id="57" name="Object 56" descr="public/generated/icons/cf329950-0a3e-11e8-922e-f1366c6e1c83-managedveeam.png">    </p:cNvPr>
+          <p:cNvPr id="57" name="Object 56" descr="public/generated/icons/cfb3c3da-7b1f-0879-f414-f367da218488.png">    </p:cNvPr>
           <p:cNvPicPr>
             <a:picLocks noChangeAspect="1"/>
           </p:cNvPicPr>
@@ -32068,7 +32068,7 @@
                 <a:ea typeface="Helvetica" pitchFamily="34" charset="-122"/>
                 <a:cs typeface="Helvetica" pitchFamily="34" charset="-120"/>
               </a:rPr>
-              <a:t>MANAGED BACKUP SERVICES</a:t>
+              <a:t>MANAGED NETWORK SECURITY SERVICES</a:t>
             </a:r>
             <a:endParaRPr lang="en-US" dirty="0"/>
           </a:p>
@@ -32101,7 +32101,7 @@
       </p:sp>
       <p:pic>
         <p:nvPicPr>
-          <p:cNvPr id="60" name="Object 59" descr="public/generated/icons/cf329950-0a3e-11e8-922e-f1366c6e1c83-managedzerto.png">    </p:cNvPr>
+          <p:cNvPr id="60" name="Object 59" descr="public/generated/icons/cf329950-0a3e-11e8-922e-f1366c6e1c83-imi.png">    </p:cNvPr>
           <p:cNvPicPr>
             <a:picLocks noChangeAspect="1"/>
           </p:cNvPicPr>
@@ -32157,7 +32157,7 @@
                 <a:ea typeface="Helvetica" pitchFamily="34" charset="-122"/>
                 <a:cs typeface="Helvetica" pitchFamily="34" charset="-120"/>
               </a:rPr>
-              <a:t>MANAGED DISASTER RECOVERY SERVICES</a:t>
+              <a:t>MANAGED VMWARE SERVICES</a:t>
             </a:r>
             <a:endParaRPr lang="en-US" dirty="0"/>
           </a:p>
@@ -32190,7 +32190,7 @@
       </p:sp>
       <p:pic>
         <p:nvPicPr>
-          <p:cNvPr id="63" name="Object 62" descr="public/generated/icons/cfb3c3da-7b1f-0879-f414-f367da218488.png">    </p:cNvPr>
+          <p:cNvPr id="63" name="Object 62" descr="public/generated/icons/14bd30e0-8921-11e9-a2c5-13fceaf553c0.png">    </p:cNvPr>
           <p:cNvPicPr>
             <a:picLocks noChangeAspect="1"/>
           </p:cNvPicPr>
@@ -32246,7 +32246,7 @@
                 <a:ea typeface="Helvetica" pitchFamily="34" charset="-122"/>
                 <a:cs typeface="Helvetica" pitchFamily="34" charset="-120"/>
               </a:rPr>
-              <a:t>MANAGED NETWORK SECURITY SERVICES</a:t>
+              <a:t>MATCH 360 WITH WATSON</a:t>
             </a:r>
             <a:endParaRPr lang="en-US" dirty="0"/>
           </a:p>
@@ -32279,7 +32279,7 @@
       </p:sp>
       <p:pic>
         <p:nvPicPr>
-          <p:cNvPr id="66" name="Object 65" descr="public/generated/icons/cf329950-0a3e-11e8-922e-f1366c6e1c83-imi.png">    </p:cNvPr>
+          <p:cNvPr id="66" name="Object 65" descr="public/generated/icons/messages-for-rabbitmq.png">    </p:cNvPr>
           <p:cNvPicPr>
             <a:picLocks noChangeAspect="1"/>
           </p:cNvPicPr>
@@ -32335,7 +32335,7 @@
                 <a:ea typeface="Helvetica" pitchFamily="34" charset="-122"/>
                 <a:cs typeface="Helvetica" pitchFamily="34" charset="-120"/>
               </a:rPr>
-              <a:t>MANAGED VMWARE SERVICES</a:t>
+              <a:t>MESSAGES FOR RABBITMQ</a:t>
             </a:r>
             <a:endParaRPr lang="en-US" dirty="0"/>
           </a:p>
@@ -32368,7 +32368,7 @@
       </p:sp>
       <p:pic>
         <p:nvPicPr>
-          <p:cNvPr id="69" name="Object 68" descr="public/generated/icons/14bd30e0-8921-11e9-a2c5-13fceaf553c0.png">    </p:cNvPr>
+          <p:cNvPr id="69" name="Object 68" descr="public/generated/icons/d4000551-49ff-4868-9e05-f863e60fad3a.png">    </p:cNvPr>
           <p:cNvPicPr>
             <a:picLocks noChangeAspect="1"/>
           </p:cNvPicPr>
@@ -32424,7 +32424,7 @@
                 <a:ea typeface="Helvetica" pitchFamily="34" charset="-122"/>
                 <a:cs typeface="Helvetica" pitchFamily="34" charset="-120"/>
               </a:rPr>
-              <a:t>MATCH 360 WITH WATSON</a:t>
+              <a:t>MINIO</a:t>
             </a:r>
             <a:endParaRPr lang="en-US" dirty="0"/>
           </a:p>
@@ -32457,7 +32457,7 @@
       </p:sp>
       <p:pic>
         <p:nvPicPr>
-          <p:cNvPr id="72" name="Object 71" descr="public/generated/icons/messages-for-rabbitmq.png">    </p:cNvPr>
+          <p:cNvPr id="72" name="Object 71" descr="public/generated/icons/9d9545b4-b866-4c1b-9fc0-39273aef5bb0.png">    </p:cNvPr>
           <p:cNvPicPr>
             <a:picLocks noChangeAspect="1"/>
           </p:cNvPicPr>
@@ -32513,7 +32513,7 @@
                 <a:ea typeface="Helvetica" pitchFamily="34" charset="-122"/>
                 <a:cs typeface="Helvetica" pitchFamily="34" charset="-120"/>
               </a:rPr>
-              <a:t>MESSAGES FOR RABBITMQ</a:t>
+              <a:t>MONO-X ONE FOR POWERVS</a:t>
             </a:r>
             <a:endParaRPr lang="en-US" dirty="0"/>
           </a:p>
@@ -32546,7 +32546,7 @@
       </p:sp>
       <p:pic>
         <p:nvPicPr>
-          <p:cNvPr id="75" name="Object 74" descr="public/generated/icons/d4000551-49ff-4868-9e05-f863e60fad3a.png">    </p:cNvPr>
+          <p:cNvPr id="75" name="Object 74" descr="public/generated/icons/01037c41-adce-4bb5-8b45-0c06004916c4.png">    </p:cNvPr>
           <p:cNvPicPr>
             <a:picLocks noChangeAspect="1"/>
           </p:cNvPicPr>
@@ -32602,7 +32602,7 @@
                 <a:ea typeface="Helvetica" pitchFamily="34" charset="-122"/>
                 <a:cs typeface="Helvetica" pitchFamily="34" charset="-120"/>
               </a:rPr>
-              <a:t>MINIO</a:t>
+              <a:t>MQ</a:t>
             </a:r>
             <a:endParaRPr lang="en-US" dirty="0"/>
           </a:p>
@@ -32635,7 +32635,7 @@
       </p:sp>
       <p:pic>
         <p:nvPicPr>
-          <p:cNvPr id="78" name="Object 77" descr="public/generated/icons/9d9545b4-b866-4c1b-9fc0-39273aef5bb0.png">    </p:cNvPr>
+          <p:cNvPr id="78" name="Object 77" descr="public/generated/icons/is.snapshot-consistency-group.png">    </p:cNvPr>
           <p:cNvPicPr>
             <a:picLocks noChangeAspect="1"/>
           </p:cNvPicPr>
@@ -32691,7 +32691,7 @@
                 <a:ea typeface="Helvetica" pitchFamily="34" charset="-122"/>
                 <a:cs typeface="Helvetica" pitchFamily="34" charset="-120"/>
               </a:rPr>
-              <a:t>MONO-X ONE FOR POWERVS</a:t>
+              <a:t>MULTI VOLUME SNAPSHOTS FOR VPC</a:t>
             </a:r>
             <a:endParaRPr lang="en-US" dirty="0"/>
           </a:p>
@@ -32724,7 +32724,7 @@
       </p:sp>
       <p:pic>
         <p:nvPicPr>
-          <p:cNvPr id="81" name="Object 80" descr="public/generated/icons/01037c41-adce-4bb5-8b45-0c06004916c4.png">    </p:cNvPr>
+          <p:cNvPr id="81" name="Object 80" descr="public/generated/icons/bb6393bc-7d81-446b-9728-61b704f6eca5.png">    </p:cNvPr>
           <p:cNvPicPr>
             <a:picLocks noChangeAspect="1"/>
           </p:cNvPicPr>
@@ -32780,7 +32780,7 @@
                 <a:ea typeface="Helvetica" pitchFamily="34" charset="-122"/>
                 <a:cs typeface="Helvetica" pitchFamily="34" charset="-120"/>
               </a:rPr>
-              <a:t>MQ</a:t>
+              <a:t>NATURAL LANGUAGE UNDERSTANDING</a:t>
             </a:r>
             <a:endParaRPr lang="en-US" dirty="0"/>
           </a:p>
@@ -32813,7 +32813,7 @@
       </p:sp>
       <p:pic>
         <p:nvPicPr>
-          <p:cNvPr id="84" name="Object 83" descr="public/generated/icons/is.snapshot-consistency-group.png">    </p:cNvPr>
+          <p:cNvPr id="84" name="Object 83" descr="public/generated/icons/cf329950-0a3e-11e8-922e-f1366c6e1c83-netapp.png">    </p:cNvPr>
           <p:cNvPicPr>
             <a:picLocks noChangeAspect="1"/>
           </p:cNvPicPr>
@@ -32869,7 +32869,7 @@
                 <a:ea typeface="Helvetica" pitchFamily="34" charset="-122"/>
                 <a:cs typeface="Helvetica" pitchFamily="34" charset="-120"/>
               </a:rPr>
-              <a:t>MULTI VOLUME SNAPSHOTS FOR VPC</a:t>
+              <a:t>NETAPP ONTAP SELECT</a:t>
             </a:r>
             <a:endParaRPr lang="en-US" dirty="0"/>
           </a:p>
@@ -32902,7 +32902,7 @@
       </p:sp>
       <p:pic>
         <p:nvPicPr>
-          <p:cNvPr id="87" name="Object 86" descr="public/generated/icons/bb6393bc-7d81-446b-9728-61b704f6eca5.png">    </p:cNvPr>
+          <p:cNvPr id="87" name="Object 86" descr="public/generated/icons/cc42cff0-b19b-11eb-9a66-c717766c1d30.png">    </p:cNvPr>
           <p:cNvPicPr>
             <a:picLocks noChangeAspect="1"/>
           </p:cNvPicPr>
@@ -32958,7 +32958,7 @@
                 <a:ea typeface="Helvetica" pitchFamily="34" charset="-122"/>
                 <a:cs typeface="Helvetica" pitchFamily="34" charset="-120"/>
               </a:rPr>
-              <a:t>NATURAL LANGUAGE UNDERSTANDING</a:t>
+              <a:t>NETEZZA PERFORMANCE SERVER</a:t>
             </a:r>
             <a:endParaRPr lang="en-US" dirty="0"/>
           </a:p>
@@ -32991,7 +32991,7 @@
       </p:sp>
       <p:pic>
         <p:nvPicPr>
-          <p:cNvPr id="90" name="Object 89" descr="public/generated/icons/cf329950-0a3e-11e8-922e-f1366c6e1c83-netapp.png">    </p:cNvPr>
+          <p:cNvPr id="90" name="Object 89" descr="public/generated/icons/is.network-acl.png">    </p:cNvPr>
           <p:cNvPicPr>
             <a:picLocks noChangeAspect="1"/>
           </p:cNvPicPr>
@@ -33047,7 +33047,7 @@
                 <a:ea typeface="Helvetica" pitchFamily="34" charset="-122"/>
                 <a:cs typeface="Helvetica" pitchFamily="34" charset="-120"/>
               </a:rPr>
-              <a:t>NETAPP ONTAP SELECT</a:t>
+              <a:t>NETWORK ACL</a:t>
             </a:r>
             <a:endParaRPr lang="en-US" dirty="0"/>
           </a:p>
@@ -33080,7 +33080,7 @@
       </p:sp>
       <p:pic>
         <p:nvPicPr>
-          <p:cNvPr id="93" name="Object 92" descr="public/generated/icons/cc42cff0-b19b-11eb-9a66-c717766c1d30.png">    </p:cNvPr>
+          <p:cNvPr id="93" name="Object 92" descr="public/generated/icons/d97bd0c3-a8e5-4f3d-b925-16380e039a9a.png">    </p:cNvPr>
           <p:cNvPicPr>
             <a:picLocks noChangeAspect="1"/>
           </p:cNvPicPr>
@@ -33136,7 +33136,7 @@
                 <a:ea typeface="Helvetica" pitchFamily="34" charset="-122"/>
                 <a:cs typeface="Helvetica" pitchFamily="34" charset="-120"/>
               </a:rPr>
-              <a:t>NETEZZA PERFORMANCE SERVER</a:t>
+              <a:t>NEURALSEEK</a:t>
             </a:r>
             <a:endParaRPr lang="en-US" dirty="0"/>
           </a:p>
@@ -33169,7 +33169,7 @@
       </p:sp>
       <p:pic>
         <p:nvPicPr>
-          <p:cNvPr id="96" name="Object 95" descr="public/generated/icons/is.network-acl.png">    </p:cNvPr>
+          <p:cNvPr id="96" name="Object 95" descr="public/generated/icons/266c5178-8d88-40a9-966f-ea9f775bab05.png">    </p:cNvPr>
           <p:cNvPicPr>
             <a:picLocks noChangeAspect="1"/>
           </p:cNvPicPr>
@@ -33225,7 +33225,7 @@
                 <a:ea typeface="Helvetica" pitchFamily="34" charset="-122"/>
                 <a:cs typeface="Helvetica" pitchFamily="34" charset="-120"/>
               </a:rPr>
-              <a:t>NETWORK ACL</a:t>
+              <a:t>NEURALSEEK PROFESSIONAL SERVICES</a:t>
             </a:r>
             <a:endParaRPr lang="en-US" dirty="0"/>
           </a:p>
@@ -33258,7 +33258,7 @@
       </p:sp>
       <p:pic>
         <p:nvPicPr>
-          <p:cNvPr id="99" name="Object 98" descr="public/generated/icons/d97bd0c3-a8e5-4f3d-b925-16380e039a9a.png">    </p:cNvPr>
+          <p:cNvPr id="99" name="Object 98" descr="public/generated/icons/466091c0-9b8d-11eb-8f8c-91e95378d441.png">    </p:cNvPr>
           <p:cNvPicPr>
             <a:picLocks noChangeAspect="1"/>
           </p:cNvPicPr>
@@ -33314,7 +33314,7 @@
                 <a:ea typeface="Helvetica" pitchFamily="34" charset="-122"/>
                 <a:cs typeface="Helvetica" pitchFamily="34" charset="-120"/>
               </a:rPr>
-              <a:t>NEURALSEEK</a:t>
+              <a:t>OPENPAGES</a:t>
             </a:r>
             <a:endParaRPr lang="en-US" dirty="0"/>
           </a:p>
@@ -33347,7 +33347,7 @@
       </p:sp>
       <p:pic>
         <p:nvPicPr>
-          <p:cNvPr id="102" name="Object 101" descr="public/generated/icons/466091c0-9b8d-11eb-8f8c-91e95378d441.png">    </p:cNvPr>
+          <p:cNvPr id="102" name="Object 101" descr="public/generated/icons/2f756420-434f-11e8-ae40-6bdd72502abc.png">    </p:cNvPr>
           <p:cNvPicPr>
             <a:picLocks noChangeAspect="1"/>
           </p:cNvPicPr>
@@ -33403,7 +33403,7 @@
                 <a:ea typeface="Helvetica" pitchFamily="34" charset="-122"/>
                 <a:cs typeface="Helvetica" pitchFamily="34" charset="-120"/>
               </a:rPr>
-              <a:t>OPENPAGES</a:t>
+              <a:t>PARTNER WITH TECHNOLOGY EXPERT LABS</a:t>
             </a:r>
             <a:endParaRPr lang="en-US" dirty="0"/>
           </a:p>
@@ -33436,7 +33436,7 @@
       </p:sp>
       <p:pic>
         <p:nvPicPr>
-          <p:cNvPr id="105" name="Object 104" descr="public/generated/icons/2f756420-434f-11e8-ae40-6bdd72502abc.png">    </p:cNvPr>
+          <p:cNvPr id="105" name="Object 104" descr="public/generated/icons/bb6229f0-e632-11ee-ae26-5d6d9ba99eec.png">    </p:cNvPr>
           <p:cNvPicPr>
             <a:picLocks noChangeAspect="1"/>
           </p:cNvPicPr>
@@ -33492,7 +33492,7 @@
                 <a:ea typeface="Helvetica" pitchFamily="34" charset="-122"/>
                 <a:cs typeface="Helvetica" pitchFamily="34" charset="-120"/>
               </a:rPr>
-              <a:t>PARTNER WITH TECHNOLOGY EXPERT LABS</a:t>
+              <a:t>PARTNER WITH TECHNOLOGY EXPERT LABS - BUILD IBM STORAGE PROTECT FOR POWERVS</a:t>
             </a:r>
             <a:endParaRPr lang="en-US" dirty="0"/>
           </a:p>
@@ -33525,7 +33525,7 @@
       </p:sp>
       <p:pic>
         <p:nvPicPr>
-          <p:cNvPr id="108" name="Object 107" descr="public/generated/icons/bb6229f0-e632-11ee-ae26-5d6d9ba99eec.png">    </p:cNvPr>
+          <p:cNvPr id="108" name="Object 107" descr="public/generated/icons/f0ea1510-e632-11ee-acb6-4d13e7035de5.png">    </p:cNvPr>
           <p:cNvPicPr>
             <a:picLocks noChangeAspect="1"/>
           </p:cNvPicPr>
@@ -33581,7 +33581,7 @@
                 <a:ea typeface="Helvetica" pitchFamily="34" charset="-122"/>
                 <a:cs typeface="Helvetica" pitchFamily="34" charset="-120"/>
               </a:rPr>
-              <a:t>PARTNER WITH TECHNOLOGY EXPERT LABS - BUILD IBM STORAGE PROTECT FOR POWERVS</a:t>
+              <a:t>PARTNER WITH TECHNOLOGY EXPERT LABS - BUILD SAP HANA STARTER EDITION</a:t>
             </a:r>
             <a:endParaRPr lang="en-US" dirty="0"/>
           </a:p>
@@ -33647,7 +33647,7 @@
       </p:sp>
       <p:pic>
         <p:nvPicPr>
-          <p:cNvPr id="3" name="Object 2" descr="public/generated/icons/f0ea1510-e632-11ee-acb6-4d13e7035de5.png">    </p:cNvPr>
+          <p:cNvPr id="3" name="Object 2" descr="public/generated/icons/339a87f0-e633-11ee-acb6-4d13e7035de5.png">    </p:cNvPr>
           <p:cNvPicPr>
             <a:picLocks noChangeAspect="1"/>
           </p:cNvPicPr>
@@ -33703,7 +33703,7 @@
                 <a:ea typeface="Helvetica" pitchFamily="34" charset="-122"/>
                 <a:cs typeface="Helvetica" pitchFamily="34" charset="-120"/>
               </a:rPr>
-              <a:t>PARTNER WITH TECHNOLOGY EXPERT LABS - BUILD SAP HANA STARTER EDITION</a:t>
+              <a:t>PARTNER WITH TECHNOLOGY EXPERT LABS - MIGRATE WORKLOADS TO IBM POWER VIRTUAL SERVER</a:t>
             </a:r>
             <a:endParaRPr lang="en-US" dirty="0"/>
           </a:p>
@@ -33736,7 +33736,7 @@
       </p:sp>
       <p:pic>
         <p:nvPicPr>
-          <p:cNvPr id="6" name="Object 5" descr="public/generated/icons/339a87f0-e633-11ee-acb6-4d13e7035de5.png">    </p:cNvPr>
+          <p:cNvPr id="6" name="Object 5" descr="public/generated/icons/is.placement-group.png">    </p:cNvPr>
           <p:cNvPicPr>
             <a:picLocks noChangeAspect="1"/>
           </p:cNvPicPr>
@@ -33792,7 +33792,7 @@
                 <a:ea typeface="Helvetica" pitchFamily="34" charset="-122"/>
                 <a:cs typeface="Helvetica" pitchFamily="34" charset="-120"/>
               </a:rPr>
-              <a:t>PARTNER WITH TECHNOLOGY EXPERT LABS - MIGRATE WORKLOADS TO IBM POWER VIRTUAL SERVER</a:t>
+              <a:t>PLACEMENT GROUPS FOR VPC</a:t>
             </a:r>
             <a:endParaRPr lang="en-US" dirty="0"/>
           </a:p>
@@ -33825,7 +33825,7 @@
       </p:sp>
       <p:pic>
         <p:nvPicPr>
-          <p:cNvPr id="9" name="Object 8" descr="public/generated/icons/is.placement-group.png">    </p:cNvPr>
+          <p:cNvPr id="9" name="Object 8" descr="public/generated/icons/41690130-a4e8-11ea-94c3-d72a57643c7d.png">    </p:cNvPr>
           <p:cNvPicPr>
             <a:picLocks noChangeAspect="1"/>
           </p:cNvPicPr>
@@ -33881,7 +33881,7 @@
                 <a:ea typeface="Helvetica" pitchFamily="34" charset="-122"/>
                 <a:cs typeface="Helvetica" pitchFamily="34" charset="-120"/>
               </a:rPr>
-              <a:t>PLACEMENT GROUPS FOR VPC</a:t>
+              <a:t>PLANNING ANALYTICS</a:t>
             </a:r>
             <a:endParaRPr lang="en-US" dirty="0"/>
           </a:p>
@@ -33914,7 +33914,7 @@
       </p:sp>
       <p:pic>
         <p:nvPicPr>
-          <p:cNvPr id="12" name="Object 11" descr="public/generated/icons/41690130-a4e8-11ea-94c3-d72a57643c7d.png">    </p:cNvPr>
+          <p:cNvPr id="12" name="Object 11" descr="public/generated/icons/d666f360-66d1-11e9-85ef-a19427301a8c.png">    </p:cNvPr>
           <p:cNvPicPr>
             <a:picLocks noChangeAspect="1"/>
           </p:cNvPicPr>
@@ -33970,7 +33970,7 @@
                 <a:ea typeface="Helvetica" pitchFamily="34" charset="-122"/>
                 <a:cs typeface="Helvetica" pitchFamily="34" charset="-120"/>
               </a:rPr>
-              <a:t>PLANNING ANALYTICS</a:t>
+              <a:t>PORTWORX ENTERPRISE</a:t>
             </a:r>
             <a:endParaRPr lang="en-US" dirty="0"/>
           </a:p>
@@ -34003,7 +34003,7 @@
       </p:sp>
       <p:pic>
         <p:nvPicPr>
-          <p:cNvPr id="15" name="Object 14" descr="public/generated/icons/d666f360-66d1-11e9-85ef-a19427301a8c.png">    </p:cNvPr>
+          <p:cNvPr id="15" name="Object 14" descr="public/generated/icons/7b2cdb0e-ad91-4fd7-97c0-5398874ec27b.png">    </p:cNvPr>
           <p:cNvPicPr>
             <a:picLocks noChangeAspect="1"/>
           </p:cNvPicPr>
@@ -34059,7 +34059,7 @@
                 <a:ea typeface="Helvetica" pitchFamily="34" charset="-122"/>
                 <a:cs typeface="Helvetica" pitchFamily="34" charset="-120"/>
               </a:rPr>
-              <a:t>PORTWORX ENTERPRISE</a:t>
+              <a:t>POWER I MIGRATE 23 SERVICES</a:t>
             </a:r>
             <a:endParaRPr lang="en-US" dirty="0"/>
           </a:p>
@@ -34092,7 +34092,7 @@
       </p:sp>
       <p:pic>
         <p:nvPicPr>
-          <p:cNvPr id="18" name="Object 17" descr="public/generated/icons/7b2cdb0e-ad91-4fd7-97c0-5398874ec27b.png">    </p:cNvPr>
+          <p:cNvPr id="18" name="Object 17" descr="public/generated/icons/9828699d-dda7-4022-839b-c8e1e8b7d9d8.png">    </p:cNvPr>
           <p:cNvPicPr>
             <a:picLocks noChangeAspect="1"/>
           </p:cNvPicPr>
@@ -34148,7 +34148,7 @@
                 <a:ea typeface="Helvetica" pitchFamily="34" charset="-122"/>
                 <a:cs typeface="Helvetica" pitchFamily="34" charset="-120"/>
               </a:rPr>
-              <a:t>POWER I MIGRATE 23 SERVICES</a:t>
+              <a:t>POWER I MIGRATE WHILE ACTIVE SERVICES</a:t>
             </a:r>
             <a:endParaRPr lang="en-US" dirty="0"/>
           </a:p>
@@ -34181,7 +34181,7 @@
       </p:sp>
       <p:pic>
         <p:nvPicPr>
-          <p:cNvPr id="21" name="Object 20" descr="public/generated/icons/9828699d-dda7-4022-839b-c8e1e8b7d9d8.png">    </p:cNvPr>
+          <p:cNvPr id="21" name="Object 20" descr="public/generated/icons/power-iaas.workspace.png">    </p:cNvPr>
           <p:cNvPicPr>
             <a:picLocks noChangeAspect="1"/>
           </p:cNvPicPr>
@@ -34237,7 +34237,7 @@
                 <a:ea typeface="Helvetica" pitchFamily="34" charset="-122"/>
                 <a:cs typeface="Helvetica" pitchFamily="34" charset="-120"/>
               </a:rPr>
-              <a:t>POWER I MIGRATE WHILE ACTIVE SERVICES</a:t>
+              <a:t>POWER VIRTUAL SERVER</a:t>
             </a:r>
             <a:endParaRPr lang="en-US" dirty="0"/>
           </a:p>
@@ -34270,7 +34270,7 @@
       </p:sp>
       <p:pic>
         <p:nvPicPr>
-          <p:cNvPr id="24" name="Object 23" descr="public/generated/icons/power-iaas.workspace.png">    </p:cNvPr>
+          <p:cNvPr id="24" name="Object 23" descr="public/generated/icons/power-iaas.dedicated-host.png">    </p:cNvPr>
           <p:cNvPicPr>
             <a:picLocks noChangeAspect="1"/>
           </p:cNvPicPr>
@@ -34326,7 +34326,7 @@
                 <a:ea typeface="Helvetica" pitchFamily="34" charset="-122"/>
                 <a:cs typeface="Helvetica" pitchFamily="34" charset="-120"/>
               </a:rPr>
-              <a:t>POWER VIRTUAL SERVER</a:t>
+              <a:t>POWER VIRTUAL SERVER DEDICATED HOST</a:t>
             </a:r>
             <a:endParaRPr lang="en-US" dirty="0"/>
           </a:p>
@@ -34359,7 +34359,7 @@
       </p:sp>
       <p:pic>
         <p:nvPicPr>
-          <p:cNvPr id="27" name="Object 26" descr="public/generated/icons/power-iaas.dedicated-host.png">    </p:cNvPr>
+          <p:cNvPr id="27" name="Object 26" descr="public/generated/icons/208072a0-7978-11ef-b369-0733120a414f.png">    </p:cNvPr>
           <p:cNvPicPr>
             <a:picLocks noChangeAspect="1"/>
           </p:cNvPicPr>
@@ -34415,7 +34415,7 @@
                 <a:ea typeface="Helvetica" pitchFamily="34" charset="-122"/>
                 <a:cs typeface="Helvetica" pitchFamily="34" charset="-120"/>
               </a:rPr>
-              <a:t>POWER VIRTUAL SERVER DEDICATED HOST</a:t>
+              <a:t>POWER VIRTUAL SERVER DR AUTOMATION</a:t>
             </a:r>
             <a:endParaRPr lang="en-US" dirty="0"/>
           </a:p>
@@ -34448,7 +34448,7 @@
       </p:sp>
       <p:pic>
         <p:nvPicPr>
-          <p:cNvPr id="30" name="Object 29" descr="public/generated/icons/208072a0-7978-11ef-b369-0733120a414f.png">    </p:cNvPr>
+          <p:cNvPr id="30" name="Object 29" descr="public/generated/icons/power-iaas.image.png">    </p:cNvPr>
           <p:cNvPicPr>
             <a:picLocks noChangeAspect="1"/>
           </p:cNvPicPr>
@@ -34504,7 +34504,7 @@
                 <a:ea typeface="Helvetica" pitchFamily="34" charset="-122"/>
                 <a:cs typeface="Helvetica" pitchFamily="34" charset="-120"/>
               </a:rPr>
-              <a:t>POWER VIRTUAL SERVER DR AUTOMATION</a:t>
+              <a:t>POWER VIRTUAL SERVER IMAGE</a:t>
             </a:r>
             <a:endParaRPr lang="en-US" dirty="0"/>
           </a:p>
@@ -34537,7 +34537,7 @@
       </p:sp>
       <p:pic>
         <p:nvPicPr>
-          <p:cNvPr id="33" name="Object 32" descr="public/generated/icons/power-iaas.image.png">    </p:cNvPr>
+          <p:cNvPr id="33" name="Object 32" descr="public/generated/icons/power-iaas.network.png">    </p:cNvPr>
           <p:cNvPicPr>
             <a:picLocks noChangeAspect="1"/>
           </p:cNvPicPr>
@@ -34593,7 +34593,7 @@
                 <a:ea typeface="Helvetica" pitchFamily="34" charset="-122"/>
                 <a:cs typeface="Helvetica" pitchFamily="34" charset="-120"/>
               </a:rPr>
-              <a:t>POWER VIRTUAL SERVER IMAGE</a:t>
+              <a:t>POWER VIRTUAL SERVER NETWORK</a:t>
             </a:r>
             <a:endParaRPr lang="en-US" dirty="0"/>
           </a:p>
@@ -34626,7 +34626,7 @@
       </p:sp>
       <p:pic>
         <p:nvPicPr>
-          <p:cNvPr id="36" name="Object 35" descr="public/generated/icons/power-iaas.network.png">    </p:cNvPr>
+          <p:cNvPr id="36" name="Object 35" descr="public/generated/icons/power-iaas.network-address-group.png">    </p:cNvPr>
           <p:cNvPicPr>
             <a:picLocks noChangeAspect="1"/>
           </p:cNvPicPr>
@@ -34682,7 +34682,7 @@
                 <a:ea typeface="Helvetica" pitchFamily="34" charset="-122"/>
                 <a:cs typeface="Helvetica" pitchFamily="34" charset="-120"/>
               </a:rPr>
-              <a:t>POWER VIRTUAL SERVER NETWORK</a:t>
+              <a:t>POWER VIRTUAL SERVER NETWORK ADDRESS GROUP</a:t>
             </a:r>
             <a:endParaRPr lang="en-US" dirty="0"/>
           </a:p>
@@ -34715,7 +34715,7 @@
       </p:sp>
       <p:pic>
         <p:nvPicPr>
-          <p:cNvPr id="39" name="Object 38" descr="public/generated/icons/power-iaas.network-address-group.png">    </p:cNvPr>
+          <p:cNvPr id="39" name="Object 38" descr="public/generated/icons/power-iaas.network-interface.png">    </p:cNvPr>
           <p:cNvPicPr>
             <a:picLocks noChangeAspect="1"/>
           </p:cNvPicPr>
@@ -34771,7 +34771,7 @@
                 <a:ea typeface="Helvetica" pitchFamily="34" charset="-122"/>
                 <a:cs typeface="Helvetica" pitchFamily="34" charset="-120"/>
               </a:rPr>
-              <a:t>POWER VIRTUAL SERVER NETWORK ADDRESS GROUP</a:t>
+              <a:t>POWER VIRTUAL SERVER NETWORK INTERFACE</a:t>
             </a:r>
             <a:endParaRPr lang="en-US" dirty="0"/>
           </a:p>
@@ -34804,7 +34804,7 @@
       </p:sp>
       <p:pic>
         <p:nvPicPr>
-          <p:cNvPr id="42" name="Object 41" descr="public/generated/icons/power-iaas.network-interface.png">    </p:cNvPr>
+          <p:cNvPr id="42" name="Object 41" descr="public/generated/icons/power-iaas.network-security-group.png">    </p:cNvPr>
           <p:cNvPicPr>
             <a:picLocks noChangeAspect="1"/>
           </p:cNvPicPr>
@@ -34860,7 +34860,7 @@
                 <a:ea typeface="Helvetica" pitchFamily="34" charset="-122"/>
                 <a:cs typeface="Helvetica" pitchFamily="34" charset="-120"/>
               </a:rPr>
-              <a:t>POWER VIRTUAL SERVER NETWORK INTERFACE</a:t>
+              <a:t>POWER VIRTUAL SERVER NETWORK SECURITY GROUP</a:t>
             </a:r>
             <a:endParaRPr lang="en-US" dirty="0"/>
           </a:p>
@@ -34893,7 +34893,7 @@
       </p:sp>
       <p:pic>
         <p:nvPicPr>
-          <p:cNvPr id="45" name="Object 44" descr="public/generated/icons/power-iaas.network-security-group.png">    </p:cNvPr>
+          <p:cNvPr id="45" name="Object 44" descr="public/generated/icons/power-iaas.shared-processor-pool.png">    </p:cNvPr>
           <p:cNvPicPr>
             <a:picLocks noChangeAspect="1"/>
           </p:cNvPicPr>
@@ -34949,7 +34949,7 @@
                 <a:ea typeface="Helvetica" pitchFamily="34" charset="-122"/>
                 <a:cs typeface="Helvetica" pitchFamily="34" charset="-120"/>
               </a:rPr>
-              <a:t>POWER VIRTUAL SERVER NETWORK SECURITY GROUP</a:t>
+              <a:t>POWER VIRTUAL SERVER SHARED PROCESSOR POOL</a:t>
             </a:r>
             <a:endParaRPr lang="en-US" dirty="0"/>
           </a:p>
@@ -34982,7 +34982,7 @@
       </p:sp>
       <p:pic>
         <p:nvPicPr>
-          <p:cNvPr id="48" name="Object 47" descr="public/generated/icons/power-iaas.shared-processor-pool.png">    </p:cNvPr>
+          <p:cNvPr id="48" name="Object 47" descr="public/generated/icons/power-iaas.snapshot.png">    </p:cNvPr>
           <p:cNvPicPr>
             <a:picLocks noChangeAspect="1"/>
           </p:cNvPicPr>
@@ -35038,7 +35038,7 @@
                 <a:ea typeface="Helvetica" pitchFamily="34" charset="-122"/>
                 <a:cs typeface="Helvetica" pitchFamily="34" charset="-120"/>
               </a:rPr>
-              <a:t>POWER VIRTUAL SERVER SHARED PROCESSOR POOL</a:t>
+              <a:t>POWER VIRTUAL SERVER SNAPSHOT</a:t>
             </a:r>
             <a:endParaRPr lang="en-US" dirty="0"/>
           </a:p>
@@ -35071,7 +35071,7 @@
       </p:sp>
       <p:pic>
         <p:nvPicPr>
-          <p:cNvPr id="51" name="Object 50" descr="public/generated/icons/power-iaas.snapshot.png">    </p:cNvPr>
+          <p:cNvPr id="51" name="Object 50" descr="public/generated/icons/power-iaas.pvm-instance.png">    </p:cNvPr>
           <p:cNvPicPr>
             <a:picLocks noChangeAspect="1"/>
           </p:cNvPicPr>
@@ -35127,7 +35127,7 @@
                 <a:ea typeface="Helvetica" pitchFamily="34" charset="-122"/>
                 <a:cs typeface="Helvetica" pitchFamily="34" charset="-120"/>
               </a:rPr>
-              <a:t>POWER VIRTUAL SERVER SNAPSHOT</a:t>
+              <a:t>POWER VIRTUAL SERVER VIRTUAL MACHINE</a:t>
             </a:r>
             <a:endParaRPr lang="en-US" dirty="0"/>
           </a:p>
@@ -35160,7 +35160,7 @@
       </p:sp>
       <p:pic>
         <p:nvPicPr>
-          <p:cNvPr id="54" name="Object 53" descr="public/generated/icons/power-iaas.pvm-instance.png">    </p:cNvPr>
+          <p:cNvPr id="54" name="Object 53" descr="public/generated/icons/power-iaas.volume.png">    </p:cNvPr>
           <p:cNvPicPr>
             <a:picLocks noChangeAspect="1"/>
           </p:cNvPicPr>
@@ -35216,7 +35216,7 @@
                 <a:ea typeface="Helvetica" pitchFamily="34" charset="-122"/>
                 <a:cs typeface="Helvetica" pitchFamily="34" charset="-120"/>
               </a:rPr>
-              <a:t>POWER VIRTUAL SERVER VIRTUAL MACHINE</a:t>
+              <a:t>POWER VIRTUAL SERVER VOLUME</a:t>
             </a:r>
             <a:endParaRPr lang="en-US" dirty="0"/>
           </a:p>
@@ -35249,7 +35249,7 @@
       </p:sp>
       <p:pic>
         <p:nvPicPr>
-          <p:cNvPr id="57" name="Object 56" descr="public/generated/icons/power-iaas.volume.png">    </p:cNvPr>
+          <p:cNvPr id="57" name="Object 56" descr="public/generated/icons/b260dfd6-9b79-4377-be6d-146a5cb59be8.png">    </p:cNvPr>
           <p:cNvPicPr>
             <a:picLocks noChangeAspect="1"/>
           </p:cNvPicPr>
@@ -35305,7 +35305,7 @@
                 <a:ea typeface="Helvetica" pitchFamily="34" charset="-122"/>
                 <a:cs typeface="Helvetica" pitchFamily="34" charset="-120"/>
               </a:rPr>
-              <a:t>POWER VIRTUAL SERVER VOLUME</a:t>
+              <a:t>POWERVS MIGRATION AS A SERVICE</a:t>
             </a:r>
             <a:endParaRPr lang="en-US" dirty="0"/>
           </a:p>
@@ -35338,7 +35338,7 @@
       </p:sp>
       <p:pic>
         <p:nvPicPr>
-          <p:cNvPr id="60" name="Object 59" descr="public/generated/icons/b260dfd6-9b79-4377-be6d-146a5cb59be8.png">    </p:cNvPr>
+          <p:cNvPr id="60" name="Object 59" descr="public/generated/icons/is.private-path-service-gateway.png">    </p:cNvPr>
           <p:cNvPicPr>
             <a:picLocks noChangeAspect="1"/>
           </p:cNvPicPr>
@@ -35394,7 +35394,7 @@
                 <a:ea typeface="Helvetica" pitchFamily="34" charset="-122"/>
                 <a:cs typeface="Helvetica" pitchFamily="34" charset="-120"/>
               </a:rPr>
-              <a:t>POWERVS MIGRATION AS A SERVICE</a:t>
+              <a:t>PRIVATE PATH SERVICE FOR VPC</a:t>
             </a:r>
             <a:endParaRPr lang="en-US" dirty="0"/>
           </a:p>
@@ -35427,7 +35427,7 @@
       </p:sp>
       <p:pic>
         <p:nvPicPr>
-          <p:cNvPr id="63" name="Object 62" descr="public/generated/icons/is.private-path-service-gateway.png">    </p:cNvPr>
+          <p:cNvPr id="63" name="Object 62" descr="public/generated/icons/91a901ac-fb7d-9b6e-eb25-14e75a20c4c2.png">    </p:cNvPr>
           <p:cNvPicPr>
             <a:picLocks noChangeAspect="1"/>
           </p:cNvPicPr>
@@ -35483,7 +35483,7 @@
                 <a:ea typeface="Helvetica" pitchFamily="34" charset="-122"/>
                 <a:cs typeface="Helvetica" pitchFamily="34" charset="-120"/>
               </a:rPr>
-              <a:t>PRIVATE PATH SERVICE FOR VPC</a:t>
+              <a:t>PROFESSIONAL SERVICES FOR GOVERNMENT(ONLY AVAILABLE IN US)</a:t>
             </a:r>
             <a:endParaRPr lang="en-US" dirty="0"/>
           </a:p>
@@ -35516,7 +35516,7 @@
       </p:sp>
       <p:pic>
         <p:nvPicPr>
-          <p:cNvPr id="66" name="Object 65" descr="public/generated/icons/91a901ac-fb7d-9b6e-eb25-14e75a20c4c2.png">    </p:cNvPr>
+          <p:cNvPr id="66" name="Object 65" descr="public/generated/icons/0f32e980-4197-4ad7-a484-e98f7c7424bf.png">    </p:cNvPr>
           <p:cNvPicPr>
             <a:picLocks noChangeAspect="1"/>
           </p:cNvPicPr>
@@ -35572,7 +35572,7 @@
                 <a:ea typeface="Helvetica" pitchFamily="34" charset="-122"/>
                 <a:cs typeface="Helvetica" pitchFamily="34" charset="-120"/>
               </a:rPr>
-              <a:t>PROFESSIONAL SERVICES FOR GOVERNMENT(ONLY AVAILABLE IN US)</a:t>
+              <a:t>PROFI POWERVS SERVICE</a:t>
             </a:r>
             <a:endParaRPr lang="en-US" dirty="0"/>
           </a:p>
@@ -36139,7 +36139,7 @@
       </p:sp>
       <p:pic>
         <p:nvPicPr>
-          <p:cNvPr id="87" name="Object 86" descr="public/generated/icons/openshift.png">    </p:cNvPr>
+          <p:cNvPr id="87" name="Object 86" descr="public/generated/icons/instructlab.png">    </p:cNvPr>
           <p:cNvPicPr>
             <a:picLocks noChangeAspect="1"/>
           </p:cNvPicPr>
@@ -36195,7 +36195,7 @@
                 <a:ea typeface="Helvetica" pitchFamily="34" charset="-122"/>
                 <a:cs typeface="Helvetica" pitchFamily="34" charset="-120"/>
               </a:rPr>
-              <a:t>RED HAT OPENSHIFT ON IBM CLOUD</a:t>
+              <a:t>RED HAT AI INSTRUCTLAB</a:t>
             </a:r>
             <a:endParaRPr lang="en-US" dirty="0"/>
           </a:p>
@@ -36228,7 +36228,7 @@
       </p:sp>
       <p:pic>
         <p:nvPicPr>
-          <p:cNvPr id="90" name="Object 89" descr="public/generated/icons/bd517bf0-88ba-11ea-a52e-91aeb42a4019.png">    </p:cNvPr>
+          <p:cNvPr id="90" name="Object 89" descr="public/generated/icons/openshift.png">    </p:cNvPr>
           <p:cNvPicPr>
             <a:picLocks noChangeAspect="1"/>
           </p:cNvPicPr>
@@ -36284,7 +36284,7 @@
                 <a:ea typeface="Helvetica" pitchFamily="34" charset="-122"/>
                 <a:cs typeface="Helvetica" pitchFamily="34" charset="-120"/>
               </a:rPr>
-              <a:t>SATELLITE</a:t>
+              <a:t>RED HAT OPENSHIFT ON IBM CLOUD</a:t>
             </a:r>
             <a:endParaRPr lang="en-US" dirty="0"/>
           </a:p>
@@ -36317,7 +36317,7 @@
       </p:sp>
       <p:pic>
         <p:nvPicPr>
-          <p:cNvPr id="93" name="Object 92" descr="public/generated/icons/schematics.png">    </p:cNvPr>
+          <p:cNvPr id="93" name="Object 92" descr="public/generated/icons/bd517bf0-88ba-11ea-a52e-91aeb42a4019.png">    </p:cNvPr>
           <p:cNvPicPr>
             <a:picLocks noChangeAspect="1"/>
           </p:cNvPicPr>
@@ -36373,7 +36373,7 @@
                 <a:ea typeface="Helvetica" pitchFamily="34" charset="-122"/>
                 <a:cs typeface="Helvetica" pitchFamily="34" charset="-120"/>
               </a:rPr>
-              <a:t>SCHEMATICS</a:t>
+              <a:t>SATELLITE</a:t>
             </a:r>
             <a:endParaRPr lang="en-US" dirty="0"/>
           </a:p>
@@ -36406,7 +36406,7 @@
       </p:sp>
       <p:pic>
         <p:nvPicPr>
-          <p:cNvPr id="96" name="Object 95" descr="public/generated/icons/14.png">    </p:cNvPr>
+          <p:cNvPr id="96" name="Object 95" descr="public/generated/icons/schematics.png">    </p:cNvPr>
           <p:cNvPicPr>
             <a:picLocks noChangeAspect="1"/>
           </p:cNvPicPr>
@@ -36462,7 +36462,7 @@
                 <a:ea typeface="Helvetica" pitchFamily="34" charset="-122"/>
                 <a:cs typeface="Helvetica" pitchFamily="34" charset="-120"/>
               </a:rPr>
-              <a:t>SECONDARY SUBNETS</a:t>
+              <a:t>SCHEMATICS</a:t>
             </a:r>
             <a:endParaRPr lang="en-US" dirty="0"/>
           </a:p>
@@ -36495,7 +36495,7 @@
       </p:sp>
       <p:pic>
         <p:nvPicPr>
-          <p:cNvPr id="99" name="Object 98" descr="public/generated/icons/ebc0cdb0-af2a-11ea-98c7-29e5db822649.png">    </p:cNvPr>
+          <p:cNvPr id="99" name="Object 98" descr="public/generated/icons/14.png">    </p:cNvPr>
           <p:cNvPicPr>
             <a:picLocks noChangeAspect="1"/>
           </p:cNvPicPr>
@@ -36551,7 +36551,7 @@
                 <a:ea typeface="Helvetica" pitchFamily="34" charset="-122"/>
                 <a:cs typeface="Helvetica" pitchFamily="34" charset="-120"/>
               </a:rPr>
-              <a:t>SECRETS MANAGER</a:t>
+              <a:t>SECONDARY SUBNETS</a:t>
             </a:r>
             <a:endParaRPr lang="en-US" dirty="0"/>
           </a:p>
@@ -36584,7 +36584,7 @@
       </p:sp>
       <p:pic>
         <p:nvPicPr>
-          <p:cNvPr id="102" name="Object 101" descr="public/generated/icons/IBM_SecureGateway.png">    </p:cNvPr>
+          <p:cNvPr id="102" name="Object 101" descr="public/generated/icons/ebc0cdb0-af2a-11ea-98c7-29e5db822649.png">    </p:cNvPr>
           <p:cNvPicPr>
             <a:picLocks noChangeAspect="1"/>
           </p:cNvPicPr>
@@ -36640,7 +36640,7 @@
                 <a:ea typeface="Helvetica" pitchFamily="34" charset="-122"/>
                 <a:cs typeface="Helvetica" pitchFamily="34" charset="-120"/>
               </a:rPr>
-              <a:t>SECURE GATEWAY</a:t>
+              <a:t>SECRETS MANAGER</a:t>
             </a:r>
             <a:endParaRPr lang="en-US" dirty="0"/>
           </a:p>
@@ -36673,7 +36673,7 @@
       </p:sp>
       <p:pic>
         <p:nvPicPr>
-          <p:cNvPr id="105" name="Object 104" descr="public/generated/icons/compliance.png">    </p:cNvPr>
+          <p:cNvPr id="105" name="Object 104" descr="public/generated/icons/IBM_SecureGateway.png">    </p:cNvPr>
           <p:cNvPicPr>
             <a:picLocks noChangeAspect="1"/>
           </p:cNvPicPr>
@@ -36729,7 +36729,7 @@
                 <a:ea typeface="Helvetica" pitchFamily="34" charset="-122"/>
                 <a:cs typeface="Helvetica" pitchFamily="34" charset="-120"/>
               </a:rPr>
-              <a:t>SECURITY AND COMPLIANCE CENTER</a:t>
+              <a:t>SECURE GATEWAY</a:t>
             </a:r>
             <a:endParaRPr lang="en-US" dirty="0"/>
           </a:p>
@@ -36762,7 +36762,7 @@
       </p:sp>
       <p:pic>
         <p:nvPicPr>
-          <p:cNvPr id="108" name="Object 107" descr="public/generated/icons/e831e900-82d6-11ec-95c5-c12c5a5d9687.png">    </p:cNvPr>
+          <p:cNvPr id="108" name="Object 107" descr="public/generated/icons/compliance.png">    </p:cNvPr>
           <p:cNvPicPr>
             <a:picLocks noChangeAspect="1"/>
           </p:cNvPicPr>
@@ -36818,7 +36818,7 @@
                 <a:ea typeface="Helvetica" pitchFamily="34" charset="-122"/>
                 <a:cs typeface="Helvetica" pitchFamily="34" charset="-120"/>
               </a:rPr>
-              <a:t>SECURITY AND COMPLIANCE CENTER WORKLOAD PROTECTION</a:t>
+              <a:t>SECURITY AND COMPLIANCE CENTER</a:t>
             </a:r>
             <a:endParaRPr lang="en-US" dirty="0"/>
           </a:p>
@@ -36884,7 +36884,7 @@
       </p:sp>
       <p:pic>
         <p:nvPicPr>
-          <p:cNvPr id="3" name="Object 2" descr="public/generated/icons/is.security-group.png">    </p:cNvPr>
+          <p:cNvPr id="3" name="Object 2" descr="public/generated/icons/e831e900-82d6-11ec-95c5-c12c5a5d9687.png">    </p:cNvPr>
           <p:cNvPicPr>
             <a:picLocks noChangeAspect="1"/>
           </p:cNvPicPr>
@@ -36940,7 +36940,7 @@
                 <a:ea typeface="Helvetica" pitchFamily="34" charset="-122"/>
                 <a:cs typeface="Helvetica" pitchFamily="34" charset="-120"/>
               </a:rPr>
-              <a:t>SECURITY GROUP FOR VPC</a:t>
+              <a:t>SECURITY AND COMPLIANCE CENTER WORKLOAD PROTECTION</a:t>
             </a:r>
             <a:endParaRPr lang="en-US" dirty="0"/>
           </a:p>
@@ -36973,7 +36973,7 @@
       </p:sp>
       <p:pic>
         <p:nvPicPr>
-          <p:cNvPr id="6" name="Object 5" descr="public/generated/icons/cf329950-0a3e-11e8-922e-f1366c6e1c83-vcstrial_dr.png">    </p:cNvPr>
+          <p:cNvPr id="6" name="Object 5" descr="public/generated/icons/is.security-group.png">    </p:cNvPr>
           <p:cNvPicPr>
             <a:picLocks noChangeAspect="1"/>
           </p:cNvPicPr>
@@ -37029,7 +37029,7 @@
                 <a:ea typeface="Helvetica" pitchFamily="34" charset="-122"/>
                 <a:cs typeface="Helvetica" pitchFamily="34" charset="-120"/>
               </a:rPr>
-              <a:t>SINGLE-NODE TRIAL FOR DATA PROTECTION AND DISASTER RECOVERY</a:t>
+              <a:t>SECURITY GROUP FOR VPC</a:t>
             </a:r>
             <a:endParaRPr lang="en-US" dirty="0"/>
           </a:p>
@@ -37062,7 +37062,7 @@
       </p:sp>
       <p:pic>
         <p:nvPicPr>
-          <p:cNvPr id="9" name="Object 8" descr="public/generated/icons/cf329950-0a3e-11e8-922e-f1366c6e1c83-vcstrial.png">    </p:cNvPr>
+          <p:cNvPr id="9" name="Object 8" descr="public/generated/icons/cf329950-0a3e-11e8-922e-f1366c6e1c83-vcstrial_dr.png">    </p:cNvPr>
           <p:cNvPicPr>
             <a:picLocks noChangeAspect="1"/>
           </p:cNvPicPr>
@@ -37118,7 +37118,7 @@
                 <a:ea typeface="Helvetica" pitchFamily="34" charset="-122"/>
                 <a:cs typeface="Helvetica" pitchFamily="34" charset="-120"/>
               </a:rPr>
-              <a:t>SINGLE-NODE TRIAL FOR MIGRATION AND APP MODERNIZATION</a:t>
+              <a:t>SINGLE-NODE TRIAL FOR DATA PROTECTION AND DISASTER RECOVERY</a:t>
             </a:r>
             <a:endParaRPr lang="en-US" dirty="0"/>
           </a:p>
@@ -37151,7 +37151,7 @@
       </p:sp>
       <p:pic>
         <p:nvPicPr>
-          <p:cNvPr id="12" name="Object 11" descr="public/generated/icons/fdf77820-deed-11e9-911d-5f09017358ff.png">    </p:cNvPr>
+          <p:cNvPr id="12" name="Object 11" descr="public/generated/icons/cf329950-0a3e-11e8-922e-f1366c6e1c83-vcstrial.png">    </p:cNvPr>
           <p:cNvPicPr>
             <a:picLocks noChangeAspect="1"/>
           </p:cNvPicPr>
@@ -37207,7 +37207,7 @@
                 <a:ea typeface="Helvetica" pitchFamily="34" charset="-122"/>
                 <a:cs typeface="Helvetica" pitchFamily="34" charset="-120"/>
               </a:rPr>
-              <a:t>SKYTAP ON IBM CLOUD</a:t>
+              <a:t>SINGLE-NODE TRIAL FOR MIGRATION AND APP MODERNIZATION</a:t>
             </a:r>
             <a:endParaRPr lang="en-US" dirty="0"/>
           </a:p>
@@ -37863,7 +37863,7 @@
       </p:sp>
       <p:pic>
         <p:nvPicPr>
-          <p:cNvPr id="36" name="Object 35" descr="public/generated/icons/282c1d79-9176-4597-9cff-941a8d6cfd4c.png">    </p:cNvPr>
+          <p:cNvPr id="36" name="Object 35" descr="public/generated/icons/4f2d2c90-caec-4916-b44b-8363479ab12a.png">    </p:cNvPr>
           <p:cNvPicPr>
             <a:picLocks noChangeAspect="1"/>
           </p:cNvPicPr>
@@ -37919,7 +37919,7 @@
                 <a:ea typeface="Helvetica" pitchFamily="34" charset="-122"/>
                 <a:cs typeface="Helvetica" pitchFamily="34" charset="-120"/>
               </a:rPr>
-              <a:t>TEXT TO SPEECH</a:t>
+              <a:t>TECHD PROFESSIONAL SERVICES</a:t>
             </a:r>
             <a:endParaRPr lang="en-US" dirty="0"/>
           </a:p>
@@ -37952,7 +37952,7 @@
       </p:sp>
       <p:pic>
         <p:nvPicPr>
-          <p:cNvPr id="39" name="Object 38" descr="public/generated/icons/e512e5f0-64fb-11e8-9c23-830c05b8b729.png">    </p:cNvPr>
+          <p:cNvPr id="39" name="Object 38" descr="public/generated/icons/282c1d79-9176-4597-9cff-941a8d6cfd4c.png">    </p:cNvPr>
           <p:cNvPicPr>
             <a:picLocks noChangeAspect="1"/>
           </p:cNvPicPr>
@@ -38008,7 +38008,7 @@
                 <a:ea typeface="Helvetica" pitchFamily="34" charset="-122"/>
                 <a:cs typeface="Helvetica" pitchFamily="34" charset="-120"/>
               </a:rPr>
-              <a:t>TOOLCHAIN</a:t>
+              <a:t>TEXT TO SPEECH</a:t>
             </a:r>
             <a:endParaRPr lang="en-US" dirty="0"/>
           </a:p>
@@ -38041,7 +38041,7 @@
       </p:sp>
       <p:pic>
         <p:nvPicPr>
-          <p:cNvPr id="42" name="Object 41" descr="public/generated/icons/f38a4da0-c353-11e9-83b6-a36a57a97a06.png">    </p:cNvPr>
+          <p:cNvPr id="42" name="Object 41" descr="public/generated/icons/e512e5f0-64fb-11e8-9c23-830c05b8b729.png">    </p:cNvPr>
           <p:cNvPicPr>
             <a:picLocks noChangeAspect="1"/>
           </p:cNvPicPr>
@@ -38097,7 +38097,7 @@
                 <a:ea typeface="Helvetica" pitchFamily="34" charset="-122"/>
                 <a:cs typeface="Helvetica" pitchFamily="34" charset="-120"/>
               </a:rPr>
-              <a:t>TRANSIT GATEWAY</a:t>
+              <a:t>TOOLCHAIN</a:t>
             </a:r>
             <a:endParaRPr lang="en-US" dirty="0"/>
           </a:p>
@@ -38130,7 +38130,7 @@
       </p:sp>
       <p:pic>
         <p:nvPicPr>
-          <p:cNvPr id="45" name="Object 44" descr="public/generated/icons/vmware.directorsite.png">    </p:cNvPr>
+          <p:cNvPr id="45" name="Object 44" descr="public/generated/icons/a0b5c5b4-cf45-4d10-ba8c-512126cf6e2c.png">    </p:cNvPr>
           <p:cNvPicPr>
             <a:picLocks noChangeAspect="1"/>
           </p:cNvPicPr>
@@ -38186,7 +38186,7 @@
                 <a:ea typeface="Helvetica" pitchFamily="34" charset="-122"/>
                 <a:cs typeface="Helvetica" pitchFamily="34" charset="-120"/>
               </a:rPr>
-              <a:t>VCF AS A SERVICE - CLOUD DIRECTOR SITE</a:t>
+              <a:t>TRADESCREEN</a:t>
             </a:r>
             <a:endParaRPr lang="en-US" dirty="0"/>
           </a:p>
@@ -38219,7 +38219,7 @@
       </p:sp>
       <p:pic>
         <p:nvPicPr>
-          <p:cNvPr id="48" name="Object 47" descr="public/generated/icons/vmware.usage-meter.png">    </p:cNvPr>
+          <p:cNvPr id="48" name="Object 47" descr="public/generated/icons/f38a4da0-c353-11e9-83b6-a36a57a97a06.png">    </p:cNvPr>
           <p:cNvPicPr>
             <a:picLocks noChangeAspect="1"/>
           </p:cNvPicPr>
@@ -38275,7 +38275,7 @@
                 <a:ea typeface="Helvetica" pitchFamily="34" charset="-122"/>
                 <a:cs typeface="Helvetica" pitchFamily="34" charset="-120"/>
               </a:rPr>
-              <a:t>VCF AS A SERVICE - USAGE METER</a:t>
+              <a:t>TRANSIT GATEWAY</a:t>
             </a:r>
             <a:endParaRPr lang="en-US" dirty="0"/>
           </a:p>
@@ -38308,7 +38308,7 @@
       </p:sp>
       <p:pic>
         <p:nvPicPr>
-          <p:cNvPr id="51" name="Object 50" descr="public/generated/icons/vmware.vdc.png">    </p:cNvPr>
+          <p:cNvPr id="51" name="Object 50" descr="public/generated/icons/vmware.directorsite.png">    </p:cNvPr>
           <p:cNvPicPr>
             <a:picLocks noChangeAspect="1"/>
           </p:cNvPicPr>
@@ -38364,7 +38364,7 @@
                 <a:ea typeface="Helvetica" pitchFamily="34" charset="-122"/>
                 <a:cs typeface="Helvetica" pitchFamily="34" charset="-120"/>
               </a:rPr>
-              <a:t>VCF AS A SERVICE - VIRTUAL DATA CENTER</a:t>
+              <a:t>VCF AS A SERVICE - CLOUD DIRECTOR SITE</a:t>
             </a:r>
             <a:endParaRPr lang="en-US" dirty="0"/>
           </a:p>
@@ -38397,7 +38397,7 @@
       </p:sp>
       <p:pic>
         <p:nvPicPr>
-          <p:cNvPr id="54" name="Object 53" descr="public/generated/icons/cf329950-0a3e-11e8-922e-f1366c6e1c83-veeam.png">    </p:cNvPr>
+          <p:cNvPr id="54" name="Object 53" descr="public/generated/icons/vmware.usage-meter.png">    </p:cNvPr>
           <p:cNvPicPr>
             <a:picLocks noChangeAspect="1"/>
           </p:cNvPicPr>
@@ -38453,7 +38453,7 @@
                 <a:ea typeface="Helvetica" pitchFamily="34" charset="-122"/>
                 <a:cs typeface="Helvetica" pitchFamily="34" charset="-120"/>
               </a:rPr>
-              <a:t>VEEAM</a:t>
+              <a:t>VCF AS A SERVICE - USAGE METER</a:t>
             </a:r>
             <a:endParaRPr lang="en-US" dirty="0"/>
           </a:p>
@@ -38486,7 +38486,7 @@
       </p:sp>
       <p:pic>
         <p:nvPicPr>
-          <p:cNvPr id="57" name="Object 56" descr="public/generated/icons/66644e80-f35a-11ee-923f-2fe367129617.png">    </p:cNvPr>
+          <p:cNvPr id="57" name="Object 56" descr="public/generated/icons/vmware.vdc.png">    </p:cNvPr>
           <p:cNvPicPr>
             <a:picLocks noChangeAspect="1"/>
           </p:cNvPicPr>
@@ -38542,7 +38542,7 @@
                 <a:ea typeface="Helvetica" pitchFamily="34" charset="-122"/>
                 <a:cs typeface="Helvetica" pitchFamily="34" charset="-120"/>
               </a:rPr>
-              <a:t>VERIFY</a:t>
+              <a:t>VCF AS A SERVICE - VIRTUAL DATA CENTER</a:t>
             </a:r>
             <a:endParaRPr lang="en-US" dirty="0"/>
           </a:p>
@@ -38575,7 +38575,7 @@
       </p:sp>
       <p:pic>
         <p:nvPicPr>
-          <p:cNvPr id="60" name="Object 59" descr="public/generated/icons/is.virtual-network-interface.png">    </p:cNvPr>
+          <p:cNvPr id="60" name="Object 59" descr="public/generated/icons/cf329950-0a3e-11e8-922e-f1366c6e1c83-veeam.png">    </p:cNvPr>
           <p:cNvPicPr>
             <a:picLocks noChangeAspect="1"/>
           </p:cNvPicPr>
@@ -38631,7 +38631,7 @@
                 <a:ea typeface="Helvetica" pitchFamily="34" charset="-122"/>
                 <a:cs typeface="Helvetica" pitchFamily="34" charset="-120"/>
               </a:rPr>
-              <a:t>VIRTUAL NETWORK INTERFACE</a:t>
+              <a:t>VEEAM</a:t>
             </a:r>
             <a:endParaRPr lang="en-US" dirty="0"/>
           </a:p>
@@ -38664,7 +38664,7 @@
       </p:sp>
       <p:pic>
         <p:nvPicPr>
-          <p:cNvPr id="63" name="Object 62" descr="public/generated/icons/is.vpc.png">    </p:cNvPr>
+          <p:cNvPr id="63" name="Object 62" descr="public/generated/icons/66644e80-f35a-11ee-923f-2fe367129617.png">    </p:cNvPr>
           <p:cNvPicPr>
             <a:picLocks noChangeAspect="1"/>
           </p:cNvPicPr>
@@ -38720,7 +38720,7 @@
                 <a:ea typeface="Helvetica" pitchFamily="34" charset="-122"/>
                 <a:cs typeface="Helvetica" pitchFamily="34" charset="-120"/>
               </a:rPr>
-              <a:t>VIRTUAL PRIVATE CLOUD</a:t>
+              <a:t>VERIFY</a:t>
             </a:r>
             <a:endParaRPr lang="en-US" dirty="0"/>
           </a:p>
@@ -38753,7 +38753,7 @@
       </p:sp>
       <p:pic>
         <p:nvPicPr>
-          <p:cNvPr id="66" name="Object 65" descr="public/generated/icons/is.endpoint-gateway.png">    </p:cNvPr>
+          <p:cNvPr id="66" name="Object 65" descr="public/generated/icons/is.virtual-network-interface.png">    </p:cNvPr>
           <p:cNvPicPr>
             <a:picLocks noChangeAspect="1"/>
           </p:cNvPicPr>
@@ -38809,7 +38809,7 @@
                 <a:ea typeface="Helvetica" pitchFamily="34" charset="-122"/>
                 <a:cs typeface="Helvetica" pitchFamily="34" charset="-120"/>
               </a:rPr>
-              <a:t>VIRTUAL PRIVATE ENDPOINT FOR VPC</a:t>
+              <a:t>VIRTUAL NETWORK INTERFACE</a:t>
             </a:r>
             <a:endParaRPr lang="en-US" dirty="0"/>
           </a:p>
@@ -38842,7 +38842,7 @@
       </p:sp>
       <p:pic>
         <p:nvPicPr>
-          <p:cNvPr id="69" name="Object 68" descr="public/generated/icons/887073fb-ba5b-9407-d2ac-938308d890e4.png">    </p:cNvPr>
+          <p:cNvPr id="69" name="Object 68" descr="public/generated/icons/is.vpc.png">    </p:cNvPr>
           <p:cNvPicPr>
             <a:picLocks noChangeAspect="1"/>
           </p:cNvPicPr>
@@ -38898,7 +38898,7 @@
                 <a:ea typeface="Helvetica" pitchFamily="34" charset="-122"/>
                 <a:cs typeface="Helvetica" pitchFamily="34" charset="-120"/>
               </a:rPr>
-              <a:t>VIRTUAL ROUTER APPLIANCE</a:t>
+              <a:t>VIRTUAL PRIVATE CLOUD</a:t>
             </a:r>
             <a:endParaRPr lang="en-US" dirty="0"/>
           </a:p>
@@ -38931,7 +38931,7 @@
       </p:sp>
       <p:pic>
         <p:nvPicPr>
-          <p:cNvPr id="72" name="Object 71" descr="public/generated/icons/virtual-server-group.png">    </p:cNvPr>
+          <p:cNvPr id="72" name="Object 71" descr="public/generated/icons/is.endpoint-gateway.png">    </p:cNvPr>
           <p:cNvPicPr>
             <a:picLocks noChangeAspect="1"/>
           </p:cNvPicPr>
@@ -38987,7 +38987,7 @@
                 <a:ea typeface="Helvetica" pitchFamily="34" charset="-122"/>
                 <a:cs typeface="Helvetica" pitchFamily="34" charset="-120"/>
               </a:rPr>
-              <a:t>VIRTUAL SERVER FOR CLASSIC</a:t>
+              <a:t>VIRTUAL PRIVATE ENDPOINT FOR VPC</a:t>
             </a:r>
             <a:endParaRPr lang="en-US" dirty="0"/>
           </a:p>
@@ -39020,7 +39020,7 @@
       </p:sp>
       <p:pic>
         <p:nvPicPr>
-          <p:cNvPr id="75" name="Object 74" descr="public/generated/icons/is.instance.png">    </p:cNvPr>
+          <p:cNvPr id="75" name="Object 74" descr="public/generated/icons/887073fb-ba5b-9407-d2ac-938308d890e4.png">    </p:cNvPr>
           <p:cNvPicPr>
             <a:picLocks noChangeAspect="1"/>
           </p:cNvPicPr>
@@ -39076,7 +39076,7 @@
                 <a:ea typeface="Helvetica" pitchFamily="34" charset="-122"/>
                 <a:cs typeface="Helvetica" pitchFamily="34" charset="-120"/>
               </a:rPr>
-              <a:t>VIRTUAL SERVER FOR VPC</a:t>
+              <a:t>VIRTUAL ROUTER APPLIANCE</a:t>
             </a:r>
             <a:endParaRPr lang="en-US" dirty="0"/>
           </a:p>
@@ -39109,7 +39109,7 @@
       </p:sp>
       <p:pic>
         <p:nvPicPr>
-          <p:cNvPr id="78" name="Object 77" descr="public/generated/icons/15.png">    </p:cNvPr>
+          <p:cNvPr id="78" name="Object 77" descr="public/generated/icons/virtual-server-group.png">    </p:cNvPr>
           <p:cNvPicPr>
             <a:picLocks noChangeAspect="1"/>
           </p:cNvPicPr>
@@ -39165,7 +39165,7 @@
                 <a:ea typeface="Helvetica" pitchFamily="34" charset="-122"/>
                 <a:cs typeface="Helvetica" pitchFamily="34" charset="-120"/>
               </a:rPr>
-              <a:t>VLAN</a:t>
+              <a:t>VIRTUAL SERVER FOR CLASSIC</a:t>
             </a:r>
             <a:endParaRPr lang="en-US" dirty="0"/>
           </a:p>
@@ -39198,7 +39198,7 @@
       </p:sp>
       <p:pic>
         <p:nvPicPr>
-          <p:cNvPr id="81" name="Object 80" descr="public/generated/icons/09f5a6ea-185e-4625-8281-9e8629360a4f.png">    </p:cNvPr>
+          <p:cNvPr id="81" name="Object 80" descr="public/generated/icons/is.instance.png">    </p:cNvPr>
           <p:cNvPicPr>
             <a:picLocks noChangeAspect="1"/>
           </p:cNvPicPr>
@@ -39254,7 +39254,7 @@
                 <a:ea typeface="Helvetica" pitchFamily="34" charset="-122"/>
                 <a:cs typeface="Helvetica" pitchFamily="34" charset="-120"/>
               </a:rPr>
-              <a:t>VMWARE CLOUD MIGRATION SERVICES</a:t>
+              <a:t>VIRTUAL SERVER FOR VPC</a:t>
             </a:r>
             <a:endParaRPr lang="en-US" dirty="0"/>
           </a:p>
@@ -39287,7 +39287,7 @@
       </p:sp>
       <p:pic>
         <p:nvPicPr>
-          <p:cNvPr id="84" name="Object 83" descr="public/generated/icons/cf329950-0a3e-11e8-922e-f1366c6e1c83.png">    </p:cNvPr>
+          <p:cNvPr id="84" name="Object 83" descr="public/generated/icons/15.png">    </p:cNvPr>
           <p:cNvPicPr>
             <a:picLocks noChangeAspect="1"/>
           </p:cNvPicPr>
@@ -39343,7 +39343,7 @@
                 <a:ea typeface="Helvetica" pitchFamily="34" charset="-122"/>
                 <a:cs typeface="Helvetica" pitchFamily="34" charset="-120"/>
               </a:rPr>
-              <a:t>VMWARE SOLUTIONS</a:t>
+              <a:t>VLAN</a:t>
             </a:r>
             <a:endParaRPr lang="en-US" dirty="0"/>
           </a:p>
@@ -39376,7 +39376,7 @@
       </p:sp>
       <p:pic>
         <p:nvPicPr>
-          <p:cNvPr id="87" name="Object 86" descr="public/generated/icons/cf329950-0a3e-11e8-922e-f1366c6e1c83-vcenterserver.png">    </p:cNvPr>
+          <p:cNvPr id="87" name="Object 86" descr="public/generated/icons/09f5a6ea-185e-4625-8281-9e8629360a4f.png">    </p:cNvPr>
           <p:cNvPicPr>
             <a:picLocks noChangeAspect="1"/>
           </p:cNvPicPr>
@@ -39432,7 +39432,7 @@
                 <a:ea typeface="Helvetica" pitchFamily="34" charset="-122"/>
                 <a:cs typeface="Helvetica" pitchFamily="34" charset="-120"/>
               </a:rPr>
-              <a:t>VMWARE VCENTER SERVER</a:t>
+              <a:t>VMWARE CLOUD MIGRATION SERVICES</a:t>
             </a:r>
             <a:endParaRPr lang="en-US" dirty="0"/>
           </a:p>
@@ -39465,7 +39465,7 @@
       </p:sp>
       <p:pic>
         <p:nvPicPr>
-          <p:cNvPr id="90" name="Object 89" descr="public/generated/icons/cf329950-0a3e-11e8-922e-f1366c6e1c83-vsphere.png">    </p:cNvPr>
+          <p:cNvPr id="90" name="Object 89" descr="public/generated/icons/cf329950-0a3e-11e8-922e-f1366c6e1c83.png">    </p:cNvPr>
           <p:cNvPicPr>
             <a:picLocks noChangeAspect="1"/>
           </p:cNvPicPr>
@@ -39521,7 +39521,7 @@
                 <a:ea typeface="Helvetica" pitchFamily="34" charset="-122"/>
                 <a:cs typeface="Helvetica" pitchFamily="34" charset="-120"/>
               </a:rPr>
-              <a:t>VMWARE VSPHERE</a:t>
+              <a:t>VMWARE SOLUTIONS</a:t>
             </a:r>
             <a:endParaRPr lang="en-US" dirty="0"/>
           </a:p>
@@ -39554,7 +39554,7 @@
       </p:sp>
       <p:pic>
         <p:nvPicPr>
-          <p:cNvPr id="93" name="Object 92" descr="public/generated/icons/b6670b68-84ca-4a04-b8e8-c567dfeeddde.png">    </p:cNvPr>
+          <p:cNvPr id="93" name="Object 92" descr="public/generated/icons/cf329950-0a3e-11e8-922e-f1366c6e1c83-vcenterserver.png">    </p:cNvPr>
           <p:cNvPicPr>
             <a:picLocks noChangeAspect="1"/>
           </p:cNvPicPr>
@@ -39610,7 +39610,7 @@
                 <a:ea typeface="Helvetica" pitchFamily="34" charset="-122"/>
                 <a:cs typeface="Helvetica" pitchFamily="34" charset="-120"/>
               </a:rPr>
-              <a:t>VPC COAAS (VPC COST OPTIMIZATION AS A SERVICE)</a:t>
+              <a:t>VMWARE VCENTER SERVER</a:t>
             </a:r>
             <a:endParaRPr lang="en-US" dirty="0"/>
           </a:p>
@@ -39643,7 +39643,7 @@
       </p:sp>
       <p:pic>
         <p:nvPicPr>
-          <p:cNvPr id="96" name="Object 95" descr="public/generated/icons/757254b0-a9a0-11ea-9ff6-17a22eb543c5.png">    </p:cNvPr>
+          <p:cNvPr id="96" name="Object 95" descr="public/generated/icons/cf329950-0a3e-11e8-922e-f1366c6e1c83-vsphere.png">    </p:cNvPr>
           <p:cNvPicPr>
             <a:picLocks noChangeAspect="1"/>
           </p:cNvPicPr>
@@ -39699,7 +39699,7 @@
                 <a:ea typeface="Helvetica" pitchFamily="34" charset="-122"/>
                 <a:cs typeface="Helvetica" pitchFamily="34" charset="-120"/>
               </a:rPr>
-              <a:t>VPC+ CLOUD MIGRATION</a:t>
+              <a:t>VMWARE VSPHERE</a:t>
             </a:r>
             <a:endParaRPr lang="en-US" dirty="0"/>
           </a:p>
@@ -39732,7 +39732,7 @@
       </p:sp>
       <p:pic>
         <p:nvPicPr>
-          <p:cNvPr id="99" name="Object 98" descr="public/generated/icons/fd1e0240-dd95-11eb-b4a0-db1c9221b8a2.png">    </p:cNvPr>
+          <p:cNvPr id="99" name="Object 98" descr="public/generated/icons/b6670b68-84ca-4a04-b8e8-c567dfeeddde.png">    </p:cNvPr>
           <p:cNvPicPr>
             <a:picLocks noChangeAspect="1"/>
           </p:cNvPicPr>
@@ -39788,7 +39788,7 @@
                 <a:ea typeface="Helvetica" pitchFamily="34" charset="-122"/>
                 <a:cs typeface="Helvetica" pitchFamily="34" charset="-120"/>
               </a:rPr>
-              <a:t>VPC+ DRAAS (VPC+ DISASTER RECOVERY AS A SERVICE)</a:t>
+              <a:t>VPC COAAS (VPC COST OPTIMIZATION AS A SERVICE)</a:t>
             </a:r>
             <a:endParaRPr lang="en-US" dirty="0"/>
           </a:p>
@@ -39821,7 +39821,7 @@
       </p:sp>
       <p:pic>
         <p:nvPicPr>
-          <p:cNvPr id="102" name="Object 101" descr="public/generated/icons/is.vpn.png">    </p:cNvPr>
+          <p:cNvPr id="102" name="Object 101" descr="public/generated/icons/757254b0-a9a0-11ea-9ff6-17a22eb543c5.png">    </p:cNvPr>
           <p:cNvPicPr>
             <a:picLocks noChangeAspect="1"/>
           </p:cNvPicPr>
@@ -39877,7 +39877,7 @@
                 <a:ea typeface="Helvetica" pitchFamily="34" charset="-122"/>
                 <a:cs typeface="Helvetica" pitchFamily="34" charset="-120"/>
               </a:rPr>
-              <a:t>VPN FOR VPC</a:t>
+              <a:t>VPC+ CLOUD MIGRATION</a:t>
             </a:r>
             <a:endParaRPr lang="en-US" dirty="0"/>
           </a:p>
@@ -39910,7 +39910,7 @@
       </p:sp>
       <p:pic>
         <p:nvPicPr>
-          <p:cNvPr id="105" name="Object 104" descr="public/generated/icons/cf329950-0a3e-11e8-922e-f1366c6e1c83-vrops.png">    </p:cNvPr>
+          <p:cNvPr id="105" name="Object 104" descr="public/generated/icons/fd1e0240-dd95-11eb-b4a0-db1c9221b8a2.png">    </p:cNvPr>
           <p:cNvPicPr>
             <a:picLocks noChangeAspect="1"/>
           </p:cNvPicPr>
@@ -39966,7 +39966,7 @@
                 <a:ea typeface="Helvetica" pitchFamily="34" charset="-122"/>
                 <a:cs typeface="Helvetica" pitchFamily="34" charset="-120"/>
               </a:rPr>
-              <a:t>VREALIZE OPERATIONS AND LOG INSIGHT</a:t>
+              <a:t>VPC+ DRAAS (VPC+ DISASTER RECOVERY AS A SERVICE)</a:t>
             </a:r>
             <a:endParaRPr lang="en-US" dirty="0"/>
           </a:p>
@@ -39999,7 +39999,7 @@
       </p:sp>
       <p:pic>
         <p:nvPicPr>
-          <p:cNvPr id="108" name="Object 107" descr="public/generated/icons/76b7bf22-b443-47db-b3db-066ba2988f47.png">    </p:cNvPr>
+          <p:cNvPr id="108" name="Object 107" descr="public/generated/icons/is.vpn.png">    </p:cNvPr>
           <p:cNvPicPr>
             <a:picLocks noChangeAspect="1"/>
           </p:cNvPicPr>
@@ -40055,7 +40055,7 @@
                 <a:ea typeface="Helvetica" pitchFamily="34" charset="-122"/>
                 <a:cs typeface="Helvetica" pitchFamily="34" charset="-120"/>
               </a:rPr>
-              <a:t>WATSON DISCOVERY</a:t>
+              <a:t>VPN FOR VPC</a:t>
             </a:r>
             <a:endParaRPr lang="en-US" dirty="0"/>
           </a:p>
@@ -40121,7 +40121,7 @@
       </p:sp>
       <p:pic>
         <p:nvPicPr>
-          <p:cNvPr id="3" name="Object 2" descr="public/generated/icons/12fbfff4-12c7-ccd0-80e6-603e8607468a.png">    </p:cNvPr>
+          <p:cNvPr id="3" name="Object 2" descr="public/generated/icons/cf329950-0a3e-11e8-922e-f1366c6e1c83-vrops.png">    </p:cNvPr>
           <p:cNvPicPr>
             <a:picLocks noChangeAspect="1"/>
           </p:cNvPicPr>
@@ -40177,7 +40177,7 @@
                 <a:ea typeface="Helvetica" pitchFamily="34" charset="-122"/>
                 <a:cs typeface="Helvetica" pitchFamily="34" charset="-120"/>
               </a:rPr>
-              <a:t>WATSONX</a:t>
+              <a:t>VREALIZE OPERATIONS AND LOG INSIGHT</a:t>
             </a:r>
             <a:endParaRPr lang="en-US" dirty="0"/>
           </a:p>
@@ -40210,7 +40210,7 @@
       </p:sp>
       <p:pic>
         <p:nvPicPr>
-          <p:cNvPr id="6" name="Object 5" descr="public/generated/icons/7045626d-55e3-4418-be11-683a26dbc1e5.png">    </p:cNvPr>
+          <p:cNvPr id="6" name="Object 5" descr="public/generated/icons/76b7bf22-b443-47db-b3db-066ba2988f47.png">    </p:cNvPr>
           <p:cNvPicPr>
             <a:picLocks noChangeAspect="1"/>
           </p:cNvPicPr>
@@ -40266,7 +40266,7 @@
                 <a:ea typeface="Helvetica" pitchFamily="34" charset="-122"/>
                 <a:cs typeface="Helvetica" pitchFamily="34" charset="-120"/>
               </a:rPr>
-              <a:t>WATSONX ASSISTANT</a:t>
+              <a:t>WATSON DISCOVERY</a:t>
             </a:r>
             <a:endParaRPr lang="en-US" dirty="0"/>
           </a:p>
@@ -40299,7 +40299,7 @@
       </p:sp>
       <p:pic>
         <p:nvPicPr>
-          <p:cNvPr id="9" name="Object 8" descr="public/generated/icons/11530fa0-1776-11ee-93f6-1d4066e6a409.png">    </p:cNvPr>
+          <p:cNvPr id="9" name="Object 8" descr="public/generated/icons/12fbfff4-12c7-ccd0-80e6-603e8607468a.png">    </p:cNvPr>
           <p:cNvPicPr>
             <a:picLocks noChangeAspect="1"/>
           </p:cNvPicPr>
@@ -40355,7 +40355,7 @@
                 <a:ea typeface="Helvetica" pitchFamily="34" charset="-122"/>
                 <a:cs typeface="Helvetica" pitchFamily="34" charset="-120"/>
               </a:rPr>
-              <a:t>WATSONX CODE ASSISTANT</a:t>
+              <a:t>WATSONX</a:t>
             </a:r>
             <a:endParaRPr lang="en-US" dirty="0"/>
           </a:p>
@@ -40388,7 +40388,7 @@
       </p:sp>
       <p:pic>
         <p:nvPicPr>
-          <p:cNvPr id="12" name="Object 11" descr="public/generated/icons/b69f78c0-11d7-11ef-9bdf-c92eb40d1838.png">    </p:cNvPr>
+          <p:cNvPr id="12" name="Object 11" descr="public/generated/icons/7045626d-55e3-4418-be11-683a26dbc1e5.png">    </p:cNvPr>
           <p:cNvPicPr>
             <a:picLocks noChangeAspect="1"/>
           </p:cNvPicPr>
@@ -40444,7 +40444,7 @@
                 <a:ea typeface="Helvetica" pitchFamily="34" charset="-122"/>
                 <a:cs typeface="Helvetica" pitchFamily="34" charset="-120"/>
               </a:rPr>
-              <a:t>WATSONX ORCHESTRATE</a:t>
+              <a:t>WATSONX ASSISTANT</a:t>
             </a:r>
             <a:endParaRPr lang="en-US" dirty="0"/>
           </a:p>
@@ -40477,7 +40477,7 @@
       </p:sp>
       <p:pic>
         <p:nvPicPr>
-          <p:cNvPr id="15" name="Object 14" descr="public/generated/icons/51c53b72-918f-4869-b834-2d99eb28422a.png">    </p:cNvPr>
+          <p:cNvPr id="15" name="Object 14" descr="public/generated/icons/11530fa0-1776-11ee-93f6-1d4066e6a409.png">    </p:cNvPr>
           <p:cNvPicPr>
             <a:picLocks noChangeAspect="1"/>
           </p:cNvPicPr>
@@ -40533,7 +40533,7 @@
                 <a:ea typeface="Helvetica" pitchFamily="34" charset="-122"/>
                 <a:cs typeface="Helvetica" pitchFamily="34" charset="-120"/>
               </a:rPr>
-              <a:t>WATSONX.AI RUNTIME</a:t>
+              <a:t>WATSONX CODE ASSISTANT</a:t>
             </a:r>
             <a:endParaRPr lang="en-US" dirty="0"/>
           </a:p>
@@ -40566,7 +40566,7 @@
       </p:sp>
       <p:pic>
         <p:nvPicPr>
-          <p:cNvPr id="18" name="Object 17" descr="public/generated/icons/39ba9d4c-b1c5-4cc3-a163-38b580121e01.png">    </p:cNvPr>
+          <p:cNvPr id="18" name="Object 17" descr="public/generated/icons/b69f78c0-11d7-11ef-9bdf-c92eb40d1838.png">    </p:cNvPr>
           <p:cNvPicPr>
             <a:picLocks noChangeAspect="1"/>
           </p:cNvPicPr>
@@ -40622,7 +40622,7 @@
                 <a:ea typeface="Helvetica" pitchFamily="34" charset="-122"/>
                 <a:cs typeface="Helvetica" pitchFamily="34" charset="-120"/>
               </a:rPr>
-              <a:t>WATSONX.AI STUDIO</a:t>
+              <a:t>WATSONX ORCHESTRATE</a:t>
             </a:r>
             <a:endParaRPr lang="en-US" dirty="0"/>
           </a:p>
@@ -40655,7 +40655,7 @@
       </p:sp>
       <p:pic>
         <p:nvPicPr>
-          <p:cNvPr id="21" name="Object 20" descr="public/generated/icons/43834340-4a6d-11ed-97d2-959039ad2a2e.png">    </p:cNvPr>
+          <p:cNvPr id="21" name="Object 20" descr="public/generated/icons/51c53b72-918f-4869-b834-2d99eb28422a.png">    </p:cNvPr>
           <p:cNvPicPr>
             <a:picLocks noChangeAspect="1"/>
           </p:cNvPicPr>
@@ -40711,7 +40711,7 @@
                 <a:ea typeface="Helvetica" pitchFamily="34" charset="-122"/>
                 <a:cs typeface="Helvetica" pitchFamily="34" charset="-120"/>
               </a:rPr>
-              <a:t>WATSONX.DATA</a:t>
+              <a:t>WATSONX.AI RUNTIME</a:t>
             </a:r>
             <a:endParaRPr lang="en-US" dirty="0"/>
           </a:p>
@@ -40744,7 +40744,7 @@
       </p:sp>
       <p:pic>
         <p:nvPicPr>
-          <p:cNvPr id="24" name="Object 23" descr="public/generated/icons/2ad019f3-0fd6-4c25-966d-f3952481a870.png">    </p:cNvPr>
+          <p:cNvPr id="24" name="Object 23" descr="public/generated/icons/39ba9d4c-b1c5-4cc3-a163-38b580121e01.png">    </p:cNvPr>
           <p:cNvPicPr>
             <a:picLocks noChangeAspect="1"/>
           </p:cNvPicPr>
@@ -40800,7 +40800,7 @@
                 <a:ea typeface="Helvetica" pitchFamily="34" charset="-122"/>
                 <a:cs typeface="Helvetica" pitchFamily="34" charset="-120"/>
               </a:rPr>
-              <a:t>WATSONX.GOVERNANCE</a:t>
+              <a:t>WATSONX.AI STUDIO</a:t>
             </a:r>
             <a:endParaRPr lang="en-US" dirty="0"/>
           </a:p>
@@ -40833,7 +40833,7 @@
       </p:sp>
       <p:pic>
         <p:nvPicPr>
-          <p:cNvPr id="27" name="Object 26" descr="public/generated/icons/cf329950-0a3e-11e8-922e-f1366c6e1c83-zerto.png">    </p:cNvPr>
+          <p:cNvPr id="27" name="Object 26" descr="public/generated/icons/43834340-4a6d-11ed-97d2-959039ad2a2e.png">    </p:cNvPr>
           <p:cNvPicPr>
             <a:picLocks noChangeAspect="1"/>
           </p:cNvPicPr>
@@ -40864,6 +40864,362 @@
         <p:spPr>
           <a:xfrm>
             <a:off x="7498080" y="777240"/>
+            <a:ext cx="640080" cy="274320"/>
+          </a:xfrm>
+          <a:prstGeom prst="rect">
+            <a:avLst/>
+          </a:prstGeom>
+          <a:noFill/>
+        </p:spPr>
+        <p:txBody>
+          <a:bodyPr wrap="square" rtlCol="0" anchor="t" bIns="0" lIns="0" rIns="0" tIns="0">
+            <a:spAutoFit/>
+          </a:bodyPr>
+          <a:lstStyle/>
+          <a:p>
+            <a:pPr algn="ctr">
+              <a:buNone/>
+            </a:pPr>
+            <a:r>
+              <a:rPr lang="en-US" b="1" sz="600" dirty="0" smtClean="0">
+                <a:solidFill>
+                  <a:srgbClr val="646365"/>
+                </a:solidFill>
+                <a:latin typeface="Helvetica" pitchFamily="34" charset="0"/>
+                <a:ea typeface="Helvetica" pitchFamily="34" charset="-122"/>
+                <a:cs typeface="Helvetica" pitchFamily="34" charset="-120"/>
+              </a:rPr>
+              <a:t>WATSONX.DATA</a:t>
+            </a:r>
+            <a:endParaRPr lang="en-US" dirty="0"/>
+          </a:p>
+        </p:txBody>
+      </p:sp>
+      <p:sp>
+        <p:nvSpPr>
+          <p:cNvPr id="29" name="Object 28"/>
+          <p:cNvSpPr/>
+          <p:nvPr/>
+        </p:nvSpPr>
+        <p:spPr>
+          <a:xfrm>
+            <a:off x="274320" y="1371600"/>
+            <a:ext cx="457200" cy="457200"/>
+          </a:xfrm>
+          <a:prstGeom prst="ellipse">
+            <a:avLst/>
+          </a:prstGeom>
+          <a:solidFill>
+            <a:srgbClr val="FFFFFF"/>
+          </a:solidFill>
+          <a:ln w="19050">
+            <a:solidFill>
+              <a:srgbClr val="646365"/>
+            </a:solidFill>
+            <a:prstDash val="solid"/>
+          </a:ln>
+        </p:spPr>
+      </p:sp>
+      <p:pic>
+        <p:nvPicPr>
+          <p:cNvPr id="30" name="Object 29" descr="public/generated/icons/ed3a5a53-eb60-4f3c-8fd1-17f88585b6ed.png">    </p:cNvPr>
+          <p:cNvPicPr>
+            <a:picLocks noChangeAspect="1"/>
+          </p:cNvPicPr>
+          <p:nvPr/>
+        </p:nvPicPr>
+        <p:blipFill>
+          <a:blip r:embed="rId10"/>
+          <a:stretch>
+            <a:fillRect/>
+          </a:stretch>
+        </p:blipFill>
+        <p:spPr>
+          <a:xfrm>
+            <a:off x="365760" y="1463040"/>
+            <a:ext cx="274320" cy="274320"/>
+          </a:xfrm>
+          <a:prstGeom prst="rect">
+            <a:avLst/>
+          </a:prstGeom>
+        </p:spPr>
+      </p:pic>
+      <p:sp>
+        <p:nvSpPr>
+          <p:cNvPr id="31" name="Object 30"/>
+          <p:cNvSpPr/>
+          <p:nvPr/>
+        </p:nvSpPr>
+        <p:spPr>
+          <a:xfrm>
+            <a:off x="182880" y="1874520"/>
+            <a:ext cx="640080" cy="274320"/>
+          </a:xfrm>
+          <a:prstGeom prst="rect">
+            <a:avLst/>
+          </a:prstGeom>
+          <a:noFill/>
+        </p:spPr>
+        <p:txBody>
+          <a:bodyPr wrap="square" rtlCol="0" anchor="t" bIns="0" lIns="0" rIns="0" tIns="0">
+            <a:spAutoFit/>
+          </a:bodyPr>
+          <a:lstStyle/>
+          <a:p>
+            <a:pPr algn="ctr">
+              <a:buNone/>
+            </a:pPr>
+            <a:r>
+              <a:rPr lang="en-US" b="1" sz="600" dirty="0" smtClean="0">
+                <a:solidFill>
+                  <a:srgbClr val="646365"/>
+                </a:solidFill>
+                <a:latin typeface="Helvetica" pitchFamily="34" charset="0"/>
+                <a:ea typeface="Helvetica" pitchFamily="34" charset="-122"/>
+                <a:cs typeface="Helvetica" pitchFamily="34" charset="-120"/>
+              </a:rPr>
+              <a:t>WATSONX.DATA INTELLIGENCE</a:t>
+            </a:r>
+            <a:endParaRPr lang="en-US" dirty="0"/>
+          </a:p>
+        </p:txBody>
+      </p:sp>
+      <p:sp>
+        <p:nvSpPr>
+          <p:cNvPr id="32" name="Object 31"/>
+          <p:cNvSpPr/>
+          <p:nvPr/>
+        </p:nvSpPr>
+        <p:spPr>
+          <a:xfrm>
+            <a:off x="1188720" y="1371600"/>
+            <a:ext cx="457200" cy="457200"/>
+          </a:xfrm>
+          <a:prstGeom prst="ellipse">
+            <a:avLst/>
+          </a:prstGeom>
+          <a:solidFill>
+            <a:srgbClr val="FFFFFF"/>
+          </a:solidFill>
+          <a:ln w="19050">
+            <a:solidFill>
+              <a:srgbClr val="646365"/>
+            </a:solidFill>
+            <a:prstDash val="solid"/>
+          </a:ln>
+        </p:spPr>
+      </p:sp>
+      <p:pic>
+        <p:nvPicPr>
+          <p:cNvPr id="33" name="Object 32" descr="public/generated/icons/2ad019f3-0fd6-4c25-966d-f3952481a870.png">    </p:cNvPr>
+          <p:cNvPicPr>
+            <a:picLocks noChangeAspect="1"/>
+          </p:cNvPicPr>
+          <p:nvPr/>
+        </p:nvPicPr>
+        <p:blipFill>
+          <a:blip r:embed="rId11"/>
+          <a:stretch>
+            <a:fillRect/>
+          </a:stretch>
+        </p:blipFill>
+        <p:spPr>
+          <a:xfrm>
+            <a:off x="1280160" y="1463040"/>
+            <a:ext cx="274320" cy="274320"/>
+          </a:xfrm>
+          <a:prstGeom prst="rect">
+            <a:avLst/>
+          </a:prstGeom>
+        </p:spPr>
+      </p:pic>
+      <p:sp>
+        <p:nvSpPr>
+          <p:cNvPr id="34" name="Object 33"/>
+          <p:cNvSpPr/>
+          <p:nvPr/>
+        </p:nvSpPr>
+        <p:spPr>
+          <a:xfrm>
+            <a:off x="1097280" y="1874520"/>
+            <a:ext cx="640080" cy="274320"/>
+          </a:xfrm>
+          <a:prstGeom prst="rect">
+            <a:avLst/>
+          </a:prstGeom>
+          <a:noFill/>
+        </p:spPr>
+        <p:txBody>
+          <a:bodyPr wrap="square" rtlCol="0" anchor="t" bIns="0" lIns="0" rIns="0" tIns="0">
+            <a:spAutoFit/>
+          </a:bodyPr>
+          <a:lstStyle/>
+          <a:p>
+            <a:pPr algn="ctr">
+              <a:buNone/>
+            </a:pPr>
+            <a:r>
+              <a:rPr lang="en-US" b="1" sz="600" dirty="0" smtClean="0">
+                <a:solidFill>
+                  <a:srgbClr val="646365"/>
+                </a:solidFill>
+                <a:latin typeface="Helvetica" pitchFamily="34" charset="0"/>
+                <a:ea typeface="Helvetica" pitchFamily="34" charset="-122"/>
+                <a:cs typeface="Helvetica" pitchFamily="34" charset="-120"/>
+              </a:rPr>
+              <a:t>WATSONX.GOVERNANCE</a:t>
+            </a:r>
+            <a:endParaRPr lang="en-US" dirty="0"/>
+          </a:p>
+        </p:txBody>
+      </p:sp>
+      <p:sp>
+        <p:nvSpPr>
+          <p:cNvPr id="35" name="Object 34"/>
+          <p:cNvSpPr/>
+          <p:nvPr/>
+        </p:nvSpPr>
+        <p:spPr>
+          <a:xfrm>
+            <a:off x="2103120" y="1371600"/>
+            <a:ext cx="457200" cy="457200"/>
+          </a:xfrm>
+          <a:prstGeom prst="ellipse">
+            <a:avLst/>
+          </a:prstGeom>
+          <a:solidFill>
+            <a:srgbClr val="FFFFFF"/>
+          </a:solidFill>
+          <a:ln w="19050">
+            <a:solidFill>
+              <a:srgbClr val="646365"/>
+            </a:solidFill>
+            <a:prstDash val="solid"/>
+          </a:ln>
+        </p:spPr>
+      </p:sp>
+      <p:pic>
+        <p:nvPicPr>
+          <p:cNvPr id="36" name="Object 35" descr="public/generated/icons/e9407be2-139f-4f05-959d-494c6601239a.png">    </p:cNvPr>
+          <p:cNvPicPr>
+            <a:picLocks noChangeAspect="1"/>
+          </p:cNvPicPr>
+          <p:nvPr/>
+        </p:nvPicPr>
+        <p:blipFill>
+          <a:blip r:embed="rId12"/>
+          <a:stretch>
+            <a:fillRect/>
+          </a:stretch>
+        </p:blipFill>
+        <p:spPr>
+          <a:xfrm>
+            <a:off x="2194560" y="1463040"/>
+            <a:ext cx="274320" cy="274320"/>
+          </a:xfrm>
+          <a:prstGeom prst="rect">
+            <a:avLst/>
+          </a:prstGeom>
+        </p:spPr>
+      </p:pic>
+      <p:sp>
+        <p:nvSpPr>
+          <p:cNvPr id="37" name="Object 36"/>
+          <p:cNvSpPr/>
+          <p:nvPr/>
+        </p:nvSpPr>
+        <p:spPr>
+          <a:xfrm>
+            <a:off x="2011680" y="1874520"/>
+            <a:ext cx="640080" cy="274320"/>
+          </a:xfrm>
+          <a:prstGeom prst="rect">
+            <a:avLst/>
+          </a:prstGeom>
+          <a:noFill/>
+        </p:spPr>
+        <p:txBody>
+          <a:bodyPr wrap="square" rtlCol="0" anchor="t" bIns="0" lIns="0" rIns="0" tIns="0">
+            <a:spAutoFit/>
+          </a:bodyPr>
+          <a:lstStyle/>
+          <a:p>
+            <a:pPr algn="ctr">
+              <a:buNone/>
+            </a:pPr>
+            <a:r>
+              <a:rPr lang="en-US" b="1" sz="600" dirty="0" smtClean="0">
+                <a:solidFill>
+                  <a:srgbClr val="646365"/>
+                </a:solidFill>
+                <a:latin typeface="Helvetica" pitchFamily="34" charset="0"/>
+                <a:ea typeface="Helvetica" pitchFamily="34" charset="-122"/>
+                <a:cs typeface="Helvetica" pitchFamily="34" charset="-120"/>
+              </a:rPr>
+              <a:t>WEALTHGROWTH.AI</a:t>
+            </a:r>
+            <a:endParaRPr lang="en-US" dirty="0"/>
+          </a:p>
+        </p:txBody>
+      </p:sp>
+      <p:sp>
+        <p:nvSpPr>
+          <p:cNvPr id="38" name="Object 37"/>
+          <p:cNvSpPr/>
+          <p:nvPr/>
+        </p:nvSpPr>
+        <p:spPr>
+          <a:xfrm>
+            <a:off x="3017520" y="1371600"/>
+            <a:ext cx="457200" cy="457200"/>
+          </a:xfrm>
+          <a:prstGeom prst="ellipse">
+            <a:avLst/>
+          </a:prstGeom>
+          <a:solidFill>
+            <a:srgbClr val="FFFFFF"/>
+          </a:solidFill>
+          <a:ln w="19050">
+            <a:solidFill>
+              <a:srgbClr val="646365"/>
+            </a:solidFill>
+            <a:prstDash val="solid"/>
+          </a:ln>
+        </p:spPr>
+      </p:sp>
+      <p:pic>
+        <p:nvPicPr>
+          <p:cNvPr id="39" name="Object 38" descr="public/generated/icons/cf329950-0a3e-11e8-922e-f1366c6e1c83-zerto.png">    </p:cNvPr>
+          <p:cNvPicPr>
+            <a:picLocks noChangeAspect="1"/>
+          </p:cNvPicPr>
+          <p:nvPr/>
+        </p:nvPicPr>
+        <p:blipFill>
+          <a:blip r:embed="rId13"/>
+          <a:stretch>
+            <a:fillRect/>
+          </a:stretch>
+        </p:blipFill>
+        <p:spPr>
+          <a:xfrm>
+            <a:off x="3108960" y="1463040"/>
+            <a:ext cx="274320" cy="274320"/>
+          </a:xfrm>
+          <a:prstGeom prst="rect">
+            <a:avLst/>
+          </a:prstGeom>
+        </p:spPr>
+      </p:pic>
+      <p:sp>
+        <p:nvSpPr>
+          <p:cNvPr id="40" name="Object 39"/>
+          <p:cNvSpPr/>
+          <p:nvPr/>
+        </p:nvSpPr>
+        <p:spPr>
+          <a:xfrm>
+            <a:off x="2926080" y="1874520"/>
             <a:ext cx="640080" cy="274320"/>
           </a:xfrm>
           <a:prstGeom prst="rect">

--- a/mycatalog-architecture-diagram-template.pptx
+++ b/mycatalog-architecture-diagram-template.pptx
@@ -524,7 +524,7 @@
           <a:p>
             <a:r>
               <a:rPr lang="en-US" dirty="0" smtClean="0"/>
-              <a:t>Generated on Sun Jun 01 2025 07:05:09 GMT+0000 (Coordinated Universal Time)</a:t>
+              <a:t>Generated on Sun Jun 22 2025 07:05:27 GMT+0000 (Coordinated Universal Time)</a:t>
             </a:r>
             <a:endParaRPr lang="en-US" dirty="0"/>
           </a:p>
@@ -25004,7 +25004,7 @@
       </p:sp>
       <p:pic>
         <p:nvPicPr>
-          <p:cNvPr id="39" name="Object 38" descr="public/generated/icons/b6c4a555-5ff6-4e1d-9ce7-0a9976629eab.png">    </p:cNvPr>
+          <p:cNvPr id="39" name="Object 38" descr="public/generated/icons/59b735ee-5938-4ebd-a6b2-541aef2d1f68.png">    </p:cNvPr>
           <p:cNvPicPr>
             <a:picLocks noChangeAspect="1"/>
           </p:cNvPicPr>
@@ -25060,7 +25060,7 @@
                 <a:ea typeface="Helvetica" pitchFamily="34" charset="-122"/>
                 <a:cs typeface="Helvetica" pitchFamily="34" charset="-120"/>
               </a:rPr>
-              <a:t>CONTENT DELIVERY NETWORK</a:t>
+              <a:t>CONTINUOUS DELIVERY</a:t>
             </a:r>
             <a:endParaRPr lang="en-US" dirty="0"/>
           </a:p>
@@ -25093,7 +25093,7 @@
       </p:sp>
       <p:pic>
         <p:nvPicPr>
-          <p:cNvPr id="42" name="Object 41" descr="public/generated/icons/59b735ee-5938-4ebd-a6b2-541aef2d1f68.png">    </p:cNvPr>
+          <p:cNvPr id="42" name="Object 41" descr="public/generated/icons/d19358fd-a20a-4bb7-9727-9d3c129db741.png">    </p:cNvPr>
           <p:cNvPicPr>
             <a:picLocks noChangeAspect="1"/>
           </p:cNvPicPr>
@@ -25149,7 +25149,7 @@
                 <a:ea typeface="Helvetica" pitchFamily="34" charset="-122"/>
                 <a:cs typeface="Helvetica" pitchFamily="34" charset="-120"/>
               </a:rPr>
-              <a:t>CONTINUOUS DELIVERY</a:t>
+              <a:t>CONVERLISTICS</a:t>
             </a:r>
             <a:endParaRPr lang="en-US" dirty="0"/>
           </a:p>
@@ -25182,7 +25182,7 @@
       </p:sp>
       <p:pic>
         <p:nvPicPr>
-          <p:cNvPr id="45" name="Object 44" descr="public/generated/icons/d19358fd-a20a-4bb7-9727-9d3c129db741.png">    </p:cNvPr>
+          <p:cNvPr id="45" name="Object 44" descr="public/generated/icons/742c2c0f-1c40-480d-ab7b-76e56a89f51b.png">    </p:cNvPr>
           <p:cNvPicPr>
             <a:picLocks noChangeAspect="1"/>
           </p:cNvPicPr>
@@ -25238,7 +25238,7 @@
                 <a:ea typeface="Helvetica" pitchFamily="34" charset="-122"/>
                 <a:cs typeface="Helvetica" pitchFamily="34" charset="-120"/>
               </a:rPr>
-              <a:t>CONVERLISTICS</a:t>
+              <a:t>CONVERTIO VMWARE WORKLOAD MIGRATION AND CONVERSION</a:t>
             </a:r>
             <a:endParaRPr lang="en-US" dirty="0"/>
           </a:p>
@@ -25271,7 +25271,7 @@
       </p:sp>
       <p:pic>
         <p:nvPicPr>
-          <p:cNvPr id="48" name="Object 47" descr="public/generated/icons/742c2c0f-1c40-480d-ab7b-76e56a89f51b.png">    </p:cNvPr>
+          <p:cNvPr id="48" name="Object 47" descr="public/generated/icons/5da26b90-7b83-44b5-b6d3-778b408b77db.png">    </p:cNvPr>
           <p:cNvPicPr>
             <a:picLocks noChangeAspect="1"/>
           </p:cNvPicPr>
@@ -25327,7 +25327,7 @@
                 <a:ea typeface="Helvetica" pitchFamily="34" charset="-122"/>
                 <a:cs typeface="Helvetica" pitchFamily="34" charset="-120"/>
               </a:rPr>
-              <a:t>CONVERTIO VMWARE WORKLOAD MIGRATION AND CONVERSION</a:t>
+              <a:t>CRUSHBANK</a:t>
             </a:r>
             <a:endParaRPr lang="en-US" dirty="0"/>
           </a:p>
@@ -25360,7 +25360,7 @@
       </p:sp>
       <p:pic>
         <p:nvPicPr>
-          <p:cNvPr id="51" name="Object 50" descr="public/generated/icons/5da26b90-7b83-44b5-b6d3-778b408b77db.png">    </p:cNvPr>
+          <p:cNvPr id="51" name="Object 50" descr="public/generated/icons/07d4aa9f-1f71-43bb-9916-8e9cff5bc426.png">    </p:cNvPr>
           <p:cNvPicPr>
             <a:picLocks noChangeAspect="1"/>
           </p:cNvPicPr>
@@ -25416,7 +25416,7 @@
                 <a:ea typeface="Helvetica" pitchFamily="34" charset="-122"/>
                 <a:cs typeface="Helvetica" pitchFamily="34" charset="-120"/>
               </a:rPr>
-              <a:t>CRUSHBANK</a:t>
+              <a:t>CUSTOM MIGRATIONS DR AND MANAGEMENT AS A SERVICE</a:t>
             </a:r>
             <a:endParaRPr lang="en-US" dirty="0"/>
           </a:p>
@@ -25449,7 +25449,7 @@
       </p:sp>
       <p:pic>
         <p:nvPicPr>
-          <p:cNvPr id="54" name="Object 53" descr="public/generated/icons/07d4aa9f-1f71-43bb-9916-8e9cff5bc426.png">    </p:cNvPr>
+          <p:cNvPr id="54" name="Object 53" descr="public/generated/icons/1ab48530-6638-4fce-a386-0bd598576a0a.png">    </p:cNvPr>
           <p:cNvPicPr>
             <a:picLocks noChangeAspect="1"/>
           </p:cNvPicPr>
@@ -25505,7 +25505,7 @@
                 <a:ea typeface="Helvetica" pitchFamily="34" charset="-122"/>
                 <a:cs typeface="Helvetica" pitchFamily="34" charset="-120"/>
               </a:rPr>
-              <a:t>CUSTOM MIGRATIONS DR AND MANAGEMENT AS A SERVICE</a:t>
+              <a:t>CYBERSTRONG BY CYBERSAINT</a:t>
             </a:r>
             <a:endParaRPr lang="en-US" dirty="0"/>
           </a:p>
@@ -25538,7 +25538,7 @@
       </p:sp>
       <p:pic>
         <p:nvPicPr>
-          <p:cNvPr id="57" name="Object 56" descr="public/generated/icons/1ab48530-6638-4fce-a386-0bd598576a0a.png">    </p:cNvPr>
+          <p:cNvPr id="57" name="Object 56" descr="public/generated/icons/840bcb30-f8c3-11ed-afcd-01dba1a5ada3.png">    </p:cNvPr>
           <p:cNvPicPr>
             <a:picLocks noChangeAspect="1"/>
           </p:cNvPicPr>
@@ -25594,7 +25594,7 @@
                 <a:ea typeface="Helvetica" pitchFamily="34" charset="-122"/>
                 <a:cs typeface="Helvetica" pitchFamily="34" charset="-120"/>
               </a:rPr>
-              <a:t>CYBERSTRONG BY CYBERSAINT</a:t>
+              <a:t>DATA PRODUCT HUB</a:t>
             </a:r>
             <a:endParaRPr lang="en-US" dirty="0"/>
           </a:p>
@@ -25627,7 +25627,7 @@
       </p:sp>
       <p:pic>
         <p:nvPicPr>
-          <p:cNvPr id="60" name="Object 59" descr="public/generated/icons/840bcb30-f8c3-11ed-afcd-01dba1a5ada3.png">    </p:cNvPr>
+          <p:cNvPr id="60" name="Object 59" descr="public/generated/icons/696b9880-9e9b-11ea-9054-e15e287f1e7f.png">    </p:cNvPr>
           <p:cNvPicPr>
             <a:picLocks noChangeAspect="1"/>
           </p:cNvPicPr>
@@ -25683,7 +25683,7 @@
                 <a:ea typeface="Helvetica" pitchFamily="34" charset="-122"/>
                 <a:cs typeface="Helvetica" pitchFamily="34" charset="-120"/>
               </a:rPr>
-              <a:t>DATA PRODUCT HUB</a:t>
+              <a:t>DATA REPLICATION</a:t>
             </a:r>
             <a:endParaRPr lang="en-US" dirty="0"/>
           </a:p>
@@ -25716,7 +25716,7 @@
       </p:sp>
       <p:pic>
         <p:nvPicPr>
-          <p:cNvPr id="63" name="Object 62" descr="public/generated/icons/696b9880-9e9b-11ea-9054-e15e287f1e7f.png">    </p:cNvPr>
+          <p:cNvPr id="63" name="Object 62" descr="public/generated/icons/5d307850-0404-11eb-8c8b-c7d7505f656d.png">    </p:cNvPr>
           <p:cNvPicPr>
             <a:picLocks noChangeAspect="1"/>
           </p:cNvPicPr>
@@ -25772,7 +25772,7 @@
                 <a:ea typeface="Helvetica" pitchFamily="34" charset="-122"/>
                 <a:cs typeface="Helvetica" pitchFamily="34" charset="-120"/>
               </a:rPr>
-              <a:t>DATA REPLICATION</a:t>
+              <a:t>DATA VIRTUALIZATION</a:t>
             </a:r>
             <a:endParaRPr lang="en-US" dirty="0"/>
           </a:p>
@@ -25805,7 +25805,7 @@
       </p:sp>
       <p:pic>
         <p:nvPicPr>
-          <p:cNvPr id="66" name="Object 65" descr="public/generated/icons/5d307850-0404-11eb-8c8b-c7d7505f656d.png">    </p:cNvPr>
+          <p:cNvPr id="66" name="Object 65" descr="public/generated/icons/databases-for-enterprisedb.png">    </p:cNvPr>
           <p:cNvPicPr>
             <a:picLocks noChangeAspect="1"/>
           </p:cNvPicPr>
@@ -25861,7 +25861,7 @@
                 <a:ea typeface="Helvetica" pitchFamily="34" charset="-122"/>
                 <a:cs typeface="Helvetica" pitchFamily="34" charset="-120"/>
               </a:rPr>
-              <a:t>DATA VIRTUALIZATION</a:t>
+              <a:t>DATABASES FOR EDB</a:t>
             </a:r>
             <a:endParaRPr lang="en-US" dirty="0"/>
           </a:p>
@@ -25894,7 +25894,7 @@
       </p:sp>
       <p:pic>
         <p:nvPicPr>
-          <p:cNvPr id="69" name="Object 68" descr="public/generated/icons/databases-for-enterprisedb.png">    </p:cNvPr>
+          <p:cNvPr id="69" name="Object 68" descr="public/generated/icons/databases-for-elasticsearch.png">    </p:cNvPr>
           <p:cNvPicPr>
             <a:picLocks noChangeAspect="1"/>
           </p:cNvPicPr>
@@ -25950,7 +25950,7 @@
                 <a:ea typeface="Helvetica" pitchFamily="34" charset="-122"/>
                 <a:cs typeface="Helvetica" pitchFamily="34" charset="-120"/>
               </a:rPr>
-              <a:t>DATABASES FOR EDB</a:t>
+              <a:t>DATABASES FOR ELASTICSEARCH</a:t>
             </a:r>
             <a:endParaRPr lang="en-US" dirty="0"/>
           </a:p>
@@ -25983,7 +25983,7 @@
       </p:sp>
       <p:pic>
         <p:nvPicPr>
-          <p:cNvPr id="72" name="Object 71" descr="public/generated/icons/databases-for-elasticsearch.png">    </p:cNvPr>
+          <p:cNvPr id="72" name="Object 71" descr="public/generated/icons/databases-for-mongodb.png">    </p:cNvPr>
           <p:cNvPicPr>
             <a:picLocks noChangeAspect="1"/>
           </p:cNvPicPr>
@@ -26039,7 +26039,7 @@
                 <a:ea typeface="Helvetica" pitchFamily="34" charset="-122"/>
                 <a:cs typeface="Helvetica" pitchFamily="34" charset="-120"/>
               </a:rPr>
-              <a:t>DATABASES FOR ELASTICSEARCH</a:t>
+              <a:t>DATABASES FOR MONGODB</a:t>
             </a:r>
             <a:endParaRPr lang="en-US" dirty="0"/>
           </a:p>
@@ -26072,7 +26072,7 @@
       </p:sp>
       <p:pic>
         <p:nvPicPr>
-          <p:cNvPr id="75" name="Object 74" descr="public/generated/icons/databases-for-mongodb.png">    </p:cNvPr>
+          <p:cNvPr id="75" name="Object 74" descr="public/generated/icons/databases-for-mysql.png">    </p:cNvPr>
           <p:cNvPicPr>
             <a:picLocks noChangeAspect="1"/>
           </p:cNvPicPr>
@@ -26128,7 +26128,7 @@
                 <a:ea typeface="Helvetica" pitchFamily="34" charset="-122"/>
                 <a:cs typeface="Helvetica" pitchFamily="34" charset="-120"/>
               </a:rPr>
-              <a:t>DATABASES FOR MONGODB</a:t>
+              <a:t>DATABASES FOR MYSQL</a:t>
             </a:r>
             <a:endParaRPr lang="en-US" dirty="0"/>
           </a:p>
@@ -26161,7 +26161,7 @@
       </p:sp>
       <p:pic>
         <p:nvPicPr>
-          <p:cNvPr id="78" name="Object 77" descr="public/generated/icons/databases-for-mysql.png">    </p:cNvPr>
+          <p:cNvPr id="78" name="Object 77" descr="public/generated/icons/databases-for-postgresql.png">    </p:cNvPr>
           <p:cNvPicPr>
             <a:picLocks noChangeAspect="1"/>
           </p:cNvPicPr>
@@ -26217,7 +26217,7 @@
                 <a:ea typeface="Helvetica" pitchFamily="34" charset="-122"/>
                 <a:cs typeface="Helvetica" pitchFamily="34" charset="-120"/>
               </a:rPr>
-              <a:t>DATABASES FOR MYSQL</a:t>
+              <a:t>DATABASES FOR POSTGRESQL</a:t>
             </a:r>
             <a:endParaRPr lang="en-US" dirty="0"/>
           </a:p>
@@ -26250,7 +26250,7 @@
       </p:sp>
       <p:pic>
         <p:nvPicPr>
-          <p:cNvPr id="81" name="Object 80" descr="public/generated/icons/databases-for-postgresql.png">    </p:cNvPr>
+          <p:cNvPr id="81" name="Object 80" descr="public/generated/icons/databases-for-redis.png">    </p:cNvPr>
           <p:cNvPicPr>
             <a:picLocks noChangeAspect="1"/>
           </p:cNvPicPr>
@@ -26306,7 +26306,7 @@
                 <a:ea typeface="Helvetica" pitchFamily="34" charset="-122"/>
                 <a:cs typeface="Helvetica" pitchFamily="34" charset="-120"/>
               </a:rPr>
-              <a:t>DATABASES FOR POSTGRESQL</a:t>
+              <a:t>DATABASES FOR REDIS</a:t>
             </a:r>
             <a:endParaRPr lang="en-US" dirty="0"/>
           </a:p>
@@ -26339,7 +26339,7 @@
       </p:sp>
       <p:pic>
         <p:nvPicPr>
-          <p:cNvPr id="84" name="Object 83" descr="public/generated/icons/databases-for-redis.png">    </p:cNvPr>
+          <p:cNvPr id="84" name="Object 83" descr="public/generated/icons/dd0532c0-f87c-11ea-be25-c9dc051df74f.png">    </p:cNvPr>
           <p:cNvPicPr>
             <a:picLocks noChangeAspect="1"/>
           </p:cNvPicPr>
@@ -26395,7 +26395,7 @@
                 <a:ea typeface="Helvetica" pitchFamily="34" charset="-122"/>
                 <a:cs typeface="Helvetica" pitchFamily="34" charset="-120"/>
               </a:rPr>
-              <a:t>DATABASES FOR REDIS</a:t>
+              <a:t>DATASTAGE</a:t>
             </a:r>
             <a:endParaRPr lang="en-US" dirty="0"/>
           </a:p>
@@ -26428,7 +26428,7 @@
       </p:sp>
       <p:pic>
         <p:nvPicPr>
-          <p:cNvPr id="87" name="Object 86" descr="public/generated/icons/dd0532c0-f87c-11ea-be25-c9dc051df74f.png">    </p:cNvPr>
+          <p:cNvPr id="87" name="Object 86" descr="public/generated/icons/dashdb-for-transactions.png">    </p:cNvPr>
           <p:cNvPicPr>
             <a:picLocks noChangeAspect="1"/>
           </p:cNvPicPr>
@@ -26484,7 +26484,7 @@
                 <a:ea typeface="Helvetica" pitchFamily="34" charset="-122"/>
                 <a:cs typeface="Helvetica" pitchFamily="34" charset="-120"/>
               </a:rPr>
-              <a:t>DATASTAGE</a:t>
+              <a:t>DB2</a:t>
             </a:r>
             <a:endParaRPr lang="en-US" dirty="0"/>
           </a:p>
@@ -26517,7 +26517,7 @@
       </p:sp>
       <p:pic>
         <p:nvPicPr>
-          <p:cNvPr id="90" name="Object 89" descr="public/generated/icons/dashdb-for-transactions.png">    </p:cNvPr>
+          <p:cNvPr id="90" name="Object 89" descr="public/generated/icons/9e02e72d-00ce-4220-b44c-650c8314e58a.png">    </p:cNvPr>
           <p:cNvPicPr>
             <a:picLocks noChangeAspect="1"/>
           </p:cNvPicPr>
@@ -26573,7 +26573,7 @@
                 <a:ea typeface="Helvetica" pitchFamily="34" charset="-122"/>
                 <a:cs typeface="Helvetica" pitchFamily="34" charset="-120"/>
               </a:rPr>
-              <a:t>DB2</a:t>
+              <a:t>DB2 WAREHOUSE</a:t>
             </a:r>
             <a:endParaRPr lang="en-US" dirty="0"/>
           </a:p>
@@ -26606,7 +26606,7 @@
       </p:sp>
       <p:pic>
         <p:nvPicPr>
-          <p:cNvPr id="93" name="Object 92" descr="public/generated/icons/9e02e72d-00ce-4220-b44c-650c8314e58a.png">    </p:cNvPr>
+          <p:cNvPr id="93" name="Object 92" descr="public/generated/icons/is.dedicated-host.png">    </p:cNvPr>
           <p:cNvPicPr>
             <a:picLocks noChangeAspect="1"/>
           </p:cNvPicPr>
@@ -26662,7 +26662,7 @@
                 <a:ea typeface="Helvetica" pitchFamily="34" charset="-122"/>
                 <a:cs typeface="Helvetica" pitchFamily="34" charset="-120"/>
               </a:rPr>
-              <a:t>DB2 WAREHOUSE</a:t>
+              <a:t>DEDICATED HOST FOR VPC</a:t>
             </a:r>
             <a:endParaRPr lang="en-US" dirty="0"/>
           </a:p>
@@ -26695,7 +26695,7 @@
       </p:sp>
       <p:pic>
         <p:nvPicPr>
-          <p:cNvPr id="96" name="Object 95" descr="public/generated/icons/is.dedicated-host.png">    </p:cNvPr>
+          <p:cNvPr id="96" name="Object 95" descr="public/generated/icons/86fb7610-0f92-11ea-a6a3-8b96ed1570d8.png">    </p:cNvPr>
           <p:cNvPicPr>
             <a:picLocks noChangeAspect="1"/>
           </p:cNvPicPr>
@@ -26751,7 +26751,7 @@
                 <a:ea typeface="Helvetica" pitchFamily="34" charset="-122"/>
                 <a:cs typeface="Helvetica" pitchFamily="34" charset="-120"/>
               </a:rPr>
-              <a:t>DEDICATED HOST FOR VPC</a:t>
+              <a:t>DIRECT LINK CONNECT</a:t>
             </a:r>
             <a:endParaRPr lang="en-US" dirty="0"/>
           </a:p>
@@ -26784,7 +26784,7 @@
       </p:sp>
       <p:pic>
         <p:nvPicPr>
-          <p:cNvPr id="99" name="Object 98" descr="public/generated/icons/86fb7610-0f92-11ea-a6a3-8b96ed1570d8.png">    </p:cNvPr>
+          <p:cNvPr id="99" name="Object 98" descr="public/generated/icons/7dd59b11-c3c5-5aad-f6b2-2a0c2a3e6c49.png">    </p:cNvPr>
           <p:cNvPicPr>
             <a:picLocks noChangeAspect="1"/>
           </p:cNvPicPr>
@@ -26840,7 +26840,7 @@
                 <a:ea typeface="Helvetica" pitchFamily="34" charset="-122"/>
                 <a:cs typeface="Helvetica" pitchFamily="34" charset="-120"/>
               </a:rPr>
-              <a:t>DIRECT LINK CONNECT</a:t>
+              <a:t>DIRECT LINK CONNECT ON CLASSIC</a:t>
             </a:r>
             <a:endParaRPr lang="en-US" dirty="0"/>
           </a:p>
@@ -26873,7 +26873,7 @@
       </p:sp>
       <p:pic>
         <p:nvPicPr>
-          <p:cNvPr id="102" name="Object 101" descr="public/generated/icons/7dd59b11-c3c5-5aad-f6b2-2a0c2a3e6c49.png">    </p:cNvPr>
+          <p:cNvPr id="102" name="Object 101" descr="public/generated/icons/dc11a440-6073-11e9-9f5a-2f7997ba23c0.png">    </p:cNvPr>
           <p:cNvPicPr>
             <a:picLocks noChangeAspect="1"/>
           </p:cNvPicPr>
@@ -26929,7 +26929,7 @@
                 <a:ea typeface="Helvetica" pitchFamily="34" charset="-122"/>
                 <a:cs typeface="Helvetica" pitchFamily="34" charset="-120"/>
               </a:rPr>
-              <a:t>DIRECT LINK CONNECT ON CLASSIC</a:t>
+              <a:t>DIRECT LINK DEDICATED</a:t>
             </a:r>
             <a:endParaRPr lang="en-US" dirty="0"/>
           </a:p>
@@ -26962,7 +26962,7 @@
       </p:sp>
       <p:pic>
         <p:nvPicPr>
-          <p:cNvPr id="105" name="Object 104" descr="public/generated/icons/dc11a440-6073-11e9-9f5a-2f7997ba23c0.png">    </p:cNvPr>
+          <p:cNvPr id="105" name="Object 104" descr="public/generated/icons/22.png">    </p:cNvPr>
           <p:cNvPicPr>
             <a:picLocks noChangeAspect="1"/>
           </p:cNvPicPr>
@@ -27018,7 +27018,7 @@
                 <a:ea typeface="Helvetica" pitchFamily="34" charset="-122"/>
                 <a:cs typeface="Helvetica" pitchFamily="34" charset="-120"/>
               </a:rPr>
-              <a:t>DIRECT LINK DEDICATED</a:t>
+              <a:t>DIRECT LINK DEDICATED HOSTING ON CLASSIC</a:t>
             </a:r>
             <a:endParaRPr lang="en-US" dirty="0"/>
           </a:p>
@@ -27051,7 +27051,7 @@
       </p:sp>
       <p:pic>
         <p:nvPicPr>
-          <p:cNvPr id="108" name="Object 107" descr="public/generated/icons/22.png">    </p:cNvPr>
+          <p:cNvPr id="108" name="Object 107" descr="public/generated/icons/23.png">    </p:cNvPr>
           <p:cNvPicPr>
             <a:picLocks noChangeAspect="1"/>
           </p:cNvPicPr>
@@ -27107,7 +27107,7 @@
                 <a:ea typeface="Helvetica" pitchFamily="34" charset="-122"/>
                 <a:cs typeface="Helvetica" pitchFamily="34" charset="-120"/>
               </a:rPr>
-              <a:t>DIRECT LINK DEDICATED HOSTING ON CLASSIC</a:t>
+              <a:t>DIRECT LINK DEDICATED ON CLASSIC</a:t>
             </a:r>
             <a:endParaRPr lang="en-US" dirty="0"/>
           </a:p>
@@ -27173,7 +27173,7 @@
       </p:sp>
       <p:pic>
         <p:nvPicPr>
-          <p:cNvPr id="3" name="Object 2" descr="public/generated/icons/23.png">    </p:cNvPr>
+          <p:cNvPr id="3" name="Object 2" descr="public/generated/icons/21.png">    </p:cNvPr>
           <p:cNvPicPr>
             <a:picLocks noChangeAspect="1"/>
           </p:cNvPicPr>
@@ -27229,7 +27229,7 @@
                 <a:ea typeface="Helvetica" pitchFamily="34" charset="-122"/>
                 <a:cs typeface="Helvetica" pitchFamily="34" charset="-120"/>
               </a:rPr>
-              <a:t>DIRECT LINK DEDICATED ON CLASSIC</a:t>
+              <a:t>DIRECT LINK EXCHANGE ON CLASSIC</a:t>
             </a:r>
             <a:endParaRPr lang="en-US" dirty="0"/>
           </a:p>
@@ -27262,7 +27262,7 @@
       </p:sp>
       <p:pic>
         <p:nvPicPr>
-          <p:cNvPr id="6" name="Object 5" descr="public/generated/icons/21.png">    </p:cNvPr>
+          <p:cNvPr id="6" name="Object 5" descr="public/generated/icons/9f3db814-3aec-47c5-94b0-6a71d49bd27f.png">    </p:cNvPr>
           <p:cNvPicPr>
             <a:picLocks noChangeAspect="1"/>
           </p:cNvPicPr>
@@ -27318,7 +27318,7 @@
                 <a:ea typeface="Helvetica" pitchFamily="34" charset="-122"/>
                 <a:cs typeface="Helvetica" pitchFamily="34" charset="-120"/>
               </a:rPr>
-              <a:t>DIRECT LINK EXCHANGE ON CLASSIC</a:t>
+              <a:t>DIZZION COMPLETE</a:t>
             </a:r>
             <a:endParaRPr lang="en-US" dirty="0"/>
           </a:p>
@@ -27351,7 +27351,7 @@
       </p:sp>
       <p:pic>
         <p:nvPicPr>
-          <p:cNvPr id="9" name="Object 8" descr="public/generated/icons/9f3db814-3aec-47c5-94b0-6a71d49bd27f.png">    </p:cNvPr>
+          <p:cNvPr id="9" name="Object 8" descr="public/generated/icons/9e09a2eb-b2e5-4d76-ab7c-1b2f8c080865.png">    </p:cNvPr>
           <p:cNvPicPr>
             <a:picLocks noChangeAspect="1"/>
           </p:cNvPicPr>
@@ -27407,7 +27407,7 @@
                 <a:ea typeface="Helvetica" pitchFamily="34" charset="-122"/>
                 <a:cs typeface="Helvetica" pitchFamily="34" charset="-120"/>
               </a:rPr>
-              <a:t>DIZZION COMPLETE</a:t>
+              <a:t>DIZZION COMPLETE - HORIZON</a:t>
             </a:r>
             <a:endParaRPr lang="en-US" dirty="0"/>
           </a:p>
@@ -27440,7 +27440,7 @@
       </p:sp>
       <p:pic>
         <p:nvPicPr>
-          <p:cNvPr id="12" name="Object 11" descr="public/generated/icons/9e09a2eb-b2e5-4d76-ab7c-1b2f8c080865.png">    </p:cNvPr>
+          <p:cNvPr id="12" name="Object 11" descr="public/generated/icons/79679329-2050-4779-a2e2-7210b88aed4e.png">    </p:cNvPr>
           <p:cNvPicPr>
             <a:picLocks noChangeAspect="1"/>
           </p:cNvPicPr>
@@ -27496,7 +27496,7 @@
                 <a:ea typeface="Helvetica" pitchFamily="34" charset="-122"/>
                 <a:cs typeface="Helvetica" pitchFamily="34" charset="-120"/>
               </a:rPr>
-              <a:t>DIZZION COMPLETE - HORIZON</a:t>
+              <a:t>DIZZION COMPLETE FS - HORIZON</a:t>
             </a:r>
             <a:endParaRPr lang="en-US" dirty="0"/>
           </a:p>
@@ -27529,7 +27529,7 @@
       </p:sp>
       <p:pic>
         <p:nvPicPr>
-          <p:cNvPr id="15" name="Object 14" descr="public/generated/icons/79679329-2050-4779-a2e2-7210b88aed4e.png">    </p:cNvPr>
+          <p:cNvPr id="15" name="Object 14" descr="public/generated/icons/6fc0c2df-7fbc-470f-aac5-a93af7ef4a92.png">    </p:cNvPr>
           <p:cNvPicPr>
             <a:picLocks noChangeAspect="1"/>
           </p:cNvPicPr>
@@ -27585,7 +27585,7 @@
                 <a:ea typeface="Helvetica" pitchFamily="34" charset="-122"/>
                 <a:cs typeface="Helvetica" pitchFamily="34" charset="-120"/>
               </a:rPr>
-              <a:t>DIZZION COMPLETE FS - HORIZON</a:t>
+              <a:t>DIZZION FLEX</a:t>
             </a:r>
             <a:endParaRPr lang="en-US" dirty="0"/>
           </a:p>
@@ -27618,7 +27618,7 @@
       </p:sp>
       <p:pic>
         <p:nvPicPr>
-          <p:cNvPr id="18" name="Object 17" descr="public/generated/icons/6fc0c2df-7fbc-470f-aac5-a93af7ef4a92.png">    </p:cNvPr>
+          <p:cNvPr id="18" name="Object 17" descr="public/generated/icons/72ca6b61-2aa8-4b8f-ba21-69854bd2095b.png">    </p:cNvPr>
           <p:cNvPicPr>
             <a:picLocks noChangeAspect="1"/>
           </p:cNvPicPr>
@@ -27674,7 +27674,7 @@
                 <a:ea typeface="Helvetica" pitchFamily="34" charset="-122"/>
                 <a:cs typeface="Helvetica" pitchFamily="34" charset="-120"/>
               </a:rPr>
-              <a:t>DIZZION FLEX</a:t>
+              <a:t>DIZZION MANAGED</a:t>
             </a:r>
             <a:endParaRPr lang="en-US" dirty="0"/>
           </a:p>
@@ -27707,7 +27707,7 @@
       </p:sp>
       <p:pic>
         <p:nvPicPr>
-          <p:cNvPr id="21" name="Object 20" descr="public/generated/icons/72ca6b61-2aa8-4b8f-ba21-69854bd2095b.png">    </p:cNvPr>
+          <p:cNvPr id="21" name="Object 20" descr="public/generated/icons/b4ed8a30-936f-11e9-b289-1d079699cbe5.png">    </p:cNvPr>
           <p:cNvPicPr>
             <a:picLocks noChangeAspect="1"/>
           </p:cNvPicPr>
@@ -27763,7 +27763,7 @@
                 <a:ea typeface="Helvetica" pitchFamily="34" charset="-122"/>
                 <a:cs typeface="Helvetica" pitchFamily="34" charset="-120"/>
               </a:rPr>
-              <a:t>DIZZION MANAGED</a:t>
+              <a:t>DNS SERVICES</a:t>
             </a:r>
             <a:endParaRPr lang="en-US" dirty="0"/>
           </a:p>
@@ -27796,7 +27796,7 @@
       </p:sp>
       <p:pic>
         <p:nvPicPr>
-          <p:cNvPr id="24" name="Object 23" descr="public/generated/icons/b4ed8a30-936f-11e9-b289-1d079699cbe5.png">    </p:cNvPr>
+          <p:cNvPr id="24" name="Object 23" descr="public/generated/icons/d1e3f0d2-0f49-ddfd-0eb9-2897b9d3a45d.png">    </p:cNvPr>
           <p:cNvPicPr>
             <a:picLocks noChangeAspect="1"/>
           </p:cNvPicPr>
@@ -27852,7 +27852,7 @@
                 <a:ea typeface="Helvetica" pitchFamily="34" charset="-122"/>
                 <a:cs typeface="Helvetica" pitchFamily="34" charset="-120"/>
               </a:rPr>
-              <a:t>DNS SERVICES</a:t>
+              <a:t>EMAIL DELIVERY, POWERED BY SENDGRID</a:t>
             </a:r>
             <a:endParaRPr lang="en-US" dirty="0"/>
           </a:p>
@@ -27885,7 +27885,7 @@
       </p:sp>
       <p:pic>
         <p:nvPicPr>
-          <p:cNvPr id="27" name="Object 26" descr="public/generated/icons/d1e3f0d2-0f49-ddfd-0eb9-2897b9d3a45d.png">    </p:cNvPr>
+          <p:cNvPr id="27" name="Object 26" descr="public/generated/icons/871a9870-7508-11ef-ac5c-3324c550b37a.png">    </p:cNvPr>
           <p:cNvPicPr>
             <a:picLocks noChangeAspect="1"/>
           </p:cNvPicPr>
@@ -27941,7 +27941,7 @@
                 <a:ea typeface="Helvetica" pitchFamily="34" charset="-122"/>
                 <a:cs typeface="Helvetica" pitchFamily="34" charset="-120"/>
               </a:rPr>
-              <a:t>EMAIL DELIVERY, POWERED BY SENDGRID</a:t>
+              <a:t>ENTERPRISE APPLICATION SERVICE</a:t>
             </a:r>
             <a:endParaRPr lang="en-US" dirty="0"/>
           </a:p>
@@ -27974,7 +27974,7 @@
       </p:sp>
       <p:pic>
         <p:nvPicPr>
-          <p:cNvPr id="30" name="Object 29" descr="public/generated/icons/871a9870-7508-11ef-ac5c-3324c550b37a.png">    </p:cNvPr>
+          <p:cNvPr id="30" name="Object 29" descr="public/generated/icons/64955a78-30f9-426d-a25a-344480421b27.png">    </p:cNvPr>
           <p:cNvPicPr>
             <a:picLocks noChangeAspect="1"/>
           </p:cNvPicPr>
@@ -28030,7 +28030,7 @@
                 <a:ea typeface="Helvetica" pitchFamily="34" charset="-122"/>
                 <a:cs typeface="Helvetica" pitchFamily="34" charset="-120"/>
               </a:rPr>
-              <a:t>ENTERPRISE APPLICATION SERVICE</a:t>
+              <a:t>ETICLOUD SECURE DIGITAL AGILE WORKPLACE</a:t>
             </a:r>
             <a:endParaRPr lang="en-US" dirty="0"/>
           </a:p>
@@ -28063,7 +28063,7 @@
       </p:sp>
       <p:pic>
         <p:nvPicPr>
-          <p:cNvPr id="33" name="Object 32" descr="public/generated/icons/64955a78-30f9-426d-a25a-344480421b27.png">    </p:cNvPr>
+          <p:cNvPr id="33" name="Object 32" descr="public/generated/icons/ecdb4690-c2d8-11eb-bff1-4f7b9d2dfe41.png">    </p:cNvPr>
           <p:cNvPicPr>
             <a:picLocks noChangeAspect="1"/>
           </p:cNvPicPr>
@@ -28119,7 +28119,7 @@
                 <a:ea typeface="Helvetica" pitchFamily="34" charset="-122"/>
                 <a:cs typeface="Helvetica" pitchFamily="34" charset="-120"/>
               </a:rPr>
-              <a:t>ETICLOUD SECURE DIGITAL AGILE WORKPLACE</a:t>
+              <a:t>EVENT NOTIFICATIONS</a:t>
             </a:r>
             <a:endParaRPr lang="en-US" dirty="0"/>
           </a:p>
@@ -28152,7 +28152,7 @@
       </p:sp>
       <p:pic>
         <p:nvPicPr>
-          <p:cNvPr id="36" name="Object 35" descr="public/generated/icons/ecdb4690-c2d8-11eb-bff1-4f7b9d2dfe41.png">    </p:cNvPr>
+          <p:cNvPr id="36" name="Object 35" descr="public/generated/icons/6a7f4e38-f218-48ef-9dd2-df408747568e.png">    </p:cNvPr>
           <p:cNvPicPr>
             <a:picLocks noChangeAspect="1"/>
           </p:cNvPicPr>
@@ -28208,7 +28208,7 @@
                 <a:ea typeface="Helvetica" pitchFamily="34" charset="-122"/>
                 <a:cs typeface="Helvetica" pitchFamily="34" charset="-120"/>
               </a:rPr>
-              <a:t>EVENT NOTIFICATIONS</a:t>
+              <a:t>EVENT STREAMS</a:t>
             </a:r>
             <a:endParaRPr lang="en-US" dirty="0"/>
           </a:p>
@@ -28241,7 +28241,7 @@
       </p:sp>
       <p:pic>
         <p:nvPicPr>
-          <p:cNvPr id="39" name="Object 38" descr="public/generated/icons/6a7f4e38-f218-48ef-9dd2-df408747568e.png">    </p:cNvPr>
+          <p:cNvPr id="39" name="Object 38" descr="public/generated/icons/cf329950-0a3e-11e8-922e-f1366c6e1c83-bigip.png">    </p:cNvPr>
           <p:cNvPicPr>
             <a:picLocks noChangeAspect="1"/>
           </p:cNvPicPr>
@@ -28297,7 +28297,7 @@
                 <a:ea typeface="Helvetica" pitchFamily="34" charset="-122"/>
                 <a:cs typeface="Helvetica" pitchFamily="34" charset="-120"/>
               </a:rPr>
-              <a:t>EVENT STREAMS</a:t>
+              <a:t>F5 BIG-IP</a:t>
             </a:r>
             <a:endParaRPr lang="en-US" dirty="0"/>
           </a:p>
@@ -28330,7 +28330,7 @@
       </p:sp>
       <p:pic>
         <p:nvPicPr>
-          <p:cNvPr id="42" name="Object 41" descr="public/generated/icons/cf329950-0a3e-11e8-922e-f1366c6e1c83-bigip.png">    </p:cNvPr>
+          <p:cNvPr id="42" name="Object 41" descr="public/generated/icons/60427a43-cf48-41e0-bd95-26bde9c12105.png">    </p:cNvPr>
           <p:cNvPicPr>
             <a:picLocks noChangeAspect="1"/>
           </p:cNvPicPr>
@@ -28386,7 +28386,7 @@
                 <a:ea typeface="Helvetica" pitchFamily="34" charset="-122"/>
                 <a:cs typeface="Helvetica" pitchFamily="34" charset="-120"/>
               </a:rPr>
-              <a:t>F5 BIG-IP</a:t>
+              <a:t>FALCONSTOR STORSAFE FOR POWER ON-PREMISES</a:t>
             </a:r>
             <a:endParaRPr lang="en-US" dirty="0"/>
           </a:p>
@@ -28419,7 +28419,7 @@
       </p:sp>
       <p:pic>
         <p:nvPicPr>
-          <p:cNvPr id="45" name="Object 44" descr="public/generated/icons/60427a43-cf48-41e0-bd95-26bde9c12105.png">    </p:cNvPr>
+          <p:cNvPr id="45" name="Object 44" descr="public/generated/icons/6.png">    </p:cNvPr>
           <p:cNvPicPr>
             <a:picLocks noChangeAspect="1"/>
           </p:cNvPicPr>
@@ -28475,7 +28475,7 @@
                 <a:ea typeface="Helvetica" pitchFamily="34" charset="-122"/>
                 <a:cs typeface="Helvetica" pitchFamily="34" charset="-120"/>
               </a:rPr>
-              <a:t>FALCONSTOR STORSAFE FOR POWER ON-PREMISES</a:t>
+              <a:t>FILE STORAGE FOR CLASSIC</a:t>
             </a:r>
             <a:endParaRPr lang="en-US" dirty="0"/>
           </a:p>
@@ -28508,7 +28508,7 @@
       </p:sp>
       <p:pic>
         <p:nvPicPr>
-          <p:cNvPr id="48" name="Object 47" descr="public/generated/icons/6.png">    </p:cNvPr>
+          <p:cNvPr id="48" name="Object 47" descr="public/generated/icons/is.share.png">    </p:cNvPr>
           <p:cNvPicPr>
             <a:picLocks noChangeAspect="1"/>
           </p:cNvPicPr>
@@ -28564,7 +28564,7 @@
                 <a:ea typeface="Helvetica" pitchFamily="34" charset="-122"/>
                 <a:cs typeface="Helvetica" pitchFamily="34" charset="-120"/>
               </a:rPr>
-              <a:t>FILE STORAGE FOR CLASSIC</a:t>
+              <a:t>FILE STORAGE FOR VPC</a:t>
             </a:r>
             <a:endParaRPr lang="en-US" dirty="0"/>
           </a:p>
@@ -28597,7 +28597,7 @@
       </p:sp>
       <p:pic>
         <p:nvPicPr>
-          <p:cNvPr id="51" name="Object 50" descr="public/generated/icons/is.share.png">    </p:cNvPr>
+          <p:cNvPr id="51" name="Object 50" descr="public/generated/icons/is.floating-ip.png">    </p:cNvPr>
           <p:cNvPicPr>
             <a:picLocks noChangeAspect="1"/>
           </p:cNvPicPr>
@@ -28653,7 +28653,7 @@
                 <a:ea typeface="Helvetica" pitchFamily="34" charset="-122"/>
                 <a:cs typeface="Helvetica" pitchFamily="34" charset="-120"/>
               </a:rPr>
-              <a:t>FILE STORAGE FOR VPC</a:t>
+              <a:t>FLOATING IP FOR VPC</a:t>
             </a:r>
             <a:endParaRPr lang="en-US" dirty="0"/>
           </a:p>
@@ -28686,7 +28686,7 @@
       </p:sp>
       <p:pic>
         <p:nvPicPr>
-          <p:cNvPr id="54" name="Object 53" descr="public/generated/icons/is.floating-ip.png">    </p:cNvPr>
+          <p:cNvPr id="54" name="Object 53" descr="public/generated/icons/is.flow-log-collector.png">    </p:cNvPr>
           <p:cNvPicPr>
             <a:picLocks noChangeAspect="1"/>
           </p:cNvPicPr>
@@ -28742,7 +28742,7 @@
                 <a:ea typeface="Helvetica" pitchFamily="34" charset="-122"/>
                 <a:cs typeface="Helvetica" pitchFamily="34" charset="-120"/>
               </a:rPr>
-              <a:t>FLOATING IP FOR VPC</a:t>
+              <a:t>FLOW LOGS FOR VPC</a:t>
             </a:r>
             <a:endParaRPr lang="en-US" dirty="0"/>
           </a:p>
@@ -28775,7 +28775,7 @@
       </p:sp>
       <p:pic>
         <p:nvPicPr>
-          <p:cNvPr id="57" name="Object 56" descr="public/generated/icons/is.flow-log-collector.png">    </p:cNvPr>
+          <p:cNvPr id="57" name="Object 56" descr="public/generated/icons/05605040-8854-4665-bd05-0b10a96daf05.png">    </p:cNvPr>
           <p:cNvPicPr>
             <a:picLocks noChangeAspect="1"/>
           </p:cNvPicPr>
@@ -28831,7 +28831,7 @@
                 <a:ea typeface="Helvetica" pitchFamily="34" charset="-122"/>
                 <a:cs typeface="Helvetica" pitchFamily="34" charset="-120"/>
               </a:rPr>
-              <a:t>FLOW LOGS FOR VPC</a:t>
+              <a:t>FNTS CLOUD MIGRATION SERVICES</a:t>
             </a:r>
             <a:endParaRPr lang="en-US" dirty="0"/>
           </a:p>
@@ -28864,7 +28864,7 @@
       </p:sp>
       <p:pic>
         <p:nvPicPr>
-          <p:cNvPr id="60" name="Object 59" descr="public/generated/icons/05605040-8854-4665-bd05-0b10a96daf05.png">    </p:cNvPr>
+          <p:cNvPr id="60" name="Object 59" descr="public/generated/icons/d2fb0ba3-1679-4053-a593-9f2259d9e87b.png">    </p:cNvPr>
           <p:cNvPicPr>
             <a:picLocks noChangeAspect="1"/>
           </p:cNvPicPr>
@@ -28920,7 +28920,7 @@
                 <a:ea typeface="Helvetica" pitchFamily="34" charset="-122"/>
                 <a:cs typeface="Helvetica" pitchFamily="34" charset="-120"/>
               </a:rPr>
-              <a:t>FNTS CLOUD MIGRATION SERVICES</a:t>
+              <a:t>FNTS MANAGED SERVICES FOR POWERVS CLOUD</a:t>
             </a:r>
             <a:endParaRPr lang="en-US" dirty="0"/>
           </a:p>
@@ -28953,7 +28953,7 @@
       </p:sp>
       <p:pic>
         <p:nvPicPr>
-          <p:cNvPr id="63" name="Object 62" descr="public/generated/icons/d2fb0ba3-1679-4053-a593-9f2259d9e87b.png">    </p:cNvPr>
+          <p:cNvPr id="63" name="Object 62" descr="public/generated/icons/cf329950-0a3e-11e8-922e-f1366c6e1c83-fortigate.png">    </p:cNvPr>
           <p:cNvPicPr>
             <a:picLocks noChangeAspect="1"/>
           </p:cNvPicPr>
@@ -29009,7 +29009,7 @@
                 <a:ea typeface="Helvetica" pitchFamily="34" charset="-122"/>
                 <a:cs typeface="Helvetica" pitchFamily="34" charset="-120"/>
               </a:rPr>
-              <a:t>FNTS MANAGED SERVICES FOR POWERVS CLOUD</a:t>
+              <a:t>FORTIGATE SECURITY APPLIANCE</a:t>
             </a:r>
             <a:endParaRPr lang="en-US" dirty="0"/>
           </a:p>
@@ -29042,7 +29042,7 @@
       </p:sp>
       <p:pic>
         <p:nvPicPr>
-          <p:cNvPr id="66" name="Object 65" descr="public/generated/icons/cf329950-0a3e-11e8-922e-f1366c6e1c83-fortigate.png">    </p:cNvPr>
+          <p:cNvPr id="66" name="Object 65" descr="public/generated/icons/f5b26324-9b39-c701-0cc5-b0d5d2fe8534.png">    </p:cNvPr>
           <p:cNvPicPr>
             <a:picLocks noChangeAspect="1"/>
           </p:cNvPicPr>
@@ -29098,7 +29098,7 @@
                 <a:ea typeface="Helvetica" pitchFamily="34" charset="-122"/>
                 <a:cs typeface="Helvetica" pitchFamily="34" charset="-120"/>
               </a:rPr>
-              <a:t>FORTIGATE SECURITY APPLIANCE</a:t>
+              <a:t>FORTIGATE SECURITY APPLIANCE 10GBPS</a:t>
             </a:r>
             <a:endParaRPr lang="en-US" dirty="0"/>
           </a:p>
@@ -29131,7 +29131,7 @@
       </p:sp>
       <p:pic>
         <p:nvPicPr>
-          <p:cNvPr id="69" name="Object 68" descr="public/generated/icons/f5b26324-9b39-c701-0cc5-b0d5d2fe8534.png">    </p:cNvPr>
+          <p:cNvPr id="69" name="Object 68" descr="public/generated/icons/cf329950-0a3e-11e8-922e-f1366c6e1c83-fortigatevm.png">    </p:cNvPr>
           <p:cNvPicPr>
             <a:picLocks noChangeAspect="1"/>
           </p:cNvPicPr>
@@ -29187,7 +29187,7 @@
                 <a:ea typeface="Helvetica" pitchFamily="34" charset="-122"/>
                 <a:cs typeface="Helvetica" pitchFamily="34" charset="-120"/>
               </a:rPr>
-              <a:t>FORTIGATE SECURITY APPLIANCE 10GBPS</a:t>
+              <a:t>FORTIGATE VIRTUAL APPLIANCE</a:t>
             </a:r>
             <a:endParaRPr lang="en-US" dirty="0"/>
           </a:p>
@@ -29220,7 +29220,7 @@
       </p:sp>
       <p:pic>
         <p:nvPicPr>
-          <p:cNvPr id="72" name="Object 71" descr="public/generated/icons/cf329950-0a3e-11e8-922e-f1366c6e1c83-fortigatevm.png">    </p:cNvPr>
+          <p:cNvPr id="72" name="Object 71" descr="public/generated/icons/a93eeacc-7012-c8bc-c851-e928949a226c.png">    </p:cNvPr>
           <p:cNvPicPr>
             <a:picLocks noChangeAspect="1"/>
           </p:cNvPicPr>
@@ -29276,7 +29276,7 @@
                 <a:ea typeface="Helvetica" pitchFamily="34" charset="-122"/>
                 <a:cs typeface="Helvetica" pitchFamily="34" charset="-120"/>
               </a:rPr>
-              <a:t>FORTIGATE VIRTUAL APPLIANCE</a:t>
+              <a:t>FORTINET VIRTUAL FORTIGATE SECURITY APPLIANCE (VFSA)</a:t>
             </a:r>
             <a:endParaRPr lang="en-US" dirty="0"/>
           </a:p>
@@ -29309,7 +29309,7 @@
       </p:sp>
       <p:pic>
         <p:nvPicPr>
-          <p:cNvPr id="75" name="Object 74" descr="public/generated/icons/a93eeacc-7012-c8bc-c851-e928949a226c.png">    </p:cNvPr>
+          <p:cNvPr id="75" name="Object 74" descr="public/generated/icons/900fb23f-fe9d-4cf8-9bb2-a82d87dede0e.png">    </p:cNvPr>
           <p:cNvPicPr>
             <a:picLocks noChangeAspect="1"/>
           </p:cNvPicPr>
@@ -29365,7 +29365,7 @@
                 <a:ea typeface="Helvetica" pitchFamily="34" charset="-122"/>
                 <a:cs typeface="Helvetica" pitchFamily="34" charset="-120"/>
               </a:rPr>
-              <a:t>FORTINET VIRTUAL FORTIGATE SECURITY APPLIANCE (VFSA)</a:t>
+              <a:t>FRESCHE KTLO APPLICATION MANAGEMENT</a:t>
             </a:r>
             <a:endParaRPr lang="en-US" dirty="0"/>
           </a:p>
@@ -29398,7 +29398,7 @@
       </p:sp>
       <p:pic>
         <p:nvPicPr>
-          <p:cNvPr id="78" name="Object 77" descr="public/generated/icons/900fb23f-fe9d-4cf8-9bb2-a82d87dede0e.png">    </p:cNvPr>
+          <p:cNvPr id="78" name="Object 77" descr="public/generated/icons/c3c7f095-67da-42e6-b982-46d0e6e79f84.png">    </p:cNvPr>
           <p:cNvPicPr>
             <a:picLocks noChangeAspect="1"/>
           </p:cNvPicPr>
@@ -29454,7 +29454,7 @@
                 <a:ea typeface="Helvetica" pitchFamily="34" charset="-122"/>
                 <a:cs typeface="Helvetica" pitchFamily="34" charset="-120"/>
               </a:rPr>
-              <a:t>FRESCHE KTLO APPLICATION MANAGEMENT</a:t>
+              <a:t>FRESCHE LPAR OPERATIONS MANAGEMENT</a:t>
             </a:r>
             <a:endParaRPr lang="en-US" dirty="0"/>
           </a:p>
@@ -29487,7 +29487,7 @@
       </p:sp>
       <p:pic>
         <p:nvPicPr>
-          <p:cNvPr id="81" name="Object 80" descr="public/generated/icons/c3c7f095-67da-42e6-b982-46d0e6e79f84.png">    </p:cNvPr>
+          <p:cNvPr id="81" name="Object 80" descr="public/generated/icons/afa31435-8561-4383-b069-ec9a47719e20.png">    </p:cNvPr>
           <p:cNvPicPr>
             <a:picLocks noChangeAspect="1"/>
           </p:cNvPicPr>
@@ -29543,7 +29543,7 @@
                 <a:ea typeface="Helvetica" pitchFamily="34" charset="-122"/>
                 <a:cs typeface="Helvetica" pitchFamily="34" charset="-120"/>
               </a:rPr>
-              <a:t>FRESCHE LPAR OPERATIONS MANAGEMENT</a:t>
+              <a:t>FRESCHE PRESTO</a:t>
             </a:r>
             <a:endParaRPr lang="en-US" dirty="0"/>
           </a:p>
@@ -29576,7 +29576,7 @@
       </p:sp>
       <p:pic>
         <p:nvPicPr>
-          <p:cNvPr id="84" name="Object 83" descr="public/generated/icons/afa31435-8561-4383-b069-ec9a47719e20.png">    </p:cNvPr>
+          <p:cNvPr id="84" name="Object 83" descr="public/generated/icons/9db75c87-84ce-491b-8526-dcd2188f3866.png">    </p:cNvPr>
           <p:cNvPicPr>
             <a:picLocks noChangeAspect="1"/>
           </p:cNvPicPr>
@@ -29632,7 +29632,7 @@
                 <a:ea typeface="Helvetica" pitchFamily="34" charset="-122"/>
                 <a:cs typeface="Helvetica" pitchFamily="34" charset="-120"/>
               </a:rPr>
-              <a:t>FRESCHE PRESTO</a:t>
+              <a:t>FRESCHE X-ANALYSIS SUITE</a:t>
             </a:r>
             <a:endParaRPr lang="en-US" dirty="0"/>
           </a:p>
@@ -29665,7 +29665,7 @@
       </p:sp>
       <p:pic>
         <p:nvPicPr>
-          <p:cNvPr id="87" name="Object 86" descr="public/generated/icons/9db75c87-84ce-491b-8526-dcd2188f3866.png">    </p:cNvPr>
+          <p:cNvPr id="87" name="Object 86" descr="public/generated/icons/16.png">    </p:cNvPr>
           <p:cNvPicPr>
             <a:picLocks noChangeAspect="1"/>
           </p:cNvPicPr>
@@ -29721,7 +29721,7 @@
                 <a:ea typeface="Helvetica" pitchFamily="34" charset="-122"/>
                 <a:cs typeface="Helvetica" pitchFamily="34" charset="-120"/>
               </a:rPr>
-              <a:t>FRESCHE X-ANALYSIS SUITE</a:t>
+              <a:t>HARDWARE FIREWALL</a:t>
             </a:r>
             <a:endParaRPr lang="en-US" dirty="0"/>
           </a:p>
@@ -29754,7 +29754,7 @@
       </p:sp>
       <p:pic>
         <p:nvPicPr>
-          <p:cNvPr id="90" name="Object 89" descr="public/generated/icons/16.png">    </p:cNvPr>
+          <p:cNvPr id="90" name="Object 89" descr="public/generated/icons/cf329950-0a3e-11e8-922e-f1366c6e1c83-hcx.png">    </p:cNvPr>
           <p:cNvPicPr>
             <a:picLocks noChangeAspect="1"/>
           </p:cNvPicPr>
@@ -29810,7 +29810,7 @@
                 <a:ea typeface="Helvetica" pitchFamily="34" charset="-122"/>
                 <a:cs typeface="Helvetica" pitchFamily="34" charset="-120"/>
               </a:rPr>
-              <a:t>HARDWARE FIREWALL</a:t>
+              <a:t>HCX</a:t>
             </a:r>
             <a:endParaRPr lang="en-US" dirty="0"/>
           </a:p>
@@ -29843,7 +29843,7 @@
       </p:sp>
       <p:pic>
         <p:nvPicPr>
-          <p:cNvPr id="93" name="Object 92" descr="public/generated/icons/cf329950-0a3e-11e8-922e-f1366c6e1c83-hcx.png">    </p:cNvPr>
+          <p:cNvPr id="93" name="Object 92" descr="public/generated/icons/3dacb5a3-de4a-4361-9f39-0b6657f89f37.png">    </p:cNvPr>
           <p:cNvPicPr>
             <a:picLocks noChangeAspect="1"/>
           </p:cNvPicPr>
@@ -29899,7 +29899,7 @@
                 <a:ea typeface="Helvetica" pitchFamily="34" charset="-122"/>
                 <a:cs typeface="Helvetica" pitchFamily="34" charset="-120"/>
               </a:rPr>
-              <a:t>HCX</a:t>
+              <a:t>HDM VMWARE WORKLOAD ANALYZER</a:t>
             </a:r>
             <a:endParaRPr lang="en-US" dirty="0"/>
           </a:p>
@@ -29932,7 +29932,7 @@
       </p:sp>
       <p:pic>
         <p:nvPicPr>
-          <p:cNvPr id="96" name="Object 95" descr="public/generated/icons/3dacb5a3-de4a-4361-9f39-0b6657f89f37.png">    </p:cNvPr>
+          <p:cNvPr id="96" name="Object 95" descr="public/generated/icons/cf329950-0a3e-11e8-922e-f1366c6e1c83-horizon.png">    </p:cNvPr>
           <p:cNvPicPr>
             <a:picLocks noChangeAspect="1"/>
           </p:cNvPicPr>
@@ -29988,7 +29988,7 @@
                 <a:ea typeface="Helvetica" pitchFamily="34" charset="-122"/>
                 <a:cs typeface="Helvetica" pitchFamily="34" charset="-120"/>
               </a:rPr>
-              <a:t>HDM VMWARE WORKLOAD ANALYZER</a:t>
+              <a:t>HORIZON 7</a:t>
             </a:r>
             <a:endParaRPr lang="en-US" dirty="0"/>
           </a:p>
@@ -30021,7 +30021,7 @@
       </p:sp>
       <p:pic>
         <p:nvPicPr>
-          <p:cNvPr id="99" name="Object 98" descr="public/generated/icons/cf329950-0a3e-11e8-922e-f1366c6e1c83-horizon.png">    </p:cNvPr>
+          <p:cNvPr id="99" name="Object 98" descr="public/generated/icons/fa329acf-f9b6-fa9f-f37e-ad72d0b6a783.png">    </p:cNvPr>
           <p:cNvPicPr>
             <a:picLocks noChangeAspect="1"/>
           </p:cNvPicPr>
@@ -30077,7 +30077,7 @@
                 <a:ea typeface="Helvetica" pitchFamily="34" charset="-122"/>
                 <a:cs typeface="Helvetica" pitchFamily="34" charset="-120"/>
               </a:rPr>
-              <a:t>HORIZON 7</a:t>
+              <a:t>HYBRID CLOUD INFRASTRUCTURE AS A SERVICE</a:t>
             </a:r>
             <a:endParaRPr lang="en-US" dirty="0"/>
           </a:p>
@@ -30110,7 +30110,7 @@
       </p:sp>
       <p:pic>
         <p:nvPicPr>
-          <p:cNvPr id="102" name="Object 101" descr="public/generated/icons/fa329acf-f9b6-fa9f-f37e-ad72d0b6a783.png">    </p:cNvPr>
+          <p:cNvPr id="102" name="Object 101" descr="public/generated/icons/d589492e-6ac0-4a11-9c28-a157851c8f68.png">    </p:cNvPr>
           <p:cNvPicPr>
             <a:picLocks noChangeAspect="1"/>
           </p:cNvPicPr>
@@ -30166,7 +30166,7 @@
                 <a:ea typeface="Helvetica" pitchFamily="34" charset="-122"/>
                 <a:cs typeface="Helvetica" pitchFamily="34" charset="-120"/>
               </a:rPr>
-              <a:t>HYBRID CLOUD INFRASTRUCTURE AS A SERVICE</a:t>
+              <a:t>HYPER PROTECT CRYPTO SERVICES</a:t>
             </a:r>
             <a:endParaRPr lang="en-US" dirty="0"/>
           </a:p>
@@ -30199,7 +30199,7 @@
       </p:sp>
       <p:pic>
         <p:nvPicPr>
-          <p:cNvPr id="105" name="Object 104" descr="public/generated/icons/d589492e-6ac0-4a11-9c28-a157851c8f68.png">    </p:cNvPr>
+          <p:cNvPr id="105" name="Object 104" descr="public/generated/icons/986f2197-9f9a-44f4-9463-f17ec64c6729.png">    </p:cNvPr>
           <p:cNvPicPr>
             <a:picLocks noChangeAspect="1"/>
           </p:cNvPicPr>
@@ -30255,7 +30255,7 @@
                 <a:ea typeface="Helvetica" pitchFamily="34" charset="-122"/>
                 <a:cs typeface="Helvetica" pitchFamily="34" charset="-120"/>
               </a:rPr>
-              <a:t>HYPER PROTECT CRYPTO SERVICES</a:t>
+              <a:t>HYPER PROTECT VIRTUAL SERVER FOR CLASSIC</a:t>
             </a:r>
             <a:endParaRPr lang="en-US" dirty="0"/>
           </a:p>
@@ -30288,7 +30288,7 @@
       </p:sp>
       <p:pic>
         <p:nvPicPr>
-          <p:cNvPr id="108" name="Object 107" descr="public/generated/icons/986f2197-9f9a-44f4-9463-f17ec64c6729.png">    </p:cNvPr>
+          <p:cNvPr id="108" name="Object 107" descr="public/generated/icons/cf329950-0a3e-11e8-922e-f1366c6e1c83-hytrustcc.png">    </p:cNvPr>
           <p:cNvPicPr>
             <a:picLocks noChangeAspect="1"/>
           </p:cNvPicPr>
@@ -30344,7 +30344,7 @@
                 <a:ea typeface="Helvetica" pitchFamily="34" charset="-122"/>
                 <a:cs typeface="Helvetica" pitchFamily="34" charset="-120"/>
               </a:rPr>
-              <a:t>HYPER PROTECT VIRTUAL SERVER FOR CLASSIC</a:t>
+              <a:t>HYTRUST CLOUDCONTROL</a:t>
             </a:r>
             <a:endParaRPr lang="en-US" dirty="0"/>
           </a:p>
@@ -30410,7 +30410,7 @@
       </p:sp>
       <p:pic>
         <p:nvPicPr>
-          <p:cNvPr id="3" name="Object 2" descr="public/generated/icons/cf329950-0a3e-11e8-922e-f1366c6e1c83-hytrustcc.png">    </p:cNvPr>
+          <p:cNvPr id="3" name="Object 2" descr="public/generated/icons/cf329950-0a3e-11e8-922e-f1366c6e1c83-hytrustdc.png">    </p:cNvPr>
           <p:cNvPicPr>
             <a:picLocks noChangeAspect="1"/>
           </p:cNvPicPr>
@@ -30466,7 +30466,7 @@
                 <a:ea typeface="Helvetica" pitchFamily="34" charset="-122"/>
                 <a:cs typeface="Helvetica" pitchFamily="34" charset="-120"/>
               </a:rPr>
-              <a:t>HYTRUST CLOUDCONTROL</a:t>
+              <a:t>HYTRUST DATACONTROL</a:t>
             </a:r>
             <a:endParaRPr lang="en-US" dirty="0"/>
           </a:p>
@@ -30499,7 +30499,7 @@
       </p:sp>
       <p:pic>
         <p:nvPicPr>
-          <p:cNvPr id="6" name="Object 5" descr="public/generated/icons/cf329950-0a3e-11e8-922e-f1366c6e1c83-hytrustdc.png">    </p:cNvPr>
+          <p:cNvPr id="6" name="Object 5" descr="public/generated/icons/cf329950-0a3e-11e8-922e-f1366c6e1c83-hytrustkc.png">    </p:cNvPr>
           <p:cNvPicPr>
             <a:picLocks noChangeAspect="1"/>
           </p:cNvPicPr>
@@ -30555,7 +30555,7 @@
                 <a:ea typeface="Helvetica" pitchFamily="34" charset="-122"/>
                 <a:cs typeface="Helvetica" pitchFamily="34" charset="-120"/>
               </a:rPr>
-              <a:t>HYTRUST DATACONTROL</a:t>
+              <a:t>HYTRUST KEYCONTROL</a:t>
             </a:r>
             <a:endParaRPr lang="en-US" dirty="0"/>
           </a:p>
@@ -30588,7 +30588,7 @@
       </p:sp>
       <p:pic>
         <p:nvPicPr>
-          <p:cNvPr id="9" name="Object 8" descr="public/generated/icons/cf329950-0a3e-11e8-922e-f1366c6e1c83-hytrustkc.png">    </p:cNvPr>
+          <p:cNvPr id="9" name="Object 8" descr="public/generated/icons/c1d5aa90-2cab-11ef-bc36-b3feacb6d8d5.png">    </p:cNvPr>
           <p:cNvPicPr>
             <a:picLocks noChangeAspect="1"/>
           </p:cNvPicPr>
@@ -30644,7 +30644,7 @@
                 <a:ea typeface="Helvetica" pitchFamily="34" charset="-122"/>
                 <a:cs typeface="Helvetica" pitchFamily="34" charset="-120"/>
               </a:rPr>
-              <a:t>HYTRUST KEYCONTROL</a:t>
+              <a:t>I MANAGED ON POWER VIRTUAL SERVER</a:t>
             </a:r>
             <a:endParaRPr lang="en-US" dirty="0"/>
           </a:p>

--- a/mycatalog-architecture-diagram-template.pptx
+++ b/mycatalog-architecture-diagram-template.pptx
@@ -524,7 +524,7 @@
           <a:p>
             <a:r>
               <a:rPr lang="en-US" dirty="0" smtClean="0"/>
-              <a:t>Generated on Sun Jun 22 2025 07:05:27 GMT+0000 (Coordinated Universal Time)</a:t>
+              <a:t>Generated on Sun Jun 29 2025 07:05:33 GMT+0000 (Coordinated Universal Time)</a:t>
             </a:r>
             <a:endParaRPr lang="en-US" dirty="0"/>
           </a:p>
@@ -29576,7 +29576,7 @@
       </p:sp>
       <p:pic>
         <p:nvPicPr>
-          <p:cNvPr id="84" name="Object 83" descr="public/generated/icons/9db75c87-84ce-491b-8526-dcd2188f3866.png">    </p:cNvPr>
+          <p:cNvPr id="84" name="Object 83" descr="public/generated/icons/3e683ee5-b3a8-4f07-b98b-bf35bdeb7082.png">    </p:cNvPr>
           <p:cNvPicPr>
             <a:picLocks noChangeAspect="1"/>
           </p:cNvPicPr>
@@ -29632,7 +29632,7 @@
                 <a:ea typeface="Helvetica" pitchFamily="34" charset="-122"/>
                 <a:cs typeface="Helvetica" pitchFamily="34" charset="-120"/>
               </a:rPr>
-              <a:t>FRESCHE X-ANALYSIS SUITE</a:t>
+              <a:t>FRESCHE SECURITY SUITE</a:t>
             </a:r>
             <a:endParaRPr lang="en-US" dirty="0"/>
           </a:p>
@@ -29665,7 +29665,7 @@
       </p:sp>
       <p:pic>
         <p:nvPicPr>
-          <p:cNvPr id="87" name="Object 86" descr="public/generated/icons/16.png">    </p:cNvPr>
+          <p:cNvPr id="87" name="Object 86" descr="public/generated/icons/9db75c87-84ce-491b-8526-dcd2188f3866.png">    </p:cNvPr>
           <p:cNvPicPr>
             <a:picLocks noChangeAspect="1"/>
           </p:cNvPicPr>
@@ -29721,7 +29721,7 @@
                 <a:ea typeface="Helvetica" pitchFamily="34" charset="-122"/>
                 <a:cs typeface="Helvetica" pitchFamily="34" charset="-120"/>
               </a:rPr>
-              <a:t>HARDWARE FIREWALL</a:t>
+              <a:t>FRESCHE X-ANALYSIS SUITE</a:t>
             </a:r>
             <a:endParaRPr lang="en-US" dirty="0"/>
           </a:p>
@@ -29754,7 +29754,7 @@
       </p:sp>
       <p:pic>
         <p:nvPicPr>
-          <p:cNvPr id="90" name="Object 89" descr="public/generated/icons/cf329950-0a3e-11e8-922e-f1366c6e1c83-hcx.png">    </p:cNvPr>
+          <p:cNvPr id="90" name="Object 89" descr="public/generated/icons/16.png">    </p:cNvPr>
           <p:cNvPicPr>
             <a:picLocks noChangeAspect="1"/>
           </p:cNvPicPr>
@@ -29810,7 +29810,7 @@
                 <a:ea typeface="Helvetica" pitchFamily="34" charset="-122"/>
                 <a:cs typeface="Helvetica" pitchFamily="34" charset="-120"/>
               </a:rPr>
-              <a:t>HCX</a:t>
+              <a:t>HARDWARE FIREWALL</a:t>
             </a:r>
             <a:endParaRPr lang="en-US" dirty="0"/>
           </a:p>
@@ -29843,7 +29843,7 @@
       </p:sp>
       <p:pic>
         <p:nvPicPr>
-          <p:cNvPr id="93" name="Object 92" descr="public/generated/icons/3dacb5a3-de4a-4361-9f39-0b6657f89f37.png">    </p:cNvPr>
+          <p:cNvPr id="93" name="Object 92" descr="public/generated/icons/cf329950-0a3e-11e8-922e-f1366c6e1c83-hcx.png">    </p:cNvPr>
           <p:cNvPicPr>
             <a:picLocks noChangeAspect="1"/>
           </p:cNvPicPr>
@@ -29899,7 +29899,7 @@
                 <a:ea typeface="Helvetica" pitchFamily="34" charset="-122"/>
                 <a:cs typeface="Helvetica" pitchFamily="34" charset="-120"/>
               </a:rPr>
-              <a:t>HDM VMWARE WORKLOAD ANALYZER</a:t>
+              <a:t>HCX</a:t>
             </a:r>
             <a:endParaRPr lang="en-US" dirty="0"/>
           </a:p>
@@ -29932,7 +29932,7 @@
       </p:sp>
       <p:pic>
         <p:nvPicPr>
-          <p:cNvPr id="96" name="Object 95" descr="public/generated/icons/cf329950-0a3e-11e8-922e-f1366c6e1c83-horizon.png">    </p:cNvPr>
+          <p:cNvPr id="96" name="Object 95" descr="public/generated/icons/3dacb5a3-de4a-4361-9f39-0b6657f89f37.png">    </p:cNvPr>
           <p:cNvPicPr>
             <a:picLocks noChangeAspect="1"/>
           </p:cNvPicPr>
@@ -29988,7 +29988,7 @@
                 <a:ea typeface="Helvetica" pitchFamily="34" charset="-122"/>
                 <a:cs typeface="Helvetica" pitchFamily="34" charset="-120"/>
               </a:rPr>
-              <a:t>HORIZON 7</a:t>
+              <a:t>HDM VMWARE WORKLOAD ANALYZER</a:t>
             </a:r>
             <a:endParaRPr lang="en-US" dirty="0"/>
           </a:p>
@@ -30021,7 +30021,7 @@
       </p:sp>
       <p:pic>
         <p:nvPicPr>
-          <p:cNvPr id="99" name="Object 98" descr="public/generated/icons/fa329acf-f9b6-fa9f-f37e-ad72d0b6a783.png">    </p:cNvPr>
+          <p:cNvPr id="99" name="Object 98" descr="public/generated/icons/cf329950-0a3e-11e8-922e-f1366c6e1c83-horizon.png">    </p:cNvPr>
           <p:cNvPicPr>
             <a:picLocks noChangeAspect="1"/>
           </p:cNvPicPr>
@@ -30077,7 +30077,7 @@
                 <a:ea typeface="Helvetica" pitchFamily="34" charset="-122"/>
                 <a:cs typeface="Helvetica" pitchFamily="34" charset="-120"/>
               </a:rPr>
-              <a:t>HYBRID CLOUD INFRASTRUCTURE AS A SERVICE</a:t>
+              <a:t>HORIZON 7</a:t>
             </a:r>
             <a:endParaRPr lang="en-US" dirty="0"/>
           </a:p>
@@ -30110,7 +30110,7 @@
       </p:sp>
       <p:pic>
         <p:nvPicPr>
-          <p:cNvPr id="102" name="Object 101" descr="public/generated/icons/d589492e-6ac0-4a11-9c28-a157851c8f68.png">    </p:cNvPr>
+          <p:cNvPr id="102" name="Object 101" descr="public/generated/icons/fa329acf-f9b6-fa9f-f37e-ad72d0b6a783.png">    </p:cNvPr>
           <p:cNvPicPr>
             <a:picLocks noChangeAspect="1"/>
           </p:cNvPicPr>
@@ -30166,7 +30166,7 @@
                 <a:ea typeface="Helvetica" pitchFamily="34" charset="-122"/>
                 <a:cs typeface="Helvetica" pitchFamily="34" charset="-120"/>
               </a:rPr>
-              <a:t>HYPER PROTECT CRYPTO SERVICES</a:t>
+              <a:t>HYBRID CLOUD INFRASTRUCTURE AS A SERVICE</a:t>
             </a:r>
             <a:endParaRPr lang="en-US" dirty="0"/>
           </a:p>
@@ -30199,7 +30199,7 @@
       </p:sp>
       <p:pic>
         <p:nvPicPr>
-          <p:cNvPr id="105" name="Object 104" descr="public/generated/icons/986f2197-9f9a-44f4-9463-f17ec64c6729.png">    </p:cNvPr>
+          <p:cNvPr id="105" name="Object 104" descr="public/generated/icons/d589492e-6ac0-4a11-9c28-a157851c8f68.png">    </p:cNvPr>
           <p:cNvPicPr>
             <a:picLocks noChangeAspect="1"/>
           </p:cNvPicPr>
@@ -30255,7 +30255,7 @@
                 <a:ea typeface="Helvetica" pitchFamily="34" charset="-122"/>
                 <a:cs typeface="Helvetica" pitchFamily="34" charset="-120"/>
               </a:rPr>
-              <a:t>HYPER PROTECT VIRTUAL SERVER FOR CLASSIC</a:t>
+              <a:t>HYPER PROTECT CRYPTO SERVICES</a:t>
             </a:r>
             <a:endParaRPr lang="en-US" dirty="0"/>
           </a:p>
@@ -30288,7 +30288,7 @@
       </p:sp>
       <p:pic>
         <p:nvPicPr>
-          <p:cNvPr id="108" name="Object 107" descr="public/generated/icons/cf329950-0a3e-11e8-922e-f1366c6e1c83-hytrustcc.png">    </p:cNvPr>
+          <p:cNvPr id="108" name="Object 107" descr="public/generated/icons/986f2197-9f9a-44f4-9463-f17ec64c6729.png">    </p:cNvPr>
           <p:cNvPicPr>
             <a:picLocks noChangeAspect="1"/>
           </p:cNvPicPr>
@@ -30344,7 +30344,7 @@
                 <a:ea typeface="Helvetica" pitchFamily="34" charset="-122"/>
                 <a:cs typeface="Helvetica" pitchFamily="34" charset="-120"/>
               </a:rPr>
-              <a:t>HYTRUST CLOUDCONTROL</a:t>
+              <a:t>HYPER PROTECT VIRTUAL SERVER FOR CLASSIC</a:t>
             </a:r>
             <a:endParaRPr lang="en-US" dirty="0"/>
           </a:p>
@@ -30410,7 +30410,7 @@
       </p:sp>
       <p:pic>
         <p:nvPicPr>
-          <p:cNvPr id="3" name="Object 2" descr="public/generated/icons/cf329950-0a3e-11e8-922e-f1366c6e1c83-hytrustdc.png">    </p:cNvPr>
+          <p:cNvPr id="3" name="Object 2" descr="public/generated/icons/cf329950-0a3e-11e8-922e-f1366c6e1c83-hytrustcc.png">    </p:cNvPr>
           <p:cNvPicPr>
             <a:picLocks noChangeAspect="1"/>
           </p:cNvPicPr>
@@ -30466,7 +30466,7 @@
                 <a:ea typeface="Helvetica" pitchFamily="34" charset="-122"/>
                 <a:cs typeface="Helvetica" pitchFamily="34" charset="-120"/>
               </a:rPr>
-              <a:t>HYTRUST DATACONTROL</a:t>
+              <a:t>HYTRUST CLOUDCONTROL</a:t>
             </a:r>
             <a:endParaRPr lang="en-US" dirty="0"/>
           </a:p>
@@ -30499,7 +30499,7 @@
       </p:sp>
       <p:pic>
         <p:nvPicPr>
-          <p:cNvPr id="6" name="Object 5" descr="public/generated/icons/cf329950-0a3e-11e8-922e-f1366c6e1c83-hytrustkc.png">    </p:cNvPr>
+          <p:cNvPr id="6" name="Object 5" descr="public/generated/icons/cf329950-0a3e-11e8-922e-f1366c6e1c83-hytrustdc.png">    </p:cNvPr>
           <p:cNvPicPr>
             <a:picLocks noChangeAspect="1"/>
           </p:cNvPicPr>
@@ -30555,7 +30555,7 @@
                 <a:ea typeface="Helvetica" pitchFamily="34" charset="-122"/>
                 <a:cs typeface="Helvetica" pitchFamily="34" charset="-120"/>
               </a:rPr>
-              <a:t>HYTRUST KEYCONTROL</a:t>
+              <a:t>HYTRUST DATACONTROL</a:t>
             </a:r>
             <a:endParaRPr lang="en-US" dirty="0"/>
           </a:p>
@@ -30588,7 +30588,7 @@
       </p:sp>
       <p:pic>
         <p:nvPicPr>
-          <p:cNvPr id="9" name="Object 8" descr="public/generated/icons/c1d5aa90-2cab-11ef-bc36-b3feacb6d8d5.png">    </p:cNvPr>
+          <p:cNvPr id="9" name="Object 8" descr="public/generated/icons/cf329950-0a3e-11e8-922e-f1366c6e1c83-hytrustkc.png">    </p:cNvPr>
           <p:cNvPicPr>
             <a:picLocks noChangeAspect="1"/>
           </p:cNvPicPr>
@@ -30644,7 +30644,7 @@
                 <a:ea typeface="Helvetica" pitchFamily="34" charset="-122"/>
                 <a:cs typeface="Helvetica" pitchFamily="34" charset="-120"/>
               </a:rPr>
-              <a:t>I MANAGED ON POWER VIRTUAL SERVER</a:t>
+              <a:t>HYTRUST KEYCONTROL</a:t>
             </a:r>
             <a:endParaRPr lang="en-US" dirty="0"/>
           </a:p>
@@ -30677,7 +30677,7 @@
       </p:sp>
       <p:pic>
         <p:nvPicPr>
-          <p:cNvPr id="12" name="Object 11" descr="public/generated/icons/is.image.png">    </p:cNvPr>
+          <p:cNvPr id="12" name="Object 11" descr="public/generated/icons/c1d5aa90-2cab-11ef-bc36-b3feacb6d8d5.png">    </p:cNvPr>
           <p:cNvPicPr>
             <a:picLocks noChangeAspect="1"/>
           </p:cNvPicPr>
@@ -30733,7 +30733,7 @@
                 <a:ea typeface="Helvetica" pitchFamily="34" charset="-122"/>
                 <a:cs typeface="Helvetica" pitchFamily="34" charset="-120"/>
               </a:rPr>
-              <a:t>IMAGE SERVICE FOR VPC</a:t>
+              <a:t>I MANAGED ON POWER VIRTUAL SERVER</a:t>
             </a:r>
             <a:endParaRPr lang="en-US" dirty="0"/>
           </a:p>
@@ -30766,7 +30766,7 @@
       </p:sp>
       <p:pic>
         <p:nvPicPr>
-          <p:cNvPr id="15" name="Object 14" descr="public/generated/icons/is.metadata.png">    </p:cNvPr>
+          <p:cNvPr id="15" name="Object 14" descr="public/generated/icons/is.image.png">    </p:cNvPr>
           <p:cNvPicPr>
             <a:picLocks noChangeAspect="1"/>
           </p:cNvPicPr>
@@ -30822,7 +30822,7 @@
                 <a:ea typeface="Helvetica" pitchFamily="34" charset="-122"/>
                 <a:cs typeface="Helvetica" pitchFamily="34" charset="-120"/>
               </a:rPr>
-              <a:t>INSTANCE METADATA FOR VPC</a:t>
+              <a:t>IMAGE SERVICE FOR VPC</a:t>
             </a:r>
             <a:endParaRPr lang="en-US" dirty="0"/>
           </a:p>
@@ -30855,7 +30855,7 @@
       </p:sp>
       <p:pic>
         <p:nvPicPr>
-          <p:cNvPr id="18" name="Object 17" descr="public/generated/icons/75874a60-cb12-11e7-948e-37ac098eb1b9.png">    </p:cNvPr>
+          <p:cNvPr id="18" name="Object 17" descr="public/generated/icons/is.metadata.png">    </p:cNvPr>
           <p:cNvPicPr>
             <a:picLocks noChangeAspect="1"/>
           </p:cNvPicPr>
@@ -30911,7 +30911,7 @@
                 <a:ea typeface="Helvetica" pitchFamily="34" charset="-122"/>
                 <a:cs typeface="Helvetica" pitchFamily="34" charset="-120"/>
               </a:rPr>
-              <a:t>INTERNET SERVICES</a:t>
+              <a:t>INSTANCE METADATA FOR VPC</a:t>
             </a:r>
             <a:endParaRPr lang="en-US" dirty="0"/>
           </a:p>
@@ -30944,7 +30944,7 @@
       </p:sp>
       <p:pic>
         <p:nvPicPr>
-          <p:cNvPr id="21" name="Object 20" descr="public/generated/icons/12.png">    </p:cNvPr>
+          <p:cNvPr id="21" name="Object 20" descr="public/generated/icons/75874a60-cb12-11e7-948e-37ac098eb1b9.png">    </p:cNvPr>
           <p:cNvPicPr>
             <a:picLocks noChangeAspect="1"/>
           </p:cNvPicPr>
@@ -31000,7 +31000,7 @@
                 <a:ea typeface="Helvetica" pitchFamily="34" charset="-122"/>
                 <a:cs typeface="Helvetica" pitchFamily="34" charset="-120"/>
               </a:rPr>
-              <a:t>IPSEC VPN</a:t>
+              <a:t>INTERNET SERVICES</a:t>
             </a:r>
             <a:endParaRPr lang="en-US" dirty="0"/>
           </a:p>
@@ -31033,7 +31033,7 @@
       </p:sp>
       <p:pic>
         <p:nvPicPr>
-          <p:cNvPr id="24" name="Object 23" descr="public/generated/icons/035145f0-2cac-4505-59e9-2e363d08d5aa.png">    </p:cNvPr>
+          <p:cNvPr id="24" name="Object 23" descr="public/generated/icons/12.png">    </p:cNvPr>
           <p:cNvPicPr>
             <a:picLocks noChangeAspect="1"/>
           </p:cNvPicPr>
@@ -31089,7 +31089,7 @@
                 <a:ea typeface="Helvetica" pitchFamily="34" charset="-122"/>
                 <a:cs typeface="Helvetica" pitchFamily="34" charset="-120"/>
               </a:rPr>
-              <a:t>JUNIPER VSRX</a:t>
+              <a:t>IPSEC VPN</a:t>
             </a:r>
             <a:endParaRPr lang="en-US" dirty="0"/>
           </a:p>
@@ -31122,7 +31122,7 @@
       </p:sp>
       <p:pic>
         <p:nvPicPr>
-          <p:cNvPr id="27" name="Object 26" descr="public/generated/icons/ee41347f-b18e-4ca6-bf80-b5467c63f9a6.png">    </p:cNvPr>
+          <p:cNvPr id="27" name="Object 26" descr="public/generated/icons/035145f0-2cac-4505-59e9-2e363d08d5aa.png">    </p:cNvPr>
           <p:cNvPicPr>
             <a:picLocks noChangeAspect="1"/>
           </p:cNvPicPr>
@@ -31178,7 +31178,7 @@
                 <a:ea typeface="Helvetica" pitchFamily="34" charset="-122"/>
                 <a:cs typeface="Helvetica" pitchFamily="34" charset="-120"/>
               </a:rPr>
-              <a:t>KEY PROTECT</a:t>
+              <a:t>JUNIPER VSRX</a:t>
             </a:r>
             <a:endParaRPr lang="en-US" dirty="0"/>
           </a:p>
@@ -31211,7 +31211,7 @@
       </p:sp>
       <p:pic>
         <p:nvPicPr>
-          <p:cNvPr id="30" name="Object 29" descr="public/generated/icons/cf329950-0a3e-11e8-922e-f1366c6e1c83-kmipadapter.png">    </p:cNvPr>
+          <p:cNvPr id="30" name="Object 29" descr="public/generated/icons/ee41347f-b18e-4ca6-bf80-b5467c63f9a6.png">    </p:cNvPr>
           <p:cNvPicPr>
             <a:picLocks noChangeAspect="1"/>
           </p:cNvPicPr>
@@ -31267,7 +31267,7 @@
                 <a:ea typeface="Helvetica" pitchFamily="34" charset="-122"/>
                 <a:cs typeface="Helvetica" pitchFamily="34" charset="-120"/>
               </a:rPr>
-              <a:t>KMIP FOR VMWARE</a:t>
+              <a:t>KEY PROTECT</a:t>
             </a:r>
             <a:endParaRPr lang="en-US" dirty="0"/>
           </a:p>
@@ -31300,7 +31300,7 @@
       </p:sp>
       <p:pic>
         <p:nvPicPr>
-          <p:cNvPr id="33" name="Object 32" descr="public/generated/icons/983ea9a2-0fec-4021-8b70-8da5373394e5.png">    </p:cNvPr>
+          <p:cNvPr id="33" name="Object 32" descr="public/generated/icons/cf329950-0a3e-11e8-922e-f1366c6e1c83-kmipadapter.png">    </p:cNvPr>
           <p:cNvPicPr>
             <a:picLocks noChangeAspect="1"/>
           </p:cNvPicPr>
@@ -31356,7 +31356,7 @@
                 <a:ea typeface="Helvetica" pitchFamily="34" charset="-122"/>
                 <a:cs typeface="Helvetica" pitchFamily="34" charset="-120"/>
               </a:rPr>
-              <a:t>KNOWLEDGE STUDIO</a:t>
+              <a:t>KMIP FOR VMWARE</a:t>
             </a:r>
             <a:endParaRPr lang="en-US" dirty="0"/>
           </a:p>
@@ -31389,7 +31389,7 @@
       </p:sp>
       <p:pic>
         <p:nvPicPr>
-          <p:cNvPr id="36" name="Object 35" descr="public/generated/icons/a8f89634-261c-4832-8257-b25e04787988.png">    </p:cNvPr>
+          <p:cNvPr id="36" name="Object 35" descr="public/generated/icons/983ea9a2-0fec-4021-8b70-8da5373394e5.png">    </p:cNvPr>
           <p:cNvPicPr>
             <a:picLocks noChangeAspect="1"/>
           </p:cNvPicPr>
@@ -31445,7 +31445,7 @@
                 <a:ea typeface="Helvetica" pitchFamily="34" charset="-122"/>
                 <a:cs typeface="Helvetica" pitchFamily="34" charset="-120"/>
               </a:rPr>
-              <a:t>KOMPRISE ELASTIC DATA MIGRATION</a:t>
+              <a:t>KNOWLEDGE STUDIO</a:t>
             </a:r>
             <a:endParaRPr lang="en-US" dirty="0"/>
           </a:p>
@@ -31478,7 +31478,7 @@
       </p:sp>
       <p:pic>
         <p:nvPicPr>
-          <p:cNvPr id="39" name="Object 38" descr="public/generated/icons/f1fa7442-9ee0-4e27-94c2-0cb3776a0a0a.png">    </p:cNvPr>
+          <p:cNvPr id="39" name="Object 38" descr="public/generated/icons/a8f89634-261c-4832-8257-b25e04787988.png">    </p:cNvPr>
           <p:cNvPicPr>
             <a:picLocks noChangeAspect="1"/>
           </p:cNvPicPr>
@@ -31534,7 +31534,7 @@
                 <a:ea typeface="Helvetica" pitchFamily="34" charset="-122"/>
                 <a:cs typeface="Helvetica" pitchFamily="34" charset="-120"/>
               </a:rPr>
-              <a:t>KOMPRISE INTELLIGENT DATA MANAGEMENT SUITE</a:t>
+              <a:t>KOMPRISE ELASTIC DATA MIGRATION</a:t>
             </a:r>
             <a:endParaRPr lang="en-US" dirty="0"/>
           </a:p>
@@ -31567,7 +31567,7 @@
       </p:sp>
       <p:pic>
         <p:nvPicPr>
-          <p:cNvPr id="42" name="Object 41" descr="public/generated/icons/containers-kubernetes.png">    </p:cNvPr>
+          <p:cNvPr id="42" name="Object 41" descr="public/generated/icons/f1fa7442-9ee0-4e27-94c2-0cb3776a0a0a.png">    </p:cNvPr>
           <p:cNvPicPr>
             <a:picLocks noChangeAspect="1"/>
           </p:cNvPicPr>
@@ -31623,7 +31623,7 @@
                 <a:ea typeface="Helvetica" pitchFamily="34" charset="-122"/>
                 <a:cs typeface="Helvetica" pitchFamily="34" charset="-120"/>
               </a:rPr>
-              <a:t>KUBERNETES SERVICE</a:t>
+              <a:t>KOMPRISE INTELLIGENT DATA MANAGEMENT SUITE</a:t>
             </a:r>
             <a:endParaRPr lang="en-US" dirty="0"/>
           </a:p>
@@ -31656,7 +31656,7 @@
       </p:sp>
       <p:pic>
         <p:nvPicPr>
-          <p:cNvPr id="45" name="Object 44" descr="public/generated/icons/is.load-balancer.png">    </p:cNvPr>
+          <p:cNvPr id="45" name="Object 44" descr="public/generated/icons/containers-kubernetes.png">    </p:cNvPr>
           <p:cNvPicPr>
             <a:picLocks noChangeAspect="1"/>
           </p:cNvPicPr>
@@ -31712,7 +31712,7 @@
                 <a:ea typeface="Helvetica" pitchFamily="34" charset="-122"/>
                 <a:cs typeface="Helvetica" pitchFamily="34" charset="-120"/>
               </a:rPr>
-              <a:t>LOAD BALANCER FOR VPC</a:t>
+              <a:t>KUBERNETES SERVICE</a:t>
             </a:r>
             <a:endParaRPr lang="en-US" dirty="0"/>
           </a:p>
@@ -31745,7 +31745,7 @@
       </p:sp>
       <p:pic>
         <p:nvPicPr>
-          <p:cNvPr id="48" name="Object 47" descr="public/generated/icons/9349854b-eb46-427f-8ef6-687d601c9eda.png">    </p:cNvPr>
+          <p:cNvPr id="48" name="Object 47" descr="public/generated/icons/is.load-balancer.png">    </p:cNvPr>
           <p:cNvPicPr>
             <a:picLocks noChangeAspect="1"/>
           </p:cNvPicPr>
@@ -31801,7 +31801,7 @@
                 <a:ea typeface="Helvetica" pitchFamily="34" charset="-122"/>
                 <a:cs typeface="Helvetica" pitchFamily="34" charset="-120"/>
               </a:rPr>
-              <a:t>LYVE DATA TRANSFER SERVICES</a:t>
+              <a:t>LOAD BALANCER FOR VPC</a:t>
             </a:r>
             <a:endParaRPr lang="en-US" dirty="0"/>
           </a:p>
@@ -31834,7 +31834,7 @@
       </p:sp>
       <p:pic>
         <p:nvPicPr>
-          <p:cNvPr id="51" name="Object 50" descr="public/generated/icons/cf329950-0a3e-11e8-922e-f1366c6e1c83-managedveeam.png">    </p:cNvPr>
+          <p:cNvPr id="51" name="Object 50" descr="public/generated/icons/9349854b-eb46-427f-8ef6-687d601c9eda.png">    </p:cNvPr>
           <p:cNvPicPr>
             <a:picLocks noChangeAspect="1"/>
           </p:cNvPicPr>
@@ -31890,7 +31890,7 @@
                 <a:ea typeface="Helvetica" pitchFamily="34" charset="-122"/>
                 <a:cs typeface="Helvetica" pitchFamily="34" charset="-120"/>
               </a:rPr>
-              <a:t>MANAGED BACKUP SERVICES</a:t>
+              <a:t>LYVE DATA TRANSFER SERVICES</a:t>
             </a:r>
             <a:endParaRPr lang="en-US" dirty="0"/>
           </a:p>
@@ -31923,7 +31923,7 @@
       </p:sp>
       <p:pic>
         <p:nvPicPr>
-          <p:cNvPr id="54" name="Object 53" descr="public/generated/icons/cf329950-0a3e-11e8-922e-f1366c6e1c83-managedzerto.png">    </p:cNvPr>
+          <p:cNvPr id="54" name="Object 53" descr="public/generated/icons/cf329950-0a3e-11e8-922e-f1366c6e1c83-managedveeam.png">    </p:cNvPr>
           <p:cNvPicPr>
             <a:picLocks noChangeAspect="1"/>
           </p:cNvPicPr>
@@ -31979,7 +31979,7 @@
                 <a:ea typeface="Helvetica" pitchFamily="34" charset="-122"/>
                 <a:cs typeface="Helvetica" pitchFamily="34" charset="-120"/>
               </a:rPr>
-              <a:t>MANAGED DISASTER RECOVERY SERVICES</a:t>
+              <a:t>MANAGED BACKUP SERVICES</a:t>
             </a:r>
             <a:endParaRPr lang="en-US" dirty="0"/>
           </a:p>
@@ -32012,7 +32012,7 @@
       </p:sp>
       <p:pic>
         <p:nvPicPr>
-          <p:cNvPr id="57" name="Object 56" descr="public/generated/icons/cfb3c3da-7b1f-0879-f414-f367da218488.png">    </p:cNvPr>
+          <p:cNvPr id="57" name="Object 56" descr="public/generated/icons/cf329950-0a3e-11e8-922e-f1366c6e1c83-managedzerto.png">    </p:cNvPr>
           <p:cNvPicPr>
             <a:picLocks noChangeAspect="1"/>
           </p:cNvPicPr>
@@ -32068,7 +32068,7 @@
                 <a:ea typeface="Helvetica" pitchFamily="34" charset="-122"/>
                 <a:cs typeface="Helvetica" pitchFamily="34" charset="-120"/>
               </a:rPr>
-              <a:t>MANAGED NETWORK SECURITY SERVICES</a:t>
+              <a:t>MANAGED DISASTER RECOVERY SERVICES</a:t>
             </a:r>
             <a:endParaRPr lang="en-US" dirty="0"/>
           </a:p>
@@ -32101,7 +32101,7 @@
       </p:sp>
       <p:pic>
         <p:nvPicPr>
-          <p:cNvPr id="60" name="Object 59" descr="public/generated/icons/cf329950-0a3e-11e8-922e-f1366c6e1c83-imi.png">    </p:cNvPr>
+          <p:cNvPr id="60" name="Object 59" descr="public/generated/icons/cfb3c3da-7b1f-0879-f414-f367da218488.png">    </p:cNvPr>
           <p:cNvPicPr>
             <a:picLocks noChangeAspect="1"/>
           </p:cNvPicPr>
@@ -32157,7 +32157,7 @@
                 <a:ea typeface="Helvetica" pitchFamily="34" charset="-122"/>
                 <a:cs typeface="Helvetica" pitchFamily="34" charset="-120"/>
               </a:rPr>
-              <a:t>MANAGED VMWARE SERVICES</a:t>
+              <a:t>MANAGED NETWORK SECURITY SERVICES</a:t>
             </a:r>
             <a:endParaRPr lang="en-US" dirty="0"/>
           </a:p>
@@ -32190,7 +32190,7 @@
       </p:sp>
       <p:pic>
         <p:nvPicPr>
-          <p:cNvPr id="63" name="Object 62" descr="public/generated/icons/14bd30e0-8921-11e9-a2c5-13fceaf553c0.png">    </p:cNvPr>
+          <p:cNvPr id="63" name="Object 62" descr="public/generated/icons/cf329950-0a3e-11e8-922e-f1366c6e1c83-imi.png">    </p:cNvPr>
           <p:cNvPicPr>
             <a:picLocks noChangeAspect="1"/>
           </p:cNvPicPr>
@@ -32246,7 +32246,7 @@
                 <a:ea typeface="Helvetica" pitchFamily="34" charset="-122"/>
                 <a:cs typeface="Helvetica" pitchFamily="34" charset="-120"/>
               </a:rPr>
-              <a:t>MATCH 360 WITH WATSON</a:t>
+              <a:t>MANAGED VMWARE SERVICES</a:t>
             </a:r>
             <a:endParaRPr lang="en-US" dirty="0"/>
           </a:p>
@@ -32279,7 +32279,7 @@
       </p:sp>
       <p:pic>
         <p:nvPicPr>
-          <p:cNvPr id="66" name="Object 65" descr="public/generated/icons/messages-for-rabbitmq.png">    </p:cNvPr>
+          <p:cNvPr id="66" name="Object 65" descr="public/generated/icons/14bd30e0-8921-11e9-a2c5-13fceaf553c0.png">    </p:cNvPr>
           <p:cNvPicPr>
             <a:picLocks noChangeAspect="1"/>
           </p:cNvPicPr>
@@ -32335,7 +32335,7 @@
                 <a:ea typeface="Helvetica" pitchFamily="34" charset="-122"/>
                 <a:cs typeface="Helvetica" pitchFamily="34" charset="-120"/>
               </a:rPr>
-              <a:t>MESSAGES FOR RABBITMQ</a:t>
+              <a:t>MATCH 360 WITH WATSON</a:t>
             </a:r>
             <a:endParaRPr lang="en-US" dirty="0"/>
           </a:p>
@@ -32368,7 +32368,7 @@
       </p:sp>
       <p:pic>
         <p:nvPicPr>
-          <p:cNvPr id="69" name="Object 68" descr="public/generated/icons/d4000551-49ff-4868-9e05-f863e60fad3a.png">    </p:cNvPr>
+          <p:cNvPr id="69" name="Object 68" descr="public/generated/icons/messages-for-rabbitmq.png">    </p:cNvPr>
           <p:cNvPicPr>
             <a:picLocks noChangeAspect="1"/>
           </p:cNvPicPr>
@@ -32424,7 +32424,7 @@
                 <a:ea typeface="Helvetica" pitchFamily="34" charset="-122"/>
                 <a:cs typeface="Helvetica" pitchFamily="34" charset="-120"/>
               </a:rPr>
-              <a:t>MINIO</a:t>
+              <a:t>MESSAGES FOR RABBITMQ</a:t>
             </a:r>
             <a:endParaRPr lang="en-US" dirty="0"/>
           </a:p>
@@ -32457,7 +32457,7 @@
       </p:sp>
       <p:pic>
         <p:nvPicPr>
-          <p:cNvPr id="72" name="Object 71" descr="public/generated/icons/9d9545b4-b866-4c1b-9fc0-39273aef5bb0.png">    </p:cNvPr>
+          <p:cNvPr id="72" name="Object 71" descr="public/generated/icons/d4000551-49ff-4868-9e05-f863e60fad3a.png">    </p:cNvPr>
           <p:cNvPicPr>
             <a:picLocks noChangeAspect="1"/>
           </p:cNvPicPr>
@@ -32513,7 +32513,7 @@
                 <a:ea typeface="Helvetica" pitchFamily="34" charset="-122"/>
                 <a:cs typeface="Helvetica" pitchFamily="34" charset="-120"/>
               </a:rPr>
-              <a:t>MONO-X ONE FOR POWERVS</a:t>
+              <a:t>MINIO</a:t>
             </a:r>
             <a:endParaRPr lang="en-US" dirty="0"/>
           </a:p>
@@ -32546,7 +32546,7 @@
       </p:sp>
       <p:pic>
         <p:nvPicPr>
-          <p:cNvPr id="75" name="Object 74" descr="public/generated/icons/01037c41-adce-4bb5-8b45-0c06004916c4.png">    </p:cNvPr>
+          <p:cNvPr id="75" name="Object 74" descr="public/generated/icons/9d9545b4-b866-4c1b-9fc0-39273aef5bb0.png">    </p:cNvPr>
           <p:cNvPicPr>
             <a:picLocks noChangeAspect="1"/>
           </p:cNvPicPr>
@@ -32602,7 +32602,7 @@
                 <a:ea typeface="Helvetica" pitchFamily="34" charset="-122"/>
                 <a:cs typeface="Helvetica" pitchFamily="34" charset="-120"/>
               </a:rPr>
-              <a:t>MQ</a:t>
+              <a:t>MONO-X ONE FOR POWERVS</a:t>
             </a:r>
             <a:endParaRPr lang="en-US" dirty="0"/>
           </a:p>
@@ -32635,7 +32635,7 @@
       </p:sp>
       <p:pic>
         <p:nvPicPr>
-          <p:cNvPr id="78" name="Object 77" descr="public/generated/icons/is.snapshot-consistency-group.png">    </p:cNvPr>
+          <p:cNvPr id="78" name="Object 77" descr="public/generated/icons/01037c41-adce-4bb5-8b45-0c06004916c4.png">    </p:cNvPr>
           <p:cNvPicPr>
             <a:picLocks noChangeAspect="1"/>
           </p:cNvPicPr>
@@ -32691,7 +32691,7 @@
                 <a:ea typeface="Helvetica" pitchFamily="34" charset="-122"/>
                 <a:cs typeface="Helvetica" pitchFamily="34" charset="-120"/>
               </a:rPr>
-              <a:t>MULTI VOLUME SNAPSHOTS FOR VPC</a:t>
+              <a:t>MQ</a:t>
             </a:r>
             <a:endParaRPr lang="en-US" dirty="0"/>
           </a:p>
@@ -32724,7 +32724,7 @@
       </p:sp>
       <p:pic>
         <p:nvPicPr>
-          <p:cNvPr id="81" name="Object 80" descr="public/generated/icons/bb6393bc-7d81-446b-9728-61b704f6eca5.png">    </p:cNvPr>
+          <p:cNvPr id="81" name="Object 80" descr="public/generated/icons/is.snapshot-consistency-group.png">    </p:cNvPr>
           <p:cNvPicPr>
             <a:picLocks noChangeAspect="1"/>
           </p:cNvPicPr>
@@ -32780,7 +32780,7 @@
                 <a:ea typeface="Helvetica" pitchFamily="34" charset="-122"/>
                 <a:cs typeface="Helvetica" pitchFamily="34" charset="-120"/>
               </a:rPr>
-              <a:t>NATURAL LANGUAGE UNDERSTANDING</a:t>
+              <a:t>MULTI VOLUME SNAPSHOTS FOR VPC</a:t>
             </a:r>
             <a:endParaRPr lang="en-US" dirty="0"/>
           </a:p>
@@ -32813,7 +32813,7 @@
       </p:sp>
       <p:pic>
         <p:nvPicPr>
-          <p:cNvPr id="84" name="Object 83" descr="public/generated/icons/cf329950-0a3e-11e8-922e-f1366c6e1c83-netapp.png">    </p:cNvPr>
+          <p:cNvPr id="84" name="Object 83" descr="public/generated/icons/bb6393bc-7d81-446b-9728-61b704f6eca5.png">    </p:cNvPr>
           <p:cNvPicPr>
             <a:picLocks noChangeAspect="1"/>
           </p:cNvPicPr>
@@ -32869,7 +32869,7 @@
                 <a:ea typeface="Helvetica" pitchFamily="34" charset="-122"/>
                 <a:cs typeface="Helvetica" pitchFamily="34" charset="-120"/>
               </a:rPr>
-              <a:t>NETAPP ONTAP SELECT</a:t>
+              <a:t>NATURAL LANGUAGE UNDERSTANDING</a:t>
             </a:r>
             <a:endParaRPr lang="en-US" dirty="0"/>
           </a:p>
@@ -32902,7 +32902,7 @@
       </p:sp>
       <p:pic>
         <p:nvPicPr>
-          <p:cNvPr id="87" name="Object 86" descr="public/generated/icons/cc42cff0-b19b-11eb-9a66-c717766c1d30.png">    </p:cNvPr>
+          <p:cNvPr id="87" name="Object 86" descr="public/generated/icons/cf329950-0a3e-11e8-922e-f1366c6e1c83-netapp.png">    </p:cNvPr>
           <p:cNvPicPr>
             <a:picLocks noChangeAspect="1"/>
           </p:cNvPicPr>
@@ -32958,7 +32958,7 @@
                 <a:ea typeface="Helvetica" pitchFamily="34" charset="-122"/>
                 <a:cs typeface="Helvetica" pitchFamily="34" charset="-120"/>
               </a:rPr>
-              <a:t>NETEZZA PERFORMANCE SERVER</a:t>
+              <a:t>NETAPP ONTAP SELECT</a:t>
             </a:r>
             <a:endParaRPr lang="en-US" dirty="0"/>
           </a:p>
@@ -32991,7 +32991,7 @@
       </p:sp>
       <p:pic>
         <p:nvPicPr>
-          <p:cNvPr id="90" name="Object 89" descr="public/generated/icons/is.network-acl.png">    </p:cNvPr>
+          <p:cNvPr id="90" name="Object 89" descr="public/generated/icons/cc42cff0-b19b-11eb-9a66-c717766c1d30.png">    </p:cNvPr>
           <p:cNvPicPr>
             <a:picLocks noChangeAspect="1"/>
           </p:cNvPicPr>
@@ -33047,7 +33047,7 @@
                 <a:ea typeface="Helvetica" pitchFamily="34" charset="-122"/>
                 <a:cs typeface="Helvetica" pitchFamily="34" charset="-120"/>
               </a:rPr>
-              <a:t>NETWORK ACL</a:t>
+              <a:t>NETEZZA PERFORMANCE SERVER</a:t>
             </a:r>
             <a:endParaRPr lang="en-US" dirty="0"/>
           </a:p>
@@ -33080,7 +33080,7 @@
       </p:sp>
       <p:pic>
         <p:nvPicPr>
-          <p:cNvPr id="93" name="Object 92" descr="public/generated/icons/d97bd0c3-a8e5-4f3d-b925-16380e039a9a.png">    </p:cNvPr>
+          <p:cNvPr id="93" name="Object 92" descr="public/generated/icons/is.network-acl.png">    </p:cNvPr>
           <p:cNvPicPr>
             <a:picLocks noChangeAspect="1"/>
           </p:cNvPicPr>
@@ -33136,7 +33136,7 @@
                 <a:ea typeface="Helvetica" pitchFamily="34" charset="-122"/>
                 <a:cs typeface="Helvetica" pitchFamily="34" charset="-120"/>
               </a:rPr>
-              <a:t>NEURALSEEK</a:t>
+              <a:t>NETWORK ACL</a:t>
             </a:r>
             <a:endParaRPr lang="en-US" dirty="0"/>
           </a:p>
@@ -33169,7 +33169,7 @@
       </p:sp>
       <p:pic>
         <p:nvPicPr>
-          <p:cNvPr id="96" name="Object 95" descr="public/generated/icons/266c5178-8d88-40a9-966f-ea9f775bab05.png">    </p:cNvPr>
+          <p:cNvPr id="96" name="Object 95" descr="public/generated/icons/d97bd0c3-a8e5-4f3d-b925-16380e039a9a.png">    </p:cNvPr>
           <p:cNvPicPr>
             <a:picLocks noChangeAspect="1"/>
           </p:cNvPicPr>
@@ -33225,7 +33225,7 @@
                 <a:ea typeface="Helvetica" pitchFamily="34" charset="-122"/>
                 <a:cs typeface="Helvetica" pitchFamily="34" charset="-120"/>
               </a:rPr>
-              <a:t>NEURALSEEK PROFESSIONAL SERVICES</a:t>
+              <a:t>NEURALSEEK</a:t>
             </a:r>
             <a:endParaRPr lang="en-US" dirty="0"/>
           </a:p>
@@ -33258,7 +33258,7 @@
       </p:sp>
       <p:pic>
         <p:nvPicPr>
-          <p:cNvPr id="99" name="Object 98" descr="public/generated/icons/466091c0-9b8d-11eb-8f8c-91e95378d441.png">    </p:cNvPr>
+          <p:cNvPr id="99" name="Object 98" descr="public/generated/icons/266c5178-8d88-40a9-966f-ea9f775bab05.png">    </p:cNvPr>
           <p:cNvPicPr>
             <a:picLocks noChangeAspect="1"/>
           </p:cNvPicPr>
@@ -33314,7 +33314,7 @@
                 <a:ea typeface="Helvetica" pitchFamily="34" charset="-122"/>
                 <a:cs typeface="Helvetica" pitchFamily="34" charset="-120"/>
               </a:rPr>
-              <a:t>OPENPAGES</a:t>
+              <a:t>NEURALSEEK PROFESSIONAL SERVICES</a:t>
             </a:r>
             <a:endParaRPr lang="en-US" dirty="0"/>
           </a:p>
@@ -33347,7 +33347,7 @@
       </p:sp>
       <p:pic>
         <p:nvPicPr>
-          <p:cNvPr id="102" name="Object 101" descr="public/generated/icons/2f756420-434f-11e8-ae40-6bdd72502abc.png">    </p:cNvPr>
+          <p:cNvPr id="102" name="Object 101" descr="public/generated/icons/466091c0-9b8d-11eb-8f8c-91e95378d441.png">    </p:cNvPr>
           <p:cNvPicPr>
             <a:picLocks noChangeAspect="1"/>
           </p:cNvPicPr>
@@ -33403,7 +33403,7 @@
                 <a:ea typeface="Helvetica" pitchFamily="34" charset="-122"/>
                 <a:cs typeface="Helvetica" pitchFamily="34" charset="-120"/>
               </a:rPr>
-              <a:t>PARTNER WITH TECHNOLOGY EXPERT LABS</a:t>
+              <a:t>OPENPAGES</a:t>
             </a:r>
             <a:endParaRPr lang="en-US" dirty="0"/>
           </a:p>
@@ -33436,7 +33436,7 @@
       </p:sp>
       <p:pic>
         <p:nvPicPr>
-          <p:cNvPr id="105" name="Object 104" descr="public/generated/icons/bb6229f0-e632-11ee-ae26-5d6d9ba99eec.png">    </p:cNvPr>
+          <p:cNvPr id="105" name="Object 104" descr="public/generated/icons/2f756420-434f-11e8-ae40-6bdd72502abc.png">    </p:cNvPr>
           <p:cNvPicPr>
             <a:picLocks noChangeAspect="1"/>
           </p:cNvPicPr>
@@ -33492,7 +33492,7 @@
                 <a:ea typeface="Helvetica" pitchFamily="34" charset="-122"/>
                 <a:cs typeface="Helvetica" pitchFamily="34" charset="-120"/>
               </a:rPr>
-              <a:t>PARTNER WITH TECHNOLOGY EXPERT LABS - BUILD IBM STORAGE PROTECT FOR POWERVS</a:t>
+              <a:t>PARTNER WITH TECHNOLOGY EXPERT LABS</a:t>
             </a:r>
             <a:endParaRPr lang="en-US" dirty="0"/>
           </a:p>
@@ -33525,7 +33525,7 @@
       </p:sp>
       <p:pic>
         <p:nvPicPr>
-          <p:cNvPr id="108" name="Object 107" descr="public/generated/icons/f0ea1510-e632-11ee-acb6-4d13e7035de5.png">    </p:cNvPr>
+          <p:cNvPr id="108" name="Object 107" descr="public/generated/icons/bb6229f0-e632-11ee-ae26-5d6d9ba99eec.png">    </p:cNvPr>
           <p:cNvPicPr>
             <a:picLocks noChangeAspect="1"/>
           </p:cNvPicPr>
@@ -33581,7 +33581,7 @@
                 <a:ea typeface="Helvetica" pitchFamily="34" charset="-122"/>
                 <a:cs typeface="Helvetica" pitchFamily="34" charset="-120"/>
               </a:rPr>
-              <a:t>PARTNER WITH TECHNOLOGY EXPERT LABS - BUILD SAP HANA STARTER EDITION</a:t>
+              <a:t>PARTNER WITH TECHNOLOGY EXPERT LABS - BUILD IBM STORAGE PROTECT FOR POWERVS</a:t>
             </a:r>
             <a:endParaRPr lang="en-US" dirty="0"/>
           </a:p>
@@ -33647,7 +33647,7 @@
       </p:sp>
       <p:pic>
         <p:nvPicPr>
-          <p:cNvPr id="3" name="Object 2" descr="public/generated/icons/339a87f0-e633-11ee-acb6-4d13e7035de5.png">    </p:cNvPr>
+          <p:cNvPr id="3" name="Object 2" descr="public/generated/icons/f0ea1510-e632-11ee-acb6-4d13e7035de5.png">    </p:cNvPr>
           <p:cNvPicPr>
             <a:picLocks noChangeAspect="1"/>
           </p:cNvPicPr>
@@ -33703,7 +33703,7 @@
                 <a:ea typeface="Helvetica" pitchFamily="34" charset="-122"/>
                 <a:cs typeface="Helvetica" pitchFamily="34" charset="-120"/>
               </a:rPr>
-              <a:t>PARTNER WITH TECHNOLOGY EXPERT LABS - MIGRATE WORKLOADS TO IBM POWER VIRTUAL SERVER</a:t>
+              <a:t>PARTNER WITH TECHNOLOGY EXPERT LABS - BUILD SAP HANA STARTER EDITION</a:t>
             </a:r>
             <a:endParaRPr lang="en-US" dirty="0"/>
           </a:p>
@@ -33736,7 +33736,7 @@
       </p:sp>
       <p:pic>
         <p:nvPicPr>
-          <p:cNvPr id="6" name="Object 5" descr="public/generated/icons/is.placement-group.png">    </p:cNvPr>
+          <p:cNvPr id="6" name="Object 5" descr="public/generated/icons/339a87f0-e633-11ee-acb6-4d13e7035de5.png">    </p:cNvPr>
           <p:cNvPicPr>
             <a:picLocks noChangeAspect="1"/>
           </p:cNvPicPr>
@@ -33792,7 +33792,7 @@
                 <a:ea typeface="Helvetica" pitchFamily="34" charset="-122"/>
                 <a:cs typeface="Helvetica" pitchFamily="34" charset="-120"/>
               </a:rPr>
-              <a:t>PLACEMENT GROUPS FOR VPC</a:t>
+              <a:t>PARTNER WITH TECHNOLOGY EXPERT LABS - MIGRATE WORKLOADS TO IBM POWER VIRTUAL SERVER</a:t>
             </a:r>
             <a:endParaRPr lang="en-US" dirty="0"/>
           </a:p>
@@ -33825,7 +33825,7 @@
       </p:sp>
       <p:pic>
         <p:nvPicPr>
-          <p:cNvPr id="9" name="Object 8" descr="public/generated/icons/41690130-a4e8-11ea-94c3-d72a57643c7d.png">    </p:cNvPr>
+          <p:cNvPr id="9" name="Object 8" descr="public/generated/icons/is.placement-group.png">    </p:cNvPr>
           <p:cNvPicPr>
             <a:picLocks noChangeAspect="1"/>
           </p:cNvPicPr>
@@ -33881,7 +33881,7 @@
                 <a:ea typeface="Helvetica" pitchFamily="34" charset="-122"/>
                 <a:cs typeface="Helvetica" pitchFamily="34" charset="-120"/>
               </a:rPr>
-              <a:t>PLANNING ANALYTICS</a:t>
+              <a:t>PLACEMENT GROUPS FOR VPC</a:t>
             </a:r>
             <a:endParaRPr lang="en-US" dirty="0"/>
           </a:p>
@@ -33914,7 +33914,7 @@
       </p:sp>
       <p:pic>
         <p:nvPicPr>
-          <p:cNvPr id="12" name="Object 11" descr="public/generated/icons/d666f360-66d1-11e9-85ef-a19427301a8c.png">    </p:cNvPr>
+          <p:cNvPr id="12" name="Object 11" descr="public/generated/icons/41690130-a4e8-11ea-94c3-d72a57643c7d.png">    </p:cNvPr>
           <p:cNvPicPr>
             <a:picLocks noChangeAspect="1"/>
           </p:cNvPicPr>
@@ -33970,7 +33970,7 @@
                 <a:ea typeface="Helvetica" pitchFamily="34" charset="-122"/>
                 <a:cs typeface="Helvetica" pitchFamily="34" charset="-120"/>
               </a:rPr>
-              <a:t>PORTWORX ENTERPRISE</a:t>
+              <a:t>PLANNING ANALYTICS</a:t>
             </a:r>
             <a:endParaRPr lang="en-US" dirty="0"/>
           </a:p>
@@ -34003,7 +34003,7 @@
       </p:sp>
       <p:pic>
         <p:nvPicPr>
-          <p:cNvPr id="15" name="Object 14" descr="public/generated/icons/7b2cdb0e-ad91-4fd7-97c0-5398874ec27b.png">    </p:cNvPr>
+          <p:cNvPr id="15" name="Object 14" descr="public/generated/icons/d666f360-66d1-11e9-85ef-a19427301a8c.png">    </p:cNvPr>
           <p:cNvPicPr>
             <a:picLocks noChangeAspect="1"/>
           </p:cNvPicPr>
@@ -34059,7 +34059,7 @@
                 <a:ea typeface="Helvetica" pitchFamily="34" charset="-122"/>
                 <a:cs typeface="Helvetica" pitchFamily="34" charset="-120"/>
               </a:rPr>
-              <a:t>POWER I MIGRATE 23 SERVICES</a:t>
+              <a:t>PORTWORX ENTERPRISE</a:t>
             </a:r>
             <a:endParaRPr lang="en-US" dirty="0"/>
           </a:p>
@@ -34092,7 +34092,7 @@
       </p:sp>
       <p:pic>
         <p:nvPicPr>
-          <p:cNvPr id="18" name="Object 17" descr="public/generated/icons/9828699d-dda7-4022-839b-c8e1e8b7d9d8.png">    </p:cNvPr>
+          <p:cNvPr id="18" name="Object 17" descr="public/generated/icons/7b2cdb0e-ad91-4fd7-97c0-5398874ec27b.png">    </p:cNvPr>
           <p:cNvPicPr>
             <a:picLocks noChangeAspect="1"/>
           </p:cNvPicPr>
@@ -34148,7 +34148,7 @@
                 <a:ea typeface="Helvetica" pitchFamily="34" charset="-122"/>
                 <a:cs typeface="Helvetica" pitchFamily="34" charset="-120"/>
               </a:rPr>
-              <a:t>POWER I MIGRATE WHILE ACTIVE SERVICES</a:t>
+              <a:t>POWER I MIGRATE 23 SERVICES</a:t>
             </a:r>
             <a:endParaRPr lang="en-US" dirty="0"/>
           </a:p>
@@ -34181,7 +34181,7 @@
       </p:sp>
       <p:pic>
         <p:nvPicPr>
-          <p:cNvPr id="21" name="Object 20" descr="public/generated/icons/power-iaas.workspace.png">    </p:cNvPr>
+          <p:cNvPr id="21" name="Object 20" descr="public/generated/icons/9828699d-dda7-4022-839b-c8e1e8b7d9d8.png">    </p:cNvPr>
           <p:cNvPicPr>
             <a:picLocks noChangeAspect="1"/>
           </p:cNvPicPr>
@@ -34237,7 +34237,7 @@
                 <a:ea typeface="Helvetica" pitchFamily="34" charset="-122"/>
                 <a:cs typeface="Helvetica" pitchFamily="34" charset="-120"/>
               </a:rPr>
-              <a:t>POWER VIRTUAL SERVER</a:t>
+              <a:t>POWER I MIGRATE WHILE ACTIVE SERVICES</a:t>
             </a:r>
             <a:endParaRPr lang="en-US" dirty="0"/>
           </a:p>
@@ -34270,7 +34270,7 @@
       </p:sp>
       <p:pic>
         <p:nvPicPr>
-          <p:cNvPr id="24" name="Object 23" descr="public/generated/icons/power-iaas.dedicated-host.png">    </p:cNvPr>
+          <p:cNvPr id="24" name="Object 23" descr="public/generated/icons/power-iaas.workspace.png">    </p:cNvPr>
           <p:cNvPicPr>
             <a:picLocks noChangeAspect="1"/>
           </p:cNvPicPr>
@@ -34326,7 +34326,7 @@
                 <a:ea typeface="Helvetica" pitchFamily="34" charset="-122"/>
                 <a:cs typeface="Helvetica" pitchFamily="34" charset="-120"/>
               </a:rPr>
-              <a:t>POWER VIRTUAL SERVER DEDICATED HOST</a:t>
+              <a:t>POWER VIRTUAL SERVER</a:t>
             </a:r>
             <a:endParaRPr lang="en-US" dirty="0"/>
           </a:p>
@@ -34359,7 +34359,7 @@
       </p:sp>
       <p:pic>
         <p:nvPicPr>
-          <p:cNvPr id="27" name="Object 26" descr="public/generated/icons/208072a0-7978-11ef-b369-0733120a414f.png">    </p:cNvPr>
+          <p:cNvPr id="27" name="Object 26" descr="public/generated/icons/power-iaas.dedicated-host.png">    </p:cNvPr>
           <p:cNvPicPr>
             <a:picLocks noChangeAspect="1"/>
           </p:cNvPicPr>
@@ -34415,7 +34415,7 @@
                 <a:ea typeface="Helvetica" pitchFamily="34" charset="-122"/>
                 <a:cs typeface="Helvetica" pitchFamily="34" charset="-120"/>
               </a:rPr>
-              <a:t>POWER VIRTUAL SERVER DR AUTOMATION</a:t>
+              <a:t>POWER VIRTUAL SERVER DEDICATED HOST</a:t>
             </a:r>
             <a:endParaRPr lang="en-US" dirty="0"/>
           </a:p>
@@ -34448,7 +34448,7 @@
       </p:sp>
       <p:pic>
         <p:nvPicPr>
-          <p:cNvPr id="30" name="Object 29" descr="public/generated/icons/power-iaas.image.png">    </p:cNvPr>
+          <p:cNvPr id="30" name="Object 29" descr="public/generated/icons/208072a0-7978-11ef-b369-0733120a414f.png">    </p:cNvPr>
           <p:cNvPicPr>
             <a:picLocks noChangeAspect="1"/>
           </p:cNvPicPr>
@@ -34504,7 +34504,7 @@
                 <a:ea typeface="Helvetica" pitchFamily="34" charset="-122"/>
                 <a:cs typeface="Helvetica" pitchFamily="34" charset="-120"/>
               </a:rPr>
-              <a:t>POWER VIRTUAL SERVER IMAGE</a:t>
+              <a:t>POWER VIRTUAL SERVER DR AUTOMATION</a:t>
             </a:r>
             <a:endParaRPr lang="en-US" dirty="0"/>
           </a:p>
@@ -34537,7 +34537,7 @@
       </p:sp>
       <p:pic>
         <p:nvPicPr>
-          <p:cNvPr id="33" name="Object 32" descr="public/generated/icons/power-iaas.network.png">    </p:cNvPr>
+          <p:cNvPr id="33" name="Object 32" descr="public/generated/icons/power-iaas.image.png">    </p:cNvPr>
           <p:cNvPicPr>
             <a:picLocks noChangeAspect="1"/>
           </p:cNvPicPr>
@@ -34593,7 +34593,7 @@
                 <a:ea typeface="Helvetica" pitchFamily="34" charset="-122"/>
                 <a:cs typeface="Helvetica" pitchFamily="34" charset="-120"/>
               </a:rPr>
-              <a:t>POWER VIRTUAL SERVER NETWORK</a:t>
+              <a:t>POWER VIRTUAL SERVER IMAGE</a:t>
             </a:r>
             <a:endParaRPr lang="en-US" dirty="0"/>
           </a:p>
@@ -34626,7 +34626,7 @@
       </p:sp>
       <p:pic>
         <p:nvPicPr>
-          <p:cNvPr id="36" name="Object 35" descr="public/generated/icons/power-iaas.network-address-group.png">    </p:cNvPr>
+          <p:cNvPr id="36" name="Object 35" descr="public/generated/icons/power-iaas.network.png">    </p:cNvPr>
           <p:cNvPicPr>
             <a:picLocks noChangeAspect="1"/>
           </p:cNvPicPr>
@@ -34682,7 +34682,7 @@
                 <a:ea typeface="Helvetica" pitchFamily="34" charset="-122"/>
                 <a:cs typeface="Helvetica" pitchFamily="34" charset="-120"/>
               </a:rPr>
-              <a:t>POWER VIRTUAL SERVER NETWORK ADDRESS GROUP</a:t>
+              <a:t>POWER VIRTUAL SERVER NETWORK</a:t>
             </a:r>
             <a:endParaRPr lang="en-US" dirty="0"/>
           </a:p>
@@ -34715,7 +34715,7 @@
       </p:sp>
       <p:pic>
         <p:nvPicPr>
-          <p:cNvPr id="39" name="Object 38" descr="public/generated/icons/power-iaas.network-interface.png">    </p:cNvPr>
+          <p:cNvPr id="39" name="Object 38" descr="public/generated/icons/power-iaas.network-address-group.png">    </p:cNvPr>
           <p:cNvPicPr>
             <a:picLocks noChangeAspect="1"/>
           </p:cNvPicPr>
@@ -34771,7 +34771,7 @@
                 <a:ea typeface="Helvetica" pitchFamily="34" charset="-122"/>
                 <a:cs typeface="Helvetica" pitchFamily="34" charset="-120"/>
               </a:rPr>
-              <a:t>POWER VIRTUAL SERVER NETWORK INTERFACE</a:t>
+              <a:t>POWER VIRTUAL SERVER NETWORK ADDRESS GROUP</a:t>
             </a:r>
             <a:endParaRPr lang="en-US" dirty="0"/>
           </a:p>
@@ -34804,7 +34804,7 @@
       </p:sp>
       <p:pic>
         <p:nvPicPr>
-          <p:cNvPr id="42" name="Object 41" descr="public/generated/icons/power-iaas.network-security-group.png">    </p:cNvPr>
+          <p:cNvPr id="42" name="Object 41" descr="public/generated/icons/power-iaas.network-interface.png">    </p:cNvPr>
           <p:cNvPicPr>
             <a:picLocks noChangeAspect="1"/>
           </p:cNvPicPr>
@@ -34860,7 +34860,7 @@
                 <a:ea typeface="Helvetica" pitchFamily="34" charset="-122"/>
                 <a:cs typeface="Helvetica" pitchFamily="34" charset="-120"/>
               </a:rPr>
-              <a:t>POWER VIRTUAL SERVER NETWORK SECURITY GROUP</a:t>
+              <a:t>POWER VIRTUAL SERVER NETWORK INTERFACE</a:t>
             </a:r>
             <a:endParaRPr lang="en-US" dirty="0"/>
           </a:p>
@@ -34893,7 +34893,7 @@
       </p:sp>
       <p:pic>
         <p:nvPicPr>
-          <p:cNvPr id="45" name="Object 44" descr="public/generated/icons/power-iaas.shared-processor-pool.png">    </p:cNvPr>
+          <p:cNvPr id="45" name="Object 44" descr="public/generated/icons/power-iaas.network-security-group.png">    </p:cNvPr>
           <p:cNvPicPr>
             <a:picLocks noChangeAspect="1"/>
           </p:cNvPicPr>
@@ -34949,7 +34949,7 @@
                 <a:ea typeface="Helvetica" pitchFamily="34" charset="-122"/>
                 <a:cs typeface="Helvetica" pitchFamily="34" charset="-120"/>
               </a:rPr>
-              <a:t>POWER VIRTUAL SERVER SHARED PROCESSOR POOL</a:t>
+              <a:t>POWER VIRTUAL SERVER NETWORK SECURITY GROUP</a:t>
             </a:r>
             <a:endParaRPr lang="en-US" dirty="0"/>
           </a:p>
@@ -34982,7 +34982,7 @@
       </p:sp>
       <p:pic>
         <p:nvPicPr>
-          <p:cNvPr id="48" name="Object 47" descr="public/generated/icons/power-iaas.snapshot.png">    </p:cNvPr>
+          <p:cNvPr id="48" name="Object 47" descr="public/generated/icons/power-iaas.shared-processor-pool.png">    </p:cNvPr>
           <p:cNvPicPr>
             <a:picLocks noChangeAspect="1"/>
           </p:cNvPicPr>
@@ -35038,7 +35038,7 @@
                 <a:ea typeface="Helvetica" pitchFamily="34" charset="-122"/>
                 <a:cs typeface="Helvetica" pitchFamily="34" charset="-120"/>
               </a:rPr>
-              <a:t>POWER VIRTUAL SERVER SNAPSHOT</a:t>
+              <a:t>POWER VIRTUAL SERVER SHARED PROCESSOR POOL</a:t>
             </a:r>
             <a:endParaRPr lang="en-US" dirty="0"/>
           </a:p>
@@ -35071,7 +35071,7 @@
       </p:sp>
       <p:pic>
         <p:nvPicPr>
-          <p:cNvPr id="51" name="Object 50" descr="public/generated/icons/power-iaas.pvm-instance.png">    </p:cNvPr>
+          <p:cNvPr id="51" name="Object 50" descr="public/generated/icons/power-iaas.snapshot.png">    </p:cNvPr>
           <p:cNvPicPr>
             <a:picLocks noChangeAspect="1"/>
           </p:cNvPicPr>
@@ -35127,7 +35127,7 @@
                 <a:ea typeface="Helvetica" pitchFamily="34" charset="-122"/>
                 <a:cs typeface="Helvetica" pitchFamily="34" charset="-120"/>
               </a:rPr>
-              <a:t>POWER VIRTUAL SERVER VIRTUAL MACHINE</a:t>
+              <a:t>POWER VIRTUAL SERVER SNAPSHOT</a:t>
             </a:r>
             <a:endParaRPr lang="en-US" dirty="0"/>
           </a:p>
@@ -35160,7 +35160,7 @@
       </p:sp>
       <p:pic>
         <p:nvPicPr>
-          <p:cNvPr id="54" name="Object 53" descr="public/generated/icons/power-iaas.volume.png">    </p:cNvPr>
+          <p:cNvPr id="54" name="Object 53" descr="public/generated/icons/power-iaas.pvm-instance.png">    </p:cNvPr>
           <p:cNvPicPr>
             <a:picLocks noChangeAspect="1"/>
           </p:cNvPicPr>
@@ -35216,7 +35216,7 @@
                 <a:ea typeface="Helvetica" pitchFamily="34" charset="-122"/>
                 <a:cs typeface="Helvetica" pitchFamily="34" charset="-120"/>
               </a:rPr>
-              <a:t>POWER VIRTUAL SERVER VOLUME</a:t>
+              <a:t>POWER VIRTUAL SERVER VIRTUAL MACHINE</a:t>
             </a:r>
             <a:endParaRPr lang="en-US" dirty="0"/>
           </a:p>
@@ -35249,7 +35249,7 @@
       </p:sp>
       <p:pic>
         <p:nvPicPr>
-          <p:cNvPr id="57" name="Object 56" descr="public/generated/icons/b260dfd6-9b79-4377-be6d-146a5cb59be8.png">    </p:cNvPr>
+          <p:cNvPr id="57" name="Object 56" descr="public/generated/icons/power-iaas.volume.png">    </p:cNvPr>
           <p:cNvPicPr>
             <a:picLocks noChangeAspect="1"/>
           </p:cNvPicPr>
@@ -35305,7 +35305,7 @@
                 <a:ea typeface="Helvetica" pitchFamily="34" charset="-122"/>
                 <a:cs typeface="Helvetica" pitchFamily="34" charset="-120"/>
               </a:rPr>
-              <a:t>POWERVS MIGRATION AS A SERVICE</a:t>
+              <a:t>POWER VIRTUAL SERVER VOLUME</a:t>
             </a:r>
             <a:endParaRPr lang="en-US" dirty="0"/>
           </a:p>
@@ -35338,7 +35338,7 @@
       </p:sp>
       <p:pic>
         <p:nvPicPr>
-          <p:cNvPr id="60" name="Object 59" descr="public/generated/icons/is.private-path-service-gateway.png">    </p:cNvPr>
+          <p:cNvPr id="60" name="Object 59" descr="public/generated/icons/b260dfd6-9b79-4377-be6d-146a5cb59be8.png">    </p:cNvPr>
           <p:cNvPicPr>
             <a:picLocks noChangeAspect="1"/>
           </p:cNvPicPr>
@@ -35394,7 +35394,7 @@
                 <a:ea typeface="Helvetica" pitchFamily="34" charset="-122"/>
                 <a:cs typeface="Helvetica" pitchFamily="34" charset="-120"/>
               </a:rPr>
-              <a:t>PRIVATE PATH SERVICE FOR VPC</a:t>
+              <a:t>POWERVS MIGRATION AS A SERVICE</a:t>
             </a:r>
             <a:endParaRPr lang="en-US" dirty="0"/>
           </a:p>
@@ -35427,7 +35427,7 @@
       </p:sp>
       <p:pic>
         <p:nvPicPr>
-          <p:cNvPr id="63" name="Object 62" descr="public/generated/icons/91a901ac-fb7d-9b6e-eb25-14e75a20c4c2.png">    </p:cNvPr>
+          <p:cNvPr id="63" name="Object 62" descr="public/generated/icons/is.private-path-service-gateway.png">    </p:cNvPr>
           <p:cNvPicPr>
             <a:picLocks noChangeAspect="1"/>
           </p:cNvPicPr>
@@ -35483,7 +35483,7 @@
                 <a:ea typeface="Helvetica" pitchFamily="34" charset="-122"/>
                 <a:cs typeface="Helvetica" pitchFamily="34" charset="-120"/>
               </a:rPr>
-              <a:t>PROFESSIONAL SERVICES FOR GOVERNMENT(ONLY AVAILABLE IN US)</a:t>
+              <a:t>PRIVATE PATH SERVICE FOR VPC</a:t>
             </a:r>
             <a:endParaRPr lang="en-US" dirty="0"/>
           </a:p>
@@ -35516,7 +35516,7 @@
       </p:sp>
       <p:pic>
         <p:nvPicPr>
-          <p:cNvPr id="66" name="Object 65" descr="public/generated/icons/0f32e980-4197-4ad7-a484-e98f7c7424bf.png">    </p:cNvPr>
+          <p:cNvPr id="66" name="Object 65" descr="public/generated/icons/91a901ac-fb7d-9b6e-eb25-14e75a20c4c2.png">    </p:cNvPr>
           <p:cNvPicPr>
             <a:picLocks noChangeAspect="1"/>
           </p:cNvPicPr>
@@ -35572,7 +35572,7 @@
                 <a:ea typeface="Helvetica" pitchFamily="34" charset="-122"/>
                 <a:cs typeface="Helvetica" pitchFamily="34" charset="-120"/>
               </a:rPr>
-              <a:t>PROFI POWERVS SERVICE</a:t>
+              <a:t>PROFESSIONAL SERVICES FOR GOVERNMENT(ONLY AVAILABLE IN US)</a:t>
             </a:r>
             <a:endParaRPr lang="en-US" dirty="0"/>
           </a:p>
@@ -35605,7 +35605,7 @@
       </p:sp>
       <p:pic>
         <p:nvPicPr>
-          <p:cNvPr id="69" name="Object 68" descr="public/generated/icons/7c03a06c-f1bb-46f8-84d8-9378432b2804.png">    </p:cNvPr>
+          <p:cNvPr id="69" name="Object 68" descr="public/generated/icons/0f32e980-4197-4ad7-a484-e98f7c7424bf.png">    </p:cNvPr>
           <p:cNvPicPr>
             <a:picLocks noChangeAspect="1"/>
           </p:cNvPicPr>
@@ -35661,7 +35661,7 @@
                 <a:ea typeface="Helvetica" pitchFamily="34" charset="-122"/>
                 <a:cs typeface="Helvetica" pitchFamily="34" charset="-120"/>
               </a:rPr>
-              <a:t>PROTECTIO DRAAS MANAGED SERVICE</a:t>
+              <a:t>PROFI POWERVS SERVICE</a:t>
             </a:r>
             <a:endParaRPr lang="en-US" dirty="0"/>
           </a:p>
@@ -35694,7 +35694,7 @@
       </p:sp>
       <p:pic>
         <p:nvPicPr>
-          <p:cNvPr id="72" name="Object 71" descr="public/generated/icons/is.public-gateway.png">    </p:cNvPr>
+          <p:cNvPr id="72" name="Object 71" descr="public/generated/icons/7c03a06c-f1bb-46f8-84d8-9378432b2804.png">    </p:cNvPr>
           <p:cNvPicPr>
             <a:picLocks noChangeAspect="1"/>
           </p:cNvPicPr>
@@ -35750,7 +35750,7 @@
                 <a:ea typeface="Helvetica" pitchFamily="34" charset="-122"/>
                 <a:cs typeface="Helvetica" pitchFamily="34" charset="-120"/>
               </a:rPr>
-              <a:t>PUBLIC GATEWAY</a:t>
+              <a:t>PROTECTIO DRAAS MANAGED SERVICE</a:t>
             </a:r>
             <a:endParaRPr lang="en-US" dirty="0"/>
           </a:p>
@@ -35783,7 +35783,7 @@
       </p:sp>
       <p:pic>
         <p:nvPicPr>
-          <p:cNvPr id="75" name="Object 74" descr="public/generated/icons/aa11a8b2-381e-4c1c-a232-2148f65c005f.png">    </p:cNvPr>
+          <p:cNvPr id="75" name="Object 74" descr="public/generated/icons/is.public-gateway.png">    </p:cNvPr>
           <p:cNvPicPr>
             <a:picLocks noChangeAspect="1"/>
           </p:cNvPicPr>
@@ -35839,7 +35839,7 @@
                 <a:ea typeface="Helvetica" pitchFamily="34" charset="-122"/>
                 <a:cs typeface="Helvetica" pitchFamily="34" charset="-120"/>
               </a:rPr>
-              <a:t>PVS ONE MANAGED SERVICE</a:t>
+              <a:t>PUBLIC GATEWAY</a:t>
             </a:r>
             <a:endParaRPr lang="en-US" dirty="0"/>
           </a:p>
@@ -35872,7 +35872,7 @@
       </p:sp>
       <p:pic>
         <p:nvPicPr>
-          <p:cNvPr id="78" name="Object 77" descr="public/generated/icons/3eb2d5a0-24ff-11eb-9437-631d7272fff5.png">    </p:cNvPr>
+          <p:cNvPr id="78" name="Object 77" descr="public/generated/icons/aa11a8b2-381e-4c1c-a232-2148f65c005f.png">    </p:cNvPr>
           <p:cNvPicPr>
             <a:picLocks noChangeAspect="1"/>
           </p:cNvPicPr>
@@ -35928,7 +35928,7 @@
                 <a:ea typeface="Helvetica" pitchFamily="34" charset="-122"/>
                 <a:cs typeface="Helvetica" pitchFamily="34" charset="-120"/>
               </a:rPr>
-              <a:t>PX-BACKUP FOR KUBERNETES</a:t>
+              <a:t>PVS ONE MANAGED SERVICE</a:t>
             </a:r>
             <a:endParaRPr lang="en-US" dirty="0"/>
           </a:p>
@@ -35961,7 +35961,7 @@
       </p:sp>
       <p:pic>
         <p:nvPicPr>
-          <p:cNvPr id="81" name="Object 80" descr="public/generated/icons/b6049020-80f4-11eb-a0f7-e35ec9b4054f.png">    </p:cNvPr>
+          <p:cNvPr id="81" name="Object 80" descr="public/generated/icons/3eb2d5a0-24ff-11eb-9437-631d7272fff5.png">    </p:cNvPr>
           <p:cNvPicPr>
             <a:picLocks noChangeAspect="1"/>
           </p:cNvPicPr>
@@ -36017,7 +36017,7 @@
                 <a:ea typeface="Helvetica" pitchFamily="34" charset="-122"/>
                 <a:cs typeface="Helvetica" pitchFamily="34" charset="-120"/>
               </a:rPr>
-              <a:t>QISKIT RUNTIME</a:t>
+              <a:t>PX-BACKUP FOR KUBERNETES</a:t>
             </a:r>
             <a:endParaRPr lang="en-US" dirty="0"/>
           </a:p>
@@ -36050,7 +36050,7 @@
       </p:sp>
       <p:pic>
         <p:nvPicPr>
-          <p:cNvPr id="84" name="Object 83" descr="public/generated/icons/cf5f8ac0-98f7-11e9-a40c-5b3c4bf3cc6d.png">    </p:cNvPr>
+          <p:cNvPr id="84" name="Object 83" descr="public/generated/icons/b6049020-80f4-11eb-a0f7-e35ec9b4054f.png">    </p:cNvPr>
           <p:cNvPicPr>
             <a:picLocks noChangeAspect="1"/>
           </p:cNvPicPr>
@@ -36106,7 +36106,7 @@
                 <a:ea typeface="Helvetica" pitchFamily="34" charset="-122"/>
                 <a:cs typeface="Helvetica" pitchFamily="34" charset="-120"/>
               </a:rPr>
-              <a:t>RAXAK PROTECT</a:t>
+              <a:t>QISKIT RUNTIME</a:t>
             </a:r>
             <a:endParaRPr lang="en-US" dirty="0"/>
           </a:p>
@@ -36139,7 +36139,7 @@
       </p:sp>
       <p:pic>
         <p:nvPicPr>
-          <p:cNvPr id="87" name="Object 86" descr="public/generated/icons/instructlab.png">    </p:cNvPr>
+          <p:cNvPr id="87" name="Object 86" descr="public/generated/icons/cf5f8ac0-98f7-11e9-a40c-5b3c4bf3cc6d.png">    </p:cNvPr>
           <p:cNvPicPr>
             <a:picLocks noChangeAspect="1"/>
           </p:cNvPicPr>
@@ -36195,7 +36195,7 @@
                 <a:ea typeface="Helvetica" pitchFamily="34" charset="-122"/>
                 <a:cs typeface="Helvetica" pitchFamily="34" charset="-120"/>
               </a:rPr>
-              <a:t>RED HAT AI INSTRUCTLAB</a:t>
+              <a:t>RAXAK PROTECT</a:t>
             </a:r>
             <a:endParaRPr lang="en-US" dirty="0"/>
           </a:p>
@@ -36228,7 +36228,7 @@
       </p:sp>
       <p:pic>
         <p:nvPicPr>
-          <p:cNvPr id="90" name="Object 89" descr="public/generated/icons/openshift.png">    </p:cNvPr>
+          <p:cNvPr id="90" name="Object 89" descr="public/generated/icons/instructlab.png">    </p:cNvPr>
           <p:cNvPicPr>
             <a:picLocks noChangeAspect="1"/>
           </p:cNvPicPr>
@@ -36284,7 +36284,7 @@
                 <a:ea typeface="Helvetica" pitchFamily="34" charset="-122"/>
                 <a:cs typeface="Helvetica" pitchFamily="34" charset="-120"/>
               </a:rPr>
-              <a:t>RED HAT OPENSHIFT ON IBM CLOUD</a:t>
+              <a:t>RED HAT AI INSTRUCTLAB</a:t>
             </a:r>
             <a:endParaRPr lang="en-US" dirty="0"/>
           </a:p>
@@ -36317,7 +36317,7 @@
       </p:sp>
       <p:pic>
         <p:nvPicPr>
-          <p:cNvPr id="93" name="Object 92" descr="public/generated/icons/bd517bf0-88ba-11ea-a52e-91aeb42a4019.png">    </p:cNvPr>
+          <p:cNvPr id="93" name="Object 92" descr="public/generated/icons/openshift.png">    </p:cNvPr>
           <p:cNvPicPr>
             <a:picLocks noChangeAspect="1"/>
           </p:cNvPicPr>
@@ -36373,7 +36373,7 @@
                 <a:ea typeface="Helvetica" pitchFamily="34" charset="-122"/>
                 <a:cs typeface="Helvetica" pitchFamily="34" charset="-120"/>
               </a:rPr>
-              <a:t>SATELLITE</a:t>
+              <a:t>RED HAT OPENSHIFT ON IBM CLOUD</a:t>
             </a:r>
             <a:endParaRPr lang="en-US" dirty="0"/>
           </a:p>
@@ -36406,7 +36406,7 @@
       </p:sp>
       <p:pic>
         <p:nvPicPr>
-          <p:cNvPr id="96" name="Object 95" descr="public/generated/icons/schematics.png">    </p:cNvPr>
+          <p:cNvPr id="96" name="Object 95" descr="public/generated/icons/bd517bf0-88ba-11ea-a52e-91aeb42a4019.png">    </p:cNvPr>
           <p:cNvPicPr>
             <a:picLocks noChangeAspect="1"/>
           </p:cNvPicPr>
@@ -36462,7 +36462,7 @@
                 <a:ea typeface="Helvetica" pitchFamily="34" charset="-122"/>
                 <a:cs typeface="Helvetica" pitchFamily="34" charset="-120"/>
               </a:rPr>
-              <a:t>SCHEMATICS</a:t>
+              <a:t>SATELLITE</a:t>
             </a:r>
             <a:endParaRPr lang="en-US" dirty="0"/>
           </a:p>
@@ -36495,7 +36495,7 @@
       </p:sp>
       <p:pic>
         <p:nvPicPr>
-          <p:cNvPr id="99" name="Object 98" descr="public/generated/icons/14.png">    </p:cNvPr>
+          <p:cNvPr id="99" name="Object 98" descr="public/generated/icons/schematics.png">    </p:cNvPr>
           <p:cNvPicPr>
             <a:picLocks noChangeAspect="1"/>
           </p:cNvPicPr>
@@ -36551,7 +36551,7 @@
                 <a:ea typeface="Helvetica" pitchFamily="34" charset="-122"/>
                 <a:cs typeface="Helvetica" pitchFamily="34" charset="-120"/>
               </a:rPr>
-              <a:t>SECONDARY SUBNETS</a:t>
+              <a:t>SCHEMATICS</a:t>
             </a:r>
             <a:endParaRPr lang="en-US" dirty="0"/>
           </a:p>
@@ -36584,7 +36584,7 @@
       </p:sp>
       <p:pic>
         <p:nvPicPr>
-          <p:cNvPr id="102" name="Object 101" descr="public/generated/icons/ebc0cdb0-af2a-11ea-98c7-29e5db822649.png">    </p:cNvPr>
+          <p:cNvPr id="102" name="Object 101" descr="public/generated/icons/14.png">    </p:cNvPr>
           <p:cNvPicPr>
             <a:picLocks noChangeAspect="1"/>
           </p:cNvPicPr>
@@ -36640,7 +36640,7 @@
                 <a:ea typeface="Helvetica" pitchFamily="34" charset="-122"/>
                 <a:cs typeface="Helvetica" pitchFamily="34" charset="-120"/>
               </a:rPr>
-              <a:t>SECRETS MANAGER</a:t>
+              <a:t>SECONDARY SUBNETS</a:t>
             </a:r>
             <a:endParaRPr lang="en-US" dirty="0"/>
           </a:p>
@@ -36673,7 +36673,7 @@
       </p:sp>
       <p:pic>
         <p:nvPicPr>
-          <p:cNvPr id="105" name="Object 104" descr="public/generated/icons/IBM_SecureGateway.png">    </p:cNvPr>
+          <p:cNvPr id="105" name="Object 104" descr="public/generated/icons/ebc0cdb0-af2a-11ea-98c7-29e5db822649.png">    </p:cNvPr>
           <p:cNvPicPr>
             <a:picLocks noChangeAspect="1"/>
           </p:cNvPicPr>
@@ -36729,7 +36729,7 @@
                 <a:ea typeface="Helvetica" pitchFamily="34" charset="-122"/>
                 <a:cs typeface="Helvetica" pitchFamily="34" charset="-120"/>
               </a:rPr>
-              <a:t>SECURE GATEWAY</a:t>
+              <a:t>SECRETS MANAGER</a:t>
             </a:r>
             <a:endParaRPr lang="en-US" dirty="0"/>
           </a:p>
@@ -36762,7 +36762,7 @@
       </p:sp>
       <p:pic>
         <p:nvPicPr>
-          <p:cNvPr id="108" name="Object 107" descr="public/generated/icons/compliance.png">    </p:cNvPr>
+          <p:cNvPr id="108" name="Object 107" descr="public/generated/icons/IBM_SecureGateway.png">    </p:cNvPr>
           <p:cNvPicPr>
             <a:picLocks noChangeAspect="1"/>
           </p:cNvPicPr>
@@ -36818,7 +36818,7 @@
                 <a:ea typeface="Helvetica" pitchFamily="34" charset="-122"/>
                 <a:cs typeface="Helvetica" pitchFamily="34" charset="-120"/>
               </a:rPr>
-              <a:t>SECURITY AND COMPLIANCE CENTER</a:t>
+              <a:t>SECURE GATEWAY</a:t>
             </a:r>
             <a:endParaRPr lang="en-US" dirty="0"/>
           </a:p>
@@ -36884,7 +36884,7 @@
       </p:sp>
       <p:pic>
         <p:nvPicPr>
-          <p:cNvPr id="3" name="Object 2" descr="public/generated/icons/e831e900-82d6-11ec-95c5-c12c5a5d9687.png">    </p:cNvPr>
+          <p:cNvPr id="3" name="Object 2" descr="public/generated/icons/compliance.png">    </p:cNvPr>
           <p:cNvPicPr>
             <a:picLocks noChangeAspect="1"/>
           </p:cNvPicPr>
@@ -36940,7 +36940,7 @@
                 <a:ea typeface="Helvetica" pitchFamily="34" charset="-122"/>
                 <a:cs typeface="Helvetica" pitchFamily="34" charset="-120"/>
               </a:rPr>
-              <a:t>SECURITY AND COMPLIANCE CENTER WORKLOAD PROTECTION</a:t>
+              <a:t>SECURITY AND COMPLIANCE CENTER</a:t>
             </a:r>
             <a:endParaRPr lang="en-US" dirty="0"/>
           </a:p>
@@ -36973,7 +36973,7 @@
       </p:sp>
       <p:pic>
         <p:nvPicPr>
-          <p:cNvPr id="6" name="Object 5" descr="public/generated/icons/is.security-group.png">    </p:cNvPr>
+          <p:cNvPr id="6" name="Object 5" descr="public/generated/icons/e831e900-82d6-11ec-95c5-c12c5a5d9687.png">    </p:cNvPr>
           <p:cNvPicPr>
             <a:picLocks noChangeAspect="1"/>
           </p:cNvPicPr>
@@ -37029,7 +37029,7 @@
                 <a:ea typeface="Helvetica" pitchFamily="34" charset="-122"/>
                 <a:cs typeface="Helvetica" pitchFamily="34" charset="-120"/>
               </a:rPr>
-              <a:t>SECURITY GROUP FOR VPC</a:t>
+              <a:t>SECURITY AND COMPLIANCE CENTER WORKLOAD PROTECTION</a:t>
             </a:r>
             <a:endParaRPr lang="en-US" dirty="0"/>
           </a:p>
@@ -37062,7 +37062,7 @@
       </p:sp>
       <p:pic>
         <p:nvPicPr>
-          <p:cNvPr id="9" name="Object 8" descr="public/generated/icons/cf329950-0a3e-11e8-922e-f1366c6e1c83-vcstrial_dr.png">    </p:cNvPr>
+          <p:cNvPr id="9" name="Object 8" descr="public/generated/icons/is.security-group.png">    </p:cNvPr>
           <p:cNvPicPr>
             <a:picLocks noChangeAspect="1"/>
           </p:cNvPicPr>
@@ -37118,7 +37118,7 @@
                 <a:ea typeface="Helvetica" pitchFamily="34" charset="-122"/>
                 <a:cs typeface="Helvetica" pitchFamily="34" charset="-120"/>
               </a:rPr>
-              <a:t>SINGLE-NODE TRIAL FOR DATA PROTECTION AND DISASTER RECOVERY</a:t>
+              <a:t>SECURITY GROUP FOR VPC</a:t>
             </a:r>
             <a:endParaRPr lang="en-US" dirty="0"/>
           </a:p>
@@ -37151,7 +37151,7 @@
       </p:sp>
       <p:pic>
         <p:nvPicPr>
-          <p:cNvPr id="12" name="Object 11" descr="public/generated/icons/cf329950-0a3e-11e8-922e-f1366c6e1c83-vcstrial.png">    </p:cNvPr>
+          <p:cNvPr id="12" name="Object 11" descr="public/generated/icons/cf329950-0a3e-11e8-922e-f1366c6e1c83-vcstrial_dr.png">    </p:cNvPr>
           <p:cNvPicPr>
             <a:picLocks noChangeAspect="1"/>
           </p:cNvPicPr>
@@ -37207,7 +37207,7 @@
                 <a:ea typeface="Helvetica" pitchFamily="34" charset="-122"/>
                 <a:cs typeface="Helvetica" pitchFamily="34" charset="-120"/>
               </a:rPr>
-              <a:t>SINGLE-NODE TRIAL FOR MIGRATION AND APP MODERNIZATION</a:t>
+              <a:t>SINGLE-NODE TRIAL FOR DATA PROTECTION AND DISASTER RECOVERY</a:t>
             </a:r>
             <a:endParaRPr lang="en-US" dirty="0"/>
           </a:p>
@@ -37240,7 +37240,7 @@
       </p:sp>
       <p:pic>
         <p:nvPicPr>
-          <p:cNvPr id="15" name="Object 14" descr="public/generated/icons/cf329950-0a3e-11e8-922e-f1366c6e1c83-spplus.png">    </p:cNvPr>
+          <p:cNvPr id="15" name="Object 14" descr="public/generated/icons/cf329950-0a3e-11e8-922e-f1366c6e1c83-vcstrial.png">    </p:cNvPr>
           <p:cNvPicPr>
             <a:picLocks noChangeAspect="1"/>
           </p:cNvPicPr>
@@ -37296,7 +37296,7 @@
                 <a:ea typeface="Helvetica" pitchFamily="34" charset="-122"/>
                 <a:cs typeface="Helvetica" pitchFamily="34" charset="-120"/>
               </a:rPr>
-              <a:t>SPECTRUM PROTECT PLUS</a:t>
+              <a:t>SINGLE-NODE TRIAL FOR MIGRATION AND APP MODERNIZATION</a:t>
             </a:r>
             <a:endParaRPr lang="en-US" dirty="0"/>
           </a:p>
@@ -37329,7 +37329,7 @@
       </p:sp>
       <p:pic>
         <p:nvPicPr>
-          <p:cNvPr id="18" name="Object 17" descr="public/generated/icons/bc35fb8c-bc5b-431b-859e-3861771d5843.png">    </p:cNvPr>
+          <p:cNvPr id="18" name="Object 17" descr="public/generated/icons/cf329950-0a3e-11e8-922e-f1366c6e1c83-spplus.png">    </p:cNvPr>
           <p:cNvPicPr>
             <a:picLocks noChangeAspect="1"/>
           </p:cNvPicPr>
@@ -37385,7 +37385,7 @@
                 <a:ea typeface="Helvetica" pitchFamily="34" charset="-122"/>
                 <a:cs typeface="Helvetica" pitchFamily="34" charset="-120"/>
               </a:rPr>
-              <a:t>SPEECH TO TEXT</a:t>
+              <a:t>SPECTRUM PROTECT PLUS</a:t>
             </a:r>
             <a:endParaRPr lang="en-US" dirty="0"/>
           </a:p>
@@ -37418,7 +37418,7 @@
       </p:sp>
       <p:pic>
         <p:nvPicPr>
-          <p:cNvPr id="21" name="Object 20" descr="public/generated/icons/556153d0-5ad0-11e9-b7f9-41319ef22125.png">    </p:cNvPr>
+          <p:cNvPr id="21" name="Object 20" descr="public/generated/icons/bc35fb8c-bc5b-431b-859e-3861771d5843.png">    </p:cNvPr>
           <p:cNvPicPr>
             <a:picLocks noChangeAspect="1"/>
           </p:cNvPicPr>
@@ -37474,7 +37474,7 @@
                 <a:ea typeface="Helvetica" pitchFamily="34" charset="-122"/>
                 <a:cs typeface="Helvetica" pitchFamily="34" charset="-120"/>
               </a:rPr>
-              <a:t>SSH KEY FOR VPC</a:t>
+              <a:t>SPEECH TO TEXT</a:t>
             </a:r>
             <a:endParaRPr lang="en-US" dirty="0"/>
           </a:p>
@@ -37507,7 +37507,7 @@
       </p:sp>
       <p:pic>
         <p:nvPicPr>
-          <p:cNvPr id="24" name="Object 23" descr="public/generated/icons/19.png">    </p:cNvPr>
+          <p:cNvPr id="24" name="Object 23" descr="public/generated/icons/556153d0-5ad0-11e9-b7f9-41319ef22125.png">    </p:cNvPr>
           <p:cNvPicPr>
             <a:picLocks noChangeAspect="1"/>
           </p:cNvPicPr>
@@ -37563,7 +37563,7 @@
                 <a:ea typeface="Helvetica" pitchFamily="34" charset="-122"/>
                 <a:cs typeface="Helvetica" pitchFamily="34" charset="-120"/>
               </a:rPr>
-              <a:t>SSL CERTIFICATES</a:t>
+              <a:t>SSH KEY FOR VPC</a:t>
             </a:r>
             <a:endParaRPr lang="en-US" dirty="0"/>
           </a:p>
@@ -37596,7 +37596,7 @@
       </p:sp>
       <p:pic>
         <p:nvPicPr>
-          <p:cNvPr id="27" name="Object 26" descr="public/generated/icons/2bea02b0-c0a4-11ee-83aa-3171b0bf2976.png">    </p:cNvPr>
+          <p:cNvPr id="27" name="Object 26" descr="public/generated/icons/19.png">    </p:cNvPr>
           <p:cNvPicPr>
             <a:picLocks noChangeAspect="1"/>
           </p:cNvPicPr>
@@ -37652,7 +37652,7 @@
                 <a:ea typeface="Helvetica" pitchFamily="34" charset="-122"/>
                 <a:cs typeface="Helvetica" pitchFamily="34" charset="-120"/>
               </a:rPr>
-              <a:t>STORAGE CEPH AS A SERVICE</a:t>
+              <a:t>SSL CERTIFICATES</a:t>
             </a:r>
             <a:endParaRPr lang="en-US" dirty="0"/>
           </a:p>
@@ -37685,7 +37685,7 @@
       </p:sp>
       <p:pic>
         <p:nvPicPr>
-          <p:cNvPr id="30" name="Object 29" descr="public/generated/icons/5acdbc42-8965-48f9-8a3c-1c728b6ed2c4.png">    </p:cNvPr>
+          <p:cNvPr id="30" name="Object 29" descr="public/generated/icons/8aa72a57-b069-47e6-bf3f-8d1ced0051ed.png">    </p:cNvPr>
           <p:cNvPicPr>
             <a:picLocks noChangeAspect="1"/>
           </p:cNvPicPr>
@@ -37741,7 +37741,7 @@
                 <a:ea typeface="Helvetica" pitchFamily="34" charset="-122"/>
                 <a:cs typeface="Helvetica" pitchFamily="34" charset="-120"/>
               </a:rPr>
-              <a:t>STREAMING ANALYTICS</a:t>
+              <a:t>STANDARD LIVE PAYMENT HSM SERVICE</a:t>
             </a:r>
             <a:endParaRPr lang="en-US" dirty="0"/>
           </a:p>
@@ -37774,7 +37774,7 @@
       </p:sp>
       <p:pic>
         <p:nvPicPr>
-          <p:cNvPr id="33" name="Object 32" descr="public/generated/icons/is.subnet.png">    </p:cNvPr>
+          <p:cNvPr id="33" name="Object 32" descr="public/generated/icons/2bea02b0-c0a4-11ee-83aa-3171b0bf2976.png">    </p:cNvPr>
           <p:cNvPicPr>
             <a:picLocks noChangeAspect="1"/>
           </p:cNvPicPr>
@@ -37830,7 +37830,7 @@
                 <a:ea typeface="Helvetica" pitchFamily="34" charset="-122"/>
                 <a:cs typeface="Helvetica" pitchFamily="34" charset="-120"/>
               </a:rPr>
-              <a:t>SUBNET</a:t>
+              <a:t>STORAGE CEPH AS A SERVICE</a:t>
             </a:r>
             <a:endParaRPr lang="en-US" dirty="0"/>
           </a:p>
@@ -37863,7 +37863,7 @@
       </p:sp>
       <p:pic>
         <p:nvPicPr>
-          <p:cNvPr id="36" name="Object 35" descr="public/generated/icons/4f2d2c90-caec-4916-b44b-8363479ab12a.png">    </p:cNvPr>
+          <p:cNvPr id="36" name="Object 35" descr="public/generated/icons/5acdbc42-8965-48f9-8a3c-1c728b6ed2c4.png">    </p:cNvPr>
           <p:cNvPicPr>
             <a:picLocks noChangeAspect="1"/>
           </p:cNvPicPr>
@@ -37919,7 +37919,7 @@
                 <a:ea typeface="Helvetica" pitchFamily="34" charset="-122"/>
                 <a:cs typeface="Helvetica" pitchFamily="34" charset="-120"/>
               </a:rPr>
-              <a:t>TECHD PROFESSIONAL SERVICES</a:t>
+              <a:t>STREAMING ANALYTICS</a:t>
             </a:r>
             <a:endParaRPr lang="en-US" dirty="0"/>
           </a:p>
@@ -37952,7 +37952,7 @@
       </p:sp>
       <p:pic>
         <p:nvPicPr>
-          <p:cNvPr id="39" name="Object 38" descr="public/generated/icons/282c1d79-9176-4597-9cff-941a8d6cfd4c.png">    </p:cNvPr>
+          <p:cNvPr id="39" name="Object 38" descr="public/generated/icons/is.subnet.png">    </p:cNvPr>
           <p:cNvPicPr>
             <a:picLocks noChangeAspect="1"/>
           </p:cNvPicPr>
@@ -38008,7 +38008,7 @@
                 <a:ea typeface="Helvetica" pitchFamily="34" charset="-122"/>
                 <a:cs typeface="Helvetica" pitchFamily="34" charset="-120"/>
               </a:rPr>
-              <a:t>TEXT TO SPEECH</a:t>
+              <a:t>SUBNET</a:t>
             </a:r>
             <a:endParaRPr lang="en-US" dirty="0"/>
           </a:p>
@@ -38041,7 +38041,7 @@
       </p:sp>
       <p:pic>
         <p:nvPicPr>
-          <p:cNvPr id="42" name="Object 41" descr="public/generated/icons/e512e5f0-64fb-11e8-9c23-830c05b8b729.png">    </p:cNvPr>
+          <p:cNvPr id="42" name="Object 41" descr="public/generated/icons/4f2d2c90-caec-4916-b44b-8363479ab12a.png">    </p:cNvPr>
           <p:cNvPicPr>
             <a:picLocks noChangeAspect="1"/>
           </p:cNvPicPr>
@@ -38097,7 +38097,7 @@
                 <a:ea typeface="Helvetica" pitchFamily="34" charset="-122"/>
                 <a:cs typeface="Helvetica" pitchFamily="34" charset="-120"/>
               </a:rPr>
-              <a:t>TOOLCHAIN</a:t>
+              <a:t>TECHD PROFESSIONAL SERVICES</a:t>
             </a:r>
             <a:endParaRPr lang="en-US" dirty="0"/>
           </a:p>
@@ -38130,7 +38130,7 @@
       </p:sp>
       <p:pic>
         <p:nvPicPr>
-          <p:cNvPr id="45" name="Object 44" descr="public/generated/icons/a0b5c5b4-cf45-4d10-ba8c-512126cf6e2c.png">    </p:cNvPr>
+          <p:cNvPr id="45" name="Object 44" descr="public/generated/icons/282c1d79-9176-4597-9cff-941a8d6cfd4c.png">    </p:cNvPr>
           <p:cNvPicPr>
             <a:picLocks noChangeAspect="1"/>
           </p:cNvPicPr>
@@ -38186,7 +38186,7 @@
                 <a:ea typeface="Helvetica" pitchFamily="34" charset="-122"/>
                 <a:cs typeface="Helvetica" pitchFamily="34" charset="-120"/>
               </a:rPr>
-              <a:t>TRADESCREEN</a:t>
+              <a:t>TEXT TO SPEECH</a:t>
             </a:r>
             <a:endParaRPr lang="en-US" dirty="0"/>
           </a:p>
@@ -38219,7 +38219,7 @@
       </p:sp>
       <p:pic>
         <p:nvPicPr>
-          <p:cNvPr id="48" name="Object 47" descr="public/generated/icons/f38a4da0-c353-11e9-83b6-a36a57a97a06.png">    </p:cNvPr>
+          <p:cNvPr id="48" name="Object 47" descr="public/generated/icons/e512e5f0-64fb-11e8-9c23-830c05b8b729.png">    </p:cNvPr>
           <p:cNvPicPr>
             <a:picLocks noChangeAspect="1"/>
           </p:cNvPicPr>
@@ -38275,7 +38275,7 @@
                 <a:ea typeface="Helvetica" pitchFamily="34" charset="-122"/>
                 <a:cs typeface="Helvetica" pitchFamily="34" charset="-120"/>
               </a:rPr>
-              <a:t>TRANSIT GATEWAY</a:t>
+              <a:t>TOOLCHAIN</a:t>
             </a:r>
             <a:endParaRPr lang="en-US" dirty="0"/>
           </a:p>
@@ -38308,7 +38308,7 @@
       </p:sp>
       <p:pic>
         <p:nvPicPr>
-          <p:cNvPr id="51" name="Object 50" descr="public/generated/icons/vmware.directorsite.png">    </p:cNvPr>
+          <p:cNvPr id="51" name="Object 50" descr="public/generated/icons/a0b5c5b4-cf45-4d10-ba8c-512126cf6e2c.png">    </p:cNvPr>
           <p:cNvPicPr>
             <a:picLocks noChangeAspect="1"/>
           </p:cNvPicPr>
@@ -38364,7 +38364,7 @@
                 <a:ea typeface="Helvetica" pitchFamily="34" charset="-122"/>
                 <a:cs typeface="Helvetica" pitchFamily="34" charset="-120"/>
               </a:rPr>
-              <a:t>VCF AS A SERVICE - CLOUD DIRECTOR SITE</a:t>
+              <a:t>TRADESCREEN</a:t>
             </a:r>
             <a:endParaRPr lang="en-US" dirty="0"/>
           </a:p>
@@ -38397,7 +38397,7 @@
       </p:sp>
       <p:pic>
         <p:nvPicPr>
-          <p:cNvPr id="54" name="Object 53" descr="public/generated/icons/vmware.usage-meter.png">    </p:cNvPr>
+          <p:cNvPr id="54" name="Object 53" descr="public/generated/icons/f38a4da0-c353-11e9-83b6-a36a57a97a06.png">    </p:cNvPr>
           <p:cNvPicPr>
             <a:picLocks noChangeAspect="1"/>
           </p:cNvPicPr>
@@ -38453,7 +38453,7 @@
                 <a:ea typeface="Helvetica" pitchFamily="34" charset="-122"/>
                 <a:cs typeface="Helvetica" pitchFamily="34" charset="-120"/>
               </a:rPr>
-              <a:t>VCF AS A SERVICE - USAGE METER</a:t>
+              <a:t>TRANSIT GATEWAY</a:t>
             </a:r>
             <a:endParaRPr lang="en-US" dirty="0"/>
           </a:p>
@@ -38486,7 +38486,7 @@
       </p:sp>
       <p:pic>
         <p:nvPicPr>
-          <p:cNvPr id="57" name="Object 56" descr="public/generated/icons/vmware.vdc.png">    </p:cNvPr>
+          <p:cNvPr id="57" name="Object 56" descr="public/generated/icons/vmware.directorsite.png">    </p:cNvPr>
           <p:cNvPicPr>
             <a:picLocks noChangeAspect="1"/>
           </p:cNvPicPr>
@@ -38542,7 +38542,7 @@
                 <a:ea typeface="Helvetica" pitchFamily="34" charset="-122"/>
                 <a:cs typeface="Helvetica" pitchFamily="34" charset="-120"/>
               </a:rPr>
-              <a:t>VCF AS A SERVICE - VIRTUAL DATA CENTER</a:t>
+              <a:t>VCF AS A SERVICE - CLOUD DIRECTOR SITE</a:t>
             </a:r>
             <a:endParaRPr lang="en-US" dirty="0"/>
           </a:p>
@@ -38575,7 +38575,7 @@
       </p:sp>
       <p:pic>
         <p:nvPicPr>
-          <p:cNvPr id="60" name="Object 59" descr="public/generated/icons/cf329950-0a3e-11e8-922e-f1366c6e1c83-veeam.png">    </p:cNvPr>
+          <p:cNvPr id="60" name="Object 59" descr="public/generated/icons/vmware.usage-meter.png">    </p:cNvPr>
           <p:cNvPicPr>
             <a:picLocks noChangeAspect="1"/>
           </p:cNvPicPr>
@@ -38631,7 +38631,7 @@
                 <a:ea typeface="Helvetica" pitchFamily="34" charset="-122"/>
                 <a:cs typeface="Helvetica" pitchFamily="34" charset="-120"/>
               </a:rPr>
-              <a:t>VEEAM</a:t>
+              <a:t>VCF AS A SERVICE - USAGE METER</a:t>
             </a:r>
             <a:endParaRPr lang="en-US" dirty="0"/>
           </a:p>
@@ -38664,7 +38664,7 @@
       </p:sp>
       <p:pic>
         <p:nvPicPr>
-          <p:cNvPr id="63" name="Object 62" descr="public/generated/icons/66644e80-f35a-11ee-923f-2fe367129617.png">    </p:cNvPr>
+          <p:cNvPr id="63" name="Object 62" descr="public/generated/icons/vmware.vdc.png">    </p:cNvPr>
           <p:cNvPicPr>
             <a:picLocks noChangeAspect="1"/>
           </p:cNvPicPr>
@@ -38720,7 +38720,7 @@
                 <a:ea typeface="Helvetica" pitchFamily="34" charset="-122"/>
                 <a:cs typeface="Helvetica" pitchFamily="34" charset="-120"/>
               </a:rPr>
-              <a:t>VERIFY</a:t>
+              <a:t>VCF AS A SERVICE - VIRTUAL DATA CENTER</a:t>
             </a:r>
             <a:endParaRPr lang="en-US" dirty="0"/>
           </a:p>
@@ -38753,7 +38753,7 @@
       </p:sp>
       <p:pic>
         <p:nvPicPr>
-          <p:cNvPr id="66" name="Object 65" descr="public/generated/icons/is.virtual-network-interface.png">    </p:cNvPr>
+          <p:cNvPr id="66" name="Object 65" descr="public/generated/icons/cf329950-0a3e-11e8-922e-f1366c6e1c83-veeam.png">    </p:cNvPr>
           <p:cNvPicPr>
             <a:picLocks noChangeAspect="1"/>
           </p:cNvPicPr>
@@ -38809,7 +38809,7 @@
                 <a:ea typeface="Helvetica" pitchFamily="34" charset="-122"/>
                 <a:cs typeface="Helvetica" pitchFamily="34" charset="-120"/>
               </a:rPr>
-              <a:t>VIRTUAL NETWORK INTERFACE</a:t>
+              <a:t>VEEAM</a:t>
             </a:r>
             <a:endParaRPr lang="en-US" dirty="0"/>
           </a:p>
@@ -38842,7 +38842,7 @@
       </p:sp>
       <p:pic>
         <p:nvPicPr>
-          <p:cNvPr id="69" name="Object 68" descr="public/generated/icons/is.vpc.png">    </p:cNvPr>
+          <p:cNvPr id="69" name="Object 68" descr="public/generated/icons/66644e80-f35a-11ee-923f-2fe367129617.png">    </p:cNvPr>
           <p:cNvPicPr>
             <a:picLocks noChangeAspect="1"/>
           </p:cNvPicPr>
@@ -38898,7 +38898,7 @@
                 <a:ea typeface="Helvetica" pitchFamily="34" charset="-122"/>
                 <a:cs typeface="Helvetica" pitchFamily="34" charset="-120"/>
               </a:rPr>
-              <a:t>VIRTUAL PRIVATE CLOUD</a:t>
+              <a:t>VERIFY</a:t>
             </a:r>
             <a:endParaRPr lang="en-US" dirty="0"/>
           </a:p>
@@ -38931,7 +38931,7 @@
       </p:sp>
       <p:pic>
         <p:nvPicPr>
-          <p:cNvPr id="72" name="Object 71" descr="public/generated/icons/is.endpoint-gateway.png">    </p:cNvPr>
+          <p:cNvPr id="72" name="Object 71" descr="public/generated/icons/is.virtual-network-interface.png">    </p:cNvPr>
           <p:cNvPicPr>
             <a:picLocks noChangeAspect="1"/>
           </p:cNvPicPr>
@@ -38987,7 +38987,7 @@
                 <a:ea typeface="Helvetica" pitchFamily="34" charset="-122"/>
                 <a:cs typeface="Helvetica" pitchFamily="34" charset="-120"/>
               </a:rPr>
-              <a:t>VIRTUAL PRIVATE ENDPOINT FOR VPC</a:t>
+              <a:t>VIRTUAL NETWORK INTERFACE</a:t>
             </a:r>
             <a:endParaRPr lang="en-US" dirty="0"/>
           </a:p>
@@ -39020,7 +39020,7 @@
       </p:sp>
       <p:pic>
         <p:nvPicPr>
-          <p:cNvPr id="75" name="Object 74" descr="public/generated/icons/887073fb-ba5b-9407-d2ac-938308d890e4.png">    </p:cNvPr>
+          <p:cNvPr id="75" name="Object 74" descr="public/generated/icons/is.vpc.png">    </p:cNvPr>
           <p:cNvPicPr>
             <a:picLocks noChangeAspect="1"/>
           </p:cNvPicPr>
@@ -39076,7 +39076,7 @@
                 <a:ea typeface="Helvetica" pitchFamily="34" charset="-122"/>
                 <a:cs typeface="Helvetica" pitchFamily="34" charset="-120"/>
               </a:rPr>
-              <a:t>VIRTUAL ROUTER APPLIANCE</a:t>
+              <a:t>VIRTUAL PRIVATE CLOUD</a:t>
             </a:r>
             <a:endParaRPr lang="en-US" dirty="0"/>
           </a:p>
@@ -39109,7 +39109,7 @@
       </p:sp>
       <p:pic>
         <p:nvPicPr>
-          <p:cNvPr id="78" name="Object 77" descr="public/generated/icons/virtual-server-group.png">    </p:cNvPr>
+          <p:cNvPr id="78" name="Object 77" descr="public/generated/icons/is.endpoint-gateway.png">    </p:cNvPr>
           <p:cNvPicPr>
             <a:picLocks noChangeAspect="1"/>
           </p:cNvPicPr>
@@ -39165,7 +39165,7 @@
                 <a:ea typeface="Helvetica" pitchFamily="34" charset="-122"/>
                 <a:cs typeface="Helvetica" pitchFamily="34" charset="-120"/>
               </a:rPr>
-              <a:t>VIRTUAL SERVER FOR CLASSIC</a:t>
+              <a:t>VIRTUAL PRIVATE ENDPOINT FOR VPC</a:t>
             </a:r>
             <a:endParaRPr lang="en-US" dirty="0"/>
           </a:p>
@@ -39198,7 +39198,7 @@
       </p:sp>
       <p:pic>
         <p:nvPicPr>
-          <p:cNvPr id="81" name="Object 80" descr="public/generated/icons/is.instance.png">    </p:cNvPr>
+          <p:cNvPr id="81" name="Object 80" descr="public/generated/icons/887073fb-ba5b-9407-d2ac-938308d890e4.png">    </p:cNvPr>
           <p:cNvPicPr>
             <a:picLocks noChangeAspect="1"/>
           </p:cNvPicPr>
@@ -39254,7 +39254,7 @@
                 <a:ea typeface="Helvetica" pitchFamily="34" charset="-122"/>
                 <a:cs typeface="Helvetica" pitchFamily="34" charset="-120"/>
               </a:rPr>
-              <a:t>VIRTUAL SERVER FOR VPC</a:t>
+              <a:t>VIRTUAL ROUTER APPLIANCE</a:t>
             </a:r>
             <a:endParaRPr lang="en-US" dirty="0"/>
           </a:p>
@@ -39287,7 +39287,7 @@
       </p:sp>
       <p:pic>
         <p:nvPicPr>
-          <p:cNvPr id="84" name="Object 83" descr="public/generated/icons/15.png">    </p:cNvPr>
+          <p:cNvPr id="84" name="Object 83" descr="public/generated/icons/virtual-server-group.png">    </p:cNvPr>
           <p:cNvPicPr>
             <a:picLocks noChangeAspect="1"/>
           </p:cNvPicPr>
@@ -39343,7 +39343,7 @@
                 <a:ea typeface="Helvetica" pitchFamily="34" charset="-122"/>
                 <a:cs typeface="Helvetica" pitchFamily="34" charset="-120"/>
               </a:rPr>
-              <a:t>VLAN</a:t>
+              <a:t>VIRTUAL SERVER FOR CLASSIC</a:t>
             </a:r>
             <a:endParaRPr lang="en-US" dirty="0"/>
           </a:p>
@@ -39376,7 +39376,7 @@
       </p:sp>
       <p:pic>
         <p:nvPicPr>
-          <p:cNvPr id="87" name="Object 86" descr="public/generated/icons/09f5a6ea-185e-4625-8281-9e8629360a4f.png">    </p:cNvPr>
+          <p:cNvPr id="87" name="Object 86" descr="public/generated/icons/is.instance.png">    </p:cNvPr>
           <p:cNvPicPr>
             <a:picLocks noChangeAspect="1"/>
           </p:cNvPicPr>
@@ -39432,7 +39432,7 @@
                 <a:ea typeface="Helvetica" pitchFamily="34" charset="-122"/>
                 <a:cs typeface="Helvetica" pitchFamily="34" charset="-120"/>
               </a:rPr>
-              <a:t>VMWARE CLOUD MIGRATION SERVICES</a:t>
+              <a:t>VIRTUAL SERVER FOR VPC</a:t>
             </a:r>
             <a:endParaRPr lang="en-US" dirty="0"/>
           </a:p>
@@ -39465,7 +39465,7 @@
       </p:sp>
       <p:pic>
         <p:nvPicPr>
-          <p:cNvPr id="90" name="Object 89" descr="public/generated/icons/cf329950-0a3e-11e8-922e-f1366c6e1c83.png">    </p:cNvPr>
+          <p:cNvPr id="90" name="Object 89" descr="public/generated/icons/15.png">    </p:cNvPr>
           <p:cNvPicPr>
             <a:picLocks noChangeAspect="1"/>
           </p:cNvPicPr>
@@ -39521,7 +39521,7 @@
                 <a:ea typeface="Helvetica" pitchFamily="34" charset="-122"/>
                 <a:cs typeface="Helvetica" pitchFamily="34" charset="-120"/>
               </a:rPr>
-              <a:t>VMWARE SOLUTIONS</a:t>
+              <a:t>VLAN</a:t>
             </a:r>
             <a:endParaRPr lang="en-US" dirty="0"/>
           </a:p>
@@ -39554,7 +39554,7 @@
       </p:sp>
       <p:pic>
         <p:nvPicPr>
-          <p:cNvPr id="93" name="Object 92" descr="public/generated/icons/cf329950-0a3e-11e8-922e-f1366c6e1c83-vcenterserver.png">    </p:cNvPr>
+          <p:cNvPr id="93" name="Object 92" descr="public/generated/icons/09f5a6ea-185e-4625-8281-9e8629360a4f.png">    </p:cNvPr>
           <p:cNvPicPr>
             <a:picLocks noChangeAspect="1"/>
           </p:cNvPicPr>
@@ -39610,7 +39610,7 @@
                 <a:ea typeface="Helvetica" pitchFamily="34" charset="-122"/>
                 <a:cs typeface="Helvetica" pitchFamily="34" charset="-120"/>
               </a:rPr>
-              <a:t>VMWARE VCENTER SERVER</a:t>
+              <a:t>VMWARE CLOUD MIGRATION SERVICES</a:t>
             </a:r>
             <a:endParaRPr lang="en-US" dirty="0"/>
           </a:p>
@@ -39643,7 +39643,7 @@
       </p:sp>
       <p:pic>
         <p:nvPicPr>
-          <p:cNvPr id="96" name="Object 95" descr="public/generated/icons/cf329950-0a3e-11e8-922e-f1366c6e1c83-vsphere.png">    </p:cNvPr>
+          <p:cNvPr id="96" name="Object 95" descr="public/generated/icons/cf329950-0a3e-11e8-922e-f1366c6e1c83.png">    </p:cNvPr>
           <p:cNvPicPr>
             <a:picLocks noChangeAspect="1"/>
           </p:cNvPicPr>
@@ -39699,7 +39699,7 @@
                 <a:ea typeface="Helvetica" pitchFamily="34" charset="-122"/>
                 <a:cs typeface="Helvetica" pitchFamily="34" charset="-120"/>
               </a:rPr>
-              <a:t>VMWARE VSPHERE</a:t>
+              <a:t>VMWARE SOLUTIONS</a:t>
             </a:r>
             <a:endParaRPr lang="en-US" dirty="0"/>
           </a:p>
@@ -39732,7 +39732,7 @@
       </p:sp>
       <p:pic>
         <p:nvPicPr>
-          <p:cNvPr id="99" name="Object 98" descr="public/generated/icons/b6670b68-84ca-4a04-b8e8-c567dfeeddde.png">    </p:cNvPr>
+          <p:cNvPr id="99" name="Object 98" descr="public/generated/icons/cf329950-0a3e-11e8-922e-f1366c6e1c83-vcenterserver.png">    </p:cNvPr>
           <p:cNvPicPr>
             <a:picLocks noChangeAspect="1"/>
           </p:cNvPicPr>
@@ -39788,7 +39788,7 @@
                 <a:ea typeface="Helvetica" pitchFamily="34" charset="-122"/>
                 <a:cs typeface="Helvetica" pitchFamily="34" charset="-120"/>
               </a:rPr>
-              <a:t>VPC COAAS (VPC COST OPTIMIZATION AS A SERVICE)</a:t>
+              <a:t>VMWARE VCENTER SERVER</a:t>
             </a:r>
             <a:endParaRPr lang="en-US" dirty="0"/>
           </a:p>
@@ -39821,7 +39821,7 @@
       </p:sp>
       <p:pic>
         <p:nvPicPr>
-          <p:cNvPr id="102" name="Object 101" descr="public/generated/icons/757254b0-a9a0-11ea-9ff6-17a22eb543c5.png">    </p:cNvPr>
+          <p:cNvPr id="102" name="Object 101" descr="public/generated/icons/cf329950-0a3e-11e8-922e-f1366c6e1c83-vsphere.png">    </p:cNvPr>
           <p:cNvPicPr>
             <a:picLocks noChangeAspect="1"/>
           </p:cNvPicPr>
@@ -39877,7 +39877,7 @@
                 <a:ea typeface="Helvetica" pitchFamily="34" charset="-122"/>
                 <a:cs typeface="Helvetica" pitchFamily="34" charset="-120"/>
               </a:rPr>
-              <a:t>VPC+ CLOUD MIGRATION</a:t>
+              <a:t>VMWARE VSPHERE</a:t>
             </a:r>
             <a:endParaRPr lang="en-US" dirty="0"/>
           </a:p>
@@ -39910,7 +39910,7 @@
       </p:sp>
       <p:pic>
         <p:nvPicPr>
-          <p:cNvPr id="105" name="Object 104" descr="public/generated/icons/fd1e0240-dd95-11eb-b4a0-db1c9221b8a2.png">    </p:cNvPr>
+          <p:cNvPr id="105" name="Object 104" descr="public/generated/icons/b6670b68-84ca-4a04-b8e8-c567dfeeddde.png">    </p:cNvPr>
           <p:cNvPicPr>
             <a:picLocks noChangeAspect="1"/>
           </p:cNvPicPr>
@@ -39966,7 +39966,7 @@
                 <a:ea typeface="Helvetica" pitchFamily="34" charset="-122"/>
                 <a:cs typeface="Helvetica" pitchFamily="34" charset="-120"/>
               </a:rPr>
-              <a:t>VPC+ DRAAS (VPC+ DISASTER RECOVERY AS A SERVICE)</a:t>
+              <a:t>VPC COAAS (VPC COST OPTIMIZATION AS A SERVICE)</a:t>
             </a:r>
             <a:endParaRPr lang="en-US" dirty="0"/>
           </a:p>
@@ -39999,7 +39999,7 @@
       </p:sp>
       <p:pic>
         <p:nvPicPr>
-          <p:cNvPr id="108" name="Object 107" descr="public/generated/icons/is.vpn.png">    </p:cNvPr>
+          <p:cNvPr id="108" name="Object 107" descr="public/generated/icons/757254b0-a9a0-11ea-9ff6-17a22eb543c5.png">    </p:cNvPr>
           <p:cNvPicPr>
             <a:picLocks noChangeAspect="1"/>
           </p:cNvPicPr>
@@ -40055,7 +40055,7 @@
                 <a:ea typeface="Helvetica" pitchFamily="34" charset="-122"/>
                 <a:cs typeface="Helvetica" pitchFamily="34" charset="-120"/>
               </a:rPr>
-              <a:t>VPN FOR VPC</a:t>
+              <a:t>VPC+ CLOUD MIGRATION</a:t>
             </a:r>
             <a:endParaRPr lang="en-US" dirty="0"/>
           </a:p>
@@ -40121,7 +40121,7 @@
       </p:sp>
       <p:pic>
         <p:nvPicPr>
-          <p:cNvPr id="3" name="Object 2" descr="public/generated/icons/cf329950-0a3e-11e8-922e-f1366c6e1c83-vrops.png">    </p:cNvPr>
+          <p:cNvPr id="3" name="Object 2" descr="public/generated/icons/fd1e0240-dd95-11eb-b4a0-db1c9221b8a2.png">    </p:cNvPr>
           <p:cNvPicPr>
             <a:picLocks noChangeAspect="1"/>
           </p:cNvPicPr>
@@ -40177,7 +40177,7 @@
                 <a:ea typeface="Helvetica" pitchFamily="34" charset="-122"/>
                 <a:cs typeface="Helvetica" pitchFamily="34" charset="-120"/>
               </a:rPr>
-              <a:t>VREALIZE OPERATIONS AND LOG INSIGHT</a:t>
+              <a:t>VPC+ DRAAS (VPC+ DISASTER RECOVERY AS A SERVICE)</a:t>
             </a:r>
             <a:endParaRPr lang="en-US" dirty="0"/>
           </a:p>
@@ -40210,7 +40210,7 @@
       </p:sp>
       <p:pic>
         <p:nvPicPr>
-          <p:cNvPr id="6" name="Object 5" descr="public/generated/icons/76b7bf22-b443-47db-b3db-066ba2988f47.png">    </p:cNvPr>
+          <p:cNvPr id="6" name="Object 5" descr="public/generated/icons/is.vpn.png">    </p:cNvPr>
           <p:cNvPicPr>
             <a:picLocks noChangeAspect="1"/>
           </p:cNvPicPr>
@@ -40266,7 +40266,7 @@
                 <a:ea typeface="Helvetica" pitchFamily="34" charset="-122"/>
                 <a:cs typeface="Helvetica" pitchFamily="34" charset="-120"/>
               </a:rPr>
-              <a:t>WATSON DISCOVERY</a:t>
+              <a:t>VPN FOR VPC</a:t>
             </a:r>
             <a:endParaRPr lang="en-US" dirty="0"/>
           </a:p>
@@ -40299,7 +40299,7 @@
       </p:sp>
       <p:pic>
         <p:nvPicPr>
-          <p:cNvPr id="9" name="Object 8" descr="public/generated/icons/12fbfff4-12c7-ccd0-80e6-603e8607468a.png">    </p:cNvPr>
+          <p:cNvPr id="9" name="Object 8" descr="public/generated/icons/cf329950-0a3e-11e8-922e-f1366c6e1c83-vrops.png">    </p:cNvPr>
           <p:cNvPicPr>
             <a:picLocks noChangeAspect="1"/>
           </p:cNvPicPr>
@@ -40355,7 +40355,7 @@
                 <a:ea typeface="Helvetica" pitchFamily="34" charset="-122"/>
                 <a:cs typeface="Helvetica" pitchFamily="34" charset="-120"/>
               </a:rPr>
-              <a:t>WATSONX</a:t>
+              <a:t>VREALIZE OPERATIONS AND LOG INSIGHT</a:t>
             </a:r>
             <a:endParaRPr lang="en-US" dirty="0"/>
           </a:p>
@@ -40388,7 +40388,7 @@
       </p:sp>
       <p:pic>
         <p:nvPicPr>
-          <p:cNvPr id="12" name="Object 11" descr="public/generated/icons/7045626d-55e3-4418-be11-683a26dbc1e5.png">    </p:cNvPr>
+          <p:cNvPr id="12" name="Object 11" descr="public/generated/icons/76b7bf22-b443-47db-b3db-066ba2988f47.png">    </p:cNvPr>
           <p:cNvPicPr>
             <a:picLocks noChangeAspect="1"/>
           </p:cNvPicPr>
@@ -40444,7 +40444,7 @@
                 <a:ea typeface="Helvetica" pitchFamily="34" charset="-122"/>
                 <a:cs typeface="Helvetica" pitchFamily="34" charset="-120"/>
               </a:rPr>
-              <a:t>WATSONX ASSISTANT</a:t>
+              <a:t>WATSON DISCOVERY</a:t>
             </a:r>
             <a:endParaRPr lang="en-US" dirty="0"/>
           </a:p>
@@ -40477,7 +40477,7 @@
       </p:sp>
       <p:pic>
         <p:nvPicPr>
-          <p:cNvPr id="15" name="Object 14" descr="public/generated/icons/11530fa0-1776-11ee-93f6-1d4066e6a409.png">    </p:cNvPr>
+          <p:cNvPr id="15" name="Object 14" descr="public/generated/icons/12fbfff4-12c7-ccd0-80e6-603e8607468a.png">    </p:cNvPr>
           <p:cNvPicPr>
             <a:picLocks noChangeAspect="1"/>
           </p:cNvPicPr>
@@ -40533,7 +40533,7 @@
                 <a:ea typeface="Helvetica" pitchFamily="34" charset="-122"/>
                 <a:cs typeface="Helvetica" pitchFamily="34" charset="-120"/>
               </a:rPr>
-              <a:t>WATSONX CODE ASSISTANT</a:t>
+              <a:t>WATSONX</a:t>
             </a:r>
             <a:endParaRPr lang="en-US" dirty="0"/>
           </a:p>
@@ -40566,7 +40566,7 @@
       </p:sp>
       <p:pic>
         <p:nvPicPr>
-          <p:cNvPr id="18" name="Object 17" descr="public/generated/icons/b69f78c0-11d7-11ef-9bdf-c92eb40d1838.png">    </p:cNvPr>
+          <p:cNvPr id="18" name="Object 17" descr="public/generated/icons/7045626d-55e3-4418-be11-683a26dbc1e5.png">    </p:cNvPr>
           <p:cNvPicPr>
             <a:picLocks noChangeAspect="1"/>
           </p:cNvPicPr>
@@ -40622,7 +40622,7 @@
                 <a:ea typeface="Helvetica" pitchFamily="34" charset="-122"/>
                 <a:cs typeface="Helvetica" pitchFamily="34" charset="-120"/>
               </a:rPr>
-              <a:t>WATSONX ORCHESTRATE</a:t>
+              <a:t>WATSONX ASSISTANT</a:t>
             </a:r>
             <a:endParaRPr lang="en-US" dirty="0"/>
           </a:p>
@@ -40655,7 +40655,7 @@
       </p:sp>
       <p:pic>
         <p:nvPicPr>
-          <p:cNvPr id="21" name="Object 20" descr="public/generated/icons/51c53b72-918f-4869-b834-2d99eb28422a.png">    </p:cNvPr>
+          <p:cNvPr id="21" name="Object 20" descr="public/generated/icons/11530fa0-1776-11ee-93f6-1d4066e6a409.png">    </p:cNvPr>
           <p:cNvPicPr>
             <a:picLocks noChangeAspect="1"/>
           </p:cNvPicPr>
@@ -40711,7 +40711,7 @@
                 <a:ea typeface="Helvetica" pitchFamily="34" charset="-122"/>
                 <a:cs typeface="Helvetica" pitchFamily="34" charset="-120"/>
               </a:rPr>
-              <a:t>WATSONX.AI RUNTIME</a:t>
+              <a:t>WATSONX CODE ASSISTANT</a:t>
             </a:r>
             <a:endParaRPr lang="en-US" dirty="0"/>
           </a:p>
@@ -40744,7 +40744,7 @@
       </p:sp>
       <p:pic>
         <p:nvPicPr>
-          <p:cNvPr id="24" name="Object 23" descr="public/generated/icons/39ba9d4c-b1c5-4cc3-a163-38b580121e01.png">    </p:cNvPr>
+          <p:cNvPr id="24" name="Object 23" descr="public/generated/icons/b69f78c0-11d7-11ef-9bdf-c92eb40d1838.png">    </p:cNvPr>
           <p:cNvPicPr>
             <a:picLocks noChangeAspect="1"/>
           </p:cNvPicPr>
@@ -40800,7 +40800,7 @@
                 <a:ea typeface="Helvetica" pitchFamily="34" charset="-122"/>
                 <a:cs typeface="Helvetica" pitchFamily="34" charset="-120"/>
               </a:rPr>
-              <a:t>WATSONX.AI STUDIO</a:t>
+              <a:t>WATSONX ORCHESTRATE</a:t>
             </a:r>
             <a:endParaRPr lang="en-US" dirty="0"/>
           </a:p>
@@ -40833,7 +40833,7 @@
       </p:sp>
       <p:pic>
         <p:nvPicPr>
-          <p:cNvPr id="27" name="Object 26" descr="public/generated/icons/43834340-4a6d-11ed-97d2-959039ad2a2e.png">    </p:cNvPr>
+          <p:cNvPr id="27" name="Object 26" descr="public/generated/icons/51c53b72-918f-4869-b834-2d99eb28422a.png">    </p:cNvPr>
           <p:cNvPicPr>
             <a:picLocks noChangeAspect="1"/>
           </p:cNvPicPr>
@@ -40889,7 +40889,7 @@
                 <a:ea typeface="Helvetica" pitchFamily="34" charset="-122"/>
                 <a:cs typeface="Helvetica" pitchFamily="34" charset="-120"/>
               </a:rPr>
-              <a:t>WATSONX.DATA</a:t>
+              <a:t>WATSONX.AI RUNTIME</a:t>
             </a:r>
             <a:endParaRPr lang="en-US" dirty="0"/>
           </a:p>
@@ -40922,7 +40922,7 @@
       </p:sp>
       <p:pic>
         <p:nvPicPr>
-          <p:cNvPr id="30" name="Object 29" descr="public/generated/icons/ed3a5a53-eb60-4f3c-8fd1-17f88585b6ed.png">    </p:cNvPr>
+          <p:cNvPr id="30" name="Object 29" descr="public/generated/icons/39ba9d4c-b1c5-4cc3-a163-38b580121e01.png">    </p:cNvPr>
           <p:cNvPicPr>
             <a:picLocks noChangeAspect="1"/>
           </p:cNvPicPr>
@@ -40978,7 +40978,7 @@
                 <a:ea typeface="Helvetica" pitchFamily="34" charset="-122"/>
                 <a:cs typeface="Helvetica" pitchFamily="34" charset="-120"/>
               </a:rPr>
-              <a:t>WATSONX.DATA INTELLIGENCE</a:t>
+              <a:t>WATSONX.AI STUDIO</a:t>
             </a:r>
             <a:endParaRPr lang="en-US" dirty="0"/>
           </a:p>
@@ -41011,7 +41011,7 @@
       </p:sp>
       <p:pic>
         <p:nvPicPr>
-          <p:cNvPr id="33" name="Object 32" descr="public/generated/icons/2ad019f3-0fd6-4c25-966d-f3952481a870.png">    </p:cNvPr>
+          <p:cNvPr id="33" name="Object 32" descr="public/generated/icons/43834340-4a6d-11ed-97d2-959039ad2a2e.png">    </p:cNvPr>
           <p:cNvPicPr>
             <a:picLocks noChangeAspect="1"/>
           </p:cNvPicPr>
@@ -41067,7 +41067,7 @@
                 <a:ea typeface="Helvetica" pitchFamily="34" charset="-122"/>
                 <a:cs typeface="Helvetica" pitchFamily="34" charset="-120"/>
               </a:rPr>
-              <a:t>WATSONX.GOVERNANCE</a:t>
+              <a:t>WATSONX.DATA</a:t>
             </a:r>
             <a:endParaRPr lang="en-US" dirty="0"/>
           </a:p>
@@ -41100,7 +41100,7 @@
       </p:sp>
       <p:pic>
         <p:nvPicPr>
-          <p:cNvPr id="36" name="Object 35" descr="public/generated/icons/e9407be2-139f-4f05-959d-494c6601239a.png">    </p:cNvPr>
+          <p:cNvPr id="36" name="Object 35" descr="public/generated/icons/4d4fd270-fe8f-11ef-82ad-af5f37d5a455.png">    </p:cNvPr>
           <p:cNvPicPr>
             <a:picLocks noChangeAspect="1"/>
           </p:cNvPicPr>
@@ -41156,7 +41156,7 @@
                 <a:ea typeface="Helvetica" pitchFamily="34" charset="-122"/>
                 <a:cs typeface="Helvetica" pitchFamily="34" charset="-120"/>
               </a:rPr>
-              <a:t>WEALTHGROWTH.AI</a:t>
+              <a:t>WATSONX.DATA INTEGRATION</a:t>
             </a:r>
             <a:endParaRPr lang="en-US" dirty="0"/>
           </a:p>
@@ -41189,7 +41189,7 @@
       </p:sp>
       <p:pic>
         <p:nvPicPr>
-          <p:cNvPr id="39" name="Object 38" descr="public/generated/icons/cf329950-0a3e-11e8-922e-f1366c6e1c83-zerto.png">    </p:cNvPr>
+          <p:cNvPr id="39" name="Object 38" descr="public/generated/icons/ed3a5a53-eb60-4f3c-8fd1-17f88585b6ed.png">    </p:cNvPr>
           <p:cNvPicPr>
             <a:picLocks noChangeAspect="1"/>
           </p:cNvPicPr>
@@ -41220,6 +41220,273 @@
         <p:spPr>
           <a:xfrm>
             <a:off x="2926080" y="1874520"/>
+            <a:ext cx="640080" cy="274320"/>
+          </a:xfrm>
+          <a:prstGeom prst="rect">
+            <a:avLst/>
+          </a:prstGeom>
+          <a:noFill/>
+        </p:spPr>
+        <p:txBody>
+          <a:bodyPr wrap="square" rtlCol="0" anchor="t" bIns="0" lIns="0" rIns="0" tIns="0">
+            <a:spAutoFit/>
+          </a:bodyPr>
+          <a:lstStyle/>
+          <a:p>
+            <a:pPr algn="ctr">
+              <a:buNone/>
+            </a:pPr>
+            <a:r>
+              <a:rPr lang="en-US" b="1" sz="600" dirty="0" smtClean="0">
+                <a:solidFill>
+                  <a:srgbClr val="646365"/>
+                </a:solidFill>
+                <a:latin typeface="Helvetica" pitchFamily="34" charset="0"/>
+                <a:ea typeface="Helvetica" pitchFamily="34" charset="-122"/>
+                <a:cs typeface="Helvetica" pitchFamily="34" charset="-120"/>
+              </a:rPr>
+              <a:t>WATSONX.DATA INTELLIGENCE</a:t>
+            </a:r>
+            <a:endParaRPr lang="en-US" dirty="0"/>
+          </a:p>
+        </p:txBody>
+      </p:sp>
+      <p:sp>
+        <p:nvSpPr>
+          <p:cNvPr id="41" name="Object 40"/>
+          <p:cNvSpPr/>
+          <p:nvPr/>
+        </p:nvSpPr>
+        <p:spPr>
+          <a:xfrm>
+            <a:off x="3931920" y="1371600"/>
+            <a:ext cx="457200" cy="457200"/>
+          </a:xfrm>
+          <a:prstGeom prst="ellipse">
+            <a:avLst/>
+          </a:prstGeom>
+          <a:solidFill>
+            <a:srgbClr val="FFFFFF"/>
+          </a:solidFill>
+          <a:ln w="19050">
+            <a:solidFill>
+              <a:srgbClr val="646365"/>
+            </a:solidFill>
+            <a:prstDash val="solid"/>
+          </a:ln>
+        </p:spPr>
+      </p:sp>
+      <p:pic>
+        <p:nvPicPr>
+          <p:cNvPr id="42" name="Object 41" descr="public/generated/icons/2ad019f3-0fd6-4c25-966d-f3952481a870.png">    </p:cNvPr>
+          <p:cNvPicPr>
+            <a:picLocks noChangeAspect="1"/>
+          </p:cNvPicPr>
+          <p:nvPr/>
+        </p:nvPicPr>
+        <p:blipFill>
+          <a:blip r:embed="rId14"/>
+          <a:stretch>
+            <a:fillRect/>
+          </a:stretch>
+        </p:blipFill>
+        <p:spPr>
+          <a:xfrm>
+            <a:off x="4023360" y="1463040"/>
+            <a:ext cx="274320" cy="274320"/>
+          </a:xfrm>
+          <a:prstGeom prst="rect">
+            <a:avLst/>
+          </a:prstGeom>
+        </p:spPr>
+      </p:pic>
+      <p:sp>
+        <p:nvSpPr>
+          <p:cNvPr id="43" name="Object 42"/>
+          <p:cNvSpPr/>
+          <p:nvPr/>
+        </p:nvSpPr>
+        <p:spPr>
+          <a:xfrm>
+            <a:off x="3840480" y="1874520"/>
+            <a:ext cx="640080" cy="274320"/>
+          </a:xfrm>
+          <a:prstGeom prst="rect">
+            <a:avLst/>
+          </a:prstGeom>
+          <a:noFill/>
+        </p:spPr>
+        <p:txBody>
+          <a:bodyPr wrap="square" rtlCol="0" anchor="t" bIns="0" lIns="0" rIns="0" tIns="0">
+            <a:spAutoFit/>
+          </a:bodyPr>
+          <a:lstStyle/>
+          <a:p>
+            <a:pPr algn="ctr">
+              <a:buNone/>
+            </a:pPr>
+            <a:r>
+              <a:rPr lang="en-US" b="1" sz="600" dirty="0" smtClean="0">
+                <a:solidFill>
+                  <a:srgbClr val="646365"/>
+                </a:solidFill>
+                <a:latin typeface="Helvetica" pitchFamily="34" charset="0"/>
+                <a:ea typeface="Helvetica" pitchFamily="34" charset="-122"/>
+                <a:cs typeface="Helvetica" pitchFamily="34" charset="-120"/>
+              </a:rPr>
+              <a:t>WATSONX.GOVERNANCE</a:t>
+            </a:r>
+            <a:endParaRPr lang="en-US" dirty="0"/>
+          </a:p>
+        </p:txBody>
+      </p:sp>
+      <p:sp>
+        <p:nvSpPr>
+          <p:cNvPr id="44" name="Object 43"/>
+          <p:cNvSpPr/>
+          <p:nvPr/>
+        </p:nvSpPr>
+        <p:spPr>
+          <a:xfrm>
+            <a:off x="4846320" y="1371600"/>
+            <a:ext cx="457200" cy="457200"/>
+          </a:xfrm>
+          <a:prstGeom prst="ellipse">
+            <a:avLst/>
+          </a:prstGeom>
+          <a:solidFill>
+            <a:srgbClr val="FFFFFF"/>
+          </a:solidFill>
+          <a:ln w="19050">
+            <a:solidFill>
+              <a:srgbClr val="646365"/>
+            </a:solidFill>
+            <a:prstDash val="solid"/>
+          </a:ln>
+        </p:spPr>
+      </p:sp>
+      <p:pic>
+        <p:nvPicPr>
+          <p:cNvPr id="45" name="Object 44" descr="public/generated/icons/e9407be2-139f-4f05-959d-494c6601239a.png">    </p:cNvPr>
+          <p:cNvPicPr>
+            <a:picLocks noChangeAspect="1"/>
+          </p:cNvPicPr>
+          <p:nvPr/>
+        </p:nvPicPr>
+        <p:blipFill>
+          <a:blip r:embed="rId15"/>
+          <a:stretch>
+            <a:fillRect/>
+          </a:stretch>
+        </p:blipFill>
+        <p:spPr>
+          <a:xfrm>
+            <a:off x="4937760" y="1463040"/>
+            <a:ext cx="274320" cy="274320"/>
+          </a:xfrm>
+          <a:prstGeom prst="rect">
+            <a:avLst/>
+          </a:prstGeom>
+        </p:spPr>
+      </p:pic>
+      <p:sp>
+        <p:nvSpPr>
+          <p:cNvPr id="46" name="Object 45"/>
+          <p:cNvSpPr/>
+          <p:nvPr/>
+        </p:nvSpPr>
+        <p:spPr>
+          <a:xfrm>
+            <a:off x="4754880" y="1874520"/>
+            <a:ext cx="640080" cy="274320"/>
+          </a:xfrm>
+          <a:prstGeom prst="rect">
+            <a:avLst/>
+          </a:prstGeom>
+          <a:noFill/>
+        </p:spPr>
+        <p:txBody>
+          <a:bodyPr wrap="square" rtlCol="0" anchor="t" bIns="0" lIns="0" rIns="0" tIns="0">
+            <a:spAutoFit/>
+          </a:bodyPr>
+          <a:lstStyle/>
+          <a:p>
+            <a:pPr algn="ctr">
+              <a:buNone/>
+            </a:pPr>
+            <a:r>
+              <a:rPr lang="en-US" b="1" sz="600" dirty="0" smtClean="0">
+                <a:solidFill>
+                  <a:srgbClr val="646365"/>
+                </a:solidFill>
+                <a:latin typeface="Helvetica" pitchFamily="34" charset="0"/>
+                <a:ea typeface="Helvetica" pitchFamily="34" charset="-122"/>
+                <a:cs typeface="Helvetica" pitchFamily="34" charset="-120"/>
+              </a:rPr>
+              <a:t>WEALTHGROWTH.AI</a:t>
+            </a:r>
+            <a:endParaRPr lang="en-US" dirty="0"/>
+          </a:p>
+        </p:txBody>
+      </p:sp>
+      <p:sp>
+        <p:nvSpPr>
+          <p:cNvPr id="47" name="Object 46"/>
+          <p:cNvSpPr/>
+          <p:nvPr/>
+        </p:nvSpPr>
+        <p:spPr>
+          <a:xfrm>
+            <a:off x="5760720" y="1371600"/>
+            <a:ext cx="457200" cy="457200"/>
+          </a:xfrm>
+          <a:prstGeom prst="ellipse">
+            <a:avLst/>
+          </a:prstGeom>
+          <a:solidFill>
+            <a:srgbClr val="FFFFFF"/>
+          </a:solidFill>
+          <a:ln w="19050">
+            <a:solidFill>
+              <a:srgbClr val="646365"/>
+            </a:solidFill>
+            <a:prstDash val="solid"/>
+          </a:ln>
+        </p:spPr>
+      </p:sp>
+      <p:pic>
+        <p:nvPicPr>
+          <p:cNvPr id="48" name="Object 47" descr="public/generated/icons/cf329950-0a3e-11e8-922e-f1366c6e1c83-zerto.png">    </p:cNvPr>
+          <p:cNvPicPr>
+            <a:picLocks noChangeAspect="1"/>
+          </p:cNvPicPr>
+          <p:nvPr/>
+        </p:nvPicPr>
+        <p:blipFill>
+          <a:blip r:embed="rId16"/>
+          <a:stretch>
+            <a:fillRect/>
+          </a:stretch>
+        </p:blipFill>
+        <p:spPr>
+          <a:xfrm>
+            <a:off x="5852160" y="1463040"/>
+            <a:ext cx="274320" cy="274320"/>
+          </a:xfrm>
+          <a:prstGeom prst="rect">
+            <a:avLst/>
+          </a:prstGeom>
+        </p:spPr>
+      </p:pic>
+      <p:sp>
+        <p:nvSpPr>
+          <p:cNvPr id="49" name="Object 48"/>
+          <p:cNvSpPr/>
+          <p:nvPr/>
+        </p:nvSpPr>
+        <p:spPr>
+          <a:xfrm>
+            <a:off x="5669280" y="1874520"/>
             <a:ext cx="640080" cy="274320"/>
           </a:xfrm>
           <a:prstGeom prst="rect">

--- a/mycatalog-architecture-diagram-template.pptx
+++ b/mycatalog-architecture-diagram-template.pptx
@@ -524,7 +524,7 @@
           <a:p>
             <a:r>
               <a:rPr lang="en-US" dirty="0" smtClean="0"/>
-              <a:t>Generated on Sun Jun 29 2025 07:05:33 GMT+0000 (Coordinated Universal Time)</a:t>
+              <a:t>Generated on Sun Aug 03 2025 07:05:14 GMT+0000 (Coordinated Universal Time)</a:t>
             </a:r>
             <a:endParaRPr lang="en-US" dirty="0"/>
           </a:p>
@@ -21378,7 +21378,7 @@
                 <a:ea typeface="Helvetica" pitchFamily="34" charset="-122"/>
                 <a:cs typeface="Helvetica" pitchFamily="34" charset="-120"/>
               </a:rPr>
-              <a:t>API-BRIDGE FOR POWERVS</a:t>
+              <a:t>API-BRIDGE FOR I </a:t>
             </a:r>
             <a:endParaRPr lang="en-US" dirty="0"/>
           </a:p>
@@ -22390,7 +22390,7 @@
       </p:sp>
       <p:pic>
         <p:nvPicPr>
-          <p:cNvPr id="61" name="Object 60" descr="public/generated/icons/5b8aa656-9da6-4683-a21b-7d3d45361d94.png">    </p:cNvPr>
+          <p:cNvPr id="61" name="Object 60" descr="public/generated/icons/3e256427-c6fd-4ba6-aae9-d809eb39ea15.png">    </p:cNvPr>
           <p:cNvPicPr>
             <a:picLocks noChangeAspect="1"/>
           </p:cNvPicPr>
@@ -22446,7 +22446,7 @@
                 <a:ea typeface="Helvetica" pitchFamily="34" charset="-122"/>
                 <a:cs typeface="Helvetica" pitchFamily="34" charset="-120"/>
               </a:rPr>
-              <a:t>CHECK-A-ROO</a:t>
+              <a:t>CELERITY COPYASSURE FOR POWERVS</a:t>
             </a:r>
             <a:endParaRPr lang="en-US" dirty="0"/>
           </a:p>
@@ -22479,7 +22479,7 @@
       </p:sp>
       <p:pic>
         <p:nvPicPr>
-          <p:cNvPr id="64" name="Object 63" descr="public/generated/icons/0a42129b-9839-42b7-90c7-7f3adb435379.png">    </p:cNvPr>
+          <p:cNvPr id="64" name="Object 63" descr="public/generated/icons/82114d8b-41e0-4f31-a8c8-b36e4f80b077.png">    </p:cNvPr>
           <p:cNvPicPr>
             <a:picLocks noChangeAspect="1"/>
           </p:cNvPicPr>
@@ -22535,7 +22535,7 @@
                 <a:ea typeface="Helvetica" pitchFamily="34" charset="-122"/>
                 <a:cs typeface="Helvetica" pitchFamily="34" charset="-120"/>
               </a:rPr>
-              <a:t>CITRIX NETSCALER VPX</a:t>
+              <a:t>CELERITY PROFESSIONAL SERVICES FOR POWERVS</a:t>
             </a:r>
             <a:endParaRPr lang="en-US" dirty="0"/>
           </a:p>
@@ -22568,7 +22568,7 @@
       </p:sp>
       <p:pic>
         <p:nvPicPr>
-          <p:cNvPr id="67" name="Object 66" descr="public/generated/icons/is.vpn-server.png">    </p:cNvPr>
+          <p:cNvPr id="67" name="Object 66" descr="public/generated/icons/5b8aa656-9da6-4683-a21b-7d3d45361d94.png">    </p:cNvPr>
           <p:cNvPicPr>
             <a:picLocks noChangeAspect="1"/>
           </p:cNvPicPr>
@@ -22624,7 +22624,7 @@
                 <a:ea typeface="Helvetica" pitchFamily="34" charset="-122"/>
                 <a:cs typeface="Helvetica" pitchFamily="34" charset="-120"/>
               </a:rPr>
-              <a:t>CLIENT VPN FOR VPC</a:t>
+              <a:t>CHECK-A-ROO</a:t>
             </a:r>
             <a:endParaRPr lang="en-US" dirty="0"/>
           </a:p>
@@ -22657,7 +22657,7 @@
       </p:sp>
       <p:pic>
         <p:nvPicPr>
-          <p:cNvPr id="70" name="Object 69" descr="public/generated/icons/6cde723c-9e49-74ac-4266-3f7a9bb74216.png">    </p:cNvPr>
+          <p:cNvPr id="70" name="Object 69" descr="public/generated/icons/0a42129b-9839-42b7-90c7-7f3adb435379.png">    </p:cNvPr>
           <p:cNvPicPr>
             <a:picLocks noChangeAspect="1"/>
           </p:cNvPicPr>
@@ -22713,7 +22713,7 @@
                 <a:ea typeface="Helvetica" pitchFamily="34" charset="-122"/>
                 <a:cs typeface="Helvetica" pitchFamily="34" charset="-120"/>
               </a:rPr>
-              <a:t>CLOUD BACKUP FOR CLASSIC</a:t>
+              <a:t>CITRIX NETSCALER VPX</a:t>
             </a:r>
             <a:endParaRPr lang="en-US" dirty="0"/>
           </a:p>
@@ -22746,7 +22746,7 @@
       </p:sp>
       <p:pic>
         <p:nvPicPr>
-          <p:cNvPr id="73" name="Object 72" descr="public/generated/icons/is.backup-policy.png">    </p:cNvPr>
+          <p:cNvPr id="73" name="Object 72" descr="public/generated/icons/is.vpn-server.png">    </p:cNvPr>
           <p:cNvPicPr>
             <a:picLocks noChangeAspect="1"/>
           </p:cNvPicPr>
@@ -22802,7 +22802,7 @@
                 <a:ea typeface="Helvetica" pitchFamily="34" charset="-122"/>
                 <a:cs typeface="Helvetica" pitchFamily="34" charset="-120"/>
               </a:rPr>
-              <a:t>CLOUD BACKUP FOR VPC</a:t>
+              <a:t>CLIENT VPN FOR VPC</a:t>
             </a:r>
             <a:endParaRPr lang="en-US" dirty="0"/>
           </a:p>
@@ -22835,7 +22835,7 @@
       </p:sp>
       <p:pic>
         <p:nvPicPr>
-          <p:cNvPr id="76" name="Object 75" descr="public/generated/icons/hardware-security-module.png">    </p:cNvPr>
+          <p:cNvPr id="76" name="Object 75" descr="public/generated/icons/6cde723c-9e49-74ac-4266-3f7a9bb74216.png">    </p:cNvPr>
           <p:cNvPicPr>
             <a:picLocks noChangeAspect="1"/>
           </p:cNvPicPr>
@@ -22891,7 +22891,7 @@
                 <a:ea typeface="Helvetica" pitchFamily="34" charset="-122"/>
                 <a:cs typeface="Helvetica" pitchFamily="34" charset="-120"/>
               </a:rPr>
-              <a:t>CLOUD HSM</a:t>
+              <a:t>CLOUD BACKUP FOR CLASSIC</a:t>
             </a:r>
             <a:endParaRPr lang="en-US" dirty="0"/>
           </a:p>
@@ -22924,7 +22924,7 @@
       </p:sp>
       <p:pic>
         <p:nvPicPr>
-          <p:cNvPr id="79" name="Object 78" descr="public/generated/icons/a3b01d2d-5457-4269-8bd5-a7c815bd2f41.png">    </p:cNvPr>
+          <p:cNvPr id="79" name="Object 78" descr="public/generated/icons/is.backup-policy.png">    </p:cNvPr>
           <p:cNvPicPr>
             <a:picLocks noChangeAspect="1"/>
           </p:cNvPicPr>
@@ -22980,7 +22980,7 @@
                 <a:ea typeface="Helvetica" pitchFamily="34" charset="-122"/>
                 <a:cs typeface="Helvetica" pitchFamily="34" charset="-120"/>
               </a:rPr>
-              <a:t>CLOUD LOAD BALANCER</a:t>
+              <a:t>CLOUD BACKUP FOR VPC</a:t>
             </a:r>
             <a:endParaRPr lang="en-US" dirty="0"/>
           </a:p>
@@ -23013,7 +23013,7 @@
       </p:sp>
       <p:pic>
         <p:nvPicPr>
-          <p:cNvPr id="82" name="Object 81" descr="public/generated/icons/cd515180-d78a-11ec-b396-db7d306c4f73.png">    </p:cNvPr>
+          <p:cNvPr id="82" name="Object 81" descr="public/generated/icons/hardware-security-module.png">    </p:cNvPr>
           <p:cNvPicPr>
             <a:picLocks noChangeAspect="1"/>
           </p:cNvPicPr>
@@ -23069,7 +23069,7 @@
                 <a:ea typeface="Helvetica" pitchFamily="34" charset="-122"/>
                 <a:cs typeface="Helvetica" pitchFamily="34" charset="-120"/>
               </a:rPr>
-              <a:t>CLOUD LOGS</a:t>
+              <a:t>CLOUD HSM</a:t>
             </a:r>
             <a:endParaRPr lang="en-US" dirty="0"/>
           </a:p>
@@ -23102,7 +23102,7 @@
       </p:sp>
       <p:pic>
         <p:nvPicPr>
-          <p:cNvPr id="85" name="Object 84" descr="public/generated/icons/090c2c10-8c38-11e8-bec2-493df9c49eb8.png">    </p:cNvPr>
+          <p:cNvPr id="85" name="Object 84" descr="public/generated/icons/a3b01d2d-5457-4269-8bd5-a7c815bd2f41.png">    </p:cNvPr>
           <p:cNvPicPr>
             <a:picLocks noChangeAspect="1"/>
           </p:cNvPicPr>
@@ -23158,7 +23158,7 @@
                 <a:ea typeface="Helvetica" pitchFamily="34" charset="-122"/>
                 <a:cs typeface="Helvetica" pitchFamily="34" charset="-120"/>
               </a:rPr>
-              <a:t>CLOUD MONITORING</a:t>
+              <a:t>CLOUD LOAD BALANCER</a:t>
             </a:r>
             <a:endParaRPr lang="en-US" dirty="0"/>
           </a:p>
@@ -23191,7 +23191,7 @@
       </p:sp>
       <p:pic>
         <p:nvPicPr>
-          <p:cNvPr id="88" name="Object 87" descr="public/generated/icons/a9617650-09ff-11ec-85f2-d10915d24d79.png">    </p:cNvPr>
+          <p:cNvPr id="88" name="Object 87" descr="public/generated/icons/cd515180-d78a-11ec-b396-db7d306c4f73.png">    </p:cNvPr>
           <p:cNvPicPr>
             <a:picLocks noChangeAspect="1"/>
           </p:cNvPicPr>
@@ -23247,7 +23247,7 @@
                 <a:ea typeface="Helvetica" pitchFamily="34" charset="-122"/>
                 <a:cs typeface="Helvetica" pitchFamily="34" charset="-120"/>
               </a:rPr>
-              <a:t>CLOUD NATIVE STORAGE AND DATA SERVICE</a:t>
+              <a:t>CLOUD LOGS</a:t>
             </a:r>
             <a:endParaRPr lang="en-US" dirty="0"/>
           </a:p>
@@ -23280,7 +23280,7 @@
       </p:sp>
       <p:pic>
         <p:nvPicPr>
-          <p:cNvPr id="91" name="Object 90" descr="public/generated/icons/dff97f5c-bc5e-4455-b470-411c3edbe49c.png">    </p:cNvPr>
+          <p:cNvPr id="91" name="Object 90" descr="public/generated/icons/090c2c10-8c38-11e8-bec2-493df9c49eb8.png">    </p:cNvPr>
           <p:cNvPicPr>
             <a:picLocks noChangeAspect="1"/>
           </p:cNvPicPr>
@@ -23336,7 +23336,7 @@
                 <a:ea typeface="Helvetica" pitchFamily="34" charset="-122"/>
                 <a:cs typeface="Helvetica" pitchFamily="34" charset="-120"/>
               </a:rPr>
-              <a:t>CLOUD OBJECT STORAGE</a:t>
+              <a:t>CLOUD MONITORING</a:t>
             </a:r>
             <a:endParaRPr lang="en-US" dirty="0"/>
           </a:p>
@@ -23369,7 +23369,7 @@
       </p:sp>
       <p:pic>
         <p:nvPicPr>
-          <p:cNvPr id="94" name="Object 93" descr="public/generated/icons/8.png">    </p:cNvPr>
+          <p:cNvPr id="94" name="Object 93" descr="public/generated/icons/a9617650-09ff-11ec-85f2-d10915d24d79.png">    </p:cNvPr>
           <p:cNvPicPr>
             <a:picLocks noChangeAspect="1"/>
           </p:cNvPicPr>
@@ -23425,7 +23425,7 @@
                 <a:ea typeface="Helvetica" pitchFamily="34" charset="-122"/>
                 <a:cs typeface="Helvetica" pitchFamily="34" charset="-120"/>
               </a:rPr>
-              <a:t>CLOUD OBJECT STORAGE (CLASSIC)</a:t>
+              <a:t>CLOUD NATIVE STORAGE AND DATA SERVICE</a:t>
             </a:r>
             <a:endParaRPr lang="en-US" dirty="0"/>
           </a:p>
@@ -23458,7 +23458,7 @@
       </p:sp>
       <p:pic>
         <p:nvPicPr>
-          <p:cNvPr id="97" name="Object 96" descr="public/generated/icons/35759612-efad-48d5-ad2a-5336349ed9bc.png">    </p:cNvPr>
+          <p:cNvPr id="97" name="Object 96" descr="public/generated/icons/dff97f5c-bc5e-4455-b470-411c3edbe49c.png">    </p:cNvPr>
           <p:cNvPicPr>
             <a:picLocks noChangeAspect="1"/>
           </p:cNvPicPr>
@@ -23514,7 +23514,7 @@
                 <a:ea typeface="Helvetica" pitchFamily="34" charset="-122"/>
                 <a:cs typeface="Helvetica" pitchFamily="34" charset="-120"/>
               </a:rPr>
-              <a:t>CLOUD PLATFORM PROFESSIONAL SERVICES</a:t>
+              <a:t>CLOUD OBJECT STORAGE</a:t>
             </a:r>
             <a:endParaRPr lang="en-US" dirty="0"/>
           </a:p>
@@ -23547,7 +23547,7 @@
       </p:sp>
       <p:pic>
         <p:nvPicPr>
-          <p:cNvPr id="100" name="Object 99" descr="public/generated/icons/is.reservation.png">    </p:cNvPr>
+          <p:cNvPr id="100" name="Object 99" descr="public/generated/icons/8.png">    </p:cNvPr>
           <p:cNvPicPr>
             <a:picLocks noChangeAspect="1"/>
           </p:cNvPicPr>
@@ -23603,7 +23603,7 @@
                 <a:ea typeface="Helvetica" pitchFamily="34" charset="-122"/>
                 <a:cs typeface="Helvetica" pitchFamily="34" charset="-120"/>
               </a:rPr>
-              <a:t>CLOUD RESERVATIONS FOR VPC</a:t>
+              <a:t>CLOUD OBJECT STORAGE (CLASSIC)</a:t>
             </a:r>
             <a:endParaRPr lang="en-US" dirty="0"/>
           </a:p>
@@ -23636,7 +23636,7 @@
       </p:sp>
       <p:pic>
         <p:nvPicPr>
-          <p:cNvPr id="103" name="Object 102" descr="public/generated/icons/cf329950-0a3e-11e8-922e-f1366c6e1c83-hytrust.png">    </p:cNvPr>
+          <p:cNvPr id="103" name="Object 102" descr="public/generated/icons/35759612-efad-48d5-ad2a-5336349ed9bc.png">    </p:cNvPr>
           <p:cNvPicPr>
             <a:picLocks noChangeAspect="1"/>
           </p:cNvPicPr>
@@ -23692,7 +23692,7 @@
                 <a:ea typeface="Helvetica" pitchFamily="34" charset="-122"/>
                 <a:cs typeface="Helvetica" pitchFamily="34" charset="-120"/>
               </a:rPr>
-              <a:t>CLOUD SECURE VIRTUALIZATION</a:t>
+              <a:t>CLOUD PLATFORM PROFESSIONAL SERVICES</a:t>
             </a:r>
             <a:endParaRPr lang="en-US" dirty="0"/>
           </a:p>
@@ -23725,7 +23725,7 @@
       </p:sp>
       <p:pic>
         <p:nvPicPr>
-          <p:cNvPr id="106" name="Object 105" descr="public/generated/icons/cloudant.png">    </p:cNvPr>
+          <p:cNvPr id="106" name="Object 105" descr="public/generated/icons/is.reservation.png">    </p:cNvPr>
           <p:cNvPicPr>
             <a:picLocks noChangeAspect="1"/>
           </p:cNvPicPr>
@@ -23781,7 +23781,7 @@
                 <a:ea typeface="Helvetica" pitchFamily="34" charset="-122"/>
                 <a:cs typeface="Helvetica" pitchFamily="34" charset="-120"/>
               </a:rPr>
-              <a:t>CLOUDANT</a:t>
+              <a:t>CLOUD RESERVATIONS FOR VPC</a:t>
             </a:r>
             <a:endParaRPr lang="en-US" dirty="0"/>
           </a:p>
@@ -23814,7 +23814,7 @@
       </p:sp>
       <p:pic>
         <p:nvPicPr>
-          <p:cNvPr id="109" name="Object 108" descr="public/generated/icons/e7114cc0-ffd2-4199-bc1a-ea79a6f09e89.png">    </p:cNvPr>
+          <p:cNvPr id="109" name="Object 108" descr="public/generated/icons/cf329950-0a3e-11e8-922e-f1366c6e1c83-hytrust.png">    </p:cNvPr>
           <p:cNvPicPr>
             <a:picLocks noChangeAspect="1"/>
           </p:cNvPicPr>
@@ -23870,7 +23870,7 @@
                 <a:ea typeface="Helvetica" pitchFamily="34" charset="-122"/>
                 <a:cs typeface="Helvetica" pitchFamily="34" charset="-120"/>
               </a:rPr>
-              <a:t>CLOUDSWAY CDN PRO</a:t>
+              <a:t>CLOUD SECURE VIRTUALIZATION</a:t>
             </a:r>
             <a:endParaRPr lang="en-US" dirty="0"/>
           </a:p>
@@ -23936,7 +23936,7 @@
       </p:sp>
       <p:pic>
         <p:nvPicPr>
-          <p:cNvPr id="3" name="Object 2" descr="public/generated/icons/is.cluster-network.png">    </p:cNvPr>
+          <p:cNvPr id="3" name="Object 2" descr="public/generated/icons/cloudant.png">    </p:cNvPr>
           <p:cNvPicPr>
             <a:picLocks noChangeAspect="1"/>
           </p:cNvPicPr>
@@ -23992,7 +23992,7 @@
                 <a:ea typeface="Helvetica" pitchFamily="34" charset="-122"/>
                 <a:cs typeface="Helvetica" pitchFamily="34" charset="-120"/>
               </a:rPr>
-              <a:t>CLUSTER NETWORK</a:t>
+              <a:t>CLOUDANT</a:t>
             </a:r>
             <a:endParaRPr lang="en-US" dirty="0"/>
           </a:p>
@@ -24025,7 +24025,7 @@
       </p:sp>
       <p:pic>
         <p:nvPicPr>
-          <p:cNvPr id="6" name="Object 5" descr="public/generated/icons/afb603e9-8738-4542-abf4-baf5231a4dbe.png">    </p:cNvPr>
+          <p:cNvPr id="6" name="Object 5" descr="public/generated/icons/e7114cc0-ffd2-4199-bc1a-ea79a6f09e89.png">    </p:cNvPr>
           <p:cNvPicPr>
             <a:picLocks noChangeAspect="1"/>
           </p:cNvPicPr>
@@ -24081,7 +24081,7 @@
                 <a:ea typeface="Helvetica" pitchFamily="34" charset="-122"/>
                 <a:cs typeface="Helvetica" pitchFamily="34" charset="-120"/>
               </a:rPr>
-              <a:t>COBALT IRON - SECURE AUTOMATED BACKUP WITH COMPASS</a:t>
+              <a:t>CLOUDSWAY CDN PRO</a:t>
             </a:r>
             <a:endParaRPr lang="en-US" dirty="0"/>
           </a:p>
@@ -24114,7 +24114,7 @@
       </p:sp>
       <p:pic>
         <p:nvPicPr>
-          <p:cNvPr id="9" name="Object 8" descr="public/generated/icons/2ad2fdd0-bba5-11ea-8966-5d6402fed1c7.png">    </p:cNvPr>
+          <p:cNvPr id="9" name="Object 8" descr="public/generated/icons/is.cluster-network.png">    </p:cNvPr>
           <p:cNvPicPr>
             <a:picLocks noChangeAspect="1"/>
           </p:cNvPicPr>
@@ -24170,7 +24170,7 @@
                 <a:ea typeface="Helvetica" pitchFamily="34" charset="-122"/>
                 <a:cs typeface="Helvetica" pitchFamily="34" charset="-120"/>
               </a:rPr>
-              <a:t>CODE ENGINE</a:t>
+              <a:t>CLUSTER NETWORK</a:t>
             </a:r>
             <a:endParaRPr lang="en-US" dirty="0"/>
           </a:p>
@@ -24203,7 +24203,7 @@
       </p:sp>
       <p:pic>
         <p:nvPicPr>
-          <p:cNvPr id="12" name="Object 11" descr="public/generated/icons/3e1a2c30-11dd-11ec-b621-67e0f6600d56.png">    </p:cNvPr>
+          <p:cNvPr id="12" name="Object 11" descr="public/generated/icons/afb603e9-8738-4542-abf4-baf5231a4dbe.png">    </p:cNvPr>
           <p:cNvPicPr>
             <a:picLocks noChangeAspect="1"/>
           </p:cNvPicPr>
@@ -24259,7 +24259,7 @@
                 <a:ea typeface="Helvetica" pitchFamily="34" charset="-122"/>
                 <a:cs typeface="Helvetica" pitchFamily="34" charset="-120"/>
               </a:rPr>
-              <a:t>COMPLIANCE AND CUSTOMER EXPERIENCE AUTOMATION</a:t>
+              <a:t>COBALT IRON - SECURE AUTOMATED BACKUP WITH COMPASS</a:t>
             </a:r>
             <a:endParaRPr lang="en-US" dirty="0"/>
           </a:p>
@@ -24292,7 +24292,7 @@
       </p:sp>
       <p:pic>
         <p:nvPicPr>
-          <p:cNvPr id="15" name="Object 14" descr="public/generated/icons/ComposeElasticsearch-P.png">    </p:cNvPr>
+          <p:cNvPr id="15" name="Object 14" descr="public/generated/icons/2ad2fdd0-bba5-11ea-8966-5d6402fed1c7.png">    </p:cNvPr>
           <p:cNvPicPr>
             <a:picLocks noChangeAspect="1"/>
           </p:cNvPicPr>
@@ -24348,7 +24348,7 @@
                 <a:ea typeface="Helvetica" pitchFamily="34" charset="-122"/>
                 <a:cs typeface="Helvetica" pitchFamily="34" charset="-120"/>
               </a:rPr>
-              <a:t>COMPOSE FOR ELASTICSEARCH</a:t>
+              <a:t>CODE ENGINE</a:t>
             </a:r>
             <a:endParaRPr lang="en-US" dirty="0"/>
           </a:p>
@@ -24381,7 +24381,7 @@
       </p:sp>
       <p:pic>
         <p:nvPicPr>
-          <p:cNvPr id="18" name="Object 17" descr="public/generated/icons/ComposeEtcd-P.png">    </p:cNvPr>
+          <p:cNvPr id="18" name="Object 17" descr="public/generated/icons/3e1a2c30-11dd-11ec-b621-67e0f6600d56.png">    </p:cNvPr>
           <p:cNvPicPr>
             <a:picLocks noChangeAspect="1"/>
           </p:cNvPicPr>
@@ -24437,7 +24437,7 @@
                 <a:ea typeface="Helvetica" pitchFamily="34" charset="-122"/>
                 <a:cs typeface="Helvetica" pitchFamily="34" charset="-120"/>
               </a:rPr>
-              <a:t>COMPOSE FOR ETCD</a:t>
+              <a:t>COMPLIANCE AND CUSTOMER EXPERIENCE AUTOMATION</a:t>
             </a:r>
             <a:endParaRPr lang="en-US" dirty="0"/>
           </a:p>
@@ -24470,7 +24470,7 @@
       </p:sp>
       <p:pic>
         <p:nvPicPr>
-          <p:cNvPr id="21" name="Object 20" descr="public/generated/icons/ComposeMongo-P.png">    </p:cNvPr>
+          <p:cNvPr id="21" name="Object 20" descr="public/generated/icons/ComposeElasticsearch-P.png">    </p:cNvPr>
           <p:cNvPicPr>
             <a:picLocks noChangeAspect="1"/>
           </p:cNvPicPr>
@@ -24526,7 +24526,7 @@
                 <a:ea typeface="Helvetica" pitchFamily="34" charset="-122"/>
                 <a:cs typeface="Helvetica" pitchFamily="34" charset="-120"/>
               </a:rPr>
-              <a:t>COMPOSE FOR MONGODB</a:t>
+              <a:t>COMPOSE FOR ELASTICSEARCH</a:t>
             </a:r>
             <a:endParaRPr lang="en-US" dirty="0"/>
           </a:p>
@@ -24559,7 +24559,7 @@
       </p:sp>
       <p:pic>
         <p:nvPicPr>
-          <p:cNvPr id="24" name="Object 23" descr="public/generated/icons/ComposePostgreSQL-P.png">    </p:cNvPr>
+          <p:cNvPr id="24" name="Object 23" descr="public/generated/icons/ComposeEtcd-P.png">    </p:cNvPr>
           <p:cNvPicPr>
             <a:picLocks noChangeAspect="1"/>
           </p:cNvPicPr>
@@ -24615,7 +24615,7 @@
                 <a:ea typeface="Helvetica" pitchFamily="34" charset="-122"/>
                 <a:cs typeface="Helvetica" pitchFamily="34" charset="-120"/>
               </a:rPr>
-              <a:t>COMPOSE FOR POSTGRESQL</a:t>
+              <a:t>COMPOSE FOR ETCD</a:t>
             </a:r>
             <a:endParaRPr lang="en-US" dirty="0"/>
           </a:p>
@@ -24648,7 +24648,7 @@
       </p:sp>
       <p:pic>
         <p:nvPicPr>
-          <p:cNvPr id="27" name="Object 26" descr="public/generated/icons/ComposeRabbitMQ-P.png">    </p:cNvPr>
+          <p:cNvPr id="27" name="Object 26" descr="public/generated/icons/ComposeMongo-P.png">    </p:cNvPr>
           <p:cNvPicPr>
             <a:picLocks noChangeAspect="1"/>
           </p:cNvPicPr>
@@ -24704,7 +24704,7 @@
                 <a:ea typeface="Helvetica" pitchFamily="34" charset="-122"/>
                 <a:cs typeface="Helvetica" pitchFamily="34" charset="-120"/>
               </a:rPr>
-              <a:t>COMPOSE FOR RABBITMQ</a:t>
+              <a:t>COMPOSE FOR MONGODB</a:t>
             </a:r>
             <a:endParaRPr lang="en-US" dirty="0"/>
           </a:p>
@@ -24737,7 +24737,7 @@
       </p:sp>
       <p:pic>
         <p:nvPicPr>
-          <p:cNvPr id="30" name="Object 29" descr="public/generated/icons/ComposeRedis-P.png">    </p:cNvPr>
+          <p:cNvPr id="30" name="Object 29" descr="public/generated/icons/ComposePostgreSQL-P.png">    </p:cNvPr>
           <p:cNvPicPr>
             <a:picLocks noChangeAspect="1"/>
           </p:cNvPicPr>
@@ -24793,7 +24793,7 @@
                 <a:ea typeface="Helvetica" pitchFamily="34" charset="-122"/>
                 <a:cs typeface="Helvetica" pitchFamily="34" charset="-120"/>
               </a:rPr>
-              <a:t>COMPOSE FOR REDIS</a:t>
+              <a:t>COMPOSE FOR POSTGRESQL</a:t>
             </a:r>
             <a:endParaRPr lang="en-US" dirty="0"/>
           </a:p>
@@ -24826,7 +24826,7 @@
       </p:sp>
       <p:pic>
         <p:nvPicPr>
-          <p:cNvPr id="33" name="Object 32" descr="public/generated/icons/public.bluemix.container.registry.png">    </p:cNvPr>
+          <p:cNvPr id="33" name="Object 32" descr="public/generated/icons/ComposeRabbitMQ-P.png">    </p:cNvPr>
           <p:cNvPicPr>
             <a:picLocks noChangeAspect="1"/>
           </p:cNvPicPr>
@@ -24882,7 +24882,7 @@
                 <a:ea typeface="Helvetica" pitchFamily="34" charset="-122"/>
                 <a:cs typeface="Helvetica" pitchFamily="34" charset="-120"/>
               </a:rPr>
-              <a:t>CONTAINER REGISTRY</a:t>
+              <a:t>COMPOSE FOR RABBITMQ</a:t>
             </a:r>
             <a:endParaRPr lang="en-US" dirty="0"/>
           </a:p>
@@ -24915,7 +24915,7 @@
       </p:sp>
       <p:pic>
         <p:nvPicPr>
-          <p:cNvPr id="36" name="Object 35" descr="public/generated/icons/4ad9c1b8-e58e-2a9d-ccb8-d4d5ae84abc0.png">    </p:cNvPr>
+          <p:cNvPr id="36" name="Object 35" descr="public/generated/icons/ComposeRedis-P.png">    </p:cNvPr>
           <p:cNvPicPr>
             <a:picLocks noChangeAspect="1"/>
           </p:cNvPicPr>
@@ -24971,7 +24971,7 @@
                 <a:ea typeface="Helvetica" pitchFamily="34" charset="-122"/>
                 <a:cs typeface="Helvetica" pitchFamily="34" charset="-120"/>
               </a:rPr>
-              <a:t>CONTAINER SECURITY SERVICES</a:t>
+              <a:t>COMPOSE FOR REDIS</a:t>
             </a:r>
             <a:endParaRPr lang="en-US" dirty="0"/>
           </a:p>
@@ -25004,7 +25004,7 @@
       </p:sp>
       <p:pic>
         <p:nvPicPr>
-          <p:cNvPr id="39" name="Object 38" descr="public/generated/icons/59b735ee-5938-4ebd-a6b2-541aef2d1f68.png">    </p:cNvPr>
+          <p:cNvPr id="39" name="Object 38" descr="public/generated/icons/public.bluemix.container.registry.png">    </p:cNvPr>
           <p:cNvPicPr>
             <a:picLocks noChangeAspect="1"/>
           </p:cNvPicPr>
@@ -25060,7 +25060,7 @@
                 <a:ea typeface="Helvetica" pitchFamily="34" charset="-122"/>
                 <a:cs typeface="Helvetica" pitchFamily="34" charset="-120"/>
               </a:rPr>
-              <a:t>CONTINUOUS DELIVERY</a:t>
+              <a:t>CONTAINER REGISTRY</a:t>
             </a:r>
             <a:endParaRPr lang="en-US" dirty="0"/>
           </a:p>
@@ -25093,7 +25093,7 @@
       </p:sp>
       <p:pic>
         <p:nvPicPr>
-          <p:cNvPr id="42" name="Object 41" descr="public/generated/icons/d19358fd-a20a-4bb7-9727-9d3c129db741.png">    </p:cNvPr>
+          <p:cNvPr id="42" name="Object 41" descr="public/generated/icons/4ad9c1b8-e58e-2a9d-ccb8-d4d5ae84abc0.png">    </p:cNvPr>
           <p:cNvPicPr>
             <a:picLocks noChangeAspect="1"/>
           </p:cNvPicPr>
@@ -25149,7 +25149,7 @@
                 <a:ea typeface="Helvetica" pitchFamily="34" charset="-122"/>
                 <a:cs typeface="Helvetica" pitchFamily="34" charset="-120"/>
               </a:rPr>
-              <a:t>CONVERLISTICS</a:t>
+              <a:t>CONTAINER SECURITY SERVICES</a:t>
             </a:r>
             <a:endParaRPr lang="en-US" dirty="0"/>
           </a:p>
@@ -25182,7 +25182,7 @@
       </p:sp>
       <p:pic>
         <p:nvPicPr>
-          <p:cNvPr id="45" name="Object 44" descr="public/generated/icons/742c2c0f-1c40-480d-ab7b-76e56a89f51b.png">    </p:cNvPr>
+          <p:cNvPr id="45" name="Object 44" descr="public/generated/icons/59b735ee-5938-4ebd-a6b2-541aef2d1f68.png">    </p:cNvPr>
           <p:cNvPicPr>
             <a:picLocks noChangeAspect="1"/>
           </p:cNvPicPr>
@@ -25238,7 +25238,7 @@
                 <a:ea typeface="Helvetica" pitchFamily="34" charset="-122"/>
                 <a:cs typeface="Helvetica" pitchFamily="34" charset="-120"/>
               </a:rPr>
-              <a:t>CONVERTIO VMWARE WORKLOAD MIGRATION AND CONVERSION</a:t>
+              <a:t>CONTINUOUS DELIVERY</a:t>
             </a:r>
             <a:endParaRPr lang="en-US" dirty="0"/>
           </a:p>
@@ -25271,7 +25271,7 @@
       </p:sp>
       <p:pic>
         <p:nvPicPr>
-          <p:cNvPr id="48" name="Object 47" descr="public/generated/icons/5da26b90-7b83-44b5-b6d3-778b408b77db.png">    </p:cNvPr>
+          <p:cNvPr id="48" name="Object 47" descr="public/generated/icons/d19358fd-a20a-4bb7-9727-9d3c129db741.png">    </p:cNvPr>
           <p:cNvPicPr>
             <a:picLocks noChangeAspect="1"/>
           </p:cNvPicPr>
@@ -25327,7 +25327,7 @@
                 <a:ea typeface="Helvetica" pitchFamily="34" charset="-122"/>
                 <a:cs typeface="Helvetica" pitchFamily="34" charset="-120"/>
               </a:rPr>
-              <a:t>CRUSHBANK</a:t>
+              <a:t>CONVERLISTICS</a:t>
             </a:r>
             <a:endParaRPr lang="en-US" dirty="0"/>
           </a:p>
@@ -25360,7 +25360,7 @@
       </p:sp>
       <p:pic>
         <p:nvPicPr>
-          <p:cNvPr id="51" name="Object 50" descr="public/generated/icons/07d4aa9f-1f71-43bb-9916-8e9cff5bc426.png">    </p:cNvPr>
+          <p:cNvPr id="51" name="Object 50" descr="public/generated/icons/742c2c0f-1c40-480d-ab7b-76e56a89f51b.png">    </p:cNvPr>
           <p:cNvPicPr>
             <a:picLocks noChangeAspect="1"/>
           </p:cNvPicPr>
@@ -25416,7 +25416,7 @@
                 <a:ea typeface="Helvetica" pitchFamily="34" charset="-122"/>
                 <a:cs typeface="Helvetica" pitchFamily="34" charset="-120"/>
               </a:rPr>
-              <a:t>CUSTOM MIGRATIONS DR AND MANAGEMENT AS A SERVICE</a:t>
+              <a:t>CONVERTIO VMWARE WORKLOAD MIGRATION AND CONVERSION</a:t>
             </a:r>
             <a:endParaRPr lang="en-US" dirty="0"/>
           </a:p>
@@ -25449,7 +25449,7 @@
       </p:sp>
       <p:pic>
         <p:nvPicPr>
-          <p:cNvPr id="54" name="Object 53" descr="public/generated/icons/1ab48530-6638-4fce-a386-0bd598576a0a.png">    </p:cNvPr>
+          <p:cNvPr id="54" name="Object 53" descr="public/generated/icons/5da26b90-7b83-44b5-b6d3-778b408b77db.png">    </p:cNvPr>
           <p:cNvPicPr>
             <a:picLocks noChangeAspect="1"/>
           </p:cNvPicPr>
@@ -25505,7 +25505,7 @@
                 <a:ea typeface="Helvetica" pitchFamily="34" charset="-122"/>
                 <a:cs typeface="Helvetica" pitchFamily="34" charset="-120"/>
               </a:rPr>
-              <a:t>CYBERSTRONG BY CYBERSAINT</a:t>
+              <a:t>CRUSHBANK</a:t>
             </a:r>
             <a:endParaRPr lang="en-US" dirty="0"/>
           </a:p>
@@ -25538,7 +25538,7 @@
       </p:sp>
       <p:pic>
         <p:nvPicPr>
-          <p:cNvPr id="57" name="Object 56" descr="public/generated/icons/840bcb30-f8c3-11ed-afcd-01dba1a5ada3.png">    </p:cNvPr>
+          <p:cNvPr id="57" name="Object 56" descr="public/generated/icons/07d4aa9f-1f71-43bb-9916-8e9cff5bc426.png">    </p:cNvPr>
           <p:cNvPicPr>
             <a:picLocks noChangeAspect="1"/>
           </p:cNvPicPr>
@@ -25594,7 +25594,7 @@
                 <a:ea typeface="Helvetica" pitchFamily="34" charset="-122"/>
                 <a:cs typeface="Helvetica" pitchFamily="34" charset="-120"/>
               </a:rPr>
-              <a:t>DATA PRODUCT HUB</a:t>
+              <a:t>CUSTOM MIGRATIONS DR AND MANAGEMENT AS A SERVICE</a:t>
             </a:r>
             <a:endParaRPr lang="en-US" dirty="0"/>
           </a:p>
@@ -25627,7 +25627,7 @@
       </p:sp>
       <p:pic>
         <p:nvPicPr>
-          <p:cNvPr id="60" name="Object 59" descr="public/generated/icons/696b9880-9e9b-11ea-9054-e15e287f1e7f.png">    </p:cNvPr>
+          <p:cNvPr id="60" name="Object 59" descr="public/generated/icons/7e82fdcb-10bb-48bf-9ce1-44a3ca20c005.png">    </p:cNvPr>
           <p:cNvPicPr>
             <a:picLocks noChangeAspect="1"/>
           </p:cNvPicPr>
@@ -25683,7 +25683,7 @@
                 <a:ea typeface="Helvetica" pitchFamily="34" charset="-122"/>
                 <a:cs typeface="Helvetica" pitchFamily="34" charset="-120"/>
               </a:rPr>
-              <a:t>DATA REPLICATION</a:t>
+              <a:t>CVVKEY</a:t>
             </a:r>
             <a:endParaRPr lang="en-US" dirty="0"/>
           </a:p>
@@ -25716,7 +25716,7 @@
       </p:sp>
       <p:pic>
         <p:nvPicPr>
-          <p:cNvPr id="63" name="Object 62" descr="public/generated/icons/5d307850-0404-11eb-8c8b-c7d7505f656d.png">    </p:cNvPr>
+          <p:cNvPr id="63" name="Object 62" descr="public/generated/icons/1ab48530-6638-4fce-a386-0bd598576a0a.png">    </p:cNvPr>
           <p:cNvPicPr>
             <a:picLocks noChangeAspect="1"/>
           </p:cNvPicPr>
@@ -25772,7 +25772,7 @@
                 <a:ea typeface="Helvetica" pitchFamily="34" charset="-122"/>
                 <a:cs typeface="Helvetica" pitchFamily="34" charset="-120"/>
               </a:rPr>
-              <a:t>DATA VIRTUALIZATION</a:t>
+              <a:t>CYBERSTRONG BY CYBERSAINT</a:t>
             </a:r>
             <a:endParaRPr lang="en-US" dirty="0"/>
           </a:p>
@@ -25805,7 +25805,7 @@
       </p:sp>
       <p:pic>
         <p:nvPicPr>
-          <p:cNvPr id="66" name="Object 65" descr="public/generated/icons/databases-for-enterprisedb.png">    </p:cNvPr>
+          <p:cNvPr id="66" name="Object 65" descr="public/generated/icons/840bcb30-f8c3-11ed-afcd-01dba1a5ada3.png">    </p:cNvPr>
           <p:cNvPicPr>
             <a:picLocks noChangeAspect="1"/>
           </p:cNvPicPr>
@@ -25861,7 +25861,7 @@
                 <a:ea typeface="Helvetica" pitchFamily="34" charset="-122"/>
                 <a:cs typeface="Helvetica" pitchFamily="34" charset="-120"/>
               </a:rPr>
-              <a:t>DATABASES FOR EDB</a:t>
+              <a:t>DATA PRODUCT HUB</a:t>
             </a:r>
             <a:endParaRPr lang="en-US" dirty="0"/>
           </a:p>
@@ -25894,7 +25894,7 @@
       </p:sp>
       <p:pic>
         <p:nvPicPr>
-          <p:cNvPr id="69" name="Object 68" descr="public/generated/icons/databases-for-elasticsearch.png">    </p:cNvPr>
+          <p:cNvPr id="69" name="Object 68" descr="public/generated/icons/696b9880-9e9b-11ea-9054-e15e287f1e7f.png">    </p:cNvPr>
           <p:cNvPicPr>
             <a:picLocks noChangeAspect="1"/>
           </p:cNvPicPr>
@@ -25950,7 +25950,7 @@
                 <a:ea typeface="Helvetica" pitchFamily="34" charset="-122"/>
                 <a:cs typeface="Helvetica" pitchFamily="34" charset="-120"/>
               </a:rPr>
-              <a:t>DATABASES FOR ELASTICSEARCH</a:t>
+              <a:t>DATA REPLICATION</a:t>
             </a:r>
             <a:endParaRPr lang="en-US" dirty="0"/>
           </a:p>
@@ -25983,7 +25983,7 @@
       </p:sp>
       <p:pic>
         <p:nvPicPr>
-          <p:cNvPr id="72" name="Object 71" descr="public/generated/icons/databases-for-mongodb.png">    </p:cNvPr>
+          <p:cNvPr id="72" name="Object 71" descr="public/generated/icons/5d307850-0404-11eb-8c8b-c7d7505f656d.png">    </p:cNvPr>
           <p:cNvPicPr>
             <a:picLocks noChangeAspect="1"/>
           </p:cNvPicPr>
@@ -26039,7 +26039,7 @@
                 <a:ea typeface="Helvetica" pitchFamily="34" charset="-122"/>
                 <a:cs typeface="Helvetica" pitchFamily="34" charset="-120"/>
               </a:rPr>
-              <a:t>DATABASES FOR MONGODB</a:t>
+              <a:t>DATA VIRTUALIZATION</a:t>
             </a:r>
             <a:endParaRPr lang="en-US" dirty="0"/>
           </a:p>
@@ -26072,7 +26072,7 @@
       </p:sp>
       <p:pic>
         <p:nvPicPr>
-          <p:cNvPr id="75" name="Object 74" descr="public/generated/icons/databases-for-mysql.png">    </p:cNvPr>
+          <p:cNvPr id="75" name="Object 74" descr="public/generated/icons/databases-for-elasticsearch.png">    </p:cNvPr>
           <p:cNvPicPr>
             <a:picLocks noChangeAspect="1"/>
           </p:cNvPicPr>
@@ -26128,7 +26128,7 @@
                 <a:ea typeface="Helvetica" pitchFamily="34" charset="-122"/>
                 <a:cs typeface="Helvetica" pitchFamily="34" charset="-120"/>
               </a:rPr>
-              <a:t>DATABASES FOR MYSQL</a:t>
+              <a:t>DATABASES FOR ELASTICSEARCH</a:t>
             </a:r>
             <a:endParaRPr lang="en-US" dirty="0"/>
           </a:p>
@@ -26161,7 +26161,7 @@
       </p:sp>
       <p:pic>
         <p:nvPicPr>
-          <p:cNvPr id="78" name="Object 77" descr="public/generated/icons/databases-for-postgresql.png">    </p:cNvPr>
+          <p:cNvPr id="78" name="Object 77" descr="public/generated/icons/databases-for-mongodb.png">    </p:cNvPr>
           <p:cNvPicPr>
             <a:picLocks noChangeAspect="1"/>
           </p:cNvPicPr>
@@ -26217,7 +26217,7 @@
                 <a:ea typeface="Helvetica" pitchFamily="34" charset="-122"/>
                 <a:cs typeface="Helvetica" pitchFamily="34" charset="-120"/>
               </a:rPr>
-              <a:t>DATABASES FOR POSTGRESQL</a:t>
+              <a:t>DATABASES FOR MONGODB</a:t>
             </a:r>
             <a:endParaRPr lang="en-US" dirty="0"/>
           </a:p>
@@ -26250,7 +26250,7 @@
       </p:sp>
       <p:pic>
         <p:nvPicPr>
-          <p:cNvPr id="81" name="Object 80" descr="public/generated/icons/databases-for-redis.png">    </p:cNvPr>
+          <p:cNvPr id="81" name="Object 80" descr="public/generated/icons/databases-for-mysql.png">    </p:cNvPr>
           <p:cNvPicPr>
             <a:picLocks noChangeAspect="1"/>
           </p:cNvPicPr>
@@ -26306,7 +26306,7 @@
                 <a:ea typeface="Helvetica" pitchFamily="34" charset="-122"/>
                 <a:cs typeface="Helvetica" pitchFamily="34" charset="-120"/>
               </a:rPr>
-              <a:t>DATABASES FOR REDIS</a:t>
+              <a:t>DATABASES FOR MYSQL</a:t>
             </a:r>
             <a:endParaRPr lang="en-US" dirty="0"/>
           </a:p>
@@ -26339,7 +26339,7 @@
       </p:sp>
       <p:pic>
         <p:nvPicPr>
-          <p:cNvPr id="84" name="Object 83" descr="public/generated/icons/dd0532c0-f87c-11ea-be25-c9dc051df74f.png">    </p:cNvPr>
+          <p:cNvPr id="84" name="Object 83" descr="public/generated/icons/databases-for-postgresql.png">    </p:cNvPr>
           <p:cNvPicPr>
             <a:picLocks noChangeAspect="1"/>
           </p:cNvPicPr>
@@ -26395,7 +26395,7 @@
                 <a:ea typeface="Helvetica" pitchFamily="34" charset="-122"/>
                 <a:cs typeface="Helvetica" pitchFamily="34" charset="-120"/>
               </a:rPr>
-              <a:t>DATASTAGE</a:t>
+              <a:t>DATABASES FOR POSTGRESQL</a:t>
             </a:r>
             <a:endParaRPr lang="en-US" dirty="0"/>
           </a:p>
@@ -26428,7 +26428,7 @@
       </p:sp>
       <p:pic>
         <p:nvPicPr>
-          <p:cNvPr id="87" name="Object 86" descr="public/generated/icons/dashdb-for-transactions.png">    </p:cNvPr>
+          <p:cNvPr id="87" name="Object 86" descr="public/generated/icons/databases-for-redis.png">    </p:cNvPr>
           <p:cNvPicPr>
             <a:picLocks noChangeAspect="1"/>
           </p:cNvPicPr>
@@ -26484,7 +26484,7 @@
                 <a:ea typeface="Helvetica" pitchFamily="34" charset="-122"/>
                 <a:cs typeface="Helvetica" pitchFamily="34" charset="-120"/>
               </a:rPr>
-              <a:t>DB2</a:t>
+              <a:t>DATABASES FOR REDIS</a:t>
             </a:r>
             <a:endParaRPr lang="en-US" dirty="0"/>
           </a:p>
@@ -26517,7 +26517,7 @@
       </p:sp>
       <p:pic>
         <p:nvPicPr>
-          <p:cNvPr id="90" name="Object 89" descr="public/generated/icons/9e02e72d-00ce-4220-b44c-650c8314e58a.png">    </p:cNvPr>
+          <p:cNvPr id="90" name="Object 89" descr="public/generated/icons/dd0532c0-f87c-11ea-be25-c9dc051df74f.png">    </p:cNvPr>
           <p:cNvPicPr>
             <a:picLocks noChangeAspect="1"/>
           </p:cNvPicPr>
@@ -26573,7 +26573,7 @@
                 <a:ea typeface="Helvetica" pitchFamily="34" charset="-122"/>
                 <a:cs typeface="Helvetica" pitchFamily="34" charset="-120"/>
               </a:rPr>
-              <a:t>DB2 WAREHOUSE</a:t>
+              <a:t>DATASTAGE</a:t>
             </a:r>
             <a:endParaRPr lang="en-US" dirty="0"/>
           </a:p>
@@ -26606,7 +26606,7 @@
       </p:sp>
       <p:pic>
         <p:nvPicPr>
-          <p:cNvPr id="93" name="Object 92" descr="public/generated/icons/is.dedicated-host.png">    </p:cNvPr>
+          <p:cNvPr id="93" name="Object 92" descr="public/generated/icons/dashdb-for-transactions.png">    </p:cNvPr>
           <p:cNvPicPr>
             <a:picLocks noChangeAspect="1"/>
           </p:cNvPicPr>
@@ -26662,7 +26662,7 @@
                 <a:ea typeface="Helvetica" pitchFamily="34" charset="-122"/>
                 <a:cs typeface="Helvetica" pitchFamily="34" charset="-120"/>
               </a:rPr>
-              <a:t>DEDICATED HOST FOR VPC</a:t>
+              <a:t>DB2</a:t>
             </a:r>
             <a:endParaRPr lang="en-US" dirty="0"/>
           </a:p>
@@ -26695,7 +26695,7 @@
       </p:sp>
       <p:pic>
         <p:nvPicPr>
-          <p:cNvPr id="96" name="Object 95" descr="public/generated/icons/86fb7610-0f92-11ea-a6a3-8b96ed1570d8.png">    </p:cNvPr>
+          <p:cNvPr id="96" name="Object 95" descr="public/generated/icons/9e02e72d-00ce-4220-b44c-650c8314e58a.png">    </p:cNvPr>
           <p:cNvPicPr>
             <a:picLocks noChangeAspect="1"/>
           </p:cNvPicPr>
@@ -26751,7 +26751,7 @@
                 <a:ea typeface="Helvetica" pitchFamily="34" charset="-122"/>
                 <a:cs typeface="Helvetica" pitchFamily="34" charset="-120"/>
               </a:rPr>
-              <a:t>DIRECT LINK CONNECT</a:t>
+              <a:t>DB2 WAREHOUSE</a:t>
             </a:r>
             <a:endParaRPr lang="en-US" dirty="0"/>
           </a:p>
@@ -26784,7 +26784,7 @@
       </p:sp>
       <p:pic>
         <p:nvPicPr>
-          <p:cNvPr id="99" name="Object 98" descr="public/generated/icons/7dd59b11-c3c5-5aad-f6b2-2a0c2a3e6c49.png">    </p:cNvPr>
+          <p:cNvPr id="99" name="Object 98" descr="public/generated/icons/is.dedicated-host.png">    </p:cNvPr>
           <p:cNvPicPr>
             <a:picLocks noChangeAspect="1"/>
           </p:cNvPicPr>
@@ -26840,7 +26840,7 @@
                 <a:ea typeface="Helvetica" pitchFamily="34" charset="-122"/>
                 <a:cs typeface="Helvetica" pitchFamily="34" charset="-120"/>
               </a:rPr>
-              <a:t>DIRECT LINK CONNECT ON CLASSIC</a:t>
+              <a:t>DEDICATED HOST FOR VPC</a:t>
             </a:r>
             <a:endParaRPr lang="en-US" dirty="0"/>
           </a:p>
@@ -26873,7 +26873,7 @@
       </p:sp>
       <p:pic>
         <p:nvPicPr>
-          <p:cNvPr id="102" name="Object 101" descr="public/generated/icons/dc11a440-6073-11e9-9f5a-2f7997ba23c0.png">    </p:cNvPr>
+          <p:cNvPr id="102" name="Object 101" descr="public/generated/icons/86fb7610-0f92-11ea-a6a3-8b96ed1570d8.png">    </p:cNvPr>
           <p:cNvPicPr>
             <a:picLocks noChangeAspect="1"/>
           </p:cNvPicPr>
@@ -26929,7 +26929,7 @@
                 <a:ea typeface="Helvetica" pitchFamily="34" charset="-122"/>
                 <a:cs typeface="Helvetica" pitchFamily="34" charset="-120"/>
               </a:rPr>
-              <a:t>DIRECT LINK DEDICATED</a:t>
+              <a:t>DIRECT LINK CONNECT</a:t>
             </a:r>
             <a:endParaRPr lang="en-US" dirty="0"/>
           </a:p>
@@ -26962,7 +26962,7 @@
       </p:sp>
       <p:pic>
         <p:nvPicPr>
-          <p:cNvPr id="105" name="Object 104" descr="public/generated/icons/22.png">    </p:cNvPr>
+          <p:cNvPr id="105" name="Object 104" descr="public/generated/icons/7dd59b11-c3c5-5aad-f6b2-2a0c2a3e6c49.png">    </p:cNvPr>
           <p:cNvPicPr>
             <a:picLocks noChangeAspect="1"/>
           </p:cNvPicPr>
@@ -27018,7 +27018,7 @@
                 <a:ea typeface="Helvetica" pitchFamily="34" charset="-122"/>
                 <a:cs typeface="Helvetica" pitchFamily="34" charset="-120"/>
               </a:rPr>
-              <a:t>DIRECT LINK DEDICATED HOSTING ON CLASSIC</a:t>
+              <a:t>DIRECT LINK CONNECT ON CLASSIC</a:t>
             </a:r>
             <a:endParaRPr lang="en-US" dirty="0"/>
           </a:p>
@@ -27051,7 +27051,7 @@
       </p:sp>
       <p:pic>
         <p:nvPicPr>
-          <p:cNvPr id="108" name="Object 107" descr="public/generated/icons/23.png">    </p:cNvPr>
+          <p:cNvPr id="108" name="Object 107" descr="public/generated/icons/dc11a440-6073-11e9-9f5a-2f7997ba23c0.png">    </p:cNvPr>
           <p:cNvPicPr>
             <a:picLocks noChangeAspect="1"/>
           </p:cNvPicPr>
@@ -27107,7 +27107,7 @@
                 <a:ea typeface="Helvetica" pitchFamily="34" charset="-122"/>
                 <a:cs typeface="Helvetica" pitchFamily="34" charset="-120"/>
               </a:rPr>
-              <a:t>DIRECT LINK DEDICATED ON CLASSIC</a:t>
+              <a:t>DIRECT LINK DEDICATED</a:t>
             </a:r>
             <a:endParaRPr lang="en-US" dirty="0"/>
           </a:p>
@@ -27173,7 +27173,7 @@
       </p:sp>
       <p:pic>
         <p:nvPicPr>
-          <p:cNvPr id="3" name="Object 2" descr="public/generated/icons/21.png">    </p:cNvPr>
+          <p:cNvPr id="3" name="Object 2" descr="public/generated/icons/22.png">    </p:cNvPr>
           <p:cNvPicPr>
             <a:picLocks noChangeAspect="1"/>
           </p:cNvPicPr>
@@ -27229,7 +27229,7 @@
                 <a:ea typeface="Helvetica" pitchFamily="34" charset="-122"/>
                 <a:cs typeface="Helvetica" pitchFamily="34" charset="-120"/>
               </a:rPr>
-              <a:t>DIRECT LINK EXCHANGE ON CLASSIC</a:t>
+              <a:t>DIRECT LINK DEDICATED HOSTING ON CLASSIC</a:t>
             </a:r>
             <a:endParaRPr lang="en-US" dirty="0"/>
           </a:p>
@@ -27262,7 +27262,7 @@
       </p:sp>
       <p:pic>
         <p:nvPicPr>
-          <p:cNvPr id="6" name="Object 5" descr="public/generated/icons/9f3db814-3aec-47c5-94b0-6a71d49bd27f.png">    </p:cNvPr>
+          <p:cNvPr id="6" name="Object 5" descr="public/generated/icons/23.png">    </p:cNvPr>
           <p:cNvPicPr>
             <a:picLocks noChangeAspect="1"/>
           </p:cNvPicPr>
@@ -27318,7 +27318,7 @@
                 <a:ea typeface="Helvetica" pitchFamily="34" charset="-122"/>
                 <a:cs typeface="Helvetica" pitchFamily="34" charset="-120"/>
               </a:rPr>
-              <a:t>DIZZION COMPLETE</a:t>
+              <a:t>DIRECT LINK DEDICATED ON CLASSIC</a:t>
             </a:r>
             <a:endParaRPr lang="en-US" dirty="0"/>
           </a:p>
@@ -27351,7 +27351,7 @@
       </p:sp>
       <p:pic>
         <p:nvPicPr>
-          <p:cNvPr id="9" name="Object 8" descr="public/generated/icons/9e09a2eb-b2e5-4d76-ab7c-1b2f8c080865.png">    </p:cNvPr>
+          <p:cNvPr id="9" name="Object 8" descr="public/generated/icons/21.png">    </p:cNvPr>
           <p:cNvPicPr>
             <a:picLocks noChangeAspect="1"/>
           </p:cNvPicPr>
@@ -27407,7 +27407,7 @@
                 <a:ea typeface="Helvetica" pitchFamily="34" charset="-122"/>
                 <a:cs typeface="Helvetica" pitchFamily="34" charset="-120"/>
               </a:rPr>
-              <a:t>DIZZION COMPLETE - HORIZON</a:t>
+              <a:t>DIRECT LINK EXCHANGE ON CLASSIC</a:t>
             </a:r>
             <a:endParaRPr lang="en-US" dirty="0"/>
           </a:p>
@@ -27440,7 +27440,7 @@
       </p:sp>
       <p:pic>
         <p:nvPicPr>
-          <p:cNvPr id="12" name="Object 11" descr="public/generated/icons/79679329-2050-4779-a2e2-7210b88aed4e.png">    </p:cNvPr>
+          <p:cNvPr id="12" name="Object 11" descr="public/generated/icons/9f3db814-3aec-47c5-94b0-6a71d49bd27f.png">    </p:cNvPr>
           <p:cNvPicPr>
             <a:picLocks noChangeAspect="1"/>
           </p:cNvPicPr>
@@ -27496,7 +27496,7 @@
                 <a:ea typeface="Helvetica" pitchFamily="34" charset="-122"/>
                 <a:cs typeface="Helvetica" pitchFamily="34" charset="-120"/>
               </a:rPr>
-              <a:t>DIZZION COMPLETE FS - HORIZON</a:t>
+              <a:t>DIZZION COMPLETE</a:t>
             </a:r>
             <a:endParaRPr lang="en-US" dirty="0"/>
           </a:p>
@@ -27529,7 +27529,7 @@
       </p:sp>
       <p:pic>
         <p:nvPicPr>
-          <p:cNvPr id="15" name="Object 14" descr="public/generated/icons/6fc0c2df-7fbc-470f-aac5-a93af7ef4a92.png">    </p:cNvPr>
+          <p:cNvPr id="15" name="Object 14" descr="public/generated/icons/9e09a2eb-b2e5-4d76-ab7c-1b2f8c080865.png">    </p:cNvPr>
           <p:cNvPicPr>
             <a:picLocks noChangeAspect="1"/>
           </p:cNvPicPr>
@@ -27585,7 +27585,7 @@
                 <a:ea typeface="Helvetica" pitchFamily="34" charset="-122"/>
                 <a:cs typeface="Helvetica" pitchFamily="34" charset="-120"/>
               </a:rPr>
-              <a:t>DIZZION FLEX</a:t>
+              <a:t>DIZZION COMPLETE - HORIZON</a:t>
             </a:r>
             <a:endParaRPr lang="en-US" dirty="0"/>
           </a:p>
@@ -27618,7 +27618,7 @@
       </p:sp>
       <p:pic>
         <p:nvPicPr>
-          <p:cNvPr id="18" name="Object 17" descr="public/generated/icons/72ca6b61-2aa8-4b8f-ba21-69854bd2095b.png">    </p:cNvPr>
+          <p:cNvPr id="18" name="Object 17" descr="public/generated/icons/79679329-2050-4779-a2e2-7210b88aed4e.png">    </p:cNvPr>
           <p:cNvPicPr>
             <a:picLocks noChangeAspect="1"/>
           </p:cNvPicPr>
@@ -27674,7 +27674,7 @@
                 <a:ea typeface="Helvetica" pitchFamily="34" charset="-122"/>
                 <a:cs typeface="Helvetica" pitchFamily="34" charset="-120"/>
               </a:rPr>
-              <a:t>DIZZION MANAGED</a:t>
+              <a:t>DIZZION COMPLETE FS - HORIZON</a:t>
             </a:r>
             <a:endParaRPr lang="en-US" dirty="0"/>
           </a:p>
@@ -27707,7 +27707,7 @@
       </p:sp>
       <p:pic>
         <p:nvPicPr>
-          <p:cNvPr id="21" name="Object 20" descr="public/generated/icons/b4ed8a30-936f-11e9-b289-1d079699cbe5.png">    </p:cNvPr>
+          <p:cNvPr id="21" name="Object 20" descr="public/generated/icons/6fc0c2df-7fbc-470f-aac5-a93af7ef4a92.png">    </p:cNvPr>
           <p:cNvPicPr>
             <a:picLocks noChangeAspect="1"/>
           </p:cNvPicPr>
@@ -27763,7 +27763,7 @@
                 <a:ea typeface="Helvetica" pitchFamily="34" charset="-122"/>
                 <a:cs typeface="Helvetica" pitchFamily="34" charset="-120"/>
               </a:rPr>
-              <a:t>DNS SERVICES</a:t>
+              <a:t>DIZZION FLEX</a:t>
             </a:r>
             <a:endParaRPr lang="en-US" dirty="0"/>
           </a:p>
@@ -27796,7 +27796,7 @@
       </p:sp>
       <p:pic>
         <p:nvPicPr>
-          <p:cNvPr id="24" name="Object 23" descr="public/generated/icons/d1e3f0d2-0f49-ddfd-0eb9-2897b9d3a45d.png">    </p:cNvPr>
+          <p:cNvPr id="24" name="Object 23" descr="public/generated/icons/72ca6b61-2aa8-4b8f-ba21-69854bd2095b.png">    </p:cNvPr>
           <p:cNvPicPr>
             <a:picLocks noChangeAspect="1"/>
           </p:cNvPicPr>
@@ -27852,7 +27852,7 @@
                 <a:ea typeface="Helvetica" pitchFamily="34" charset="-122"/>
                 <a:cs typeface="Helvetica" pitchFamily="34" charset="-120"/>
               </a:rPr>
-              <a:t>EMAIL DELIVERY, POWERED BY SENDGRID</a:t>
+              <a:t>DIZZION MANAGED</a:t>
             </a:r>
             <a:endParaRPr lang="en-US" dirty="0"/>
           </a:p>
@@ -27885,7 +27885,7 @@
       </p:sp>
       <p:pic>
         <p:nvPicPr>
-          <p:cNvPr id="27" name="Object 26" descr="public/generated/icons/871a9870-7508-11ef-ac5c-3324c550b37a.png">    </p:cNvPr>
+          <p:cNvPr id="27" name="Object 26" descr="public/generated/icons/b4ed8a30-936f-11e9-b289-1d079699cbe5.png">    </p:cNvPr>
           <p:cNvPicPr>
             <a:picLocks noChangeAspect="1"/>
           </p:cNvPicPr>
@@ -27941,7 +27941,7 @@
                 <a:ea typeface="Helvetica" pitchFamily="34" charset="-122"/>
                 <a:cs typeface="Helvetica" pitchFamily="34" charset="-120"/>
               </a:rPr>
-              <a:t>ENTERPRISE APPLICATION SERVICE</a:t>
+              <a:t>DNS SERVICES</a:t>
             </a:r>
             <a:endParaRPr lang="en-US" dirty="0"/>
           </a:p>
@@ -27974,7 +27974,7 @@
       </p:sp>
       <p:pic>
         <p:nvPicPr>
-          <p:cNvPr id="30" name="Object 29" descr="public/generated/icons/64955a78-30f9-426d-a25a-344480421b27.png">    </p:cNvPr>
+          <p:cNvPr id="30" name="Object 29" descr="public/generated/icons/d1e3f0d2-0f49-ddfd-0eb9-2897b9d3a45d.png">    </p:cNvPr>
           <p:cNvPicPr>
             <a:picLocks noChangeAspect="1"/>
           </p:cNvPicPr>
@@ -28030,7 +28030,7 @@
                 <a:ea typeface="Helvetica" pitchFamily="34" charset="-122"/>
                 <a:cs typeface="Helvetica" pitchFamily="34" charset="-120"/>
               </a:rPr>
-              <a:t>ETICLOUD SECURE DIGITAL AGILE WORKPLACE</a:t>
+              <a:t>EMAIL DELIVERY, POWERED BY SENDGRID</a:t>
             </a:r>
             <a:endParaRPr lang="en-US" dirty="0"/>
           </a:p>
@@ -28063,7 +28063,7 @@
       </p:sp>
       <p:pic>
         <p:nvPicPr>
-          <p:cNvPr id="33" name="Object 32" descr="public/generated/icons/ecdb4690-c2d8-11eb-bff1-4f7b9d2dfe41.png">    </p:cNvPr>
+          <p:cNvPr id="33" name="Object 32" descr="public/generated/icons/871a9870-7508-11ef-ac5c-3324c550b37a.png">    </p:cNvPr>
           <p:cNvPicPr>
             <a:picLocks noChangeAspect="1"/>
           </p:cNvPicPr>
@@ -28119,7 +28119,7 @@
                 <a:ea typeface="Helvetica" pitchFamily="34" charset="-122"/>
                 <a:cs typeface="Helvetica" pitchFamily="34" charset="-120"/>
               </a:rPr>
-              <a:t>EVENT NOTIFICATIONS</a:t>
+              <a:t>ENTERPRISE APPLICATION SERVICE</a:t>
             </a:r>
             <a:endParaRPr lang="en-US" dirty="0"/>
           </a:p>
@@ -28152,7 +28152,7 @@
       </p:sp>
       <p:pic>
         <p:nvPicPr>
-          <p:cNvPr id="36" name="Object 35" descr="public/generated/icons/6a7f4e38-f218-48ef-9dd2-df408747568e.png">    </p:cNvPr>
+          <p:cNvPr id="36" name="Object 35" descr="public/generated/icons/64955a78-30f9-426d-a25a-344480421b27.png">    </p:cNvPr>
           <p:cNvPicPr>
             <a:picLocks noChangeAspect="1"/>
           </p:cNvPicPr>
@@ -28208,7 +28208,7 @@
                 <a:ea typeface="Helvetica" pitchFamily="34" charset="-122"/>
                 <a:cs typeface="Helvetica" pitchFamily="34" charset="-120"/>
               </a:rPr>
-              <a:t>EVENT STREAMS</a:t>
+              <a:t>ETICLOUD SECURE DIGITAL AGILE WORKPLACE</a:t>
             </a:r>
             <a:endParaRPr lang="en-US" dirty="0"/>
           </a:p>
@@ -28241,7 +28241,7 @@
       </p:sp>
       <p:pic>
         <p:nvPicPr>
-          <p:cNvPr id="39" name="Object 38" descr="public/generated/icons/cf329950-0a3e-11e8-922e-f1366c6e1c83-bigip.png">    </p:cNvPr>
+          <p:cNvPr id="39" name="Object 38" descr="public/generated/icons/ecdb4690-c2d8-11eb-bff1-4f7b9d2dfe41.png">    </p:cNvPr>
           <p:cNvPicPr>
             <a:picLocks noChangeAspect="1"/>
           </p:cNvPicPr>
@@ -28297,7 +28297,7 @@
                 <a:ea typeface="Helvetica" pitchFamily="34" charset="-122"/>
                 <a:cs typeface="Helvetica" pitchFamily="34" charset="-120"/>
               </a:rPr>
-              <a:t>F5 BIG-IP</a:t>
+              <a:t>EVENT NOTIFICATIONS</a:t>
             </a:r>
             <a:endParaRPr lang="en-US" dirty="0"/>
           </a:p>
@@ -28330,7 +28330,7 @@
       </p:sp>
       <p:pic>
         <p:nvPicPr>
-          <p:cNvPr id="42" name="Object 41" descr="public/generated/icons/60427a43-cf48-41e0-bd95-26bde9c12105.png">    </p:cNvPr>
+          <p:cNvPr id="42" name="Object 41" descr="public/generated/icons/6a7f4e38-f218-48ef-9dd2-df408747568e.png">    </p:cNvPr>
           <p:cNvPicPr>
             <a:picLocks noChangeAspect="1"/>
           </p:cNvPicPr>
@@ -28386,7 +28386,7 @@
                 <a:ea typeface="Helvetica" pitchFamily="34" charset="-122"/>
                 <a:cs typeface="Helvetica" pitchFamily="34" charset="-120"/>
               </a:rPr>
-              <a:t>FALCONSTOR STORSAFE FOR POWER ON-PREMISES</a:t>
+              <a:t>EVENT STREAMS</a:t>
             </a:r>
             <a:endParaRPr lang="en-US" dirty="0"/>
           </a:p>
@@ -28419,7 +28419,7 @@
       </p:sp>
       <p:pic>
         <p:nvPicPr>
-          <p:cNvPr id="45" name="Object 44" descr="public/generated/icons/6.png">    </p:cNvPr>
+          <p:cNvPr id="45" name="Object 44" descr="public/generated/icons/cf329950-0a3e-11e8-922e-f1366c6e1c83-bigip.png">    </p:cNvPr>
           <p:cNvPicPr>
             <a:picLocks noChangeAspect="1"/>
           </p:cNvPicPr>
@@ -28475,7 +28475,7 @@
                 <a:ea typeface="Helvetica" pitchFamily="34" charset="-122"/>
                 <a:cs typeface="Helvetica" pitchFamily="34" charset="-120"/>
               </a:rPr>
-              <a:t>FILE STORAGE FOR CLASSIC</a:t>
+              <a:t>F5 BIG-IP</a:t>
             </a:r>
             <a:endParaRPr lang="en-US" dirty="0"/>
           </a:p>
@@ -28508,7 +28508,7 @@
       </p:sp>
       <p:pic>
         <p:nvPicPr>
-          <p:cNvPr id="48" name="Object 47" descr="public/generated/icons/is.share.png">    </p:cNvPr>
+          <p:cNvPr id="48" name="Object 47" descr="public/generated/icons/60427a43-cf48-41e0-bd95-26bde9c12105.png">    </p:cNvPr>
           <p:cNvPicPr>
             <a:picLocks noChangeAspect="1"/>
           </p:cNvPicPr>
@@ -28564,7 +28564,7 @@
                 <a:ea typeface="Helvetica" pitchFamily="34" charset="-122"/>
                 <a:cs typeface="Helvetica" pitchFamily="34" charset="-120"/>
               </a:rPr>
-              <a:t>FILE STORAGE FOR VPC</a:t>
+              <a:t>FALCONSTOR STORSAFE FOR POWER ON-PREMISES</a:t>
             </a:r>
             <a:endParaRPr lang="en-US" dirty="0"/>
           </a:p>
@@ -28597,7 +28597,7 @@
       </p:sp>
       <p:pic>
         <p:nvPicPr>
-          <p:cNvPr id="51" name="Object 50" descr="public/generated/icons/is.floating-ip.png">    </p:cNvPr>
+          <p:cNvPr id="51" name="Object 50" descr="public/generated/icons/6.png">    </p:cNvPr>
           <p:cNvPicPr>
             <a:picLocks noChangeAspect="1"/>
           </p:cNvPicPr>
@@ -28653,7 +28653,7 @@
                 <a:ea typeface="Helvetica" pitchFamily="34" charset="-122"/>
                 <a:cs typeface="Helvetica" pitchFamily="34" charset="-120"/>
               </a:rPr>
-              <a:t>FLOATING IP FOR VPC</a:t>
+              <a:t>FILE STORAGE FOR CLASSIC</a:t>
             </a:r>
             <a:endParaRPr lang="en-US" dirty="0"/>
           </a:p>
@@ -28686,7 +28686,7 @@
       </p:sp>
       <p:pic>
         <p:nvPicPr>
-          <p:cNvPr id="54" name="Object 53" descr="public/generated/icons/is.flow-log-collector.png">    </p:cNvPr>
+          <p:cNvPr id="54" name="Object 53" descr="public/generated/icons/is.share.png">    </p:cNvPr>
           <p:cNvPicPr>
             <a:picLocks noChangeAspect="1"/>
           </p:cNvPicPr>
@@ -28742,7 +28742,7 @@
                 <a:ea typeface="Helvetica" pitchFamily="34" charset="-122"/>
                 <a:cs typeface="Helvetica" pitchFamily="34" charset="-120"/>
               </a:rPr>
-              <a:t>FLOW LOGS FOR VPC</a:t>
+              <a:t>FILE STORAGE FOR VPC</a:t>
             </a:r>
             <a:endParaRPr lang="en-US" dirty="0"/>
           </a:p>
@@ -28775,7 +28775,7 @@
       </p:sp>
       <p:pic>
         <p:nvPicPr>
-          <p:cNvPr id="57" name="Object 56" descr="public/generated/icons/05605040-8854-4665-bd05-0b10a96daf05.png">    </p:cNvPr>
+          <p:cNvPr id="57" name="Object 56" descr="public/generated/icons/is.floating-ip.png">    </p:cNvPr>
           <p:cNvPicPr>
             <a:picLocks noChangeAspect="1"/>
           </p:cNvPicPr>
@@ -28831,7 +28831,7 @@
                 <a:ea typeface="Helvetica" pitchFamily="34" charset="-122"/>
                 <a:cs typeface="Helvetica" pitchFamily="34" charset="-120"/>
               </a:rPr>
-              <a:t>FNTS CLOUD MIGRATION SERVICES</a:t>
+              <a:t>FLOATING IP FOR VPC</a:t>
             </a:r>
             <a:endParaRPr lang="en-US" dirty="0"/>
           </a:p>
@@ -28864,7 +28864,7 @@
       </p:sp>
       <p:pic>
         <p:nvPicPr>
-          <p:cNvPr id="60" name="Object 59" descr="public/generated/icons/d2fb0ba3-1679-4053-a593-9f2259d9e87b.png">    </p:cNvPr>
+          <p:cNvPr id="60" name="Object 59" descr="public/generated/icons/is.flow-log-collector.png">    </p:cNvPr>
           <p:cNvPicPr>
             <a:picLocks noChangeAspect="1"/>
           </p:cNvPicPr>
@@ -28920,7 +28920,7 @@
                 <a:ea typeface="Helvetica" pitchFamily="34" charset="-122"/>
                 <a:cs typeface="Helvetica" pitchFamily="34" charset="-120"/>
               </a:rPr>
-              <a:t>FNTS MANAGED SERVICES FOR POWERVS CLOUD</a:t>
+              <a:t>FLOW LOGS FOR VPC</a:t>
             </a:r>
             <a:endParaRPr lang="en-US" dirty="0"/>
           </a:p>
@@ -28953,7 +28953,7 @@
       </p:sp>
       <p:pic>
         <p:nvPicPr>
-          <p:cNvPr id="63" name="Object 62" descr="public/generated/icons/cf329950-0a3e-11e8-922e-f1366c6e1c83-fortigate.png">    </p:cNvPr>
+          <p:cNvPr id="63" name="Object 62" descr="public/generated/icons/05605040-8854-4665-bd05-0b10a96daf05.png">    </p:cNvPr>
           <p:cNvPicPr>
             <a:picLocks noChangeAspect="1"/>
           </p:cNvPicPr>
@@ -29009,7 +29009,7 @@
                 <a:ea typeface="Helvetica" pitchFamily="34" charset="-122"/>
                 <a:cs typeface="Helvetica" pitchFamily="34" charset="-120"/>
               </a:rPr>
-              <a:t>FORTIGATE SECURITY APPLIANCE</a:t>
+              <a:t>FNTS CLOUD MIGRATION SERVICES</a:t>
             </a:r>
             <a:endParaRPr lang="en-US" dirty="0"/>
           </a:p>
@@ -29042,7 +29042,7 @@
       </p:sp>
       <p:pic>
         <p:nvPicPr>
-          <p:cNvPr id="66" name="Object 65" descr="public/generated/icons/f5b26324-9b39-c701-0cc5-b0d5d2fe8534.png">    </p:cNvPr>
+          <p:cNvPr id="66" name="Object 65" descr="public/generated/icons/d2fb0ba3-1679-4053-a593-9f2259d9e87b.png">    </p:cNvPr>
           <p:cNvPicPr>
             <a:picLocks noChangeAspect="1"/>
           </p:cNvPicPr>
@@ -29098,7 +29098,7 @@
                 <a:ea typeface="Helvetica" pitchFamily="34" charset="-122"/>
                 <a:cs typeface="Helvetica" pitchFamily="34" charset="-120"/>
               </a:rPr>
-              <a:t>FORTIGATE SECURITY APPLIANCE 10GBPS</a:t>
+              <a:t>FNTS MANAGED SERVICES FOR POWERVS CLOUD</a:t>
             </a:r>
             <a:endParaRPr lang="en-US" dirty="0"/>
           </a:p>
@@ -29131,7 +29131,7 @@
       </p:sp>
       <p:pic>
         <p:nvPicPr>
-          <p:cNvPr id="69" name="Object 68" descr="public/generated/icons/cf329950-0a3e-11e8-922e-f1366c6e1c83-fortigatevm.png">    </p:cNvPr>
+          <p:cNvPr id="69" name="Object 68" descr="public/generated/icons/cf329950-0a3e-11e8-922e-f1366c6e1c83-fortigate.png">    </p:cNvPr>
           <p:cNvPicPr>
             <a:picLocks noChangeAspect="1"/>
           </p:cNvPicPr>
@@ -29187,7 +29187,7 @@
                 <a:ea typeface="Helvetica" pitchFamily="34" charset="-122"/>
                 <a:cs typeface="Helvetica" pitchFamily="34" charset="-120"/>
               </a:rPr>
-              <a:t>FORTIGATE VIRTUAL APPLIANCE</a:t>
+              <a:t>FORTIGATE SECURITY APPLIANCE</a:t>
             </a:r>
             <a:endParaRPr lang="en-US" dirty="0"/>
           </a:p>
@@ -29220,7 +29220,7 @@
       </p:sp>
       <p:pic>
         <p:nvPicPr>
-          <p:cNvPr id="72" name="Object 71" descr="public/generated/icons/a93eeacc-7012-c8bc-c851-e928949a226c.png">    </p:cNvPr>
+          <p:cNvPr id="72" name="Object 71" descr="public/generated/icons/f5b26324-9b39-c701-0cc5-b0d5d2fe8534.png">    </p:cNvPr>
           <p:cNvPicPr>
             <a:picLocks noChangeAspect="1"/>
           </p:cNvPicPr>
@@ -29276,7 +29276,7 @@
                 <a:ea typeface="Helvetica" pitchFamily="34" charset="-122"/>
                 <a:cs typeface="Helvetica" pitchFamily="34" charset="-120"/>
               </a:rPr>
-              <a:t>FORTINET VIRTUAL FORTIGATE SECURITY APPLIANCE (VFSA)</a:t>
+              <a:t>FORTIGATE SECURITY APPLIANCE 10GBPS</a:t>
             </a:r>
             <a:endParaRPr lang="en-US" dirty="0"/>
           </a:p>
@@ -29309,7 +29309,7 @@
       </p:sp>
       <p:pic>
         <p:nvPicPr>
-          <p:cNvPr id="75" name="Object 74" descr="public/generated/icons/900fb23f-fe9d-4cf8-9bb2-a82d87dede0e.png">    </p:cNvPr>
+          <p:cNvPr id="75" name="Object 74" descr="public/generated/icons/cf329950-0a3e-11e8-922e-f1366c6e1c83-fortigatevm.png">    </p:cNvPr>
           <p:cNvPicPr>
             <a:picLocks noChangeAspect="1"/>
           </p:cNvPicPr>
@@ -29365,7 +29365,7 @@
                 <a:ea typeface="Helvetica" pitchFamily="34" charset="-122"/>
                 <a:cs typeface="Helvetica" pitchFamily="34" charset="-120"/>
               </a:rPr>
-              <a:t>FRESCHE KTLO APPLICATION MANAGEMENT</a:t>
+              <a:t>FORTIGATE VIRTUAL APPLIANCE</a:t>
             </a:r>
             <a:endParaRPr lang="en-US" dirty="0"/>
           </a:p>
@@ -29398,7 +29398,7 @@
       </p:sp>
       <p:pic>
         <p:nvPicPr>
-          <p:cNvPr id="78" name="Object 77" descr="public/generated/icons/c3c7f095-67da-42e6-b982-46d0e6e79f84.png">    </p:cNvPr>
+          <p:cNvPr id="78" name="Object 77" descr="public/generated/icons/a93eeacc-7012-c8bc-c851-e928949a226c.png">    </p:cNvPr>
           <p:cNvPicPr>
             <a:picLocks noChangeAspect="1"/>
           </p:cNvPicPr>
@@ -29454,7 +29454,7 @@
                 <a:ea typeface="Helvetica" pitchFamily="34" charset="-122"/>
                 <a:cs typeface="Helvetica" pitchFamily="34" charset="-120"/>
               </a:rPr>
-              <a:t>FRESCHE LPAR OPERATIONS MANAGEMENT</a:t>
+              <a:t>FORTINET VIRTUAL FORTIGATE SECURITY APPLIANCE (VFSA)</a:t>
             </a:r>
             <a:endParaRPr lang="en-US" dirty="0"/>
           </a:p>
@@ -29487,7 +29487,7 @@
       </p:sp>
       <p:pic>
         <p:nvPicPr>
-          <p:cNvPr id="81" name="Object 80" descr="public/generated/icons/afa31435-8561-4383-b069-ec9a47719e20.png">    </p:cNvPr>
+          <p:cNvPr id="81" name="Object 80" descr="public/generated/icons/900fb23f-fe9d-4cf8-9bb2-a82d87dede0e.png">    </p:cNvPr>
           <p:cNvPicPr>
             <a:picLocks noChangeAspect="1"/>
           </p:cNvPicPr>
@@ -29543,7 +29543,7 @@
                 <a:ea typeface="Helvetica" pitchFamily="34" charset="-122"/>
                 <a:cs typeface="Helvetica" pitchFamily="34" charset="-120"/>
               </a:rPr>
-              <a:t>FRESCHE PRESTO</a:t>
+              <a:t>FRESCHE KTLO APPLICATION MANAGEMENT</a:t>
             </a:r>
             <a:endParaRPr lang="en-US" dirty="0"/>
           </a:p>
@@ -29576,7 +29576,7 @@
       </p:sp>
       <p:pic>
         <p:nvPicPr>
-          <p:cNvPr id="84" name="Object 83" descr="public/generated/icons/3e683ee5-b3a8-4f07-b98b-bf35bdeb7082.png">    </p:cNvPr>
+          <p:cNvPr id="84" name="Object 83" descr="public/generated/icons/c3c7f095-67da-42e6-b982-46d0e6e79f84.png">    </p:cNvPr>
           <p:cNvPicPr>
             <a:picLocks noChangeAspect="1"/>
           </p:cNvPicPr>
@@ -29632,7 +29632,7 @@
                 <a:ea typeface="Helvetica" pitchFamily="34" charset="-122"/>
                 <a:cs typeface="Helvetica" pitchFamily="34" charset="-120"/>
               </a:rPr>
-              <a:t>FRESCHE SECURITY SUITE</a:t>
+              <a:t>FRESCHE LPAR OPERATIONS MANAGEMENT</a:t>
             </a:r>
             <a:endParaRPr lang="en-US" dirty="0"/>
           </a:p>
@@ -29665,7 +29665,7 @@
       </p:sp>
       <p:pic>
         <p:nvPicPr>
-          <p:cNvPr id="87" name="Object 86" descr="public/generated/icons/9db75c87-84ce-491b-8526-dcd2188f3866.png">    </p:cNvPr>
+          <p:cNvPr id="87" name="Object 86" descr="public/generated/icons/afa31435-8561-4383-b069-ec9a47719e20.png">    </p:cNvPr>
           <p:cNvPicPr>
             <a:picLocks noChangeAspect="1"/>
           </p:cNvPicPr>
@@ -29721,7 +29721,7 @@
                 <a:ea typeface="Helvetica" pitchFamily="34" charset="-122"/>
                 <a:cs typeface="Helvetica" pitchFamily="34" charset="-120"/>
               </a:rPr>
-              <a:t>FRESCHE X-ANALYSIS SUITE</a:t>
+              <a:t>FRESCHE PRESTO</a:t>
             </a:r>
             <a:endParaRPr lang="en-US" dirty="0"/>
           </a:p>
@@ -29754,7 +29754,7 @@
       </p:sp>
       <p:pic>
         <p:nvPicPr>
-          <p:cNvPr id="90" name="Object 89" descr="public/generated/icons/16.png">    </p:cNvPr>
+          <p:cNvPr id="90" name="Object 89" descr="public/generated/icons/3e683ee5-b3a8-4f07-b98b-bf35bdeb7082.png">    </p:cNvPr>
           <p:cNvPicPr>
             <a:picLocks noChangeAspect="1"/>
           </p:cNvPicPr>
@@ -29810,7 +29810,7 @@
                 <a:ea typeface="Helvetica" pitchFamily="34" charset="-122"/>
                 <a:cs typeface="Helvetica" pitchFamily="34" charset="-120"/>
               </a:rPr>
-              <a:t>HARDWARE FIREWALL</a:t>
+              <a:t>FRESCHE SECURITY SUITE</a:t>
             </a:r>
             <a:endParaRPr lang="en-US" dirty="0"/>
           </a:p>
@@ -29843,7 +29843,7 @@
       </p:sp>
       <p:pic>
         <p:nvPicPr>
-          <p:cNvPr id="93" name="Object 92" descr="public/generated/icons/cf329950-0a3e-11e8-922e-f1366c6e1c83-hcx.png">    </p:cNvPr>
+          <p:cNvPr id="93" name="Object 92" descr="public/generated/icons/9db75c87-84ce-491b-8526-dcd2188f3866.png">    </p:cNvPr>
           <p:cNvPicPr>
             <a:picLocks noChangeAspect="1"/>
           </p:cNvPicPr>
@@ -29899,7 +29899,7 @@
                 <a:ea typeface="Helvetica" pitchFamily="34" charset="-122"/>
                 <a:cs typeface="Helvetica" pitchFamily="34" charset="-120"/>
               </a:rPr>
-              <a:t>HCX</a:t>
+              <a:t>FRESCHE X-ANALYSIS SUITE</a:t>
             </a:r>
             <a:endParaRPr lang="en-US" dirty="0"/>
           </a:p>
@@ -29932,7 +29932,7 @@
       </p:sp>
       <p:pic>
         <p:nvPicPr>
-          <p:cNvPr id="96" name="Object 95" descr="public/generated/icons/3dacb5a3-de4a-4361-9f39-0b6657f89f37.png">    </p:cNvPr>
+          <p:cNvPr id="96" name="Object 95" descr="public/generated/icons/16.png">    </p:cNvPr>
           <p:cNvPicPr>
             <a:picLocks noChangeAspect="1"/>
           </p:cNvPicPr>
@@ -29988,7 +29988,7 @@
                 <a:ea typeface="Helvetica" pitchFamily="34" charset="-122"/>
                 <a:cs typeface="Helvetica" pitchFamily="34" charset="-120"/>
               </a:rPr>
-              <a:t>HDM VMWARE WORKLOAD ANALYZER</a:t>
+              <a:t>HARDWARE FIREWALL</a:t>
             </a:r>
             <a:endParaRPr lang="en-US" dirty="0"/>
           </a:p>
@@ -30021,7 +30021,7 @@
       </p:sp>
       <p:pic>
         <p:nvPicPr>
-          <p:cNvPr id="99" name="Object 98" descr="public/generated/icons/cf329950-0a3e-11e8-922e-f1366c6e1c83-horizon.png">    </p:cNvPr>
+          <p:cNvPr id="99" name="Object 98" descr="public/generated/icons/cf329950-0a3e-11e8-922e-f1366c6e1c83-hcx.png">    </p:cNvPr>
           <p:cNvPicPr>
             <a:picLocks noChangeAspect="1"/>
           </p:cNvPicPr>
@@ -30077,7 +30077,7 @@
                 <a:ea typeface="Helvetica" pitchFamily="34" charset="-122"/>
                 <a:cs typeface="Helvetica" pitchFamily="34" charset="-120"/>
               </a:rPr>
-              <a:t>HORIZON 7</a:t>
+              <a:t>HCX</a:t>
             </a:r>
             <a:endParaRPr lang="en-US" dirty="0"/>
           </a:p>
@@ -30110,7 +30110,7 @@
       </p:sp>
       <p:pic>
         <p:nvPicPr>
-          <p:cNvPr id="102" name="Object 101" descr="public/generated/icons/fa329acf-f9b6-fa9f-f37e-ad72d0b6a783.png">    </p:cNvPr>
+          <p:cNvPr id="102" name="Object 101" descr="public/generated/icons/3dacb5a3-de4a-4361-9f39-0b6657f89f37.png">    </p:cNvPr>
           <p:cNvPicPr>
             <a:picLocks noChangeAspect="1"/>
           </p:cNvPicPr>
@@ -30166,7 +30166,7 @@
                 <a:ea typeface="Helvetica" pitchFamily="34" charset="-122"/>
                 <a:cs typeface="Helvetica" pitchFamily="34" charset="-120"/>
               </a:rPr>
-              <a:t>HYBRID CLOUD INFRASTRUCTURE AS A SERVICE</a:t>
+              <a:t>HDM VMWARE WORKLOAD ANALYZER</a:t>
             </a:r>
             <a:endParaRPr lang="en-US" dirty="0"/>
           </a:p>
@@ -30199,7 +30199,7 @@
       </p:sp>
       <p:pic>
         <p:nvPicPr>
-          <p:cNvPr id="105" name="Object 104" descr="public/generated/icons/d589492e-6ac0-4a11-9c28-a157851c8f68.png">    </p:cNvPr>
+          <p:cNvPr id="105" name="Object 104" descr="public/generated/icons/cf329950-0a3e-11e8-922e-f1366c6e1c83-horizon.png">    </p:cNvPr>
           <p:cNvPicPr>
             <a:picLocks noChangeAspect="1"/>
           </p:cNvPicPr>
@@ -30255,7 +30255,7 @@
                 <a:ea typeface="Helvetica" pitchFamily="34" charset="-122"/>
                 <a:cs typeface="Helvetica" pitchFamily="34" charset="-120"/>
               </a:rPr>
-              <a:t>HYPER PROTECT CRYPTO SERVICES</a:t>
+              <a:t>HORIZON 7</a:t>
             </a:r>
             <a:endParaRPr lang="en-US" dirty="0"/>
           </a:p>
@@ -30288,7 +30288,7 @@
       </p:sp>
       <p:pic>
         <p:nvPicPr>
-          <p:cNvPr id="108" name="Object 107" descr="public/generated/icons/986f2197-9f9a-44f4-9463-f17ec64c6729.png">    </p:cNvPr>
+          <p:cNvPr id="108" name="Object 107" descr="public/generated/icons/fa329acf-f9b6-fa9f-f37e-ad72d0b6a783.png">    </p:cNvPr>
           <p:cNvPicPr>
             <a:picLocks noChangeAspect="1"/>
           </p:cNvPicPr>
@@ -30344,7 +30344,7 @@
                 <a:ea typeface="Helvetica" pitchFamily="34" charset="-122"/>
                 <a:cs typeface="Helvetica" pitchFamily="34" charset="-120"/>
               </a:rPr>
-              <a:t>HYPER PROTECT VIRTUAL SERVER FOR CLASSIC</a:t>
+              <a:t>HYBRID CLOUD INFRASTRUCTURE AS A SERVICE</a:t>
             </a:r>
             <a:endParaRPr lang="en-US" dirty="0"/>
           </a:p>
@@ -30410,7 +30410,7 @@
       </p:sp>
       <p:pic>
         <p:nvPicPr>
-          <p:cNvPr id="3" name="Object 2" descr="public/generated/icons/cf329950-0a3e-11e8-922e-f1366c6e1c83-hytrustcc.png">    </p:cNvPr>
+          <p:cNvPr id="3" name="Object 2" descr="public/generated/icons/d589492e-6ac0-4a11-9c28-a157851c8f68.png">    </p:cNvPr>
           <p:cNvPicPr>
             <a:picLocks noChangeAspect="1"/>
           </p:cNvPicPr>
@@ -30466,7 +30466,7 @@
                 <a:ea typeface="Helvetica" pitchFamily="34" charset="-122"/>
                 <a:cs typeface="Helvetica" pitchFamily="34" charset="-120"/>
               </a:rPr>
-              <a:t>HYTRUST CLOUDCONTROL</a:t>
+              <a:t>HYPER PROTECT CRYPTO SERVICES</a:t>
             </a:r>
             <a:endParaRPr lang="en-US" dirty="0"/>
           </a:p>
@@ -30499,7 +30499,7 @@
       </p:sp>
       <p:pic>
         <p:nvPicPr>
-          <p:cNvPr id="6" name="Object 5" descr="public/generated/icons/cf329950-0a3e-11e8-922e-f1366c6e1c83-hytrustdc.png">    </p:cNvPr>
+          <p:cNvPr id="6" name="Object 5" descr="public/generated/icons/986f2197-9f9a-44f4-9463-f17ec64c6729.png">    </p:cNvPr>
           <p:cNvPicPr>
             <a:picLocks noChangeAspect="1"/>
           </p:cNvPicPr>
@@ -30555,7 +30555,7 @@
                 <a:ea typeface="Helvetica" pitchFamily="34" charset="-122"/>
                 <a:cs typeface="Helvetica" pitchFamily="34" charset="-120"/>
               </a:rPr>
-              <a:t>HYTRUST DATACONTROL</a:t>
+              <a:t>HYPER PROTECT VIRTUAL SERVER FOR CLASSIC</a:t>
             </a:r>
             <a:endParaRPr lang="en-US" dirty="0"/>
           </a:p>
@@ -30588,7 +30588,7 @@
       </p:sp>
       <p:pic>
         <p:nvPicPr>
-          <p:cNvPr id="9" name="Object 8" descr="public/generated/icons/cf329950-0a3e-11e8-922e-f1366c6e1c83-hytrustkc.png">    </p:cNvPr>
+          <p:cNvPr id="9" name="Object 8" descr="public/generated/icons/cf329950-0a3e-11e8-922e-f1366c6e1c83-hytrustcc.png">    </p:cNvPr>
           <p:cNvPicPr>
             <a:picLocks noChangeAspect="1"/>
           </p:cNvPicPr>
@@ -30644,7 +30644,7 @@
                 <a:ea typeface="Helvetica" pitchFamily="34" charset="-122"/>
                 <a:cs typeface="Helvetica" pitchFamily="34" charset="-120"/>
               </a:rPr>
-              <a:t>HYTRUST KEYCONTROL</a:t>
+              <a:t>HYTRUST CLOUDCONTROL</a:t>
             </a:r>
             <a:endParaRPr lang="en-US" dirty="0"/>
           </a:p>
@@ -30677,7 +30677,7 @@
       </p:sp>
       <p:pic>
         <p:nvPicPr>
-          <p:cNvPr id="12" name="Object 11" descr="public/generated/icons/c1d5aa90-2cab-11ef-bc36-b3feacb6d8d5.png">    </p:cNvPr>
+          <p:cNvPr id="12" name="Object 11" descr="public/generated/icons/cf329950-0a3e-11e8-922e-f1366c6e1c83-hytrustdc.png">    </p:cNvPr>
           <p:cNvPicPr>
             <a:picLocks noChangeAspect="1"/>
           </p:cNvPicPr>
@@ -30733,7 +30733,7 @@
                 <a:ea typeface="Helvetica" pitchFamily="34" charset="-122"/>
                 <a:cs typeface="Helvetica" pitchFamily="34" charset="-120"/>
               </a:rPr>
-              <a:t>I MANAGED ON POWER VIRTUAL SERVER</a:t>
+              <a:t>HYTRUST DATACONTROL</a:t>
             </a:r>
             <a:endParaRPr lang="en-US" dirty="0"/>
           </a:p>
@@ -30766,7 +30766,7 @@
       </p:sp>
       <p:pic>
         <p:nvPicPr>
-          <p:cNvPr id="15" name="Object 14" descr="public/generated/icons/is.image.png">    </p:cNvPr>
+          <p:cNvPr id="15" name="Object 14" descr="public/generated/icons/cf329950-0a3e-11e8-922e-f1366c6e1c83-hytrustkc.png">    </p:cNvPr>
           <p:cNvPicPr>
             <a:picLocks noChangeAspect="1"/>
           </p:cNvPicPr>
@@ -30822,7 +30822,7 @@
                 <a:ea typeface="Helvetica" pitchFamily="34" charset="-122"/>
                 <a:cs typeface="Helvetica" pitchFamily="34" charset="-120"/>
               </a:rPr>
-              <a:t>IMAGE SERVICE FOR VPC</a:t>
+              <a:t>HYTRUST KEYCONTROL</a:t>
             </a:r>
             <a:endParaRPr lang="en-US" dirty="0"/>
           </a:p>
@@ -30855,7 +30855,7 @@
       </p:sp>
       <p:pic>
         <p:nvPicPr>
-          <p:cNvPr id="18" name="Object 17" descr="public/generated/icons/is.metadata.png">    </p:cNvPr>
+          <p:cNvPr id="18" name="Object 17" descr="public/generated/icons/c1d5aa90-2cab-11ef-bc36-b3feacb6d8d5.png">    </p:cNvPr>
           <p:cNvPicPr>
             <a:picLocks noChangeAspect="1"/>
           </p:cNvPicPr>
@@ -30911,7 +30911,7 @@
                 <a:ea typeface="Helvetica" pitchFamily="34" charset="-122"/>
                 <a:cs typeface="Helvetica" pitchFamily="34" charset="-120"/>
               </a:rPr>
-              <a:t>INSTANCE METADATA FOR VPC</a:t>
+              <a:t>I MANAGED ON POWER VIRTUAL SERVER</a:t>
             </a:r>
             <a:endParaRPr lang="en-US" dirty="0"/>
           </a:p>
@@ -30944,7 +30944,7 @@
       </p:sp>
       <p:pic>
         <p:nvPicPr>
-          <p:cNvPr id="21" name="Object 20" descr="public/generated/icons/75874a60-cb12-11e7-948e-37ac098eb1b9.png">    </p:cNvPr>
+          <p:cNvPr id="21" name="Object 20" descr="public/generated/icons/is.image.png">    </p:cNvPr>
           <p:cNvPicPr>
             <a:picLocks noChangeAspect="1"/>
           </p:cNvPicPr>
@@ -31000,7 +31000,7 @@
                 <a:ea typeface="Helvetica" pitchFamily="34" charset="-122"/>
                 <a:cs typeface="Helvetica" pitchFamily="34" charset="-120"/>
               </a:rPr>
-              <a:t>INTERNET SERVICES</a:t>
+              <a:t>IMAGE SERVICE FOR VPC</a:t>
             </a:r>
             <a:endParaRPr lang="en-US" dirty="0"/>
           </a:p>
@@ -31033,7 +31033,7 @@
       </p:sp>
       <p:pic>
         <p:nvPicPr>
-          <p:cNvPr id="24" name="Object 23" descr="public/generated/icons/12.png">    </p:cNvPr>
+          <p:cNvPr id="24" name="Object 23" descr="public/generated/icons/is.metadata.png">    </p:cNvPr>
           <p:cNvPicPr>
             <a:picLocks noChangeAspect="1"/>
           </p:cNvPicPr>
@@ -31089,7 +31089,7 @@
                 <a:ea typeface="Helvetica" pitchFamily="34" charset="-122"/>
                 <a:cs typeface="Helvetica" pitchFamily="34" charset="-120"/>
               </a:rPr>
-              <a:t>IPSEC VPN</a:t>
+              <a:t>INSTANCE METADATA FOR VPC</a:t>
             </a:r>
             <a:endParaRPr lang="en-US" dirty="0"/>
           </a:p>
@@ -31122,7 +31122,7 @@
       </p:sp>
       <p:pic>
         <p:nvPicPr>
-          <p:cNvPr id="27" name="Object 26" descr="public/generated/icons/035145f0-2cac-4505-59e9-2e363d08d5aa.png">    </p:cNvPr>
+          <p:cNvPr id="27" name="Object 26" descr="public/generated/icons/75874a60-cb12-11e7-948e-37ac098eb1b9.png">    </p:cNvPr>
           <p:cNvPicPr>
             <a:picLocks noChangeAspect="1"/>
           </p:cNvPicPr>
@@ -31178,7 +31178,7 @@
                 <a:ea typeface="Helvetica" pitchFamily="34" charset="-122"/>
                 <a:cs typeface="Helvetica" pitchFamily="34" charset="-120"/>
               </a:rPr>
-              <a:t>JUNIPER VSRX</a:t>
+              <a:t>INTERNET SERVICES</a:t>
             </a:r>
             <a:endParaRPr lang="en-US" dirty="0"/>
           </a:p>
@@ -31211,7 +31211,7 @@
       </p:sp>
       <p:pic>
         <p:nvPicPr>
-          <p:cNvPr id="30" name="Object 29" descr="public/generated/icons/ee41347f-b18e-4ca6-bf80-b5467c63f9a6.png">    </p:cNvPr>
+          <p:cNvPr id="30" name="Object 29" descr="public/generated/icons/12.png">    </p:cNvPr>
           <p:cNvPicPr>
             <a:picLocks noChangeAspect="1"/>
           </p:cNvPicPr>
@@ -31267,7 +31267,7 @@
                 <a:ea typeface="Helvetica" pitchFamily="34" charset="-122"/>
                 <a:cs typeface="Helvetica" pitchFamily="34" charset="-120"/>
               </a:rPr>
-              <a:t>KEY PROTECT</a:t>
+              <a:t>IPSEC VPN</a:t>
             </a:r>
             <a:endParaRPr lang="en-US" dirty="0"/>
           </a:p>
@@ -31300,7 +31300,7 @@
       </p:sp>
       <p:pic>
         <p:nvPicPr>
-          <p:cNvPr id="33" name="Object 32" descr="public/generated/icons/cf329950-0a3e-11e8-922e-f1366c6e1c83-kmipadapter.png">    </p:cNvPr>
+          <p:cNvPr id="33" name="Object 32" descr="public/generated/icons/035145f0-2cac-4505-59e9-2e363d08d5aa.png">    </p:cNvPr>
           <p:cNvPicPr>
             <a:picLocks noChangeAspect="1"/>
           </p:cNvPicPr>
@@ -31356,7 +31356,7 @@
                 <a:ea typeface="Helvetica" pitchFamily="34" charset="-122"/>
                 <a:cs typeface="Helvetica" pitchFamily="34" charset="-120"/>
               </a:rPr>
-              <a:t>KMIP FOR VMWARE</a:t>
+              <a:t>JUNIPER VSRX</a:t>
             </a:r>
             <a:endParaRPr lang="en-US" dirty="0"/>
           </a:p>
@@ -31389,7 +31389,7 @@
       </p:sp>
       <p:pic>
         <p:nvPicPr>
-          <p:cNvPr id="36" name="Object 35" descr="public/generated/icons/983ea9a2-0fec-4021-8b70-8da5373394e5.png">    </p:cNvPr>
+          <p:cNvPr id="36" name="Object 35" descr="public/generated/icons/ee41347f-b18e-4ca6-bf80-b5467c63f9a6.png">    </p:cNvPr>
           <p:cNvPicPr>
             <a:picLocks noChangeAspect="1"/>
           </p:cNvPicPr>
@@ -31445,7 +31445,7 @@
                 <a:ea typeface="Helvetica" pitchFamily="34" charset="-122"/>
                 <a:cs typeface="Helvetica" pitchFamily="34" charset="-120"/>
               </a:rPr>
-              <a:t>KNOWLEDGE STUDIO</a:t>
+              <a:t>KEY PROTECT</a:t>
             </a:r>
             <a:endParaRPr lang="en-US" dirty="0"/>
           </a:p>
@@ -31478,7 +31478,7 @@
       </p:sp>
       <p:pic>
         <p:nvPicPr>
-          <p:cNvPr id="39" name="Object 38" descr="public/generated/icons/a8f89634-261c-4832-8257-b25e04787988.png">    </p:cNvPr>
+          <p:cNvPr id="39" name="Object 38" descr="public/generated/icons/cf329950-0a3e-11e8-922e-f1366c6e1c83-kmipadapter.png">    </p:cNvPr>
           <p:cNvPicPr>
             <a:picLocks noChangeAspect="1"/>
           </p:cNvPicPr>
@@ -31534,7 +31534,7 @@
                 <a:ea typeface="Helvetica" pitchFamily="34" charset="-122"/>
                 <a:cs typeface="Helvetica" pitchFamily="34" charset="-120"/>
               </a:rPr>
-              <a:t>KOMPRISE ELASTIC DATA MIGRATION</a:t>
+              <a:t>KMIP FOR VMWARE</a:t>
             </a:r>
             <a:endParaRPr lang="en-US" dirty="0"/>
           </a:p>
@@ -31567,7 +31567,7 @@
       </p:sp>
       <p:pic>
         <p:nvPicPr>
-          <p:cNvPr id="42" name="Object 41" descr="public/generated/icons/f1fa7442-9ee0-4e27-94c2-0cb3776a0a0a.png">    </p:cNvPr>
+          <p:cNvPr id="42" name="Object 41" descr="public/generated/icons/983ea9a2-0fec-4021-8b70-8da5373394e5.png">    </p:cNvPr>
           <p:cNvPicPr>
             <a:picLocks noChangeAspect="1"/>
           </p:cNvPicPr>
@@ -31623,7 +31623,7 @@
                 <a:ea typeface="Helvetica" pitchFamily="34" charset="-122"/>
                 <a:cs typeface="Helvetica" pitchFamily="34" charset="-120"/>
               </a:rPr>
-              <a:t>KOMPRISE INTELLIGENT DATA MANAGEMENT SUITE</a:t>
+              <a:t>KNOWLEDGE STUDIO</a:t>
             </a:r>
             <a:endParaRPr lang="en-US" dirty="0"/>
           </a:p>
@@ -31656,7 +31656,7 @@
       </p:sp>
       <p:pic>
         <p:nvPicPr>
-          <p:cNvPr id="45" name="Object 44" descr="public/generated/icons/containers-kubernetes.png">    </p:cNvPr>
+          <p:cNvPr id="45" name="Object 44" descr="public/generated/icons/a8f89634-261c-4832-8257-b25e04787988.png">    </p:cNvPr>
           <p:cNvPicPr>
             <a:picLocks noChangeAspect="1"/>
           </p:cNvPicPr>
@@ -31712,7 +31712,7 @@
                 <a:ea typeface="Helvetica" pitchFamily="34" charset="-122"/>
                 <a:cs typeface="Helvetica" pitchFamily="34" charset="-120"/>
               </a:rPr>
-              <a:t>KUBERNETES SERVICE</a:t>
+              <a:t>KOMPRISE ELASTIC DATA MIGRATION</a:t>
             </a:r>
             <a:endParaRPr lang="en-US" dirty="0"/>
           </a:p>
@@ -31745,7 +31745,7 @@
       </p:sp>
       <p:pic>
         <p:nvPicPr>
-          <p:cNvPr id="48" name="Object 47" descr="public/generated/icons/is.load-balancer.png">    </p:cNvPr>
+          <p:cNvPr id="48" name="Object 47" descr="public/generated/icons/f1fa7442-9ee0-4e27-94c2-0cb3776a0a0a.png">    </p:cNvPr>
           <p:cNvPicPr>
             <a:picLocks noChangeAspect="1"/>
           </p:cNvPicPr>
@@ -31801,7 +31801,7 @@
                 <a:ea typeface="Helvetica" pitchFamily="34" charset="-122"/>
                 <a:cs typeface="Helvetica" pitchFamily="34" charset="-120"/>
               </a:rPr>
-              <a:t>LOAD BALANCER FOR VPC</a:t>
+              <a:t>KOMPRISE INTELLIGENT DATA MANAGEMENT SUITE</a:t>
             </a:r>
             <a:endParaRPr lang="en-US" dirty="0"/>
           </a:p>
@@ -31834,7 +31834,7 @@
       </p:sp>
       <p:pic>
         <p:nvPicPr>
-          <p:cNvPr id="51" name="Object 50" descr="public/generated/icons/9349854b-eb46-427f-8ef6-687d601c9eda.png">    </p:cNvPr>
+          <p:cNvPr id="51" name="Object 50" descr="public/generated/icons/containers-kubernetes.png">    </p:cNvPr>
           <p:cNvPicPr>
             <a:picLocks noChangeAspect="1"/>
           </p:cNvPicPr>
@@ -31890,7 +31890,7 @@
                 <a:ea typeface="Helvetica" pitchFamily="34" charset="-122"/>
                 <a:cs typeface="Helvetica" pitchFamily="34" charset="-120"/>
               </a:rPr>
-              <a:t>LYVE DATA TRANSFER SERVICES</a:t>
+              <a:t>KUBERNETES SERVICE</a:t>
             </a:r>
             <a:endParaRPr lang="en-US" dirty="0"/>
           </a:p>
@@ -31923,7 +31923,7 @@
       </p:sp>
       <p:pic>
         <p:nvPicPr>
-          <p:cNvPr id="54" name="Object 53" descr="public/generated/icons/cf329950-0a3e-11e8-922e-f1366c6e1c83-managedveeam.png">    </p:cNvPr>
+          <p:cNvPr id="54" name="Object 53" descr="public/generated/icons/is.load-balancer.png">    </p:cNvPr>
           <p:cNvPicPr>
             <a:picLocks noChangeAspect="1"/>
           </p:cNvPicPr>
@@ -31979,7 +31979,7 @@
                 <a:ea typeface="Helvetica" pitchFamily="34" charset="-122"/>
                 <a:cs typeface="Helvetica" pitchFamily="34" charset="-120"/>
               </a:rPr>
-              <a:t>MANAGED BACKUP SERVICES</a:t>
+              <a:t>LOAD BALANCER FOR VPC</a:t>
             </a:r>
             <a:endParaRPr lang="en-US" dirty="0"/>
           </a:p>
@@ -32012,7 +32012,7 @@
       </p:sp>
       <p:pic>
         <p:nvPicPr>
-          <p:cNvPr id="57" name="Object 56" descr="public/generated/icons/cf329950-0a3e-11e8-922e-f1366c6e1c83-managedzerto.png">    </p:cNvPr>
+          <p:cNvPr id="57" name="Object 56" descr="public/generated/icons/9349854b-eb46-427f-8ef6-687d601c9eda.png">    </p:cNvPr>
           <p:cNvPicPr>
             <a:picLocks noChangeAspect="1"/>
           </p:cNvPicPr>
@@ -32068,7 +32068,7 @@
                 <a:ea typeface="Helvetica" pitchFamily="34" charset="-122"/>
                 <a:cs typeface="Helvetica" pitchFamily="34" charset="-120"/>
               </a:rPr>
-              <a:t>MANAGED DISASTER RECOVERY SERVICES</a:t>
+              <a:t>LYVE DATA TRANSFER SERVICES</a:t>
             </a:r>
             <a:endParaRPr lang="en-US" dirty="0"/>
           </a:p>
@@ -32101,7 +32101,7 @@
       </p:sp>
       <p:pic>
         <p:nvPicPr>
-          <p:cNvPr id="60" name="Object 59" descr="public/generated/icons/cfb3c3da-7b1f-0879-f414-f367da218488.png">    </p:cNvPr>
+          <p:cNvPr id="60" name="Object 59" descr="public/generated/icons/cf329950-0a3e-11e8-922e-f1366c6e1c83-managedveeam.png">    </p:cNvPr>
           <p:cNvPicPr>
             <a:picLocks noChangeAspect="1"/>
           </p:cNvPicPr>
@@ -32157,7 +32157,7 @@
                 <a:ea typeface="Helvetica" pitchFamily="34" charset="-122"/>
                 <a:cs typeface="Helvetica" pitchFamily="34" charset="-120"/>
               </a:rPr>
-              <a:t>MANAGED NETWORK SECURITY SERVICES</a:t>
+              <a:t>MANAGED BACKUP SERVICES</a:t>
             </a:r>
             <a:endParaRPr lang="en-US" dirty="0"/>
           </a:p>
@@ -32190,7 +32190,7 @@
       </p:sp>
       <p:pic>
         <p:nvPicPr>
-          <p:cNvPr id="63" name="Object 62" descr="public/generated/icons/cf329950-0a3e-11e8-922e-f1366c6e1c83-imi.png">    </p:cNvPr>
+          <p:cNvPr id="63" name="Object 62" descr="public/generated/icons/cf329950-0a3e-11e8-922e-f1366c6e1c83-managedzerto.png">    </p:cNvPr>
           <p:cNvPicPr>
             <a:picLocks noChangeAspect="1"/>
           </p:cNvPicPr>
@@ -32246,7 +32246,7 @@
                 <a:ea typeface="Helvetica" pitchFamily="34" charset="-122"/>
                 <a:cs typeface="Helvetica" pitchFamily="34" charset="-120"/>
               </a:rPr>
-              <a:t>MANAGED VMWARE SERVICES</a:t>
+              <a:t>MANAGED DISASTER RECOVERY SERVICES</a:t>
             </a:r>
             <a:endParaRPr lang="en-US" dirty="0"/>
           </a:p>
@@ -32279,7 +32279,7 @@
       </p:sp>
       <p:pic>
         <p:nvPicPr>
-          <p:cNvPr id="66" name="Object 65" descr="public/generated/icons/14bd30e0-8921-11e9-a2c5-13fceaf553c0.png">    </p:cNvPr>
+          <p:cNvPr id="66" name="Object 65" descr="public/generated/icons/cfb3c3da-7b1f-0879-f414-f367da218488.png">    </p:cNvPr>
           <p:cNvPicPr>
             <a:picLocks noChangeAspect="1"/>
           </p:cNvPicPr>
@@ -32335,7 +32335,7 @@
                 <a:ea typeface="Helvetica" pitchFamily="34" charset="-122"/>
                 <a:cs typeface="Helvetica" pitchFamily="34" charset="-120"/>
               </a:rPr>
-              <a:t>MATCH 360 WITH WATSON</a:t>
+              <a:t>MANAGED NETWORK SECURITY SERVICES</a:t>
             </a:r>
             <a:endParaRPr lang="en-US" dirty="0"/>
           </a:p>
@@ -32368,7 +32368,7 @@
       </p:sp>
       <p:pic>
         <p:nvPicPr>
-          <p:cNvPr id="69" name="Object 68" descr="public/generated/icons/messages-for-rabbitmq.png">    </p:cNvPr>
+          <p:cNvPr id="69" name="Object 68" descr="public/generated/icons/cf329950-0a3e-11e8-922e-f1366c6e1c83-imi.png">    </p:cNvPr>
           <p:cNvPicPr>
             <a:picLocks noChangeAspect="1"/>
           </p:cNvPicPr>
@@ -32424,7 +32424,7 @@
                 <a:ea typeface="Helvetica" pitchFamily="34" charset="-122"/>
                 <a:cs typeface="Helvetica" pitchFamily="34" charset="-120"/>
               </a:rPr>
-              <a:t>MESSAGES FOR RABBITMQ</a:t>
+              <a:t>MANAGED VMWARE SERVICES</a:t>
             </a:r>
             <a:endParaRPr lang="en-US" dirty="0"/>
           </a:p>
@@ -32457,7 +32457,7 @@
       </p:sp>
       <p:pic>
         <p:nvPicPr>
-          <p:cNvPr id="72" name="Object 71" descr="public/generated/icons/d4000551-49ff-4868-9e05-f863e60fad3a.png">    </p:cNvPr>
+          <p:cNvPr id="72" name="Object 71" descr="public/generated/icons/14bd30e0-8921-11e9-a2c5-13fceaf553c0.png">    </p:cNvPr>
           <p:cNvPicPr>
             <a:picLocks noChangeAspect="1"/>
           </p:cNvPicPr>
@@ -32513,7 +32513,7 @@
                 <a:ea typeface="Helvetica" pitchFamily="34" charset="-122"/>
                 <a:cs typeface="Helvetica" pitchFamily="34" charset="-120"/>
               </a:rPr>
-              <a:t>MINIO</a:t>
+              <a:t>MATCH 360 WITH WATSON</a:t>
             </a:r>
             <a:endParaRPr lang="en-US" dirty="0"/>
           </a:p>
@@ -32546,7 +32546,7 @@
       </p:sp>
       <p:pic>
         <p:nvPicPr>
-          <p:cNvPr id="75" name="Object 74" descr="public/generated/icons/9d9545b4-b866-4c1b-9fc0-39273aef5bb0.png">    </p:cNvPr>
+          <p:cNvPr id="75" name="Object 74" descr="public/generated/icons/messages-for-rabbitmq.png">    </p:cNvPr>
           <p:cNvPicPr>
             <a:picLocks noChangeAspect="1"/>
           </p:cNvPicPr>
@@ -32602,7 +32602,7 @@
                 <a:ea typeface="Helvetica" pitchFamily="34" charset="-122"/>
                 <a:cs typeface="Helvetica" pitchFamily="34" charset="-120"/>
               </a:rPr>
-              <a:t>MONO-X ONE FOR POWERVS</a:t>
+              <a:t>MESSAGES FOR RABBITMQ</a:t>
             </a:r>
             <a:endParaRPr lang="en-US" dirty="0"/>
           </a:p>
@@ -32635,7 +32635,7 @@
       </p:sp>
       <p:pic>
         <p:nvPicPr>
-          <p:cNvPr id="78" name="Object 77" descr="public/generated/icons/01037c41-adce-4bb5-8b45-0c06004916c4.png">    </p:cNvPr>
+          <p:cNvPr id="78" name="Object 77" descr="public/generated/icons/d4000551-49ff-4868-9e05-f863e60fad3a.png">    </p:cNvPr>
           <p:cNvPicPr>
             <a:picLocks noChangeAspect="1"/>
           </p:cNvPicPr>
@@ -32691,7 +32691,7 @@
                 <a:ea typeface="Helvetica" pitchFamily="34" charset="-122"/>
                 <a:cs typeface="Helvetica" pitchFamily="34" charset="-120"/>
               </a:rPr>
-              <a:t>MQ</a:t>
+              <a:t>MINIO</a:t>
             </a:r>
             <a:endParaRPr lang="en-US" dirty="0"/>
           </a:p>
@@ -32724,7 +32724,7 @@
       </p:sp>
       <p:pic>
         <p:nvPicPr>
-          <p:cNvPr id="81" name="Object 80" descr="public/generated/icons/is.snapshot-consistency-group.png">    </p:cNvPr>
+          <p:cNvPr id="81" name="Object 80" descr="public/generated/icons/9d9545b4-b866-4c1b-9fc0-39273aef5bb0.png">    </p:cNvPr>
           <p:cNvPicPr>
             <a:picLocks noChangeAspect="1"/>
           </p:cNvPicPr>
@@ -32780,7 +32780,7 @@
                 <a:ea typeface="Helvetica" pitchFamily="34" charset="-122"/>
                 <a:cs typeface="Helvetica" pitchFamily="34" charset="-120"/>
               </a:rPr>
-              <a:t>MULTI VOLUME SNAPSHOTS FOR VPC</a:t>
+              <a:t>MONO-X ONE FOR POWERVS</a:t>
             </a:r>
             <a:endParaRPr lang="en-US" dirty="0"/>
           </a:p>
@@ -32813,7 +32813,7 @@
       </p:sp>
       <p:pic>
         <p:nvPicPr>
-          <p:cNvPr id="84" name="Object 83" descr="public/generated/icons/bb6393bc-7d81-446b-9728-61b704f6eca5.png">    </p:cNvPr>
+          <p:cNvPr id="84" name="Object 83" descr="public/generated/icons/01037c41-adce-4bb5-8b45-0c06004916c4.png">    </p:cNvPr>
           <p:cNvPicPr>
             <a:picLocks noChangeAspect="1"/>
           </p:cNvPicPr>
@@ -32869,7 +32869,7 @@
                 <a:ea typeface="Helvetica" pitchFamily="34" charset="-122"/>
                 <a:cs typeface="Helvetica" pitchFamily="34" charset="-120"/>
               </a:rPr>
-              <a:t>NATURAL LANGUAGE UNDERSTANDING</a:t>
+              <a:t>MQ</a:t>
             </a:r>
             <a:endParaRPr lang="en-US" dirty="0"/>
           </a:p>
@@ -32902,7 +32902,7 @@
       </p:sp>
       <p:pic>
         <p:nvPicPr>
-          <p:cNvPr id="87" name="Object 86" descr="public/generated/icons/cf329950-0a3e-11e8-922e-f1366c6e1c83-netapp.png">    </p:cNvPr>
+          <p:cNvPr id="87" name="Object 86" descr="public/generated/icons/is.snapshot-consistency-group.png">    </p:cNvPr>
           <p:cNvPicPr>
             <a:picLocks noChangeAspect="1"/>
           </p:cNvPicPr>
@@ -32958,7 +32958,7 @@
                 <a:ea typeface="Helvetica" pitchFamily="34" charset="-122"/>
                 <a:cs typeface="Helvetica" pitchFamily="34" charset="-120"/>
               </a:rPr>
-              <a:t>NETAPP ONTAP SELECT</a:t>
+              <a:t>MULTI VOLUME SNAPSHOTS FOR VPC</a:t>
             </a:r>
             <a:endParaRPr lang="en-US" dirty="0"/>
           </a:p>
@@ -32991,7 +32991,7 @@
       </p:sp>
       <p:pic>
         <p:nvPicPr>
-          <p:cNvPr id="90" name="Object 89" descr="public/generated/icons/cc42cff0-b19b-11eb-9a66-c717766c1d30.png">    </p:cNvPr>
+          <p:cNvPr id="90" name="Object 89" descr="public/generated/icons/bb6393bc-7d81-446b-9728-61b704f6eca5.png">    </p:cNvPr>
           <p:cNvPicPr>
             <a:picLocks noChangeAspect="1"/>
           </p:cNvPicPr>
@@ -33047,7 +33047,7 @@
                 <a:ea typeface="Helvetica" pitchFamily="34" charset="-122"/>
                 <a:cs typeface="Helvetica" pitchFamily="34" charset="-120"/>
               </a:rPr>
-              <a:t>NETEZZA PERFORMANCE SERVER</a:t>
+              <a:t>NATURAL LANGUAGE UNDERSTANDING</a:t>
             </a:r>
             <a:endParaRPr lang="en-US" dirty="0"/>
           </a:p>
@@ -33080,7 +33080,7 @@
       </p:sp>
       <p:pic>
         <p:nvPicPr>
-          <p:cNvPr id="93" name="Object 92" descr="public/generated/icons/is.network-acl.png">    </p:cNvPr>
+          <p:cNvPr id="93" name="Object 92" descr="public/generated/icons/cf329950-0a3e-11e8-922e-f1366c6e1c83-netapp.png">    </p:cNvPr>
           <p:cNvPicPr>
             <a:picLocks noChangeAspect="1"/>
           </p:cNvPicPr>
@@ -33136,7 +33136,7 @@
                 <a:ea typeface="Helvetica" pitchFamily="34" charset="-122"/>
                 <a:cs typeface="Helvetica" pitchFamily="34" charset="-120"/>
               </a:rPr>
-              <a:t>NETWORK ACL</a:t>
+              <a:t>NETAPP ONTAP SELECT</a:t>
             </a:r>
             <a:endParaRPr lang="en-US" dirty="0"/>
           </a:p>
@@ -33169,7 +33169,7 @@
       </p:sp>
       <p:pic>
         <p:nvPicPr>
-          <p:cNvPr id="96" name="Object 95" descr="public/generated/icons/d97bd0c3-a8e5-4f3d-b925-16380e039a9a.png">    </p:cNvPr>
+          <p:cNvPr id="96" name="Object 95" descr="public/generated/icons/cc42cff0-b19b-11eb-9a66-c717766c1d30.png">    </p:cNvPr>
           <p:cNvPicPr>
             <a:picLocks noChangeAspect="1"/>
           </p:cNvPicPr>
@@ -33225,7 +33225,7 @@
                 <a:ea typeface="Helvetica" pitchFamily="34" charset="-122"/>
                 <a:cs typeface="Helvetica" pitchFamily="34" charset="-120"/>
               </a:rPr>
-              <a:t>NEURALSEEK</a:t>
+              <a:t>NETEZZA PERFORMANCE SERVER</a:t>
             </a:r>
             <a:endParaRPr lang="en-US" dirty="0"/>
           </a:p>
@@ -33258,7 +33258,7 @@
       </p:sp>
       <p:pic>
         <p:nvPicPr>
-          <p:cNvPr id="99" name="Object 98" descr="public/generated/icons/266c5178-8d88-40a9-966f-ea9f775bab05.png">    </p:cNvPr>
+          <p:cNvPr id="99" name="Object 98" descr="public/generated/icons/is.network-acl.png">    </p:cNvPr>
           <p:cNvPicPr>
             <a:picLocks noChangeAspect="1"/>
           </p:cNvPicPr>
@@ -33314,7 +33314,7 @@
                 <a:ea typeface="Helvetica" pitchFamily="34" charset="-122"/>
                 <a:cs typeface="Helvetica" pitchFamily="34" charset="-120"/>
               </a:rPr>
-              <a:t>NEURALSEEK PROFESSIONAL SERVICES</a:t>
+              <a:t>NETWORK ACL</a:t>
             </a:r>
             <a:endParaRPr lang="en-US" dirty="0"/>
           </a:p>
@@ -33347,7 +33347,7 @@
       </p:sp>
       <p:pic>
         <p:nvPicPr>
-          <p:cNvPr id="102" name="Object 101" descr="public/generated/icons/466091c0-9b8d-11eb-8f8c-91e95378d441.png">    </p:cNvPr>
+          <p:cNvPr id="102" name="Object 101" descr="public/generated/icons/d97bd0c3-a8e5-4f3d-b925-16380e039a9a.png">    </p:cNvPr>
           <p:cNvPicPr>
             <a:picLocks noChangeAspect="1"/>
           </p:cNvPicPr>
@@ -33403,7 +33403,7 @@
                 <a:ea typeface="Helvetica" pitchFamily="34" charset="-122"/>
                 <a:cs typeface="Helvetica" pitchFamily="34" charset="-120"/>
               </a:rPr>
-              <a:t>OPENPAGES</a:t>
+              <a:t>NEURALSEEK</a:t>
             </a:r>
             <a:endParaRPr lang="en-US" dirty="0"/>
           </a:p>
@@ -33436,7 +33436,7 @@
       </p:sp>
       <p:pic>
         <p:nvPicPr>
-          <p:cNvPr id="105" name="Object 104" descr="public/generated/icons/2f756420-434f-11e8-ae40-6bdd72502abc.png">    </p:cNvPr>
+          <p:cNvPr id="105" name="Object 104" descr="public/generated/icons/266c5178-8d88-40a9-966f-ea9f775bab05.png">    </p:cNvPr>
           <p:cNvPicPr>
             <a:picLocks noChangeAspect="1"/>
           </p:cNvPicPr>
@@ -33492,7 +33492,7 @@
                 <a:ea typeface="Helvetica" pitchFamily="34" charset="-122"/>
                 <a:cs typeface="Helvetica" pitchFamily="34" charset="-120"/>
               </a:rPr>
-              <a:t>PARTNER WITH TECHNOLOGY EXPERT LABS</a:t>
+              <a:t>NEURALSEEK PROFESSIONAL SERVICES</a:t>
             </a:r>
             <a:endParaRPr lang="en-US" dirty="0"/>
           </a:p>
@@ -33525,7 +33525,7 @@
       </p:sp>
       <p:pic>
         <p:nvPicPr>
-          <p:cNvPr id="108" name="Object 107" descr="public/generated/icons/bb6229f0-e632-11ee-ae26-5d6d9ba99eec.png">    </p:cNvPr>
+          <p:cNvPr id="108" name="Object 107" descr="public/generated/icons/466091c0-9b8d-11eb-8f8c-91e95378d441.png">    </p:cNvPr>
           <p:cNvPicPr>
             <a:picLocks noChangeAspect="1"/>
           </p:cNvPicPr>
@@ -33581,7 +33581,7 @@
                 <a:ea typeface="Helvetica" pitchFamily="34" charset="-122"/>
                 <a:cs typeface="Helvetica" pitchFamily="34" charset="-120"/>
               </a:rPr>
-              <a:t>PARTNER WITH TECHNOLOGY EXPERT LABS - BUILD IBM STORAGE PROTECT FOR POWERVS</a:t>
+              <a:t>OPENPAGES</a:t>
             </a:r>
             <a:endParaRPr lang="en-US" dirty="0"/>
           </a:p>
@@ -33647,7 +33647,7 @@
       </p:sp>
       <p:pic>
         <p:nvPicPr>
-          <p:cNvPr id="3" name="Object 2" descr="public/generated/icons/f0ea1510-e632-11ee-acb6-4d13e7035de5.png">    </p:cNvPr>
+          <p:cNvPr id="3" name="Object 2" descr="public/generated/icons/2f756420-434f-11e8-ae40-6bdd72502abc.png">    </p:cNvPr>
           <p:cNvPicPr>
             <a:picLocks noChangeAspect="1"/>
           </p:cNvPicPr>
@@ -33703,7 +33703,7 @@
                 <a:ea typeface="Helvetica" pitchFamily="34" charset="-122"/>
                 <a:cs typeface="Helvetica" pitchFamily="34" charset="-120"/>
               </a:rPr>
-              <a:t>PARTNER WITH TECHNOLOGY EXPERT LABS - BUILD SAP HANA STARTER EDITION</a:t>
+              <a:t>PARTNER WITH TECHNOLOGY EXPERT LABS</a:t>
             </a:r>
             <a:endParaRPr lang="en-US" dirty="0"/>
           </a:p>
@@ -33736,7 +33736,7 @@
       </p:sp>
       <p:pic>
         <p:nvPicPr>
-          <p:cNvPr id="6" name="Object 5" descr="public/generated/icons/339a87f0-e633-11ee-acb6-4d13e7035de5.png">    </p:cNvPr>
+          <p:cNvPr id="6" name="Object 5" descr="public/generated/icons/bb6229f0-e632-11ee-ae26-5d6d9ba99eec.png">    </p:cNvPr>
           <p:cNvPicPr>
             <a:picLocks noChangeAspect="1"/>
           </p:cNvPicPr>
@@ -33792,7 +33792,7 @@
                 <a:ea typeface="Helvetica" pitchFamily="34" charset="-122"/>
                 <a:cs typeface="Helvetica" pitchFamily="34" charset="-120"/>
               </a:rPr>
-              <a:t>PARTNER WITH TECHNOLOGY EXPERT LABS - MIGRATE WORKLOADS TO IBM POWER VIRTUAL SERVER</a:t>
+              <a:t>PARTNER WITH TECHNOLOGY EXPERT LABS - BUILD IBM STORAGE PROTECT FOR POWERVS</a:t>
             </a:r>
             <a:endParaRPr lang="en-US" dirty="0"/>
           </a:p>
@@ -33825,7 +33825,7 @@
       </p:sp>
       <p:pic>
         <p:nvPicPr>
-          <p:cNvPr id="9" name="Object 8" descr="public/generated/icons/is.placement-group.png">    </p:cNvPr>
+          <p:cNvPr id="9" name="Object 8" descr="public/generated/icons/f0ea1510-e632-11ee-acb6-4d13e7035de5.png">    </p:cNvPr>
           <p:cNvPicPr>
             <a:picLocks noChangeAspect="1"/>
           </p:cNvPicPr>
@@ -33881,7 +33881,7 @@
                 <a:ea typeface="Helvetica" pitchFamily="34" charset="-122"/>
                 <a:cs typeface="Helvetica" pitchFamily="34" charset="-120"/>
               </a:rPr>
-              <a:t>PLACEMENT GROUPS FOR VPC</a:t>
+              <a:t>PARTNER WITH TECHNOLOGY EXPERT LABS - BUILD SAP HANA STARTER EDITION</a:t>
             </a:r>
             <a:endParaRPr lang="en-US" dirty="0"/>
           </a:p>
@@ -33914,7 +33914,7 @@
       </p:sp>
       <p:pic>
         <p:nvPicPr>
-          <p:cNvPr id="12" name="Object 11" descr="public/generated/icons/41690130-a4e8-11ea-94c3-d72a57643c7d.png">    </p:cNvPr>
+          <p:cNvPr id="12" name="Object 11" descr="public/generated/icons/339a87f0-e633-11ee-acb6-4d13e7035de5.png">    </p:cNvPr>
           <p:cNvPicPr>
             <a:picLocks noChangeAspect="1"/>
           </p:cNvPicPr>
@@ -33970,7 +33970,7 @@
                 <a:ea typeface="Helvetica" pitchFamily="34" charset="-122"/>
                 <a:cs typeface="Helvetica" pitchFamily="34" charset="-120"/>
               </a:rPr>
-              <a:t>PLANNING ANALYTICS</a:t>
+              <a:t>PARTNER WITH TECHNOLOGY EXPERT LABS - MIGRATE WORKLOADS TO IBM POWER VIRTUAL SERVER</a:t>
             </a:r>
             <a:endParaRPr lang="en-US" dirty="0"/>
           </a:p>
@@ -34003,7 +34003,7 @@
       </p:sp>
       <p:pic>
         <p:nvPicPr>
-          <p:cNvPr id="15" name="Object 14" descr="public/generated/icons/d666f360-66d1-11e9-85ef-a19427301a8c.png">    </p:cNvPr>
+          <p:cNvPr id="15" name="Object 14" descr="public/generated/icons/is.placement-group.png">    </p:cNvPr>
           <p:cNvPicPr>
             <a:picLocks noChangeAspect="1"/>
           </p:cNvPicPr>
@@ -34059,7 +34059,7 @@
                 <a:ea typeface="Helvetica" pitchFamily="34" charset="-122"/>
                 <a:cs typeface="Helvetica" pitchFamily="34" charset="-120"/>
               </a:rPr>
-              <a:t>PORTWORX ENTERPRISE</a:t>
+              <a:t>PLACEMENT GROUPS FOR VPC</a:t>
             </a:r>
             <a:endParaRPr lang="en-US" dirty="0"/>
           </a:p>
@@ -34092,7 +34092,7 @@
       </p:sp>
       <p:pic>
         <p:nvPicPr>
-          <p:cNvPr id="18" name="Object 17" descr="public/generated/icons/7b2cdb0e-ad91-4fd7-97c0-5398874ec27b.png">    </p:cNvPr>
+          <p:cNvPr id="18" name="Object 17" descr="public/generated/icons/41690130-a4e8-11ea-94c3-d72a57643c7d.png">    </p:cNvPr>
           <p:cNvPicPr>
             <a:picLocks noChangeAspect="1"/>
           </p:cNvPicPr>
@@ -34148,7 +34148,7 @@
                 <a:ea typeface="Helvetica" pitchFamily="34" charset="-122"/>
                 <a:cs typeface="Helvetica" pitchFamily="34" charset="-120"/>
               </a:rPr>
-              <a:t>POWER I MIGRATE 23 SERVICES</a:t>
+              <a:t>PLANNING ANALYTICS</a:t>
             </a:r>
             <a:endParaRPr lang="en-US" dirty="0"/>
           </a:p>
@@ -34181,7 +34181,7 @@
       </p:sp>
       <p:pic>
         <p:nvPicPr>
-          <p:cNvPr id="21" name="Object 20" descr="public/generated/icons/9828699d-dda7-4022-839b-c8e1e8b7d9d8.png">    </p:cNvPr>
+          <p:cNvPr id="21" name="Object 20" descr="public/generated/icons/d666f360-66d1-11e9-85ef-a19427301a8c.png">    </p:cNvPr>
           <p:cNvPicPr>
             <a:picLocks noChangeAspect="1"/>
           </p:cNvPicPr>
@@ -34237,7 +34237,7 @@
                 <a:ea typeface="Helvetica" pitchFamily="34" charset="-122"/>
                 <a:cs typeface="Helvetica" pitchFamily="34" charset="-120"/>
               </a:rPr>
-              <a:t>POWER I MIGRATE WHILE ACTIVE SERVICES</a:t>
+              <a:t>PORTWORX ENTERPRISE</a:t>
             </a:r>
             <a:endParaRPr lang="en-US" dirty="0"/>
           </a:p>
@@ -34270,7 +34270,7 @@
       </p:sp>
       <p:pic>
         <p:nvPicPr>
-          <p:cNvPr id="24" name="Object 23" descr="public/generated/icons/power-iaas.workspace.png">    </p:cNvPr>
+          <p:cNvPr id="24" name="Object 23" descr="public/generated/icons/7b2cdb0e-ad91-4fd7-97c0-5398874ec27b.png">    </p:cNvPr>
           <p:cNvPicPr>
             <a:picLocks noChangeAspect="1"/>
           </p:cNvPicPr>
@@ -34326,7 +34326,7 @@
                 <a:ea typeface="Helvetica" pitchFamily="34" charset="-122"/>
                 <a:cs typeface="Helvetica" pitchFamily="34" charset="-120"/>
               </a:rPr>
-              <a:t>POWER VIRTUAL SERVER</a:t>
+              <a:t>POWER I MIGRATE 23 SERVICES</a:t>
             </a:r>
             <a:endParaRPr lang="en-US" dirty="0"/>
           </a:p>
@@ -34359,7 +34359,7 @@
       </p:sp>
       <p:pic>
         <p:nvPicPr>
-          <p:cNvPr id="27" name="Object 26" descr="public/generated/icons/power-iaas.dedicated-host.png">    </p:cNvPr>
+          <p:cNvPr id="27" name="Object 26" descr="public/generated/icons/9828699d-dda7-4022-839b-c8e1e8b7d9d8.png">    </p:cNvPr>
           <p:cNvPicPr>
             <a:picLocks noChangeAspect="1"/>
           </p:cNvPicPr>
@@ -34415,7 +34415,7 @@
                 <a:ea typeface="Helvetica" pitchFamily="34" charset="-122"/>
                 <a:cs typeface="Helvetica" pitchFamily="34" charset="-120"/>
               </a:rPr>
-              <a:t>POWER VIRTUAL SERVER DEDICATED HOST</a:t>
+              <a:t>POWER I MIGRATE WHILE ACTIVE SERVICES</a:t>
             </a:r>
             <a:endParaRPr lang="en-US" dirty="0"/>
           </a:p>
@@ -34448,7 +34448,7 @@
       </p:sp>
       <p:pic>
         <p:nvPicPr>
-          <p:cNvPr id="30" name="Object 29" descr="public/generated/icons/208072a0-7978-11ef-b369-0733120a414f.png">    </p:cNvPr>
+          <p:cNvPr id="30" name="Object 29" descr="public/generated/icons/power-iaas.workspace.png">    </p:cNvPr>
           <p:cNvPicPr>
             <a:picLocks noChangeAspect="1"/>
           </p:cNvPicPr>
@@ -34504,7 +34504,7 @@
                 <a:ea typeface="Helvetica" pitchFamily="34" charset="-122"/>
                 <a:cs typeface="Helvetica" pitchFamily="34" charset="-120"/>
               </a:rPr>
-              <a:t>POWER VIRTUAL SERVER DR AUTOMATION</a:t>
+              <a:t>POWER VIRTUAL SERVER</a:t>
             </a:r>
             <a:endParaRPr lang="en-US" dirty="0"/>
           </a:p>
@@ -34537,7 +34537,7 @@
       </p:sp>
       <p:pic>
         <p:nvPicPr>
-          <p:cNvPr id="33" name="Object 32" descr="public/generated/icons/power-iaas.image.png">    </p:cNvPr>
+          <p:cNvPr id="33" name="Object 32" descr="public/generated/icons/power-iaas.dedicated-host.png">    </p:cNvPr>
           <p:cNvPicPr>
             <a:picLocks noChangeAspect="1"/>
           </p:cNvPicPr>
@@ -34593,7 +34593,7 @@
                 <a:ea typeface="Helvetica" pitchFamily="34" charset="-122"/>
                 <a:cs typeface="Helvetica" pitchFamily="34" charset="-120"/>
               </a:rPr>
-              <a:t>POWER VIRTUAL SERVER IMAGE</a:t>
+              <a:t>POWER VIRTUAL SERVER DEDICATED HOST</a:t>
             </a:r>
             <a:endParaRPr lang="en-US" dirty="0"/>
           </a:p>
@@ -34626,7 +34626,7 @@
       </p:sp>
       <p:pic>
         <p:nvPicPr>
-          <p:cNvPr id="36" name="Object 35" descr="public/generated/icons/power-iaas.network.png">    </p:cNvPr>
+          <p:cNvPr id="36" name="Object 35" descr="public/generated/icons/208072a0-7978-11ef-b369-0733120a414f.png">    </p:cNvPr>
           <p:cNvPicPr>
             <a:picLocks noChangeAspect="1"/>
           </p:cNvPicPr>
@@ -34682,7 +34682,7 @@
                 <a:ea typeface="Helvetica" pitchFamily="34" charset="-122"/>
                 <a:cs typeface="Helvetica" pitchFamily="34" charset="-120"/>
               </a:rPr>
-              <a:t>POWER VIRTUAL SERVER NETWORK</a:t>
+              <a:t>POWER VIRTUAL SERVER DR AUTOMATION</a:t>
             </a:r>
             <a:endParaRPr lang="en-US" dirty="0"/>
           </a:p>
@@ -34715,7 +34715,7 @@
       </p:sp>
       <p:pic>
         <p:nvPicPr>
-          <p:cNvPr id="39" name="Object 38" descr="public/generated/icons/power-iaas.network-address-group.png">    </p:cNvPr>
+          <p:cNvPr id="39" name="Object 38" descr="public/generated/icons/power-iaas.image.png">    </p:cNvPr>
           <p:cNvPicPr>
             <a:picLocks noChangeAspect="1"/>
           </p:cNvPicPr>
@@ -34771,7 +34771,7 @@
                 <a:ea typeface="Helvetica" pitchFamily="34" charset="-122"/>
                 <a:cs typeface="Helvetica" pitchFamily="34" charset="-120"/>
               </a:rPr>
-              <a:t>POWER VIRTUAL SERVER NETWORK ADDRESS GROUP</a:t>
+              <a:t>POWER VIRTUAL SERVER IMAGE</a:t>
             </a:r>
             <a:endParaRPr lang="en-US" dirty="0"/>
           </a:p>
@@ -34804,7 +34804,7 @@
       </p:sp>
       <p:pic>
         <p:nvPicPr>
-          <p:cNvPr id="42" name="Object 41" descr="public/generated/icons/power-iaas.network-interface.png">    </p:cNvPr>
+          <p:cNvPr id="42" name="Object 41" descr="public/generated/icons/power-iaas.network.png">    </p:cNvPr>
           <p:cNvPicPr>
             <a:picLocks noChangeAspect="1"/>
           </p:cNvPicPr>
@@ -34860,7 +34860,7 @@
                 <a:ea typeface="Helvetica" pitchFamily="34" charset="-122"/>
                 <a:cs typeface="Helvetica" pitchFamily="34" charset="-120"/>
               </a:rPr>
-              <a:t>POWER VIRTUAL SERVER NETWORK INTERFACE</a:t>
+              <a:t>POWER VIRTUAL SERVER NETWORK</a:t>
             </a:r>
             <a:endParaRPr lang="en-US" dirty="0"/>
           </a:p>
@@ -34893,7 +34893,7 @@
       </p:sp>
       <p:pic>
         <p:nvPicPr>
-          <p:cNvPr id="45" name="Object 44" descr="public/generated/icons/power-iaas.network-security-group.png">    </p:cNvPr>
+          <p:cNvPr id="45" name="Object 44" descr="public/generated/icons/power-iaas.network-address-group.png">    </p:cNvPr>
           <p:cNvPicPr>
             <a:picLocks noChangeAspect="1"/>
           </p:cNvPicPr>
@@ -34949,7 +34949,7 @@
                 <a:ea typeface="Helvetica" pitchFamily="34" charset="-122"/>
                 <a:cs typeface="Helvetica" pitchFamily="34" charset="-120"/>
               </a:rPr>
-              <a:t>POWER VIRTUAL SERVER NETWORK SECURITY GROUP</a:t>
+              <a:t>POWER VIRTUAL SERVER NETWORK ADDRESS GROUP</a:t>
             </a:r>
             <a:endParaRPr lang="en-US" dirty="0"/>
           </a:p>
@@ -34982,7 +34982,7 @@
       </p:sp>
       <p:pic>
         <p:nvPicPr>
-          <p:cNvPr id="48" name="Object 47" descr="public/generated/icons/power-iaas.shared-processor-pool.png">    </p:cNvPr>
+          <p:cNvPr id="48" name="Object 47" descr="public/generated/icons/power-iaas.network-interface.png">    </p:cNvPr>
           <p:cNvPicPr>
             <a:picLocks noChangeAspect="1"/>
           </p:cNvPicPr>
@@ -35038,7 +35038,7 @@
                 <a:ea typeface="Helvetica" pitchFamily="34" charset="-122"/>
                 <a:cs typeface="Helvetica" pitchFamily="34" charset="-120"/>
               </a:rPr>
-              <a:t>POWER VIRTUAL SERVER SHARED PROCESSOR POOL</a:t>
+              <a:t>POWER VIRTUAL SERVER NETWORK INTERFACE</a:t>
             </a:r>
             <a:endParaRPr lang="en-US" dirty="0"/>
           </a:p>
@@ -35071,7 +35071,7 @@
       </p:sp>
       <p:pic>
         <p:nvPicPr>
-          <p:cNvPr id="51" name="Object 50" descr="public/generated/icons/power-iaas.snapshot.png">    </p:cNvPr>
+          <p:cNvPr id="51" name="Object 50" descr="public/generated/icons/power-iaas.network-security-group.png">    </p:cNvPr>
           <p:cNvPicPr>
             <a:picLocks noChangeAspect="1"/>
           </p:cNvPicPr>
@@ -35127,7 +35127,7 @@
                 <a:ea typeface="Helvetica" pitchFamily="34" charset="-122"/>
                 <a:cs typeface="Helvetica" pitchFamily="34" charset="-120"/>
               </a:rPr>
-              <a:t>POWER VIRTUAL SERVER SNAPSHOT</a:t>
+              <a:t>POWER VIRTUAL SERVER NETWORK SECURITY GROUP</a:t>
             </a:r>
             <a:endParaRPr lang="en-US" dirty="0"/>
           </a:p>
@@ -35160,7 +35160,7 @@
       </p:sp>
       <p:pic>
         <p:nvPicPr>
-          <p:cNvPr id="54" name="Object 53" descr="public/generated/icons/power-iaas.pvm-instance.png">    </p:cNvPr>
+          <p:cNvPr id="54" name="Object 53" descr="public/generated/icons/power-iaas.placement-group.png">    </p:cNvPr>
           <p:cNvPicPr>
             <a:picLocks noChangeAspect="1"/>
           </p:cNvPicPr>
@@ -35216,7 +35216,7 @@
                 <a:ea typeface="Helvetica" pitchFamily="34" charset="-122"/>
                 <a:cs typeface="Helvetica" pitchFamily="34" charset="-120"/>
               </a:rPr>
-              <a:t>POWER VIRTUAL SERVER VIRTUAL MACHINE</a:t>
+              <a:t>POWER VIRTUAL SERVER PLACEMENT GROUP</a:t>
             </a:r>
             <a:endParaRPr lang="en-US" dirty="0"/>
           </a:p>
@@ -35249,7 +35249,7 @@
       </p:sp>
       <p:pic>
         <p:nvPicPr>
-          <p:cNvPr id="57" name="Object 56" descr="public/generated/icons/power-iaas.volume.png">    </p:cNvPr>
+          <p:cNvPr id="57" name="Object 56" descr="public/generated/icons/power-iaas.route.png">    </p:cNvPr>
           <p:cNvPicPr>
             <a:picLocks noChangeAspect="1"/>
           </p:cNvPicPr>
@@ -35305,7 +35305,7 @@
                 <a:ea typeface="Helvetica" pitchFamily="34" charset="-122"/>
                 <a:cs typeface="Helvetica" pitchFamily="34" charset="-120"/>
               </a:rPr>
-              <a:t>POWER VIRTUAL SERVER VOLUME</a:t>
+              <a:t>POWER VIRTUAL SERVER ROUTE</a:t>
             </a:r>
             <a:endParaRPr lang="en-US" dirty="0"/>
           </a:p>
@@ -35338,7 +35338,7 @@
       </p:sp>
       <p:pic>
         <p:nvPicPr>
-          <p:cNvPr id="60" name="Object 59" descr="public/generated/icons/b260dfd6-9b79-4377-be6d-146a5cb59be8.png">    </p:cNvPr>
+          <p:cNvPr id="60" name="Object 59" descr="public/generated/icons/power-iaas.shared-processor-pool.png">    </p:cNvPr>
           <p:cNvPicPr>
             <a:picLocks noChangeAspect="1"/>
           </p:cNvPicPr>
@@ -35394,7 +35394,7 @@
                 <a:ea typeface="Helvetica" pitchFamily="34" charset="-122"/>
                 <a:cs typeface="Helvetica" pitchFamily="34" charset="-120"/>
               </a:rPr>
-              <a:t>POWERVS MIGRATION AS A SERVICE</a:t>
+              <a:t>POWER VIRTUAL SERVER SHARED PROCESSOR POOL</a:t>
             </a:r>
             <a:endParaRPr lang="en-US" dirty="0"/>
           </a:p>
@@ -35427,7 +35427,7 @@
       </p:sp>
       <p:pic>
         <p:nvPicPr>
-          <p:cNvPr id="63" name="Object 62" descr="public/generated/icons/is.private-path-service-gateway.png">    </p:cNvPr>
+          <p:cNvPr id="63" name="Object 62" descr="public/generated/icons/power-iaas.spp-placement-group.png">    </p:cNvPr>
           <p:cNvPicPr>
             <a:picLocks noChangeAspect="1"/>
           </p:cNvPicPr>
@@ -35483,7 +35483,7 @@
                 <a:ea typeface="Helvetica" pitchFamily="34" charset="-122"/>
                 <a:cs typeface="Helvetica" pitchFamily="34" charset="-120"/>
               </a:rPr>
-              <a:t>PRIVATE PATH SERVICE FOR VPC</a:t>
+              <a:t>POWER VIRTUAL SERVER SHARED PROCESSOR POOL PLACEMENT GROUP</a:t>
             </a:r>
             <a:endParaRPr lang="en-US" dirty="0"/>
           </a:p>
@@ -35516,7 +35516,7 @@
       </p:sp>
       <p:pic>
         <p:nvPicPr>
-          <p:cNvPr id="66" name="Object 65" descr="public/generated/icons/91a901ac-fb7d-9b6e-eb25-14e75a20c4c2.png">    </p:cNvPr>
+          <p:cNvPr id="66" name="Object 65" descr="public/generated/icons/power-iaas.snapshot.png">    </p:cNvPr>
           <p:cNvPicPr>
             <a:picLocks noChangeAspect="1"/>
           </p:cNvPicPr>
@@ -35572,7 +35572,7 @@
                 <a:ea typeface="Helvetica" pitchFamily="34" charset="-122"/>
                 <a:cs typeface="Helvetica" pitchFamily="34" charset="-120"/>
               </a:rPr>
-              <a:t>PROFESSIONAL SERVICES FOR GOVERNMENT(ONLY AVAILABLE IN US)</a:t>
+              <a:t>POWER VIRTUAL SERVER SNAPSHOT</a:t>
             </a:r>
             <a:endParaRPr lang="en-US" dirty="0"/>
           </a:p>
@@ -35605,7 +35605,7 @@
       </p:sp>
       <p:pic>
         <p:nvPicPr>
-          <p:cNvPr id="69" name="Object 68" descr="public/generated/icons/0f32e980-4197-4ad7-a484-e98f7c7424bf.png">    </p:cNvPr>
+          <p:cNvPr id="69" name="Object 68" descr="public/generated/icons/power-iaas.pvm-instance.png">    </p:cNvPr>
           <p:cNvPicPr>
             <a:picLocks noChangeAspect="1"/>
           </p:cNvPicPr>
@@ -35661,7 +35661,7 @@
                 <a:ea typeface="Helvetica" pitchFamily="34" charset="-122"/>
                 <a:cs typeface="Helvetica" pitchFamily="34" charset="-120"/>
               </a:rPr>
-              <a:t>PROFI POWERVS SERVICE</a:t>
+              <a:t>POWER VIRTUAL SERVER VIRTUAL MACHINE</a:t>
             </a:r>
             <a:endParaRPr lang="en-US" dirty="0"/>
           </a:p>
@@ -35694,7 +35694,7 @@
       </p:sp>
       <p:pic>
         <p:nvPicPr>
-          <p:cNvPr id="72" name="Object 71" descr="public/generated/icons/7c03a06c-f1bb-46f8-84d8-9378432b2804.png">    </p:cNvPr>
+          <p:cNvPr id="72" name="Object 71" descr="public/generated/icons/power-iaas.volume.png">    </p:cNvPr>
           <p:cNvPicPr>
             <a:picLocks noChangeAspect="1"/>
           </p:cNvPicPr>
@@ -35750,7 +35750,7 @@
                 <a:ea typeface="Helvetica" pitchFamily="34" charset="-122"/>
                 <a:cs typeface="Helvetica" pitchFamily="34" charset="-120"/>
               </a:rPr>
-              <a:t>PROTECTIO DRAAS MANAGED SERVICE</a:t>
+              <a:t>POWER VIRTUAL SERVER VOLUME</a:t>
             </a:r>
             <a:endParaRPr lang="en-US" dirty="0"/>
           </a:p>
@@ -35783,7 +35783,7 @@
       </p:sp>
       <p:pic>
         <p:nvPicPr>
-          <p:cNvPr id="75" name="Object 74" descr="public/generated/icons/is.public-gateway.png">    </p:cNvPr>
+          <p:cNvPr id="75" name="Object 74" descr="public/generated/icons/b260dfd6-9b79-4377-be6d-146a5cb59be8.png">    </p:cNvPr>
           <p:cNvPicPr>
             <a:picLocks noChangeAspect="1"/>
           </p:cNvPicPr>
@@ -35839,7 +35839,7 @@
                 <a:ea typeface="Helvetica" pitchFamily="34" charset="-122"/>
                 <a:cs typeface="Helvetica" pitchFamily="34" charset="-120"/>
               </a:rPr>
-              <a:t>PUBLIC GATEWAY</a:t>
+              <a:t>POWERVS MIGRATION AS A SERVICE</a:t>
             </a:r>
             <a:endParaRPr lang="en-US" dirty="0"/>
           </a:p>
@@ -35872,7 +35872,7 @@
       </p:sp>
       <p:pic>
         <p:nvPicPr>
-          <p:cNvPr id="78" name="Object 77" descr="public/generated/icons/aa11a8b2-381e-4c1c-a232-2148f65c005f.png">    </p:cNvPr>
+          <p:cNvPr id="78" name="Object 77" descr="public/generated/icons/is.private-path-service-gateway.png">    </p:cNvPr>
           <p:cNvPicPr>
             <a:picLocks noChangeAspect="1"/>
           </p:cNvPicPr>
@@ -35928,7 +35928,7 @@
                 <a:ea typeface="Helvetica" pitchFamily="34" charset="-122"/>
                 <a:cs typeface="Helvetica" pitchFamily="34" charset="-120"/>
               </a:rPr>
-              <a:t>PVS ONE MANAGED SERVICE</a:t>
+              <a:t>PRIVATE PATH SERVICE FOR VPC</a:t>
             </a:r>
             <a:endParaRPr lang="en-US" dirty="0"/>
           </a:p>
@@ -35961,7 +35961,7 @@
       </p:sp>
       <p:pic>
         <p:nvPicPr>
-          <p:cNvPr id="81" name="Object 80" descr="public/generated/icons/3eb2d5a0-24ff-11eb-9437-631d7272fff5.png">    </p:cNvPr>
+          <p:cNvPr id="81" name="Object 80" descr="public/generated/icons/91a901ac-fb7d-9b6e-eb25-14e75a20c4c2.png">    </p:cNvPr>
           <p:cNvPicPr>
             <a:picLocks noChangeAspect="1"/>
           </p:cNvPicPr>
@@ -36017,7 +36017,7 @@
                 <a:ea typeface="Helvetica" pitchFamily="34" charset="-122"/>
                 <a:cs typeface="Helvetica" pitchFamily="34" charset="-120"/>
               </a:rPr>
-              <a:t>PX-BACKUP FOR KUBERNETES</a:t>
+              <a:t>PROFESSIONAL SERVICES FOR GOVERNMENT(ONLY AVAILABLE IN US)</a:t>
             </a:r>
             <a:endParaRPr lang="en-US" dirty="0"/>
           </a:p>
@@ -36050,7 +36050,7 @@
       </p:sp>
       <p:pic>
         <p:nvPicPr>
-          <p:cNvPr id="84" name="Object 83" descr="public/generated/icons/b6049020-80f4-11eb-a0f7-e35ec9b4054f.png">    </p:cNvPr>
+          <p:cNvPr id="84" name="Object 83" descr="public/generated/icons/0f32e980-4197-4ad7-a484-e98f7c7424bf.png">    </p:cNvPr>
           <p:cNvPicPr>
             <a:picLocks noChangeAspect="1"/>
           </p:cNvPicPr>
@@ -36106,7 +36106,7 @@
                 <a:ea typeface="Helvetica" pitchFamily="34" charset="-122"/>
                 <a:cs typeface="Helvetica" pitchFamily="34" charset="-120"/>
               </a:rPr>
-              <a:t>QISKIT RUNTIME</a:t>
+              <a:t>PROFI POWERVS SERVICE</a:t>
             </a:r>
             <a:endParaRPr lang="en-US" dirty="0"/>
           </a:p>
@@ -36139,7 +36139,7 @@
       </p:sp>
       <p:pic>
         <p:nvPicPr>
-          <p:cNvPr id="87" name="Object 86" descr="public/generated/icons/cf5f8ac0-98f7-11e9-a40c-5b3c4bf3cc6d.png">    </p:cNvPr>
+          <p:cNvPr id="87" name="Object 86" descr="public/generated/icons/7c03a06c-f1bb-46f8-84d8-9378432b2804.png">    </p:cNvPr>
           <p:cNvPicPr>
             <a:picLocks noChangeAspect="1"/>
           </p:cNvPicPr>
@@ -36195,7 +36195,7 @@
                 <a:ea typeface="Helvetica" pitchFamily="34" charset="-122"/>
                 <a:cs typeface="Helvetica" pitchFamily="34" charset="-120"/>
               </a:rPr>
-              <a:t>RAXAK PROTECT</a:t>
+              <a:t>PROTECTIO DRAAS MANAGED SERVICE</a:t>
             </a:r>
             <a:endParaRPr lang="en-US" dirty="0"/>
           </a:p>
@@ -36228,7 +36228,7 @@
       </p:sp>
       <p:pic>
         <p:nvPicPr>
-          <p:cNvPr id="90" name="Object 89" descr="public/generated/icons/instructlab.png">    </p:cNvPr>
+          <p:cNvPr id="90" name="Object 89" descr="public/generated/icons/is.public-gateway.png">    </p:cNvPr>
           <p:cNvPicPr>
             <a:picLocks noChangeAspect="1"/>
           </p:cNvPicPr>
@@ -36284,7 +36284,7 @@
                 <a:ea typeface="Helvetica" pitchFamily="34" charset="-122"/>
                 <a:cs typeface="Helvetica" pitchFamily="34" charset="-120"/>
               </a:rPr>
-              <a:t>RED HAT AI INSTRUCTLAB</a:t>
+              <a:t>PUBLIC GATEWAY</a:t>
             </a:r>
             <a:endParaRPr lang="en-US" dirty="0"/>
           </a:p>
@@ -36317,7 +36317,7 @@
       </p:sp>
       <p:pic>
         <p:nvPicPr>
-          <p:cNvPr id="93" name="Object 92" descr="public/generated/icons/openshift.png">    </p:cNvPr>
+          <p:cNvPr id="93" name="Object 92" descr="public/generated/icons/aa11a8b2-381e-4c1c-a232-2148f65c005f.png">    </p:cNvPr>
           <p:cNvPicPr>
             <a:picLocks noChangeAspect="1"/>
           </p:cNvPicPr>
@@ -36373,7 +36373,7 @@
                 <a:ea typeface="Helvetica" pitchFamily="34" charset="-122"/>
                 <a:cs typeface="Helvetica" pitchFamily="34" charset="-120"/>
               </a:rPr>
-              <a:t>RED HAT OPENSHIFT ON IBM CLOUD</a:t>
+              <a:t>PVS ONE MANAGED SERVICE</a:t>
             </a:r>
             <a:endParaRPr lang="en-US" dirty="0"/>
           </a:p>
@@ -36406,7 +36406,7 @@
       </p:sp>
       <p:pic>
         <p:nvPicPr>
-          <p:cNvPr id="96" name="Object 95" descr="public/generated/icons/bd517bf0-88ba-11ea-a52e-91aeb42a4019.png">    </p:cNvPr>
+          <p:cNvPr id="96" name="Object 95" descr="public/generated/icons/3eb2d5a0-24ff-11eb-9437-631d7272fff5.png">    </p:cNvPr>
           <p:cNvPicPr>
             <a:picLocks noChangeAspect="1"/>
           </p:cNvPicPr>
@@ -36462,7 +36462,7 @@
                 <a:ea typeface="Helvetica" pitchFamily="34" charset="-122"/>
                 <a:cs typeface="Helvetica" pitchFamily="34" charset="-120"/>
               </a:rPr>
-              <a:t>SATELLITE</a:t>
+              <a:t>PX-BACKUP FOR KUBERNETES</a:t>
             </a:r>
             <a:endParaRPr lang="en-US" dirty="0"/>
           </a:p>
@@ -36495,7 +36495,7 @@
       </p:sp>
       <p:pic>
         <p:nvPicPr>
-          <p:cNvPr id="99" name="Object 98" descr="public/generated/icons/schematics.png">    </p:cNvPr>
+          <p:cNvPr id="99" name="Object 98" descr="public/generated/icons/b6049020-80f4-11eb-a0f7-e35ec9b4054f.png">    </p:cNvPr>
           <p:cNvPicPr>
             <a:picLocks noChangeAspect="1"/>
           </p:cNvPicPr>
@@ -36551,7 +36551,7 @@
                 <a:ea typeface="Helvetica" pitchFamily="34" charset="-122"/>
                 <a:cs typeface="Helvetica" pitchFamily="34" charset="-120"/>
               </a:rPr>
-              <a:t>SCHEMATICS</a:t>
+              <a:t>QISKIT RUNTIME</a:t>
             </a:r>
             <a:endParaRPr lang="en-US" dirty="0"/>
           </a:p>
@@ -36584,7 +36584,7 @@
       </p:sp>
       <p:pic>
         <p:nvPicPr>
-          <p:cNvPr id="102" name="Object 101" descr="public/generated/icons/14.png">    </p:cNvPr>
+          <p:cNvPr id="102" name="Object 101" descr="public/generated/icons/cf5f8ac0-98f7-11e9-a40c-5b3c4bf3cc6d.png">    </p:cNvPr>
           <p:cNvPicPr>
             <a:picLocks noChangeAspect="1"/>
           </p:cNvPicPr>
@@ -36640,7 +36640,7 @@
                 <a:ea typeface="Helvetica" pitchFamily="34" charset="-122"/>
                 <a:cs typeface="Helvetica" pitchFamily="34" charset="-120"/>
               </a:rPr>
-              <a:t>SECONDARY SUBNETS</a:t>
+              <a:t>RAXAK PROTECT</a:t>
             </a:r>
             <a:endParaRPr lang="en-US" dirty="0"/>
           </a:p>
@@ -36673,7 +36673,7 @@
       </p:sp>
       <p:pic>
         <p:nvPicPr>
-          <p:cNvPr id="105" name="Object 104" descr="public/generated/icons/ebc0cdb0-af2a-11ea-98c7-29e5db822649.png">    </p:cNvPr>
+          <p:cNvPr id="105" name="Object 104" descr="public/generated/icons/instructlab.png">    </p:cNvPr>
           <p:cNvPicPr>
             <a:picLocks noChangeAspect="1"/>
           </p:cNvPicPr>
@@ -36729,7 +36729,7 @@
                 <a:ea typeface="Helvetica" pitchFamily="34" charset="-122"/>
                 <a:cs typeface="Helvetica" pitchFamily="34" charset="-120"/>
               </a:rPr>
-              <a:t>SECRETS MANAGER</a:t>
+              <a:t>RED HAT AI INSTRUCTLAB</a:t>
             </a:r>
             <a:endParaRPr lang="en-US" dirty="0"/>
           </a:p>
@@ -36762,7 +36762,7 @@
       </p:sp>
       <p:pic>
         <p:nvPicPr>
-          <p:cNvPr id="108" name="Object 107" descr="public/generated/icons/IBM_SecureGateway.png">    </p:cNvPr>
+          <p:cNvPr id="108" name="Object 107" descr="public/generated/icons/openshift.png">    </p:cNvPr>
           <p:cNvPicPr>
             <a:picLocks noChangeAspect="1"/>
           </p:cNvPicPr>
@@ -36818,7 +36818,7 @@
                 <a:ea typeface="Helvetica" pitchFamily="34" charset="-122"/>
                 <a:cs typeface="Helvetica" pitchFamily="34" charset="-120"/>
               </a:rPr>
-              <a:t>SECURE GATEWAY</a:t>
+              <a:t>RED HAT OPENSHIFT ON IBM CLOUD</a:t>
             </a:r>
             <a:endParaRPr lang="en-US" dirty="0"/>
           </a:p>
@@ -36884,7 +36884,7 @@
       </p:sp>
       <p:pic>
         <p:nvPicPr>
-          <p:cNvPr id="3" name="Object 2" descr="public/generated/icons/compliance.png">    </p:cNvPr>
+          <p:cNvPr id="3" name="Object 2" descr="public/generated/icons/bd517bf0-88ba-11ea-a52e-91aeb42a4019.png">    </p:cNvPr>
           <p:cNvPicPr>
             <a:picLocks noChangeAspect="1"/>
           </p:cNvPicPr>
@@ -36940,7 +36940,7 @@
                 <a:ea typeface="Helvetica" pitchFamily="34" charset="-122"/>
                 <a:cs typeface="Helvetica" pitchFamily="34" charset="-120"/>
               </a:rPr>
-              <a:t>SECURITY AND COMPLIANCE CENTER</a:t>
+              <a:t>SATELLITE</a:t>
             </a:r>
             <a:endParaRPr lang="en-US" dirty="0"/>
           </a:p>
@@ -36973,7 +36973,7 @@
       </p:sp>
       <p:pic>
         <p:nvPicPr>
-          <p:cNvPr id="6" name="Object 5" descr="public/generated/icons/e831e900-82d6-11ec-95c5-c12c5a5d9687.png">    </p:cNvPr>
+          <p:cNvPr id="6" name="Object 5" descr="public/generated/icons/schematics.png">    </p:cNvPr>
           <p:cNvPicPr>
             <a:picLocks noChangeAspect="1"/>
           </p:cNvPicPr>
@@ -37029,7 +37029,7 @@
                 <a:ea typeface="Helvetica" pitchFamily="34" charset="-122"/>
                 <a:cs typeface="Helvetica" pitchFamily="34" charset="-120"/>
               </a:rPr>
-              <a:t>SECURITY AND COMPLIANCE CENTER WORKLOAD PROTECTION</a:t>
+              <a:t>SCHEMATICS</a:t>
             </a:r>
             <a:endParaRPr lang="en-US" dirty="0"/>
           </a:p>
@@ -37062,7 +37062,7 @@
       </p:sp>
       <p:pic>
         <p:nvPicPr>
-          <p:cNvPr id="9" name="Object 8" descr="public/generated/icons/is.security-group.png">    </p:cNvPr>
+          <p:cNvPr id="9" name="Object 8" descr="public/generated/icons/14.png">    </p:cNvPr>
           <p:cNvPicPr>
             <a:picLocks noChangeAspect="1"/>
           </p:cNvPicPr>
@@ -37118,7 +37118,7 @@
                 <a:ea typeface="Helvetica" pitchFamily="34" charset="-122"/>
                 <a:cs typeface="Helvetica" pitchFamily="34" charset="-120"/>
               </a:rPr>
-              <a:t>SECURITY GROUP FOR VPC</a:t>
+              <a:t>SECONDARY SUBNETS</a:t>
             </a:r>
             <a:endParaRPr lang="en-US" dirty="0"/>
           </a:p>
@@ -37151,7 +37151,7 @@
       </p:sp>
       <p:pic>
         <p:nvPicPr>
-          <p:cNvPr id="12" name="Object 11" descr="public/generated/icons/cf329950-0a3e-11e8-922e-f1366c6e1c83-vcstrial_dr.png">    </p:cNvPr>
+          <p:cNvPr id="12" name="Object 11" descr="public/generated/icons/ebc0cdb0-af2a-11ea-98c7-29e5db822649.png">    </p:cNvPr>
           <p:cNvPicPr>
             <a:picLocks noChangeAspect="1"/>
           </p:cNvPicPr>
@@ -37207,7 +37207,7 @@
                 <a:ea typeface="Helvetica" pitchFamily="34" charset="-122"/>
                 <a:cs typeface="Helvetica" pitchFamily="34" charset="-120"/>
               </a:rPr>
-              <a:t>SINGLE-NODE TRIAL FOR DATA PROTECTION AND DISASTER RECOVERY</a:t>
+              <a:t>SECRETS MANAGER</a:t>
             </a:r>
             <a:endParaRPr lang="en-US" dirty="0"/>
           </a:p>
@@ -37240,7 +37240,7 @@
       </p:sp>
       <p:pic>
         <p:nvPicPr>
-          <p:cNvPr id="15" name="Object 14" descr="public/generated/icons/cf329950-0a3e-11e8-922e-f1366c6e1c83-vcstrial.png">    </p:cNvPr>
+          <p:cNvPr id="15" name="Object 14" descr="public/generated/icons/IBM_SecureGateway.png">    </p:cNvPr>
           <p:cNvPicPr>
             <a:picLocks noChangeAspect="1"/>
           </p:cNvPicPr>
@@ -37296,7 +37296,7 @@
                 <a:ea typeface="Helvetica" pitchFamily="34" charset="-122"/>
                 <a:cs typeface="Helvetica" pitchFamily="34" charset="-120"/>
               </a:rPr>
-              <a:t>SINGLE-NODE TRIAL FOR MIGRATION AND APP MODERNIZATION</a:t>
+              <a:t>SECURE GATEWAY</a:t>
             </a:r>
             <a:endParaRPr lang="en-US" dirty="0"/>
           </a:p>
@@ -37329,7 +37329,7 @@
       </p:sp>
       <p:pic>
         <p:nvPicPr>
-          <p:cNvPr id="18" name="Object 17" descr="public/generated/icons/cf329950-0a3e-11e8-922e-f1366c6e1c83-spplus.png">    </p:cNvPr>
+          <p:cNvPr id="18" name="Object 17" descr="public/generated/icons/e831e900-82d6-11ec-95c5-c12c5a5d9687.png">    </p:cNvPr>
           <p:cNvPicPr>
             <a:picLocks noChangeAspect="1"/>
           </p:cNvPicPr>
@@ -37385,7 +37385,7 @@
                 <a:ea typeface="Helvetica" pitchFamily="34" charset="-122"/>
                 <a:cs typeface="Helvetica" pitchFamily="34" charset="-120"/>
               </a:rPr>
-              <a:t>SPECTRUM PROTECT PLUS</a:t>
+              <a:t>SECURITY AND COMPLIANCE CENTER WORKLOAD PROTECTION</a:t>
             </a:r>
             <a:endParaRPr lang="en-US" dirty="0"/>
           </a:p>
@@ -37418,7 +37418,7 @@
       </p:sp>
       <p:pic>
         <p:nvPicPr>
-          <p:cNvPr id="21" name="Object 20" descr="public/generated/icons/bc35fb8c-bc5b-431b-859e-3861771d5843.png">    </p:cNvPr>
+          <p:cNvPr id="21" name="Object 20" descr="public/generated/icons/is.security-group.png">    </p:cNvPr>
           <p:cNvPicPr>
             <a:picLocks noChangeAspect="1"/>
           </p:cNvPicPr>
@@ -37474,7 +37474,7 @@
                 <a:ea typeface="Helvetica" pitchFamily="34" charset="-122"/>
                 <a:cs typeface="Helvetica" pitchFamily="34" charset="-120"/>
               </a:rPr>
-              <a:t>SPEECH TO TEXT</a:t>
+              <a:t>SECURITY GROUP FOR VPC</a:t>
             </a:r>
             <a:endParaRPr lang="en-US" dirty="0"/>
           </a:p>
@@ -37507,7 +37507,7 @@
       </p:sp>
       <p:pic>
         <p:nvPicPr>
-          <p:cNvPr id="24" name="Object 23" descr="public/generated/icons/556153d0-5ad0-11e9-b7f9-41319ef22125.png">    </p:cNvPr>
+          <p:cNvPr id="24" name="Object 23" descr="public/generated/icons/cf329950-0a3e-11e8-922e-f1366c6e1c83-vcstrial_dr.png">    </p:cNvPr>
           <p:cNvPicPr>
             <a:picLocks noChangeAspect="1"/>
           </p:cNvPicPr>
@@ -37563,7 +37563,7 @@
                 <a:ea typeface="Helvetica" pitchFamily="34" charset="-122"/>
                 <a:cs typeface="Helvetica" pitchFamily="34" charset="-120"/>
               </a:rPr>
-              <a:t>SSH KEY FOR VPC</a:t>
+              <a:t>SINGLE-NODE TRIAL FOR DATA PROTECTION AND DISASTER RECOVERY</a:t>
             </a:r>
             <a:endParaRPr lang="en-US" dirty="0"/>
           </a:p>
@@ -37596,7 +37596,7 @@
       </p:sp>
       <p:pic>
         <p:nvPicPr>
-          <p:cNvPr id="27" name="Object 26" descr="public/generated/icons/19.png">    </p:cNvPr>
+          <p:cNvPr id="27" name="Object 26" descr="public/generated/icons/cf329950-0a3e-11e8-922e-f1366c6e1c83-vcstrial.png">    </p:cNvPr>
           <p:cNvPicPr>
             <a:picLocks noChangeAspect="1"/>
           </p:cNvPicPr>
@@ -37652,7 +37652,7 @@
                 <a:ea typeface="Helvetica" pitchFamily="34" charset="-122"/>
                 <a:cs typeface="Helvetica" pitchFamily="34" charset="-120"/>
               </a:rPr>
-              <a:t>SSL CERTIFICATES</a:t>
+              <a:t>SINGLE-NODE TRIAL FOR MIGRATION AND APP MODERNIZATION</a:t>
             </a:r>
             <a:endParaRPr lang="en-US" dirty="0"/>
           </a:p>
@@ -37685,7 +37685,7 @@
       </p:sp>
       <p:pic>
         <p:nvPicPr>
-          <p:cNvPr id="30" name="Object 29" descr="public/generated/icons/8aa72a57-b069-47e6-bf3f-8d1ced0051ed.png">    </p:cNvPr>
+          <p:cNvPr id="30" name="Object 29" descr="public/generated/icons/cf329950-0a3e-11e8-922e-f1366c6e1c83-spplus.png">    </p:cNvPr>
           <p:cNvPicPr>
             <a:picLocks noChangeAspect="1"/>
           </p:cNvPicPr>
@@ -37741,7 +37741,7 @@
                 <a:ea typeface="Helvetica" pitchFamily="34" charset="-122"/>
                 <a:cs typeface="Helvetica" pitchFamily="34" charset="-120"/>
               </a:rPr>
-              <a:t>STANDARD LIVE PAYMENT HSM SERVICE</a:t>
+              <a:t>SPECTRUM PROTECT PLUS</a:t>
             </a:r>
             <a:endParaRPr lang="en-US" dirty="0"/>
           </a:p>
@@ -37774,7 +37774,7 @@
       </p:sp>
       <p:pic>
         <p:nvPicPr>
-          <p:cNvPr id="33" name="Object 32" descr="public/generated/icons/2bea02b0-c0a4-11ee-83aa-3171b0bf2976.png">    </p:cNvPr>
+          <p:cNvPr id="33" name="Object 32" descr="public/generated/icons/bc35fb8c-bc5b-431b-859e-3861771d5843.png">    </p:cNvPr>
           <p:cNvPicPr>
             <a:picLocks noChangeAspect="1"/>
           </p:cNvPicPr>
@@ -37830,7 +37830,7 @@
                 <a:ea typeface="Helvetica" pitchFamily="34" charset="-122"/>
                 <a:cs typeface="Helvetica" pitchFamily="34" charset="-120"/>
               </a:rPr>
-              <a:t>STORAGE CEPH AS A SERVICE</a:t>
+              <a:t>SPEECH TO TEXT</a:t>
             </a:r>
             <a:endParaRPr lang="en-US" dirty="0"/>
           </a:p>
@@ -37863,7 +37863,7 @@
       </p:sp>
       <p:pic>
         <p:nvPicPr>
-          <p:cNvPr id="36" name="Object 35" descr="public/generated/icons/5acdbc42-8965-48f9-8a3c-1c728b6ed2c4.png">    </p:cNvPr>
+          <p:cNvPr id="36" name="Object 35" descr="public/generated/icons/556153d0-5ad0-11e9-b7f9-41319ef22125.png">    </p:cNvPr>
           <p:cNvPicPr>
             <a:picLocks noChangeAspect="1"/>
           </p:cNvPicPr>
@@ -37919,7 +37919,7 @@
                 <a:ea typeface="Helvetica" pitchFamily="34" charset="-122"/>
                 <a:cs typeface="Helvetica" pitchFamily="34" charset="-120"/>
               </a:rPr>
-              <a:t>STREAMING ANALYTICS</a:t>
+              <a:t>SSH KEY FOR VPC</a:t>
             </a:r>
             <a:endParaRPr lang="en-US" dirty="0"/>
           </a:p>
@@ -37952,7 +37952,7 @@
       </p:sp>
       <p:pic>
         <p:nvPicPr>
-          <p:cNvPr id="39" name="Object 38" descr="public/generated/icons/is.subnet.png">    </p:cNvPr>
+          <p:cNvPr id="39" name="Object 38" descr="public/generated/icons/19.png">    </p:cNvPr>
           <p:cNvPicPr>
             <a:picLocks noChangeAspect="1"/>
           </p:cNvPicPr>
@@ -38008,7 +38008,7 @@
                 <a:ea typeface="Helvetica" pitchFamily="34" charset="-122"/>
                 <a:cs typeface="Helvetica" pitchFamily="34" charset="-120"/>
               </a:rPr>
-              <a:t>SUBNET</a:t>
+              <a:t>SSL CERTIFICATES</a:t>
             </a:r>
             <a:endParaRPr lang="en-US" dirty="0"/>
           </a:p>
@@ -38041,7 +38041,7 @@
       </p:sp>
       <p:pic>
         <p:nvPicPr>
-          <p:cNvPr id="42" name="Object 41" descr="public/generated/icons/4f2d2c90-caec-4916-b44b-8363479ab12a.png">    </p:cNvPr>
+          <p:cNvPr id="42" name="Object 41" descr="public/generated/icons/8aa72a57-b069-47e6-bf3f-8d1ced0051ed.png">    </p:cNvPr>
           <p:cNvPicPr>
             <a:picLocks noChangeAspect="1"/>
           </p:cNvPicPr>
@@ -38097,7 +38097,7 @@
                 <a:ea typeface="Helvetica" pitchFamily="34" charset="-122"/>
                 <a:cs typeface="Helvetica" pitchFamily="34" charset="-120"/>
               </a:rPr>
-              <a:t>TECHD PROFESSIONAL SERVICES</a:t>
+              <a:t>STANDARD LIVE PAYMENT HSM SERVICE</a:t>
             </a:r>
             <a:endParaRPr lang="en-US" dirty="0"/>
           </a:p>
@@ -38130,7 +38130,7 @@
       </p:sp>
       <p:pic>
         <p:nvPicPr>
-          <p:cNvPr id="45" name="Object 44" descr="public/generated/icons/282c1d79-9176-4597-9cff-941a8d6cfd4c.png">    </p:cNvPr>
+          <p:cNvPr id="45" name="Object 44" descr="public/generated/icons/c82e2968-02eb-487e-84f0-01cbd884b5c0.png">    </p:cNvPr>
           <p:cNvPicPr>
             <a:picLocks noChangeAspect="1"/>
           </p:cNvPicPr>
@@ -38186,7 +38186,7 @@
                 <a:ea typeface="Helvetica" pitchFamily="34" charset="-122"/>
                 <a:cs typeface="Helvetica" pitchFamily="34" charset="-120"/>
               </a:rPr>
-              <a:t>TEXT TO SPEECH</a:t>
+              <a:t>STAR VIRTUAL LEARNING PLATFORM (VLP)</a:t>
             </a:r>
             <a:endParaRPr lang="en-US" dirty="0"/>
           </a:p>
@@ -38219,7 +38219,7 @@
       </p:sp>
       <p:pic>
         <p:nvPicPr>
-          <p:cNvPr id="48" name="Object 47" descr="public/generated/icons/e512e5f0-64fb-11e8-9c23-830c05b8b729.png">    </p:cNvPr>
+          <p:cNvPr id="48" name="Object 47" descr="public/generated/icons/2bea02b0-c0a4-11ee-83aa-3171b0bf2976.png">    </p:cNvPr>
           <p:cNvPicPr>
             <a:picLocks noChangeAspect="1"/>
           </p:cNvPicPr>
@@ -38275,7 +38275,7 @@
                 <a:ea typeface="Helvetica" pitchFamily="34" charset="-122"/>
                 <a:cs typeface="Helvetica" pitchFamily="34" charset="-120"/>
               </a:rPr>
-              <a:t>TOOLCHAIN</a:t>
+              <a:t>STORAGE CEPH AS A SERVICE</a:t>
             </a:r>
             <a:endParaRPr lang="en-US" dirty="0"/>
           </a:p>
@@ -38308,7 +38308,7 @@
       </p:sp>
       <p:pic>
         <p:nvPicPr>
-          <p:cNvPr id="51" name="Object 50" descr="public/generated/icons/a0b5c5b4-cf45-4d10-ba8c-512126cf6e2c.png">    </p:cNvPr>
+          <p:cNvPr id="51" name="Object 50" descr="public/generated/icons/5acdbc42-8965-48f9-8a3c-1c728b6ed2c4.png">    </p:cNvPr>
           <p:cNvPicPr>
             <a:picLocks noChangeAspect="1"/>
           </p:cNvPicPr>
@@ -38364,7 +38364,7 @@
                 <a:ea typeface="Helvetica" pitchFamily="34" charset="-122"/>
                 <a:cs typeface="Helvetica" pitchFamily="34" charset="-120"/>
               </a:rPr>
-              <a:t>TRADESCREEN</a:t>
+              <a:t>STREAMING ANALYTICS</a:t>
             </a:r>
             <a:endParaRPr lang="en-US" dirty="0"/>
           </a:p>
@@ -38397,7 +38397,7 @@
       </p:sp>
       <p:pic>
         <p:nvPicPr>
-          <p:cNvPr id="54" name="Object 53" descr="public/generated/icons/f38a4da0-c353-11e9-83b6-a36a57a97a06.png">    </p:cNvPr>
+          <p:cNvPr id="54" name="Object 53" descr="public/generated/icons/is.subnet.png">    </p:cNvPr>
           <p:cNvPicPr>
             <a:picLocks noChangeAspect="1"/>
           </p:cNvPicPr>
@@ -38453,7 +38453,7 @@
                 <a:ea typeface="Helvetica" pitchFamily="34" charset="-122"/>
                 <a:cs typeface="Helvetica" pitchFamily="34" charset="-120"/>
               </a:rPr>
-              <a:t>TRANSIT GATEWAY</a:t>
+              <a:t>SUBNET</a:t>
             </a:r>
             <a:endParaRPr lang="en-US" dirty="0"/>
           </a:p>
@@ -38486,7 +38486,7 @@
       </p:sp>
       <p:pic>
         <p:nvPicPr>
-          <p:cNvPr id="57" name="Object 56" descr="public/generated/icons/vmware.directorsite.png">    </p:cNvPr>
+          <p:cNvPr id="57" name="Object 56" descr="public/generated/icons/c3ef52e7-c978-4fd1-9982-e39084119336.png">    </p:cNvPr>
           <p:cNvPicPr>
             <a:picLocks noChangeAspect="1"/>
           </p:cNvPicPr>
@@ -38542,7 +38542,7 @@
                 <a:ea typeface="Helvetica" pitchFamily="34" charset="-122"/>
                 <a:cs typeface="Helvetica" pitchFamily="34" charset="-120"/>
               </a:rPr>
-              <a:t>VCF AS A SERVICE - CLOUD DIRECTOR SITE</a:t>
+              <a:t>TAPESTRYX</a:t>
             </a:r>
             <a:endParaRPr lang="en-US" dirty="0"/>
           </a:p>
@@ -38575,7 +38575,7 @@
       </p:sp>
       <p:pic>
         <p:nvPicPr>
-          <p:cNvPr id="60" name="Object 59" descr="public/generated/icons/vmware.usage-meter.png">    </p:cNvPr>
+          <p:cNvPr id="60" name="Object 59" descr="public/generated/icons/4f2d2c90-caec-4916-b44b-8363479ab12a.png">    </p:cNvPr>
           <p:cNvPicPr>
             <a:picLocks noChangeAspect="1"/>
           </p:cNvPicPr>
@@ -38631,7 +38631,7 @@
                 <a:ea typeface="Helvetica" pitchFamily="34" charset="-122"/>
                 <a:cs typeface="Helvetica" pitchFamily="34" charset="-120"/>
               </a:rPr>
-              <a:t>VCF AS A SERVICE - USAGE METER</a:t>
+              <a:t>TECHD PROFESSIONAL SERVICES</a:t>
             </a:r>
             <a:endParaRPr lang="en-US" dirty="0"/>
           </a:p>
@@ -38664,7 +38664,7 @@
       </p:sp>
       <p:pic>
         <p:nvPicPr>
-          <p:cNvPr id="63" name="Object 62" descr="public/generated/icons/vmware.vdc.png">    </p:cNvPr>
+          <p:cNvPr id="63" name="Object 62" descr="public/generated/icons/282c1d79-9176-4597-9cff-941a8d6cfd4c.png">    </p:cNvPr>
           <p:cNvPicPr>
             <a:picLocks noChangeAspect="1"/>
           </p:cNvPicPr>
@@ -38720,7 +38720,7 @@
                 <a:ea typeface="Helvetica" pitchFamily="34" charset="-122"/>
                 <a:cs typeface="Helvetica" pitchFamily="34" charset="-120"/>
               </a:rPr>
-              <a:t>VCF AS A SERVICE - VIRTUAL DATA CENTER</a:t>
+              <a:t>TEXT TO SPEECH</a:t>
             </a:r>
             <a:endParaRPr lang="en-US" dirty="0"/>
           </a:p>
@@ -38753,7 +38753,7 @@
       </p:sp>
       <p:pic>
         <p:nvPicPr>
-          <p:cNvPr id="66" name="Object 65" descr="public/generated/icons/cf329950-0a3e-11e8-922e-f1366c6e1c83-veeam.png">    </p:cNvPr>
+          <p:cNvPr id="66" name="Object 65" descr="public/generated/icons/e512e5f0-64fb-11e8-9c23-830c05b8b729.png">    </p:cNvPr>
           <p:cNvPicPr>
             <a:picLocks noChangeAspect="1"/>
           </p:cNvPicPr>
@@ -38809,7 +38809,7 @@
                 <a:ea typeface="Helvetica" pitchFamily="34" charset="-122"/>
                 <a:cs typeface="Helvetica" pitchFamily="34" charset="-120"/>
               </a:rPr>
-              <a:t>VEEAM</a:t>
+              <a:t>TOOLCHAIN</a:t>
             </a:r>
             <a:endParaRPr lang="en-US" dirty="0"/>
           </a:p>
@@ -38842,7 +38842,7 @@
       </p:sp>
       <p:pic>
         <p:nvPicPr>
-          <p:cNvPr id="69" name="Object 68" descr="public/generated/icons/66644e80-f35a-11ee-923f-2fe367129617.png">    </p:cNvPr>
+          <p:cNvPr id="69" name="Object 68" descr="public/generated/icons/a0b5c5b4-cf45-4d10-ba8c-512126cf6e2c.png">    </p:cNvPr>
           <p:cNvPicPr>
             <a:picLocks noChangeAspect="1"/>
           </p:cNvPicPr>
@@ -38898,7 +38898,7 @@
                 <a:ea typeface="Helvetica" pitchFamily="34" charset="-122"/>
                 <a:cs typeface="Helvetica" pitchFamily="34" charset="-120"/>
               </a:rPr>
-              <a:t>VERIFY</a:t>
+              <a:t>TRADESCREEN</a:t>
             </a:r>
             <a:endParaRPr lang="en-US" dirty="0"/>
           </a:p>
@@ -38931,7 +38931,7 @@
       </p:sp>
       <p:pic>
         <p:nvPicPr>
-          <p:cNvPr id="72" name="Object 71" descr="public/generated/icons/is.virtual-network-interface.png">    </p:cNvPr>
+          <p:cNvPr id="72" name="Object 71" descr="public/generated/icons/f38a4da0-c353-11e9-83b6-a36a57a97a06.png">    </p:cNvPr>
           <p:cNvPicPr>
             <a:picLocks noChangeAspect="1"/>
           </p:cNvPicPr>
@@ -38987,7 +38987,7 @@
                 <a:ea typeface="Helvetica" pitchFamily="34" charset="-122"/>
                 <a:cs typeface="Helvetica" pitchFamily="34" charset="-120"/>
               </a:rPr>
-              <a:t>VIRTUAL NETWORK INTERFACE</a:t>
+              <a:t>TRANSIT GATEWAY</a:t>
             </a:r>
             <a:endParaRPr lang="en-US" dirty="0"/>
           </a:p>
@@ -39020,7 +39020,7 @@
       </p:sp>
       <p:pic>
         <p:nvPicPr>
-          <p:cNvPr id="75" name="Object 74" descr="public/generated/icons/is.vpc.png">    </p:cNvPr>
+          <p:cNvPr id="75" name="Object 74" descr="public/generated/icons/vmware.directorsite.png">    </p:cNvPr>
           <p:cNvPicPr>
             <a:picLocks noChangeAspect="1"/>
           </p:cNvPicPr>
@@ -39076,7 +39076,7 @@
                 <a:ea typeface="Helvetica" pitchFamily="34" charset="-122"/>
                 <a:cs typeface="Helvetica" pitchFamily="34" charset="-120"/>
               </a:rPr>
-              <a:t>VIRTUAL PRIVATE CLOUD</a:t>
+              <a:t>VCF AS A SERVICE - CLOUD DIRECTOR SITE</a:t>
             </a:r>
             <a:endParaRPr lang="en-US" dirty="0"/>
           </a:p>
@@ -39109,7 +39109,7 @@
       </p:sp>
       <p:pic>
         <p:nvPicPr>
-          <p:cNvPr id="78" name="Object 77" descr="public/generated/icons/is.endpoint-gateway.png">    </p:cNvPr>
+          <p:cNvPr id="78" name="Object 77" descr="public/generated/icons/vmware.usage-meter.png">    </p:cNvPr>
           <p:cNvPicPr>
             <a:picLocks noChangeAspect="1"/>
           </p:cNvPicPr>
@@ -39165,7 +39165,7 @@
                 <a:ea typeface="Helvetica" pitchFamily="34" charset="-122"/>
                 <a:cs typeface="Helvetica" pitchFamily="34" charset="-120"/>
               </a:rPr>
-              <a:t>VIRTUAL PRIVATE ENDPOINT FOR VPC</a:t>
+              <a:t>VCF AS A SERVICE - USAGE METER</a:t>
             </a:r>
             <a:endParaRPr lang="en-US" dirty="0"/>
           </a:p>
@@ -39198,7 +39198,7 @@
       </p:sp>
       <p:pic>
         <p:nvPicPr>
-          <p:cNvPr id="81" name="Object 80" descr="public/generated/icons/887073fb-ba5b-9407-d2ac-938308d890e4.png">    </p:cNvPr>
+          <p:cNvPr id="81" name="Object 80" descr="public/generated/icons/vmware.vdc.png">    </p:cNvPr>
           <p:cNvPicPr>
             <a:picLocks noChangeAspect="1"/>
           </p:cNvPicPr>
@@ -39254,7 +39254,7 @@
                 <a:ea typeface="Helvetica" pitchFamily="34" charset="-122"/>
                 <a:cs typeface="Helvetica" pitchFamily="34" charset="-120"/>
               </a:rPr>
-              <a:t>VIRTUAL ROUTER APPLIANCE</a:t>
+              <a:t>VCF AS A SERVICE - VIRTUAL DATA CENTER</a:t>
             </a:r>
             <a:endParaRPr lang="en-US" dirty="0"/>
           </a:p>
@@ -39287,7 +39287,7 @@
       </p:sp>
       <p:pic>
         <p:nvPicPr>
-          <p:cNvPr id="84" name="Object 83" descr="public/generated/icons/virtual-server-group.png">    </p:cNvPr>
+          <p:cNvPr id="84" name="Object 83" descr="public/generated/icons/cf329950-0a3e-11e8-922e-f1366c6e1c83-veeam.png">    </p:cNvPr>
           <p:cNvPicPr>
             <a:picLocks noChangeAspect="1"/>
           </p:cNvPicPr>
@@ -39343,7 +39343,7 @@
                 <a:ea typeface="Helvetica" pitchFamily="34" charset="-122"/>
                 <a:cs typeface="Helvetica" pitchFamily="34" charset="-120"/>
               </a:rPr>
-              <a:t>VIRTUAL SERVER FOR CLASSIC</a:t>
+              <a:t>VEEAM</a:t>
             </a:r>
             <a:endParaRPr lang="en-US" dirty="0"/>
           </a:p>
@@ -39376,7 +39376,7 @@
       </p:sp>
       <p:pic>
         <p:nvPicPr>
-          <p:cNvPr id="87" name="Object 86" descr="public/generated/icons/is.instance.png">    </p:cNvPr>
+          <p:cNvPr id="87" name="Object 86" descr="public/generated/icons/66644e80-f35a-11ee-923f-2fe367129617.png">    </p:cNvPr>
           <p:cNvPicPr>
             <a:picLocks noChangeAspect="1"/>
           </p:cNvPicPr>
@@ -39432,7 +39432,7 @@
                 <a:ea typeface="Helvetica" pitchFamily="34" charset="-122"/>
                 <a:cs typeface="Helvetica" pitchFamily="34" charset="-120"/>
               </a:rPr>
-              <a:t>VIRTUAL SERVER FOR VPC</a:t>
+              <a:t>VERIFY</a:t>
             </a:r>
             <a:endParaRPr lang="en-US" dirty="0"/>
           </a:p>
@@ -39465,7 +39465,7 @@
       </p:sp>
       <p:pic>
         <p:nvPicPr>
-          <p:cNvPr id="90" name="Object 89" descr="public/generated/icons/15.png">    </p:cNvPr>
+          <p:cNvPr id="90" name="Object 89" descr="public/generated/icons/is.virtual-network-interface.png">    </p:cNvPr>
           <p:cNvPicPr>
             <a:picLocks noChangeAspect="1"/>
           </p:cNvPicPr>
@@ -39521,7 +39521,7 @@
                 <a:ea typeface="Helvetica" pitchFamily="34" charset="-122"/>
                 <a:cs typeface="Helvetica" pitchFamily="34" charset="-120"/>
               </a:rPr>
-              <a:t>VLAN</a:t>
+              <a:t>VIRTUAL NETWORK INTERFACE</a:t>
             </a:r>
             <a:endParaRPr lang="en-US" dirty="0"/>
           </a:p>
@@ -39554,7 +39554,7 @@
       </p:sp>
       <p:pic>
         <p:nvPicPr>
-          <p:cNvPr id="93" name="Object 92" descr="public/generated/icons/09f5a6ea-185e-4625-8281-9e8629360a4f.png">    </p:cNvPr>
+          <p:cNvPr id="93" name="Object 92" descr="public/generated/icons/is.vpc.png">    </p:cNvPr>
           <p:cNvPicPr>
             <a:picLocks noChangeAspect="1"/>
           </p:cNvPicPr>
@@ -39610,7 +39610,7 @@
                 <a:ea typeface="Helvetica" pitchFamily="34" charset="-122"/>
                 <a:cs typeface="Helvetica" pitchFamily="34" charset="-120"/>
               </a:rPr>
-              <a:t>VMWARE CLOUD MIGRATION SERVICES</a:t>
+              <a:t>VIRTUAL PRIVATE CLOUD</a:t>
             </a:r>
             <a:endParaRPr lang="en-US" dirty="0"/>
           </a:p>
@@ -39643,7 +39643,7 @@
       </p:sp>
       <p:pic>
         <p:nvPicPr>
-          <p:cNvPr id="96" name="Object 95" descr="public/generated/icons/cf329950-0a3e-11e8-922e-f1366c6e1c83.png">    </p:cNvPr>
+          <p:cNvPr id="96" name="Object 95" descr="public/generated/icons/is.endpoint-gateway.png">    </p:cNvPr>
           <p:cNvPicPr>
             <a:picLocks noChangeAspect="1"/>
           </p:cNvPicPr>
@@ -39699,7 +39699,7 @@
                 <a:ea typeface="Helvetica" pitchFamily="34" charset="-122"/>
                 <a:cs typeface="Helvetica" pitchFamily="34" charset="-120"/>
               </a:rPr>
-              <a:t>VMWARE SOLUTIONS</a:t>
+              <a:t>VIRTUAL PRIVATE ENDPOINT FOR VPC</a:t>
             </a:r>
             <a:endParaRPr lang="en-US" dirty="0"/>
           </a:p>
@@ -39732,7 +39732,7 @@
       </p:sp>
       <p:pic>
         <p:nvPicPr>
-          <p:cNvPr id="99" name="Object 98" descr="public/generated/icons/cf329950-0a3e-11e8-922e-f1366c6e1c83-vcenterserver.png">    </p:cNvPr>
+          <p:cNvPr id="99" name="Object 98" descr="public/generated/icons/887073fb-ba5b-9407-d2ac-938308d890e4.png">    </p:cNvPr>
           <p:cNvPicPr>
             <a:picLocks noChangeAspect="1"/>
           </p:cNvPicPr>
@@ -39788,7 +39788,7 @@
                 <a:ea typeface="Helvetica" pitchFamily="34" charset="-122"/>
                 <a:cs typeface="Helvetica" pitchFamily="34" charset="-120"/>
               </a:rPr>
-              <a:t>VMWARE VCENTER SERVER</a:t>
+              <a:t>VIRTUAL ROUTER APPLIANCE</a:t>
             </a:r>
             <a:endParaRPr lang="en-US" dirty="0"/>
           </a:p>
@@ -39821,7 +39821,7 @@
       </p:sp>
       <p:pic>
         <p:nvPicPr>
-          <p:cNvPr id="102" name="Object 101" descr="public/generated/icons/cf329950-0a3e-11e8-922e-f1366c6e1c83-vsphere.png">    </p:cNvPr>
+          <p:cNvPr id="102" name="Object 101" descr="public/generated/icons/virtual-server-group.png">    </p:cNvPr>
           <p:cNvPicPr>
             <a:picLocks noChangeAspect="1"/>
           </p:cNvPicPr>
@@ -39877,7 +39877,7 @@
                 <a:ea typeface="Helvetica" pitchFamily="34" charset="-122"/>
                 <a:cs typeface="Helvetica" pitchFamily="34" charset="-120"/>
               </a:rPr>
-              <a:t>VMWARE VSPHERE</a:t>
+              <a:t>VIRTUAL SERVER FOR CLASSIC</a:t>
             </a:r>
             <a:endParaRPr lang="en-US" dirty="0"/>
           </a:p>
@@ -39910,7 +39910,7 @@
       </p:sp>
       <p:pic>
         <p:nvPicPr>
-          <p:cNvPr id="105" name="Object 104" descr="public/generated/icons/b6670b68-84ca-4a04-b8e8-c567dfeeddde.png">    </p:cNvPr>
+          <p:cNvPr id="105" name="Object 104" descr="public/generated/icons/is.instance.png">    </p:cNvPr>
           <p:cNvPicPr>
             <a:picLocks noChangeAspect="1"/>
           </p:cNvPicPr>
@@ -39966,7 +39966,7 @@
                 <a:ea typeface="Helvetica" pitchFamily="34" charset="-122"/>
                 <a:cs typeface="Helvetica" pitchFamily="34" charset="-120"/>
               </a:rPr>
-              <a:t>VPC COAAS (VPC COST OPTIMIZATION AS A SERVICE)</a:t>
+              <a:t>VIRTUAL SERVER FOR VPC</a:t>
             </a:r>
             <a:endParaRPr lang="en-US" dirty="0"/>
           </a:p>
@@ -39999,7 +39999,7 @@
       </p:sp>
       <p:pic>
         <p:nvPicPr>
-          <p:cNvPr id="108" name="Object 107" descr="public/generated/icons/757254b0-a9a0-11ea-9ff6-17a22eb543c5.png">    </p:cNvPr>
+          <p:cNvPr id="108" name="Object 107" descr="public/generated/icons/15.png">    </p:cNvPr>
           <p:cNvPicPr>
             <a:picLocks noChangeAspect="1"/>
           </p:cNvPicPr>
@@ -40055,7 +40055,7 @@
                 <a:ea typeface="Helvetica" pitchFamily="34" charset="-122"/>
                 <a:cs typeface="Helvetica" pitchFamily="34" charset="-120"/>
               </a:rPr>
-              <a:t>VPC+ CLOUD MIGRATION</a:t>
+              <a:t>VLAN</a:t>
             </a:r>
             <a:endParaRPr lang="en-US" dirty="0"/>
           </a:p>
@@ -40121,7 +40121,7 @@
       </p:sp>
       <p:pic>
         <p:nvPicPr>
-          <p:cNvPr id="3" name="Object 2" descr="public/generated/icons/fd1e0240-dd95-11eb-b4a0-db1c9221b8a2.png">    </p:cNvPr>
+          <p:cNvPr id="3" name="Object 2" descr="public/generated/icons/09f5a6ea-185e-4625-8281-9e8629360a4f.png">    </p:cNvPr>
           <p:cNvPicPr>
             <a:picLocks noChangeAspect="1"/>
           </p:cNvPicPr>
@@ -40177,7 +40177,7 @@
                 <a:ea typeface="Helvetica" pitchFamily="34" charset="-122"/>
                 <a:cs typeface="Helvetica" pitchFamily="34" charset="-120"/>
               </a:rPr>
-              <a:t>VPC+ DRAAS (VPC+ DISASTER RECOVERY AS A SERVICE)</a:t>
+              <a:t>VMWARE CLOUD MIGRATION SERVICES</a:t>
             </a:r>
             <a:endParaRPr lang="en-US" dirty="0"/>
           </a:p>
@@ -40210,7 +40210,7 @@
       </p:sp>
       <p:pic>
         <p:nvPicPr>
-          <p:cNvPr id="6" name="Object 5" descr="public/generated/icons/is.vpn.png">    </p:cNvPr>
+          <p:cNvPr id="6" name="Object 5" descr="public/generated/icons/cf329950-0a3e-11e8-922e-f1366c6e1c83.png">    </p:cNvPr>
           <p:cNvPicPr>
             <a:picLocks noChangeAspect="1"/>
           </p:cNvPicPr>
@@ -40266,7 +40266,7 @@
                 <a:ea typeface="Helvetica" pitchFamily="34" charset="-122"/>
                 <a:cs typeface="Helvetica" pitchFamily="34" charset="-120"/>
               </a:rPr>
-              <a:t>VPN FOR VPC</a:t>
+              <a:t>VMWARE SOLUTIONS</a:t>
             </a:r>
             <a:endParaRPr lang="en-US" dirty="0"/>
           </a:p>
@@ -40299,7 +40299,7 @@
       </p:sp>
       <p:pic>
         <p:nvPicPr>
-          <p:cNvPr id="9" name="Object 8" descr="public/generated/icons/cf329950-0a3e-11e8-922e-f1366c6e1c83-vrops.png">    </p:cNvPr>
+          <p:cNvPr id="9" name="Object 8" descr="public/generated/icons/cf329950-0a3e-11e8-922e-f1366c6e1c83-vcenterserver.png">    </p:cNvPr>
           <p:cNvPicPr>
             <a:picLocks noChangeAspect="1"/>
           </p:cNvPicPr>
@@ -40355,7 +40355,7 @@
                 <a:ea typeface="Helvetica" pitchFamily="34" charset="-122"/>
                 <a:cs typeface="Helvetica" pitchFamily="34" charset="-120"/>
               </a:rPr>
-              <a:t>VREALIZE OPERATIONS AND LOG INSIGHT</a:t>
+              <a:t>VMWARE VCENTER SERVER</a:t>
             </a:r>
             <a:endParaRPr lang="en-US" dirty="0"/>
           </a:p>
@@ -40388,7 +40388,7 @@
       </p:sp>
       <p:pic>
         <p:nvPicPr>
-          <p:cNvPr id="12" name="Object 11" descr="public/generated/icons/76b7bf22-b443-47db-b3db-066ba2988f47.png">    </p:cNvPr>
+          <p:cNvPr id="12" name="Object 11" descr="public/generated/icons/cf329950-0a3e-11e8-922e-f1366c6e1c83-vsphere.png">    </p:cNvPr>
           <p:cNvPicPr>
             <a:picLocks noChangeAspect="1"/>
           </p:cNvPicPr>
@@ -40444,7 +40444,7 @@
                 <a:ea typeface="Helvetica" pitchFamily="34" charset="-122"/>
                 <a:cs typeface="Helvetica" pitchFamily="34" charset="-120"/>
               </a:rPr>
-              <a:t>WATSON DISCOVERY</a:t>
+              <a:t>VMWARE VSPHERE</a:t>
             </a:r>
             <a:endParaRPr lang="en-US" dirty="0"/>
           </a:p>
@@ -40477,7 +40477,7 @@
       </p:sp>
       <p:pic>
         <p:nvPicPr>
-          <p:cNvPr id="15" name="Object 14" descr="public/generated/icons/12fbfff4-12c7-ccd0-80e6-603e8607468a.png">    </p:cNvPr>
+          <p:cNvPr id="15" name="Object 14" descr="public/generated/icons/b6670b68-84ca-4a04-b8e8-c567dfeeddde.png">    </p:cNvPr>
           <p:cNvPicPr>
             <a:picLocks noChangeAspect="1"/>
           </p:cNvPicPr>
@@ -40533,7 +40533,7 @@
                 <a:ea typeface="Helvetica" pitchFamily="34" charset="-122"/>
                 <a:cs typeface="Helvetica" pitchFamily="34" charset="-120"/>
               </a:rPr>
-              <a:t>WATSONX</a:t>
+              <a:t>VPC COAAS (VPC COST OPTIMIZATION AS A SERVICE)</a:t>
             </a:r>
             <a:endParaRPr lang="en-US" dirty="0"/>
           </a:p>
@@ -40566,7 +40566,7 @@
       </p:sp>
       <p:pic>
         <p:nvPicPr>
-          <p:cNvPr id="18" name="Object 17" descr="public/generated/icons/7045626d-55e3-4418-be11-683a26dbc1e5.png">    </p:cNvPr>
+          <p:cNvPr id="18" name="Object 17" descr="public/generated/icons/757254b0-a9a0-11ea-9ff6-17a22eb543c5.png">    </p:cNvPr>
           <p:cNvPicPr>
             <a:picLocks noChangeAspect="1"/>
           </p:cNvPicPr>
@@ -40622,7 +40622,7 @@
                 <a:ea typeface="Helvetica" pitchFamily="34" charset="-122"/>
                 <a:cs typeface="Helvetica" pitchFamily="34" charset="-120"/>
               </a:rPr>
-              <a:t>WATSONX ASSISTANT</a:t>
+              <a:t>VPC+ CLOUD MIGRATION</a:t>
             </a:r>
             <a:endParaRPr lang="en-US" dirty="0"/>
           </a:p>
@@ -40655,7 +40655,7 @@
       </p:sp>
       <p:pic>
         <p:nvPicPr>
-          <p:cNvPr id="21" name="Object 20" descr="public/generated/icons/11530fa0-1776-11ee-93f6-1d4066e6a409.png">    </p:cNvPr>
+          <p:cNvPr id="21" name="Object 20" descr="public/generated/icons/fd1e0240-dd95-11eb-b4a0-db1c9221b8a2.png">    </p:cNvPr>
           <p:cNvPicPr>
             <a:picLocks noChangeAspect="1"/>
           </p:cNvPicPr>
@@ -40711,7 +40711,7 @@
                 <a:ea typeface="Helvetica" pitchFamily="34" charset="-122"/>
                 <a:cs typeface="Helvetica" pitchFamily="34" charset="-120"/>
               </a:rPr>
-              <a:t>WATSONX CODE ASSISTANT</a:t>
+              <a:t>VPC+ DRAAS (VPC+ DISASTER RECOVERY AS A SERVICE)</a:t>
             </a:r>
             <a:endParaRPr lang="en-US" dirty="0"/>
           </a:p>
@@ -40744,7 +40744,7 @@
       </p:sp>
       <p:pic>
         <p:nvPicPr>
-          <p:cNvPr id="24" name="Object 23" descr="public/generated/icons/b69f78c0-11d7-11ef-9bdf-c92eb40d1838.png">    </p:cNvPr>
+          <p:cNvPr id="24" name="Object 23" descr="public/generated/icons/is.vpn.png">    </p:cNvPr>
           <p:cNvPicPr>
             <a:picLocks noChangeAspect="1"/>
           </p:cNvPicPr>
@@ -40800,7 +40800,7 @@
                 <a:ea typeface="Helvetica" pitchFamily="34" charset="-122"/>
                 <a:cs typeface="Helvetica" pitchFamily="34" charset="-120"/>
               </a:rPr>
-              <a:t>WATSONX ORCHESTRATE</a:t>
+              <a:t>VPN FOR VPC</a:t>
             </a:r>
             <a:endParaRPr lang="en-US" dirty="0"/>
           </a:p>
@@ -40833,7 +40833,7 @@
       </p:sp>
       <p:pic>
         <p:nvPicPr>
-          <p:cNvPr id="27" name="Object 26" descr="public/generated/icons/51c53b72-918f-4869-b834-2d99eb28422a.png">    </p:cNvPr>
+          <p:cNvPr id="27" name="Object 26" descr="public/generated/icons/cf329950-0a3e-11e8-922e-f1366c6e1c83-vrops.png">    </p:cNvPr>
           <p:cNvPicPr>
             <a:picLocks noChangeAspect="1"/>
           </p:cNvPicPr>
@@ -40889,7 +40889,7 @@
                 <a:ea typeface="Helvetica" pitchFamily="34" charset="-122"/>
                 <a:cs typeface="Helvetica" pitchFamily="34" charset="-120"/>
               </a:rPr>
-              <a:t>WATSONX.AI RUNTIME</a:t>
+              <a:t>VREALIZE OPERATIONS AND LOG INSIGHT</a:t>
             </a:r>
             <a:endParaRPr lang="en-US" dirty="0"/>
           </a:p>
@@ -40922,7 +40922,7 @@
       </p:sp>
       <p:pic>
         <p:nvPicPr>
-          <p:cNvPr id="30" name="Object 29" descr="public/generated/icons/39ba9d4c-b1c5-4cc3-a163-38b580121e01.png">    </p:cNvPr>
+          <p:cNvPr id="30" name="Object 29" descr="public/generated/icons/76b7bf22-b443-47db-b3db-066ba2988f47.png">    </p:cNvPr>
           <p:cNvPicPr>
             <a:picLocks noChangeAspect="1"/>
           </p:cNvPicPr>
@@ -40978,7 +40978,7 @@
                 <a:ea typeface="Helvetica" pitchFamily="34" charset="-122"/>
                 <a:cs typeface="Helvetica" pitchFamily="34" charset="-120"/>
               </a:rPr>
-              <a:t>WATSONX.AI STUDIO</a:t>
+              <a:t>WATSON DISCOVERY</a:t>
             </a:r>
             <a:endParaRPr lang="en-US" dirty="0"/>
           </a:p>
@@ -41011,7 +41011,7 @@
       </p:sp>
       <p:pic>
         <p:nvPicPr>
-          <p:cNvPr id="33" name="Object 32" descr="public/generated/icons/43834340-4a6d-11ed-97d2-959039ad2a2e.png">    </p:cNvPr>
+          <p:cNvPr id="33" name="Object 32" descr="public/generated/icons/12fbfff4-12c7-ccd0-80e6-603e8607468a.png">    </p:cNvPr>
           <p:cNvPicPr>
             <a:picLocks noChangeAspect="1"/>
           </p:cNvPicPr>
@@ -41067,7 +41067,7 @@
                 <a:ea typeface="Helvetica" pitchFamily="34" charset="-122"/>
                 <a:cs typeface="Helvetica" pitchFamily="34" charset="-120"/>
               </a:rPr>
-              <a:t>WATSONX.DATA</a:t>
+              <a:t>WATSONX</a:t>
             </a:r>
             <a:endParaRPr lang="en-US" dirty="0"/>
           </a:p>
@@ -41100,7 +41100,7 @@
       </p:sp>
       <p:pic>
         <p:nvPicPr>
-          <p:cNvPr id="36" name="Object 35" descr="public/generated/icons/4d4fd270-fe8f-11ef-82ad-af5f37d5a455.png">    </p:cNvPr>
+          <p:cNvPr id="36" name="Object 35" descr="public/generated/icons/7045626d-55e3-4418-be11-683a26dbc1e5.png">    </p:cNvPr>
           <p:cNvPicPr>
             <a:picLocks noChangeAspect="1"/>
           </p:cNvPicPr>
@@ -41156,7 +41156,7 @@
                 <a:ea typeface="Helvetica" pitchFamily="34" charset="-122"/>
                 <a:cs typeface="Helvetica" pitchFamily="34" charset="-120"/>
               </a:rPr>
-              <a:t>WATSONX.DATA INTEGRATION</a:t>
+              <a:t>WATSONX ASSISTANT</a:t>
             </a:r>
             <a:endParaRPr lang="en-US" dirty="0"/>
           </a:p>
@@ -41189,7 +41189,7 @@
       </p:sp>
       <p:pic>
         <p:nvPicPr>
-          <p:cNvPr id="39" name="Object 38" descr="public/generated/icons/ed3a5a53-eb60-4f3c-8fd1-17f88585b6ed.png">    </p:cNvPr>
+          <p:cNvPr id="39" name="Object 38" descr="public/generated/icons/11530fa0-1776-11ee-93f6-1d4066e6a409.png">    </p:cNvPr>
           <p:cNvPicPr>
             <a:picLocks noChangeAspect="1"/>
           </p:cNvPicPr>
@@ -41245,7 +41245,7 @@
                 <a:ea typeface="Helvetica" pitchFamily="34" charset="-122"/>
                 <a:cs typeface="Helvetica" pitchFamily="34" charset="-120"/>
               </a:rPr>
-              <a:t>WATSONX.DATA INTELLIGENCE</a:t>
+              <a:t>WATSONX CODE ASSISTANT</a:t>
             </a:r>
             <a:endParaRPr lang="en-US" dirty="0"/>
           </a:p>
@@ -41278,7 +41278,7 @@
       </p:sp>
       <p:pic>
         <p:nvPicPr>
-          <p:cNvPr id="42" name="Object 41" descr="public/generated/icons/2ad019f3-0fd6-4c25-966d-f3952481a870.png">    </p:cNvPr>
+          <p:cNvPr id="42" name="Object 41" descr="public/generated/icons/b69f78c0-11d7-11ef-9bdf-c92eb40d1838.png">    </p:cNvPr>
           <p:cNvPicPr>
             <a:picLocks noChangeAspect="1"/>
           </p:cNvPicPr>
@@ -41334,7 +41334,7 @@
                 <a:ea typeface="Helvetica" pitchFamily="34" charset="-122"/>
                 <a:cs typeface="Helvetica" pitchFamily="34" charset="-120"/>
               </a:rPr>
-              <a:t>WATSONX.GOVERNANCE</a:t>
+              <a:t>WATSONX ORCHESTRATE</a:t>
             </a:r>
             <a:endParaRPr lang="en-US" dirty="0"/>
           </a:p>
@@ -41367,7 +41367,7 @@
       </p:sp>
       <p:pic>
         <p:nvPicPr>
-          <p:cNvPr id="45" name="Object 44" descr="public/generated/icons/e9407be2-139f-4f05-959d-494c6601239a.png">    </p:cNvPr>
+          <p:cNvPr id="45" name="Object 44" descr="public/generated/icons/51c53b72-918f-4869-b834-2d99eb28422a.png">    </p:cNvPr>
           <p:cNvPicPr>
             <a:picLocks noChangeAspect="1"/>
           </p:cNvPicPr>
@@ -41423,7 +41423,7 @@
                 <a:ea typeface="Helvetica" pitchFamily="34" charset="-122"/>
                 <a:cs typeface="Helvetica" pitchFamily="34" charset="-120"/>
               </a:rPr>
-              <a:t>WEALTHGROWTH.AI</a:t>
+              <a:t>WATSONX.AI RUNTIME</a:t>
             </a:r>
             <a:endParaRPr lang="en-US" dirty="0"/>
           </a:p>
@@ -41456,7 +41456,7 @@
       </p:sp>
       <p:pic>
         <p:nvPicPr>
-          <p:cNvPr id="48" name="Object 47" descr="public/generated/icons/cf329950-0a3e-11e8-922e-f1366c6e1c83-zerto.png">    </p:cNvPr>
+          <p:cNvPr id="48" name="Object 47" descr="public/generated/icons/39ba9d4c-b1c5-4cc3-a163-38b580121e01.png">    </p:cNvPr>
           <p:cNvPicPr>
             <a:picLocks noChangeAspect="1"/>
           </p:cNvPicPr>
@@ -41487,6 +41487,540 @@
         <p:spPr>
           <a:xfrm>
             <a:off x="5669280" y="1874520"/>
+            <a:ext cx="640080" cy="274320"/>
+          </a:xfrm>
+          <a:prstGeom prst="rect">
+            <a:avLst/>
+          </a:prstGeom>
+          <a:noFill/>
+        </p:spPr>
+        <p:txBody>
+          <a:bodyPr wrap="square" rtlCol="0" anchor="t" bIns="0" lIns="0" rIns="0" tIns="0">
+            <a:spAutoFit/>
+          </a:bodyPr>
+          <a:lstStyle/>
+          <a:p>
+            <a:pPr algn="ctr">
+              <a:buNone/>
+            </a:pPr>
+            <a:r>
+              <a:rPr lang="en-US" b="1" sz="600" dirty="0" smtClean="0">
+                <a:solidFill>
+                  <a:srgbClr val="646365"/>
+                </a:solidFill>
+                <a:latin typeface="Helvetica" pitchFamily="34" charset="0"/>
+                <a:ea typeface="Helvetica" pitchFamily="34" charset="-122"/>
+                <a:cs typeface="Helvetica" pitchFamily="34" charset="-120"/>
+              </a:rPr>
+              <a:t>WATSONX.AI STUDIO</a:t>
+            </a:r>
+            <a:endParaRPr lang="en-US" dirty="0"/>
+          </a:p>
+        </p:txBody>
+      </p:sp>
+      <p:sp>
+        <p:nvSpPr>
+          <p:cNvPr id="50" name="Object 49"/>
+          <p:cNvSpPr/>
+          <p:nvPr/>
+        </p:nvSpPr>
+        <p:spPr>
+          <a:xfrm>
+            <a:off x="6675120" y="1371600"/>
+            <a:ext cx="457200" cy="457200"/>
+          </a:xfrm>
+          <a:prstGeom prst="ellipse">
+            <a:avLst/>
+          </a:prstGeom>
+          <a:solidFill>
+            <a:srgbClr val="FFFFFF"/>
+          </a:solidFill>
+          <a:ln w="19050">
+            <a:solidFill>
+              <a:srgbClr val="646365"/>
+            </a:solidFill>
+            <a:prstDash val="solid"/>
+          </a:ln>
+        </p:spPr>
+      </p:sp>
+      <p:pic>
+        <p:nvPicPr>
+          <p:cNvPr id="51" name="Object 50" descr="public/generated/icons/43834340-4a6d-11ed-97d2-959039ad2a2e.png">    </p:cNvPr>
+          <p:cNvPicPr>
+            <a:picLocks noChangeAspect="1"/>
+          </p:cNvPicPr>
+          <p:nvPr/>
+        </p:nvPicPr>
+        <p:blipFill>
+          <a:blip r:embed="rId17"/>
+          <a:stretch>
+            <a:fillRect/>
+          </a:stretch>
+        </p:blipFill>
+        <p:spPr>
+          <a:xfrm>
+            <a:off x="6766560" y="1463040"/>
+            <a:ext cx="274320" cy="274320"/>
+          </a:xfrm>
+          <a:prstGeom prst="rect">
+            <a:avLst/>
+          </a:prstGeom>
+        </p:spPr>
+      </p:pic>
+      <p:sp>
+        <p:nvSpPr>
+          <p:cNvPr id="52" name="Object 51"/>
+          <p:cNvSpPr/>
+          <p:nvPr/>
+        </p:nvSpPr>
+        <p:spPr>
+          <a:xfrm>
+            <a:off x="6583680" y="1874520"/>
+            <a:ext cx="640080" cy="274320"/>
+          </a:xfrm>
+          <a:prstGeom prst="rect">
+            <a:avLst/>
+          </a:prstGeom>
+          <a:noFill/>
+        </p:spPr>
+        <p:txBody>
+          <a:bodyPr wrap="square" rtlCol="0" anchor="t" bIns="0" lIns="0" rIns="0" tIns="0">
+            <a:spAutoFit/>
+          </a:bodyPr>
+          <a:lstStyle/>
+          <a:p>
+            <a:pPr algn="ctr">
+              <a:buNone/>
+            </a:pPr>
+            <a:r>
+              <a:rPr lang="en-US" b="1" sz="600" dirty="0" smtClean="0">
+                <a:solidFill>
+                  <a:srgbClr val="646365"/>
+                </a:solidFill>
+                <a:latin typeface="Helvetica" pitchFamily="34" charset="0"/>
+                <a:ea typeface="Helvetica" pitchFamily="34" charset="-122"/>
+                <a:cs typeface="Helvetica" pitchFamily="34" charset="-120"/>
+              </a:rPr>
+              <a:t>WATSONX.DATA</a:t>
+            </a:r>
+            <a:endParaRPr lang="en-US" dirty="0"/>
+          </a:p>
+        </p:txBody>
+      </p:sp>
+      <p:sp>
+        <p:nvSpPr>
+          <p:cNvPr id="53" name="Object 52"/>
+          <p:cNvSpPr/>
+          <p:nvPr/>
+        </p:nvSpPr>
+        <p:spPr>
+          <a:xfrm>
+            <a:off x="7589520" y="1371600"/>
+            <a:ext cx="457200" cy="457200"/>
+          </a:xfrm>
+          <a:prstGeom prst="ellipse">
+            <a:avLst/>
+          </a:prstGeom>
+          <a:solidFill>
+            <a:srgbClr val="FFFFFF"/>
+          </a:solidFill>
+          <a:ln w="19050">
+            <a:solidFill>
+              <a:srgbClr val="646365"/>
+            </a:solidFill>
+            <a:prstDash val="solid"/>
+          </a:ln>
+        </p:spPr>
+      </p:sp>
+      <p:pic>
+        <p:nvPicPr>
+          <p:cNvPr id="54" name="Object 53" descr="public/generated/icons/4d4fd270-fe8f-11ef-82ad-af5f37d5a455.png">    </p:cNvPr>
+          <p:cNvPicPr>
+            <a:picLocks noChangeAspect="1"/>
+          </p:cNvPicPr>
+          <p:nvPr/>
+        </p:nvPicPr>
+        <p:blipFill>
+          <a:blip r:embed="rId18"/>
+          <a:stretch>
+            <a:fillRect/>
+          </a:stretch>
+        </p:blipFill>
+        <p:spPr>
+          <a:xfrm>
+            <a:off x="7680960" y="1463040"/>
+            <a:ext cx="274320" cy="274320"/>
+          </a:xfrm>
+          <a:prstGeom prst="rect">
+            <a:avLst/>
+          </a:prstGeom>
+        </p:spPr>
+      </p:pic>
+      <p:sp>
+        <p:nvSpPr>
+          <p:cNvPr id="55" name="Object 54"/>
+          <p:cNvSpPr/>
+          <p:nvPr/>
+        </p:nvSpPr>
+        <p:spPr>
+          <a:xfrm>
+            <a:off x="7498080" y="1874520"/>
+            <a:ext cx="640080" cy="274320"/>
+          </a:xfrm>
+          <a:prstGeom prst="rect">
+            <a:avLst/>
+          </a:prstGeom>
+          <a:noFill/>
+        </p:spPr>
+        <p:txBody>
+          <a:bodyPr wrap="square" rtlCol="0" anchor="t" bIns="0" lIns="0" rIns="0" tIns="0">
+            <a:spAutoFit/>
+          </a:bodyPr>
+          <a:lstStyle/>
+          <a:p>
+            <a:pPr algn="ctr">
+              <a:buNone/>
+            </a:pPr>
+            <a:r>
+              <a:rPr lang="en-US" b="1" sz="600" dirty="0" smtClean="0">
+                <a:solidFill>
+                  <a:srgbClr val="646365"/>
+                </a:solidFill>
+                <a:latin typeface="Helvetica" pitchFamily="34" charset="0"/>
+                <a:ea typeface="Helvetica" pitchFamily="34" charset="-122"/>
+                <a:cs typeface="Helvetica" pitchFamily="34" charset="-120"/>
+              </a:rPr>
+              <a:t>WATSONX.DATA INTEGRATION</a:t>
+            </a:r>
+            <a:endParaRPr lang="en-US" dirty="0"/>
+          </a:p>
+        </p:txBody>
+      </p:sp>
+      <p:sp>
+        <p:nvSpPr>
+          <p:cNvPr id="56" name="Object 55"/>
+          <p:cNvSpPr/>
+          <p:nvPr/>
+        </p:nvSpPr>
+        <p:spPr>
+          <a:xfrm>
+            <a:off x="274320" y="2468880"/>
+            <a:ext cx="457200" cy="457200"/>
+          </a:xfrm>
+          <a:prstGeom prst="ellipse">
+            <a:avLst/>
+          </a:prstGeom>
+          <a:solidFill>
+            <a:srgbClr val="FFFFFF"/>
+          </a:solidFill>
+          <a:ln w="19050">
+            <a:solidFill>
+              <a:srgbClr val="646365"/>
+            </a:solidFill>
+            <a:prstDash val="solid"/>
+          </a:ln>
+        </p:spPr>
+      </p:sp>
+      <p:pic>
+        <p:nvPicPr>
+          <p:cNvPr id="57" name="Object 56" descr="public/generated/icons/ed3a5a53-eb60-4f3c-8fd1-17f88585b6ed.png">    </p:cNvPr>
+          <p:cNvPicPr>
+            <a:picLocks noChangeAspect="1"/>
+          </p:cNvPicPr>
+          <p:nvPr/>
+        </p:nvPicPr>
+        <p:blipFill>
+          <a:blip r:embed="rId19"/>
+          <a:stretch>
+            <a:fillRect/>
+          </a:stretch>
+        </p:blipFill>
+        <p:spPr>
+          <a:xfrm>
+            <a:off x="365760" y="2560320"/>
+            <a:ext cx="274320" cy="274320"/>
+          </a:xfrm>
+          <a:prstGeom prst="rect">
+            <a:avLst/>
+          </a:prstGeom>
+        </p:spPr>
+      </p:pic>
+      <p:sp>
+        <p:nvSpPr>
+          <p:cNvPr id="58" name="Object 57"/>
+          <p:cNvSpPr/>
+          <p:nvPr/>
+        </p:nvSpPr>
+        <p:spPr>
+          <a:xfrm>
+            <a:off x="182880" y="2971800"/>
+            <a:ext cx="640080" cy="274320"/>
+          </a:xfrm>
+          <a:prstGeom prst="rect">
+            <a:avLst/>
+          </a:prstGeom>
+          <a:noFill/>
+        </p:spPr>
+        <p:txBody>
+          <a:bodyPr wrap="square" rtlCol="0" anchor="t" bIns="0" lIns="0" rIns="0" tIns="0">
+            <a:spAutoFit/>
+          </a:bodyPr>
+          <a:lstStyle/>
+          <a:p>
+            <a:pPr algn="ctr">
+              <a:buNone/>
+            </a:pPr>
+            <a:r>
+              <a:rPr lang="en-US" b="1" sz="600" dirty="0" smtClean="0">
+                <a:solidFill>
+                  <a:srgbClr val="646365"/>
+                </a:solidFill>
+                <a:latin typeface="Helvetica" pitchFamily="34" charset="0"/>
+                <a:ea typeface="Helvetica" pitchFamily="34" charset="-122"/>
+                <a:cs typeface="Helvetica" pitchFamily="34" charset="-120"/>
+              </a:rPr>
+              <a:t>WATSONX.DATA INTELLIGENCE</a:t>
+            </a:r>
+            <a:endParaRPr lang="en-US" dirty="0"/>
+          </a:p>
+        </p:txBody>
+      </p:sp>
+      <p:sp>
+        <p:nvSpPr>
+          <p:cNvPr id="59" name="Object 58"/>
+          <p:cNvSpPr/>
+          <p:nvPr/>
+        </p:nvSpPr>
+        <p:spPr>
+          <a:xfrm>
+            <a:off x="1188720" y="2468880"/>
+            <a:ext cx="457200" cy="457200"/>
+          </a:xfrm>
+          <a:prstGeom prst="ellipse">
+            <a:avLst/>
+          </a:prstGeom>
+          <a:solidFill>
+            <a:srgbClr val="FFFFFF"/>
+          </a:solidFill>
+          <a:ln w="19050">
+            <a:solidFill>
+              <a:srgbClr val="646365"/>
+            </a:solidFill>
+            <a:prstDash val="solid"/>
+          </a:ln>
+        </p:spPr>
+      </p:sp>
+      <p:pic>
+        <p:nvPicPr>
+          <p:cNvPr id="60" name="Object 59" descr="public/generated/icons/2ad019f3-0fd6-4c25-966d-f3952481a870.png">    </p:cNvPr>
+          <p:cNvPicPr>
+            <a:picLocks noChangeAspect="1"/>
+          </p:cNvPicPr>
+          <p:nvPr/>
+        </p:nvPicPr>
+        <p:blipFill>
+          <a:blip r:embed="rId20"/>
+          <a:stretch>
+            <a:fillRect/>
+          </a:stretch>
+        </p:blipFill>
+        <p:spPr>
+          <a:xfrm>
+            <a:off x="1280160" y="2560320"/>
+            <a:ext cx="274320" cy="274320"/>
+          </a:xfrm>
+          <a:prstGeom prst="rect">
+            <a:avLst/>
+          </a:prstGeom>
+        </p:spPr>
+      </p:pic>
+      <p:sp>
+        <p:nvSpPr>
+          <p:cNvPr id="61" name="Object 60"/>
+          <p:cNvSpPr/>
+          <p:nvPr/>
+        </p:nvSpPr>
+        <p:spPr>
+          <a:xfrm>
+            <a:off x="1097280" y="2971800"/>
+            <a:ext cx="640080" cy="274320"/>
+          </a:xfrm>
+          <a:prstGeom prst="rect">
+            <a:avLst/>
+          </a:prstGeom>
+          <a:noFill/>
+        </p:spPr>
+        <p:txBody>
+          <a:bodyPr wrap="square" rtlCol="0" anchor="t" bIns="0" lIns="0" rIns="0" tIns="0">
+            <a:spAutoFit/>
+          </a:bodyPr>
+          <a:lstStyle/>
+          <a:p>
+            <a:pPr algn="ctr">
+              <a:buNone/>
+            </a:pPr>
+            <a:r>
+              <a:rPr lang="en-US" b="1" sz="600" dirty="0" smtClean="0">
+                <a:solidFill>
+                  <a:srgbClr val="646365"/>
+                </a:solidFill>
+                <a:latin typeface="Helvetica" pitchFamily="34" charset="0"/>
+                <a:ea typeface="Helvetica" pitchFamily="34" charset="-122"/>
+                <a:cs typeface="Helvetica" pitchFamily="34" charset="-120"/>
+              </a:rPr>
+              <a:t>WATSONX.GOVERNANCE</a:t>
+            </a:r>
+            <a:endParaRPr lang="en-US" dirty="0"/>
+          </a:p>
+        </p:txBody>
+      </p:sp>
+      <p:sp>
+        <p:nvSpPr>
+          <p:cNvPr id="62" name="Object 61"/>
+          <p:cNvSpPr/>
+          <p:nvPr/>
+        </p:nvSpPr>
+        <p:spPr>
+          <a:xfrm>
+            <a:off x="2103120" y="2468880"/>
+            <a:ext cx="457200" cy="457200"/>
+          </a:xfrm>
+          <a:prstGeom prst="ellipse">
+            <a:avLst/>
+          </a:prstGeom>
+          <a:solidFill>
+            <a:srgbClr val="FFFFFF"/>
+          </a:solidFill>
+          <a:ln w="19050">
+            <a:solidFill>
+              <a:srgbClr val="646365"/>
+            </a:solidFill>
+            <a:prstDash val="solid"/>
+          </a:ln>
+        </p:spPr>
+      </p:sp>
+      <p:pic>
+        <p:nvPicPr>
+          <p:cNvPr id="63" name="Object 62" descr="public/generated/icons/e9407be2-139f-4f05-959d-494c6601239a.png">    </p:cNvPr>
+          <p:cNvPicPr>
+            <a:picLocks noChangeAspect="1"/>
+          </p:cNvPicPr>
+          <p:nvPr/>
+        </p:nvPicPr>
+        <p:blipFill>
+          <a:blip r:embed="rId21"/>
+          <a:stretch>
+            <a:fillRect/>
+          </a:stretch>
+        </p:blipFill>
+        <p:spPr>
+          <a:xfrm>
+            <a:off x="2194560" y="2560320"/>
+            <a:ext cx="274320" cy="274320"/>
+          </a:xfrm>
+          <a:prstGeom prst="rect">
+            <a:avLst/>
+          </a:prstGeom>
+        </p:spPr>
+      </p:pic>
+      <p:sp>
+        <p:nvSpPr>
+          <p:cNvPr id="64" name="Object 63"/>
+          <p:cNvSpPr/>
+          <p:nvPr/>
+        </p:nvSpPr>
+        <p:spPr>
+          <a:xfrm>
+            <a:off x="2011680" y="2971800"/>
+            <a:ext cx="640080" cy="274320"/>
+          </a:xfrm>
+          <a:prstGeom prst="rect">
+            <a:avLst/>
+          </a:prstGeom>
+          <a:noFill/>
+        </p:spPr>
+        <p:txBody>
+          <a:bodyPr wrap="square" rtlCol="0" anchor="t" bIns="0" lIns="0" rIns="0" tIns="0">
+            <a:spAutoFit/>
+          </a:bodyPr>
+          <a:lstStyle/>
+          <a:p>
+            <a:pPr algn="ctr">
+              <a:buNone/>
+            </a:pPr>
+            <a:r>
+              <a:rPr lang="en-US" b="1" sz="600" dirty="0" smtClean="0">
+                <a:solidFill>
+                  <a:srgbClr val="646365"/>
+                </a:solidFill>
+                <a:latin typeface="Helvetica" pitchFamily="34" charset="0"/>
+                <a:ea typeface="Helvetica" pitchFamily="34" charset="-122"/>
+                <a:cs typeface="Helvetica" pitchFamily="34" charset="-120"/>
+              </a:rPr>
+              <a:t>WEALTHGROWTH.AI</a:t>
+            </a:r>
+            <a:endParaRPr lang="en-US" dirty="0"/>
+          </a:p>
+        </p:txBody>
+      </p:sp>
+      <p:sp>
+        <p:nvSpPr>
+          <p:cNvPr id="65" name="Object 64"/>
+          <p:cNvSpPr/>
+          <p:nvPr/>
+        </p:nvSpPr>
+        <p:spPr>
+          <a:xfrm>
+            <a:off x="3017520" y="2468880"/>
+            <a:ext cx="457200" cy="457200"/>
+          </a:xfrm>
+          <a:prstGeom prst="ellipse">
+            <a:avLst/>
+          </a:prstGeom>
+          <a:solidFill>
+            <a:srgbClr val="FFFFFF"/>
+          </a:solidFill>
+          <a:ln w="19050">
+            <a:solidFill>
+              <a:srgbClr val="646365"/>
+            </a:solidFill>
+            <a:prstDash val="solid"/>
+          </a:ln>
+        </p:spPr>
+      </p:sp>
+      <p:pic>
+        <p:nvPicPr>
+          <p:cNvPr id="66" name="Object 65" descr="public/generated/icons/cf329950-0a3e-11e8-922e-f1366c6e1c83-zerto.png">    </p:cNvPr>
+          <p:cNvPicPr>
+            <a:picLocks noChangeAspect="1"/>
+          </p:cNvPicPr>
+          <p:nvPr/>
+        </p:nvPicPr>
+        <p:blipFill>
+          <a:blip r:embed="rId22"/>
+          <a:stretch>
+            <a:fillRect/>
+          </a:stretch>
+        </p:blipFill>
+        <p:spPr>
+          <a:xfrm>
+            <a:off x="3108960" y="2560320"/>
+            <a:ext cx="274320" cy="274320"/>
+          </a:xfrm>
+          <a:prstGeom prst="rect">
+            <a:avLst/>
+          </a:prstGeom>
+        </p:spPr>
+      </p:pic>
+      <p:sp>
+        <p:nvSpPr>
+          <p:cNvPr id="67" name="Object 66"/>
+          <p:cNvSpPr/>
+          <p:nvPr/>
+        </p:nvSpPr>
+        <p:spPr>
+          <a:xfrm>
+            <a:off x="2926080" y="2971800"/>
             <a:ext cx="640080" cy="274320"/>
           </a:xfrm>
           <a:prstGeom prst="rect">

--- a/mycatalog-architecture-diagram-template.pptx
+++ b/mycatalog-architecture-diagram-template.pptx
@@ -524,7 +524,7 @@
           <a:p>
             <a:r>
               <a:rPr lang="en-US" dirty="0" smtClean="0"/>
-              <a:t>Generated on Sun Aug 03 2025 07:05:14 GMT+0000 (Coordinated Universal Time)</a:t>
+              <a:t>Generated on Sun Aug 10 2025 07:03:51 GMT+0000 (Coordinated Universal Time)</a:t>
             </a:r>
             <a:endParaRPr lang="en-US" dirty="0"/>
           </a:p>
@@ -27440,7 +27440,7 @@
       </p:sp>
       <p:pic>
         <p:nvPicPr>
-          <p:cNvPr id="12" name="Object 11" descr="public/generated/icons/9f3db814-3aec-47c5-94b0-6a71d49bd27f.png">    </p:cNvPr>
+          <p:cNvPr id="12" name="Object 11" descr="public/generated/icons/b4ed8a30-936f-11e9-b289-1d079699cbe5.png">    </p:cNvPr>
           <p:cNvPicPr>
             <a:picLocks noChangeAspect="1"/>
           </p:cNvPicPr>
@@ -27496,7 +27496,7 @@
                 <a:ea typeface="Helvetica" pitchFamily="34" charset="-122"/>
                 <a:cs typeface="Helvetica" pitchFamily="34" charset="-120"/>
               </a:rPr>
-              <a:t>DIZZION COMPLETE</a:t>
+              <a:t>DNS SERVICES</a:t>
             </a:r>
             <a:endParaRPr lang="en-US" dirty="0"/>
           </a:p>
@@ -27529,7 +27529,7 @@
       </p:sp>
       <p:pic>
         <p:nvPicPr>
-          <p:cNvPr id="15" name="Object 14" descr="public/generated/icons/9e09a2eb-b2e5-4d76-ab7c-1b2f8c080865.png">    </p:cNvPr>
+          <p:cNvPr id="15" name="Object 14" descr="public/generated/icons/d1e3f0d2-0f49-ddfd-0eb9-2897b9d3a45d.png">    </p:cNvPr>
           <p:cNvPicPr>
             <a:picLocks noChangeAspect="1"/>
           </p:cNvPicPr>
@@ -27585,7 +27585,7 @@
                 <a:ea typeface="Helvetica" pitchFamily="34" charset="-122"/>
                 <a:cs typeface="Helvetica" pitchFamily="34" charset="-120"/>
               </a:rPr>
-              <a:t>DIZZION COMPLETE - HORIZON</a:t>
+              <a:t>EMAIL DELIVERY, POWERED BY SENDGRID</a:t>
             </a:r>
             <a:endParaRPr lang="en-US" dirty="0"/>
           </a:p>
@@ -27618,7 +27618,7 @@
       </p:sp>
       <p:pic>
         <p:nvPicPr>
-          <p:cNvPr id="18" name="Object 17" descr="public/generated/icons/79679329-2050-4779-a2e2-7210b88aed4e.png">    </p:cNvPr>
+          <p:cNvPr id="18" name="Object 17" descr="public/generated/icons/871a9870-7508-11ef-ac5c-3324c550b37a.png">    </p:cNvPr>
           <p:cNvPicPr>
             <a:picLocks noChangeAspect="1"/>
           </p:cNvPicPr>
@@ -27674,7 +27674,7 @@
                 <a:ea typeface="Helvetica" pitchFamily="34" charset="-122"/>
                 <a:cs typeface="Helvetica" pitchFamily="34" charset="-120"/>
               </a:rPr>
-              <a:t>DIZZION COMPLETE FS - HORIZON</a:t>
+              <a:t>ENTERPRISE APPLICATION SERVICE</a:t>
             </a:r>
             <a:endParaRPr lang="en-US" dirty="0"/>
           </a:p>
@@ -27707,7 +27707,7 @@
       </p:sp>
       <p:pic>
         <p:nvPicPr>
-          <p:cNvPr id="21" name="Object 20" descr="public/generated/icons/6fc0c2df-7fbc-470f-aac5-a93af7ef4a92.png">    </p:cNvPr>
+          <p:cNvPr id="21" name="Object 20" descr="public/generated/icons/64955a78-30f9-426d-a25a-344480421b27.png">    </p:cNvPr>
           <p:cNvPicPr>
             <a:picLocks noChangeAspect="1"/>
           </p:cNvPicPr>
@@ -27763,7 +27763,7 @@
                 <a:ea typeface="Helvetica" pitchFamily="34" charset="-122"/>
                 <a:cs typeface="Helvetica" pitchFamily="34" charset="-120"/>
               </a:rPr>
-              <a:t>DIZZION FLEX</a:t>
+              <a:t>ETICLOUD SECURE DIGITAL AGILE WORKPLACE</a:t>
             </a:r>
             <a:endParaRPr lang="en-US" dirty="0"/>
           </a:p>
@@ -27796,7 +27796,7 @@
       </p:sp>
       <p:pic>
         <p:nvPicPr>
-          <p:cNvPr id="24" name="Object 23" descr="public/generated/icons/72ca6b61-2aa8-4b8f-ba21-69854bd2095b.png">    </p:cNvPr>
+          <p:cNvPr id="24" name="Object 23" descr="public/generated/icons/ecdb4690-c2d8-11eb-bff1-4f7b9d2dfe41.png">    </p:cNvPr>
           <p:cNvPicPr>
             <a:picLocks noChangeAspect="1"/>
           </p:cNvPicPr>
@@ -27852,7 +27852,7 @@
                 <a:ea typeface="Helvetica" pitchFamily="34" charset="-122"/>
                 <a:cs typeface="Helvetica" pitchFamily="34" charset="-120"/>
               </a:rPr>
-              <a:t>DIZZION MANAGED</a:t>
+              <a:t>EVENT NOTIFICATIONS</a:t>
             </a:r>
             <a:endParaRPr lang="en-US" dirty="0"/>
           </a:p>
@@ -27885,7 +27885,7 @@
       </p:sp>
       <p:pic>
         <p:nvPicPr>
-          <p:cNvPr id="27" name="Object 26" descr="public/generated/icons/b4ed8a30-936f-11e9-b289-1d079699cbe5.png">    </p:cNvPr>
+          <p:cNvPr id="27" name="Object 26" descr="public/generated/icons/6a7f4e38-f218-48ef-9dd2-df408747568e.png">    </p:cNvPr>
           <p:cNvPicPr>
             <a:picLocks noChangeAspect="1"/>
           </p:cNvPicPr>
@@ -27941,7 +27941,7 @@
                 <a:ea typeface="Helvetica" pitchFamily="34" charset="-122"/>
                 <a:cs typeface="Helvetica" pitchFamily="34" charset="-120"/>
               </a:rPr>
-              <a:t>DNS SERVICES</a:t>
+              <a:t>EVENT STREAMS</a:t>
             </a:r>
             <a:endParaRPr lang="en-US" dirty="0"/>
           </a:p>
@@ -27974,7 +27974,7 @@
       </p:sp>
       <p:pic>
         <p:nvPicPr>
-          <p:cNvPr id="30" name="Object 29" descr="public/generated/icons/d1e3f0d2-0f49-ddfd-0eb9-2897b9d3a45d.png">    </p:cNvPr>
+          <p:cNvPr id="30" name="Object 29" descr="public/generated/icons/cf329950-0a3e-11e8-922e-f1366c6e1c83-bigip.png">    </p:cNvPr>
           <p:cNvPicPr>
             <a:picLocks noChangeAspect="1"/>
           </p:cNvPicPr>
@@ -28030,7 +28030,7 @@
                 <a:ea typeface="Helvetica" pitchFamily="34" charset="-122"/>
                 <a:cs typeface="Helvetica" pitchFamily="34" charset="-120"/>
               </a:rPr>
-              <a:t>EMAIL DELIVERY, POWERED BY SENDGRID</a:t>
+              <a:t>F5 BIG-IP</a:t>
             </a:r>
             <a:endParaRPr lang="en-US" dirty="0"/>
           </a:p>
@@ -28063,7 +28063,7 @@
       </p:sp>
       <p:pic>
         <p:nvPicPr>
-          <p:cNvPr id="33" name="Object 32" descr="public/generated/icons/871a9870-7508-11ef-ac5c-3324c550b37a.png">    </p:cNvPr>
+          <p:cNvPr id="33" name="Object 32" descr="public/generated/icons/60427a43-cf48-41e0-bd95-26bde9c12105.png">    </p:cNvPr>
           <p:cNvPicPr>
             <a:picLocks noChangeAspect="1"/>
           </p:cNvPicPr>
@@ -28119,7 +28119,7 @@
                 <a:ea typeface="Helvetica" pitchFamily="34" charset="-122"/>
                 <a:cs typeface="Helvetica" pitchFamily="34" charset="-120"/>
               </a:rPr>
-              <a:t>ENTERPRISE APPLICATION SERVICE</a:t>
+              <a:t>FALCONSTOR STORSAFE FOR POWER ON-PREMISES</a:t>
             </a:r>
             <a:endParaRPr lang="en-US" dirty="0"/>
           </a:p>
@@ -28152,7 +28152,7 @@
       </p:sp>
       <p:pic>
         <p:nvPicPr>
-          <p:cNvPr id="36" name="Object 35" descr="public/generated/icons/64955a78-30f9-426d-a25a-344480421b27.png">    </p:cNvPr>
+          <p:cNvPr id="36" name="Object 35" descr="public/generated/icons/6.png">    </p:cNvPr>
           <p:cNvPicPr>
             <a:picLocks noChangeAspect="1"/>
           </p:cNvPicPr>
@@ -28208,7 +28208,7 @@
                 <a:ea typeface="Helvetica" pitchFamily="34" charset="-122"/>
                 <a:cs typeface="Helvetica" pitchFamily="34" charset="-120"/>
               </a:rPr>
-              <a:t>ETICLOUD SECURE DIGITAL AGILE WORKPLACE</a:t>
+              <a:t>FILE STORAGE FOR CLASSIC</a:t>
             </a:r>
             <a:endParaRPr lang="en-US" dirty="0"/>
           </a:p>
@@ -28241,7 +28241,7 @@
       </p:sp>
       <p:pic>
         <p:nvPicPr>
-          <p:cNvPr id="39" name="Object 38" descr="public/generated/icons/ecdb4690-c2d8-11eb-bff1-4f7b9d2dfe41.png">    </p:cNvPr>
+          <p:cNvPr id="39" name="Object 38" descr="public/generated/icons/is.share.png">    </p:cNvPr>
           <p:cNvPicPr>
             <a:picLocks noChangeAspect="1"/>
           </p:cNvPicPr>
@@ -28297,7 +28297,7 @@
                 <a:ea typeface="Helvetica" pitchFamily="34" charset="-122"/>
                 <a:cs typeface="Helvetica" pitchFamily="34" charset="-120"/>
               </a:rPr>
-              <a:t>EVENT NOTIFICATIONS</a:t>
+              <a:t>FILE STORAGE FOR VPC</a:t>
             </a:r>
             <a:endParaRPr lang="en-US" dirty="0"/>
           </a:p>
@@ -28330,7 +28330,7 @@
       </p:sp>
       <p:pic>
         <p:nvPicPr>
-          <p:cNvPr id="42" name="Object 41" descr="public/generated/icons/6a7f4e38-f218-48ef-9dd2-df408747568e.png">    </p:cNvPr>
+          <p:cNvPr id="42" name="Object 41" descr="public/generated/icons/is.floating-ip.png">    </p:cNvPr>
           <p:cNvPicPr>
             <a:picLocks noChangeAspect="1"/>
           </p:cNvPicPr>
@@ -28386,7 +28386,7 @@
                 <a:ea typeface="Helvetica" pitchFamily="34" charset="-122"/>
                 <a:cs typeface="Helvetica" pitchFamily="34" charset="-120"/>
               </a:rPr>
-              <a:t>EVENT STREAMS</a:t>
+              <a:t>FLOATING IP FOR VPC</a:t>
             </a:r>
             <a:endParaRPr lang="en-US" dirty="0"/>
           </a:p>
@@ -28419,7 +28419,7 @@
       </p:sp>
       <p:pic>
         <p:nvPicPr>
-          <p:cNvPr id="45" name="Object 44" descr="public/generated/icons/cf329950-0a3e-11e8-922e-f1366c6e1c83-bigip.png">    </p:cNvPr>
+          <p:cNvPr id="45" name="Object 44" descr="public/generated/icons/is.flow-log-collector.png">    </p:cNvPr>
           <p:cNvPicPr>
             <a:picLocks noChangeAspect="1"/>
           </p:cNvPicPr>
@@ -28475,7 +28475,7 @@
                 <a:ea typeface="Helvetica" pitchFamily="34" charset="-122"/>
                 <a:cs typeface="Helvetica" pitchFamily="34" charset="-120"/>
               </a:rPr>
-              <a:t>F5 BIG-IP</a:t>
+              <a:t>FLOW LOGS FOR VPC</a:t>
             </a:r>
             <a:endParaRPr lang="en-US" dirty="0"/>
           </a:p>
@@ -28508,7 +28508,7 @@
       </p:sp>
       <p:pic>
         <p:nvPicPr>
-          <p:cNvPr id="48" name="Object 47" descr="public/generated/icons/60427a43-cf48-41e0-bd95-26bde9c12105.png">    </p:cNvPr>
+          <p:cNvPr id="48" name="Object 47" descr="public/generated/icons/05605040-8854-4665-bd05-0b10a96daf05.png">    </p:cNvPr>
           <p:cNvPicPr>
             <a:picLocks noChangeAspect="1"/>
           </p:cNvPicPr>
@@ -28564,7 +28564,7 @@
                 <a:ea typeface="Helvetica" pitchFamily="34" charset="-122"/>
                 <a:cs typeface="Helvetica" pitchFamily="34" charset="-120"/>
               </a:rPr>
-              <a:t>FALCONSTOR STORSAFE FOR POWER ON-PREMISES</a:t>
+              <a:t>FNTS CLOUD MIGRATION SERVICES</a:t>
             </a:r>
             <a:endParaRPr lang="en-US" dirty="0"/>
           </a:p>
@@ -28597,7 +28597,7 @@
       </p:sp>
       <p:pic>
         <p:nvPicPr>
-          <p:cNvPr id="51" name="Object 50" descr="public/generated/icons/6.png">    </p:cNvPr>
+          <p:cNvPr id="51" name="Object 50" descr="public/generated/icons/d2fb0ba3-1679-4053-a593-9f2259d9e87b.png">    </p:cNvPr>
           <p:cNvPicPr>
             <a:picLocks noChangeAspect="1"/>
           </p:cNvPicPr>
@@ -28653,7 +28653,7 @@
                 <a:ea typeface="Helvetica" pitchFamily="34" charset="-122"/>
                 <a:cs typeface="Helvetica" pitchFamily="34" charset="-120"/>
               </a:rPr>
-              <a:t>FILE STORAGE FOR CLASSIC</a:t>
+              <a:t>FNTS MANAGED SERVICES FOR POWERVS CLOUD</a:t>
             </a:r>
             <a:endParaRPr lang="en-US" dirty="0"/>
           </a:p>
@@ -28686,7 +28686,7 @@
       </p:sp>
       <p:pic>
         <p:nvPicPr>
-          <p:cNvPr id="54" name="Object 53" descr="public/generated/icons/is.share.png">    </p:cNvPr>
+          <p:cNvPr id="54" name="Object 53" descr="public/generated/icons/cf329950-0a3e-11e8-922e-f1366c6e1c83-fortigate.png">    </p:cNvPr>
           <p:cNvPicPr>
             <a:picLocks noChangeAspect="1"/>
           </p:cNvPicPr>
@@ -28742,7 +28742,7 @@
                 <a:ea typeface="Helvetica" pitchFamily="34" charset="-122"/>
                 <a:cs typeface="Helvetica" pitchFamily="34" charset="-120"/>
               </a:rPr>
-              <a:t>FILE STORAGE FOR VPC</a:t>
+              <a:t>FORTIGATE SECURITY APPLIANCE</a:t>
             </a:r>
             <a:endParaRPr lang="en-US" dirty="0"/>
           </a:p>
@@ -28775,7 +28775,7 @@
       </p:sp>
       <p:pic>
         <p:nvPicPr>
-          <p:cNvPr id="57" name="Object 56" descr="public/generated/icons/is.floating-ip.png">    </p:cNvPr>
+          <p:cNvPr id="57" name="Object 56" descr="public/generated/icons/f5b26324-9b39-c701-0cc5-b0d5d2fe8534.png">    </p:cNvPr>
           <p:cNvPicPr>
             <a:picLocks noChangeAspect="1"/>
           </p:cNvPicPr>
@@ -28831,7 +28831,7 @@
                 <a:ea typeface="Helvetica" pitchFamily="34" charset="-122"/>
                 <a:cs typeface="Helvetica" pitchFamily="34" charset="-120"/>
               </a:rPr>
-              <a:t>FLOATING IP FOR VPC</a:t>
+              <a:t>FORTIGATE SECURITY APPLIANCE 10GBPS</a:t>
             </a:r>
             <a:endParaRPr lang="en-US" dirty="0"/>
           </a:p>
@@ -28864,7 +28864,7 @@
       </p:sp>
       <p:pic>
         <p:nvPicPr>
-          <p:cNvPr id="60" name="Object 59" descr="public/generated/icons/is.flow-log-collector.png">    </p:cNvPr>
+          <p:cNvPr id="60" name="Object 59" descr="public/generated/icons/cf329950-0a3e-11e8-922e-f1366c6e1c83-fortigatevm.png">    </p:cNvPr>
           <p:cNvPicPr>
             <a:picLocks noChangeAspect="1"/>
           </p:cNvPicPr>
@@ -28920,7 +28920,7 @@
                 <a:ea typeface="Helvetica" pitchFamily="34" charset="-122"/>
                 <a:cs typeface="Helvetica" pitchFamily="34" charset="-120"/>
               </a:rPr>
-              <a:t>FLOW LOGS FOR VPC</a:t>
+              <a:t>FORTIGATE VIRTUAL APPLIANCE</a:t>
             </a:r>
             <a:endParaRPr lang="en-US" dirty="0"/>
           </a:p>
@@ -28953,7 +28953,7 @@
       </p:sp>
       <p:pic>
         <p:nvPicPr>
-          <p:cNvPr id="63" name="Object 62" descr="public/generated/icons/05605040-8854-4665-bd05-0b10a96daf05.png">    </p:cNvPr>
+          <p:cNvPr id="63" name="Object 62" descr="public/generated/icons/a93eeacc-7012-c8bc-c851-e928949a226c.png">    </p:cNvPr>
           <p:cNvPicPr>
             <a:picLocks noChangeAspect="1"/>
           </p:cNvPicPr>
@@ -29009,7 +29009,7 @@
                 <a:ea typeface="Helvetica" pitchFamily="34" charset="-122"/>
                 <a:cs typeface="Helvetica" pitchFamily="34" charset="-120"/>
               </a:rPr>
-              <a:t>FNTS CLOUD MIGRATION SERVICES</a:t>
+              <a:t>FORTINET VIRTUAL FORTIGATE SECURITY APPLIANCE (VFSA)</a:t>
             </a:r>
             <a:endParaRPr lang="en-US" dirty="0"/>
           </a:p>
@@ -29042,7 +29042,7 @@
       </p:sp>
       <p:pic>
         <p:nvPicPr>
-          <p:cNvPr id="66" name="Object 65" descr="public/generated/icons/d2fb0ba3-1679-4053-a593-9f2259d9e87b.png">    </p:cNvPr>
+          <p:cNvPr id="66" name="Object 65" descr="public/generated/icons/900fb23f-fe9d-4cf8-9bb2-a82d87dede0e.png">    </p:cNvPr>
           <p:cNvPicPr>
             <a:picLocks noChangeAspect="1"/>
           </p:cNvPicPr>
@@ -29098,7 +29098,7 @@
                 <a:ea typeface="Helvetica" pitchFamily="34" charset="-122"/>
                 <a:cs typeface="Helvetica" pitchFamily="34" charset="-120"/>
               </a:rPr>
-              <a:t>FNTS MANAGED SERVICES FOR POWERVS CLOUD</a:t>
+              <a:t>FRESCHE KTLO APPLICATION MANAGEMENT</a:t>
             </a:r>
             <a:endParaRPr lang="en-US" dirty="0"/>
           </a:p>
@@ -29131,7 +29131,7 @@
       </p:sp>
       <p:pic>
         <p:nvPicPr>
-          <p:cNvPr id="69" name="Object 68" descr="public/generated/icons/cf329950-0a3e-11e8-922e-f1366c6e1c83-fortigate.png">    </p:cNvPr>
+          <p:cNvPr id="69" name="Object 68" descr="public/generated/icons/c3c7f095-67da-42e6-b982-46d0e6e79f84.png">    </p:cNvPr>
           <p:cNvPicPr>
             <a:picLocks noChangeAspect="1"/>
           </p:cNvPicPr>
@@ -29187,7 +29187,7 @@
                 <a:ea typeface="Helvetica" pitchFamily="34" charset="-122"/>
                 <a:cs typeface="Helvetica" pitchFamily="34" charset="-120"/>
               </a:rPr>
-              <a:t>FORTIGATE SECURITY APPLIANCE</a:t>
+              <a:t>FRESCHE LPAR OPERATIONS MANAGEMENT</a:t>
             </a:r>
             <a:endParaRPr lang="en-US" dirty="0"/>
           </a:p>
@@ -29220,7 +29220,7 @@
       </p:sp>
       <p:pic>
         <p:nvPicPr>
-          <p:cNvPr id="72" name="Object 71" descr="public/generated/icons/f5b26324-9b39-c701-0cc5-b0d5d2fe8534.png">    </p:cNvPr>
+          <p:cNvPr id="72" name="Object 71" descr="public/generated/icons/afa31435-8561-4383-b069-ec9a47719e20.png">    </p:cNvPr>
           <p:cNvPicPr>
             <a:picLocks noChangeAspect="1"/>
           </p:cNvPicPr>
@@ -29276,7 +29276,7 @@
                 <a:ea typeface="Helvetica" pitchFamily="34" charset="-122"/>
                 <a:cs typeface="Helvetica" pitchFamily="34" charset="-120"/>
               </a:rPr>
-              <a:t>FORTIGATE SECURITY APPLIANCE 10GBPS</a:t>
+              <a:t>FRESCHE PRESTO</a:t>
             </a:r>
             <a:endParaRPr lang="en-US" dirty="0"/>
           </a:p>
@@ -29309,7 +29309,7 @@
       </p:sp>
       <p:pic>
         <p:nvPicPr>
-          <p:cNvPr id="75" name="Object 74" descr="public/generated/icons/cf329950-0a3e-11e8-922e-f1366c6e1c83-fortigatevm.png">    </p:cNvPr>
+          <p:cNvPr id="75" name="Object 74" descr="public/generated/icons/3e683ee5-b3a8-4f07-b98b-bf35bdeb7082.png">    </p:cNvPr>
           <p:cNvPicPr>
             <a:picLocks noChangeAspect="1"/>
           </p:cNvPicPr>
@@ -29365,7 +29365,7 @@
                 <a:ea typeface="Helvetica" pitchFamily="34" charset="-122"/>
                 <a:cs typeface="Helvetica" pitchFamily="34" charset="-120"/>
               </a:rPr>
-              <a:t>FORTIGATE VIRTUAL APPLIANCE</a:t>
+              <a:t>FRESCHE SECURITY SUITE</a:t>
             </a:r>
             <a:endParaRPr lang="en-US" dirty="0"/>
           </a:p>
@@ -29398,7 +29398,7 @@
       </p:sp>
       <p:pic>
         <p:nvPicPr>
-          <p:cNvPr id="78" name="Object 77" descr="public/generated/icons/a93eeacc-7012-c8bc-c851-e928949a226c.png">    </p:cNvPr>
+          <p:cNvPr id="78" name="Object 77" descr="public/generated/icons/9db75c87-84ce-491b-8526-dcd2188f3866.png">    </p:cNvPr>
           <p:cNvPicPr>
             <a:picLocks noChangeAspect="1"/>
           </p:cNvPicPr>
@@ -29454,7 +29454,7 @@
                 <a:ea typeface="Helvetica" pitchFamily="34" charset="-122"/>
                 <a:cs typeface="Helvetica" pitchFamily="34" charset="-120"/>
               </a:rPr>
-              <a:t>FORTINET VIRTUAL FORTIGATE SECURITY APPLIANCE (VFSA)</a:t>
+              <a:t>FRESCHE X-ANALYSIS SUITE</a:t>
             </a:r>
             <a:endParaRPr lang="en-US" dirty="0"/>
           </a:p>
@@ -29487,7 +29487,7 @@
       </p:sp>
       <p:pic>
         <p:nvPicPr>
-          <p:cNvPr id="81" name="Object 80" descr="public/generated/icons/900fb23f-fe9d-4cf8-9bb2-a82d87dede0e.png">    </p:cNvPr>
+          <p:cNvPr id="81" name="Object 80" descr="public/generated/icons/16.png">    </p:cNvPr>
           <p:cNvPicPr>
             <a:picLocks noChangeAspect="1"/>
           </p:cNvPicPr>
@@ -29543,7 +29543,7 @@
                 <a:ea typeface="Helvetica" pitchFamily="34" charset="-122"/>
                 <a:cs typeface="Helvetica" pitchFamily="34" charset="-120"/>
               </a:rPr>
-              <a:t>FRESCHE KTLO APPLICATION MANAGEMENT</a:t>
+              <a:t>HARDWARE FIREWALL</a:t>
             </a:r>
             <a:endParaRPr lang="en-US" dirty="0"/>
           </a:p>
@@ -29576,7 +29576,7 @@
       </p:sp>
       <p:pic>
         <p:nvPicPr>
-          <p:cNvPr id="84" name="Object 83" descr="public/generated/icons/c3c7f095-67da-42e6-b982-46d0e6e79f84.png">    </p:cNvPr>
+          <p:cNvPr id="84" name="Object 83" descr="public/generated/icons/cf329950-0a3e-11e8-922e-f1366c6e1c83-hcx.png">    </p:cNvPr>
           <p:cNvPicPr>
             <a:picLocks noChangeAspect="1"/>
           </p:cNvPicPr>
@@ -29632,7 +29632,7 @@
                 <a:ea typeface="Helvetica" pitchFamily="34" charset="-122"/>
                 <a:cs typeface="Helvetica" pitchFamily="34" charset="-120"/>
               </a:rPr>
-              <a:t>FRESCHE LPAR OPERATIONS MANAGEMENT</a:t>
+              <a:t>HCX</a:t>
             </a:r>
             <a:endParaRPr lang="en-US" dirty="0"/>
           </a:p>
@@ -29665,7 +29665,7 @@
       </p:sp>
       <p:pic>
         <p:nvPicPr>
-          <p:cNvPr id="87" name="Object 86" descr="public/generated/icons/afa31435-8561-4383-b069-ec9a47719e20.png">    </p:cNvPr>
+          <p:cNvPr id="87" name="Object 86" descr="public/generated/icons/3dacb5a3-de4a-4361-9f39-0b6657f89f37.png">    </p:cNvPr>
           <p:cNvPicPr>
             <a:picLocks noChangeAspect="1"/>
           </p:cNvPicPr>
@@ -29721,7 +29721,7 @@
                 <a:ea typeface="Helvetica" pitchFamily="34" charset="-122"/>
                 <a:cs typeface="Helvetica" pitchFamily="34" charset="-120"/>
               </a:rPr>
-              <a:t>FRESCHE PRESTO</a:t>
+              <a:t>HDM VMWARE WORKLOAD ANALYZER</a:t>
             </a:r>
             <a:endParaRPr lang="en-US" dirty="0"/>
           </a:p>
@@ -29754,7 +29754,7 @@
       </p:sp>
       <p:pic>
         <p:nvPicPr>
-          <p:cNvPr id="90" name="Object 89" descr="public/generated/icons/3e683ee5-b3a8-4f07-b98b-bf35bdeb7082.png">    </p:cNvPr>
+          <p:cNvPr id="90" name="Object 89" descr="public/generated/icons/cf329950-0a3e-11e8-922e-f1366c6e1c83-horizon.png">    </p:cNvPr>
           <p:cNvPicPr>
             <a:picLocks noChangeAspect="1"/>
           </p:cNvPicPr>
@@ -29810,7 +29810,7 @@
                 <a:ea typeface="Helvetica" pitchFamily="34" charset="-122"/>
                 <a:cs typeface="Helvetica" pitchFamily="34" charset="-120"/>
               </a:rPr>
-              <a:t>FRESCHE SECURITY SUITE</a:t>
+              <a:t>HORIZON 7</a:t>
             </a:r>
             <a:endParaRPr lang="en-US" dirty="0"/>
           </a:p>
@@ -29843,7 +29843,7 @@
       </p:sp>
       <p:pic>
         <p:nvPicPr>
-          <p:cNvPr id="93" name="Object 92" descr="public/generated/icons/9db75c87-84ce-491b-8526-dcd2188f3866.png">    </p:cNvPr>
+          <p:cNvPr id="93" name="Object 92" descr="public/generated/icons/fa329acf-f9b6-fa9f-f37e-ad72d0b6a783.png">    </p:cNvPr>
           <p:cNvPicPr>
             <a:picLocks noChangeAspect="1"/>
           </p:cNvPicPr>
@@ -29899,7 +29899,7 @@
                 <a:ea typeface="Helvetica" pitchFamily="34" charset="-122"/>
                 <a:cs typeface="Helvetica" pitchFamily="34" charset="-120"/>
               </a:rPr>
-              <a:t>FRESCHE X-ANALYSIS SUITE</a:t>
+              <a:t>HYBRID CLOUD INFRASTRUCTURE AS A SERVICE</a:t>
             </a:r>
             <a:endParaRPr lang="en-US" dirty="0"/>
           </a:p>
@@ -29932,7 +29932,7 @@
       </p:sp>
       <p:pic>
         <p:nvPicPr>
-          <p:cNvPr id="96" name="Object 95" descr="public/generated/icons/16.png">    </p:cNvPr>
+          <p:cNvPr id="96" name="Object 95" descr="public/generated/icons/d589492e-6ac0-4a11-9c28-a157851c8f68.png">    </p:cNvPr>
           <p:cNvPicPr>
             <a:picLocks noChangeAspect="1"/>
           </p:cNvPicPr>
@@ -29988,7 +29988,7 @@
                 <a:ea typeface="Helvetica" pitchFamily="34" charset="-122"/>
                 <a:cs typeface="Helvetica" pitchFamily="34" charset="-120"/>
               </a:rPr>
-              <a:t>HARDWARE FIREWALL</a:t>
+              <a:t>HYPER PROTECT CRYPTO SERVICES</a:t>
             </a:r>
             <a:endParaRPr lang="en-US" dirty="0"/>
           </a:p>
@@ -30021,7 +30021,7 @@
       </p:sp>
       <p:pic>
         <p:nvPicPr>
-          <p:cNvPr id="99" name="Object 98" descr="public/generated/icons/cf329950-0a3e-11e8-922e-f1366c6e1c83-hcx.png">    </p:cNvPr>
+          <p:cNvPr id="99" name="Object 98" descr="public/generated/icons/cf329950-0a3e-11e8-922e-f1366c6e1c83-hytrustcc.png">    </p:cNvPr>
           <p:cNvPicPr>
             <a:picLocks noChangeAspect="1"/>
           </p:cNvPicPr>
@@ -30077,7 +30077,7 @@
                 <a:ea typeface="Helvetica" pitchFamily="34" charset="-122"/>
                 <a:cs typeface="Helvetica" pitchFamily="34" charset="-120"/>
               </a:rPr>
-              <a:t>HCX</a:t>
+              <a:t>HYTRUST CLOUDCONTROL</a:t>
             </a:r>
             <a:endParaRPr lang="en-US" dirty="0"/>
           </a:p>
@@ -30110,7 +30110,7 @@
       </p:sp>
       <p:pic>
         <p:nvPicPr>
-          <p:cNvPr id="102" name="Object 101" descr="public/generated/icons/3dacb5a3-de4a-4361-9f39-0b6657f89f37.png">    </p:cNvPr>
+          <p:cNvPr id="102" name="Object 101" descr="public/generated/icons/cf329950-0a3e-11e8-922e-f1366c6e1c83-hytrustdc.png">    </p:cNvPr>
           <p:cNvPicPr>
             <a:picLocks noChangeAspect="1"/>
           </p:cNvPicPr>
@@ -30166,7 +30166,7 @@
                 <a:ea typeface="Helvetica" pitchFamily="34" charset="-122"/>
                 <a:cs typeface="Helvetica" pitchFamily="34" charset="-120"/>
               </a:rPr>
-              <a:t>HDM VMWARE WORKLOAD ANALYZER</a:t>
+              <a:t>HYTRUST DATACONTROL</a:t>
             </a:r>
             <a:endParaRPr lang="en-US" dirty="0"/>
           </a:p>
@@ -30199,7 +30199,7 @@
       </p:sp>
       <p:pic>
         <p:nvPicPr>
-          <p:cNvPr id="105" name="Object 104" descr="public/generated/icons/cf329950-0a3e-11e8-922e-f1366c6e1c83-horizon.png">    </p:cNvPr>
+          <p:cNvPr id="105" name="Object 104" descr="public/generated/icons/cf329950-0a3e-11e8-922e-f1366c6e1c83-hytrustkc.png">    </p:cNvPr>
           <p:cNvPicPr>
             <a:picLocks noChangeAspect="1"/>
           </p:cNvPicPr>
@@ -30255,7 +30255,7 @@
                 <a:ea typeface="Helvetica" pitchFamily="34" charset="-122"/>
                 <a:cs typeface="Helvetica" pitchFamily="34" charset="-120"/>
               </a:rPr>
-              <a:t>HORIZON 7</a:t>
+              <a:t>HYTRUST KEYCONTROL</a:t>
             </a:r>
             <a:endParaRPr lang="en-US" dirty="0"/>
           </a:p>
@@ -30288,7 +30288,7 @@
       </p:sp>
       <p:pic>
         <p:nvPicPr>
-          <p:cNvPr id="108" name="Object 107" descr="public/generated/icons/fa329acf-f9b6-fa9f-f37e-ad72d0b6a783.png">    </p:cNvPr>
+          <p:cNvPr id="108" name="Object 107" descr="public/generated/icons/c1d5aa90-2cab-11ef-bc36-b3feacb6d8d5.png">    </p:cNvPr>
           <p:cNvPicPr>
             <a:picLocks noChangeAspect="1"/>
           </p:cNvPicPr>
@@ -30344,7 +30344,7 @@
                 <a:ea typeface="Helvetica" pitchFamily="34" charset="-122"/>
                 <a:cs typeface="Helvetica" pitchFamily="34" charset="-120"/>
               </a:rPr>
-              <a:t>HYBRID CLOUD INFRASTRUCTURE AS A SERVICE</a:t>
+              <a:t>I MANAGED ON POWER VIRTUAL SERVER</a:t>
             </a:r>
             <a:endParaRPr lang="en-US" dirty="0"/>
           </a:p>
@@ -30410,7 +30410,7 @@
       </p:sp>
       <p:pic>
         <p:nvPicPr>
-          <p:cNvPr id="3" name="Object 2" descr="public/generated/icons/d589492e-6ac0-4a11-9c28-a157851c8f68.png">    </p:cNvPr>
+          <p:cNvPr id="3" name="Object 2" descr="public/generated/icons/is.image.png">    </p:cNvPr>
           <p:cNvPicPr>
             <a:picLocks noChangeAspect="1"/>
           </p:cNvPicPr>
@@ -30466,7 +30466,7 @@
                 <a:ea typeface="Helvetica" pitchFamily="34" charset="-122"/>
                 <a:cs typeface="Helvetica" pitchFamily="34" charset="-120"/>
               </a:rPr>
-              <a:t>HYPER PROTECT CRYPTO SERVICES</a:t>
+              <a:t>IMAGE SERVICE FOR VPC</a:t>
             </a:r>
             <a:endParaRPr lang="en-US" dirty="0"/>
           </a:p>
@@ -30499,7 +30499,7 @@
       </p:sp>
       <p:pic>
         <p:nvPicPr>
-          <p:cNvPr id="6" name="Object 5" descr="public/generated/icons/986f2197-9f9a-44f4-9463-f17ec64c6729.png">    </p:cNvPr>
+          <p:cNvPr id="6" name="Object 5" descr="public/generated/icons/is.metadata.png">    </p:cNvPr>
           <p:cNvPicPr>
             <a:picLocks noChangeAspect="1"/>
           </p:cNvPicPr>
@@ -30555,7 +30555,7 @@
                 <a:ea typeface="Helvetica" pitchFamily="34" charset="-122"/>
                 <a:cs typeface="Helvetica" pitchFamily="34" charset="-120"/>
               </a:rPr>
-              <a:t>HYPER PROTECT VIRTUAL SERVER FOR CLASSIC</a:t>
+              <a:t>INSTANCE METADATA FOR VPC</a:t>
             </a:r>
             <a:endParaRPr lang="en-US" dirty="0"/>
           </a:p>
@@ -30588,7 +30588,7 @@
       </p:sp>
       <p:pic>
         <p:nvPicPr>
-          <p:cNvPr id="9" name="Object 8" descr="public/generated/icons/cf329950-0a3e-11e8-922e-f1366c6e1c83-hytrustcc.png">    </p:cNvPr>
+          <p:cNvPr id="9" name="Object 8" descr="public/generated/icons/75874a60-cb12-11e7-948e-37ac098eb1b9.png">    </p:cNvPr>
           <p:cNvPicPr>
             <a:picLocks noChangeAspect="1"/>
           </p:cNvPicPr>
@@ -30644,7 +30644,7 @@
                 <a:ea typeface="Helvetica" pitchFamily="34" charset="-122"/>
                 <a:cs typeface="Helvetica" pitchFamily="34" charset="-120"/>
               </a:rPr>
-              <a:t>HYTRUST CLOUDCONTROL</a:t>
+              <a:t>INTERNET SERVICES</a:t>
             </a:r>
             <a:endParaRPr lang="en-US" dirty="0"/>
           </a:p>
@@ -30677,7 +30677,7 @@
       </p:sp>
       <p:pic>
         <p:nvPicPr>
-          <p:cNvPr id="12" name="Object 11" descr="public/generated/icons/cf329950-0a3e-11e8-922e-f1366c6e1c83-hytrustdc.png">    </p:cNvPr>
+          <p:cNvPr id="12" name="Object 11" descr="public/generated/icons/12.png">    </p:cNvPr>
           <p:cNvPicPr>
             <a:picLocks noChangeAspect="1"/>
           </p:cNvPicPr>
@@ -30733,7 +30733,7 @@
                 <a:ea typeface="Helvetica" pitchFamily="34" charset="-122"/>
                 <a:cs typeface="Helvetica" pitchFamily="34" charset="-120"/>
               </a:rPr>
-              <a:t>HYTRUST DATACONTROL</a:t>
+              <a:t>IPSEC VPN</a:t>
             </a:r>
             <a:endParaRPr lang="en-US" dirty="0"/>
           </a:p>
@@ -30766,7 +30766,7 @@
       </p:sp>
       <p:pic>
         <p:nvPicPr>
-          <p:cNvPr id="15" name="Object 14" descr="public/generated/icons/cf329950-0a3e-11e8-922e-f1366c6e1c83-hytrustkc.png">    </p:cNvPr>
+          <p:cNvPr id="15" name="Object 14" descr="public/generated/icons/035145f0-2cac-4505-59e9-2e363d08d5aa.png">    </p:cNvPr>
           <p:cNvPicPr>
             <a:picLocks noChangeAspect="1"/>
           </p:cNvPicPr>
@@ -30822,7 +30822,7 @@
                 <a:ea typeface="Helvetica" pitchFamily="34" charset="-122"/>
                 <a:cs typeface="Helvetica" pitchFamily="34" charset="-120"/>
               </a:rPr>
-              <a:t>HYTRUST KEYCONTROL</a:t>
+              <a:t>JUNIPER VSRX</a:t>
             </a:r>
             <a:endParaRPr lang="en-US" dirty="0"/>
           </a:p>
@@ -30855,7 +30855,7 @@
       </p:sp>
       <p:pic>
         <p:nvPicPr>
-          <p:cNvPr id="18" name="Object 17" descr="public/generated/icons/c1d5aa90-2cab-11ef-bc36-b3feacb6d8d5.png">    </p:cNvPr>
+          <p:cNvPr id="18" name="Object 17" descr="public/generated/icons/ee41347f-b18e-4ca6-bf80-b5467c63f9a6.png">    </p:cNvPr>
           <p:cNvPicPr>
             <a:picLocks noChangeAspect="1"/>
           </p:cNvPicPr>
@@ -30911,7 +30911,7 @@
                 <a:ea typeface="Helvetica" pitchFamily="34" charset="-122"/>
                 <a:cs typeface="Helvetica" pitchFamily="34" charset="-120"/>
               </a:rPr>
-              <a:t>I MANAGED ON POWER VIRTUAL SERVER</a:t>
+              <a:t>KEY PROTECT</a:t>
             </a:r>
             <a:endParaRPr lang="en-US" dirty="0"/>
           </a:p>
@@ -30944,7 +30944,7 @@
       </p:sp>
       <p:pic>
         <p:nvPicPr>
-          <p:cNvPr id="21" name="Object 20" descr="public/generated/icons/is.image.png">    </p:cNvPr>
+          <p:cNvPr id="21" name="Object 20" descr="public/generated/icons/cf329950-0a3e-11e8-922e-f1366c6e1c83-kmipadapter.png">    </p:cNvPr>
           <p:cNvPicPr>
             <a:picLocks noChangeAspect="1"/>
           </p:cNvPicPr>
@@ -31000,7 +31000,7 @@
                 <a:ea typeface="Helvetica" pitchFamily="34" charset="-122"/>
                 <a:cs typeface="Helvetica" pitchFamily="34" charset="-120"/>
               </a:rPr>
-              <a:t>IMAGE SERVICE FOR VPC</a:t>
+              <a:t>KMIP FOR VMWARE</a:t>
             </a:r>
             <a:endParaRPr lang="en-US" dirty="0"/>
           </a:p>
@@ -31033,7 +31033,7 @@
       </p:sp>
       <p:pic>
         <p:nvPicPr>
-          <p:cNvPr id="24" name="Object 23" descr="public/generated/icons/is.metadata.png">    </p:cNvPr>
+          <p:cNvPr id="24" name="Object 23" descr="public/generated/icons/983ea9a2-0fec-4021-8b70-8da5373394e5.png">    </p:cNvPr>
           <p:cNvPicPr>
             <a:picLocks noChangeAspect="1"/>
           </p:cNvPicPr>
@@ -31089,7 +31089,7 @@
                 <a:ea typeface="Helvetica" pitchFamily="34" charset="-122"/>
                 <a:cs typeface="Helvetica" pitchFamily="34" charset="-120"/>
               </a:rPr>
-              <a:t>INSTANCE METADATA FOR VPC</a:t>
+              <a:t>KNOWLEDGE STUDIO</a:t>
             </a:r>
             <a:endParaRPr lang="en-US" dirty="0"/>
           </a:p>
@@ -31122,7 +31122,7 @@
       </p:sp>
       <p:pic>
         <p:nvPicPr>
-          <p:cNvPr id="27" name="Object 26" descr="public/generated/icons/75874a60-cb12-11e7-948e-37ac098eb1b9.png">    </p:cNvPr>
+          <p:cNvPr id="27" name="Object 26" descr="public/generated/icons/a8f89634-261c-4832-8257-b25e04787988.png">    </p:cNvPr>
           <p:cNvPicPr>
             <a:picLocks noChangeAspect="1"/>
           </p:cNvPicPr>
@@ -31178,7 +31178,7 @@
                 <a:ea typeface="Helvetica" pitchFamily="34" charset="-122"/>
                 <a:cs typeface="Helvetica" pitchFamily="34" charset="-120"/>
               </a:rPr>
-              <a:t>INTERNET SERVICES</a:t>
+              <a:t>KOMPRISE ELASTIC DATA MIGRATION</a:t>
             </a:r>
             <a:endParaRPr lang="en-US" dirty="0"/>
           </a:p>
@@ -31211,7 +31211,7 @@
       </p:sp>
       <p:pic>
         <p:nvPicPr>
-          <p:cNvPr id="30" name="Object 29" descr="public/generated/icons/12.png">    </p:cNvPr>
+          <p:cNvPr id="30" name="Object 29" descr="public/generated/icons/f1fa7442-9ee0-4e27-94c2-0cb3776a0a0a.png">    </p:cNvPr>
           <p:cNvPicPr>
             <a:picLocks noChangeAspect="1"/>
           </p:cNvPicPr>
@@ -31267,7 +31267,7 @@
                 <a:ea typeface="Helvetica" pitchFamily="34" charset="-122"/>
                 <a:cs typeface="Helvetica" pitchFamily="34" charset="-120"/>
               </a:rPr>
-              <a:t>IPSEC VPN</a:t>
+              <a:t>KOMPRISE INTELLIGENT DATA MANAGEMENT SUITE</a:t>
             </a:r>
             <a:endParaRPr lang="en-US" dirty="0"/>
           </a:p>
@@ -31300,7 +31300,7 @@
       </p:sp>
       <p:pic>
         <p:nvPicPr>
-          <p:cNvPr id="33" name="Object 32" descr="public/generated/icons/035145f0-2cac-4505-59e9-2e363d08d5aa.png">    </p:cNvPr>
+          <p:cNvPr id="33" name="Object 32" descr="public/generated/icons/containers-kubernetes.png">    </p:cNvPr>
           <p:cNvPicPr>
             <a:picLocks noChangeAspect="1"/>
           </p:cNvPicPr>
@@ -31356,7 +31356,7 @@
                 <a:ea typeface="Helvetica" pitchFamily="34" charset="-122"/>
                 <a:cs typeface="Helvetica" pitchFamily="34" charset="-120"/>
               </a:rPr>
-              <a:t>JUNIPER VSRX</a:t>
+              <a:t>KUBERNETES SERVICE</a:t>
             </a:r>
             <a:endParaRPr lang="en-US" dirty="0"/>
           </a:p>
@@ -31389,7 +31389,7 @@
       </p:sp>
       <p:pic>
         <p:nvPicPr>
-          <p:cNvPr id="36" name="Object 35" descr="public/generated/icons/ee41347f-b18e-4ca6-bf80-b5467c63f9a6.png">    </p:cNvPr>
+          <p:cNvPr id="36" name="Object 35" descr="public/generated/icons/is.load-balancer.png">    </p:cNvPr>
           <p:cNvPicPr>
             <a:picLocks noChangeAspect="1"/>
           </p:cNvPicPr>
@@ -31445,7 +31445,7 @@
                 <a:ea typeface="Helvetica" pitchFamily="34" charset="-122"/>
                 <a:cs typeface="Helvetica" pitchFamily="34" charset="-120"/>
               </a:rPr>
-              <a:t>KEY PROTECT</a:t>
+              <a:t>LOAD BALANCER FOR VPC</a:t>
             </a:r>
             <a:endParaRPr lang="en-US" dirty="0"/>
           </a:p>
@@ -31478,7 +31478,7 @@
       </p:sp>
       <p:pic>
         <p:nvPicPr>
-          <p:cNvPr id="39" name="Object 38" descr="public/generated/icons/cf329950-0a3e-11e8-922e-f1366c6e1c83-kmipadapter.png">    </p:cNvPr>
+          <p:cNvPr id="39" name="Object 38" descr="public/generated/icons/9349854b-eb46-427f-8ef6-687d601c9eda.png">    </p:cNvPr>
           <p:cNvPicPr>
             <a:picLocks noChangeAspect="1"/>
           </p:cNvPicPr>
@@ -31534,7 +31534,7 @@
                 <a:ea typeface="Helvetica" pitchFamily="34" charset="-122"/>
                 <a:cs typeface="Helvetica" pitchFamily="34" charset="-120"/>
               </a:rPr>
-              <a:t>KMIP FOR VMWARE</a:t>
+              <a:t>LYVE DATA TRANSFER SERVICES</a:t>
             </a:r>
             <a:endParaRPr lang="en-US" dirty="0"/>
           </a:p>
@@ -31567,7 +31567,7 @@
       </p:sp>
       <p:pic>
         <p:nvPicPr>
-          <p:cNvPr id="42" name="Object 41" descr="public/generated/icons/983ea9a2-0fec-4021-8b70-8da5373394e5.png">    </p:cNvPr>
+          <p:cNvPr id="42" name="Object 41" descr="public/generated/icons/cf329950-0a3e-11e8-922e-f1366c6e1c83-managedveeam.png">    </p:cNvPr>
           <p:cNvPicPr>
             <a:picLocks noChangeAspect="1"/>
           </p:cNvPicPr>
@@ -31623,7 +31623,7 @@
                 <a:ea typeface="Helvetica" pitchFamily="34" charset="-122"/>
                 <a:cs typeface="Helvetica" pitchFamily="34" charset="-120"/>
               </a:rPr>
-              <a:t>KNOWLEDGE STUDIO</a:t>
+              <a:t>MANAGED BACKUP SERVICES</a:t>
             </a:r>
             <a:endParaRPr lang="en-US" dirty="0"/>
           </a:p>
@@ -31656,7 +31656,7 @@
       </p:sp>
       <p:pic>
         <p:nvPicPr>
-          <p:cNvPr id="45" name="Object 44" descr="public/generated/icons/a8f89634-261c-4832-8257-b25e04787988.png">    </p:cNvPr>
+          <p:cNvPr id="45" name="Object 44" descr="public/generated/icons/cf329950-0a3e-11e8-922e-f1366c6e1c83-managedzerto.png">    </p:cNvPr>
           <p:cNvPicPr>
             <a:picLocks noChangeAspect="1"/>
           </p:cNvPicPr>
@@ -31712,7 +31712,7 @@
                 <a:ea typeface="Helvetica" pitchFamily="34" charset="-122"/>
                 <a:cs typeface="Helvetica" pitchFamily="34" charset="-120"/>
               </a:rPr>
-              <a:t>KOMPRISE ELASTIC DATA MIGRATION</a:t>
+              <a:t>MANAGED DISASTER RECOVERY SERVICES</a:t>
             </a:r>
             <a:endParaRPr lang="en-US" dirty="0"/>
           </a:p>
@@ -31745,7 +31745,7 @@
       </p:sp>
       <p:pic>
         <p:nvPicPr>
-          <p:cNvPr id="48" name="Object 47" descr="public/generated/icons/f1fa7442-9ee0-4e27-94c2-0cb3776a0a0a.png">    </p:cNvPr>
+          <p:cNvPr id="48" name="Object 47" descr="public/generated/icons/cfb3c3da-7b1f-0879-f414-f367da218488.png">    </p:cNvPr>
           <p:cNvPicPr>
             <a:picLocks noChangeAspect="1"/>
           </p:cNvPicPr>
@@ -31801,7 +31801,7 @@
                 <a:ea typeface="Helvetica" pitchFamily="34" charset="-122"/>
                 <a:cs typeface="Helvetica" pitchFamily="34" charset="-120"/>
               </a:rPr>
-              <a:t>KOMPRISE INTELLIGENT DATA MANAGEMENT SUITE</a:t>
+              <a:t>MANAGED NETWORK SECURITY SERVICES</a:t>
             </a:r>
             <a:endParaRPr lang="en-US" dirty="0"/>
           </a:p>
@@ -31834,7 +31834,7 @@
       </p:sp>
       <p:pic>
         <p:nvPicPr>
-          <p:cNvPr id="51" name="Object 50" descr="public/generated/icons/containers-kubernetes.png">    </p:cNvPr>
+          <p:cNvPr id="51" name="Object 50" descr="public/generated/icons/cf329950-0a3e-11e8-922e-f1366c6e1c83-imi.png">    </p:cNvPr>
           <p:cNvPicPr>
             <a:picLocks noChangeAspect="1"/>
           </p:cNvPicPr>
@@ -31890,7 +31890,7 @@
                 <a:ea typeface="Helvetica" pitchFamily="34" charset="-122"/>
                 <a:cs typeface="Helvetica" pitchFamily="34" charset="-120"/>
               </a:rPr>
-              <a:t>KUBERNETES SERVICE</a:t>
+              <a:t>MANAGED VMWARE SERVICES</a:t>
             </a:r>
             <a:endParaRPr lang="en-US" dirty="0"/>
           </a:p>
@@ -31923,7 +31923,7 @@
       </p:sp>
       <p:pic>
         <p:nvPicPr>
-          <p:cNvPr id="54" name="Object 53" descr="public/generated/icons/is.load-balancer.png">    </p:cNvPr>
+          <p:cNvPr id="54" name="Object 53" descr="public/generated/icons/14bd30e0-8921-11e9-a2c5-13fceaf553c0.png">    </p:cNvPr>
           <p:cNvPicPr>
             <a:picLocks noChangeAspect="1"/>
           </p:cNvPicPr>
@@ -31979,7 +31979,7 @@
                 <a:ea typeface="Helvetica" pitchFamily="34" charset="-122"/>
                 <a:cs typeface="Helvetica" pitchFamily="34" charset="-120"/>
               </a:rPr>
-              <a:t>LOAD BALANCER FOR VPC</a:t>
+              <a:t>MATCH 360 WITH WATSON</a:t>
             </a:r>
             <a:endParaRPr lang="en-US" dirty="0"/>
           </a:p>
@@ -32012,7 +32012,7 @@
       </p:sp>
       <p:pic>
         <p:nvPicPr>
-          <p:cNvPr id="57" name="Object 56" descr="public/generated/icons/9349854b-eb46-427f-8ef6-687d601c9eda.png">    </p:cNvPr>
+          <p:cNvPr id="57" name="Object 56" descr="public/generated/icons/messages-for-rabbitmq.png">    </p:cNvPr>
           <p:cNvPicPr>
             <a:picLocks noChangeAspect="1"/>
           </p:cNvPicPr>
@@ -32068,7 +32068,7 @@
                 <a:ea typeface="Helvetica" pitchFamily="34" charset="-122"/>
                 <a:cs typeface="Helvetica" pitchFamily="34" charset="-120"/>
               </a:rPr>
-              <a:t>LYVE DATA TRANSFER SERVICES</a:t>
+              <a:t>MESSAGES FOR RABBITMQ</a:t>
             </a:r>
             <a:endParaRPr lang="en-US" dirty="0"/>
           </a:p>
@@ -32101,7 +32101,7 @@
       </p:sp>
       <p:pic>
         <p:nvPicPr>
-          <p:cNvPr id="60" name="Object 59" descr="public/generated/icons/cf329950-0a3e-11e8-922e-f1366c6e1c83-managedveeam.png">    </p:cNvPr>
+          <p:cNvPr id="60" name="Object 59" descr="public/generated/icons/d4000551-49ff-4868-9e05-f863e60fad3a.png">    </p:cNvPr>
           <p:cNvPicPr>
             <a:picLocks noChangeAspect="1"/>
           </p:cNvPicPr>
@@ -32157,7 +32157,7 @@
                 <a:ea typeface="Helvetica" pitchFamily="34" charset="-122"/>
                 <a:cs typeface="Helvetica" pitchFamily="34" charset="-120"/>
               </a:rPr>
-              <a:t>MANAGED BACKUP SERVICES</a:t>
+              <a:t>MINIO</a:t>
             </a:r>
             <a:endParaRPr lang="en-US" dirty="0"/>
           </a:p>
@@ -32190,7 +32190,7 @@
       </p:sp>
       <p:pic>
         <p:nvPicPr>
-          <p:cNvPr id="63" name="Object 62" descr="public/generated/icons/cf329950-0a3e-11e8-922e-f1366c6e1c83-managedzerto.png">    </p:cNvPr>
+          <p:cNvPr id="63" name="Object 62" descr="public/generated/icons/9d9545b4-b866-4c1b-9fc0-39273aef5bb0.png">    </p:cNvPr>
           <p:cNvPicPr>
             <a:picLocks noChangeAspect="1"/>
           </p:cNvPicPr>
@@ -32246,7 +32246,7 @@
                 <a:ea typeface="Helvetica" pitchFamily="34" charset="-122"/>
                 <a:cs typeface="Helvetica" pitchFamily="34" charset="-120"/>
               </a:rPr>
-              <a:t>MANAGED DISASTER RECOVERY SERVICES</a:t>
+              <a:t>MONO-X ONE FOR POWERVS</a:t>
             </a:r>
             <a:endParaRPr lang="en-US" dirty="0"/>
           </a:p>
@@ -32279,7 +32279,7 @@
       </p:sp>
       <p:pic>
         <p:nvPicPr>
-          <p:cNvPr id="66" name="Object 65" descr="public/generated/icons/cfb3c3da-7b1f-0879-f414-f367da218488.png">    </p:cNvPr>
+          <p:cNvPr id="66" name="Object 65" descr="public/generated/icons/01037c41-adce-4bb5-8b45-0c06004916c4.png">    </p:cNvPr>
           <p:cNvPicPr>
             <a:picLocks noChangeAspect="1"/>
           </p:cNvPicPr>
@@ -32335,7 +32335,7 @@
                 <a:ea typeface="Helvetica" pitchFamily="34" charset="-122"/>
                 <a:cs typeface="Helvetica" pitchFamily="34" charset="-120"/>
               </a:rPr>
-              <a:t>MANAGED NETWORK SECURITY SERVICES</a:t>
+              <a:t>MQ</a:t>
             </a:r>
             <a:endParaRPr lang="en-US" dirty="0"/>
           </a:p>
@@ -32368,7 +32368,7 @@
       </p:sp>
       <p:pic>
         <p:nvPicPr>
-          <p:cNvPr id="69" name="Object 68" descr="public/generated/icons/cf329950-0a3e-11e8-922e-f1366c6e1c83-imi.png">    </p:cNvPr>
+          <p:cNvPr id="69" name="Object 68" descr="public/generated/icons/is.snapshot-consistency-group.png">    </p:cNvPr>
           <p:cNvPicPr>
             <a:picLocks noChangeAspect="1"/>
           </p:cNvPicPr>
@@ -32424,7 +32424,7 @@
                 <a:ea typeface="Helvetica" pitchFamily="34" charset="-122"/>
                 <a:cs typeface="Helvetica" pitchFamily="34" charset="-120"/>
               </a:rPr>
-              <a:t>MANAGED VMWARE SERVICES</a:t>
+              <a:t>MULTI VOLUME SNAPSHOTS FOR VPC</a:t>
             </a:r>
             <a:endParaRPr lang="en-US" dirty="0"/>
           </a:p>
@@ -32457,7 +32457,7 @@
       </p:sp>
       <p:pic>
         <p:nvPicPr>
-          <p:cNvPr id="72" name="Object 71" descr="public/generated/icons/14bd30e0-8921-11e9-a2c5-13fceaf553c0.png">    </p:cNvPr>
+          <p:cNvPr id="72" name="Object 71" descr="public/generated/icons/bb6393bc-7d81-446b-9728-61b704f6eca5.png">    </p:cNvPr>
           <p:cNvPicPr>
             <a:picLocks noChangeAspect="1"/>
           </p:cNvPicPr>
@@ -32513,7 +32513,7 @@
                 <a:ea typeface="Helvetica" pitchFamily="34" charset="-122"/>
                 <a:cs typeface="Helvetica" pitchFamily="34" charset="-120"/>
               </a:rPr>
-              <a:t>MATCH 360 WITH WATSON</a:t>
+              <a:t>NATURAL LANGUAGE UNDERSTANDING</a:t>
             </a:r>
             <a:endParaRPr lang="en-US" dirty="0"/>
           </a:p>
@@ -32546,7 +32546,7 @@
       </p:sp>
       <p:pic>
         <p:nvPicPr>
-          <p:cNvPr id="75" name="Object 74" descr="public/generated/icons/messages-for-rabbitmq.png">    </p:cNvPr>
+          <p:cNvPr id="75" name="Object 74" descr="public/generated/icons/cf329950-0a3e-11e8-922e-f1366c6e1c83-netapp.png">    </p:cNvPr>
           <p:cNvPicPr>
             <a:picLocks noChangeAspect="1"/>
           </p:cNvPicPr>
@@ -32602,7 +32602,7 @@
                 <a:ea typeface="Helvetica" pitchFamily="34" charset="-122"/>
                 <a:cs typeface="Helvetica" pitchFamily="34" charset="-120"/>
               </a:rPr>
-              <a:t>MESSAGES FOR RABBITMQ</a:t>
+              <a:t>NETAPP ONTAP SELECT</a:t>
             </a:r>
             <a:endParaRPr lang="en-US" dirty="0"/>
           </a:p>
@@ -32635,7 +32635,7 @@
       </p:sp>
       <p:pic>
         <p:nvPicPr>
-          <p:cNvPr id="78" name="Object 77" descr="public/generated/icons/d4000551-49ff-4868-9e05-f863e60fad3a.png">    </p:cNvPr>
+          <p:cNvPr id="78" name="Object 77" descr="public/generated/icons/cc42cff0-b19b-11eb-9a66-c717766c1d30.png">    </p:cNvPr>
           <p:cNvPicPr>
             <a:picLocks noChangeAspect="1"/>
           </p:cNvPicPr>
@@ -32691,7 +32691,7 @@
                 <a:ea typeface="Helvetica" pitchFamily="34" charset="-122"/>
                 <a:cs typeface="Helvetica" pitchFamily="34" charset="-120"/>
               </a:rPr>
-              <a:t>MINIO</a:t>
+              <a:t>NETEZZA PERFORMANCE SERVER</a:t>
             </a:r>
             <a:endParaRPr lang="en-US" dirty="0"/>
           </a:p>
@@ -32724,7 +32724,7 @@
       </p:sp>
       <p:pic>
         <p:nvPicPr>
-          <p:cNvPr id="81" name="Object 80" descr="public/generated/icons/9d9545b4-b866-4c1b-9fc0-39273aef5bb0.png">    </p:cNvPr>
+          <p:cNvPr id="81" name="Object 80" descr="public/generated/icons/is.network-acl.png">    </p:cNvPr>
           <p:cNvPicPr>
             <a:picLocks noChangeAspect="1"/>
           </p:cNvPicPr>
@@ -32780,7 +32780,7 @@
                 <a:ea typeface="Helvetica" pitchFamily="34" charset="-122"/>
                 <a:cs typeface="Helvetica" pitchFamily="34" charset="-120"/>
               </a:rPr>
-              <a:t>MONO-X ONE FOR POWERVS</a:t>
+              <a:t>NETWORK ACL</a:t>
             </a:r>
             <a:endParaRPr lang="en-US" dirty="0"/>
           </a:p>
@@ -32813,7 +32813,7 @@
       </p:sp>
       <p:pic>
         <p:nvPicPr>
-          <p:cNvPr id="84" name="Object 83" descr="public/generated/icons/01037c41-adce-4bb5-8b45-0c06004916c4.png">    </p:cNvPr>
+          <p:cNvPr id="84" name="Object 83" descr="public/generated/icons/d97bd0c3-a8e5-4f3d-b925-16380e039a9a.png">    </p:cNvPr>
           <p:cNvPicPr>
             <a:picLocks noChangeAspect="1"/>
           </p:cNvPicPr>
@@ -32869,7 +32869,7 @@
                 <a:ea typeface="Helvetica" pitchFamily="34" charset="-122"/>
                 <a:cs typeface="Helvetica" pitchFamily="34" charset="-120"/>
               </a:rPr>
-              <a:t>MQ</a:t>
+              <a:t>NEURALSEEK</a:t>
             </a:r>
             <a:endParaRPr lang="en-US" dirty="0"/>
           </a:p>
@@ -32902,7 +32902,7 @@
       </p:sp>
       <p:pic>
         <p:nvPicPr>
-          <p:cNvPr id="87" name="Object 86" descr="public/generated/icons/is.snapshot-consistency-group.png">    </p:cNvPr>
+          <p:cNvPr id="87" name="Object 86" descr="public/generated/icons/266c5178-8d88-40a9-966f-ea9f775bab05.png">    </p:cNvPr>
           <p:cNvPicPr>
             <a:picLocks noChangeAspect="1"/>
           </p:cNvPicPr>
@@ -32958,7 +32958,7 @@
                 <a:ea typeface="Helvetica" pitchFamily="34" charset="-122"/>
                 <a:cs typeface="Helvetica" pitchFamily="34" charset="-120"/>
               </a:rPr>
-              <a:t>MULTI VOLUME SNAPSHOTS FOR VPC</a:t>
+              <a:t>NEURALSEEK PROFESSIONAL SERVICES</a:t>
             </a:r>
             <a:endParaRPr lang="en-US" dirty="0"/>
           </a:p>
@@ -32991,7 +32991,7 @@
       </p:sp>
       <p:pic>
         <p:nvPicPr>
-          <p:cNvPr id="90" name="Object 89" descr="public/generated/icons/bb6393bc-7d81-446b-9728-61b704f6eca5.png">    </p:cNvPr>
+          <p:cNvPr id="90" name="Object 89" descr="public/generated/icons/466091c0-9b8d-11eb-8f8c-91e95378d441.png">    </p:cNvPr>
           <p:cNvPicPr>
             <a:picLocks noChangeAspect="1"/>
           </p:cNvPicPr>
@@ -33047,7 +33047,7 @@
                 <a:ea typeface="Helvetica" pitchFamily="34" charset="-122"/>
                 <a:cs typeface="Helvetica" pitchFamily="34" charset="-120"/>
               </a:rPr>
-              <a:t>NATURAL LANGUAGE UNDERSTANDING</a:t>
+              <a:t>OPENPAGES</a:t>
             </a:r>
             <a:endParaRPr lang="en-US" dirty="0"/>
           </a:p>
@@ -33080,7 +33080,7 @@
       </p:sp>
       <p:pic>
         <p:nvPicPr>
-          <p:cNvPr id="93" name="Object 92" descr="public/generated/icons/cf329950-0a3e-11e8-922e-f1366c6e1c83-netapp.png">    </p:cNvPr>
+          <p:cNvPr id="93" name="Object 92" descr="public/generated/icons/2f756420-434f-11e8-ae40-6bdd72502abc.png">    </p:cNvPr>
           <p:cNvPicPr>
             <a:picLocks noChangeAspect="1"/>
           </p:cNvPicPr>
@@ -33136,7 +33136,7 @@
                 <a:ea typeface="Helvetica" pitchFamily="34" charset="-122"/>
                 <a:cs typeface="Helvetica" pitchFamily="34" charset="-120"/>
               </a:rPr>
-              <a:t>NETAPP ONTAP SELECT</a:t>
+              <a:t>PARTNER WITH TECHNOLOGY EXPERT LABS</a:t>
             </a:r>
             <a:endParaRPr lang="en-US" dirty="0"/>
           </a:p>
@@ -33169,7 +33169,7 @@
       </p:sp>
       <p:pic>
         <p:nvPicPr>
-          <p:cNvPr id="96" name="Object 95" descr="public/generated/icons/cc42cff0-b19b-11eb-9a66-c717766c1d30.png">    </p:cNvPr>
+          <p:cNvPr id="96" name="Object 95" descr="public/generated/icons/bb6229f0-e632-11ee-ae26-5d6d9ba99eec.png">    </p:cNvPr>
           <p:cNvPicPr>
             <a:picLocks noChangeAspect="1"/>
           </p:cNvPicPr>
@@ -33225,7 +33225,7 @@
                 <a:ea typeface="Helvetica" pitchFamily="34" charset="-122"/>
                 <a:cs typeface="Helvetica" pitchFamily="34" charset="-120"/>
               </a:rPr>
-              <a:t>NETEZZA PERFORMANCE SERVER</a:t>
+              <a:t>PARTNER WITH TECHNOLOGY EXPERT LABS - BUILD IBM STORAGE PROTECT FOR POWERVS</a:t>
             </a:r>
             <a:endParaRPr lang="en-US" dirty="0"/>
           </a:p>
@@ -33258,7 +33258,7 @@
       </p:sp>
       <p:pic>
         <p:nvPicPr>
-          <p:cNvPr id="99" name="Object 98" descr="public/generated/icons/is.network-acl.png">    </p:cNvPr>
+          <p:cNvPr id="99" name="Object 98" descr="public/generated/icons/f0ea1510-e632-11ee-acb6-4d13e7035de5.png">    </p:cNvPr>
           <p:cNvPicPr>
             <a:picLocks noChangeAspect="1"/>
           </p:cNvPicPr>
@@ -33314,7 +33314,7 @@
                 <a:ea typeface="Helvetica" pitchFamily="34" charset="-122"/>
                 <a:cs typeface="Helvetica" pitchFamily="34" charset="-120"/>
               </a:rPr>
-              <a:t>NETWORK ACL</a:t>
+              <a:t>PARTNER WITH TECHNOLOGY EXPERT LABS - BUILD SAP HANA STARTER EDITION</a:t>
             </a:r>
             <a:endParaRPr lang="en-US" dirty="0"/>
           </a:p>
@@ -33347,7 +33347,7 @@
       </p:sp>
       <p:pic>
         <p:nvPicPr>
-          <p:cNvPr id="102" name="Object 101" descr="public/generated/icons/d97bd0c3-a8e5-4f3d-b925-16380e039a9a.png">    </p:cNvPr>
+          <p:cNvPr id="102" name="Object 101" descr="public/generated/icons/339a87f0-e633-11ee-acb6-4d13e7035de5.png">    </p:cNvPr>
           <p:cNvPicPr>
             <a:picLocks noChangeAspect="1"/>
           </p:cNvPicPr>
@@ -33403,7 +33403,7 @@
                 <a:ea typeface="Helvetica" pitchFamily="34" charset="-122"/>
                 <a:cs typeface="Helvetica" pitchFamily="34" charset="-120"/>
               </a:rPr>
-              <a:t>NEURALSEEK</a:t>
+              <a:t>PARTNER WITH TECHNOLOGY EXPERT LABS - MIGRATE WORKLOADS TO IBM POWER VIRTUAL SERVER</a:t>
             </a:r>
             <a:endParaRPr lang="en-US" dirty="0"/>
           </a:p>
@@ -33436,7 +33436,7 @@
       </p:sp>
       <p:pic>
         <p:nvPicPr>
-          <p:cNvPr id="105" name="Object 104" descr="public/generated/icons/266c5178-8d88-40a9-966f-ea9f775bab05.png">    </p:cNvPr>
+          <p:cNvPr id="105" name="Object 104" descr="public/generated/icons/is.placement-group.png">    </p:cNvPr>
           <p:cNvPicPr>
             <a:picLocks noChangeAspect="1"/>
           </p:cNvPicPr>
@@ -33492,7 +33492,7 @@
                 <a:ea typeface="Helvetica" pitchFamily="34" charset="-122"/>
                 <a:cs typeface="Helvetica" pitchFamily="34" charset="-120"/>
               </a:rPr>
-              <a:t>NEURALSEEK PROFESSIONAL SERVICES</a:t>
+              <a:t>PLACEMENT GROUPS FOR VPC</a:t>
             </a:r>
             <a:endParaRPr lang="en-US" dirty="0"/>
           </a:p>
@@ -33525,7 +33525,7 @@
       </p:sp>
       <p:pic>
         <p:nvPicPr>
-          <p:cNvPr id="108" name="Object 107" descr="public/generated/icons/466091c0-9b8d-11eb-8f8c-91e95378d441.png">    </p:cNvPr>
+          <p:cNvPr id="108" name="Object 107" descr="public/generated/icons/41690130-a4e8-11ea-94c3-d72a57643c7d.png">    </p:cNvPr>
           <p:cNvPicPr>
             <a:picLocks noChangeAspect="1"/>
           </p:cNvPicPr>
@@ -33581,7 +33581,7 @@
                 <a:ea typeface="Helvetica" pitchFamily="34" charset="-122"/>
                 <a:cs typeface="Helvetica" pitchFamily="34" charset="-120"/>
               </a:rPr>
-              <a:t>OPENPAGES</a:t>
+              <a:t>PLANNING ANALYTICS</a:t>
             </a:r>
             <a:endParaRPr lang="en-US" dirty="0"/>
           </a:p>
@@ -33647,7 +33647,7 @@
       </p:sp>
       <p:pic>
         <p:nvPicPr>
-          <p:cNvPr id="3" name="Object 2" descr="public/generated/icons/2f756420-434f-11e8-ae40-6bdd72502abc.png">    </p:cNvPr>
+          <p:cNvPr id="3" name="Object 2" descr="public/generated/icons/d666f360-66d1-11e9-85ef-a19427301a8c.png">    </p:cNvPr>
           <p:cNvPicPr>
             <a:picLocks noChangeAspect="1"/>
           </p:cNvPicPr>
@@ -33703,7 +33703,7 @@
                 <a:ea typeface="Helvetica" pitchFamily="34" charset="-122"/>
                 <a:cs typeface="Helvetica" pitchFamily="34" charset="-120"/>
               </a:rPr>
-              <a:t>PARTNER WITH TECHNOLOGY EXPERT LABS</a:t>
+              <a:t>PORTWORX ENTERPRISE</a:t>
             </a:r>
             <a:endParaRPr lang="en-US" dirty="0"/>
           </a:p>
@@ -33736,7 +33736,7 @@
       </p:sp>
       <p:pic>
         <p:nvPicPr>
-          <p:cNvPr id="6" name="Object 5" descr="public/generated/icons/bb6229f0-e632-11ee-ae26-5d6d9ba99eec.png">    </p:cNvPr>
+          <p:cNvPr id="6" name="Object 5" descr="public/generated/icons/7b2cdb0e-ad91-4fd7-97c0-5398874ec27b.png">    </p:cNvPr>
           <p:cNvPicPr>
             <a:picLocks noChangeAspect="1"/>
           </p:cNvPicPr>
@@ -33792,7 +33792,7 @@
                 <a:ea typeface="Helvetica" pitchFamily="34" charset="-122"/>
                 <a:cs typeface="Helvetica" pitchFamily="34" charset="-120"/>
               </a:rPr>
-              <a:t>PARTNER WITH TECHNOLOGY EXPERT LABS - BUILD IBM STORAGE PROTECT FOR POWERVS</a:t>
+              <a:t>POWER I MIGRATE 23 SERVICES</a:t>
             </a:r>
             <a:endParaRPr lang="en-US" dirty="0"/>
           </a:p>
@@ -33825,7 +33825,7 @@
       </p:sp>
       <p:pic>
         <p:nvPicPr>
-          <p:cNvPr id="9" name="Object 8" descr="public/generated/icons/f0ea1510-e632-11ee-acb6-4d13e7035de5.png">    </p:cNvPr>
+          <p:cNvPr id="9" name="Object 8" descr="public/generated/icons/9828699d-dda7-4022-839b-c8e1e8b7d9d8.png">    </p:cNvPr>
           <p:cNvPicPr>
             <a:picLocks noChangeAspect="1"/>
           </p:cNvPicPr>
@@ -33881,7 +33881,7 @@
                 <a:ea typeface="Helvetica" pitchFamily="34" charset="-122"/>
                 <a:cs typeface="Helvetica" pitchFamily="34" charset="-120"/>
               </a:rPr>
-              <a:t>PARTNER WITH TECHNOLOGY EXPERT LABS - BUILD SAP HANA STARTER EDITION</a:t>
+              <a:t>POWER I MIGRATE WHILE ACTIVE SERVICES</a:t>
             </a:r>
             <a:endParaRPr lang="en-US" dirty="0"/>
           </a:p>
@@ -33914,7 +33914,7 @@
       </p:sp>
       <p:pic>
         <p:nvPicPr>
-          <p:cNvPr id="12" name="Object 11" descr="public/generated/icons/339a87f0-e633-11ee-acb6-4d13e7035de5.png">    </p:cNvPr>
+          <p:cNvPr id="12" name="Object 11" descr="public/generated/icons/power-iaas.workspace.png">    </p:cNvPr>
           <p:cNvPicPr>
             <a:picLocks noChangeAspect="1"/>
           </p:cNvPicPr>
@@ -33970,7 +33970,7 @@
                 <a:ea typeface="Helvetica" pitchFamily="34" charset="-122"/>
                 <a:cs typeface="Helvetica" pitchFamily="34" charset="-120"/>
               </a:rPr>
-              <a:t>PARTNER WITH TECHNOLOGY EXPERT LABS - MIGRATE WORKLOADS TO IBM POWER VIRTUAL SERVER</a:t>
+              <a:t>POWER VIRTUAL SERVER</a:t>
             </a:r>
             <a:endParaRPr lang="en-US" dirty="0"/>
           </a:p>
@@ -34003,7 +34003,7 @@
       </p:sp>
       <p:pic>
         <p:nvPicPr>
-          <p:cNvPr id="15" name="Object 14" descr="public/generated/icons/is.placement-group.png">    </p:cNvPr>
+          <p:cNvPr id="15" name="Object 14" descr="public/generated/icons/power-iaas.dedicated-host.png">    </p:cNvPr>
           <p:cNvPicPr>
             <a:picLocks noChangeAspect="1"/>
           </p:cNvPicPr>
@@ -34059,7 +34059,7 @@
                 <a:ea typeface="Helvetica" pitchFamily="34" charset="-122"/>
                 <a:cs typeface="Helvetica" pitchFamily="34" charset="-120"/>
               </a:rPr>
-              <a:t>PLACEMENT GROUPS FOR VPC</a:t>
+              <a:t>POWER VIRTUAL SERVER DEDICATED HOST</a:t>
             </a:r>
             <a:endParaRPr lang="en-US" dirty="0"/>
           </a:p>
@@ -34092,7 +34092,7 @@
       </p:sp>
       <p:pic>
         <p:nvPicPr>
-          <p:cNvPr id="18" name="Object 17" descr="public/generated/icons/41690130-a4e8-11ea-94c3-d72a57643c7d.png">    </p:cNvPr>
+          <p:cNvPr id="18" name="Object 17" descr="public/generated/icons/208072a0-7978-11ef-b369-0733120a414f.png">    </p:cNvPr>
           <p:cNvPicPr>
             <a:picLocks noChangeAspect="1"/>
           </p:cNvPicPr>
@@ -34148,7 +34148,7 @@
                 <a:ea typeface="Helvetica" pitchFamily="34" charset="-122"/>
                 <a:cs typeface="Helvetica" pitchFamily="34" charset="-120"/>
               </a:rPr>
-              <a:t>PLANNING ANALYTICS</a:t>
+              <a:t>POWER VIRTUAL SERVER DR AUTOMATION</a:t>
             </a:r>
             <a:endParaRPr lang="en-US" dirty="0"/>
           </a:p>
@@ -34181,7 +34181,7 @@
       </p:sp>
       <p:pic>
         <p:nvPicPr>
-          <p:cNvPr id="21" name="Object 20" descr="public/generated/icons/d666f360-66d1-11e9-85ef-a19427301a8c.png">    </p:cNvPr>
+          <p:cNvPr id="21" name="Object 20" descr="public/generated/icons/power-iaas.image.png">    </p:cNvPr>
           <p:cNvPicPr>
             <a:picLocks noChangeAspect="1"/>
           </p:cNvPicPr>
@@ -34237,7 +34237,7 @@
                 <a:ea typeface="Helvetica" pitchFamily="34" charset="-122"/>
                 <a:cs typeface="Helvetica" pitchFamily="34" charset="-120"/>
               </a:rPr>
-              <a:t>PORTWORX ENTERPRISE</a:t>
+              <a:t>POWER VIRTUAL SERVER IMAGE</a:t>
             </a:r>
             <a:endParaRPr lang="en-US" dirty="0"/>
           </a:p>
@@ -34270,7 +34270,7 @@
       </p:sp>
       <p:pic>
         <p:nvPicPr>
-          <p:cNvPr id="24" name="Object 23" descr="public/generated/icons/7b2cdb0e-ad91-4fd7-97c0-5398874ec27b.png">    </p:cNvPr>
+          <p:cNvPr id="24" name="Object 23" descr="public/generated/icons/power-iaas.network.png">    </p:cNvPr>
           <p:cNvPicPr>
             <a:picLocks noChangeAspect="1"/>
           </p:cNvPicPr>
@@ -34326,7 +34326,7 @@
                 <a:ea typeface="Helvetica" pitchFamily="34" charset="-122"/>
                 <a:cs typeface="Helvetica" pitchFamily="34" charset="-120"/>
               </a:rPr>
-              <a:t>POWER I MIGRATE 23 SERVICES</a:t>
+              <a:t>POWER VIRTUAL SERVER NETWORK</a:t>
             </a:r>
             <a:endParaRPr lang="en-US" dirty="0"/>
           </a:p>
@@ -34359,7 +34359,7 @@
       </p:sp>
       <p:pic>
         <p:nvPicPr>
-          <p:cNvPr id="27" name="Object 26" descr="public/generated/icons/9828699d-dda7-4022-839b-c8e1e8b7d9d8.png">    </p:cNvPr>
+          <p:cNvPr id="27" name="Object 26" descr="public/generated/icons/power-iaas.network-address-group.png">    </p:cNvPr>
           <p:cNvPicPr>
             <a:picLocks noChangeAspect="1"/>
           </p:cNvPicPr>
@@ -34415,7 +34415,7 @@
                 <a:ea typeface="Helvetica" pitchFamily="34" charset="-122"/>
                 <a:cs typeface="Helvetica" pitchFamily="34" charset="-120"/>
               </a:rPr>
-              <a:t>POWER I MIGRATE WHILE ACTIVE SERVICES</a:t>
+              <a:t>POWER VIRTUAL SERVER NETWORK ADDRESS GROUP</a:t>
             </a:r>
             <a:endParaRPr lang="en-US" dirty="0"/>
           </a:p>
@@ -34448,7 +34448,7 @@
       </p:sp>
       <p:pic>
         <p:nvPicPr>
-          <p:cNvPr id="30" name="Object 29" descr="public/generated/icons/power-iaas.workspace.png">    </p:cNvPr>
+          <p:cNvPr id="30" name="Object 29" descr="public/generated/icons/power-iaas.network-interface.png">    </p:cNvPr>
           <p:cNvPicPr>
             <a:picLocks noChangeAspect="1"/>
           </p:cNvPicPr>
@@ -34504,7 +34504,7 @@
                 <a:ea typeface="Helvetica" pitchFamily="34" charset="-122"/>
                 <a:cs typeface="Helvetica" pitchFamily="34" charset="-120"/>
               </a:rPr>
-              <a:t>POWER VIRTUAL SERVER</a:t>
+              <a:t>POWER VIRTUAL SERVER NETWORK INTERFACE</a:t>
             </a:r>
             <a:endParaRPr lang="en-US" dirty="0"/>
           </a:p>
@@ -34537,7 +34537,7 @@
       </p:sp>
       <p:pic>
         <p:nvPicPr>
-          <p:cNvPr id="33" name="Object 32" descr="public/generated/icons/power-iaas.dedicated-host.png">    </p:cNvPr>
+          <p:cNvPr id="33" name="Object 32" descr="public/generated/icons/power-iaas.network-security-group.png">    </p:cNvPr>
           <p:cNvPicPr>
             <a:picLocks noChangeAspect="1"/>
           </p:cNvPicPr>
@@ -34593,7 +34593,7 @@
                 <a:ea typeface="Helvetica" pitchFamily="34" charset="-122"/>
                 <a:cs typeface="Helvetica" pitchFamily="34" charset="-120"/>
               </a:rPr>
-              <a:t>POWER VIRTUAL SERVER DEDICATED HOST</a:t>
+              <a:t>POWER VIRTUAL SERVER NETWORK SECURITY GROUP</a:t>
             </a:r>
             <a:endParaRPr lang="en-US" dirty="0"/>
           </a:p>
@@ -34626,7 +34626,7 @@
       </p:sp>
       <p:pic>
         <p:nvPicPr>
-          <p:cNvPr id="36" name="Object 35" descr="public/generated/icons/208072a0-7978-11ef-b369-0733120a414f.png">    </p:cNvPr>
+          <p:cNvPr id="36" name="Object 35" descr="public/generated/icons/power-iaas.placement-group.png">    </p:cNvPr>
           <p:cNvPicPr>
             <a:picLocks noChangeAspect="1"/>
           </p:cNvPicPr>
@@ -34682,7 +34682,7 @@
                 <a:ea typeface="Helvetica" pitchFamily="34" charset="-122"/>
                 <a:cs typeface="Helvetica" pitchFamily="34" charset="-120"/>
               </a:rPr>
-              <a:t>POWER VIRTUAL SERVER DR AUTOMATION</a:t>
+              <a:t>POWER VIRTUAL SERVER PLACEMENT GROUP</a:t>
             </a:r>
             <a:endParaRPr lang="en-US" dirty="0"/>
           </a:p>
@@ -34715,7 +34715,7 @@
       </p:sp>
       <p:pic>
         <p:nvPicPr>
-          <p:cNvPr id="39" name="Object 38" descr="public/generated/icons/power-iaas.image.png">    </p:cNvPr>
+          <p:cNvPr id="39" name="Object 38" descr="public/generated/icons/power-iaas.route.png">    </p:cNvPr>
           <p:cNvPicPr>
             <a:picLocks noChangeAspect="1"/>
           </p:cNvPicPr>
@@ -34771,7 +34771,7 @@
                 <a:ea typeface="Helvetica" pitchFamily="34" charset="-122"/>
                 <a:cs typeface="Helvetica" pitchFamily="34" charset="-120"/>
               </a:rPr>
-              <a:t>POWER VIRTUAL SERVER IMAGE</a:t>
+              <a:t>POWER VIRTUAL SERVER ROUTE</a:t>
             </a:r>
             <a:endParaRPr lang="en-US" dirty="0"/>
           </a:p>
@@ -34804,7 +34804,7 @@
       </p:sp>
       <p:pic>
         <p:nvPicPr>
-          <p:cNvPr id="42" name="Object 41" descr="public/generated/icons/power-iaas.network.png">    </p:cNvPr>
+          <p:cNvPr id="42" name="Object 41" descr="public/generated/icons/power-iaas.shared-processor-pool.png">    </p:cNvPr>
           <p:cNvPicPr>
             <a:picLocks noChangeAspect="1"/>
           </p:cNvPicPr>
@@ -34860,7 +34860,7 @@
                 <a:ea typeface="Helvetica" pitchFamily="34" charset="-122"/>
                 <a:cs typeface="Helvetica" pitchFamily="34" charset="-120"/>
               </a:rPr>
-              <a:t>POWER VIRTUAL SERVER NETWORK</a:t>
+              <a:t>POWER VIRTUAL SERVER SHARED PROCESSOR POOL</a:t>
             </a:r>
             <a:endParaRPr lang="en-US" dirty="0"/>
           </a:p>
@@ -34893,7 +34893,7 @@
       </p:sp>
       <p:pic>
         <p:nvPicPr>
-          <p:cNvPr id="45" name="Object 44" descr="public/generated/icons/power-iaas.network-address-group.png">    </p:cNvPr>
+          <p:cNvPr id="45" name="Object 44" descr="public/generated/icons/power-iaas.spp-placement-group.png">    </p:cNvPr>
           <p:cNvPicPr>
             <a:picLocks noChangeAspect="1"/>
           </p:cNvPicPr>
@@ -34949,7 +34949,7 @@
                 <a:ea typeface="Helvetica" pitchFamily="34" charset="-122"/>
                 <a:cs typeface="Helvetica" pitchFamily="34" charset="-120"/>
               </a:rPr>
-              <a:t>POWER VIRTUAL SERVER NETWORK ADDRESS GROUP</a:t>
+              <a:t>POWER VIRTUAL SERVER SHARED PROCESSOR POOL PLACEMENT GROUP</a:t>
             </a:r>
             <a:endParaRPr lang="en-US" dirty="0"/>
           </a:p>
@@ -34982,7 +34982,7 @@
       </p:sp>
       <p:pic>
         <p:nvPicPr>
-          <p:cNvPr id="48" name="Object 47" descr="public/generated/icons/power-iaas.network-interface.png">    </p:cNvPr>
+          <p:cNvPr id="48" name="Object 47" descr="public/generated/icons/power-iaas.snapshot.png">    </p:cNvPr>
           <p:cNvPicPr>
             <a:picLocks noChangeAspect="1"/>
           </p:cNvPicPr>
@@ -35038,7 +35038,7 @@
                 <a:ea typeface="Helvetica" pitchFamily="34" charset="-122"/>
                 <a:cs typeface="Helvetica" pitchFamily="34" charset="-120"/>
               </a:rPr>
-              <a:t>POWER VIRTUAL SERVER NETWORK INTERFACE</a:t>
+              <a:t>POWER VIRTUAL SERVER SNAPSHOT</a:t>
             </a:r>
             <a:endParaRPr lang="en-US" dirty="0"/>
           </a:p>
@@ -35071,7 +35071,7 @@
       </p:sp>
       <p:pic>
         <p:nvPicPr>
-          <p:cNvPr id="51" name="Object 50" descr="public/generated/icons/power-iaas.network-security-group.png">    </p:cNvPr>
+          <p:cNvPr id="51" name="Object 50" descr="public/generated/icons/power-iaas.pvm-instance.png">    </p:cNvPr>
           <p:cNvPicPr>
             <a:picLocks noChangeAspect="1"/>
           </p:cNvPicPr>
@@ -35127,7 +35127,7 @@
                 <a:ea typeface="Helvetica" pitchFamily="34" charset="-122"/>
                 <a:cs typeface="Helvetica" pitchFamily="34" charset="-120"/>
               </a:rPr>
-              <a:t>POWER VIRTUAL SERVER NETWORK SECURITY GROUP</a:t>
+              <a:t>POWER VIRTUAL SERVER VIRTUAL MACHINE</a:t>
             </a:r>
             <a:endParaRPr lang="en-US" dirty="0"/>
           </a:p>
@@ -35160,7 +35160,7 @@
       </p:sp>
       <p:pic>
         <p:nvPicPr>
-          <p:cNvPr id="54" name="Object 53" descr="public/generated/icons/power-iaas.placement-group.png">    </p:cNvPr>
+          <p:cNvPr id="54" name="Object 53" descr="public/generated/icons/power-iaas.volume.png">    </p:cNvPr>
           <p:cNvPicPr>
             <a:picLocks noChangeAspect="1"/>
           </p:cNvPicPr>
@@ -35216,7 +35216,7 @@
                 <a:ea typeface="Helvetica" pitchFamily="34" charset="-122"/>
                 <a:cs typeface="Helvetica" pitchFamily="34" charset="-120"/>
               </a:rPr>
-              <a:t>POWER VIRTUAL SERVER PLACEMENT GROUP</a:t>
+              <a:t>POWER VIRTUAL SERVER VOLUME</a:t>
             </a:r>
             <a:endParaRPr lang="en-US" dirty="0"/>
           </a:p>
@@ -35249,7 +35249,7 @@
       </p:sp>
       <p:pic>
         <p:nvPicPr>
-          <p:cNvPr id="57" name="Object 56" descr="public/generated/icons/power-iaas.route.png">    </p:cNvPr>
+          <p:cNvPr id="57" name="Object 56" descr="public/generated/icons/b260dfd6-9b79-4377-be6d-146a5cb59be8.png">    </p:cNvPr>
           <p:cNvPicPr>
             <a:picLocks noChangeAspect="1"/>
           </p:cNvPicPr>
@@ -35305,7 +35305,7 @@
                 <a:ea typeface="Helvetica" pitchFamily="34" charset="-122"/>
                 <a:cs typeface="Helvetica" pitchFamily="34" charset="-120"/>
               </a:rPr>
-              <a:t>POWER VIRTUAL SERVER ROUTE</a:t>
+              <a:t>POWERVS MIGRATION AS A SERVICE</a:t>
             </a:r>
             <a:endParaRPr lang="en-US" dirty="0"/>
           </a:p>
@@ -35338,7 +35338,7 @@
       </p:sp>
       <p:pic>
         <p:nvPicPr>
-          <p:cNvPr id="60" name="Object 59" descr="public/generated/icons/power-iaas.shared-processor-pool.png">    </p:cNvPr>
+          <p:cNvPr id="60" name="Object 59" descr="public/generated/icons/is.private-path-service-gateway.png">    </p:cNvPr>
           <p:cNvPicPr>
             <a:picLocks noChangeAspect="1"/>
           </p:cNvPicPr>
@@ -35394,7 +35394,7 @@
                 <a:ea typeface="Helvetica" pitchFamily="34" charset="-122"/>
                 <a:cs typeface="Helvetica" pitchFamily="34" charset="-120"/>
               </a:rPr>
-              <a:t>POWER VIRTUAL SERVER SHARED PROCESSOR POOL</a:t>
+              <a:t>PRIVATE PATH SERVICE FOR VPC</a:t>
             </a:r>
             <a:endParaRPr lang="en-US" dirty="0"/>
           </a:p>
@@ -35427,7 +35427,7 @@
       </p:sp>
       <p:pic>
         <p:nvPicPr>
-          <p:cNvPr id="63" name="Object 62" descr="public/generated/icons/power-iaas.spp-placement-group.png">    </p:cNvPr>
+          <p:cNvPr id="63" name="Object 62" descr="public/generated/icons/91a901ac-fb7d-9b6e-eb25-14e75a20c4c2.png">    </p:cNvPr>
           <p:cNvPicPr>
             <a:picLocks noChangeAspect="1"/>
           </p:cNvPicPr>
@@ -35483,7 +35483,7 @@
                 <a:ea typeface="Helvetica" pitchFamily="34" charset="-122"/>
                 <a:cs typeface="Helvetica" pitchFamily="34" charset="-120"/>
               </a:rPr>
-              <a:t>POWER VIRTUAL SERVER SHARED PROCESSOR POOL PLACEMENT GROUP</a:t>
+              <a:t>PROFESSIONAL SERVICES FOR GOVERNMENT(ONLY AVAILABLE IN US)</a:t>
             </a:r>
             <a:endParaRPr lang="en-US" dirty="0"/>
           </a:p>
@@ -35516,7 +35516,7 @@
       </p:sp>
       <p:pic>
         <p:nvPicPr>
-          <p:cNvPr id="66" name="Object 65" descr="public/generated/icons/power-iaas.snapshot.png">    </p:cNvPr>
+          <p:cNvPr id="66" name="Object 65" descr="public/generated/icons/0f32e980-4197-4ad7-a484-e98f7c7424bf.png">    </p:cNvPr>
           <p:cNvPicPr>
             <a:picLocks noChangeAspect="1"/>
           </p:cNvPicPr>
@@ -35572,7 +35572,7 @@
                 <a:ea typeface="Helvetica" pitchFamily="34" charset="-122"/>
                 <a:cs typeface="Helvetica" pitchFamily="34" charset="-120"/>
               </a:rPr>
-              <a:t>POWER VIRTUAL SERVER SNAPSHOT</a:t>
+              <a:t>PROFI POWERVS SERVICE</a:t>
             </a:r>
             <a:endParaRPr lang="en-US" dirty="0"/>
           </a:p>
@@ -35605,7 +35605,7 @@
       </p:sp>
       <p:pic>
         <p:nvPicPr>
-          <p:cNvPr id="69" name="Object 68" descr="public/generated/icons/power-iaas.pvm-instance.png">    </p:cNvPr>
+          <p:cNvPr id="69" name="Object 68" descr="public/generated/icons/7c03a06c-f1bb-46f8-84d8-9378432b2804.png">    </p:cNvPr>
           <p:cNvPicPr>
             <a:picLocks noChangeAspect="1"/>
           </p:cNvPicPr>
@@ -35661,7 +35661,7 @@
                 <a:ea typeface="Helvetica" pitchFamily="34" charset="-122"/>
                 <a:cs typeface="Helvetica" pitchFamily="34" charset="-120"/>
               </a:rPr>
-              <a:t>POWER VIRTUAL SERVER VIRTUAL MACHINE</a:t>
+              <a:t>PROTECTIO DRAAS MANAGED SERVICE</a:t>
             </a:r>
             <a:endParaRPr lang="en-US" dirty="0"/>
           </a:p>
@@ -35694,7 +35694,7 @@
       </p:sp>
       <p:pic>
         <p:nvPicPr>
-          <p:cNvPr id="72" name="Object 71" descr="public/generated/icons/power-iaas.volume.png">    </p:cNvPr>
+          <p:cNvPr id="72" name="Object 71" descr="public/generated/icons/is.public-gateway.png">    </p:cNvPr>
           <p:cNvPicPr>
             <a:picLocks noChangeAspect="1"/>
           </p:cNvPicPr>
@@ -35750,7 +35750,7 @@
                 <a:ea typeface="Helvetica" pitchFamily="34" charset="-122"/>
                 <a:cs typeface="Helvetica" pitchFamily="34" charset="-120"/>
               </a:rPr>
-              <a:t>POWER VIRTUAL SERVER VOLUME</a:t>
+              <a:t>PUBLIC GATEWAY</a:t>
             </a:r>
             <a:endParaRPr lang="en-US" dirty="0"/>
           </a:p>
@@ -35783,7 +35783,7 @@
       </p:sp>
       <p:pic>
         <p:nvPicPr>
-          <p:cNvPr id="75" name="Object 74" descr="public/generated/icons/b260dfd6-9b79-4377-be6d-146a5cb59be8.png">    </p:cNvPr>
+          <p:cNvPr id="75" name="Object 74" descr="public/generated/icons/aa11a8b2-381e-4c1c-a232-2148f65c005f.png">    </p:cNvPr>
           <p:cNvPicPr>
             <a:picLocks noChangeAspect="1"/>
           </p:cNvPicPr>
@@ -35839,7 +35839,7 @@
                 <a:ea typeface="Helvetica" pitchFamily="34" charset="-122"/>
                 <a:cs typeface="Helvetica" pitchFamily="34" charset="-120"/>
               </a:rPr>
-              <a:t>POWERVS MIGRATION AS A SERVICE</a:t>
+              <a:t>PVS ONE MANAGED SERVICE</a:t>
             </a:r>
             <a:endParaRPr lang="en-US" dirty="0"/>
           </a:p>
@@ -35872,7 +35872,7 @@
       </p:sp>
       <p:pic>
         <p:nvPicPr>
-          <p:cNvPr id="78" name="Object 77" descr="public/generated/icons/is.private-path-service-gateway.png">    </p:cNvPr>
+          <p:cNvPr id="78" name="Object 77" descr="public/generated/icons/3eb2d5a0-24ff-11eb-9437-631d7272fff5.png">    </p:cNvPr>
           <p:cNvPicPr>
             <a:picLocks noChangeAspect="1"/>
           </p:cNvPicPr>
@@ -35928,7 +35928,7 @@
                 <a:ea typeface="Helvetica" pitchFamily="34" charset="-122"/>
                 <a:cs typeface="Helvetica" pitchFamily="34" charset="-120"/>
               </a:rPr>
-              <a:t>PRIVATE PATH SERVICE FOR VPC</a:t>
+              <a:t>PX-BACKUP FOR KUBERNETES</a:t>
             </a:r>
             <a:endParaRPr lang="en-US" dirty="0"/>
           </a:p>
@@ -35961,7 +35961,7 @@
       </p:sp>
       <p:pic>
         <p:nvPicPr>
-          <p:cNvPr id="81" name="Object 80" descr="public/generated/icons/91a901ac-fb7d-9b6e-eb25-14e75a20c4c2.png">    </p:cNvPr>
+          <p:cNvPr id="81" name="Object 80" descr="public/generated/icons/b6049020-80f4-11eb-a0f7-e35ec9b4054f.png">    </p:cNvPr>
           <p:cNvPicPr>
             <a:picLocks noChangeAspect="1"/>
           </p:cNvPicPr>
@@ -36017,7 +36017,7 @@
                 <a:ea typeface="Helvetica" pitchFamily="34" charset="-122"/>
                 <a:cs typeface="Helvetica" pitchFamily="34" charset="-120"/>
               </a:rPr>
-              <a:t>PROFESSIONAL SERVICES FOR GOVERNMENT(ONLY AVAILABLE IN US)</a:t>
+              <a:t>QISKIT RUNTIME</a:t>
             </a:r>
             <a:endParaRPr lang="en-US" dirty="0"/>
           </a:p>
@@ -36050,7 +36050,7 @@
       </p:sp>
       <p:pic>
         <p:nvPicPr>
-          <p:cNvPr id="84" name="Object 83" descr="public/generated/icons/0f32e980-4197-4ad7-a484-e98f7c7424bf.png">    </p:cNvPr>
+          <p:cNvPr id="84" name="Object 83" descr="public/generated/icons/cf5f8ac0-98f7-11e9-a40c-5b3c4bf3cc6d.png">    </p:cNvPr>
           <p:cNvPicPr>
             <a:picLocks noChangeAspect="1"/>
           </p:cNvPicPr>
@@ -36106,7 +36106,7 @@
                 <a:ea typeface="Helvetica" pitchFamily="34" charset="-122"/>
                 <a:cs typeface="Helvetica" pitchFamily="34" charset="-120"/>
               </a:rPr>
-              <a:t>PROFI POWERVS SERVICE</a:t>
+              <a:t>RAXAK PROTECT</a:t>
             </a:r>
             <a:endParaRPr lang="en-US" dirty="0"/>
           </a:p>
@@ -36139,7 +36139,7 @@
       </p:sp>
       <p:pic>
         <p:nvPicPr>
-          <p:cNvPr id="87" name="Object 86" descr="public/generated/icons/7c03a06c-f1bb-46f8-84d8-9378432b2804.png">    </p:cNvPr>
+          <p:cNvPr id="87" name="Object 86" descr="public/generated/icons/instructlab.png">    </p:cNvPr>
           <p:cNvPicPr>
             <a:picLocks noChangeAspect="1"/>
           </p:cNvPicPr>
@@ -36195,7 +36195,7 @@
                 <a:ea typeface="Helvetica" pitchFamily="34" charset="-122"/>
                 <a:cs typeface="Helvetica" pitchFamily="34" charset="-120"/>
               </a:rPr>
-              <a:t>PROTECTIO DRAAS MANAGED SERVICE</a:t>
+              <a:t>RED HAT AI INSTRUCTLAB</a:t>
             </a:r>
             <a:endParaRPr lang="en-US" dirty="0"/>
           </a:p>
@@ -36228,7 +36228,7 @@
       </p:sp>
       <p:pic>
         <p:nvPicPr>
-          <p:cNvPr id="90" name="Object 89" descr="public/generated/icons/is.public-gateway.png">    </p:cNvPr>
+          <p:cNvPr id="90" name="Object 89" descr="public/generated/icons/openshift.png">    </p:cNvPr>
           <p:cNvPicPr>
             <a:picLocks noChangeAspect="1"/>
           </p:cNvPicPr>
@@ -36284,7 +36284,7 @@
                 <a:ea typeface="Helvetica" pitchFamily="34" charset="-122"/>
                 <a:cs typeface="Helvetica" pitchFamily="34" charset="-120"/>
               </a:rPr>
-              <a:t>PUBLIC GATEWAY</a:t>
+              <a:t>RED HAT OPENSHIFT ON IBM CLOUD</a:t>
             </a:r>
             <a:endParaRPr lang="en-US" dirty="0"/>
           </a:p>
@@ -36317,7 +36317,7 @@
       </p:sp>
       <p:pic>
         <p:nvPicPr>
-          <p:cNvPr id="93" name="Object 92" descr="public/generated/icons/aa11a8b2-381e-4c1c-a232-2148f65c005f.png">    </p:cNvPr>
+          <p:cNvPr id="93" name="Object 92" descr="public/generated/icons/bd517bf0-88ba-11ea-a52e-91aeb42a4019.png">    </p:cNvPr>
           <p:cNvPicPr>
             <a:picLocks noChangeAspect="1"/>
           </p:cNvPicPr>
@@ -36373,7 +36373,7 @@
                 <a:ea typeface="Helvetica" pitchFamily="34" charset="-122"/>
                 <a:cs typeface="Helvetica" pitchFamily="34" charset="-120"/>
               </a:rPr>
-              <a:t>PVS ONE MANAGED SERVICE</a:t>
+              <a:t>SATELLITE</a:t>
             </a:r>
             <a:endParaRPr lang="en-US" dirty="0"/>
           </a:p>
@@ -36406,7 +36406,7 @@
       </p:sp>
       <p:pic>
         <p:nvPicPr>
-          <p:cNvPr id="96" name="Object 95" descr="public/generated/icons/3eb2d5a0-24ff-11eb-9437-631d7272fff5.png">    </p:cNvPr>
+          <p:cNvPr id="96" name="Object 95" descr="public/generated/icons/schematics.png">    </p:cNvPr>
           <p:cNvPicPr>
             <a:picLocks noChangeAspect="1"/>
           </p:cNvPicPr>
@@ -36462,7 +36462,7 @@
                 <a:ea typeface="Helvetica" pitchFamily="34" charset="-122"/>
                 <a:cs typeface="Helvetica" pitchFamily="34" charset="-120"/>
               </a:rPr>
-              <a:t>PX-BACKUP FOR KUBERNETES</a:t>
+              <a:t>SCHEMATICS</a:t>
             </a:r>
             <a:endParaRPr lang="en-US" dirty="0"/>
           </a:p>
@@ -36495,7 +36495,7 @@
       </p:sp>
       <p:pic>
         <p:nvPicPr>
-          <p:cNvPr id="99" name="Object 98" descr="public/generated/icons/b6049020-80f4-11eb-a0f7-e35ec9b4054f.png">    </p:cNvPr>
+          <p:cNvPr id="99" name="Object 98" descr="public/generated/icons/14.png">    </p:cNvPr>
           <p:cNvPicPr>
             <a:picLocks noChangeAspect="1"/>
           </p:cNvPicPr>
@@ -36551,7 +36551,7 @@
                 <a:ea typeface="Helvetica" pitchFamily="34" charset="-122"/>
                 <a:cs typeface="Helvetica" pitchFamily="34" charset="-120"/>
               </a:rPr>
-              <a:t>QISKIT RUNTIME</a:t>
+              <a:t>SECONDARY SUBNETS</a:t>
             </a:r>
             <a:endParaRPr lang="en-US" dirty="0"/>
           </a:p>
@@ -36584,7 +36584,7 @@
       </p:sp>
       <p:pic>
         <p:nvPicPr>
-          <p:cNvPr id="102" name="Object 101" descr="public/generated/icons/cf5f8ac0-98f7-11e9-a40c-5b3c4bf3cc6d.png">    </p:cNvPr>
+          <p:cNvPr id="102" name="Object 101" descr="public/generated/icons/ebc0cdb0-af2a-11ea-98c7-29e5db822649.png">    </p:cNvPr>
           <p:cNvPicPr>
             <a:picLocks noChangeAspect="1"/>
           </p:cNvPicPr>
@@ -36640,7 +36640,7 @@
                 <a:ea typeface="Helvetica" pitchFamily="34" charset="-122"/>
                 <a:cs typeface="Helvetica" pitchFamily="34" charset="-120"/>
               </a:rPr>
-              <a:t>RAXAK PROTECT</a:t>
+              <a:t>SECRETS MANAGER</a:t>
             </a:r>
             <a:endParaRPr lang="en-US" dirty="0"/>
           </a:p>
@@ -36673,7 +36673,7 @@
       </p:sp>
       <p:pic>
         <p:nvPicPr>
-          <p:cNvPr id="105" name="Object 104" descr="public/generated/icons/instructlab.png">    </p:cNvPr>
+          <p:cNvPr id="105" name="Object 104" descr="public/generated/icons/e831e900-82d6-11ec-95c5-c12c5a5d9687.png">    </p:cNvPr>
           <p:cNvPicPr>
             <a:picLocks noChangeAspect="1"/>
           </p:cNvPicPr>
@@ -36729,7 +36729,7 @@
                 <a:ea typeface="Helvetica" pitchFamily="34" charset="-122"/>
                 <a:cs typeface="Helvetica" pitchFamily="34" charset="-120"/>
               </a:rPr>
-              <a:t>RED HAT AI INSTRUCTLAB</a:t>
+              <a:t>SECURITY AND COMPLIANCE CENTER WORKLOAD PROTECTION</a:t>
             </a:r>
             <a:endParaRPr lang="en-US" dirty="0"/>
           </a:p>
@@ -36762,7 +36762,7 @@
       </p:sp>
       <p:pic>
         <p:nvPicPr>
-          <p:cNvPr id="108" name="Object 107" descr="public/generated/icons/openshift.png">    </p:cNvPr>
+          <p:cNvPr id="108" name="Object 107" descr="public/generated/icons/is.security-group.png">    </p:cNvPr>
           <p:cNvPicPr>
             <a:picLocks noChangeAspect="1"/>
           </p:cNvPicPr>
@@ -36818,7 +36818,7 @@
                 <a:ea typeface="Helvetica" pitchFamily="34" charset="-122"/>
                 <a:cs typeface="Helvetica" pitchFamily="34" charset="-120"/>
               </a:rPr>
-              <a:t>RED HAT OPENSHIFT ON IBM CLOUD</a:t>
+              <a:t>SECURITY GROUP FOR VPC</a:t>
             </a:r>
             <a:endParaRPr lang="en-US" dirty="0"/>
           </a:p>
@@ -36884,7 +36884,7 @@
       </p:sp>
       <p:pic>
         <p:nvPicPr>
-          <p:cNvPr id="3" name="Object 2" descr="public/generated/icons/bd517bf0-88ba-11ea-a52e-91aeb42a4019.png">    </p:cNvPr>
+          <p:cNvPr id="3" name="Object 2" descr="public/generated/icons/cf329950-0a3e-11e8-922e-f1366c6e1c83-vcstrial_dr.png">    </p:cNvPr>
           <p:cNvPicPr>
             <a:picLocks noChangeAspect="1"/>
           </p:cNvPicPr>
@@ -36940,7 +36940,7 @@
                 <a:ea typeface="Helvetica" pitchFamily="34" charset="-122"/>
                 <a:cs typeface="Helvetica" pitchFamily="34" charset="-120"/>
               </a:rPr>
-              <a:t>SATELLITE</a:t>
+              <a:t>SINGLE-NODE TRIAL FOR DATA PROTECTION AND DISASTER RECOVERY</a:t>
             </a:r>
             <a:endParaRPr lang="en-US" dirty="0"/>
           </a:p>
@@ -36973,7 +36973,7 @@
       </p:sp>
       <p:pic>
         <p:nvPicPr>
-          <p:cNvPr id="6" name="Object 5" descr="public/generated/icons/schematics.png">    </p:cNvPr>
+          <p:cNvPr id="6" name="Object 5" descr="public/generated/icons/cf329950-0a3e-11e8-922e-f1366c6e1c83-vcstrial.png">    </p:cNvPr>
           <p:cNvPicPr>
             <a:picLocks noChangeAspect="1"/>
           </p:cNvPicPr>
@@ -37029,7 +37029,7 @@
                 <a:ea typeface="Helvetica" pitchFamily="34" charset="-122"/>
                 <a:cs typeface="Helvetica" pitchFamily="34" charset="-120"/>
               </a:rPr>
-              <a:t>SCHEMATICS</a:t>
+              <a:t>SINGLE-NODE TRIAL FOR MIGRATION AND APP MODERNIZATION</a:t>
             </a:r>
             <a:endParaRPr lang="en-US" dirty="0"/>
           </a:p>
@@ -37062,7 +37062,7 @@
       </p:sp>
       <p:pic>
         <p:nvPicPr>
-          <p:cNvPr id="9" name="Object 8" descr="public/generated/icons/14.png">    </p:cNvPr>
+          <p:cNvPr id="9" name="Object 8" descr="public/generated/icons/cf329950-0a3e-11e8-922e-f1366c6e1c83-spplus.png">    </p:cNvPr>
           <p:cNvPicPr>
             <a:picLocks noChangeAspect="1"/>
           </p:cNvPicPr>
@@ -37118,7 +37118,7 @@
                 <a:ea typeface="Helvetica" pitchFamily="34" charset="-122"/>
                 <a:cs typeface="Helvetica" pitchFamily="34" charset="-120"/>
               </a:rPr>
-              <a:t>SECONDARY SUBNETS</a:t>
+              <a:t>SPECTRUM PROTECT PLUS</a:t>
             </a:r>
             <a:endParaRPr lang="en-US" dirty="0"/>
           </a:p>
@@ -37151,7 +37151,7 @@
       </p:sp>
       <p:pic>
         <p:nvPicPr>
-          <p:cNvPr id="12" name="Object 11" descr="public/generated/icons/ebc0cdb0-af2a-11ea-98c7-29e5db822649.png">    </p:cNvPr>
+          <p:cNvPr id="12" name="Object 11" descr="public/generated/icons/bc35fb8c-bc5b-431b-859e-3861771d5843.png">    </p:cNvPr>
           <p:cNvPicPr>
             <a:picLocks noChangeAspect="1"/>
           </p:cNvPicPr>
@@ -37207,7 +37207,7 @@
                 <a:ea typeface="Helvetica" pitchFamily="34" charset="-122"/>
                 <a:cs typeface="Helvetica" pitchFamily="34" charset="-120"/>
               </a:rPr>
-              <a:t>SECRETS MANAGER</a:t>
+              <a:t>SPEECH TO TEXT</a:t>
             </a:r>
             <a:endParaRPr lang="en-US" dirty="0"/>
           </a:p>
@@ -37240,7 +37240,7 @@
       </p:sp>
       <p:pic>
         <p:nvPicPr>
-          <p:cNvPr id="15" name="Object 14" descr="public/generated/icons/IBM_SecureGateway.png">    </p:cNvPr>
+          <p:cNvPr id="15" name="Object 14" descr="public/generated/icons/556153d0-5ad0-11e9-b7f9-41319ef22125.png">    </p:cNvPr>
           <p:cNvPicPr>
             <a:picLocks noChangeAspect="1"/>
           </p:cNvPicPr>
@@ -37296,7 +37296,7 @@
                 <a:ea typeface="Helvetica" pitchFamily="34" charset="-122"/>
                 <a:cs typeface="Helvetica" pitchFamily="34" charset="-120"/>
               </a:rPr>
-              <a:t>SECURE GATEWAY</a:t>
+              <a:t>SSH KEY FOR VPC</a:t>
             </a:r>
             <a:endParaRPr lang="en-US" dirty="0"/>
           </a:p>
@@ -37329,7 +37329,7 @@
       </p:sp>
       <p:pic>
         <p:nvPicPr>
-          <p:cNvPr id="18" name="Object 17" descr="public/generated/icons/e831e900-82d6-11ec-95c5-c12c5a5d9687.png">    </p:cNvPr>
+          <p:cNvPr id="18" name="Object 17" descr="public/generated/icons/19.png">    </p:cNvPr>
           <p:cNvPicPr>
             <a:picLocks noChangeAspect="1"/>
           </p:cNvPicPr>
@@ -37385,7 +37385,7 @@
                 <a:ea typeface="Helvetica" pitchFamily="34" charset="-122"/>
                 <a:cs typeface="Helvetica" pitchFamily="34" charset="-120"/>
               </a:rPr>
-              <a:t>SECURITY AND COMPLIANCE CENTER WORKLOAD PROTECTION</a:t>
+              <a:t>SSL CERTIFICATES</a:t>
             </a:r>
             <a:endParaRPr lang="en-US" dirty="0"/>
           </a:p>
@@ -37418,7 +37418,7 @@
       </p:sp>
       <p:pic>
         <p:nvPicPr>
-          <p:cNvPr id="21" name="Object 20" descr="public/generated/icons/is.security-group.png">    </p:cNvPr>
+          <p:cNvPr id="21" name="Object 20" descr="public/generated/icons/8aa72a57-b069-47e6-bf3f-8d1ced0051ed.png">    </p:cNvPr>
           <p:cNvPicPr>
             <a:picLocks noChangeAspect="1"/>
           </p:cNvPicPr>
@@ -37474,7 +37474,7 @@
                 <a:ea typeface="Helvetica" pitchFamily="34" charset="-122"/>
                 <a:cs typeface="Helvetica" pitchFamily="34" charset="-120"/>
               </a:rPr>
-              <a:t>SECURITY GROUP FOR VPC</a:t>
+              <a:t>STANDARD LIVE PAYMENT HSM SERVICE</a:t>
             </a:r>
             <a:endParaRPr lang="en-US" dirty="0"/>
           </a:p>
@@ -37507,7 +37507,7 @@
       </p:sp>
       <p:pic>
         <p:nvPicPr>
-          <p:cNvPr id="24" name="Object 23" descr="public/generated/icons/cf329950-0a3e-11e8-922e-f1366c6e1c83-vcstrial_dr.png">    </p:cNvPr>
+          <p:cNvPr id="24" name="Object 23" descr="public/generated/icons/c82e2968-02eb-487e-84f0-01cbd884b5c0.png">    </p:cNvPr>
           <p:cNvPicPr>
             <a:picLocks noChangeAspect="1"/>
           </p:cNvPicPr>
@@ -37563,7 +37563,7 @@
                 <a:ea typeface="Helvetica" pitchFamily="34" charset="-122"/>
                 <a:cs typeface="Helvetica" pitchFamily="34" charset="-120"/>
               </a:rPr>
-              <a:t>SINGLE-NODE TRIAL FOR DATA PROTECTION AND DISASTER RECOVERY</a:t>
+              <a:t>STAR VIRTUAL LEARNING PLATFORM (VLP)</a:t>
             </a:r>
             <a:endParaRPr lang="en-US" dirty="0"/>
           </a:p>
@@ -37596,7 +37596,7 @@
       </p:sp>
       <p:pic>
         <p:nvPicPr>
-          <p:cNvPr id="27" name="Object 26" descr="public/generated/icons/cf329950-0a3e-11e8-922e-f1366c6e1c83-vcstrial.png">    </p:cNvPr>
+          <p:cNvPr id="27" name="Object 26" descr="public/generated/icons/2bea02b0-c0a4-11ee-83aa-3171b0bf2976.png">    </p:cNvPr>
           <p:cNvPicPr>
             <a:picLocks noChangeAspect="1"/>
           </p:cNvPicPr>
@@ -37652,7 +37652,7 @@
                 <a:ea typeface="Helvetica" pitchFamily="34" charset="-122"/>
                 <a:cs typeface="Helvetica" pitchFamily="34" charset="-120"/>
               </a:rPr>
-              <a:t>SINGLE-NODE TRIAL FOR MIGRATION AND APP MODERNIZATION</a:t>
+              <a:t>STORAGE CEPH AS A SERVICE</a:t>
             </a:r>
             <a:endParaRPr lang="en-US" dirty="0"/>
           </a:p>
@@ -37685,7 +37685,7 @@
       </p:sp>
       <p:pic>
         <p:nvPicPr>
-          <p:cNvPr id="30" name="Object 29" descr="public/generated/icons/cf329950-0a3e-11e8-922e-f1366c6e1c83-spplus.png">    </p:cNvPr>
+          <p:cNvPr id="30" name="Object 29" descr="public/generated/icons/5acdbc42-8965-48f9-8a3c-1c728b6ed2c4.png">    </p:cNvPr>
           <p:cNvPicPr>
             <a:picLocks noChangeAspect="1"/>
           </p:cNvPicPr>
@@ -37741,7 +37741,7 @@
                 <a:ea typeface="Helvetica" pitchFamily="34" charset="-122"/>
                 <a:cs typeface="Helvetica" pitchFamily="34" charset="-120"/>
               </a:rPr>
-              <a:t>SPECTRUM PROTECT PLUS</a:t>
+              <a:t>STREAMING ANALYTICS</a:t>
             </a:r>
             <a:endParaRPr lang="en-US" dirty="0"/>
           </a:p>
@@ -37774,7 +37774,7 @@
       </p:sp>
       <p:pic>
         <p:nvPicPr>
-          <p:cNvPr id="33" name="Object 32" descr="public/generated/icons/bc35fb8c-bc5b-431b-859e-3861771d5843.png">    </p:cNvPr>
+          <p:cNvPr id="33" name="Object 32" descr="public/generated/icons/is.subnet.png">    </p:cNvPr>
           <p:cNvPicPr>
             <a:picLocks noChangeAspect="1"/>
           </p:cNvPicPr>
@@ -37830,7 +37830,7 @@
                 <a:ea typeface="Helvetica" pitchFamily="34" charset="-122"/>
                 <a:cs typeface="Helvetica" pitchFamily="34" charset="-120"/>
               </a:rPr>
-              <a:t>SPEECH TO TEXT</a:t>
+              <a:t>SUBNET</a:t>
             </a:r>
             <a:endParaRPr lang="en-US" dirty="0"/>
           </a:p>
@@ -37863,7 +37863,7 @@
       </p:sp>
       <p:pic>
         <p:nvPicPr>
-          <p:cNvPr id="36" name="Object 35" descr="public/generated/icons/556153d0-5ad0-11e9-b7f9-41319ef22125.png">    </p:cNvPr>
+          <p:cNvPr id="36" name="Object 35" descr="public/generated/icons/c3ef52e7-c978-4fd1-9982-e39084119336.png">    </p:cNvPr>
           <p:cNvPicPr>
             <a:picLocks noChangeAspect="1"/>
           </p:cNvPicPr>
@@ -37919,7 +37919,7 @@
                 <a:ea typeface="Helvetica" pitchFamily="34" charset="-122"/>
                 <a:cs typeface="Helvetica" pitchFamily="34" charset="-120"/>
               </a:rPr>
-              <a:t>SSH KEY FOR VPC</a:t>
+              <a:t>TAPESTRYX</a:t>
             </a:r>
             <a:endParaRPr lang="en-US" dirty="0"/>
           </a:p>
@@ -37952,7 +37952,7 @@
       </p:sp>
       <p:pic>
         <p:nvPicPr>
-          <p:cNvPr id="39" name="Object 38" descr="public/generated/icons/19.png">    </p:cNvPr>
+          <p:cNvPr id="39" name="Object 38" descr="public/generated/icons/4f2d2c90-caec-4916-b44b-8363479ab12a.png">    </p:cNvPr>
           <p:cNvPicPr>
             <a:picLocks noChangeAspect="1"/>
           </p:cNvPicPr>
@@ -38008,7 +38008,7 @@
                 <a:ea typeface="Helvetica" pitchFamily="34" charset="-122"/>
                 <a:cs typeface="Helvetica" pitchFamily="34" charset="-120"/>
               </a:rPr>
-              <a:t>SSL CERTIFICATES</a:t>
+              <a:t>TECHD PROFESSIONAL SERVICES</a:t>
             </a:r>
             <a:endParaRPr lang="en-US" dirty="0"/>
           </a:p>
@@ -38041,7 +38041,7 @@
       </p:sp>
       <p:pic>
         <p:nvPicPr>
-          <p:cNvPr id="42" name="Object 41" descr="public/generated/icons/8aa72a57-b069-47e6-bf3f-8d1ced0051ed.png">    </p:cNvPr>
+          <p:cNvPr id="42" name="Object 41" descr="public/generated/icons/282c1d79-9176-4597-9cff-941a8d6cfd4c.png">    </p:cNvPr>
           <p:cNvPicPr>
             <a:picLocks noChangeAspect="1"/>
           </p:cNvPicPr>
@@ -38097,7 +38097,7 @@
                 <a:ea typeface="Helvetica" pitchFamily="34" charset="-122"/>
                 <a:cs typeface="Helvetica" pitchFamily="34" charset="-120"/>
               </a:rPr>
-              <a:t>STANDARD LIVE PAYMENT HSM SERVICE</a:t>
+              <a:t>TEXT TO SPEECH</a:t>
             </a:r>
             <a:endParaRPr lang="en-US" dirty="0"/>
           </a:p>
@@ -38130,7 +38130,7 @@
       </p:sp>
       <p:pic>
         <p:nvPicPr>
-          <p:cNvPr id="45" name="Object 44" descr="public/generated/icons/c82e2968-02eb-487e-84f0-01cbd884b5c0.png">    </p:cNvPr>
+          <p:cNvPr id="45" name="Object 44" descr="public/generated/icons/e512e5f0-64fb-11e8-9c23-830c05b8b729.png">    </p:cNvPr>
           <p:cNvPicPr>
             <a:picLocks noChangeAspect="1"/>
           </p:cNvPicPr>
@@ -38186,7 +38186,7 @@
                 <a:ea typeface="Helvetica" pitchFamily="34" charset="-122"/>
                 <a:cs typeface="Helvetica" pitchFamily="34" charset="-120"/>
               </a:rPr>
-              <a:t>STAR VIRTUAL LEARNING PLATFORM (VLP)</a:t>
+              <a:t>TOOLCHAIN</a:t>
             </a:r>
             <a:endParaRPr lang="en-US" dirty="0"/>
           </a:p>
@@ -38219,7 +38219,7 @@
       </p:sp>
       <p:pic>
         <p:nvPicPr>
-          <p:cNvPr id="48" name="Object 47" descr="public/generated/icons/2bea02b0-c0a4-11ee-83aa-3171b0bf2976.png">    </p:cNvPr>
+          <p:cNvPr id="48" name="Object 47" descr="public/generated/icons/a0b5c5b4-cf45-4d10-ba8c-512126cf6e2c.png">    </p:cNvPr>
           <p:cNvPicPr>
             <a:picLocks noChangeAspect="1"/>
           </p:cNvPicPr>
@@ -38275,7 +38275,7 @@
                 <a:ea typeface="Helvetica" pitchFamily="34" charset="-122"/>
                 <a:cs typeface="Helvetica" pitchFamily="34" charset="-120"/>
               </a:rPr>
-              <a:t>STORAGE CEPH AS A SERVICE</a:t>
+              <a:t>TRADESCREEN</a:t>
             </a:r>
             <a:endParaRPr lang="en-US" dirty="0"/>
           </a:p>
@@ -38308,7 +38308,7 @@
       </p:sp>
       <p:pic>
         <p:nvPicPr>
-          <p:cNvPr id="51" name="Object 50" descr="public/generated/icons/5acdbc42-8965-48f9-8a3c-1c728b6ed2c4.png">    </p:cNvPr>
+          <p:cNvPr id="51" name="Object 50" descr="public/generated/icons/f38a4da0-c353-11e9-83b6-a36a57a97a06.png">    </p:cNvPr>
           <p:cNvPicPr>
             <a:picLocks noChangeAspect="1"/>
           </p:cNvPicPr>
@@ -38364,7 +38364,7 @@
                 <a:ea typeface="Helvetica" pitchFamily="34" charset="-122"/>
                 <a:cs typeface="Helvetica" pitchFamily="34" charset="-120"/>
               </a:rPr>
-              <a:t>STREAMING ANALYTICS</a:t>
+              <a:t>TRANSIT GATEWAY</a:t>
             </a:r>
             <a:endParaRPr lang="en-US" dirty="0"/>
           </a:p>
@@ -38397,7 +38397,7 @@
       </p:sp>
       <p:pic>
         <p:nvPicPr>
-          <p:cNvPr id="54" name="Object 53" descr="public/generated/icons/is.subnet.png">    </p:cNvPr>
+          <p:cNvPr id="54" name="Object 53" descr="public/generated/icons/vmware.directorsite.png">    </p:cNvPr>
           <p:cNvPicPr>
             <a:picLocks noChangeAspect="1"/>
           </p:cNvPicPr>
@@ -38453,7 +38453,7 @@
                 <a:ea typeface="Helvetica" pitchFamily="34" charset="-122"/>
                 <a:cs typeface="Helvetica" pitchFamily="34" charset="-120"/>
               </a:rPr>
-              <a:t>SUBNET</a:t>
+              <a:t>VCF AS A SERVICE - CLOUD DIRECTOR SITE</a:t>
             </a:r>
             <a:endParaRPr lang="en-US" dirty="0"/>
           </a:p>
@@ -38486,7 +38486,7 @@
       </p:sp>
       <p:pic>
         <p:nvPicPr>
-          <p:cNvPr id="57" name="Object 56" descr="public/generated/icons/c3ef52e7-c978-4fd1-9982-e39084119336.png">    </p:cNvPr>
+          <p:cNvPr id="57" name="Object 56" descr="public/generated/icons/vmware.usage-meter.png">    </p:cNvPr>
           <p:cNvPicPr>
             <a:picLocks noChangeAspect="1"/>
           </p:cNvPicPr>
@@ -38542,7 +38542,7 @@
                 <a:ea typeface="Helvetica" pitchFamily="34" charset="-122"/>
                 <a:cs typeface="Helvetica" pitchFamily="34" charset="-120"/>
               </a:rPr>
-              <a:t>TAPESTRYX</a:t>
+              <a:t>VCF AS A SERVICE - USAGE METER</a:t>
             </a:r>
             <a:endParaRPr lang="en-US" dirty="0"/>
           </a:p>
@@ -38575,7 +38575,7 @@
       </p:sp>
       <p:pic>
         <p:nvPicPr>
-          <p:cNvPr id="60" name="Object 59" descr="public/generated/icons/4f2d2c90-caec-4916-b44b-8363479ab12a.png">    </p:cNvPr>
+          <p:cNvPr id="60" name="Object 59" descr="public/generated/icons/vmware.vdc.png">    </p:cNvPr>
           <p:cNvPicPr>
             <a:picLocks noChangeAspect="1"/>
           </p:cNvPicPr>
@@ -38631,7 +38631,7 @@
                 <a:ea typeface="Helvetica" pitchFamily="34" charset="-122"/>
                 <a:cs typeface="Helvetica" pitchFamily="34" charset="-120"/>
               </a:rPr>
-              <a:t>TECHD PROFESSIONAL SERVICES</a:t>
+              <a:t>VCF AS A SERVICE - VIRTUAL DATA CENTER</a:t>
             </a:r>
             <a:endParaRPr lang="en-US" dirty="0"/>
           </a:p>
@@ -38664,7 +38664,7 @@
       </p:sp>
       <p:pic>
         <p:nvPicPr>
-          <p:cNvPr id="63" name="Object 62" descr="public/generated/icons/282c1d79-9176-4597-9cff-941a8d6cfd4c.png">    </p:cNvPr>
+          <p:cNvPr id="63" name="Object 62" descr="public/generated/icons/cf329950-0a3e-11e8-922e-f1366c6e1c83-veeam.png">    </p:cNvPr>
           <p:cNvPicPr>
             <a:picLocks noChangeAspect="1"/>
           </p:cNvPicPr>
@@ -38720,7 +38720,7 @@
                 <a:ea typeface="Helvetica" pitchFamily="34" charset="-122"/>
                 <a:cs typeface="Helvetica" pitchFamily="34" charset="-120"/>
               </a:rPr>
-              <a:t>TEXT TO SPEECH</a:t>
+              <a:t>VEEAM</a:t>
             </a:r>
             <a:endParaRPr lang="en-US" dirty="0"/>
           </a:p>
@@ -38753,7 +38753,7 @@
       </p:sp>
       <p:pic>
         <p:nvPicPr>
-          <p:cNvPr id="66" name="Object 65" descr="public/generated/icons/e512e5f0-64fb-11e8-9c23-830c05b8b729.png">    </p:cNvPr>
+          <p:cNvPr id="66" name="Object 65" descr="public/generated/icons/66644e80-f35a-11ee-923f-2fe367129617.png">    </p:cNvPr>
           <p:cNvPicPr>
             <a:picLocks noChangeAspect="1"/>
           </p:cNvPicPr>
@@ -38809,7 +38809,7 @@
                 <a:ea typeface="Helvetica" pitchFamily="34" charset="-122"/>
                 <a:cs typeface="Helvetica" pitchFamily="34" charset="-120"/>
               </a:rPr>
-              <a:t>TOOLCHAIN</a:t>
+              <a:t>VERIFY</a:t>
             </a:r>
             <a:endParaRPr lang="en-US" dirty="0"/>
           </a:p>
@@ -38842,7 +38842,7 @@
       </p:sp>
       <p:pic>
         <p:nvPicPr>
-          <p:cNvPr id="69" name="Object 68" descr="public/generated/icons/a0b5c5b4-cf45-4d10-ba8c-512126cf6e2c.png">    </p:cNvPr>
+          <p:cNvPr id="69" name="Object 68" descr="public/generated/icons/is.virtual-network-interface.png">    </p:cNvPr>
           <p:cNvPicPr>
             <a:picLocks noChangeAspect="1"/>
           </p:cNvPicPr>
@@ -38898,7 +38898,7 @@
                 <a:ea typeface="Helvetica" pitchFamily="34" charset="-122"/>
                 <a:cs typeface="Helvetica" pitchFamily="34" charset="-120"/>
               </a:rPr>
-              <a:t>TRADESCREEN</a:t>
+              <a:t>VIRTUAL NETWORK INTERFACE</a:t>
             </a:r>
             <a:endParaRPr lang="en-US" dirty="0"/>
           </a:p>
@@ -38931,7 +38931,7 @@
       </p:sp>
       <p:pic>
         <p:nvPicPr>
-          <p:cNvPr id="72" name="Object 71" descr="public/generated/icons/f38a4da0-c353-11e9-83b6-a36a57a97a06.png">    </p:cNvPr>
+          <p:cNvPr id="72" name="Object 71" descr="public/generated/icons/is.vpc.png">    </p:cNvPr>
           <p:cNvPicPr>
             <a:picLocks noChangeAspect="1"/>
           </p:cNvPicPr>
@@ -38987,7 +38987,7 @@
                 <a:ea typeface="Helvetica" pitchFamily="34" charset="-122"/>
                 <a:cs typeface="Helvetica" pitchFamily="34" charset="-120"/>
               </a:rPr>
-              <a:t>TRANSIT GATEWAY</a:t>
+              <a:t>VIRTUAL PRIVATE CLOUD</a:t>
             </a:r>
             <a:endParaRPr lang="en-US" dirty="0"/>
           </a:p>
@@ -39020,7 +39020,7 @@
       </p:sp>
       <p:pic>
         <p:nvPicPr>
-          <p:cNvPr id="75" name="Object 74" descr="public/generated/icons/vmware.directorsite.png">    </p:cNvPr>
+          <p:cNvPr id="75" name="Object 74" descr="public/generated/icons/is.endpoint-gateway.png">    </p:cNvPr>
           <p:cNvPicPr>
             <a:picLocks noChangeAspect="1"/>
           </p:cNvPicPr>
@@ -39076,7 +39076,7 @@
                 <a:ea typeface="Helvetica" pitchFamily="34" charset="-122"/>
                 <a:cs typeface="Helvetica" pitchFamily="34" charset="-120"/>
               </a:rPr>
-              <a:t>VCF AS A SERVICE - CLOUD DIRECTOR SITE</a:t>
+              <a:t>VIRTUAL PRIVATE ENDPOINT FOR VPC</a:t>
             </a:r>
             <a:endParaRPr lang="en-US" dirty="0"/>
           </a:p>
@@ -39109,7 +39109,7 @@
       </p:sp>
       <p:pic>
         <p:nvPicPr>
-          <p:cNvPr id="78" name="Object 77" descr="public/generated/icons/vmware.usage-meter.png">    </p:cNvPr>
+          <p:cNvPr id="78" name="Object 77" descr="public/generated/icons/887073fb-ba5b-9407-d2ac-938308d890e4.png">    </p:cNvPr>
           <p:cNvPicPr>
             <a:picLocks noChangeAspect="1"/>
           </p:cNvPicPr>
@@ -39165,7 +39165,7 @@
                 <a:ea typeface="Helvetica" pitchFamily="34" charset="-122"/>
                 <a:cs typeface="Helvetica" pitchFamily="34" charset="-120"/>
               </a:rPr>
-              <a:t>VCF AS A SERVICE - USAGE METER</a:t>
+              <a:t>VIRTUAL ROUTER APPLIANCE</a:t>
             </a:r>
             <a:endParaRPr lang="en-US" dirty="0"/>
           </a:p>
@@ -39198,7 +39198,7 @@
       </p:sp>
       <p:pic>
         <p:nvPicPr>
-          <p:cNvPr id="81" name="Object 80" descr="public/generated/icons/vmware.vdc.png">    </p:cNvPr>
+          <p:cNvPr id="81" name="Object 80" descr="public/generated/icons/virtual-server-group.png">    </p:cNvPr>
           <p:cNvPicPr>
             <a:picLocks noChangeAspect="1"/>
           </p:cNvPicPr>
@@ -39254,7 +39254,7 @@
                 <a:ea typeface="Helvetica" pitchFamily="34" charset="-122"/>
                 <a:cs typeface="Helvetica" pitchFamily="34" charset="-120"/>
               </a:rPr>
-              <a:t>VCF AS A SERVICE - VIRTUAL DATA CENTER</a:t>
+              <a:t>VIRTUAL SERVER FOR CLASSIC</a:t>
             </a:r>
             <a:endParaRPr lang="en-US" dirty="0"/>
           </a:p>
@@ -39287,7 +39287,7 @@
       </p:sp>
       <p:pic>
         <p:nvPicPr>
-          <p:cNvPr id="84" name="Object 83" descr="public/generated/icons/cf329950-0a3e-11e8-922e-f1366c6e1c83-veeam.png">    </p:cNvPr>
+          <p:cNvPr id="84" name="Object 83" descr="public/generated/icons/is.instance.png">    </p:cNvPr>
           <p:cNvPicPr>
             <a:picLocks noChangeAspect="1"/>
           </p:cNvPicPr>
@@ -39343,7 +39343,7 @@
                 <a:ea typeface="Helvetica" pitchFamily="34" charset="-122"/>
                 <a:cs typeface="Helvetica" pitchFamily="34" charset="-120"/>
               </a:rPr>
-              <a:t>VEEAM</a:t>
+              <a:t>VIRTUAL SERVER FOR VPC</a:t>
             </a:r>
             <a:endParaRPr lang="en-US" dirty="0"/>
           </a:p>
@@ -39376,7 +39376,7 @@
       </p:sp>
       <p:pic>
         <p:nvPicPr>
-          <p:cNvPr id="87" name="Object 86" descr="public/generated/icons/66644e80-f35a-11ee-923f-2fe367129617.png">    </p:cNvPr>
+          <p:cNvPr id="87" name="Object 86" descr="public/generated/icons/15.png">    </p:cNvPr>
           <p:cNvPicPr>
             <a:picLocks noChangeAspect="1"/>
           </p:cNvPicPr>
@@ -39432,7 +39432,7 @@
                 <a:ea typeface="Helvetica" pitchFamily="34" charset="-122"/>
                 <a:cs typeface="Helvetica" pitchFamily="34" charset="-120"/>
               </a:rPr>
-              <a:t>VERIFY</a:t>
+              <a:t>VLAN</a:t>
             </a:r>
             <a:endParaRPr lang="en-US" dirty="0"/>
           </a:p>
@@ -39465,7 +39465,7 @@
       </p:sp>
       <p:pic>
         <p:nvPicPr>
-          <p:cNvPr id="90" name="Object 89" descr="public/generated/icons/is.virtual-network-interface.png">    </p:cNvPr>
+          <p:cNvPr id="90" name="Object 89" descr="public/generated/icons/09f5a6ea-185e-4625-8281-9e8629360a4f.png">    </p:cNvPr>
           <p:cNvPicPr>
             <a:picLocks noChangeAspect="1"/>
           </p:cNvPicPr>
@@ -39521,7 +39521,7 @@
                 <a:ea typeface="Helvetica" pitchFamily="34" charset="-122"/>
                 <a:cs typeface="Helvetica" pitchFamily="34" charset="-120"/>
               </a:rPr>
-              <a:t>VIRTUAL NETWORK INTERFACE</a:t>
+              <a:t>VMWARE CLOUD MIGRATION SERVICES</a:t>
             </a:r>
             <a:endParaRPr lang="en-US" dirty="0"/>
           </a:p>
@@ -39554,7 +39554,7 @@
       </p:sp>
       <p:pic>
         <p:nvPicPr>
-          <p:cNvPr id="93" name="Object 92" descr="public/generated/icons/is.vpc.png">    </p:cNvPr>
+          <p:cNvPr id="93" name="Object 92" descr="public/generated/icons/cf329950-0a3e-11e8-922e-f1366c6e1c83.png">    </p:cNvPr>
           <p:cNvPicPr>
             <a:picLocks noChangeAspect="1"/>
           </p:cNvPicPr>
@@ -39610,7 +39610,7 @@
                 <a:ea typeface="Helvetica" pitchFamily="34" charset="-122"/>
                 <a:cs typeface="Helvetica" pitchFamily="34" charset="-120"/>
               </a:rPr>
-              <a:t>VIRTUAL PRIVATE CLOUD</a:t>
+              <a:t>VMWARE SOLUTIONS</a:t>
             </a:r>
             <a:endParaRPr lang="en-US" dirty="0"/>
           </a:p>
@@ -39643,7 +39643,7 @@
       </p:sp>
       <p:pic>
         <p:nvPicPr>
-          <p:cNvPr id="96" name="Object 95" descr="public/generated/icons/is.endpoint-gateway.png">    </p:cNvPr>
+          <p:cNvPr id="96" name="Object 95" descr="public/generated/icons/cf329950-0a3e-11e8-922e-f1366c6e1c83-vcenterserver.png">    </p:cNvPr>
           <p:cNvPicPr>
             <a:picLocks noChangeAspect="1"/>
           </p:cNvPicPr>
@@ -39699,7 +39699,7 @@
                 <a:ea typeface="Helvetica" pitchFamily="34" charset="-122"/>
                 <a:cs typeface="Helvetica" pitchFamily="34" charset="-120"/>
               </a:rPr>
-              <a:t>VIRTUAL PRIVATE ENDPOINT FOR VPC</a:t>
+              <a:t>VMWARE VCENTER SERVER</a:t>
             </a:r>
             <a:endParaRPr lang="en-US" dirty="0"/>
           </a:p>
@@ -39732,7 +39732,7 @@
       </p:sp>
       <p:pic>
         <p:nvPicPr>
-          <p:cNvPr id="99" name="Object 98" descr="public/generated/icons/887073fb-ba5b-9407-d2ac-938308d890e4.png">    </p:cNvPr>
+          <p:cNvPr id="99" name="Object 98" descr="public/generated/icons/cf329950-0a3e-11e8-922e-f1366c6e1c83-vsphere.png">    </p:cNvPr>
           <p:cNvPicPr>
             <a:picLocks noChangeAspect="1"/>
           </p:cNvPicPr>
@@ -39788,7 +39788,7 @@
                 <a:ea typeface="Helvetica" pitchFamily="34" charset="-122"/>
                 <a:cs typeface="Helvetica" pitchFamily="34" charset="-120"/>
               </a:rPr>
-              <a:t>VIRTUAL ROUTER APPLIANCE</a:t>
+              <a:t>VMWARE VSPHERE</a:t>
             </a:r>
             <a:endParaRPr lang="en-US" dirty="0"/>
           </a:p>
@@ -39821,7 +39821,7 @@
       </p:sp>
       <p:pic>
         <p:nvPicPr>
-          <p:cNvPr id="102" name="Object 101" descr="public/generated/icons/virtual-server-group.png">    </p:cNvPr>
+          <p:cNvPr id="102" name="Object 101" descr="public/generated/icons/b6670b68-84ca-4a04-b8e8-c567dfeeddde.png">    </p:cNvPr>
           <p:cNvPicPr>
             <a:picLocks noChangeAspect="1"/>
           </p:cNvPicPr>
@@ -39877,7 +39877,7 @@
                 <a:ea typeface="Helvetica" pitchFamily="34" charset="-122"/>
                 <a:cs typeface="Helvetica" pitchFamily="34" charset="-120"/>
               </a:rPr>
-              <a:t>VIRTUAL SERVER FOR CLASSIC</a:t>
+              <a:t>VPC COAAS (VPC COST OPTIMIZATION AS A SERVICE)</a:t>
             </a:r>
             <a:endParaRPr lang="en-US" dirty="0"/>
           </a:p>
@@ -39910,7 +39910,7 @@
       </p:sp>
       <p:pic>
         <p:nvPicPr>
-          <p:cNvPr id="105" name="Object 104" descr="public/generated/icons/is.instance.png">    </p:cNvPr>
+          <p:cNvPr id="105" name="Object 104" descr="public/generated/icons/757254b0-a9a0-11ea-9ff6-17a22eb543c5.png">    </p:cNvPr>
           <p:cNvPicPr>
             <a:picLocks noChangeAspect="1"/>
           </p:cNvPicPr>
@@ -39966,7 +39966,7 @@
                 <a:ea typeface="Helvetica" pitchFamily="34" charset="-122"/>
                 <a:cs typeface="Helvetica" pitchFamily="34" charset="-120"/>
               </a:rPr>
-              <a:t>VIRTUAL SERVER FOR VPC</a:t>
+              <a:t>VPC+ CLOUD MIGRATION</a:t>
             </a:r>
             <a:endParaRPr lang="en-US" dirty="0"/>
           </a:p>
@@ -39999,7 +39999,7 @@
       </p:sp>
       <p:pic>
         <p:nvPicPr>
-          <p:cNvPr id="108" name="Object 107" descr="public/generated/icons/15.png">    </p:cNvPr>
+          <p:cNvPr id="108" name="Object 107" descr="public/generated/icons/fd1e0240-dd95-11eb-b4a0-db1c9221b8a2.png">    </p:cNvPr>
           <p:cNvPicPr>
             <a:picLocks noChangeAspect="1"/>
           </p:cNvPicPr>
@@ -40055,7 +40055,7 @@
                 <a:ea typeface="Helvetica" pitchFamily="34" charset="-122"/>
                 <a:cs typeface="Helvetica" pitchFamily="34" charset="-120"/>
               </a:rPr>
-              <a:t>VLAN</a:t>
+              <a:t>VPC+ DRAAS (VPC+ DISASTER RECOVERY AS A SERVICE)</a:t>
             </a:r>
             <a:endParaRPr lang="en-US" dirty="0"/>
           </a:p>
@@ -40121,7 +40121,7 @@
       </p:sp>
       <p:pic>
         <p:nvPicPr>
-          <p:cNvPr id="3" name="Object 2" descr="public/generated/icons/09f5a6ea-185e-4625-8281-9e8629360a4f.png">    </p:cNvPr>
+          <p:cNvPr id="3" name="Object 2" descr="public/generated/icons/is.vpn.png">    </p:cNvPr>
           <p:cNvPicPr>
             <a:picLocks noChangeAspect="1"/>
           </p:cNvPicPr>
@@ -40177,7 +40177,7 @@
                 <a:ea typeface="Helvetica" pitchFamily="34" charset="-122"/>
                 <a:cs typeface="Helvetica" pitchFamily="34" charset="-120"/>
               </a:rPr>
-              <a:t>VMWARE CLOUD MIGRATION SERVICES</a:t>
+              <a:t>VPN FOR VPC</a:t>
             </a:r>
             <a:endParaRPr lang="en-US" dirty="0"/>
           </a:p>
@@ -40210,7 +40210,7 @@
       </p:sp>
       <p:pic>
         <p:nvPicPr>
-          <p:cNvPr id="6" name="Object 5" descr="public/generated/icons/cf329950-0a3e-11e8-922e-f1366c6e1c83.png">    </p:cNvPr>
+          <p:cNvPr id="6" name="Object 5" descr="public/generated/icons/cf329950-0a3e-11e8-922e-f1366c6e1c83-vrops.png">    </p:cNvPr>
           <p:cNvPicPr>
             <a:picLocks noChangeAspect="1"/>
           </p:cNvPicPr>
@@ -40266,7 +40266,7 @@
                 <a:ea typeface="Helvetica" pitchFamily="34" charset="-122"/>
                 <a:cs typeface="Helvetica" pitchFamily="34" charset="-120"/>
               </a:rPr>
-              <a:t>VMWARE SOLUTIONS</a:t>
+              <a:t>VREALIZE OPERATIONS AND LOG INSIGHT</a:t>
             </a:r>
             <a:endParaRPr lang="en-US" dirty="0"/>
           </a:p>
@@ -40299,7 +40299,7 @@
       </p:sp>
       <p:pic>
         <p:nvPicPr>
-          <p:cNvPr id="9" name="Object 8" descr="public/generated/icons/cf329950-0a3e-11e8-922e-f1366c6e1c83-vcenterserver.png">    </p:cNvPr>
+          <p:cNvPr id="9" name="Object 8" descr="public/generated/icons/76b7bf22-b443-47db-b3db-066ba2988f47.png">    </p:cNvPr>
           <p:cNvPicPr>
             <a:picLocks noChangeAspect="1"/>
           </p:cNvPicPr>
@@ -40355,7 +40355,7 @@
                 <a:ea typeface="Helvetica" pitchFamily="34" charset="-122"/>
                 <a:cs typeface="Helvetica" pitchFamily="34" charset="-120"/>
               </a:rPr>
-              <a:t>VMWARE VCENTER SERVER</a:t>
+              <a:t>WATSON DISCOVERY</a:t>
             </a:r>
             <a:endParaRPr lang="en-US" dirty="0"/>
           </a:p>
@@ -40388,7 +40388,7 @@
       </p:sp>
       <p:pic>
         <p:nvPicPr>
-          <p:cNvPr id="12" name="Object 11" descr="public/generated/icons/cf329950-0a3e-11e8-922e-f1366c6e1c83-vsphere.png">    </p:cNvPr>
+          <p:cNvPr id="12" name="Object 11" descr="public/generated/icons/12fbfff4-12c7-ccd0-80e6-603e8607468a.png">    </p:cNvPr>
           <p:cNvPicPr>
             <a:picLocks noChangeAspect="1"/>
           </p:cNvPicPr>
@@ -40444,7 +40444,7 @@
                 <a:ea typeface="Helvetica" pitchFamily="34" charset="-122"/>
                 <a:cs typeface="Helvetica" pitchFamily="34" charset="-120"/>
               </a:rPr>
-              <a:t>VMWARE VSPHERE</a:t>
+              <a:t>WATSONX</a:t>
             </a:r>
             <a:endParaRPr lang="en-US" dirty="0"/>
           </a:p>
@@ -40477,7 +40477,7 @@
       </p:sp>
       <p:pic>
         <p:nvPicPr>
-          <p:cNvPr id="15" name="Object 14" descr="public/generated/icons/b6670b68-84ca-4a04-b8e8-c567dfeeddde.png">    </p:cNvPr>
+          <p:cNvPr id="15" name="Object 14" descr="public/generated/icons/7045626d-55e3-4418-be11-683a26dbc1e5.png">    </p:cNvPr>
           <p:cNvPicPr>
             <a:picLocks noChangeAspect="1"/>
           </p:cNvPicPr>
@@ -40533,7 +40533,7 @@
                 <a:ea typeface="Helvetica" pitchFamily="34" charset="-122"/>
                 <a:cs typeface="Helvetica" pitchFamily="34" charset="-120"/>
               </a:rPr>
-              <a:t>VPC COAAS (VPC COST OPTIMIZATION AS A SERVICE)</a:t>
+              <a:t>WATSONX ASSISTANT</a:t>
             </a:r>
             <a:endParaRPr lang="en-US" dirty="0"/>
           </a:p>
@@ -40566,7 +40566,7 @@
       </p:sp>
       <p:pic>
         <p:nvPicPr>
-          <p:cNvPr id="18" name="Object 17" descr="public/generated/icons/757254b0-a9a0-11ea-9ff6-17a22eb543c5.png">    </p:cNvPr>
+          <p:cNvPr id="18" name="Object 17" descr="public/generated/icons/11530fa0-1776-11ee-93f6-1d4066e6a409.png">    </p:cNvPr>
           <p:cNvPicPr>
             <a:picLocks noChangeAspect="1"/>
           </p:cNvPicPr>
@@ -40622,7 +40622,7 @@
                 <a:ea typeface="Helvetica" pitchFamily="34" charset="-122"/>
                 <a:cs typeface="Helvetica" pitchFamily="34" charset="-120"/>
               </a:rPr>
-              <a:t>VPC+ CLOUD MIGRATION</a:t>
+              <a:t>WATSONX CODE ASSISTANT</a:t>
             </a:r>
             <a:endParaRPr lang="en-US" dirty="0"/>
           </a:p>
@@ -40655,7 +40655,7 @@
       </p:sp>
       <p:pic>
         <p:nvPicPr>
-          <p:cNvPr id="21" name="Object 20" descr="public/generated/icons/fd1e0240-dd95-11eb-b4a0-db1c9221b8a2.png">    </p:cNvPr>
+          <p:cNvPr id="21" name="Object 20" descr="public/generated/icons/b69f78c0-11d7-11ef-9bdf-c92eb40d1838.png">    </p:cNvPr>
           <p:cNvPicPr>
             <a:picLocks noChangeAspect="1"/>
           </p:cNvPicPr>
@@ -40711,7 +40711,7 @@
                 <a:ea typeface="Helvetica" pitchFamily="34" charset="-122"/>
                 <a:cs typeface="Helvetica" pitchFamily="34" charset="-120"/>
               </a:rPr>
-              <a:t>VPC+ DRAAS (VPC+ DISASTER RECOVERY AS A SERVICE)</a:t>
+              <a:t>WATSONX ORCHESTRATE</a:t>
             </a:r>
             <a:endParaRPr lang="en-US" dirty="0"/>
           </a:p>
@@ -40744,7 +40744,7 @@
       </p:sp>
       <p:pic>
         <p:nvPicPr>
-          <p:cNvPr id="24" name="Object 23" descr="public/generated/icons/is.vpn.png">    </p:cNvPr>
+          <p:cNvPr id="24" name="Object 23" descr="public/generated/icons/51c53b72-918f-4869-b834-2d99eb28422a.png">    </p:cNvPr>
           <p:cNvPicPr>
             <a:picLocks noChangeAspect="1"/>
           </p:cNvPicPr>
@@ -40800,7 +40800,7 @@
                 <a:ea typeface="Helvetica" pitchFamily="34" charset="-122"/>
                 <a:cs typeface="Helvetica" pitchFamily="34" charset="-120"/>
               </a:rPr>
-              <a:t>VPN FOR VPC</a:t>
+              <a:t>WATSONX.AI RUNTIME</a:t>
             </a:r>
             <a:endParaRPr lang="en-US" dirty="0"/>
           </a:p>
@@ -40833,7 +40833,7 @@
       </p:sp>
       <p:pic>
         <p:nvPicPr>
-          <p:cNvPr id="27" name="Object 26" descr="public/generated/icons/cf329950-0a3e-11e8-922e-f1366c6e1c83-vrops.png">    </p:cNvPr>
+          <p:cNvPr id="27" name="Object 26" descr="public/generated/icons/39ba9d4c-b1c5-4cc3-a163-38b580121e01.png">    </p:cNvPr>
           <p:cNvPicPr>
             <a:picLocks noChangeAspect="1"/>
           </p:cNvPicPr>
@@ -40889,7 +40889,7 @@
                 <a:ea typeface="Helvetica" pitchFamily="34" charset="-122"/>
                 <a:cs typeface="Helvetica" pitchFamily="34" charset="-120"/>
               </a:rPr>
-              <a:t>VREALIZE OPERATIONS AND LOG INSIGHT</a:t>
+              <a:t>WATSONX.AI STUDIO</a:t>
             </a:r>
             <a:endParaRPr lang="en-US" dirty="0"/>
           </a:p>
@@ -40922,7 +40922,7 @@
       </p:sp>
       <p:pic>
         <p:nvPicPr>
-          <p:cNvPr id="30" name="Object 29" descr="public/generated/icons/76b7bf22-b443-47db-b3db-066ba2988f47.png">    </p:cNvPr>
+          <p:cNvPr id="30" name="Object 29" descr="public/generated/icons/43834340-4a6d-11ed-97d2-959039ad2a2e.png">    </p:cNvPr>
           <p:cNvPicPr>
             <a:picLocks noChangeAspect="1"/>
           </p:cNvPicPr>
@@ -40978,7 +40978,7 @@
                 <a:ea typeface="Helvetica" pitchFamily="34" charset="-122"/>
                 <a:cs typeface="Helvetica" pitchFamily="34" charset="-120"/>
               </a:rPr>
-              <a:t>WATSON DISCOVERY</a:t>
+              <a:t>WATSONX.DATA</a:t>
             </a:r>
             <a:endParaRPr lang="en-US" dirty="0"/>
           </a:p>
@@ -41011,7 +41011,7 @@
       </p:sp>
       <p:pic>
         <p:nvPicPr>
-          <p:cNvPr id="33" name="Object 32" descr="public/generated/icons/12fbfff4-12c7-ccd0-80e6-603e8607468a.png">    </p:cNvPr>
+          <p:cNvPr id="33" name="Object 32" descr="public/generated/icons/4d4fd270-fe8f-11ef-82ad-af5f37d5a455.png">    </p:cNvPr>
           <p:cNvPicPr>
             <a:picLocks noChangeAspect="1"/>
           </p:cNvPicPr>
@@ -41067,7 +41067,7 @@
                 <a:ea typeface="Helvetica" pitchFamily="34" charset="-122"/>
                 <a:cs typeface="Helvetica" pitchFamily="34" charset="-120"/>
               </a:rPr>
-              <a:t>WATSONX</a:t>
+              <a:t>WATSONX.DATA INTEGRATION</a:t>
             </a:r>
             <a:endParaRPr lang="en-US" dirty="0"/>
           </a:p>
@@ -41100,7 +41100,7 @@
       </p:sp>
       <p:pic>
         <p:nvPicPr>
-          <p:cNvPr id="36" name="Object 35" descr="public/generated/icons/7045626d-55e3-4418-be11-683a26dbc1e5.png">    </p:cNvPr>
+          <p:cNvPr id="36" name="Object 35" descr="public/generated/icons/ed3a5a53-eb60-4f3c-8fd1-17f88585b6ed.png">    </p:cNvPr>
           <p:cNvPicPr>
             <a:picLocks noChangeAspect="1"/>
           </p:cNvPicPr>
@@ -41156,7 +41156,7 @@
                 <a:ea typeface="Helvetica" pitchFamily="34" charset="-122"/>
                 <a:cs typeface="Helvetica" pitchFamily="34" charset="-120"/>
               </a:rPr>
-              <a:t>WATSONX ASSISTANT</a:t>
+              <a:t>WATSONX.DATA INTELLIGENCE</a:t>
             </a:r>
             <a:endParaRPr lang="en-US" dirty="0"/>
           </a:p>
@@ -41189,7 +41189,7 @@
       </p:sp>
       <p:pic>
         <p:nvPicPr>
-          <p:cNvPr id="39" name="Object 38" descr="public/generated/icons/11530fa0-1776-11ee-93f6-1d4066e6a409.png">    </p:cNvPr>
+          <p:cNvPr id="39" name="Object 38" descr="public/generated/icons/2ad019f3-0fd6-4c25-966d-f3952481a870.png">    </p:cNvPr>
           <p:cNvPicPr>
             <a:picLocks noChangeAspect="1"/>
           </p:cNvPicPr>
@@ -41245,7 +41245,7 @@
                 <a:ea typeface="Helvetica" pitchFamily="34" charset="-122"/>
                 <a:cs typeface="Helvetica" pitchFamily="34" charset="-120"/>
               </a:rPr>
-              <a:t>WATSONX CODE ASSISTANT</a:t>
+              <a:t>WATSONX.GOVERNANCE</a:t>
             </a:r>
             <a:endParaRPr lang="en-US" dirty="0"/>
           </a:p>
@@ -41278,7 +41278,7 @@
       </p:sp>
       <p:pic>
         <p:nvPicPr>
-          <p:cNvPr id="42" name="Object 41" descr="public/generated/icons/b69f78c0-11d7-11ef-9bdf-c92eb40d1838.png">    </p:cNvPr>
+          <p:cNvPr id="42" name="Object 41" descr="public/generated/icons/e9407be2-139f-4f05-959d-494c6601239a.png">    </p:cNvPr>
           <p:cNvPicPr>
             <a:picLocks noChangeAspect="1"/>
           </p:cNvPicPr>
@@ -41334,7 +41334,7 @@
                 <a:ea typeface="Helvetica" pitchFamily="34" charset="-122"/>
                 <a:cs typeface="Helvetica" pitchFamily="34" charset="-120"/>
               </a:rPr>
-              <a:t>WATSONX ORCHESTRATE</a:t>
+              <a:t>WEALTHGROWTH.AI</a:t>
             </a:r>
             <a:endParaRPr lang="en-US" dirty="0"/>
           </a:p>
@@ -41367,7 +41367,7 @@
       </p:sp>
       <p:pic>
         <p:nvPicPr>
-          <p:cNvPr id="45" name="Object 44" descr="public/generated/icons/51c53b72-918f-4869-b834-2d99eb28422a.png">    </p:cNvPr>
+          <p:cNvPr id="45" name="Object 44" descr="public/generated/icons/cf329950-0a3e-11e8-922e-f1366c6e1c83-zerto.png">    </p:cNvPr>
           <p:cNvPicPr>
             <a:picLocks noChangeAspect="1"/>
           </p:cNvPicPr>
@@ -41398,629 +41398,6 @@
         <p:spPr>
           <a:xfrm>
             <a:off x="4754880" y="1874520"/>
-            <a:ext cx="640080" cy="274320"/>
-          </a:xfrm>
-          <a:prstGeom prst="rect">
-            <a:avLst/>
-          </a:prstGeom>
-          <a:noFill/>
-        </p:spPr>
-        <p:txBody>
-          <a:bodyPr wrap="square" rtlCol="0" anchor="t" bIns="0" lIns="0" rIns="0" tIns="0">
-            <a:spAutoFit/>
-          </a:bodyPr>
-          <a:lstStyle/>
-          <a:p>
-            <a:pPr algn="ctr">
-              <a:buNone/>
-            </a:pPr>
-            <a:r>
-              <a:rPr lang="en-US" b="1" sz="600" dirty="0" smtClean="0">
-                <a:solidFill>
-                  <a:srgbClr val="646365"/>
-                </a:solidFill>
-                <a:latin typeface="Helvetica" pitchFamily="34" charset="0"/>
-                <a:ea typeface="Helvetica" pitchFamily="34" charset="-122"/>
-                <a:cs typeface="Helvetica" pitchFamily="34" charset="-120"/>
-              </a:rPr>
-              <a:t>WATSONX.AI RUNTIME</a:t>
-            </a:r>
-            <a:endParaRPr lang="en-US" dirty="0"/>
-          </a:p>
-        </p:txBody>
-      </p:sp>
-      <p:sp>
-        <p:nvSpPr>
-          <p:cNvPr id="47" name="Object 46"/>
-          <p:cNvSpPr/>
-          <p:nvPr/>
-        </p:nvSpPr>
-        <p:spPr>
-          <a:xfrm>
-            <a:off x="5760720" y="1371600"/>
-            <a:ext cx="457200" cy="457200"/>
-          </a:xfrm>
-          <a:prstGeom prst="ellipse">
-            <a:avLst/>
-          </a:prstGeom>
-          <a:solidFill>
-            <a:srgbClr val="FFFFFF"/>
-          </a:solidFill>
-          <a:ln w="19050">
-            <a:solidFill>
-              <a:srgbClr val="646365"/>
-            </a:solidFill>
-            <a:prstDash val="solid"/>
-          </a:ln>
-        </p:spPr>
-      </p:sp>
-      <p:pic>
-        <p:nvPicPr>
-          <p:cNvPr id="48" name="Object 47" descr="public/generated/icons/39ba9d4c-b1c5-4cc3-a163-38b580121e01.png">    </p:cNvPr>
-          <p:cNvPicPr>
-            <a:picLocks noChangeAspect="1"/>
-          </p:cNvPicPr>
-          <p:nvPr/>
-        </p:nvPicPr>
-        <p:blipFill>
-          <a:blip r:embed="rId16"/>
-          <a:stretch>
-            <a:fillRect/>
-          </a:stretch>
-        </p:blipFill>
-        <p:spPr>
-          <a:xfrm>
-            <a:off x="5852160" y="1463040"/>
-            <a:ext cx="274320" cy="274320"/>
-          </a:xfrm>
-          <a:prstGeom prst="rect">
-            <a:avLst/>
-          </a:prstGeom>
-        </p:spPr>
-      </p:pic>
-      <p:sp>
-        <p:nvSpPr>
-          <p:cNvPr id="49" name="Object 48"/>
-          <p:cNvSpPr/>
-          <p:nvPr/>
-        </p:nvSpPr>
-        <p:spPr>
-          <a:xfrm>
-            <a:off x="5669280" y="1874520"/>
-            <a:ext cx="640080" cy="274320"/>
-          </a:xfrm>
-          <a:prstGeom prst="rect">
-            <a:avLst/>
-          </a:prstGeom>
-          <a:noFill/>
-        </p:spPr>
-        <p:txBody>
-          <a:bodyPr wrap="square" rtlCol="0" anchor="t" bIns="0" lIns="0" rIns="0" tIns="0">
-            <a:spAutoFit/>
-          </a:bodyPr>
-          <a:lstStyle/>
-          <a:p>
-            <a:pPr algn="ctr">
-              <a:buNone/>
-            </a:pPr>
-            <a:r>
-              <a:rPr lang="en-US" b="1" sz="600" dirty="0" smtClean="0">
-                <a:solidFill>
-                  <a:srgbClr val="646365"/>
-                </a:solidFill>
-                <a:latin typeface="Helvetica" pitchFamily="34" charset="0"/>
-                <a:ea typeface="Helvetica" pitchFamily="34" charset="-122"/>
-                <a:cs typeface="Helvetica" pitchFamily="34" charset="-120"/>
-              </a:rPr>
-              <a:t>WATSONX.AI STUDIO</a:t>
-            </a:r>
-            <a:endParaRPr lang="en-US" dirty="0"/>
-          </a:p>
-        </p:txBody>
-      </p:sp>
-      <p:sp>
-        <p:nvSpPr>
-          <p:cNvPr id="50" name="Object 49"/>
-          <p:cNvSpPr/>
-          <p:nvPr/>
-        </p:nvSpPr>
-        <p:spPr>
-          <a:xfrm>
-            <a:off x="6675120" y="1371600"/>
-            <a:ext cx="457200" cy="457200"/>
-          </a:xfrm>
-          <a:prstGeom prst="ellipse">
-            <a:avLst/>
-          </a:prstGeom>
-          <a:solidFill>
-            <a:srgbClr val="FFFFFF"/>
-          </a:solidFill>
-          <a:ln w="19050">
-            <a:solidFill>
-              <a:srgbClr val="646365"/>
-            </a:solidFill>
-            <a:prstDash val="solid"/>
-          </a:ln>
-        </p:spPr>
-      </p:sp>
-      <p:pic>
-        <p:nvPicPr>
-          <p:cNvPr id="51" name="Object 50" descr="public/generated/icons/43834340-4a6d-11ed-97d2-959039ad2a2e.png">    </p:cNvPr>
-          <p:cNvPicPr>
-            <a:picLocks noChangeAspect="1"/>
-          </p:cNvPicPr>
-          <p:nvPr/>
-        </p:nvPicPr>
-        <p:blipFill>
-          <a:blip r:embed="rId17"/>
-          <a:stretch>
-            <a:fillRect/>
-          </a:stretch>
-        </p:blipFill>
-        <p:spPr>
-          <a:xfrm>
-            <a:off x="6766560" y="1463040"/>
-            <a:ext cx="274320" cy="274320"/>
-          </a:xfrm>
-          <a:prstGeom prst="rect">
-            <a:avLst/>
-          </a:prstGeom>
-        </p:spPr>
-      </p:pic>
-      <p:sp>
-        <p:nvSpPr>
-          <p:cNvPr id="52" name="Object 51"/>
-          <p:cNvSpPr/>
-          <p:nvPr/>
-        </p:nvSpPr>
-        <p:spPr>
-          <a:xfrm>
-            <a:off x="6583680" y="1874520"/>
-            <a:ext cx="640080" cy="274320"/>
-          </a:xfrm>
-          <a:prstGeom prst="rect">
-            <a:avLst/>
-          </a:prstGeom>
-          <a:noFill/>
-        </p:spPr>
-        <p:txBody>
-          <a:bodyPr wrap="square" rtlCol="0" anchor="t" bIns="0" lIns="0" rIns="0" tIns="0">
-            <a:spAutoFit/>
-          </a:bodyPr>
-          <a:lstStyle/>
-          <a:p>
-            <a:pPr algn="ctr">
-              <a:buNone/>
-            </a:pPr>
-            <a:r>
-              <a:rPr lang="en-US" b="1" sz="600" dirty="0" smtClean="0">
-                <a:solidFill>
-                  <a:srgbClr val="646365"/>
-                </a:solidFill>
-                <a:latin typeface="Helvetica" pitchFamily="34" charset="0"/>
-                <a:ea typeface="Helvetica" pitchFamily="34" charset="-122"/>
-                <a:cs typeface="Helvetica" pitchFamily="34" charset="-120"/>
-              </a:rPr>
-              <a:t>WATSONX.DATA</a:t>
-            </a:r>
-            <a:endParaRPr lang="en-US" dirty="0"/>
-          </a:p>
-        </p:txBody>
-      </p:sp>
-      <p:sp>
-        <p:nvSpPr>
-          <p:cNvPr id="53" name="Object 52"/>
-          <p:cNvSpPr/>
-          <p:nvPr/>
-        </p:nvSpPr>
-        <p:spPr>
-          <a:xfrm>
-            <a:off x="7589520" y="1371600"/>
-            <a:ext cx="457200" cy="457200"/>
-          </a:xfrm>
-          <a:prstGeom prst="ellipse">
-            <a:avLst/>
-          </a:prstGeom>
-          <a:solidFill>
-            <a:srgbClr val="FFFFFF"/>
-          </a:solidFill>
-          <a:ln w="19050">
-            <a:solidFill>
-              <a:srgbClr val="646365"/>
-            </a:solidFill>
-            <a:prstDash val="solid"/>
-          </a:ln>
-        </p:spPr>
-      </p:sp>
-      <p:pic>
-        <p:nvPicPr>
-          <p:cNvPr id="54" name="Object 53" descr="public/generated/icons/4d4fd270-fe8f-11ef-82ad-af5f37d5a455.png">    </p:cNvPr>
-          <p:cNvPicPr>
-            <a:picLocks noChangeAspect="1"/>
-          </p:cNvPicPr>
-          <p:nvPr/>
-        </p:nvPicPr>
-        <p:blipFill>
-          <a:blip r:embed="rId18"/>
-          <a:stretch>
-            <a:fillRect/>
-          </a:stretch>
-        </p:blipFill>
-        <p:spPr>
-          <a:xfrm>
-            <a:off x="7680960" y="1463040"/>
-            <a:ext cx="274320" cy="274320"/>
-          </a:xfrm>
-          <a:prstGeom prst="rect">
-            <a:avLst/>
-          </a:prstGeom>
-        </p:spPr>
-      </p:pic>
-      <p:sp>
-        <p:nvSpPr>
-          <p:cNvPr id="55" name="Object 54"/>
-          <p:cNvSpPr/>
-          <p:nvPr/>
-        </p:nvSpPr>
-        <p:spPr>
-          <a:xfrm>
-            <a:off x="7498080" y="1874520"/>
-            <a:ext cx="640080" cy="274320"/>
-          </a:xfrm>
-          <a:prstGeom prst="rect">
-            <a:avLst/>
-          </a:prstGeom>
-          <a:noFill/>
-        </p:spPr>
-        <p:txBody>
-          <a:bodyPr wrap="square" rtlCol="0" anchor="t" bIns="0" lIns="0" rIns="0" tIns="0">
-            <a:spAutoFit/>
-          </a:bodyPr>
-          <a:lstStyle/>
-          <a:p>
-            <a:pPr algn="ctr">
-              <a:buNone/>
-            </a:pPr>
-            <a:r>
-              <a:rPr lang="en-US" b="1" sz="600" dirty="0" smtClean="0">
-                <a:solidFill>
-                  <a:srgbClr val="646365"/>
-                </a:solidFill>
-                <a:latin typeface="Helvetica" pitchFamily="34" charset="0"/>
-                <a:ea typeface="Helvetica" pitchFamily="34" charset="-122"/>
-                <a:cs typeface="Helvetica" pitchFamily="34" charset="-120"/>
-              </a:rPr>
-              <a:t>WATSONX.DATA INTEGRATION</a:t>
-            </a:r>
-            <a:endParaRPr lang="en-US" dirty="0"/>
-          </a:p>
-        </p:txBody>
-      </p:sp>
-      <p:sp>
-        <p:nvSpPr>
-          <p:cNvPr id="56" name="Object 55"/>
-          <p:cNvSpPr/>
-          <p:nvPr/>
-        </p:nvSpPr>
-        <p:spPr>
-          <a:xfrm>
-            <a:off x="274320" y="2468880"/>
-            <a:ext cx="457200" cy="457200"/>
-          </a:xfrm>
-          <a:prstGeom prst="ellipse">
-            <a:avLst/>
-          </a:prstGeom>
-          <a:solidFill>
-            <a:srgbClr val="FFFFFF"/>
-          </a:solidFill>
-          <a:ln w="19050">
-            <a:solidFill>
-              <a:srgbClr val="646365"/>
-            </a:solidFill>
-            <a:prstDash val="solid"/>
-          </a:ln>
-        </p:spPr>
-      </p:sp>
-      <p:pic>
-        <p:nvPicPr>
-          <p:cNvPr id="57" name="Object 56" descr="public/generated/icons/ed3a5a53-eb60-4f3c-8fd1-17f88585b6ed.png">    </p:cNvPr>
-          <p:cNvPicPr>
-            <a:picLocks noChangeAspect="1"/>
-          </p:cNvPicPr>
-          <p:nvPr/>
-        </p:nvPicPr>
-        <p:blipFill>
-          <a:blip r:embed="rId19"/>
-          <a:stretch>
-            <a:fillRect/>
-          </a:stretch>
-        </p:blipFill>
-        <p:spPr>
-          <a:xfrm>
-            <a:off x="365760" y="2560320"/>
-            <a:ext cx="274320" cy="274320"/>
-          </a:xfrm>
-          <a:prstGeom prst="rect">
-            <a:avLst/>
-          </a:prstGeom>
-        </p:spPr>
-      </p:pic>
-      <p:sp>
-        <p:nvSpPr>
-          <p:cNvPr id="58" name="Object 57"/>
-          <p:cNvSpPr/>
-          <p:nvPr/>
-        </p:nvSpPr>
-        <p:spPr>
-          <a:xfrm>
-            <a:off x="182880" y="2971800"/>
-            <a:ext cx="640080" cy="274320"/>
-          </a:xfrm>
-          <a:prstGeom prst="rect">
-            <a:avLst/>
-          </a:prstGeom>
-          <a:noFill/>
-        </p:spPr>
-        <p:txBody>
-          <a:bodyPr wrap="square" rtlCol="0" anchor="t" bIns="0" lIns="0" rIns="0" tIns="0">
-            <a:spAutoFit/>
-          </a:bodyPr>
-          <a:lstStyle/>
-          <a:p>
-            <a:pPr algn="ctr">
-              <a:buNone/>
-            </a:pPr>
-            <a:r>
-              <a:rPr lang="en-US" b="1" sz="600" dirty="0" smtClean="0">
-                <a:solidFill>
-                  <a:srgbClr val="646365"/>
-                </a:solidFill>
-                <a:latin typeface="Helvetica" pitchFamily="34" charset="0"/>
-                <a:ea typeface="Helvetica" pitchFamily="34" charset="-122"/>
-                <a:cs typeface="Helvetica" pitchFamily="34" charset="-120"/>
-              </a:rPr>
-              <a:t>WATSONX.DATA INTELLIGENCE</a:t>
-            </a:r>
-            <a:endParaRPr lang="en-US" dirty="0"/>
-          </a:p>
-        </p:txBody>
-      </p:sp>
-      <p:sp>
-        <p:nvSpPr>
-          <p:cNvPr id="59" name="Object 58"/>
-          <p:cNvSpPr/>
-          <p:nvPr/>
-        </p:nvSpPr>
-        <p:spPr>
-          <a:xfrm>
-            <a:off x="1188720" y="2468880"/>
-            <a:ext cx="457200" cy="457200"/>
-          </a:xfrm>
-          <a:prstGeom prst="ellipse">
-            <a:avLst/>
-          </a:prstGeom>
-          <a:solidFill>
-            <a:srgbClr val="FFFFFF"/>
-          </a:solidFill>
-          <a:ln w="19050">
-            <a:solidFill>
-              <a:srgbClr val="646365"/>
-            </a:solidFill>
-            <a:prstDash val="solid"/>
-          </a:ln>
-        </p:spPr>
-      </p:sp>
-      <p:pic>
-        <p:nvPicPr>
-          <p:cNvPr id="60" name="Object 59" descr="public/generated/icons/2ad019f3-0fd6-4c25-966d-f3952481a870.png">    </p:cNvPr>
-          <p:cNvPicPr>
-            <a:picLocks noChangeAspect="1"/>
-          </p:cNvPicPr>
-          <p:nvPr/>
-        </p:nvPicPr>
-        <p:blipFill>
-          <a:blip r:embed="rId20"/>
-          <a:stretch>
-            <a:fillRect/>
-          </a:stretch>
-        </p:blipFill>
-        <p:spPr>
-          <a:xfrm>
-            <a:off x="1280160" y="2560320"/>
-            <a:ext cx="274320" cy="274320"/>
-          </a:xfrm>
-          <a:prstGeom prst="rect">
-            <a:avLst/>
-          </a:prstGeom>
-        </p:spPr>
-      </p:pic>
-      <p:sp>
-        <p:nvSpPr>
-          <p:cNvPr id="61" name="Object 60"/>
-          <p:cNvSpPr/>
-          <p:nvPr/>
-        </p:nvSpPr>
-        <p:spPr>
-          <a:xfrm>
-            <a:off x="1097280" y="2971800"/>
-            <a:ext cx="640080" cy="274320"/>
-          </a:xfrm>
-          <a:prstGeom prst="rect">
-            <a:avLst/>
-          </a:prstGeom>
-          <a:noFill/>
-        </p:spPr>
-        <p:txBody>
-          <a:bodyPr wrap="square" rtlCol="0" anchor="t" bIns="0" lIns="0" rIns="0" tIns="0">
-            <a:spAutoFit/>
-          </a:bodyPr>
-          <a:lstStyle/>
-          <a:p>
-            <a:pPr algn="ctr">
-              <a:buNone/>
-            </a:pPr>
-            <a:r>
-              <a:rPr lang="en-US" b="1" sz="600" dirty="0" smtClean="0">
-                <a:solidFill>
-                  <a:srgbClr val="646365"/>
-                </a:solidFill>
-                <a:latin typeface="Helvetica" pitchFamily="34" charset="0"/>
-                <a:ea typeface="Helvetica" pitchFamily="34" charset="-122"/>
-                <a:cs typeface="Helvetica" pitchFamily="34" charset="-120"/>
-              </a:rPr>
-              <a:t>WATSONX.GOVERNANCE</a:t>
-            </a:r>
-            <a:endParaRPr lang="en-US" dirty="0"/>
-          </a:p>
-        </p:txBody>
-      </p:sp>
-      <p:sp>
-        <p:nvSpPr>
-          <p:cNvPr id="62" name="Object 61"/>
-          <p:cNvSpPr/>
-          <p:nvPr/>
-        </p:nvSpPr>
-        <p:spPr>
-          <a:xfrm>
-            <a:off x="2103120" y="2468880"/>
-            <a:ext cx="457200" cy="457200"/>
-          </a:xfrm>
-          <a:prstGeom prst="ellipse">
-            <a:avLst/>
-          </a:prstGeom>
-          <a:solidFill>
-            <a:srgbClr val="FFFFFF"/>
-          </a:solidFill>
-          <a:ln w="19050">
-            <a:solidFill>
-              <a:srgbClr val="646365"/>
-            </a:solidFill>
-            <a:prstDash val="solid"/>
-          </a:ln>
-        </p:spPr>
-      </p:sp>
-      <p:pic>
-        <p:nvPicPr>
-          <p:cNvPr id="63" name="Object 62" descr="public/generated/icons/e9407be2-139f-4f05-959d-494c6601239a.png">    </p:cNvPr>
-          <p:cNvPicPr>
-            <a:picLocks noChangeAspect="1"/>
-          </p:cNvPicPr>
-          <p:nvPr/>
-        </p:nvPicPr>
-        <p:blipFill>
-          <a:blip r:embed="rId21"/>
-          <a:stretch>
-            <a:fillRect/>
-          </a:stretch>
-        </p:blipFill>
-        <p:spPr>
-          <a:xfrm>
-            <a:off x="2194560" y="2560320"/>
-            <a:ext cx="274320" cy="274320"/>
-          </a:xfrm>
-          <a:prstGeom prst="rect">
-            <a:avLst/>
-          </a:prstGeom>
-        </p:spPr>
-      </p:pic>
-      <p:sp>
-        <p:nvSpPr>
-          <p:cNvPr id="64" name="Object 63"/>
-          <p:cNvSpPr/>
-          <p:nvPr/>
-        </p:nvSpPr>
-        <p:spPr>
-          <a:xfrm>
-            <a:off x="2011680" y="2971800"/>
-            <a:ext cx="640080" cy="274320"/>
-          </a:xfrm>
-          <a:prstGeom prst="rect">
-            <a:avLst/>
-          </a:prstGeom>
-          <a:noFill/>
-        </p:spPr>
-        <p:txBody>
-          <a:bodyPr wrap="square" rtlCol="0" anchor="t" bIns="0" lIns="0" rIns="0" tIns="0">
-            <a:spAutoFit/>
-          </a:bodyPr>
-          <a:lstStyle/>
-          <a:p>
-            <a:pPr algn="ctr">
-              <a:buNone/>
-            </a:pPr>
-            <a:r>
-              <a:rPr lang="en-US" b="1" sz="600" dirty="0" smtClean="0">
-                <a:solidFill>
-                  <a:srgbClr val="646365"/>
-                </a:solidFill>
-                <a:latin typeface="Helvetica" pitchFamily="34" charset="0"/>
-                <a:ea typeface="Helvetica" pitchFamily="34" charset="-122"/>
-                <a:cs typeface="Helvetica" pitchFamily="34" charset="-120"/>
-              </a:rPr>
-              <a:t>WEALTHGROWTH.AI</a:t>
-            </a:r>
-            <a:endParaRPr lang="en-US" dirty="0"/>
-          </a:p>
-        </p:txBody>
-      </p:sp>
-      <p:sp>
-        <p:nvSpPr>
-          <p:cNvPr id="65" name="Object 64"/>
-          <p:cNvSpPr/>
-          <p:nvPr/>
-        </p:nvSpPr>
-        <p:spPr>
-          <a:xfrm>
-            <a:off x="3017520" y="2468880"/>
-            <a:ext cx="457200" cy="457200"/>
-          </a:xfrm>
-          <a:prstGeom prst="ellipse">
-            <a:avLst/>
-          </a:prstGeom>
-          <a:solidFill>
-            <a:srgbClr val="FFFFFF"/>
-          </a:solidFill>
-          <a:ln w="19050">
-            <a:solidFill>
-              <a:srgbClr val="646365"/>
-            </a:solidFill>
-            <a:prstDash val="solid"/>
-          </a:ln>
-        </p:spPr>
-      </p:sp>
-      <p:pic>
-        <p:nvPicPr>
-          <p:cNvPr id="66" name="Object 65" descr="public/generated/icons/cf329950-0a3e-11e8-922e-f1366c6e1c83-zerto.png">    </p:cNvPr>
-          <p:cNvPicPr>
-            <a:picLocks noChangeAspect="1"/>
-          </p:cNvPicPr>
-          <p:nvPr/>
-        </p:nvPicPr>
-        <p:blipFill>
-          <a:blip r:embed="rId22"/>
-          <a:stretch>
-            <a:fillRect/>
-          </a:stretch>
-        </p:blipFill>
-        <p:spPr>
-          <a:xfrm>
-            <a:off x="3108960" y="2560320"/>
-            <a:ext cx="274320" cy="274320"/>
-          </a:xfrm>
-          <a:prstGeom prst="rect">
-            <a:avLst/>
-          </a:prstGeom>
-        </p:spPr>
-      </p:pic>
-      <p:sp>
-        <p:nvSpPr>
-          <p:cNvPr id="67" name="Object 66"/>
-          <p:cNvSpPr/>
-          <p:nvPr/>
-        </p:nvSpPr>
-        <p:spPr>
-          <a:xfrm>
-            <a:off x="2926080" y="2971800"/>
             <a:ext cx="640080" cy="274320"/>
           </a:xfrm>
           <a:prstGeom prst="rect">

--- a/mycatalog-architecture-diagram-template.pptx
+++ b/mycatalog-architecture-diagram-template.pptx
@@ -524,7 +524,7 @@
           <a:p>
             <a:r>
               <a:rPr lang="en-US" dirty="0" smtClean="0"/>
-              <a:t>Generated on Sun Aug 10 2025 07:03:51 GMT+0000 (Coordinated Universal Time)</a:t>
+              <a:t>Generated on Sun Aug 17 2025 07:04:08 GMT+0000 (Coordinated Universal Time)</a:t>
             </a:r>
             <a:endParaRPr lang="en-US" dirty="0"/>
           </a:p>
@@ -20966,7 +20966,7 @@
       </p:sp>
       <p:pic>
         <p:nvPicPr>
-          <p:cNvPr id="13" name="Object 12" descr="public/generated/icons/18de078f-e6b0-4b47-a7c4-0ed2f93f3e1d.png">    </p:cNvPr>
+          <p:cNvPr id="13" name="Object 12" descr="public/generated/icons/20aaec51-7943-4509-a180-5360036fd649.png">    </p:cNvPr>
           <p:cNvPicPr>
             <a:picLocks noChangeAspect="1"/>
           </p:cNvPicPr>
@@ -21022,7 +21022,7 @@
                 <a:ea typeface="Helvetica" pitchFamily="34" charset="-122"/>
                 <a:cs typeface="Helvetica" pitchFamily="34" charset="-120"/>
               </a:rPr>
-              <a:t>ANALYTICS ENGINE</a:t>
+              <a:t>ALICE</a:t>
             </a:r>
             <a:endParaRPr lang="en-US" dirty="0"/>
           </a:p>
@@ -21055,7 +21055,7 @@
       </p:sp>
       <p:pic>
         <p:nvPicPr>
-          <p:cNvPr id="16" name="Object 15" descr="public/generated/icons/b77c8f80-f155-11eb-8766-1f68cf60a2c4.png">    </p:cNvPr>
+          <p:cNvPr id="16" name="Object 15" descr="public/generated/icons/18de078f-e6b0-4b47-a7c4-0ed2f93f3e1d.png">    </p:cNvPr>
           <p:cNvPicPr>
             <a:picLocks noChangeAspect="1"/>
           </p:cNvPicPr>
@@ -21111,7 +21111,7 @@
                 <a:ea typeface="Helvetica" pitchFamily="34" charset="-122"/>
                 <a:cs typeface="Helvetica" pitchFamily="34" charset="-120"/>
               </a:rPr>
-              <a:t>ANONTECH VIZIVAULT PLATFORM</a:t>
+              <a:t>ANALYTICS ENGINE</a:t>
             </a:r>
             <a:endParaRPr lang="en-US" dirty="0"/>
           </a:p>
@@ -21144,7 +21144,7 @@
       </p:sp>
       <p:pic>
         <p:nvPicPr>
-          <p:cNvPr id="19" name="Object 18" descr="public/generated/icons/8c437b59-5f6a-460c-b11a-5b7cabf058cb.png">    </p:cNvPr>
+          <p:cNvPr id="19" name="Object 18" descr="public/generated/icons/b77c8f80-f155-11eb-8766-1f68cf60a2c4.png">    </p:cNvPr>
           <p:cNvPicPr>
             <a:picLocks noChangeAspect="1"/>
           </p:cNvPicPr>
@@ -21200,7 +21200,7 @@
                 <a:ea typeface="Helvetica" pitchFamily="34" charset="-122"/>
                 <a:cs typeface="Helvetica" pitchFamily="34" charset="-120"/>
               </a:rPr>
-              <a:t>ANYCLOUD BACKUP FOR 365</a:t>
+              <a:t>ANONTECH VIZIVAULT PLATFORM</a:t>
             </a:r>
             <a:endParaRPr lang="en-US" dirty="0"/>
           </a:p>
@@ -21233,7 +21233,7 @@
       </p:sp>
       <p:pic>
         <p:nvPicPr>
-          <p:cNvPr id="22" name="Object 21" descr="public/generated/icons/api-connect.png">    </p:cNvPr>
+          <p:cNvPr id="22" name="Object 21" descr="public/generated/icons/8c437b59-5f6a-460c-b11a-5b7cabf058cb.png">    </p:cNvPr>
           <p:cNvPicPr>
             <a:picLocks noChangeAspect="1"/>
           </p:cNvPicPr>
@@ -21289,7 +21289,7 @@
                 <a:ea typeface="Helvetica" pitchFamily="34" charset="-122"/>
                 <a:cs typeface="Helvetica" pitchFamily="34" charset="-120"/>
               </a:rPr>
-              <a:t>API CONNECT</a:t>
+              <a:t>ANYCLOUD BACKUP FOR 365</a:t>
             </a:r>
             <a:endParaRPr lang="en-US" dirty="0"/>
           </a:p>
@@ -21322,7 +21322,7 @@
       </p:sp>
       <p:pic>
         <p:nvPicPr>
-          <p:cNvPr id="25" name="Object 24" descr="public/generated/icons/09edee6c-6ec8-4bc9-823a-3d8d193b7bd9.png">    </p:cNvPr>
+          <p:cNvPr id="25" name="Object 24" descr="public/generated/icons/api-connect.png">    </p:cNvPr>
           <p:cNvPicPr>
             <a:picLocks noChangeAspect="1"/>
           </p:cNvPicPr>
@@ -21378,7 +21378,7 @@
                 <a:ea typeface="Helvetica" pitchFamily="34" charset="-122"/>
                 <a:cs typeface="Helvetica" pitchFamily="34" charset="-120"/>
               </a:rPr>
-              <a:t>API-BRIDGE FOR I </a:t>
+              <a:t>API CONNECT</a:t>
             </a:r>
             <a:endParaRPr lang="en-US" dirty="0"/>
           </a:p>
@@ -21411,7 +21411,7 @@
       </p:sp>
       <p:pic>
         <p:nvPicPr>
-          <p:cNvPr id="28" name="Object 27" descr="public/generated/icons/apprapp-d6aece47-d840-45b0-8ab9-ad15354deeea.png">    </p:cNvPr>
+          <p:cNvPr id="28" name="Object 27" descr="public/generated/icons/09edee6c-6ec8-4bc9-823a-3d8d193b7bd9.png">    </p:cNvPr>
           <p:cNvPicPr>
             <a:picLocks noChangeAspect="1"/>
           </p:cNvPicPr>
@@ -21467,7 +21467,7 @@
                 <a:ea typeface="Helvetica" pitchFamily="34" charset="-122"/>
                 <a:cs typeface="Helvetica" pitchFamily="34" charset="-120"/>
               </a:rPr>
-              <a:t>APP CONFIGURATION</a:t>
+              <a:t>API-BRIDGE FOR I </a:t>
             </a:r>
             <a:endParaRPr lang="en-US" dirty="0"/>
           </a:p>
@@ -21500,7 +21500,7 @@
       </p:sp>
       <p:pic>
         <p:nvPicPr>
-          <p:cNvPr id="31" name="Object 30" descr="public/generated/icons/AdvancedMobileAccess-d6aece47-d840-45b0-8ab9-ad15354deeea.png">    </p:cNvPr>
+          <p:cNvPr id="31" name="Object 30" descr="public/generated/icons/apprapp-d6aece47-d840-45b0-8ab9-ad15354deeea.png">    </p:cNvPr>
           <p:cNvPicPr>
             <a:picLocks noChangeAspect="1"/>
           </p:cNvPicPr>
@@ -21556,7 +21556,7 @@
                 <a:ea typeface="Helvetica" pitchFamily="34" charset="-122"/>
                 <a:cs typeface="Helvetica" pitchFamily="34" charset="-120"/>
               </a:rPr>
-              <a:t>APP ID</a:t>
+              <a:t>APP CONFIGURATION</a:t>
             </a:r>
             <a:endParaRPr lang="en-US" dirty="0"/>
           </a:p>
@@ -21589,7 +21589,7 @@
       </p:sp>
       <p:pic>
         <p:nvPicPr>
-          <p:cNvPr id="34" name="Object 33" descr="public/generated/icons/is.instance-group.png">    </p:cNvPr>
+          <p:cNvPr id="34" name="Object 33" descr="public/generated/icons/AdvancedMobileAccess-d6aece47-d840-45b0-8ab9-ad15354deeea.png">    </p:cNvPr>
           <p:cNvPicPr>
             <a:picLocks noChangeAspect="1"/>
           </p:cNvPicPr>
@@ -21645,7 +21645,7 @@
                 <a:ea typeface="Helvetica" pitchFamily="34" charset="-122"/>
                 <a:cs typeface="Helvetica" pitchFamily="34" charset="-120"/>
               </a:rPr>
-              <a:t>AUTO SCALE FOR VPC</a:t>
+              <a:t>APP ID</a:t>
             </a:r>
             <a:endParaRPr lang="en-US" dirty="0"/>
           </a:p>
@@ -21678,7 +21678,7 @@
       </p:sp>
       <p:pic>
         <p:nvPicPr>
-          <p:cNvPr id="37" name="Object 36" descr="public/generated/icons/1.png">    </p:cNvPr>
+          <p:cNvPr id="37" name="Object 36" descr="public/generated/icons/is.instance-group.png">    </p:cNvPr>
           <p:cNvPicPr>
             <a:picLocks noChangeAspect="1"/>
           </p:cNvPicPr>
@@ -21734,7 +21734,7 @@
                 <a:ea typeface="Helvetica" pitchFamily="34" charset="-122"/>
                 <a:cs typeface="Helvetica" pitchFamily="34" charset="-120"/>
               </a:rPr>
-              <a:t>BARE METAL SERVER FOR CLASSIC</a:t>
+              <a:t>AUTO SCALE FOR VPC</a:t>
             </a:r>
             <a:endParaRPr lang="en-US" dirty="0"/>
           </a:p>
@@ -21767,7 +21767,7 @@
       </p:sp>
       <p:pic>
         <p:nvPicPr>
-          <p:cNvPr id="40" name="Object 39" descr="public/generated/icons/is.bare-metal-server.png">    </p:cNvPr>
+          <p:cNvPr id="40" name="Object 39" descr="public/generated/icons/1.png">    </p:cNvPr>
           <p:cNvPicPr>
             <a:picLocks noChangeAspect="1"/>
           </p:cNvPicPr>
@@ -21823,7 +21823,7 @@
                 <a:ea typeface="Helvetica" pitchFamily="34" charset="-122"/>
                 <a:cs typeface="Helvetica" pitchFamily="34" charset="-120"/>
               </a:rPr>
-              <a:t>BARE METAL SERVERS FOR VPC</a:t>
+              <a:t>BARE METAL SERVER FOR CLASSIC</a:t>
             </a:r>
             <a:endParaRPr lang="en-US" dirty="0"/>
           </a:p>
@@ -21856,7 +21856,7 @@
       </p:sp>
       <p:pic>
         <p:nvPicPr>
-          <p:cNvPr id="43" name="Object 42" descr="public/generated/icons/ee700ab3-6951-4c68-b541-a177f78eed53.png">    </p:cNvPr>
+          <p:cNvPr id="43" name="Object 42" descr="public/generated/icons/is.bare-metal-server.png">    </p:cNvPr>
           <p:cNvPicPr>
             <a:picLocks noChangeAspect="1"/>
           </p:cNvPicPr>
@@ -21912,7 +21912,7 @@
                 <a:ea typeface="Helvetica" pitchFamily="34" charset="-122"/>
                 <a:cs typeface="Helvetica" pitchFamily="34" charset="-120"/>
               </a:rPr>
-              <a:t>BESPOKEN AUTOMATED TESTING FOR IVR AND CHAT</a:t>
+              <a:t>BARE METAL SERVERS FOR VPC</a:t>
             </a:r>
             <a:endParaRPr lang="en-US" dirty="0"/>
           </a:p>
@@ -21945,7 +21945,7 @@
       </p:sp>
       <p:pic>
         <p:nvPicPr>
-          <p:cNvPr id="46" name="Object 45" descr="public/generated/icons/block-storage-group.png">    </p:cNvPr>
+          <p:cNvPr id="46" name="Object 45" descr="public/generated/icons/ee700ab3-6951-4c68-b541-a177f78eed53.png">    </p:cNvPr>
           <p:cNvPicPr>
             <a:picLocks noChangeAspect="1"/>
           </p:cNvPicPr>
@@ -22001,7 +22001,7 @@
                 <a:ea typeface="Helvetica" pitchFamily="34" charset="-122"/>
                 <a:cs typeface="Helvetica" pitchFamily="34" charset="-120"/>
               </a:rPr>
-              <a:t>BLOCK STORAGE FOR CLASSIC</a:t>
+              <a:t>BESPOKEN AUTOMATED TESTING FOR IVR AND CHAT</a:t>
             </a:r>
             <a:endParaRPr lang="en-US" dirty="0"/>
           </a:p>
@@ -22034,7 +22034,7 @@
       </p:sp>
       <p:pic>
         <p:nvPicPr>
-          <p:cNvPr id="49" name="Object 48" descr="public/generated/icons/is.volume.png">    </p:cNvPr>
+          <p:cNvPr id="49" name="Object 48" descr="public/generated/icons/block-storage-group.png">    </p:cNvPr>
           <p:cNvPicPr>
             <a:picLocks noChangeAspect="1"/>
           </p:cNvPicPr>
@@ -22090,7 +22090,7 @@
                 <a:ea typeface="Helvetica" pitchFamily="34" charset="-122"/>
                 <a:cs typeface="Helvetica" pitchFamily="34" charset="-120"/>
               </a:rPr>
-              <a:t>BLOCK STORAGE FOR VPC</a:t>
+              <a:t>BLOCK STORAGE FOR CLASSIC</a:t>
             </a:r>
             <a:endParaRPr lang="en-US" dirty="0"/>
           </a:p>
@@ -22123,7 +22123,7 @@
       </p:sp>
       <p:pic>
         <p:nvPicPr>
-          <p:cNvPr id="52" name="Object 51" descr="public/generated/icons/is.snapshot.png">    </p:cNvPr>
+          <p:cNvPr id="52" name="Object 51" descr="public/generated/icons/is.volume.png">    </p:cNvPr>
           <p:cNvPicPr>
             <a:picLocks noChangeAspect="1"/>
           </p:cNvPicPr>
@@ -22179,7 +22179,7 @@
                 <a:ea typeface="Helvetica" pitchFamily="34" charset="-122"/>
                 <a:cs typeface="Helvetica" pitchFamily="34" charset="-120"/>
               </a:rPr>
-              <a:t>BLOCK STORAGE SNAPSHOTS FOR VPC</a:t>
+              <a:t>BLOCK STORAGE FOR VPC</a:t>
             </a:r>
             <a:endParaRPr lang="en-US" dirty="0"/>
           </a:p>
@@ -22212,7 +22212,7 @@
       </p:sp>
       <p:pic>
         <p:nvPicPr>
-          <p:cNvPr id="55" name="Object 54" descr="public/generated/icons/e687e558-849d-40cc-8043-cd8071f659e9.png">    </p:cNvPr>
+          <p:cNvPr id="55" name="Object 54" descr="public/generated/icons/is.snapshot.png">    </p:cNvPr>
           <p:cNvPicPr>
             <a:picLocks noChangeAspect="1"/>
           </p:cNvPicPr>
@@ -22268,7 +22268,7 @@
                 <a:ea typeface="Helvetica" pitchFamily="34" charset="-122"/>
                 <a:cs typeface="Helvetica" pitchFamily="34" charset="-120"/>
               </a:rPr>
-              <a:t>BUS4I SYSTEM COPY - MIGRATE 23 FOR POWER I</a:t>
+              <a:t>BLOCK STORAGE SNAPSHOTS FOR VPC</a:t>
             </a:r>
             <a:endParaRPr lang="en-US" dirty="0"/>
           </a:p>
@@ -22301,7 +22301,7 @@
       </p:sp>
       <p:pic>
         <p:nvPicPr>
-          <p:cNvPr id="58" name="Object 57" descr="public/generated/icons/cf329950-0a3e-11e8-922e-f1366c6e1c83-caveonix.png">    </p:cNvPr>
+          <p:cNvPr id="58" name="Object 57" descr="public/generated/icons/e687e558-849d-40cc-8043-cd8071f659e9.png">    </p:cNvPr>
           <p:cNvPicPr>
             <a:picLocks noChangeAspect="1"/>
           </p:cNvPicPr>
@@ -22357,7 +22357,7 @@
                 <a:ea typeface="Helvetica" pitchFamily="34" charset="-122"/>
                 <a:cs typeface="Helvetica" pitchFamily="34" charset="-120"/>
               </a:rPr>
-              <a:t>CAVEONIX RISKFORESIGHT</a:t>
+              <a:t>BUS4I SYSTEM COPY - MIGRATE 23 FOR POWER I</a:t>
             </a:r>
             <a:endParaRPr lang="en-US" dirty="0"/>
           </a:p>
@@ -22390,7 +22390,7 @@
       </p:sp>
       <p:pic>
         <p:nvPicPr>
-          <p:cNvPr id="61" name="Object 60" descr="public/generated/icons/3e256427-c6fd-4ba6-aae9-d809eb39ea15.png">    </p:cNvPr>
+          <p:cNvPr id="61" name="Object 60" descr="public/generated/icons/cf329950-0a3e-11e8-922e-f1366c6e1c83-caveonix.png">    </p:cNvPr>
           <p:cNvPicPr>
             <a:picLocks noChangeAspect="1"/>
           </p:cNvPicPr>
@@ -22446,7 +22446,7 @@
                 <a:ea typeface="Helvetica" pitchFamily="34" charset="-122"/>
                 <a:cs typeface="Helvetica" pitchFamily="34" charset="-120"/>
               </a:rPr>
-              <a:t>CELERITY COPYASSURE FOR POWERVS</a:t>
+              <a:t>CAVEONIX RISKFORESIGHT</a:t>
             </a:r>
             <a:endParaRPr lang="en-US" dirty="0"/>
           </a:p>
@@ -22479,7 +22479,7 @@
       </p:sp>
       <p:pic>
         <p:nvPicPr>
-          <p:cNvPr id="64" name="Object 63" descr="public/generated/icons/82114d8b-41e0-4f31-a8c8-b36e4f80b077.png">    </p:cNvPr>
+          <p:cNvPr id="64" name="Object 63" descr="public/generated/icons/3e256427-c6fd-4ba6-aae9-d809eb39ea15.png">    </p:cNvPr>
           <p:cNvPicPr>
             <a:picLocks noChangeAspect="1"/>
           </p:cNvPicPr>
@@ -22535,7 +22535,7 @@
                 <a:ea typeface="Helvetica" pitchFamily="34" charset="-122"/>
                 <a:cs typeface="Helvetica" pitchFamily="34" charset="-120"/>
               </a:rPr>
-              <a:t>CELERITY PROFESSIONAL SERVICES FOR POWERVS</a:t>
+              <a:t>CELERITY COPYASSURE FOR POWERVS</a:t>
             </a:r>
             <a:endParaRPr lang="en-US" dirty="0"/>
           </a:p>
@@ -22568,7 +22568,7 @@
       </p:sp>
       <p:pic>
         <p:nvPicPr>
-          <p:cNvPr id="67" name="Object 66" descr="public/generated/icons/5b8aa656-9da6-4683-a21b-7d3d45361d94.png">    </p:cNvPr>
+          <p:cNvPr id="67" name="Object 66" descr="public/generated/icons/82114d8b-41e0-4f31-a8c8-b36e4f80b077.png">    </p:cNvPr>
           <p:cNvPicPr>
             <a:picLocks noChangeAspect="1"/>
           </p:cNvPicPr>
@@ -22624,7 +22624,7 @@
                 <a:ea typeface="Helvetica" pitchFamily="34" charset="-122"/>
                 <a:cs typeface="Helvetica" pitchFamily="34" charset="-120"/>
               </a:rPr>
-              <a:t>CHECK-A-ROO</a:t>
+              <a:t>CELERITY PROFESSIONAL SERVICES FOR POWERVS</a:t>
             </a:r>
             <a:endParaRPr lang="en-US" dirty="0"/>
           </a:p>
@@ -22657,7 +22657,7 @@
       </p:sp>
       <p:pic>
         <p:nvPicPr>
-          <p:cNvPr id="70" name="Object 69" descr="public/generated/icons/0a42129b-9839-42b7-90c7-7f3adb435379.png">    </p:cNvPr>
+          <p:cNvPr id="70" name="Object 69" descr="public/generated/icons/5b8aa656-9da6-4683-a21b-7d3d45361d94.png">    </p:cNvPr>
           <p:cNvPicPr>
             <a:picLocks noChangeAspect="1"/>
           </p:cNvPicPr>
@@ -22713,7 +22713,7 @@
                 <a:ea typeface="Helvetica" pitchFamily="34" charset="-122"/>
                 <a:cs typeface="Helvetica" pitchFamily="34" charset="-120"/>
               </a:rPr>
-              <a:t>CITRIX NETSCALER VPX</a:t>
+              <a:t>CHECK-A-ROO</a:t>
             </a:r>
             <a:endParaRPr lang="en-US" dirty="0"/>
           </a:p>
@@ -22746,7 +22746,7 @@
       </p:sp>
       <p:pic>
         <p:nvPicPr>
-          <p:cNvPr id="73" name="Object 72" descr="public/generated/icons/is.vpn-server.png">    </p:cNvPr>
+          <p:cNvPr id="73" name="Object 72" descr="public/generated/icons/0a42129b-9839-42b7-90c7-7f3adb435379.png">    </p:cNvPr>
           <p:cNvPicPr>
             <a:picLocks noChangeAspect="1"/>
           </p:cNvPicPr>
@@ -22802,7 +22802,7 @@
                 <a:ea typeface="Helvetica" pitchFamily="34" charset="-122"/>
                 <a:cs typeface="Helvetica" pitchFamily="34" charset="-120"/>
               </a:rPr>
-              <a:t>CLIENT VPN FOR VPC</a:t>
+              <a:t>CITRIX NETSCALER VPX</a:t>
             </a:r>
             <a:endParaRPr lang="en-US" dirty="0"/>
           </a:p>
@@ -22835,7 +22835,7 @@
       </p:sp>
       <p:pic>
         <p:nvPicPr>
-          <p:cNvPr id="76" name="Object 75" descr="public/generated/icons/6cde723c-9e49-74ac-4266-3f7a9bb74216.png">    </p:cNvPr>
+          <p:cNvPr id="76" name="Object 75" descr="public/generated/icons/is.vpn-server.png">    </p:cNvPr>
           <p:cNvPicPr>
             <a:picLocks noChangeAspect="1"/>
           </p:cNvPicPr>
@@ -22891,7 +22891,7 @@
                 <a:ea typeface="Helvetica" pitchFamily="34" charset="-122"/>
                 <a:cs typeface="Helvetica" pitchFamily="34" charset="-120"/>
               </a:rPr>
-              <a:t>CLOUD BACKUP FOR CLASSIC</a:t>
+              <a:t>CLIENT VPN FOR VPC</a:t>
             </a:r>
             <a:endParaRPr lang="en-US" dirty="0"/>
           </a:p>
@@ -22924,7 +22924,7 @@
       </p:sp>
       <p:pic>
         <p:nvPicPr>
-          <p:cNvPr id="79" name="Object 78" descr="public/generated/icons/is.backup-policy.png">    </p:cNvPr>
+          <p:cNvPr id="79" name="Object 78" descr="public/generated/icons/6cde723c-9e49-74ac-4266-3f7a9bb74216.png">    </p:cNvPr>
           <p:cNvPicPr>
             <a:picLocks noChangeAspect="1"/>
           </p:cNvPicPr>
@@ -22980,7 +22980,7 @@
                 <a:ea typeface="Helvetica" pitchFamily="34" charset="-122"/>
                 <a:cs typeface="Helvetica" pitchFamily="34" charset="-120"/>
               </a:rPr>
-              <a:t>CLOUD BACKUP FOR VPC</a:t>
+              <a:t>CLOUD BACKUP FOR CLASSIC</a:t>
             </a:r>
             <a:endParaRPr lang="en-US" dirty="0"/>
           </a:p>
@@ -23013,7 +23013,7 @@
       </p:sp>
       <p:pic>
         <p:nvPicPr>
-          <p:cNvPr id="82" name="Object 81" descr="public/generated/icons/hardware-security-module.png">    </p:cNvPr>
+          <p:cNvPr id="82" name="Object 81" descr="public/generated/icons/is.backup-policy.png">    </p:cNvPr>
           <p:cNvPicPr>
             <a:picLocks noChangeAspect="1"/>
           </p:cNvPicPr>
@@ -23069,7 +23069,7 @@
                 <a:ea typeface="Helvetica" pitchFamily="34" charset="-122"/>
                 <a:cs typeface="Helvetica" pitchFamily="34" charset="-120"/>
               </a:rPr>
-              <a:t>CLOUD HSM</a:t>
+              <a:t>CLOUD BACKUP FOR VPC</a:t>
             </a:r>
             <a:endParaRPr lang="en-US" dirty="0"/>
           </a:p>
@@ -23102,7 +23102,7 @@
       </p:sp>
       <p:pic>
         <p:nvPicPr>
-          <p:cNvPr id="85" name="Object 84" descr="public/generated/icons/a3b01d2d-5457-4269-8bd5-a7c815bd2f41.png">    </p:cNvPr>
+          <p:cNvPr id="85" name="Object 84" descr="public/generated/icons/hardware-security-module.png">    </p:cNvPr>
           <p:cNvPicPr>
             <a:picLocks noChangeAspect="1"/>
           </p:cNvPicPr>
@@ -23158,7 +23158,7 @@
                 <a:ea typeface="Helvetica" pitchFamily="34" charset="-122"/>
                 <a:cs typeface="Helvetica" pitchFamily="34" charset="-120"/>
               </a:rPr>
-              <a:t>CLOUD LOAD BALANCER</a:t>
+              <a:t>CLOUD HSM</a:t>
             </a:r>
             <a:endParaRPr lang="en-US" dirty="0"/>
           </a:p>
@@ -23191,7 +23191,7 @@
       </p:sp>
       <p:pic>
         <p:nvPicPr>
-          <p:cNvPr id="88" name="Object 87" descr="public/generated/icons/cd515180-d78a-11ec-b396-db7d306c4f73.png">    </p:cNvPr>
+          <p:cNvPr id="88" name="Object 87" descr="public/generated/icons/a3b01d2d-5457-4269-8bd5-a7c815bd2f41.png">    </p:cNvPr>
           <p:cNvPicPr>
             <a:picLocks noChangeAspect="1"/>
           </p:cNvPicPr>
@@ -23247,7 +23247,7 @@
                 <a:ea typeface="Helvetica" pitchFamily="34" charset="-122"/>
                 <a:cs typeface="Helvetica" pitchFamily="34" charset="-120"/>
               </a:rPr>
-              <a:t>CLOUD LOGS</a:t>
+              <a:t>CLOUD LOAD BALANCER</a:t>
             </a:r>
             <a:endParaRPr lang="en-US" dirty="0"/>
           </a:p>
@@ -23280,7 +23280,7 @@
       </p:sp>
       <p:pic>
         <p:nvPicPr>
-          <p:cNvPr id="91" name="Object 90" descr="public/generated/icons/090c2c10-8c38-11e8-bec2-493df9c49eb8.png">    </p:cNvPr>
+          <p:cNvPr id="91" name="Object 90" descr="public/generated/icons/cd515180-d78a-11ec-b396-db7d306c4f73.png">    </p:cNvPr>
           <p:cNvPicPr>
             <a:picLocks noChangeAspect="1"/>
           </p:cNvPicPr>
@@ -23336,7 +23336,7 @@
                 <a:ea typeface="Helvetica" pitchFamily="34" charset="-122"/>
                 <a:cs typeface="Helvetica" pitchFamily="34" charset="-120"/>
               </a:rPr>
-              <a:t>CLOUD MONITORING</a:t>
+              <a:t>CLOUD LOGS</a:t>
             </a:r>
             <a:endParaRPr lang="en-US" dirty="0"/>
           </a:p>
@@ -23369,7 +23369,7 @@
       </p:sp>
       <p:pic>
         <p:nvPicPr>
-          <p:cNvPr id="94" name="Object 93" descr="public/generated/icons/a9617650-09ff-11ec-85f2-d10915d24d79.png">    </p:cNvPr>
+          <p:cNvPr id="94" name="Object 93" descr="public/generated/icons/090c2c10-8c38-11e8-bec2-493df9c49eb8.png">    </p:cNvPr>
           <p:cNvPicPr>
             <a:picLocks noChangeAspect="1"/>
           </p:cNvPicPr>
@@ -23425,7 +23425,7 @@
                 <a:ea typeface="Helvetica" pitchFamily="34" charset="-122"/>
                 <a:cs typeface="Helvetica" pitchFamily="34" charset="-120"/>
               </a:rPr>
-              <a:t>CLOUD NATIVE STORAGE AND DATA SERVICE</a:t>
+              <a:t>CLOUD MONITORING</a:t>
             </a:r>
             <a:endParaRPr lang="en-US" dirty="0"/>
           </a:p>
@@ -23458,7 +23458,7 @@
       </p:sp>
       <p:pic>
         <p:nvPicPr>
-          <p:cNvPr id="97" name="Object 96" descr="public/generated/icons/dff97f5c-bc5e-4455-b470-411c3edbe49c.png">    </p:cNvPr>
+          <p:cNvPr id="97" name="Object 96" descr="public/generated/icons/a9617650-09ff-11ec-85f2-d10915d24d79.png">    </p:cNvPr>
           <p:cNvPicPr>
             <a:picLocks noChangeAspect="1"/>
           </p:cNvPicPr>
@@ -23514,7 +23514,7 @@
                 <a:ea typeface="Helvetica" pitchFamily="34" charset="-122"/>
                 <a:cs typeface="Helvetica" pitchFamily="34" charset="-120"/>
               </a:rPr>
-              <a:t>CLOUD OBJECT STORAGE</a:t>
+              <a:t>CLOUD NATIVE STORAGE AND DATA SERVICE</a:t>
             </a:r>
             <a:endParaRPr lang="en-US" dirty="0"/>
           </a:p>
@@ -23547,7 +23547,7 @@
       </p:sp>
       <p:pic>
         <p:nvPicPr>
-          <p:cNvPr id="100" name="Object 99" descr="public/generated/icons/8.png">    </p:cNvPr>
+          <p:cNvPr id="100" name="Object 99" descr="public/generated/icons/dff97f5c-bc5e-4455-b470-411c3edbe49c.png">    </p:cNvPr>
           <p:cNvPicPr>
             <a:picLocks noChangeAspect="1"/>
           </p:cNvPicPr>
@@ -23603,7 +23603,7 @@
                 <a:ea typeface="Helvetica" pitchFamily="34" charset="-122"/>
                 <a:cs typeface="Helvetica" pitchFamily="34" charset="-120"/>
               </a:rPr>
-              <a:t>CLOUD OBJECT STORAGE (CLASSIC)</a:t>
+              <a:t>CLOUD OBJECT STORAGE</a:t>
             </a:r>
             <a:endParaRPr lang="en-US" dirty="0"/>
           </a:p>
@@ -23636,7 +23636,7 @@
       </p:sp>
       <p:pic>
         <p:nvPicPr>
-          <p:cNvPr id="103" name="Object 102" descr="public/generated/icons/35759612-efad-48d5-ad2a-5336349ed9bc.png">    </p:cNvPr>
+          <p:cNvPr id="103" name="Object 102" descr="public/generated/icons/8.png">    </p:cNvPr>
           <p:cNvPicPr>
             <a:picLocks noChangeAspect="1"/>
           </p:cNvPicPr>
@@ -23692,7 +23692,7 @@
                 <a:ea typeface="Helvetica" pitchFamily="34" charset="-122"/>
                 <a:cs typeface="Helvetica" pitchFamily="34" charset="-120"/>
               </a:rPr>
-              <a:t>CLOUD PLATFORM PROFESSIONAL SERVICES</a:t>
+              <a:t>CLOUD OBJECT STORAGE (CLASSIC)</a:t>
             </a:r>
             <a:endParaRPr lang="en-US" dirty="0"/>
           </a:p>
@@ -23725,7 +23725,7 @@
       </p:sp>
       <p:pic>
         <p:nvPicPr>
-          <p:cNvPr id="106" name="Object 105" descr="public/generated/icons/is.reservation.png">    </p:cNvPr>
+          <p:cNvPr id="106" name="Object 105" descr="public/generated/icons/35759612-efad-48d5-ad2a-5336349ed9bc.png">    </p:cNvPr>
           <p:cNvPicPr>
             <a:picLocks noChangeAspect="1"/>
           </p:cNvPicPr>
@@ -23781,7 +23781,7 @@
                 <a:ea typeface="Helvetica" pitchFamily="34" charset="-122"/>
                 <a:cs typeface="Helvetica" pitchFamily="34" charset="-120"/>
               </a:rPr>
-              <a:t>CLOUD RESERVATIONS FOR VPC</a:t>
+              <a:t>CLOUD PLATFORM PROFESSIONAL SERVICES</a:t>
             </a:r>
             <a:endParaRPr lang="en-US" dirty="0"/>
           </a:p>
@@ -23814,7 +23814,7 @@
       </p:sp>
       <p:pic>
         <p:nvPicPr>
-          <p:cNvPr id="109" name="Object 108" descr="public/generated/icons/cf329950-0a3e-11e8-922e-f1366c6e1c83-hytrust.png">    </p:cNvPr>
+          <p:cNvPr id="109" name="Object 108" descr="public/generated/icons/is.reservation.png">    </p:cNvPr>
           <p:cNvPicPr>
             <a:picLocks noChangeAspect="1"/>
           </p:cNvPicPr>
@@ -23870,7 +23870,7 @@
                 <a:ea typeface="Helvetica" pitchFamily="34" charset="-122"/>
                 <a:cs typeface="Helvetica" pitchFamily="34" charset="-120"/>
               </a:rPr>
-              <a:t>CLOUD SECURE VIRTUALIZATION</a:t>
+              <a:t>CLOUD RESERVATIONS FOR VPC</a:t>
             </a:r>
             <a:endParaRPr lang="en-US" dirty="0"/>
           </a:p>
@@ -23936,7 +23936,7 @@
       </p:sp>
       <p:pic>
         <p:nvPicPr>
-          <p:cNvPr id="3" name="Object 2" descr="public/generated/icons/cloudant.png">    </p:cNvPr>
+          <p:cNvPr id="3" name="Object 2" descr="public/generated/icons/cf329950-0a3e-11e8-922e-f1366c6e1c83-hytrust.png">    </p:cNvPr>
           <p:cNvPicPr>
             <a:picLocks noChangeAspect="1"/>
           </p:cNvPicPr>
@@ -23992,7 +23992,7 @@
                 <a:ea typeface="Helvetica" pitchFamily="34" charset="-122"/>
                 <a:cs typeface="Helvetica" pitchFamily="34" charset="-120"/>
               </a:rPr>
-              <a:t>CLOUDANT</a:t>
+              <a:t>CLOUD SECURE VIRTUALIZATION</a:t>
             </a:r>
             <a:endParaRPr lang="en-US" dirty="0"/>
           </a:p>
@@ -24025,7 +24025,7 @@
       </p:sp>
       <p:pic>
         <p:nvPicPr>
-          <p:cNvPr id="6" name="Object 5" descr="public/generated/icons/e7114cc0-ffd2-4199-bc1a-ea79a6f09e89.png">    </p:cNvPr>
+          <p:cNvPr id="6" name="Object 5" descr="public/generated/icons/cloudant.png">    </p:cNvPr>
           <p:cNvPicPr>
             <a:picLocks noChangeAspect="1"/>
           </p:cNvPicPr>
@@ -24081,7 +24081,7 @@
                 <a:ea typeface="Helvetica" pitchFamily="34" charset="-122"/>
                 <a:cs typeface="Helvetica" pitchFamily="34" charset="-120"/>
               </a:rPr>
-              <a:t>CLOUDSWAY CDN PRO</a:t>
+              <a:t>CLOUDANT</a:t>
             </a:r>
             <a:endParaRPr lang="en-US" dirty="0"/>
           </a:p>
@@ -24114,7 +24114,7 @@
       </p:sp>
       <p:pic>
         <p:nvPicPr>
-          <p:cNvPr id="9" name="Object 8" descr="public/generated/icons/is.cluster-network.png">    </p:cNvPr>
+          <p:cNvPr id="9" name="Object 8" descr="public/generated/icons/e7114cc0-ffd2-4199-bc1a-ea79a6f09e89.png">    </p:cNvPr>
           <p:cNvPicPr>
             <a:picLocks noChangeAspect="1"/>
           </p:cNvPicPr>
@@ -24170,7 +24170,7 @@
                 <a:ea typeface="Helvetica" pitchFamily="34" charset="-122"/>
                 <a:cs typeface="Helvetica" pitchFamily="34" charset="-120"/>
               </a:rPr>
-              <a:t>CLUSTER NETWORK</a:t>
+              <a:t>CLOUDSWAY CDN PRO</a:t>
             </a:r>
             <a:endParaRPr lang="en-US" dirty="0"/>
           </a:p>
@@ -24203,7 +24203,7 @@
       </p:sp>
       <p:pic>
         <p:nvPicPr>
-          <p:cNvPr id="12" name="Object 11" descr="public/generated/icons/afb603e9-8738-4542-abf4-baf5231a4dbe.png">    </p:cNvPr>
+          <p:cNvPr id="12" name="Object 11" descr="public/generated/icons/is.cluster-network.png">    </p:cNvPr>
           <p:cNvPicPr>
             <a:picLocks noChangeAspect="1"/>
           </p:cNvPicPr>
@@ -24259,7 +24259,7 @@
                 <a:ea typeface="Helvetica" pitchFamily="34" charset="-122"/>
                 <a:cs typeface="Helvetica" pitchFamily="34" charset="-120"/>
               </a:rPr>
-              <a:t>COBALT IRON - SECURE AUTOMATED BACKUP WITH COMPASS</a:t>
+              <a:t>CLUSTER NETWORK</a:t>
             </a:r>
             <a:endParaRPr lang="en-US" dirty="0"/>
           </a:p>
@@ -24292,7 +24292,7 @@
       </p:sp>
       <p:pic>
         <p:nvPicPr>
-          <p:cNvPr id="15" name="Object 14" descr="public/generated/icons/2ad2fdd0-bba5-11ea-8966-5d6402fed1c7.png">    </p:cNvPr>
+          <p:cNvPr id="15" name="Object 14" descr="public/generated/icons/afb603e9-8738-4542-abf4-baf5231a4dbe.png">    </p:cNvPr>
           <p:cNvPicPr>
             <a:picLocks noChangeAspect="1"/>
           </p:cNvPicPr>
@@ -24348,7 +24348,7 @@
                 <a:ea typeface="Helvetica" pitchFamily="34" charset="-122"/>
                 <a:cs typeface="Helvetica" pitchFamily="34" charset="-120"/>
               </a:rPr>
-              <a:t>CODE ENGINE</a:t>
+              <a:t>COBALT IRON - SECURE AUTOMATED BACKUP WITH COMPASS</a:t>
             </a:r>
             <a:endParaRPr lang="en-US" dirty="0"/>
           </a:p>
@@ -24381,7 +24381,7 @@
       </p:sp>
       <p:pic>
         <p:nvPicPr>
-          <p:cNvPr id="18" name="Object 17" descr="public/generated/icons/3e1a2c30-11dd-11ec-b621-67e0f6600d56.png">    </p:cNvPr>
+          <p:cNvPr id="18" name="Object 17" descr="public/generated/icons/2ad2fdd0-bba5-11ea-8966-5d6402fed1c7.png">    </p:cNvPr>
           <p:cNvPicPr>
             <a:picLocks noChangeAspect="1"/>
           </p:cNvPicPr>
@@ -24437,7 +24437,7 @@
                 <a:ea typeface="Helvetica" pitchFamily="34" charset="-122"/>
                 <a:cs typeface="Helvetica" pitchFamily="34" charset="-120"/>
               </a:rPr>
-              <a:t>COMPLIANCE AND CUSTOMER EXPERIENCE AUTOMATION</a:t>
+              <a:t>CODE ENGINE</a:t>
             </a:r>
             <a:endParaRPr lang="en-US" dirty="0"/>
           </a:p>
@@ -24470,7 +24470,7 @@
       </p:sp>
       <p:pic>
         <p:nvPicPr>
-          <p:cNvPr id="21" name="Object 20" descr="public/generated/icons/ComposeElasticsearch-P.png">    </p:cNvPr>
+          <p:cNvPr id="21" name="Object 20" descr="public/generated/icons/3e1a2c30-11dd-11ec-b621-67e0f6600d56.png">    </p:cNvPr>
           <p:cNvPicPr>
             <a:picLocks noChangeAspect="1"/>
           </p:cNvPicPr>
@@ -24526,7 +24526,7 @@
                 <a:ea typeface="Helvetica" pitchFamily="34" charset="-122"/>
                 <a:cs typeface="Helvetica" pitchFamily="34" charset="-120"/>
               </a:rPr>
-              <a:t>COMPOSE FOR ELASTICSEARCH</a:t>
+              <a:t>COMPLIANCE AND CUSTOMER EXPERIENCE AUTOMATION</a:t>
             </a:r>
             <a:endParaRPr lang="en-US" dirty="0"/>
           </a:p>
@@ -24559,7 +24559,7 @@
       </p:sp>
       <p:pic>
         <p:nvPicPr>
-          <p:cNvPr id="24" name="Object 23" descr="public/generated/icons/ComposeEtcd-P.png">    </p:cNvPr>
+          <p:cNvPr id="24" name="Object 23" descr="public/generated/icons/ComposeElasticsearch-P.png">    </p:cNvPr>
           <p:cNvPicPr>
             <a:picLocks noChangeAspect="1"/>
           </p:cNvPicPr>
@@ -24615,7 +24615,7 @@
                 <a:ea typeface="Helvetica" pitchFamily="34" charset="-122"/>
                 <a:cs typeface="Helvetica" pitchFamily="34" charset="-120"/>
               </a:rPr>
-              <a:t>COMPOSE FOR ETCD</a:t>
+              <a:t>COMPOSE FOR ELASTICSEARCH</a:t>
             </a:r>
             <a:endParaRPr lang="en-US" dirty="0"/>
           </a:p>
@@ -24648,7 +24648,7 @@
       </p:sp>
       <p:pic>
         <p:nvPicPr>
-          <p:cNvPr id="27" name="Object 26" descr="public/generated/icons/ComposeMongo-P.png">    </p:cNvPr>
+          <p:cNvPr id="27" name="Object 26" descr="public/generated/icons/ComposeEtcd-P.png">    </p:cNvPr>
           <p:cNvPicPr>
             <a:picLocks noChangeAspect="1"/>
           </p:cNvPicPr>
@@ -24704,7 +24704,7 @@
                 <a:ea typeface="Helvetica" pitchFamily="34" charset="-122"/>
                 <a:cs typeface="Helvetica" pitchFamily="34" charset="-120"/>
               </a:rPr>
-              <a:t>COMPOSE FOR MONGODB</a:t>
+              <a:t>COMPOSE FOR ETCD</a:t>
             </a:r>
             <a:endParaRPr lang="en-US" dirty="0"/>
           </a:p>
@@ -24737,7 +24737,7 @@
       </p:sp>
       <p:pic>
         <p:nvPicPr>
-          <p:cNvPr id="30" name="Object 29" descr="public/generated/icons/ComposePostgreSQL-P.png">    </p:cNvPr>
+          <p:cNvPr id="30" name="Object 29" descr="public/generated/icons/ComposeMongo-P.png">    </p:cNvPr>
           <p:cNvPicPr>
             <a:picLocks noChangeAspect="1"/>
           </p:cNvPicPr>
@@ -24793,7 +24793,7 @@
                 <a:ea typeface="Helvetica" pitchFamily="34" charset="-122"/>
                 <a:cs typeface="Helvetica" pitchFamily="34" charset="-120"/>
               </a:rPr>
-              <a:t>COMPOSE FOR POSTGRESQL</a:t>
+              <a:t>COMPOSE FOR MONGODB</a:t>
             </a:r>
             <a:endParaRPr lang="en-US" dirty="0"/>
           </a:p>
@@ -24826,7 +24826,7 @@
       </p:sp>
       <p:pic>
         <p:nvPicPr>
-          <p:cNvPr id="33" name="Object 32" descr="public/generated/icons/ComposeRabbitMQ-P.png">    </p:cNvPr>
+          <p:cNvPr id="33" name="Object 32" descr="public/generated/icons/ComposePostgreSQL-P.png">    </p:cNvPr>
           <p:cNvPicPr>
             <a:picLocks noChangeAspect="1"/>
           </p:cNvPicPr>
@@ -24882,7 +24882,7 @@
                 <a:ea typeface="Helvetica" pitchFamily="34" charset="-122"/>
                 <a:cs typeface="Helvetica" pitchFamily="34" charset="-120"/>
               </a:rPr>
-              <a:t>COMPOSE FOR RABBITMQ</a:t>
+              <a:t>COMPOSE FOR POSTGRESQL</a:t>
             </a:r>
             <a:endParaRPr lang="en-US" dirty="0"/>
           </a:p>
@@ -24915,7 +24915,7 @@
       </p:sp>
       <p:pic>
         <p:nvPicPr>
-          <p:cNvPr id="36" name="Object 35" descr="public/generated/icons/ComposeRedis-P.png">    </p:cNvPr>
+          <p:cNvPr id="36" name="Object 35" descr="public/generated/icons/ComposeRabbitMQ-P.png">    </p:cNvPr>
           <p:cNvPicPr>
             <a:picLocks noChangeAspect="1"/>
           </p:cNvPicPr>
@@ -24971,7 +24971,7 @@
                 <a:ea typeface="Helvetica" pitchFamily="34" charset="-122"/>
                 <a:cs typeface="Helvetica" pitchFamily="34" charset="-120"/>
               </a:rPr>
-              <a:t>COMPOSE FOR REDIS</a:t>
+              <a:t>COMPOSE FOR RABBITMQ</a:t>
             </a:r>
             <a:endParaRPr lang="en-US" dirty="0"/>
           </a:p>
@@ -25004,7 +25004,7 @@
       </p:sp>
       <p:pic>
         <p:nvPicPr>
-          <p:cNvPr id="39" name="Object 38" descr="public/generated/icons/public.bluemix.container.registry.png">    </p:cNvPr>
+          <p:cNvPr id="39" name="Object 38" descr="public/generated/icons/ComposeRedis-P.png">    </p:cNvPr>
           <p:cNvPicPr>
             <a:picLocks noChangeAspect="1"/>
           </p:cNvPicPr>
@@ -25060,7 +25060,7 @@
                 <a:ea typeface="Helvetica" pitchFamily="34" charset="-122"/>
                 <a:cs typeface="Helvetica" pitchFamily="34" charset="-120"/>
               </a:rPr>
-              <a:t>CONTAINER REGISTRY</a:t>
+              <a:t>COMPOSE FOR REDIS</a:t>
             </a:r>
             <a:endParaRPr lang="en-US" dirty="0"/>
           </a:p>
@@ -25093,7 +25093,7 @@
       </p:sp>
       <p:pic>
         <p:nvPicPr>
-          <p:cNvPr id="42" name="Object 41" descr="public/generated/icons/4ad9c1b8-e58e-2a9d-ccb8-d4d5ae84abc0.png">    </p:cNvPr>
+          <p:cNvPr id="42" name="Object 41" descr="public/generated/icons/public.bluemix.container.registry.png">    </p:cNvPr>
           <p:cNvPicPr>
             <a:picLocks noChangeAspect="1"/>
           </p:cNvPicPr>
@@ -25149,7 +25149,7 @@
                 <a:ea typeface="Helvetica" pitchFamily="34" charset="-122"/>
                 <a:cs typeface="Helvetica" pitchFamily="34" charset="-120"/>
               </a:rPr>
-              <a:t>CONTAINER SECURITY SERVICES</a:t>
+              <a:t>CONTAINER REGISTRY</a:t>
             </a:r>
             <a:endParaRPr lang="en-US" dirty="0"/>
           </a:p>
@@ -25182,7 +25182,7 @@
       </p:sp>
       <p:pic>
         <p:nvPicPr>
-          <p:cNvPr id="45" name="Object 44" descr="public/generated/icons/59b735ee-5938-4ebd-a6b2-541aef2d1f68.png">    </p:cNvPr>
+          <p:cNvPr id="45" name="Object 44" descr="public/generated/icons/4ad9c1b8-e58e-2a9d-ccb8-d4d5ae84abc0.png">    </p:cNvPr>
           <p:cNvPicPr>
             <a:picLocks noChangeAspect="1"/>
           </p:cNvPicPr>
@@ -25238,7 +25238,7 @@
                 <a:ea typeface="Helvetica" pitchFamily="34" charset="-122"/>
                 <a:cs typeface="Helvetica" pitchFamily="34" charset="-120"/>
               </a:rPr>
-              <a:t>CONTINUOUS DELIVERY</a:t>
+              <a:t>CONTAINER SECURITY SERVICES</a:t>
             </a:r>
             <a:endParaRPr lang="en-US" dirty="0"/>
           </a:p>
@@ -25271,7 +25271,7 @@
       </p:sp>
       <p:pic>
         <p:nvPicPr>
-          <p:cNvPr id="48" name="Object 47" descr="public/generated/icons/d19358fd-a20a-4bb7-9727-9d3c129db741.png">    </p:cNvPr>
+          <p:cNvPr id="48" name="Object 47" descr="public/generated/icons/59b735ee-5938-4ebd-a6b2-541aef2d1f68.png">    </p:cNvPr>
           <p:cNvPicPr>
             <a:picLocks noChangeAspect="1"/>
           </p:cNvPicPr>
@@ -25327,7 +25327,7 @@
                 <a:ea typeface="Helvetica" pitchFamily="34" charset="-122"/>
                 <a:cs typeface="Helvetica" pitchFamily="34" charset="-120"/>
               </a:rPr>
-              <a:t>CONVERLISTICS</a:t>
+              <a:t>CONTINUOUS DELIVERY</a:t>
             </a:r>
             <a:endParaRPr lang="en-US" dirty="0"/>
           </a:p>
@@ -25360,7 +25360,7 @@
       </p:sp>
       <p:pic>
         <p:nvPicPr>
-          <p:cNvPr id="51" name="Object 50" descr="public/generated/icons/742c2c0f-1c40-480d-ab7b-76e56a89f51b.png">    </p:cNvPr>
+          <p:cNvPr id="51" name="Object 50" descr="public/generated/icons/d19358fd-a20a-4bb7-9727-9d3c129db741.png">    </p:cNvPr>
           <p:cNvPicPr>
             <a:picLocks noChangeAspect="1"/>
           </p:cNvPicPr>
@@ -25416,7 +25416,7 @@
                 <a:ea typeface="Helvetica" pitchFamily="34" charset="-122"/>
                 <a:cs typeface="Helvetica" pitchFamily="34" charset="-120"/>
               </a:rPr>
-              <a:t>CONVERTIO VMWARE WORKLOAD MIGRATION AND CONVERSION</a:t>
+              <a:t>CONVERLISTICS</a:t>
             </a:r>
             <a:endParaRPr lang="en-US" dirty="0"/>
           </a:p>
@@ -25449,7 +25449,7 @@
       </p:sp>
       <p:pic>
         <p:nvPicPr>
-          <p:cNvPr id="54" name="Object 53" descr="public/generated/icons/5da26b90-7b83-44b5-b6d3-778b408b77db.png">    </p:cNvPr>
+          <p:cNvPr id="54" name="Object 53" descr="public/generated/icons/742c2c0f-1c40-480d-ab7b-76e56a89f51b.png">    </p:cNvPr>
           <p:cNvPicPr>
             <a:picLocks noChangeAspect="1"/>
           </p:cNvPicPr>
@@ -25505,7 +25505,7 @@
                 <a:ea typeface="Helvetica" pitchFamily="34" charset="-122"/>
                 <a:cs typeface="Helvetica" pitchFamily="34" charset="-120"/>
               </a:rPr>
-              <a:t>CRUSHBANK</a:t>
+              <a:t>CONVERTIO VMWARE WORKLOAD MIGRATION AND CONVERSION</a:t>
             </a:r>
             <a:endParaRPr lang="en-US" dirty="0"/>
           </a:p>
@@ -25538,7 +25538,7 @@
       </p:sp>
       <p:pic>
         <p:nvPicPr>
-          <p:cNvPr id="57" name="Object 56" descr="public/generated/icons/07d4aa9f-1f71-43bb-9916-8e9cff5bc426.png">    </p:cNvPr>
+          <p:cNvPr id="57" name="Object 56" descr="public/generated/icons/5da26b90-7b83-44b5-b6d3-778b408b77db.png">    </p:cNvPr>
           <p:cNvPicPr>
             <a:picLocks noChangeAspect="1"/>
           </p:cNvPicPr>
@@ -25594,7 +25594,7 @@
                 <a:ea typeface="Helvetica" pitchFamily="34" charset="-122"/>
                 <a:cs typeface="Helvetica" pitchFamily="34" charset="-120"/>
               </a:rPr>
-              <a:t>CUSTOM MIGRATIONS DR AND MANAGEMENT AS A SERVICE</a:t>
+              <a:t>CRUSHBANK</a:t>
             </a:r>
             <a:endParaRPr lang="en-US" dirty="0"/>
           </a:p>
@@ -25627,7 +25627,7 @@
       </p:sp>
       <p:pic>
         <p:nvPicPr>
-          <p:cNvPr id="60" name="Object 59" descr="public/generated/icons/7e82fdcb-10bb-48bf-9ce1-44a3ca20c005.png">    </p:cNvPr>
+          <p:cNvPr id="60" name="Object 59" descr="public/generated/icons/07d4aa9f-1f71-43bb-9916-8e9cff5bc426.png">    </p:cNvPr>
           <p:cNvPicPr>
             <a:picLocks noChangeAspect="1"/>
           </p:cNvPicPr>
@@ -25683,7 +25683,7 @@
                 <a:ea typeface="Helvetica" pitchFamily="34" charset="-122"/>
                 <a:cs typeface="Helvetica" pitchFamily="34" charset="-120"/>
               </a:rPr>
-              <a:t>CVVKEY</a:t>
+              <a:t>CUSTOM MIGRATIONS DR AND MANAGEMENT AS A SERVICE</a:t>
             </a:r>
             <a:endParaRPr lang="en-US" dirty="0"/>
           </a:p>
@@ -25716,7 +25716,7 @@
       </p:sp>
       <p:pic>
         <p:nvPicPr>
-          <p:cNvPr id="63" name="Object 62" descr="public/generated/icons/1ab48530-6638-4fce-a386-0bd598576a0a.png">    </p:cNvPr>
+          <p:cNvPr id="63" name="Object 62" descr="public/generated/icons/7e82fdcb-10bb-48bf-9ce1-44a3ca20c005.png">    </p:cNvPr>
           <p:cNvPicPr>
             <a:picLocks noChangeAspect="1"/>
           </p:cNvPicPr>
@@ -25772,7 +25772,7 @@
                 <a:ea typeface="Helvetica" pitchFamily="34" charset="-122"/>
                 <a:cs typeface="Helvetica" pitchFamily="34" charset="-120"/>
               </a:rPr>
-              <a:t>CYBERSTRONG BY CYBERSAINT</a:t>
+              <a:t>CVVKEY</a:t>
             </a:r>
             <a:endParaRPr lang="en-US" dirty="0"/>
           </a:p>
@@ -25805,7 +25805,7 @@
       </p:sp>
       <p:pic>
         <p:nvPicPr>
-          <p:cNvPr id="66" name="Object 65" descr="public/generated/icons/840bcb30-f8c3-11ed-afcd-01dba1a5ada3.png">    </p:cNvPr>
+          <p:cNvPr id="66" name="Object 65" descr="public/generated/icons/1ab48530-6638-4fce-a386-0bd598576a0a.png">    </p:cNvPr>
           <p:cNvPicPr>
             <a:picLocks noChangeAspect="1"/>
           </p:cNvPicPr>
@@ -25861,7 +25861,7 @@
                 <a:ea typeface="Helvetica" pitchFamily="34" charset="-122"/>
                 <a:cs typeface="Helvetica" pitchFamily="34" charset="-120"/>
               </a:rPr>
-              <a:t>DATA PRODUCT HUB</a:t>
+              <a:t>CYBERSTRONG BY CYBERSAINT</a:t>
             </a:r>
             <a:endParaRPr lang="en-US" dirty="0"/>
           </a:p>
@@ -25894,7 +25894,7 @@
       </p:sp>
       <p:pic>
         <p:nvPicPr>
-          <p:cNvPr id="69" name="Object 68" descr="public/generated/icons/696b9880-9e9b-11ea-9054-e15e287f1e7f.png">    </p:cNvPr>
+          <p:cNvPr id="69" name="Object 68" descr="public/generated/icons/840bcb30-f8c3-11ed-afcd-01dba1a5ada3.png">    </p:cNvPr>
           <p:cNvPicPr>
             <a:picLocks noChangeAspect="1"/>
           </p:cNvPicPr>
@@ -25950,7 +25950,7 @@
                 <a:ea typeface="Helvetica" pitchFamily="34" charset="-122"/>
                 <a:cs typeface="Helvetica" pitchFamily="34" charset="-120"/>
               </a:rPr>
-              <a:t>DATA REPLICATION</a:t>
+              <a:t>DATA PRODUCT HUB</a:t>
             </a:r>
             <a:endParaRPr lang="en-US" dirty="0"/>
           </a:p>
@@ -25983,7 +25983,7 @@
       </p:sp>
       <p:pic>
         <p:nvPicPr>
-          <p:cNvPr id="72" name="Object 71" descr="public/generated/icons/5d307850-0404-11eb-8c8b-c7d7505f656d.png">    </p:cNvPr>
+          <p:cNvPr id="72" name="Object 71" descr="public/generated/icons/696b9880-9e9b-11ea-9054-e15e287f1e7f.png">    </p:cNvPr>
           <p:cNvPicPr>
             <a:picLocks noChangeAspect="1"/>
           </p:cNvPicPr>
@@ -26039,7 +26039,7 @@
                 <a:ea typeface="Helvetica" pitchFamily="34" charset="-122"/>
                 <a:cs typeface="Helvetica" pitchFamily="34" charset="-120"/>
               </a:rPr>
-              <a:t>DATA VIRTUALIZATION</a:t>
+              <a:t>DATA REPLICATION</a:t>
             </a:r>
             <a:endParaRPr lang="en-US" dirty="0"/>
           </a:p>
@@ -26072,7 +26072,7 @@
       </p:sp>
       <p:pic>
         <p:nvPicPr>
-          <p:cNvPr id="75" name="Object 74" descr="public/generated/icons/databases-for-elasticsearch.png">    </p:cNvPr>
+          <p:cNvPr id="75" name="Object 74" descr="public/generated/icons/5d307850-0404-11eb-8c8b-c7d7505f656d.png">    </p:cNvPr>
           <p:cNvPicPr>
             <a:picLocks noChangeAspect="1"/>
           </p:cNvPicPr>
@@ -26128,7 +26128,7 @@
                 <a:ea typeface="Helvetica" pitchFamily="34" charset="-122"/>
                 <a:cs typeface="Helvetica" pitchFamily="34" charset="-120"/>
               </a:rPr>
-              <a:t>DATABASES FOR ELASTICSEARCH</a:t>
+              <a:t>DATA VIRTUALIZATION</a:t>
             </a:r>
             <a:endParaRPr lang="en-US" dirty="0"/>
           </a:p>
@@ -26161,7 +26161,7 @@
       </p:sp>
       <p:pic>
         <p:nvPicPr>
-          <p:cNvPr id="78" name="Object 77" descr="public/generated/icons/databases-for-mongodb.png">    </p:cNvPr>
+          <p:cNvPr id="78" name="Object 77" descr="public/generated/icons/databases-for-elasticsearch.png">    </p:cNvPr>
           <p:cNvPicPr>
             <a:picLocks noChangeAspect="1"/>
           </p:cNvPicPr>
@@ -26217,7 +26217,7 @@
                 <a:ea typeface="Helvetica" pitchFamily="34" charset="-122"/>
                 <a:cs typeface="Helvetica" pitchFamily="34" charset="-120"/>
               </a:rPr>
-              <a:t>DATABASES FOR MONGODB</a:t>
+              <a:t>DATABASES FOR ELASTICSEARCH</a:t>
             </a:r>
             <a:endParaRPr lang="en-US" dirty="0"/>
           </a:p>
@@ -26250,7 +26250,7 @@
       </p:sp>
       <p:pic>
         <p:nvPicPr>
-          <p:cNvPr id="81" name="Object 80" descr="public/generated/icons/databases-for-mysql.png">    </p:cNvPr>
+          <p:cNvPr id="81" name="Object 80" descr="public/generated/icons/databases-for-mongodb.png">    </p:cNvPr>
           <p:cNvPicPr>
             <a:picLocks noChangeAspect="1"/>
           </p:cNvPicPr>
@@ -26306,7 +26306,7 @@
                 <a:ea typeface="Helvetica" pitchFamily="34" charset="-122"/>
                 <a:cs typeface="Helvetica" pitchFamily="34" charset="-120"/>
               </a:rPr>
-              <a:t>DATABASES FOR MYSQL</a:t>
+              <a:t>DATABASES FOR MONGODB</a:t>
             </a:r>
             <a:endParaRPr lang="en-US" dirty="0"/>
           </a:p>
@@ -26339,7 +26339,7 @@
       </p:sp>
       <p:pic>
         <p:nvPicPr>
-          <p:cNvPr id="84" name="Object 83" descr="public/generated/icons/databases-for-postgresql.png">    </p:cNvPr>
+          <p:cNvPr id="84" name="Object 83" descr="public/generated/icons/databases-for-mysql.png">    </p:cNvPr>
           <p:cNvPicPr>
             <a:picLocks noChangeAspect="1"/>
           </p:cNvPicPr>
@@ -26395,7 +26395,7 @@
                 <a:ea typeface="Helvetica" pitchFamily="34" charset="-122"/>
                 <a:cs typeface="Helvetica" pitchFamily="34" charset="-120"/>
               </a:rPr>
-              <a:t>DATABASES FOR POSTGRESQL</a:t>
+              <a:t>DATABASES FOR MYSQL</a:t>
             </a:r>
             <a:endParaRPr lang="en-US" dirty="0"/>
           </a:p>
@@ -26428,7 +26428,7 @@
       </p:sp>
       <p:pic>
         <p:nvPicPr>
-          <p:cNvPr id="87" name="Object 86" descr="public/generated/icons/databases-for-redis.png">    </p:cNvPr>
+          <p:cNvPr id="87" name="Object 86" descr="public/generated/icons/databases-for-postgresql.png">    </p:cNvPr>
           <p:cNvPicPr>
             <a:picLocks noChangeAspect="1"/>
           </p:cNvPicPr>
@@ -26484,7 +26484,7 @@
                 <a:ea typeface="Helvetica" pitchFamily="34" charset="-122"/>
                 <a:cs typeface="Helvetica" pitchFamily="34" charset="-120"/>
               </a:rPr>
-              <a:t>DATABASES FOR REDIS</a:t>
+              <a:t>DATABASES FOR POSTGRESQL</a:t>
             </a:r>
             <a:endParaRPr lang="en-US" dirty="0"/>
           </a:p>
@@ -26517,7 +26517,7 @@
       </p:sp>
       <p:pic>
         <p:nvPicPr>
-          <p:cNvPr id="90" name="Object 89" descr="public/generated/icons/dd0532c0-f87c-11ea-be25-c9dc051df74f.png">    </p:cNvPr>
+          <p:cNvPr id="90" name="Object 89" descr="public/generated/icons/databases-for-redis.png">    </p:cNvPr>
           <p:cNvPicPr>
             <a:picLocks noChangeAspect="1"/>
           </p:cNvPicPr>
@@ -26573,7 +26573,7 @@
                 <a:ea typeface="Helvetica" pitchFamily="34" charset="-122"/>
                 <a:cs typeface="Helvetica" pitchFamily="34" charset="-120"/>
               </a:rPr>
-              <a:t>DATASTAGE</a:t>
+              <a:t>DATABASES FOR REDIS</a:t>
             </a:r>
             <a:endParaRPr lang="en-US" dirty="0"/>
           </a:p>
@@ -26606,7 +26606,7 @@
       </p:sp>
       <p:pic>
         <p:nvPicPr>
-          <p:cNvPr id="93" name="Object 92" descr="public/generated/icons/dashdb-for-transactions.png">    </p:cNvPr>
+          <p:cNvPr id="93" name="Object 92" descr="public/generated/icons/dd0532c0-f87c-11ea-be25-c9dc051df74f.png">    </p:cNvPr>
           <p:cNvPicPr>
             <a:picLocks noChangeAspect="1"/>
           </p:cNvPicPr>
@@ -26662,7 +26662,7 @@
                 <a:ea typeface="Helvetica" pitchFamily="34" charset="-122"/>
                 <a:cs typeface="Helvetica" pitchFamily="34" charset="-120"/>
               </a:rPr>
-              <a:t>DB2</a:t>
+              <a:t>DATASTAGE</a:t>
             </a:r>
             <a:endParaRPr lang="en-US" dirty="0"/>
           </a:p>
@@ -26695,7 +26695,7 @@
       </p:sp>
       <p:pic>
         <p:nvPicPr>
-          <p:cNvPr id="96" name="Object 95" descr="public/generated/icons/9e02e72d-00ce-4220-b44c-650c8314e58a.png">    </p:cNvPr>
+          <p:cNvPr id="96" name="Object 95" descr="public/generated/icons/dashdb-for-transactions.png">    </p:cNvPr>
           <p:cNvPicPr>
             <a:picLocks noChangeAspect="1"/>
           </p:cNvPicPr>
@@ -26751,7 +26751,7 @@
                 <a:ea typeface="Helvetica" pitchFamily="34" charset="-122"/>
                 <a:cs typeface="Helvetica" pitchFamily="34" charset="-120"/>
               </a:rPr>
-              <a:t>DB2 WAREHOUSE</a:t>
+              <a:t>DB2</a:t>
             </a:r>
             <a:endParaRPr lang="en-US" dirty="0"/>
           </a:p>
@@ -26784,7 +26784,7 @@
       </p:sp>
       <p:pic>
         <p:nvPicPr>
-          <p:cNvPr id="99" name="Object 98" descr="public/generated/icons/is.dedicated-host.png">    </p:cNvPr>
+          <p:cNvPr id="99" name="Object 98" descr="public/generated/icons/9e02e72d-00ce-4220-b44c-650c8314e58a.png">    </p:cNvPr>
           <p:cNvPicPr>
             <a:picLocks noChangeAspect="1"/>
           </p:cNvPicPr>
@@ -26840,7 +26840,7 @@
                 <a:ea typeface="Helvetica" pitchFamily="34" charset="-122"/>
                 <a:cs typeface="Helvetica" pitchFamily="34" charset="-120"/>
               </a:rPr>
-              <a:t>DEDICATED HOST FOR VPC</a:t>
+              <a:t>DB2 WAREHOUSE</a:t>
             </a:r>
             <a:endParaRPr lang="en-US" dirty="0"/>
           </a:p>
@@ -26873,7 +26873,7 @@
       </p:sp>
       <p:pic>
         <p:nvPicPr>
-          <p:cNvPr id="102" name="Object 101" descr="public/generated/icons/86fb7610-0f92-11ea-a6a3-8b96ed1570d8.png">    </p:cNvPr>
+          <p:cNvPr id="102" name="Object 101" descr="public/generated/icons/is.dedicated-host.png">    </p:cNvPr>
           <p:cNvPicPr>
             <a:picLocks noChangeAspect="1"/>
           </p:cNvPicPr>
@@ -26929,7 +26929,7 @@
                 <a:ea typeface="Helvetica" pitchFamily="34" charset="-122"/>
                 <a:cs typeface="Helvetica" pitchFamily="34" charset="-120"/>
               </a:rPr>
-              <a:t>DIRECT LINK CONNECT</a:t>
+              <a:t>DEDICATED HOST FOR VPC</a:t>
             </a:r>
             <a:endParaRPr lang="en-US" dirty="0"/>
           </a:p>
@@ -26962,7 +26962,7 @@
       </p:sp>
       <p:pic>
         <p:nvPicPr>
-          <p:cNvPr id="105" name="Object 104" descr="public/generated/icons/7dd59b11-c3c5-5aad-f6b2-2a0c2a3e6c49.png">    </p:cNvPr>
+          <p:cNvPr id="105" name="Object 104" descr="public/generated/icons/86fb7610-0f92-11ea-a6a3-8b96ed1570d8.png">    </p:cNvPr>
           <p:cNvPicPr>
             <a:picLocks noChangeAspect="1"/>
           </p:cNvPicPr>
@@ -27018,7 +27018,7 @@
                 <a:ea typeface="Helvetica" pitchFamily="34" charset="-122"/>
                 <a:cs typeface="Helvetica" pitchFamily="34" charset="-120"/>
               </a:rPr>
-              <a:t>DIRECT LINK CONNECT ON CLASSIC</a:t>
+              <a:t>DIRECT LINK CONNECT</a:t>
             </a:r>
             <a:endParaRPr lang="en-US" dirty="0"/>
           </a:p>
@@ -27051,7 +27051,7 @@
       </p:sp>
       <p:pic>
         <p:nvPicPr>
-          <p:cNvPr id="108" name="Object 107" descr="public/generated/icons/dc11a440-6073-11e9-9f5a-2f7997ba23c0.png">    </p:cNvPr>
+          <p:cNvPr id="108" name="Object 107" descr="public/generated/icons/7dd59b11-c3c5-5aad-f6b2-2a0c2a3e6c49.png">    </p:cNvPr>
           <p:cNvPicPr>
             <a:picLocks noChangeAspect="1"/>
           </p:cNvPicPr>
@@ -27107,7 +27107,7 @@
                 <a:ea typeface="Helvetica" pitchFamily="34" charset="-122"/>
                 <a:cs typeface="Helvetica" pitchFamily="34" charset="-120"/>
               </a:rPr>
-              <a:t>DIRECT LINK DEDICATED</a:t>
+              <a:t>DIRECT LINK CONNECT ON CLASSIC</a:t>
             </a:r>
             <a:endParaRPr lang="en-US" dirty="0"/>
           </a:p>
@@ -27173,7 +27173,7 @@
       </p:sp>
       <p:pic>
         <p:nvPicPr>
-          <p:cNvPr id="3" name="Object 2" descr="public/generated/icons/22.png">    </p:cNvPr>
+          <p:cNvPr id="3" name="Object 2" descr="public/generated/icons/dc11a440-6073-11e9-9f5a-2f7997ba23c0.png">    </p:cNvPr>
           <p:cNvPicPr>
             <a:picLocks noChangeAspect="1"/>
           </p:cNvPicPr>
@@ -27229,7 +27229,7 @@
                 <a:ea typeface="Helvetica" pitchFamily="34" charset="-122"/>
                 <a:cs typeface="Helvetica" pitchFamily="34" charset="-120"/>
               </a:rPr>
-              <a:t>DIRECT LINK DEDICATED HOSTING ON CLASSIC</a:t>
+              <a:t>DIRECT LINK DEDICATED</a:t>
             </a:r>
             <a:endParaRPr lang="en-US" dirty="0"/>
           </a:p>
@@ -27262,7 +27262,7 @@
       </p:sp>
       <p:pic>
         <p:nvPicPr>
-          <p:cNvPr id="6" name="Object 5" descr="public/generated/icons/23.png">    </p:cNvPr>
+          <p:cNvPr id="6" name="Object 5" descr="public/generated/icons/22.png">    </p:cNvPr>
           <p:cNvPicPr>
             <a:picLocks noChangeAspect="1"/>
           </p:cNvPicPr>
@@ -27318,7 +27318,7 @@
                 <a:ea typeface="Helvetica" pitchFamily="34" charset="-122"/>
                 <a:cs typeface="Helvetica" pitchFamily="34" charset="-120"/>
               </a:rPr>
-              <a:t>DIRECT LINK DEDICATED ON CLASSIC</a:t>
+              <a:t>DIRECT LINK DEDICATED HOSTING ON CLASSIC</a:t>
             </a:r>
             <a:endParaRPr lang="en-US" dirty="0"/>
           </a:p>
@@ -27351,7 +27351,7 @@
       </p:sp>
       <p:pic>
         <p:nvPicPr>
-          <p:cNvPr id="9" name="Object 8" descr="public/generated/icons/21.png">    </p:cNvPr>
+          <p:cNvPr id="9" name="Object 8" descr="public/generated/icons/23.png">    </p:cNvPr>
           <p:cNvPicPr>
             <a:picLocks noChangeAspect="1"/>
           </p:cNvPicPr>
@@ -27407,7 +27407,7 @@
                 <a:ea typeface="Helvetica" pitchFamily="34" charset="-122"/>
                 <a:cs typeface="Helvetica" pitchFamily="34" charset="-120"/>
               </a:rPr>
-              <a:t>DIRECT LINK EXCHANGE ON CLASSIC</a:t>
+              <a:t>DIRECT LINK DEDICATED ON CLASSIC</a:t>
             </a:r>
             <a:endParaRPr lang="en-US" dirty="0"/>
           </a:p>
@@ -27440,7 +27440,7 @@
       </p:sp>
       <p:pic>
         <p:nvPicPr>
-          <p:cNvPr id="12" name="Object 11" descr="public/generated/icons/b4ed8a30-936f-11e9-b289-1d079699cbe5.png">    </p:cNvPr>
+          <p:cNvPr id="12" name="Object 11" descr="public/generated/icons/21.png">    </p:cNvPr>
           <p:cNvPicPr>
             <a:picLocks noChangeAspect="1"/>
           </p:cNvPicPr>
@@ -27496,7 +27496,7 @@
                 <a:ea typeface="Helvetica" pitchFamily="34" charset="-122"/>
                 <a:cs typeface="Helvetica" pitchFamily="34" charset="-120"/>
               </a:rPr>
-              <a:t>DNS SERVICES</a:t>
+              <a:t>DIRECT LINK EXCHANGE ON CLASSIC</a:t>
             </a:r>
             <a:endParaRPr lang="en-US" dirty="0"/>
           </a:p>
@@ -27529,7 +27529,7 @@
       </p:sp>
       <p:pic>
         <p:nvPicPr>
-          <p:cNvPr id="15" name="Object 14" descr="public/generated/icons/d1e3f0d2-0f49-ddfd-0eb9-2897b9d3a45d.png">    </p:cNvPr>
+          <p:cNvPr id="15" name="Object 14" descr="public/generated/icons/6fc0c2df-7fbc-470f-aac5-a93af7ef4a92.png">    </p:cNvPr>
           <p:cNvPicPr>
             <a:picLocks noChangeAspect="1"/>
           </p:cNvPicPr>
@@ -27585,7 +27585,7 @@
                 <a:ea typeface="Helvetica" pitchFamily="34" charset="-122"/>
                 <a:cs typeface="Helvetica" pitchFamily="34" charset="-120"/>
               </a:rPr>
-              <a:t>EMAIL DELIVERY, POWERED BY SENDGRID</a:t>
+              <a:t>DIZZION FLEX</a:t>
             </a:r>
             <a:endParaRPr lang="en-US" dirty="0"/>
           </a:p>
@@ -27618,7 +27618,7 @@
       </p:sp>
       <p:pic>
         <p:nvPicPr>
-          <p:cNvPr id="18" name="Object 17" descr="public/generated/icons/871a9870-7508-11ef-ac5c-3324c550b37a.png">    </p:cNvPr>
+          <p:cNvPr id="18" name="Object 17" descr="public/generated/icons/b4ed8a30-936f-11e9-b289-1d079699cbe5.png">    </p:cNvPr>
           <p:cNvPicPr>
             <a:picLocks noChangeAspect="1"/>
           </p:cNvPicPr>
@@ -27674,7 +27674,7 @@
                 <a:ea typeface="Helvetica" pitchFamily="34" charset="-122"/>
                 <a:cs typeface="Helvetica" pitchFamily="34" charset="-120"/>
               </a:rPr>
-              <a:t>ENTERPRISE APPLICATION SERVICE</a:t>
+              <a:t>DNS SERVICES</a:t>
             </a:r>
             <a:endParaRPr lang="en-US" dirty="0"/>
           </a:p>
@@ -27707,7 +27707,7 @@
       </p:sp>
       <p:pic>
         <p:nvPicPr>
-          <p:cNvPr id="21" name="Object 20" descr="public/generated/icons/64955a78-30f9-426d-a25a-344480421b27.png">    </p:cNvPr>
+          <p:cNvPr id="21" name="Object 20" descr="public/generated/icons/d1e3f0d2-0f49-ddfd-0eb9-2897b9d3a45d.png">    </p:cNvPr>
           <p:cNvPicPr>
             <a:picLocks noChangeAspect="1"/>
           </p:cNvPicPr>
@@ -27763,7 +27763,7 @@
                 <a:ea typeface="Helvetica" pitchFamily="34" charset="-122"/>
                 <a:cs typeface="Helvetica" pitchFamily="34" charset="-120"/>
               </a:rPr>
-              <a:t>ETICLOUD SECURE DIGITAL AGILE WORKPLACE</a:t>
+              <a:t>EMAIL DELIVERY, POWERED BY SENDGRID</a:t>
             </a:r>
             <a:endParaRPr lang="en-US" dirty="0"/>
           </a:p>
@@ -27796,7 +27796,7 @@
       </p:sp>
       <p:pic>
         <p:nvPicPr>
-          <p:cNvPr id="24" name="Object 23" descr="public/generated/icons/ecdb4690-c2d8-11eb-bff1-4f7b9d2dfe41.png">    </p:cNvPr>
+          <p:cNvPr id="24" name="Object 23" descr="public/generated/icons/871a9870-7508-11ef-ac5c-3324c550b37a.png">    </p:cNvPr>
           <p:cNvPicPr>
             <a:picLocks noChangeAspect="1"/>
           </p:cNvPicPr>
@@ -27852,7 +27852,7 @@
                 <a:ea typeface="Helvetica" pitchFamily="34" charset="-122"/>
                 <a:cs typeface="Helvetica" pitchFamily="34" charset="-120"/>
               </a:rPr>
-              <a:t>EVENT NOTIFICATIONS</a:t>
+              <a:t>ENTERPRISE APPLICATION SERVICE</a:t>
             </a:r>
             <a:endParaRPr lang="en-US" dirty="0"/>
           </a:p>
@@ -27885,7 +27885,7 @@
       </p:sp>
       <p:pic>
         <p:nvPicPr>
-          <p:cNvPr id="27" name="Object 26" descr="public/generated/icons/6a7f4e38-f218-48ef-9dd2-df408747568e.png">    </p:cNvPr>
+          <p:cNvPr id="27" name="Object 26" descr="public/generated/icons/64955a78-30f9-426d-a25a-344480421b27.png">    </p:cNvPr>
           <p:cNvPicPr>
             <a:picLocks noChangeAspect="1"/>
           </p:cNvPicPr>
@@ -27941,7 +27941,7 @@
                 <a:ea typeface="Helvetica" pitchFamily="34" charset="-122"/>
                 <a:cs typeface="Helvetica" pitchFamily="34" charset="-120"/>
               </a:rPr>
-              <a:t>EVENT STREAMS</a:t>
+              <a:t>ETICLOUD SECURE DIGITAL AGILE WORKPLACE</a:t>
             </a:r>
             <a:endParaRPr lang="en-US" dirty="0"/>
           </a:p>
@@ -27974,7 +27974,7 @@
       </p:sp>
       <p:pic>
         <p:nvPicPr>
-          <p:cNvPr id="30" name="Object 29" descr="public/generated/icons/cf329950-0a3e-11e8-922e-f1366c6e1c83-bigip.png">    </p:cNvPr>
+          <p:cNvPr id="30" name="Object 29" descr="public/generated/icons/ecdb4690-c2d8-11eb-bff1-4f7b9d2dfe41.png">    </p:cNvPr>
           <p:cNvPicPr>
             <a:picLocks noChangeAspect="1"/>
           </p:cNvPicPr>
@@ -28030,7 +28030,7 @@
                 <a:ea typeface="Helvetica" pitchFamily="34" charset="-122"/>
                 <a:cs typeface="Helvetica" pitchFamily="34" charset="-120"/>
               </a:rPr>
-              <a:t>F5 BIG-IP</a:t>
+              <a:t>EVENT NOTIFICATIONS</a:t>
             </a:r>
             <a:endParaRPr lang="en-US" dirty="0"/>
           </a:p>
@@ -28063,7 +28063,7 @@
       </p:sp>
       <p:pic>
         <p:nvPicPr>
-          <p:cNvPr id="33" name="Object 32" descr="public/generated/icons/60427a43-cf48-41e0-bd95-26bde9c12105.png">    </p:cNvPr>
+          <p:cNvPr id="33" name="Object 32" descr="public/generated/icons/6a7f4e38-f218-48ef-9dd2-df408747568e.png">    </p:cNvPr>
           <p:cNvPicPr>
             <a:picLocks noChangeAspect="1"/>
           </p:cNvPicPr>
@@ -28119,7 +28119,7 @@
                 <a:ea typeface="Helvetica" pitchFamily="34" charset="-122"/>
                 <a:cs typeface="Helvetica" pitchFamily="34" charset="-120"/>
               </a:rPr>
-              <a:t>FALCONSTOR STORSAFE FOR POWER ON-PREMISES</a:t>
+              <a:t>EVENT STREAMS</a:t>
             </a:r>
             <a:endParaRPr lang="en-US" dirty="0"/>
           </a:p>
@@ -28152,7 +28152,7 @@
       </p:sp>
       <p:pic>
         <p:nvPicPr>
-          <p:cNvPr id="36" name="Object 35" descr="public/generated/icons/6.png">    </p:cNvPr>
+          <p:cNvPr id="36" name="Object 35" descr="public/generated/icons/cf329950-0a3e-11e8-922e-f1366c6e1c83-bigip.png">    </p:cNvPr>
           <p:cNvPicPr>
             <a:picLocks noChangeAspect="1"/>
           </p:cNvPicPr>
@@ -28208,7 +28208,7 @@
                 <a:ea typeface="Helvetica" pitchFamily="34" charset="-122"/>
                 <a:cs typeface="Helvetica" pitchFamily="34" charset="-120"/>
               </a:rPr>
-              <a:t>FILE STORAGE FOR CLASSIC</a:t>
+              <a:t>F5 BIG-IP</a:t>
             </a:r>
             <a:endParaRPr lang="en-US" dirty="0"/>
           </a:p>
@@ -28241,7 +28241,7 @@
       </p:sp>
       <p:pic>
         <p:nvPicPr>
-          <p:cNvPr id="39" name="Object 38" descr="public/generated/icons/is.share.png">    </p:cNvPr>
+          <p:cNvPr id="39" name="Object 38" descr="public/generated/icons/60427a43-cf48-41e0-bd95-26bde9c12105.png">    </p:cNvPr>
           <p:cNvPicPr>
             <a:picLocks noChangeAspect="1"/>
           </p:cNvPicPr>
@@ -28297,7 +28297,7 @@
                 <a:ea typeface="Helvetica" pitchFamily="34" charset="-122"/>
                 <a:cs typeface="Helvetica" pitchFamily="34" charset="-120"/>
               </a:rPr>
-              <a:t>FILE STORAGE FOR VPC</a:t>
+              <a:t>FALCONSTOR STORSAFE FOR POWER ON-PREMISES</a:t>
             </a:r>
             <a:endParaRPr lang="en-US" dirty="0"/>
           </a:p>
@@ -28330,7 +28330,7 @@
       </p:sp>
       <p:pic>
         <p:nvPicPr>
-          <p:cNvPr id="42" name="Object 41" descr="public/generated/icons/is.floating-ip.png">    </p:cNvPr>
+          <p:cNvPr id="42" name="Object 41" descr="public/generated/icons/6.png">    </p:cNvPr>
           <p:cNvPicPr>
             <a:picLocks noChangeAspect="1"/>
           </p:cNvPicPr>
@@ -28386,7 +28386,7 @@
                 <a:ea typeface="Helvetica" pitchFamily="34" charset="-122"/>
                 <a:cs typeface="Helvetica" pitchFamily="34" charset="-120"/>
               </a:rPr>
-              <a:t>FLOATING IP FOR VPC</a:t>
+              <a:t>FILE STORAGE FOR CLASSIC</a:t>
             </a:r>
             <a:endParaRPr lang="en-US" dirty="0"/>
           </a:p>
@@ -28419,7 +28419,7 @@
       </p:sp>
       <p:pic>
         <p:nvPicPr>
-          <p:cNvPr id="45" name="Object 44" descr="public/generated/icons/is.flow-log-collector.png">    </p:cNvPr>
+          <p:cNvPr id="45" name="Object 44" descr="public/generated/icons/is.share.png">    </p:cNvPr>
           <p:cNvPicPr>
             <a:picLocks noChangeAspect="1"/>
           </p:cNvPicPr>
@@ -28475,7 +28475,7 @@
                 <a:ea typeface="Helvetica" pitchFamily="34" charset="-122"/>
                 <a:cs typeface="Helvetica" pitchFamily="34" charset="-120"/>
               </a:rPr>
-              <a:t>FLOW LOGS FOR VPC</a:t>
+              <a:t>FILE STORAGE FOR VPC</a:t>
             </a:r>
             <a:endParaRPr lang="en-US" dirty="0"/>
           </a:p>
@@ -28508,7 +28508,7 @@
       </p:sp>
       <p:pic>
         <p:nvPicPr>
-          <p:cNvPr id="48" name="Object 47" descr="public/generated/icons/05605040-8854-4665-bd05-0b10a96daf05.png">    </p:cNvPr>
+          <p:cNvPr id="48" name="Object 47" descr="public/generated/icons/is.floating-ip.png">    </p:cNvPr>
           <p:cNvPicPr>
             <a:picLocks noChangeAspect="1"/>
           </p:cNvPicPr>
@@ -28564,7 +28564,7 @@
                 <a:ea typeface="Helvetica" pitchFamily="34" charset="-122"/>
                 <a:cs typeface="Helvetica" pitchFamily="34" charset="-120"/>
               </a:rPr>
-              <a:t>FNTS CLOUD MIGRATION SERVICES</a:t>
+              <a:t>FLOATING IP FOR VPC</a:t>
             </a:r>
             <a:endParaRPr lang="en-US" dirty="0"/>
           </a:p>
@@ -28597,7 +28597,7 @@
       </p:sp>
       <p:pic>
         <p:nvPicPr>
-          <p:cNvPr id="51" name="Object 50" descr="public/generated/icons/d2fb0ba3-1679-4053-a593-9f2259d9e87b.png">    </p:cNvPr>
+          <p:cNvPr id="51" name="Object 50" descr="public/generated/icons/is.flow-log-collector.png">    </p:cNvPr>
           <p:cNvPicPr>
             <a:picLocks noChangeAspect="1"/>
           </p:cNvPicPr>
@@ -28653,7 +28653,7 @@
                 <a:ea typeface="Helvetica" pitchFamily="34" charset="-122"/>
                 <a:cs typeface="Helvetica" pitchFamily="34" charset="-120"/>
               </a:rPr>
-              <a:t>FNTS MANAGED SERVICES FOR POWERVS CLOUD</a:t>
+              <a:t>FLOW LOGS FOR VPC</a:t>
             </a:r>
             <a:endParaRPr lang="en-US" dirty="0"/>
           </a:p>
@@ -28686,7 +28686,7 @@
       </p:sp>
       <p:pic>
         <p:nvPicPr>
-          <p:cNvPr id="54" name="Object 53" descr="public/generated/icons/cf329950-0a3e-11e8-922e-f1366c6e1c83-fortigate.png">    </p:cNvPr>
+          <p:cNvPr id="54" name="Object 53" descr="public/generated/icons/05605040-8854-4665-bd05-0b10a96daf05.png">    </p:cNvPr>
           <p:cNvPicPr>
             <a:picLocks noChangeAspect="1"/>
           </p:cNvPicPr>
@@ -28742,7 +28742,7 @@
                 <a:ea typeface="Helvetica" pitchFamily="34" charset="-122"/>
                 <a:cs typeface="Helvetica" pitchFamily="34" charset="-120"/>
               </a:rPr>
-              <a:t>FORTIGATE SECURITY APPLIANCE</a:t>
+              <a:t>FNTS CLOUD MIGRATION SERVICES</a:t>
             </a:r>
             <a:endParaRPr lang="en-US" dirty="0"/>
           </a:p>
@@ -28775,7 +28775,7 @@
       </p:sp>
       <p:pic>
         <p:nvPicPr>
-          <p:cNvPr id="57" name="Object 56" descr="public/generated/icons/f5b26324-9b39-c701-0cc5-b0d5d2fe8534.png">    </p:cNvPr>
+          <p:cNvPr id="57" name="Object 56" descr="public/generated/icons/d2fb0ba3-1679-4053-a593-9f2259d9e87b.png">    </p:cNvPr>
           <p:cNvPicPr>
             <a:picLocks noChangeAspect="1"/>
           </p:cNvPicPr>
@@ -28831,7 +28831,7 @@
                 <a:ea typeface="Helvetica" pitchFamily="34" charset="-122"/>
                 <a:cs typeface="Helvetica" pitchFamily="34" charset="-120"/>
               </a:rPr>
-              <a:t>FORTIGATE SECURITY APPLIANCE 10GBPS</a:t>
+              <a:t>FNTS MANAGED SERVICES FOR POWERVS CLOUD</a:t>
             </a:r>
             <a:endParaRPr lang="en-US" dirty="0"/>
           </a:p>
@@ -28864,7 +28864,7 @@
       </p:sp>
       <p:pic>
         <p:nvPicPr>
-          <p:cNvPr id="60" name="Object 59" descr="public/generated/icons/cf329950-0a3e-11e8-922e-f1366c6e1c83-fortigatevm.png">    </p:cNvPr>
+          <p:cNvPr id="60" name="Object 59" descr="public/generated/icons/cf329950-0a3e-11e8-922e-f1366c6e1c83-fortigate.png">    </p:cNvPr>
           <p:cNvPicPr>
             <a:picLocks noChangeAspect="1"/>
           </p:cNvPicPr>
@@ -28920,7 +28920,7 @@
                 <a:ea typeface="Helvetica" pitchFamily="34" charset="-122"/>
                 <a:cs typeface="Helvetica" pitchFamily="34" charset="-120"/>
               </a:rPr>
-              <a:t>FORTIGATE VIRTUAL APPLIANCE</a:t>
+              <a:t>FORTIGATE SECURITY APPLIANCE</a:t>
             </a:r>
             <a:endParaRPr lang="en-US" dirty="0"/>
           </a:p>
@@ -28953,7 +28953,7 @@
       </p:sp>
       <p:pic>
         <p:nvPicPr>
-          <p:cNvPr id="63" name="Object 62" descr="public/generated/icons/a93eeacc-7012-c8bc-c851-e928949a226c.png">    </p:cNvPr>
+          <p:cNvPr id="63" name="Object 62" descr="public/generated/icons/f5b26324-9b39-c701-0cc5-b0d5d2fe8534.png">    </p:cNvPr>
           <p:cNvPicPr>
             <a:picLocks noChangeAspect="1"/>
           </p:cNvPicPr>
@@ -29009,7 +29009,7 @@
                 <a:ea typeface="Helvetica" pitchFamily="34" charset="-122"/>
                 <a:cs typeface="Helvetica" pitchFamily="34" charset="-120"/>
               </a:rPr>
-              <a:t>FORTINET VIRTUAL FORTIGATE SECURITY APPLIANCE (VFSA)</a:t>
+              <a:t>FORTIGATE SECURITY APPLIANCE 10GBPS</a:t>
             </a:r>
             <a:endParaRPr lang="en-US" dirty="0"/>
           </a:p>
@@ -29042,7 +29042,7 @@
       </p:sp>
       <p:pic>
         <p:nvPicPr>
-          <p:cNvPr id="66" name="Object 65" descr="public/generated/icons/900fb23f-fe9d-4cf8-9bb2-a82d87dede0e.png">    </p:cNvPr>
+          <p:cNvPr id="66" name="Object 65" descr="public/generated/icons/cf329950-0a3e-11e8-922e-f1366c6e1c83-fortigatevm.png">    </p:cNvPr>
           <p:cNvPicPr>
             <a:picLocks noChangeAspect="1"/>
           </p:cNvPicPr>
@@ -29098,7 +29098,7 @@
                 <a:ea typeface="Helvetica" pitchFamily="34" charset="-122"/>
                 <a:cs typeface="Helvetica" pitchFamily="34" charset="-120"/>
               </a:rPr>
-              <a:t>FRESCHE KTLO APPLICATION MANAGEMENT</a:t>
+              <a:t>FORTIGATE VIRTUAL APPLIANCE</a:t>
             </a:r>
             <a:endParaRPr lang="en-US" dirty="0"/>
           </a:p>
@@ -29131,7 +29131,7 @@
       </p:sp>
       <p:pic>
         <p:nvPicPr>
-          <p:cNvPr id="69" name="Object 68" descr="public/generated/icons/c3c7f095-67da-42e6-b982-46d0e6e79f84.png">    </p:cNvPr>
+          <p:cNvPr id="69" name="Object 68" descr="public/generated/icons/a93eeacc-7012-c8bc-c851-e928949a226c.png">    </p:cNvPr>
           <p:cNvPicPr>
             <a:picLocks noChangeAspect="1"/>
           </p:cNvPicPr>
@@ -29187,7 +29187,7 @@
                 <a:ea typeface="Helvetica" pitchFamily="34" charset="-122"/>
                 <a:cs typeface="Helvetica" pitchFamily="34" charset="-120"/>
               </a:rPr>
-              <a:t>FRESCHE LPAR OPERATIONS MANAGEMENT</a:t>
+              <a:t>FORTINET VIRTUAL FORTIGATE SECURITY APPLIANCE (VFSA)</a:t>
             </a:r>
             <a:endParaRPr lang="en-US" dirty="0"/>
           </a:p>
@@ -29220,7 +29220,7 @@
       </p:sp>
       <p:pic>
         <p:nvPicPr>
-          <p:cNvPr id="72" name="Object 71" descr="public/generated/icons/afa31435-8561-4383-b069-ec9a47719e20.png">    </p:cNvPr>
+          <p:cNvPr id="72" name="Object 71" descr="public/generated/icons/900fb23f-fe9d-4cf8-9bb2-a82d87dede0e.png">    </p:cNvPr>
           <p:cNvPicPr>
             <a:picLocks noChangeAspect="1"/>
           </p:cNvPicPr>
@@ -29276,7 +29276,7 @@
                 <a:ea typeface="Helvetica" pitchFamily="34" charset="-122"/>
                 <a:cs typeface="Helvetica" pitchFamily="34" charset="-120"/>
               </a:rPr>
-              <a:t>FRESCHE PRESTO</a:t>
+              <a:t>FRESCHE KTLO APPLICATION MANAGEMENT</a:t>
             </a:r>
             <a:endParaRPr lang="en-US" dirty="0"/>
           </a:p>
@@ -29309,7 +29309,7 @@
       </p:sp>
       <p:pic>
         <p:nvPicPr>
-          <p:cNvPr id="75" name="Object 74" descr="public/generated/icons/3e683ee5-b3a8-4f07-b98b-bf35bdeb7082.png">    </p:cNvPr>
+          <p:cNvPr id="75" name="Object 74" descr="public/generated/icons/c3c7f095-67da-42e6-b982-46d0e6e79f84.png">    </p:cNvPr>
           <p:cNvPicPr>
             <a:picLocks noChangeAspect="1"/>
           </p:cNvPicPr>
@@ -29365,7 +29365,7 @@
                 <a:ea typeface="Helvetica" pitchFamily="34" charset="-122"/>
                 <a:cs typeface="Helvetica" pitchFamily="34" charset="-120"/>
               </a:rPr>
-              <a:t>FRESCHE SECURITY SUITE</a:t>
+              <a:t>FRESCHE LPAR OPERATIONS MANAGEMENT</a:t>
             </a:r>
             <a:endParaRPr lang="en-US" dirty="0"/>
           </a:p>
@@ -29398,7 +29398,7 @@
       </p:sp>
       <p:pic>
         <p:nvPicPr>
-          <p:cNvPr id="78" name="Object 77" descr="public/generated/icons/9db75c87-84ce-491b-8526-dcd2188f3866.png">    </p:cNvPr>
+          <p:cNvPr id="78" name="Object 77" descr="public/generated/icons/afa31435-8561-4383-b069-ec9a47719e20.png">    </p:cNvPr>
           <p:cNvPicPr>
             <a:picLocks noChangeAspect="1"/>
           </p:cNvPicPr>
@@ -29454,7 +29454,7 @@
                 <a:ea typeface="Helvetica" pitchFamily="34" charset="-122"/>
                 <a:cs typeface="Helvetica" pitchFamily="34" charset="-120"/>
               </a:rPr>
-              <a:t>FRESCHE X-ANALYSIS SUITE</a:t>
+              <a:t>FRESCHE PRESTO</a:t>
             </a:r>
             <a:endParaRPr lang="en-US" dirty="0"/>
           </a:p>
@@ -29487,7 +29487,7 @@
       </p:sp>
       <p:pic>
         <p:nvPicPr>
-          <p:cNvPr id="81" name="Object 80" descr="public/generated/icons/16.png">    </p:cNvPr>
+          <p:cNvPr id="81" name="Object 80" descr="public/generated/icons/3e683ee5-b3a8-4f07-b98b-bf35bdeb7082.png">    </p:cNvPr>
           <p:cNvPicPr>
             <a:picLocks noChangeAspect="1"/>
           </p:cNvPicPr>
@@ -29543,7 +29543,7 @@
                 <a:ea typeface="Helvetica" pitchFamily="34" charset="-122"/>
                 <a:cs typeface="Helvetica" pitchFamily="34" charset="-120"/>
               </a:rPr>
-              <a:t>HARDWARE FIREWALL</a:t>
+              <a:t>FRESCHE SECURITY SUITE</a:t>
             </a:r>
             <a:endParaRPr lang="en-US" dirty="0"/>
           </a:p>
@@ -29576,7 +29576,7 @@
       </p:sp>
       <p:pic>
         <p:nvPicPr>
-          <p:cNvPr id="84" name="Object 83" descr="public/generated/icons/cf329950-0a3e-11e8-922e-f1366c6e1c83-hcx.png">    </p:cNvPr>
+          <p:cNvPr id="84" name="Object 83" descr="public/generated/icons/9db75c87-84ce-491b-8526-dcd2188f3866.png">    </p:cNvPr>
           <p:cNvPicPr>
             <a:picLocks noChangeAspect="1"/>
           </p:cNvPicPr>
@@ -29632,7 +29632,7 @@
                 <a:ea typeface="Helvetica" pitchFamily="34" charset="-122"/>
                 <a:cs typeface="Helvetica" pitchFamily="34" charset="-120"/>
               </a:rPr>
-              <a:t>HCX</a:t>
+              <a:t>FRESCHE X-ANALYSIS SUITE</a:t>
             </a:r>
             <a:endParaRPr lang="en-US" dirty="0"/>
           </a:p>
@@ -29665,7 +29665,7 @@
       </p:sp>
       <p:pic>
         <p:nvPicPr>
-          <p:cNvPr id="87" name="Object 86" descr="public/generated/icons/3dacb5a3-de4a-4361-9f39-0b6657f89f37.png">    </p:cNvPr>
+          <p:cNvPr id="87" name="Object 86" descr="public/generated/icons/16.png">    </p:cNvPr>
           <p:cNvPicPr>
             <a:picLocks noChangeAspect="1"/>
           </p:cNvPicPr>
@@ -29721,7 +29721,7 @@
                 <a:ea typeface="Helvetica" pitchFamily="34" charset="-122"/>
                 <a:cs typeface="Helvetica" pitchFamily="34" charset="-120"/>
               </a:rPr>
-              <a:t>HDM VMWARE WORKLOAD ANALYZER</a:t>
+              <a:t>HARDWARE FIREWALL</a:t>
             </a:r>
             <a:endParaRPr lang="en-US" dirty="0"/>
           </a:p>
@@ -29754,7 +29754,7 @@
       </p:sp>
       <p:pic>
         <p:nvPicPr>
-          <p:cNvPr id="90" name="Object 89" descr="public/generated/icons/cf329950-0a3e-11e8-922e-f1366c6e1c83-horizon.png">    </p:cNvPr>
+          <p:cNvPr id="90" name="Object 89" descr="public/generated/icons/cf329950-0a3e-11e8-922e-f1366c6e1c83-hcx.png">    </p:cNvPr>
           <p:cNvPicPr>
             <a:picLocks noChangeAspect="1"/>
           </p:cNvPicPr>
@@ -29810,7 +29810,7 @@
                 <a:ea typeface="Helvetica" pitchFamily="34" charset="-122"/>
                 <a:cs typeface="Helvetica" pitchFamily="34" charset="-120"/>
               </a:rPr>
-              <a:t>HORIZON 7</a:t>
+              <a:t>HCX</a:t>
             </a:r>
             <a:endParaRPr lang="en-US" dirty="0"/>
           </a:p>
@@ -29843,7 +29843,7 @@
       </p:sp>
       <p:pic>
         <p:nvPicPr>
-          <p:cNvPr id="93" name="Object 92" descr="public/generated/icons/fa329acf-f9b6-fa9f-f37e-ad72d0b6a783.png">    </p:cNvPr>
+          <p:cNvPr id="93" name="Object 92" descr="public/generated/icons/3dacb5a3-de4a-4361-9f39-0b6657f89f37.png">    </p:cNvPr>
           <p:cNvPicPr>
             <a:picLocks noChangeAspect="1"/>
           </p:cNvPicPr>
@@ -29899,7 +29899,7 @@
                 <a:ea typeface="Helvetica" pitchFamily="34" charset="-122"/>
                 <a:cs typeface="Helvetica" pitchFamily="34" charset="-120"/>
               </a:rPr>
-              <a:t>HYBRID CLOUD INFRASTRUCTURE AS A SERVICE</a:t>
+              <a:t>HDM VMWARE WORKLOAD ANALYZER</a:t>
             </a:r>
             <a:endParaRPr lang="en-US" dirty="0"/>
           </a:p>
@@ -29932,7 +29932,7 @@
       </p:sp>
       <p:pic>
         <p:nvPicPr>
-          <p:cNvPr id="96" name="Object 95" descr="public/generated/icons/d589492e-6ac0-4a11-9c28-a157851c8f68.png">    </p:cNvPr>
+          <p:cNvPr id="96" name="Object 95" descr="public/generated/icons/cf329950-0a3e-11e8-922e-f1366c6e1c83-horizon.png">    </p:cNvPr>
           <p:cNvPicPr>
             <a:picLocks noChangeAspect="1"/>
           </p:cNvPicPr>
@@ -29988,7 +29988,7 @@
                 <a:ea typeface="Helvetica" pitchFamily="34" charset="-122"/>
                 <a:cs typeface="Helvetica" pitchFamily="34" charset="-120"/>
               </a:rPr>
-              <a:t>HYPER PROTECT CRYPTO SERVICES</a:t>
+              <a:t>HORIZON 7</a:t>
             </a:r>
             <a:endParaRPr lang="en-US" dirty="0"/>
           </a:p>
@@ -30021,7 +30021,7 @@
       </p:sp>
       <p:pic>
         <p:nvPicPr>
-          <p:cNvPr id="99" name="Object 98" descr="public/generated/icons/cf329950-0a3e-11e8-922e-f1366c6e1c83-hytrustcc.png">    </p:cNvPr>
+          <p:cNvPr id="99" name="Object 98" descr="public/generated/icons/fa329acf-f9b6-fa9f-f37e-ad72d0b6a783.png">    </p:cNvPr>
           <p:cNvPicPr>
             <a:picLocks noChangeAspect="1"/>
           </p:cNvPicPr>
@@ -30077,7 +30077,7 @@
                 <a:ea typeface="Helvetica" pitchFamily="34" charset="-122"/>
                 <a:cs typeface="Helvetica" pitchFamily="34" charset="-120"/>
               </a:rPr>
-              <a:t>HYTRUST CLOUDCONTROL</a:t>
+              <a:t>HYBRID CLOUD INFRASTRUCTURE AS A SERVICE</a:t>
             </a:r>
             <a:endParaRPr lang="en-US" dirty="0"/>
           </a:p>
@@ -30110,7 +30110,7 @@
       </p:sp>
       <p:pic>
         <p:nvPicPr>
-          <p:cNvPr id="102" name="Object 101" descr="public/generated/icons/cf329950-0a3e-11e8-922e-f1366c6e1c83-hytrustdc.png">    </p:cNvPr>
+          <p:cNvPr id="102" name="Object 101" descr="public/generated/icons/d589492e-6ac0-4a11-9c28-a157851c8f68.png">    </p:cNvPr>
           <p:cNvPicPr>
             <a:picLocks noChangeAspect="1"/>
           </p:cNvPicPr>
@@ -30166,7 +30166,7 @@
                 <a:ea typeface="Helvetica" pitchFamily="34" charset="-122"/>
                 <a:cs typeface="Helvetica" pitchFamily="34" charset="-120"/>
               </a:rPr>
-              <a:t>HYTRUST DATACONTROL</a:t>
+              <a:t>HYPER PROTECT CRYPTO SERVICES</a:t>
             </a:r>
             <a:endParaRPr lang="en-US" dirty="0"/>
           </a:p>
@@ -30199,7 +30199,7 @@
       </p:sp>
       <p:pic>
         <p:nvPicPr>
-          <p:cNvPr id="105" name="Object 104" descr="public/generated/icons/cf329950-0a3e-11e8-922e-f1366c6e1c83-hytrustkc.png">    </p:cNvPr>
+          <p:cNvPr id="105" name="Object 104" descr="public/generated/icons/cf329950-0a3e-11e8-922e-f1366c6e1c83-hytrustcc.png">    </p:cNvPr>
           <p:cNvPicPr>
             <a:picLocks noChangeAspect="1"/>
           </p:cNvPicPr>
@@ -30255,7 +30255,7 @@
                 <a:ea typeface="Helvetica" pitchFamily="34" charset="-122"/>
                 <a:cs typeface="Helvetica" pitchFamily="34" charset="-120"/>
               </a:rPr>
-              <a:t>HYTRUST KEYCONTROL</a:t>
+              <a:t>HYTRUST CLOUDCONTROL</a:t>
             </a:r>
             <a:endParaRPr lang="en-US" dirty="0"/>
           </a:p>
@@ -30288,7 +30288,7 @@
       </p:sp>
       <p:pic>
         <p:nvPicPr>
-          <p:cNvPr id="108" name="Object 107" descr="public/generated/icons/c1d5aa90-2cab-11ef-bc36-b3feacb6d8d5.png">    </p:cNvPr>
+          <p:cNvPr id="108" name="Object 107" descr="public/generated/icons/cf329950-0a3e-11e8-922e-f1366c6e1c83-hytrustdc.png">    </p:cNvPr>
           <p:cNvPicPr>
             <a:picLocks noChangeAspect="1"/>
           </p:cNvPicPr>
@@ -30344,7 +30344,7 @@
                 <a:ea typeface="Helvetica" pitchFamily="34" charset="-122"/>
                 <a:cs typeface="Helvetica" pitchFamily="34" charset="-120"/>
               </a:rPr>
-              <a:t>I MANAGED ON POWER VIRTUAL SERVER</a:t>
+              <a:t>HYTRUST DATACONTROL</a:t>
             </a:r>
             <a:endParaRPr lang="en-US" dirty="0"/>
           </a:p>
@@ -30410,7 +30410,7 @@
       </p:sp>
       <p:pic>
         <p:nvPicPr>
-          <p:cNvPr id="3" name="Object 2" descr="public/generated/icons/is.image.png">    </p:cNvPr>
+          <p:cNvPr id="3" name="Object 2" descr="public/generated/icons/cf329950-0a3e-11e8-922e-f1366c6e1c83-hytrustkc.png">    </p:cNvPr>
           <p:cNvPicPr>
             <a:picLocks noChangeAspect="1"/>
           </p:cNvPicPr>
@@ -30466,7 +30466,7 @@
                 <a:ea typeface="Helvetica" pitchFamily="34" charset="-122"/>
                 <a:cs typeface="Helvetica" pitchFamily="34" charset="-120"/>
               </a:rPr>
-              <a:t>IMAGE SERVICE FOR VPC</a:t>
+              <a:t>HYTRUST KEYCONTROL</a:t>
             </a:r>
             <a:endParaRPr lang="en-US" dirty="0"/>
           </a:p>
@@ -30499,7 +30499,7 @@
       </p:sp>
       <p:pic>
         <p:nvPicPr>
-          <p:cNvPr id="6" name="Object 5" descr="public/generated/icons/is.metadata.png">    </p:cNvPr>
+          <p:cNvPr id="6" name="Object 5" descr="public/generated/icons/c1d5aa90-2cab-11ef-bc36-b3feacb6d8d5.png">    </p:cNvPr>
           <p:cNvPicPr>
             <a:picLocks noChangeAspect="1"/>
           </p:cNvPicPr>
@@ -30555,7 +30555,7 @@
                 <a:ea typeface="Helvetica" pitchFamily="34" charset="-122"/>
                 <a:cs typeface="Helvetica" pitchFamily="34" charset="-120"/>
               </a:rPr>
-              <a:t>INSTANCE METADATA FOR VPC</a:t>
+              <a:t>I MANAGED ON POWER VIRTUAL SERVER</a:t>
             </a:r>
             <a:endParaRPr lang="en-US" dirty="0"/>
           </a:p>
@@ -30588,7 +30588,7 @@
       </p:sp>
       <p:pic>
         <p:nvPicPr>
-          <p:cNvPr id="9" name="Object 8" descr="public/generated/icons/75874a60-cb12-11e7-948e-37ac098eb1b9.png">    </p:cNvPr>
+          <p:cNvPr id="9" name="Object 8" descr="public/generated/icons/is.image.png">    </p:cNvPr>
           <p:cNvPicPr>
             <a:picLocks noChangeAspect="1"/>
           </p:cNvPicPr>
@@ -30644,7 +30644,7 @@
                 <a:ea typeface="Helvetica" pitchFamily="34" charset="-122"/>
                 <a:cs typeface="Helvetica" pitchFamily="34" charset="-120"/>
               </a:rPr>
-              <a:t>INTERNET SERVICES</a:t>
+              <a:t>IMAGE SERVICE FOR VPC</a:t>
             </a:r>
             <a:endParaRPr lang="en-US" dirty="0"/>
           </a:p>
@@ -30677,7 +30677,7 @@
       </p:sp>
       <p:pic>
         <p:nvPicPr>
-          <p:cNvPr id="12" name="Object 11" descr="public/generated/icons/12.png">    </p:cNvPr>
+          <p:cNvPr id="12" name="Object 11" descr="public/generated/icons/is.metadata.png">    </p:cNvPr>
           <p:cNvPicPr>
             <a:picLocks noChangeAspect="1"/>
           </p:cNvPicPr>
@@ -30733,7 +30733,7 @@
                 <a:ea typeface="Helvetica" pitchFamily="34" charset="-122"/>
                 <a:cs typeface="Helvetica" pitchFamily="34" charset="-120"/>
               </a:rPr>
-              <a:t>IPSEC VPN</a:t>
+              <a:t>INSTANCE METADATA FOR VPC</a:t>
             </a:r>
             <a:endParaRPr lang="en-US" dirty="0"/>
           </a:p>
@@ -30766,7 +30766,7 @@
       </p:sp>
       <p:pic>
         <p:nvPicPr>
-          <p:cNvPr id="15" name="Object 14" descr="public/generated/icons/035145f0-2cac-4505-59e9-2e363d08d5aa.png">    </p:cNvPr>
+          <p:cNvPr id="15" name="Object 14" descr="public/generated/icons/75874a60-cb12-11e7-948e-37ac098eb1b9.png">    </p:cNvPr>
           <p:cNvPicPr>
             <a:picLocks noChangeAspect="1"/>
           </p:cNvPicPr>
@@ -30822,7 +30822,7 @@
                 <a:ea typeface="Helvetica" pitchFamily="34" charset="-122"/>
                 <a:cs typeface="Helvetica" pitchFamily="34" charset="-120"/>
               </a:rPr>
-              <a:t>JUNIPER VSRX</a:t>
+              <a:t>INTERNET SERVICES</a:t>
             </a:r>
             <a:endParaRPr lang="en-US" dirty="0"/>
           </a:p>
@@ -30855,7 +30855,7 @@
       </p:sp>
       <p:pic>
         <p:nvPicPr>
-          <p:cNvPr id="18" name="Object 17" descr="public/generated/icons/ee41347f-b18e-4ca6-bf80-b5467c63f9a6.png">    </p:cNvPr>
+          <p:cNvPr id="18" name="Object 17" descr="public/generated/icons/12.png">    </p:cNvPr>
           <p:cNvPicPr>
             <a:picLocks noChangeAspect="1"/>
           </p:cNvPicPr>
@@ -30911,7 +30911,7 @@
                 <a:ea typeface="Helvetica" pitchFamily="34" charset="-122"/>
                 <a:cs typeface="Helvetica" pitchFamily="34" charset="-120"/>
               </a:rPr>
-              <a:t>KEY PROTECT</a:t>
+              <a:t>IPSEC VPN</a:t>
             </a:r>
             <a:endParaRPr lang="en-US" dirty="0"/>
           </a:p>
@@ -30944,7 +30944,7 @@
       </p:sp>
       <p:pic>
         <p:nvPicPr>
-          <p:cNvPr id="21" name="Object 20" descr="public/generated/icons/cf329950-0a3e-11e8-922e-f1366c6e1c83-kmipadapter.png">    </p:cNvPr>
+          <p:cNvPr id="21" name="Object 20" descr="public/generated/icons/035145f0-2cac-4505-59e9-2e363d08d5aa.png">    </p:cNvPr>
           <p:cNvPicPr>
             <a:picLocks noChangeAspect="1"/>
           </p:cNvPicPr>
@@ -31000,7 +31000,7 @@
                 <a:ea typeface="Helvetica" pitchFamily="34" charset="-122"/>
                 <a:cs typeface="Helvetica" pitchFamily="34" charset="-120"/>
               </a:rPr>
-              <a:t>KMIP FOR VMWARE</a:t>
+              <a:t>JUNIPER VSRX</a:t>
             </a:r>
             <a:endParaRPr lang="en-US" dirty="0"/>
           </a:p>
@@ -31033,7 +31033,7 @@
       </p:sp>
       <p:pic>
         <p:nvPicPr>
-          <p:cNvPr id="24" name="Object 23" descr="public/generated/icons/983ea9a2-0fec-4021-8b70-8da5373394e5.png">    </p:cNvPr>
+          <p:cNvPr id="24" name="Object 23" descr="public/generated/icons/ee41347f-b18e-4ca6-bf80-b5467c63f9a6.png">    </p:cNvPr>
           <p:cNvPicPr>
             <a:picLocks noChangeAspect="1"/>
           </p:cNvPicPr>
@@ -31089,7 +31089,7 @@
                 <a:ea typeface="Helvetica" pitchFamily="34" charset="-122"/>
                 <a:cs typeface="Helvetica" pitchFamily="34" charset="-120"/>
               </a:rPr>
-              <a:t>KNOWLEDGE STUDIO</a:t>
+              <a:t>KEY PROTECT</a:t>
             </a:r>
             <a:endParaRPr lang="en-US" dirty="0"/>
           </a:p>
@@ -31122,7 +31122,7 @@
       </p:sp>
       <p:pic>
         <p:nvPicPr>
-          <p:cNvPr id="27" name="Object 26" descr="public/generated/icons/a8f89634-261c-4832-8257-b25e04787988.png">    </p:cNvPr>
+          <p:cNvPr id="27" name="Object 26" descr="public/generated/icons/cf329950-0a3e-11e8-922e-f1366c6e1c83-kmipadapter.png">    </p:cNvPr>
           <p:cNvPicPr>
             <a:picLocks noChangeAspect="1"/>
           </p:cNvPicPr>
@@ -31178,7 +31178,7 @@
                 <a:ea typeface="Helvetica" pitchFamily="34" charset="-122"/>
                 <a:cs typeface="Helvetica" pitchFamily="34" charset="-120"/>
               </a:rPr>
-              <a:t>KOMPRISE ELASTIC DATA MIGRATION</a:t>
+              <a:t>KMIP FOR VMWARE</a:t>
             </a:r>
             <a:endParaRPr lang="en-US" dirty="0"/>
           </a:p>
@@ -31211,7 +31211,7 @@
       </p:sp>
       <p:pic>
         <p:nvPicPr>
-          <p:cNvPr id="30" name="Object 29" descr="public/generated/icons/f1fa7442-9ee0-4e27-94c2-0cb3776a0a0a.png">    </p:cNvPr>
+          <p:cNvPr id="30" name="Object 29" descr="public/generated/icons/983ea9a2-0fec-4021-8b70-8da5373394e5.png">    </p:cNvPr>
           <p:cNvPicPr>
             <a:picLocks noChangeAspect="1"/>
           </p:cNvPicPr>
@@ -31267,7 +31267,7 @@
                 <a:ea typeface="Helvetica" pitchFamily="34" charset="-122"/>
                 <a:cs typeface="Helvetica" pitchFamily="34" charset="-120"/>
               </a:rPr>
-              <a:t>KOMPRISE INTELLIGENT DATA MANAGEMENT SUITE</a:t>
+              <a:t>KNOWLEDGE STUDIO</a:t>
             </a:r>
             <a:endParaRPr lang="en-US" dirty="0"/>
           </a:p>
@@ -31300,7 +31300,7 @@
       </p:sp>
       <p:pic>
         <p:nvPicPr>
-          <p:cNvPr id="33" name="Object 32" descr="public/generated/icons/containers-kubernetes.png">    </p:cNvPr>
+          <p:cNvPr id="33" name="Object 32" descr="public/generated/icons/a8f89634-261c-4832-8257-b25e04787988.png">    </p:cNvPr>
           <p:cNvPicPr>
             <a:picLocks noChangeAspect="1"/>
           </p:cNvPicPr>
@@ -31356,7 +31356,7 @@
                 <a:ea typeface="Helvetica" pitchFamily="34" charset="-122"/>
                 <a:cs typeface="Helvetica" pitchFamily="34" charset="-120"/>
               </a:rPr>
-              <a:t>KUBERNETES SERVICE</a:t>
+              <a:t>KOMPRISE ELASTIC DATA MIGRATION</a:t>
             </a:r>
             <a:endParaRPr lang="en-US" dirty="0"/>
           </a:p>
@@ -31389,7 +31389,7 @@
       </p:sp>
       <p:pic>
         <p:nvPicPr>
-          <p:cNvPr id="36" name="Object 35" descr="public/generated/icons/is.load-balancer.png">    </p:cNvPr>
+          <p:cNvPr id="36" name="Object 35" descr="public/generated/icons/f1fa7442-9ee0-4e27-94c2-0cb3776a0a0a.png">    </p:cNvPr>
           <p:cNvPicPr>
             <a:picLocks noChangeAspect="1"/>
           </p:cNvPicPr>
@@ -31445,7 +31445,7 @@
                 <a:ea typeface="Helvetica" pitchFamily="34" charset="-122"/>
                 <a:cs typeface="Helvetica" pitchFamily="34" charset="-120"/>
               </a:rPr>
-              <a:t>LOAD BALANCER FOR VPC</a:t>
+              <a:t>KOMPRISE INTELLIGENT DATA MANAGEMENT SUITE</a:t>
             </a:r>
             <a:endParaRPr lang="en-US" dirty="0"/>
           </a:p>
@@ -31478,7 +31478,7 @@
       </p:sp>
       <p:pic>
         <p:nvPicPr>
-          <p:cNvPr id="39" name="Object 38" descr="public/generated/icons/9349854b-eb46-427f-8ef6-687d601c9eda.png">    </p:cNvPr>
+          <p:cNvPr id="39" name="Object 38" descr="public/generated/icons/containers-kubernetes.png">    </p:cNvPr>
           <p:cNvPicPr>
             <a:picLocks noChangeAspect="1"/>
           </p:cNvPicPr>
@@ -31534,7 +31534,7 @@
                 <a:ea typeface="Helvetica" pitchFamily="34" charset="-122"/>
                 <a:cs typeface="Helvetica" pitchFamily="34" charset="-120"/>
               </a:rPr>
-              <a:t>LYVE DATA TRANSFER SERVICES</a:t>
+              <a:t>KUBERNETES SERVICE</a:t>
             </a:r>
             <a:endParaRPr lang="en-US" dirty="0"/>
           </a:p>
@@ -31567,7 +31567,7 @@
       </p:sp>
       <p:pic>
         <p:nvPicPr>
-          <p:cNvPr id="42" name="Object 41" descr="public/generated/icons/cf329950-0a3e-11e8-922e-f1366c6e1c83-managedveeam.png">    </p:cNvPr>
+          <p:cNvPr id="42" name="Object 41" descr="public/generated/icons/is.load-balancer.png">    </p:cNvPr>
           <p:cNvPicPr>
             <a:picLocks noChangeAspect="1"/>
           </p:cNvPicPr>
@@ -31623,7 +31623,7 @@
                 <a:ea typeface="Helvetica" pitchFamily="34" charset="-122"/>
                 <a:cs typeface="Helvetica" pitchFamily="34" charset="-120"/>
               </a:rPr>
-              <a:t>MANAGED BACKUP SERVICES</a:t>
+              <a:t>LOAD BALANCER FOR VPC</a:t>
             </a:r>
             <a:endParaRPr lang="en-US" dirty="0"/>
           </a:p>
@@ -31656,7 +31656,7 @@
       </p:sp>
       <p:pic>
         <p:nvPicPr>
-          <p:cNvPr id="45" name="Object 44" descr="public/generated/icons/cf329950-0a3e-11e8-922e-f1366c6e1c83-managedzerto.png">    </p:cNvPr>
+          <p:cNvPr id="45" name="Object 44" descr="public/generated/icons/9349854b-eb46-427f-8ef6-687d601c9eda.png">    </p:cNvPr>
           <p:cNvPicPr>
             <a:picLocks noChangeAspect="1"/>
           </p:cNvPicPr>
@@ -31712,7 +31712,7 @@
                 <a:ea typeface="Helvetica" pitchFamily="34" charset="-122"/>
                 <a:cs typeface="Helvetica" pitchFamily="34" charset="-120"/>
               </a:rPr>
-              <a:t>MANAGED DISASTER RECOVERY SERVICES</a:t>
+              <a:t>LYVE DATA TRANSFER SERVICES</a:t>
             </a:r>
             <a:endParaRPr lang="en-US" dirty="0"/>
           </a:p>
@@ -31745,7 +31745,7 @@
       </p:sp>
       <p:pic>
         <p:nvPicPr>
-          <p:cNvPr id="48" name="Object 47" descr="public/generated/icons/cfb3c3da-7b1f-0879-f414-f367da218488.png">    </p:cNvPr>
+          <p:cNvPr id="48" name="Object 47" descr="public/generated/icons/cf329950-0a3e-11e8-922e-f1366c6e1c83-managedveeam.png">    </p:cNvPr>
           <p:cNvPicPr>
             <a:picLocks noChangeAspect="1"/>
           </p:cNvPicPr>
@@ -31801,7 +31801,7 @@
                 <a:ea typeface="Helvetica" pitchFamily="34" charset="-122"/>
                 <a:cs typeface="Helvetica" pitchFamily="34" charset="-120"/>
               </a:rPr>
-              <a:t>MANAGED NETWORK SECURITY SERVICES</a:t>
+              <a:t>MANAGED BACKUP SERVICES</a:t>
             </a:r>
             <a:endParaRPr lang="en-US" dirty="0"/>
           </a:p>
@@ -31834,7 +31834,7 @@
       </p:sp>
       <p:pic>
         <p:nvPicPr>
-          <p:cNvPr id="51" name="Object 50" descr="public/generated/icons/cf329950-0a3e-11e8-922e-f1366c6e1c83-imi.png">    </p:cNvPr>
+          <p:cNvPr id="51" name="Object 50" descr="public/generated/icons/cf329950-0a3e-11e8-922e-f1366c6e1c83-managedzerto.png">    </p:cNvPr>
           <p:cNvPicPr>
             <a:picLocks noChangeAspect="1"/>
           </p:cNvPicPr>
@@ -31890,7 +31890,7 @@
                 <a:ea typeface="Helvetica" pitchFamily="34" charset="-122"/>
                 <a:cs typeface="Helvetica" pitchFamily="34" charset="-120"/>
               </a:rPr>
-              <a:t>MANAGED VMWARE SERVICES</a:t>
+              <a:t>MANAGED DISASTER RECOVERY SERVICES</a:t>
             </a:r>
             <a:endParaRPr lang="en-US" dirty="0"/>
           </a:p>
@@ -31923,7 +31923,7 @@
       </p:sp>
       <p:pic>
         <p:nvPicPr>
-          <p:cNvPr id="54" name="Object 53" descr="public/generated/icons/14bd30e0-8921-11e9-a2c5-13fceaf553c0.png">    </p:cNvPr>
+          <p:cNvPr id="54" name="Object 53" descr="public/generated/icons/cfb3c3da-7b1f-0879-f414-f367da218488.png">    </p:cNvPr>
           <p:cNvPicPr>
             <a:picLocks noChangeAspect="1"/>
           </p:cNvPicPr>
@@ -31979,7 +31979,7 @@
                 <a:ea typeface="Helvetica" pitchFamily="34" charset="-122"/>
                 <a:cs typeface="Helvetica" pitchFamily="34" charset="-120"/>
               </a:rPr>
-              <a:t>MATCH 360 WITH WATSON</a:t>
+              <a:t>MANAGED NETWORK SECURITY SERVICES</a:t>
             </a:r>
             <a:endParaRPr lang="en-US" dirty="0"/>
           </a:p>
@@ -32012,7 +32012,7 @@
       </p:sp>
       <p:pic>
         <p:nvPicPr>
-          <p:cNvPr id="57" name="Object 56" descr="public/generated/icons/messages-for-rabbitmq.png">    </p:cNvPr>
+          <p:cNvPr id="57" name="Object 56" descr="public/generated/icons/cf329950-0a3e-11e8-922e-f1366c6e1c83-imi.png">    </p:cNvPr>
           <p:cNvPicPr>
             <a:picLocks noChangeAspect="1"/>
           </p:cNvPicPr>
@@ -32068,7 +32068,7 @@
                 <a:ea typeface="Helvetica" pitchFamily="34" charset="-122"/>
                 <a:cs typeface="Helvetica" pitchFamily="34" charset="-120"/>
               </a:rPr>
-              <a:t>MESSAGES FOR RABBITMQ</a:t>
+              <a:t>MANAGED VMWARE SERVICES</a:t>
             </a:r>
             <a:endParaRPr lang="en-US" dirty="0"/>
           </a:p>
@@ -32101,7 +32101,7 @@
       </p:sp>
       <p:pic>
         <p:nvPicPr>
-          <p:cNvPr id="60" name="Object 59" descr="public/generated/icons/d4000551-49ff-4868-9e05-f863e60fad3a.png">    </p:cNvPr>
+          <p:cNvPr id="60" name="Object 59" descr="public/generated/icons/14bd30e0-8921-11e9-a2c5-13fceaf553c0.png">    </p:cNvPr>
           <p:cNvPicPr>
             <a:picLocks noChangeAspect="1"/>
           </p:cNvPicPr>
@@ -32157,7 +32157,7 @@
                 <a:ea typeface="Helvetica" pitchFamily="34" charset="-122"/>
                 <a:cs typeface="Helvetica" pitchFamily="34" charset="-120"/>
               </a:rPr>
-              <a:t>MINIO</a:t>
+              <a:t>MATCH 360 WITH WATSON</a:t>
             </a:r>
             <a:endParaRPr lang="en-US" dirty="0"/>
           </a:p>
@@ -32190,7 +32190,7 @@
       </p:sp>
       <p:pic>
         <p:nvPicPr>
-          <p:cNvPr id="63" name="Object 62" descr="public/generated/icons/9d9545b4-b866-4c1b-9fc0-39273aef5bb0.png">    </p:cNvPr>
+          <p:cNvPr id="63" name="Object 62" descr="public/generated/icons/messages-for-rabbitmq.png">    </p:cNvPr>
           <p:cNvPicPr>
             <a:picLocks noChangeAspect="1"/>
           </p:cNvPicPr>
@@ -32246,7 +32246,7 @@
                 <a:ea typeface="Helvetica" pitchFamily="34" charset="-122"/>
                 <a:cs typeface="Helvetica" pitchFamily="34" charset="-120"/>
               </a:rPr>
-              <a:t>MONO-X ONE FOR POWERVS</a:t>
+              <a:t>MESSAGES FOR RABBITMQ</a:t>
             </a:r>
             <a:endParaRPr lang="en-US" dirty="0"/>
           </a:p>
@@ -32279,7 +32279,7 @@
       </p:sp>
       <p:pic>
         <p:nvPicPr>
-          <p:cNvPr id="66" name="Object 65" descr="public/generated/icons/01037c41-adce-4bb5-8b45-0c06004916c4.png">    </p:cNvPr>
+          <p:cNvPr id="66" name="Object 65" descr="public/generated/icons/d4000551-49ff-4868-9e05-f863e60fad3a.png">    </p:cNvPr>
           <p:cNvPicPr>
             <a:picLocks noChangeAspect="1"/>
           </p:cNvPicPr>
@@ -32335,7 +32335,7 @@
                 <a:ea typeface="Helvetica" pitchFamily="34" charset="-122"/>
                 <a:cs typeface="Helvetica" pitchFamily="34" charset="-120"/>
               </a:rPr>
-              <a:t>MQ</a:t>
+              <a:t>MINIO</a:t>
             </a:r>
             <a:endParaRPr lang="en-US" dirty="0"/>
           </a:p>
@@ -32368,7 +32368,7 @@
       </p:sp>
       <p:pic>
         <p:nvPicPr>
-          <p:cNvPr id="69" name="Object 68" descr="public/generated/icons/is.snapshot-consistency-group.png">    </p:cNvPr>
+          <p:cNvPr id="69" name="Object 68" descr="public/generated/icons/9d9545b4-b866-4c1b-9fc0-39273aef5bb0.png">    </p:cNvPr>
           <p:cNvPicPr>
             <a:picLocks noChangeAspect="1"/>
           </p:cNvPicPr>
@@ -32424,7 +32424,7 @@
                 <a:ea typeface="Helvetica" pitchFamily="34" charset="-122"/>
                 <a:cs typeface="Helvetica" pitchFamily="34" charset="-120"/>
               </a:rPr>
-              <a:t>MULTI VOLUME SNAPSHOTS FOR VPC</a:t>
+              <a:t>MONO-X ONE FOR POWERVS</a:t>
             </a:r>
             <a:endParaRPr lang="en-US" dirty="0"/>
           </a:p>
@@ -32457,7 +32457,7 @@
       </p:sp>
       <p:pic>
         <p:nvPicPr>
-          <p:cNvPr id="72" name="Object 71" descr="public/generated/icons/bb6393bc-7d81-446b-9728-61b704f6eca5.png">    </p:cNvPr>
+          <p:cNvPr id="72" name="Object 71" descr="public/generated/icons/01037c41-adce-4bb5-8b45-0c06004916c4.png">    </p:cNvPr>
           <p:cNvPicPr>
             <a:picLocks noChangeAspect="1"/>
           </p:cNvPicPr>
@@ -32513,7 +32513,7 @@
                 <a:ea typeface="Helvetica" pitchFamily="34" charset="-122"/>
                 <a:cs typeface="Helvetica" pitchFamily="34" charset="-120"/>
               </a:rPr>
-              <a:t>NATURAL LANGUAGE UNDERSTANDING</a:t>
+              <a:t>MQ</a:t>
             </a:r>
             <a:endParaRPr lang="en-US" dirty="0"/>
           </a:p>
@@ -32546,7 +32546,7 @@
       </p:sp>
       <p:pic>
         <p:nvPicPr>
-          <p:cNvPr id="75" name="Object 74" descr="public/generated/icons/cf329950-0a3e-11e8-922e-f1366c6e1c83-netapp.png">    </p:cNvPr>
+          <p:cNvPr id="75" name="Object 74" descr="public/generated/icons/is.snapshot-consistency-group.png">    </p:cNvPr>
           <p:cNvPicPr>
             <a:picLocks noChangeAspect="1"/>
           </p:cNvPicPr>
@@ -32602,7 +32602,7 @@
                 <a:ea typeface="Helvetica" pitchFamily="34" charset="-122"/>
                 <a:cs typeface="Helvetica" pitchFamily="34" charset="-120"/>
               </a:rPr>
-              <a:t>NETAPP ONTAP SELECT</a:t>
+              <a:t>MULTI VOLUME SNAPSHOTS FOR VPC</a:t>
             </a:r>
             <a:endParaRPr lang="en-US" dirty="0"/>
           </a:p>
@@ -32635,7 +32635,7 @@
       </p:sp>
       <p:pic>
         <p:nvPicPr>
-          <p:cNvPr id="78" name="Object 77" descr="public/generated/icons/cc42cff0-b19b-11eb-9a66-c717766c1d30.png">    </p:cNvPr>
+          <p:cNvPr id="78" name="Object 77" descr="public/generated/icons/bb6393bc-7d81-446b-9728-61b704f6eca5.png">    </p:cNvPr>
           <p:cNvPicPr>
             <a:picLocks noChangeAspect="1"/>
           </p:cNvPicPr>
@@ -32691,7 +32691,7 @@
                 <a:ea typeface="Helvetica" pitchFamily="34" charset="-122"/>
                 <a:cs typeface="Helvetica" pitchFamily="34" charset="-120"/>
               </a:rPr>
-              <a:t>NETEZZA PERFORMANCE SERVER</a:t>
+              <a:t>NATURAL LANGUAGE UNDERSTANDING</a:t>
             </a:r>
             <a:endParaRPr lang="en-US" dirty="0"/>
           </a:p>
@@ -32724,7 +32724,7 @@
       </p:sp>
       <p:pic>
         <p:nvPicPr>
-          <p:cNvPr id="81" name="Object 80" descr="public/generated/icons/is.network-acl.png">    </p:cNvPr>
+          <p:cNvPr id="81" name="Object 80" descr="public/generated/icons/cf329950-0a3e-11e8-922e-f1366c6e1c83-netapp.png">    </p:cNvPr>
           <p:cNvPicPr>
             <a:picLocks noChangeAspect="1"/>
           </p:cNvPicPr>
@@ -32780,7 +32780,7 @@
                 <a:ea typeface="Helvetica" pitchFamily="34" charset="-122"/>
                 <a:cs typeface="Helvetica" pitchFamily="34" charset="-120"/>
               </a:rPr>
-              <a:t>NETWORK ACL</a:t>
+              <a:t>NETAPP ONTAP SELECT</a:t>
             </a:r>
             <a:endParaRPr lang="en-US" dirty="0"/>
           </a:p>
@@ -32813,7 +32813,7 @@
       </p:sp>
       <p:pic>
         <p:nvPicPr>
-          <p:cNvPr id="84" name="Object 83" descr="public/generated/icons/d97bd0c3-a8e5-4f3d-b925-16380e039a9a.png">    </p:cNvPr>
+          <p:cNvPr id="84" name="Object 83" descr="public/generated/icons/cc42cff0-b19b-11eb-9a66-c717766c1d30.png">    </p:cNvPr>
           <p:cNvPicPr>
             <a:picLocks noChangeAspect="1"/>
           </p:cNvPicPr>
@@ -32869,7 +32869,7 @@
                 <a:ea typeface="Helvetica" pitchFamily="34" charset="-122"/>
                 <a:cs typeface="Helvetica" pitchFamily="34" charset="-120"/>
               </a:rPr>
-              <a:t>NEURALSEEK</a:t>
+              <a:t>NETEZZA PERFORMANCE SERVER</a:t>
             </a:r>
             <a:endParaRPr lang="en-US" dirty="0"/>
           </a:p>
@@ -32902,7 +32902,7 @@
       </p:sp>
       <p:pic>
         <p:nvPicPr>
-          <p:cNvPr id="87" name="Object 86" descr="public/generated/icons/266c5178-8d88-40a9-966f-ea9f775bab05.png">    </p:cNvPr>
+          <p:cNvPr id="87" name="Object 86" descr="public/generated/icons/is.network-acl.png">    </p:cNvPr>
           <p:cNvPicPr>
             <a:picLocks noChangeAspect="1"/>
           </p:cNvPicPr>
@@ -32958,7 +32958,7 @@
                 <a:ea typeface="Helvetica" pitchFamily="34" charset="-122"/>
                 <a:cs typeface="Helvetica" pitchFamily="34" charset="-120"/>
               </a:rPr>
-              <a:t>NEURALSEEK PROFESSIONAL SERVICES</a:t>
+              <a:t>NETWORK ACL</a:t>
             </a:r>
             <a:endParaRPr lang="en-US" dirty="0"/>
           </a:p>
@@ -32991,7 +32991,7 @@
       </p:sp>
       <p:pic>
         <p:nvPicPr>
-          <p:cNvPr id="90" name="Object 89" descr="public/generated/icons/466091c0-9b8d-11eb-8f8c-91e95378d441.png">    </p:cNvPr>
+          <p:cNvPr id="90" name="Object 89" descr="public/generated/icons/d97bd0c3-a8e5-4f3d-b925-16380e039a9a.png">    </p:cNvPr>
           <p:cNvPicPr>
             <a:picLocks noChangeAspect="1"/>
           </p:cNvPicPr>
@@ -33047,7 +33047,7 @@
                 <a:ea typeface="Helvetica" pitchFamily="34" charset="-122"/>
                 <a:cs typeface="Helvetica" pitchFamily="34" charset="-120"/>
               </a:rPr>
-              <a:t>OPENPAGES</a:t>
+              <a:t>NEURALSEEK</a:t>
             </a:r>
             <a:endParaRPr lang="en-US" dirty="0"/>
           </a:p>
@@ -33080,7 +33080,7 @@
       </p:sp>
       <p:pic>
         <p:nvPicPr>
-          <p:cNvPr id="93" name="Object 92" descr="public/generated/icons/2f756420-434f-11e8-ae40-6bdd72502abc.png">    </p:cNvPr>
+          <p:cNvPr id="93" name="Object 92" descr="public/generated/icons/266c5178-8d88-40a9-966f-ea9f775bab05.png">    </p:cNvPr>
           <p:cNvPicPr>
             <a:picLocks noChangeAspect="1"/>
           </p:cNvPicPr>
@@ -33136,7 +33136,7 @@
                 <a:ea typeface="Helvetica" pitchFamily="34" charset="-122"/>
                 <a:cs typeface="Helvetica" pitchFamily="34" charset="-120"/>
               </a:rPr>
-              <a:t>PARTNER WITH TECHNOLOGY EXPERT LABS</a:t>
+              <a:t>NEURALSEEK PROFESSIONAL SERVICES</a:t>
             </a:r>
             <a:endParaRPr lang="en-US" dirty="0"/>
           </a:p>
@@ -33169,7 +33169,7 @@
       </p:sp>
       <p:pic>
         <p:nvPicPr>
-          <p:cNvPr id="96" name="Object 95" descr="public/generated/icons/bb6229f0-e632-11ee-ae26-5d6d9ba99eec.png">    </p:cNvPr>
+          <p:cNvPr id="96" name="Object 95" descr="public/generated/icons/466091c0-9b8d-11eb-8f8c-91e95378d441.png">    </p:cNvPr>
           <p:cNvPicPr>
             <a:picLocks noChangeAspect="1"/>
           </p:cNvPicPr>
@@ -33225,7 +33225,7 @@
                 <a:ea typeface="Helvetica" pitchFamily="34" charset="-122"/>
                 <a:cs typeface="Helvetica" pitchFamily="34" charset="-120"/>
               </a:rPr>
-              <a:t>PARTNER WITH TECHNOLOGY EXPERT LABS - BUILD IBM STORAGE PROTECT FOR POWERVS</a:t>
+              <a:t>OPENPAGES</a:t>
             </a:r>
             <a:endParaRPr lang="en-US" dirty="0"/>
           </a:p>
@@ -33258,7 +33258,7 @@
       </p:sp>
       <p:pic>
         <p:nvPicPr>
-          <p:cNvPr id="99" name="Object 98" descr="public/generated/icons/f0ea1510-e632-11ee-acb6-4d13e7035de5.png">    </p:cNvPr>
+          <p:cNvPr id="99" name="Object 98" descr="public/generated/icons/2f756420-434f-11e8-ae40-6bdd72502abc.png">    </p:cNvPr>
           <p:cNvPicPr>
             <a:picLocks noChangeAspect="1"/>
           </p:cNvPicPr>
@@ -33314,7 +33314,7 @@
                 <a:ea typeface="Helvetica" pitchFamily="34" charset="-122"/>
                 <a:cs typeface="Helvetica" pitchFamily="34" charset="-120"/>
               </a:rPr>
-              <a:t>PARTNER WITH TECHNOLOGY EXPERT LABS - BUILD SAP HANA STARTER EDITION</a:t>
+              <a:t>PARTNER WITH TECHNOLOGY EXPERT LABS</a:t>
             </a:r>
             <a:endParaRPr lang="en-US" dirty="0"/>
           </a:p>
@@ -33347,7 +33347,7 @@
       </p:sp>
       <p:pic>
         <p:nvPicPr>
-          <p:cNvPr id="102" name="Object 101" descr="public/generated/icons/339a87f0-e633-11ee-acb6-4d13e7035de5.png">    </p:cNvPr>
+          <p:cNvPr id="102" name="Object 101" descr="public/generated/icons/bb6229f0-e632-11ee-ae26-5d6d9ba99eec.png">    </p:cNvPr>
           <p:cNvPicPr>
             <a:picLocks noChangeAspect="1"/>
           </p:cNvPicPr>
@@ -33403,7 +33403,7 @@
                 <a:ea typeface="Helvetica" pitchFamily="34" charset="-122"/>
                 <a:cs typeface="Helvetica" pitchFamily="34" charset="-120"/>
               </a:rPr>
-              <a:t>PARTNER WITH TECHNOLOGY EXPERT LABS - MIGRATE WORKLOADS TO IBM POWER VIRTUAL SERVER</a:t>
+              <a:t>PARTNER WITH TECHNOLOGY EXPERT LABS - BUILD IBM STORAGE PROTECT FOR POWERVS</a:t>
             </a:r>
             <a:endParaRPr lang="en-US" dirty="0"/>
           </a:p>
@@ -33436,7 +33436,7 @@
       </p:sp>
       <p:pic>
         <p:nvPicPr>
-          <p:cNvPr id="105" name="Object 104" descr="public/generated/icons/is.placement-group.png">    </p:cNvPr>
+          <p:cNvPr id="105" name="Object 104" descr="public/generated/icons/f0ea1510-e632-11ee-acb6-4d13e7035de5.png">    </p:cNvPr>
           <p:cNvPicPr>
             <a:picLocks noChangeAspect="1"/>
           </p:cNvPicPr>
@@ -33492,7 +33492,7 @@
                 <a:ea typeface="Helvetica" pitchFamily="34" charset="-122"/>
                 <a:cs typeface="Helvetica" pitchFamily="34" charset="-120"/>
               </a:rPr>
-              <a:t>PLACEMENT GROUPS FOR VPC</a:t>
+              <a:t>PARTNER WITH TECHNOLOGY EXPERT LABS - BUILD SAP HANA STARTER EDITION</a:t>
             </a:r>
             <a:endParaRPr lang="en-US" dirty="0"/>
           </a:p>
@@ -33525,7 +33525,7 @@
       </p:sp>
       <p:pic>
         <p:nvPicPr>
-          <p:cNvPr id="108" name="Object 107" descr="public/generated/icons/41690130-a4e8-11ea-94c3-d72a57643c7d.png">    </p:cNvPr>
+          <p:cNvPr id="108" name="Object 107" descr="public/generated/icons/339a87f0-e633-11ee-acb6-4d13e7035de5.png">    </p:cNvPr>
           <p:cNvPicPr>
             <a:picLocks noChangeAspect="1"/>
           </p:cNvPicPr>
@@ -33581,7 +33581,7 @@
                 <a:ea typeface="Helvetica" pitchFamily="34" charset="-122"/>
                 <a:cs typeface="Helvetica" pitchFamily="34" charset="-120"/>
               </a:rPr>
-              <a:t>PLANNING ANALYTICS</a:t>
+              <a:t>PARTNER WITH TECHNOLOGY EXPERT LABS - MIGRATE WORKLOADS TO IBM POWER VIRTUAL SERVER</a:t>
             </a:r>
             <a:endParaRPr lang="en-US" dirty="0"/>
           </a:p>
@@ -33647,7 +33647,7 @@
       </p:sp>
       <p:pic>
         <p:nvPicPr>
-          <p:cNvPr id="3" name="Object 2" descr="public/generated/icons/d666f360-66d1-11e9-85ef-a19427301a8c.png">    </p:cNvPr>
+          <p:cNvPr id="3" name="Object 2" descr="public/generated/icons/is.placement-group.png">    </p:cNvPr>
           <p:cNvPicPr>
             <a:picLocks noChangeAspect="1"/>
           </p:cNvPicPr>
@@ -33703,7 +33703,7 @@
                 <a:ea typeface="Helvetica" pitchFamily="34" charset="-122"/>
                 <a:cs typeface="Helvetica" pitchFamily="34" charset="-120"/>
               </a:rPr>
-              <a:t>PORTWORX ENTERPRISE</a:t>
+              <a:t>PLACEMENT GROUPS FOR VPC</a:t>
             </a:r>
             <a:endParaRPr lang="en-US" dirty="0"/>
           </a:p>
@@ -33736,7 +33736,7 @@
       </p:sp>
       <p:pic>
         <p:nvPicPr>
-          <p:cNvPr id="6" name="Object 5" descr="public/generated/icons/7b2cdb0e-ad91-4fd7-97c0-5398874ec27b.png">    </p:cNvPr>
+          <p:cNvPr id="6" name="Object 5" descr="public/generated/icons/41690130-a4e8-11ea-94c3-d72a57643c7d.png">    </p:cNvPr>
           <p:cNvPicPr>
             <a:picLocks noChangeAspect="1"/>
           </p:cNvPicPr>
@@ -33792,7 +33792,7 @@
                 <a:ea typeface="Helvetica" pitchFamily="34" charset="-122"/>
                 <a:cs typeface="Helvetica" pitchFamily="34" charset="-120"/>
               </a:rPr>
-              <a:t>POWER I MIGRATE 23 SERVICES</a:t>
+              <a:t>PLANNING ANALYTICS</a:t>
             </a:r>
             <a:endParaRPr lang="en-US" dirty="0"/>
           </a:p>
@@ -33825,7 +33825,7 @@
       </p:sp>
       <p:pic>
         <p:nvPicPr>
-          <p:cNvPr id="9" name="Object 8" descr="public/generated/icons/9828699d-dda7-4022-839b-c8e1e8b7d9d8.png">    </p:cNvPr>
+          <p:cNvPr id="9" name="Object 8" descr="public/generated/icons/d666f360-66d1-11e9-85ef-a19427301a8c.png">    </p:cNvPr>
           <p:cNvPicPr>
             <a:picLocks noChangeAspect="1"/>
           </p:cNvPicPr>
@@ -33881,7 +33881,7 @@
                 <a:ea typeface="Helvetica" pitchFamily="34" charset="-122"/>
                 <a:cs typeface="Helvetica" pitchFamily="34" charset="-120"/>
               </a:rPr>
-              <a:t>POWER I MIGRATE WHILE ACTIVE SERVICES</a:t>
+              <a:t>PORTWORX ENTERPRISE</a:t>
             </a:r>
             <a:endParaRPr lang="en-US" dirty="0"/>
           </a:p>
@@ -33914,7 +33914,7 @@
       </p:sp>
       <p:pic>
         <p:nvPicPr>
-          <p:cNvPr id="12" name="Object 11" descr="public/generated/icons/power-iaas.workspace.png">    </p:cNvPr>
+          <p:cNvPr id="12" name="Object 11" descr="public/generated/icons/7b2cdb0e-ad91-4fd7-97c0-5398874ec27b.png">    </p:cNvPr>
           <p:cNvPicPr>
             <a:picLocks noChangeAspect="1"/>
           </p:cNvPicPr>
@@ -33970,7 +33970,7 @@
                 <a:ea typeface="Helvetica" pitchFamily="34" charset="-122"/>
                 <a:cs typeface="Helvetica" pitchFamily="34" charset="-120"/>
               </a:rPr>
-              <a:t>POWER VIRTUAL SERVER</a:t>
+              <a:t>POWER I MIGRATE 23 SERVICES</a:t>
             </a:r>
             <a:endParaRPr lang="en-US" dirty="0"/>
           </a:p>
@@ -34003,7 +34003,7 @@
       </p:sp>
       <p:pic>
         <p:nvPicPr>
-          <p:cNvPr id="15" name="Object 14" descr="public/generated/icons/power-iaas.dedicated-host.png">    </p:cNvPr>
+          <p:cNvPr id="15" name="Object 14" descr="public/generated/icons/9828699d-dda7-4022-839b-c8e1e8b7d9d8.png">    </p:cNvPr>
           <p:cNvPicPr>
             <a:picLocks noChangeAspect="1"/>
           </p:cNvPicPr>
@@ -34059,7 +34059,7 @@
                 <a:ea typeface="Helvetica" pitchFamily="34" charset="-122"/>
                 <a:cs typeface="Helvetica" pitchFamily="34" charset="-120"/>
               </a:rPr>
-              <a:t>POWER VIRTUAL SERVER DEDICATED HOST</a:t>
+              <a:t>POWER I MIGRATE WHILE ACTIVE SERVICES</a:t>
             </a:r>
             <a:endParaRPr lang="en-US" dirty="0"/>
           </a:p>
@@ -34092,7 +34092,7 @@
       </p:sp>
       <p:pic>
         <p:nvPicPr>
-          <p:cNvPr id="18" name="Object 17" descr="public/generated/icons/208072a0-7978-11ef-b369-0733120a414f.png">    </p:cNvPr>
+          <p:cNvPr id="18" name="Object 17" descr="public/generated/icons/power-iaas.workspace.png">    </p:cNvPr>
           <p:cNvPicPr>
             <a:picLocks noChangeAspect="1"/>
           </p:cNvPicPr>
@@ -34148,7 +34148,7 @@
                 <a:ea typeface="Helvetica" pitchFamily="34" charset="-122"/>
                 <a:cs typeface="Helvetica" pitchFamily="34" charset="-120"/>
               </a:rPr>
-              <a:t>POWER VIRTUAL SERVER DR AUTOMATION</a:t>
+              <a:t>POWER VIRTUAL SERVER</a:t>
             </a:r>
             <a:endParaRPr lang="en-US" dirty="0"/>
           </a:p>
@@ -34181,7 +34181,7 @@
       </p:sp>
       <p:pic>
         <p:nvPicPr>
-          <p:cNvPr id="21" name="Object 20" descr="public/generated/icons/power-iaas.image.png">    </p:cNvPr>
+          <p:cNvPr id="21" name="Object 20" descr="public/generated/icons/power-iaas.dedicated-host.png">    </p:cNvPr>
           <p:cNvPicPr>
             <a:picLocks noChangeAspect="1"/>
           </p:cNvPicPr>
@@ -34237,7 +34237,7 @@
                 <a:ea typeface="Helvetica" pitchFamily="34" charset="-122"/>
                 <a:cs typeface="Helvetica" pitchFamily="34" charset="-120"/>
               </a:rPr>
-              <a:t>POWER VIRTUAL SERVER IMAGE</a:t>
+              <a:t>POWER VIRTUAL SERVER DEDICATED HOST</a:t>
             </a:r>
             <a:endParaRPr lang="en-US" dirty="0"/>
           </a:p>
@@ -34270,7 +34270,7 @@
       </p:sp>
       <p:pic>
         <p:nvPicPr>
-          <p:cNvPr id="24" name="Object 23" descr="public/generated/icons/power-iaas.network.png">    </p:cNvPr>
+          <p:cNvPr id="24" name="Object 23" descr="public/generated/icons/208072a0-7978-11ef-b369-0733120a414f.png">    </p:cNvPr>
           <p:cNvPicPr>
             <a:picLocks noChangeAspect="1"/>
           </p:cNvPicPr>
@@ -34326,7 +34326,7 @@
                 <a:ea typeface="Helvetica" pitchFamily="34" charset="-122"/>
                 <a:cs typeface="Helvetica" pitchFamily="34" charset="-120"/>
               </a:rPr>
-              <a:t>POWER VIRTUAL SERVER NETWORK</a:t>
+              <a:t>POWER VIRTUAL SERVER DR AUTOMATION</a:t>
             </a:r>
             <a:endParaRPr lang="en-US" dirty="0"/>
           </a:p>
@@ -34359,7 +34359,7 @@
       </p:sp>
       <p:pic>
         <p:nvPicPr>
-          <p:cNvPr id="27" name="Object 26" descr="public/generated/icons/power-iaas.network-address-group.png">    </p:cNvPr>
+          <p:cNvPr id="27" name="Object 26" descr="public/generated/icons/power-iaas.image.png">    </p:cNvPr>
           <p:cNvPicPr>
             <a:picLocks noChangeAspect="1"/>
           </p:cNvPicPr>
@@ -34415,7 +34415,7 @@
                 <a:ea typeface="Helvetica" pitchFamily="34" charset="-122"/>
                 <a:cs typeface="Helvetica" pitchFamily="34" charset="-120"/>
               </a:rPr>
-              <a:t>POWER VIRTUAL SERVER NETWORK ADDRESS GROUP</a:t>
+              <a:t>POWER VIRTUAL SERVER IMAGE</a:t>
             </a:r>
             <a:endParaRPr lang="en-US" dirty="0"/>
           </a:p>
@@ -34448,7 +34448,7 @@
       </p:sp>
       <p:pic>
         <p:nvPicPr>
-          <p:cNvPr id="30" name="Object 29" descr="public/generated/icons/power-iaas.network-interface.png">    </p:cNvPr>
+          <p:cNvPr id="30" name="Object 29" descr="public/generated/icons/power-iaas.network.png">    </p:cNvPr>
           <p:cNvPicPr>
             <a:picLocks noChangeAspect="1"/>
           </p:cNvPicPr>
@@ -34504,7 +34504,7 @@
                 <a:ea typeface="Helvetica" pitchFamily="34" charset="-122"/>
                 <a:cs typeface="Helvetica" pitchFamily="34" charset="-120"/>
               </a:rPr>
-              <a:t>POWER VIRTUAL SERVER NETWORK INTERFACE</a:t>
+              <a:t>POWER VIRTUAL SERVER NETWORK</a:t>
             </a:r>
             <a:endParaRPr lang="en-US" dirty="0"/>
           </a:p>
@@ -34537,7 +34537,7 @@
       </p:sp>
       <p:pic>
         <p:nvPicPr>
-          <p:cNvPr id="33" name="Object 32" descr="public/generated/icons/power-iaas.network-security-group.png">    </p:cNvPr>
+          <p:cNvPr id="33" name="Object 32" descr="public/generated/icons/power-iaas.network-address-group.png">    </p:cNvPr>
           <p:cNvPicPr>
             <a:picLocks noChangeAspect="1"/>
           </p:cNvPicPr>
@@ -34593,7 +34593,7 @@
                 <a:ea typeface="Helvetica" pitchFamily="34" charset="-122"/>
                 <a:cs typeface="Helvetica" pitchFamily="34" charset="-120"/>
               </a:rPr>
-              <a:t>POWER VIRTUAL SERVER NETWORK SECURITY GROUP</a:t>
+              <a:t>POWER VIRTUAL SERVER NETWORK ADDRESS GROUP</a:t>
             </a:r>
             <a:endParaRPr lang="en-US" dirty="0"/>
           </a:p>
@@ -34626,7 +34626,7 @@
       </p:sp>
       <p:pic>
         <p:nvPicPr>
-          <p:cNvPr id="36" name="Object 35" descr="public/generated/icons/power-iaas.placement-group.png">    </p:cNvPr>
+          <p:cNvPr id="36" name="Object 35" descr="public/generated/icons/power-iaas.network-interface.png">    </p:cNvPr>
           <p:cNvPicPr>
             <a:picLocks noChangeAspect="1"/>
           </p:cNvPicPr>
@@ -34682,7 +34682,7 @@
                 <a:ea typeface="Helvetica" pitchFamily="34" charset="-122"/>
                 <a:cs typeface="Helvetica" pitchFamily="34" charset="-120"/>
               </a:rPr>
-              <a:t>POWER VIRTUAL SERVER PLACEMENT GROUP</a:t>
+              <a:t>POWER VIRTUAL SERVER NETWORK INTERFACE</a:t>
             </a:r>
             <a:endParaRPr lang="en-US" dirty="0"/>
           </a:p>
@@ -34715,7 +34715,7 @@
       </p:sp>
       <p:pic>
         <p:nvPicPr>
-          <p:cNvPr id="39" name="Object 38" descr="public/generated/icons/power-iaas.route.png">    </p:cNvPr>
+          <p:cNvPr id="39" name="Object 38" descr="public/generated/icons/power-iaas.network-security-group.png">    </p:cNvPr>
           <p:cNvPicPr>
             <a:picLocks noChangeAspect="1"/>
           </p:cNvPicPr>
@@ -34771,7 +34771,7 @@
                 <a:ea typeface="Helvetica" pitchFamily="34" charset="-122"/>
                 <a:cs typeface="Helvetica" pitchFamily="34" charset="-120"/>
               </a:rPr>
-              <a:t>POWER VIRTUAL SERVER ROUTE</a:t>
+              <a:t>POWER VIRTUAL SERVER NETWORK SECURITY GROUP</a:t>
             </a:r>
             <a:endParaRPr lang="en-US" dirty="0"/>
           </a:p>
@@ -34804,7 +34804,7 @@
       </p:sp>
       <p:pic>
         <p:nvPicPr>
-          <p:cNvPr id="42" name="Object 41" descr="public/generated/icons/power-iaas.shared-processor-pool.png">    </p:cNvPr>
+          <p:cNvPr id="42" name="Object 41" descr="public/generated/icons/power-iaas.placement-group.png">    </p:cNvPr>
           <p:cNvPicPr>
             <a:picLocks noChangeAspect="1"/>
           </p:cNvPicPr>
@@ -34860,7 +34860,7 @@
                 <a:ea typeface="Helvetica" pitchFamily="34" charset="-122"/>
                 <a:cs typeface="Helvetica" pitchFamily="34" charset="-120"/>
               </a:rPr>
-              <a:t>POWER VIRTUAL SERVER SHARED PROCESSOR POOL</a:t>
+              <a:t>POWER VIRTUAL SERVER PLACEMENT GROUP</a:t>
             </a:r>
             <a:endParaRPr lang="en-US" dirty="0"/>
           </a:p>
@@ -34893,7 +34893,7 @@
       </p:sp>
       <p:pic>
         <p:nvPicPr>
-          <p:cNvPr id="45" name="Object 44" descr="public/generated/icons/power-iaas.spp-placement-group.png">    </p:cNvPr>
+          <p:cNvPr id="45" name="Object 44" descr="public/generated/icons/power-iaas.route.png">    </p:cNvPr>
           <p:cNvPicPr>
             <a:picLocks noChangeAspect="1"/>
           </p:cNvPicPr>
@@ -34949,7 +34949,7 @@
                 <a:ea typeface="Helvetica" pitchFamily="34" charset="-122"/>
                 <a:cs typeface="Helvetica" pitchFamily="34" charset="-120"/>
               </a:rPr>
-              <a:t>POWER VIRTUAL SERVER SHARED PROCESSOR POOL PLACEMENT GROUP</a:t>
+              <a:t>POWER VIRTUAL SERVER ROUTE</a:t>
             </a:r>
             <a:endParaRPr lang="en-US" dirty="0"/>
           </a:p>
@@ -34982,7 +34982,7 @@
       </p:sp>
       <p:pic>
         <p:nvPicPr>
-          <p:cNvPr id="48" name="Object 47" descr="public/generated/icons/power-iaas.snapshot.png">    </p:cNvPr>
+          <p:cNvPr id="48" name="Object 47" descr="public/generated/icons/power-iaas.shared-processor-pool.png">    </p:cNvPr>
           <p:cNvPicPr>
             <a:picLocks noChangeAspect="1"/>
           </p:cNvPicPr>
@@ -35038,7 +35038,7 @@
                 <a:ea typeface="Helvetica" pitchFamily="34" charset="-122"/>
                 <a:cs typeface="Helvetica" pitchFamily="34" charset="-120"/>
               </a:rPr>
-              <a:t>POWER VIRTUAL SERVER SNAPSHOT</a:t>
+              <a:t>POWER VIRTUAL SERVER SHARED PROCESSOR POOL</a:t>
             </a:r>
             <a:endParaRPr lang="en-US" dirty="0"/>
           </a:p>
@@ -35071,7 +35071,7 @@
       </p:sp>
       <p:pic>
         <p:nvPicPr>
-          <p:cNvPr id="51" name="Object 50" descr="public/generated/icons/power-iaas.pvm-instance.png">    </p:cNvPr>
+          <p:cNvPr id="51" name="Object 50" descr="public/generated/icons/power-iaas.spp-placement-group.png">    </p:cNvPr>
           <p:cNvPicPr>
             <a:picLocks noChangeAspect="1"/>
           </p:cNvPicPr>
@@ -35127,7 +35127,7 @@
                 <a:ea typeface="Helvetica" pitchFamily="34" charset="-122"/>
                 <a:cs typeface="Helvetica" pitchFamily="34" charset="-120"/>
               </a:rPr>
-              <a:t>POWER VIRTUAL SERVER VIRTUAL MACHINE</a:t>
+              <a:t>POWER VIRTUAL SERVER SHARED PROCESSOR POOL PLACEMENT GROUP</a:t>
             </a:r>
             <a:endParaRPr lang="en-US" dirty="0"/>
           </a:p>
@@ -35160,7 +35160,7 @@
       </p:sp>
       <p:pic>
         <p:nvPicPr>
-          <p:cNvPr id="54" name="Object 53" descr="public/generated/icons/power-iaas.volume.png">    </p:cNvPr>
+          <p:cNvPr id="54" name="Object 53" descr="public/generated/icons/power-iaas.snapshot.png">    </p:cNvPr>
           <p:cNvPicPr>
             <a:picLocks noChangeAspect="1"/>
           </p:cNvPicPr>
@@ -35216,7 +35216,7 @@
                 <a:ea typeface="Helvetica" pitchFamily="34" charset="-122"/>
                 <a:cs typeface="Helvetica" pitchFamily="34" charset="-120"/>
               </a:rPr>
-              <a:t>POWER VIRTUAL SERVER VOLUME</a:t>
+              <a:t>POWER VIRTUAL SERVER SNAPSHOT</a:t>
             </a:r>
             <a:endParaRPr lang="en-US" dirty="0"/>
           </a:p>
@@ -35249,7 +35249,7 @@
       </p:sp>
       <p:pic>
         <p:nvPicPr>
-          <p:cNvPr id="57" name="Object 56" descr="public/generated/icons/b260dfd6-9b79-4377-be6d-146a5cb59be8.png">    </p:cNvPr>
+          <p:cNvPr id="57" name="Object 56" descr="public/generated/icons/power-iaas.pvm-instance.png">    </p:cNvPr>
           <p:cNvPicPr>
             <a:picLocks noChangeAspect="1"/>
           </p:cNvPicPr>
@@ -35305,7 +35305,7 @@
                 <a:ea typeface="Helvetica" pitchFamily="34" charset="-122"/>
                 <a:cs typeface="Helvetica" pitchFamily="34" charset="-120"/>
               </a:rPr>
-              <a:t>POWERVS MIGRATION AS A SERVICE</a:t>
+              <a:t>POWER VIRTUAL SERVER VIRTUAL MACHINE</a:t>
             </a:r>
             <a:endParaRPr lang="en-US" dirty="0"/>
           </a:p>
@@ -35338,7 +35338,7 @@
       </p:sp>
       <p:pic>
         <p:nvPicPr>
-          <p:cNvPr id="60" name="Object 59" descr="public/generated/icons/is.private-path-service-gateway.png">    </p:cNvPr>
+          <p:cNvPr id="60" name="Object 59" descr="public/generated/icons/power-iaas.volume.png">    </p:cNvPr>
           <p:cNvPicPr>
             <a:picLocks noChangeAspect="1"/>
           </p:cNvPicPr>
@@ -35394,7 +35394,7 @@
                 <a:ea typeface="Helvetica" pitchFamily="34" charset="-122"/>
                 <a:cs typeface="Helvetica" pitchFamily="34" charset="-120"/>
               </a:rPr>
-              <a:t>PRIVATE PATH SERVICE FOR VPC</a:t>
+              <a:t>POWER VIRTUAL SERVER VOLUME</a:t>
             </a:r>
             <a:endParaRPr lang="en-US" dirty="0"/>
           </a:p>
@@ -35427,7 +35427,7 @@
       </p:sp>
       <p:pic>
         <p:nvPicPr>
-          <p:cNvPr id="63" name="Object 62" descr="public/generated/icons/91a901ac-fb7d-9b6e-eb25-14e75a20c4c2.png">    </p:cNvPr>
+          <p:cNvPr id="63" name="Object 62" descr="public/generated/icons/b260dfd6-9b79-4377-be6d-146a5cb59be8.png">    </p:cNvPr>
           <p:cNvPicPr>
             <a:picLocks noChangeAspect="1"/>
           </p:cNvPicPr>
@@ -35483,7 +35483,7 @@
                 <a:ea typeface="Helvetica" pitchFamily="34" charset="-122"/>
                 <a:cs typeface="Helvetica" pitchFamily="34" charset="-120"/>
               </a:rPr>
-              <a:t>PROFESSIONAL SERVICES FOR GOVERNMENT(ONLY AVAILABLE IN US)</a:t>
+              <a:t>POWERVS MIGRATION AS A SERVICE</a:t>
             </a:r>
             <a:endParaRPr lang="en-US" dirty="0"/>
           </a:p>
@@ -35516,7 +35516,7 @@
       </p:sp>
       <p:pic>
         <p:nvPicPr>
-          <p:cNvPr id="66" name="Object 65" descr="public/generated/icons/0f32e980-4197-4ad7-a484-e98f7c7424bf.png">    </p:cNvPr>
+          <p:cNvPr id="66" name="Object 65" descr="public/generated/icons/is.private-path-service-gateway.png">    </p:cNvPr>
           <p:cNvPicPr>
             <a:picLocks noChangeAspect="1"/>
           </p:cNvPicPr>
@@ -35572,7 +35572,7 @@
                 <a:ea typeface="Helvetica" pitchFamily="34" charset="-122"/>
                 <a:cs typeface="Helvetica" pitchFamily="34" charset="-120"/>
               </a:rPr>
-              <a:t>PROFI POWERVS SERVICE</a:t>
+              <a:t>PRIVATE PATH SERVICE FOR VPC</a:t>
             </a:r>
             <a:endParaRPr lang="en-US" dirty="0"/>
           </a:p>
@@ -35605,7 +35605,7 @@
       </p:sp>
       <p:pic>
         <p:nvPicPr>
-          <p:cNvPr id="69" name="Object 68" descr="public/generated/icons/7c03a06c-f1bb-46f8-84d8-9378432b2804.png">    </p:cNvPr>
+          <p:cNvPr id="69" name="Object 68" descr="public/generated/icons/91a901ac-fb7d-9b6e-eb25-14e75a20c4c2.png">    </p:cNvPr>
           <p:cNvPicPr>
             <a:picLocks noChangeAspect="1"/>
           </p:cNvPicPr>
@@ -35661,7 +35661,7 @@
                 <a:ea typeface="Helvetica" pitchFamily="34" charset="-122"/>
                 <a:cs typeface="Helvetica" pitchFamily="34" charset="-120"/>
               </a:rPr>
-              <a:t>PROTECTIO DRAAS MANAGED SERVICE</a:t>
+              <a:t>PROFESSIONAL SERVICES FOR GOVERNMENT(ONLY AVAILABLE IN US)</a:t>
             </a:r>
             <a:endParaRPr lang="en-US" dirty="0"/>
           </a:p>
@@ -35694,7 +35694,7 @@
       </p:sp>
       <p:pic>
         <p:nvPicPr>
-          <p:cNvPr id="72" name="Object 71" descr="public/generated/icons/is.public-gateway.png">    </p:cNvPr>
+          <p:cNvPr id="72" name="Object 71" descr="public/generated/icons/0f32e980-4197-4ad7-a484-e98f7c7424bf.png">    </p:cNvPr>
           <p:cNvPicPr>
             <a:picLocks noChangeAspect="1"/>
           </p:cNvPicPr>
@@ -35750,7 +35750,7 @@
                 <a:ea typeface="Helvetica" pitchFamily="34" charset="-122"/>
                 <a:cs typeface="Helvetica" pitchFamily="34" charset="-120"/>
               </a:rPr>
-              <a:t>PUBLIC GATEWAY</a:t>
+              <a:t>PROFI POWERVS SERVICE</a:t>
             </a:r>
             <a:endParaRPr lang="en-US" dirty="0"/>
           </a:p>
@@ -35783,7 +35783,7 @@
       </p:sp>
       <p:pic>
         <p:nvPicPr>
-          <p:cNvPr id="75" name="Object 74" descr="public/generated/icons/aa11a8b2-381e-4c1c-a232-2148f65c005f.png">    </p:cNvPr>
+          <p:cNvPr id="75" name="Object 74" descr="public/generated/icons/7c03a06c-f1bb-46f8-84d8-9378432b2804.png">    </p:cNvPr>
           <p:cNvPicPr>
             <a:picLocks noChangeAspect="1"/>
           </p:cNvPicPr>
@@ -35839,7 +35839,7 @@
                 <a:ea typeface="Helvetica" pitchFamily="34" charset="-122"/>
                 <a:cs typeface="Helvetica" pitchFamily="34" charset="-120"/>
               </a:rPr>
-              <a:t>PVS ONE MANAGED SERVICE</a:t>
+              <a:t>PROTECTIO DRAAS MANAGED SERVICE</a:t>
             </a:r>
             <a:endParaRPr lang="en-US" dirty="0"/>
           </a:p>
@@ -35872,7 +35872,7 @@
       </p:sp>
       <p:pic>
         <p:nvPicPr>
-          <p:cNvPr id="78" name="Object 77" descr="public/generated/icons/3eb2d5a0-24ff-11eb-9437-631d7272fff5.png">    </p:cNvPr>
+          <p:cNvPr id="78" name="Object 77" descr="public/generated/icons/is.public-gateway.png">    </p:cNvPr>
           <p:cNvPicPr>
             <a:picLocks noChangeAspect="1"/>
           </p:cNvPicPr>
@@ -35928,7 +35928,7 @@
                 <a:ea typeface="Helvetica" pitchFamily="34" charset="-122"/>
                 <a:cs typeface="Helvetica" pitchFamily="34" charset="-120"/>
               </a:rPr>
-              <a:t>PX-BACKUP FOR KUBERNETES</a:t>
+              <a:t>PUBLIC GATEWAY</a:t>
             </a:r>
             <a:endParaRPr lang="en-US" dirty="0"/>
           </a:p>
@@ -35961,7 +35961,7 @@
       </p:sp>
       <p:pic>
         <p:nvPicPr>
-          <p:cNvPr id="81" name="Object 80" descr="public/generated/icons/b6049020-80f4-11eb-a0f7-e35ec9b4054f.png">    </p:cNvPr>
+          <p:cNvPr id="81" name="Object 80" descr="public/generated/icons/aa11a8b2-381e-4c1c-a232-2148f65c005f.png">    </p:cNvPr>
           <p:cNvPicPr>
             <a:picLocks noChangeAspect="1"/>
           </p:cNvPicPr>
@@ -36017,7 +36017,7 @@
                 <a:ea typeface="Helvetica" pitchFamily="34" charset="-122"/>
                 <a:cs typeface="Helvetica" pitchFamily="34" charset="-120"/>
               </a:rPr>
-              <a:t>QISKIT RUNTIME</a:t>
+              <a:t>PVS ONE MANAGED SERVICE</a:t>
             </a:r>
             <a:endParaRPr lang="en-US" dirty="0"/>
           </a:p>
@@ -36050,7 +36050,7 @@
       </p:sp>
       <p:pic>
         <p:nvPicPr>
-          <p:cNvPr id="84" name="Object 83" descr="public/generated/icons/cf5f8ac0-98f7-11e9-a40c-5b3c4bf3cc6d.png">    </p:cNvPr>
+          <p:cNvPr id="84" name="Object 83" descr="public/generated/icons/3eb2d5a0-24ff-11eb-9437-631d7272fff5.png">    </p:cNvPr>
           <p:cNvPicPr>
             <a:picLocks noChangeAspect="1"/>
           </p:cNvPicPr>
@@ -36106,7 +36106,7 @@
                 <a:ea typeface="Helvetica" pitchFamily="34" charset="-122"/>
                 <a:cs typeface="Helvetica" pitchFamily="34" charset="-120"/>
               </a:rPr>
-              <a:t>RAXAK PROTECT</a:t>
+              <a:t>PX-BACKUP FOR KUBERNETES</a:t>
             </a:r>
             <a:endParaRPr lang="en-US" dirty="0"/>
           </a:p>
@@ -36139,7 +36139,7 @@
       </p:sp>
       <p:pic>
         <p:nvPicPr>
-          <p:cNvPr id="87" name="Object 86" descr="public/generated/icons/instructlab.png">    </p:cNvPr>
+          <p:cNvPr id="87" name="Object 86" descr="public/generated/icons/b6049020-80f4-11eb-a0f7-e35ec9b4054f.png">    </p:cNvPr>
           <p:cNvPicPr>
             <a:picLocks noChangeAspect="1"/>
           </p:cNvPicPr>
@@ -36195,7 +36195,7 @@
                 <a:ea typeface="Helvetica" pitchFamily="34" charset="-122"/>
                 <a:cs typeface="Helvetica" pitchFamily="34" charset="-120"/>
               </a:rPr>
-              <a:t>RED HAT AI INSTRUCTLAB</a:t>
+              <a:t>QISKIT RUNTIME</a:t>
             </a:r>
             <a:endParaRPr lang="en-US" dirty="0"/>
           </a:p>
@@ -36228,7 +36228,7 @@
       </p:sp>
       <p:pic>
         <p:nvPicPr>
-          <p:cNvPr id="90" name="Object 89" descr="public/generated/icons/openshift.png">    </p:cNvPr>
+          <p:cNvPr id="90" name="Object 89" descr="public/generated/icons/cf5f8ac0-98f7-11e9-a40c-5b3c4bf3cc6d.png">    </p:cNvPr>
           <p:cNvPicPr>
             <a:picLocks noChangeAspect="1"/>
           </p:cNvPicPr>
@@ -36284,7 +36284,7 @@
                 <a:ea typeface="Helvetica" pitchFamily="34" charset="-122"/>
                 <a:cs typeface="Helvetica" pitchFamily="34" charset="-120"/>
               </a:rPr>
-              <a:t>RED HAT OPENSHIFT ON IBM CLOUD</a:t>
+              <a:t>RAXAK PROTECT</a:t>
             </a:r>
             <a:endParaRPr lang="en-US" dirty="0"/>
           </a:p>
@@ -36317,7 +36317,7 @@
       </p:sp>
       <p:pic>
         <p:nvPicPr>
-          <p:cNvPr id="93" name="Object 92" descr="public/generated/icons/bd517bf0-88ba-11ea-a52e-91aeb42a4019.png">    </p:cNvPr>
+          <p:cNvPr id="93" name="Object 92" descr="public/generated/icons/instructlab.png">    </p:cNvPr>
           <p:cNvPicPr>
             <a:picLocks noChangeAspect="1"/>
           </p:cNvPicPr>
@@ -36373,7 +36373,7 @@
                 <a:ea typeface="Helvetica" pitchFamily="34" charset="-122"/>
                 <a:cs typeface="Helvetica" pitchFamily="34" charset="-120"/>
               </a:rPr>
-              <a:t>SATELLITE</a:t>
+              <a:t>RED HAT AI INSTRUCTLAB</a:t>
             </a:r>
             <a:endParaRPr lang="en-US" dirty="0"/>
           </a:p>
@@ -36406,7 +36406,7 @@
       </p:sp>
       <p:pic>
         <p:nvPicPr>
-          <p:cNvPr id="96" name="Object 95" descr="public/generated/icons/schematics.png">    </p:cNvPr>
+          <p:cNvPr id="96" name="Object 95" descr="public/generated/icons/openshift.png">    </p:cNvPr>
           <p:cNvPicPr>
             <a:picLocks noChangeAspect="1"/>
           </p:cNvPicPr>
@@ -36462,7 +36462,7 @@
                 <a:ea typeface="Helvetica" pitchFamily="34" charset="-122"/>
                 <a:cs typeface="Helvetica" pitchFamily="34" charset="-120"/>
               </a:rPr>
-              <a:t>SCHEMATICS</a:t>
+              <a:t>RED HAT OPENSHIFT ON IBM CLOUD</a:t>
             </a:r>
             <a:endParaRPr lang="en-US" dirty="0"/>
           </a:p>
@@ -36495,7 +36495,7 @@
       </p:sp>
       <p:pic>
         <p:nvPicPr>
-          <p:cNvPr id="99" name="Object 98" descr="public/generated/icons/14.png">    </p:cNvPr>
+          <p:cNvPr id="99" name="Object 98" descr="public/generated/icons/bd517bf0-88ba-11ea-a52e-91aeb42a4019.png">    </p:cNvPr>
           <p:cNvPicPr>
             <a:picLocks noChangeAspect="1"/>
           </p:cNvPicPr>
@@ -36551,7 +36551,7 @@
                 <a:ea typeface="Helvetica" pitchFamily="34" charset="-122"/>
                 <a:cs typeface="Helvetica" pitchFamily="34" charset="-120"/>
               </a:rPr>
-              <a:t>SECONDARY SUBNETS</a:t>
+              <a:t>SATELLITE</a:t>
             </a:r>
             <a:endParaRPr lang="en-US" dirty="0"/>
           </a:p>
@@ -36584,7 +36584,7 @@
       </p:sp>
       <p:pic>
         <p:nvPicPr>
-          <p:cNvPr id="102" name="Object 101" descr="public/generated/icons/ebc0cdb0-af2a-11ea-98c7-29e5db822649.png">    </p:cNvPr>
+          <p:cNvPr id="102" name="Object 101" descr="public/generated/icons/schematics.png">    </p:cNvPr>
           <p:cNvPicPr>
             <a:picLocks noChangeAspect="1"/>
           </p:cNvPicPr>
@@ -36640,7 +36640,7 @@
                 <a:ea typeface="Helvetica" pitchFamily="34" charset="-122"/>
                 <a:cs typeface="Helvetica" pitchFamily="34" charset="-120"/>
               </a:rPr>
-              <a:t>SECRETS MANAGER</a:t>
+              <a:t>SCHEMATICS</a:t>
             </a:r>
             <a:endParaRPr lang="en-US" dirty="0"/>
           </a:p>
@@ -36673,7 +36673,7 @@
       </p:sp>
       <p:pic>
         <p:nvPicPr>
-          <p:cNvPr id="105" name="Object 104" descr="public/generated/icons/e831e900-82d6-11ec-95c5-c12c5a5d9687.png">    </p:cNvPr>
+          <p:cNvPr id="105" name="Object 104" descr="public/generated/icons/14.png">    </p:cNvPr>
           <p:cNvPicPr>
             <a:picLocks noChangeAspect="1"/>
           </p:cNvPicPr>
@@ -36729,7 +36729,7 @@
                 <a:ea typeface="Helvetica" pitchFamily="34" charset="-122"/>
                 <a:cs typeface="Helvetica" pitchFamily="34" charset="-120"/>
               </a:rPr>
-              <a:t>SECURITY AND COMPLIANCE CENTER WORKLOAD PROTECTION</a:t>
+              <a:t>SECONDARY SUBNETS</a:t>
             </a:r>
             <a:endParaRPr lang="en-US" dirty="0"/>
           </a:p>
@@ -36762,7 +36762,7 @@
       </p:sp>
       <p:pic>
         <p:nvPicPr>
-          <p:cNvPr id="108" name="Object 107" descr="public/generated/icons/is.security-group.png">    </p:cNvPr>
+          <p:cNvPr id="108" name="Object 107" descr="public/generated/icons/ebc0cdb0-af2a-11ea-98c7-29e5db822649.png">    </p:cNvPr>
           <p:cNvPicPr>
             <a:picLocks noChangeAspect="1"/>
           </p:cNvPicPr>
@@ -36818,7 +36818,7 @@
                 <a:ea typeface="Helvetica" pitchFamily="34" charset="-122"/>
                 <a:cs typeface="Helvetica" pitchFamily="34" charset="-120"/>
               </a:rPr>
-              <a:t>SECURITY GROUP FOR VPC</a:t>
+              <a:t>SECRETS MANAGER</a:t>
             </a:r>
             <a:endParaRPr lang="en-US" dirty="0"/>
           </a:p>
@@ -36884,7 +36884,7 @@
       </p:sp>
       <p:pic>
         <p:nvPicPr>
-          <p:cNvPr id="3" name="Object 2" descr="public/generated/icons/cf329950-0a3e-11e8-922e-f1366c6e1c83-vcstrial_dr.png">    </p:cNvPr>
+          <p:cNvPr id="3" name="Object 2" descr="public/generated/icons/e831e900-82d6-11ec-95c5-c12c5a5d9687.png">    </p:cNvPr>
           <p:cNvPicPr>
             <a:picLocks noChangeAspect="1"/>
           </p:cNvPicPr>
@@ -36940,7 +36940,7 @@
                 <a:ea typeface="Helvetica" pitchFamily="34" charset="-122"/>
                 <a:cs typeface="Helvetica" pitchFamily="34" charset="-120"/>
               </a:rPr>
-              <a:t>SINGLE-NODE TRIAL FOR DATA PROTECTION AND DISASTER RECOVERY</a:t>
+              <a:t>SECURITY AND COMPLIANCE CENTER WORKLOAD PROTECTION</a:t>
             </a:r>
             <a:endParaRPr lang="en-US" dirty="0"/>
           </a:p>
@@ -36973,7 +36973,7 @@
       </p:sp>
       <p:pic>
         <p:nvPicPr>
-          <p:cNvPr id="6" name="Object 5" descr="public/generated/icons/cf329950-0a3e-11e8-922e-f1366c6e1c83-vcstrial.png">    </p:cNvPr>
+          <p:cNvPr id="6" name="Object 5" descr="public/generated/icons/is.security-group.png">    </p:cNvPr>
           <p:cNvPicPr>
             <a:picLocks noChangeAspect="1"/>
           </p:cNvPicPr>
@@ -37029,7 +37029,7 @@
                 <a:ea typeface="Helvetica" pitchFamily="34" charset="-122"/>
                 <a:cs typeface="Helvetica" pitchFamily="34" charset="-120"/>
               </a:rPr>
-              <a:t>SINGLE-NODE TRIAL FOR MIGRATION AND APP MODERNIZATION</a:t>
+              <a:t>SECURITY GROUP FOR VPC</a:t>
             </a:r>
             <a:endParaRPr lang="en-US" dirty="0"/>
           </a:p>
@@ -37062,7 +37062,7 @@
       </p:sp>
       <p:pic>
         <p:nvPicPr>
-          <p:cNvPr id="9" name="Object 8" descr="public/generated/icons/cf329950-0a3e-11e8-922e-f1366c6e1c83-spplus.png">    </p:cNvPr>
+          <p:cNvPr id="9" name="Object 8" descr="public/generated/icons/cf329950-0a3e-11e8-922e-f1366c6e1c83-vcstrial_dr.png">    </p:cNvPr>
           <p:cNvPicPr>
             <a:picLocks noChangeAspect="1"/>
           </p:cNvPicPr>
@@ -37118,7 +37118,7 @@
                 <a:ea typeface="Helvetica" pitchFamily="34" charset="-122"/>
                 <a:cs typeface="Helvetica" pitchFamily="34" charset="-120"/>
               </a:rPr>
-              <a:t>SPECTRUM PROTECT PLUS</a:t>
+              <a:t>SINGLE-NODE TRIAL FOR DATA PROTECTION AND DISASTER RECOVERY</a:t>
             </a:r>
             <a:endParaRPr lang="en-US" dirty="0"/>
           </a:p>
@@ -37151,7 +37151,7 @@
       </p:sp>
       <p:pic>
         <p:nvPicPr>
-          <p:cNvPr id="12" name="Object 11" descr="public/generated/icons/bc35fb8c-bc5b-431b-859e-3861771d5843.png">    </p:cNvPr>
+          <p:cNvPr id="12" name="Object 11" descr="public/generated/icons/cf329950-0a3e-11e8-922e-f1366c6e1c83-vcstrial.png">    </p:cNvPr>
           <p:cNvPicPr>
             <a:picLocks noChangeAspect="1"/>
           </p:cNvPicPr>
@@ -37207,7 +37207,7 @@
                 <a:ea typeface="Helvetica" pitchFamily="34" charset="-122"/>
                 <a:cs typeface="Helvetica" pitchFamily="34" charset="-120"/>
               </a:rPr>
-              <a:t>SPEECH TO TEXT</a:t>
+              <a:t>SINGLE-NODE TRIAL FOR MIGRATION AND APP MODERNIZATION</a:t>
             </a:r>
             <a:endParaRPr lang="en-US" dirty="0"/>
           </a:p>
@@ -37240,7 +37240,7 @@
       </p:sp>
       <p:pic>
         <p:nvPicPr>
-          <p:cNvPr id="15" name="Object 14" descr="public/generated/icons/556153d0-5ad0-11e9-b7f9-41319ef22125.png">    </p:cNvPr>
+          <p:cNvPr id="15" name="Object 14" descr="public/generated/icons/cf329950-0a3e-11e8-922e-f1366c6e1c83-spplus.png">    </p:cNvPr>
           <p:cNvPicPr>
             <a:picLocks noChangeAspect="1"/>
           </p:cNvPicPr>
@@ -37296,7 +37296,7 @@
                 <a:ea typeface="Helvetica" pitchFamily="34" charset="-122"/>
                 <a:cs typeface="Helvetica" pitchFamily="34" charset="-120"/>
               </a:rPr>
-              <a:t>SSH KEY FOR VPC</a:t>
+              <a:t>SPECTRUM PROTECT PLUS</a:t>
             </a:r>
             <a:endParaRPr lang="en-US" dirty="0"/>
           </a:p>
@@ -37329,7 +37329,7 @@
       </p:sp>
       <p:pic>
         <p:nvPicPr>
-          <p:cNvPr id="18" name="Object 17" descr="public/generated/icons/19.png">    </p:cNvPr>
+          <p:cNvPr id="18" name="Object 17" descr="public/generated/icons/bc35fb8c-bc5b-431b-859e-3861771d5843.png">    </p:cNvPr>
           <p:cNvPicPr>
             <a:picLocks noChangeAspect="1"/>
           </p:cNvPicPr>
@@ -37385,7 +37385,7 @@
                 <a:ea typeface="Helvetica" pitchFamily="34" charset="-122"/>
                 <a:cs typeface="Helvetica" pitchFamily="34" charset="-120"/>
               </a:rPr>
-              <a:t>SSL CERTIFICATES</a:t>
+              <a:t>SPEECH TO TEXT</a:t>
             </a:r>
             <a:endParaRPr lang="en-US" dirty="0"/>
           </a:p>
@@ -37418,7 +37418,7 @@
       </p:sp>
       <p:pic>
         <p:nvPicPr>
-          <p:cNvPr id="21" name="Object 20" descr="public/generated/icons/8aa72a57-b069-47e6-bf3f-8d1ced0051ed.png">    </p:cNvPr>
+          <p:cNvPr id="21" name="Object 20" descr="public/generated/icons/556153d0-5ad0-11e9-b7f9-41319ef22125.png">    </p:cNvPr>
           <p:cNvPicPr>
             <a:picLocks noChangeAspect="1"/>
           </p:cNvPicPr>
@@ -37474,7 +37474,7 @@
                 <a:ea typeface="Helvetica" pitchFamily="34" charset="-122"/>
                 <a:cs typeface="Helvetica" pitchFamily="34" charset="-120"/>
               </a:rPr>
-              <a:t>STANDARD LIVE PAYMENT HSM SERVICE</a:t>
+              <a:t>SSH KEY FOR VPC</a:t>
             </a:r>
             <a:endParaRPr lang="en-US" dirty="0"/>
           </a:p>
@@ -37507,7 +37507,7 @@
       </p:sp>
       <p:pic>
         <p:nvPicPr>
-          <p:cNvPr id="24" name="Object 23" descr="public/generated/icons/c82e2968-02eb-487e-84f0-01cbd884b5c0.png">    </p:cNvPr>
+          <p:cNvPr id="24" name="Object 23" descr="public/generated/icons/19.png">    </p:cNvPr>
           <p:cNvPicPr>
             <a:picLocks noChangeAspect="1"/>
           </p:cNvPicPr>
@@ -37563,7 +37563,7 @@
                 <a:ea typeface="Helvetica" pitchFamily="34" charset="-122"/>
                 <a:cs typeface="Helvetica" pitchFamily="34" charset="-120"/>
               </a:rPr>
-              <a:t>STAR VIRTUAL LEARNING PLATFORM (VLP)</a:t>
+              <a:t>SSL CERTIFICATES</a:t>
             </a:r>
             <a:endParaRPr lang="en-US" dirty="0"/>
           </a:p>
@@ -37596,7 +37596,7 @@
       </p:sp>
       <p:pic>
         <p:nvPicPr>
-          <p:cNvPr id="27" name="Object 26" descr="public/generated/icons/2bea02b0-c0a4-11ee-83aa-3171b0bf2976.png">    </p:cNvPr>
+          <p:cNvPr id="27" name="Object 26" descr="public/generated/icons/8aa72a57-b069-47e6-bf3f-8d1ced0051ed.png">    </p:cNvPr>
           <p:cNvPicPr>
             <a:picLocks noChangeAspect="1"/>
           </p:cNvPicPr>
@@ -37652,7 +37652,7 @@
                 <a:ea typeface="Helvetica" pitchFamily="34" charset="-122"/>
                 <a:cs typeface="Helvetica" pitchFamily="34" charset="-120"/>
               </a:rPr>
-              <a:t>STORAGE CEPH AS A SERVICE</a:t>
+              <a:t>STANDARD LIVE PAYMENT HSM SERVICE</a:t>
             </a:r>
             <a:endParaRPr lang="en-US" dirty="0"/>
           </a:p>
@@ -37685,7 +37685,7 @@
       </p:sp>
       <p:pic>
         <p:nvPicPr>
-          <p:cNvPr id="30" name="Object 29" descr="public/generated/icons/5acdbc42-8965-48f9-8a3c-1c728b6ed2c4.png">    </p:cNvPr>
+          <p:cNvPr id="30" name="Object 29" descr="public/generated/icons/c82e2968-02eb-487e-84f0-01cbd884b5c0.png">    </p:cNvPr>
           <p:cNvPicPr>
             <a:picLocks noChangeAspect="1"/>
           </p:cNvPicPr>
@@ -37741,7 +37741,7 @@
                 <a:ea typeface="Helvetica" pitchFamily="34" charset="-122"/>
                 <a:cs typeface="Helvetica" pitchFamily="34" charset="-120"/>
               </a:rPr>
-              <a:t>STREAMING ANALYTICS</a:t>
+              <a:t>STAR VIRTUAL LEARNING PLATFORM (VLP)</a:t>
             </a:r>
             <a:endParaRPr lang="en-US" dirty="0"/>
           </a:p>
@@ -37774,7 +37774,7 @@
       </p:sp>
       <p:pic>
         <p:nvPicPr>
-          <p:cNvPr id="33" name="Object 32" descr="public/generated/icons/is.subnet.png">    </p:cNvPr>
+          <p:cNvPr id="33" name="Object 32" descr="public/generated/icons/2bea02b0-c0a4-11ee-83aa-3171b0bf2976.png">    </p:cNvPr>
           <p:cNvPicPr>
             <a:picLocks noChangeAspect="1"/>
           </p:cNvPicPr>
@@ -37830,7 +37830,7 @@
                 <a:ea typeface="Helvetica" pitchFamily="34" charset="-122"/>
                 <a:cs typeface="Helvetica" pitchFamily="34" charset="-120"/>
               </a:rPr>
-              <a:t>SUBNET</a:t>
+              <a:t>STORAGE CEPH AS A SERVICE</a:t>
             </a:r>
             <a:endParaRPr lang="en-US" dirty="0"/>
           </a:p>
@@ -37863,7 +37863,7 @@
       </p:sp>
       <p:pic>
         <p:nvPicPr>
-          <p:cNvPr id="36" name="Object 35" descr="public/generated/icons/c3ef52e7-c978-4fd1-9982-e39084119336.png">    </p:cNvPr>
+          <p:cNvPr id="36" name="Object 35" descr="public/generated/icons/5acdbc42-8965-48f9-8a3c-1c728b6ed2c4.png">    </p:cNvPr>
           <p:cNvPicPr>
             <a:picLocks noChangeAspect="1"/>
           </p:cNvPicPr>
@@ -37919,7 +37919,7 @@
                 <a:ea typeface="Helvetica" pitchFamily="34" charset="-122"/>
                 <a:cs typeface="Helvetica" pitchFamily="34" charset="-120"/>
               </a:rPr>
-              <a:t>TAPESTRYX</a:t>
+              <a:t>STREAMING ANALYTICS</a:t>
             </a:r>
             <a:endParaRPr lang="en-US" dirty="0"/>
           </a:p>
@@ -37952,7 +37952,7 @@
       </p:sp>
       <p:pic>
         <p:nvPicPr>
-          <p:cNvPr id="39" name="Object 38" descr="public/generated/icons/4f2d2c90-caec-4916-b44b-8363479ab12a.png">    </p:cNvPr>
+          <p:cNvPr id="39" name="Object 38" descr="public/generated/icons/is.subnet.png">    </p:cNvPr>
           <p:cNvPicPr>
             <a:picLocks noChangeAspect="1"/>
           </p:cNvPicPr>
@@ -38008,7 +38008,7 @@
                 <a:ea typeface="Helvetica" pitchFamily="34" charset="-122"/>
                 <a:cs typeface="Helvetica" pitchFamily="34" charset="-120"/>
               </a:rPr>
-              <a:t>TECHD PROFESSIONAL SERVICES</a:t>
+              <a:t>SUBNET</a:t>
             </a:r>
             <a:endParaRPr lang="en-US" dirty="0"/>
           </a:p>
@@ -38041,7 +38041,7 @@
       </p:sp>
       <p:pic>
         <p:nvPicPr>
-          <p:cNvPr id="42" name="Object 41" descr="public/generated/icons/282c1d79-9176-4597-9cff-941a8d6cfd4c.png">    </p:cNvPr>
+          <p:cNvPr id="42" name="Object 41" descr="public/generated/icons/c3ef52e7-c978-4fd1-9982-e39084119336.png">    </p:cNvPr>
           <p:cNvPicPr>
             <a:picLocks noChangeAspect="1"/>
           </p:cNvPicPr>
@@ -38097,7 +38097,7 @@
                 <a:ea typeface="Helvetica" pitchFamily="34" charset="-122"/>
                 <a:cs typeface="Helvetica" pitchFamily="34" charset="-120"/>
               </a:rPr>
-              <a:t>TEXT TO SPEECH</a:t>
+              <a:t>TAPESTRYX</a:t>
             </a:r>
             <a:endParaRPr lang="en-US" dirty="0"/>
           </a:p>
@@ -38130,7 +38130,7 @@
       </p:sp>
       <p:pic>
         <p:nvPicPr>
-          <p:cNvPr id="45" name="Object 44" descr="public/generated/icons/e512e5f0-64fb-11e8-9c23-830c05b8b729.png">    </p:cNvPr>
+          <p:cNvPr id="45" name="Object 44" descr="public/generated/icons/4f2d2c90-caec-4916-b44b-8363479ab12a.png">    </p:cNvPr>
           <p:cNvPicPr>
             <a:picLocks noChangeAspect="1"/>
           </p:cNvPicPr>
@@ -38186,7 +38186,7 @@
                 <a:ea typeface="Helvetica" pitchFamily="34" charset="-122"/>
                 <a:cs typeface="Helvetica" pitchFamily="34" charset="-120"/>
               </a:rPr>
-              <a:t>TOOLCHAIN</a:t>
+              <a:t>TECHD PROFESSIONAL SERVICES</a:t>
             </a:r>
             <a:endParaRPr lang="en-US" dirty="0"/>
           </a:p>
@@ -38219,7 +38219,7 @@
       </p:sp>
       <p:pic>
         <p:nvPicPr>
-          <p:cNvPr id="48" name="Object 47" descr="public/generated/icons/a0b5c5b4-cf45-4d10-ba8c-512126cf6e2c.png">    </p:cNvPr>
+          <p:cNvPr id="48" name="Object 47" descr="public/generated/icons/282c1d79-9176-4597-9cff-941a8d6cfd4c.png">    </p:cNvPr>
           <p:cNvPicPr>
             <a:picLocks noChangeAspect="1"/>
           </p:cNvPicPr>
@@ -38275,7 +38275,7 @@
                 <a:ea typeface="Helvetica" pitchFamily="34" charset="-122"/>
                 <a:cs typeface="Helvetica" pitchFamily="34" charset="-120"/>
               </a:rPr>
-              <a:t>TRADESCREEN</a:t>
+              <a:t>TEXT TO SPEECH</a:t>
             </a:r>
             <a:endParaRPr lang="en-US" dirty="0"/>
           </a:p>
@@ -38308,7 +38308,7 @@
       </p:sp>
       <p:pic>
         <p:nvPicPr>
-          <p:cNvPr id="51" name="Object 50" descr="public/generated/icons/f38a4da0-c353-11e9-83b6-a36a57a97a06.png">    </p:cNvPr>
+          <p:cNvPr id="51" name="Object 50" descr="public/generated/icons/e512e5f0-64fb-11e8-9c23-830c05b8b729.png">    </p:cNvPr>
           <p:cNvPicPr>
             <a:picLocks noChangeAspect="1"/>
           </p:cNvPicPr>
@@ -38364,7 +38364,7 @@
                 <a:ea typeface="Helvetica" pitchFamily="34" charset="-122"/>
                 <a:cs typeface="Helvetica" pitchFamily="34" charset="-120"/>
               </a:rPr>
-              <a:t>TRANSIT GATEWAY</a:t>
+              <a:t>TOOLCHAIN</a:t>
             </a:r>
             <a:endParaRPr lang="en-US" dirty="0"/>
           </a:p>
@@ -38397,7 +38397,7 @@
       </p:sp>
       <p:pic>
         <p:nvPicPr>
-          <p:cNvPr id="54" name="Object 53" descr="public/generated/icons/vmware.directorsite.png">    </p:cNvPr>
+          <p:cNvPr id="54" name="Object 53" descr="public/generated/icons/a0b5c5b4-cf45-4d10-ba8c-512126cf6e2c.png">    </p:cNvPr>
           <p:cNvPicPr>
             <a:picLocks noChangeAspect="1"/>
           </p:cNvPicPr>
@@ -38453,7 +38453,7 @@
                 <a:ea typeface="Helvetica" pitchFamily="34" charset="-122"/>
                 <a:cs typeface="Helvetica" pitchFamily="34" charset="-120"/>
               </a:rPr>
-              <a:t>VCF AS A SERVICE - CLOUD DIRECTOR SITE</a:t>
+              <a:t>TRADESCREEN</a:t>
             </a:r>
             <a:endParaRPr lang="en-US" dirty="0"/>
           </a:p>
@@ -38486,7 +38486,7 @@
       </p:sp>
       <p:pic>
         <p:nvPicPr>
-          <p:cNvPr id="57" name="Object 56" descr="public/generated/icons/vmware.usage-meter.png">    </p:cNvPr>
+          <p:cNvPr id="57" name="Object 56" descr="public/generated/icons/f38a4da0-c353-11e9-83b6-a36a57a97a06.png">    </p:cNvPr>
           <p:cNvPicPr>
             <a:picLocks noChangeAspect="1"/>
           </p:cNvPicPr>
@@ -38542,7 +38542,7 @@
                 <a:ea typeface="Helvetica" pitchFamily="34" charset="-122"/>
                 <a:cs typeface="Helvetica" pitchFamily="34" charset="-120"/>
               </a:rPr>
-              <a:t>VCF AS A SERVICE - USAGE METER</a:t>
+              <a:t>TRANSIT GATEWAY</a:t>
             </a:r>
             <a:endParaRPr lang="en-US" dirty="0"/>
           </a:p>
@@ -38575,7 +38575,7 @@
       </p:sp>
       <p:pic>
         <p:nvPicPr>
-          <p:cNvPr id="60" name="Object 59" descr="public/generated/icons/vmware.vdc.png">    </p:cNvPr>
+          <p:cNvPr id="60" name="Object 59" descr="public/generated/icons/vmware.directorsite.png">    </p:cNvPr>
           <p:cNvPicPr>
             <a:picLocks noChangeAspect="1"/>
           </p:cNvPicPr>
@@ -38631,7 +38631,7 @@
                 <a:ea typeface="Helvetica" pitchFamily="34" charset="-122"/>
                 <a:cs typeface="Helvetica" pitchFamily="34" charset="-120"/>
               </a:rPr>
-              <a:t>VCF AS A SERVICE - VIRTUAL DATA CENTER</a:t>
+              <a:t>VCF AS A SERVICE - CLOUD DIRECTOR SITE</a:t>
             </a:r>
             <a:endParaRPr lang="en-US" dirty="0"/>
           </a:p>
@@ -38664,7 +38664,7 @@
       </p:sp>
       <p:pic>
         <p:nvPicPr>
-          <p:cNvPr id="63" name="Object 62" descr="public/generated/icons/cf329950-0a3e-11e8-922e-f1366c6e1c83-veeam.png">    </p:cNvPr>
+          <p:cNvPr id="63" name="Object 62" descr="public/generated/icons/vmware.usage-meter.png">    </p:cNvPr>
           <p:cNvPicPr>
             <a:picLocks noChangeAspect="1"/>
           </p:cNvPicPr>
@@ -38720,7 +38720,7 @@
                 <a:ea typeface="Helvetica" pitchFamily="34" charset="-122"/>
                 <a:cs typeface="Helvetica" pitchFamily="34" charset="-120"/>
               </a:rPr>
-              <a:t>VEEAM</a:t>
+              <a:t>VCF AS A SERVICE - USAGE METER</a:t>
             </a:r>
             <a:endParaRPr lang="en-US" dirty="0"/>
           </a:p>
@@ -38753,7 +38753,7 @@
       </p:sp>
       <p:pic>
         <p:nvPicPr>
-          <p:cNvPr id="66" name="Object 65" descr="public/generated/icons/66644e80-f35a-11ee-923f-2fe367129617.png">    </p:cNvPr>
+          <p:cNvPr id="66" name="Object 65" descr="public/generated/icons/vmware.vdc.png">    </p:cNvPr>
           <p:cNvPicPr>
             <a:picLocks noChangeAspect="1"/>
           </p:cNvPicPr>
@@ -38809,7 +38809,7 @@
                 <a:ea typeface="Helvetica" pitchFamily="34" charset="-122"/>
                 <a:cs typeface="Helvetica" pitchFamily="34" charset="-120"/>
               </a:rPr>
-              <a:t>VERIFY</a:t>
+              <a:t>VCF AS A SERVICE - VIRTUAL DATA CENTER</a:t>
             </a:r>
             <a:endParaRPr lang="en-US" dirty="0"/>
           </a:p>
@@ -38842,7 +38842,7 @@
       </p:sp>
       <p:pic>
         <p:nvPicPr>
-          <p:cNvPr id="69" name="Object 68" descr="public/generated/icons/is.virtual-network-interface.png">    </p:cNvPr>
+          <p:cNvPr id="69" name="Object 68" descr="public/generated/icons/cf329950-0a3e-11e8-922e-f1366c6e1c83-veeam.png">    </p:cNvPr>
           <p:cNvPicPr>
             <a:picLocks noChangeAspect="1"/>
           </p:cNvPicPr>
@@ -38898,7 +38898,7 @@
                 <a:ea typeface="Helvetica" pitchFamily="34" charset="-122"/>
                 <a:cs typeface="Helvetica" pitchFamily="34" charset="-120"/>
               </a:rPr>
-              <a:t>VIRTUAL NETWORK INTERFACE</a:t>
+              <a:t>VEEAM</a:t>
             </a:r>
             <a:endParaRPr lang="en-US" dirty="0"/>
           </a:p>
@@ -38931,7 +38931,7 @@
       </p:sp>
       <p:pic>
         <p:nvPicPr>
-          <p:cNvPr id="72" name="Object 71" descr="public/generated/icons/is.vpc.png">    </p:cNvPr>
+          <p:cNvPr id="72" name="Object 71" descr="public/generated/icons/66644e80-f35a-11ee-923f-2fe367129617.png">    </p:cNvPr>
           <p:cNvPicPr>
             <a:picLocks noChangeAspect="1"/>
           </p:cNvPicPr>
@@ -38987,7 +38987,7 @@
                 <a:ea typeface="Helvetica" pitchFamily="34" charset="-122"/>
                 <a:cs typeface="Helvetica" pitchFamily="34" charset="-120"/>
               </a:rPr>
-              <a:t>VIRTUAL PRIVATE CLOUD</a:t>
+              <a:t>VERIFY</a:t>
             </a:r>
             <a:endParaRPr lang="en-US" dirty="0"/>
           </a:p>
@@ -39020,7 +39020,7 @@
       </p:sp>
       <p:pic>
         <p:nvPicPr>
-          <p:cNvPr id="75" name="Object 74" descr="public/generated/icons/is.endpoint-gateway.png">    </p:cNvPr>
+          <p:cNvPr id="75" name="Object 74" descr="public/generated/icons/is.virtual-network-interface.png">    </p:cNvPr>
           <p:cNvPicPr>
             <a:picLocks noChangeAspect="1"/>
           </p:cNvPicPr>
@@ -39076,7 +39076,7 @@
                 <a:ea typeface="Helvetica" pitchFamily="34" charset="-122"/>
                 <a:cs typeface="Helvetica" pitchFamily="34" charset="-120"/>
               </a:rPr>
-              <a:t>VIRTUAL PRIVATE ENDPOINT FOR VPC</a:t>
+              <a:t>VIRTUAL NETWORK INTERFACE</a:t>
             </a:r>
             <a:endParaRPr lang="en-US" dirty="0"/>
           </a:p>
@@ -39109,7 +39109,7 @@
       </p:sp>
       <p:pic>
         <p:nvPicPr>
-          <p:cNvPr id="78" name="Object 77" descr="public/generated/icons/887073fb-ba5b-9407-d2ac-938308d890e4.png">    </p:cNvPr>
+          <p:cNvPr id="78" name="Object 77" descr="public/generated/icons/is.vpc.png">    </p:cNvPr>
           <p:cNvPicPr>
             <a:picLocks noChangeAspect="1"/>
           </p:cNvPicPr>
@@ -39165,7 +39165,7 @@
                 <a:ea typeface="Helvetica" pitchFamily="34" charset="-122"/>
                 <a:cs typeface="Helvetica" pitchFamily="34" charset="-120"/>
               </a:rPr>
-              <a:t>VIRTUAL ROUTER APPLIANCE</a:t>
+              <a:t>VIRTUAL PRIVATE CLOUD</a:t>
             </a:r>
             <a:endParaRPr lang="en-US" dirty="0"/>
           </a:p>
@@ -39198,7 +39198,7 @@
       </p:sp>
       <p:pic>
         <p:nvPicPr>
-          <p:cNvPr id="81" name="Object 80" descr="public/generated/icons/virtual-server-group.png">    </p:cNvPr>
+          <p:cNvPr id="81" name="Object 80" descr="public/generated/icons/is.endpoint-gateway.png">    </p:cNvPr>
           <p:cNvPicPr>
             <a:picLocks noChangeAspect="1"/>
           </p:cNvPicPr>
@@ -39254,7 +39254,7 @@
                 <a:ea typeface="Helvetica" pitchFamily="34" charset="-122"/>
                 <a:cs typeface="Helvetica" pitchFamily="34" charset="-120"/>
               </a:rPr>
-              <a:t>VIRTUAL SERVER FOR CLASSIC</a:t>
+              <a:t>VIRTUAL PRIVATE ENDPOINT FOR VPC</a:t>
             </a:r>
             <a:endParaRPr lang="en-US" dirty="0"/>
           </a:p>
@@ -39287,7 +39287,7 @@
       </p:sp>
       <p:pic>
         <p:nvPicPr>
-          <p:cNvPr id="84" name="Object 83" descr="public/generated/icons/is.instance.png">    </p:cNvPr>
+          <p:cNvPr id="84" name="Object 83" descr="public/generated/icons/887073fb-ba5b-9407-d2ac-938308d890e4.png">    </p:cNvPr>
           <p:cNvPicPr>
             <a:picLocks noChangeAspect="1"/>
           </p:cNvPicPr>
@@ -39343,7 +39343,7 @@
                 <a:ea typeface="Helvetica" pitchFamily="34" charset="-122"/>
                 <a:cs typeface="Helvetica" pitchFamily="34" charset="-120"/>
               </a:rPr>
-              <a:t>VIRTUAL SERVER FOR VPC</a:t>
+              <a:t>VIRTUAL ROUTER APPLIANCE</a:t>
             </a:r>
             <a:endParaRPr lang="en-US" dirty="0"/>
           </a:p>
@@ -39376,7 +39376,7 @@
       </p:sp>
       <p:pic>
         <p:nvPicPr>
-          <p:cNvPr id="87" name="Object 86" descr="public/generated/icons/15.png">    </p:cNvPr>
+          <p:cNvPr id="87" name="Object 86" descr="public/generated/icons/virtual-server-group.png">    </p:cNvPr>
           <p:cNvPicPr>
             <a:picLocks noChangeAspect="1"/>
           </p:cNvPicPr>
@@ -39432,7 +39432,7 @@
                 <a:ea typeface="Helvetica" pitchFamily="34" charset="-122"/>
                 <a:cs typeface="Helvetica" pitchFamily="34" charset="-120"/>
               </a:rPr>
-              <a:t>VLAN</a:t>
+              <a:t>VIRTUAL SERVER FOR CLASSIC</a:t>
             </a:r>
             <a:endParaRPr lang="en-US" dirty="0"/>
           </a:p>
@@ -39465,7 +39465,7 @@
       </p:sp>
       <p:pic>
         <p:nvPicPr>
-          <p:cNvPr id="90" name="Object 89" descr="public/generated/icons/09f5a6ea-185e-4625-8281-9e8629360a4f.png">    </p:cNvPr>
+          <p:cNvPr id="90" name="Object 89" descr="public/generated/icons/is.instance.png">    </p:cNvPr>
           <p:cNvPicPr>
             <a:picLocks noChangeAspect="1"/>
           </p:cNvPicPr>
@@ -39521,7 +39521,7 @@
                 <a:ea typeface="Helvetica" pitchFamily="34" charset="-122"/>
                 <a:cs typeface="Helvetica" pitchFamily="34" charset="-120"/>
               </a:rPr>
-              <a:t>VMWARE CLOUD MIGRATION SERVICES</a:t>
+              <a:t>VIRTUAL SERVER FOR VPC</a:t>
             </a:r>
             <a:endParaRPr lang="en-US" dirty="0"/>
           </a:p>
@@ -39554,7 +39554,7 @@
       </p:sp>
       <p:pic>
         <p:nvPicPr>
-          <p:cNvPr id="93" name="Object 92" descr="public/generated/icons/cf329950-0a3e-11e8-922e-f1366c6e1c83.png">    </p:cNvPr>
+          <p:cNvPr id="93" name="Object 92" descr="public/generated/icons/15.png">    </p:cNvPr>
           <p:cNvPicPr>
             <a:picLocks noChangeAspect="1"/>
           </p:cNvPicPr>
@@ -39610,7 +39610,7 @@
                 <a:ea typeface="Helvetica" pitchFamily="34" charset="-122"/>
                 <a:cs typeface="Helvetica" pitchFamily="34" charset="-120"/>
               </a:rPr>
-              <a:t>VMWARE SOLUTIONS</a:t>
+              <a:t>VLAN</a:t>
             </a:r>
             <a:endParaRPr lang="en-US" dirty="0"/>
           </a:p>
@@ -39643,7 +39643,7 @@
       </p:sp>
       <p:pic>
         <p:nvPicPr>
-          <p:cNvPr id="96" name="Object 95" descr="public/generated/icons/cf329950-0a3e-11e8-922e-f1366c6e1c83-vcenterserver.png">    </p:cNvPr>
+          <p:cNvPr id="96" name="Object 95" descr="public/generated/icons/09f5a6ea-185e-4625-8281-9e8629360a4f.png">    </p:cNvPr>
           <p:cNvPicPr>
             <a:picLocks noChangeAspect="1"/>
           </p:cNvPicPr>
@@ -39699,7 +39699,7 @@
                 <a:ea typeface="Helvetica" pitchFamily="34" charset="-122"/>
                 <a:cs typeface="Helvetica" pitchFamily="34" charset="-120"/>
               </a:rPr>
-              <a:t>VMWARE VCENTER SERVER</a:t>
+              <a:t>VMWARE CLOUD MIGRATION SERVICES</a:t>
             </a:r>
             <a:endParaRPr lang="en-US" dirty="0"/>
           </a:p>
@@ -39732,7 +39732,7 @@
       </p:sp>
       <p:pic>
         <p:nvPicPr>
-          <p:cNvPr id="99" name="Object 98" descr="public/generated/icons/cf329950-0a3e-11e8-922e-f1366c6e1c83-vsphere.png">    </p:cNvPr>
+          <p:cNvPr id="99" name="Object 98" descr="public/generated/icons/cf329950-0a3e-11e8-922e-f1366c6e1c83.png">    </p:cNvPr>
           <p:cNvPicPr>
             <a:picLocks noChangeAspect="1"/>
           </p:cNvPicPr>
@@ -39788,7 +39788,7 @@
                 <a:ea typeface="Helvetica" pitchFamily="34" charset="-122"/>
                 <a:cs typeface="Helvetica" pitchFamily="34" charset="-120"/>
               </a:rPr>
-              <a:t>VMWARE VSPHERE</a:t>
+              <a:t>VMWARE SOLUTIONS</a:t>
             </a:r>
             <a:endParaRPr lang="en-US" dirty="0"/>
           </a:p>
@@ -39821,7 +39821,7 @@
       </p:sp>
       <p:pic>
         <p:nvPicPr>
-          <p:cNvPr id="102" name="Object 101" descr="public/generated/icons/b6670b68-84ca-4a04-b8e8-c567dfeeddde.png">    </p:cNvPr>
+          <p:cNvPr id="102" name="Object 101" descr="public/generated/icons/cf329950-0a3e-11e8-922e-f1366c6e1c83-vcenterserver.png">    </p:cNvPr>
           <p:cNvPicPr>
             <a:picLocks noChangeAspect="1"/>
           </p:cNvPicPr>
@@ -39877,7 +39877,7 @@
                 <a:ea typeface="Helvetica" pitchFamily="34" charset="-122"/>
                 <a:cs typeface="Helvetica" pitchFamily="34" charset="-120"/>
               </a:rPr>
-              <a:t>VPC COAAS (VPC COST OPTIMIZATION AS A SERVICE)</a:t>
+              <a:t>VMWARE VCENTER SERVER</a:t>
             </a:r>
             <a:endParaRPr lang="en-US" dirty="0"/>
           </a:p>
@@ -39910,7 +39910,7 @@
       </p:sp>
       <p:pic>
         <p:nvPicPr>
-          <p:cNvPr id="105" name="Object 104" descr="public/generated/icons/757254b0-a9a0-11ea-9ff6-17a22eb543c5.png">    </p:cNvPr>
+          <p:cNvPr id="105" name="Object 104" descr="public/generated/icons/cf329950-0a3e-11e8-922e-f1366c6e1c83-vsphere.png">    </p:cNvPr>
           <p:cNvPicPr>
             <a:picLocks noChangeAspect="1"/>
           </p:cNvPicPr>
@@ -39966,7 +39966,7 @@
                 <a:ea typeface="Helvetica" pitchFamily="34" charset="-122"/>
                 <a:cs typeface="Helvetica" pitchFamily="34" charset="-120"/>
               </a:rPr>
-              <a:t>VPC+ CLOUD MIGRATION</a:t>
+              <a:t>VMWARE VSPHERE</a:t>
             </a:r>
             <a:endParaRPr lang="en-US" dirty="0"/>
           </a:p>
@@ -39999,7 +39999,7 @@
       </p:sp>
       <p:pic>
         <p:nvPicPr>
-          <p:cNvPr id="108" name="Object 107" descr="public/generated/icons/fd1e0240-dd95-11eb-b4a0-db1c9221b8a2.png">    </p:cNvPr>
+          <p:cNvPr id="108" name="Object 107" descr="public/generated/icons/b6670b68-84ca-4a04-b8e8-c567dfeeddde.png">    </p:cNvPr>
           <p:cNvPicPr>
             <a:picLocks noChangeAspect="1"/>
           </p:cNvPicPr>
@@ -40055,7 +40055,7 @@
                 <a:ea typeface="Helvetica" pitchFamily="34" charset="-122"/>
                 <a:cs typeface="Helvetica" pitchFamily="34" charset="-120"/>
               </a:rPr>
-              <a:t>VPC+ DRAAS (VPC+ DISASTER RECOVERY AS A SERVICE)</a:t>
+              <a:t>VPC COAAS (VPC COST OPTIMIZATION AS A SERVICE)</a:t>
             </a:r>
             <a:endParaRPr lang="en-US" dirty="0"/>
           </a:p>
@@ -40121,7 +40121,7 @@
       </p:sp>
       <p:pic>
         <p:nvPicPr>
-          <p:cNvPr id="3" name="Object 2" descr="public/generated/icons/is.vpn.png">    </p:cNvPr>
+          <p:cNvPr id="3" name="Object 2" descr="public/generated/icons/757254b0-a9a0-11ea-9ff6-17a22eb543c5.png">    </p:cNvPr>
           <p:cNvPicPr>
             <a:picLocks noChangeAspect="1"/>
           </p:cNvPicPr>
@@ -40177,7 +40177,7 @@
                 <a:ea typeface="Helvetica" pitchFamily="34" charset="-122"/>
                 <a:cs typeface="Helvetica" pitchFamily="34" charset="-120"/>
               </a:rPr>
-              <a:t>VPN FOR VPC</a:t>
+              <a:t>VPC+ CLOUD MIGRATION</a:t>
             </a:r>
             <a:endParaRPr lang="en-US" dirty="0"/>
           </a:p>
@@ -40210,7 +40210,7 @@
       </p:sp>
       <p:pic>
         <p:nvPicPr>
-          <p:cNvPr id="6" name="Object 5" descr="public/generated/icons/cf329950-0a3e-11e8-922e-f1366c6e1c83-vrops.png">    </p:cNvPr>
+          <p:cNvPr id="6" name="Object 5" descr="public/generated/icons/fd1e0240-dd95-11eb-b4a0-db1c9221b8a2.png">    </p:cNvPr>
           <p:cNvPicPr>
             <a:picLocks noChangeAspect="1"/>
           </p:cNvPicPr>
@@ -40266,7 +40266,7 @@
                 <a:ea typeface="Helvetica" pitchFamily="34" charset="-122"/>
                 <a:cs typeface="Helvetica" pitchFamily="34" charset="-120"/>
               </a:rPr>
-              <a:t>VREALIZE OPERATIONS AND LOG INSIGHT</a:t>
+              <a:t>VPC+ DRAAS (VPC+ DISASTER RECOVERY AS A SERVICE)</a:t>
             </a:r>
             <a:endParaRPr lang="en-US" dirty="0"/>
           </a:p>
@@ -40299,7 +40299,7 @@
       </p:sp>
       <p:pic>
         <p:nvPicPr>
-          <p:cNvPr id="9" name="Object 8" descr="public/generated/icons/76b7bf22-b443-47db-b3db-066ba2988f47.png">    </p:cNvPr>
+          <p:cNvPr id="9" name="Object 8" descr="public/generated/icons/is.vpn.png">    </p:cNvPr>
           <p:cNvPicPr>
             <a:picLocks noChangeAspect="1"/>
           </p:cNvPicPr>
@@ -40355,7 +40355,7 @@
                 <a:ea typeface="Helvetica" pitchFamily="34" charset="-122"/>
                 <a:cs typeface="Helvetica" pitchFamily="34" charset="-120"/>
               </a:rPr>
-              <a:t>WATSON DISCOVERY</a:t>
+              <a:t>VPN FOR VPC</a:t>
             </a:r>
             <a:endParaRPr lang="en-US" dirty="0"/>
           </a:p>
@@ -40388,7 +40388,7 @@
       </p:sp>
       <p:pic>
         <p:nvPicPr>
-          <p:cNvPr id="12" name="Object 11" descr="public/generated/icons/12fbfff4-12c7-ccd0-80e6-603e8607468a.png">    </p:cNvPr>
+          <p:cNvPr id="12" name="Object 11" descr="public/generated/icons/cf329950-0a3e-11e8-922e-f1366c6e1c83-vrops.png">    </p:cNvPr>
           <p:cNvPicPr>
             <a:picLocks noChangeAspect="1"/>
           </p:cNvPicPr>
@@ -40444,7 +40444,7 @@
                 <a:ea typeface="Helvetica" pitchFamily="34" charset="-122"/>
                 <a:cs typeface="Helvetica" pitchFamily="34" charset="-120"/>
               </a:rPr>
-              <a:t>WATSONX</a:t>
+              <a:t>VREALIZE OPERATIONS AND LOG INSIGHT</a:t>
             </a:r>
             <a:endParaRPr lang="en-US" dirty="0"/>
           </a:p>
@@ -40477,7 +40477,7 @@
       </p:sp>
       <p:pic>
         <p:nvPicPr>
-          <p:cNvPr id="15" name="Object 14" descr="public/generated/icons/7045626d-55e3-4418-be11-683a26dbc1e5.png">    </p:cNvPr>
+          <p:cNvPr id="15" name="Object 14" descr="public/generated/icons/76b7bf22-b443-47db-b3db-066ba2988f47.png">    </p:cNvPr>
           <p:cNvPicPr>
             <a:picLocks noChangeAspect="1"/>
           </p:cNvPicPr>
@@ -40533,7 +40533,7 @@
                 <a:ea typeface="Helvetica" pitchFamily="34" charset="-122"/>
                 <a:cs typeface="Helvetica" pitchFamily="34" charset="-120"/>
               </a:rPr>
-              <a:t>WATSONX ASSISTANT</a:t>
+              <a:t>WATSON DISCOVERY</a:t>
             </a:r>
             <a:endParaRPr lang="en-US" dirty="0"/>
           </a:p>
@@ -40566,7 +40566,7 @@
       </p:sp>
       <p:pic>
         <p:nvPicPr>
-          <p:cNvPr id="18" name="Object 17" descr="public/generated/icons/11530fa0-1776-11ee-93f6-1d4066e6a409.png">    </p:cNvPr>
+          <p:cNvPr id="18" name="Object 17" descr="public/generated/icons/12fbfff4-12c7-ccd0-80e6-603e8607468a.png">    </p:cNvPr>
           <p:cNvPicPr>
             <a:picLocks noChangeAspect="1"/>
           </p:cNvPicPr>
@@ -40622,7 +40622,7 @@
                 <a:ea typeface="Helvetica" pitchFamily="34" charset="-122"/>
                 <a:cs typeface="Helvetica" pitchFamily="34" charset="-120"/>
               </a:rPr>
-              <a:t>WATSONX CODE ASSISTANT</a:t>
+              <a:t>WATSONX</a:t>
             </a:r>
             <a:endParaRPr lang="en-US" dirty="0"/>
           </a:p>
@@ -40655,7 +40655,7 @@
       </p:sp>
       <p:pic>
         <p:nvPicPr>
-          <p:cNvPr id="21" name="Object 20" descr="public/generated/icons/b69f78c0-11d7-11ef-9bdf-c92eb40d1838.png">    </p:cNvPr>
+          <p:cNvPr id="21" name="Object 20" descr="public/generated/icons/7045626d-55e3-4418-be11-683a26dbc1e5.png">    </p:cNvPr>
           <p:cNvPicPr>
             <a:picLocks noChangeAspect="1"/>
           </p:cNvPicPr>
@@ -40711,7 +40711,7 @@
                 <a:ea typeface="Helvetica" pitchFamily="34" charset="-122"/>
                 <a:cs typeface="Helvetica" pitchFamily="34" charset="-120"/>
               </a:rPr>
-              <a:t>WATSONX ORCHESTRATE</a:t>
+              <a:t>WATSONX ASSISTANT</a:t>
             </a:r>
             <a:endParaRPr lang="en-US" dirty="0"/>
           </a:p>
@@ -40744,7 +40744,7 @@
       </p:sp>
       <p:pic>
         <p:nvPicPr>
-          <p:cNvPr id="24" name="Object 23" descr="public/generated/icons/51c53b72-918f-4869-b834-2d99eb28422a.png">    </p:cNvPr>
+          <p:cNvPr id="24" name="Object 23" descr="public/generated/icons/94a4aea0-9510-11ee-b512-5b3decec36b3.png">    </p:cNvPr>
           <p:cNvPicPr>
             <a:picLocks noChangeAspect="1"/>
           </p:cNvPicPr>
@@ -40800,7 +40800,7 @@
                 <a:ea typeface="Helvetica" pitchFamily="34" charset="-122"/>
                 <a:cs typeface="Helvetica" pitchFamily="34" charset="-120"/>
               </a:rPr>
-              <a:t>WATSONX.AI RUNTIME</a:t>
+              <a:t>WATSONX BI</a:t>
             </a:r>
             <a:endParaRPr lang="en-US" dirty="0"/>
           </a:p>
@@ -40833,7 +40833,7 @@
       </p:sp>
       <p:pic>
         <p:nvPicPr>
-          <p:cNvPr id="27" name="Object 26" descr="public/generated/icons/39ba9d4c-b1c5-4cc3-a163-38b580121e01.png">    </p:cNvPr>
+          <p:cNvPr id="27" name="Object 26" descr="public/generated/icons/11530fa0-1776-11ee-93f6-1d4066e6a409.png">    </p:cNvPr>
           <p:cNvPicPr>
             <a:picLocks noChangeAspect="1"/>
           </p:cNvPicPr>
@@ -40889,7 +40889,7 @@
                 <a:ea typeface="Helvetica" pitchFamily="34" charset="-122"/>
                 <a:cs typeface="Helvetica" pitchFamily="34" charset="-120"/>
               </a:rPr>
-              <a:t>WATSONX.AI STUDIO</a:t>
+              <a:t>WATSONX CODE ASSISTANT</a:t>
             </a:r>
             <a:endParaRPr lang="en-US" dirty="0"/>
           </a:p>
@@ -40922,7 +40922,7 @@
       </p:sp>
       <p:pic>
         <p:nvPicPr>
-          <p:cNvPr id="30" name="Object 29" descr="public/generated/icons/43834340-4a6d-11ed-97d2-959039ad2a2e.png">    </p:cNvPr>
+          <p:cNvPr id="30" name="Object 29" descr="public/generated/icons/b69f78c0-11d7-11ef-9bdf-c92eb40d1838.png">    </p:cNvPr>
           <p:cNvPicPr>
             <a:picLocks noChangeAspect="1"/>
           </p:cNvPicPr>
@@ -40978,7 +40978,7 @@
                 <a:ea typeface="Helvetica" pitchFamily="34" charset="-122"/>
                 <a:cs typeface="Helvetica" pitchFamily="34" charset="-120"/>
               </a:rPr>
-              <a:t>WATSONX.DATA</a:t>
+              <a:t>WATSONX ORCHESTRATE</a:t>
             </a:r>
             <a:endParaRPr lang="en-US" dirty="0"/>
           </a:p>
@@ -41011,7 +41011,7 @@
       </p:sp>
       <p:pic>
         <p:nvPicPr>
-          <p:cNvPr id="33" name="Object 32" descr="public/generated/icons/4d4fd270-fe8f-11ef-82ad-af5f37d5a455.png">    </p:cNvPr>
+          <p:cNvPr id="33" name="Object 32" descr="public/generated/icons/51c53b72-918f-4869-b834-2d99eb28422a.png">    </p:cNvPr>
           <p:cNvPicPr>
             <a:picLocks noChangeAspect="1"/>
           </p:cNvPicPr>
@@ -41067,7 +41067,7 @@
                 <a:ea typeface="Helvetica" pitchFamily="34" charset="-122"/>
                 <a:cs typeface="Helvetica" pitchFamily="34" charset="-120"/>
               </a:rPr>
-              <a:t>WATSONX.DATA INTEGRATION</a:t>
+              <a:t>WATSONX.AI RUNTIME</a:t>
             </a:r>
             <a:endParaRPr lang="en-US" dirty="0"/>
           </a:p>
@@ -41100,7 +41100,7 @@
       </p:sp>
       <p:pic>
         <p:nvPicPr>
-          <p:cNvPr id="36" name="Object 35" descr="public/generated/icons/ed3a5a53-eb60-4f3c-8fd1-17f88585b6ed.png">    </p:cNvPr>
+          <p:cNvPr id="36" name="Object 35" descr="public/generated/icons/39ba9d4c-b1c5-4cc3-a163-38b580121e01.png">    </p:cNvPr>
           <p:cNvPicPr>
             <a:picLocks noChangeAspect="1"/>
           </p:cNvPicPr>
@@ -41156,7 +41156,7 @@
                 <a:ea typeface="Helvetica" pitchFamily="34" charset="-122"/>
                 <a:cs typeface="Helvetica" pitchFamily="34" charset="-120"/>
               </a:rPr>
-              <a:t>WATSONX.DATA INTELLIGENCE</a:t>
+              <a:t>WATSONX.AI STUDIO</a:t>
             </a:r>
             <a:endParaRPr lang="en-US" dirty="0"/>
           </a:p>
@@ -41189,7 +41189,7 @@
       </p:sp>
       <p:pic>
         <p:nvPicPr>
-          <p:cNvPr id="39" name="Object 38" descr="public/generated/icons/2ad019f3-0fd6-4c25-966d-f3952481a870.png">    </p:cNvPr>
+          <p:cNvPr id="39" name="Object 38" descr="public/generated/icons/43834340-4a6d-11ed-97d2-959039ad2a2e.png">    </p:cNvPr>
           <p:cNvPicPr>
             <a:picLocks noChangeAspect="1"/>
           </p:cNvPicPr>
@@ -41245,7 +41245,7 @@
                 <a:ea typeface="Helvetica" pitchFamily="34" charset="-122"/>
                 <a:cs typeface="Helvetica" pitchFamily="34" charset="-120"/>
               </a:rPr>
-              <a:t>WATSONX.GOVERNANCE</a:t>
+              <a:t>WATSONX.DATA</a:t>
             </a:r>
             <a:endParaRPr lang="en-US" dirty="0"/>
           </a:p>
@@ -41278,7 +41278,7 @@
       </p:sp>
       <p:pic>
         <p:nvPicPr>
-          <p:cNvPr id="42" name="Object 41" descr="public/generated/icons/e9407be2-139f-4f05-959d-494c6601239a.png">    </p:cNvPr>
+          <p:cNvPr id="42" name="Object 41" descr="public/generated/icons/4d4fd270-fe8f-11ef-82ad-af5f37d5a455.png">    </p:cNvPr>
           <p:cNvPicPr>
             <a:picLocks noChangeAspect="1"/>
           </p:cNvPicPr>
@@ -41334,7 +41334,7 @@
                 <a:ea typeface="Helvetica" pitchFamily="34" charset="-122"/>
                 <a:cs typeface="Helvetica" pitchFamily="34" charset="-120"/>
               </a:rPr>
-              <a:t>WEALTHGROWTH.AI</a:t>
+              <a:t>WATSONX.DATA INTEGRATION</a:t>
             </a:r>
             <a:endParaRPr lang="en-US" dirty="0"/>
           </a:p>
@@ -41367,7 +41367,7 @@
       </p:sp>
       <p:pic>
         <p:nvPicPr>
-          <p:cNvPr id="45" name="Object 44" descr="public/generated/icons/cf329950-0a3e-11e8-922e-f1366c6e1c83-zerto.png">    </p:cNvPr>
+          <p:cNvPr id="45" name="Object 44" descr="public/generated/icons/ed3a5a53-eb60-4f3c-8fd1-17f88585b6ed.png">    </p:cNvPr>
           <p:cNvPicPr>
             <a:picLocks noChangeAspect="1"/>
           </p:cNvPicPr>
@@ -41398,6 +41398,273 @@
         <p:spPr>
           <a:xfrm>
             <a:off x="4754880" y="1874520"/>
+            <a:ext cx="640080" cy="274320"/>
+          </a:xfrm>
+          <a:prstGeom prst="rect">
+            <a:avLst/>
+          </a:prstGeom>
+          <a:noFill/>
+        </p:spPr>
+        <p:txBody>
+          <a:bodyPr wrap="square" rtlCol="0" anchor="t" bIns="0" lIns="0" rIns="0" tIns="0">
+            <a:spAutoFit/>
+          </a:bodyPr>
+          <a:lstStyle/>
+          <a:p>
+            <a:pPr algn="ctr">
+              <a:buNone/>
+            </a:pPr>
+            <a:r>
+              <a:rPr lang="en-US" b="1" sz="600" dirty="0" smtClean="0">
+                <a:solidFill>
+                  <a:srgbClr val="646365"/>
+                </a:solidFill>
+                <a:latin typeface="Helvetica" pitchFamily="34" charset="0"/>
+                <a:ea typeface="Helvetica" pitchFamily="34" charset="-122"/>
+                <a:cs typeface="Helvetica" pitchFamily="34" charset="-120"/>
+              </a:rPr>
+              <a:t>WATSONX.DATA INTELLIGENCE</a:t>
+            </a:r>
+            <a:endParaRPr lang="en-US" dirty="0"/>
+          </a:p>
+        </p:txBody>
+      </p:sp>
+      <p:sp>
+        <p:nvSpPr>
+          <p:cNvPr id="47" name="Object 46"/>
+          <p:cNvSpPr/>
+          <p:nvPr/>
+        </p:nvSpPr>
+        <p:spPr>
+          <a:xfrm>
+            <a:off x="5760720" y="1371600"/>
+            <a:ext cx="457200" cy="457200"/>
+          </a:xfrm>
+          <a:prstGeom prst="ellipse">
+            <a:avLst/>
+          </a:prstGeom>
+          <a:solidFill>
+            <a:srgbClr val="FFFFFF"/>
+          </a:solidFill>
+          <a:ln w="19050">
+            <a:solidFill>
+              <a:srgbClr val="646365"/>
+            </a:solidFill>
+            <a:prstDash val="solid"/>
+          </a:ln>
+        </p:spPr>
+      </p:sp>
+      <p:pic>
+        <p:nvPicPr>
+          <p:cNvPr id="48" name="Object 47" descr="public/generated/icons/2ad019f3-0fd6-4c25-966d-f3952481a870.png">    </p:cNvPr>
+          <p:cNvPicPr>
+            <a:picLocks noChangeAspect="1"/>
+          </p:cNvPicPr>
+          <p:nvPr/>
+        </p:nvPicPr>
+        <p:blipFill>
+          <a:blip r:embed="rId16"/>
+          <a:stretch>
+            <a:fillRect/>
+          </a:stretch>
+        </p:blipFill>
+        <p:spPr>
+          <a:xfrm>
+            <a:off x="5852160" y="1463040"/>
+            <a:ext cx="274320" cy="274320"/>
+          </a:xfrm>
+          <a:prstGeom prst="rect">
+            <a:avLst/>
+          </a:prstGeom>
+        </p:spPr>
+      </p:pic>
+      <p:sp>
+        <p:nvSpPr>
+          <p:cNvPr id="49" name="Object 48"/>
+          <p:cNvSpPr/>
+          <p:nvPr/>
+        </p:nvSpPr>
+        <p:spPr>
+          <a:xfrm>
+            <a:off x="5669280" y="1874520"/>
+            <a:ext cx="640080" cy="274320"/>
+          </a:xfrm>
+          <a:prstGeom prst="rect">
+            <a:avLst/>
+          </a:prstGeom>
+          <a:noFill/>
+        </p:spPr>
+        <p:txBody>
+          <a:bodyPr wrap="square" rtlCol="0" anchor="t" bIns="0" lIns="0" rIns="0" tIns="0">
+            <a:spAutoFit/>
+          </a:bodyPr>
+          <a:lstStyle/>
+          <a:p>
+            <a:pPr algn="ctr">
+              <a:buNone/>
+            </a:pPr>
+            <a:r>
+              <a:rPr lang="en-US" b="1" sz="600" dirty="0" smtClean="0">
+                <a:solidFill>
+                  <a:srgbClr val="646365"/>
+                </a:solidFill>
+                <a:latin typeface="Helvetica" pitchFamily="34" charset="0"/>
+                <a:ea typeface="Helvetica" pitchFamily="34" charset="-122"/>
+                <a:cs typeface="Helvetica" pitchFamily="34" charset="-120"/>
+              </a:rPr>
+              <a:t>WATSONX.GOVERNANCE</a:t>
+            </a:r>
+            <a:endParaRPr lang="en-US" dirty="0"/>
+          </a:p>
+        </p:txBody>
+      </p:sp>
+      <p:sp>
+        <p:nvSpPr>
+          <p:cNvPr id="50" name="Object 49"/>
+          <p:cNvSpPr/>
+          <p:nvPr/>
+        </p:nvSpPr>
+        <p:spPr>
+          <a:xfrm>
+            <a:off x="6675120" y="1371600"/>
+            <a:ext cx="457200" cy="457200"/>
+          </a:xfrm>
+          <a:prstGeom prst="ellipse">
+            <a:avLst/>
+          </a:prstGeom>
+          <a:solidFill>
+            <a:srgbClr val="FFFFFF"/>
+          </a:solidFill>
+          <a:ln w="19050">
+            <a:solidFill>
+              <a:srgbClr val="646365"/>
+            </a:solidFill>
+            <a:prstDash val="solid"/>
+          </a:ln>
+        </p:spPr>
+      </p:sp>
+      <p:pic>
+        <p:nvPicPr>
+          <p:cNvPr id="51" name="Object 50" descr="public/generated/icons/e9407be2-139f-4f05-959d-494c6601239a.png">    </p:cNvPr>
+          <p:cNvPicPr>
+            <a:picLocks noChangeAspect="1"/>
+          </p:cNvPicPr>
+          <p:nvPr/>
+        </p:nvPicPr>
+        <p:blipFill>
+          <a:blip r:embed="rId17"/>
+          <a:stretch>
+            <a:fillRect/>
+          </a:stretch>
+        </p:blipFill>
+        <p:spPr>
+          <a:xfrm>
+            <a:off x="6766560" y="1463040"/>
+            <a:ext cx="274320" cy="274320"/>
+          </a:xfrm>
+          <a:prstGeom prst="rect">
+            <a:avLst/>
+          </a:prstGeom>
+        </p:spPr>
+      </p:pic>
+      <p:sp>
+        <p:nvSpPr>
+          <p:cNvPr id="52" name="Object 51"/>
+          <p:cNvSpPr/>
+          <p:nvPr/>
+        </p:nvSpPr>
+        <p:spPr>
+          <a:xfrm>
+            <a:off x="6583680" y="1874520"/>
+            <a:ext cx="640080" cy="274320"/>
+          </a:xfrm>
+          <a:prstGeom prst="rect">
+            <a:avLst/>
+          </a:prstGeom>
+          <a:noFill/>
+        </p:spPr>
+        <p:txBody>
+          <a:bodyPr wrap="square" rtlCol="0" anchor="t" bIns="0" lIns="0" rIns="0" tIns="0">
+            <a:spAutoFit/>
+          </a:bodyPr>
+          <a:lstStyle/>
+          <a:p>
+            <a:pPr algn="ctr">
+              <a:buNone/>
+            </a:pPr>
+            <a:r>
+              <a:rPr lang="en-US" b="1" sz="600" dirty="0" smtClean="0">
+                <a:solidFill>
+                  <a:srgbClr val="646365"/>
+                </a:solidFill>
+                <a:latin typeface="Helvetica" pitchFamily="34" charset="0"/>
+                <a:ea typeface="Helvetica" pitchFamily="34" charset="-122"/>
+                <a:cs typeface="Helvetica" pitchFamily="34" charset="-120"/>
+              </a:rPr>
+              <a:t>WEALTHGROWTH.AI</a:t>
+            </a:r>
+            <a:endParaRPr lang="en-US" dirty="0"/>
+          </a:p>
+        </p:txBody>
+      </p:sp>
+      <p:sp>
+        <p:nvSpPr>
+          <p:cNvPr id="53" name="Object 52"/>
+          <p:cNvSpPr/>
+          <p:nvPr/>
+        </p:nvSpPr>
+        <p:spPr>
+          <a:xfrm>
+            <a:off x="7589520" y="1371600"/>
+            <a:ext cx="457200" cy="457200"/>
+          </a:xfrm>
+          <a:prstGeom prst="ellipse">
+            <a:avLst/>
+          </a:prstGeom>
+          <a:solidFill>
+            <a:srgbClr val="FFFFFF"/>
+          </a:solidFill>
+          <a:ln w="19050">
+            <a:solidFill>
+              <a:srgbClr val="646365"/>
+            </a:solidFill>
+            <a:prstDash val="solid"/>
+          </a:ln>
+        </p:spPr>
+      </p:sp>
+      <p:pic>
+        <p:nvPicPr>
+          <p:cNvPr id="54" name="Object 53" descr="public/generated/icons/cf329950-0a3e-11e8-922e-f1366c6e1c83-zerto.png">    </p:cNvPr>
+          <p:cNvPicPr>
+            <a:picLocks noChangeAspect="1"/>
+          </p:cNvPicPr>
+          <p:nvPr/>
+        </p:nvPicPr>
+        <p:blipFill>
+          <a:blip r:embed="rId18"/>
+          <a:stretch>
+            <a:fillRect/>
+          </a:stretch>
+        </p:blipFill>
+        <p:spPr>
+          <a:xfrm>
+            <a:off x="7680960" y="1463040"/>
+            <a:ext cx="274320" cy="274320"/>
+          </a:xfrm>
+          <a:prstGeom prst="rect">
+            <a:avLst/>
+          </a:prstGeom>
+        </p:spPr>
+      </p:pic>
+      <p:sp>
+        <p:nvSpPr>
+          <p:cNvPr id="55" name="Object 54"/>
+          <p:cNvSpPr/>
+          <p:nvPr/>
+        </p:nvSpPr>
+        <p:spPr>
+          <a:xfrm>
+            <a:off x="7498080" y="1874520"/>
             <a:ext cx="640080" cy="274320"/>
           </a:xfrm>
           <a:prstGeom prst="rect">
